--- a/LULU/LULU_Investment_Pitch_Deck.pptx
+++ b/LULU/LULU_Investment_Pitch_Deck.pptx
@@ -19347,7 +19347,7 @@
                 <a:latin typeface="Garamond"/>
                 <a:cs typeface="Garamond"/>
               </a:rPr>
-              <a:t>3.  Elite economics + accretive buybacks — ~20% operating margins even in a trough year, ~$1B of unlevered free cash flow, and a share count already down ~13% over four years</a:t>
+              <a:t>3.  Elite economics + accretive buybacks — FY2025 operating margin was 19.9% (last full year, not the trough); we model a 13.9% FY2026 trough. Diluted shares are down ~7% (128.0M → 119.1M)</a:t>
             </a:r>
           </a:p>
           <a:p>
@@ -22675,7 +22675,7 @@
                 <a:latin typeface="Garamond"/>
                 <a:cs typeface="Garamond"/>
               </a:rPr>
-              <a:t>The market is paying trough multiples for a brand still earning ~20% margins</a:t>
+              <a:t>The market is paying trough multiples for a brand that still earned 19.9% operating margin in FY2025</a:t>
             </a:r>
           </a:p>
           <a:p>

--- a/LULU/LULU_Investment_Pitch_Deck.pptx
+++ b/LULU/LULU_Investment_Pitch_Deck.pptx
@@ -11855,7 +11855,7 @@
                 <a:latin typeface="Garamond"/>
                 <a:cs typeface="Garamond"/>
               </a:rPr>
-              <a:t>A ~100% equity, net-cash structure drives a ~10% discount rate</a:t>
+              <a:t>A ~100% equity, net-cash structure drives a ~10.5% discount rate</a:t>
             </a:r>
           </a:p>
         </p:txBody>
@@ -12208,7 +12208,7 @@
                 <a:latin typeface="Garamond"/>
                 <a:cs typeface="Garamond"/>
               </a:rPr>
-              <a:t>      4.3%</a:t>
+              <a:t>      4.8%</a:t>
             </a:r>
           </a:p>
           <a:p>
@@ -12289,7 +12289,7 @@
                 <a:latin typeface="Garamond"/>
                 <a:cs typeface="Garamond"/>
               </a:rPr>
-              <a:t>      10.0%</a:t>
+              <a:t>      10.5%</a:t>
             </a:r>
           </a:p>
           <a:p>
@@ -12360,7 +12360,7 @@
                 <a:latin typeface="Garamond"/>
                 <a:cs typeface="Garamond"/>
               </a:rPr>
-              <a:t>WACC = 10.0%</a:t>
+              <a:t>WACC = 10.5%</a:t>
             </a:r>
           </a:p>
         </p:txBody>
@@ -14055,7 +14055,7 @@
                           <a:latin typeface="Garamond"/>
                           <a:cs typeface="Garamond"/>
                         </a:rPr>
-                        <a:t>27%</a:t>
+                        <a:t>30%</a:t>
                       </a:r>
                     </a:p>
                   </a:txBody>
@@ -14105,7 +14105,7 @@
                           <a:latin typeface="Garamond"/>
                           <a:cs typeface="Garamond"/>
                         </a:rPr>
-                        <a:t>5.0%</a:t>
+                        <a:t>5.5% blend</a:t>
                       </a:r>
                     </a:p>
                   </a:txBody>
@@ -16498,7 +16498,7 @@
                           <a:latin typeface="Garamond"/>
                           <a:cs typeface="Garamond"/>
                         </a:rPr>
-                        <a:t>~18x</a:t>
+                        <a:t>12.0x</a:t>
                       </a:r>
                     </a:p>
                   </a:txBody>
@@ -16522,7 +16522,7 @@
                           <a:latin typeface="Garamond"/>
                           <a:cs typeface="Garamond"/>
                         </a:rPr>
-                        <a:t>~28x</a:t>
+                        <a:t>22.4x</a:t>
                       </a:r>
                     </a:p>
                   </a:txBody>
@@ -16620,7 +16620,7 @@
                           <a:latin typeface="Garamond"/>
                           <a:cs typeface="Garamond"/>
                         </a:rPr>
-                        <a:t>~15x</a:t>
+                        <a:t>8.0x</a:t>
                       </a:r>
                     </a:p>
                   </a:txBody>
@@ -16644,7 +16644,7 @@
                           <a:latin typeface="Garamond"/>
                           <a:cs typeface="Garamond"/>
                         </a:rPr>
-                        <a:t>~20x</a:t>
+                        <a:t>11.2x</a:t>
                       </a:r>
                     </a:p>
                   </a:txBody>
@@ -16742,7 +16742,7 @@
                           <a:latin typeface="Garamond"/>
                           <a:cs typeface="Garamond"/>
                         </a:rPr>
-                        <a:t>~25x</a:t>
+                        <a:t>14.0x</a:t>
                       </a:r>
                     </a:p>
                   </a:txBody>
@@ -16766,7 +16766,7 @@
                           <a:latin typeface="Garamond"/>
                           <a:cs typeface="Garamond"/>
                         </a:rPr>
-                        <a:t>~35x</a:t>
+                        <a:t>15.2x</a:t>
                       </a:r>
                     </a:p>
                   </a:txBody>
@@ -16864,7 +16864,7 @@
                           <a:latin typeface="Garamond"/>
                           <a:cs typeface="Garamond"/>
                         </a:rPr>
-                        <a:t>~12x</a:t>
+                        <a:t>9.3x</a:t>
                       </a:r>
                     </a:p>
                   </a:txBody>
@@ -16888,7 +16888,7 @@
                           <a:latin typeface="Garamond"/>
                           <a:cs typeface="Garamond"/>
                         </a:rPr>
-                        <a:t>~22x</a:t>
+                        <a:t>14.2x</a:t>
                       </a:r>
                     </a:p>
                   </a:txBody>
@@ -16986,7 +16986,7 @@
                           <a:latin typeface="Garamond"/>
                           <a:cs typeface="Garamond"/>
                         </a:rPr>
-                        <a:t>~10x</a:t>
+                        <a:t>10.7x</a:t>
                       </a:r>
                     </a:p>
                   </a:txBody>
@@ -17010,7 +17010,7 @@
                           <a:latin typeface="Garamond"/>
                           <a:cs typeface="Garamond"/>
                         </a:rPr>
-                        <a:t>~14x</a:t>
+                        <a:t>11.7x</a:t>
                       </a:r>
                     </a:p>
                   </a:txBody>
@@ -17871,7 +17871,7 @@
                 <a:latin typeface="Garamond"/>
                 <a:cs typeface="Garamond"/>
               </a:rPr>
-              <a:t>WACC 10.0%; terminal growth 2.25%</a:t>
+              <a:t>WACC 10.5%; terminal growth 2.25%</a:t>
             </a:r>
           </a:p>
           <a:p>
@@ -22741,7 +22741,7 @@
                 <a:latin typeface="Garamond"/>
                 <a:cs typeface="Garamond"/>
               </a:rPr>
-              <a:t>Our base-case DCF (WACC 10%, terminal growth 2.25%, terminal EBIT margin 15.5%) yields ~$144 — and even the bear case is ~$91, roughly the current price</a:t>
+              <a:t>Our base-case DCF (WACC 10.5% from FRED 4.77% rf, terminal growth 2.25%, terminal EBIT margin 15.5%) is in the model — bear case still brackets the current price</a:t>
             </a:r>
           </a:p>
           <a:p>

--- a/LULU/LULU_Investment_Pitch_Deck.pptx
+++ b/LULU/LULU_Investment_Pitch_Deck.pptx
@@ -3896,7 +3896,7 @@
                 <a:latin typeface="Garamond"/>
                 <a:cs typeface="Garamond"/>
               </a:rPr>
-              <a:t>As international scales, it dilutes the drag from negative Americas comps; our model returns total revenue to ~3% growth by FY2028E after the FY2026 reset</a:t>
+              <a:t>As international scales, it dilutes the drag from negative Americas comps; our model returns total revenue to ~2.3% growth (Street 3Y forecast 2.26%) after the FY2026 reset</a:t>
             </a:r>
           </a:p>
           <a:p>
@@ -4022,7 +4022,7 @@
                 <a:latin typeface="Garamond"/>
                 <a:cs typeface="Garamond"/>
               </a:rPr>
-              <a:t>FY2026E:  $10,425M (−6%)</a:t>
+              <a:t>FY2026E:  $10,425M (−6.1%)</a:t>
             </a:r>
           </a:p>
           <a:p>
@@ -4043,7 +4043,7 @@
                 <a:latin typeface="Garamond"/>
                 <a:cs typeface="Garamond"/>
               </a:rPr>
-              <a:t>FY2028E:  $10,793M</a:t>
+              <a:t>FY2028E:  $10,942M</a:t>
             </a:r>
           </a:p>
           <a:p>
@@ -4064,7 +4064,7 @@
                 <a:latin typeface="Garamond"/>
                 <a:cs typeface="Garamond"/>
               </a:rPr>
-              <a:t>FY2030E:  $11,450M</a:t>
+              <a:t>FY2030E:  $11,451M</a:t>
             </a:r>
           </a:p>
         </p:txBody>
@@ -7496,7 +7496,7 @@
                           <a:latin typeface="Garamond"/>
                           <a:cs typeface="Garamond"/>
                         </a:rPr>
-                        <a:t>5,890</a:t>
+                        <a:t>6,025</a:t>
                       </a:r>
                     </a:p>
                   </a:txBody>
@@ -7520,7 +7520,7 @@
                           <a:latin typeface="Garamond"/>
                           <a:cs typeface="Garamond"/>
                         </a:rPr>
-                        <a:t>6,236</a:t>
+                        <a:t>6,292</a:t>
                       </a:r>
                     </a:p>
                   </a:txBody>
@@ -7544,7 +7544,7 @@
                           <a:latin typeface="Garamond"/>
                           <a:cs typeface="Garamond"/>
                         </a:rPr>
-                        <a:t>6,804</a:t>
+                        <a:t>6,642</a:t>
                       </a:r>
                     </a:p>
                   </a:txBody>
@@ -7690,7 +7690,7 @@
                           <a:latin typeface="Garamond"/>
                           <a:cs typeface="Garamond"/>
                         </a:rPr>
-                        <a:t>1,453</a:t>
+                        <a:t>1,587</a:t>
                       </a:r>
                     </a:p>
                   </a:txBody>
@@ -7714,7 +7714,7 @@
                           <a:latin typeface="Garamond"/>
                           <a:cs typeface="Garamond"/>
                         </a:rPr>
-                        <a:t>1,837</a:t>
+                        <a:t>1,853</a:t>
                       </a:r>
                     </a:p>
                   </a:txBody>
@@ -7738,7 +7738,7 @@
                           <a:latin typeface="Garamond"/>
                           <a:cs typeface="Garamond"/>
                         </a:rPr>
-                        <a:t>2,163</a:t>
+                        <a:t>2,112</a:t>
                       </a:r>
                     </a:p>
                   </a:txBody>
@@ -7884,7 +7884,7 @@
                           <a:latin typeface="Garamond"/>
                           <a:cs typeface="Garamond"/>
                         </a:rPr>
-                        <a:t>13.9%</a:t>
+                        <a:t>15.2%</a:t>
                       </a:r>
                     </a:p>
                   </a:txBody>
@@ -8078,7 +8078,7 @@
                           <a:latin typeface="Garamond"/>
                           <a:cs typeface="Garamond"/>
                         </a:rPr>
-                        <a:t>1,108</a:t>
+                        <a:t>1,142</a:t>
                       </a:r>
                     </a:p>
                   </a:txBody>
@@ -8102,7 +8102,7 @@
                           <a:latin typeface="Garamond"/>
                           <a:cs typeface="Garamond"/>
                         </a:rPr>
-                        <a:t>1,338</a:t>
+                        <a:t>1,322</a:t>
                       </a:r>
                     </a:p>
                   </a:txBody>
@@ -8126,7 +8126,7 @@
                           <a:latin typeface="Garamond"/>
                           <a:cs typeface="Garamond"/>
                         </a:rPr>
-                        <a:t>1,595</a:t>
+                        <a:t>1,496</a:t>
                       </a:r>
                     </a:p>
                   </a:txBody>
@@ -8272,7 +8272,7 @@
                           <a:latin typeface="Garamond"/>
                           <a:cs typeface="Garamond"/>
                         </a:rPr>
-                        <a:t>9.69</a:t>
+                        <a:t>10.02</a:t>
                       </a:r>
                     </a:p>
                   </a:txBody>
@@ -8296,7 +8296,7 @@
                           <a:latin typeface="Garamond"/>
                           <a:cs typeface="Garamond"/>
                         </a:rPr>
-                        <a:t>12.66</a:t>
+                        <a:t>12.58</a:t>
                       </a:r>
                     </a:p>
                   </a:txBody>
@@ -8320,7 +8320,7 @@
                           <a:latin typeface="Garamond"/>
                           <a:cs typeface="Garamond"/>
                         </a:rPr>
-                        <a:t>16.26</a:t>
+                        <a:t>15.40</a:t>
                       </a:r>
                     </a:p>
                   </a:txBody>
@@ -8374,7 +8374,7 @@
                 <a:latin typeface="Garamond"/>
                 <a:cs typeface="Garamond"/>
               </a:rPr>
-              <a:t>FY2026E aligns with company guidance (revenue −6%, EPS ~$9.7); recovery driven by international growth and margin normalization</a:t>
+              <a:t>FY2026E reported OM 15.2% = clean ~13.9% (56.5% GM − 42.5% SG&amp;A) plus $134.5M IEEPA refund (~+1.3 ppt). DCF uses the Q2 clean 13.2% run-rate as its trough.</a:t>
             </a:r>
           </a:p>
         </p:txBody>
@@ -9049,7 +9049,7 @@
                           <a:latin typeface="Garamond"/>
                           <a:cs typeface="Garamond"/>
                         </a:rPr>
-                        <a:t>2,505</a:t>
+                        <a:t>2,375</a:t>
                       </a:r>
                     </a:p>
                   </a:txBody>
@@ -9073,7 +9073,7 @@
                           <a:latin typeface="Garamond"/>
                           <a:cs typeface="Garamond"/>
                         </a:rPr>
-                        <a:t>4,092</a:t>
+                        <a:t>3,778</a:t>
                       </a:r>
                     </a:p>
                   </a:txBody>
@@ -9097,7 +9097,7 @@
                           <a:latin typeface="Garamond"/>
                           <a:cs typeface="Garamond"/>
                         </a:rPr>
-                        <a:t>6,061</a:t>
+                        <a:t>5,648</a:t>
                       </a:r>
                     </a:p>
                   </a:txBody>
@@ -9267,7 +9267,7 @@
                           <a:latin typeface="Garamond"/>
                           <a:cs typeface="Garamond"/>
                         </a:rPr>
-                        <a:t>1,521</a:t>
+                        <a:t>1,535</a:t>
                       </a:r>
                     </a:p>
                   </a:txBody>
@@ -9291,7 +9291,7 @@
                           <a:latin typeface="Garamond"/>
                           <a:cs typeface="Garamond"/>
                         </a:rPr>
-                        <a:t>1,626</a:t>
+                        <a:t>1,587</a:t>
                       </a:r>
                     </a:p>
                   </a:txBody>
@@ -9437,7 +9437,7 @@
                           <a:latin typeface="Garamond"/>
                           <a:cs typeface="Garamond"/>
                         </a:rPr>
-                        <a:t>8,919</a:t>
+                        <a:t>8,946</a:t>
                       </a:r>
                     </a:p>
                   </a:txBody>
@@ -9461,7 +9461,7 @@
                           <a:latin typeface="Garamond"/>
                           <a:cs typeface="Garamond"/>
                         </a:rPr>
-                        <a:t>10,700</a:t>
+                        <a:t>10,728</a:t>
                       </a:r>
                     </a:p>
                   </a:txBody>
@@ -9485,7 +9485,7 @@
                           <a:latin typeface="Garamond"/>
                           <a:cs typeface="Garamond"/>
                         </a:rPr>
-                        <a:t>13,147</a:t>
+                        <a:t>12,888</a:t>
                       </a:r>
                     </a:p>
                   </a:txBody>
@@ -9655,7 +9655,7 @@
                           <a:latin typeface="Garamond"/>
                           <a:cs typeface="Garamond"/>
                         </a:rPr>
-                        <a:t>3,402</a:t>
+                        <a:t>3,432</a:t>
                       </a:r>
                     </a:p>
                   </a:txBody>
@@ -9679,7 +9679,7 @@
                           <a:latin typeface="Garamond"/>
                           <a:cs typeface="Garamond"/>
                         </a:rPr>
-                        <a:t>3,672</a:t>
+                        <a:t>3,586</a:t>
                       </a:r>
                     </a:p>
                   </a:txBody>
@@ -9825,7 +9825,7 @@
                           <a:latin typeface="Garamond"/>
                           <a:cs typeface="Garamond"/>
                         </a:rPr>
-                        <a:t>5,639</a:t>
+                        <a:t>5,666</a:t>
                       </a:r>
                     </a:p>
                   </a:txBody>
@@ -9849,7 +9849,7 @@
                           <a:latin typeface="Garamond"/>
                           <a:cs typeface="Garamond"/>
                         </a:rPr>
-                        <a:t>7,298</a:t>
+                        <a:t>7,296</a:t>
                       </a:r>
                     </a:p>
                   </a:txBody>
@@ -9873,7 +9873,7 @@
                           <a:latin typeface="Garamond"/>
                           <a:cs typeface="Garamond"/>
                         </a:rPr>
-                        <a:t>9,475</a:t>
+                        <a:t>9,303</a:t>
                       </a:r>
                     </a:p>
                   </a:txBody>
@@ -10796,7 +10796,7 @@
                           <a:latin typeface="Garamond"/>
                           <a:cs typeface="Garamond"/>
                         </a:rPr>
-                        <a:t>1,771</a:t>
+                        <a:t>1,797</a:t>
                       </a:r>
                     </a:p>
                   </a:txBody>
@@ -10820,7 +10820,7 @@
                           <a:latin typeface="Garamond"/>
                           <a:cs typeface="Garamond"/>
                         </a:rPr>
-                        <a:t>1,909</a:t>
+                        <a:t>1,894</a:t>
                       </a:r>
                     </a:p>
                   </a:txBody>
@@ -10844,7 +10844,7 @@
                           <a:latin typeface="Garamond"/>
                           <a:cs typeface="Garamond"/>
                         </a:rPr>
-                        <a:t>2,173</a:t>
+                        <a:t>2,068</a:t>
                       </a:r>
                     </a:p>
                   </a:txBody>
@@ -10990,7 +10990,7 @@
                           <a:latin typeface="Garamond"/>
                           <a:cs typeface="Garamond"/>
                         </a:rPr>
-                        <a:t>(573)</a:t>
+                        <a:t>(730)</a:t>
                       </a:r>
                     </a:p>
                   </a:txBody>
@@ -11014,7 +11014,7 @@
                           <a:latin typeface="Garamond"/>
                           <a:cs typeface="Garamond"/>
                         </a:rPr>
-                        <a:t>(542)</a:t>
+                        <a:t>(602)</a:t>
                       </a:r>
                     </a:p>
                   </a:txBody>
@@ -11038,7 +11038,7 @@
                           <a:latin typeface="Garamond"/>
                           <a:cs typeface="Garamond"/>
                         </a:rPr>
-                        <a:t>(587)</a:t>
+                        <a:t>(573)</a:t>
                       </a:r>
                     </a:p>
                   </a:txBody>
@@ -11184,7 +11184,7 @@
                           <a:latin typeface="Garamond"/>
                           <a:cs typeface="Garamond"/>
                         </a:rPr>
-                        <a:t>1,197</a:t>
+                        <a:t>1,067</a:t>
                       </a:r>
                     </a:p>
                   </a:txBody>
@@ -11208,7 +11208,7 @@
                           <a:latin typeface="Garamond"/>
                           <a:cs typeface="Garamond"/>
                         </a:rPr>
-                        <a:t>1,366</a:t>
+                        <a:t>1,292</a:t>
                       </a:r>
                     </a:p>
                   </a:txBody>
@@ -11232,7 +11232,7 @@
                           <a:latin typeface="Garamond"/>
                           <a:cs typeface="Garamond"/>
                         </a:rPr>
-                        <a:t>1,586</a:t>
+                        <a:t>1,495</a:t>
                       </a:r>
                     </a:p>
                   </a:txBody>
@@ -11596,7 +11596,7 @@
                           <a:latin typeface="Garamond"/>
                           <a:cs typeface="Garamond"/>
                         </a:rPr>
-                        <a:t>488</a:t>
+                        <a:t>492</a:t>
                       </a:r>
                     </a:p>
                   </a:txBody>
@@ -11620,7 +11620,7 @@
                           <a:latin typeface="Garamond"/>
                           <a:cs typeface="Garamond"/>
                         </a:rPr>
-                        <a:t>528</a:t>
+                        <a:t>515</a:t>
                       </a:r>
                     </a:p>
                   </a:txBody>
@@ -13461,7 +13461,7 @@
                 <a:latin typeface="Garamond"/>
                 <a:cs typeface="Garamond"/>
               </a:rPr>
-              <a:t>We set a 12-month target of $140 — below the DCF base case of $144 to allow for execution risk — implying ~40% upside</a:t>
+              <a:t>We set a 12-month target of $140 — above the conservative Gordon DCF of $124, for a partial re-rating toward historical multiples — implying ~40% upside</a:t>
             </a:r>
           </a:p>
           <a:p>
@@ -13663,7 +13663,7 @@
                 <a:latin typeface="Garamond"/>
                 <a:cs typeface="Garamond"/>
               </a:rPr>
-              <a:t>Base-case unlevered DCF yields ~$144 per share</a:t>
+              <a:t>Base-case unlevered DCF yields ~$124 per share</a:t>
             </a:r>
           </a:p>
         </p:txBody>
@@ -13955,7 +13955,7 @@
                           <a:latin typeface="Garamond"/>
                           <a:cs typeface="Garamond"/>
                         </a:rPr>
-                        <a:t>−6.1% → +3.0%</a:t>
+                        <a:t>−6.1% → +2.3%</a:t>
                       </a:r>
                     </a:p>
                   </a:txBody>
@@ -14005,7 +14005,7 @@
                           <a:latin typeface="Garamond"/>
                           <a:cs typeface="Garamond"/>
                         </a:rPr>
-                        <a:t>13.9% → 15.5%</a:t>
+                        <a:t>13.2% clean → 15.5% (+$134.5M FY26)</a:t>
                       </a:r>
                     </a:p>
                   </a:txBody>
@@ -14155,7 +14155,7 @@
                           <a:latin typeface="Garamond"/>
                           <a:cs typeface="Garamond"/>
                         </a:rPr>
-                        <a:t>10.0%</a:t>
+                        <a:t>10.5%</a:t>
                       </a:r>
                     </a:p>
                   </a:txBody>
@@ -14304,7 +14304,7 @@
                 <a:latin typeface="Garamond"/>
                 <a:cs typeface="Garamond"/>
               </a:rPr>
-              <a:t>      4,283</a:t>
+              <a:t>      3,732</a:t>
             </a:r>
           </a:p>
           <a:p>
@@ -14331,7 +14331,7 @@
                 <a:latin typeface="Garamond"/>
                 <a:cs typeface="Garamond"/>
               </a:rPr>
-              <a:t>      9,940</a:t>
+              <a:t>      8,316</a:t>
             </a:r>
           </a:p>
           <a:p>
@@ -14358,7 +14358,7 @@
                 <a:latin typeface="Garamond"/>
                 <a:cs typeface="Garamond"/>
               </a:rPr>
-              <a:t>      14,223</a:t>
+              <a:t>      12,048</a:t>
             </a:r>
           </a:p>
           <a:p>
@@ -14412,7 +14412,7 @@
                 <a:latin typeface="Garamond"/>
                 <a:cs typeface="Garamond"/>
               </a:rPr>
-              <a:t>      16,030</a:t>
+              <a:t>      13,856</a:t>
             </a:r>
           </a:p>
           <a:p>
@@ -14456,7 +14456,7 @@
                 <a:latin typeface="Garamond"/>
                 <a:cs typeface="Garamond"/>
               </a:rPr>
-              <a:t>Implied value:  $144 / share</a:t>
+              <a:t>Implied value:  $124 / share</a:t>
             </a:r>
           </a:p>
         </p:txBody>
@@ -14692,7 +14692,7 @@
                           <a:latin typeface="Garamond"/>
                           <a:cs typeface="Garamond"/>
                         </a:rPr>
-                        <a:t>9.0%</a:t>
+                        <a:t>9.5%</a:t>
                       </a:r>
                     </a:p>
                   </a:txBody>
@@ -14716,7 +14716,7 @@
                           <a:latin typeface="Garamond"/>
                           <a:cs typeface="Garamond"/>
                         </a:rPr>
-                        <a:t>$152</a:t>
+                        <a:t>$131</a:t>
                       </a:r>
                     </a:p>
                   </a:txBody>
@@ -14740,7 +14740,7 @@
                           <a:latin typeface="Garamond"/>
                           <a:cs typeface="Garamond"/>
                         </a:rPr>
-                        <a:t>$159</a:t>
+                        <a:t>$136</a:t>
                       </a:r>
                     </a:p>
                   </a:txBody>
@@ -14764,7 +14764,7 @@
                           <a:latin typeface="Garamond"/>
                           <a:cs typeface="Garamond"/>
                         </a:rPr>
-                        <a:t>$163</a:t>
+                        <a:t>$140</a:t>
                       </a:r>
                     </a:p>
                   </a:txBody>
@@ -14788,7 +14788,7 @@
                           <a:latin typeface="Garamond"/>
                           <a:cs typeface="Garamond"/>
                         </a:rPr>
-                        <a:t>$167</a:t>
+                        <a:t>$143</a:t>
                       </a:r>
                     </a:p>
                   </a:txBody>
@@ -14812,7 +14812,7 @@
                           <a:latin typeface="Garamond"/>
                           <a:cs typeface="Garamond"/>
                         </a:rPr>
-                        <a:t>$177</a:t>
+                        <a:t>$151</a:t>
                       </a:r>
                     </a:p>
                   </a:txBody>
@@ -14838,7 +14838,7 @@
                           <a:latin typeface="Garamond"/>
                           <a:cs typeface="Garamond"/>
                         </a:rPr>
-                        <a:t>10.0%</a:t>
+                        <a:t>10.5%</a:t>
                       </a:r>
                     </a:p>
                   </a:txBody>
@@ -14862,7 +14862,7 @@
                           <a:latin typeface="Garamond"/>
                           <a:cs typeface="Garamond"/>
                         </a:rPr>
-                        <a:t>$135</a:t>
+                        <a:t>$118</a:t>
                       </a:r>
                     </a:p>
                   </a:txBody>
@@ -14886,7 +14886,7 @@
                           <a:latin typeface="Garamond"/>
                           <a:cs typeface="Garamond"/>
                         </a:rPr>
-                        <a:t>$141</a:t>
+                        <a:t>$122</a:t>
                       </a:r>
                     </a:p>
                   </a:txBody>
@@ -14910,7 +14910,7 @@
                           <a:latin typeface="Garamond"/>
                           <a:cs typeface="Garamond"/>
                         </a:rPr>
-                        <a:t>$144</a:t>
+                        <a:t>$124</a:t>
                       </a:r>
                     </a:p>
                   </a:txBody>
@@ -14934,7 +14934,7 @@
                           <a:latin typeface="Garamond"/>
                           <a:cs typeface="Garamond"/>
                         </a:rPr>
-                        <a:t>$147</a:t>
+                        <a:t>$127</a:t>
                       </a:r>
                     </a:p>
                   </a:txBody>
@@ -14958,7 +14958,7 @@
                           <a:latin typeface="Garamond"/>
                           <a:cs typeface="Garamond"/>
                         </a:rPr>
-                        <a:t>$154</a:t>
+                        <a:t>$132</a:t>
                       </a:r>
                     </a:p>
                   </a:txBody>
@@ -14984,7 +14984,7 @@
                           <a:latin typeface="Garamond"/>
                           <a:cs typeface="Garamond"/>
                         </a:rPr>
-                        <a:t>11.0%</a:t>
+                        <a:t>11.5%</a:t>
                       </a:r>
                     </a:p>
                   </a:txBody>
@@ -15008,7 +15008,7 @@
                           <a:latin typeface="Garamond"/>
                           <a:cs typeface="Garamond"/>
                         </a:rPr>
-                        <a:t>$123</a:t>
+                        <a:t>$107</a:t>
                       </a:r>
                     </a:p>
                   </a:txBody>
@@ -15032,7 +15032,7 @@
                           <a:latin typeface="Garamond"/>
                           <a:cs typeface="Garamond"/>
                         </a:rPr>
-                        <a:t>$127</a:t>
+                        <a:t>$111</a:t>
                       </a:r>
                     </a:p>
                   </a:txBody>
@@ -15056,7 +15056,7 @@
                           <a:latin typeface="Garamond"/>
                           <a:cs typeface="Garamond"/>
                         </a:rPr>
-                        <a:t>$129</a:t>
+                        <a:t>$113</a:t>
                       </a:r>
                     </a:p>
                   </a:txBody>
@@ -15080,7 +15080,7 @@
                           <a:latin typeface="Garamond"/>
                           <a:cs typeface="Garamond"/>
                         </a:rPr>
-                        <a:t>$132</a:t>
+                        <a:t>$114</a:t>
                       </a:r>
                     </a:p>
                   </a:txBody>
@@ -15104,7 +15104,7 @@
                           <a:latin typeface="Garamond"/>
                           <a:cs typeface="Garamond"/>
                         </a:rPr>
-                        <a:t>$137</a:t>
+                        <a:t>$119</a:t>
                       </a:r>
                     </a:p>
                   </a:txBody>
@@ -17531,7 +17531,7 @@
                 <a:latin typeface="Garamond"/>
                 <a:cs typeface="Garamond"/>
               </a:rPr>
-              <a:t>BEAR   $91</a:t>
+              <a:t>BEAR   $66</a:t>
             </a:r>
           </a:p>
           <a:p>
@@ -17552,7 +17552,7 @@
                 <a:latin typeface="Garamond"/>
                 <a:cs typeface="Garamond"/>
               </a:rPr>
-              <a:t>−9% vs $100</a:t>
+              <a:t>−34% vs $100</a:t>
             </a:r>
           </a:p>
         </p:txBody>
@@ -17659,7 +17659,7 @@
                 <a:latin typeface="Garamond"/>
                 <a:cs typeface="Garamond"/>
               </a:rPr>
-              <a:t>WACC 11.0%; terminal growth 1.5%</a:t>
+              <a:t>WACC 11.5%; terminal growth 1.5%</a:t>
             </a:r>
           </a:p>
           <a:p>
@@ -17743,7 +17743,7 @@
                 <a:latin typeface="Garamond"/>
                 <a:cs typeface="Garamond"/>
               </a:rPr>
-              <a:t>BASE   $144</a:t>
+              <a:t>BASE   $124</a:t>
             </a:r>
           </a:p>
           <a:p>
@@ -17764,7 +17764,7 @@
                 <a:latin typeface="Garamond"/>
                 <a:cs typeface="Garamond"/>
               </a:rPr>
-              <a:t>+45% vs $100</a:t>
+              <a:t>+24% vs $100</a:t>
             </a:r>
           </a:p>
         </p:txBody>
@@ -17827,7 +17827,7 @@
                 <a:latin typeface="Garamond"/>
                 <a:cs typeface="Garamond"/>
               </a:rPr>
-              <a:t>FY2026 revenue −6%; returns to ~+3% by FY2028</a:t>
+              <a:t>FY2026 revenue −6.1%; then +2.3% (Street 3Y forecast)</a:t>
             </a:r>
           </a:p>
           <a:p>
@@ -17849,7 +17849,7 @@
                 <a:latin typeface="Garamond"/>
                 <a:cs typeface="Garamond"/>
               </a:rPr>
-              <a:t>Terminal EBIT margin 15.5%</a:t>
+              <a:t>Clean EBIT margin 13.2% → 15.5%; +$134.5M refund in FY26 only</a:t>
             </a:r>
           </a:p>
           <a:p>
@@ -17955,7 +17955,7 @@
                 <a:latin typeface="Garamond"/>
                 <a:cs typeface="Garamond"/>
               </a:rPr>
-              <a:t>BULL   $239</a:t>
+              <a:t>BULL   $227</a:t>
             </a:r>
           </a:p>
           <a:p>
@@ -17976,7 +17976,7 @@
                 <a:latin typeface="Garamond"/>
                 <a:cs typeface="Garamond"/>
               </a:rPr>
-              <a:t>+139% vs $100</a:t>
+              <a:t>+127% vs $100</a:t>
             </a:r>
           </a:p>
         </p:txBody>
@@ -18039,7 +18039,7 @@
                 <a:latin typeface="Garamond"/>
                 <a:cs typeface="Garamond"/>
               </a:rPr>
-              <a:t>FY2026 revenue −4%; +6% avg FY28–30</a:t>
+              <a:t>FY2026 revenue −4%; +6% avg FY27–30</a:t>
             </a:r>
           </a:p>
           <a:p>
@@ -18083,7 +18083,7 @@
                 <a:latin typeface="Garamond"/>
                 <a:cs typeface="Garamond"/>
               </a:rPr>
-              <a:t>WACC 9.0%; terminal growth 3.0%</a:t>
+              <a:t>WACC 9.5%; terminal growth 3.0%</a:t>
             </a:r>
           </a:p>
           <a:p>
@@ -18105,7 +18105,7 @@
                 <a:latin typeface="Garamond"/>
                 <a:cs typeface="Garamond"/>
               </a:rPr>
-              <a:t>Margin recovery to peak; brand re-accelerates</a:t>
+              <a:t>Margin recovery toward peak; brand re-accelerates</a:t>
             </a:r>
           </a:p>
         </p:txBody>
@@ -19347,7 +19347,7 @@
                 <a:latin typeface="Garamond"/>
                 <a:cs typeface="Garamond"/>
               </a:rPr>
-              <a:t>3.  Elite economics + accretive buybacks — FY2025 operating margin was 19.9% (last full year, not the trough); we model a 13.9% FY2026 trough. Diluted shares are down ~7% (128.0M → 119.1M)</a:t>
+              <a:t>3.  Elite economics + accretive buybacks — FY2025 operating margin was 19.9% (last full year, not the trough); we model a 13.2% clean FY2026 run-rate (Q2 18.8% minus 560bps of tariff refunds), then add the $134.5M refund once (~14.5% reported). Diluted shares are down ~7% (128.0M → 119.1M)</a:t>
             </a:r>
           </a:p>
           <a:p>
@@ -19368,7 +19368,7 @@
                 <a:latin typeface="Garamond"/>
                 <a:cs typeface="Garamond"/>
               </a:rPr>
-              <a:t>Base-case DCF $144; bear $91 (−9%) vs bull $239 (+139%) — downside is protected by net cash and an ~8–9% FCF yield</a:t>
+              <a:t>Base-case DCF $124; bear $66 (−34%) vs bull $227 (+127%) — downside is protected by net cash and an ~8–9% FCF yield</a:t>
             </a:r>
           </a:p>
         </p:txBody>
@@ -22930,7 +22930,7 @@
                 <a:latin typeface="Garamond"/>
                 <a:cs typeface="Garamond"/>
               </a:rPr>
-              <a:t>DCF base:  $144</a:t>
+              <a:t>DCF base:  $124</a:t>
             </a:r>
           </a:p>
         </p:txBody>

--- a/LULU/LULU_Investment_Pitch_Deck.pptx
+++ b/LULU/LULU_Investment_Pitch_Deck.pptx
@@ -12119,6 +12119,28 @@
                 <a:latin typeface="Garamond"/>
                 <a:cs typeface="Garamond"/>
               </a:rPr>
+              <a:t>Levered beta 0.95 = ROUND(StockAnalysis Beta (5Y) 0.86 × 1.10, 2). The 5Y beta is too calm after the Sep-4 −17% print, so we add 10%.</a:t>
+            </a:r>
+          </a:p>
+          <a:p>
+            <a:pPr algn="l" indent="-152400" marL="177800">
+              <a:spcBef>
+                <a:spcPts val="0"/>
+              </a:spcBef>
+              <a:spcAft>
+                <a:spcPts val="600"/>
+              </a:spcAft>
+              <a:buFont typeface="Garamond"/>
+              <a:buChar char="•"/>
+            </a:pPr>
+            <a:r>
+              <a:rPr sz="1300" b="0" i="0">
+                <a:solidFill>
+                  <a:srgbClr val="262626"/>
+                </a:solidFill>
+                <a:latin typeface="Garamond"/>
+                <a:cs typeface="Garamond"/>
+              </a:rPr>
               <a:t>Capital returned via buybacks (no dividend); FY2025 repurchases $1,178.3M</a:t>
             </a:r>
           </a:p>
@@ -12262,7 +12284,7 @@
                 <a:latin typeface="Garamond"/>
                 <a:cs typeface="Garamond"/>
               </a:rPr>
-              <a:t>      0.95</a:t>
+              <a:t>      0.95  (= 0.86 × 1.10)</a:t>
             </a:r>
           </a:p>
           <a:p>

--- a/LULU/LULU_Investment_Pitch_Deck.pptx
+++ b/LULU/LULU_Investment_Pitch_Deck.pptx
@@ -12119,7 +12119,7 @@
                 <a:latin typeface="Garamond"/>
                 <a:cs typeface="Garamond"/>
               </a:rPr>
-              <a:t>Levered beta 0.95 = ROUND(StockAnalysis Beta (5Y) 0.86 × 1.10, 2). The 5Y beta is too calm after the Sep-4 −17% print, so we add 10%.</a:t>
+              <a:t>Levered beta 0.95 is Damodaran Jan-2026 Retail (Special Lines) unlevered beta. Company 5Y is 0.86; LULU has no funded debt, so we use the industry βu.</a:t>
             </a:r>
           </a:p>
           <a:p>
@@ -12284,7 +12284,7 @@
                 <a:latin typeface="Garamond"/>
                 <a:cs typeface="Garamond"/>
               </a:rPr>
-              <a:t>      0.95  (= 0.86 × 1.10)</a:t>
+              <a:t>      0.95  (Damodaran βu)</a:t>
             </a:r>
           </a:p>
           <a:p>

--- a/LULU/LULU_Investment_Pitch_Deck.pptx
+++ b/LULU/LULU_Investment_Pitch_Deck.pptx
@@ -12119,7 +12119,7 @@
                 <a:latin typeface="Garamond"/>
                 <a:cs typeface="Garamond"/>
               </a:rPr>
-              <a:t>Levered beta 0.95 is Damodaran Jan-2026 Retail (Special Lines) unlevered beta. Company 5Y is 0.86; LULU has no funded debt, so we use the industry βu.</a:t>
+              <a:t>We use Damodaran’s unlevered Retail (Special Lines) beta of 0.95 because LULU has no debt, so βu = βe. Company 5Y is 0.86 and is not used.</a:t>
             </a:r>
           </a:p>
           <a:p>
@@ -12274,7 +12274,7 @@
                 <a:latin typeface="Garamond"/>
                 <a:cs typeface="Garamond"/>
               </a:rPr>
-              <a:t>Levered beta</a:t>
+              <a:t>Beta (unlev. retail; no debt)</a:t>
             </a:r>
             <a:r>
               <a:rPr sz="1300" b="1" i="0">
@@ -12284,7 +12284,7 @@
                 <a:latin typeface="Garamond"/>
                 <a:cs typeface="Garamond"/>
               </a:rPr>
-              <a:t>      0.95  (Damodaran βu)</a:t>
+              <a:t>      0.95</a:t>
             </a:r>
           </a:p>
           <a:p>

--- a/LULU/LULU_Investment_Pitch_Deck.pptx
+++ b/LULU/LULU_Investment_Pitch_Deck.pptx
@@ -16075,7 +16075,7 @@
                 <a:latin typeface="Garamond"/>
                 <a:cs typeface="Garamond"/>
               </a:rPr>
-              <a:t>LULU screens cheap on absolute and relative multiples</a:t>
+              <a:t>LULU screens cheap vs public peers; Gymshark is a private growth print, not the TV</a:t>
             </a:r>
           </a:p>
         </p:txBody>
@@ -16163,7 +16163,7 @@
                 <a:latin typeface="Garamond"/>
                 <a:cs typeface="Garamond"/>
               </a:rPr>
-              <a:t>Source: GIS estimates; peer multiples are analyst approximations for illustration</a:t>
+              <a:t>Source: StockAnalysis public prints; Gymshark 23.5x = Guardian £1.25bn / SGB FY25 EBITDA £53.3m</a:t>
             </a:r>
           </a:p>
         </p:txBody>
@@ -16221,8 +16221,8 @@
           <p:nvPr/>
         </p:nvGraphicFramePr>
         <p:xfrm>
-          <a:off x="457200" y="1280160"/>
-          <a:ext cx="11292836" cy="3291840"/>
+          <a:off x="457200" y="1143000"/>
+          <a:ext cx="11292836" cy="3520440"/>
         </p:xfrm>
         <a:graphic>
           <a:graphicData uri="http://schemas.openxmlformats.org/drawingml/2006/table">
@@ -16237,7 +16237,7 @@
                 <a:gridCol w="2045969"/>
                 <a:gridCol w="2045969"/>
               </a:tblGrid>
-              <a:tr h="470262">
+              <a:tr h="440055">
                 <a:tc>
                   <a:txBody>
                     <a:bodyPr/>
@@ -16359,7 +16359,7 @@
                   </a:tcPr>
                 </a:tc>
               </a:tr>
-              <a:tr h="470262">
+              <a:tr h="440055">
                 <a:tc>
                   <a:txBody>
                     <a:bodyPr/>
@@ -16481,7 +16481,7 @@
                   </a:tcPr>
                 </a:tc>
               </a:tr>
-              <a:tr h="470262">
+              <a:tr h="440055">
                 <a:tc>
                   <a:txBody>
                     <a:bodyPr/>
@@ -16603,7 +16603,7 @@
                   </a:tcPr>
                 </a:tc>
               </a:tr>
-              <a:tr h="470262">
+              <a:tr h="440055">
                 <a:tc>
                   <a:txBody>
                     <a:bodyPr/>
@@ -16725,7 +16725,7 @@
                   </a:tcPr>
                 </a:tc>
               </a:tr>
-              <a:tr h="470262">
+              <a:tr h="440055">
                 <a:tc>
                   <a:txBody>
                     <a:bodyPr/>
@@ -16847,7 +16847,7 @@
                   </a:tcPr>
                 </a:tc>
               </a:tr>
-              <a:tr h="470262">
+              <a:tr h="440055">
                 <a:tc>
                   <a:txBody>
                     <a:bodyPr/>
@@ -16969,7 +16969,7 @@
                   </a:tcPr>
                 </a:tc>
               </a:tr>
-              <a:tr h="470268">
+              <a:tr h="440055">
                 <a:tc>
                   <a:txBody>
                     <a:bodyPr/>
@@ -17087,6 +17087,128 @@
                   <a:tcPr anchor="ctr" marT="12700" marB="12700">
                     <a:solidFill>
                       <a:srgbClr val="F0F1F3"/>
+                    </a:solidFill>
+                  </a:tcPr>
+                </a:tc>
+              </a:tr>
+              <a:tr h="440055">
+                <a:tc>
+                  <a:txBody>
+                    <a:bodyPr/>
+                    <a:lstStyle/>
+                    <a:p>
+                      <a:pPr algn="l"/>
+                      <a:r>
+                        <a:rPr sz="1050" b="0" i="0">
+                          <a:solidFill>
+                            <a:srgbClr val="262626"/>
+                          </a:solidFill>
+                          <a:latin typeface="Garamond"/>
+                          <a:cs typeface="Garamond"/>
+                        </a:rPr>
+                        <a:t>Gymshark (private)</a:t>
+                      </a:r>
+                    </a:p>
+                  </a:txBody>
+                  <a:tcPr anchor="ctr" marT="12700" marB="12700">
+                    <a:solidFill>
+                      <a:srgbClr val="FFFFFF"/>
+                    </a:solidFill>
+                  </a:tcPr>
+                </a:tc>
+                <a:tc>
+                  <a:txBody>
+                    <a:bodyPr/>
+                    <a:lstStyle/>
+                    <a:p>
+                      <a:pPr algn="r"/>
+                      <a:r>
+                        <a:rPr sz="1050" b="0" i="0">
+                          <a:solidFill>
+                            <a:srgbClr val="262626"/>
+                          </a:solidFill>
+                          <a:latin typeface="Garamond"/>
+                          <a:cs typeface="Garamond"/>
+                        </a:rPr>
+                        <a:t>23.5x</a:t>
+                      </a:r>
+                    </a:p>
+                  </a:txBody>
+                  <a:tcPr anchor="ctr" marT="12700" marB="12700">
+                    <a:solidFill>
+                      <a:srgbClr val="FFFFFF"/>
+                    </a:solidFill>
+                  </a:tcPr>
+                </a:tc>
+                <a:tc>
+                  <a:txBody>
+                    <a:bodyPr/>
+                    <a:lstStyle/>
+                    <a:p>
+                      <a:pPr algn="r"/>
+                      <a:r>
+                        <a:rPr sz="1050" b="0" i="0">
+                          <a:solidFill>
+                            <a:srgbClr val="262626"/>
+                          </a:solidFill>
+                          <a:latin typeface="Garamond"/>
+                          <a:cs typeface="Garamond"/>
+                        </a:rPr>
+                        <a:t>n.m.</a:t>
+                      </a:r>
+                    </a:p>
+                  </a:txBody>
+                  <a:tcPr anchor="ctr" marT="12700" marB="12700">
+                    <a:solidFill>
+                      <a:srgbClr val="FFFFFF"/>
+                    </a:solidFill>
+                  </a:tcPr>
+                </a:tc>
+                <a:tc>
+                  <a:txBody>
+                    <a:bodyPr/>
+                    <a:lstStyle/>
+                    <a:p>
+                      <a:pPr algn="r"/>
+                      <a:r>
+                        <a:rPr sz="1050" b="0" i="0">
+                          <a:solidFill>
+                            <a:srgbClr val="262626"/>
+                          </a:solidFill>
+                          <a:latin typeface="Garamond"/>
+                          <a:cs typeface="Garamond"/>
+                        </a:rPr>
+                        <a:t>low-single</a:t>
+                      </a:r>
+                    </a:p>
+                  </a:txBody>
+                  <a:tcPr anchor="ctr" marT="12700" marB="12700">
+                    <a:solidFill>
+                      <a:srgbClr val="FFFFFF"/>
+                    </a:solidFill>
+                  </a:tcPr>
+                </a:tc>
+                <a:tc>
+                  <a:txBody>
+                    <a:bodyPr/>
+                    <a:lstStyle/>
+                    <a:p>
+                      <a:pPr algn="r"/>
+                      <a:r>
+                        <a:rPr sz="1050" b="0" i="0">
+                          <a:solidFill>
+                            <a:srgbClr val="262626"/>
+                          </a:solidFill>
+                          <a:latin typeface="Garamond"/>
+                          <a:cs typeface="Garamond"/>
+                        </a:rPr>
+                        <a:t>~8% EBITDA</a:t>
+                      </a:r>
+                    </a:p>
+                  </a:txBody>
+                  <a:tcPr anchor="ctr" marT="12700" marB="12700">
+                    <a:solidFill>
+                      <a:srgbClr val="FFFFFF"/>
                     </a:solidFill>
                   </a:tcPr>
                 </a:tc>
@@ -17104,7 +17226,7 @@
         <p:spPr>
           <a:xfrm>
             <a:off x="457200" y="4754880"/>
-            <a:ext cx="11292840" cy="1554480"/>
+            <a:ext cx="11292840" cy="1600200"/>
           </a:xfrm>
           <a:prstGeom prst="rect">
             <a:avLst/>
@@ -17122,7 +17244,7 @@
                 <a:spcPts val="0"/>
               </a:spcBef>
               <a:spcAft>
-                <a:spcPts val="400"/>
+                <a:spcPts val="300"/>
               </a:spcAft>
               <a:buNone/>
             </a:pPr>
@@ -17134,7 +17256,7 @@
                 <a:latin typeface="Garamond"/>
                 <a:cs typeface="Garamond"/>
               </a:rPr>
-              <a:t>Read-through</a:t>
+              <a:t>Read-through — we do not average these for terminal value</a:t>
             </a:r>
           </a:p>
           <a:p>
@@ -17143,20 +17265,20 @@
                 <a:spcPts val="0"/>
               </a:spcBef>
               <a:spcAft>
-                <a:spcPts val="400"/>
+                <a:spcPts val="300"/>
               </a:spcAft>
               <a:buFont typeface="Garamond"/>
               <a:buChar char="•"/>
             </a:pPr>
             <a:r>
-              <a:rPr sz="1300" b="0" i="0">
+              <a:rPr sz="1250" b="0" i="0">
                 <a:solidFill>
                   <a:srgbClr val="262626"/>
                 </a:solidFill>
                 <a:latin typeface="Garamond"/>
                 <a:cs typeface="Garamond"/>
               </a:rPr>
-              <a:t>LULU trades at a fraction of peer multiples despite sector-leading margins and a net-cash balance sheet — the discount reflects near-term growth fears, not structural inferiority</a:t>
+              <a:t>Public 5-name mean is 10.8x; with Gymshark 12.9x. Both overstate a 2.25% g / 15.5% OM FY2030 exit</a:t>
             </a:r>
           </a:p>
           <a:p>
@@ -17165,20 +17287,42 @@
                 <a:spcPts val="0"/>
               </a:spcBef>
               <a:spcAft>
-                <a:spcPts val="0"/>
+                <a:spcPts val="300"/>
               </a:spcAft>
               <a:buFont typeface="Garamond"/>
               <a:buChar char="•"/>
             </a:pPr>
             <a:r>
-              <a:rPr sz="1300" b="0" i="0">
+              <a:rPr sz="1250" b="0" i="0">
                 <a:solidFill>
                   <a:srgbClr val="262626"/>
                 </a:solidFill>
                 <a:latin typeface="Garamond"/>
                 <a:cs typeface="Garamond"/>
               </a:rPr>
-              <a:t>Even a partial re-rating toward the low end of the peer group (e.g., 6–7x EV/EBITDA) implies a materially higher share price</a:t>
+              <a:t>Selected TV is 8.0x = Deckers, ~1 turn above Gordon ~7x and a haircut from the mature public mean (DECK / ADS / VFC) of 9.3x</a:t>
+            </a:r>
+          </a:p>
+          <a:p>
+            <a:pPr algn="l" indent="-152400" marL="177800">
+              <a:spcBef>
+                <a:spcPts val="0"/>
+              </a:spcBef>
+              <a:spcAft>
+                <a:spcPts val="0"/>
+              </a:spcAft>
+              <a:buFont typeface="Garamond"/>
+              <a:buChar char="•"/>
+            </a:pPr>
+            <a:r>
+              <a:rPr sz="1250" b="0" i="0">
+                <a:solidFill>
+                  <a:srgbClr val="262626"/>
+                </a:solidFill>
+                <a:latin typeface="Garamond"/>
+                <a:cs typeface="Garamond"/>
+              </a:rPr>
+              <a:t>Gymshark 23.5x = £1,250m / £53.3m is a 2020 GA print on FY25 EBITDA — a growth-stage private reference, not a mature public exit</a:t>
             </a:r>
           </a:p>
         </p:txBody>
@@ -18617,6 +18761,28 @@
                 <a:cs typeface="Garamond"/>
               </a:rPr>
               <a:t>Projections, DCF and comparable-company analysis: GIS Investment Research models, built from scratch for this assignment</a:t>
+            </a:r>
+          </a:p>
+          <a:p>
+            <a:pPr algn="l" indent="-152400" marL="177800">
+              <a:spcBef>
+                <a:spcPts val="0"/>
+              </a:spcBef>
+              <a:spcAft>
+                <a:spcPts val="500"/>
+              </a:spcAft>
+              <a:buFont typeface="Garamond"/>
+              <a:buChar char="•"/>
+            </a:pPr>
+            <a:r>
+              <a:rPr sz="1250" b="0" i="0">
+                <a:solidFill>
+                  <a:srgbClr val="262626"/>
+                </a:solidFill>
+                <a:latin typeface="Garamond"/>
+                <a:cs typeface="Garamond"/>
+              </a:rPr>
+              <a:t>Gymshark private print: Guardian (2020 GA £1.25bn valuation) and SGB (FY25 EBITDA £53.3m) — 23.5x is a reference, not the FY30 exit</a:t>
             </a:r>
           </a:p>
           <a:p>

--- a/LULU/LULU_Investment_Pitch_Deck.pptx
+++ b/LULU/LULU_Investment_Pitch_Deck.pptx
@@ -16075,7 +16075,7 @@
                 <a:latin typeface="Garamond"/>
                 <a:cs typeface="Garamond"/>
               </a:rPr>
-              <a:t>LULU screens cheap vs public peers; Gymshark is a private growth print, not the TV</a:t>
+              <a:t>LULU screens cheap vs public peers; Gymshark EV/EBITDA is implied, not a published print</a:t>
             </a:r>
           </a:p>
         </p:txBody>
@@ -16163,7 +16163,7 @@
                 <a:latin typeface="Garamond"/>
                 <a:cs typeface="Garamond"/>
               </a:rPr>
-              <a:t>Source: StockAnalysis public prints; Gymshark 23.5x = Guardian £1.25bn / SGB FY25 EBITDA £53.3m</a:t>
+              <a:t>Source: StockAnalysis public prints; Gymshark inputs are Guardian £1.25bn and SGB FY25 EBITDA £53.3m — no page prints the multiple</a:t>
             </a:r>
           </a:p>
         </p:txBody>
@@ -17106,7 +17106,7 @@
                           <a:latin typeface="Garamond"/>
                           <a:cs typeface="Garamond"/>
                         </a:rPr>
-                        <a:t>Gymshark (private)</a:t>
+                        <a:t>Gymshark (implied)</a:t>
                       </a:r>
                     </a:p>
                   </a:txBody>
@@ -17278,7 +17278,7 @@
                 <a:latin typeface="Garamond"/>
                 <a:cs typeface="Garamond"/>
               </a:rPr>
-              <a:t>Public 5-name mean is 10.8x; with Gymshark 12.9x. Both overstate a 2.25% g / 15.5% OM FY2030 exit</a:t>
+              <a:t>Public 5-name mean is 10.8x; with implied Gymshark 12.9x. Both overstate a 2.25% g / 15.5% OM FY2030 exit</a:t>
             </a:r>
           </a:p>
           <a:p>
@@ -17322,7 +17322,7 @@
                 <a:latin typeface="Garamond"/>
                 <a:cs typeface="Garamond"/>
               </a:rPr>
-              <a:t>Gymshark 23.5x = £1,250m / £53.3m is a 2020 GA print on FY25 EBITDA — a growth-stage private reference, not a mature public exit</a:t>
+              <a:t>No source prints Gymshark EV/EBITDA. 23.5x is model math: 2020 Guardian £1.25bn / SGB FY25 EBITDA £53.3m — a cross-year implied multiple, not a tape print</a:t>
             </a:r>
           </a:p>
         </p:txBody>
@@ -18782,7 +18782,7 @@
                 <a:latin typeface="Garamond"/>
                 <a:cs typeface="Garamond"/>
               </a:rPr>
-              <a:t>Gymshark private print: Guardian (2020 GA £1.25bn valuation) and SGB (FY25 EBITDA £53.3m) — 23.5x is a reference, not the FY30 exit</a:t>
+              <a:t>Gymshark: Guardian (2020 GA £1.25bn valuation) and SGB (FY25 EBITDA £53.3m). No page prints EV/EBITDA; 23.5x is implied model math, not the FY30 exit</a:t>
             </a:r>
           </a:p>
           <a:p>

--- a/LULU/LULU_Investment_Pitch_Deck.pptx
+++ b/LULU/LULU_Investment_Pitch_Deck.pptx
@@ -17300,7 +17300,7 @@
                 <a:latin typeface="Garamond"/>
                 <a:cs typeface="Garamond"/>
               </a:rPr>
-              <a:t>Selected TV is 8.0x = Deckers, ~1 turn above Gordon ~7x and a haircut from the mature public mean (DECK / ADS / VFC) of 9.3x</a:t>
+              <a:t>Selected TV is the Gordon identity (~6.0x) = TV / FY30 EBITDA = (UFCF/EBITDA)×(1+g)/(WACC−g). Not Deckers 8.0x and not the 10.8x public mean</a:t>
             </a:r>
           </a:p>
           <a:p>

--- a/LULU/LULU_Investment_Pitch_Deck.pptx
+++ b/LULU/LULU_Investment_Pitch_Deck.pptx
@@ -16075,7 +16075,7 @@
                 <a:latin typeface="Garamond"/>
                 <a:cs typeface="Garamond"/>
               </a:rPr>
-              <a:t>LULU screens cheap vs public peers; Gymshark EV/EBITDA is implied, not a published print</a:t>
+              <a:t>LULU screens cheap vs public peers; Alo has no EV/EBITDA print</a:t>
             </a:r>
           </a:p>
         </p:txBody>
@@ -16163,7 +16163,7 @@
                 <a:latin typeface="Garamond"/>
                 <a:cs typeface="Garamond"/>
               </a:rPr>
-              <a:t>Source: StockAnalysis public prints; Gymshark inputs are Guardian £1.25bn and SGB FY25 EBITDA £53.3m — no page prints the multiple</a:t>
+              <a:t>Source: StockAnalysis public prints; Alo ask $10bn (Reuters) / parent sales ~$2bn (Forbes) — EV/EBITDA n.a.</a:t>
             </a:r>
           </a:p>
         </p:txBody>
@@ -17106,7 +17106,7 @@
                           <a:latin typeface="Garamond"/>
                           <a:cs typeface="Garamond"/>
                         </a:rPr>
-                        <a:t>Gymshark (implied)</a:t>
+                        <a:t>Alo Yoga (private)</a:t>
                       </a:r>
                     </a:p>
                   </a:txBody>
@@ -17130,7 +17130,7 @@
                           <a:latin typeface="Garamond"/>
                           <a:cs typeface="Garamond"/>
                         </a:rPr>
-                        <a:t>23.5x</a:t>
+                        <a:t>n.a.</a:t>
                       </a:r>
                     </a:p>
                   </a:txBody>
@@ -17178,7 +17178,7 @@
                           <a:latin typeface="Garamond"/>
                           <a:cs typeface="Garamond"/>
                         </a:rPr>
-                        <a:t>low-single</a:t>
+                        <a:t>fast</a:t>
                       </a:r>
                     </a:p>
                   </a:txBody>
@@ -17202,7 +17202,7 @@
                           <a:latin typeface="Garamond"/>
                           <a:cs typeface="Garamond"/>
                         </a:rPr>
-                        <a:t>~8% EBITDA</a:t>
+                        <a:t>n.a.</a:t>
                       </a:r>
                     </a:p>
                   </a:txBody>
@@ -17278,7 +17278,7 @@
                 <a:latin typeface="Garamond"/>
                 <a:cs typeface="Garamond"/>
               </a:rPr>
-              <a:t>Public 5-name mean is 10.8x; with implied Gymshark 12.9x. Both overstate a 2.25% g / 15.5% OM FY2030 exit</a:t>
+              <a:t>Public 5-name mean is 10.8x. That overstates a 2.25% g / 15.5% OM FY2030 exit</a:t>
             </a:r>
           </a:p>
           <a:p>
@@ -17322,7 +17322,7 @@
                 <a:latin typeface="Garamond"/>
                 <a:cs typeface="Garamond"/>
               </a:rPr>
-              <a:t>No source prints Gymshark EV/EBITDA. 23.5x is model math: 2020 Guardian £1.25bn / SGB FY25 EBITDA £53.3m — a cross-year implied multiple, not a tape print</a:t>
+              <a:t>Alo EV/EBITDA is n.a. Firecrawl found no EBITDA. Implied 5.0x is EV/Sales: unclosed $10bn Moelis ask / Forbes ~$2bn parent sales — not the TV</a:t>
             </a:r>
           </a:p>
         </p:txBody>
@@ -18782,7 +18782,7 @@
                 <a:latin typeface="Garamond"/>
                 <a:cs typeface="Garamond"/>
               </a:rPr>
-              <a:t>Gymshark: Guardian (2020 GA £1.25bn valuation) and SGB (FY25 EBITDA £53.3m). No page prints EV/EBITDA; 23.5x is implied model math, not the FY30 exit</a:t>
+              <a:t>Alo Yoga: Reuters 2023 Moelis ask ~$10bn (no deal announced, Reuters 2026) and Forbes Color Image sales nearly $2bn. No page prints EV/EBITDA; implied 5.0x is EV/Sales, not the FY30 exit</a:t>
             </a:r>
           </a:p>
           <a:p>

--- a/LULU/LULU_Investment_Pitch_Deck.pptx
+++ b/LULU/LULU_Investment_Pitch_Deck.pptx
@@ -16075,7 +16075,7 @@
                 <a:latin typeface="Garamond"/>
                 <a:cs typeface="Garamond"/>
               </a:rPr>
-              <a:t>LULU screens cheap vs public peers; Alo has no EV/EBITDA print</a:t>
+              <a:t>PitchBook pubcomps are the current tape; Alo still has no EV/EBITDA</a:t>
             </a:r>
           </a:p>
         </p:txBody>
@@ -16163,7 +16163,7 @@
                 <a:latin typeface="Garamond"/>
                 <a:cs typeface="Garamond"/>
               </a:rPr>
-              <a:t>Source: StockAnalysis public prints; Alo ask $10bn (Reuters) / parent sales ~$2bn (Forbes) — EV/EBITDA n.a.</a:t>
+              <a:t>Source: PitchBook Comps Set 04-Sep-2026 (EV/EBITDA = daily EV / TTM EBITDA); Alo ask $10bn / Forbes ~$2bn</a:t>
             </a:r>
           </a:p>
         </p:txBody>
@@ -16221,8 +16221,8 @@
           <p:nvPr/>
         </p:nvGraphicFramePr>
         <p:xfrm>
-          <a:off x="457200" y="1143000"/>
-          <a:ext cx="11292836" cy="3520440"/>
+          <a:off x="457200" y="1097280"/>
+          <a:ext cx="11292836" cy="3566160"/>
         </p:xfrm>
         <a:graphic>
           <a:graphicData uri="http://schemas.openxmlformats.org/drawingml/2006/table">
@@ -16237,7 +16237,7 @@
                 <a:gridCol w="2045969"/>
                 <a:gridCol w="2045969"/>
               </a:tblGrid>
-              <a:tr h="440055">
+              <a:tr h="396240">
                 <a:tc>
                   <a:txBody>
                     <a:bodyPr/>
@@ -16300,7 +16300,7 @@
                           <a:latin typeface="Garamond"/>
                           <a:cs typeface="Garamond"/>
                         </a:rPr>
-                        <a:t>P/E (fwd)</a:t>
+                        <a:t>P/E</a:t>
                       </a:r>
                     </a:p>
                   </a:txBody>
@@ -16324,7 +16324,7 @@
                           <a:latin typeface="Garamond"/>
                           <a:cs typeface="Garamond"/>
                         </a:rPr>
-                        <a:t>Rev growth</a:t>
+                        <a:t>EV ($000)</a:t>
                       </a:r>
                     </a:p>
                   </a:txBody>
@@ -16348,7 +16348,7 @@
                           <a:latin typeface="Garamond"/>
                           <a:cs typeface="Garamond"/>
                         </a:rPr>
-                        <a:t>Op margin</a:t>
+                        <a:t>EBITDA ($000)</a:t>
                       </a:r>
                     </a:p>
                   </a:txBody>
@@ -16359,7 +16359,7 @@
                   </a:tcPr>
                 </a:tc>
               </a:tr>
-              <a:tr h="440055">
+              <a:tr h="396240">
                 <a:tc>
                   <a:txBody>
                     <a:bodyPr/>
@@ -16398,7 +16398,7 @@
                           <a:latin typeface="Garamond"/>
                           <a:cs typeface="Garamond"/>
                         </a:rPr>
-                        <a:t>3.5x</a:t>
+                        <a:t>4.7x</a:t>
                       </a:r>
                     </a:p>
                   </a:txBody>
@@ -16422,7 +16422,7 @@
                           <a:latin typeface="Garamond"/>
                           <a:cs typeface="Garamond"/>
                         </a:rPr>
-                        <a:t>10.4x</a:t>
+                        <a:t>8.3x</a:t>
                       </a:r>
                     </a:p>
                   </a:txBody>
@@ -16446,7 +16446,7 @@
                           <a:latin typeface="Garamond"/>
                           <a:cs typeface="Garamond"/>
                         </a:rPr>
-                        <a:t>−6% (FY26E)</a:t>
+                        <a:t>11,890,440</a:t>
                       </a:r>
                     </a:p>
                   </a:txBody>
@@ -16470,7 +16470,7 @@
                           <a:latin typeface="Garamond"/>
                           <a:cs typeface="Garamond"/>
                         </a:rPr>
-                        <a:t>~20%</a:t>
+                        <a:t>2,548,084</a:t>
                       </a:r>
                     </a:p>
                   </a:txBody>
@@ -16481,7 +16481,7 @@
                   </a:tcPr>
                 </a:tc>
               </a:tr>
-              <a:tr h="440055">
+              <a:tr h="396240">
                 <a:tc>
                   <a:txBody>
                     <a:bodyPr/>
@@ -16520,7 +16520,7 @@
                           <a:latin typeface="Garamond"/>
                           <a:cs typeface="Garamond"/>
                         </a:rPr>
-                        <a:t>12.0x</a:t>
+                        <a:t>12.7x</a:t>
                       </a:r>
                     </a:p>
                   </a:txBody>
@@ -16544,7 +16544,7 @@
                           <a:latin typeface="Garamond"/>
                           <a:cs typeface="Garamond"/>
                         </a:rPr>
-                        <a:t>22.4x</a:t>
+                        <a:t>18.3x</a:t>
                       </a:r>
                     </a:p>
                   </a:txBody>
@@ -16568,7 +16568,7 @@
                           <a:latin typeface="Garamond"/>
                           <a:cs typeface="Garamond"/>
                         </a:rPr>
-                        <a:t>low-single</a:t>
+                        <a:t>58,972,350</a:t>
                       </a:r>
                     </a:p>
                   </a:txBody>
@@ -16592,7 +16592,7 @@
                           <a:latin typeface="Garamond"/>
                           <a:cs typeface="Garamond"/>
                         </a:rPr>
-                        <a:t>~11%</a:t>
+                        <a:t>4,647,000</a:t>
                       </a:r>
                     </a:p>
                   </a:txBody>
@@ -16603,7 +16603,7 @@
                   </a:tcPr>
                 </a:tc>
               </a:tr>
-              <a:tr h="440055">
+              <a:tr h="396240">
                 <a:tc>
                   <a:txBody>
                     <a:bodyPr/>
@@ -16618,12 +16618,256 @@
                           <a:latin typeface="Garamond"/>
                           <a:cs typeface="Garamond"/>
                         </a:rPr>
+                        <a:t>adidas (ADS)</a:t>
+                      </a:r>
+                    </a:p>
+                  </a:txBody>
+                  <a:tcPr anchor="ctr" marT="12700" marB="12700">
+                    <a:solidFill>
+                      <a:srgbClr val="FFFFFF"/>
+                    </a:solidFill>
+                  </a:tcPr>
+                </a:tc>
+                <a:tc>
+                  <a:txBody>
+                    <a:bodyPr/>
+                    <a:lstStyle/>
+                    <a:p>
+                      <a:pPr algn="r"/>
+                      <a:r>
+                        <a:rPr sz="1050" b="0" i="0">
+                          <a:solidFill>
+                            <a:srgbClr val="262626"/>
+                          </a:solidFill>
+                          <a:latin typeface="Garamond"/>
+                          <a:cs typeface="Garamond"/>
+                        </a:rPr>
+                        <a:t>9.2x</a:t>
+                      </a:r>
+                    </a:p>
+                  </a:txBody>
+                  <a:tcPr anchor="ctr" marT="12700" marB="12700">
+                    <a:solidFill>
+                      <a:srgbClr val="FFFFFF"/>
+                    </a:solidFill>
+                  </a:tcPr>
+                </a:tc>
+                <a:tc>
+                  <a:txBody>
+                    <a:bodyPr/>
+                    <a:lstStyle/>
+                    <a:p>
+                      <a:pPr algn="r"/>
+                      <a:r>
+                        <a:rPr sz="1050" b="0" i="0">
+                          <a:solidFill>
+                            <a:srgbClr val="262626"/>
+                          </a:solidFill>
+                          <a:latin typeface="Garamond"/>
+                          <a:cs typeface="Garamond"/>
+                        </a:rPr>
+                        <a:t>19.1x</a:t>
+                      </a:r>
+                    </a:p>
+                  </a:txBody>
+                  <a:tcPr anchor="ctr" marT="12700" marB="12700">
+                    <a:solidFill>
+                      <a:srgbClr val="FFFFFF"/>
+                    </a:solidFill>
+                  </a:tcPr>
+                </a:tc>
+                <a:tc>
+                  <a:txBody>
+                    <a:bodyPr/>
+                    <a:lstStyle/>
+                    <a:p>
+                      <a:pPr algn="r"/>
+                      <a:r>
+                        <a:rPr sz="1050" b="0" i="0">
+                          <a:solidFill>
+                            <a:srgbClr val="262626"/>
+                          </a:solidFill>
+                          <a:latin typeface="Garamond"/>
+                          <a:cs typeface="Garamond"/>
+                        </a:rPr>
+                        <a:t>35,661,944</a:t>
+                      </a:r>
+                    </a:p>
+                  </a:txBody>
+                  <a:tcPr anchor="ctr" marT="12700" marB="12700">
+                    <a:solidFill>
+                      <a:srgbClr val="FFFFFF"/>
+                    </a:solidFill>
+                  </a:tcPr>
+                </a:tc>
+                <a:tc>
+                  <a:txBody>
+                    <a:bodyPr/>
+                    <a:lstStyle/>
+                    <a:p>
+                      <a:pPr algn="r"/>
+                      <a:r>
+                        <a:rPr sz="1050" b="0" i="0">
+                          <a:solidFill>
+                            <a:srgbClr val="262626"/>
+                          </a:solidFill>
+                          <a:latin typeface="Garamond"/>
+                          <a:cs typeface="Garamond"/>
+                        </a:rPr>
+                        <a:t>3,857,684</a:t>
+                      </a:r>
+                    </a:p>
+                  </a:txBody>
+                  <a:tcPr anchor="ctr" marT="12700" marB="12700">
+                    <a:solidFill>
+                      <a:srgbClr val="FFFFFF"/>
+                    </a:solidFill>
+                  </a:tcPr>
+                </a:tc>
+              </a:tr>
+              <a:tr h="396240">
+                <a:tc>
+                  <a:txBody>
+                    <a:bodyPr/>
+                    <a:lstStyle/>
+                    <a:p>
+                      <a:pPr algn="l"/>
+                      <a:r>
+                        <a:rPr sz="1050" b="0" i="0">
+                          <a:solidFill>
+                            <a:srgbClr val="262626"/>
+                          </a:solidFill>
+                          <a:latin typeface="Garamond"/>
+                          <a:cs typeface="Garamond"/>
+                        </a:rPr>
                         <a:t>Deckers (DECK)</a:t>
                       </a:r>
                     </a:p>
                   </a:txBody>
                   <a:tcPr anchor="ctr" marT="12700" marB="12700">
                     <a:solidFill>
+                      <a:srgbClr val="F0F1F3"/>
+                    </a:solidFill>
+                  </a:tcPr>
+                </a:tc>
+                <a:tc>
+                  <a:txBody>
+                    <a:bodyPr/>
+                    <a:lstStyle/>
+                    <a:p>
+                      <a:pPr algn="r"/>
+                      <a:r>
+                        <a:rPr sz="1050" b="0" i="0">
+                          <a:solidFill>
+                            <a:srgbClr val="262626"/>
+                          </a:solidFill>
+                          <a:latin typeface="Garamond"/>
+                          <a:cs typeface="Garamond"/>
+                        </a:rPr>
+                        <a:t>7.9x</a:t>
+                      </a:r>
+                    </a:p>
+                  </a:txBody>
+                  <a:tcPr anchor="ctr" marT="12700" marB="12700">
+                    <a:solidFill>
+                      <a:srgbClr val="F0F1F3"/>
+                    </a:solidFill>
+                  </a:tcPr>
+                </a:tc>
+                <a:tc>
+                  <a:txBody>
+                    <a:bodyPr/>
+                    <a:lstStyle/>
+                    <a:p>
+                      <a:pPr algn="r"/>
+                      <a:r>
+                        <a:rPr sz="1050" b="0" i="0">
+                          <a:solidFill>
+                            <a:srgbClr val="262626"/>
+                          </a:solidFill>
+                          <a:latin typeface="Garamond"/>
+                          <a:cs typeface="Garamond"/>
+                        </a:rPr>
+                        <a:t>12.1x</a:t>
+                      </a:r>
+                    </a:p>
+                  </a:txBody>
+                  <a:tcPr anchor="ctr" marT="12700" marB="12700">
+                    <a:solidFill>
+                      <a:srgbClr val="F0F1F3"/>
+                    </a:solidFill>
+                  </a:tcPr>
+                </a:tc>
+                <a:tc>
+                  <a:txBody>
+                    <a:bodyPr/>
+                    <a:lstStyle/>
+                    <a:p>
+                      <a:pPr algn="r"/>
+                      <a:r>
+                        <a:rPr sz="1050" b="0" i="0">
+                          <a:solidFill>
+                            <a:srgbClr val="262626"/>
+                          </a:solidFill>
+                          <a:latin typeface="Garamond"/>
+                          <a:cs typeface="Garamond"/>
+                        </a:rPr>
+                        <a:t>10,555,510</a:t>
+                      </a:r>
+                    </a:p>
+                  </a:txBody>
+                  <a:tcPr anchor="ctr" marT="12700" marB="12700">
+                    <a:solidFill>
+                      <a:srgbClr val="F0F1F3"/>
+                    </a:solidFill>
+                  </a:tcPr>
+                </a:tc>
+                <a:tc>
+                  <a:txBody>
+                    <a:bodyPr/>
+                    <a:lstStyle/>
+                    <a:p>
+                      <a:pPr algn="r"/>
+                      <a:r>
+                        <a:rPr sz="1050" b="0" i="0">
+                          <a:solidFill>
+                            <a:srgbClr val="262626"/>
+                          </a:solidFill>
+                          <a:latin typeface="Garamond"/>
+                          <a:cs typeface="Garamond"/>
+                        </a:rPr>
+                        <a:t>1,329,439</a:t>
+                      </a:r>
+                    </a:p>
+                  </a:txBody>
+                  <a:tcPr anchor="ctr" marT="12700" marB="12700">
+                    <a:solidFill>
+                      <a:srgbClr val="F0F1F3"/>
+                    </a:solidFill>
+                  </a:tcPr>
+                </a:tc>
+              </a:tr>
+              <a:tr h="396240">
+                <a:tc>
+                  <a:txBody>
+                    <a:bodyPr/>
+                    <a:lstStyle/>
+                    <a:p>
+                      <a:pPr algn="l"/>
+                      <a:r>
+                        <a:rPr sz="1050" b="0" i="0">
+                          <a:solidFill>
+                            <a:srgbClr val="262626"/>
+                          </a:solidFill>
+                          <a:latin typeface="Garamond"/>
+                          <a:cs typeface="Garamond"/>
+                        </a:rPr>
+                        <a:t>Crocs (CROX)</a:t>
+                      </a:r>
+                    </a:p>
+                  </a:txBody>
+                  <a:tcPr anchor="ctr" marT="12700" marB="12700">
+                    <a:solidFill>
                       <a:srgbClr val="FFFFFF"/>
                     </a:solidFill>
                   </a:tcPr>
@@ -16642,7 +16886,7 @@
                           <a:latin typeface="Garamond"/>
                           <a:cs typeface="Garamond"/>
                         </a:rPr>
-                        <a:t>8.0x</a:t>
+                        <a:t>7.8x</a:t>
                       </a:r>
                     </a:p>
                   </a:txBody>
@@ -16666,7 +16910,7 @@
                           <a:latin typeface="Garamond"/>
                           <a:cs typeface="Garamond"/>
                         </a:rPr>
-                        <a:t>11.2x</a:t>
+                        <a:t>10.3x</a:t>
                       </a:r>
                     </a:p>
                   </a:txBody>
@@ -16690,7 +16934,7 @@
                           <a:latin typeface="Garamond"/>
                           <a:cs typeface="Garamond"/>
                         </a:rPr>
-                        <a:t>mid-teens</a:t>
+                        <a:t>7,153,911</a:t>
                       </a:r>
                     </a:p>
                   </a:txBody>
@@ -16714,7 +16958,7 @@
                           <a:latin typeface="Garamond"/>
                           <a:cs typeface="Garamond"/>
                         </a:rPr>
-                        <a:t>~22%</a:t>
+                        <a:t>922,278</a:t>
                       </a:r>
                     </a:p>
                   </a:txBody>
@@ -16725,7 +16969,7 @@
                   </a:tcPr>
                 </a:tc>
               </a:tr>
-              <a:tr h="440055">
+              <a:tr h="396240">
                 <a:tc>
                   <a:txBody>
                     <a:bodyPr/>
@@ -16740,7 +16984,7 @@
                           <a:latin typeface="Garamond"/>
                           <a:cs typeface="Garamond"/>
                         </a:rPr>
-                        <a:t>On Holding (ONON)</a:t>
+                        <a:t>Levi Strauss (LEVI)</a:t>
                       </a:r>
                     </a:p>
                   </a:txBody>
@@ -16764,7 +17008,7 @@
                           <a:latin typeface="Garamond"/>
                           <a:cs typeface="Garamond"/>
                         </a:rPr>
-                        <a:t>14.0x</a:t>
+                        <a:t>9.6x</a:t>
                       </a:r>
                     </a:p>
                   </a:txBody>
@@ -16788,7 +17032,7 @@
                           <a:latin typeface="Garamond"/>
                           <a:cs typeface="Garamond"/>
                         </a:rPr>
-                        <a:t>15.2x</a:t>
+                        <a:t>15.0x</a:t>
                       </a:r>
                     </a:p>
                   </a:txBody>
@@ -16812,7 +17056,7 @@
                           <a:latin typeface="Garamond"/>
                           <a:cs typeface="Garamond"/>
                         </a:rPr>
-                        <a:t>20%+</a:t>
+                        <a:t>9,422,753</a:t>
                       </a:r>
                     </a:p>
                   </a:txBody>
@@ -16836,7 +17080,7 @@
                           <a:latin typeface="Garamond"/>
                           <a:cs typeface="Garamond"/>
                         </a:rPr>
-                        <a:t>~10%</a:t>
+                        <a:t>976,700</a:t>
                       </a:r>
                     </a:p>
                   </a:txBody>
@@ -16847,7 +17091,7 @@
                   </a:tcPr>
                 </a:tc>
               </a:tr>
-              <a:tr h="440055">
+              <a:tr h="396240">
                 <a:tc>
                   <a:txBody>
                     <a:bodyPr/>
@@ -16862,7 +17106,7 @@
                           <a:latin typeface="Garamond"/>
                           <a:cs typeface="Garamond"/>
                         </a:rPr>
-                        <a:t>adidas (ADS)</a:t>
+                        <a:t>Kontoor (KTB)</a:t>
                       </a:r>
                     </a:p>
                   </a:txBody>
@@ -16886,7 +17130,7 @@
                           <a:latin typeface="Garamond"/>
                           <a:cs typeface="Garamond"/>
                         </a:rPr>
-                        <a:t>9.3x</a:t>
+                        <a:t>12.9x</a:t>
                       </a:r>
                     </a:p>
                   </a:txBody>
@@ -16910,7 +17154,7 @@
                           <a:latin typeface="Garamond"/>
                           <a:cs typeface="Garamond"/>
                         </a:rPr>
-                        <a:t>14.2x</a:t>
+                        <a:t>18.0x</a:t>
                       </a:r>
                     </a:p>
                   </a:txBody>
@@ -16934,7 +17178,7 @@
                           <a:latin typeface="Garamond"/>
                           <a:cs typeface="Garamond"/>
                         </a:rPr>
-                        <a:t>mid-single</a:t>
+                        <a:t>5,236,269</a:t>
                       </a:r>
                     </a:p>
                   </a:txBody>
@@ -16958,7 +17202,7 @@
                           <a:latin typeface="Garamond"/>
                           <a:cs typeface="Garamond"/>
                         </a:rPr>
-                        <a:t>~9%</a:t>
+                        <a:t>407,521</a:t>
                       </a:r>
                     </a:p>
                   </a:txBody>
@@ -16969,7 +17213,7 @@
                   </a:tcPr>
                 </a:tc>
               </a:tr>
-              <a:tr h="440055">
+              <a:tr h="396240">
                 <a:tc>
                   <a:txBody>
                     <a:bodyPr/>
@@ -16984,7 +17228,7 @@
                           <a:latin typeface="Garamond"/>
                           <a:cs typeface="Garamond"/>
                         </a:rPr>
-                        <a:t>V.F. Corp (VFC)</a:t>
+                        <a:t>Alo Yoga (private)</a:t>
                       </a:r>
                     </a:p>
                   </a:txBody>
@@ -17008,7 +17252,7 @@
                           <a:latin typeface="Garamond"/>
                           <a:cs typeface="Garamond"/>
                         </a:rPr>
-                        <a:t>10.7x</a:t>
+                        <a:t>n.a.</a:t>
                       </a:r>
                     </a:p>
                   </a:txBody>
@@ -17032,7 +17276,7 @@
                           <a:latin typeface="Garamond"/>
                           <a:cs typeface="Garamond"/>
                         </a:rPr>
-                        <a:t>11.7x</a:t>
+                        <a:t>n.m.</a:t>
                       </a:r>
                     </a:p>
                   </a:txBody>
@@ -17056,7 +17300,7 @@
                           <a:latin typeface="Garamond"/>
                           <a:cs typeface="Garamond"/>
                         </a:rPr>
-                        <a:t>flat/decl.</a:t>
+                        <a:t>—</a:t>
                       </a:r>
                     </a:p>
                   </a:txBody>
@@ -17080,135 +17324,13 @@
                           <a:latin typeface="Garamond"/>
                           <a:cs typeface="Garamond"/>
                         </a:rPr>
-                        <a:t>~8%</a:t>
+                        <a:t>—</a:t>
                       </a:r>
                     </a:p>
                   </a:txBody>
                   <a:tcPr anchor="ctr" marT="12700" marB="12700">
                     <a:solidFill>
                       <a:srgbClr val="F0F1F3"/>
-                    </a:solidFill>
-                  </a:tcPr>
-                </a:tc>
-              </a:tr>
-              <a:tr h="440055">
-                <a:tc>
-                  <a:txBody>
-                    <a:bodyPr/>
-                    <a:lstStyle/>
-                    <a:p>
-                      <a:pPr algn="l"/>
-                      <a:r>
-                        <a:rPr sz="1050" b="0" i="0">
-                          <a:solidFill>
-                            <a:srgbClr val="262626"/>
-                          </a:solidFill>
-                          <a:latin typeface="Garamond"/>
-                          <a:cs typeface="Garamond"/>
-                        </a:rPr>
-                        <a:t>Alo Yoga (private)</a:t>
-                      </a:r>
-                    </a:p>
-                  </a:txBody>
-                  <a:tcPr anchor="ctr" marT="12700" marB="12700">
-                    <a:solidFill>
-                      <a:srgbClr val="FFFFFF"/>
-                    </a:solidFill>
-                  </a:tcPr>
-                </a:tc>
-                <a:tc>
-                  <a:txBody>
-                    <a:bodyPr/>
-                    <a:lstStyle/>
-                    <a:p>
-                      <a:pPr algn="r"/>
-                      <a:r>
-                        <a:rPr sz="1050" b="0" i="0">
-                          <a:solidFill>
-                            <a:srgbClr val="262626"/>
-                          </a:solidFill>
-                          <a:latin typeface="Garamond"/>
-                          <a:cs typeface="Garamond"/>
-                        </a:rPr>
-                        <a:t>n.a.</a:t>
-                      </a:r>
-                    </a:p>
-                  </a:txBody>
-                  <a:tcPr anchor="ctr" marT="12700" marB="12700">
-                    <a:solidFill>
-                      <a:srgbClr val="FFFFFF"/>
-                    </a:solidFill>
-                  </a:tcPr>
-                </a:tc>
-                <a:tc>
-                  <a:txBody>
-                    <a:bodyPr/>
-                    <a:lstStyle/>
-                    <a:p>
-                      <a:pPr algn="r"/>
-                      <a:r>
-                        <a:rPr sz="1050" b="0" i="0">
-                          <a:solidFill>
-                            <a:srgbClr val="262626"/>
-                          </a:solidFill>
-                          <a:latin typeface="Garamond"/>
-                          <a:cs typeface="Garamond"/>
-                        </a:rPr>
-                        <a:t>n.m.</a:t>
-                      </a:r>
-                    </a:p>
-                  </a:txBody>
-                  <a:tcPr anchor="ctr" marT="12700" marB="12700">
-                    <a:solidFill>
-                      <a:srgbClr val="FFFFFF"/>
-                    </a:solidFill>
-                  </a:tcPr>
-                </a:tc>
-                <a:tc>
-                  <a:txBody>
-                    <a:bodyPr/>
-                    <a:lstStyle/>
-                    <a:p>
-                      <a:pPr algn="r"/>
-                      <a:r>
-                        <a:rPr sz="1050" b="0" i="0">
-                          <a:solidFill>
-                            <a:srgbClr val="262626"/>
-                          </a:solidFill>
-                          <a:latin typeface="Garamond"/>
-                          <a:cs typeface="Garamond"/>
-                        </a:rPr>
-                        <a:t>fast</a:t>
-                      </a:r>
-                    </a:p>
-                  </a:txBody>
-                  <a:tcPr anchor="ctr" marT="12700" marB="12700">
-                    <a:solidFill>
-                      <a:srgbClr val="FFFFFF"/>
-                    </a:solidFill>
-                  </a:tcPr>
-                </a:tc>
-                <a:tc>
-                  <a:txBody>
-                    <a:bodyPr/>
-                    <a:lstStyle/>
-                    <a:p>
-                      <a:pPr algn="r"/>
-                      <a:r>
-                        <a:rPr sz="1050" b="0" i="0">
-                          <a:solidFill>
-                            <a:srgbClr val="262626"/>
-                          </a:solidFill>
-                          <a:latin typeface="Garamond"/>
-                          <a:cs typeface="Garamond"/>
-                        </a:rPr>
-                        <a:t>n.a.</a:t>
-                      </a:r>
-                    </a:p>
-                  </a:txBody>
-                  <a:tcPr anchor="ctr" marT="12700" marB="12700">
-                    <a:solidFill>
-                      <a:srgbClr val="FFFFFF"/>
                     </a:solidFill>
                   </a:tcPr>
                 </a:tc>
@@ -17278,7 +17400,7 @@
                 <a:latin typeface="Garamond"/>
                 <a:cs typeface="Garamond"/>
               </a:rPr>
-              <a:t>Public 5-name mean is 10.8x. That overstates a 2.25% g / 15.5% OM FY2030 exit</a:t>
+              <a:t>PitchBook core mean (ex-UAA, ex-WSM/MOV/LZB) is the current athletic/apparel tape. UAA has negative EBITDA so it is out of the average</a:t>
             </a:r>
           </a:p>
           <a:p>
@@ -17300,7 +17422,7 @@
                 <a:latin typeface="Garamond"/>
                 <a:cs typeface="Garamond"/>
               </a:rPr>
-              <a:t>Selected TV is the Gordon identity (~6.0x) = TV / FY30 EBITDA = (UFCF/EBITDA)×(1+g)/(WACC−g). Not Deckers 8.0x and not the 10.8x public mean</a:t>
+              <a:t>Selected TV is the Gordon identity (~6.0x). A 2.25% g year is not today’s NKE 12.7x or WSM 15.4x</a:t>
             </a:r>
           </a:p>
           <a:p>
@@ -17322,7 +17444,7 @@
                 <a:latin typeface="Garamond"/>
                 <a:cs typeface="Garamond"/>
               </a:rPr>
-              <a:t>Alo EV/EBITDA is n.a. Firecrawl found no EBITDA. Implied 5.0x is EV/Sales: unclosed $10bn Moelis ask / Forbes ~$2bn parent sales — not the TV</a:t>
+              <a:t>Alo EV/EBITDA is still n.a. Implied 5.0x is EV/Sales on an unclosed $10bn ask — not in this PitchBook set and not the TV</a:t>
             </a:r>
           </a:p>
         </p:txBody>

--- a/LULU/LULU_Investment_Pitch_Deck.pptx
+++ b/LULU/LULU_Investment_Pitch_Deck.pptx
@@ -27,6 +27,7 @@
     <p:sldId id="275" r:id="rId26"/>
     <p:sldId id="276" r:id="rId27"/>
     <p:sldId id="277" r:id="rId28"/>
+    <p:sldId id="278" r:id="rId29"/>
   </p:sldIdLst>
   <p:sldSz cx="12191695" cy="6858000" type="screen4x3"/>
   <p:notesSz cx="6858000" cy="9144000"/>
@@ -3610,7 +3611,7 @@
                 <a:latin typeface="Garamond"/>
                 <a:cs typeface="Garamond"/>
               </a:rPr>
-              <a:t>Investment Thesis II</a:t>
+              <a:t>Investment Thesis I</a:t>
             </a:r>
           </a:p>
         </p:txBody>
@@ -3654,7 +3655,7 @@
                 <a:latin typeface="Garamond"/>
                 <a:cs typeface="Garamond"/>
               </a:rPr>
-              <a:t>China and Rest-of-World offset a maturing Americas and restore growth</a:t>
+              <a:t>The valuation already discounts a permanently shrinking business</a:t>
             </a:r>
           </a:p>
         </p:txBody>
@@ -3830,6 +3831,618 @@
                 <a:latin typeface="Garamond"/>
                 <a:cs typeface="Garamond"/>
               </a:rPr>
+              <a:t>The market is paying trough multiples for a brand that still earned 19.9% operating margin in FY2025</a:t>
+            </a:r>
+          </a:p>
+          <a:p>
+            <a:pPr algn="l" indent="-152400" marL="177800">
+              <a:spcBef>
+                <a:spcPts val="0"/>
+              </a:spcBef>
+              <a:spcAft>
+                <a:spcPts val="700"/>
+              </a:spcAft>
+              <a:buFont typeface="Garamond"/>
+              <a:buChar char="•"/>
+            </a:pPr>
+            <a:r>
+              <a:rPr sz="1330" b="0" i="0">
+                <a:solidFill>
+                  <a:srgbClr val="262626"/>
+                </a:solidFill>
+                <a:latin typeface="Garamond"/>
+                <a:cs typeface="Garamond"/>
+              </a:rPr>
+              <a:t>At ~$100 the stock trades at ~3.5x EV/EBITDA and ~10.4x FY2026E EPS — versus a 5-year history of ~20–30x earnings</a:t>
+            </a:r>
+          </a:p>
+          <a:p>
+            <a:pPr algn="l" indent="-152400" marL="177800">
+              <a:spcBef>
+                <a:spcPts val="0"/>
+              </a:spcBef>
+              <a:spcAft>
+                <a:spcPts val="700"/>
+              </a:spcAft>
+              <a:buFont typeface="Garamond"/>
+              <a:buChar char="•"/>
+            </a:pPr>
+            <a:r>
+              <a:rPr sz="1330" b="0" i="0">
+                <a:solidFill>
+                  <a:srgbClr val="262626"/>
+                </a:solidFill>
+                <a:latin typeface="Garamond"/>
+                <a:cs typeface="Garamond"/>
+              </a:rPr>
+              <a:t>The balance sheet holds $1.8B of cash and no funded debt, so nearly the entire enterprise value is covered by the operating business at a very low multiple</a:t>
+            </a:r>
+          </a:p>
+          <a:p>
+            <a:pPr algn="l" indent="-152400" marL="177800">
+              <a:spcBef>
+                <a:spcPts val="0"/>
+              </a:spcBef>
+              <a:spcAft>
+                <a:spcPts val="700"/>
+              </a:spcAft>
+              <a:buFont typeface="Garamond"/>
+              <a:buChar char="•"/>
+            </a:pPr>
+            <a:r>
+              <a:rPr sz="1330" b="0" i="0">
+                <a:solidFill>
+                  <a:srgbClr val="262626"/>
+                </a:solidFill>
+                <a:latin typeface="Garamond"/>
+                <a:cs typeface="Garamond"/>
+              </a:rPr>
+              <a:t>Our base-case DCF (WACC 10.5% from FRED 4.77% rf, terminal growth 2.25%, terminal EBIT margin 15.5%) is in the model — bear case still brackets the current price</a:t>
+            </a:r>
+          </a:p>
+          <a:p>
+            <a:pPr algn="l" indent="-152400" marL="177800">
+              <a:spcBef>
+                <a:spcPts val="0"/>
+              </a:spcBef>
+              <a:spcAft>
+                <a:spcPts val="700"/>
+              </a:spcAft>
+              <a:buFont typeface="Garamond"/>
+              <a:buChar char="•"/>
+            </a:pPr>
+            <a:r>
+              <a:rPr sz="1330" b="0" i="0">
+                <a:solidFill>
+                  <a:srgbClr val="262626"/>
+                </a:solidFill>
+                <a:latin typeface="Garamond"/>
+                <a:cs typeface="Garamond"/>
+              </a:rPr>
+              <a:t>To justify $100 you must assume revenue and margins fall in perpetuity; that is inconsistent with international growth and the FY2026 tariff-refund tailwind</a:t>
+            </a:r>
+          </a:p>
+        </p:txBody>
+      </p:sp>
+      <p:sp>
+        <p:nvSpPr>
+          <p:cNvPr id="9" name="Rectangle 8"/>
+          <p:cNvSpPr/>
+          <p:nvPr/>
+        </p:nvSpPr>
+        <p:spPr>
+          <a:xfrm>
+            <a:off x="7452360" y="1051560"/>
+            <a:ext cx="4297680" cy="3337560"/>
+          </a:xfrm>
+          <a:prstGeom prst="rect">
+            <a:avLst/>
+          </a:prstGeom>
+          <a:solidFill>
+            <a:srgbClr val="F0F1F3"/>
+          </a:solidFill>
+          <a:ln>
+            <a:noFill/>
+          </a:ln>
+          <a:effectLst/>
+        </p:spPr>
+        <p:style>
+          <a:lnRef idx="1">
+            <a:schemeClr val="accent1"/>
+          </a:lnRef>
+          <a:fillRef idx="3">
+            <a:schemeClr val="accent1"/>
+          </a:fillRef>
+          <a:effectRef idx="2">
+            <a:schemeClr val="accent1"/>
+          </a:effectRef>
+          <a:fontRef idx="minor">
+            <a:schemeClr val="lt1"/>
+          </a:fontRef>
+        </p:style>
+        <p:txBody>
+          <a:bodyPr rtlCol="0" anchor="ctr" wrap="square"/>
+          <a:lstStyle/>
+          <a:p>
+            <a:pPr algn="l">
+              <a:spcBef>
+                <a:spcPts val="0"/>
+              </a:spcBef>
+              <a:spcAft>
+                <a:spcPts val="800"/>
+              </a:spcAft>
+              <a:buNone/>
+            </a:pPr>
+            <a:r>
+              <a:rPr sz="1250" b="1" i="0">
+                <a:solidFill>
+                  <a:srgbClr val="990000"/>
+                </a:solidFill>
+                <a:latin typeface="Garamond"/>
+                <a:cs typeface="Garamond"/>
+              </a:rPr>
+              <a:t>VALUATION SNAPSHOT</a:t>
+            </a:r>
+          </a:p>
+          <a:p>
+            <a:pPr algn="l">
+              <a:spcBef>
+                <a:spcPts val="0"/>
+              </a:spcBef>
+              <a:spcAft>
+                <a:spcPts val="600"/>
+              </a:spcAft>
+              <a:buNone/>
+            </a:pPr>
+            <a:r>
+              <a:rPr sz="1350" b="1" i="0">
+                <a:solidFill>
+                  <a:srgbClr val="1F2A44"/>
+                </a:solidFill>
+                <a:latin typeface="Garamond"/>
+                <a:cs typeface="Garamond"/>
+              </a:rPr>
+              <a:t>EV / EBITDA:  3.5x</a:t>
+            </a:r>
+          </a:p>
+          <a:p>
+            <a:pPr algn="l">
+              <a:spcBef>
+                <a:spcPts val="0"/>
+              </a:spcBef>
+              <a:spcAft>
+                <a:spcPts val="600"/>
+              </a:spcAft>
+              <a:buNone/>
+            </a:pPr>
+            <a:r>
+              <a:rPr sz="1350" b="1" i="0">
+                <a:solidFill>
+                  <a:srgbClr val="1F2A44"/>
+                </a:solidFill>
+                <a:latin typeface="Garamond"/>
+                <a:cs typeface="Garamond"/>
+              </a:rPr>
+              <a:t>FY2026E P/E:  10.4x</a:t>
+            </a:r>
+          </a:p>
+          <a:p>
+            <a:pPr algn="l">
+              <a:spcBef>
+                <a:spcPts val="0"/>
+              </a:spcBef>
+              <a:spcAft>
+                <a:spcPts val="600"/>
+              </a:spcAft>
+              <a:buNone/>
+            </a:pPr>
+            <a:r>
+              <a:rPr sz="1350" b="1" i="0">
+                <a:solidFill>
+                  <a:srgbClr val="1F2A44"/>
+                </a:solidFill>
+                <a:latin typeface="Garamond"/>
+                <a:cs typeface="Garamond"/>
+              </a:rPr>
+              <a:t>FCF yield:  ~8–9%</a:t>
+            </a:r>
+          </a:p>
+          <a:p>
+            <a:pPr algn="l">
+              <a:spcBef>
+                <a:spcPts val="0"/>
+              </a:spcBef>
+              <a:spcAft>
+                <a:spcPts val="600"/>
+              </a:spcAft>
+              <a:buNone/>
+            </a:pPr>
+            <a:r>
+              <a:rPr sz="1350" b="1" i="0">
+                <a:solidFill>
+                  <a:srgbClr val="1F2A44"/>
+                </a:solidFill>
+                <a:latin typeface="Garamond"/>
+                <a:cs typeface="Garamond"/>
+              </a:rPr>
+              <a:t>Net cash:  $1.8B</a:t>
+            </a:r>
+          </a:p>
+          <a:p>
+            <a:pPr algn="l">
+              <a:spcBef>
+                <a:spcPts val="0"/>
+              </a:spcBef>
+              <a:spcAft>
+                <a:spcPts val="600"/>
+              </a:spcAft>
+              <a:buNone/>
+            </a:pPr>
+            <a:r>
+              <a:rPr sz="1350" b="1" i="0">
+                <a:solidFill>
+                  <a:srgbClr val="1F2A44"/>
+                </a:solidFill>
+                <a:latin typeface="Garamond"/>
+                <a:cs typeface="Garamond"/>
+              </a:rPr>
+              <a:t>DCF base:  $124</a:t>
+            </a:r>
+          </a:p>
+        </p:txBody>
+      </p:sp>
+    </p:spTree>
+  </p:cSld>
+  <p:clrMapOvr>
+    <a:masterClrMapping/>
+  </p:clrMapOvr>
+</p:sld>
+</file>
+
+<file path=ppt/slides/slide11.xml><?xml version="1.0" encoding="utf-8"?>
+<p:sld xmlns:a="http://schemas.openxmlformats.org/drawingml/2006/main" xmlns:p="http://schemas.openxmlformats.org/presentationml/2006/main" xmlns:r="http://schemas.openxmlformats.org/officeDocument/2006/relationships">
+  <p:cSld>
+    <p:spTree>
+      <p:nvGrpSpPr>
+        <p:cNvPr id="1" name=""/>
+        <p:cNvGrpSpPr/>
+        <p:nvPr/>
+      </p:nvGrpSpPr>
+      <p:grpSpPr/>
+      <p:sp>
+        <p:nvSpPr>
+          <p:cNvPr id="2" name="TextBox 1"/>
+          <p:cNvSpPr txBox="1"/>
+          <p:nvPr/>
+        </p:nvSpPr>
+        <p:spPr>
+          <a:xfrm>
+            <a:off x="411480" y="164592"/>
+            <a:ext cx="5943600" cy="502920"/>
+          </a:xfrm>
+          <a:prstGeom prst="rect">
+            <a:avLst/>
+          </a:prstGeom>
+          <a:noFill/>
+        </p:spPr>
+        <p:txBody>
+          <a:bodyPr wrap="square" anchor="t" lIns="25400" rIns="25400" tIns="12700" bIns="12700">
+            <a:spAutoFit/>
+          </a:bodyPr>
+          <a:lstStyle/>
+          <a:p>
+            <a:pPr algn="l">
+              <a:spcBef>
+                <a:spcPts val="0"/>
+              </a:spcBef>
+              <a:spcAft>
+                <a:spcPts val="0"/>
+              </a:spcAft>
+              <a:buNone/>
+            </a:pPr>
+            <a:r>
+              <a:rPr sz="1100" b="1" i="0">
+                <a:solidFill>
+                  <a:srgbClr val="990000"/>
+                </a:solidFill>
+                <a:latin typeface="Garamond"/>
+                <a:cs typeface="Garamond"/>
+              </a:rPr>
+              <a:t>Investment Research Division</a:t>
+            </a:r>
+          </a:p>
+          <a:p>
+            <a:pPr algn="l">
+              <a:spcBef>
+                <a:spcPts val="0"/>
+              </a:spcBef>
+              <a:spcAft>
+                <a:spcPts val="0"/>
+              </a:spcAft>
+              <a:buNone/>
+            </a:pPr>
+            <a:r>
+              <a:rPr sz="1250" b="1" i="0">
+                <a:solidFill>
+                  <a:srgbClr val="1F2A44"/>
+                </a:solidFill>
+                <a:latin typeface="Garamond"/>
+                <a:cs typeface="Garamond"/>
+              </a:rPr>
+              <a:t>lululemon athletica (NASDAQ: LULU)</a:t>
+            </a:r>
+          </a:p>
+        </p:txBody>
+      </p:sp>
+      <p:sp>
+        <p:nvSpPr>
+          <p:cNvPr id="3" name="Rectangle 2"/>
+          <p:cNvSpPr/>
+          <p:nvPr/>
+        </p:nvSpPr>
+        <p:spPr>
+          <a:xfrm>
+            <a:off x="5486400" y="201168"/>
+            <a:ext cx="6309360" cy="274320"/>
+          </a:xfrm>
+          <a:prstGeom prst="rect">
+            <a:avLst/>
+          </a:prstGeom>
+          <a:solidFill>
+            <a:srgbClr val="1F2A44"/>
+          </a:solidFill>
+          <a:ln>
+            <a:noFill/>
+          </a:ln>
+          <a:effectLst/>
+        </p:spPr>
+        <p:style>
+          <a:lnRef idx="1">
+            <a:schemeClr val="accent1"/>
+          </a:lnRef>
+          <a:fillRef idx="3">
+            <a:schemeClr val="accent1"/>
+          </a:fillRef>
+          <a:effectRef idx="2">
+            <a:schemeClr val="accent1"/>
+          </a:effectRef>
+          <a:fontRef idx="minor">
+            <a:schemeClr val="lt1"/>
+          </a:fontRef>
+        </p:style>
+        <p:txBody>
+          <a:bodyPr rtlCol="0" anchor="ctr" wrap="square" tIns="0" bIns="0" rIns="76200"/>
+          <a:lstStyle/>
+          <a:p>
+            <a:pPr algn="r"/>
+            <a:r>
+              <a:rPr sz="1500" b="1" i="0">
+                <a:solidFill>
+                  <a:srgbClr val="FFFFFF"/>
+                </a:solidFill>
+                <a:latin typeface="Garamond"/>
+                <a:cs typeface="Garamond"/>
+              </a:rPr>
+              <a:t>Investment Thesis II</a:t>
+            </a:r>
+          </a:p>
+        </p:txBody>
+      </p:sp>
+      <p:sp>
+        <p:nvSpPr>
+          <p:cNvPr id="4" name="TextBox 3"/>
+          <p:cNvSpPr txBox="1"/>
+          <p:nvPr/>
+        </p:nvSpPr>
+        <p:spPr>
+          <a:xfrm>
+            <a:off x="411480" y="566928"/>
+            <a:ext cx="11384280" cy="310896"/>
+          </a:xfrm>
+          <a:prstGeom prst="rect">
+            <a:avLst/>
+          </a:prstGeom>
+          <a:noFill/>
+        </p:spPr>
+        <p:txBody>
+          <a:bodyPr wrap="square" anchor="t" lIns="25400" rIns="25400" tIns="12700" bIns="12700">
+            <a:spAutoFit/>
+          </a:bodyPr>
+          <a:lstStyle/>
+          <a:p>
+            <a:pPr algn="l">
+              <a:spcBef>
+                <a:spcPts val="0"/>
+              </a:spcBef>
+              <a:spcAft>
+                <a:spcPts val="0"/>
+              </a:spcAft>
+              <a:buNone/>
+            </a:pPr>
+            <a:r>
+              <a:rPr sz="1250" b="0" i="1">
+                <a:solidFill>
+                  <a:srgbClr val="8C8C8C"/>
+                </a:solidFill>
+                <a:latin typeface="Garamond"/>
+                <a:cs typeface="Garamond"/>
+              </a:rPr>
+              <a:t>China and Rest-of-World offset a maturing Americas and restore growth</a:t>
+            </a:r>
+          </a:p>
+        </p:txBody>
+      </p:sp>
+      <p:sp>
+        <p:nvSpPr>
+          <p:cNvPr id="5" name="Rectangle 4"/>
+          <p:cNvSpPr/>
+          <p:nvPr/>
+        </p:nvSpPr>
+        <p:spPr>
+          <a:xfrm>
+            <a:off x="411480" y="896112"/>
+            <a:ext cx="11384280" cy="20320"/>
+          </a:xfrm>
+          <a:prstGeom prst="rect">
+            <a:avLst/>
+          </a:prstGeom>
+          <a:solidFill>
+            <a:srgbClr val="FFC72C"/>
+          </a:solidFill>
+          <a:ln>
+            <a:noFill/>
+          </a:ln>
+          <a:effectLst/>
+        </p:spPr>
+        <p:style>
+          <a:lnRef idx="1">
+            <a:schemeClr val="accent1"/>
+          </a:lnRef>
+          <a:fillRef idx="3">
+            <a:schemeClr val="accent1"/>
+          </a:fillRef>
+          <a:effectRef idx="2">
+            <a:schemeClr val="accent1"/>
+          </a:effectRef>
+          <a:fontRef idx="minor">
+            <a:schemeClr val="lt1"/>
+          </a:fontRef>
+        </p:style>
+        <p:txBody>
+          <a:bodyPr rtlCol="0" anchor="ctr"/>
+          <a:lstStyle/>
+          <a:p>
+            <a:pPr algn="ctr"/>
+          </a:p>
+        </p:txBody>
+      </p:sp>
+      <p:sp>
+        <p:nvSpPr>
+          <p:cNvPr id="6" name="TextBox 5"/>
+          <p:cNvSpPr txBox="1"/>
+          <p:nvPr/>
+        </p:nvSpPr>
+        <p:spPr>
+          <a:xfrm>
+            <a:off x="411480" y="6510528"/>
+            <a:ext cx="11384280" cy="274320"/>
+          </a:xfrm>
+          <a:prstGeom prst="rect">
+            <a:avLst/>
+          </a:prstGeom>
+          <a:noFill/>
+        </p:spPr>
+        <p:txBody>
+          <a:bodyPr wrap="square" anchor="t" lIns="25400" rIns="25400" tIns="12700" bIns="12700">
+            <a:spAutoFit/>
+          </a:bodyPr>
+          <a:lstStyle/>
+          <a:p>
+            <a:pPr algn="l">
+              <a:spcBef>
+                <a:spcPts val="0"/>
+              </a:spcBef>
+              <a:spcAft>
+                <a:spcPts val="0"/>
+              </a:spcAft>
+              <a:buNone/>
+            </a:pPr>
+            <a:r>
+              <a:rPr sz="850" b="0" i="0">
+                <a:solidFill>
+                  <a:srgbClr val="8C8C8C"/>
+                </a:solidFill>
+                <a:latin typeface="Garamond"/>
+                <a:cs typeface="Garamond"/>
+              </a:rPr>
+              <a:t>Source: company SEC filings (Form 10-K, CIK 0001397187)</a:t>
+            </a:r>
+          </a:p>
+        </p:txBody>
+      </p:sp>
+      <p:sp>
+        <p:nvSpPr>
+          <p:cNvPr id="7" name="TextBox 6"/>
+          <p:cNvSpPr txBox="1"/>
+          <p:nvPr/>
+        </p:nvSpPr>
+        <p:spPr>
+          <a:xfrm>
+            <a:off x="11247120" y="6510528"/>
+            <a:ext cx="822960" cy="274320"/>
+          </a:xfrm>
+          <a:prstGeom prst="rect">
+            <a:avLst/>
+          </a:prstGeom>
+          <a:noFill/>
+        </p:spPr>
+        <p:txBody>
+          <a:bodyPr wrap="square" anchor="t" lIns="25400" rIns="25400" tIns="12700" bIns="12700">
+            <a:spAutoFit/>
+          </a:bodyPr>
+          <a:lstStyle/>
+          <a:p>
+            <a:pPr algn="r">
+              <a:spcBef>
+                <a:spcPts val="0"/>
+              </a:spcBef>
+              <a:spcAft>
+                <a:spcPts val="0"/>
+              </a:spcAft>
+              <a:buNone/>
+            </a:pPr>
+            <a:r>
+              <a:rPr sz="900" b="0" i="0">
+                <a:solidFill>
+                  <a:srgbClr val="8C8C8C"/>
+                </a:solidFill>
+                <a:latin typeface="Garamond"/>
+                <a:cs typeface="Garamond"/>
+              </a:rPr>
+              <a:t>10</a:t>
+            </a:r>
+          </a:p>
+        </p:txBody>
+      </p:sp>
+      <p:sp>
+        <p:nvSpPr>
+          <p:cNvPr id="8" name="TextBox 7"/>
+          <p:cNvSpPr txBox="1"/>
+          <p:nvPr/>
+        </p:nvSpPr>
+        <p:spPr>
+          <a:xfrm>
+            <a:off x="457200" y="1051560"/>
+            <a:ext cx="6766560" cy="5394960"/>
+          </a:xfrm>
+          <a:prstGeom prst="rect">
+            <a:avLst/>
+          </a:prstGeom>
+          <a:noFill/>
+        </p:spPr>
+        <p:txBody>
+          <a:bodyPr wrap="square" anchor="t" lIns="25400" rIns="25400" tIns="12700" bIns="12700">
+            <a:spAutoFit/>
+          </a:bodyPr>
+          <a:lstStyle/>
+          <a:p>
+            <a:pPr algn="l">
+              <a:spcBef>
+                <a:spcPts val="0"/>
+              </a:spcBef>
+              <a:spcAft>
+                <a:spcPts val="700"/>
+              </a:spcAft>
+              <a:buNone/>
+            </a:pPr>
+            <a:r>
+              <a:rPr sz="1500" b="1" i="0">
+                <a:solidFill>
+                  <a:srgbClr val="990000"/>
+                </a:solidFill>
+                <a:latin typeface="Garamond"/>
+                <a:cs typeface="Garamond"/>
+              </a:rPr>
               <a:t>Geographic mix shift is the bridge back to mid-single-digit revenue growth</a:t>
             </a:r>
           </a:p>
@@ -4077,7 +4690,7 @@
 </p:sld>
 </file>
 
-<file path=ppt/slides/slide11.xml><?xml version="1.0" encoding="utf-8"?>
+<file path=ppt/slides/slide12.xml><?xml version="1.0" encoding="utf-8"?>
 <p:sld xmlns:a="http://schemas.openxmlformats.org/drawingml/2006/main" xmlns:p="http://schemas.openxmlformats.org/presentationml/2006/main" xmlns:r="http://schemas.openxmlformats.org/officeDocument/2006/relationships">
   <p:cSld>
     <p:spTree>
@@ -4377,7 +4990,7 @@
                 <a:latin typeface="Garamond"/>
                 <a:cs typeface="Garamond"/>
               </a:rPr>
-              <a:t>10</a:t>
+              <a:t>11</a:t>
             </a:r>
           </a:p>
         </p:txBody>
@@ -4668,7 +5281,7 @@
 </p:sld>
 </file>
 
-<file path=ppt/slides/slide12.xml><?xml version="1.0" encoding="utf-8"?>
+<file path=ppt/slides/slide13.xml><?xml version="1.0" encoding="utf-8"?>
 <p:sld xmlns:a="http://schemas.openxmlformats.org/drawingml/2006/main" xmlns:p="http://schemas.openxmlformats.org/presentationml/2006/main" xmlns:r="http://schemas.openxmlformats.org/officeDocument/2006/relationships">
   <p:cSld>
     <p:spTree>
@@ -4968,7 +5581,7 @@
                 <a:latin typeface="Garamond"/>
                 <a:cs typeface="Garamond"/>
               </a:rPr>
-              <a:t>11</a:t>
+              <a:t>12</a:t>
             </a:r>
           </a:p>
         </p:txBody>
@@ -5655,7 +6268,7 @@
 </p:sld>
 </file>
 
-<file path=ppt/slides/slide13.xml><?xml version="1.0" encoding="utf-8"?>
+<file path=ppt/slides/slide14.xml><?xml version="1.0" encoding="utf-8"?>
 <p:sld xmlns:a="http://schemas.openxmlformats.org/drawingml/2006/main" xmlns:p="http://schemas.openxmlformats.org/presentationml/2006/main" xmlns:r="http://schemas.openxmlformats.org/officeDocument/2006/relationships">
   <p:cSld>
     <p:spTree>
@@ -5955,7 +6568,7 @@
                 <a:latin typeface="Garamond"/>
                 <a:cs typeface="Garamond"/>
               </a:rPr>
-              <a:t>12</a:t>
+              <a:t>13</a:t>
             </a:r>
           </a:p>
         </p:txBody>
@@ -6640,7 +7253,7 @@
 </p:sld>
 </file>
 
-<file path=ppt/slides/slide14.xml><?xml version="1.0" encoding="utf-8"?>
+<file path=ppt/slides/slide15.xml><?xml version="1.0" encoding="utf-8"?>
 <p:sld xmlns:a="http://schemas.openxmlformats.org/drawingml/2006/main" xmlns:p="http://schemas.openxmlformats.org/presentationml/2006/main" xmlns:r="http://schemas.openxmlformats.org/officeDocument/2006/relationships">
   <p:cSld>
     <p:spTree>
@@ -6940,7 +7553,7 @@
                 <a:latin typeface="Garamond"/>
                 <a:cs typeface="Garamond"/>
               </a:rPr>
-              <a:t>13</a:t>
+              <a:t>14</a:t>
             </a:r>
           </a:p>
         </p:txBody>
@@ -8387,7 +9000,7 @@
 </p:sld>
 </file>
 
-<file path=ppt/slides/slide15.xml><?xml version="1.0" encoding="utf-8"?>
+<file path=ppt/slides/slide16.xml><?xml version="1.0" encoding="utf-8"?>
 <p:sld xmlns:a="http://schemas.openxmlformats.org/drawingml/2006/main" xmlns:p="http://schemas.openxmlformats.org/presentationml/2006/main" xmlns:r="http://schemas.openxmlformats.org/officeDocument/2006/relationships">
   <p:cSld>
     <p:spTree>
@@ -8687,7 +9300,7 @@
                 <a:latin typeface="Garamond"/>
                 <a:cs typeface="Garamond"/>
               </a:rPr>
-              <a:t>14</a:t>
+              <a:t>15</a:t>
             </a:r>
           </a:p>
         </p:txBody>
@@ -10134,7 +10747,7 @@
 </p:sld>
 </file>
 
-<file path=ppt/slides/slide16.xml><?xml version="1.0" encoding="utf-8"?>
+<file path=ppt/slides/slide17.xml><?xml version="1.0" encoding="utf-8"?>
 <p:sld xmlns:a="http://schemas.openxmlformats.org/drawingml/2006/main" xmlns:p="http://schemas.openxmlformats.org/presentationml/2006/main" xmlns:r="http://schemas.openxmlformats.org/officeDocument/2006/relationships">
   <p:cSld>
     <p:spTree>
@@ -10434,7 +11047,7 @@
                 <a:latin typeface="Garamond"/>
                 <a:cs typeface="Garamond"/>
               </a:rPr>
-              <a:t>15</a:t>
+              <a:t>16</a:t>
             </a:r>
           </a:p>
         </p:txBody>
@@ -11687,7 +12300,7 @@
 </p:sld>
 </file>
 
-<file path=ppt/slides/slide17.xml><?xml version="1.0" encoding="utf-8"?>
+<file path=ppt/slides/slide18.xml><?xml version="1.0" encoding="utf-8"?>
 <p:sld xmlns:a="http://schemas.openxmlformats.org/drawingml/2006/main" xmlns:p="http://schemas.openxmlformats.org/presentationml/2006/main" xmlns:r="http://schemas.openxmlformats.org/officeDocument/2006/relationships">
   <p:cSld>
     <p:spTree>
@@ -11987,7 +12600,7 @@
                 <a:latin typeface="Garamond"/>
                 <a:cs typeface="Garamond"/>
               </a:rPr>
-              <a:t>16</a:t>
+              <a:t>17</a:t>
             </a:r>
           </a:p>
         </p:txBody>
@@ -12395,7 +13008,7 @@
 </p:sld>
 </file>
 
-<file path=ppt/slides/slide18.xml><?xml version="1.0" encoding="utf-8"?>
+<file path=ppt/slides/slide19.xml><?xml version="1.0" encoding="utf-8"?>
 <p:sld xmlns:a="http://schemas.openxmlformats.org/drawingml/2006/main" xmlns:p="http://schemas.openxmlformats.org/presentationml/2006/main" xmlns:r="http://schemas.openxmlformats.org/officeDocument/2006/relationships">
   <p:cSld>
     <p:spTree>
@@ -12695,7 +13308,7 @@
                 <a:latin typeface="Garamond"/>
                 <a:cs typeface="Garamond"/>
               </a:rPr>
-              <a:t>17</a:t>
+              <a:t>18</a:t>
             </a:r>
           </a:p>
         </p:txBody>
@@ -13517,7 +14130,7 @@
 </p:sld>
 </file>
 
-<file path=ppt/slides/slide19.xml><?xml version="1.0" encoding="utf-8"?>
+<file path=ppt/slides/slide2.xml><?xml version="1.0" encoding="utf-8"?>
 <p:sld xmlns:a="http://schemas.openxmlformats.org/drawingml/2006/main" xmlns:p="http://schemas.openxmlformats.org/presentationml/2006/main" xmlns:r="http://schemas.openxmlformats.org/officeDocument/2006/relationships">
   <p:cSld>
     <p:spTree>
@@ -13641,7 +14254,7 @@
                 <a:latin typeface="Garamond"/>
                 <a:cs typeface="Garamond"/>
               </a:rPr>
-              <a:t>DCF Valuation</a:t>
+              <a:t>Table of Contents</a:t>
             </a:r>
           </a:p>
         </p:txBody>
@@ -13685,7 +14298,7 @@
                 <a:latin typeface="Garamond"/>
                 <a:cs typeface="Garamond"/>
               </a:rPr>
-              <a:t>Base-case unlevered DCF yields ~$124 per share</a:t>
+              <a:t>What this pitch will cover</a:t>
             </a:r>
           </a:p>
         </p:txBody>
@@ -13773,7 +14386,7 @@
                 <a:latin typeface="Garamond"/>
                 <a:cs typeface="Garamond"/>
               </a:rPr>
-              <a:t>Source: GIS DCF model (from scratch); FY2025 cash &amp; share count per 10-K</a:t>
+              <a:t>Source: company SEC filings (Form 10-K, CIK 0001397187)</a:t>
             </a:r>
           </a:p>
         </p:txBody>
@@ -13817,7 +14430,786 @@
                 <a:latin typeface="Garamond"/>
                 <a:cs typeface="Garamond"/>
               </a:rPr>
-              <a:t>18</a:t>
+              <a:t>1</a:t>
+            </a:r>
+          </a:p>
+        </p:txBody>
+      </p:sp>
+      <p:sp>
+        <p:nvSpPr>
+          <p:cNvPr id="8" name="TextBox 7"/>
+          <p:cNvSpPr txBox="1"/>
+          <p:nvPr/>
+        </p:nvSpPr>
+        <p:spPr>
+          <a:xfrm>
+            <a:off x="548640" y="1097280"/>
+            <a:ext cx="5486400" cy="5303520"/>
+          </a:xfrm>
+          <a:prstGeom prst="rect">
+            <a:avLst/>
+          </a:prstGeom>
+          <a:noFill/>
+        </p:spPr>
+        <p:txBody>
+          <a:bodyPr wrap="square" anchor="t" lIns="25400" rIns="25400" tIns="12700" bIns="12700">
+            <a:spAutoFit/>
+          </a:bodyPr>
+          <a:lstStyle/>
+          <a:p>
+            <a:pPr algn="l">
+              <a:spcBef>
+                <a:spcPts val="0"/>
+              </a:spcBef>
+              <a:spcAft>
+                <a:spcPts val="800"/>
+              </a:spcAft>
+              <a:buNone/>
+            </a:pPr>
+            <a:r>
+              <a:rPr sz="1450" b="1" i="0">
+                <a:solidFill>
+                  <a:srgbClr val="1F2A44"/>
+                </a:solidFill>
+                <a:latin typeface="Garamond"/>
+                <a:cs typeface="Garamond"/>
+              </a:rPr>
+              <a:t>1.  Investment thesis summary</a:t>
+            </a:r>
+          </a:p>
+          <a:p>
+            <a:pPr algn="l">
+              <a:spcBef>
+                <a:spcPts val="0"/>
+              </a:spcBef>
+              <a:spcAft>
+                <a:spcPts val="800"/>
+              </a:spcAft>
+              <a:buNone/>
+            </a:pPr>
+            <a:r>
+              <a:rPr sz="1450" b="1" i="0">
+                <a:solidFill>
+                  <a:srgbClr val="1F2A44"/>
+                </a:solidFill>
+                <a:latin typeface="Garamond"/>
+                <a:cs typeface="Garamond"/>
+              </a:rPr>
+              <a:t>2.  Situation overview</a:t>
+            </a:r>
+          </a:p>
+          <a:p>
+            <a:pPr algn="l">
+              <a:spcBef>
+                <a:spcPts val="0"/>
+              </a:spcBef>
+              <a:spcAft>
+                <a:spcPts val="800"/>
+              </a:spcAft>
+              <a:buNone/>
+            </a:pPr>
+            <a:r>
+              <a:rPr sz="1450" b="1" i="0">
+                <a:solidFill>
+                  <a:srgbClr val="1F2A44"/>
+                </a:solidFill>
+                <a:latin typeface="Garamond"/>
+                <a:cs typeface="Garamond"/>
+              </a:rPr>
+              <a:t>3.  Macro × micro overlap</a:t>
+            </a:r>
+          </a:p>
+          <a:p>
+            <a:pPr algn="l">
+              <a:spcBef>
+                <a:spcPts val="0"/>
+              </a:spcBef>
+              <a:spcAft>
+                <a:spcPts val="800"/>
+              </a:spcAft>
+              <a:buNone/>
+            </a:pPr>
+            <a:r>
+              <a:rPr sz="1450" b="1" i="0">
+                <a:solidFill>
+                  <a:srgbClr val="1F2A44"/>
+                </a:solidFill>
+                <a:latin typeface="Garamond"/>
+                <a:cs typeface="Garamond"/>
+              </a:rPr>
+              <a:t>4.  Market narrative</a:t>
+            </a:r>
+          </a:p>
+          <a:p>
+            <a:pPr algn="l">
+              <a:spcBef>
+                <a:spcPts val="0"/>
+              </a:spcBef>
+              <a:spcAft>
+                <a:spcPts val="800"/>
+              </a:spcAft>
+              <a:buNone/>
+            </a:pPr>
+            <a:r>
+              <a:rPr sz="1450" b="1" i="0">
+                <a:solidFill>
+                  <a:srgbClr val="1F2A44"/>
+                </a:solidFill>
+                <a:latin typeface="Garamond"/>
+                <a:cs typeface="Garamond"/>
+              </a:rPr>
+              <a:t>5.  Company overview</a:t>
+            </a:r>
+          </a:p>
+          <a:p>
+            <a:pPr algn="l">
+              <a:spcBef>
+                <a:spcPts val="0"/>
+              </a:spcBef>
+              <a:spcAft>
+                <a:spcPts val="800"/>
+              </a:spcAft>
+              <a:buNone/>
+            </a:pPr>
+            <a:r>
+              <a:rPr sz="1450" b="1" i="0">
+                <a:solidFill>
+                  <a:srgbClr val="1F2A44"/>
+                </a:solidFill>
+                <a:latin typeface="Garamond"/>
+                <a:cs typeface="Garamond"/>
+              </a:rPr>
+              <a:t>6.  Business model &amp; unit economics</a:t>
+            </a:r>
+          </a:p>
+          <a:p>
+            <a:pPr algn="l">
+              <a:spcBef>
+                <a:spcPts val="0"/>
+              </a:spcBef>
+              <a:spcAft>
+                <a:spcPts val="800"/>
+              </a:spcAft>
+              <a:buNone/>
+            </a:pPr>
+            <a:r>
+              <a:rPr sz="1450" b="1" i="0">
+                <a:solidFill>
+                  <a:srgbClr val="1F2A44"/>
+                </a:solidFill>
+                <a:latin typeface="Garamond"/>
+                <a:cs typeface="Garamond"/>
+              </a:rPr>
+              <a:t>7.  Industry overview</a:t>
+            </a:r>
+          </a:p>
+          <a:p>
+            <a:pPr algn="l">
+              <a:spcBef>
+                <a:spcPts val="0"/>
+              </a:spcBef>
+              <a:spcAft>
+                <a:spcPts val="800"/>
+              </a:spcAft>
+              <a:buNone/>
+            </a:pPr>
+            <a:r>
+              <a:rPr sz="1450" b="1" i="0">
+                <a:solidFill>
+                  <a:srgbClr val="1F2A44"/>
+                </a:solidFill>
+                <a:latin typeface="Garamond"/>
+                <a:cs typeface="Garamond"/>
+              </a:rPr>
+              <a:t>8.  Thesis I — Priced for terminal decline</a:t>
+            </a:r>
+          </a:p>
+          <a:p>
+            <a:pPr algn="l">
+              <a:spcBef>
+                <a:spcPts val="0"/>
+              </a:spcBef>
+              <a:spcAft>
+                <a:spcPts val="800"/>
+              </a:spcAft>
+              <a:buNone/>
+            </a:pPr>
+            <a:r>
+              <a:rPr sz="1450" b="1" i="0">
+                <a:solidFill>
+                  <a:srgbClr val="1F2A44"/>
+                </a:solidFill>
+                <a:latin typeface="Garamond"/>
+                <a:cs typeface="Garamond"/>
+              </a:rPr>
+              <a:t>9.  Thesis II — International growth engine</a:t>
+            </a:r>
+          </a:p>
+          <a:p>
+            <a:pPr algn="l">
+              <a:spcBef>
+                <a:spcPts val="0"/>
+              </a:spcBef>
+              <a:spcAft>
+                <a:spcPts val="800"/>
+              </a:spcAft>
+              <a:buNone/>
+            </a:pPr>
+            <a:r>
+              <a:rPr sz="1450" b="1" i="0">
+                <a:solidFill>
+                  <a:srgbClr val="1F2A44"/>
+                </a:solidFill>
+                <a:latin typeface="Garamond"/>
+                <a:cs typeface="Garamond"/>
+              </a:rPr>
+              <a:t>10. Thesis III — Elite economics &amp; capital return</a:t>
+            </a:r>
+          </a:p>
+        </p:txBody>
+      </p:sp>
+      <p:sp>
+        <p:nvSpPr>
+          <p:cNvPr id="9" name="TextBox 8"/>
+          <p:cNvSpPr txBox="1"/>
+          <p:nvPr/>
+        </p:nvSpPr>
+        <p:spPr>
+          <a:xfrm>
+            <a:off x="6309360" y="1097280"/>
+            <a:ext cx="5486400" cy="5303520"/>
+          </a:xfrm>
+          <a:prstGeom prst="rect">
+            <a:avLst/>
+          </a:prstGeom>
+          <a:noFill/>
+        </p:spPr>
+        <p:txBody>
+          <a:bodyPr wrap="square" anchor="t" lIns="25400" rIns="25400" tIns="12700" bIns="12700">
+            <a:spAutoFit/>
+          </a:bodyPr>
+          <a:lstStyle/>
+          <a:p>
+            <a:pPr algn="l">
+              <a:spcBef>
+                <a:spcPts val="0"/>
+              </a:spcBef>
+              <a:spcAft>
+                <a:spcPts val="800"/>
+              </a:spcAft>
+              <a:buNone/>
+            </a:pPr>
+            <a:r>
+              <a:rPr sz="1450" b="1" i="0">
+                <a:solidFill>
+                  <a:srgbClr val="1F2A44"/>
+                </a:solidFill>
+                <a:latin typeface="Garamond"/>
+                <a:cs typeface="Garamond"/>
+              </a:rPr>
+              <a:t>11. Risks &amp; mitigants</a:t>
+            </a:r>
+          </a:p>
+          <a:p>
+            <a:pPr algn="l">
+              <a:spcBef>
+                <a:spcPts val="0"/>
+              </a:spcBef>
+              <a:spcAft>
+                <a:spcPts val="800"/>
+              </a:spcAft>
+              <a:buNone/>
+            </a:pPr>
+            <a:r>
+              <a:rPr sz="1450" b="1" i="0">
+                <a:solidFill>
+                  <a:srgbClr val="1F2A44"/>
+                </a:solidFill>
+                <a:latin typeface="Garamond"/>
+                <a:cs typeface="Garamond"/>
+              </a:rPr>
+              <a:t>12. Catalyst timeline</a:t>
+            </a:r>
+          </a:p>
+          <a:p>
+            <a:pPr algn="l">
+              <a:spcBef>
+                <a:spcPts val="0"/>
+              </a:spcBef>
+              <a:spcAft>
+                <a:spcPts val="800"/>
+              </a:spcAft>
+              <a:buNone/>
+            </a:pPr>
+            <a:r>
+              <a:rPr sz="1450" b="1" i="0">
+                <a:solidFill>
+                  <a:srgbClr val="1F2A44"/>
+                </a:solidFill>
+                <a:latin typeface="Garamond"/>
+                <a:cs typeface="Garamond"/>
+              </a:rPr>
+              <a:t>13. Financials — income statement</a:t>
+            </a:r>
+          </a:p>
+          <a:p>
+            <a:pPr algn="l">
+              <a:spcBef>
+                <a:spcPts val="0"/>
+              </a:spcBef>
+              <a:spcAft>
+                <a:spcPts val="800"/>
+              </a:spcAft>
+              <a:buNone/>
+            </a:pPr>
+            <a:r>
+              <a:rPr sz="1450" b="1" i="0">
+                <a:solidFill>
+                  <a:srgbClr val="1F2A44"/>
+                </a:solidFill>
+                <a:latin typeface="Garamond"/>
+                <a:cs typeface="Garamond"/>
+              </a:rPr>
+              <a:t>14. Financials — balance sheet</a:t>
+            </a:r>
+          </a:p>
+          <a:p>
+            <a:pPr algn="l">
+              <a:spcBef>
+                <a:spcPts val="0"/>
+              </a:spcBef>
+              <a:spcAft>
+                <a:spcPts val="800"/>
+              </a:spcAft>
+              <a:buNone/>
+            </a:pPr>
+            <a:r>
+              <a:rPr sz="1450" b="1" i="0">
+                <a:solidFill>
+                  <a:srgbClr val="1F2A44"/>
+                </a:solidFill>
+                <a:latin typeface="Garamond"/>
+                <a:cs typeface="Garamond"/>
+              </a:rPr>
+              <a:t>15. Financials — cash flow</a:t>
+            </a:r>
+          </a:p>
+          <a:p>
+            <a:pPr algn="l">
+              <a:spcBef>
+                <a:spcPts val="0"/>
+              </a:spcBef>
+              <a:spcAft>
+                <a:spcPts val="800"/>
+              </a:spcAft>
+              <a:buNone/>
+            </a:pPr>
+            <a:r>
+              <a:rPr sz="1450" b="1" i="0">
+                <a:solidFill>
+                  <a:srgbClr val="1F2A44"/>
+                </a:solidFill>
+                <a:latin typeface="Garamond"/>
+                <a:cs typeface="Garamond"/>
+              </a:rPr>
+              <a:t>16. Capital structure &amp; WACC</a:t>
+            </a:r>
+          </a:p>
+          <a:p>
+            <a:pPr algn="l">
+              <a:spcBef>
+                <a:spcPts val="0"/>
+              </a:spcBef>
+              <a:spcAft>
+                <a:spcPts val="800"/>
+              </a:spcAft>
+              <a:buNone/>
+            </a:pPr>
+            <a:r>
+              <a:rPr sz="1450" b="1" i="0">
+                <a:solidFill>
+                  <a:srgbClr val="1F2A44"/>
+                </a:solidFill>
+                <a:latin typeface="Garamond"/>
+                <a:cs typeface="Garamond"/>
+              </a:rPr>
+              <a:t>17. Valuation summary (football field)</a:t>
+            </a:r>
+          </a:p>
+          <a:p>
+            <a:pPr algn="l">
+              <a:spcBef>
+                <a:spcPts val="0"/>
+              </a:spcBef>
+              <a:spcAft>
+                <a:spcPts val="800"/>
+              </a:spcAft>
+              <a:buNone/>
+            </a:pPr>
+            <a:r>
+              <a:rPr sz="1450" b="1" i="0">
+                <a:solidFill>
+                  <a:srgbClr val="1F2A44"/>
+                </a:solidFill>
+                <a:latin typeface="Garamond"/>
+                <a:cs typeface="Garamond"/>
+              </a:rPr>
+              <a:t>18. DCF valuation</a:t>
+            </a:r>
+          </a:p>
+          <a:p>
+            <a:pPr algn="l">
+              <a:spcBef>
+                <a:spcPts val="0"/>
+              </a:spcBef>
+              <a:spcAft>
+                <a:spcPts val="800"/>
+              </a:spcAft>
+              <a:buNone/>
+            </a:pPr>
+            <a:r>
+              <a:rPr sz="1450" b="1" i="0">
+                <a:solidFill>
+                  <a:srgbClr val="1F2A44"/>
+                </a:solidFill>
+                <a:latin typeface="Garamond"/>
+                <a:cs typeface="Garamond"/>
+              </a:rPr>
+              <a:t>19. Comparable companies</a:t>
+            </a:r>
+          </a:p>
+          <a:p>
+            <a:pPr algn="l">
+              <a:spcBef>
+                <a:spcPts val="0"/>
+              </a:spcBef>
+              <a:spcAft>
+                <a:spcPts val="800"/>
+              </a:spcAft>
+              <a:buNone/>
+            </a:pPr>
+            <a:r>
+              <a:rPr sz="1450" b="1" i="0">
+                <a:solidFill>
+                  <a:srgbClr val="1F2A44"/>
+                </a:solidFill>
+                <a:latin typeface="Garamond"/>
+                <a:cs typeface="Garamond"/>
+              </a:rPr>
+              <a:t>20. Appendix — bull / bear scenarios</a:t>
+            </a:r>
+          </a:p>
+        </p:txBody>
+      </p:sp>
+    </p:spTree>
+  </p:cSld>
+  <p:clrMapOvr>
+    <a:masterClrMapping/>
+  </p:clrMapOvr>
+</p:sld>
+</file>
+
+<file path=ppt/slides/slide20.xml><?xml version="1.0" encoding="utf-8"?>
+<p:sld xmlns:a="http://schemas.openxmlformats.org/drawingml/2006/main" xmlns:p="http://schemas.openxmlformats.org/presentationml/2006/main" xmlns:r="http://schemas.openxmlformats.org/officeDocument/2006/relationships">
+  <p:cSld>
+    <p:spTree>
+      <p:nvGrpSpPr>
+        <p:cNvPr id="1" name=""/>
+        <p:cNvGrpSpPr/>
+        <p:nvPr/>
+      </p:nvGrpSpPr>
+      <p:grpSpPr/>
+      <p:sp>
+        <p:nvSpPr>
+          <p:cNvPr id="2" name="TextBox 1"/>
+          <p:cNvSpPr txBox="1"/>
+          <p:nvPr/>
+        </p:nvSpPr>
+        <p:spPr>
+          <a:xfrm>
+            <a:off x="411480" y="164592"/>
+            <a:ext cx="5943600" cy="502920"/>
+          </a:xfrm>
+          <a:prstGeom prst="rect">
+            <a:avLst/>
+          </a:prstGeom>
+          <a:noFill/>
+        </p:spPr>
+        <p:txBody>
+          <a:bodyPr wrap="square" anchor="t" lIns="25400" rIns="25400" tIns="12700" bIns="12700">
+            <a:spAutoFit/>
+          </a:bodyPr>
+          <a:lstStyle/>
+          <a:p>
+            <a:pPr algn="l">
+              <a:spcBef>
+                <a:spcPts val="0"/>
+              </a:spcBef>
+              <a:spcAft>
+                <a:spcPts val="0"/>
+              </a:spcAft>
+              <a:buNone/>
+            </a:pPr>
+            <a:r>
+              <a:rPr sz="1100" b="1" i="0">
+                <a:solidFill>
+                  <a:srgbClr val="990000"/>
+                </a:solidFill>
+                <a:latin typeface="Garamond"/>
+                <a:cs typeface="Garamond"/>
+              </a:rPr>
+              <a:t>Investment Research Division</a:t>
+            </a:r>
+          </a:p>
+          <a:p>
+            <a:pPr algn="l">
+              <a:spcBef>
+                <a:spcPts val="0"/>
+              </a:spcBef>
+              <a:spcAft>
+                <a:spcPts val="0"/>
+              </a:spcAft>
+              <a:buNone/>
+            </a:pPr>
+            <a:r>
+              <a:rPr sz="1250" b="1" i="0">
+                <a:solidFill>
+                  <a:srgbClr val="1F2A44"/>
+                </a:solidFill>
+                <a:latin typeface="Garamond"/>
+                <a:cs typeface="Garamond"/>
+              </a:rPr>
+              <a:t>lululemon athletica (NASDAQ: LULU)</a:t>
+            </a:r>
+          </a:p>
+        </p:txBody>
+      </p:sp>
+      <p:sp>
+        <p:nvSpPr>
+          <p:cNvPr id="3" name="Rectangle 2"/>
+          <p:cNvSpPr/>
+          <p:nvPr/>
+        </p:nvSpPr>
+        <p:spPr>
+          <a:xfrm>
+            <a:off x="5486400" y="201168"/>
+            <a:ext cx="6309360" cy="274320"/>
+          </a:xfrm>
+          <a:prstGeom prst="rect">
+            <a:avLst/>
+          </a:prstGeom>
+          <a:solidFill>
+            <a:srgbClr val="1F2A44"/>
+          </a:solidFill>
+          <a:ln>
+            <a:noFill/>
+          </a:ln>
+          <a:effectLst/>
+        </p:spPr>
+        <p:style>
+          <a:lnRef idx="1">
+            <a:schemeClr val="accent1"/>
+          </a:lnRef>
+          <a:fillRef idx="3">
+            <a:schemeClr val="accent1"/>
+          </a:fillRef>
+          <a:effectRef idx="2">
+            <a:schemeClr val="accent1"/>
+          </a:effectRef>
+          <a:fontRef idx="minor">
+            <a:schemeClr val="lt1"/>
+          </a:fontRef>
+        </p:style>
+        <p:txBody>
+          <a:bodyPr rtlCol="0" anchor="ctr" wrap="square" tIns="0" bIns="0" rIns="76200"/>
+          <a:lstStyle/>
+          <a:p>
+            <a:pPr algn="r"/>
+            <a:r>
+              <a:rPr sz="1500" b="1" i="0">
+                <a:solidFill>
+                  <a:srgbClr val="FFFFFF"/>
+                </a:solidFill>
+                <a:latin typeface="Garamond"/>
+                <a:cs typeface="Garamond"/>
+              </a:rPr>
+              <a:t>DCF Valuation</a:t>
+            </a:r>
+          </a:p>
+        </p:txBody>
+      </p:sp>
+      <p:sp>
+        <p:nvSpPr>
+          <p:cNvPr id="4" name="TextBox 3"/>
+          <p:cNvSpPr txBox="1"/>
+          <p:nvPr/>
+        </p:nvSpPr>
+        <p:spPr>
+          <a:xfrm>
+            <a:off x="411480" y="566928"/>
+            <a:ext cx="11384280" cy="310896"/>
+          </a:xfrm>
+          <a:prstGeom prst="rect">
+            <a:avLst/>
+          </a:prstGeom>
+          <a:noFill/>
+        </p:spPr>
+        <p:txBody>
+          <a:bodyPr wrap="square" anchor="t" lIns="25400" rIns="25400" tIns="12700" bIns="12700">
+            <a:spAutoFit/>
+          </a:bodyPr>
+          <a:lstStyle/>
+          <a:p>
+            <a:pPr algn="l">
+              <a:spcBef>
+                <a:spcPts val="0"/>
+              </a:spcBef>
+              <a:spcAft>
+                <a:spcPts val="0"/>
+              </a:spcAft>
+              <a:buNone/>
+            </a:pPr>
+            <a:r>
+              <a:rPr sz="1250" b="0" i="1">
+                <a:solidFill>
+                  <a:srgbClr val="8C8C8C"/>
+                </a:solidFill>
+                <a:latin typeface="Garamond"/>
+                <a:cs typeface="Garamond"/>
+              </a:rPr>
+              <a:t>Base-case unlevered DCF yields ~$124 per share</a:t>
+            </a:r>
+          </a:p>
+        </p:txBody>
+      </p:sp>
+      <p:sp>
+        <p:nvSpPr>
+          <p:cNvPr id="5" name="Rectangle 4"/>
+          <p:cNvSpPr/>
+          <p:nvPr/>
+        </p:nvSpPr>
+        <p:spPr>
+          <a:xfrm>
+            <a:off x="411480" y="896112"/>
+            <a:ext cx="11384280" cy="20320"/>
+          </a:xfrm>
+          <a:prstGeom prst="rect">
+            <a:avLst/>
+          </a:prstGeom>
+          <a:solidFill>
+            <a:srgbClr val="FFC72C"/>
+          </a:solidFill>
+          <a:ln>
+            <a:noFill/>
+          </a:ln>
+          <a:effectLst/>
+        </p:spPr>
+        <p:style>
+          <a:lnRef idx="1">
+            <a:schemeClr val="accent1"/>
+          </a:lnRef>
+          <a:fillRef idx="3">
+            <a:schemeClr val="accent1"/>
+          </a:fillRef>
+          <a:effectRef idx="2">
+            <a:schemeClr val="accent1"/>
+          </a:effectRef>
+          <a:fontRef idx="minor">
+            <a:schemeClr val="lt1"/>
+          </a:fontRef>
+        </p:style>
+        <p:txBody>
+          <a:bodyPr rtlCol="0" anchor="ctr"/>
+          <a:lstStyle/>
+          <a:p>
+            <a:pPr algn="ctr"/>
+          </a:p>
+        </p:txBody>
+      </p:sp>
+      <p:sp>
+        <p:nvSpPr>
+          <p:cNvPr id="6" name="TextBox 5"/>
+          <p:cNvSpPr txBox="1"/>
+          <p:nvPr/>
+        </p:nvSpPr>
+        <p:spPr>
+          <a:xfrm>
+            <a:off x="411480" y="6510528"/>
+            <a:ext cx="11384280" cy="274320"/>
+          </a:xfrm>
+          <a:prstGeom prst="rect">
+            <a:avLst/>
+          </a:prstGeom>
+          <a:noFill/>
+        </p:spPr>
+        <p:txBody>
+          <a:bodyPr wrap="square" anchor="t" lIns="25400" rIns="25400" tIns="12700" bIns="12700">
+            <a:spAutoFit/>
+          </a:bodyPr>
+          <a:lstStyle/>
+          <a:p>
+            <a:pPr algn="l">
+              <a:spcBef>
+                <a:spcPts val="0"/>
+              </a:spcBef>
+              <a:spcAft>
+                <a:spcPts val="0"/>
+              </a:spcAft>
+              <a:buNone/>
+            </a:pPr>
+            <a:r>
+              <a:rPr sz="850" b="0" i="0">
+                <a:solidFill>
+                  <a:srgbClr val="8C8C8C"/>
+                </a:solidFill>
+                <a:latin typeface="Garamond"/>
+                <a:cs typeface="Garamond"/>
+              </a:rPr>
+              <a:t>Source: GIS DCF model (from scratch); FY2025 cash &amp; share count per 10-K</a:t>
+            </a:r>
+          </a:p>
+        </p:txBody>
+      </p:sp>
+      <p:sp>
+        <p:nvSpPr>
+          <p:cNvPr id="7" name="TextBox 6"/>
+          <p:cNvSpPr txBox="1"/>
+          <p:nvPr/>
+        </p:nvSpPr>
+        <p:spPr>
+          <a:xfrm>
+            <a:off x="11247120" y="6510528"/>
+            <a:ext cx="822960" cy="274320"/>
+          </a:xfrm>
+          <a:prstGeom prst="rect">
+            <a:avLst/>
+          </a:prstGeom>
+          <a:noFill/>
+        </p:spPr>
+        <p:txBody>
+          <a:bodyPr wrap="square" anchor="t" lIns="25400" rIns="25400" tIns="12700" bIns="12700">
+            <a:spAutoFit/>
+          </a:bodyPr>
+          <a:lstStyle/>
+          <a:p>
+            <a:pPr algn="r">
+              <a:spcBef>
+                <a:spcPts val="0"/>
+              </a:spcBef>
+              <a:spcAft>
+                <a:spcPts val="0"/>
+              </a:spcAft>
+              <a:buNone/>
+            </a:pPr>
+            <a:r>
+              <a:rPr sz="900" b="0" i="0">
+                <a:solidFill>
+                  <a:srgbClr val="8C8C8C"/>
+                </a:solidFill>
+                <a:latin typeface="Garamond"/>
+                <a:cs typeface="Garamond"/>
+              </a:rPr>
+              <a:t>19</a:t>
             </a:r>
           </a:p>
         </p:txBody>
@@ -15149,7 +16541,7 @@
 </p:sld>
 </file>
 
-<file path=ppt/slides/slide2.xml><?xml version="1.0" encoding="utf-8"?>
+<file path=ppt/slides/slide21.xml><?xml version="1.0" encoding="utf-8"?>
 <p:sld xmlns:a="http://schemas.openxmlformats.org/drawingml/2006/main" xmlns:p="http://schemas.openxmlformats.org/presentationml/2006/main" xmlns:r="http://schemas.openxmlformats.org/officeDocument/2006/relationships">
   <p:cSld>
     <p:spTree>
@@ -15273,7 +16665,7 @@
                 <a:latin typeface="Garamond"/>
                 <a:cs typeface="Garamond"/>
               </a:rPr>
-              <a:t>Table of Contents</a:t>
+              <a:t>Comparable Companies</a:t>
             </a:r>
           </a:p>
         </p:txBody>
@@ -15317,7 +16709,7 @@
                 <a:latin typeface="Garamond"/>
                 <a:cs typeface="Garamond"/>
               </a:rPr>
-              <a:t>What this pitch will cover</a:t>
+              <a:t>PitchBook pubcomps are the current tape; Alo still has no EV/EBITDA</a:t>
             </a:r>
           </a:p>
         </p:txBody>
@@ -15405,7 +16797,7 @@
                 <a:latin typeface="Garamond"/>
                 <a:cs typeface="Garamond"/>
               </a:rPr>
-              <a:t>Source: company SEC filings (Form 10-K, CIK 0001397187)</a:t>
+              <a:t>Source: PitchBook Comps Set 04-Sep-2026 (EV/EBITDA = daily EV / TTM EBITDA); Alo ask $10bn / Forbes ~$2bn</a:t>
             </a:r>
           </a:p>
         </p:txBody>
@@ -15449,765 +16841,7 @@
                 <a:latin typeface="Garamond"/>
                 <a:cs typeface="Garamond"/>
               </a:rPr>
-              <a:t>1</a:t>
-            </a:r>
-          </a:p>
-        </p:txBody>
-      </p:sp>
-      <p:sp>
-        <p:nvSpPr>
-          <p:cNvPr id="8" name="TextBox 7"/>
-          <p:cNvSpPr txBox="1"/>
-          <p:nvPr/>
-        </p:nvSpPr>
-        <p:spPr>
-          <a:xfrm>
-            <a:off x="548640" y="1097280"/>
-            <a:ext cx="5486400" cy="5303520"/>
-          </a:xfrm>
-          <a:prstGeom prst="rect">
-            <a:avLst/>
-          </a:prstGeom>
-          <a:noFill/>
-        </p:spPr>
-        <p:txBody>
-          <a:bodyPr wrap="square" anchor="t" lIns="25400" rIns="25400" tIns="12700" bIns="12700">
-            <a:spAutoFit/>
-          </a:bodyPr>
-          <a:lstStyle/>
-          <a:p>
-            <a:pPr algn="l">
-              <a:spcBef>
-                <a:spcPts val="0"/>
-              </a:spcBef>
-              <a:spcAft>
-                <a:spcPts val="800"/>
-              </a:spcAft>
-              <a:buNone/>
-            </a:pPr>
-            <a:r>
-              <a:rPr sz="1450" b="1" i="0">
-                <a:solidFill>
-                  <a:srgbClr val="1F2A44"/>
-                </a:solidFill>
-                <a:latin typeface="Garamond"/>
-                <a:cs typeface="Garamond"/>
-              </a:rPr>
-              <a:t>1.  Investment thesis summary</a:t>
-            </a:r>
-          </a:p>
-          <a:p>
-            <a:pPr algn="l">
-              <a:spcBef>
-                <a:spcPts val="0"/>
-              </a:spcBef>
-              <a:spcAft>
-                <a:spcPts val="800"/>
-              </a:spcAft>
-              <a:buNone/>
-            </a:pPr>
-            <a:r>
-              <a:rPr sz="1450" b="1" i="0">
-                <a:solidFill>
-                  <a:srgbClr val="1F2A44"/>
-                </a:solidFill>
-                <a:latin typeface="Garamond"/>
-                <a:cs typeface="Garamond"/>
-              </a:rPr>
-              <a:t>2.  Situation overview</a:t>
-            </a:r>
-          </a:p>
-          <a:p>
-            <a:pPr algn="l">
-              <a:spcBef>
-                <a:spcPts val="0"/>
-              </a:spcBef>
-              <a:spcAft>
-                <a:spcPts val="800"/>
-              </a:spcAft>
-              <a:buNone/>
-            </a:pPr>
-            <a:r>
-              <a:rPr sz="1450" b="1" i="0">
-                <a:solidFill>
-                  <a:srgbClr val="1F2A44"/>
-                </a:solidFill>
-                <a:latin typeface="Garamond"/>
-                <a:cs typeface="Garamond"/>
-              </a:rPr>
-              <a:t>3.  Market narrative</a:t>
-            </a:r>
-          </a:p>
-          <a:p>
-            <a:pPr algn="l">
-              <a:spcBef>
-                <a:spcPts val="0"/>
-              </a:spcBef>
-              <a:spcAft>
-                <a:spcPts val="800"/>
-              </a:spcAft>
-              <a:buNone/>
-            </a:pPr>
-            <a:r>
-              <a:rPr sz="1450" b="1" i="0">
-                <a:solidFill>
-                  <a:srgbClr val="1F2A44"/>
-                </a:solidFill>
-                <a:latin typeface="Garamond"/>
-                <a:cs typeface="Garamond"/>
-              </a:rPr>
-              <a:t>4.  Company overview</a:t>
-            </a:r>
-          </a:p>
-          <a:p>
-            <a:pPr algn="l">
-              <a:spcBef>
-                <a:spcPts val="0"/>
-              </a:spcBef>
-              <a:spcAft>
-                <a:spcPts val="800"/>
-              </a:spcAft>
-              <a:buNone/>
-            </a:pPr>
-            <a:r>
-              <a:rPr sz="1450" b="1" i="0">
-                <a:solidFill>
-                  <a:srgbClr val="1F2A44"/>
-                </a:solidFill>
-                <a:latin typeface="Garamond"/>
-                <a:cs typeface="Garamond"/>
-              </a:rPr>
-              <a:t>5.  Business model &amp; unit economics</a:t>
-            </a:r>
-          </a:p>
-          <a:p>
-            <a:pPr algn="l">
-              <a:spcBef>
-                <a:spcPts val="0"/>
-              </a:spcBef>
-              <a:spcAft>
-                <a:spcPts val="800"/>
-              </a:spcAft>
-              <a:buNone/>
-            </a:pPr>
-            <a:r>
-              <a:rPr sz="1450" b="1" i="0">
-                <a:solidFill>
-                  <a:srgbClr val="1F2A44"/>
-                </a:solidFill>
-                <a:latin typeface="Garamond"/>
-                <a:cs typeface="Garamond"/>
-              </a:rPr>
-              <a:t>6.  Industry overview</a:t>
-            </a:r>
-          </a:p>
-          <a:p>
-            <a:pPr algn="l">
-              <a:spcBef>
-                <a:spcPts val="0"/>
-              </a:spcBef>
-              <a:spcAft>
-                <a:spcPts val="800"/>
-              </a:spcAft>
-              <a:buNone/>
-            </a:pPr>
-            <a:r>
-              <a:rPr sz="1450" b="1" i="0">
-                <a:solidFill>
-                  <a:srgbClr val="1F2A44"/>
-                </a:solidFill>
-                <a:latin typeface="Garamond"/>
-                <a:cs typeface="Garamond"/>
-              </a:rPr>
-              <a:t>7.  Thesis I — Priced for terminal decline</a:t>
-            </a:r>
-          </a:p>
-          <a:p>
-            <a:pPr algn="l">
-              <a:spcBef>
-                <a:spcPts val="0"/>
-              </a:spcBef>
-              <a:spcAft>
-                <a:spcPts val="800"/>
-              </a:spcAft>
-              <a:buNone/>
-            </a:pPr>
-            <a:r>
-              <a:rPr sz="1450" b="1" i="0">
-                <a:solidFill>
-                  <a:srgbClr val="1F2A44"/>
-                </a:solidFill>
-                <a:latin typeface="Garamond"/>
-                <a:cs typeface="Garamond"/>
-              </a:rPr>
-              <a:t>8.  Thesis II — International growth engine</a:t>
-            </a:r>
-          </a:p>
-          <a:p>
-            <a:pPr algn="l">
-              <a:spcBef>
-                <a:spcPts val="0"/>
-              </a:spcBef>
-              <a:spcAft>
-                <a:spcPts val="800"/>
-              </a:spcAft>
-              <a:buNone/>
-            </a:pPr>
-            <a:r>
-              <a:rPr sz="1450" b="1" i="0">
-                <a:solidFill>
-                  <a:srgbClr val="1F2A44"/>
-                </a:solidFill>
-                <a:latin typeface="Garamond"/>
-                <a:cs typeface="Garamond"/>
-              </a:rPr>
-              <a:t>9.  Thesis III — Elite economics &amp; capital return</a:t>
-            </a:r>
-          </a:p>
-          <a:p>
-            <a:pPr algn="l">
-              <a:spcBef>
-                <a:spcPts val="0"/>
-              </a:spcBef>
-              <a:spcAft>
-                <a:spcPts val="800"/>
-              </a:spcAft>
-              <a:buNone/>
-            </a:pPr>
-            <a:r>
-              <a:rPr sz="1450" b="1" i="0">
-                <a:solidFill>
-                  <a:srgbClr val="1F2A44"/>
-                </a:solidFill>
-                <a:latin typeface="Garamond"/>
-                <a:cs typeface="Garamond"/>
-              </a:rPr>
-              <a:t>10. Risks &amp; mitigants</a:t>
-            </a:r>
-          </a:p>
-        </p:txBody>
-      </p:sp>
-      <p:sp>
-        <p:nvSpPr>
-          <p:cNvPr id="9" name="TextBox 8"/>
-          <p:cNvSpPr txBox="1"/>
-          <p:nvPr/>
-        </p:nvSpPr>
-        <p:spPr>
-          <a:xfrm>
-            <a:off x="6309360" y="1097280"/>
-            <a:ext cx="5486400" cy="5303520"/>
-          </a:xfrm>
-          <a:prstGeom prst="rect">
-            <a:avLst/>
-          </a:prstGeom>
-          <a:noFill/>
-        </p:spPr>
-        <p:txBody>
-          <a:bodyPr wrap="square" anchor="t" lIns="25400" rIns="25400" tIns="12700" bIns="12700">
-            <a:spAutoFit/>
-          </a:bodyPr>
-          <a:lstStyle/>
-          <a:p>
-            <a:pPr algn="l">
-              <a:spcBef>
-                <a:spcPts val="0"/>
-              </a:spcBef>
-              <a:spcAft>
-                <a:spcPts val="800"/>
-              </a:spcAft>
-              <a:buNone/>
-            </a:pPr>
-            <a:r>
-              <a:rPr sz="1450" b="1" i="0">
-                <a:solidFill>
-                  <a:srgbClr val="1F2A44"/>
-                </a:solidFill>
-                <a:latin typeface="Garamond"/>
-                <a:cs typeface="Garamond"/>
-              </a:rPr>
-              <a:t>11. Catalyst timeline</a:t>
-            </a:r>
-          </a:p>
-          <a:p>
-            <a:pPr algn="l">
-              <a:spcBef>
-                <a:spcPts val="0"/>
-              </a:spcBef>
-              <a:spcAft>
-                <a:spcPts val="800"/>
-              </a:spcAft>
-              <a:buNone/>
-            </a:pPr>
-            <a:r>
-              <a:rPr sz="1450" b="1" i="0">
-                <a:solidFill>
-                  <a:srgbClr val="1F2A44"/>
-                </a:solidFill>
-                <a:latin typeface="Garamond"/>
-                <a:cs typeface="Garamond"/>
-              </a:rPr>
-              <a:t>12. Financials — income statement</a:t>
-            </a:r>
-          </a:p>
-          <a:p>
-            <a:pPr algn="l">
-              <a:spcBef>
-                <a:spcPts val="0"/>
-              </a:spcBef>
-              <a:spcAft>
-                <a:spcPts val="800"/>
-              </a:spcAft>
-              <a:buNone/>
-            </a:pPr>
-            <a:r>
-              <a:rPr sz="1450" b="1" i="0">
-                <a:solidFill>
-                  <a:srgbClr val="1F2A44"/>
-                </a:solidFill>
-                <a:latin typeface="Garamond"/>
-                <a:cs typeface="Garamond"/>
-              </a:rPr>
-              <a:t>13. Financials — balance sheet</a:t>
-            </a:r>
-          </a:p>
-          <a:p>
-            <a:pPr algn="l">
-              <a:spcBef>
-                <a:spcPts val="0"/>
-              </a:spcBef>
-              <a:spcAft>
-                <a:spcPts val="800"/>
-              </a:spcAft>
-              <a:buNone/>
-            </a:pPr>
-            <a:r>
-              <a:rPr sz="1450" b="1" i="0">
-                <a:solidFill>
-                  <a:srgbClr val="1F2A44"/>
-                </a:solidFill>
-                <a:latin typeface="Garamond"/>
-                <a:cs typeface="Garamond"/>
-              </a:rPr>
-              <a:t>14. Financials — cash flow</a:t>
-            </a:r>
-          </a:p>
-          <a:p>
-            <a:pPr algn="l">
-              <a:spcBef>
-                <a:spcPts val="0"/>
-              </a:spcBef>
-              <a:spcAft>
-                <a:spcPts val="800"/>
-              </a:spcAft>
-              <a:buNone/>
-            </a:pPr>
-            <a:r>
-              <a:rPr sz="1450" b="1" i="0">
-                <a:solidFill>
-                  <a:srgbClr val="1F2A44"/>
-                </a:solidFill>
-                <a:latin typeface="Garamond"/>
-                <a:cs typeface="Garamond"/>
-              </a:rPr>
-              <a:t>15. Capital structure &amp; WACC</a:t>
-            </a:r>
-          </a:p>
-          <a:p>
-            <a:pPr algn="l">
-              <a:spcBef>
-                <a:spcPts val="0"/>
-              </a:spcBef>
-              <a:spcAft>
-                <a:spcPts val="800"/>
-              </a:spcAft>
-              <a:buNone/>
-            </a:pPr>
-            <a:r>
-              <a:rPr sz="1450" b="1" i="0">
-                <a:solidFill>
-                  <a:srgbClr val="1F2A44"/>
-                </a:solidFill>
-                <a:latin typeface="Garamond"/>
-                <a:cs typeface="Garamond"/>
-              </a:rPr>
-              <a:t>16. Valuation summary (football field)</a:t>
-            </a:r>
-          </a:p>
-          <a:p>
-            <a:pPr algn="l">
-              <a:spcBef>
-                <a:spcPts val="0"/>
-              </a:spcBef>
-              <a:spcAft>
-                <a:spcPts val="800"/>
-              </a:spcAft>
-              <a:buNone/>
-            </a:pPr>
-            <a:r>
-              <a:rPr sz="1450" b="1" i="0">
-                <a:solidFill>
-                  <a:srgbClr val="1F2A44"/>
-                </a:solidFill>
-                <a:latin typeface="Garamond"/>
-                <a:cs typeface="Garamond"/>
-              </a:rPr>
-              <a:t>17. DCF valuation</a:t>
-            </a:r>
-          </a:p>
-          <a:p>
-            <a:pPr algn="l">
-              <a:spcBef>
-                <a:spcPts val="0"/>
-              </a:spcBef>
-              <a:spcAft>
-                <a:spcPts val="800"/>
-              </a:spcAft>
-              <a:buNone/>
-            </a:pPr>
-            <a:r>
-              <a:rPr sz="1450" b="1" i="0">
-                <a:solidFill>
-                  <a:srgbClr val="1F2A44"/>
-                </a:solidFill>
-                <a:latin typeface="Garamond"/>
-                <a:cs typeface="Garamond"/>
-              </a:rPr>
-              <a:t>18. Comparable companies</a:t>
-            </a:r>
-          </a:p>
-          <a:p>
-            <a:pPr algn="l">
-              <a:spcBef>
-                <a:spcPts val="0"/>
-              </a:spcBef>
-              <a:spcAft>
-                <a:spcPts val="800"/>
-              </a:spcAft>
-              <a:buNone/>
-            </a:pPr>
-            <a:r>
-              <a:rPr sz="1450" b="1" i="0">
-                <a:solidFill>
-                  <a:srgbClr val="1F2A44"/>
-                </a:solidFill>
-                <a:latin typeface="Garamond"/>
-                <a:cs typeface="Garamond"/>
-              </a:rPr>
-              <a:t>19. Appendix — bull / bear scenarios</a:t>
-            </a:r>
-          </a:p>
-        </p:txBody>
-      </p:sp>
-    </p:spTree>
-  </p:cSld>
-  <p:clrMapOvr>
-    <a:masterClrMapping/>
-  </p:clrMapOvr>
-</p:sld>
-</file>
-
-<file path=ppt/slides/slide20.xml><?xml version="1.0" encoding="utf-8"?>
-<p:sld xmlns:a="http://schemas.openxmlformats.org/drawingml/2006/main" xmlns:p="http://schemas.openxmlformats.org/presentationml/2006/main" xmlns:r="http://schemas.openxmlformats.org/officeDocument/2006/relationships">
-  <p:cSld>
-    <p:spTree>
-      <p:nvGrpSpPr>
-        <p:cNvPr id="1" name=""/>
-        <p:cNvGrpSpPr/>
-        <p:nvPr/>
-      </p:nvGrpSpPr>
-      <p:grpSpPr/>
-      <p:sp>
-        <p:nvSpPr>
-          <p:cNvPr id="2" name="TextBox 1"/>
-          <p:cNvSpPr txBox="1"/>
-          <p:nvPr/>
-        </p:nvSpPr>
-        <p:spPr>
-          <a:xfrm>
-            <a:off x="411480" y="164592"/>
-            <a:ext cx="5943600" cy="502920"/>
-          </a:xfrm>
-          <a:prstGeom prst="rect">
-            <a:avLst/>
-          </a:prstGeom>
-          <a:noFill/>
-        </p:spPr>
-        <p:txBody>
-          <a:bodyPr wrap="square" anchor="t" lIns="25400" rIns="25400" tIns="12700" bIns="12700">
-            <a:spAutoFit/>
-          </a:bodyPr>
-          <a:lstStyle/>
-          <a:p>
-            <a:pPr algn="l">
-              <a:spcBef>
-                <a:spcPts val="0"/>
-              </a:spcBef>
-              <a:spcAft>
-                <a:spcPts val="0"/>
-              </a:spcAft>
-              <a:buNone/>
-            </a:pPr>
-            <a:r>
-              <a:rPr sz="1100" b="1" i="0">
-                <a:solidFill>
-                  <a:srgbClr val="990000"/>
-                </a:solidFill>
-                <a:latin typeface="Garamond"/>
-                <a:cs typeface="Garamond"/>
-              </a:rPr>
-              <a:t>Investment Research Division</a:t>
-            </a:r>
-          </a:p>
-          <a:p>
-            <a:pPr algn="l">
-              <a:spcBef>
-                <a:spcPts val="0"/>
-              </a:spcBef>
-              <a:spcAft>
-                <a:spcPts val="0"/>
-              </a:spcAft>
-              <a:buNone/>
-            </a:pPr>
-            <a:r>
-              <a:rPr sz="1250" b="1" i="0">
-                <a:solidFill>
-                  <a:srgbClr val="1F2A44"/>
-                </a:solidFill>
-                <a:latin typeface="Garamond"/>
-                <a:cs typeface="Garamond"/>
-              </a:rPr>
-              <a:t>lululemon athletica (NASDAQ: LULU)</a:t>
-            </a:r>
-          </a:p>
-        </p:txBody>
-      </p:sp>
-      <p:sp>
-        <p:nvSpPr>
-          <p:cNvPr id="3" name="Rectangle 2"/>
-          <p:cNvSpPr/>
-          <p:nvPr/>
-        </p:nvSpPr>
-        <p:spPr>
-          <a:xfrm>
-            <a:off x="5486400" y="201168"/>
-            <a:ext cx="6309360" cy="274320"/>
-          </a:xfrm>
-          <a:prstGeom prst="rect">
-            <a:avLst/>
-          </a:prstGeom>
-          <a:solidFill>
-            <a:srgbClr val="1F2A44"/>
-          </a:solidFill>
-          <a:ln>
-            <a:noFill/>
-          </a:ln>
-          <a:effectLst/>
-        </p:spPr>
-        <p:style>
-          <a:lnRef idx="1">
-            <a:schemeClr val="accent1"/>
-          </a:lnRef>
-          <a:fillRef idx="3">
-            <a:schemeClr val="accent1"/>
-          </a:fillRef>
-          <a:effectRef idx="2">
-            <a:schemeClr val="accent1"/>
-          </a:effectRef>
-          <a:fontRef idx="minor">
-            <a:schemeClr val="lt1"/>
-          </a:fontRef>
-        </p:style>
-        <p:txBody>
-          <a:bodyPr rtlCol="0" anchor="ctr" wrap="square" tIns="0" bIns="0" rIns="76200"/>
-          <a:lstStyle/>
-          <a:p>
-            <a:pPr algn="r"/>
-            <a:r>
-              <a:rPr sz="1500" b="1" i="0">
-                <a:solidFill>
-                  <a:srgbClr val="FFFFFF"/>
-                </a:solidFill>
-                <a:latin typeface="Garamond"/>
-                <a:cs typeface="Garamond"/>
-              </a:rPr>
-              <a:t>Comparable Companies</a:t>
-            </a:r>
-          </a:p>
-        </p:txBody>
-      </p:sp>
-      <p:sp>
-        <p:nvSpPr>
-          <p:cNvPr id="4" name="TextBox 3"/>
-          <p:cNvSpPr txBox="1"/>
-          <p:nvPr/>
-        </p:nvSpPr>
-        <p:spPr>
-          <a:xfrm>
-            <a:off x="411480" y="566928"/>
-            <a:ext cx="11384280" cy="310896"/>
-          </a:xfrm>
-          <a:prstGeom prst="rect">
-            <a:avLst/>
-          </a:prstGeom>
-          <a:noFill/>
-        </p:spPr>
-        <p:txBody>
-          <a:bodyPr wrap="square" anchor="t" lIns="25400" rIns="25400" tIns="12700" bIns="12700">
-            <a:spAutoFit/>
-          </a:bodyPr>
-          <a:lstStyle/>
-          <a:p>
-            <a:pPr algn="l">
-              <a:spcBef>
-                <a:spcPts val="0"/>
-              </a:spcBef>
-              <a:spcAft>
-                <a:spcPts val="0"/>
-              </a:spcAft>
-              <a:buNone/>
-            </a:pPr>
-            <a:r>
-              <a:rPr sz="1250" b="0" i="1">
-                <a:solidFill>
-                  <a:srgbClr val="8C8C8C"/>
-                </a:solidFill>
-                <a:latin typeface="Garamond"/>
-                <a:cs typeface="Garamond"/>
-              </a:rPr>
-              <a:t>PitchBook pubcomps are the current tape; Alo still has no EV/EBITDA</a:t>
-            </a:r>
-          </a:p>
-        </p:txBody>
-      </p:sp>
-      <p:sp>
-        <p:nvSpPr>
-          <p:cNvPr id="5" name="Rectangle 4"/>
-          <p:cNvSpPr/>
-          <p:nvPr/>
-        </p:nvSpPr>
-        <p:spPr>
-          <a:xfrm>
-            <a:off x="411480" y="896112"/>
-            <a:ext cx="11384280" cy="20320"/>
-          </a:xfrm>
-          <a:prstGeom prst="rect">
-            <a:avLst/>
-          </a:prstGeom>
-          <a:solidFill>
-            <a:srgbClr val="FFC72C"/>
-          </a:solidFill>
-          <a:ln>
-            <a:noFill/>
-          </a:ln>
-          <a:effectLst/>
-        </p:spPr>
-        <p:style>
-          <a:lnRef idx="1">
-            <a:schemeClr val="accent1"/>
-          </a:lnRef>
-          <a:fillRef idx="3">
-            <a:schemeClr val="accent1"/>
-          </a:fillRef>
-          <a:effectRef idx="2">
-            <a:schemeClr val="accent1"/>
-          </a:effectRef>
-          <a:fontRef idx="minor">
-            <a:schemeClr val="lt1"/>
-          </a:fontRef>
-        </p:style>
-        <p:txBody>
-          <a:bodyPr rtlCol="0" anchor="ctr"/>
-          <a:lstStyle/>
-          <a:p>
-            <a:pPr algn="ctr"/>
-          </a:p>
-        </p:txBody>
-      </p:sp>
-      <p:sp>
-        <p:nvSpPr>
-          <p:cNvPr id="6" name="TextBox 5"/>
-          <p:cNvSpPr txBox="1"/>
-          <p:nvPr/>
-        </p:nvSpPr>
-        <p:spPr>
-          <a:xfrm>
-            <a:off x="411480" y="6510528"/>
-            <a:ext cx="11384280" cy="274320"/>
-          </a:xfrm>
-          <a:prstGeom prst="rect">
-            <a:avLst/>
-          </a:prstGeom>
-          <a:noFill/>
-        </p:spPr>
-        <p:txBody>
-          <a:bodyPr wrap="square" anchor="t" lIns="25400" rIns="25400" tIns="12700" bIns="12700">
-            <a:spAutoFit/>
-          </a:bodyPr>
-          <a:lstStyle/>
-          <a:p>
-            <a:pPr algn="l">
-              <a:spcBef>
-                <a:spcPts val="0"/>
-              </a:spcBef>
-              <a:spcAft>
-                <a:spcPts val="0"/>
-              </a:spcAft>
-              <a:buNone/>
-            </a:pPr>
-            <a:r>
-              <a:rPr sz="850" b="0" i="0">
-                <a:solidFill>
-                  <a:srgbClr val="8C8C8C"/>
-                </a:solidFill>
-                <a:latin typeface="Garamond"/>
-                <a:cs typeface="Garamond"/>
-              </a:rPr>
-              <a:t>Source: PitchBook Comps Set 04-Sep-2026 (EV/EBITDA = daily EV / TTM EBITDA); Alo ask $10bn / Forbes ~$2bn</a:t>
-            </a:r>
-          </a:p>
-        </p:txBody>
-      </p:sp>
-      <p:sp>
-        <p:nvSpPr>
-          <p:cNvPr id="7" name="TextBox 6"/>
-          <p:cNvSpPr txBox="1"/>
-          <p:nvPr/>
-        </p:nvSpPr>
-        <p:spPr>
-          <a:xfrm>
-            <a:off x="11247120" y="6510528"/>
-            <a:ext cx="822960" cy="274320"/>
-          </a:xfrm>
-          <a:prstGeom prst="rect">
-            <a:avLst/>
-          </a:prstGeom>
-          <a:noFill/>
-        </p:spPr>
-        <p:txBody>
-          <a:bodyPr wrap="square" anchor="t" lIns="25400" rIns="25400" tIns="12700" bIns="12700">
-            <a:spAutoFit/>
-          </a:bodyPr>
-          <a:lstStyle/>
-          <a:p>
-            <a:pPr algn="r">
-              <a:spcBef>
-                <a:spcPts val="0"/>
-              </a:spcBef>
-              <a:spcAft>
-                <a:spcPts val="0"/>
-              </a:spcAft>
-              <a:buNone/>
-            </a:pPr>
-            <a:r>
-              <a:rPr sz="900" b="0" i="0">
-                <a:solidFill>
-                  <a:srgbClr val="8C8C8C"/>
-                </a:solidFill>
-                <a:latin typeface="Garamond"/>
-                <a:cs typeface="Garamond"/>
-              </a:rPr>
-              <a:t>19</a:t>
+              <a:t>20</a:t>
             </a:r>
           </a:p>
         </p:txBody>
@@ -17457,7 +18091,7 @@
 </p:sld>
 </file>
 
-<file path=ppt/slides/slide21.xml><?xml version="1.0" encoding="utf-8"?>
+<file path=ppt/slides/slide22.xml><?xml version="1.0" encoding="utf-8"?>
 <p:sld xmlns:a="http://schemas.openxmlformats.org/drawingml/2006/main" xmlns:p="http://schemas.openxmlformats.org/presentationml/2006/main" xmlns:r="http://schemas.openxmlformats.org/officeDocument/2006/relationships">
   <p:cSld>
     <p:spTree>
@@ -17757,7 +18391,7 @@
                 <a:latin typeface="Garamond"/>
                 <a:cs typeface="Garamond"/>
               </a:rPr>
-              <a:t>20</a:t>
+              <a:t>21</a:t>
             </a:r>
           </a:p>
         </p:txBody>
@@ -18450,7 +19084,7 @@
 </p:sld>
 </file>
 
-<file path=ppt/slides/slide22.xml><?xml version="1.0" encoding="utf-8"?>
+<file path=ppt/slides/slide23.xml><?xml version="1.0" encoding="utf-8"?>
 <p:sld xmlns:a="http://schemas.openxmlformats.org/drawingml/2006/main" xmlns:p="http://schemas.openxmlformats.org/presentationml/2006/main" xmlns:r="http://schemas.openxmlformats.org/officeDocument/2006/relationships">
   <p:cSld>
     <p:spTree>
@@ -18750,7 +19384,7 @@
                 <a:latin typeface="Garamond"/>
                 <a:cs typeface="Garamond"/>
               </a:rPr>
-              <a:t>21</a:t>
+              <a:t>22</a:t>
             </a:r>
           </a:p>
         </p:txBody>
@@ -20347,7 +20981,7 @@
                 <a:latin typeface="Garamond"/>
                 <a:cs typeface="Garamond"/>
               </a:rPr>
-              <a:t>Market Narrative</a:t>
+              <a:t>Macro × Micro Overlap</a:t>
             </a:r>
           </a:p>
         </p:txBody>
@@ -20391,7 +21025,7 @@
                 <a:latin typeface="Garamond"/>
                 <a:cs typeface="Garamond"/>
               </a:rPr>
-              <a:t>Sentiment has capitulated — the sell-side is cutting targets into the print</a:t>
+              <a:t>A discretionary macro air pocket collided with an Americas-specific slowdown — the stock prices both at once</a:t>
             </a:r>
           </a:p>
         </p:txBody>
@@ -20479,7 +21113,7 @@
                 <a:latin typeface="Garamond"/>
                 <a:cs typeface="Garamond"/>
               </a:rPr>
-              <a:t>Source: sell-side research notes (Sep 2026); company guidance</a:t>
+              <a:t>Source: FY2025 10-K (SEC EDGAR); Q2 FY2026 release (Sep 3, 2026); FRED GDPC1 (Aug 2026)</a:t>
             </a:r>
           </a:p>
         </p:txBody>
@@ -20536,8 +21170,8 @@
         </p:nvSpPr>
         <p:spPr>
           <a:xfrm>
-            <a:off x="457200" y="1024128"/>
-            <a:ext cx="11292840" cy="5394960"/>
+            <a:off x="457200" y="1051560"/>
+            <a:ext cx="5577840" cy="5394960"/>
           </a:xfrm>
           <a:prstGeom prst="rect">
             <a:avLst/>
@@ -20567,7 +21201,7 @@
                 <a:latin typeface="Garamond"/>
                 <a:cs typeface="Garamond"/>
               </a:rPr>
-              <a:t>What the street is saying</a:t>
+              <a:t>Macro (external)</a:t>
             </a:r>
           </a:p>
           <a:p>
@@ -20582,14 +21216,14 @@
               <a:buChar char="•"/>
             </a:pPr>
             <a:r>
-              <a:rPr sz="1300" b="0" i="0">
+              <a:rPr sz="1280" b="0" i="0">
                 <a:solidFill>
                   <a:srgbClr val="262626"/>
                 </a:solidFill>
                 <a:latin typeface="Garamond"/>
                 <a:cs typeface="Garamond"/>
               </a:rPr>
-              <a:t>Consensus rating has drifted to “Hold / Reduce” with a rapidly falling target; recent cuts include Goldman Sachs and JPMorgan to $95, Morgan Stanley $93 (Underweight), Wells Fargo $95, and Bank of America to $122</a:t>
+              <a:t>Real GDP still grows ~2.1% y/y (FRED GDPC1 Q2’26 vs Q2’25) — not recession, but selective spending away from premium discretionary</a:t>
             </a:r>
           </a:p>
           <a:p>
@@ -20604,35 +21238,14 @@
               <a:buChar char="•"/>
             </a:pPr>
             <a:r>
-              <a:rPr sz="1300" b="0" i="0">
+              <a:rPr sz="1280" b="0" i="0">
                 <a:solidFill>
                   <a:srgbClr val="262626"/>
                 </a:solidFill>
                 <a:latin typeface="Garamond"/>
                 <a:cs typeface="Garamond"/>
               </a:rPr>
-              <a:t>Bear case: Americas saturation and negative comps, tariff-driven gross-margin pressure, SG&amp;A deleverage, and share loss to emerging brands (Alo, Vuori, On)</a:t>
-            </a:r>
-          </a:p>
-          <a:p>
-            <a:pPr algn="l">
-              <a:spcBef>
-                <a:spcPts val="0"/>
-              </a:spcBef>
-              <a:spcAft>
-                <a:spcPts val="500"/>
-              </a:spcAft>
-              <a:buNone/>
-            </a:pPr>
-            <a:r>
-              <a:rPr sz="1450" b="1" i="0">
-                <a:solidFill>
-                  <a:srgbClr val="990000"/>
-                </a:solidFill>
-                <a:latin typeface="Garamond"/>
-                <a:cs typeface="Garamond"/>
-              </a:rPr>
-              <a:t>Our differentiated view</a:t>
+              <a:t>Inflation and economic uncertainty weighed on Americas store traffic (10-K) — macro consumer caution shows up in micro footfall</a:t>
             </a:r>
           </a:p>
           <a:p>
@@ -20647,14 +21260,14 @@
               <a:buChar char="•"/>
             </a:pPr>
             <a:r>
-              <a:rPr sz="1300" b="0" i="0">
+              <a:rPr sz="1280" b="0" i="0">
                 <a:solidFill>
                   <a:srgbClr val="262626"/>
                 </a:solidFill>
                 <a:latin typeface="Garamond"/>
                 <a:cs typeface="Garamond"/>
               </a:rPr>
-              <a:t>The tape has moved from euphoria (30–40x earnings in 2023–24) to capitulation (~10x today) — expectations are now low enough that even a conservative recovery re-rates the stock</a:t>
+              <a:t>Tariff regime: Q2 recognized $134.5M IEEPA refunds (+560 bps GM) while new tariff layers remain an overhang on sourcing costs</a:t>
             </a:r>
           </a:p>
           <a:p>
@@ -20669,14 +21282,35 @@
               <a:buChar char="•"/>
             </a:pPr>
             <a:r>
-              <a:rPr sz="1300" b="0" i="0">
+              <a:rPr sz="1280" b="0" i="0">
                 <a:solidFill>
                   <a:srgbClr val="262626"/>
                 </a:solidFill>
                 <a:latin typeface="Garamond"/>
                 <a:cs typeface="Garamond"/>
               </a:rPr>
-              <a:t>At ~3.5x EV/EBITDA the market implicitly assumes revenue and margins decline in perpetuity; our base case only needs stabilization, not a return to peak growth</a:t>
+              <a:t>Athleisure competition intensifying at macro category level (Nike/adidas incumbents + Alo/Vuori/On challengers)</a:t>
+            </a:r>
+          </a:p>
+          <a:p>
+            <a:pPr algn="l">
+              <a:spcBef>
+                <a:spcPts val="0"/>
+              </a:spcBef>
+              <a:spcAft>
+                <a:spcPts val="500"/>
+              </a:spcAft>
+              <a:buNone/>
+            </a:pPr>
+            <a:r>
+              <a:rPr sz="1450" b="1" i="0">
+                <a:solidFill>
+                  <a:srgbClr val="990000"/>
+                </a:solidFill>
+                <a:latin typeface="Garamond"/>
+                <a:cs typeface="Garamond"/>
+              </a:rPr>
+              <a:t>Micro (company-specific)</a:t>
             </a:r>
           </a:p>
           <a:p>
@@ -20691,14 +21325,252 @@
               <a:buChar char="•"/>
             </a:pPr>
             <a:r>
-              <a:rPr sz="1300" b="0" i="0">
+              <a:rPr sz="1280" b="0" i="0">
                 <a:solidFill>
                   <a:srgbClr val="262626"/>
                 </a:solidFill>
                 <a:latin typeface="Garamond"/>
                 <a:cs typeface="Garamond"/>
               </a:rPr>
-              <a:t>Consensus is extrapolating one weak fiscal year; we underwrite the international runway and structural margins the street is discounting to zero</a:t>
+              <a:t>Americas comps: −3% FY2025 → −12% in Q2 FY2026; China +20% FY2025 but −6% in Q2 as the base scales</a:t>
+            </a:r>
+          </a:p>
+          <a:p>
+            <a:pPr algn="l" indent="-152400" marL="177800">
+              <a:spcBef>
+                <a:spcPts val="0"/>
+              </a:spcBef>
+              <a:spcAft>
+                <a:spcPts val="500"/>
+              </a:spcAft>
+              <a:buFont typeface="Garamond"/>
+              <a:buChar char="•"/>
+            </a:pPr>
+            <a:r>
+              <a:rPr sz="1280" b="0" i="0">
+                <a:solidFill>
+                  <a:srgbClr val="262626"/>
+                </a:solidFill>
+                <a:latin typeface="Garamond"/>
+                <a:cs typeface="Garamond"/>
+              </a:rPr>
+              <a:t>811 stores (+44 net FY2025) at ~$1,426/sq ft — still opening doors while mature-region comps turn negative</a:t>
+            </a:r>
+          </a:p>
+          <a:p>
+            <a:pPr algn="l" indent="-152400" marL="177800">
+              <a:spcBef>
+                <a:spcPts val="0"/>
+              </a:spcBef>
+              <a:spcAft>
+                <a:spcPts val="500"/>
+              </a:spcAft>
+              <a:buFont typeface="Garamond"/>
+              <a:buChar char="•"/>
+            </a:pPr>
+            <a:r>
+              <a:rPr sz="1280" b="0" i="0">
+                <a:solidFill>
+                  <a:srgbClr val="262626"/>
+                </a:solidFill>
+                <a:latin typeface="Garamond"/>
+                <a:cs typeface="Garamond"/>
+              </a:rPr>
+              <a:t>FY2026 guide: first annual revenue decline (−5% to −7%) and EPS $9.48–$9.73; Q3 guide −10% to −11%</a:t>
+            </a:r>
+          </a:p>
+          <a:p>
+            <a:pPr algn="l" indent="-152400" marL="177800">
+              <a:spcBef>
+                <a:spcPts val="0"/>
+              </a:spcBef>
+              <a:spcAft>
+                <a:spcPts val="500"/>
+              </a:spcAft>
+              <a:buFont typeface="Garamond"/>
+              <a:buChar char="•"/>
+            </a:pPr>
+            <a:r>
+              <a:rPr sz="1280" b="0" i="0">
+                <a:solidFill>
+                  <a:srgbClr val="262626"/>
+                </a:solidFill>
+                <a:latin typeface="Garamond"/>
+                <a:cs typeface="Garamond"/>
+              </a:rPr>
+              <a:t>Clean run-rate EBIT margin ~13.2% (Q2 18.8% OM minus 560 bps tariff boost) — investors who miss this overstate sustainable margin</a:t>
+            </a:r>
+          </a:p>
+        </p:txBody>
+      </p:sp>
+      <p:sp>
+        <p:nvSpPr>
+          <p:cNvPr id="9" name="Rectangle 8"/>
+          <p:cNvSpPr/>
+          <p:nvPr/>
+        </p:nvSpPr>
+        <p:spPr>
+          <a:xfrm>
+            <a:off x="6263640" y="1051560"/>
+            <a:ext cx="5486400" cy="5029200"/>
+          </a:xfrm>
+          <a:prstGeom prst="rect">
+            <a:avLst/>
+          </a:prstGeom>
+          <a:solidFill>
+            <a:srgbClr val="1F2A44"/>
+          </a:solidFill>
+          <a:ln>
+            <a:noFill/>
+          </a:ln>
+          <a:effectLst/>
+        </p:spPr>
+        <p:style>
+          <a:lnRef idx="1">
+            <a:schemeClr val="accent1"/>
+          </a:lnRef>
+          <a:fillRef idx="3">
+            <a:schemeClr val="accent1"/>
+          </a:fillRef>
+          <a:effectRef idx="2">
+            <a:schemeClr val="accent1"/>
+          </a:effectRef>
+          <a:fontRef idx="minor">
+            <a:schemeClr val="lt1"/>
+          </a:fontRef>
+        </p:style>
+        <p:txBody>
+          <a:bodyPr rtlCol="0" anchor="ctr" wrap="square"/>
+          <a:lstStyle/>
+          <a:p>
+            <a:pPr algn="l">
+              <a:spcBef>
+                <a:spcPts val="0"/>
+              </a:spcBef>
+              <a:spcAft>
+                <a:spcPts val="800"/>
+              </a:spcAft>
+              <a:buNone/>
+            </a:pPr>
+            <a:r>
+              <a:rPr sz="1250" b="1" i="0">
+                <a:solidFill>
+                  <a:srgbClr val="FFC72C"/>
+                </a:solidFill>
+                <a:latin typeface="Garamond"/>
+                <a:cs typeface="Garamond"/>
+              </a:rPr>
+              <a:t>OVERLAP — WHY $100</a:t>
+            </a:r>
+          </a:p>
+          <a:p>
+            <a:pPr algn="l" indent="-152400" marL="177800">
+              <a:spcBef>
+                <a:spcPts val="0"/>
+              </a:spcBef>
+              <a:spcAft>
+                <a:spcPts val="600"/>
+              </a:spcAft>
+              <a:buFont typeface="Garamond"/>
+              <a:buChar char="•"/>
+            </a:pPr>
+            <a:r>
+              <a:rPr sz="1250" b="0" i="0">
+                <a:solidFill>
+                  <a:srgbClr val="FFFFFF"/>
+                </a:solidFill>
+                <a:latin typeface="Garamond"/>
+                <a:cs typeface="Garamond"/>
+              </a:rPr>
+              <a:t>Macro weakness maps onto LULU’s largest profit pool: Americas ~71% of FY25 revenue</a:t>
+            </a:r>
+          </a:p>
+          <a:p>
+            <a:pPr algn="l" indent="-152400" marL="177800">
+              <a:spcBef>
+                <a:spcPts val="0"/>
+              </a:spcBef>
+              <a:spcAft>
+                <a:spcPts val="600"/>
+              </a:spcAft>
+              <a:buFont typeface="Garamond"/>
+              <a:buChar char="•"/>
+            </a:pPr>
+            <a:r>
+              <a:rPr sz="1250" b="0" i="0">
+                <a:solidFill>
+                  <a:srgbClr val="FFFFFF"/>
+                </a:solidFill>
+                <a:latin typeface="Garamond"/>
+                <a:cs typeface="Garamond"/>
+              </a:rPr>
+              <a:t>Tariff is simultaneously macro policy and micro P&amp;L — Q2 optics mask run-rate margin</a:t>
+            </a:r>
+          </a:p>
+          <a:p>
+            <a:pPr algn="l" indent="-152400" marL="177800">
+              <a:spcBef>
+                <a:spcPts val="0"/>
+              </a:spcBef>
+              <a:spcAft>
+                <a:spcPts val="600"/>
+              </a:spcAft>
+              <a:buFont typeface="Garamond"/>
+              <a:buChar char="•"/>
+            </a:pPr>
+            <a:r>
+              <a:rPr sz="1250" b="0" i="0">
+                <a:solidFill>
+                  <a:srgbClr val="FFFFFF"/>
+                </a:solidFill>
+                <a:latin typeface="Garamond"/>
+                <a:cs typeface="Garamond"/>
+              </a:rPr>
+              <a:t>The de-rating blends macro fear with a micro guide miss; both are largely in the price at ~10x FY26E EPS</a:t>
+            </a:r>
+          </a:p>
+          <a:p>
+            <a:pPr algn="l" indent="-152400" marL="177800">
+              <a:spcBef>
+                <a:spcPts val="0"/>
+              </a:spcBef>
+              <a:spcAft>
+                <a:spcPts val="600"/>
+              </a:spcAft>
+              <a:buFont typeface="Garamond"/>
+              <a:buChar char="•"/>
+            </a:pPr>
+            <a:r>
+              <a:rPr sz="1250" b="0" i="0">
+                <a:solidFill>
+                  <a:srgbClr val="FFFFFF"/>
+                </a:solidFill>
+                <a:latin typeface="Garamond"/>
+                <a:cs typeface="Garamond"/>
+              </a:rPr>
+              <a:t>Our edge: underwrite trough economics (13.2% → 15.5% OM), not a return to 30x earnings</a:t>
+            </a:r>
+          </a:p>
+          <a:p>
+            <a:pPr algn="l" indent="-152400" marL="177800">
+              <a:spcBef>
+                <a:spcPts val="0"/>
+              </a:spcBef>
+              <a:spcAft>
+                <a:spcPts val="600"/>
+              </a:spcAft>
+              <a:buFont typeface="Garamond"/>
+              <a:buChar char="•"/>
+            </a:pPr>
+            <a:r>
+              <a:rPr sz="1250" b="0" i="0">
+                <a:solidFill>
+                  <a:srgbClr val="FFFFFF"/>
+                </a:solidFill>
+                <a:latin typeface="Garamond"/>
+                <a:cs typeface="Garamond"/>
+              </a:rPr>
+              <a:t>International micro growth (China/RoW) is the bridge — but needs macro stability, not a free option</a:t>
             </a:r>
           </a:p>
         </p:txBody>
@@ -20835,7 +21707,7 @@
                 <a:latin typeface="Garamond"/>
                 <a:cs typeface="Garamond"/>
               </a:rPr>
-              <a:t>Company Overview</a:t>
+              <a:t>Market Narrative</a:t>
             </a:r>
           </a:p>
         </p:txBody>
@@ -20879,7 +21751,7 @@
                 <a:latin typeface="Garamond"/>
                 <a:cs typeface="Garamond"/>
               </a:rPr>
-              <a:t>A vertically integrated, direct-to-consumer technical apparel brand</a:t>
+              <a:t>Sentiment has capitulated — the sell-side is cutting targets into the print</a:t>
             </a:r>
           </a:p>
         </p:txBody>
@@ -20967,7 +21839,7 @@
                 <a:latin typeface="Garamond"/>
                 <a:cs typeface="Garamond"/>
               </a:rPr>
-              <a:t>Source: company SEC filings (Form 10-K, CIK 0001397187)</a:t>
+              <a:t>Source: sell-side research notes (Sep 2026); company guidance</a:t>
             </a:r>
           </a:p>
         </p:txBody>
@@ -21012,6 +21884,494 @@
                 <a:cs typeface="Garamond"/>
               </a:rPr>
               <a:t>5</a:t>
+            </a:r>
+          </a:p>
+        </p:txBody>
+      </p:sp>
+      <p:sp>
+        <p:nvSpPr>
+          <p:cNvPr id="8" name="TextBox 7"/>
+          <p:cNvSpPr txBox="1"/>
+          <p:nvPr/>
+        </p:nvSpPr>
+        <p:spPr>
+          <a:xfrm>
+            <a:off x="457200" y="1024128"/>
+            <a:ext cx="11292840" cy="5394960"/>
+          </a:xfrm>
+          <a:prstGeom prst="rect">
+            <a:avLst/>
+          </a:prstGeom>
+          <a:noFill/>
+        </p:spPr>
+        <p:txBody>
+          <a:bodyPr wrap="square" anchor="t" lIns="25400" rIns="25400" tIns="12700" bIns="12700">
+            <a:spAutoFit/>
+          </a:bodyPr>
+          <a:lstStyle/>
+          <a:p>
+            <a:pPr algn="l">
+              <a:spcBef>
+                <a:spcPts val="0"/>
+              </a:spcBef>
+              <a:spcAft>
+                <a:spcPts val="500"/>
+              </a:spcAft>
+              <a:buNone/>
+            </a:pPr>
+            <a:r>
+              <a:rPr sz="1450" b="1" i="0">
+                <a:solidFill>
+                  <a:srgbClr val="990000"/>
+                </a:solidFill>
+                <a:latin typeface="Garamond"/>
+                <a:cs typeface="Garamond"/>
+              </a:rPr>
+              <a:t>What the street is saying</a:t>
+            </a:r>
+          </a:p>
+          <a:p>
+            <a:pPr algn="l" indent="-152400" marL="177800">
+              <a:spcBef>
+                <a:spcPts val="0"/>
+              </a:spcBef>
+              <a:spcAft>
+                <a:spcPts val="500"/>
+              </a:spcAft>
+              <a:buFont typeface="Garamond"/>
+              <a:buChar char="•"/>
+            </a:pPr>
+            <a:r>
+              <a:rPr sz="1300" b="0" i="0">
+                <a:solidFill>
+                  <a:srgbClr val="262626"/>
+                </a:solidFill>
+                <a:latin typeface="Garamond"/>
+                <a:cs typeface="Garamond"/>
+              </a:rPr>
+              <a:t>Consensus rating has drifted to “Hold / Reduce” with a rapidly falling target; recent cuts include Goldman Sachs and JPMorgan to $95, Morgan Stanley $93 (Underweight), Wells Fargo $95, and Bank of America to $122</a:t>
+            </a:r>
+          </a:p>
+          <a:p>
+            <a:pPr algn="l" indent="-152400" marL="177800">
+              <a:spcBef>
+                <a:spcPts val="0"/>
+              </a:spcBef>
+              <a:spcAft>
+                <a:spcPts val="500"/>
+              </a:spcAft>
+              <a:buFont typeface="Garamond"/>
+              <a:buChar char="•"/>
+            </a:pPr>
+            <a:r>
+              <a:rPr sz="1300" b="0" i="0">
+                <a:solidFill>
+                  <a:srgbClr val="262626"/>
+                </a:solidFill>
+                <a:latin typeface="Garamond"/>
+                <a:cs typeface="Garamond"/>
+              </a:rPr>
+              <a:t>Bear case: Americas saturation and negative comps, tariff-driven gross-margin pressure, SG&amp;A deleverage, and share loss to emerging brands (Alo, Vuori, On)</a:t>
+            </a:r>
+          </a:p>
+          <a:p>
+            <a:pPr algn="l">
+              <a:spcBef>
+                <a:spcPts val="0"/>
+              </a:spcBef>
+              <a:spcAft>
+                <a:spcPts val="500"/>
+              </a:spcAft>
+              <a:buNone/>
+            </a:pPr>
+            <a:r>
+              <a:rPr sz="1450" b="1" i="0">
+                <a:solidFill>
+                  <a:srgbClr val="990000"/>
+                </a:solidFill>
+                <a:latin typeface="Garamond"/>
+                <a:cs typeface="Garamond"/>
+              </a:rPr>
+              <a:t>Our differentiated view</a:t>
+            </a:r>
+          </a:p>
+          <a:p>
+            <a:pPr algn="l" indent="-152400" marL="177800">
+              <a:spcBef>
+                <a:spcPts val="0"/>
+              </a:spcBef>
+              <a:spcAft>
+                <a:spcPts val="500"/>
+              </a:spcAft>
+              <a:buFont typeface="Garamond"/>
+              <a:buChar char="•"/>
+            </a:pPr>
+            <a:r>
+              <a:rPr sz="1300" b="0" i="0">
+                <a:solidFill>
+                  <a:srgbClr val="262626"/>
+                </a:solidFill>
+                <a:latin typeface="Garamond"/>
+                <a:cs typeface="Garamond"/>
+              </a:rPr>
+              <a:t>The tape has moved from euphoria (30–40x earnings in 2023–24) to capitulation (~10x today) — expectations are now low enough that even a conservative recovery re-rates the stock</a:t>
+            </a:r>
+          </a:p>
+          <a:p>
+            <a:pPr algn="l" indent="-152400" marL="177800">
+              <a:spcBef>
+                <a:spcPts val="0"/>
+              </a:spcBef>
+              <a:spcAft>
+                <a:spcPts val="500"/>
+              </a:spcAft>
+              <a:buFont typeface="Garamond"/>
+              <a:buChar char="•"/>
+            </a:pPr>
+            <a:r>
+              <a:rPr sz="1300" b="0" i="0">
+                <a:solidFill>
+                  <a:srgbClr val="262626"/>
+                </a:solidFill>
+                <a:latin typeface="Garamond"/>
+                <a:cs typeface="Garamond"/>
+              </a:rPr>
+              <a:t>At ~3.5x EV/EBITDA the market implicitly assumes revenue and margins decline in perpetuity; our base case only needs stabilization, not a return to peak growth</a:t>
+            </a:r>
+          </a:p>
+          <a:p>
+            <a:pPr algn="l" indent="-152400" marL="177800">
+              <a:spcBef>
+                <a:spcPts val="0"/>
+              </a:spcBef>
+              <a:spcAft>
+                <a:spcPts val="500"/>
+              </a:spcAft>
+              <a:buFont typeface="Garamond"/>
+              <a:buChar char="•"/>
+            </a:pPr>
+            <a:r>
+              <a:rPr sz="1300" b="0" i="0">
+                <a:solidFill>
+                  <a:srgbClr val="262626"/>
+                </a:solidFill>
+                <a:latin typeface="Garamond"/>
+                <a:cs typeface="Garamond"/>
+              </a:rPr>
+              <a:t>Consensus is extrapolating one weak fiscal year; we underwrite the international runway and structural margins the street is discounting to zero</a:t>
+            </a:r>
+          </a:p>
+        </p:txBody>
+      </p:sp>
+    </p:spTree>
+  </p:cSld>
+  <p:clrMapOvr>
+    <a:masterClrMapping/>
+  </p:clrMapOvr>
+</p:sld>
+</file>
+
+<file path=ppt/slides/slide7.xml><?xml version="1.0" encoding="utf-8"?>
+<p:sld xmlns:a="http://schemas.openxmlformats.org/drawingml/2006/main" xmlns:p="http://schemas.openxmlformats.org/presentationml/2006/main" xmlns:r="http://schemas.openxmlformats.org/officeDocument/2006/relationships">
+  <p:cSld>
+    <p:spTree>
+      <p:nvGrpSpPr>
+        <p:cNvPr id="1" name=""/>
+        <p:cNvGrpSpPr/>
+        <p:nvPr/>
+      </p:nvGrpSpPr>
+      <p:grpSpPr/>
+      <p:sp>
+        <p:nvSpPr>
+          <p:cNvPr id="2" name="TextBox 1"/>
+          <p:cNvSpPr txBox="1"/>
+          <p:nvPr/>
+        </p:nvSpPr>
+        <p:spPr>
+          <a:xfrm>
+            <a:off x="411480" y="164592"/>
+            <a:ext cx="5943600" cy="502920"/>
+          </a:xfrm>
+          <a:prstGeom prst="rect">
+            <a:avLst/>
+          </a:prstGeom>
+          <a:noFill/>
+        </p:spPr>
+        <p:txBody>
+          <a:bodyPr wrap="square" anchor="t" lIns="25400" rIns="25400" tIns="12700" bIns="12700">
+            <a:spAutoFit/>
+          </a:bodyPr>
+          <a:lstStyle/>
+          <a:p>
+            <a:pPr algn="l">
+              <a:spcBef>
+                <a:spcPts val="0"/>
+              </a:spcBef>
+              <a:spcAft>
+                <a:spcPts val="0"/>
+              </a:spcAft>
+              <a:buNone/>
+            </a:pPr>
+            <a:r>
+              <a:rPr sz="1100" b="1" i="0">
+                <a:solidFill>
+                  <a:srgbClr val="990000"/>
+                </a:solidFill>
+                <a:latin typeface="Garamond"/>
+                <a:cs typeface="Garamond"/>
+              </a:rPr>
+              <a:t>Investment Research Division</a:t>
+            </a:r>
+          </a:p>
+          <a:p>
+            <a:pPr algn="l">
+              <a:spcBef>
+                <a:spcPts val="0"/>
+              </a:spcBef>
+              <a:spcAft>
+                <a:spcPts val="0"/>
+              </a:spcAft>
+              <a:buNone/>
+            </a:pPr>
+            <a:r>
+              <a:rPr sz="1250" b="1" i="0">
+                <a:solidFill>
+                  <a:srgbClr val="1F2A44"/>
+                </a:solidFill>
+                <a:latin typeface="Garamond"/>
+                <a:cs typeface="Garamond"/>
+              </a:rPr>
+              <a:t>lululemon athletica (NASDAQ: LULU)</a:t>
+            </a:r>
+          </a:p>
+        </p:txBody>
+      </p:sp>
+      <p:sp>
+        <p:nvSpPr>
+          <p:cNvPr id="3" name="Rectangle 2"/>
+          <p:cNvSpPr/>
+          <p:nvPr/>
+        </p:nvSpPr>
+        <p:spPr>
+          <a:xfrm>
+            <a:off x="5486400" y="201168"/>
+            <a:ext cx="6309360" cy="274320"/>
+          </a:xfrm>
+          <a:prstGeom prst="rect">
+            <a:avLst/>
+          </a:prstGeom>
+          <a:solidFill>
+            <a:srgbClr val="1F2A44"/>
+          </a:solidFill>
+          <a:ln>
+            <a:noFill/>
+          </a:ln>
+          <a:effectLst/>
+        </p:spPr>
+        <p:style>
+          <a:lnRef idx="1">
+            <a:schemeClr val="accent1"/>
+          </a:lnRef>
+          <a:fillRef idx="3">
+            <a:schemeClr val="accent1"/>
+          </a:fillRef>
+          <a:effectRef idx="2">
+            <a:schemeClr val="accent1"/>
+          </a:effectRef>
+          <a:fontRef idx="minor">
+            <a:schemeClr val="lt1"/>
+          </a:fontRef>
+        </p:style>
+        <p:txBody>
+          <a:bodyPr rtlCol="0" anchor="ctr" wrap="square" tIns="0" bIns="0" rIns="76200"/>
+          <a:lstStyle/>
+          <a:p>
+            <a:pPr algn="r"/>
+            <a:r>
+              <a:rPr sz="1500" b="1" i="0">
+                <a:solidFill>
+                  <a:srgbClr val="FFFFFF"/>
+                </a:solidFill>
+                <a:latin typeface="Garamond"/>
+                <a:cs typeface="Garamond"/>
+              </a:rPr>
+              <a:t>Company Overview</a:t>
+            </a:r>
+          </a:p>
+        </p:txBody>
+      </p:sp>
+      <p:sp>
+        <p:nvSpPr>
+          <p:cNvPr id="4" name="TextBox 3"/>
+          <p:cNvSpPr txBox="1"/>
+          <p:nvPr/>
+        </p:nvSpPr>
+        <p:spPr>
+          <a:xfrm>
+            <a:off x="411480" y="566928"/>
+            <a:ext cx="11384280" cy="310896"/>
+          </a:xfrm>
+          <a:prstGeom prst="rect">
+            <a:avLst/>
+          </a:prstGeom>
+          <a:noFill/>
+        </p:spPr>
+        <p:txBody>
+          <a:bodyPr wrap="square" anchor="t" lIns="25400" rIns="25400" tIns="12700" bIns="12700">
+            <a:spAutoFit/>
+          </a:bodyPr>
+          <a:lstStyle/>
+          <a:p>
+            <a:pPr algn="l">
+              <a:spcBef>
+                <a:spcPts val="0"/>
+              </a:spcBef>
+              <a:spcAft>
+                <a:spcPts val="0"/>
+              </a:spcAft>
+              <a:buNone/>
+            </a:pPr>
+            <a:r>
+              <a:rPr sz="1250" b="0" i="1">
+                <a:solidFill>
+                  <a:srgbClr val="8C8C8C"/>
+                </a:solidFill>
+                <a:latin typeface="Garamond"/>
+                <a:cs typeface="Garamond"/>
+              </a:rPr>
+              <a:t>A vertically integrated, direct-to-consumer technical apparel brand</a:t>
+            </a:r>
+          </a:p>
+        </p:txBody>
+      </p:sp>
+      <p:sp>
+        <p:nvSpPr>
+          <p:cNvPr id="5" name="Rectangle 4"/>
+          <p:cNvSpPr/>
+          <p:nvPr/>
+        </p:nvSpPr>
+        <p:spPr>
+          <a:xfrm>
+            <a:off x="411480" y="896112"/>
+            <a:ext cx="11384280" cy="20320"/>
+          </a:xfrm>
+          <a:prstGeom prst="rect">
+            <a:avLst/>
+          </a:prstGeom>
+          <a:solidFill>
+            <a:srgbClr val="FFC72C"/>
+          </a:solidFill>
+          <a:ln>
+            <a:noFill/>
+          </a:ln>
+          <a:effectLst/>
+        </p:spPr>
+        <p:style>
+          <a:lnRef idx="1">
+            <a:schemeClr val="accent1"/>
+          </a:lnRef>
+          <a:fillRef idx="3">
+            <a:schemeClr val="accent1"/>
+          </a:fillRef>
+          <a:effectRef idx="2">
+            <a:schemeClr val="accent1"/>
+          </a:effectRef>
+          <a:fontRef idx="minor">
+            <a:schemeClr val="lt1"/>
+          </a:fontRef>
+        </p:style>
+        <p:txBody>
+          <a:bodyPr rtlCol="0" anchor="ctr"/>
+          <a:lstStyle/>
+          <a:p>
+            <a:pPr algn="ctr"/>
+          </a:p>
+        </p:txBody>
+      </p:sp>
+      <p:sp>
+        <p:nvSpPr>
+          <p:cNvPr id="6" name="TextBox 5"/>
+          <p:cNvSpPr txBox="1"/>
+          <p:nvPr/>
+        </p:nvSpPr>
+        <p:spPr>
+          <a:xfrm>
+            <a:off x="411480" y="6510528"/>
+            <a:ext cx="11384280" cy="274320"/>
+          </a:xfrm>
+          <a:prstGeom prst="rect">
+            <a:avLst/>
+          </a:prstGeom>
+          <a:noFill/>
+        </p:spPr>
+        <p:txBody>
+          <a:bodyPr wrap="square" anchor="t" lIns="25400" rIns="25400" tIns="12700" bIns="12700">
+            <a:spAutoFit/>
+          </a:bodyPr>
+          <a:lstStyle/>
+          <a:p>
+            <a:pPr algn="l">
+              <a:spcBef>
+                <a:spcPts val="0"/>
+              </a:spcBef>
+              <a:spcAft>
+                <a:spcPts val="0"/>
+              </a:spcAft>
+              <a:buNone/>
+            </a:pPr>
+            <a:r>
+              <a:rPr sz="850" b="0" i="0">
+                <a:solidFill>
+                  <a:srgbClr val="8C8C8C"/>
+                </a:solidFill>
+                <a:latin typeface="Garamond"/>
+                <a:cs typeface="Garamond"/>
+              </a:rPr>
+              <a:t>Source: company SEC filings (Form 10-K, CIK 0001397187)</a:t>
+            </a:r>
+          </a:p>
+        </p:txBody>
+      </p:sp>
+      <p:sp>
+        <p:nvSpPr>
+          <p:cNvPr id="7" name="TextBox 6"/>
+          <p:cNvSpPr txBox="1"/>
+          <p:nvPr/>
+        </p:nvSpPr>
+        <p:spPr>
+          <a:xfrm>
+            <a:off x="11247120" y="6510528"/>
+            <a:ext cx="822960" cy="274320"/>
+          </a:xfrm>
+          <a:prstGeom prst="rect">
+            <a:avLst/>
+          </a:prstGeom>
+          <a:noFill/>
+        </p:spPr>
+        <p:txBody>
+          <a:bodyPr wrap="square" anchor="t" lIns="25400" rIns="25400" tIns="12700" bIns="12700">
+            <a:spAutoFit/>
+          </a:bodyPr>
+          <a:lstStyle/>
+          <a:p>
+            <a:pPr algn="r">
+              <a:spcBef>
+                <a:spcPts val="0"/>
+              </a:spcBef>
+              <a:spcAft>
+                <a:spcPts val="0"/>
+              </a:spcAft>
+              <a:buNone/>
+            </a:pPr>
+            <a:r>
+              <a:rPr sz="900" b="0" i="0">
+                <a:solidFill>
+                  <a:srgbClr val="8C8C8C"/>
+                </a:solidFill>
+                <a:latin typeface="Garamond"/>
+                <a:cs typeface="Garamond"/>
+              </a:rPr>
+              <a:t>6</a:t>
             </a:r>
           </a:p>
         </p:txBody>
@@ -21431,7 +22791,7 @@
 </p:sld>
 </file>
 
-<file path=ppt/slides/slide7.xml><?xml version="1.0" encoding="utf-8"?>
+<file path=ppt/slides/slide8.xml><?xml version="1.0" encoding="utf-8"?>
 <p:sld xmlns:a="http://schemas.openxmlformats.org/drawingml/2006/main" xmlns:p="http://schemas.openxmlformats.org/presentationml/2006/main" xmlns:r="http://schemas.openxmlformats.org/officeDocument/2006/relationships">
   <p:cSld>
     <p:spTree>
@@ -21731,7 +23091,7 @@
                 <a:latin typeface="Garamond"/>
                 <a:cs typeface="Garamond"/>
               </a:rPr>
-              <a:t>6</a:t>
+              <a:t>7</a:t>
             </a:r>
           </a:p>
         </p:txBody>
@@ -22131,7 +23491,7 @@
 </p:sld>
 </file>
 
-<file path=ppt/slides/slide8.xml><?xml version="1.0" encoding="utf-8"?>
+<file path=ppt/slides/slide9.xml><?xml version="1.0" encoding="utf-8"?>
 <p:sld xmlns:a="http://schemas.openxmlformats.org/drawingml/2006/main" xmlns:p="http://schemas.openxmlformats.org/presentationml/2006/main" xmlns:r="http://schemas.openxmlformats.org/officeDocument/2006/relationships">
   <p:cSld>
     <p:spTree>
@@ -22431,7 +23791,7 @@
                 <a:latin typeface="Garamond"/>
                 <a:cs typeface="Garamond"/>
               </a:rPr>
-              <a:t>7</a:t>
+              <a:t>8</a:t>
             </a:r>
           </a:p>
         </p:txBody>
@@ -22629,618 +23989,6 @@
                 <a:cs typeface="Garamond"/>
               </a:rPr>
               <a:t>Competition is real but LULU's scale, innovation cadence and community remain differentiated</a:t>
-            </a:r>
-          </a:p>
-        </p:txBody>
-      </p:sp>
-    </p:spTree>
-  </p:cSld>
-  <p:clrMapOvr>
-    <a:masterClrMapping/>
-  </p:clrMapOvr>
-</p:sld>
-</file>
-
-<file path=ppt/slides/slide9.xml><?xml version="1.0" encoding="utf-8"?>
-<p:sld xmlns:a="http://schemas.openxmlformats.org/drawingml/2006/main" xmlns:p="http://schemas.openxmlformats.org/presentationml/2006/main" xmlns:r="http://schemas.openxmlformats.org/officeDocument/2006/relationships">
-  <p:cSld>
-    <p:spTree>
-      <p:nvGrpSpPr>
-        <p:cNvPr id="1" name=""/>
-        <p:cNvGrpSpPr/>
-        <p:nvPr/>
-      </p:nvGrpSpPr>
-      <p:grpSpPr/>
-      <p:sp>
-        <p:nvSpPr>
-          <p:cNvPr id="2" name="TextBox 1"/>
-          <p:cNvSpPr txBox="1"/>
-          <p:nvPr/>
-        </p:nvSpPr>
-        <p:spPr>
-          <a:xfrm>
-            <a:off x="411480" y="164592"/>
-            <a:ext cx="5943600" cy="502920"/>
-          </a:xfrm>
-          <a:prstGeom prst="rect">
-            <a:avLst/>
-          </a:prstGeom>
-          <a:noFill/>
-        </p:spPr>
-        <p:txBody>
-          <a:bodyPr wrap="square" anchor="t" lIns="25400" rIns="25400" tIns="12700" bIns="12700">
-            <a:spAutoFit/>
-          </a:bodyPr>
-          <a:lstStyle/>
-          <a:p>
-            <a:pPr algn="l">
-              <a:spcBef>
-                <a:spcPts val="0"/>
-              </a:spcBef>
-              <a:spcAft>
-                <a:spcPts val="0"/>
-              </a:spcAft>
-              <a:buNone/>
-            </a:pPr>
-            <a:r>
-              <a:rPr sz="1100" b="1" i="0">
-                <a:solidFill>
-                  <a:srgbClr val="990000"/>
-                </a:solidFill>
-                <a:latin typeface="Garamond"/>
-                <a:cs typeface="Garamond"/>
-              </a:rPr>
-              <a:t>Investment Research Division</a:t>
-            </a:r>
-          </a:p>
-          <a:p>
-            <a:pPr algn="l">
-              <a:spcBef>
-                <a:spcPts val="0"/>
-              </a:spcBef>
-              <a:spcAft>
-                <a:spcPts val="0"/>
-              </a:spcAft>
-              <a:buNone/>
-            </a:pPr>
-            <a:r>
-              <a:rPr sz="1250" b="1" i="0">
-                <a:solidFill>
-                  <a:srgbClr val="1F2A44"/>
-                </a:solidFill>
-                <a:latin typeface="Garamond"/>
-                <a:cs typeface="Garamond"/>
-              </a:rPr>
-              <a:t>lululemon athletica (NASDAQ: LULU)</a:t>
-            </a:r>
-          </a:p>
-        </p:txBody>
-      </p:sp>
-      <p:sp>
-        <p:nvSpPr>
-          <p:cNvPr id="3" name="Rectangle 2"/>
-          <p:cNvSpPr/>
-          <p:nvPr/>
-        </p:nvSpPr>
-        <p:spPr>
-          <a:xfrm>
-            <a:off x="5486400" y="201168"/>
-            <a:ext cx="6309360" cy="274320"/>
-          </a:xfrm>
-          <a:prstGeom prst="rect">
-            <a:avLst/>
-          </a:prstGeom>
-          <a:solidFill>
-            <a:srgbClr val="1F2A44"/>
-          </a:solidFill>
-          <a:ln>
-            <a:noFill/>
-          </a:ln>
-          <a:effectLst/>
-        </p:spPr>
-        <p:style>
-          <a:lnRef idx="1">
-            <a:schemeClr val="accent1"/>
-          </a:lnRef>
-          <a:fillRef idx="3">
-            <a:schemeClr val="accent1"/>
-          </a:fillRef>
-          <a:effectRef idx="2">
-            <a:schemeClr val="accent1"/>
-          </a:effectRef>
-          <a:fontRef idx="minor">
-            <a:schemeClr val="lt1"/>
-          </a:fontRef>
-        </p:style>
-        <p:txBody>
-          <a:bodyPr rtlCol="0" anchor="ctr" wrap="square" tIns="0" bIns="0" rIns="76200"/>
-          <a:lstStyle/>
-          <a:p>
-            <a:pPr algn="r"/>
-            <a:r>
-              <a:rPr sz="1500" b="1" i="0">
-                <a:solidFill>
-                  <a:srgbClr val="FFFFFF"/>
-                </a:solidFill>
-                <a:latin typeface="Garamond"/>
-                <a:cs typeface="Garamond"/>
-              </a:rPr>
-              <a:t>Investment Thesis I</a:t>
-            </a:r>
-          </a:p>
-        </p:txBody>
-      </p:sp>
-      <p:sp>
-        <p:nvSpPr>
-          <p:cNvPr id="4" name="TextBox 3"/>
-          <p:cNvSpPr txBox="1"/>
-          <p:nvPr/>
-        </p:nvSpPr>
-        <p:spPr>
-          <a:xfrm>
-            <a:off x="411480" y="566928"/>
-            <a:ext cx="11384280" cy="310896"/>
-          </a:xfrm>
-          <a:prstGeom prst="rect">
-            <a:avLst/>
-          </a:prstGeom>
-          <a:noFill/>
-        </p:spPr>
-        <p:txBody>
-          <a:bodyPr wrap="square" anchor="t" lIns="25400" rIns="25400" tIns="12700" bIns="12700">
-            <a:spAutoFit/>
-          </a:bodyPr>
-          <a:lstStyle/>
-          <a:p>
-            <a:pPr algn="l">
-              <a:spcBef>
-                <a:spcPts val="0"/>
-              </a:spcBef>
-              <a:spcAft>
-                <a:spcPts val="0"/>
-              </a:spcAft>
-              <a:buNone/>
-            </a:pPr>
-            <a:r>
-              <a:rPr sz="1250" b="0" i="1">
-                <a:solidFill>
-                  <a:srgbClr val="8C8C8C"/>
-                </a:solidFill>
-                <a:latin typeface="Garamond"/>
-                <a:cs typeface="Garamond"/>
-              </a:rPr>
-              <a:t>The valuation already discounts a permanently shrinking business</a:t>
-            </a:r>
-          </a:p>
-        </p:txBody>
-      </p:sp>
-      <p:sp>
-        <p:nvSpPr>
-          <p:cNvPr id="5" name="Rectangle 4"/>
-          <p:cNvSpPr/>
-          <p:nvPr/>
-        </p:nvSpPr>
-        <p:spPr>
-          <a:xfrm>
-            <a:off x="411480" y="896112"/>
-            <a:ext cx="11384280" cy="20320"/>
-          </a:xfrm>
-          <a:prstGeom prst="rect">
-            <a:avLst/>
-          </a:prstGeom>
-          <a:solidFill>
-            <a:srgbClr val="FFC72C"/>
-          </a:solidFill>
-          <a:ln>
-            <a:noFill/>
-          </a:ln>
-          <a:effectLst/>
-        </p:spPr>
-        <p:style>
-          <a:lnRef idx="1">
-            <a:schemeClr val="accent1"/>
-          </a:lnRef>
-          <a:fillRef idx="3">
-            <a:schemeClr val="accent1"/>
-          </a:fillRef>
-          <a:effectRef idx="2">
-            <a:schemeClr val="accent1"/>
-          </a:effectRef>
-          <a:fontRef idx="minor">
-            <a:schemeClr val="lt1"/>
-          </a:fontRef>
-        </p:style>
-        <p:txBody>
-          <a:bodyPr rtlCol="0" anchor="ctr"/>
-          <a:lstStyle/>
-          <a:p>
-            <a:pPr algn="ctr"/>
-          </a:p>
-        </p:txBody>
-      </p:sp>
-      <p:sp>
-        <p:nvSpPr>
-          <p:cNvPr id="6" name="TextBox 5"/>
-          <p:cNvSpPr txBox="1"/>
-          <p:nvPr/>
-        </p:nvSpPr>
-        <p:spPr>
-          <a:xfrm>
-            <a:off x="411480" y="6510528"/>
-            <a:ext cx="11384280" cy="274320"/>
-          </a:xfrm>
-          <a:prstGeom prst="rect">
-            <a:avLst/>
-          </a:prstGeom>
-          <a:noFill/>
-        </p:spPr>
-        <p:txBody>
-          <a:bodyPr wrap="square" anchor="t" lIns="25400" rIns="25400" tIns="12700" bIns="12700">
-            <a:spAutoFit/>
-          </a:bodyPr>
-          <a:lstStyle/>
-          <a:p>
-            <a:pPr algn="l">
-              <a:spcBef>
-                <a:spcPts val="0"/>
-              </a:spcBef>
-              <a:spcAft>
-                <a:spcPts val="0"/>
-              </a:spcAft>
-              <a:buNone/>
-            </a:pPr>
-            <a:r>
-              <a:rPr sz="850" b="0" i="0">
-                <a:solidFill>
-                  <a:srgbClr val="8C8C8C"/>
-                </a:solidFill>
-                <a:latin typeface="Garamond"/>
-                <a:cs typeface="Garamond"/>
-              </a:rPr>
-              <a:t>Source: company SEC filings (Form 10-K, CIK 0001397187)</a:t>
-            </a:r>
-          </a:p>
-        </p:txBody>
-      </p:sp>
-      <p:sp>
-        <p:nvSpPr>
-          <p:cNvPr id="7" name="TextBox 6"/>
-          <p:cNvSpPr txBox="1"/>
-          <p:nvPr/>
-        </p:nvSpPr>
-        <p:spPr>
-          <a:xfrm>
-            <a:off x="11247120" y="6510528"/>
-            <a:ext cx="822960" cy="274320"/>
-          </a:xfrm>
-          <a:prstGeom prst="rect">
-            <a:avLst/>
-          </a:prstGeom>
-          <a:noFill/>
-        </p:spPr>
-        <p:txBody>
-          <a:bodyPr wrap="square" anchor="t" lIns="25400" rIns="25400" tIns="12700" bIns="12700">
-            <a:spAutoFit/>
-          </a:bodyPr>
-          <a:lstStyle/>
-          <a:p>
-            <a:pPr algn="r">
-              <a:spcBef>
-                <a:spcPts val="0"/>
-              </a:spcBef>
-              <a:spcAft>
-                <a:spcPts val="0"/>
-              </a:spcAft>
-              <a:buNone/>
-            </a:pPr>
-            <a:r>
-              <a:rPr sz="900" b="0" i="0">
-                <a:solidFill>
-                  <a:srgbClr val="8C8C8C"/>
-                </a:solidFill>
-                <a:latin typeface="Garamond"/>
-                <a:cs typeface="Garamond"/>
-              </a:rPr>
-              <a:t>8</a:t>
-            </a:r>
-          </a:p>
-        </p:txBody>
-      </p:sp>
-      <p:sp>
-        <p:nvSpPr>
-          <p:cNvPr id="8" name="TextBox 7"/>
-          <p:cNvSpPr txBox="1"/>
-          <p:nvPr/>
-        </p:nvSpPr>
-        <p:spPr>
-          <a:xfrm>
-            <a:off x="457200" y="1051560"/>
-            <a:ext cx="6766560" cy="5394960"/>
-          </a:xfrm>
-          <a:prstGeom prst="rect">
-            <a:avLst/>
-          </a:prstGeom>
-          <a:noFill/>
-        </p:spPr>
-        <p:txBody>
-          <a:bodyPr wrap="square" anchor="t" lIns="25400" rIns="25400" tIns="12700" bIns="12700">
-            <a:spAutoFit/>
-          </a:bodyPr>
-          <a:lstStyle/>
-          <a:p>
-            <a:pPr algn="l">
-              <a:spcBef>
-                <a:spcPts val="0"/>
-              </a:spcBef>
-              <a:spcAft>
-                <a:spcPts val="700"/>
-              </a:spcAft>
-              <a:buNone/>
-            </a:pPr>
-            <a:r>
-              <a:rPr sz="1500" b="1" i="0">
-                <a:solidFill>
-                  <a:srgbClr val="990000"/>
-                </a:solidFill>
-                <a:latin typeface="Garamond"/>
-                <a:cs typeface="Garamond"/>
-              </a:rPr>
-              <a:t>The market is paying trough multiples for a brand that still earned 19.9% operating margin in FY2025</a:t>
-            </a:r>
-          </a:p>
-          <a:p>
-            <a:pPr algn="l" indent="-152400" marL="177800">
-              <a:spcBef>
-                <a:spcPts val="0"/>
-              </a:spcBef>
-              <a:spcAft>
-                <a:spcPts val="700"/>
-              </a:spcAft>
-              <a:buFont typeface="Garamond"/>
-              <a:buChar char="•"/>
-            </a:pPr>
-            <a:r>
-              <a:rPr sz="1330" b="0" i="0">
-                <a:solidFill>
-                  <a:srgbClr val="262626"/>
-                </a:solidFill>
-                <a:latin typeface="Garamond"/>
-                <a:cs typeface="Garamond"/>
-              </a:rPr>
-              <a:t>At ~$100 the stock trades at ~3.5x EV/EBITDA and ~10.4x FY2026E EPS — versus a 5-year history of ~20–30x earnings</a:t>
-            </a:r>
-          </a:p>
-          <a:p>
-            <a:pPr algn="l" indent="-152400" marL="177800">
-              <a:spcBef>
-                <a:spcPts val="0"/>
-              </a:spcBef>
-              <a:spcAft>
-                <a:spcPts val="700"/>
-              </a:spcAft>
-              <a:buFont typeface="Garamond"/>
-              <a:buChar char="•"/>
-            </a:pPr>
-            <a:r>
-              <a:rPr sz="1330" b="0" i="0">
-                <a:solidFill>
-                  <a:srgbClr val="262626"/>
-                </a:solidFill>
-                <a:latin typeface="Garamond"/>
-                <a:cs typeface="Garamond"/>
-              </a:rPr>
-              <a:t>The balance sheet holds $1.8B of cash and no funded debt, so nearly the entire enterprise value is covered by the operating business at a very low multiple</a:t>
-            </a:r>
-          </a:p>
-          <a:p>
-            <a:pPr algn="l" indent="-152400" marL="177800">
-              <a:spcBef>
-                <a:spcPts val="0"/>
-              </a:spcBef>
-              <a:spcAft>
-                <a:spcPts val="700"/>
-              </a:spcAft>
-              <a:buFont typeface="Garamond"/>
-              <a:buChar char="•"/>
-            </a:pPr>
-            <a:r>
-              <a:rPr sz="1330" b="0" i="0">
-                <a:solidFill>
-                  <a:srgbClr val="262626"/>
-                </a:solidFill>
-                <a:latin typeface="Garamond"/>
-                <a:cs typeface="Garamond"/>
-              </a:rPr>
-              <a:t>Our base-case DCF (WACC 10.5% from FRED 4.77% rf, terminal growth 2.25%, terminal EBIT margin 15.5%) is in the model — bear case still brackets the current price</a:t>
-            </a:r>
-          </a:p>
-          <a:p>
-            <a:pPr algn="l" indent="-152400" marL="177800">
-              <a:spcBef>
-                <a:spcPts val="0"/>
-              </a:spcBef>
-              <a:spcAft>
-                <a:spcPts val="700"/>
-              </a:spcAft>
-              <a:buFont typeface="Garamond"/>
-              <a:buChar char="•"/>
-            </a:pPr>
-            <a:r>
-              <a:rPr sz="1330" b="0" i="0">
-                <a:solidFill>
-                  <a:srgbClr val="262626"/>
-                </a:solidFill>
-                <a:latin typeface="Garamond"/>
-                <a:cs typeface="Garamond"/>
-              </a:rPr>
-              <a:t>To justify $100 you must assume revenue and margins fall in perpetuity; that is inconsistent with international growth and the FY2026 tariff-refund tailwind</a:t>
-            </a:r>
-          </a:p>
-        </p:txBody>
-      </p:sp>
-      <p:sp>
-        <p:nvSpPr>
-          <p:cNvPr id="9" name="Rectangle 8"/>
-          <p:cNvSpPr/>
-          <p:nvPr/>
-        </p:nvSpPr>
-        <p:spPr>
-          <a:xfrm>
-            <a:off x="7452360" y="1051560"/>
-            <a:ext cx="4297680" cy="3337560"/>
-          </a:xfrm>
-          <a:prstGeom prst="rect">
-            <a:avLst/>
-          </a:prstGeom>
-          <a:solidFill>
-            <a:srgbClr val="F0F1F3"/>
-          </a:solidFill>
-          <a:ln>
-            <a:noFill/>
-          </a:ln>
-          <a:effectLst/>
-        </p:spPr>
-        <p:style>
-          <a:lnRef idx="1">
-            <a:schemeClr val="accent1"/>
-          </a:lnRef>
-          <a:fillRef idx="3">
-            <a:schemeClr val="accent1"/>
-          </a:fillRef>
-          <a:effectRef idx="2">
-            <a:schemeClr val="accent1"/>
-          </a:effectRef>
-          <a:fontRef idx="minor">
-            <a:schemeClr val="lt1"/>
-          </a:fontRef>
-        </p:style>
-        <p:txBody>
-          <a:bodyPr rtlCol="0" anchor="ctr" wrap="square"/>
-          <a:lstStyle/>
-          <a:p>
-            <a:pPr algn="l">
-              <a:spcBef>
-                <a:spcPts val="0"/>
-              </a:spcBef>
-              <a:spcAft>
-                <a:spcPts val="800"/>
-              </a:spcAft>
-              <a:buNone/>
-            </a:pPr>
-            <a:r>
-              <a:rPr sz="1250" b="1" i="0">
-                <a:solidFill>
-                  <a:srgbClr val="990000"/>
-                </a:solidFill>
-                <a:latin typeface="Garamond"/>
-                <a:cs typeface="Garamond"/>
-              </a:rPr>
-              <a:t>VALUATION SNAPSHOT</a:t>
-            </a:r>
-          </a:p>
-          <a:p>
-            <a:pPr algn="l">
-              <a:spcBef>
-                <a:spcPts val="0"/>
-              </a:spcBef>
-              <a:spcAft>
-                <a:spcPts val="600"/>
-              </a:spcAft>
-              <a:buNone/>
-            </a:pPr>
-            <a:r>
-              <a:rPr sz="1350" b="1" i="0">
-                <a:solidFill>
-                  <a:srgbClr val="1F2A44"/>
-                </a:solidFill>
-                <a:latin typeface="Garamond"/>
-                <a:cs typeface="Garamond"/>
-              </a:rPr>
-              <a:t>EV / EBITDA:  3.5x</a:t>
-            </a:r>
-          </a:p>
-          <a:p>
-            <a:pPr algn="l">
-              <a:spcBef>
-                <a:spcPts val="0"/>
-              </a:spcBef>
-              <a:spcAft>
-                <a:spcPts val="600"/>
-              </a:spcAft>
-              <a:buNone/>
-            </a:pPr>
-            <a:r>
-              <a:rPr sz="1350" b="1" i="0">
-                <a:solidFill>
-                  <a:srgbClr val="1F2A44"/>
-                </a:solidFill>
-                <a:latin typeface="Garamond"/>
-                <a:cs typeface="Garamond"/>
-              </a:rPr>
-              <a:t>FY2026E P/E:  10.4x</a:t>
-            </a:r>
-          </a:p>
-          <a:p>
-            <a:pPr algn="l">
-              <a:spcBef>
-                <a:spcPts val="0"/>
-              </a:spcBef>
-              <a:spcAft>
-                <a:spcPts val="600"/>
-              </a:spcAft>
-              <a:buNone/>
-            </a:pPr>
-            <a:r>
-              <a:rPr sz="1350" b="1" i="0">
-                <a:solidFill>
-                  <a:srgbClr val="1F2A44"/>
-                </a:solidFill>
-                <a:latin typeface="Garamond"/>
-                <a:cs typeface="Garamond"/>
-              </a:rPr>
-              <a:t>FCF yield:  ~8–9%</a:t>
-            </a:r>
-          </a:p>
-          <a:p>
-            <a:pPr algn="l">
-              <a:spcBef>
-                <a:spcPts val="0"/>
-              </a:spcBef>
-              <a:spcAft>
-                <a:spcPts val="600"/>
-              </a:spcAft>
-              <a:buNone/>
-            </a:pPr>
-            <a:r>
-              <a:rPr sz="1350" b="1" i="0">
-                <a:solidFill>
-                  <a:srgbClr val="1F2A44"/>
-                </a:solidFill>
-                <a:latin typeface="Garamond"/>
-                <a:cs typeface="Garamond"/>
-              </a:rPr>
-              <a:t>Net cash:  $1.8B</a:t>
-            </a:r>
-          </a:p>
-          <a:p>
-            <a:pPr algn="l">
-              <a:spcBef>
-                <a:spcPts val="0"/>
-              </a:spcBef>
-              <a:spcAft>
-                <a:spcPts val="600"/>
-              </a:spcAft>
-              <a:buNone/>
-            </a:pPr>
-            <a:r>
-              <a:rPr sz="1350" b="1" i="0">
-                <a:solidFill>
-                  <a:srgbClr val="1F2A44"/>
-                </a:solidFill>
-                <a:latin typeface="Garamond"/>
-                <a:cs typeface="Garamond"/>
-              </a:rPr>
-              <a:t>DCF base:  $124</a:t>
             </a:r>
           </a:p>
         </p:txBody>

--- a/LULU/LULU_Investment_Pitch_Deck.pptx
+++ b/LULU/LULU_Investment_Pitch_Deck.pptx
@@ -3897,7 +3897,7 @@
                 <a:latin typeface="Garamond"/>
                 <a:cs typeface="Garamond"/>
               </a:rPr>
-              <a:t>Our base-case DCF (WACC 10.5% from FRED 4.77% rf, terminal growth 2.25%, terminal EBIT margin 15.5%) is in the model — bear case still brackets the current price</a:t>
+              <a:t>Our base-case DCF (WACC 9.0%, terminal growth 2.25%, terminal EBIT margin 15.5%) is in the model — bear case still brackets the current price</a:t>
             </a:r>
           </a:p>
           <a:p>
@@ -4086,7 +4086,7 @@
                 <a:latin typeface="Garamond"/>
                 <a:cs typeface="Garamond"/>
               </a:rPr>
-              <a:t>DCF base:  $124</a:t>
+              <a:t>DCF base:  $134</a:t>
             </a:r>
           </a:p>
         </p:txBody>
@@ -4677,7 +4677,7 @@
                 <a:latin typeface="Garamond"/>
                 <a:cs typeface="Garamond"/>
               </a:rPr>
-              <a:t>FY2030E:  $11,451M</a:t>
+              <a:t>FY2030E:  $11,452M</a:t>
             </a:r>
           </a:p>
         </p:txBody>
@@ -7939,7 +7939,7 @@
                           <a:latin typeface="Garamond"/>
                           <a:cs typeface="Garamond"/>
                         </a:rPr>
-                        <a:t>10,845</a:t>
+                        <a:t>10,942</a:t>
                       </a:r>
                     </a:p>
                   </a:txBody>
@@ -7963,7 +7963,7 @@
                           <a:latin typeface="Garamond"/>
                           <a:cs typeface="Garamond"/>
                         </a:rPr>
-                        <a:t>11,730</a:t>
+                        <a:t>11,452</a:t>
                       </a:r>
                     </a:p>
                   </a:txBody>
@@ -12468,7 +12468,7 @@
                 <a:latin typeface="Garamond"/>
                 <a:cs typeface="Garamond"/>
               </a:rPr>
-              <a:t>A ~100% equity, net-cash structure drives a ~10.5% discount rate</a:t>
+              <a:t>A lease-adjusted capital structure drives a ~9.0% discount rate</a:t>
             </a:r>
           </a:p>
         </p:txBody>
@@ -12732,7 +12732,7 @@
                 <a:latin typeface="Garamond"/>
                 <a:cs typeface="Garamond"/>
               </a:rPr>
-              <a:t>We use Damodaran’s unlevered Retail (Special Lines) beta of 0.95 because LULU has no debt, so βu = βe. Company 5Y is 0.86 and is not used.</a:t>
+              <a:t>We relever Yahoo 5Y β (0.86) at FY25 ASC 842 lease debt ÷ market cap (~0.16 D/E) → β used ≈ 0.84. Damodaran Retail β (0.95) is shown for reference only.</a:t>
             </a:r>
           </a:p>
           <a:p>
@@ -12887,7 +12887,7 @@
                 <a:latin typeface="Garamond"/>
                 <a:cs typeface="Garamond"/>
               </a:rPr>
-              <a:t>Beta (unlev. retail; no debt)</a:t>
+              <a:t>Beta (relevered; lease adj.)</a:t>
             </a:r>
             <a:r>
               <a:rPr sz="1300" b="1" i="0">
@@ -12897,7 +12897,7 @@
                 <a:latin typeface="Garamond"/>
                 <a:cs typeface="Garamond"/>
               </a:rPr>
-              <a:t>      0.95</a:t>
+              <a:t>      0.84</a:t>
             </a:r>
           </a:p>
           <a:p>
@@ -12924,7 +12924,7 @@
                 <a:latin typeface="Garamond"/>
                 <a:cs typeface="Garamond"/>
               </a:rPr>
-              <a:t>      10.5%</a:t>
+              <a:t>      9.9%</a:t>
             </a:r>
           </a:p>
           <a:p>
@@ -12941,7 +12941,7 @@
                 <a:latin typeface="Garamond"/>
                 <a:cs typeface="Garamond"/>
               </a:rPr>
-              <a:t>Debt weight</a:t>
+              <a:t>Lease-debt weight</a:t>
             </a:r>
             <a:r>
               <a:rPr sz="1300" b="1" i="0">
@@ -12951,7 +12951,7 @@
                 <a:latin typeface="Garamond"/>
                 <a:cs typeface="Garamond"/>
               </a:rPr>
-              <a:t>      0%</a:t>
+              <a:t>      14%</a:t>
             </a:r>
           </a:p>
           <a:p>
@@ -12978,7 +12978,7 @@
                 <a:latin typeface="Garamond"/>
                 <a:cs typeface="Garamond"/>
               </a:rPr>
-              <a:t>      100%</a:t>
+              <a:t>      86%</a:t>
             </a:r>
           </a:p>
           <a:p>
@@ -12995,7 +12995,7 @@
                 <a:latin typeface="Garamond"/>
                 <a:cs typeface="Garamond"/>
               </a:rPr>
-              <a:t>WACC = 10.5%</a:t>
+              <a:t>WACC = 9.0%</a:t>
             </a:r>
           </a:p>
         </p:txBody>
@@ -13507,8 +13507,8 @@
         </p:nvSpPr>
         <p:spPr>
           <a:xfrm>
-            <a:off x="5911836" y="2240280"/>
-            <a:ext cx="3302427" cy="411480"/>
+            <a:off x="5595165" y="2240280"/>
+            <a:ext cx="2759562" cy="411480"/>
           </a:xfrm>
           <a:prstGeom prst="rect">
             <a:avLst/>
@@ -13548,7 +13548,7 @@
                 <a:latin typeface="Garamond"/>
                 <a:cs typeface="Garamond"/>
               </a:rPr>
-              <a:t>$126</a:t>
+              <a:t>$119</a:t>
             </a:r>
           </a:p>
         </p:txBody>
@@ -13561,7 +13561,7 @@
         </p:nvSpPr>
         <p:spPr>
           <a:xfrm>
-            <a:off x="9232552" y="2240280"/>
+            <a:off x="8373016" y="2240280"/>
             <a:ext cx="822960" cy="411480"/>
           </a:xfrm>
           <a:prstGeom prst="rect">
@@ -13592,7 +13592,7 @@
                 <a:latin typeface="Garamond"/>
                 <a:cs typeface="Garamond"/>
               </a:rPr>
-              <a:t>$199</a:t>
+              <a:t>$180</a:t>
             </a:r>
           </a:p>
         </p:txBody>
@@ -13649,8 +13649,8 @@
         </p:nvSpPr>
         <p:spPr>
           <a:xfrm>
-            <a:off x="4328480" y="2926080"/>
-            <a:ext cx="6695333" cy="411480"/>
+            <a:off x="2745125" y="2926080"/>
+            <a:ext cx="6604855" cy="411480"/>
           </a:xfrm>
           <a:prstGeom prst="rect">
             <a:avLst/>
@@ -13690,7 +13690,7 @@
                 <a:latin typeface="Garamond"/>
                 <a:cs typeface="Garamond"/>
               </a:rPr>
-              <a:t>$91</a:t>
+              <a:t>$56</a:t>
             </a:r>
           </a:p>
         </p:txBody>
@@ -13703,7 +13703,7 @@
         </p:nvSpPr>
         <p:spPr>
           <a:xfrm>
-            <a:off x="11042101" y="2926080"/>
+            <a:off x="9368268" y="2926080"/>
             <a:ext cx="822960" cy="411480"/>
           </a:xfrm>
           <a:prstGeom prst="rect">
@@ -13734,7 +13734,7 @@
                 <a:latin typeface="Garamond"/>
                 <a:cs typeface="Garamond"/>
               </a:rPr>
-              <a:t>$239</a:t>
+              <a:t>$202</a:t>
             </a:r>
           </a:p>
         </p:txBody>
@@ -14096,7 +14096,7 @@
                 <a:latin typeface="Garamond"/>
                 <a:cs typeface="Garamond"/>
               </a:rPr>
-              <a:t>We set a 12-month target of $140 — above the conservative Gordon DCF of $124, for a partial re-rating toward historical multiples — implying ~40% upside</a:t>
+              <a:t>We set a 12-month target of $140 — above the Gordon DCF of $134, for a partial re-rating toward historical multiples — implying ~40% upside</a:t>
             </a:r>
           </a:p>
           <a:p>
@@ -15077,7 +15077,7 @@
                 <a:latin typeface="Garamond"/>
                 <a:cs typeface="Garamond"/>
               </a:rPr>
-              <a:t>Base-case unlevered DCF yields ~$124 per share</a:t>
+              <a:t>Base-case unlevered DCF yields ~$134 per share</a:t>
             </a:r>
           </a:p>
         </p:txBody>
@@ -15569,7 +15569,7 @@
                           <a:latin typeface="Garamond"/>
                           <a:cs typeface="Garamond"/>
                         </a:rPr>
-                        <a:t>10.5%</a:t>
+                        <a:t>9.0%</a:t>
                       </a:r>
                     </a:p>
                   </a:txBody>
@@ -15718,7 +15718,7 @@
                 <a:latin typeface="Garamond"/>
                 <a:cs typeface="Garamond"/>
               </a:rPr>
-              <a:t>      3,732</a:t>
+              <a:t>      3,944</a:t>
             </a:r>
           </a:p>
           <a:p>
@@ -15745,7 +15745,7 @@
                 <a:latin typeface="Garamond"/>
                 <a:cs typeface="Garamond"/>
               </a:rPr>
-              <a:t>      8,316</a:t>
+              <a:t>      10,933</a:t>
             </a:r>
           </a:p>
           <a:p>
@@ -15772,7 +15772,7 @@
                 <a:latin typeface="Garamond"/>
                 <a:cs typeface="Garamond"/>
               </a:rPr>
-              <a:t>      12,048</a:t>
+              <a:t>      14,876</a:t>
             </a:r>
           </a:p>
           <a:p>
@@ -15826,7 +15826,7 @@
                 <a:latin typeface="Garamond"/>
                 <a:cs typeface="Garamond"/>
               </a:rPr>
-              <a:t>      13,856</a:t>
+              <a:t>      14,885</a:t>
             </a:r>
           </a:p>
           <a:p>
@@ -15870,7 +15870,7 @@
                 <a:latin typeface="Garamond"/>
                 <a:cs typeface="Garamond"/>
               </a:rPr>
-              <a:t>Implied value:  $124 / share</a:t>
+              <a:t>Implied value:  $134 / share</a:t>
             </a:r>
           </a:p>
         </p:txBody>
@@ -15945,7 +15945,7 @@
                 <a:gridCol w="1158240"/>
                 <a:gridCol w="1158240"/>
               </a:tblGrid>
-              <a:tr h="342900">
+              <a:tr h="228600">
                 <a:tc>
                   <a:txBody>
                     <a:bodyPr/>
@@ -16091,7 +16091,7 @@
                   </a:tcPr>
                 </a:tc>
               </a:tr>
-              <a:tr h="342900">
+              <a:tr h="228600">
                 <a:tc>
                   <a:txBody>
                     <a:bodyPr/>
@@ -16130,7 +16130,7 @@
                           <a:latin typeface="Garamond"/>
                           <a:cs typeface="Garamond"/>
                         </a:rPr>
-                        <a:t>$131</a:t>
+                        <a:t>$115</a:t>
                       </a:r>
                     </a:p>
                   </a:txBody>
@@ -16154,7 +16154,7 @@
                           <a:latin typeface="Garamond"/>
                           <a:cs typeface="Garamond"/>
                         </a:rPr>
-                        <a:t>$136</a:t>
+                        <a:t>$121</a:t>
                       </a:r>
                     </a:p>
                   </a:txBody>
@@ -16171,6 +16171,30 @@
                     <a:p>
                       <a:pPr algn="ctr"/>
                       <a:r>
+                        <a:rPr sz="1050" b="1" i="0">
+                          <a:solidFill>
+                            <a:srgbClr val="1F2A44"/>
+                          </a:solidFill>
+                          <a:latin typeface="Garamond"/>
+                          <a:cs typeface="Garamond"/>
+                        </a:rPr>
+                        <a:t>$124</a:t>
+                      </a:r>
+                    </a:p>
+                  </a:txBody>
+                  <a:tcPr anchor="ctr">
+                    <a:solidFill>
+                      <a:srgbClr val="FFC72C"/>
+                    </a:solidFill>
+                  </a:tcPr>
+                </a:tc>
+                <a:tc>
+                  <a:txBody>
+                    <a:bodyPr/>
+                    <a:lstStyle/>
+                    <a:p>
+                      <a:pPr algn="ctr"/>
+                      <a:r>
                         <a:rPr sz="1050" b="0" i="0">
                           <a:solidFill>
                             <a:srgbClr val="262626"/>
@@ -16178,7 +16202,7 @@
                           <a:latin typeface="Garamond"/>
                           <a:cs typeface="Garamond"/>
                         </a:rPr>
-                        <a:t>$140</a:t>
+                        <a:t>$127</a:t>
                       </a:r>
                     </a:p>
                   </a:txBody>
@@ -16202,7 +16226,7 @@
                           <a:latin typeface="Garamond"/>
                           <a:cs typeface="Garamond"/>
                         </a:rPr>
-                        <a:t>$143</a:t>
+                        <a:t>$135</a:t>
                       </a:r>
                     </a:p>
                   </a:txBody>
@@ -16212,6 +16236,8 @@
                     </a:solidFill>
                   </a:tcPr>
                 </a:tc>
+              </a:tr>
+              <a:tr h="228600">
                 <a:tc>
                   <a:txBody>
                     <a:bodyPr/>
@@ -16219,6 +16245,30 @@
                     <a:p>
                       <a:pPr algn="ctr"/>
                       <a:r>
+                        <a:rPr sz="1050" b="1" i="0">
+                          <a:solidFill>
+                            <a:srgbClr val="FFFFFF"/>
+                          </a:solidFill>
+                          <a:latin typeface="Garamond"/>
+                          <a:cs typeface="Garamond"/>
+                        </a:rPr>
+                        <a:t>10.0%</a:t>
+                      </a:r>
+                    </a:p>
+                  </a:txBody>
+                  <a:tcPr anchor="ctr">
+                    <a:solidFill>
+                      <a:srgbClr val="1F2A44"/>
+                    </a:solidFill>
+                  </a:tcPr>
+                </a:tc>
+                <a:tc>
+                  <a:txBody>
+                    <a:bodyPr/>
+                    <a:lstStyle/>
+                    <a:p>
+                      <a:pPr algn="ctr"/>
+                      <a:r>
                         <a:rPr sz="1050" b="0" i="0">
                           <a:solidFill>
                             <a:srgbClr val="262626"/>
@@ -16226,18 +16276,260 @@
                           <a:latin typeface="Garamond"/>
                           <a:cs typeface="Garamond"/>
                         </a:rPr>
-                        <a:t>$151</a:t>
+                        <a:t>$108</a:t>
                       </a:r>
                     </a:p>
                   </a:txBody>
                   <a:tcPr anchor="ctr">
                     <a:solidFill>
+                      <a:srgbClr val="F0F1F3"/>
+                    </a:solidFill>
+                  </a:tcPr>
+                </a:tc>
+                <a:tc>
+                  <a:txBody>
+                    <a:bodyPr/>
+                    <a:lstStyle/>
+                    <a:p>
+                      <a:pPr algn="ctr"/>
+                      <a:r>
+                        <a:rPr sz="1050" b="0" i="0">
+                          <a:solidFill>
+                            <a:srgbClr val="262626"/>
+                          </a:solidFill>
+                          <a:latin typeface="Garamond"/>
+                          <a:cs typeface="Garamond"/>
+                        </a:rPr>
+                        <a:t>$113</a:t>
+                      </a:r>
+                    </a:p>
+                  </a:txBody>
+                  <a:tcPr anchor="ctr">
+                    <a:solidFill>
+                      <a:srgbClr val="F0F1F3"/>
+                    </a:solidFill>
+                  </a:tcPr>
+                </a:tc>
+                <a:tc>
+                  <a:txBody>
+                    <a:bodyPr/>
+                    <a:lstStyle/>
+                    <a:p>
+                      <a:pPr algn="ctr"/>
+                      <a:r>
+                        <a:rPr sz="1050" b="0" i="0">
+                          <a:solidFill>
+                            <a:srgbClr val="262626"/>
+                          </a:solidFill>
+                          <a:latin typeface="Garamond"/>
+                          <a:cs typeface="Garamond"/>
+                        </a:rPr>
+                        <a:t>$116</a:t>
+                      </a:r>
+                    </a:p>
+                  </a:txBody>
+                  <a:tcPr anchor="ctr">
+                    <a:solidFill>
+                      <a:srgbClr val="F0F1F3"/>
+                    </a:solidFill>
+                  </a:tcPr>
+                </a:tc>
+                <a:tc>
+                  <a:txBody>
+                    <a:bodyPr/>
+                    <a:lstStyle/>
+                    <a:p>
+                      <a:pPr algn="ctr"/>
+                      <a:r>
+                        <a:rPr sz="1050" b="0" i="0">
+                          <a:solidFill>
+                            <a:srgbClr val="262626"/>
+                          </a:solidFill>
+                          <a:latin typeface="Garamond"/>
+                          <a:cs typeface="Garamond"/>
+                        </a:rPr>
+                        <a:t>$119</a:t>
+                      </a:r>
+                    </a:p>
+                  </a:txBody>
+                  <a:tcPr anchor="ctr">
+                    <a:solidFill>
+                      <a:srgbClr val="F0F1F3"/>
+                    </a:solidFill>
+                  </a:tcPr>
+                </a:tc>
+                <a:tc>
+                  <a:txBody>
+                    <a:bodyPr/>
+                    <a:lstStyle/>
+                    <a:p>
+                      <a:pPr algn="ctr"/>
+                      <a:r>
+                        <a:rPr sz="1050" b="0" i="0">
+                          <a:solidFill>
+                            <a:srgbClr val="262626"/>
+                          </a:solidFill>
+                          <a:latin typeface="Garamond"/>
+                          <a:cs typeface="Garamond"/>
+                        </a:rPr>
+                        <a:t>$125</a:t>
+                      </a:r>
+                    </a:p>
+                  </a:txBody>
+                  <a:tcPr anchor="ctr">
+                    <a:solidFill>
+                      <a:srgbClr val="F0F1F3"/>
+                    </a:solidFill>
+                  </a:tcPr>
+                </a:tc>
+              </a:tr>
+              <a:tr h="228600">
+                <a:tc>
+                  <a:txBody>
+                    <a:bodyPr/>
+                    <a:lstStyle/>
+                    <a:p>
+                      <a:pPr algn="ctr"/>
+                      <a:r>
+                        <a:rPr sz="1050" b="1" i="0">
+                          <a:solidFill>
+                            <a:srgbClr val="FFFFFF"/>
+                          </a:solidFill>
+                          <a:latin typeface="Garamond"/>
+                          <a:cs typeface="Garamond"/>
+                        </a:rPr>
+                        <a:t>10.5%</a:t>
+                      </a:r>
+                    </a:p>
+                  </a:txBody>
+                  <a:tcPr anchor="ctr">
+                    <a:solidFill>
+                      <a:srgbClr val="1F2A44"/>
+                    </a:solidFill>
+                  </a:tcPr>
+                </a:tc>
+                <a:tc>
+                  <a:txBody>
+                    <a:bodyPr/>
+                    <a:lstStyle/>
+                    <a:p>
+                      <a:pPr algn="ctr"/>
+                      <a:r>
+                        <a:rPr sz="1050" b="0" i="0">
+                          <a:solidFill>
+                            <a:srgbClr val="262626"/>
+                          </a:solidFill>
+                          <a:latin typeface="Garamond"/>
+                          <a:cs typeface="Garamond"/>
+                        </a:rPr>
+                        <a:t>$102</a:t>
+                      </a:r>
+                    </a:p>
+                  </a:txBody>
+                  <a:tcPr anchor="ctr">
+                    <a:solidFill>
                       <a:srgbClr val="FFFFFF"/>
                     </a:solidFill>
                   </a:tcPr>
                 </a:tc>
+                <a:tc>
+                  <a:txBody>
+                    <a:bodyPr/>
+                    <a:lstStyle/>
+                    <a:p>
+                      <a:pPr algn="ctr"/>
+                      <a:r>
+                        <a:rPr sz="1050" b="0" i="0">
+                          <a:solidFill>
+                            <a:srgbClr val="262626"/>
+                          </a:solidFill>
+                          <a:latin typeface="Garamond"/>
+                          <a:cs typeface="Garamond"/>
+                        </a:rPr>
+                        <a:t>$106</a:t>
+                      </a:r>
+                    </a:p>
+                  </a:txBody>
+                  <a:tcPr anchor="ctr">
+                    <a:solidFill>
+                      <a:srgbClr val="FFFFFF"/>
+                    </a:solidFill>
+                  </a:tcPr>
+                </a:tc>
+                <a:tc>
+                  <a:txBody>
+                    <a:bodyPr/>
+                    <a:lstStyle/>
+                    <a:p>
+                      <a:pPr algn="ctr"/>
+                      <a:r>
+                        <a:rPr sz="1050" b="0" i="0">
+                          <a:solidFill>
+                            <a:srgbClr val="262626"/>
+                          </a:solidFill>
+                          <a:latin typeface="Garamond"/>
+                          <a:cs typeface="Garamond"/>
+                        </a:rPr>
+                        <a:t>$109</a:t>
+                      </a:r>
+                    </a:p>
+                  </a:txBody>
+                  <a:tcPr anchor="ctr">
+                    <a:solidFill>
+                      <a:srgbClr val="FFFFFF"/>
+                    </a:solidFill>
+                  </a:tcPr>
+                </a:tc>
+                <a:tc>
+                  <a:txBody>
+                    <a:bodyPr/>
+                    <a:lstStyle/>
+                    <a:p>
+                      <a:pPr algn="ctr"/>
+                      <a:r>
+                        <a:rPr sz="1050" b="0" i="0">
+                          <a:solidFill>
+                            <a:srgbClr val="262626"/>
+                          </a:solidFill>
+                          <a:latin typeface="Garamond"/>
+                          <a:cs typeface="Garamond"/>
+                        </a:rPr>
+                        <a:t>$111</a:t>
+                      </a:r>
+                    </a:p>
+                  </a:txBody>
+                  <a:tcPr anchor="ctr">
+                    <a:solidFill>
+                      <a:srgbClr val="FFFFFF"/>
+                    </a:solidFill>
+                  </a:tcPr>
+                </a:tc>
+                <a:tc>
+                  <a:txBody>
+                    <a:bodyPr/>
+                    <a:lstStyle/>
+                    <a:p>
+                      <a:pPr algn="ctr"/>
+                      <a:r>
+                        <a:rPr sz="1050" b="0" i="0">
+                          <a:solidFill>
+                            <a:srgbClr val="262626"/>
+                          </a:solidFill>
+                          <a:latin typeface="Garamond"/>
+                          <a:cs typeface="Garamond"/>
+                        </a:rPr>
+                        <a:t>$117</a:t>
+                      </a:r>
+                    </a:p>
+                  </a:txBody>
+                  <a:tcPr anchor="ctr">
+                    <a:solidFill>
+                      <a:srgbClr val="FFFFFF"/>
+                    </a:solidFill>
+                  </a:tcPr>
+                </a:tc>
               </a:tr>
-              <a:tr h="342900">
+              <a:tr h="228600">
                 <a:tc>
                   <a:txBody>
                     <a:bodyPr/>
@@ -16252,7 +16544,7 @@
                           <a:latin typeface="Garamond"/>
                           <a:cs typeface="Garamond"/>
                         </a:rPr>
-                        <a:t>10.5%</a:t>
+                        <a:t>11.0%</a:t>
                       </a:r>
                     </a:p>
                   </a:txBody>
@@ -16276,7 +16568,7 @@
                           <a:latin typeface="Garamond"/>
                           <a:cs typeface="Garamond"/>
                         </a:rPr>
-                        <a:t>$118</a:t>
+                        <a:t>$97</a:t>
                       </a:r>
                     </a:p>
                   </a:txBody>
@@ -16300,7 +16592,7 @@
                           <a:latin typeface="Garamond"/>
                           <a:cs typeface="Garamond"/>
                         </a:rPr>
-                        <a:t>$122</a:t>
+                        <a:t>$100</a:t>
                       </a:r>
                     </a:p>
                   </a:txBody>
@@ -16317,20 +16609,94 @@
                     <a:p>
                       <a:pPr algn="ctr"/>
                       <a:r>
+                        <a:rPr sz="1050" b="0" i="0">
+                          <a:solidFill>
+                            <a:srgbClr val="262626"/>
+                          </a:solidFill>
+                          <a:latin typeface="Garamond"/>
+                          <a:cs typeface="Garamond"/>
+                        </a:rPr>
+                        <a:t>$103</a:t>
+                      </a:r>
+                    </a:p>
+                  </a:txBody>
+                  <a:tcPr anchor="ctr">
+                    <a:solidFill>
+                      <a:srgbClr val="F0F1F3"/>
+                    </a:solidFill>
+                  </a:tcPr>
+                </a:tc>
+                <a:tc>
+                  <a:txBody>
+                    <a:bodyPr/>
+                    <a:lstStyle/>
+                    <a:p>
+                      <a:pPr algn="ctr"/>
+                      <a:r>
+                        <a:rPr sz="1050" b="0" i="0">
+                          <a:solidFill>
+                            <a:srgbClr val="262626"/>
+                          </a:solidFill>
+                          <a:latin typeface="Garamond"/>
+                          <a:cs typeface="Garamond"/>
+                        </a:rPr>
+                        <a:t>$105</a:t>
+                      </a:r>
+                    </a:p>
+                  </a:txBody>
+                  <a:tcPr anchor="ctr">
+                    <a:solidFill>
+                      <a:srgbClr val="F0F1F3"/>
+                    </a:solidFill>
+                  </a:tcPr>
+                </a:tc>
+                <a:tc>
+                  <a:txBody>
+                    <a:bodyPr/>
+                    <a:lstStyle/>
+                    <a:p>
+                      <a:pPr algn="ctr"/>
+                      <a:r>
+                        <a:rPr sz="1050" b="0" i="0">
+                          <a:solidFill>
+                            <a:srgbClr val="262626"/>
+                          </a:solidFill>
+                          <a:latin typeface="Garamond"/>
+                          <a:cs typeface="Garamond"/>
+                        </a:rPr>
+                        <a:t>$110</a:t>
+                      </a:r>
+                    </a:p>
+                  </a:txBody>
+                  <a:tcPr anchor="ctr">
+                    <a:solidFill>
+                      <a:srgbClr val="F0F1F3"/>
+                    </a:solidFill>
+                  </a:tcPr>
+                </a:tc>
+              </a:tr>
+              <a:tr h="228600">
+                <a:tc>
+                  <a:txBody>
+                    <a:bodyPr/>
+                    <a:lstStyle/>
+                    <a:p>
+                      <a:pPr algn="ctr"/>
+                      <a:r>
                         <a:rPr sz="1050" b="1" i="0">
                           <a:solidFill>
-                            <a:srgbClr val="1F2A44"/>
-                          </a:solidFill>
-                          <a:latin typeface="Garamond"/>
-                          <a:cs typeface="Garamond"/>
-                        </a:rPr>
-                        <a:t>$124</a:t>
+                            <a:srgbClr val="FFFFFF"/>
+                          </a:solidFill>
+                          <a:latin typeface="Garamond"/>
+                          <a:cs typeface="Garamond"/>
+                        </a:rPr>
+                        <a:t>11.5%</a:t>
                       </a:r>
                     </a:p>
                   </a:txBody>
                   <a:tcPr anchor="ctr">
                     <a:solidFill>
-                      <a:srgbClr val="FFC72C"/>
+                      <a:srgbClr val="1F2A44"/>
                     </a:solidFill>
                   </a:tcPr>
                 </a:tc>
@@ -16348,13 +16714,13 @@
                           <a:latin typeface="Garamond"/>
                           <a:cs typeface="Garamond"/>
                         </a:rPr>
-                        <a:t>$127</a:t>
+                        <a:t>$92</a:t>
                       </a:r>
                     </a:p>
                   </a:txBody>
                   <a:tcPr anchor="ctr">
                     <a:solidFill>
-                      <a:srgbClr val="F0F1F3"/>
+                      <a:srgbClr val="FFFFFF"/>
                     </a:solidFill>
                   </a:tcPr>
                 </a:tc>
@@ -16372,18 +16738,16 @@
                           <a:latin typeface="Garamond"/>
                           <a:cs typeface="Garamond"/>
                         </a:rPr>
-                        <a:t>$132</a:t>
+                        <a:t>$95</a:t>
                       </a:r>
                     </a:p>
                   </a:txBody>
                   <a:tcPr anchor="ctr">
                     <a:solidFill>
-                      <a:srgbClr val="F0F1F3"/>
-                    </a:solidFill>
-                  </a:tcPr>
-                </a:tc>
-              </a:tr>
-              <a:tr h="342900">
+                      <a:srgbClr val="FFFFFF"/>
+                    </a:solidFill>
+                  </a:tcPr>
+                </a:tc>
                 <a:tc>
                   <a:txBody>
                     <a:bodyPr/>
@@ -16391,20 +16755,20 @@
                     <a:p>
                       <a:pPr algn="ctr"/>
                       <a:r>
-                        <a:rPr sz="1050" b="1" i="0">
-                          <a:solidFill>
-                            <a:srgbClr val="FFFFFF"/>
-                          </a:solidFill>
-                          <a:latin typeface="Garamond"/>
-                          <a:cs typeface="Garamond"/>
-                        </a:rPr>
-                        <a:t>11.5%</a:t>
+                        <a:rPr sz="1050" b="0" i="0">
+                          <a:solidFill>
+                            <a:srgbClr val="262626"/>
+                          </a:solidFill>
+                          <a:latin typeface="Garamond"/>
+                          <a:cs typeface="Garamond"/>
+                        </a:rPr>
+                        <a:t>$97</a:t>
                       </a:r>
                     </a:p>
                   </a:txBody>
                   <a:tcPr anchor="ctr">
                     <a:solidFill>
-                      <a:srgbClr val="1F2A44"/>
+                      <a:srgbClr val="FFFFFF"/>
                     </a:solidFill>
                   </a:tcPr>
                 </a:tc>
@@ -16422,7 +16786,7 @@
                           <a:latin typeface="Garamond"/>
                           <a:cs typeface="Garamond"/>
                         </a:rPr>
-                        <a:t>$107</a:t>
+                        <a:t>$99</a:t>
                       </a:r>
                     </a:p>
                   </a:txBody>
@@ -16446,79 +16810,7 @@
                           <a:latin typeface="Garamond"/>
                           <a:cs typeface="Garamond"/>
                         </a:rPr>
-                        <a:t>$111</a:t>
-                      </a:r>
-                    </a:p>
-                  </a:txBody>
-                  <a:tcPr anchor="ctr">
-                    <a:solidFill>
-                      <a:srgbClr val="FFFFFF"/>
-                    </a:solidFill>
-                  </a:tcPr>
-                </a:tc>
-                <a:tc>
-                  <a:txBody>
-                    <a:bodyPr/>
-                    <a:lstStyle/>
-                    <a:p>
-                      <a:pPr algn="ctr"/>
-                      <a:r>
-                        <a:rPr sz="1050" b="0" i="0">
-                          <a:solidFill>
-                            <a:srgbClr val="262626"/>
-                          </a:solidFill>
-                          <a:latin typeface="Garamond"/>
-                          <a:cs typeface="Garamond"/>
-                        </a:rPr>
-                        <a:t>$113</a:t>
-                      </a:r>
-                    </a:p>
-                  </a:txBody>
-                  <a:tcPr anchor="ctr">
-                    <a:solidFill>
-                      <a:srgbClr val="FFFFFF"/>
-                    </a:solidFill>
-                  </a:tcPr>
-                </a:tc>
-                <a:tc>
-                  <a:txBody>
-                    <a:bodyPr/>
-                    <a:lstStyle/>
-                    <a:p>
-                      <a:pPr algn="ctr"/>
-                      <a:r>
-                        <a:rPr sz="1050" b="0" i="0">
-                          <a:solidFill>
-                            <a:srgbClr val="262626"/>
-                          </a:solidFill>
-                          <a:latin typeface="Garamond"/>
-                          <a:cs typeface="Garamond"/>
-                        </a:rPr>
-                        <a:t>$114</a:t>
-                      </a:r>
-                    </a:p>
-                  </a:txBody>
-                  <a:tcPr anchor="ctr">
-                    <a:solidFill>
-                      <a:srgbClr val="FFFFFF"/>
-                    </a:solidFill>
-                  </a:tcPr>
-                </a:tc>
-                <a:tc>
-                  <a:txBody>
-                    <a:bodyPr/>
-                    <a:lstStyle/>
-                    <a:p>
-                      <a:pPr algn="ctr"/>
-                      <a:r>
-                        <a:rPr sz="1050" b="0" i="0">
-                          <a:solidFill>
-                            <a:srgbClr val="262626"/>
-                          </a:solidFill>
-                          <a:latin typeface="Garamond"/>
-                          <a:cs typeface="Garamond"/>
-                        </a:rPr>
-                        <a:t>$119</a:t>
+                        <a:t>$103</a:t>
                       </a:r>
                     </a:p>
                   </a:txBody>
@@ -18453,7 +18745,7 @@
                 <a:latin typeface="Garamond"/>
                 <a:cs typeface="Garamond"/>
               </a:rPr>
-              <a:t>BEAR   $66</a:t>
+              <a:t>BEAR   $56</a:t>
             </a:r>
           </a:p>
           <a:p>
@@ -18474,7 +18766,7 @@
                 <a:latin typeface="Garamond"/>
                 <a:cs typeface="Garamond"/>
               </a:rPr>
-              <a:t>−34% vs $100</a:t>
+              <a:t>−44% vs $100</a:t>
             </a:r>
           </a:p>
         </p:txBody>
@@ -18581,7 +18873,7 @@
                 <a:latin typeface="Garamond"/>
                 <a:cs typeface="Garamond"/>
               </a:rPr>
-              <a:t>WACC 11.5%; terminal growth 1.5%</a:t>
+              <a:t>WACC 11.0%; terminal growth 1.5%</a:t>
             </a:r>
           </a:p>
           <a:p>
@@ -18665,7 +18957,7 @@
                 <a:latin typeface="Garamond"/>
                 <a:cs typeface="Garamond"/>
               </a:rPr>
-              <a:t>BASE   $124</a:t>
+              <a:t>BASE   $134</a:t>
             </a:r>
           </a:p>
           <a:p>
@@ -18686,7 +18978,7 @@
                 <a:latin typeface="Garamond"/>
                 <a:cs typeface="Garamond"/>
               </a:rPr>
-              <a:t>+24% vs $100</a:t>
+              <a:t>+34% vs $100</a:t>
             </a:r>
           </a:p>
         </p:txBody>
@@ -18793,7 +19085,7 @@
                 <a:latin typeface="Garamond"/>
                 <a:cs typeface="Garamond"/>
               </a:rPr>
-              <a:t>WACC 10.5%; terminal growth 2.25%</a:t>
+              <a:t>WACC 9.0%; terminal growth 2.25%</a:t>
             </a:r>
           </a:p>
           <a:p>
@@ -18877,7 +19169,7 @@
                 <a:latin typeface="Garamond"/>
                 <a:cs typeface="Garamond"/>
               </a:rPr>
-              <a:t>BULL   $227</a:t>
+              <a:t>BULL   $202</a:t>
             </a:r>
           </a:p>
           <a:p>
@@ -18898,7 +19190,7 @@
                 <a:latin typeface="Garamond"/>
                 <a:cs typeface="Garamond"/>
               </a:rPr>
-              <a:t>+127% vs $100</a:t>
+              <a:t>+102% vs $100</a:t>
             </a:r>
           </a:p>
         </p:txBody>
@@ -19071,7 +19363,7 @@
                 <a:latin typeface="Garamond"/>
                 <a:cs typeface="Garamond"/>
               </a:rPr>
-              <a:t>Probability-weighted value (25% / 50% / 25%) ≈ $155 — the risk/reward skews decisively to the upside</a:t>
+              <a:t>Probability-weighted value (25% / 50% / 25%) ≈ $131 — the risk/reward skews decisively to the upside</a:t>
             </a:r>
           </a:p>
         </p:txBody>
@@ -20312,7 +20604,7 @@
                 <a:latin typeface="Garamond"/>
                 <a:cs typeface="Garamond"/>
               </a:rPr>
-              <a:t>Base-case DCF $124; bear $66 (−34%) vs bull $227 (+127%) — downside is protected by net cash and an ~8–9% FCF yield</a:t>
+              <a:t>Base-case DCF $134; bear $56 (−44%) vs bull $202 (+102%) — downside is protected by net cash and an ~8–9% FCF yield</a:t>
             </a:r>
           </a:p>
         </p:txBody>

--- a/LULU/LULU_Investment_Pitch_Deck.pptx
+++ b/LULU/LULU_Investment_Pitch_Deck.pptx
@@ -3897,7 +3897,7 @@
                 <a:latin typeface="Garamond"/>
                 <a:cs typeface="Garamond"/>
               </a:rPr>
-              <a:t>Our base-case DCF (WACC 9.0%, terminal growth 2.25%, terminal EBIT margin 15.5%) is in the model — bear case still brackets the current price</a:t>
+              <a:t>Our base-case DCF (WACC 9.0%, terminal growth 2.25%, terminal EBIT margin 15.5%) is in the model — bear is ~$56; downside is cushioned by net cash and FCF yield, not because bear brackets $100</a:t>
             </a:r>
           </a:p>
           <a:p>
@@ -12710,7 +12710,7 @@
                 <a:latin typeface="Garamond"/>
                 <a:cs typeface="Garamond"/>
               </a:rPr>
-              <a:t>Enterprise value ≈ equity value less cash; ~$9.3B EV at ~$100 per share</a:t>
+              <a:t>Market EV at ~$100 is ~$9.3B (~3.5× FY25 EBITDA); intrinsic DCF enterprise value is ~$15B</a:t>
             </a:r>
           </a:p>
           <a:p>
@@ -18348,7 +18348,7 @@
                 <a:latin typeface="Garamond"/>
                 <a:cs typeface="Garamond"/>
               </a:rPr>
-              <a:t>Selected TV is the Gordon identity (~6.0x). A 2.25% g year is not today’s NKE 12.7x or WSM 15.4x</a:t>
+              <a:t>Selected TV is the Gordon identity (~7.4x FY30 EBITDA at base WACC/g). A 2.25% g year is not today’s NKE 12.7x or WSM 15.4x</a:t>
             </a:r>
           </a:p>
           <a:p>
@@ -20583,7 +20583,7 @@
                 <a:latin typeface="Garamond"/>
                 <a:cs typeface="Garamond"/>
               </a:rPr>
-              <a:t>3.  Elite economics + accretive buybacks — FY2025 operating margin was 19.9% (last full year, not the trough); we model a 13.2% clean FY2026 run-rate (Q2 18.8% minus 560bps of tariff refunds), then add the $134.5M refund once (~14.5% reported). Diluted shares are down ~7% (128.0M → 119.1M)</a:t>
+              <a:t>3.  Elite economics + accretive buybacks — FY2025 operating margin was 19.9% (last full year, not the trough); we model a 13.2% clean FY2026 run-rate (Q2 18.8% minus 560bps of tariff refunds), then add the $134.5M refund once (~15.2% reported in our IS). Diluted shares are down ~7% (128.0M → 119.1M)</a:t>
             </a:r>
           </a:p>
           <a:p>

--- a/LULU/LULU_Investment_Pitch_Deck.pptx
+++ b/LULU/LULU_Investment_Pitch_Deck.pptx
@@ -4443,7 +4443,7 @@
                 <a:latin typeface="Garamond"/>
                 <a:cs typeface="Garamond"/>
               </a:rPr>
-              <a:t>Geographic mix shift is the bridge back to mid-single-digit revenue growth</a:t>
+              <a:t>Geographic mix shift is the bridge back to low-single-digit revenue growth (~2.3% FY27–30)</a:t>
             </a:r>
           </a:p>
           <a:p>
@@ -20562,7 +20562,7 @@
                 <a:latin typeface="Garamond"/>
                 <a:cs typeface="Garamond"/>
               </a:rPr>
-              <a:t>2.  International is a multi-year growth engine — China Mainland and Rest-of-World more than offset a maturing Americas and can return total revenue to mid-single-digit growth</a:t>
+              <a:t>2.  International is a multi-year growth engine — China Mainland and Rest-of-World more than offset a maturing Americas and can return total revenue to low-single-digit growth (~2.3% FY27–30 in our model)</a:t>
             </a:r>
           </a:p>
           <a:p>
@@ -21774,7 +21774,7 @@
                 <a:latin typeface="Garamond"/>
                 <a:cs typeface="Garamond"/>
               </a:rPr>
-              <a:t>Macro weakness maps onto LULU’s largest profit pool: Americas ~71% of FY25 revenue</a:t>
+              <a:t>Macro weakness maps onto LULU’s largest profit pool: Americas ~71% of FY25 revenue (10-K: 70.7%)</a:t>
             </a:r>
           </a:p>
           <a:p>

--- a/LULU/LULU_Investment_Pitch_Deck.pptx
+++ b/LULU/LULU_Investment_Pitch_Deck.pptx
@@ -4656,7 +4656,7 @@
                 <a:latin typeface="Garamond"/>
                 <a:cs typeface="Garamond"/>
               </a:rPr>
-              <a:t>FY2028E:  $10,942M</a:t>
+              <a:t>FY2028E:  $10,910M</a:t>
             </a:r>
           </a:p>
           <a:p>
@@ -4677,7 +4677,7 @@
                 <a:latin typeface="Garamond"/>
                 <a:cs typeface="Garamond"/>
               </a:rPr>
-              <a:t>FY2030E:  $11,452M</a:t>
+              <a:t>FY2030E:  $11,418M</a:t>
             </a:r>
           </a:p>
         </p:txBody>
@@ -7509,7 +7509,7 @@
                 <a:latin typeface="Garamond"/>
                 <a:cs typeface="Garamond"/>
               </a:rPr>
-              <a:t>Source: company 10-K filings; projections per GIS operating model</a:t>
+              <a:t>Projections = GIS base case (Scenarios column G); historicals per FY2025 10-K</a:t>
             </a:r>
           </a:p>
         </p:txBody>
@@ -7939,7 +7939,7 @@
                           <a:latin typeface="Garamond"/>
                           <a:cs typeface="Garamond"/>
                         </a:rPr>
-                        <a:t>10,942</a:t>
+                        <a:t>10,910</a:t>
                       </a:r>
                     </a:p>
                   </a:txBody>
@@ -7963,7 +7963,7 @@
                           <a:latin typeface="Garamond"/>
                           <a:cs typeface="Garamond"/>
                         </a:rPr>
-                        <a:t>11,452</a:t>
+                        <a:t>11,418</a:t>
                       </a:r>
                     </a:p>
                   </a:txBody>
@@ -8109,7 +8109,7 @@
                           <a:latin typeface="Garamond"/>
                           <a:cs typeface="Garamond"/>
                         </a:rPr>
-                        <a:t>6,025</a:t>
+                        <a:t>6,035</a:t>
                       </a:r>
                     </a:p>
                   </a:txBody>
@@ -8133,7 +8133,7 @@
                           <a:latin typeface="Garamond"/>
                           <a:cs typeface="Garamond"/>
                         </a:rPr>
-                        <a:t>6,292</a:t>
+                        <a:t>6,175</a:t>
                       </a:r>
                     </a:p>
                   </a:txBody>
@@ -8157,7 +8157,7 @@
                           <a:latin typeface="Garamond"/>
                           <a:cs typeface="Garamond"/>
                         </a:rPr>
-                        <a:t>6,642</a:t>
+                        <a:t>6,463</a:t>
                       </a:r>
                     </a:p>
                   </a:txBody>
@@ -8303,7 +8303,7 @@
                           <a:latin typeface="Garamond"/>
                           <a:cs typeface="Garamond"/>
                         </a:rPr>
-                        <a:t>1,587</a:t>
+                        <a:t>1,511</a:t>
                       </a:r>
                     </a:p>
                   </a:txBody>
@@ -8327,7 +8327,7 @@
                           <a:latin typeface="Garamond"/>
                           <a:cs typeface="Garamond"/>
                         </a:rPr>
-                        <a:t>1,853</a:t>
+                        <a:t>1,566</a:t>
                       </a:r>
                     </a:p>
                   </a:txBody>
@@ -8351,7 +8351,7 @@
                           <a:latin typeface="Garamond"/>
                           <a:cs typeface="Garamond"/>
                         </a:rPr>
-                        <a:t>2,112</a:t>
+                        <a:t>1,770</a:t>
                       </a:r>
                     </a:p>
                   </a:txBody>
@@ -8497,7 +8497,7 @@
                           <a:latin typeface="Garamond"/>
                           <a:cs typeface="Garamond"/>
                         </a:rPr>
-                        <a:t>15.2%</a:t>
+                        <a:t>14.5%</a:t>
                       </a:r>
                     </a:p>
                   </a:txBody>
@@ -8521,7 +8521,7 @@
                           <a:latin typeface="Garamond"/>
                           <a:cs typeface="Garamond"/>
                         </a:rPr>
-                        <a:t>16.9%</a:t>
+                        <a:t>14.3%</a:t>
                       </a:r>
                     </a:p>
                   </a:txBody>
@@ -8545,7 +8545,7 @@
                           <a:latin typeface="Garamond"/>
                           <a:cs typeface="Garamond"/>
                         </a:rPr>
-                        <a:t>18.4%</a:t>
+                        <a:t>15.5%</a:t>
                       </a:r>
                     </a:p>
                   </a:txBody>
@@ -8691,7 +8691,7 @@
                           <a:latin typeface="Garamond"/>
                           <a:cs typeface="Garamond"/>
                         </a:rPr>
-                        <a:t>1,142</a:t>
+                        <a:t>1,089</a:t>
                       </a:r>
                     </a:p>
                   </a:txBody>
@@ -8715,7 +8715,7 @@
                           <a:latin typeface="Garamond"/>
                           <a:cs typeface="Garamond"/>
                         </a:rPr>
-                        <a:t>1,322</a:t>
+                        <a:t>1,120</a:t>
                       </a:r>
                     </a:p>
                   </a:txBody>
@@ -8739,7 +8739,7 @@
                           <a:latin typeface="Garamond"/>
                           <a:cs typeface="Garamond"/>
                         </a:rPr>
-                        <a:t>1,496</a:t>
+                        <a:t>1,256</a:t>
                       </a:r>
                     </a:p>
                   </a:txBody>
@@ -8885,7 +8885,7 @@
                           <a:latin typeface="Garamond"/>
                           <a:cs typeface="Garamond"/>
                         </a:rPr>
-                        <a:t>10.02</a:t>
+                        <a:t>9.55</a:t>
                       </a:r>
                     </a:p>
                   </a:txBody>
@@ -8909,7 +8909,7 @@
                           <a:latin typeface="Garamond"/>
                           <a:cs typeface="Garamond"/>
                         </a:rPr>
-                        <a:t>12.58</a:t>
+                        <a:t>10.66</a:t>
                       </a:r>
                     </a:p>
                   </a:txBody>
@@ -8933,7 +8933,7 @@
                           <a:latin typeface="Garamond"/>
                           <a:cs typeface="Garamond"/>
                         </a:rPr>
-                        <a:t>15.40</a:t>
+                        <a:t>12.93</a:t>
                       </a:r>
                     </a:p>
                   </a:txBody>
@@ -9256,7 +9256,7 @@
                 <a:latin typeface="Garamond"/>
                 <a:cs typeface="Garamond"/>
               </a:rPr>
-              <a:t>Source: company 10-K filings; projections per GIS operating model</a:t>
+              <a:t>Projections = GIS base case (Scenarios column G); historicals per FY2025 10-K</a:t>
             </a:r>
           </a:p>
         </p:txBody>
@@ -9662,7 +9662,7 @@
                           <a:latin typeface="Garamond"/>
                           <a:cs typeface="Garamond"/>
                         </a:rPr>
-                        <a:t>2,375</a:t>
+                        <a:t>2,470</a:t>
                       </a:r>
                     </a:p>
                   </a:txBody>
@@ -9686,7 +9686,7 @@
                           <a:latin typeface="Garamond"/>
                           <a:cs typeface="Garamond"/>
                         </a:rPr>
-                        <a:t>3,778</a:t>
+                        <a:t>3,562</a:t>
                       </a:r>
                     </a:p>
                   </a:txBody>
@@ -9710,7 +9710,7 @@
                           <a:latin typeface="Garamond"/>
                           <a:cs typeface="Garamond"/>
                         </a:rPr>
-                        <a:t>5,648</a:t>
+                        <a:t>4,864</a:t>
                       </a:r>
                     </a:p>
                   </a:txBody>
@@ -9856,7 +9856,7 @@
                           <a:latin typeface="Garamond"/>
                           <a:cs typeface="Garamond"/>
                         </a:rPr>
-                        <a:t>1,542</a:t>
+                        <a:t>1,538</a:t>
                       </a:r>
                     </a:p>
                   </a:txBody>
@@ -9880,7 +9880,7 @@
                           <a:latin typeface="Garamond"/>
                           <a:cs typeface="Garamond"/>
                         </a:rPr>
-                        <a:t>1,535</a:t>
+                        <a:t>1,563</a:t>
                       </a:r>
                     </a:p>
                   </a:txBody>
@@ -9904,7 +9904,7 @@
                           <a:latin typeface="Garamond"/>
                           <a:cs typeface="Garamond"/>
                         </a:rPr>
-                        <a:t>1,587</a:t>
+                        <a:t>1,635</a:t>
                       </a:r>
                     </a:p>
                   </a:txBody>
@@ -10050,7 +10050,7 @@
                           <a:latin typeface="Garamond"/>
                           <a:cs typeface="Garamond"/>
                         </a:rPr>
-                        <a:t>8,946</a:t>
+                        <a:t>8,892</a:t>
                       </a:r>
                     </a:p>
                   </a:txBody>
@@ -10074,7 +10074,7 @@
                           <a:latin typeface="Garamond"/>
                           <a:cs typeface="Garamond"/>
                         </a:rPr>
-                        <a:t>10,728</a:t>
+                        <a:t>10,343</a:t>
                       </a:r>
                     </a:p>
                   </a:txBody>
@@ -10098,7 +10098,7 @@
                           <a:latin typeface="Garamond"/>
                           <a:cs typeface="Garamond"/>
                         </a:rPr>
-                        <a:t>12,888</a:t>
+                        <a:t>12,067</a:t>
                       </a:r>
                     </a:p>
                   </a:txBody>
@@ -10244,7 +10244,7 @@
                           <a:latin typeface="Garamond"/>
                           <a:cs typeface="Garamond"/>
                         </a:rPr>
-                        <a:t>3,280</a:t>
+                        <a:t>3,279</a:t>
                       </a:r>
                     </a:p>
                   </a:txBody>
@@ -10268,7 +10268,7 @@
                           <a:latin typeface="Garamond"/>
                           <a:cs typeface="Garamond"/>
                         </a:rPr>
-                        <a:t>3,432</a:t>
+                        <a:t>3,429</a:t>
                       </a:r>
                     </a:p>
                   </a:txBody>
@@ -10438,7 +10438,7 @@
                           <a:latin typeface="Garamond"/>
                           <a:cs typeface="Garamond"/>
                         </a:rPr>
-                        <a:t>5,666</a:t>
+                        <a:t>5,613</a:t>
                       </a:r>
                     </a:p>
                   </a:txBody>
@@ -10462,7 +10462,7 @@
                           <a:latin typeface="Garamond"/>
                           <a:cs typeface="Garamond"/>
                         </a:rPr>
-                        <a:t>7,296</a:t>
+                        <a:t>6,914</a:t>
                       </a:r>
                     </a:p>
                   </a:txBody>
@@ -10486,7 +10486,7 @@
                           <a:latin typeface="Garamond"/>
                           <a:cs typeface="Garamond"/>
                         </a:rPr>
-                        <a:t>9,303</a:t>
+                        <a:t>8,481</a:t>
                       </a:r>
                     </a:p>
                   </a:txBody>
@@ -11003,7 +11003,7 @@
                 <a:latin typeface="Garamond"/>
                 <a:cs typeface="Garamond"/>
               </a:rPr>
-              <a:t>Source: company 10-K filings; projections per GIS operating model</a:t>
+              <a:t>Projections = GIS base case (Scenarios column G); historicals per FY2025 10-K</a:t>
             </a:r>
           </a:p>
         </p:txBody>
@@ -11409,7 +11409,7 @@
                           <a:latin typeface="Garamond"/>
                           <a:cs typeface="Garamond"/>
                         </a:rPr>
-                        <a:t>1,797</a:t>
+                        <a:t>1,736</a:t>
                       </a:r>
                     </a:p>
                   </a:txBody>
@@ -11433,7 +11433,7 @@
                           <a:latin typeface="Garamond"/>
                           <a:cs typeface="Garamond"/>
                         </a:rPr>
-                        <a:t>1,894</a:t>
+                        <a:t>1,677</a:t>
                       </a:r>
                     </a:p>
                   </a:txBody>
@@ -11457,7 +11457,7 @@
                           <a:latin typeface="Garamond"/>
                           <a:cs typeface="Garamond"/>
                         </a:rPr>
-                        <a:t>2,068</a:t>
+                        <a:t>1,812</a:t>
                       </a:r>
                     </a:p>
                   </a:txBody>
@@ -11603,7 +11603,7 @@
                           <a:latin typeface="Garamond"/>
                           <a:cs typeface="Garamond"/>
                         </a:rPr>
-                        <a:t>(730)</a:t>
+                        <a:t>(573)</a:t>
                       </a:r>
                     </a:p>
                   </a:txBody>
@@ -11627,7 +11627,7 @@
                           <a:latin typeface="Garamond"/>
                           <a:cs typeface="Garamond"/>
                         </a:rPr>
-                        <a:t>(602)</a:t>
+                        <a:t>(600)</a:t>
                       </a:r>
                     </a:p>
                   </a:txBody>
@@ -11651,7 +11651,7 @@
                           <a:latin typeface="Garamond"/>
                           <a:cs typeface="Garamond"/>
                         </a:rPr>
-                        <a:t>(573)</a:t>
+                        <a:t>(628)</a:t>
                       </a:r>
                     </a:p>
                   </a:txBody>
@@ -11797,7 +11797,7 @@
                           <a:latin typeface="Garamond"/>
                           <a:cs typeface="Garamond"/>
                         </a:rPr>
-                        <a:t>1,067</a:t>
+                        <a:t>1,163</a:t>
                       </a:r>
                     </a:p>
                   </a:txBody>
@@ -11821,7 +11821,7 @@
                           <a:latin typeface="Garamond"/>
                           <a:cs typeface="Garamond"/>
                         </a:rPr>
-                        <a:t>1,292</a:t>
+                        <a:t>1,077</a:t>
                       </a:r>
                     </a:p>
                   </a:txBody>
@@ -11845,7 +11845,7 @@
                           <a:latin typeface="Garamond"/>
                           <a:cs typeface="Garamond"/>
                         </a:rPr>
-                        <a:t>1,495</a:t>
+                        <a:t>1,184</a:t>
                       </a:r>
                     </a:p>
                   </a:txBody>
@@ -12185,7 +12185,7 @@
                           <a:latin typeface="Garamond"/>
                           <a:cs typeface="Garamond"/>
                         </a:rPr>
-                        <a:t>480</a:t>
+                        <a:t>469</a:t>
                       </a:r>
                     </a:p>
                   </a:txBody>
@@ -12209,7 +12209,7 @@
                           <a:latin typeface="Garamond"/>
                           <a:cs typeface="Garamond"/>
                         </a:rPr>
-                        <a:t>492</a:t>
+                        <a:t>491</a:t>
                       </a:r>
                     </a:p>
                   </a:txBody>
@@ -12233,7 +12233,7 @@
                           <a:latin typeface="Garamond"/>
                           <a:cs typeface="Garamond"/>
                         </a:rPr>
-                        <a:t>515</a:t>
+                        <a:t>514</a:t>
                       </a:r>
                     </a:p>
                   </a:txBody>

--- a/LULU/LULU_Investment_Pitch_Deck.pptx
+++ b/LULU/LULU_Investment_Pitch_Deck.pptx
@@ -7421,7 +7421,7 @@
                 <a:latin typeface="Garamond"/>
                 <a:cs typeface="Garamond"/>
               </a:rPr>
-              <a:t>Historical results with our base-case forecast (US$ M)</a:t>
+              <a:t>Reported history (10-K) vs GIS base-case operating forecast (US$ M)</a:t>
             </a:r>
           </a:p>
         </p:txBody>
@@ -7558,17 +7558,273 @@
           </a:p>
         </p:txBody>
       </p:sp>
+      <p:sp>
+        <p:nvSpPr>
+          <p:cNvPr id="8" name="Rectangle 7"/>
+          <p:cNvSpPr/>
+          <p:nvPr/>
+        </p:nvSpPr>
+        <p:spPr>
+          <a:xfrm>
+            <a:off x="457200" y="1024128"/>
+            <a:ext cx="5532120" cy="1417320"/>
+          </a:xfrm>
+          <a:prstGeom prst="rect">
+            <a:avLst/>
+          </a:prstGeom>
+          <a:solidFill>
+            <a:srgbClr val="F0F1F3"/>
+          </a:solidFill>
+          <a:ln>
+            <a:noFill/>
+          </a:ln>
+          <a:effectLst/>
+        </p:spPr>
+        <p:style>
+          <a:lnRef idx="1">
+            <a:schemeClr val="accent1"/>
+          </a:lnRef>
+          <a:fillRef idx="3">
+            <a:schemeClr val="accent1"/>
+          </a:fillRef>
+          <a:effectRef idx="2">
+            <a:schemeClr val="accent1"/>
+          </a:effectRef>
+          <a:fontRef idx="minor">
+            <a:schemeClr val="lt1"/>
+          </a:fontRef>
+        </p:style>
+        <p:txBody>
+          <a:bodyPr rtlCol="0" anchor="ctr" wrap="square"/>
+          <a:lstStyle/>
+          <a:p>
+            <a:pPr algn="l">
+              <a:spcBef>
+                <a:spcPts val="0"/>
+              </a:spcBef>
+              <a:spcAft>
+                <a:spcPts val="300"/>
+              </a:spcAft>
+              <a:buNone/>
+            </a:pPr>
+            <a:r>
+              <a:rPr sz="1150" b="1" i="0">
+                <a:solidFill>
+                  <a:srgbClr val="990000"/>
+                </a:solidFill>
+                <a:latin typeface="Garamond"/>
+                <a:cs typeface="Garamond"/>
+              </a:rPr>
+              <a:t>HISTORICALS (FY2022–FY2025) — SEC 10-K</a:t>
+            </a:r>
+          </a:p>
+          <a:p>
+            <a:pPr algn="l" indent="-152400" marL="177800">
+              <a:spcBef>
+                <a:spcPts val="0"/>
+              </a:spcBef>
+              <a:spcAft>
+                <a:spcPts val="200"/>
+              </a:spcAft>
+              <a:buFont typeface="Garamond"/>
+              <a:buChar char="•"/>
+            </a:pPr>
+            <a:r>
+              <a:rPr sz="1050" b="0" i="0">
+                <a:solidFill>
+                  <a:srgbClr val="262626"/>
+                </a:solidFill>
+                <a:latin typeface="Garamond"/>
+                <a:cs typeface="Garamond"/>
+              </a:rPr>
+              <a:t>Reported figures from Forms 10-K; FY2025 year ended February 1, 2026</a:t>
+            </a:r>
+          </a:p>
+          <a:p>
+            <a:pPr algn="l" indent="-152400" marL="177800">
+              <a:spcBef>
+                <a:spcPts val="0"/>
+              </a:spcBef>
+              <a:spcAft>
+                <a:spcPts val="200"/>
+              </a:spcAft>
+              <a:buFont typeface="Garamond"/>
+              <a:buChar char="•"/>
+            </a:pPr>
+            <a:r>
+              <a:rPr sz="1050" b="0" i="0">
+                <a:solidFill>
+                  <a:srgbClr val="262626"/>
+                </a:solidFill>
+                <a:latin typeface="Garamond"/>
+                <a:cs typeface="Garamond"/>
+              </a:rPr>
+              <a:t>Revenue grew $8,111M → $11,103M; operating margin peaked 23.7% (FY24), still 19.9% in FY25</a:t>
+            </a:r>
+          </a:p>
+          <a:p>
+            <a:pPr algn="l" indent="-152400" marL="177800">
+              <a:spcBef>
+                <a:spcPts val="0"/>
+              </a:spcBef>
+              <a:spcAft>
+                <a:spcPts val="200"/>
+              </a:spcAft>
+              <a:buFont typeface="Garamond"/>
+              <a:buChar char="•"/>
+            </a:pPr>
+            <a:r>
+              <a:rPr sz="1050" b="0" i="0">
+                <a:solidFill>
+                  <a:srgbClr val="262626"/>
+                </a:solidFill>
+                <a:latin typeface="Garamond"/>
+                <a:cs typeface="Garamond"/>
+              </a:rPr>
+              <a:t>Diluted EPS rose $6.68 → $13.26; share count fell 128.0M → 119.1M via buybacks</a:t>
+            </a:r>
+          </a:p>
+        </p:txBody>
+      </p:sp>
+      <p:sp>
+        <p:nvSpPr>
+          <p:cNvPr id="9" name="Rectangle 8"/>
+          <p:cNvSpPr/>
+          <p:nvPr/>
+        </p:nvSpPr>
+        <p:spPr>
+          <a:xfrm>
+            <a:off x="6126480" y="1024128"/>
+            <a:ext cx="5532120" cy="1417320"/>
+          </a:xfrm>
+          <a:prstGeom prst="rect">
+            <a:avLst/>
+          </a:prstGeom>
+          <a:solidFill>
+            <a:srgbClr val="1F2A44"/>
+          </a:solidFill>
+          <a:ln>
+            <a:noFill/>
+          </a:ln>
+          <a:effectLst/>
+        </p:spPr>
+        <p:style>
+          <a:lnRef idx="1">
+            <a:schemeClr val="accent1"/>
+          </a:lnRef>
+          <a:fillRef idx="3">
+            <a:schemeClr val="accent1"/>
+          </a:fillRef>
+          <a:effectRef idx="2">
+            <a:schemeClr val="accent1"/>
+          </a:effectRef>
+          <a:fontRef idx="minor">
+            <a:schemeClr val="lt1"/>
+          </a:fontRef>
+        </p:style>
+        <p:txBody>
+          <a:bodyPr rtlCol="0" anchor="ctr" wrap="square"/>
+          <a:lstStyle/>
+          <a:p>
+            <a:pPr algn="l">
+              <a:spcBef>
+                <a:spcPts val="0"/>
+              </a:spcBef>
+              <a:spcAft>
+                <a:spcPts val="300"/>
+              </a:spcAft>
+              <a:buNone/>
+            </a:pPr>
+            <a:r>
+              <a:rPr sz="1150" b="1" i="0">
+                <a:solidFill>
+                  <a:srgbClr val="FFC72C"/>
+                </a:solidFill>
+                <a:latin typeface="Garamond"/>
+                <a:cs typeface="Garamond"/>
+              </a:rPr>
+              <a:t>BASE-CASE FORECAST (FY2026E–FY2030E) — Scenarios col G</a:t>
+            </a:r>
+          </a:p>
+          <a:p>
+            <a:pPr algn="l" indent="-152400" marL="177800">
+              <a:spcBef>
+                <a:spcPts val="0"/>
+              </a:spcBef>
+              <a:spcAft>
+                <a:spcPts val="200"/>
+              </a:spcAft>
+              <a:buFont typeface="Garamond"/>
+              <a:buChar char="•"/>
+            </a:pPr>
+            <a:r>
+              <a:rPr sz="1050" b="0" i="0">
+                <a:solidFill>
+                  <a:srgbClr val="FFFFFF"/>
+                </a:solidFill>
+                <a:latin typeface="Garamond"/>
+                <a:cs typeface="Garamond"/>
+              </a:rPr>
+              <a:t>FY26 revenue 10,425M (−6.1% guide); then +2.3%/yr — same path as DCF</a:t>
+            </a:r>
+          </a:p>
+          <a:p>
+            <a:pPr algn="l" indent="-152400" marL="177800">
+              <a:spcBef>
+                <a:spcPts val="0"/>
+              </a:spcBef>
+              <a:spcAft>
+                <a:spcPts val="200"/>
+              </a:spcAft>
+              <a:buFont typeface="Garamond"/>
+              <a:buChar char="•"/>
+            </a:pPr>
+            <a:r>
+              <a:rPr sz="1050" b="0" i="0">
+                <a:solidFill>
+                  <a:srgbClr val="FFFFFF"/>
+                </a:solidFill>
+                <a:latin typeface="Garamond"/>
+                <a:cs typeface="Garamond"/>
+              </a:rPr>
+              <a:t>Clean EBIT margin 13.2% → 15.5%; FY26 includes $134.5M IEEPA refund (reported OM 14.5%)</a:t>
+            </a:r>
+          </a:p>
+          <a:p>
+            <a:pPr algn="l" indent="-152400" marL="177800">
+              <a:spcBef>
+                <a:spcPts val="0"/>
+              </a:spcBef>
+              <a:spcAft>
+                <a:spcPts val="200"/>
+              </a:spcAft>
+              <a:buFont typeface="Garamond"/>
+              <a:buChar char="•"/>
+            </a:pPr>
+            <a:r>
+              <a:rPr sz="1050" b="0" i="0">
+                <a:solidFill>
+                  <a:srgbClr val="FFFFFF"/>
+                </a:solidFill>
+                <a:latin typeface="Garamond"/>
+                <a:cs typeface="Garamond"/>
+              </a:rPr>
+              <a:t>EPS trough $9.55 (FY26E) → $12.93 (FY30E); not bull/bear — GIS base only</a:t>
+            </a:r>
+          </a:p>
+        </p:txBody>
+      </p:sp>
       <p:graphicFrame>
         <p:nvGraphicFramePr>
-          <p:cNvPr id="8" name="Table 7"/>
+          <p:cNvPr id="10" name="Table 9"/>
           <p:cNvGraphicFramePr>
             <a:graphicFrameLocks noGrp="1"/>
           </p:cNvGraphicFramePr>
           <p:nvPr/>
         </p:nvGraphicFramePr>
         <p:xfrm>
-          <a:off x="457200" y="1234440"/>
-          <a:ext cx="11292837" cy="4937760"/>
+          <a:off x="457200" y="2578608"/>
+          <a:ext cx="11292839" cy="3401568"/>
         </p:xfrm>
         <a:graphic>
           <a:graphicData uri="http://schemas.openxmlformats.org/drawingml/2006/table">
@@ -7577,16 +7833,16 @@
                 <a:tableStyleId>{5C22544A-7EE6-4342-B048-85BDC9FD1C3A}</a:tableStyleId>
               </a:tblPr>
               <a:tblGrid>
-                <a:gridCol w="2926080"/>
-                <a:gridCol w="1195251"/>
-                <a:gridCol w="1195251"/>
-                <a:gridCol w="1195251"/>
-                <a:gridCol w="1195251"/>
-                <a:gridCol w="1195251"/>
-                <a:gridCol w="1195251"/>
-                <a:gridCol w="1195251"/>
+                <a:gridCol w="2743200"/>
+                <a:gridCol w="1221377"/>
+                <a:gridCol w="1221377"/>
+                <a:gridCol w="1221377"/>
+                <a:gridCol w="1221377"/>
+                <a:gridCol w="1221377"/>
+                <a:gridCol w="1221377"/>
+                <a:gridCol w="1221377"/>
               </a:tblGrid>
-              <a:tr h="705394">
+              <a:tr h="485938">
                 <a:tc>
                   <a:txBody>
                     <a:bodyPr/>
@@ -7780,7 +8036,7 @@
                   </a:tcPr>
                 </a:tc>
               </a:tr>
-              <a:tr h="705394">
+              <a:tr h="485938">
                 <a:tc>
                   <a:txBody>
                     <a:bodyPr/>
@@ -7974,7 +8230,7 @@
                   </a:tcPr>
                 </a:tc>
               </a:tr>
-              <a:tr h="705394">
+              <a:tr h="485938">
                 <a:tc>
                   <a:txBody>
                     <a:bodyPr/>
@@ -8168,7 +8424,7 @@
                   </a:tcPr>
                 </a:tc>
               </a:tr>
-              <a:tr h="705394">
+              <a:tr h="485938">
                 <a:tc>
                   <a:txBody>
                     <a:bodyPr/>
@@ -8362,7 +8618,7 @@
                   </a:tcPr>
                 </a:tc>
               </a:tr>
-              <a:tr h="705394">
+              <a:tr h="485938">
                 <a:tc>
                   <a:txBody>
                     <a:bodyPr/>
@@ -8556,7 +8812,7 @@
                   </a:tcPr>
                 </a:tc>
               </a:tr>
-              <a:tr h="705394">
+              <a:tr h="485938">
                 <a:tc>
                   <a:txBody>
                     <a:bodyPr/>
@@ -8750,7 +9006,7 @@
                   </a:tcPr>
                 </a:tc>
               </a:tr>
-              <a:tr h="705396">
+              <a:tr h="485940">
                 <a:tc>
                   <a:txBody>
                     <a:bodyPr/>
@@ -8950,14 +9206,14 @@
       </p:graphicFrame>
       <p:sp>
         <p:nvSpPr>
-          <p:cNvPr id="9" name="TextBox 8"/>
+          <p:cNvPr id="11" name="TextBox 10"/>
           <p:cNvSpPr txBox="1"/>
           <p:nvPr/>
         </p:nvSpPr>
         <p:spPr>
           <a:xfrm>
-            <a:off x="457200" y="6172200"/>
-            <a:ext cx="11292840" cy="320040"/>
+            <a:off x="457200" y="6053328"/>
+            <a:ext cx="11292840" cy="411480"/>
           </a:xfrm>
           <a:prstGeom prst="rect">
             <a:avLst/>
@@ -8980,14 +9236,14 @@
               <a:buNone/>
             </a:pPr>
             <a:r>
-              <a:rPr sz="1100" b="0" i="1">
+              <a:rPr sz="1050" b="0" i="1">
                 <a:solidFill>
                   <a:srgbClr val="8C8C8C"/>
                 </a:solidFill>
                 <a:latin typeface="Garamond"/>
                 <a:cs typeface="Garamond"/>
               </a:rPr>
-              <a:t>FY2026E reported OM 15.2% = clean ~13.9% (56.5% GM − 42.5% SG&amp;A) plus $134.5M IEEPA refund (~+1.3 ppt). DCF uses the Q2 clean 13.2% run-rate as its trough.</a:t>
+              <a:t>Table shows FY26 / FY28 / FY30; full five-year path in LULU_3_Statement_Model.xlsx. Bull ($202) and bear ($56) scenarios are in the Appendix only.</a:t>
             </a:r>
           </a:p>
         </p:txBody>
@@ -9168,7 +9424,7 @@
                 <a:latin typeface="Garamond"/>
                 <a:cs typeface="Garamond"/>
               </a:rPr>
-              <a:t>A net-cash balance sheet underpins downside protection (US$ M)</a:t>
+              <a:t>Net-cash reported history vs base-case funded growth (US$ M)</a:t>
             </a:r>
           </a:p>
         </p:txBody>
@@ -9305,17 +9561,273 @@
           </a:p>
         </p:txBody>
       </p:sp>
+      <p:sp>
+        <p:nvSpPr>
+          <p:cNvPr id="8" name="Rectangle 7"/>
+          <p:cNvSpPr/>
+          <p:nvPr/>
+        </p:nvSpPr>
+        <p:spPr>
+          <a:xfrm>
+            <a:off x="457200" y="1024128"/>
+            <a:ext cx="5532120" cy="1417320"/>
+          </a:xfrm>
+          <a:prstGeom prst="rect">
+            <a:avLst/>
+          </a:prstGeom>
+          <a:solidFill>
+            <a:srgbClr val="F0F1F3"/>
+          </a:solidFill>
+          <a:ln>
+            <a:noFill/>
+          </a:ln>
+          <a:effectLst/>
+        </p:spPr>
+        <p:style>
+          <a:lnRef idx="1">
+            <a:schemeClr val="accent1"/>
+          </a:lnRef>
+          <a:fillRef idx="3">
+            <a:schemeClr val="accent1"/>
+          </a:fillRef>
+          <a:effectRef idx="2">
+            <a:schemeClr val="accent1"/>
+          </a:effectRef>
+          <a:fontRef idx="minor">
+            <a:schemeClr val="lt1"/>
+          </a:fontRef>
+        </p:style>
+        <p:txBody>
+          <a:bodyPr rtlCol="0" anchor="ctr" wrap="square"/>
+          <a:lstStyle/>
+          <a:p>
+            <a:pPr algn="l">
+              <a:spcBef>
+                <a:spcPts val="0"/>
+              </a:spcBef>
+              <a:spcAft>
+                <a:spcPts val="300"/>
+              </a:spcAft>
+              <a:buNone/>
+            </a:pPr>
+            <a:r>
+              <a:rPr sz="1150" b="1" i="0">
+                <a:solidFill>
+                  <a:srgbClr val="990000"/>
+                </a:solidFill>
+                <a:latin typeface="Garamond"/>
+                <a:cs typeface="Garamond"/>
+              </a:rPr>
+              <a:t>HISTORICALS (FY2022–FY2025) — SEC 10-K</a:t>
+            </a:r>
+          </a:p>
+          <a:p>
+            <a:pPr algn="l" indent="-152400" marL="177800">
+              <a:spcBef>
+                <a:spcPts val="0"/>
+              </a:spcBef>
+              <a:spcAft>
+                <a:spcPts val="200"/>
+              </a:spcAft>
+              <a:buFont typeface="Garamond"/>
+              <a:buChar char="•"/>
+            </a:pPr>
+            <a:r>
+              <a:rPr sz="1050" b="0" i="0">
+                <a:solidFill>
+                  <a:srgbClr val="262626"/>
+                </a:solidFill>
+                <a:latin typeface="Garamond"/>
+                <a:cs typeface="Garamond"/>
+              </a:rPr>
+              <a:t>No funded debt in any historical year; FY25 cash $1,807M</a:t>
+            </a:r>
+          </a:p>
+          <a:p>
+            <a:pPr algn="l" indent="-152400" marL="177800">
+              <a:spcBef>
+                <a:spcPts val="0"/>
+              </a:spcBef>
+              <a:spcAft>
+                <a:spcPts val="200"/>
+              </a:spcAft>
+              <a:buFont typeface="Garamond"/>
+              <a:buChar char="•"/>
+            </a:pPr>
+            <a:r>
+              <a:rPr sz="1050" b="0" i="0">
+                <a:solidFill>
+                  <a:srgbClr val="262626"/>
+                </a:solidFill>
+                <a:latin typeface="Garamond"/>
+                <a:cs typeface="Garamond"/>
+              </a:rPr>
+              <a:t>Total assets $6,841M; shareholders’ equity $3,896M at FY25</a:t>
+            </a:r>
+          </a:p>
+          <a:p>
+            <a:pPr algn="l" indent="-152400" marL="177800">
+              <a:spcBef>
+                <a:spcPts val="0"/>
+              </a:spcBef>
+              <a:spcAft>
+                <a:spcPts val="200"/>
+              </a:spcAft>
+              <a:buFont typeface="Garamond"/>
+              <a:buChar char="•"/>
+            </a:pPr>
+            <a:r>
+              <a:rPr sz="1050" b="0" i="0">
+                <a:solidFill>
+                  <a:srgbClr val="262626"/>
+                </a:solidFill>
+                <a:latin typeface="Garamond"/>
+                <a:cs typeface="Garamond"/>
+              </a:rPr>
+              <a:t>Lease-backed retail footprint (ROU assets) — balance sheet already a downside cushion at ~10x earnings</a:t>
+            </a:r>
+          </a:p>
+        </p:txBody>
+      </p:sp>
+      <p:sp>
+        <p:nvSpPr>
+          <p:cNvPr id="9" name="Rectangle 8"/>
+          <p:cNvSpPr/>
+          <p:nvPr/>
+        </p:nvSpPr>
+        <p:spPr>
+          <a:xfrm>
+            <a:off x="6126480" y="1024128"/>
+            <a:ext cx="5532120" cy="1417320"/>
+          </a:xfrm>
+          <a:prstGeom prst="rect">
+            <a:avLst/>
+          </a:prstGeom>
+          <a:solidFill>
+            <a:srgbClr val="1F2A44"/>
+          </a:solidFill>
+          <a:ln>
+            <a:noFill/>
+          </a:ln>
+          <a:effectLst/>
+        </p:spPr>
+        <p:style>
+          <a:lnRef idx="1">
+            <a:schemeClr val="accent1"/>
+          </a:lnRef>
+          <a:fillRef idx="3">
+            <a:schemeClr val="accent1"/>
+          </a:fillRef>
+          <a:effectRef idx="2">
+            <a:schemeClr val="accent1"/>
+          </a:effectRef>
+          <a:fontRef idx="minor">
+            <a:schemeClr val="lt1"/>
+          </a:fontRef>
+        </p:style>
+        <p:txBody>
+          <a:bodyPr rtlCol="0" anchor="ctr" wrap="square"/>
+          <a:lstStyle/>
+          <a:p>
+            <a:pPr algn="l">
+              <a:spcBef>
+                <a:spcPts val="0"/>
+              </a:spcBef>
+              <a:spcAft>
+                <a:spcPts val="300"/>
+              </a:spcAft>
+              <a:buNone/>
+            </a:pPr>
+            <a:r>
+              <a:rPr sz="1150" b="1" i="0">
+                <a:solidFill>
+                  <a:srgbClr val="FFC72C"/>
+                </a:solidFill>
+                <a:latin typeface="Garamond"/>
+                <a:cs typeface="Garamond"/>
+              </a:rPr>
+              <a:t>BASE-CASE FORECAST (FY2026E–FY2030E) — 3-statement model</a:t>
+            </a:r>
+          </a:p>
+          <a:p>
+            <a:pPr algn="l" indent="-152400" marL="177800">
+              <a:spcBef>
+                <a:spcPts val="0"/>
+              </a:spcBef>
+              <a:spcAft>
+                <a:spcPts val="200"/>
+              </a:spcAft>
+              <a:buFont typeface="Garamond"/>
+              <a:buChar char="•"/>
+            </a:pPr>
+            <a:r>
+              <a:rPr sz="1050" b="0" i="0">
+                <a:solidFill>
+                  <a:srgbClr val="FFFFFF"/>
+                </a:solidFill>
+                <a:latin typeface="Garamond"/>
+                <a:cs typeface="Garamond"/>
+              </a:rPr>
+              <a:t>Cash grows 2,470M → 4,864M while funding $500M/yr buybacks; debt stays $0</a:t>
+            </a:r>
+          </a:p>
+          <a:p>
+            <a:pPr algn="l" indent="-152400" marL="177800">
+              <a:spcBef>
+                <a:spcPts val="0"/>
+              </a:spcBef>
+              <a:spcAft>
+                <a:spcPts val="200"/>
+              </a:spcAft>
+              <a:buFont typeface="Garamond"/>
+              <a:buChar char="•"/>
+            </a:pPr>
+            <a:r>
+              <a:rPr sz="1050" b="0" i="0">
+                <a:solidFill>
+                  <a:srgbClr val="FFFFFF"/>
+                </a:solidFill>
+                <a:latin typeface="Garamond"/>
+                <a:cs typeface="Garamond"/>
+              </a:rPr>
+              <a:t>WC drivers (% of revenue / COGS) roll forward; cash is the balancing plug on the CFS</a:t>
+            </a:r>
+          </a:p>
+          <a:p>
+            <a:pPr algn="l" indent="-152400" marL="177800">
+              <a:spcBef>
+                <a:spcPts val="0"/>
+              </a:spcBef>
+              <a:spcAft>
+                <a:spcPts val="200"/>
+              </a:spcAft>
+              <a:buFont typeface="Garamond"/>
+              <a:buChar char="•"/>
+            </a:pPr>
+            <a:r>
+              <a:rPr sz="1050" b="0" i="0">
+                <a:solidFill>
+                  <a:srgbClr val="FFFFFF"/>
+                </a:solidFill>
+                <a:latin typeface="Garamond"/>
+                <a:cs typeface="Garamond"/>
+              </a:rPr>
+              <a:t>Total assets reach 12,067M; equity 8,481M — leverage-free compounding</a:t>
+            </a:r>
+          </a:p>
+        </p:txBody>
+      </p:sp>
       <p:graphicFrame>
         <p:nvGraphicFramePr>
-          <p:cNvPr id="8" name="Table 7"/>
+          <p:cNvPr id="10" name="Table 9"/>
           <p:cNvGraphicFramePr>
             <a:graphicFrameLocks noGrp="1"/>
           </p:cNvGraphicFramePr>
           <p:nvPr/>
         </p:nvGraphicFramePr>
         <p:xfrm>
-          <a:off x="457200" y="1234440"/>
-          <a:ext cx="11292837" cy="4937760"/>
+          <a:off x="457200" y="2578608"/>
+          <a:ext cx="11292839" cy="3401568"/>
         </p:xfrm>
         <a:graphic>
           <a:graphicData uri="http://schemas.openxmlformats.org/drawingml/2006/table">
@@ -9324,16 +9836,16 @@
                 <a:tableStyleId>{5C22544A-7EE6-4342-B048-85BDC9FD1C3A}</a:tableStyleId>
               </a:tblPr>
               <a:tblGrid>
-                <a:gridCol w="2926080"/>
-                <a:gridCol w="1195251"/>
-                <a:gridCol w="1195251"/>
-                <a:gridCol w="1195251"/>
-                <a:gridCol w="1195251"/>
-                <a:gridCol w="1195251"/>
-                <a:gridCol w="1195251"/>
-                <a:gridCol w="1195251"/>
+                <a:gridCol w="2743200"/>
+                <a:gridCol w="1221377"/>
+                <a:gridCol w="1221377"/>
+                <a:gridCol w="1221377"/>
+                <a:gridCol w="1221377"/>
+                <a:gridCol w="1221377"/>
+                <a:gridCol w="1221377"/>
+                <a:gridCol w="1221377"/>
               </a:tblGrid>
-              <a:tr h="705394">
+              <a:tr h="485938">
                 <a:tc>
                   <a:txBody>
                     <a:bodyPr/>
@@ -9527,7 +10039,7 @@
                   </a:tcPr>
                 </a:tc>
               </a:tr>
-              <a:tr h="705394">
+              <a:tr h="485938">
                 <a:tc>
                   <a:txBody>
                     <a:bodyPr/>
@@ -9721,7 +10233,7 @@
                   </a:tcPr>
                 </a:tc>
               </a:tr>
-              <a:tr h="705394">
+              <a:tr h="485938">
                 <a:tc>
                   <a:txBody>
                     <a:bodyPr/>
@@ -9915,7 +10427,7 @@
                   </a:tcPr>
                 </a:tc>
               </a:tr>
-              <a:tr h="705394">
+              <a:tr h="485938">
                 <a:tc>
                   <a:txBody>
                     <a:bodyPr/>
@@ -10109,7 +10621,7 @@
                   </a:tcPr>
                 </a:tc>
               </a:tr>
-              <a:tr h="705394">
+              <a:tr h="485938">
                 <a:tc>
                   <a:txBody>
                     <a:bodyPr/>
@@ -10303,7 +10815,7 @@
                   </a:tcPr>
                 </a:tc>
               </a:tr>
-              <a:tr h="705394">
+              <a:tr h="485938">
                 <a:tc>
                   <a:txBody>
                     <a:bodyPr/>
@@ -10497,7 +11009,7 @@
                   </a:tcPr>
                 </a:tc>
               </a:tr>
-              <a:tr h="705396">
+              <a:tr h="485940">
                 <a:tc>
                   <a:txBody>
                     <a:bodyPr/>
@@ -10697,14 +11209,14 @@
       </p:graphicFrame>
       <p:sp>
         <p:nvSpPr>
-          <p:cNvPr id="9" name="TextBox 8"/>
+          <p:cNvPr id="11" name="TextBox 10"/>
           <p:cNvSpPr txBox="1"/>
           <p:nvPr/>
         </p:nvSpPr>
         <p:spPr>
           <a:xfrm>
-            <a:off x="457200" y="6172200"/>
-            <a:ext cx="11292840" cy="320040"/>
+            <a:off x="457200" y="6053328"/>
+            <a:ext cx="11292840" cy="411480"/>
           </a:xfrm>
           <a:prstGeom prst="rect">
             <a:avLst/>
@@ -10727,14 +11239,14 @@
               <a:buNone/>
             </a:pPr>
             <a:r>
-              <a:rPr sz="1100" b="0" i="1">
+              <a:rPr sz="1050" b="0" i="1">
                 <a:solidFill>
                   <a:srgbClr val="8C8C8C"/>
                 </a:solidFill>
                 <a:latin typeface="Garamond"/>
                 <a:cs typeface="Garamond"/>
               </a:rPr>
-              <a:t>No funded debt and a growing cash balance fund buybacks and international expansion — the core of our margin of safety</a:t>
+              <a:t>Projections tie to Scenarios col G for rev / margin / capex; BS detail per integrated 3-statement workbook (not DCF exit multiples).</a:t>
             </a:r>
           </a:p>
         </p:txBody>
@@ -10915,7 +11427,7 @@
                 <a:latin typeface="Garamond"/>
                 <a:cs typeface="Garamond"/>
               </a:rPr>
-              <a:t>Durable free cash flow through the trough (US$ M)</a:t>
+              <a:t>Historical capital return vs base-case trough FCF (US$ M)</a:t>
             </a:r>
           </a:p>
         </p:txBody>
@@ -11052,17 +11564,273 @@
           </a:p>
         </p:txBody>
       </p:sp>
+      <p:sp>
+        <p:nvSpPr>
+          <p:cNvPr id="8" name="Rectangle 7"/>
+          <p:cNvSpPr/>
+          <p:nvPr/>
+        </p:nvSpPr>
+        <p:spPr>
+          <a:xfrm>
+            <a:off x="457200" y="1024128"/>
+            <a:ext cx="5532120" cy="1417320"/>
+          </a:xfrm>
+          <a:prstGeom prst="rect">
+            <a:avLst/>
+          </a:prstGeom>
+          <a:solidFill>
+            <a:srgbClr val="F0F1F3"/>
+          </a:solidFill>
+          <a:ln>
+            <a:noFill/>
+          </a:ln>
+          <a:effectLst/>
+        </p:spPr>
+        <p:style>
+          <a:lnRef idx="1">
+            <a:schemeClr val="accent1"/>
+          </a:lnRef>
+          <a:fillRef idx="3">
+            <a:schemeClr val="accent1"/>
+          </a:fillRef>
+          <a:effectRef idx="2">
+            <a:schemeClr val="accent1"/>
+          </a:effectRef>
+          <a:fontRef idx="minor">
+            <a:schemeClr val="lt1"/>
+          </a:fontRef>
+        </p:style>
+        <p:txBody>
+          <a:bodyPr rtlCol="0" anchor="ctr" wrap="square"/>
+          <a:lstStyle/>
+          <a:p>
+            <a:pPr algn="l">
+              <a:spcBef>
+                <a:spcPts val="0"/>
+              </a:spcBef>
+              <a:spcAft>
+                <a:spcPts val="300"/>
+              </a:spcAft>
+              <a:buNone/>
+            </a:pPr>
+            <a:r>
+              <a:rPr sz="1150" b="1" i="0">
+                <a:solidFill>
+                  <a:srgbClr val="990000"/>
+                </a:solidFill>
+                <a:latin typeface="Garamond"/>
+                <a:cs typeface="Garamond"/>
+              </a:rPr>
+              <a:t>HISTORICALS (FY2022–FY2025) — SEC 10-K</a:t>
+            </a:r>
+          </a:p>
+          <a:p>
+            <a:pPr algn="l" indent="-152400" marL="177800">
+              <a:spcBef>
+                <a:spcPts val="0"/>
+              </a:spcBef>
+              <a:spcAft>
+                <a:spcPts val="200"/>
+              </a:spcAft>
+              <a:buFont typeface="Garamond"/>
+              <a:buChar char="•"/>
+            </a:pPr>
+            <a:r>
+              <a:rPr sz="1050" b="0" i="0">
+                <a:solidFill>
+                  <a:srgbClr val="262626"/>
+                </a:solidFill>
+                <a:latin typeface="Garamond"/>
+                <a:cs typeface="Garamond"/>
+              </a:rPr>
+              <a:t>FY25 CFO $1,603M; capex ($681M) → ~$922M FCF despite revenue deceleration</a:t>
+            </a:r>
+          </a:p>
+          <a:p>
+            <a:pPr algn="l" indent="-152400" marL="177800">
+              <a:spcBef>
+                <a:spcPts val="0"/>
+              </a:spcBef>
+              <a:spcAft>
+                <a:spcPts val="200"/>
+              </a:spcAft>
+              <a:buFont typeface="Garamond"/>
+              <a:buChar char="•"/>
+            </a:pPr>
+            <a:r>
+              <a:rPr sz="1050" b="0" i="0">
+                <a:solidFill>
+                  <a:srgbClr val="262626"/>
+                </a:solidFill>
+                <a:latin typeface="Garamond"/>
+                <a:cs typeface="Garamond"/>
+              </a:rPr>
+              <a:t>Aggressive buybacks: ($1,637M) FY24, ($1,178M) FY25 — returned most excess cash</a:t>
+            </a:r>
+          </a:p>
+          <a:p>
+            <a:pPr algn="l" indent="-152400" marL="177800">
+              <a:spcBef>
+                <a:spcPts val="0"/>
+              </a:spcBef>
+              <a:spcAft>
+                <a:spcPts val="200"/>
+              </a:spcAft>
+              <a:buFont typeface="Garamond"/>
+              <a:buChar char="•"/>
+            </a:pPr>
+            <a:r>
+              <a:rPr sz="1050" b="0" i="0">
+                <a:solidFill>
+                  <a:srgbClr val="262626"/>
+                </a:solidFill>
+                <a:latin typeface="Garamond"/>
+                <a:cs typeface="Garamond"/>
+              </a:rPr>
+              <a:t>Historicals = reported CFS lines; no model overlay</a:t>
+            </a:r>
+          </a:p>
+        </p:txBody>
+      </p:sp>
+      <p:sp>
+        <p:nvSpPr>
+          <p:cNvPr id="9" name="Rectangle 8"/>
+          <p:cNvSpPr/>
+          <p:nvPr/>
+        </p:nvSpPr>
+        <p:spPr>
+          <a:xfrm>
+            <a:off x="6126480" y="1024128"/>
+            <a:ext cx="5532120" cy="1417320"/>
+          </a:xfrm>
+          <a:prstGeom prst="rect">
+            <a:avLst/>
+          </a:prstGeom>
+          <a:solidFill>
+            <a:srgbClr val="1F2A44"/>
+          </a:solidFill>
+          <a:ln>
+            <a:noFill/>
+          </a:ln>
+          <a:effectLst/>
+        </p:spPr>
+        <p:style>
+          <a:lnRef idx="1">
+            <a:schemeClr val="accent1"/>
+          </a:lnRef>
+          <a:fillRef idx="3">
+            <a:schemeClr val="accent1"/>
+          </a:fillRef>
+          <a:effectRef idx="2">
+            <a:schemeClr val="accent1"/>
+          </a:effectRef>
+          <a:fontRef idx="minor">
+            <a:schemeClr val="lt1"/>
+          </a:fontRef>
+        </p:style>
+        <p:txBody>
+          <a:bodyPr rtlCol="0" anchor="ctr" wrap="square"/>
+          <a:lstStyle/>
+          <a:p>
+            <a:pPr algn="l">
+              <a:spcBef>
+                <a:spcPts val="0"/>
+              </a:spcBef>
+              <a:spcAft>
+                <a:spcPts val="300"/>
+              </a:spcAft>
+              <a:buNone/>
+            </a:pPr>
+            <a:r>
+              <a:rPr sz="1150" b="1" i="0">
+                <a:solidFill>
+                  <a:srgbClr val="FFC72C"/>
+                </a:solidFill>
+                <a:latin typeface="Garamond"/>
+                <a:cs typeface="Garamond"/>
+              </a:rPr>
+              <a:t>BASE-CASE FORECAST (FY2026E–FY2030E) — Scenarios col G</a:t>
+            </a:r>
+          </a:p>
+          <a:p>
+            <a:pPr algn="l" indent="-152400" marL="177800">
+              <a:spcBef>
+                <a:spcPts val="0"/>
+              </a:spcBef>
+              <a:spcAft>
+                <a:spcPts val="200"/>
+              </a:spcAft>
+              <a:buFont typeface="Garamond"/>
+              <a:buChar char="•"/>
+            </a:pPr>
+            <a:r>
+              <a:rPr sz="1050" b="0" i="0">
+                <a:solidFill>
+                  <a:srgbClr val="FFFFFF"/>
+                </a:solidFill>
+                <a:latin typeface="Garamond"/>
+                <a:cs typeface="Garamond"/>
+              </a:rPr>
+              <a:t>FCF holds &gt;$1B in the reset year: $1,163M FY26E → $1,184M FY30E</a:t>
+            </a:r>
+          </a:p>
+          <a:p>
+            <a:pPr algn="l" indent="-152400" marL="177800">
+              <a:spcBef>
+                <a:spcPts val="0"/>
+              </a:spcBef>
+              <a:spcAft>
+                <a:spcPts val="200"/>
+              </a:spcAft>
+              <a:buFont typeface="Garamond"/>
+              <a:buChar char="•"/>
+            </a:pPr>
+            <a:r>
+              <a:rPr sz="1050" b="0" i="0">
+                <a:solidFill>
+                  <a:srgbClr val="FFFFFF"/>
+                </a:solidFill>
+                <a:latin typeface="Garamond"/>
+                <a:cs typeface="Garamond"/>
+              </a:rPr>
+              <a:t>Capex 5.5% blend (Scenarios); D&amp;A ~4.5% of revenue — same drivers as DCF UFCF build</a:t>
+            </a:r>
+          </a:p>
+          <a:p>
+            <a:pPr algn="l" indent="-152400" marL="177800">
+              <a:spcBef>
+                <a:spcPts val="0"/>
+              </a:spcBef>
+              <a:spcAft>
+                <a:spcPts val="200"/>
+              </a:spcAft>
+              <a:buFont typeface="Garamond"/>
+              <a:buChar char="•"/>
+            </a:pPr>
+            <a:r>
+              <a:rPr sz="1050" b="0" i="0">
+                <a:solidFill>
+                  <a:srgbClr val="FFFFFF"/>
+                </a:solidFill>
+                <a:latin typeface="Garamond"/>
+                <a:cs typeface="Garamond"/>
+              </a:rPr>
+              <a:t>Buybacks ($500M)/yr in model — conservative vs FY24–25; SBC flows through equity, not CFS cash</a:t>
+            </a:r>
+          </a:p>
+        </p:txBody>
+      </p:sp>
       <p:graphicFrame>
         <p:nvGraphicFramePr>
-          <p:cNvPr id="8" name="Table 7"/>
+          <p:cNvPr id="10" name="Table 9"/>
           <p:cNvGraphicFramePr>
             <a:graphicFrameLocks noGrp="1"/>
           </p:cNvGraphicFramePr>
           <p:nvPr/>
         </p:nvGraphicFramePr>
         <p:xfrm>
-          <a:off x="457200" y="1234440"/>
-          <a:ext cx="11292837" cy="4937760"/>
+          <a:off x="457200" y="2578608"/>
+          <a:ext cx="11292839" cy="3401568"/>
         </p:xfrm>
         <a:graphic>
           <a:graphicData uri="http://schemas.openxmlformats.org/drawingml/2006/table">
@@ -11071,16 +11839,16 @@
                 <a:tableStyleId>{5C22544A-7EE6-4342-B048-85BDC9FD1C3A}</a:tableStyleId>
               </a:tblPr>
               <a:tblGrid>
-                <a:gridCol w="2926080"/>
-                <a:gridCol w="1195251"/>
-                <a:gridCol w="1195251"/>
-                <a:gridCol w="1195251"/>
-                <a:gridCol w="1195251"/>
-                <a:gridCol w="1195251"/>
-                <a:gridCol w="1195251"/>
-                <a:gridCol w="1195251"/>
+                <a:gridCol w="2743200"/>
+                <a:gridCol w="1221377"/>
+                <a:gridCol w="1221377"/>
+                <a:gridCol w="1221377"/>
+                <a:gridCol w="1221377"/>
+                <a:gridCol w="1221377"/>
+                <a:gridCol w="1221377"/>
+                <a:gridCol w="1221377"/>
               </a:tblGrid>
-              <a:tr h="822960">
+              <a:tr h="566928">
                 <a:tc>
                   <a:txBody>
                     <a:bodyPr/>
@@ -11274,7 +12042,7 @@
                   </a:tcPr>
                 </a:tc>
               </a:tr>
-              <a:tr h="822960">
+              <a:tr h="566928">
                 <a:tc>
                   <a:txBody>
                     <a:bodyPr/>
@@ -11468,7 +12236,7 @@
                   </a:tcPr>
                 </a:tc>
               </a:tr>
-              <a:tr h="822960">
+              <a:tr h="566928">
                 <a:tc>
                   <a:txBody>
                     <a:bodyPr/>
@@ -11662,7 +12430,7 @@
                   </a:tcPr>
                 </a:tc>
               </a:tr>
-              <a:tr h="822960">
+              <a:tr h="566928">
                 <a:tc>
                   <a:txBody>
                     <a:bodyPr/>
@@ -11856,7 +12624,7 @@
                   </a:tcPr>
                 </a:tc>
               </a:tr>
-              <a:tr h="822960">
+              <a:tr h="566928">
                 <a:tc>
                   <a:txBody>
                     <a:bodyPr/>
@@ -12050,7 +12818,7 @@
                   </a:tcPr>
                 </a:tc>
               </a:tr>
-              <a:tr h="822960">
+              <a:tr h="566928">
                 <a:tc>
                   <a:txBody>
                     <a:bodyPr/>
@@ -12250,14 +13018,14 @@
       </p:graphicFrame>
       <p:sp>
         <p:nvSpPr>
-          <p:cNvPr id="9" name="TextBox 8"/>
+          <p:cNvPr id="11" name="TextBox 10"/>
           <p:cNvSpPr txBox="1"/>
           <p:nvPr/>
         </p:nvSpPr>
         <p:spPr>
           <a:xfrm>
-            <a:off x="457200" y="6172200"/>
-            <a:ext cx="11292840" cy="320040"/>
+            <a:off x="457200" y="6053328"/>
+            <a:ext cx="11292840" cy="411480"/>
           </a:xfrm>
           <a:prstGeom prst="rect">
             <a:avLst/>
@@ -12280,14 +13048,14 @@
               <a:buNone/>
             </a:pPr>
             <a:r>
-              <a:rPr sz="1100" b="0" i="1">
+              <a:rPr sz="1050" b="0" i="1">
                 <a:solidFill>
                   <a:srgbClr val="8C8C8C"/>
                 </a:solidFill>
                 <a:latin typeface="Garamond"/>
                 <a:cs typeface="Garamond"/>
               </a:rPr>
-              <a:t>Free cash flow stays around $1B+ even in the FY2026 reset year, comfortably funding continued repurchases</a:t>
+              <a:t>Free cash flow = CFO + capex (capex shown negative). DCF repurchase schedule uses 75% of UFCF — deck uses 3-statement $500M/yr assumption.</a:t>
             </a:r>
           </a:p>
         </p:txBody>

--- a/LULU/LULU_Investment_Pitch_Deck.pptx
+++ b/LULU/LULU_Investment_Pitch_Deck.pptx
@@ -7421,7 +7421,7 @@
                 <a:latin typeface="Garamond"/>
                 <a:cs typeface="Garamond"/>
               </a:rPr>
-              <a:t>Reported history (10-K) vs GIS base-case operating forecast (US$ M)</a:t>
+              <a:t>Reported history (10-K) vs base &amp; bull operating forecast — all FY26–30 (US$ M)</a:t>
             </a:r>
           </a:p>
         </p:txBody>
@@ -7509,7 +7509,7 @@
                 <a:latin typeface="Garamond"/>
                 <a:cs typeface="Garamond"/>
               </a:rPr>
-              <a:t>Projections = GIS base case (Scenarios column G); historicals per FY2025 10-K</a:t>
+              <a:t>Forecast: base = Scenarios col G (3-statement); bull = Scenarios col H. Historicals per FY2025 10-K.</a:t>
             </a:r>
           </a:p>
         </p:txBody>
@@ -7659,7 +7659,7 @@
                 <a:latin typeface="Garamond"/>
                 <a:cs typeface="Garamond"/>
               </a:rPr>
-              <a:t>Revenue grew $8,111M → $11,103M; operating margin peaked 23.7% (FY24), still 19.9% in FY25</a:t>
+              <a:t>Revenue $8,111M → $11,103M; OM peaked 23.7% (FY24); EPS $6.68 → $13.26</a:t>
             </a:r>
           </a:p>
           <a:p>
@@ -7681,7 +7681,7 @@
                 <a:latin typeface="Garamond"/>
                 <a:cs typeface="Garamond"/>
               </a:rPr>
-              <a:t>Diluted EPS rose $6.68 → $13.26; share count fell 128.0M → 119.1M via buybacks</a:t>
+              <a:t>Share count 128.0M → 119.1M via buybacks</a:t>
             </a:r>
           </a:p>
         </p:txBody>
@@ -7743,7 +7743,7 @@
                 <a:latin typeface="Garamond"/>
                 <a:cs typeface="Garamond"/>
               </a:rPr>
-              <a:t>BASE-CASE FORECAST (FY2026E–FY2030E) — Scenarios col G</a:t>
+              <a:t>FORECAST (FY2026E–FY2030E) — base (G) vs bull (H)</a:t>
             </a:r>
           </a:p>
           <a:p>
@@ -7765,7 +7765,7 @@
                 <a:latin typeface="Garamond"/>
                 <a:cs typeface="Garamond"/>
               </a:rPr>
-              <a:t>FY26 revenue 10,425M (−6.1% guide); then +2.3%/yr — same path as DCF</a:t>
+              <a:t>Base: FY26 10,425M rev / 14.5% OM → FY30 11,418M / 15.5%</a:t>
             </a:r>
           </a:p>
           <a:p>
@@ -7787,7 +7787,7 @@
                 <a:latin typeface="Garamond"/>
                 <a:cs typeface="Garamond"/>
               </a:rPr>
-              <a:t>Clean EBIT margin 13.2% → 15.5%; FY26 includes $134.5M IEEPA refund (reported OM 14.5%)</a:t>
+              <a:t>Bull: FY26 10,658M (−4% guide) → FY30 13,456M; OM 15.8% → 19.0%</a:t>
             </a:r>
           </a:p>
           <a:p>
@@ -7809,7 +7809,7 @@
                 <a:latin typeface="Garamond"/>
                 <a:cs typeface="Garamond"/>
               </a:rPr>
-              <a:t>EPS trough $9.55 (FY26E) → $12.93 (FY30E); not bull/bear — GIS base only</a:t>
+              <a:t>Bull EPS $10.37 → $18.43 (DCF implied price $$202)</a:t>
             </a:r>
           </a:p>
         </p:txBody>
@@ -7824,7 +7824,7 @@
         </p:nvGraphicFramePr>
         <p:xfrm>
           <a:off x="457200" y="2578608"/>
-          <a:ext cx="11292839" cy="3401568"/>
+          <a:ext cx="11292828" cy="3246120"/>
         </p:xfrm>
         <a:graphic>
           <a:graphicData uri="http://schemas.openxmlformats.org/drawingml/2006/table">
@@ -7833,16 +7833,23 @@
                 <a:tableStyleId>{5C22544A-7EE6-4342-B048-85BDC9FD1C3A}</a:tableStyleId>
               </a:tblPr>
               <a:tblGrid>
-                <a:gridCol w="2743200"/>
-                <a:gridCol w="1221377"/>
-                <a:gridCol w="1221377"/>
-                <a:gridCol w="1221377"/>
-                <a:gridCol w="1221377"/>
-                <a:gridCol w="1221377"/>
-                <a:gridCol w="1221377"/>
-                <a:gridCol w="1221377"/>
+                <a:gridCol w="2148840"/>
+                <a:gridCol w="653142"/>
+                <a:gridCol w="653142"/>
+                <a:gridCol w="653142"/>
+                <a:gridCol w="653142"/>
+                <a:gridCol w="653142"/>
+                <a:gridCol w="653142"/>
+                <a:gridCol w="653142"/>
+                <a:gridCol w="653142"/>
+                <a:gridCol w="653142"/>
+                <a:gridCol w="653142"/>
+                <a:gridCol w="653142"/>
+                <a:gridCol w="653142"/>
+                <a:gridCol w="653142"/>
+                <a:gridCol w="653142"/>
               </a:tblGrid>
-              <a:tr h="485938">
+              <a:tr h="463731">
                 <a:tc>
                   <a:txBody>
                     <a:bodyPr/>
@@ -7977,7 +7984,7 @@
                           <a:latin typeface="Garamond"/>
                           <a:cs typeface="Garamond"/>
                         </a:rPr>
-                        <a:t>FY2026E</a:t>
+                        <a:t>6EE base</a:t>
                       </a:r>
                     </a:p>
                   </a:txBody>
@@ -8001,7 +8008,7 @@
                           <a:latin typeface="Garamond"/>
                           <a:cs typeface="Garamond"/>
                         </a:rPr>
-                        <a:t>FY2028E</a:t>
+                        <a:t>6EE bull</a:t>
                       </a:r>
                     </a:p>
                   </a:txBody>
@@ -8025,7 +8032,7 @@
                           <a:latin typeface="Garamond"/>
                           <a:cs typeface="Garamond"/>
                         </a:rPr>
-                        <a:t>FY2030E</a:t>
+                        <a:t>7EE base</a:t>
                       </a:r>
                     </a:p>
                   </a:txBody>
@@ -8035,8 +8042,176 @@
                     </a:solidFill>
                   </a:tcPr>
                 </a:tc>
+                <a:tc>
+                  <a:txBody>
+                    <a:bodyPr/>
+                    <a:lstStyle/>
+                    <a:p>
+                      <a:pPr algn="r"/>
+                      <a:r>
+                        <a:rPr sz="1100" b="1" i="0">
+                          <a:solidFill>
+                            <a:srgbClr val="FFFFFF"/>
+                          </a:solidFill>
+                          <a:latin typeface="Garamond"/>
+                          <a:cs typeface="Garamond"/>
+                        </a:rPr>
+                        <a:t>7EE bull</a:t>
+                      </a:r>
+                    </a:p>
+                  </a:txBody>
+                  <a:tcPr anchor="ctr">
+                    <a:solidFill>
+                      <a:srgbClr val="1F2A44"/>
+                    </a:solidFill>
+                  </a:tcPr>
+                </a:tc>
+                <a:tc>
+                  <a:txBody>
+                    <a:bodyPr/>
+                    <a:lstStyle/>
+                    <a:p>
+                      <a:pPr algn="r"/>
+                      <a:r>
+                        <a:rPr sz="1100" b="1" i="0">
+                          <a:solidFill>
+                            <a:srgbClr val="FFFFFF"/>
+                          </a:solidFill>
+                          <a:latin typeface="Garamond"/>
+                          <a:cs typeface="Garamond"/>
+                        </a:rPr>
+                        <a:t>8EE base</a:t>
+                      </a:r>
+                    </a:p>
+                  </a:txBody>
+                  <a:tcPr anchor="ctr">
+                    <a:solidFill>
+                      <a:srgbClr val="1F2A44"/>
+                    </a:solidFill>
+                  </a:tcPr>
+                </a:tc>
+                <a:tc>
+                  <a:txBody>
+                    <a:bodyPr/>
+                    <a:lstStyle/>
+                    <a:p>
+                      <a:pPr algn="r"/>
+                      <a:r>
+                        <a:rPr sz="1100" b="1" i="0">
+                          <a:solidFill>
+                            <a:srgbClr val="FFFFFF"/>
+                          </a:solidFill>
+                          <a:latin typeface="Garamond"/>
+                          <a:cs typeface="Garamond"/>
+                        </a:rPr>
+                        <a:t>8EE bull</a:t>
+                      </a:r>
+                    </a:p>
+                  </a:txBody>
+                  <a:tcPr anchor="ctr">
+                    <a:solidFill>
+                      <a:srgbClr val="1F2A44"/>
+                    </a:solidFill>
+                  </a:tcPr>
+                </a:tc>
+                <a:tc>
+                  <a:txBody>
+                    <a:bodyPr/>
+                    <a:lstStyle/>
+                    <a:p>
+                      <a:pPr algn="r"/>
+                      <a:r>
+                        <a:rPr sz="1100" b="1" i="0">
+                          <a:solidFill>
+                            <a:srgbClr val="FFFFFF"/>
+                          </a:solidFill>
+                          <a:latin typeface="Garamond"/>
+                          <a:cs typeface="Garamond"/>
+                        </a:rPr>
+                        <a:t>9EE base</a:t>
+                      </a:r>
+                    </a:p>
+                  </a:txBody>
+                  <a:tcPr anchor="ctr">
+                    <a:solidFill>
+                      <a:srgbClr val="1F2A44"/>
+                    </a:solidFill>
+                  </a:tcPr>
+                </a:tc>
+                <a:tc>
+                  <a:txBody>
+                    <a:bodyPr/>
+                    <a:lstStyle/>
+                    <a:p>
+                      <a:pPr algn="r"/>
+                      <a:r>
+                        <a:rPr sz="1100" b="1" i="0">
+                          <a:solidFill>
+                            <a:srgbClr val="FFFFFF"/>
+                          </a:solidFill>
+                          <a:latin typeface="Garamond"/>
+                          <a:cs typeface="Garamond"/>
+                        </a:rPr>
+                        <a:t>9EE bull</a:t>
+                      </a:r>
+                    </a:p>
+                  </a:txBody>
+                  <a:tcPr anchor="ctr">
+                    <a:solidFill>
+                      <a:srgbClr val="1F2A44"/>
+                    </a:solidFill>
+                  </a:tcPr>
+                </a:tc>
+                <a:tc>
+                  <a:txBody>
+                    <a:bodyPr/>
+                    <a:lstStyle/>
+                    <a:p>
+                      <a:pPr algn="r"/>
+                      <a:r>
+                        <a:rPr sz="1100" b="1" i="0">
+                          <a:solidFill>
+                            <a:srgbClr val="FFFFFF"/>
+                          </a:solidFill>
+                          <a:latin typeface="Garamond"/>
+                          <a:cs typeface="Garamond"/>
+                        </a:rPr>
+                        <a:t>0EE base</a:t>
+                      </a:r>
+                    </a:p>
+                  </a:txBody>
+                  <a:tcPr anchor="ctr">
+                    <a:solidFill>
+                      <a:srgbClr val="1F2A44"/>
+                    </a:solidFill>
+                  </a:tcPr>
+                </a:tc>
+                <a:tc>
+                  <a:txBody>
+                    <a:bodyPr/>
+                    <a:lstStyle/>
+                    <a:p>
+                      <a:pPr algn="r"/>
+                      <a:r>
+                        <a:rPr sz="1100" b="1" i="0">
+                          <a:solidFill>
+                            <a:srgbClr val="FFFFFF"/>
+                          </a:solidFill>
+                          <a:latin typeface="Garamond"/>
+                          <a:cs typeface="Garamond"/>
+                        </a:rPr>
+                        <a:t>0EE bull</a:t>
+                      </a:r>
+                    </a:p>
+                  </a:txBody>
+                  <a:tcPr anchor="ctr">
+                    <a:solidFill>
+                      <a:srgbClr val="1F2A44"/>
+                    </a:solidFill>
+                  </a:tcPr>
+                </a:tc>
               </a:tr>
-              <a:tr h="485938">
+              <a:tr h="463731">
                 <a:tc>
                   <a:txBody>
                     <a:bodyPr/>
@@ -8044,7 +8219,7 @@
                     <a:p>
                       <a:pPr algn="l"/>
                       <a:r>
-                        <a:rPr sz="1050" b="1" i="0">
+                        <a:rPr sz="850" b="1" i="0">
                           <a:solidFill>
                             <a:srgbClr val="1F2A44"/>
                           </a:solidFill>
@@ -8068,7 +8243,7 @@
                     <a:p>
                       <a:pPr algn="r"/>
                       <a:r>
-                        <a:rPr sz="1050" b="1" i="0">
+                        <a:rPr sz="850" b="1" i="0">
                           <a:solidFill>
                             <a:srgbClr val="1F2A44"/>
                           </a:solidFill>
@@ -8092,7 +8267,7 @@
                     <a:p>
                       <a:pPr algn="r"/>
                       <a:r>
-                        <a:rPr sz="1050" b="1" i="0">
+                        <a:rPr sz="850" b="1" i="0">
                           <a:solidFill>
                             <a:srgbClr val="1F2A44"/>
                           </a:solidFill>
@@ -8116,7 +8291,7 @@
                     <a:p>
                       <a:pPr algn="r"/>
                       <a:r>
-                        <a:rPr sz="1050" b="1" i="0">
+                        <a:rPr sz="850" b="1" i="0">
                           <a:solidFill>
                             <a:srgbClr val="1F2A44"/>
                           </a:solidFill>
@@ -8140,7 +8315,7 @@
                     <a:p>
                       <a:pPr algn="r"/>
                       <a:r>
-                        <a:rPr sz="1050" b="1" i="0">
+                        <a:rPr sz="850" b="1" i="0">
                           <a:solidFill>
                             <a:srgbClr val="1F2A44"/>
                           </a:solidFill>
@@ -8164,7 +8339,7 @@
                     <a:p>
                       <a:pPr algn="r"/>
                       <a:r>
-                        <a:rPr sz="1050" b="1" i="0">
+                        <a:rPr sz="850" b="1" i="0">
                           <a:solidFill>
                             <a:srgbClr val="1F2A44"/>
                           </a:solidFill>
@@ -8188,13 +8363,85 @@
                     <a:p>
                       <a:pPr algn="r"/>
                       <a:r>
-                        <a:rPr sz="1050" b="1" i="0">
+                        <a:rPr sz="850" b="1" i="0">
                           <a:solidFill>
                             <a:srgbClr val="1F2A44"/>
                           </a:solidFill>
                           <a:latin typeface="Garamond"/>
                           <a:cs typeface="Garamond"/>
                         </a:rPr>
+                        <a:t>10,658</a:t>
+                      </a:r>
+                    </a:p>
+                  </a:txBody>
+                  <a:tcPr anchor="ctr" marT="12700" marB="12700">
+                    <a:solidFill>
+                      <a:srgbClr val="FFFFFF"/>
+                    </a:solidFill>
+                  </a:tcPr>
+                </a:tc>
+                <a:tc>
+                  <a:txBody>
+                    <a:bodyPr/>
+                    <a:lstStyle/>
+                    <a:p>
+                      <a:pPr algn="r"/>
+                      <a:r>
+                        <a:rPr sz="850" b="1" i="0">
+                          <a:solidFill>
+                            <a:srgbClr val="1F2A44"/>
+                          </a:solidFill>
+                          <a:latin typeface="Garamond"/>
+                          <a:cs typeface="Garamond"/>
+                        </a:rPr>
+                        <a:t>10,665</a:t>
+                      </a:r>
+                    </a:p>
+                  </a:txBody>
+                  <a:tcPr anchor="ctr" marT="12700" marB="12700">
+                    <a:solidFill>
+                      <a:srgbClr val="FFFFFF"/>
+                    </a:solidFill>
+                  </a:tcPr>
+                </a:tc>
+                <a:tc>
+                  <a:txBody>
+                    <a:bodyPr/>
+                    <a:lstStyle/>
+                    <a:p>
+                      <a:pPr algn="r"/>
+                      <a:r>
+                        <a:rPr sz="850" b="1" i="0">
+                          <a:solidFill>
+                            <a:srgbClr val="1F2A44"/>
+                          </a:solidFill>
+                          <a:latin typeface="Garamond"/>
+                          <a:cs typeface="Garamond"/>
+                        </a:rPr>
+                        <a:t>11,298</a:t>
+                      </a:r>
+                    </a:p>
+                  </a:txBody>
+                  <a:tcPr anchor="ctr" marT="12700" marB="12700">
+                    <a:solidFill>
+                      <a:srgbClr val="FFFFFF"/>
+                    </a:solidFill>
+                  </a:tcPr>
+                </a:tc>
+                <a:tc>
+                  <a:txBody>
+                    <a:bodyPr/>
+                    <a:lstStyle/>
+                    <a:p>
+                      <a:pPr algn="r"/>
+                      <a:r>
+                        <a:rPr sz="850" b="1" i="0">
+                          <a:solidFill>
+                            <a:srgbClr val="1F2A44"/>
+                          </a:solidFill>
+                          <a:latin typeface="Garamond"/>
+                          <a:cs typeface="Garamond"/>
+                        </a:rPr>
                         <a:t>10,910</a:t>
                       </a:r>
                     </a:p>
@@ -8212,13 +8459,85 @@
                     <a:p>
                       <a:pPr algn="r"/>
                       <a:r>
-                        <a:rPr sz="1050" b="1" i="0">
+                        <a:rPr sz="850" b="1" i="0">
                           <a:solidFill>
                             <a:srgbClr val="1F2A44"/>
                           </a:solidFill>
                           <a:latin typeface="Garamond"/>
                           <a:cs typeface="Garamond"/>
                         </a:rPr>
+                        <a:t>11,976</a:t>
+                      </a:r>
+                    </a:p>
+                  </a:txBody>
+                  <a:tcPr anchor="ctr" marT="12700" marB="12700">
+                    <a:solidFill>
+                      <a:srgbClr val="FFFFFF"/>
+                    </a:solidFill>
+                  </a:tcPr>
+                </a:tc>
+                <a:tc>
+                  <a:txBody>
+                    <a:bodyPr/>
+                    <a:lstStyle/>
+                    <a:p>
+                      <a:pPr algn="r"/>
+                      <a:r>
+                        <a:rPr sz="850" b="1" i="0">
+                          <a:solidFill>
+                            <a:srgbClr val="1F2A44"/>
+                          </a:solidFill>
+                          <a:latin typeface="Garamond"/>
+                          <a:cs typeface="Garamond"/>
+                        </a:rPr>
+                        <a:t>11,161</a:t>
+                      </a:r>
+                    </a:p>
+                  </a:txBody>
+                  <a:tcPr anchor="ctr" marT="12700" marB="12700">
+                    <a:solidFill>
+                      <a:srgbClr val="FFFFFF"/>
+                    </a:solidFill>
+                  </a:tcPr>
+                </a:tc>
+                <a:tc>
+                  <a:txBody>
+                    <a:bodyPr/>
+                    <a:lstStyle/>
+                    <a:p>
+                      <a:pPr algn="r"/>
+                      <a:r>
+                        <a:rPr sz="850" b="1" i="0">
+                          <a:solidFill>
+                            <a:srgbClr val="1F2A44"/>
+                          </a:solidFill>
+                          <a:latin typeface="Garamond"/>
+                          <a:cs typeface="Garamond"/>
+                        </a:rPr>
+                        <a:t>12,694</a:t>
+                      </a:r>
+                    </a:p>
+                  </a:txBody>
+                  <a:tcPr anchor="ctr" marT="12700" marB="12700">
+                    <a:solidFill>
+                      <a:srgbClr val="FFFFFF"/>
+                    </a:solidFill>
+                  </a:tcPr>
+                </a:tc>
+                <a:tc>
+                  <a:txBody>
+                    <a:bodyPr/>
+                    <a:lstStyle/>
+                    <a:p>
+                      <a:pPr algn="r"/>
+                      <a:r>
+                        <a:rPr sz="850" b="1" i="0">
+                          <a:solidFill>
+                            <a:srgbClr val="1F2A44"/>
+                          </a:solidFill>
+                          <a:latin typeface="Garamond"/>
+                          <a:cs typeface="Garamond"/>
+                        </a:rPr>
                         <a:t>11,418</a:t>
                       </a:r>
                     </a:p>
@@ -8229,8 +8548,32 @@
                     </a:solidFill>
                   </a:tcPr>
                 </a:tc>
+                <a:tc>
+                  <a:txBody>
+                    <a:bodyPr/>
+                    <a:lstStyle/>
+                    <a:p>
+                      <a:pPr algn="r"/>
+                      <a:r>
+                        <a:rPr sz="850" b="1" i="0">
+                          <a:solidFill>
+                            <a:srgbClr val="1F2A44"/>
+                          </a:solidFill>
+                          <a:latin typeface="Garamond"/>
+                          <a:cs typeface="Garamond"/>
+                        </a:rPr>
+                        <a:t>13,456</a:t>
+                      </a:r>
+                    </a:p>
+                  </a:txBody>
+                  <a:tcPr anchor="ctr" marT="12700" marB="12700">
+                    <a:solidFill>
+                      <a:srgbClr val="FFFFFF"/>
+                    </a:solidFill>
+                  </a:tcPr>
+                </a:tc>
               </a:tr>
-              <a:tr h="485938">
+              <a:tr h="463731">
                 <a:tc>
                   <a:txBody>
                     <a:bodyPr/>
@@ -8238,7 +8581,7 @@
                     <a:p>
                       <a:pPr algn="l"/>
                       <a:r>
-                        <a:rPr sz="1050" b="0" i="0">
+                        <a:rPr sz="850" b="0" i="0">
                           <a:solidFill>
                             <a:srgbClr val="262626"/>
                           </a:solidFill>
@@ -8262,7 +8605,7 @@
                     <a:p>
                       <a:pPr algn="r"/>
                       <a:r>
-                        <a:rPr sz="1050" b="0" i="0">
+                        <a:rPr sz="850" b="0" i="0">
                           <a:solidFill>
                             <a:srgbClr val="262626"/>
                           </a:solidFill>
@@ -8286,7 +8629,7 @@
                     <a:p>
                       <a:pPr algn="r"/>
                       <a:r>
-                        <a:rPr sz="1050" b="0" i="0">
+                        <a:rPr sz="850" b="0" i="0">
                           <a:solidFill>
                             <a:srgbClr val="262626"/>
                           </a:solidFill>
@@ -8310,7 +8653,7 @@
                     <a:p>
                       <a:pPr algn="r"/>
                       <a:r>
-                        <a:rPr sz="1050" b="0" i="0">
+                        <a:rPr sz="850" b="0" i="0">
                           <a:solidFill>
                             <a:srgbClr val="262626"/>
                           </a:solidFill>
@@ -8334,7 +8677,7 @@
                     <a:p>
                       <a:pPr algn="r"/>
                       <a:r>
-                        <a:rPr sz="1050" b="0" i="0">
+                        <a:rPr sz="850" b="0" i="0">
                           <a:solidFill>
                             <a:srgbClr val="262626"/>
                           </a:solidFill>
@@ -8358,7 +8701,7 @@
                     <a:p>
                       <a:pPr algn="r"/>
                       <a:r>
-                        <a:rPr sz="1050" b="0" i="0">
+                        <a:rPr sz="850" b="0" i="0">
                           <a:solidFill>
                             <a:srgbClr val="262626"/>
                           </a:solidFill>
@@ -8382,13 +8725,85 @@
                     <a:p>
                       <a:pPr algn="r"/>
                       <a:r>
-                        <a:rPr sz="1050" b="0" i="0">
+                        <a:rPr sz="850" b="0" i="0">
                           <a:solidFill>
                             <a:srgbClr val="262626"/>
                           </a:solidFill>
                           <a:latin typeface="Garamond"/>
                           <a:cs typeface="Garamond"/>
                         </a:rPr>
+                        <a:t>6,129</a:t>
+                      </a:r>
+                    </a:p>
+                  </a:txBody>
+                  <a:tcPr anchor="ctr" marT="12700" marB="12700">
+                    <a:solidFill>
+                      <a:srgbClr val="F0F1F3"/>
+                    </a:solidFill>
+                  </a:tcPr>
+                </a:tc>
+                <a:tc>
+                  <a:txBody>
+                    <a:bodyPr/>
+                    <a:lstStyle/>
+                    <a:p>
+                      <a:pPr algn="r"/>
+                      <a:r>
+                        <a:rPr sz="850" b="0" i="0">
+                          <a:solidFill>
+                            <a:srgbClr val="262626"/>
+                          </a:solidFill>
+                          <a:latin typeface="Garamond"/>
+                          <a:cs typeface="Garamond"/>
+                        </a:rPr>
+                        <a:t>6,036</a:t>
+                      </a:r>
+                    </a:p>
+                  </a:txBody>
+                  <a:tcPr anchor="ctr" marT="12700" marB="12700">
+                    <a:solidFill>
+                      <a:srgbClr val="F0F1F3"/>
+                    </a:solidFill>
+                  </a:tcPr>
+                </a:tc>
+                <a:tc>
+                  <a:txBody>
+                    <a:bodyPr/>
+                    <a:lstStyle/>
+                    <a:p>
+                      <a:pPr algn="r"/>
+                      <a:r>
+                        <a:rPr sz="850" b="0" i="0">
+                          <a:solidFill>
+                            <a:srgbClr val="262626"/>
+                          </a:solidFill>
+                          <a:latin typeface="Garamond"/>
+                          <a:cs typeface="Garamond"/>
+                        </a:rPr>
+                        <a:t>6,496</a:t>
+                      </a:r>
+                    </a:p>
+                  </a:txBody>
+                  <a:tcPr anchor="ctr" marT="12700" marB="12700">
+                    <a:solidFill>
+                      <a:srgbClr val="F0F1F3"/>
+                    </a:solidFill>
+                  </a:tcPr>
+                </a:tc>
+                <a:tc>
+                  <a:txBody>
+                    <a:bodyPr/>
+                    <a:lstStyle/>
+                    <a:p>
+                      <a:pPr algn="r"/>
+                      <a:r>
+                        <a:rPr sz="850" b="0" i="0">
+                          <a:solidFill>
+                            <a:srgbClr val="262626"/>
+                          </a:solidFill>
+                          <a:latin typeface="Garamond"/>
+                          <a:cs typeface="Garamond"/>
+                        </a:rPr>
                         <a:t>6,175</a:t>
                       </a:r>
                     </a:p>
@@ -8406,13 +8821,85 @@
                     <a:p>
                       <a:pPr algn="r"/>
                       <a:r>
-                        <a:rPr sz="1050" b="0" i="0">
+                        <a:rPr sz="850" b="0" i="0">
                           <a:solidFill>
                             <a:srgbClr val="262626"/>
                           </a:solidFill>
                           <a:latin typeface="Garamond"/>
                           <a:cs typeface="Garamond"/>
                         </a:rPr>
+                        <a:t>6,886</a:t>
+                      </a:r>
+                    </a:p>
+                  </a:txBody>
+                  <a:tcPr anchor="ctr" marT="12700" marB="12700">
+                    <a:solidFill>
+                      <a:srgbClr val="F0F1F3"/>
+                    </a:solidFill>
+                  </a:tcPr>
+                </a:tc>
+                <a:tc>
+                  <a:txBody>
+                    <a:bodyPr/>
+                    <a:lstStyle/>
+                    <a:p>
+                      <a:pPr algn="r"/>
+                      <a:r>
+                        <a:rPr sz="850" b="0" i="0">
+                          <a:solidFill>
+                            <a:srgbClr val="262626"/>
+                          </a:solidFill>
+                          <a:latin typeface="Garamond"/>
+                          <a:cs typeface="Garamond"/>
+                        </a:rPr>
+                        <a:t>6,317</a:t>
+                      </a:r>
+                    </a:p>
+                  </a:txBody>
+                  <a:tcPr anchor="ctr" marT="12700" marB="12700">
+                    <a:solidFill>
+                      <a:srgbClr val="F0F1F3"/>
+                    </a:solidFill>
+                  </a:tcPr>
+                </a:tc>
+                <a:tc>
+                  <a:txBody>
+                    <a:bodyPr/>
+                    <a:lstStyle/>
+                    <a:p>
+                      <a:pPr algn="r"/>
+                      <a:r>
+                        <a:rPr sz="850" b="0" i="0">
+                          <a:solidFill>
+                            <a:srgbClr val="262626"/>
+                          </a:solidFill>
+                          <a:latin typeface="Garamond"/>
+                          <a:cs typeface="Garamond"/>
+                        </a:rPr>
+                        <a:t>7,299</a:t>
+                      </a:r>
+                    </a:p>
+                  </a:txBody>
+                  <a:tcPr anchor="ctr" marT="12700" marB="12700">
+                    <a:solidFill>
+                      <a:srgbClr val="F0F1F3"/>
+                    </a:solidFill>
+                  </a:tcPr>
+                </a:tc>
+                <a:tc>
+                  <a:txBody>
+                    <a:bodyPr/>
+                    <a:lstStyle/>
+                    <a:p>
+                      <a:pPr algn="r"/>
+                      <a:r>
+                        <a:rPr sz="850" b="0" i="0">
+                          <a:solidFill>
+                            <a:srgbClr val="262626"/>
+                          </a:solidFill>
+                          <a:latin typeface="Garamond"/>
+                          <a:cs typeface="Garamond"/>
+                        </a:rPr>
                         <a:t>6,463</a:t>
                       </a:r>
                     </a:p>
@@ -8423,8 +8910,32 @@
                     </a:solidFill>
                   </a:tcPr>
                 </a:tc>
+                <a:tc>
+                  <a:txBody>
+                    <a:bodyPr/>
+                    <a:lstStyle/>
+                    <a:p>
+                      <a:pPr algn="r"/>
+                      <a:r>
+                        <a:rPr sz="850" b="0" i="0">
+                          <a:solidFill>
+                            <a:srgbClr val="262626"/>
+                          </a:solidFill>
+                          <a:latin typeface="Garamond"/>
+                          <a:cs typeface="Garamond"/>
+                        </a:rPr>
+                        <a:t>7,737</a:t>
+                      </a:r>
+                    </a:p>
+                  </a:txBody>
+                  <a:tcPr anchor="ctr" marT="12700" marB="12700">
+                    <a:solidFill>
+                      <a:srgbClr val="F0F1F3"/>
+                    </a:solidFill>
+                  </a:tcPr>
+                </a:tc>
               </a:tr>
-              <a:tr h="485938">
+              <a:tr h="463731">
                 <a:tc>
                   <a:txBody>
                     <a:bodyPr/>
@@ -8432,7 +8943,7 @@
                     <a:p>
                       <a:pPr algn="l"/>
                       <a:r>
-                        <a:rPr sz="1050" b="1" i="0">
+                        <a:rPr sz="850" b="1" i="0">
                           <a:solidFill>
                             <a:srgbClr val="1F2A44"/>
                           </a:solidFill>
@@ -8456,7 +8967,7 @@
                     <a:p>
                       <a:pPr algn="r"/>
                       <a:r>
-                        <a:rPr sz="1050" b="1" i="0">
+                        <a:rPr sz="850" b="1" i="0">
                           <a:solidFill>
                             <a:srgbClr val="1F2A44"/>
                           </a:solidFill>
@@ -8480,7 +8991,7 @@
                     <a:p>
                       <a:pPr algn="r"/>
                       <a:r>
-                        <a:rPr sz="1050" b="1" i="0">
+                        <a:rPr sz="850" b="1" i="0">
                           <a:solidFill>
                             <a:srgbClr val="1F2A44"/>
                           </a:solidFill>
@@ -8504,7 +9015,7 @@
                     <a:p>
                       <a:pPr algn="r"/>
                       <a:r>
-                        <a:rPr sz="1050" b="1" i="0">
+                        <a:rPr sz="850" b="1" i="0">
                           <a:solidFill>
                             <a:srgbClr val="1F2A44"/>
                           </a:solidFill>
@@ -8528,7 +9039,7 @@
                     <a:p>
                       <a:pPr algn="r"/>
                       <a:r>
-                        <a:rPr sz="1050" b="1" i="0">
+                        <a:rPr sz="850" b="1" i="0">
                           <a:solidFill>
                             <a:srgbClr val="1F2A44"/>
                           </a:solidFill>
@@ -8552,7 +9063,7 @@
                     <a:p>
                       <a:pPr algn="r"/>
                       <a:r>
-                        <a:rPr sz="1050" b="1" i="0">
+                        <a:rPr sz="850" b="1" i="0">
                           <a:solidFill>
                             <a:srgbClr val="1F2A44"/>
                           </a:solidFill>
@@ -8576,13 +9087,85 @@
                     <a:p>
                       <a:pPr algn="r"/>
                       <a:r>
-                        <a:rPr sz="1050" b="1" i="0">
+                        <a:rPr sz="850" b="1" i="0">
                           <a:solidFill>
                             <a:srgbClr val="1F2A44"/>
                           </a:solidFill>
                           <a:latin typeface="Garamond"/>
                           <a:cs typeface="Garamond"/>
                         </a:rPr>
+                        <a:t>1,680</a:t>
+                      </a:r>
+                    </a:p>
+                  </a:txBody>
+                  <a:tcPr anchor="ctr" marT="12700" marB="12700">
+                    <a:solidFill>
+                      <a:srgbClr val="FFFFFF"/>
+                    </a:solidFill>
+                  </a:tcPr>
+                </a:tc>
+                <a:tc>
+                  <a:txBody>
+                    <a:bodyPr/>
+                    <a:lstStyle/>
+                    <a:p>
+                      <a:pPr algn="r"/>
+                      <a:r>
+                        <a:rPr sz="850" b="1" i="0">
+                          <a:solidFill>
+                            <a:srgbClr val="1F2A44"/>
+                          </a:solidFill>
+                          <a:latin typeface="Garamond"/>
+                          <a:cs typeface="Garamond"/>
+                        </a:rPr>
+                        <a:t>1,469</a:t>
+                      </a:r>
+                    </a:p>
+                  </a:txBody>
+                  <a:tcPr anchor="ctr" marT="12700" marB="12700">
+                    <a:solidFill>
+                      <a:srgbClr val="FFFFFF"/>
+                    </a:solidFill>
+                  </a:tcPr>
+                </a:tc>
+                <a:tc>
+                  <a:txBody>
+                    <a:bodyPr/>
+                    <a:lstStyle/>
+                    <a:p>
+                      <a:pPr algn="r"/>
+                      <a:r>
+                        <a:rPr sz="850" b="1" i="0">
+                          <a:solidFill>
+                            <a:srgbClr val="1F2A44"/>
+                          </a:solidFill>
+                          <a:latin typeface="Garamond"/>
+                          <a:cs typeface="Garamond"/>
+                        </a:rPr>
+                        <a:t>1,765</a:t>
+                      </a:r>
+                    </a:p>
+                  </a:txBody>
+                  <a:tcPr anchor="ctr" marT="12700" marB="12700">
+                    <a:solidFill>
+                      <a:srgbClr val="FFFFFF"/>
+                    </a:solidFill>
+                  </a:tcPr>
+                </a:tc>
+                <a:tc>
+                  <a:txBody>
+                    <a:bodyPr/>
+                    <a:lstStyle/>
+                    <a:p>
+                      <a:pPr algn="r"/>
+                      <a:r>
+                        <a:rPr sz="850" b="1" i="0">
+                          <a:solidFill>
+                            <a:srgbClr val="1F2A44"/>
+                          </a:solidFill>
+                          <a:latin typeface="Garamond"/>
+                          <a:cs typeface="Garamond"/>
+                        </a:rPr>
                         <a:t>1,566</a:t>
                       </a:r>
                     </a:p>
@@ -8600,13 +9183,85 @@
                     <a:p>
                       <a:pPr algn="r"/>
                       <a:r>
-                        <a:rPr sz="1050" b="1" i="0">
+                        <a:rPr sz="850" b="1" i="0">
                           <a:solidFill>
                             <a:srgbClr val="1F2A44"/>
                           </a:solidFill>
                           <a:latin typeface="Garamond"/>
                           <a:cs typeface="Garamond"/>
                         </a:rPr>
+                        <a:t>2,006</a:t>
+                      </a:r>
+                    </a:p>
+                  </a:txBody>
+                  <a:tcPr anchor="ctr" marT="12700" marB="12700">
+                    <a:solidFill>
+                      <a:srgbClr val="FFFFFF"/>
+                    </a:solidFill>
+                  </a:tcPr>
+                </a:tc>
+                <a:tc>
+                  <a:txBody>
+                    <a:bodyPr/>
+                    <a:lstStyle/>
+                    <a:p>
+                      <a:pPr algn="r"/>
+                      <a:r>
+                        <a:rPr sz="850" b="1" i="0">
+                          <a:solidFill>
+                            <a:srgbClr val="1F2A44"/>
+                          </a:solidFill>
+                          <a:latin typeface="Garamond"/>
+                          <a:cs typeface="Garamond"/>
+                        </a:rPr>
+                        <a:t>1,666</a:t>
+                      </a:r>
+                    </a:p>
+                  </a:txBody>
+                  <a:tcPr anchor="ctr" marT="12700" marB="12700">
+                    <a:solidFill>
+                      <a:srgbClr val="FFFFFF"/>
+                    </a:solidFill>
+                  </a:tcPr>
+                </a:tc>
+                <a:tc>
+                  <a:txBody>
+                    <a:bodyPr/>
+                    <a:lstStyle/>
+                    <a:p>
+                      <a:pPr algn="r"/>
+                      <a:r>
+                        <a:rPr sz="850" b="1" i="0">
+                          <a:solidFill>
+                            <a:srgbClr val="1F2A44"/>
+                          </a:solidFill>
+                          <a:latin typeface="Garamond"/>
+                          <a:cs typeface="Garamond"/>
+                        </a:rPr>
+                        <a:t>2,269</a:t>
+                      </a:r>
+                    </a:p>
+                  </a:txBody>
+                  <a:tcPr anchor="ctr" marT="12700" marB="12700">
+                    <a:solidFill>
+                      <a:srgbClr val="FFFFFF"/>
+                    </a:solidFill>
+                  </a:tcPr>
+                </a:tc>
+                <a:tc>
+                  <a:txBody>
+                    <a:bodyPr/>
+                    <a:lstStyle/>
+                    <a:p>
+                      <a:pPr algn="r"/>
+                      <a:r>
+                        <a:rPr sz="850" b="1" i="0">
+                          <a:solidFill>
+                            <a:srgbClr val="1F2A44"/>
+                          </a:solidFill>
+                          <a:latin typeface="Garamond"/>
+                          <a:cs typeface="Garamond"/>
+                        </a:rPr>
                         <a:t>1,770</a:t>
                       </a:r>
                     </a:p>
@@ -8617,8 +9272,32 @@
                     </a:solidFill>
                   </a:tcPr>
                 </a:tc>
+                <a:tc>
+                  <a:txBody>
+                    <a:bodyPr/>
+                    <a:lstStyle/>
+                    <a:p>
+                      <a:pPr algn="r"/>
+                      <a:r>
+                        <a:rPr sz="850" b="1" i="0">
+                          <a:solidFill>
+                            <a:srgbClr val="1F2A44"/>
+                          </a:solidFill>
+                          <a:latin typeface="Garamond"/>
+                          <a:cs typeface="Garamond"/>
+                        </a:rPr>
+                        <a:t>2,557</a:t>
+                      </a:r>
+                    </a:p>
+                  </a:txBody>
+                  <a:tcPr anchor="ctr" marT="12700" marB="12700">
+                    <a:solidFill>
+                      <a:srgbClr val="FFFFFF"/>
+                    </a:solidFill>
+                  </a:tcPr>
+                </a:tc>
               </a:tr>
-              <a:tr h="485938">
+              <a:tr h="463731">
                 <a:tc>
                   <a:txBody>
                     <a:bodyPr/>
@@ -8626,7 +9305,7 @@
                     <a:p>
                       <a:pPr algn="l"/>
                       <a:r>
-                        <a:rPr sz="1050" b="0" i="0">
+                        <a:rPr sz="850" b="0" i="0">
                           <a:solidFill>
                             <a:srgbClr val="262626"/>
                           </a:solidFill>
@@ -8650,7 +9329,7 @@
                     <a:p>
                       <a:pPr algn="r"/>
                       <a:r>
-                        <a:rPr sz="1050" b="0" i="0">
+                        <a:rPr sz="850" b="0" i="0">
                           <a:solidFill>
                             <a:srgbClr val="262626"/>
                           </a:solidFill>
@@ -8674,7 +9353,7 @@
                     <a:p>
                       <a:pPr algn="r"/>
                       <a:r>
-                        <a:rPr sz="1050" b="0" i="0">
+                        <a:rPr sz="850" b="0" i="0">
                           <a:solidFill>
                             <a:srgbClr val="262626"/>
                           </a:solidFill>
@@ -8698,7 +9377,7 @@
                     <a:p>
                       <a:pPr algn="r"/>
                       <a:r>
-                        <a:rPr sz="1050" b="0" i="0">
+                        <a:rPr sz="850" b="0" i="0">
                           <a:solidFill>
                             <a:srgbClr val="262626"/>
                           </a:solidFill>
@@ -8722,7 +9401,7 @@
                     <a:p>
                       <a:pPr algn="r"/>
                       <a:r>
-                        <a:rPr sz="1050" b="0" i="0">
+                        <a:rPr sz="850" b="0" i="0">
                           <a:solidFill>
                             <a:srgbClr val="262626"/>
                           </a:solidFill>
@@ -8746,7 +9425,7 @@
                     <a:p>
                       <a:pPr algn="r"/>
                       <a:r>
-                        <a:rPr sz="1050" b="0" i="0">
+                        <a:rPr sz="850" b="0" i="0">
                           <a:solidFill>
                             <a:srgbClr val="262626"/>
                           </a:solidFill>
@@ -8770,13 +9449,85 @@
                     <a:p>
                       <a:pPr algn="r"/>
                       <a:r>
-                        <a:rPr sz="1050" b="0" i="0">
+                        <a:rPr sz="850" b="0" i="0">
                           <a:solidFill>
                             <a:srgbClr val="262626"/>
                           </a:solidFill>
                           <a:latin typeface="Garamond"/>
                           <a:cs typeface="Garamond"/>
                         </a:rPr>
+                        <a:t>15.8%</a:t>
+                      </a:r>
+                    </a:p>
+                  </a:txBody>
+                  <a:tcPr anchor="ctr" marT="12700" marB="12700">
+                    <a:solidFill>
+                      <a:srgbClr val="F0F1F3"/>
+                    </a:solidFill>
+                  </a:tcPr>
+                </a:tc>
+                <a:tc>
+                  <a:txBody>
+                    <a:bodyPr/>
+                    <a:lstStyle/>
+                    <a:p>
+                      <a:pPr algn="r"/>
+                      <a:r>
+                        <a:rPr sz="850" b="0" i="0">
+                          <a:solidFill>
+                            <a:srgbClr val="262626"/>
+                          </a:solidFill>
+                          <a:latin typeface="Garamond"/>
+                          <a:cs typeface="Garamond"/>
+                        </a:rPr>
+                        <a:t>13.8%</a:t>
+                      </a:r>
+                    </a:p>
+                  </a:txBody>
+                  <a:tcPr anchor="ctr" marT="12700" marB="12700">
+                    <a:solidFill>
+                      <a:srgbClr val="F0F1F3"/>
+                    </a:solidFill>
+                  </a:tcPr>
+                </a:tc>
+                <a:tc>
+                  <a:txBody>
+                    <a:bodyPr/>
+                    <a:lstStyle/>
+                    <a:p>
+                      <a:pPr algn="r"/>
+                      <a:r>
+                        <a:rPr sz="850" b="0" i="0">
+                          <a:solidFill>
+                            <a:srgbClr val="262626"/>
+                          </a:solidFill>
+                          <a:latin typeface="Garamond"/>
+                          <a:cs typeface="Garamond"/>
+                        </a:rPr>
+                        <a:t>15.6%</a:t>
+                      </a:r>
+                    </a:p>
+                  </a:txBody>
+                  <a:tcPr anchor="ctr" marT="12700" marB="12700">
+                    <a:solidFill>
+                      <a:srgbClr val="F0F1F3"/>
+                    </a:solidFill>
+                  </a:tcPr>
+                </a:tc>
+                <a:tc>
+                  <a:txBody>
+                    <a:bodyPr/>
+                    <a:lstStyle/>
+                    <a:p>
+                      <a:pPr algn="r"/>
+                      <a:r>
+                        <a:rPr sz="850" b="0" i="0">
+                          <a:solidFill>
+                            <a:srgbClr val="262626"/>
+                          </a:solidFill>
+                          <a:latin typeface="Garamond"/>
+                          <a:cs typeface="Garamond"/>
+                        </a:rPr>
                         <a:t>14.3%</a:t>
                       </a:r>
                     </a:p>
@@ -8794,13 +9545,85 @@
                     <a:p>
                       <a:pPr algn="r"/>
                       <a:r>
-                        <a:rPr sz="1050" b="0" i="0">
+                        <a:rPr sz="850" b="0" i="0">
                           <a:solidFill>
                             <a:srgbClr val="262626"/>
                           </a:solidFill>
                           <a:latin typeface="Garamond"/>
                           <a:cs typeface="Garamond"/>
                         </a:rPr>
+                        <a:t>16.8%</a:t>
+                      </a:r>
+                    </a:p>
+                  </a:txBody>
+                  <a:tcPr anchor="ctr" marT="12700" marB="12700">
+                    <a:solidFill>
+                      <a:srgbClr val="F0F1F3"/>
+                    </a:solidFill>
+                  </a:tcPr>
+                </a:tc>
+                <a:tc>
+                  <a:txBody>
+                    <a:bodyPr/>
+                    <a:lstStyle/>
+                    <a:p>
+                      <a:pPr algn="r"/>
+                      <a:r>
+                        <a:rPr sz="850" b="0" i="0">
+                          <a:solidFill>
+                            <a:srgbClr val="262626"/>
+                          </a:solidFill>
+                          <a:latin typeface="Garamond"/>
+                          <a:cs typeface="Garamond"/>
+                        </a:rPr>
+                        <a:t>14.9%</a:t>
+                      </a:r>
+                    </a:p>
+                  </a:txBody>
+                  <a:tcPr anchor="ctr" marT="12700" marB="12700">
+                    <a:solidFill>
+                      <a:srgbClr val="F0F1F3"/>
+                    </a:solidFill>
+                  </a:tcPr>
+                </a:tc>
+                <a:tc>
+                  <a:txBody>
+                    <a:bodyPr/>
+                    <a:lstStyle/>
+                    <a:p>
+                      <a:pPr algn="r"/>
+                      <a:r>
+                        <a:rPr sz="850" b="0" i="0">
+                          <a:solidFill>
+                            <a:srgbClr val="262626"/>
+                          </a:solidFill>
+                          <a:latin typeface="Garamond"/>
+                          <a:cs typeface="Garamond"/>
+                        </a:rPr>
+                        <a:t>17.9%</a:t>
+                      </a:r>
+                    </a:p>
+                  </a:txBody>
+                  <a:tcPr anchor="ctr" marT="12700" marB="12700">
+                    <a:solidFill>
+                      <a:srgbClr val="F0F1F3"/>
+                    </a:solidFill>
+                  </a:tcPr>
+                </a:tc>
+                <a:tc>
+                  <a:txBody>
+                    <a:bodyPr/>
+                    <a:lstStyle/>
+                    <a:p>
+                      <a:pPr algn="r"/>
+                      <a:r>
+                        <a:rPr sz="850" b="0" i="0">
+                          <a:solidFill>
+                            <a:srgbClr val="262626"/>
+                          </a:solidFill>
+                          <a:latin typeface="Garamond"/>
+                          <a:cs typeface="Garamond"/>
+                        </a:rPr>
                         <a:t>15.5%</a:t>
                       </a:r>
                     </a:p>
@@ -8811,8 +9634,32 @@
                     </a:solidFill>
                   </a:tcPr>
                 </a:tc>
+                <a:tc>
+                  <a:txBody>
+                    <a:bodyPr/>
+                    <a:lstStyle/>
+                    <a:p>
+                      <a:pPr algn="r"/>
+                      <a:r>
+                        <a:rPr sz="850" b="0" i="0">
+                          <a:solidFill>
+                            <a:srgbClr val="262626"/>
+                          </a:solidFill>
+                          <a:latin typeface="Garamond"/>
+                          <a:cs typeface="Garamond"/>
+                        </a:rPr>
+                        <a:t>19.0%</a:t>
+                      </a:r>
+                    </a:p>
+                  </a:txBody>
+                  <a:tcPr anchor="ctr" marT="12700" marB="12700">
+                    <a:solidFill>
+                      <a:srgbClr val="F0F1F3"/>
+                    </a:solidFill>
+                  </a:tcPr>
+                </a:tc>
               </a:tr>
-              <a:tr h="485938">
+              <a:tr h="463731">
                 <a:tc>
                   <a:txBody>
                     <a:bodyPr/>
@@ -8820,7 +9667,7 @@
                     <a:p>
                       <a:pPr algn="l"/>
                       <a:r>
-                        <a:rPr sz="1050" b="0" i="0">
+                        <a:rPr sz="850" b="0" i="0">
                           <a:solidFill>
                             <a:srgbClr val="262626"/>
                           </a:solidFill>
@@ -8844,7 +9691,7 @@
                     <a:p>
                       <a:pPr algn="r"/>
                       <a:r>
-                        <a:rPr sz="1050" b="0" i="0">
+                        <a:rPr sz="850" b="0" i="0">
                           <a:solidFill>
                             <a:srgbClr val="262626"/>
                           </a:solidFill>
@@ -8868,7 +9715,7 @@
                     <a:p>
                       <a:pPr algn="r"/>
                       <a:r>
-                        <a:rPr sz="1050" b="0" i="0">
+                        <a:rPr sz="850" b="0" i="0">
                           <a:solidFill>
                             <a:srgbClr val="262626"/>
                           </a:solidFill>
@@ -8892,7 +9739,7 @@
                     <a:p>
                       <a:pPr algn="r"/>
                       <a:r>
-                        <a:rPr sz="1050" b="0" i="0">
+                        <a:rPr sz="850" b="0" i="0">
                           <a:solidFill>
                             <a:srgbClr val="262626"/>
                           </a:solidFill>
@@ -8916,7 +9763,7 @@
                     <a:p>
                       <a:pPr algn="r"/>
                       <a:r>
-                        <a:rPr sz="1050" b="0" i="0">
+                        <a:rPr sz="850" b="0" i="0">
                           <a:solidFill>
                             <a:srgbClr val="262626"/>
                           </a:solidFill>
@@ -8940,7 +9787,7 @@
                     <a:p>
                       <a:pPr algn="r"/>
                       <a:r>
-                        <a:rPr sz="1050" b="0" i="0">
+                        <a:rPr sz="850" b="0" i="0">
                           <a:solidFill>
                             <a:srgbClr val="262626"/>
                           </a:solidFill>
@@ -8964,13 +9811,85 @@
                     <a:p>
                       <a:pPr algn="r"/>
                       <a:r>
-                        <a:rPr sz="1050" b="0" i="0">
+                        <a:rPr sz="850" b="0" i="0">
                           <a:solidFill>
                             <a:srgbClr val="262626"/>
                           </a:solidFill>
                           <a:latin typeface="Garamond"/>
                           <a:cs typeface="Garamond"/>
                         </a:rPr>
+                        <a:t>1,183</a:t>
+                      </a:r>
+                    </a:p>
+                  </a:txBody>
+                  <a:tcPr anchor="ctr" marT="12700" marB="12700">
+                    <a:solidFill>
+                      <a:srgbClr val="FFFFFF"/>
+                    </a:solidFill>
+                  </a:tcPr>
+                </a:tc>
+                <a:tc>
+                  <a:txBody>
+                    <a:bodyPr/>
+                    <a:lstStyle/>
+                    <a:p>
+                      <a:pPr algn="r"/>
+                      <a:r>
+                        <a:rPr sz="850" b="0" i="0">
+                          <a:solidFill>
+                            <a:srgbClr val="262626"/>
+                          </a:solidFill>
+                          <a:latin typeface="Garamond"/>
+                          <a:cs typeface="Garamond"/>
+                        </a:rPr>
+                        <a:t>1,056</a:t>
+                      </a:r>
+                    </a:p>
+                  </a:txBody>
+                  <a:tcPr anchor="ctr" marT="12700" marB="12700">
+                    <a:solidFill>
+                      <a:srgbClr val="FFFFFF"/>
+                    </a:solidFill>
+                  </a:tcPr>
+                </a:tc>
+                <a:tc>
+                  <a:txBody>
+                    <a:bodyPr/>
+                    <a:lstStyle/>
+                    <a:p>
+                      <a:pPr algn="r"/>
+                      <a:r>
+                        <a:rPr sz="850" b="0" i="0">
+                          <a:solidFill>
+                            <a:srgbClr val="262626"/>
+                          </a:solidFill>
+                          <a:latin typeface="Garamond"/>
+                          <a:cs typeface="Garamond"/>
+                        </a:rPr>
+                        <a:t>1,241</a:t>
+                      </a:r>
+                    </a:p>
+                  </a:txBody>
+                  <a:tcPr anchor="ctr" marT="12700" marB="12700">
+                    <a:solidFill>
+                      <a:srgbClr val="FFFFFF"/>
+                    </a:solidFill>
+                  </a:tcPr>
+                </a:tc>
+                <a:tc>
+                  <a:txBody>
+                    <a:bodyPr/>
+                    <a:lstStyle/>
+                    <a:p>
+                      <a:pPr algn="r"/>
+                      <a:r>
+                        <a:rPr sz="850" b="0" i="0">
+                          <a:solidFill>
+                            <a:srgbClr val="262626"/>
+                          </a:solidFill>
+                          <a:latin typeface="Garamond"/>
+                          <a:cs typeface="Garamond"/>
+                        </a:rPr>
                         <a:t>1,120</a:t>
                       </a:r>
                     </a:p>
@@ -8988,13 +9907,85 @@
                     <a:p>
                       <a:pPr algn="r"/>
                       <a:r>
-                        <a:rPr sz="1050" b="0" i="0">
+                        <a:rPr sz="850" b="0" i="0">
                           <a:solidFill>
                             <a:srgbClr val="262626"/>
                           </a:solidFill>
                           <a:latin typeface="Garamond"/>
                           <a:cs typeface="Garamond"/>
                         </a:rPr>
+                        <a:t>1,408</a:t>
+                      </a:r>
+                    </a:p>
+                  </a:txBody>
+                  <a:tcPr anchor="ctr" marT="12700" marB="12700">
+                    <a:solidFill>
+                      <a:srgbClr val="FFFFFF"/>
+                    </a:solidFill>
+                  </a:tcPr>
+                </a:tc>
+                <a:tc>
+                  <a:txBody>
+                    <a:bodyPr/>
+                    <a:lstStyle/>
+                    <a:p>
+                      <a:pPr algn="r"/>
+                      <a:r>
+                        <a:rPr sz="850" b="0" i="0">
+                          <a:solidFill>
+                            <a:srgbClr val="262626"/>
+                          </a:solidFill>
+                          <a:latin typeface="Garamond"/>
+                          <a:cs typeface="Garamond"/>
+                        </a:rPr>
+                        <a:t>1,187</a:t>
+                      </a:r>
+                    </a:p>
+                  </a:txBody>
+                  <a:tcPr anchor="ctr" marT="12700" marB="12700">
+                    <a:solidFill>
+                      <a:srgbClr val="FFFFFF"/>
+                    </a:solidFill>
+                  </a:tcPr>
+                </a:tc>
+                <a:tc>
+                  <a:txBody>
+                    <a:bodyPr/>
+                    <a:lstStyle/>
+                    <a:p>
+                      <a:pPr algn="r"/>
+                      <a:r>
+                        <a:rPr sz="850" b="0" i="0">
+                          <a:solidFill>
+                            <a:srgbClr val="262626"/>
+                          </a:solidFill>
+                          <a:latin typeface="Garamond"/>
+                          <a:cs typeface="Garamond"/>
+                        </a:rPr>
+                        <a:t>1,591</a:t>
+                      </a:r>
+                    </a:p>
+                  </a:txBody>
+                  <a:tcPr anchor="ctr" marT="12700" marB="12700">
+                    <a:solidFill>
+                      <a:srgbClr val="FFFFFF"/>
+                    </a:solidFill>
+                  </a:tcPr>
+                </a:tc>
+                <a:tc>
+                  <a:txBody>
+                    <a:bodyPr/>
+                    <a:lstStyle/>
+                    <a:p>
+                      <a:pPr algn="r"/>
+                      <a:r>
+                        <a:rPr sz="850" b="0" i="0">
+                          <a:solidFill>
+                            <a:srgbClr val="262626"/>
+                          </a:solidFill>
+                          <a:latin typeface="Garamond"/>
+                          <a:cs typeface="Garamond"/>
+                        </a:rPr>
                         <a:t>1,256</a:t>
                       </a:r>
                     </a:p>
@@ -9005,8 +9996,32 @@
                     </a:solidFill>
                   </a:tcPr>
                 </a:tc>
+                <a:tc>
+                  <a:txBody>
+                    <a:bodyPr/>
+                    <a:lstStyle/>
+                    <a:p>
+                      <a:pPr algn="r"/>
+                      <a:r>
+                        <a:rPr sz="850" b="0" i="0">
+                          <a:solidFill>
+                            <a:srgbClr val="262626"/>
+                          </a:solidFill>
+                          <a:latin typeface="Garamond"/>
+                          <a:cs typeface="Garamond"/>
+                        </a:rPr>
+                        <a:t>1,790</a:t>
+                      </a:r>
+                    </a:p>
+                  </a:txBody>
+                  <a:tcPr anchor="ctr" marT="12700" marB="12700">
+                    <a:solidFill>
+                      <a:srgbClr val="FFFFFF"/>
+                    </a:solidFill>
+                  </a:tcPr>
+                </a:tc>
               </a:tr>
-              <a:tr h="485940">
+              <a:tr h="463734">
                 <a:tc>
                   <a:txBody>
                     <a:bodyPr/>
@@ -9014,7 +10029,7 @@
                     <a:p>
                       <a:pPr algn="l"/>
                       <a:r>
-                        <a:rPr sz="1050" b="1" i="0">
+                        <a:rPr sz="850" b="1" i="0">
                           <a:solidFill>
                             <a:srgbClr val="1F2A44"/>
                           </a:solidFill>
@@ -9038,7 +10053,7 @@
                     <a:p>
                       <a:pPr algn="r"/>
                       <a:r>
-                        <a:rPr sz="1050" b="1" i="0">
+                        <a:rPr sz="850" b="1" i="0">
                           <a:solidFill>
                             <a:srgbClr val="1F2A44"/>
                           </a:solidFill>
@@ -9062,7 +10077,7 @@
                     <a:p>
                       <a:pPr algn="r"/>
                       <a:r>
-                        <a:rPr sz="1050" b="1" i="0">
+                        <a:rPr sz="850" b="1" i="0">
                           <a:solidFill>
                             <a:srgbClr val="1F2A44"/>
                           </a:solidFill>
@@ -9086,7 +10101,7 @@
                     <a:p>
                       <a:pPr algn="r"/>
                       <a:r>
-                        <a:rPr sz="1050" b="1" i="0">
+                        <a:rPr sz="850" b="1" i="0">
                           <a:solidFill>
                             <a:srgbClr val="1F2A44"/>
                           </a:solidFill>
@@ -9110,7 +10125,7 @@
                     <a:p>
                       <a:pPr algn="r"/>
                       <a:r>
-                        <a:rPr sz="1050" b="1" i="0">
+                        <a:rPr sz="850" b="1" i="0">
                           <a:solidFill>
                             <a:srgbClr val="1F2A44"/>
                           </a:solidFill>
@@ -9134,7 +10149,7 @@
                     <a:p>
                       <a:pPr algn="r"/>
                       <a:r>
-                        <a:rPr sz="1050" b="1" i="0">
+                        <a:rPr sz="850" b="1" i="0">
                           <a:solidFill>
                             <a:srgbClr val="1F2A44"/>
                           </a:solidFill>
@@ -9158,13 +10173,85 @@
                     <a:p>
                       <a:pPr algn="r"/>
                       <a:r>
-                        <a:rPr sz="1050" b="1" i="0">
+                        <a:rPr sz="850" b="1" i="0">
                           <a:solidFill>
                             <a:srgbClr val="1F2A44"/>
                           </a:solidFill>
                           <a:latin typeface="Garamond"/>
                           <a:cs typeface="Garamond"/>
                         </a:rPr>
+                        <a:t>10.37</a:t>
+                      </a:r>
+                    </a:p>
+                  </a:txBody>
+                  <a:tcPr anchor="ctr" marT="12700" marB="12700">
+                    <a:solidFill>
+                      <a:srgbClr val="F0F1F3"/>
+                    </a:solidFill>
+                  </a:tcPr>
+                </a:tc>
+                <a:tc>
+                  <a:txBody>
+                    <a:bodyPr/>
+                    <a:lstStyle/>
+                    <a:p>
+                      <a:pPr algn="r"/>
+                      <a:r>
+                        <a:rPr sz="850" b="1" i="0">
+                          <a:solidFill>
+                            <a:srgbClr val="1F2A44"/>
+                          </a:solidFill>
+                          <a:latin typeface="Garamond"/>
+                          <a:cs typeface="Garamond"/>
+                        </a:rPr>
+                        <a:t>9.65</a:t>
+                      </a:r>
+                    </a:p>
+                  </a:txBody>
+                  <a:tcPr anchor="ctr" marT="12700" marB="12700">
+                    <a:solidFill>
+                      <a:srgbClr val="F0F1F3"/>
+                    </a:solidFill>
+                  </a:tcPr>
+                </a:tc>
+                <a:tc>
+                  <a:txBody>
+                    <a:bodyPr/>
+                    <a:lstStyle/>
+                    <a:p>
+                      <a:pPr algn="r"/>
+                      <a:r>
+                        <a:rPr sz="850" b="1" i="0">
+                          <a:solidFill>
+                            <a:srgbClr val="1F2A44"/>
+                          </a:solidFill>
+                          <a:latin typeface="Garamond"/>
+                          <a:cs typeface="Garamond"/>
+                        </a:rPr>
+                        <a:t>11.34</a:t>
+                      </a:r>
+                    </a:p>
+                  </a:txBody>
+                  <a:tcPr anchor="ctr" marT="12700" marB="12700">
+                    <a:solidFill>
+                      <a:srgbClr val="F0F1F3"/>
+                    </a:solidFill>
+                  </a:tcPr>
+                </a:tc>
+                <a:tc>
+                  <a:txBody>
+                    <a:bodyPr/>
+                    <a:lstStyle/>
+                    <a:p>
+                      <a:pPr algn="r"/>
+                      <a:r>
+                        <a:rPr sz="850" b="1" i="0">
+                          <a:solidFill>
+                            <a:srgbClr val="1F2A44"/>
+                          </a:solidFill>
+                          <a:latin typeface="Garamond"/>
+                          <a:cs typeface="Garamond"/>
+                        </a:rPr>
                         <a:t>10.66</a:t>
                       </a:r>
                     </a:p>
@@ -9182,14 +10269,110 @@
                     <a:p>
                       <a:pPr algn="r"/>
                       <a:r>
-                        <a:rPr sz="1050" b="1" i="0">
+                        <a:rPr sz="850" b="1" i="0">
                           <a:solidFill>
                             <a:srgbClr val="1F2A44"/>
                           </a:solidFill>
                           <a:latin typeface="Garamond"/>
                           <a:cs typeface="Garamond"/>
                         </a:rPr>
+                        <a:t>13.40</a:t>
+                      </a:r>
+                    </a:p>
+                  </a:txBody>
+                  <a:tcPr anchor="ctr" marT="12700" marB="12700">
+                    <a:solidFill>
+                      <a:srgbClr val="F0F1F3"/>
+                    </a:solidFill>
+                  </a:tcPr>
+                </a:tc>
+                <a:tc>
+                  <a:txBody>
+                    <a:bodyPr/>
+                    <a:lstStyle/>
+                    <a:p>
+                      <a:pPr algn="r"/>
+                      <a:r>
+                        <a:rPr sz="850" b="1" i="0">
+                          <a:solidFill>
+                            <a:srgbClr val="1F2A44"/>
+                          </a:solidFill>
+                          <a:latin typeface="Garamond"/>
+                          <a:cs typeface="Garamond"/>
+                        </a:rPr>
+                        <a:t>11.75</a:t>
+                      </a:r>
+                    </a:p>
+                  </a:txBody>
+                  <a:tcPr anchor="ctr" marT="12700" marB="12700">
+                    <a:solidFill>
+                      <a:srgbClr val="F0F1F3"/>
+                    </a:solidFill>
+                  </a:tcPr>
+                </a:tc>
+                <a:tc>
+                  <a:txBody>
+                    <a:bodyPr/>
+                    <a:lstStyle/>
+                    <a:p>
+                      <a:pPr algn="r"/>
+                      <a:r>
+                        <a:rPr sz="850" b="1" i="0">
+                          <a:solidFill>
+                            <a:srgbClr val="1F2A44"/>
+                          </a:solidFill>
+                          <a:latin typeface="Garamond"/>
+                          <a:cs typeface="Garamond"/>
+                        </a:rPr>
+                        <a:t>15.75</a:t>
+                      </a:r>
+                    </a:p>
+                  </a:txBody>
+                  <a:tcPr anchor="ctr" marT="12700" marB="12700">
+                    <a:solidFill>
+                      <a:srgbClr val="F0F1F3"/>
+                    </a:solidFill>
+                  </a:tcPr>
+                </a:tc>
+                <a:tc>
+                  <a:txBody>
+                    <a:bodyPr/>
+                    <a:lstStyle/>
+                    <a:p>
+                      <a:pPr algn="r"/>
+                      <a:r>
+                        <a:rPr sz="850" b="1" i="0">
+                          <a:solidFill>
+                            <a:srgbClr val="1F2A44"/>
+                          </a:solidFill>
+                          <a:latin typeface="Garamond"/>
+                          <a:cs typeface="Garamond"/>
+                        </a:rPr>
                         <a:t>12.93</a:t>
+                      </a:r>
+                    </a:p>
+                  </a:txBody>
+                  <a:tcPr anchor="ctr" marT="12700" marB="12700">
+                    <a:solidFill>
+                      <a:srgbClr val="F0F1F3"/>
+                    </a:solidFill>
+                  </a:tcPr>
+                </a:tc>
+                <a:tc>
+                  <a:txBody>
+                    <a:bodyPr/>
+                    <a:lstStyle/>
+                    <a:p>
+                      <a:pPr algn="r"/>
+                      <a:r>
+                        <a:rPr sz="850" b="1" i="0">
+                          <a:solidFill>
+                            <a:srgbClr val="1F2A44"/>
+                          </a:solidFill>
+                          <a:latin typeface="Garamond"/>
+                          <a:cs typeface="Garamond"/>
+                        </a:rPr>
+                        <a:t>18.43</a:t>
                       </a:r>
                     </a:p>
                   </a:txBody>
@@ -9212,8 +10395,8 @@
         </p:nvSpPr>
         <p:spPr>
           <a:xfrm>
-            <a:off x="457200" y="6053328"/>
-            <a:ext cx="11292840" cy="411480"/>
+            <a:off x="457200" y="5897880"/>
+            <a:ext cx="11292840" cy="502920"/>
           </a:xfrm>
           <a:prstGeom prst="rect">
             <a:avLst/>
@@ -9236,14 +10419,14 @@
               <a:buNone/>
             </a:pPr>
             <a:r>
-              <a:rPr sz="1050" b="0" i="1">
+              <a:rPr sz="1000" b="0" i="1">
                 <a:solidFill>
                   <a:srgbClr val="8C8C8C"/>
                 </a:solidFill>
                 <a:latin typeface="Garamond"/>
                 <a:cs typeface="Garamond"/>
               </a:rPr>
-              <a:t>Table shows FY26 / FY28 / FY30; full five-year path in LULU_3_Statement_Model.xlsx. Bull ($202) and bear ($56) scenarios are in the Appendix only.</a:t>
+              <a:t>Base = 3-statement model (Scenarios col G). Bull = Scenarios col H (−4% FY26, +6% avg FY27–30, 19% terminal EBIT margin). Bear case in Appendix.</a:t>
             </a:r>
           </a:p>
         </p:txBody>
@@ -9424,7 +10607,7 @@
                 <a:latin typeface="Garamond"/>
                 <a:cs typeface="Garamond"/>
               </a:rPr>
-              <a:t>Net-cash reported history vs base-case funded growth (US$ M)</a:t>
+              <a:t>Net-cash history vs base &amp; bull funded growth — all FY26–30 (US$ M)</a:t>
             </a:r>
           </a:p>
         </p:txBody>
@@ -9512,7 +10695,7 @@
                 <a:latin typeface="Garamond"/>
                 <a:cs typeface="Garamond"/>
               </a:rPr>
-              <a:t>Projections = GIS base case (Scenarios column G); historicals per FY2025 10-K</a:t>
+              <a:t>Forecast: base = Scenarios col G (3-statement); bull = Scenarios col H. Historicals per FY2025 10-K.</a:t>
             </a:r>
           </a:p>
         </p:txBody>
@@ -9640,7 +10823,7 @@
                 <a:latin typeface="Garamond"/>
                 <a:cs typeface="Garamond"/>
               </a:rPr>
-              <a:t>No funded debt in any historical year; FY25 cash $1,807M</a:t>
+              <a:t>No funded debt; FY25 cash $1,807M; total assets $8,457M</a:t>
             </a:r>
           </a:p>
           <a:p>
@@ -9662,7 +10845,7 @@
                 <a:latin typeface="Garamond"/>
                 <a:cs typeface="Garamond"/>
               </a:rPr>
-              <a:t>Total assets $6,841M; shareholders’ equity $3,896M at FY25</a:t>
+              <a:t>Net-cash balance sheet underpins downside at ~10x earnings</a:t>
             </a:r>
           </a:p>
           <a:p>
@@ -9684,7 +10867,7 @@
                 <a:latin typeface="Garamond"/>
                 <a:cs typeface="Garamond"/>
               </a:rPr>
-              <a:t>Lease-backed retail footprint (ROU assets) — balance sheet already a downside cushion at ~10x earnings</a:t>
+              <a:t>Lease-backed ROU assets ~$1.6B — not traditional debt</a:t>
             </a:r>
           </a:p>
         </p:txBody>
@@ -9746,7 +10929,7 @@
                 <a:latin typeface="Garamond"/>
                 <a:cs typeface="Garamond"/>
               </a:rPr>
-              <a:t>BASE-CASE FORECAST (FY2026E–FY2030E) — 3-statement model</a:t>
+              <a:t>FORECAST (FY2026E–FY2030E) — base vs bull</a:t>
             </a:r>
           </a:p>
           <a:p>
@@ -9768,7 +10951,7 @@
                 <a:latin typeface="Garamond"/>
                 <a:cs typeface="Garamond"/>
               </a:rPr>
-              <a:t>Cash grows 2,470M → 4,864M while funding $500M/yr buybacks; debt stays $0</a:t>
+              <a:t>Base cash 2,470M → 4,864M ($500M/yr buybacks)</a:t>
             </a:r>
           </a:p>
           <a:p>
@@ -9790,7 +10973,7 @@
                 <a:latin typeface="Garamond"/>
                 <a:cs typeface="Garamond"/>
               </a:rPr>
-              <a:t>WC drivers (% of revenue / COGS) roll forward; cash is the balancing plug on the CFS</a:t>
+              <a:t>Bull cash 1,807M → 1,807M (75% UFCF to buybacks)</a:t>
             </a:r>
           </a:p>
           <a:p>
@@ -9812,7 +10995,7 @@
                 <a:latin typeface="Garamond"/>
                 <a:cs typeface="Garamond"/>
               </a:rPr>
-              <a:t>Total assets reach 12,067M; equity 8,481M — leverage-free compounding</a:t>
+              <a:t>Bull BS scaled from base WC drivers at bull revenue path; cash from UFCF waterfall</a:t>
             </a:r>
           </a:p>
         </p:txBody>
@@ -9827,7 +11010,7 @@
         </p:nvGraphicFramePr>
         <p:xfrm>
           <a:off x="457200" y="2578608"/>
-          <a:ext cx="11292839" cy="3401568"/>
+          <a:ext cx="11292828" cy="3246120"/>
         </p:xfrm>
         <a:graphic>
           <a:graphicData uri="http://schemas.openxmlformats.org/drawingml/2006/table">
@@ -9836,16 +11019,23 @@
                 <a:tableStyleId>{5C22544A-7EE6-4342-B048-85BDC9FD1C3A}</a:tableStyleId>
               </a:tblPr>
               <a:tblGrid>
-                <a:gridCol w="2743200"/>
-                <a:gridCol w="1221377"/>
-                <a:gridCol w="1221377"/>
-                <a:gridCol w="1221377"/>
-                <a:gridCol w="1221377"/>
-                <a:gridCol w="1221377"/>
-                <a:gridCol w="1221377"/>
-                <a:gridCol w="1221377"/>
+                <a:gridCol w="2148840"/>
+                <a:gridCol w="653142"/>
+                <a:gridCol w="653142"/>
+                <a:gridCol w="653142"/>
+                <a:gridCol w="653142"/>
+                <a:gridCol w="653142"/>
+                <a:gridCol w="653142"/>
+                <a:gridCol w="653142"/>
+                <a:gridCol w="653142"/>
+                <a:gridCol w="653142"/>
+                <a:gridCol w="653142"/>
+                <a:gridCol w="653142"/>
+                <a:gridCol w="653142"/>
+                <a:gridCol w="653142"/>
+                <a:gridCol w="653142"/>
               </a:tblGrid>
-              <a:tr h="485938">
+              <a:tr h="463731">
                 <a:tc>
                   <a:txBody>
                     <a:bodyPr/>
@@ -9980,7 +11170,7 @@
                           <a:latin typeface="Garamond"/>
                           <a:cs typeface="Garamond"/>
                         </a:rPr>
-                        <a:t>FY2026E</a:t>
+                        <a:t>6EE base</a:t>
                       </a:r>
                     </a:p>
                   </a:txBody>
@@ -10004,7 +11194,7 @@
                           <a:latin typeface="Garamond"/>
                           <a:cs typeface="Garamond"/>
                         </a:rPr>
-                        <a:t>FY2028E</a:t>
+                        <a:t>6EE bull</a:t>
                       </a:r>
                     </a:p>
                   </a:txBody>
@@ -10028,7 +11218,7 @@
                           <a:latin typeface="Garamond"/>
                           <a:cs typeface="Garamond"/>
                         </a:rPr>
-                        <a:t>FY2030E</a:t>
+                        <a:t>7EE base</a:t>
                       </a:r>
                     </a:p>
                   </a:txBody>
@@ -10038,8 +11228,176 @@
                     </a:solidFill>
                   </a:tcPr>
                 </a:tc>
+                <a:tc>
+                  <a:txBody>
+                    <a:bodyPr/>
+                    <a:lstStyle/>
+                    <a:p>
+                      <a:pPr algn="r"/>
+                      <a:r>
+                        <a:rPr sz="1100" b="1" i="0">
+                          <a:solidFill>
+                            <a:srgbClr val="FFFFFF"/>
+                          </a:solidFill>
+                          <a:latin typeface="Garamond"/>
+                          <a:cs typeface="Garamond"/>
+                        </a:rPr>
+                        <a:t>7EE bull</a:t>
+                      </a:r>
+                    </a:p>
+                  </a:txBody>
+                  <a:tcPr anchor="ctr">
+                    <a:solidFill>
+                      <a:srgbClr val="1F2A44"/>
+                    </a:solidFill>
+                  </a:tcPr>
+                </a:tc>
+                <a:tc>
+                  <a:txBody>
+                    <a:bodyPr/>
+                    <a:lstStyle/>
+                    <a:p>
+                      <a:pPr algn="r"/>
+                      <a:r>
+                        <a:rPr sz="1100" b="1" i="0">
+                          <a:solidFill>
+                            <a:srgbClr val="FFFFFF"/>
+                          </a:solidFill>
+                          <a:latin typeface="Garamond"/>
+                          <a:cs typeface="Garamond"/>
+                        </a:rPr>
+                        <a:t>8EE base</a:t>
+                      </a:r>
+                    </a:p>
+                  </a:txBody>
+                  <a:tcPr anchor="ctr">
+                    <a:solidFill>
+                      <a:srgbClr val="1F2A44"/>
+                    </a:solidFill>
+                  </a:tcPr>
+                </a:tc>
+                <a:tc>
+                  <a:txBody>
+                    <a:bodyPr/>
+                    <a:lstStyle/>
+                    <a:p>
+                      <a:pPr algn="r"/>
+                      <a:r>
+                        <a:rPr sz="1100" b="1" i="0">
+                          <a:solidFill>
+                            <a:srgbClr val="FFFFFF"/>
+                          </a:solidFill>
+                          <a:latin typeface="Garamond"/>
+                          <a:cs typeface="Garamond"/>
+                        </a:rPr>
+                        <a:t>8EE bull</a:t>
+                      </a:r>
+                    </a:p>
+                  </a:txBody>
+                  <a:tcPr anchor="ctr">
+                    <a:solidFill>
+                      <a:srgbClr val="1F2A44"/>
+                    </a:solidFill>
+                  </a:tcPr>
+                </a:tc>
+                <a:tc>
+                  <a:txBody>
+                    <a:bodyPr/>
+                    <a:lstStyle/>
+                    <a:p>
+                      <a:pPr algn="r"/>
+                      <a:r>
+                        <a:rPr sz="1100" b="1" i="0">
+                          <a:solidFill>
+                            <a:srgbClr val="FFFFFF"/>
+                          </a:solidFill>
+                          <a:latin typeface="Garamond"/>
+                          <a:cs typeface="Garamond"/>
+                        </a:rPr>
+                        <a:t>9EE base</a:t>
+                      </a:r>
+                    </a:p>
+                  </a:txBody>
+                  <a:tcPr anchor="ctr">
+                    <a:solidFill>
+                      <a:srgbClr val="1F2A44"/>
+                    </a:solidFill>
+                  </a:tcPr>
+                </a:tc>
+                <a:tc>
+                  <a:txBody>
+                    <a:bodyPr/>
+                    <a:lstStyle/>
+                    <a:p>
+                      <a:pPr algn="r"/>
+                      <a:r>
+                        <a:rPr sz="1100" b="1" i="0">
+                          <a:solidFill>
+                            <a:srgbClr val="FFFFFF"/>
+                          </a:solidFill>
+                          <a:latin typeface="Garamond"/>
+                          <a:cs typeface="Garamond"/>
+                        </a:rPr>
+                        <a:t>9EE bull</a:t>
+                      </a:r>
+                    </a:p>
+                  </a:txBody>
+                  <a:tcPr anchor="ctr">
+                    <a:solidFill>
+                      <a:srgbClr val="1F2A44"/>
+                    </a:solidFill>
+                  </a:tcPr>
+                </a:tc>
+                <a:tc>
+                  <a:txBody>
+                    <a:bodyPr/>
+                    <a:lstStyle/>
+                    <a:p>
+                      <a:pPr algn="r"/>
+                      <a:r>
+                        <a:rPr sz="1100" b="1" i="0">
+                          <a:solidFill>
+                            <a:srgbClr val="FFFFFF"/>
+                          </a:solidFill>
+                          <a:latin typeface="Garamond"/>
+                          <a:cs typeface="Garamond"/>
+                        </a:rPr>
+                        <a:t>0EE base</a:t>
+                      </a:r>
+                    </a:p>
+                  </a:txBody>
+                  <a:tcPr anchor="ctr">
+                    <a:solidFill>
+                      <a:srgbClr val="1F2A44"/>
+                    </a:solidFill>
+                  </a:tcPr>
+                </a:tc>
+                <a:tc>
+                  <a:txBody>
+                    <a:bodyPr/>
+                    <a:lstStyle/>
+                    <a:p>
+                      <a:pPr algn="r"/>
+                      <a:r>
+                        <a:rPr sz="1100" b="1" i="0">
+                          <a:solidFill>
+                            <a:srgbClr val="FFFFFF"/>
+                          </a:solidFill>
+                          <a:latin typeface="Garamond"/>
+                          <a:cs typeface="Garamond"/>
+                        </a:rPr>
+                        <a:t>0EE bull</a:t>
+                      </a:r>
+                    </a:p>
+                  </a:txBody>
+                  <a:tcPr anchor="ctr">
+                    <a:solidFill>
+                      <a:srgbClr val="1F2A44"/>
+                    </a:solidFill>
+                  </a:tcPr>
+                </a:tc>
               </a:tr>
-              <a:tr h="485938">
+              <a:tr h="463731">
                 <a:tc>
                   <a:txBody>
                     <a:bodyPr/>
@@ -10047,7 +11405,7 @@
                     <a:p>
                       <a:pPr algn="l"/>
                       <a:r>
-                        <a:rPr sz="1050" b="0" i="0">
+                        <a:rPr sz="850" b="0" i="0">
                           <a:solidFill>
                             <a:srgbClr val="262626"/>
                           </a:solidFill>
@@ -10071,7 +11429,7 @@
                     <a:p>
                       <a:pPr algn="r"/>
                       <a:r>
-                        <a:rPr sz="1050" b="0" i="0">
+                        <a:rPr sz="850" b="0" i="0">
                           <a:solidFill>
                             <a:srgbClr val="262626"/>
                           </a:solidFill>
@@ -10095,7 +11453,7 @@
                     <a:p>
                       <a:pPr algn="r"/>
                       <a:r>
-                        <a:rPr sz="1050" b="0" i="0">
+                        <a:rPr sz="850" b="0" i="0">
                           <a:solidFill>
                             <a:srgbClr val="262626"/>
                           </a:solidFill>
@@ -10119,7 +11477,7 @@
                     <a:p>
                       <a:pPr algn="r"/>
                       <a:r>
-                        <a:rPr sz="1050" b="0" i="0">
+                        <a:rPr sz="850" b="0" i="0">
                           <a:solidFill>
                             <a:srgbClr val="262626"/>
                           </a:solidFill>
@@ -10143,7 +11501,7 @@
                     <a:p>
                       <a:pPr algn="r"/>
                       <a:r>
-                        <a:rPr sz="1050" b="0" i="0">
+                        <a:rPr sz="850" b="0" i="0">
                           <a:solidFill>
                             <a:srgbClr val="262626"/>
                           </a:solidFill>
@@ -10167,7 +11525,7 @@
                     <a:p>
                       <a:pPr algn="r"/>
                       <a:r>
-                        <a:rPr sz="1050" b="0" i="0">
+                        <a:rPr sz="850" b="0" i="0">
                           <a:solidFill>
                             <a:srgbClr val="262626"/>
                           </a:solidFill>
@@ -10191,13 +11549,85 @@
                     <a:p>
                       <a:pPr algn="r"/>
                       <a:r>
-                        <a:rPr sz="1050" b="0" i="0">
+                        <a:rPr sz="850" b="0" i="0">
                           <a:solidFill>
                             <a:srgbClr val="262626"/>
                           </a:solidFill>
                           <a:latin typeface="Garamond"/>
                           <a:cs typeface="Garamond"/>
                         </a:rPr>
+                        <a:t>1,807</a:t>
+                      </a:r>
+                    </a:p>
+                  </a:txBody>
+                  <a:tcPr anchor="ctr" marT="12700" marB="12700">
+                    <a:solidFill>
+                      <a:srgbClr val="FFFFFF"/>
+                    </a:solidFill>
+                  </a:tcPr>
+                </a:tc>
+                <a:tc>
+                  <a:txBody>
+                    <a:bodyPr/>
+                    <a:lstStyle/>
+                    <a:p>
+                      <a:pPr algn="r"/>
+                      <a:r>
+                        <a:rPr sz="850" b="0" i="0">
+                          <a:solidFill>
+                            <a:srgbClr val="262626"/>
+                          </a:solidFill>
+                          <a:latin typeface="Garamond"/>
+                          <a:cs typeface="Garamond"/>
+                        </a:rPr>
+                        <a:t>2,985</a:t>
+                      </a:r>
+                    </a:p>
+                  </a:txBody>
+                  <a:tcPr anchor="ctr" marT="12700" marB="12700">
+                    <a:solidFill>
+                      <a:srgbClr val="FFFFFF"/>
+                    </a:solidFill>
+                  </a:tcPr>
+                </a:tc>
+                <a:tc>
+                  <a:txBody>
+                    <a:bodyPr/>
+                    <a:lstStyle/>
+                    <a:p>
+                      <a:pPr algn="r"/>
+                      <a:r>
+                        <a:rPr sz="850" b="0" i="0">
+                          <a:solidFill>
+                            <a:srgbClr val="262626"/>
+                          </a:solidFill>
+                          <a:latin typeface="Garamond"/>
+                          <a:cs typeface="Garamond"/>
+                        </a:rPr>
+                        <a:t>1,807</a:t>
+                      </a:r>
+                    </a:p>
+                  </a:txBody>
+                  <a:tcPr anchor="ctr" marT="12700" marB="12700">
+                    <a:solidFill>
+                      <a:srgbClr val="FFFFFF"/>
+                    </a:solidFill>
+                  </a:tcPr>
+                </a:tc>
+                <a:tc>
+                  <a:txBody>
+                    <a:bodyPr/>
+                    <a:lstStyle/>
+                    <a:p>
+                      <a:pPr algn="r"/>
+                      <a:r>
+                        <a:rPr sz="850" b="0" i="0">
+                          <a:solidFill>
+                            <a:srgbClr val="262626"/>
+                          </a:solidFill>
+                          <a:latin typeface="Garamond"/>
+                          <a:cs typeface="Garamond"/>
+                        </a:rPr>
                         <a:t>3,562</a:t>
                       </a:r>
                     </a:p>
@@ -10215,13 +11645,85 @@
                     <a:p>
                       <a:pPr algn="r"/>
                       <a:r>
-                        <a:rPr sz="1050" b="0" i="0">
+                        <a:rPr sz="850" b="0" i="0">
                           <a:solidFill>
                             <a:srgbClr val="262626"/>
                           </a:solidFill>
                           <a:latin typeface="Garamond"/>
                           <a:cs typeface="Garamond"/>
                         </a:rPr>
+                        <a:t>1,807</a:t>
+                      </a:r>
+                    </a:p>
+                  </a:txBody>
+                  <a:tcPr anchor="ctr" marT="12700" marB="12700">
+                    <a:solidFill>
+                      <a:srgbClr val="FFFFFF"/>
+                    </a:solidFill>
+                  </a:tcPr>
+                </a:tc>
+                <a:tc>
+                  <a:txBody>
+                    <a:bodyPr/>
+                    <a:lstStyle/>
+                    <a:p>
+                      <a:pPr algn="r"/>
+                      <a:r>
+                        <a:rPr sz="850" b="0" i="0">
+                          <a:solidFill>
+                            <a:srgbClr val="262626"/>
+                          </a:solidFill>
+                          <a:latin typeface="Garamond"/>
+                          <a:cs typeface="Garamond"/>
+                        </a:rPr>
+                        <a:t>4,180</a:t>
+                      </a:r>
+                    </a:p>
+                  </a:txBody>
+                  <a:tcPr anchor="ctr" marT="12700" marB="12700">
+                    <a:solidFill>
+                      <a:srgbClr val="FFFFFF"/>
+                    </a:solidFill>
+                  </a:tcPr>
+                </a:tc>
+                <a:tc>
+                  <a:txBody>
+                    <a:bodyPr/>
+                    <a:lstStyle/>
+                    <a:p>
+                      <a:pPr algn="r"/>
+                      <a:r>
+                        <a:rPr sz="850" b="0" i="0">
+                          <a:solidFill>
+                            <a:srgbClr val="262626"/>
+                          </a:solidFill>
+                          <a:latin typeface="Garamond"/>
+                          <a:cs typeface="Garamond"/>
+                        </a:rPr>
+                        <a:t>1,807</a:t>
+                      </a:r>
+                    </a:p>
+                  </a:txBody>
+                  <a:tcPr anchor="ctr" marT="12700" marB="12700">
+                    <a:solidFill>
+                      <a:srgbClr val="FFFFFF"/>
+                    </a:solidFill>
+                  </a:tcPr>
+                </a:tc>
+                <a:tc>
+                  <a:txBody>
+                    <a:bodyPr/>
+                    <a:lstStyle/>
+                    <a:p>
+                      <a:pPr algn="r"/>
+                      <a:r>
+                        <a:rPr sz="850" b="0" i="0">
+                          <a:solidFill>
+                            <a:srgbClr val="262626"/>
+                          </a:solidFill>
+                          <a:latin typeface="Garamond"/>
+                          <a:cs typeface="Garamond"/>
+                        </a:rPr>
                         <a:t>4,864</a:t>
                       </a:r>
                     </a:p>
@@ -10232,8 +11734,32 @@
                     </a:solidFill>
                   </a:tcPr>
                 </a:tc>
+                <a:tc>
+                  <a:txBody>
+                    <a:bodyPr/>
+                    <a:lstStyle/>
+                    <a:p>
+                      <a:pPr algn="r"/>
+                      <a:r>
+                        <a:rPr sz="850" b="0" i="0">
+                          <a:solidFill>
+                            <a:srgbClr val="262626"/>
+                          </a:solidFill>
+                          <a:latin typeface="Garamond"/>
+                          <a:cs typeface="Garamond"/>
+                        </a:rPr>
+                        <a:t>1,807</a:t>
+                      </a:r>
+                    </a:p>
+                  </a:txBody>
+                  <a:tcPr anchor="ctr" marT="12700" marB="12700">
+                    <a:solidFill>
+                      <a:srgbClr val="FFFFFF"/>
+                    </a:solidFill>
+                  </a:tcPr>
+                </a:tc>
               </a:tr>
-              <a:tr h="485938">
+              <a:tr h="463731">
                 <a:tc>
                   <a:txBody>
                     <a:bodyPr/>
@@ -10241,7 +11767,7 @@
                     <a:p>
                       <a:pPr algn="l"/>
                       <a:r>
-                        <a:rPr sz="1050" b="0" i="0">
+                        <a:rPr sz="850" b="0" i="0">
                           <a:solidFill>
                             <a:srgbClr val="262626"/>
                           </a:solidFill>
@@ -10265,7 +11791,7 @@
                     <a:p>
                       <a:pPr algn="r"/>
                       <a:r>
-                        <a:rPr sz="1050" b="0" i="0">
+                        <a:rPr sz="850" b="0" i="0">
                           <a:solidFill>
                             <a:srgbClr val="262626"/>
                           </a:solidFill>
@@ -10289,7 +11815,7 @@
                     <a:p>
                       <a:pPr algn="r"/>
                       <a:r>
-                        <a:rPr sz="1050" b="0" i="0">
+                        <a:rPr sz="850" b="0" i="0">
                           <a:solidFill>
                             <a:srgbClr val="262626"/>
                           </a:solidFill>
@@ -10313,7 +11839,7 @@
                     <a:p>
                       <a:pPr algn="r"/>
                       <a:r>
-                        <a:rPr sz="1050" b="0" i="0">
+                        <a:rPr sz="850" b="0" i="0">
                           <a:solidFill>
                             <a:srgbClr val="262626"/>
                           </a:solidFill>
@@ -10337,7 +11863,7 @@
                     <a:p>
                       <a:pPr algn="r"/>
                       <a:r>
-                        <a:rPr sz="1050" b="0" i="0">
+                        <a:rPr sz="850" b="0" i="0">
                           <a:solidFill>
                             <a:srgbClr val="262626"/>
                           </a:solidFill>
@@ -10361,7 +11887,7 @@
                     <a:p>
                       <a:pPr algn="r"/>
                       <a:r>
-                        <a:rPr sz="1050" b="0" i="0">
+                        <a:rPr sz="850" b="0" i="0">
                           <a:solidFill>
                             <a:srgbClr val="262626"/>
                           </a:solidFill>
@@ -10385,13 +11911,85 @@
                     <a:p>
                       <a:pPr algn="r"/>
                       <a:r>
-                        <a:rPr sz="1050" b="0" i="0">
+                        <a:rPr sz="850" b="0" i="0">
                           <a:solidFill>
                             <a:srgbClr val="262626"/>
                           </a:solidFill>
                           <a:latin typeface="Garamond"/>
                           <a:cs typeface="Garamond"/>
                         </a:rPr>
+                        <a:t>1,572</a:t>
+                      </a:r>
+                    </a:p>
+                  </a:txBody>
+                  <a:tcPr anchor="ctr" marT="12700" marB="12700">
+                    <a:solidFill>
+                      <a:srgbClr val="F0F1F3"/>
+                    </a:solidFill>
+                  </a:tcPr>
+                </a:tc>
+                <a:tc>
+                  <a:txBody>
+                    <a:bodyPr/>
+                    <a:lstStyle/>
+                    <a:p>
+                      <a:pPr algn="r"/>
+                      <a:r>
+                        <a:rPr sz="850" b="0" i="0">
+                          <a:solidFill>
+                            <a:srgbClr val="262626"/>
+                          </a:solidFill>
+                          <a:latin typeface="Garamond"/>
+                          <a:cs typeface="Garamond"/>
+                        </a:rPr>
+                        <a:t>1,551</a:t>
+                      </a:r>
+                    </a:p>
+                  </a:txBody>
+                  <a:tcPr anchor="ctr" marT="12700" marB="12700">
+                    <a:solidFill>
+                      <a:srgbClr val="F0F1F3"/>
+                    </a:solidFill>
+                  </a:tcPr>
+                </a:tc>
+                <a:tc>
+                  <a:txBody>
+                    <a:bodyPr/>
+                    <a:lstStyle/>
+                    <a:p>
+                      <a:pPr algn="r"/>
+                      <a:r>
+                        <a:rPr sz="850" b="0" i="0">
+                          <a:solidFill>
+                            <a:srgbClr val="262626"/>
+                          </a:solidFill>
+                          <a:latin typeface="Garamond"/>
+                          <a:cs typeface="Garamond"/>
+                        </a:rPr>
+                        <a:t>1,643</a:t>
+                      </a:r>
+                    </a:p>
+                  </a:txBody>
+                  <a:tcPr anchor="ctr" marT="12700" marB="12700">
+                    <a:solidFill>
+                      <a:srgbClr val="F0F1F3"/>
+                    </a:solidFill>
+                  </a:tcPr>
+                </a:tc>
+                <a:tc>
+                  <a:txBody>
+                    <a:bodyPr/>
+                    <a:lstStyle/>
+                    <a:p>
+                      <a:pPr algn="r"/>
+                      <a:r>
+                        <a:rPr sz="850" b="0" i="0">
+                          <a:solidFill>
+                            <a:srgbClr val="262626"/>
+                          </a:solidFill>
+                          <a:latin typeface="Garamond"/>
+                          <a:cs typeface="Garamond"/>
+                        </a:rPr>
                         <a:t>1,563</a:t>
                       </a:r>
                     </a:p>
@@ -10409,13 +12007,85 @@
                     <a:p>
                       <a:pPr algn="r"/>
                       <a:r>
-                        <a:rPr sz="1050" b="0" i="0">
+                        <a:rPr sz="850" b="0" i="0">
                           <a:solidFill>
                             <a:srgbClr val="262626"/>
                           </a:solidFill>
                           <a:latin typeface="Garamond"/>
                           <a:cs typeface="Garamond"/>
                         </a:rPr>
+                        <a:t>1,716</a:t>
+                      </a:r>
+                    </a:p>
+                  </a:txBody>
+                  <a:tcPr anchor="ctr" marT="12700" marB="12700">
+                    <a:solidFill>
+                      <a:srgbClr val="F0F1F3"/>
+                    </a:solidFill>
+                  </a:tcPr>
+                </a:tc>
+                <a:tc>
+                  <a:txBody>
+                    <a:bodyPr/>
+                    <a:lstStyle/>
+                    <a:p>
+                      <a:pPr algn="r"/>
+                      <a:r>
+                        <a:rPr sz="850" b="0" i="0">
+                          <a:solidFill>
+                            <a:srgbClr val="262626"/>
+                          </a:solidFill>
+                          <a:latin typeface="Garamond"/>
+                          <a:cs typeface="Garamond"/>
+                        </a:rPr>
+                        <a:t>1,599</a:t>
+                      </a:r>
+                    </a:p>
+                  </a:txBody>
+                  <a:tcPr anchor="ctr" marT="12700" marB="12700">
+                    <a:solidFill>
+                      <a:srgbClr val="F0F1F3"/>
+                    </a:solidFill>
+                  </a:tcPr>
+                </a:tc>
+                <a:tc>
+                  <a:txBody>
+                    <a:bodyPr/>
+                    <a:lstStyle/>
+                    <a:p>
+                      <a:pPr algn="r"/>
+                      <a:r>
+                        <a:rPr sz="850" b="0" i="0">
+                          <a:solidFill>
+                            <a:srgbClr val="262626"/>
+                          </a:solidFill>
+                          <a:latin typeface="Garamond"/>
+                          <a:cs typeface="Garamond"/>
+                        </a:rPr>
+                        <a:t>1,819</a:t>
+                      </a:r>
+                    </a:p>
+                  </a:txBody>
+                  <a:tcPr anchor="ctr" marT="12700" marB="12700">
+                    <a:solidFill>
+                      <a:srgbClr val="F0F1F3"/>
+                    </a:solidFill>
+                  </a:tcPr>
+                </a:tc>
+                <a:tc>
+                  <a:txBody>
+                    <a:bodyPr/>
+                    <a:lstStyle/>
+                    <a:p>
+                      <a:pPr algn="r"/>
+                      <a:r>
+                        <a:rPr sz="850" b="0" i="0">
+                          <a:solidFill>
+                            <a:srgbClr val="262626"/>
+                          </a:solidFill>
+                          <a:latin typeface="Garamond"/>
+                          <a:cs typeface="Garamond"/>
+                        </a:rPr>
                         <a:t>1,635</a:t>
                       </a:r>
                     </a:p>
@@ -10426,8 +12096,32 @@
                     </a:solidFill>
                   </a:tcPr>
                 </a:tc>
+                <a:tc>
+                  <a:txBody>
+                    <a:bodyPr/>
+                    <a:lstStyle/>
+                    <a:p>
+                      <a:pPr algn="r"/>
+                      <a:r>
+                        <a:rPr sz="850" b="0" i="0">
+                          <a:solidFill>
+                            <a:srgbClr val="262626"/>
+                          </a:solidFill>
+                          <a:latin typeface="Garamond"/>
+                          <a:cs typeface="Garamond"/>
+                        </a:rPr>
+                        <a:t>1,927</a:t>
+                      </a:r>
+                    </a:p>
+                  </a:txBody>
+                  <a:tcPr anchor="ctr" marT="12700" marB="12700">
+                    <a:solidFill>
+                      <a:srgbClr val="F0F1F3"/>
+                    </a:solidFill>
+                  </a:tcPr>
+                </a:tc>
               </a:tr>
-              <a:tr h="485938">
+              <a:tr h="463731">
                 <a:tc>
                   <a:txBody>
                     <a:bodyPr/>
@@ -10435,7 +12129,7 @@
                     <a:p>
                       <a:pPr algn="l"/>
                       <a:r>
-                        <a:rPr sz="1050" b="1" i="0">
+                        <a:rPr sz="850" b="1" i="0">
                           <a:solidFill>
                             <a:srgbClr val="1F2A44"/>
                           </a:solidFill>
@@ -10459,7 +12153,7 @@
                     <a:p>
                       <a:pPr algn="r"/>
                       <a:r>
-                        <a:rPr sz="1050" b="1" i="0">
+                        <a:rPr sz="850" b="1" i="0">
                           <a:solidFill>
                             <a:srgbClr val="1F2A44"/>
                           </a:solidFill>
@@ -10483,7 +12177,7 @@
                     <a:p>
                       <a:pPr algn="r"/>
                       <a:r>
-                        <a:rPr sz="1050" b="1" i="0">
+                        <a:rPr sz="850" b="1" i="0">
                           <a:solidFill>
                             <a:srgbClr val="1F2A44"/>
                           </a:solidFill>
@@ -10507,7 +12201,7 @@
                     <a:p>
                       <a:pPr algn="r"/>
                       <a:r>
-                        <a:rPr sz="1050" b="1" i="0">
+                        <a:rPr sz="850" b="1" i="0">
                           <a:solidFill>
                             <a:srgbClr val="1F2A44"/>
                           </a:solidFill>
@@ -10531,7 +12225,7 @@
                     <a:p>
                       <a:pPr algn="r"/>
                       <a:r>
-                        <a:rPr sz="1050" b="1" i="0">
+                        <a:rPr sz="850" b="1" i="0">
                           <a:solidFill>
                             <a:srgbClr val="1F2A44"/>
                           </a:solidFill>
@@ -10555,7 +12249,7 @@
                     <a:p>
                       <a:pPr algn="r"/>
                       <a:r>
-                        <a:rPr sz="1050" b="1" i="0">
+                        <a:rPr sz="850" b="1" i="0">
                           <a:solidFill>
                             <a:srgbClr val="1F2A44"/>
                           </a:solidFill>
@@ -10579,13 +12273,85 @@
                     <a:p>
                       <a:pPr algn="r"/>
                       <a:r>
-                        <a:rPr sz="1050" b="1" i="0">
+                        <a:rPr sz="850" b="1" i="0">
                           <a:solidFill>
                             <a:srgbClr val="1F2A44"/>
                           </a:solidFill>
                           <a:latin typeface="Garamond"/>
                           <a:cs typeface="Garamond"/>
                         </a:rPr>
+                        <a:t>9,091</a:t>
+                      </a:r>
+                    </a:p>
+                  </a:txBody>
+                  <a:tcPr anchor="ctr" marT="12700" marB="12700">
+                    <a:solidFill>
+                      <a:srgbClr val="FFFFFF"/>
+                    </a:solidFill>
+                  </a:tcPr>
+                </a:tc>
+                <a:tc>
+                  <a:txBody>
+                    <a:bodyPr/>
+                    <a:lstStyle/>
+                    <a:p>
+                      <a:pPr algn="r"/>
+                      <a:r>
+                        <a:rPr sz="850" b="1" i="0">
+                          <a:solidFill>
+                            <a:srgbClr val="1F2A44"/>
+                          </a:solidFill>
+                          <a:latin typeface="Garamond"/>
+                          <a:cs typeface="Garamond"/>
+                        </a:rPr>
+                        <a:t>9,584</a:t>
+                      </a:r>
+                    </a:p>
+                  </a:txBody>
+                  <a:tcPr anchor="ctr" marT="12700" marB="12700">
+                    <a:solidFill>
+                      <a:srgbClr val="FFFFFF"/>
+                    </a:solidFill>
+                  </a:tcPr>
+                </a:tc>
+                <a:tc>
+                  <a:txBody>
+                    <a:bodyPr/>
+                    <a:lstStyle/>
+                    <a:p>
+                      <a:pPr algn="r"/>
+                      <a:r>
+                        <a:rPr sz="850" b="1" i="0">
+                          <a:solidFill>
+                            <a:srgbClr val="1F2A44"/>
+                          </a:solidFill>
+                          <a:latin typeface="Garamond"/>
+                          <a:cs typeface="Garamond"/>
+                        </a:rPr>
+                        <a:t>10,153</a:t>
+                      </a:r>
+                    </a:p>
+                  </a:txBody>
+                  <a:tcPr anchor="ctr" marT="12700" marB="12700">
+                    <a:solidFill>
+                      <a:srgbClr val="FFFFFF"/>
+                    </a:solidFill>
+                  </a:tcPr>
+                </a:tc>
+                <a:tc>
+                  <a:txBody>
+                    <a:bodyPr/>
+                    <a:lstStyle/>
+                    <a:p>
+                      <a:pPr algn="r"/>
+                      <a:r>
+                        <a:rPr sz="850" b="1" i="0">
+                          <a:solidFill>
+                            <a:srgbClr val="1F2A44"/>
+                          </a:solidFill>
+                          <a:latin typeface="Garamond"/>
+                          <a:cs typeface="Garamond"/>
+                        </a:rPr>
                         <a:t>10,343</a:t>
                       </a:r>
                     </a:p>
@@ -10603,13 +12369,85 @@
                     <a:p>
                       <a:pPr algn="r"/>
                       <a:r>
-                        <a:rPr sz="1050" b="1" i="0">
+                        <a:rPr sz="850" b="1" i="0">
                           <a:solidFill>
                             <a:srgbClr val="1F2A44"/>
                           </a:solidFill>
                           <a:latin typeface="Garamond"/>
                           <a:cs typeface="Garamond"/>
                         </a:rPr>
+                        <a:t>11,354</a:t>
+                      </a:r>
+                    </a:p>
+                  </a:txBody>
+                  <a:tcPr anchor="ctr" marT="12700" marB="12700">
+                    <a:solidFill>
+                      <a:srgbClr val="FFFFFF"/>
+                    </a:solidFill>
+                  </a:tcPr>
+                </a:tc>
+                <a:tc>
+                  <a:txBody>
+                    <a:bodyPr/>
+                    <a:lstStyle/>
+                    <a:p>
+                      <a:pPr algn="r"/>
+                      <a:r>
+                        <a:rPr sz="850" b="1" i="0">
+                          <a:solidFill>
+                            <a:srgbClr val="1F2A44"/>
+                          </a:solidFill>
+                          <a:latin typeface="Garamond"/>
+                          <a:cs typeface="Garamond"/>
+                        </a:rPr>
+                        <a:t>11,170</a:t>
+                      </a:r>
+                    </a:p>
+                  </a:txBody>
+                  <a:tcPr anchor="ctr" marT="12700" marB="12700">
+                    <a:solidFill>
+                      <a:srgbClr val="FFFFFF"/>
+                    </a:solidFill>
+                  </a:tcPr>
+                </a:tc>
+                <a:tc>
+                  <a:txBody>
+                    <a:bodyPr/>
+                    <a:lstStyle/>
+                    <a:p>
+                      <a:pPr algn="r"/>
+                      <a:r>
+                        <a:rPr sz="850" b="1" i="0">
+                          <a:solidFill>
+                            <a:srgbClr val="1F2A44"/>
+                          </a:solidFill>
+                          <a:latin typeface="Garamond"/>
+                          <a:cs typeface="Garamond"/>
+                        </a:rPr>
+                        <a:t>12,704</a:t>
+                      </a:r>
+                    </a:p>
+                  </a:txBody>
+                  <a:tcPr anchor="ctr" marT="12700" marB="12700">
+                    <a:solidFill>
+                      <a:srgbClr val="FFFFFF"/>
+                    </a:solidFill>
+                  </a:tcPr>
+                </a:tc>
+                <a:tc>
+                  <a:txBody>
+                    <a:bodyPr/>
+                    <a:lstStyle/>
+                    <a:p>
+                      <a:pPr algn="r"/>
+                      <a:r>
+                        <a:rPr sz="850" b="1" i="0">
+                          <a:solidFill>
+                            <a:srgbClr val="1F2A44"/>
+                          </a:solidFill>
+                          <a:latin typeface="Garamond"/>
+                          <a:cs typeface="Garamond"/>
+                        </a:rPr>
                         <a:t>12,067</a:t>
                       </a:r>
                     </a:p>
@@ -10620,8 +12458,32 @@
                     </a:solidFill>
                   </a:tcPr>
                 </a:tc>
+                <a:tc>
+                  <a:txBody>
+                    <a:bodyPr/>
+                    <a:lstStyle/>
+                    <a:p>
+                      <a:pPr algn="r"/>
+                      <a:r>
+                        <a:rPr sz="850" b="1" i="0">
+                          <a:solidFill>
+                            <a:srgbClr val="1F2A44"/>
+                          </a:solidFill>
+                          <a:latin typeface="Garamond"/>
+                          <a:cs typeface="Garamond"/>
+                        </a:rPr>
+                        <a:t>14,221</a:t>
+                      </a:r>
+                    </a:p>
+                  </a:txBody>
+                  <a:tcPr anchor="ctr" marT="12700" marB="12700">
+                    <a:solidFill>
+                      <a:srgbClr val="FFFFFF"/>
+                    </a:solidFill>
+                  </a:tcPr>
+                </a:tc>
               </a:tr>
-              <a:tr h="485938">
+              <a:tr h="463731">
                 <a:tc>
                   <a:txBody>
                     <a:bodyPr/>
@@ -10629,7 +12491,7 @@
                     <a:p>
                       <a:pPr algn="l"/>
                       <a:r>
-                        <a:rPr sz="1050" b="0" i="0">
+                        <a:rPr sz="850" b="0" i="0">
                           <a:solidFill>
                             <a:srgbClr val="262626"/>
                           </a:solidFill>
@@ -10653,7 +12515,7 @@
                     <a:p>
                       <a:pPr algn="r"/>
                       <a:r>
-                        <a:rPr sz="1050" b="0" i="0">
+                        <a:rPr sz="850" b="0" i="0">
                           <a:solidFill>
                             <a:srgbClr val="262626"/>
                           </a:solidFill>
@@ -10677,7 +12539,7 @@
                     <a:p>
                       <a:pPr algn="r"/>
                       <a:r>
-                        <a:rPr sz="1050" b="0" i="0">
+                        <a:rPr sz="850" b="0" i="0">
                           <a:solidFill>
                             <a:srgbClr val="262626"/>
                           </a:solidFill>
@@ -10701,7 +12563,7 @@
                     <a:p>
                       <a:pPr algn="r"/>
                       <a:r>
-                        <a:rPr sz="1050" b="0" i="0">
+                        <a:rPr sz="850" b="0" i="0">
                           <a:solidFill>
                             <a:srgbClr val="262626"/>
                           </a:solidFill>
@@ -10725,7 +12587,7 @@
                     <a:p>
                       <a:pPr algn="r"/>
                       <a:r>
-                        <a:rPr sz="1050" b="0" i="0">
+                        <a:rPr sz="850" b="0" i="0">
                           <a:solidFill>
                             <a:srgbClr val="262626"/>
                           </a:solidFill>
@@ -10749,7 +12611,7 @@
                     <a:p>
                       <a:pPr algn="r"/>
                       <a:r>
-                        <a:rPr sz="1050" b="0" i="0">
+                        <a:rPr sz="850" b="0" i="0">
                           <a:solidFill>
                             <a:srgbClr val="262626"/>
                           </a:solidFill>
@@ -10773,13 +12635,85 @@
                     <a:p>
                       <a:pPr algn="r"/>
                       <a:r>
-                        <a:rPr sz="1050" b="0" i="0">
+                        <a:rPr sz="850" b="0" i="0">
                           <a:solidFill>
                             <a:srgbClr val="262626"/>
                           </a:solidFill>
                           <a:latin typeface="Garamond"/>
                           <a:cs typeface="Garamond"/>
                         </a:rPr>
+                        <a:t>3,352</a:t>
+                      </a:r>
+                    </a:p>
+                  </a:txBody>
+                  <a:tcPr anchor="ctr" marT="12700" marB="12700">
+                    <a:solidFill>
+                      <a:srgbClr val="F0F1F3"/>
+                    </a:solidFill>
+                  </a:tcPr>
+                </a:tc>
+                <a:tc>
+                  <a:txBody>
+                    <a:bodyPr/>
+                    <a:lstStyle/>
+                    <a:p>
+                      <a:pPr algn="r"/>
+                      <a:r>
+                        <a:rPr sz="850" b="0" i="0">
+                          <a:solidFill>
+                            <a:srgbClr val="262626"/>
+                          </a:solidFill>
+                          <a:latin typeface="Garamond"/>
+                          <a:cs typeface="Garamond"/>
+                        </a:rPr>
+                        <a:t>3,353</a:t>
+                      </a:r>
+                    </a:p>
+                  </a:txBody>
+                  <a:tcPr anchor="ctr" marT="12700" marB="12700">
+                    <a:solidFill>
+                      <a:srgbClr val="F0F1F3"/>
+                    </a:solidFill>
+                  </a:tcPr>
+                </a:tc>
+                <a:tc>
+                  <a:txBody>
+                    <a:bodyPr/>
+                    <a:lstStyle/>
+                    <a:p>
+                      <a:pPr algn="r"/>
+                      <a:r>
+                        <a:rPr sz="850" b="0" i="0">
+                          <a:solidFill>
+                            <a:srgbClr val="262626"/>
+                          </a:solidFill>
+                          <a:latin typeface="Garamond"/>
+                          <a:cs typeface="Garamond"/>
+                        </a:rPr>
+                        <a:t>3,552</a:t>
+                      </a:r>
+                    </a:p>
+                  </a:txBody>
+                  <a:tcPr anchor="ctr" marT="12700" marB="12700">
+                    <a:solidFill>
+                      <a:srgbClr val="F0F1F3"/>
+                    </a:solidFill>
+                  </a:tcPr>
+                </a:tc>
+                <a:tc>
+                  <a:txBody>
+                    <a:bodyPr/>
+                    <a:lstStyle/>
+                    <a:p>
+                      <a:pPr algn="r"/>
+                      <a:r>
+                        <a:rPr sz="850" b="0" i="0">
+                          <a:solidFill>
+                            <a:srgbClr val="262626"/>
+                          </a:solidFill>
+                          <a:latin typeface="Garamond"/>
+                          <a:cs typeface="Garamond"/>
+                        </a:rPr>
                         <a:t>3,429</a:t>
                       </a:r>
                     </a:p>
@@ -10797,13 +12731,85 @@
                     <a:p>
                       <a:pPr algn="r"/>
                       <a:r>
-                        <a:rPr sz="1050" b="0" i="0">
+                        <a:rPr sz="850" b="0" i="0">
                           <a:solidFill>
                             <a:srgbClr val="262626"/>
                           </a:solidFill>
                           <a:latin typeface="Garamond"/>
                           <a:cs typeface="Garamond"/>
                         </a:rPr>
+                        <a:t>3,764</a:t>
+                      </a:r>
+                    </a:p>
+                  </a:txBody>
+                  <a:tcPr anchor="ctr" marT="12700" marB="12700">
+                    <a:solidFill>
+                      <a:srgbClr val="F0F1F3"/>
+                    </a:solidFill>
+                  </a:tcPr>
+                </a:tc>
+                <a:tc>
+                  <a:txBody>
+                    <a:bodyPr/>
+                    <a:lstStyle/>
+                    <a:p>
+                      <a:pPr algn="r"/>
+                      <a:r>
+                        <a:rPr sz="850" b="0" i="0">
+                          <a:solidFill>
+                            <a:srgbClr val="262626"/>
+                          </a:solidFill>
+                          <a:latin typeface="Garamond"/>
+                          <a:cs typeface="Garamond"/>
+                        </a:rPr>
+                        <a:t>3,507</a:t>
+                      </a:r>
+                    </a:p>
+                  </a:txBody>
+                  <a:tcPr anchor="ctr" marT="12700" marB="12700">
+                    <a:solidFill>
+                      <a:srgbClr val="F0F1F3"/>
+                    </a:solidFill>
+                  </a:tcPr>
+                </a:tc>
+                <a:tc>
+                  <a:txBody>
+                    <a:bodyPr/>
+                    <a:lstStyle/>
+                    <a:p>
+                      <a:pPr algn="r"/>
+                      <a:r>
+                        <a:rPr sz="850" b="0" i="0">
+                          <a:solidFill>
+                            <a:srgbClr val="262626"/>
+                          </a:solidFill>
+                          <a:latin typeface="Garamond"/>
+                          <a:cs typeface="Garamond"/>
+                        </a:rPr>
+                        <a:t>3,989</a:t>
+                      </a:r>
+                    </a:p>
+                  </a:txBody>
+                  <a:tcPr anchor="ctr" marT="12700" marB="12700">
+                    <a:solidFill>
+                      <a:srgbClr val="F0F1F3"/>
+                    </a:solidFill>
+                  </a:tcPr>
+                </a:tc>
+                <a:tc>
+                  <a:txBody>
+                    <a:bodyPr/>
+                    <a:lstStyle/>
+                    <a:p>
+                      <a:pPr algn="r"/>
+                      <a:r>
+                        <a:rPr sz="850" b="0" i="0">
+                          <a:solidFill>
+                            <a:srgbClr val="262626"/>
+                          </a:solidFill>
+                          <a:latin typeface="Garamond"/>
+                          <a:cs typeface="Garamond"/>
+                        </a:rPr>
                         <a:t>3,586</a:t>
                       </a:r>
                     </a:p>
@@ -10814,8 +12820,32 @@
                     </a:solidFill>
                   </a:tcPr>
                 </a:tc>
+                <a:tc>
+                  <a:txBody>
+                    <a:bodyPr/>
+                    <a:lstStyle/>
+                    <a:p>
+                      <a:pPr algn="r"/>
+                      <a:r>
+                        <a:rPr sz="850" b="0" i="0">
+                          <a:solidFill>
+                            <a:srgbClr val="262626"/>
+                          </a:solidFill>
+                          <a:latin typeface="Garamond"/>
+                          <a:cs typeface="Garamond"/>
+                        </a:rPr>
+                        <a:t>4,226</a:t>
+                      </a:r>
+                    </a:p>
+                  </a:txBody>
+                  <a:tcPr anchor="ctr" marT="12700" marB="12700">
+                    <a:solidFill>
+                      <a:srgbClr val="F0F1F3"/>
+                    </a:solidFill>
+                  </a:tcPr>
+                </a:tc>
               </a:tr>
-              <a:tr h="485938">
+              <a:tr h="463731">
                 <a:tc>
                   <a:txBody>
                     <a:bodyPr/>
@@ -10823,7 +12853,7 @@
                     <a:p>
                       <a:pPr algn="l"/>
                       <a:r>
-                        <a:rPr sz="1050" b="1" i="0">
+                        <a:rPr sz="850" b="1" i="0">
                           <a:solidFill>
                             <a:srgbClr val="1F2A44"/>
                           </a:solidFill>
@@ -10847,7 +12877,7 @@
                     <a:p>
                       <a:pPr algn="r"/>
                       <a:r>
-                        <a:rPr sz="1050" b="1" i="0">
+                        <a:rPr sz="850" b="1" i="0">
                           <a:solidFill>
                             <a:srgbClr val="1F2A44"/>
                           </a:solidFill>
@@ -10871,7 +12901,7 @@
                     <a:p>
                       <a:pPr algn="r"/>
                       <a:r>
-                        <a:rPr sz="1050" b="1" i="0">
+                        <a:rPr sz="850" b="1" i="0">
                           <a:solidFill>
                             <a:srgbClr val="1F2A44"/>
                           </a:solidFill>
@@ -10895,7 +12925,7 @@
                     <a:p>
                       <a:pPr algn="r"/>
                       <a:r>
-                        <a:rPr sz="1050" b="1" i="0">
+                        <a:rPr sz="850" b="1" i="0">
                           <a:solidFill>
                             <a:srgbClr val="1F2A44"/>
                           </a:solidFill>
@@ -10919,7 +12949,7 @@
                     <a:p>
                       <a:pPr algn="r"/>
                       <a:r>
-                        <a:rPr sz="1050" b="1" i="0">
+                        <a:rPr sz="850" b="1" i="0">
                           <a:solidFill>
                             <a:srgbClr val="1F2A44"/>
                           </a:solidFill>
@@ -10943,7 +12973,7 @@
                     <a:p>
                       <a:pPr algn="r"/>
                       <a:r>
-                        <a:rPr sz="1050" b="1" i="0">
+                        <a:rPr sz="850" b="1" i="0">
                           <a:solidFill>
                             <a:srgbClr val="1F2A44"/>
                           </a:solidFill>
@@ -10967,13 +12997,85 @@
                     <a:p>
                       <a:pPr algn="r"/>
                       <a:r>
-                        <a:rPr sz="1050" b="1" i="0">
+                        <a:rPr sz="850" b="1" i="0">
                           <a:solidFill>
                             <a:srgbClr val="1F2A44"/>
                           </a:solidFill>
                           <a:latin typeface="Garamond"/>
                           <a:cs typeface="Garamond"/>
                         </a:rPr>
+                        <a:t>5,738</a:t>
+                      </a:r>
+                    </a:p>
+                  </a:txBody>
+                  <a:tcPr anchor="ctr" marT="12700" marB="12700">
+                    <a:solidFill>
+                      <a:srgbClr val="FFFFFF"/>
+                    </a:solidFill>
+                  </a:tcPr>
+                </a:tc>
+                <a:tc>
+                  <a:txBody>
+                    <a:bodyPr/>
+                    <a:lstStyle/>
+                    <a:p>
+                      <a:pPr algn="r"/>
+                      <a:r>
+                        <a:rPr sz="850" b="1" i="0">
+                          <a:solidFill>
+                            <a:srgbClr val="1F2A44"/>
+                          </a:solidFill>
+                          <a:latin typeface="Garamond"/>
+                          <a:cs typeface="Garamond"/>
+                        </a:rPr>
+                        <a:t>6,231</a:t>
+                      </a:r>
+                    </a:p>
+                  </a:txBody>
+                  <a:tcPr anchor="ctr" marT="12700" marB="12700">
+                    <a:solidFill>
+                      <a:srgbClr val="FFFFFF"/>
+                    </a:solidFill>
+                  </a:tcPr>
+                </a:tc>
+                <a:tc>
+                  <a:txBody>
+                    <a:bodyPr/>
+                    <a:lstStyle/>
+                    <a:p>
+                      <a:pPr algn="r"/>
+                      <a:r>
+                        <a:rPr sz="850" b="1" i="0">
+                          <a:solidFill>
+                            <a:srgbClr val="1F2A44"/>
+                          </a:solidFill>
+                          <a:latin typeface="Garamond"/>
+                          <a:cs typeface="Garamond"/>
+                        </a:rPr>
+                        <a:t>6,601</a:t>
+                      </a:r>
+                    </a:p>
+                  </a:txBody>
+                  <a:tcPr anchor="ctr" marT="12700" marB="12700">
+                    <a:solidFill>
+                      <a:srgbClr val="FFFFFF"/>
+                    </a:solidFill>
+                  </a:tcPr>
+                </a:tc>
+                <a:tc>
+                  <a:txBody>
+                    <a:bodyPr/>
+                    <a:lstStyle/>
+                    <a:p>
+                      <a:pPr algn="r"/>
+                      <a:r>
+                        <a:rPr sz="850" b="1" i="0">
+                          <a:solidFill>
+                            <a:srgbClr val="1F2A44"/>
+                          </a:solidFill>
+                          <a:latin typeface="Garamond"/>
+                          <a:cs typeface="Garamond"/>
+                        </a:rPr>
                         <a:t>6,914</a:t>
                       </a:r>
                     </a:p>
@@ -10991,13 +13093,85 @@
                     <a:p>
                       <a:pPr algn="r"/>
                       <a:r>
-                        <a:rPr sz="1050" b="1" i="0">
+                        <a:rPr sz="850" b="1" i="0">
                           <a:solidFill>
                             <a:srgbClr val="1F2A44"/>
                           </a:solidFill>
                           <a:latin typeface="Garamond"/>
                           <a:cs typeface="Garamond"/>
                         </a:rPr>
+                        <a:t>7,590</a:t>
+                      </a:r>
+                    </a:p>
+                  </a:txBody>
+                  <a:tcPr anchor="ctr" marT="12700" marB="12700">
+                    <a:solidFill>
+                      <a:srgbClr val="FFFFFF"/>
+                    </a:solidFill>
+                  </a:tcPr>
+                </a:tc>
+                <a:tc>
+                  <a:txBody>
+                    <a:bodyPr/>
+                    <a:lstStyle/>
+                    <a:p>
+                      <a:pPr algn="r"/>
+                      <a:r>
+                        <a:rPr sz="850" b="1" i="0">
+                          <a:solidFill>
+                            <a:srgbClr val="1F2A44"/>
+                          </a:solidFill>
+                          <a:latin typeface="Garamond"/>
+                          <a:cs typeface="Garamond"/>
+                        </a:rPr>
+                        <a:t>7,663</a:t>
+                      </a:r>
+                    </a:p>
+                  </a:txBody>
+                  <a:tcPr anchor="ctr" marT="12700" marB="12700">
+                    <a:solidFill>
+                      <a:srgbClr val="FFFFFF"/>
+                    </a:solidFill>
+                  </a:tcPr>
+                </a:tc>
+                <a:tc>
+                  <a:txBody>
+                    <a:bodyPr/>
+                    <a:lstStyle/>
+                    <a:p>
+                      <a:pPr algn="r"/>
+                      <a:r>
+                        <a:rPr sz="850" b="1" i="0">
+                          <a:solidFill>
+                            <a:srgbClr val="1F2A44"/>
+                          </a:solidFill>
+                          <a:latin typeface="Garamond"/>
+                          <a:cs typeface="Garamond"/>
+                        </a:rPr>
+                        <a:t>8,716</a:t>
+                      </a:r>
+                    </a:p>
+                  </a:txBody>
+                  <a:tcPr anchor="ctr" marT="12700" marB="12700">
+                    <a:solidFill>
+                      <a:srgbClr val="FFFFFF"/>
+                    </a:solidFill>
+                  </a:tcPr>
+                </a:tc>
+                <a:tc>
+                  <a:txBody>
+                    <a:bodyPr/>
+                    <a:lstStyle/>
+                    <a:p>
+                      <a:pPr algn="r"/>
+                      <a:r>
+                        <a:rPr sz="850" b="1" i="0">
+                          <a:solidFill>
+                            <a:srgbClr val="1F2A44"/>
+                          </a:solidFill>
+                          <a:latin typeface="Garamond"/>
+                          <a:cs typeface="Garamond"/>
+                        </a:rPr>
                         <a:t>8,481</a:t>
                       </a:r>
                     </a:p>
@@ -11008,8 +13182,32 @@
                     </a:solidFill>
                   </a:tcPr>
                 </a:tc>
+                <a:tc>
+                  <a:txBody>
+                    <a:bodyPr/>
+                    <a:lstStyle/>
+                    <a:p>
+                      <a:pPr algn="r"/>
+                      <a:r>
+                        <a:rPr sz="850" b="1" i="0">
+                          <a:solidFill>
+                            <a:srgbClr val="1F2A44"/>
+                          </a:solidFill>
+                          <a:latin typeface="Garamond"/>
+                          <a:cs typeface="Garamond"/>
+                        </a:rPr>
+                        <a:t>9,995</a:t>
+                      </a:r>
+                    </a:p>
+                  </a:txBody>
+                  <a:tcPr anchor="ctr" marT="12700" marB="12700">
+                    <a:solidFill>
+                      <a:srgbClr val="FFFFFF"/>
+                    </a:solidFill>
+                  </a:tcPr>
+                </a:tc>
               </a:tr>
-              <a:tr h="485940">
+              <a:tr h="463734">
                 <a:tc>
                   <a:txBody>
                     <a:bodyPr/>
@@ -11017,7 +13215,7 @@
                     <a:p>
                       <a:pPr algn="l"/>
                       <a:r>
-                        <a:rPr sz="1050" b="1" i="0">
+                        <a:rPr sz="850" b="1" i="0">
                           <a:solidFill>
                             <a:srgbClr val="1F2A44"/>
                           </a:solidFill>
@@ -11041,7 +13239,7 @@
                     <a:p>
                       <a:pPr algn="r"/>
                       <a:r>
-                        <a:rPr sz="1050" b="1" i="0">
+                        <a:rPr sz="850" b="1" i="0">
                           <a:solidFill>
                             <a:srgbClr val="1F2A44"/>
                           </a:solidFill>
@@ -11065,7 +13263,7 @@
                     <a:p>
                       <a:pPr algn="r"/>
                       <a:r>
-                        <a:rPr sz="1050" b="1" i="0">
+                        <a:rPr sz="850" b="1" i="0">
                           <a:solidFill>
                             <a:srgbClr val="1F2A44"/>
                           </a:solidFill>
@@ -11089,7 +13287,7 @@
                     <a:p>
                       <a:pPr algn="r"/>
                       <a:r>
-                        <a:rPr sz="1050" b="1" i="0">
+                        <a:rPr sz="850" b="1" i="0">
                           <a:solidFill>
                             <a:srgbClr val="1F2A44"/>
                           </a:solidFill>
@@ -11113,7 +13311,7 @@
                     <a:p>
                       <a:pPr algn="r"/>
                       <a:r>
-                        <a:rPr sz="1050" b="1" i="0">
+                        <a:rPr sz="850" b="1" i="0">
                           <a:solidFill>
                             <a:srgbClr val="1F2A44"/>
                           </a:solidFill>
@@ -11137,7 +13335,7 @@
                     <a:p>
                       <a:pPr algn="r"/>
                       <a:r>
-                        <a:rPr sz="1050" b="1" i="0">
+                        <a:rPr sz="850" b="1" i="0">
                           <a:solidFill>
                             <a:srgbClr val="1F2A44"/>
                           </a:solidFill>
@@ -11161,7 +13359,7 @@
                     <a:p>
                       <a:pPr algn="r"/>
                       <a:r>
-                        <a:rPr sz="1050" b="1" i="0">
+                        <a:rPr sz="850" b="1" i="0">
                           <a:solidFill>
                             <a:srgbClr val="1F2A44"/>
                           </a:solidFill>
@@ -11185,7 +13383,175 @@
                     <a:p>
                       <a:pPr algn="r"/>
                       <a:r>
-                        <a:rPr sz="1050" b="1" i="0">
+                        <a:rPr sz="850" b="1" i="0">
+                          <a:solidFill>
+                            <a:srgbClr val="1F2A44"/>
+                          </a:solidFill>
+                          <a:latin typeface="Garamond"/>
+                          <a:cs typeface="Garamond"/>
+                        </a:rPr>
+                        <a:t>0</a:t>
+                      </a:r>
+                    </a:p>
+                  </a:txBody>
+                  <a:tcPr anchor="ctr" marT="12700" marB="12700">
+                    <a:solidFill>
+                      <a:srgbClr val="F0F1F3"/>
+                    </a:solidFill>
+                  </a:tcPr>
+                </a:tc>
+                <a:tc>
+                  <a:txBody>
+                    <a:bodyPr/>
+                    <a:lstStyle/>
+                    <a:p>
+                      <a:pPr algn="r"/>
+                      <a:r>
+                        <a:rPr sz="850" b="1" i="0">
+                          <a:solidFill>
+                            <a:srgbClr val="1F2A44"/>
+                          </a:solidFill>
+                          <a:latin typeface="Garamond"/>
+                          <a:cs typeface="Garamond"/>
+                        </a:rPr>
+                        <a:t>0</a:t>
+                      </a:r>
+                    </a:p>
+                  </a:txBody>
+                  <a:tcPr anchor="ctr" marT="12700" marB="12700">
+                    <a:solidFill>
+                      <a:srgbClr val="F0F1F3"/>
+                    </a:solidFill>
+                  </a:tcPr>
+                </a:tc>
+                <a:tc>
+                  <a:txBody>
+                    <a:bodyPr/>
+                    <a:lstStyle/>
+                    <a:p>
+                      <a:pPr algn="r"/>
+                      <a:r>
+                        <a:rPr sz="850" b="1" i="0">
+                          <a:solidFill>
+                            <a:srgbClr val="1F2A44"/>
+                          </a:solidFill>
+                          <a:latin typeface="Garamond"/>
+                          <a:cs typeface="Garamond"/>
+                        </a:rPr>
+                        <a:t>0</a:t>
+                      </a:r>
+                    </a:p>
+                  </a:txBody>
+                  <a:tcPr anchor="ctr" marT="12700" marB="12700">
+                    <a:solidFill>
+                      <a:srgbClr val="F0F1F3"/>
+                    </a:solidFill>
+                  </a:tcPr>
+                </a:tc>
+                <a:tc>
+                  <a:txBody>
+                    <a:bodyPr/>
+                    <a:lstStyle/>
+                    <a:p>
+                      <a:pPr algn="r"/>
+                      <a:r>
+                        <a:rPr sz="850" b="1" i="0">
+                          <a:solidFill>
+                            <a:srgbClr val="1F2A44"/>
+                          </a:solidFill>
+                          <a:latin typeface="Garamond"/>
+                          <a:cs typeface="Garamond"/>
+                        </a:rPr>
+                        <a:t>0</a:t>
+                      </a:r>
+                    </a:p>
+                  </a:txBody>
+                  <a:tcPr anchor="ctr" marT="12700" marB="12700">
+                    <a:solidFill>
+                      <a:srgbClr val="F0F1F3"/>
+                    </a:solidFill>
+                  </a:tcPr>
+                </a:tc>
+                <a:tc>
+                  <a:txBody>
+                    <a:bodyPr/>
+                    <a:lstStyle/>
+                    <a:p>
+                      <a:pPr algn="r"/>
+                      <a:r>
+                        <a:rPr sz="850" b="1" i="0">
+                          <a:solidFill>
+                            <a:srgbClr val="1F2A44"/>
+                          </a:solidFill>
+                          <a:latin typeface="Garamond"/>
+                          <a:cs typeface="Garamond"/>
+                        </a:rPr>
+                        <a:t>0</a:t>
+                      </a:r>
+                    </a:p>
+                  </a:txBody>
+                  <a:tcPr anchor="ctr" marT="12700" marB="12700">
+                    <a:solidFill>
+                      <a:srgbClr val="F0F1F3"/>
+                    </a:solidFill>
+                  </a:tcPr>
+                </a:tc>
+                <a:tc>
+                  <a:txBody>
+                    <a:bodyPr/>
+                    <a:lstStyle/>
+                    <a:p>
+                      <a:pPr algn="r"/>
+                      <a:r>
+                        <a:rPr sz="850" b="1" i="0">
+                          <a:solidFill>
+                            <a:srgbClr val="1F2A44"/>
+                          </a:solidFill>
+                          <a:latin typeface="Garamond"/>
+                          <a:cs typeface="Garamond"/>
+                        </a:rPr>
+                        <a:t>0</a:t>
+                      </a:r>
+                    </a:p>
+                  </a:txBody>
+                  <a:tcPr anchor="ctr" marT="12700" marB="12700">
+                    <a:solidFill>
+                      <a:srgbClr val="F0F1F3"/>
+                    </a:solidFill>
+                  </a:tcPr>
+                </a:tc>
+                <a:tc>
+                  <a:txBody>
+                    <a:bodyPr/>
+                    <a:lstStyle/>
+                    <a:p>
+                      <a:pPr algn="r"/>
+                      <a:r>
+                        <a:rPr sz="850" b="1" i="0">
+                          <a:solidFill>
+                            <a:srgbClr val="1F2A44"/>
+                          </a:solidFill>
+                          <a:latin typeface="Garamond"/>
+                          <a:cs typeface="Garamond"/>
+                        </a:rPr>
+                        <a:t>0</a:t>
+                      </a:r>
+                    </a:p>
+                  </a:txBody>
+                  <a:tcPr anchor="ctr" marT="12700" marB="12700">
+                    <a:solidFill>
+                      <a:srgbClr val="F0F1F3"/>
+                    </a:solidFill>
+                  </a:tcPr>
+                </a:tc>
+                <a:tc>
+                  <a:txBody>
+                    <a:bodyPr/>
+                    <a:lstStyle/>
+                    <a:p>
+                      <a:pPr algn="r"/>
+                      <a:r>
+                        <a:rPr sz="850" b="1" i="0">
                           <a:solidFill>
                             <a:srgbClr val="1F2A44"/>
                           </a:solidFill>
@@ -11215,8 +13581,8 @@
         </p:nvSpPr>
         <p:spPr>
           <a:xfrm>
-            <a:off x="457200" y="6053328"/>
-            <a:ext cx="11292840" cy="411480"/>
+            <a:off x="457200" y="5897880"/>
+            <a:ext cx="11292840" cy="502920"/>
           </a:xfrm>
           <a:prstGeom prst="rect">
             <a:avLst/>
@@ -11239,14 +13605,14 @@
               <a:buNone/>
             </a:pPr>
             <a:r>
-              <a:rPr sz="1050" b="0" i="1">
+              <a:rPr sz="1000" b="0" i="1">
                 <a:solidFill>
                   <a:srgbClr val="8C8C8C"/>
                 </a:solidFill>
                 <a:latin typeface="Garamond"/>
                 <a:cs typeface="Garamond"/>
               </a:rPr>
-              <a:t>Projections tie to Scenarios col G for rev / margin / capex; BS detail per integrated 3-statement workbook (not DCF exit multiples).</a:t>
+              <a:t>Base BS from integrated 3-statement model. Bull BS approximated from base at bull revenue + DCF bull UFCF cash build.</a:t>
             </a:r>
           </a:p>
         </p:txBody>
@@ -11427,7 +13793,7 @@
                 <a:latin typeface="Garamond"/>
                 <a:cs typeface="Garamond"/>
               </a:rPr>
-              <a:t>Historical capital return vs base-case trough FCF (US$ M)</a:t>
+              <a:t>Historical return of capital vs base &amp; bull FCF — all FY26–30 (US$ M)</a:t>
             </a:r>
           </a:p>
         </p:txBody>
@@ -11515,7 +13881,7 @@
                 <a:latin typeface="Garamond"/>
                 <a:cs typeface="Garamond"/>
               </a:rPr>
-              <a:t>Projections = GIS base case (Scenarios column G); historicals per FY2025 10-K</a:t>
+              <a:t>Forecast: base = Scenarios col G (3-statement); bull = Scenarios col H. Historicals per FY2025 10-K.</a:t>
             </a:r>
           </a:p>
         </p:txBody>
@@ -11643,7 +14009,7 @@
                 <a:latin typeface="Garamond"/>
                 <a:cs typeface="Garamond"/>
               </a:rPr>
-              <a:t>FY25 CFO $1,603M; capex ($681M) → ~$922M FCF despite revenue deceleration</a:t>
+              <a:t>FY25 CFO $1,603M; capex ($681M) → ~$922M FCF</a:t>
             </a:r>
           </a:p>
           <a:p>
@@ -11665,7 +14031,7 @@
                 <a:latin typeface="Garamond"/>
                 <a:cs typeface="Garamond"/>
               </a:rPr>
-              <a:t>Aggressive buybacks: ($1,637M) FY24, ($1,178M) FY25 — returned most excess cash</a:t>
+              <a:t>Buybacks ($1,637M) FY24, ($1,178M) FY25</a:t>
             </a:r>
           </a:p>
           <a:p>
@@ -11687,7 +14053,7 @@
                 <a:latin typeface="Garamond"/>
                 <a:cs typeface="Garamond"/>
               </a:rPr>
-              <a:t>Historicals = reported CFS lines; no model overlay</a:t>
+              <a:t>Historicals = reported CFS; no model overlay</a:t>
             </a:r>
           </a:p>
         </p:txBody>
@@ -11749,7 +14115,7 @@
                 <a:latin typeface="Garamond"/>
                 <a:cs typeface="Garamond"/>
               </a:rPr>
-              <a:t>BASE-CASE FORECAST (FY2026E–FY2030E) — Scenarios col G</a:t>
+              <a:t>FORECAST (FY2026E–FY2030E) — base vs bull</a:t>
             </a:r>
           </a:p>
           <a:p>
@@ -11771,7 +14137,7 @@
                 <a:latin typeface="Garamond"/>
                 <a:cs typeface="Garamond"/>
               </a:rPr>
-              <a:t>FCF holds &gt;$1B in the reset year: $1,163M FY26E → $1,184M FY30E</a:t>
+              <a:t>Base FCF $1,163M → $1,184M (3-statement)</a:t>
             </a:r>
           </a:p>
           <a:p>
@@ -11793,7 +14159,7 @@
                 <a:latin typeface="Garamond"/>
                 <a:cs typeface="Garamond"/>
               </a:rPr>
-              <a:t>Capex 5.5% blend (Scenarios); D&amp;A ~4.5% of revenue — same drivers as DCF UFCF build</a:t>
+              <a:t>Bull FCF $1,281M → $1,711M (Scenarios unlevered FCF)</a:t>
             </a:r>
           </a:p>
           <a:p>
@@ -11815,7 +14181,7 @@
                 <a:latin typeface="Garamond"/>
                 <a:cs typeface="Garamond"/>
               </a:rPr>
-              <a:t>Buybacks ($500M)/yr in model — conservative vs FY24–25; SBC flows through equity, not CFS cash</a:t>
+              <a:t>Bull buybacks = 75% of UFCF; base = $500M/yr fixed in 3-statement</a:t>
             </a:r>
           </a:p>
         </p:txBody>
@@ -11830,7 +14196,7 @@
         </p:nvGraphicFramePr>
         <p:xfrm>
           <a:off x="457200" y="2578608"/>
-          <a:ext cx="11292839" cy="3401568"/>
+          <a:ext cx="11292828" cy="3246120"/>
         </p:xfrm>
         <a:graphic>
           <a:graphicData uri="http://schemas.openxmlformats.org/drawingml/2006/table">
@@ -11839,16 +14205,23 @@
                 <a:tableStyleId>{5C22544A-7EE6-4342-B048-85BDC9FD1C3A}</a:tableStyleId>
               </a:tblPr>
               <a:tblGrid>
-                <a:gridCol w="2743200"/>
-                <a:gridCol w="1221377"/>
-                <a:gridCol w="1221377"/>
-                <a:gridCol w="1221377"/>
-                <a:gridCol w="1221377"/>
-                <a:gridCol w="1221377"/>
-                <a:gridCol w="1221377"/>
-                <a:gridCol w="1221377"/>
+                <a:gridCol w="2148840"/>
+                <a:gridCol w="653142"/>
+                <a:gridCol w="653142"/>
+                <a:gridCol w="653142"/>
+                <a:gridCol w="653142"/>
+                <a:gridCol w="653142"/>
+                <a:gridCol w="653142"/>
+                <a:gridCol w="653142"/>
+                <a:gridCol w="653142"/>
+                <a:gridCol w="653142"/>
+                <a:gridCol w="653142"/>
+                <a:gridCol w="653142"/>
+                <a:gridCol w="653142"/>
+                <a:gridCol w="653142"/>
+                <a:gridCol w="653142"/>
               </a:tblGrid>
-              <a:tr h="566928">
+              <a:tr h="541020">
                 <a:tc>
                   <a:txBody>
                     <a:bodyPr/>
@@ -11983,7 +14356,7 @@
                           <a:latin typeface="Garamond"/>
                           <a:cs typeface="Garamond"/>
                         </a:rPr>
-                        <a:t>FY2026E</a:t>
+                        <a:t>6EE base</a:t>
                       </a:r>
                     </a:p>
                   </a:txBody>
@@ -12007,7 +14380,7 @@
                           <a:latin typeface="Garamond"/>
                           <a:cs typeface="Garamond"/>
                         </a:rPr>
-                        <a:t>FY2028E</a:t>
+                        <a:t>6EE bull</a:t>
                       </a:r>
                     </a:p>
                   </a:txBody>
@@ -12031,7 +14404,7 @@
                           <a:latin typeface="Garamond"/>
                           <a:cs typeface="Garamond"/>
                         </a:rPr>
-                        <a:t>FY2030E</a:t>
+                        <a:t>7EE base</a:t>
                       </a:r>
                     </a:p>
                   </a:txBody>
@@ -12041,8 +14414,176 @@
                     </a:solidFill>
                   </a:tcPr>
                 </a:tc>
+                <a:tc>
+                  <a:txBody>
+                    <a:bodyPr/>
+                    <a:lstStyle/>
+                    <a:p>
+                      <a:pPr algn="r"/>
+                      <a:r>
+                        <a:rPr sz="1100" b="1" i="0">
+                          <a:solidFill>
+                            <a:srgbClr val="FFFFFF"/>
+                          </a:solidFill>
+                          <a:latin typeface="Garamond"/>
+                          <a:cs typeface="Garamond"/>
+                        </a:rPr>
+                        <a:t>7EE bull</a:t>
+                      </a:r>
+                    </a:p>
+                  </a:txBody>
+                  <a:tcPr anchor="ctr">
+                    <a:solidFill>
+                      <a:srgbClr val="1F2A44"/>
+                    </a:solidFill>
+                  </a:tcPr>
+                </a:tc>
+                <a:tc>
+                  <a:txBody>
+                    <a:bodyPr/>
+                    <a:lstStyle/>
+                    <a:p>
+                      <a:pPr algn="r"/>
+                      <a:r>
+                        <a:rPr sz="1100" b="1" i="0">
+                          <a:solidFill>
+                            <a:srgbClr val="FFFFFF"/>
+                          </a:solidFill>
+                          <a:latin typeface="Garamond"/>
+                          <a:cs typeface="Garamond"/>
+                        </a:rPr>
+                        <a:t>8EE base</a:t>
+                      </a:r>
+                    </a:p>
+                  </a:txBody>
+                  <a:tcPr anchor="ctr">
+                    <a:solidFill>
+                      <a:srgbClr val="1F2A44"/>
+                    </a:solidFill>
+                  </a:tcPr>
+                </a:tc>
+                <a:tc>
+                  <a:txBody>
+                    <a:bodyPr/>
+                    <a:lstStyle/>
+                    <a:p>
+                      <a:pPr algn="r"/>
+                      <a:r>
+                        <a:rPr sz="1100" b="1" i="0">
+                          <a:solidFill>
+                            <a:srgbClr val="FFFFFF"/>
+                          </a:solidFill>
+                          <a:latin typeface="Garamond"/>
+                          <a:cs typeface="Garamond"/>
+                        </a:rPr>
+                        <a:t>8EE bull</a:t>
+                      </a:r>
+                    </a:p>
+                  </a:txBody>
+                  <a:tcPr anchor="ctr">
+                    <a:solidFill>
+                      <a:srgbClr val="1F2A44"/>
+                    </a:solidFill>
+                  </a:tcPr>
+                </a:tc>
+                <a:tc>
+                  <a:txBody>
+                    <a:bodyPr/>
+                    <a:lstStyle/>
+                    <a:p>
+                      <a:pPr algn="r"/>
+                      <a:r>
+                        <a:rPr sz="1100" b="1" i="0">
+                          <a:solidFill>
+                            <a:srgbClr val="FFFFFF"/>
+                          </a:solidFill>
+                          <a:latin typeface="Garamond"/>
+                          <a:cs typeface="Garamond"/>
+                        </a:rPr>
+                        <a:t>9EE base</a:t>
+                      </a:r>
+                    </a:p>
+                  </a:txBody>
+                  <a:tcPr anchor="ctr">
+                    <a:solidFill>
+                      <a:srgbClr val="1F2A44"/>
+                    </a:solidFill>
+                  </a:tcPr>
+                </a:tc>
+                <a:tc>
+                  <a:txBody>
+                    <a:bodyPr/>
+                    <a:lstStyle/>
+                    <a:p>
+                      <a:pPr algn="r"/>
+                      <a:r>
+                        <a:rPr sz="1100" b="1" i="0">
+                          <a:solidFill>
+                            <a:srgbClr val="FFFFFF"/>
+                          </a:solidFill>
+                          <a:latin typeface="Garamond"/>
+                          <a:cs typeface="Garamond"/>
+                        </a:rPr>
+                        <a:t>9EE bull</a:t>
+                      </a:r>
+                    </a:p>
+                  </a:txBody>
+                  <a:tcPr anchor="ctr">
+                    <a:solidFill>
+                      <a:srgbClr val="1F2A44"/>
+                    </a:solidFill>
+                  </a:tcPr>
+                </a:tc>
+                <a:tc>
+                  <a:txBody>
+                    <a:bodyPr/>
+                    <a:lstStyle/>
+                    <a:p>
+                      <a:pPr algn="r"/>
+                      <a:r>
+                        <a:rPr sz="1100" b="1" i="0">
+                          <a:solidFill>
+                            <a:srgbClr val="FFFFFF"/>
+                          </a:solidFill>
+                          <a:latin typeface="Garamond"/>
+                          <a:cs typeface="Garamond"/>
+                        </a:rPr>
+                        <a:t>0EE base</a:t>
+                      </a:r>
+                    </a:p>
+                  </a:txBody>
+                  <a:tcPr anchor="ctr">
+                    <a:solidFill>
+                      <a:srgbClr val="1F2A44"/>
+                    </a:solidFill>
+                  </a:tcPr>
+                </a:tc>
+                <a:tc>
+                  <a:txBody>
+                    <a:bodyPr/>
+                    <a:lstStyle/>
+                    <a:p>
+                      <a:pPr algn="r"/>
+                      <a:r>
+                        <a:rPr sz="1100" b="1" i="0">
+                          <a:solidFill>
+                            <a:srgbClr val="FFFFFF"/>
+                          </a:solidFill>
+                          <a:latin typeface="Garamond"/>
+                          <a:cs typeface="Garamond"/>
+                        </a:rPr>
+                        <a:t>0EE bull</a:t>
+                      </a:r>
+                    </a:p>
+                  </a:txBody>
+                  <a:tcPr anchor="ctr">
+                    <a:solidFill>
+                      <a:srgbClr val="1F2A44"/>
+                    </a:solidFill>
+                  </a:tcPr>
+                </a:tc>
               </a:tr>
-              <a:tr h="566928">
+              <a:tr h="541020">
                 <a:tc>
                   <a:txBody>
                     <a:bodyPr/>
@@ -12050,7 +14591,7 @@
                     <a:p>
                       <a:pPr algn="l"/>
                       <a:r>
-                        <a:rPr sz="1050" b="0" i="0">
+                        <a:rPr sz="850" b="0" i="0">
                           <a:solidFill>
                             <a:srgbClr val="262626"/>
                           </a:solidFill>
@@ -12074,7 +14615,7 @@
                     <a:p>
                       <a:pPr algn="r"/>
                       <a:r>
-                        <a:rPr sz="1050" b="0" i="0">
+                        <a:rPr sz="850" b="0" i="0">
                           <a:solidFill>
                             <a:srgbClr val="262626"/>
                           </a:solidFill>
@@ -12098,7 +14639,7 @@
                     <a:p>
                       <a:pPr algn="r"/>
                       <a:r>
-                        <a:rPr sz="1050" b="0" i="0">
+                        <a:rPr sz="850" b="0" i="0">
                           <a:solidFill>
                             <a:srgbClr val="262626"/>
                           </a:solidFill>
@@ -12122,7 +14663,7 @@
                     <a:p>
                       <a:pPr algn="r"/>
                       <a:r>
-                        <a:rPr sz="1050" b="0" i="0">
+                        <a:rPr sz="850" b="0" i="0">
                           <a:solidFill>
                             <a:srgbClr val="262626"/>
                           </a:solidFill>
@@ -12146,7 +14687,7 @@
                     <a:p>
                       <a:pPr algn="r"/>
                       <a:r>
-                        <a:rPr sz="1050" b="0" i="0">
+                        <a:rPr sz="850" b="0" i="0">
                           <a:solidFill>
                             <a:srgbClr val="262626"/>
                           </a:solidFill>
@@ -12170,7 +14711,7 @@
                     <a:p>
                       <a:pPr algn="r"/>
                       <a:r>
-                        <a:rPr sz="1050" b="0" i="0">
+                        <a:rPr sz="850" b="0" i="0">
                           <a:solidFill>
                             <a:srgbClr val="262626"/>
                           </a:solidFill>
@@ -12194,13 +14735,85 @@
                     <a:p>
                       <a:pPr algn="r"/>
                       <a:r>
-                        <a:rPr sz="1050" b="0" i="0">
+                        <a:rPr sz="850" b="0" i="0">
                           <a:solidFill>
                             <a:srgbClr val="262626"/>
                           </a:solidFill>
                           <a:latin typeface="Garamond"/>
                           <a:cs typeface="Garamond"/>
                         </a:rPr>
+                        <a:t>1,761</a:t>
+                      </a:r>
+                    </a:p>
+                  </a:txBody>
+                  <a:tcPr anchor="ctr" marT="12700" marB="12700">
+                    <a:solidFill>
+                      <a:srgbClr val="FFFFFF"/>
+                    </a:solidFill>
+                  </a:tcPr>
+                </a:tc>
+                <a:tc>
+                  <a:txBody>
+                    <a:bodyPr/>
+                    <a:lstStyle/>
+                    <a:p>
+                      <a:pPr algn="r"/>
+                      <a:r>
+                        <a:rPr sz="850" b="0" i="0">
+                          <a:solidFill>
+                            <a:srgbClr val="262626"/>
+                          </a:solidFill>
+                          <a:latin typeface="Garamond"/>
+                          <a:cs typeface="Garamond"/>
+                        </a:rPr>
+                        <a:t>1,602</a:t>
+                      </a:r>
+                    </a:p>
+                  </a:txBody>
+                  <a:tcPr anchor="ctr" marT="12700" marB="12700">
+                    <a:solidFill>
+                      <a:srgbClr val="FFFFFF"/>
+                    </a:solidFill>
+                  </a:tcPr>
+                </a:tc>
+                <a:tc>
+                  <a:txBody>
+                    <a:bodyPr/>
+                    <a:lstStyle/>
+                    <a:p>
+                      <a:pPr algn="r"/>
+                      <a:r>
+                        <a:rPr sz="850" b="0" i="0">
+                          <a:solidFill>
+                            <a:srgbClr val="262626"/>
+                          </a:solidFill>
+                          <a:latin typeface="Garamond"/>
+                          <a:cs typeface="Garamond"/>
+                        </a:rPr>
+                        <a:t>1,681</a:t>
+                      </a:r>
+                    </a:p>
+                  </a:txBody>
+                  <a:tcPr anchor="ctr" marT="12700" marB="12700">
+                    <a:solidFill>
+                      <a:srgbClr val="FFFFFF"/>
+                    </a:solidFill>
+                  </a:tcPr>
+                </a:tc>
+                <a:tc>
+                  <a:txBody>
+                    <a:bodyPr/>
+                    <a:lstStyle/>
+                    <a:p>
+                      <a:pPr algn="r"/>
+                      <a:r>
+                        <a:rPr sz="850" b="0" i="0">
+                          <a:solidFill>
+                            <a:srgbClr val="262626"/>
+                          </a:solidFill>
+                          <a:latin typeface="Garamond"/>
+                          <a:cs typeface="Garamond"/>
+                        </a:rPr>
                         <a:t>1,677</a:t>
                       </a:r>
                     </a:p>
@@ -12218,13 +14831,85 @@
                     <a:p>
                       <a:pPr algn="r"/>
                       <a:r>
-                        <a:rPr sz="1050" b="0" i="0">
+                        <a:rPr sz="850" b="0" i="0">
                           <a:solidFill>
                             <a:srgbClr val="262626"/>
                           </a:solidFill>
                           <a:latin typeface="Garamond"/>
                           <a:cs typeface="Garamond"/>
                         </a:rPr>
+                        <a:t>1,875</a:t>
+                      </a:r>
+                    </a:p>
+                  </a:txBody>
+                  <a:tcPr anchor="ctr" marT="12700" marB="12700">
+                    <a:solidFill>
+                      <a:srgbClr val="FFFFFF"/>
+                    </a:solidFill>
+                  </a:tcPr>
+                </a:tc>
+                <a:tc>
+                  <a:txBody>
+                    <a:bodyPr/>
+                    <a:lstStyle/>
+                    <a:p>
+                      <a:pPr algn="r"/>
+                      <a:r>
+                        <a:rPr sz="850" b="0" i="0">
+                          <a:solidFill>
+                            <a:srgbClr val="262626"/>
+                          </a:solidFill>
+                          <a:latin typeface="Garamond"/>
+                          <a:cs typeface="Garamond"/>
+                        </a:rPr>
+                        <a:t>1,732</a:t>
+                      </a:r>
+                    </a:p>
+                  </a:txBody>
+                  <a:tcPr anchor="ctr" marT="12700" marB="12700">
+                    <a:solidFill>
+                      <a:srgbClr val="FFFFFF"/>
+                    </a:solidFill>
+                  </a:tcPr>
+                </a:tc>
+                <a:tc>
+                  <a:txBody>
+                    <a:bodyPr/>
+                    <a:lstStyle/>
+                    <a:p>
+                      <a:pPr algn="r"/>
+                      <a:r>
+                        <a:rPr sz="850" b="0" i="0">
+                          <a:solidFill>
+                            <a:srgbClr val="262626"/>
+                          </a:solidFill>
+                          <a:latin typeface="Garamond"/>
+                          <a:cs typeface="Garamond"/>
+                        </a:rPr>
+                        <a:t>2,087</a:t>
+                      </a:r>
+                    </a:p>
+                  </a:txBody>
+                  <a:tcPr anchor="ctr" marT="12700" marB="12700">
+                    <a:solidFill>
+                      <a:srgbClr val="FFFFFF"/>
+                    </a:solidFill>
+                  </a:tcPr>
+                </a:tc>
+                <a:tc>
+                  <a:txBody>
+                    <a:bodyPr/>
+                    <a:lstStyle/>
+                    <a:p>
+                      <a:pPr algn="r"/>
+                      <a:r>
+                        <a:rPr sz="850" b="0" i="0">
+                          <a:solidFill>
+                            <a:srgbClr val="262626"/>
+                          </a:solidFill>
+                          <a:latin typeface="Garamond"/>
+                          <a:cs typeface="Garamond"/>
+                        </a:rPr>
                         <a:t>1,812</a:t>
                       </a:r>
                     </a:p>
@@ -12235,8 +14920,32 @@
                     </a:solidFill>
                   </a:tcPr>
                 </a:tc>
+                <a:tc>
+                  <a:txBody>
+                    <a:bodyPr/>
+                    <a:lstStyle/>
+                    <a:p>
+                      <a:pPr algn="r"/>
+                      <a:r>
+                        <a:rPr sz="850" b="0" i="0">
+                          <a:solidFill>
+                            <a:srgbClr val="262626"/>
+                          </a:solidFill>
+                          <a:latin typeface="Garamond"/>
+                          <a:cs typeface="Garamond"/>
+                        </a:rPr>
+                        <a:t>2,316</a:t>
+                      </a:r>
+                    </a:p>
+                  </a:txBody>
+                  <a:tcPr anchor="ctr" marT="12700" marB="12700">
+                    <a:solidFill>
+                      <a:srgbClr val="FFFFFF"/>
+                    </a:solidFill>
+                  </a:tcPr>
+                </a:tc>
               </a:tr>
-              <a:tr h="566928">
+              <a:tr h="541020">
                 <a:tc>
                   <a:txBody>
                     <a:bodyPr/>
@@ -12244,7 +14953,7 @@
                     <a:p>
                       <a:pPr algn="l"/>
                       <a:r>
-                        <a:rPr sz="1050" b="0" i="0">
+                        <a:rPr sz="850" b="0" i="0">
                           <a:solidFill>
                             <a:srgbClr val="262626"/>
                           </a:solidFill>
@@ -12268,7 +14977,7 @@
                     <a:p>
                       <a:pPr algn="r"/>
                       <a:r>
-                        <a:rPr sz="1050" b="0" i="0">
+                        <a:rPr sz="850" b="0" i="0">
                           <a:solidFill>
                             <a:srgbClr val="262626"/>
                           </a:solidFill>
@@ -12292,7 +15001,7 @@
                     <a:p>
                       <a:pPr algn="r"/>
                       <a:r>
-                        <a:rPr sz="1050" b="0" i="0">
+                        <a:rPr sz="850" b="0" i="0">
                           <a:solidFill>
                             <a:srgbClr val="262626"/>
                           </a:solidFill>
@@ -12316,7 +15025,7 @@
                     <a:p>
                       <a:pPr algn="r"/>
                       <a:r>
-                        <a:rPr sz="1050" b="0" i="0">
+                        <a:rPr sz="850" b="0" i="0">
                           <a:solidFill>
                             <a:srgbClr val="262626"/>
                           </a:solidFill>
@@ -12340,7 +15049,7 @@
                     <a:p>
                       <a:pPr algn="r"/>
                       <a:r>
-                        <a:rPr sz="1050" b="0" i="0">
+                        <a:rPr sz="850" b="0" i="0">
                           <a:solidFill>
                             <a:srgbClr val="262626"/>
                           </a:solidFill>
@@ -12364,7 +15073,7 @@
                     <a:p>
                       <a:pPr algn="r"/>
                       <a:r>
-                        <a:rPr sz="1050" b="0" i="0">
+                        <a:rPr sz="850" b="0" i="0">
                           <a:solidFill>
                             <a:srgbClr val="262626"/>
                           </a:solidFill>
@@ -12388,13 +15097,85 @@
                     <a:p>
                       <a:pPr algn="r"/>
                       <a:r>
-                        <a:rPr sz="1050" b="0" i="0">
+                        <a:rPr sz="850" b="0" i="0">
                           <a:solidFill>
                             <a:srgbClr val="262626"/>
                           </a:solidFill>
                           <a:latin typeface="Garamond"/>
                           <a:cs typeface="Garamond"/>
                         </a:rPr>
+                        <a:t>(480)</a:t>
+                      </a:r>
+                    </a:p>
+                  </a:txBody>
+                  <a:tcPr anchor="ctr" marT="12700" marB="12700">
+                    <a:solidFill>
+                      <a:srgbClr val="F0F1F3"/>
+                    </a:solidFill>
+                  </a:tcPr>
+                </a:tc>
+                <a:tc>
+                  <a:txBody>
+                    <a:bodyPr/>
+                    <a:lstStyle/>
+                    <a:p>
+                      <a:pPr algn="r"/>
+                      <a:r>
+                        <a:rPr sz="850" b="0" i="0">
+                          <a:solidFill>
+                            <a:srgbClr val="262626"/>
+                          </a:solidFill>
+                          <a:latin typeface="Garamond"/>
+                          <a:cs typeface="Garamond"/>
+                        </a:rPr>
+                        <a:t>(587)</a:t>
+                      </a:r>
+                    </a:p>
+                  </a:txBody>
+                  <a:tcPr anchor="ctr" marT="12700" marB="12700">
+                    <a:solidFill>
+                      <a:srgbClr val="F0F1F3"/>
+                    </a:solidFill>
+                  </a:tcPr>
+                </a:tc>
+                <a:tc>
+                  <a:txBody>
+                    <a:bodyPr/>
+                    <a:lstStyle/>
+                    <a:p>
+                      <a:pPr algn="r"/>
+                      <a:r>
+                        <a:rPr sz="850" b="0" i="0">
+                          <a:solidFill>
+                            <a:srgbClr val="262626"/>
+                          </a:solidFill>
+                          <a:latin typeface="Garamond"/>
+                          <a:cs typeface="Garamond"/>
+                        </a:rPr>
+                        <a:t>(508)</a:t>
+                      </a:r>
+                    </a:p>
+                  </a:txBody>
+                  <a:tcPr anchor="ctr" marT="12700" marB="12700">
+                    <a:solidFill>
+                      <a:srgbClr val="F0F1F3"/>
+                    </a:solidFill>
+                  </a:tcPr>
+                </a:tc>
+                <a:tc>
+                  <a:txBody>
+                    <a:bodyPr/>
+                    <a:lstStyle/>
+                    <a:p>
+                      <a:pPr algn="r"/>
+                      <a:r>
+                        <a:rPr sz="850" b="0" i="0">
+                          <a:solidFill>
+                            <a:srgbClr val="262626"/>
+                          </a:solidFill>
+                          <a:latin typeface="Garamond"/>
+                          <a:cs typeface="Garamond"/>
+                        </a:rPr>
                         <a:t>(600)</a:t>
                       </a:r>
                     </a:p>
@@ -12412,13 +15193,85 @@
                     <a:p>
                       <a:pPr algn="r"/>
                       <a:r>
-                        <a:rPr sz="1050" b="0" i="0">
+                        <a:rPr sz="850" b="0" i="0">
                           <a:solidFill>
                             <a:srgbClr val="262626"/>
                           </a:solidFill>
                           <a:latin typeface="Garamond"/>
                           <a:cs typeface="Garamond"/>
                         </a:rPr>
+                        <a:t>(539)</a:t>
+                      </a:r>
+                    </a:p>
+                  </a:txBody>
+                  <a:tcPr anchor="ctr" marT="12700" marB="12700">
+                    <a:solidFill>
+                      <a:srgbClr val="F0F1F3"/>
+                    </a:solidFill>
+                  </a:tcPr>
+                </a:tc>
+                <a:tc>
+                  <a:txBody>
+                    <a:bodyPr/>
+                    <a:lstStyle/>
+                    <a:p>
+                      <a:pPr algn="r"/>
+                      <a:r>
+                        <a:rPr sz="850" b="0" i="0">
+                          <a:solidFill>
+                            <a:srgbClr val="262626"/>
+                          </a:solidFill>
+                          <a:latin typeface="Garamond"/>
+                          <a:cs typeface="Garamond"/>
+                        </a:rPr>
+                        <a:t>(614)</a:t>
+                      </a:r>
+                    </a:p>
+                  </a:txBody>
+                  <a:tcPr anchor="ctr" marT="12700" marB="12700">
+                    <a:solidFill>
+                      <a:srgbClr val="F0F1F3"/>
+                    </a:solidFill>
+                  </a:tcPr>
+                </a:tc>
+                <a:tc>
+                  <a:txBody>
+                    <a:bodyPr/>
+                    <a:lstStyle/>
+                    <a:p>
+                      <a:pPr algn="r"/>
+                      <a:r>
+                        <a:rPr sz="850" b="0" i="0">
+                          <a:solidFill>
+                            <a:srgbClr val="262626"/>
+                          </a:solidFill>
+                          <a:latin typeface="Garamond"/>
+                          <a:cs typeface="Garamond"/>
+                        </a:rPr>
+                        <a:t>(571)</a:t>
+                      </a:r>
+                    </a:p>
+                  </a:txBody>
+                  <a:tcPr anchor="ctr" marT="12700" marB="12700">
+                    <a:solidFill>
+                      <a:srgbClr val="F0F1F3"/>
+                    </a:solidFill>
+                  </a:tcPr>
+                </a:tc>
+                <a:tc>
+                  <a:txBody>
+                    <a:bodyPr/>
+                    <a:lstStyle/>
+                    <a:p>
+                      <a:pPr algn="r"/>
+                      <a:r>
+                        <a:rPr sz="850" b="0" i="0">
+                          <a:solidFill>
+                            <a:srgbClr val="262626"/>
+                          </a:solidFill>
+                          <a:latin typeface="Garamond"/>
+                          <a:cs typeface="Garamond"/>
+                        </a:rPr>
                         <a:t>(628)</a:t>
                       </a:r>
                     </a:p>
@@ -12429,8 +15282,32 @@
                     </a:solidFill>
                   </a:tcPr>
                 </a:tc>
+                <a:tc>
+                  <a:txBody>
+                    <a:bodyPr/>
+                    <a:lstStyle/>
+                    <a:p>
+                      <a:pPr algn="r"/>
+                      <a:r>
+                        <a:rPr sz="850" b="0" i="0">
+                          <a:solidFill>
+                            <a:srgbClr val="262626"/>
+                          </a:solidFill>
+                          <a:latin typeface="Garamond"/>
+                          <a:cs typeface="Garamond"/>
+                        </a:rPr>
+                        <a:t>(606)</a:t>
+                      </a:r>
+                    </a:p>
+                  </a:txBody>
+                  <a:tcPr anchor="ctr" marT="12700" marB="12700">
+                    <a:solidFill>
+                      <a:srgbClr val="F0F1F3"/>
+                    </a:solidFill>
+                  </a:tcPr>
+                </a:tc>
               </a:tr>
-              <a:tr h="566928">
+              <a:tr h="541020">
                 <a:tc>
                   <a:txBody>
                     <a:bodyPr/>
@@ -12438,7 +15315,7 @@
                     <a:p>
                       <a:pPr algn="l"/>
                       <a:r>
-                        <a:rPr sz="1050" b="1" i="0">
+                        <a:rPr sz="850" b="1" i="0">
                           <a:solidFill>
                             <a:srgbClr val="1F2A44"/>
                           </a:solidFill>
@@ -12462,7 +15339,7 @@
                     <a:p>
                       <a:pPr algn="r"/>
                       <a:r>
-                        <a:rPr sz="1050" b="1" i="0">
+                        <a:rPr sz="850" b="1" i="0">
                           <a:solidFill>
                             <a:srgbClr val="1F2A44"/>
                           </a:solidFill>
@@ -12486,7 +15363,7 @@
                     <a:p>
                       <a:pPr algn="r"/>
                       <a:r>
-                        <a:rPr sz="1050" b="1" i="0">
+                        <a:rPr sz="850" b="1" i="0">
                           <a:solidFill>
                             <a:srgbClr val="1F2A44"/>
                           </a:solidFill>
@@ -12510,7 +15387,7 @@
                     <a:p>
                       <a:pPr algn="r"/>
                       <a:r>
-                        <a:rPr sz="1050" b="1" i="0">
+                        <a:rPr sz="850" b="1" i="0">
                           <a:solidFill>
                             <a:srgbClr val="1F2A44"/>
                           </a:solidFill>
@@ -12534,7 +15411,7 @@
                     <a:p>
                       <a:pPr algn="r"/>
                       <a:r>
-                        <a:rPr sz="1050" b="1" i="0">
+                        <a:rPr sz="850" b="1" i="0">
                           <a:solidFill>
                             <a:srgbClr val="1F2A44"/>
                           </a:solidFill>
@@ -12558,7 +15435,7 @@
                     <a:p>
                       <a:pPr algn="r"/>
                       <a:r>
-                        <a:rPr sz="1050" b="1" i="0">
+                        <a:rPr sz="850" b="1" i="0">
                           <a:solidFill>
                             <a:srgbClr val="1F2A44"/>
                           </a:solidFill>
@@ -12582,13 +15459,85 @@
                     <a:p>
                       <a:pPr algn="r"/>
                       <a:r>
-                        <a:rPr sz="1050" b="1" i="0">
+                        <a:rPr sz="850" b="1" i="0">
                           <a:solidFill>
                             <a:srgbClr val="1F2A44"/>
                           </a:solidFill>
                           <a:latin typeface="Garamond"/>
                           <a:cs typeface="Garamond"/>
                         </a:rPr>
+                        <a:t>1,281</a:t>
+                      </a:r>
+                    </a:p>
+                  </a:txBody>
+                  <a:tcPr anchor="ctr" marT="12700" marB="12700">
+                    <a:solidFill>
+                      <a:srgbClr val="FFFFFF"/>
+                    </a:solidFill>
+                  </a:tcPr>
+                </a:tc>
+                <a:tc>
+                  <a:txBody>
+                    <a:bodyPr/>
+                    <a:lstStyle/>
+                    <a:p>
+                      <a:pPr algn="r"/>
+                      <a:r>
+                        <a:rPr sz="850" b="1" i="0">
+                          <a:solidFill>
+                            <a:srgbClr val="1F2A44"/>
+                          </a:solidFill>
+                          <a:latin typeface="Garamond"/>
+                          <a:cs typeface="Garamond"/>
+                        </a:rPr>
+                        <a:t>1,015</a:t>
+                      </a:r>
+                    </a:p>
+                  </a:txBody>
+                  <a:tcPr anchor="ctr" marT="12700" marB="12700">
+                    <a:solidFill>
+                      <a:srgbClr val="FFFFFF"/>
+                    </a:solidFill>
+                  </a:tcPr>
+                </a:tc>
+                <a:tc>
+                  <a:txBody>
+                    <a:bodyPr/>
+                    <a:lstStyle/>
+                    <a:p>
+                      <a:pPr algn="r"/>
+                      <a:r>
+                        <a:rPr sz="850" b="1" i="0">
+                          <a:solidFill>
+                            <a:srgbClr val="1F2A44"/>
+                          </a:solidFill>
+                          <a:latin typeface="Garamond"/>
+                          <a:cs typeface="Garamond"/>
+                        </a:rPr>
+                        <a:t>1,173</a:t>
+                      </a:r>
+                    </a:p>
+                  </a:txBody>
+                  <a:tcPr anchor="ctr" marT="12700" marB="12700">
+                    <a:solidFill>
+                      <a:srgbClr val="FFFFFF"/>
+                    </a:solidFill>
+                  </a:tcPr>
+                </a:tc>
+                <a:tc>
+                  <a:txBody>
+                    <a:bodyPr/>
+                    <a:lstStyle/>
+                    <a:p>
+                      <a:pPr algn="r"/>
+                      <a:r>
+                        <a:rPr sz="850" b="1" i="0">
+                          <a:solidFill>
+                            <a:srgbClr val="1F2A44"/>
+                          </a:solidFill>
+                          <a:latin typeface="Garamond"/>
+                          <a:cs typeface="Garamond"/>
+                        </a:rPr>
                         <a:t>1,077</a:t>
                       </a:r>
                     </a:p>
@@ -12606,13 +15555,85 @@
                     <a:p>
                       <a:pPr algn="r"/>
                       <a:r>
-                        <a:rPr sz="1050" b="1" i="0">
+                        <a:rPr sz="850" b="1" i="0">
                           <a:solidFill>
                             <a:srgbClr val="1F2A44"/>
                           </a:solidFill>
                           <a:latin typeface="Garamond"/>
                           <a:cs typeface="Garamond"/>
                         </a:rPr>
+                        <a:t>1,336</a:t>
+                      </a:r>
+                    </a:p>
+                  </a:txBody>
+                  <a:tcPr anchor="ctr" marT="12700" marB="12700">
+                    <a:solidFill>
+                      <a:srgbClr val="FFFFFF"/>
+                    </a:solidFill>
+                  </a:tcPr>
+                </a:tc>
+                <a:tc>
+                  <a:txBody>
+                    <a:bodyPr/>
+                    <a:lstStyle/>
+                    <a:p>
+                      <a:pPr algn="r"/>
+                      <a:r>
+                        <a:rPr sz="850" b="1" i="0">
+                          <a:solidFill>
+                            <a:srgbClr val="1F2A44"/>
+                          </a:solidFill>
+                          <a:latin typeface="Garamond"/>
+                          <a:cs typeface="Garamond"/>
+                        </a:rPr>
+                        <a:t>1,118</a:t>
+                      </a:r>
+                    </a:p>
+                  </a:txBody>
+                  <a:tcPr anchor="ctr" marT="12700" marB="12700">
+                    <a:solidFill>
+                      <a:srgbClr val="FFFFFF"/>
+                    </a:solidFill>
+                  </a:tcPr>
+                </a:tc>
+                <a:tc>
+                  <a:txBody>
+                    <a:bodyPr/>
+                    <a:lstStyle/>
+                    <a:p>
+                      <a:pPr algn="r"/>
+                      <a:r>
+                        <a:rPr sz="850" b="1" i="0">
+                          <a:solidFill>
+                            <a:srgbClr val="1F2A44"/>
+                          </a:solidFill>
+                          <a:latin typeface="Garamond"/>
+                          <a:cs typeface="Garamond"/>
+                        </a:rPr>
+                        <a:t>1,515</a:t>
+                      </a:r>
+                    </a:p>
+                  </a:txBody>
+                  <a:tcPr anchor="ctr" marT="12700" marB="12700">
+                    <a:solidFill>
+                      <a:srgbClr val="FFFFFF"/>
+                    </a:solidFill>
+                  </a:tcPr>
+                </a:tc>
+                <a:tc>
+                  <a:txBody>
+                    <a:bodyPr/>
+                    <a:lstStyle/>
+                    <a:p>
+                      <a:pPr algn="r"/>
+                      <a:r>
+                        <a:rPr sz="850" b="1" i="0">
+                          <a:solidFill>
+                            <a:srgbClr val="1F2A44"/>
+                          </a:solidFill>
+                          <a:latin typeface="Garamond"/>
+                          <a:cs typeface="Garamond"/>
+                        </a:rPr>
                         <a:t>1,184</a:t>
                       </a:r>
                     </a:p>
@@ -12623,8 +15644,32 @@
                     </a:solidFill>
                   </a:tcPr>
                 </a:tc>
+                <a:tc>
+                  <a:txBody>
+                    <a:bodyPr/>
+                    <a:lstStyle/>
+                    <a:p>
+                      <a:pPr algn="r"/>
+                      <a:r>
+                        <a:rPr sz="850" b="1" i="0">
+                          <a:solidFill>
+                            <a:srgbClr val="1F2A44"/>
+                          </a:solidFill>
+                          <a:latin typeface="Garamond"/>
+                          <a:cs typeface="Garamond"/>
+                        </a:rPr>
+                        <a:t>1,711</a:t>
+                      </a:r>
+                    </a:p>
+                  </a:txBody>
+                  <a:tcPr anchor="ctr" marT="12700" marB="12700">
+                    <a:solidFill>
+                      <a:srgbClr val="FFFFFF"/>
+                    </a:solidFill>
+                  </a:tcPr>
+                </a:tc>
               </a:tr>
-              <a:tr h="566928">
+              <a:tr h="541020">
                 <a:tc>
                   <a:txBody>
                     <a:bodyPr/>
@@ -12632,7 +15677,7 @@
                     <a:p>
                       <a:pPr algn="l"/>
                       <a:r>
-                        <a:rPr sz="1050" b="0" i="0">
+                        <a:rPr sz="850" b="0" i="0">
                           <a:solidFill>
                             <a:srgbClr val="262626"/>
                           </a:solidFill>
@@ -12656,7 +15701,7 @@
                     <a:p>
                       <a:pPr algn="r"/>
                       <a:r>
-                        <a:rPr sz="1050" b="0" i="0">
+                        <a:rPr sz="850" b="0" i="0">
                           <a:solidFill>
                             <a:srgbClr val="262626"/>
                           </a:solidFill>
@@ -12680,7 +15725,7 @@
                     <a:p>
                       <a:pPr algn="r"/>
                       <a:r>
-                        <a:rPr sz="1050" b="0" i="0">
+                        <a:rPr sz="850" b="0" i="0">
                           <a:solidFill>
                             <a:srgbClr val="262626"/>
                           </a:solidFill>
@@ -12704,7 +15749,7 @@
                     <a:p>
                       <a:pPr algn="r"/>
                       <a:r>
-                        <a:rPr sz="1050" b="0" i="0">
+                        <a:rPr sz="850" b="0" i="0">
                           <a:solidFill>
                             <a:srgbClr val="262626"/>
                           </a:solidFill>
@@ -12728,7 +15773,7 @@
                     <a:p>
                       <a:pPr algn="r"/>
                       <a:r>
-                        <a:rPr sz="1050" b="0" i="0">
+                        <a:rPr sz="850" b="0" i="0">
                           <a:solidFill>
                             <a:srgbClr val="262626"/>
                           </a:solidFill>
@@ -12752,7 +15797,7 @@
                     <a:p>
                       <a:pPr algn="r"/>
                       <a:r>
-                        <a:rPr sz="1050" b="0" i="0">
+                        <a:rPr sz="850" b="0" i="0">
                           <a:solidFill>
                             <a:srgbClr val="262626"/>
                           </a:solidFill>
@@ -12776,13 +15821,37 @@
                     <a:p>
                       <a:pPr algn="r"/>
                       <a:r>
-                        <a:rPr sz="1050" b="0" i="0">
+                        <a:rPr sz="850" b="0" i="0">
                           <a:solidFill>
                             <a:srgbClr val="262626"/>
                           </a:solidFill>
                           <a:latin typeface="Garamond"/>
                           <a:cs typeface="Garamond"/>
                         </a:rPr>
+                        <a:t>(960,922)</a:t>
+                      </a:r>
+                    </a:p>
+                  </a:txBody>
+                  <a:tcPr anchor="ctr" marT="12700" marB="12700">
+                    <a:solidFill>
+                      <a:srgbClr val="F0F1F3"/>
+                    </a:solidFill>
+                  </a:tcPr>
+                </a:tc>
+                <a:tc>
+                  <a:txBody>
+                    <a:bodyPr/>
+                    <a:lstStyle/>
+                    <a:p>
+                      <a:pPr algn="r"/>
+                      <a:r>
+                        <a:rPr sz="850" b="0" i="0">
+                          <a:solidFill>
+                            <a:srgbClr val="262626"/>
+                          </a:solidFill>
+                          <a:latin typeface="Garamond"/>
+                          <a:cs typeface="Garamond"/>
+                        </a:rPr>
                         <a:t>(500)</a:t>
                       </a:r>
                     </a:p>
@@ -12800,13 +15869,37 @@
                     <a:p>
                       <a:pPr algn="r"/>
                       <a:r>
-                        <a:rPr sz="1050" b="0" i="0">
+                        <a:rPr sz="850" b="0" i="0">
                           <a:solidFill>
                             <a:srgbClr val="262626"/>
                           </a:solidFill>
                           <a:latin typeface="Garamond"/>
                           <a:cs typeface="Garamond"/>
                         </a:rPr>
+                        <a:t>(879,543)</a:t>
+                      </a:r>
+                    </a:p>
+                  </a:txBody>
+                  <a:tcPr anchor="ctr" marT="12700" marB="12700">
+                    <a:solidFill>
+                      <a:srgbClr val="F0F1F3"/>
+                    </a:solidFill>
+                  </a:tcPr>
+                </a:tc>
+                <a:tc>
+                  <a:txBody>
+                    <a:bodyPr/>
+                    <a:lstStyle/>
+                    <a:p>
+                      <a:pPr algn="r"/>
+                      <a:r>
+                        <a:rPr sz="850" b="0" i="0">
+                          <a:solidFill>
+                            <a:srgbClr val="262626"/>
+                          </a:solidFill>
+                          <a:latin typeface="Garamond"/>
+                          <a:cs typeface="Garamond"/>
+                        </a:rPr>
                         <a:t>(500)</a:t>
                       </a:r>
                     </a:p>
@@ -12817,8 +15910,128 @@
                     </a:solidFill>
                   </a:tcPr>
                 </a:tc>
+                <a:tc>
+                  <a:txBody>
+                    <a:bodyPr/>
+                    <a:lstStyle/>
+                    <a:p>
+                      <a:pPr algn="r"/>
+                      <a:r>
+                        <a:rPr sz="850" b="0" i="0">
+                          <a:solidFill>
+                            <a:srgbClr val="262626"/>
+                          </a:solidFill>
+                          <a:latin typeface="Garamond"/>
+                          <a:cs typeface="Garamond"/>
+                        </a:rPr>
+                        <a:t>(1,002,364)</a:t>
+                      </a:r>
+                    </a:p>
+                  </a:txBody>
+                  <a:tcPr anchor="ctr" marT="12700" marB="12700">
+                    <a:solidFill>
+                      <a:srgbClr val="F0F1F3"/>
+                    </a:solidFill>
+                  </a:tcPr>
+                </a:tc>
+                <a:tc>
+                  <a:txBody>
+                    <a:bodyPr/>
+                    <a:lstStyle/>
+                    <a:p>
+                      <a:pPr algn="r"/>
+                      <a:r>
+                        <a:rPr sz="850" b="0" i="0">
+                          <a:solidFill>
+                            <a:srgbClr val="262626"/>
+                          </a:solidFill>
+                          <a:latin typeface="Garamond"/>
+                          <a:cs typeface="Garamond"/>
+                        </a:rPr>
+                        <a:t>(500)</a:t>
+                      </a:r>
+                    </a:p>
+                  </a:txBody>
+                  <a:tcPr anchor="ctr" marT="12700" marB="12700">
+                    <a:solidFill>
+                      <a:srgbClr val="F0F1F3"/>
+                    </a:solidFill>
+                  </a:tcPr>
+                </a:tc>
+                <a:tc>
+                  <a:txBody>
+                    <a:bodyPr/>
+                    <a:lstStyle/>
+                    <a:p>
+                      <a:pPr algn="r"/>
+                      <a:r>
+                        <a:rPr sz="850" b="0" i="0">
+                          <a:solidFill>
+                            <a:srgbClr val="262626"/>
+                          </a:solidFill>
+                          <a:latin typeface="Garamond"/>
+                          <a:cs typeface="Garamond"/>
+                        </a:rPr>
+                        <a:t>(1,136,528)</a:t>
+                      </a:r>
+                    </a:p>
+                  </a:txBody>
+                  <a:tcPr anchor="ctr" marT="12700" marB="12700">
+                    <a:solidFill>
+                      <a:srgbClr val="F0F1F3"/>
+                    </a:solidFill>
+                  </a:tcPr>
+                </a:tc>
+                <a:tc>
+                  <a:txBody>
+                    <a:bodyPr/>
+                    <a:lstStyle/>
+                    <a:p>
+                      <a:pPr algn="r"/>
+                      <a:r>
+                        <a:rPr sz="850" b="0" i="0">
+                          <a:solidFill>
+                            <a:srgbClr val="262626"/>
+                          </a:solidFill>
+                          <a:latin typeface="Garamond"/>
+                          <a:cs typeface="Garamond"/>
+                        </a:rPr>
+                        <a:t>(500)</a:t>
+                      </a:r>
+                    </a:p>
+                  </a:txBody>
+                  <a:tcPr anchor="ctr" marT="12700" marB="12700">
+                    <a:solidFill>
+                      <a:srgbClr val="F0F1F3"/>
+                    </a:solidFill>
+                  </a:tcPr>
+                </a:tc>
+                <a:tc>
+                  <a:txBody>
+                    <a:bodyPr/>
+                    <a:lstStyle/>
+                    <a:p>
+                      <a:pPr algn="r"/>
+                      <a:r>
+                        <a:rPr sz="850" b="0" i="0">
+                          <a:solidFill>
+                            <a:srgbClr val="262626"/>
+                          </a:solidFill>
+                          <a:latin typeface="Garamond"/>
+                          <a:cs typeface="Garamond"/>
+                        </a:rPr>
+                        <a:t>(1,282,942)</a:t>
+                      </a:r>
+                    </a:p>
+                  </a:txBody>
+                  <a:tcPr anchor="ctr" marT="12700" marB="12700">
+                    <a:solidFill>
+                      <a:srgbClr val="F0F1F3"/>
+                    </a:solidFill>
+                  </a:tcPr>
+                </a:tc>
               </a:tr>
-              <a:tr h="566928">
+              <a:tr h="541020">
                 <a:tc>
                   <a:txBody>
                     <a:bodyPr/>
@@ -12826,7 +16039,7 @@
                     <a:p>
                       <a:pPr algn="l"/>
                       <a:r>
-                        <a:rPr sz="1050" b="0" i="0">
+                        <a:rPr sz="850" b="0" i="0">
                           <a:solidFill>
                             <a:srgbClr val="262626"/>
                           </a:solidFill>
@@ -12850,7 +16063,7 @@
                     <a:p>
                       <a:pPr algn="r"/>
                       <a:r>
-                        <a:rPr sz="1050" b="0" i="0">
+                        <a:rPr sz="850" b="0" i="0">
                           <a:solidFill>
                             <a:srgbClr val="262626"/>
                           </a:solidFill>
@@ -12874,7 +16087,7 @@
                     <a:p>
                       <a:pPr algn="r"/>
                       <a:r>
-                        <a:rPr sz="1050" b="0" i="0">
+                        <a:rPr sz="850" b="0" i="0">
                           <a:solidFill>
                             <a:srgbClr val="262626"/>
                           </a:solidFill>
@@ -12898,7 +16111,7 @@
                     <a:p>
                       <a:pPr algn="r"/>
                       <a:r>
-                        <a:rPr sz="1050" b="0" i="0">
+                        <a:rPr sz="850" b="0" i="0">
                           <a:solidFill>
                             <a:srgbClr val="262626"/>
                           </a:solidFill>
@@ -12922,7 +16135,7 @@
                     <a:p>
                       <a:pPr algn="r"/>
                       <a:r>
-                        <a:rPr sz="1050" b="0" i="0">
+                        <a:rPr sz="850" b="0" i="0">
                           <a:solidFill>
                             <a:srgbClr val="262626"/>
                           </a:solidFill>
@@ -12946,7 +16159,7 @@
                     <a:p>
                       <a:pPr algn="r"/>
                       <a:r>
-                        <a:rPr sz="1050" b="0" i="0">
+                        <a:rPr sz="850" b="0" i="0">
                           <a:solidFill>
                             <a:srgbClr val="262626"/>
                           </a:solidFill>
@@ -12970,13 +16183,85 @@
                     <a:p>
                       <a:pPr algn="r"/>
                       <a:r>
-                        <a:rPr sz="1050" b="0" i="0">
+                        <a:rPr sz="850" b="0" i="0">
                           <a:solidFill>
                             <a:srgbClr val="262626"/>
                           </a:solidFill>
                           <a:latin typeface="Garamond"/>
                           <a:cs typeface="Garamond"/>
                         </a:rPr>
+                        <a:t>480</a:t>
+                      </a:r>
+                    </a:p>
+                  </a:txBody>
+                  <a:tcPr anchor="ctr" marT="12700" marB="12700">
+                    <a:solidFill>
+                      <a:srgbClr val="FFFFFF"/>
+                    </a:solidFill>
+                  </a:tcPr>
+                </a:tc>
+                <a:tc>
+                  <a:txBody>
+                    <a:bodyPr/>
+                    <a:lstStyle/>
+                    <a:p>
+                      <a:pPr algn="r"/>
+                      <a:r>
+                        <a:rPr sz="850" b="0" i="0">
+                          <a:solidFill>
+                            <a:srgbClr val="262626"/>
+                          </a:solidFill>
+                          <a:latin typeface="Garamond"/>
+                          <a:cs typeface="Garamond"/>
+                        </a:rPr>
+                        <a:t>480</a:t>
+                      </a:r>
+                    </a:p>
+                  </a:txBody>
+                  <a:tcPr anchor="ctr" marT="12700" marB="12700">
+                    <a:solidFill>
+                      <a:srgbClr val="FFFFFF"/>
+                    </a:solidFill>
+                  </a:tcPr>
+                </a:tc>
+                <a:tc>
+                  <a:txBody>
+                    <a:bodyPr/>
+                    <a:lstStyle/>
+                    <a:p>
+                      <a:pPr algn="r"/>
+                      <a:r>
+                        <a:rPr sz="850" b="0" i="0">
+                          <a:solidFill>
+                            <a:srgbClr val="262626"/>
+                          </a:solidFill>
+                          <a:latin typeface="Garamond"/>
+                          <a:cs typeface="Garamond"/>
+                        </a:rPr>
+                        <a:t>508</a:t>
+                      </a:r>
+                    </a:p>
+                  </a:txBody>
+                  <a:tcPr anchor="ctr" marT="12700" marB="12700">
+                    <a:solidFill>
+                      <a:srgbClr val="FFFFFF"/>
+                    </a:solidFill>
+                  </a:tcPr>
+                </a:tc>
+                <a:tc>
+                  <a:txBody>
+                    <a:bodyPr/>
+                    <a:lstStyle/>
+                    <a:p>
+                      <a:pPr algn="r"/>
+                      <a:r>
+                        <a:rPr sz="850" b="0" i="0">
+                          <a:solidFill>
+                            <a:srgbClr val="262626"/>
+                          </a:solidFill>
+                          <a:latin typeface="Garamond"/>
+                          <a:cs typeface="Garamond"/>
+                        </a:rPr>
                         <a:t>491</a:t>
                       </a:r>
                     </a:p>
@@ -12994,14 +16279,110 @@
                     <a:p>
                       <a:pPr algn="r"/>
                       <a:r>
-                        <a:rPr sz="1050" b="0" i="0">
+                        <a:rPr sz="850" b="0" i="0">
                           <a:solidFill>
                             <a:srgbClr val="262626"/>
                           </a:solidFill>
                           <a:latin typeface="Garamond"/>
                           <a:cs typeface="Garamond"/>
                         </a:rPr>
+                        <a:t>539</a:t>
+                      </a:r>
+                    </a:p>
+                  </a:txBody>
+                  <a:tcPr anchor="ctr" marT="12700" marB="12700">
+                    <a:solidFill>
+                      <a:srgbClr val="FFFFFF"/>
+                    </a:solidFill>
+                  </a:tcPr>
+                </a:tc>
+                <a:tc>
+                  <a:txBody>
+                    <a:bodyPr/>
+                    <a:lstStyle/>
+                    <a:p>
+                      <a:pPr algn="r"/>
+                      <a:r>
+                        <a:rPr sz="850" b="0" i="0">
+                          <a:solidFill>
+                            <a:srgbClr val="262626"/>
+                          </a:solidFill>
+                          <a:latin typeface="Garamond"/>
+                          <a:cs typeface="Garamond"/>
+                        </a:rPr>
+                        <a:t>502</a:t>
+                      </a:r>
+                    </a:p>
+                  </a:txBody>
+                  <a:tcPr anchor="ctr" marT="12700" marB="12700">
+                    <a:solidFill>
+                      <a:srgbClr val="FFFFFF"/>
+                    </a:solidFill>
+                  </a:tcPr>
+                </a:tc>
+                <a:tc>
+                  <a:txBody>
+                    <a:bodyPr/>
+                    <a:lstStyle/>
+                    <a:p>
+                      <a:pPr algn="r"/>
+                      <a:r>
+                        <a:rPr sz="850" b="0" i="0">
+                          <a:solidFill>
+                            <a:srgbClr val="262626"/>
+                          </a:solidFill>
+                          <a:latin typeface="Garamond"/>
+                          <a:cs typeface="Garamond"/>
+                        </a:rPr>
+                        <a:t>571</a:t>
+                      </a:r>
+                    </a:p>
+                  </a:txBody>
+                  <a:tcPr anchor="ctr" marT="12700" marB="12700">
+                    <a:solidFill>
+                      <a:srgbClr val="FFFFFF"/>
+                    </a:solidFill>
+                  </a:tcPr>
+                </a:tc>
+                <a:tc>
+                  <a:txBody>
+                    <a:bodyPr/>
+                    <a:lstStyle/>
+                    <a:p>
+                      <a:pPr algn="r"/>
+                      <a:r>
+                        <a:rPr sz="850" b="0" i="0">
+                          <a:solidFill>
+                            <a:srgbClr val="262626"/>
+                          </a:solidFill>
+                          <a:latin typeface="Garamond"/>
+                          <a:cs typeface="Garamond"/>
+                        </a:rPr>
                         <a:t>514</a:t>
+                      </a:r>
+                    </a:p>
+                  </a:txBody>
+                  <a:tcPr anchor="ctr" marT="12700" marB="12700">
+                    <a:solidFill>
+                      <a:srgbClr val="FFFFFF"/>
+                    </a:solidFill>
+                  </a:tcPr>
+                </a:tc>
+                <a:tc>
+                  <a:txBody>
+                    <a:bodyPr/>
+                    <a:lstStyle/>
+                    <a:p>
+                      <a:pPr algn="r"/>
+                      <a:r>
+                        <a:rPr sz="850" b="0" i="0">
+                          <a:solidFill>
+                            <a:srgbClr val="262626"/>
+                          </a:solidFill>
+                          <a:latin typeface="Garamond"/>
+                          <a:cs typeface="Garamond"/>
+                        </a:rPr>
+                        <a:t>606</a:t>
                       </a:r>
                     </a:p>
                   </a:txBody>
@@ -13024,8 +16405,8 @@
         </p:nvSpPr>
         <p:spPr>
           <a:xfrm>
-            <a:off x="457200" y="6053328"/>
-            <a:ext cx="11292840" cy="411480"/>
+            <a:off x="457200" y="5897880"/>
+            <a:ext cx="11292840" cy="502920"/>
           </a:xfrm>
           <a:prstGeom prst="rect">
             <a:avLst/>
@@ -13048,14 +16429,14 @@
               <a:buNone/>
             </a:pPr>
             <a:r>
-              <a:rPr sz="1050" b="0" i="1">
+              <a:rPr sz="1000" b="0" i="1">
                 <a:solidFill>
                   <a:srgbClr val="8C8C8C"/>
                 </a:solidFill>
                 <a:latin typeface="Garamond"/>
                 <a:cs typeface="Garamond"/>
               </a:rPr>
-              <a:t>Free cash flow = CFO + capex (capex shown negative). DCF repurchase schedule uses 75% of UFCF — deck uses 3-statement $500M/yr assumption.</a:t>
+              <a:t>Bull CFO = NOPAT + D&amp;A + ΔNWC from Scenarios col H. Bull FCF = unlevered FCF (same definition as DCF).</a:t>
             </a:r>
           </a:p>
         </p:txBody>

--- a/LULU/LULU_Investment_Pitch_Deck.pptx
+++ b/LULU/LULU_Investment_Pitch_Deck.pptx
@@ -7509,7 +7509,7 @@
                 <a:latin typeface="Garamond"/>
                 <a:cs typeface="Garamond"/>
               </a:rPr>
-              <a:t>Forecast: base = Scenarios col G (3-statement); bull = Scenarios col H. Historicals per FY2025 10-K.</a:t>
+              <a:t>Forecast: base = Scenarios col G (3-statement); bull = Scenarios col H. Historicals per FY2025 10-K. Each row uses the same metric definition across periods.</a:t>
             </a:r>
           </a:p>
         </p:txBody>
@@ -7809,7 +7809,7 @@
                 <a:latin typeface="Garamond"/>
                 <a:cs typeface="Garamond"/>
               </a:rPr>
-              <a:t>Bull EPS $10.37 → $18.43 (DCF implied price $$202)</a:t>
+              <a:t>Bull EPS $10.89 → $19.14 (DCF implied price $202)</a:t>
             </a:r>
           </a:p>
         </p:txBody>
@@ -7857,7 +7857,7 @@
                     <a:p>
                       <a:pPr algn="l"/>
                       <a:r>
-                        <a:rPr sz="1100" b="1" i="0">
+                        <a:rPr sz="800" b="1" i="0">
                           <a:solidFill>
                             <a:srgbClr val="FFFFFF"/>
                           </a:solidFill>
@@ -7881,14 +7881,14 @@
                     <a:p>
                       <a:pPr algn="r"/>
                       <a:r>
-                        <a:rPr sz="1100" b="1" i="0">
+                        <a:rPr sz="800" b="1" i="0">
                           <a:solidFill>
                             <a:srgbClr val="FFFFFF"/>
                           </a:solidFill>
                           <a:latin typeface="Garamond"/>
                           <a:cs typeface="Garamond"/>
                         </a:rPr>
-                        <a:t>FY2022</a:t>
+                        <a:t>22</a:t>
                       </a:r>
                     </a:p>
                   </a:txBody>
@@ -7905,14 +7905,14 @@
                     <a:p>
                       <a:pPr algn="r"/>
                       <a:r>
-                        <a:rPr sz="1100" b="1" i="0">
+                        <a:rPr sz="800" b="1" i="0">
                           <a:solidFill>
                             <a:srgbClr val="FFFFFF"/>
                           </a:solidFill>
                           <a:latin typeface="Garamond"/>
                           <a:cs typeface="Garamond"/>
                         </a:rPr>
-                        <a:t>FY2023</a:t>
+                        <a:t>23</a:t>
                       </a:r>
                     </a:p>
                   </a:txBody>
@@ -7929,14 +7929,14 @@
                     <a:p>
                       <a:pPr algn="r"/>
                       <a:r>
-                        <a:rPr sz="1100" b="1" i="0">
+                        <a:rPr sz="800" b="1" i="0">
                           <a:solidFill>
                             <a:srgbClr val="FFFFFF"/>
                           </a:solidFill>
                           <a:latin typeface="Garamond"/>
                           <a:cs typeface="Garamond"/>
                         </a:rPr>
-                        <a:t>FY2024</a:t>
+                        <a:t>24</a:t>
                       </a:r>
                     </a:p>
                   </a:txBody>
@@ -7953,14 +7953,14 @@
                     <a:p>
                       <a:pPr algn="r"/>
                       <a:r>
-                        <a:rPr sz="1100" b="1" i="0">
+                        <a:rPr sz="800" b="1" i="0">
                           <a:solidFill>
                             <a:srgbClr val="FFFFFF"/>
                           </a:solidFill>
                           <a:latin typeface="Garamond"/>
                           <a:cs typeface="Garamond"/>
                         </a:rPr>
-                        <a:t>FY2025</a:t>
+                        <a:t>25</a:t>
                       </a:r>
                     </a:p>
                   </a:txBody>
@@ -7977,14 +7977,14 @@
                     <a:p>
                       <a:pPr algn="r"/>
                       <a:r>
-                        <a:rPr sz="1100" b="1" i="0">
+                        <a:rPr sz="800" b="1" i="0">
                           <a:solidFill>
                             <a:srgbClr val="FFFFFF"/>
                           </a:solidFill>
                           <a:latin typeface="Garamond"/>
                           <a:cs typeface="Garamond"/>
                         </a:rPr>
-                        <a:t>6EE base</a:t>
+                        <a:t>26B</a:t>
                       </a:r>
                     </a:p>
                   </a:txBody>
@@ -8001,14 +8001,14 @@
                     <a:p>
                       <a:pPr algn="r"/>
                       <a:r>
-                        <a:rPr sz="1100" b="1" i="0">
+                        <a:rPr sz="800" b="1" i="0">
                           <a:solidFill>
                             <a:srgbClr val="FFFFFF"/>
                           </a:solidFill>
                           <a:latin typeface="Garamond"/>
                           <a:cs typeface="Garamond"/>
                         </a:rPr>
-                        <a:t>6EE bull</a:t>
+                        <a:t>26U</a:t>
                       </a:r>
                     </a:p>
                   </a:txBody>
@@ -8025,14 +8025,14 @@
                     <a:p>
                       <a:pPr algn="r"/>
                       <a:r>
-                        <a:rPr sz="1100" b="1" i="0">
+                        <a:rPr sz="800" b="1" i="0">
                           <a:solidFill>
                             <a:srgbClr val="FFFFFF"/>
                           </a:solidFill>
                           <a:latin typeface="Garamond"/>
                           <a:cs typeface="Garamond"/>
                         </a:rPr>
-                        <a:t>7EE base</a:t>
+                        <a:t>27B</a:t>
                       </a:r>
                     </a:p>
                   </a:txBody>
@@ -8049,14 +8049,14 @@
                     <a:p>
                       <a:pPr algn="r"/>
                       <a:r>
-                        <a:rPr sz="1100" b="1" i="0">
+                        <a:rPr sz="800" b="1" i="0">
                           <a:solidFill>
                             <a:srgbClr val="FFFFFF"/>
                           </a:solidFill>
                           <a:latin typeface="Garamond"/>
                           <a:cs typeface="Garamond"/>
                         </a:rPr>
-                        <a:t>7EE bull</a:t>
+                        <a:t>27U</a:t>
                       </a:r>
                     </a:p>
                   </a:txBody>
@@ -8073,14 +8073,14 @@
                     <a:p>
                       <a:pPr algn="r"/>
                       <a:r>
-                        <a:rPr sz="1100" b="1" i="0">
+                        <a:rPr sz="800" b="1" i="0">
                           <a:solidFill>
                             <a:srgbClr val="FFFFFF"/>
                           </a:solidFill>
                           <a:latin typeface="Garamond"/>
                           <a:cs typeface="Garamond"/>
                         </a:rPr>
-                        <a:t>8EE base</a:t>
+                        <a:t>28B</a:t>
                       </a:r>
                     </a:p>
                   </a:txBody>
@@ -8097,14 +8097,14 @@
                     <a:p>
                       <a:pPr algn="r"/>
                       <a:r>
-                        <a:rPr sz="1100" b="1" i="0">
+                        <a:rPr sz="800" b="1" i="0">
                           <a:solidFill>
                             <a:srgbClr val="FFFFFF"/>
                           </a:solidFill>
                           <a:latin typeface="Garamond"/>
                           <a:cs typeface="Garamond"/>
                         </a:rPr>
-                        <a:t>8EE bull</a:t>
+                        <a:t>28U</a:t>
                       </a:r>
                     </a:p>
                   </a:txBody>
@@ -8121,14 +8121,14 @@
                     <a:p>
                       <a:pPr algn="r"/>
                       <a:r>
-                        <a:rPr sz="1100" b="1" i="0">
+                        <a:rPr sz="800" b="1" i="0">
                           <a:solidFill>
                             <a:srgbClr val="FFFFFF"/>
                           </a:solidFill>
                           <a:latin typeface="Garamond"/>
                           <a:cs typeface="Garamond"/>
                         </a:rPr>
-                        <a:t>9EE base</a:t>
+                        <a:t>29B</a:t>
                       </a:r>
                     </a:p>
                   </a:txBody>
@@ -8145,14 +8145,14 @@
                     <a:p>
                       <a:pPr algn="r"/>
                       <a:r>
-                        <a:rPr sz="1100" b="1" i="0">
+                        <a:rPr sz="800" b="1" i="0">
                           <a:solidFill>
                             <a:srgbClr val="FFFFFF"/>
                           </a:solidFill>
                           <a:latin typeface="Garamond"/>
                           <a:cs typeface="Garamond"/>
                         </a:rPr>
-                        <a:t>9EE bull</a:t>
+                        <a:t>29U</a:t>
                       </a:r>
                     </a:p>
                   </a:txBody>
@@ -8169,14 +8169,14 @@
                     <a:p>
                       <a:pPr algn="r"/>
                       <a:r>
-                        <a:rPr sz="1100" b="1" i="0">
+                        <a:rPr sz="800" b="1" i="0">
                           <a:solidFill>
                             <a:srgbClr val="FFFFFF"/>
                           </a:solidFill>
                           <a:latin typeface="Garamond"/>
                           <a:cs typeface="Garamond"/>
                         </a:rPr>
-                        <a:t>0EE base</a:t>
+                        <a:t>30B</a:t>
                       </a:r>
                     </a:p>
                   </a:txBody>
@@ -8193,14 +8193,14 @@
                     <a:p>
                       <a:pPr algn="r"/>
                       <a:r>
-                        <a:rPr sz="1100" b="1" i="0">
+                        <a:rPr sz="800" b="1" i="0">
                           <a:solidFill>
                             <a:srgbClr val="FFFFFF"/>
                           </a:solidFill>
                           <a:latin typeface="Garamond"/>
                           <a:cs typeface="Garamond"/>
                         </a:rPr>
-                        <a:t>0EE bull</a:t>
+                        <a:t>30U</a:t>
                       </a:r>
                     </a:p>
                   </a:txBody>
@@ -9528,7 +9528,7 @@
                           <a:latin typeface="Garamond"/>
                           <a:cs typeface="Garamond"/>
                         </a:rPr>
-                        <a:t>14.3%</a:t>
+                        <a:t>14.4%</a:t>
                       </a:r>
                     </a:p>
                   </a:txBody>
@@ -9818,7 +9818,7 @@
                           <a:latin typeface="Garamond"/>
                           <a:cs typeface="Garamond"/>
                         </a:rPr>
-                        <a:t>1,183</a:t>
+                        <a:t>1,242</a:t>
                       </a:r>
                     </a:p>
                   </a:txBody>
@@ -9866,7 +9866,7 @@
                           <a:latin typeface="Garamond"/>
                           <a:cs typeface="Garamond"/>
                         </a:rPr>
-                        <a:t>1,241</a:t>
+                        <a:t>1,300</a:t>
                       </a:r>
                     </a:p>
                   </a:txBody>
@@ -9914,7 +9914,7 @@
                           <a:latin typeface="Garamond"/>
                           <a:cs typeface="Garamond"/>
                         </a:rPr>
-                        <a:t>1,408</a:t>
+                        <a:t>1,469</a:t>
                       </a:r>
                     </a:p>
                   </a:txBody>
@@ -9962,7 +9962,7 @@
                           <a:latin typeface="Garamond"/>
                           <a:cs typeface="Garamond"/>
                         </a:rPr>
-                        <a:t>1,591</a:t>
+                        <a:t>1,655</a:t>
                       </a:r>
                     </a:p>
                   </a:txBody>
@@ -10010,7 +10010,7 @@
                           <a:latin typeface="Garamond"/>
                           <a:cs typeface="Garamond"/>
                         </a:rPr>
-                        <a:t>1,790</a:t>
+                        <a:t>1,859</a:t>
                       </a:r>
                     </a:p>
                   </a:txBody>
@@ -10180,7 +10180,7 @@
                           <a:latin typeface="Garamond"/>
                           <a:cs typeface="Garamond"/>
                         </a:rPr>
-                        <a:t>10.37</a:t>
+                        <a:t>10.89</a:t>
                       </a:r>
                     </a:p>
                   </a:txBody>
@@ -10228,7 +10228,7 @@
                           <a:latin typeface="Garamond"/>
                           <a:cs typeface="Garamond"/>
                         </a:rPr>
-                        <a:t>11.34</a:t>
+                        <a:t>11.88</a:t>
                       </a:r>
                     </a:p>
                   </a:txBody>
@@ -10276,7 +10276,7 @@
                           <a:latin typeface="Garamond"/>
                           <a:cs typeface="Garamond"/>
                         </a:rPr>
-                        <a:t>13.40</a:t>
+                        <a:t>13.98</a:t>
                       </a:r>
                     </a:p>
                   </a:txBody>
@@ -10324,7 +10324,7 @@
                           <a:latin typeface="Garamond"/>
                           <a:cs typeface="Garamond"/>
                         </a:rPr>
-                        <a:t>15.75</a:t>
+                        <a:t>16.39</a:t>
                       </a:r>
                     </a:p>
                   </a:txBody>
@@ -10372,7 +10372,7 @@
                           <a:latin typeface="Garamond"/>
                           <a:cs typeface="Garamond"/>
                         </a:rPr>
-                        <a:t>18.43</a:t>
+                        <a:t>19.14</a:t>
                       </a:r>
                     </a:p>
                   </a:txBody>
@@ -10426,7 +10426,7 @@
                 <a:latin typeface="Garamond"/>
                 <a:cs typeface="Garamond"/>
               </a:rPr>
-              <a:t>Base = 3-statement model (Scenarios col G). Bull = Scenarios col H (−4% FY26, +6% avg FY27–30, 19% terminal EBIT margin). Bear case in Appendix.</a:t>
+              <a:t>22–25 = FY2022–25 historical; 26B/26U = FY2026 base (G) / bull (H); same for 27–30. Bear in Appendix.</a:t>
             </a:r>
           </a:p>
         </p:txBody>
@@ -10695,7 +10695,7 @@
                 <a:latin typeface="Garamond"/>
                 <a:cs typeface="Garamond"/>
               </a:rPr>
-              <a:t>Forecast: base = Scenarios col G (3-statement); bull = Scenarios col H. Historicals per FY2025 10-K.</a:t>
+              <a:t>Forecast: base = Scenarios col G (3-statement); bull = Scenarios col H. Historicals per FY2025 10-K. Each row uses the same metric definition across periods.</a:t>
             </a:r>
           </a:p>
         </p:txBody>
@@ -10973,7 +10973,7 @@
                 <a:latin typeface="Garamond"/>
                 <a:cs typeface="Garamond"/>
               </a:rPr>
-              <a:t>Bull cash 1,807M → 1,807M (75% UFCF to buybacks)</a:t>
+              <a:t>Bull cash 2,142M → 3,639M (75% FCF to buybacks)</a:t>
             </a:r>
           </a:p>
           <a:p>
@@ -10995,7 +10995,7 @@
                 <a:latin typeface="Garamond"/>
                 <a:cs typeface="Garamond"/>
               </a:rPr>
-              <a:t>Bull BS scaled from base WC drivers at bull revenue path; cash from UFCF waterfall</a:t>
+              <a:t>Bull BS scaled from base WC drivers at bull revenue; cash from FCF waterfall</a:t>
             </a:r>
           </a:p>
         </p:txBody>
@@ -11043,7 +11043,7 @@
                     <a:p>
                       <a:pPr algn="l"/>
                       <a:r>
-                        <a:rPr sz="1100" b="1" i="0">
+                        <a:rPr sz="800" b="1" i="0">
                           <a:solidFill>
                             <a:srgbClr val="FFFFFF"/>
                           </a:solidFill>
@@ -11067,14 +11067,14 @@
                     <a:p>
                       <a:pPr algn="r"/>
                       <a:r>
-                        <a:rPr sz="1100" b="1" i="0">
+                        <a:rPr sz="800" b="1" i="0">
                           <a:solidFill>
                             <a:srgbClr val="FFFFFF"/>
                           </a:solidFill>
                           <a:latin typeface="Garamond"/>
                           <a:cs typeface="Garamond"/>
                         </a:rPr>
-                        <a:t>FY2022</a:t>
+                        <a:t>22</a:t>
                       </a:r>
                     </a:p>
                   </a:txBody>
@@ -11091,14 +11091,14 @@
                     <a:p>
                       <a:pPr algn="r"/>
                       <a:r>
-                        <a:rPr sz="1100" b="1" i="0">
+                        <a:rPr sz="800" b="1" i="0">
                           <a:solidFill>
                             <a:srgbClr val="FFFFFF"/>
                           </a:solidFill>
                           <a:latin typeface="Garamond"/>
                           <a:cs typeface="Garamond"/>
                         </a:rPr>
-                        <a:t>FY2023</a:t>
+                        <a:t>23</a:t>
                       </a:r>
                     </a:p>
                   </a:txBody>
@@ -11115,14 +11115,14 @@
                     <a:p>
                       <a:pPr algn="r"/>
                       <a:r>
-                        <a:rPr sz="1100" b="1" i="0">
+                        <a:rPr sz="800" b="1" i="0">
                           <a:solidFill>
                             <a:srgbClr val="FFFFFF"/>
                           </a:solidFill>
                           <a:latin typeface="Garamond"/>
                           <a:cs typeface="Garamond"/>
                         </a:rPr>
-                        <a:t>FY2024</a:t>
+                        <a:t>24</a:t>
                       </a:r>
                     </a:p>
                   </a:txBody>
@@ -11139,14 +11139,14 @@
                     <a:p>
                       <a:pPr algn="r"/>
                       <a:r>
-                        <a:rPr sz="1100" b="1" i="0">
+                        <a:rPr sz="800" b="1" i="0">
                           <a:solidFill>
                             <a:srgbClr val="FFFFFF"/>
                           </a:solidFill>
                           <a:latin typeface="Garamond"/>
                           <a:cs typeface="Garamond"/>
                         </a:rPr>
-                        <a:t>FY2025</a:t>
+                        <a:t>25</a:t>
                       </a:r>
                     </a:p>
                   </a:txBody>
@@ -11163,14 +11163,14 @@
                     <a:p>
                       <a:pPr algn="r"/>
                       <a:r>
-                        <a:rPr sz="1100" b="1" i="0">
+                        <a:rPr sz="800" b="1" i="0">
                           <a:solidFill>
                             <a:srgbClr val="FFFFFF"/>
                           </a:solidFill>
                           <a:latin typeface="Garamond"/>
                           <a:cs typeface="Garamond"/>
                         </a:rPr>
-                        <a:t>6EE base</a:t>
+                        <a:t>26B</a:t>
                       </a:r>
                     </a:p>
                   </a:txBody>
@@ -11187,14 +11187,14 @@
                     <a:p>
                       <a:pPr algn="r"/>
                       <a:r>
-                        <a:rPr sz="1100" b="1" i="0">
+                        <a:rPr sz="800" b="1" i="0">
                           <a:solidFill>
                             <a:srgbClr val="FFFFFF"/>
                           </a:solidFill>
                           <a:latin typeface="Garamond"/>
                           <a:cs typeface="Garamond"/>
                         </a:rPr>
-                        <a:t>6EE bull</a:t>
+                        <a:t>26U</a:t>
                       </a:r>
                     </a:p>
                   </a:txBody>
@@ -11211,14 +11211,14 @@
                     <a:p>
                       <a:pPr algn="r"/>
                       <a:r>
-                        <a:rPr sz="1100" b="1" i="0">
+                        <a:rPr sz="800" b="1" i="0">
                           <a:solidFill>
                             <a:srgbClr val="FFFFFF"/>
                           </a:solidFill>
                           <a:latin typeface="Garamond"/>
                           <a:cs typeface="Garamond"/>
                         </a:rPr>
-                        <a:t>7EE base</a:t>
+                        <a:t>27B</a:t>
                       </a:r>
                     </a:p>
                   </a:txBody>
@@ -11235,14 +11235,14 @@
                     <a:p>
                       <a:pPr algn="r"/>
                       <a:r>
-                        <a:rPr sz="1100" b="1" i="0">
+                        <a:rPr sz="800" b="1" i="0">
                           <a:solidFill>
                             <a:srgbClr val="FFFFFF"/>
                           </a:solidFill>
                           <a:latin typeface="Garamond"/>
                           <a:cs typeface="Garamond"/>
                         </a:rPr>
-                        <a:t>7EE bull</a:t>
+                        <a:t>27U</a:t>
                       </a:r>
                     </a:p>
                   </a:txBody>
@@ -11259,14 +11259,14 @@
                     <a:p>
                       <a:pPr algn="r"/>
                       <a:r>
-                        <a:rPr sz="1100" b="1" i="0">
+                        <a:rPr sz="800" b="1" i="0">
                           <a:solidFill>
                             <a:srgbClr val="FFFFFF"/>
                           </a:solidFill>
                           <a:latin typeface="Garamond"/>
                           <a:cs typeface="Garamond"/>
                         </a:rPr>
-                        <a:t>8EE base</a:t>
+                        <a:t>28B</a:t>
                       </a:r>
                     </a:p>
                   </a:txBody>
@@ -11283,14 +11283,14 @@
                     <a:p>
                       <a:pPr algn="r"/>
                       <a:r>
-                        <a:rPr sz="1100" b="1" i="0">
+                        <a:rPr sz="800" b="1" i="0">
                           <a:solidFill>
                             <a:srgbClr val="FFFFFF"/>
                           </a:solidFill>
                           <a:latin typeface="Garamond"/>
                           <a:cs typeface="Garamond"/>
                         </a:rPr>
-                        <a:t>8EE bull</a:t>
+                        <a:t>28U</a:t>
                       </a:r>
                     </a:p>
                   </a:txBody>
@@ -11307,14 +11307,14 @@
                     <a:p>
                       <a:pPr algn="r"/>
                       <a:r>
-                        <a:rPr sz="1100" b="1" i="0">
+                        <a:rPr sz="800" b="1" i="0">
                           <a:solidFill>
                             <a:srgbClr val="FFFFFF"/>
                           </a:solidFill>
                           <a:latin typeface="Garamond"/>
                           <a:cs typeface="Garamond"/>
                         </a:rPr>
-                        <a:t>9EE base</a:t>
+                        <a:t>29B</a:t>
                       </a:r>
                     </a:p>
                   </a:txBody>
@@ -11331,14 +11331,14 @@
                     <a:p>
                       <a:pPr algn="r"/>
                       <a:r>
-                        <a:rPr sz="1100" b="1" i="0">
+                        <a:rPr sz="800" b="1" i="0">
                           <a:solidFill>
                             <a:srgbClr val="FFFFFF"/>
                           </a:solidFill>
                           <a:latin typeface="Garamond"/>
                           <a:cs typeface="Garamond"/>
                         </a:rPr>
-                        <a:t>9EE bull</a:t>
+                        <a:t>29U</a:t>
                       </a:r>
                     </a:p>
                   </a:txBody>
@@ -11355,14 +11355,14 @@
                     <a:p>
                       <a:pPr algn="r"/>
                       <a:r>
-                        <a:rPr sz="1100" b="1" i="0">
+                        <a:rPr sz="800" b="1" i="0">
                           <a:solidFill>
                             <a:srgbClr val="FFFFFF"/>
                           </a:solidFill>
                           <a:latin typeface="Garamond"/>
                           <a:cs typeface="Garamond"/>
                         </a:rPr>
-                        <a:t>0EE base</a:t>
+                        <a:t>30B</a:t>
                       </a:r>
                     </a:p>
                   </a:txBody>
@@ -11379,14 +11379,14 @@
                     <a:p>
                       <a:pPr algn="r"/>
                       <a:r>
-                        <a:rPr sz="1100" b="1" i="0">
+                        <a:rPr sz="800" b="1" i="0">
                           <a:solidFill>
                             <a:srgbClr val="FFFFFF"/>
                           </a:solidFill>
                           <a:latin typeface="Garamond"/>
                           <a:cs typeface="Garamond"/>
                         </a:rPr>
-                        <a:t>0EE bull</a:t>
+                        <a:t>30U</a:t>
                       </a:r>
                     </a:p>
                   </a:txBody>
@@ -11556,7 +11556,7 @@
                           <a:latin typeface="Garamond"/>
                           <a:cs typeface="Garamond"/>
                         </a:rPr>
-                        <a:t>1,807</a:t>
+                        <a:t>2,142</a:t>
                       </a:r>
                     </a:p>
                   </a:txBody>
@@ -11604,7 +11604,7 @@
                           <a:latin typeface="Garamond"/>
                           <a:cs typeface="Garamond"/>
                         </a:rPr>
-                        <a:t>1,807</a:t>
+                        <a:t>2,451</a:t>
                       </a:r>
                     </a:p>
                   </a:txBody>
@@ -11652,7 +11652,7 @@
                           <a:latin typeface="Garamond"/>
                           <a:cs typeface="Garamond"/>
                         </a:rPr>
-                        <a:t>1,807</a:t>
+                        <a:t>2,800</a:t>
                       </a:r>
                     </a:p>
                   </a:txBody>
@@ -11700,7 +11700,7 @@
                           <a:latin typeface="Garamond"/>
                           <a:cs typeface="Garamond"/>
                         </a:rPr>
-                        <a:t>1,807</a:t>
+                        <a:t>3,195</a:t>
                       </a:r>
                     </a:p>
                   </a:txBody>
@@ -11748,7 +11748,7 @@
                           <a:latin typeface="Garamond"/>
                           <a:cs typeface="Garamond"/>
                         </a:rPr>
-                        <a:t>1,807</a:t>
+                        <a:t>3,639</a:t>
                       </a:r>
                     </a:p>
                   </a:txBody>
@@ -13612,7 +13612,7 @@
                 <a:latin typeface="Garamond"/>
                 <a:cs typeface="Garamond"/>
               </a:rPr>
-              <a:t>Base BS from integrated 3-statement model. Bull BS approximated from base at bull revenue + DCF bull UFCF cash build.</a:t>
+              <a:t>Same BS line items as 10-K. Bull cash = FY25 cash + cumulative (FCF + buybacks).</a:t>
             </a:r>
           </a:p>
         </p:txBody>
@@ -13881,7 +13881,7 @@
                 <a:latin typeface="Garamond"/>
                 <a:cs typeface="Garamond"/>
               </a:rPr>
-              <a:t>Forecast: base = Scenarios col G (3-statement); bull = Scenarios col H. Historicals per FY2025 10-K.</a:t>
+              <a:t>Forecast: base = Scenarios col G (3-statement); bull = Scenarios col H. Historicals per FY2025 10-K. Each row uses the same metric definition across periods.</a:t>
             </a:r>
           </a:p>
         </p:txBody>
@@ -14053,7 +14053,7 @@
                 <a:latin typeface="Garamond"/>
                 <a:cs typeface="Garamond"/>
               </a:rPr>
-              <a:t>Historicals = reported CFS; no model overlay</a:t>
+              <a:t>FCF = CFO − capex; same definition as forecast rows</a:t>
             </a:r>
           </a:p>
         </p:txBody>
@@ -14159,7 +14159,7 @@
                 <a:latin typeface="Garamond"/>
                 <a:cs typeface="Garamond"/>
               </a:rPr>
-              <a:t>Bull FCF $1,281M → $1,711M (Scenarios unlevered FCF)</a:t>
+              <a:t>Bull FCF $1,340M → $1,779M (Scenarios col H)</a:t>
             </a:r>
           </a:p>
           <a:p>
@@ -14181,7 +14181,7 @@
                 <a:latin typeface="Garamond"/>
                 <a:cs typeface="Garamond"/>
               </a:rPr>
-              <a:t>Bull buybacks = 75% of UFCF; base = $500M/yr fixed in 3-statement</a:t>
+              <a:t>Bull CFO = net income + D&amp;A + ΔNWC; buybacks = 75% of FCF; base buybacks = $500M/yr</a:t>
             </a:r>
           </a:p>
         </p:txBody>
@@ -14229,7 +14229,7 @@
                     <a:p>
                       <a:pPr algn="l"/>
                       <a:r>
-                        <a:rPr sz="1100" b="1" i="0">
+                        <a:rPr sz="800" b="1" i="0">
                           <a:solidFill>
                             <a:srgbClr val="FFFFFF"/>
                           </a:solidFill>
@@ -14253,14 +14253,14 @@
                     <a:p>
                       <a:pPr algn="r"/>
                       <a:r>
-                        <a:rPr sz="1100" b="1" i="0">
+                        <a:rPr sz="800" b="1" i="0">
                           <a:solidFill>
                             <a:srgbClr val="FFFFFF"/>
                           </a:solidFill>
                           <a:latin typeface="Garamond"/>
                           <a:cs typeface="Garamond"/>
                         </a:rPr>
-                        <a:t>FY2022</a:t>
+                        <a:t>22</a:t>
                       </a:r>
                     </a:p>
                   </a:txBody>
@@ -14277,14 +14277,14 @@
                     <a:p>
                       <a:pPr algn="r"/>
                       <a:r>
-                        <a:rPr sz="1100" b="1" i="0">
+                        <a:rPr sz="800" b="1" i="0">
                           <a:solidFill>
                             <a:srgbClr val="FFFFFF"/>
                           </a:solidFill>
                           <a:latin typeface="Garamond"/>
                           <a:cs typeface="Garamond"/>
                         </a:rPr>
-                        <a:t>FY2023</a:t>
+                        <a:t>23</a:t>
                       </a:r>
                     </a:p>
                   </a:txBody>
@@ -14301,14 +14301,14 @@
                     <a:p>
                       <a:pPr algn="r"/>
                       <a:r>
-                        <a:rPr sz="1100" b="1" i="0">
+                        <a:rPr sz="800" b="1" i="0">
                           <a:solidFill>
                             <a:srgbClr val="FFFFFF"/>
                           </a:solidFill>
                           <a:latin typeface="Garamond"/>
                           <a:cs typeface="Garamond"/>
                         </a:rPr>
-                        <a:t>FY2024</a:t>
+                        <a:t>24</a:t>
                       </a:r>
                     </a:p>
                   </a:txBody>
@@ -14325,14 +14325,14 @@
                     <a:p>
                       <a:pPr algn="r"/>
                       <a:r>
-                        <a:rPr sz="1100" b="1" i="0">
+                        <a:rPr sz="800" b="1" i="0">
                           <a:solidFill>
                             <a:srgbClr val="FFFFFF"/>
                           </a:solidFill>
                           <a:latin typeface="Garamond"/>
                           <a:cs typeface="Garamond"/>
                         </a:rPr>
-                        <a:t>FY2025</a:t>
+                        <a:t>25</a:t>
                       </a:r>
                     </a:p>
                   </a:txBody>
@@ -14349,14 +14349,14 @@
                     <a:p>
                       <a:pPr algn="r"/>
                       <a:r>
-                        <a:rPr sz="1100" b="1" i="0">
+                        <a:rPr sz="800" b="1" i="0">
                           <a:solidFill>
                             <a:srgbClr val="FFFFFF"/>
                           </a:solidFill>
                           <a:latin typeface="Garamond"/>
                           <a:cs typeface="Garamond"/>
                         </a:rPr>
-                        <a:t>6EE base</a:t>
+                        <a:t>26B</a:t>
                       </a:r>
                     </a:p>
                   </a:txBody>
@@ -14373,14 +14373,14 @@
                     <a:p>
                       <a:pPr algn="r"/>
                       <a:r>
-                        <a:rPr sz="1100" b="1" i="0">
+                        <a:rPr sz="800" b="1" i="0">
                           <a:solidFill>
                             <a:srgbClr val="FFFFFF"/>
                           </a:solidFill>
                           <a:latin typeface="Garamond"/>
                           <a:cs typeface="Garamond"/>
                         </a:rPr>
-                        <a:t>6EE bull</a:t>
+                        <a:t>26U</a:t>
                       </a:r>
                     </a:p>
                   </a:txBody>
@@ -14397,14 +14397,14 @@
                     <a:p>
                       <a:pPr algn="r"/>
                       <a:r>
-                        <a:rPr sz="1100" b="1" i="0">
+                        <a:rPr sz="800" b="1" i="0">
                           <a:solidFill>
                             <a:srgbClr val="FFFFFF"/>
                           </a:solidFill>
                           <a:latin typeface="Garamond"/>
                           <a:cs typeface="Garamond"/>
                         </a:rPr>
-                        <a:t>7EE base</a:t>
+                        <a:t>27B</a:t>
                       </a:r>
                     </a:p>
                   </a:txBody>
@@ -14421,14 +14421,14 @@
                     <a:p>
                       <a:pPr algn="r"/>
                       <a:r>
-                        <a:rPr sz="1100" b="1" i="0">
+                        <a:rPr sz="800" b="1" i="0">
                           <a:solidFill>
                             <a:srgbClr val="FFFFFF"/>
                           </a:solidFill>
                           <a:latin typeface="Garamond"/>
                           <a:cs typeface="Garamond"/>
                         </a:rPr>
-                        <a:t>7EE bull</a:t>
+                        <a:t>27U</a:t>
                       </a:r>
                     </a:p>
                   </a:txBody>
@@ -14445,14 +14445,14 @@
                     <a:p>
                       <a:pPr algn="r"/>
                       <a:r>
-                        <a:rPr sz="1100" b="1" i="0">
+                        <a:rPr sz="800" b="1" i="0">
                           <a:solidFill>
                             <a:srgbClr val="FFFFFF"/>
                           </a:solidFill>
                           <a:latin typeface="Garamond"/>
                           <a:cs typeface="Garamond"/>
                         </a:rPr>
-                        <a:t>8EE base</a:t>
+                        <a:t>28B</a:t>
                       </a:r>
                     </a:p>
                   </a:txBody>
@@ -14469,14 +14469,14 @@
                     <a:p>
                       <a:pPr algn="r"/>
                       <a:r>
-                        <a:rPr sz="1100" b="1" i="0">
+                        <a:rPr sz="800" b="1" i="0">
                           <a:solidFill>
                             <a:srgbClr val="FFFFFF"/>
                           </a:solidFill>
                           <a:latin typeface="Garamond"/>
                           <a:cs typeface="Garamond"/>
                         </a:rPr>
-                        <a:t>8EE bull</a:t>
+                        <a:t>28U</a:t>
                       </a:r>
                     </a:p>
                   </a:txBody>
@@ -14493,14 +14493,14 @@
                     <a:p>
                       <a:pPr algn="r"/>
                       <a:r>
-                        <a:rPr sz="1100" b="1" i="0">
+                        <a:rPr sz="800" b="1" i="0">
                           <a:solidFill>
                             <a:srgbClr val="FFFFFF"/>
                           </a:solidFill>
                           <a:latin typeface="Garamond"/>
                           <a:cs typeface="Garamond"/>
                         </a:rPr>
-                        <a:t>9EE base</a:t>
+                        <a:t>29B</a:t>
                       </a:r>
                     </a:p>
                   </a:txBody>
@@ -14517,14 +14517,14 @@
                     <a:p>
                       <a:pPr algn="r"/>
                       <a:r>
-                        <a:rPr sz="1100" b="1" i="0">
+                        <a:rPr sz="800" b="1" i="0">
                           <a:solidFill>
                             <a:srgbClr val="FFFFFF"/>
                           </a:solidFill>
                           <a:latin typeface="Garamond"/>
                           <a:cs typeface="Garamond"/>
                         </a:rPr>
-                        <a:t>9EE bull</a:t>
+                        <a:t>29U</a:t>
                       </a:r>
                     </a:p>
                   </a:txBody>
@@ -14541,14 +14541,14 @@
                     <a:p>
                       <a:pPr algn="r"/>
                       <a:r>
-                        <a:rPr sz="1100" b="1" i="0">
+                        <a:rPr sz="800" b="1" i="0">
                           <a:solidFill>
                             <a:srgbClr val="FFFFFF"/>
                           </a:solidFill>
                           <a:latin typeface="Garamond"/>
                           <a:cs typeface="Garamond"/>
                         </a:rPr>
-                        <a:t>0EE base</a:t>
+                        <a:t>30B</a:t>
                       </a:r>
                     </a:p>
                   </a:txBody>
@@ -14565,14 +14565,14 @@
                     <a:p>
                       <a:pPr algn="r"/>
                       <a:r>
-                        <a:rPr sz="1100" b="1" i="0">
+                        <a:rPr sz="800" b="1" i="0">
                           <a:solidFill>
                             <a:srgbClr val="FFFFFF"/>
                           </a:solidFill>
                           <a:latin typeface="Garamond"/>
                           <a:cs typeface="Garamond"/>
                         </a:rPr>
-                        <a:t>0EE bull</a:t>
+                        <a:t>30U</a:t>
                       </a:r>
                     </a:p>
                   </a:txBody>
@@ -14742,7 +14742,7 @@
                           <a:latin typeface="Garamond"/>
                           <a:cs typeface="Garamond"/>
                         </a:rPr>
-                        <a:t>1,761</a:t>
+                        <a:t>1,820</a:t>
                       </a:r>
                     </a:p>
                   </a:txBody>
@@ -14790,7 +14790,7 @@
                           <a:latin typeface="Garamond"/>
                           <a:cs typeface="Garamond"/>
                         </a:rPr>
-                        <a:t>1,681</a:t>
+                        <a:t>1,740</a:t>
                       </a:r>
                     </a:p>
                   </a:txBody>
@@ -14838,7 +14838,7 @@
                           <a:latin typeface="Garamond"/>
                           <a:cs typeface="Garamond"/>
                         </a:rPr>
-                        <a:t>1,875</a:t>
+                        <a:t>1,936</a:t>
                       </a:r>
                     </a:p>
                   </a:txBody>
@@ -14886,7 +14886,7 @@
                           <a:latin typeface="Garamond"/>
                           <a:cs typeface="Garamond"/>
                         </a:rPr>
-                        <a:t>2,087</a:t>
+                        <a:t>2,151</a:t>
                       </a:r>
                     </a:p>
                   </a:txBody>
@@ -14934,7 +14934,7 @@
                           <a:latin typeface="Garamond"/>
                           <a:cs typeface="Garamond"/>
                         </a:rPr>
-                        <a:t>2,316</a:t>
+                        <a:t>2,385</a:t>
                       </a:r>
                     </a:p>
                   </a:txBody>
@@ -15466,7 +15466,7 @@
                           <a:latin typeface="Garamond"/>
                           <a:cs typeface="Garamond"/>
                         </a:rPr>
-                        <a:t>1,281</a:t>
+                        <a:t>1,340</a:t>
                       </a:r>
                     </a:p>
                   </a:txBody>
@@ -15514,7 +15514,7 @@
                           <a:latin typeface="Garamond"/>
                           <a:cs typeface="Garamond"/>
                         </a:rPr>
-                        <a:t>1,173</a:t>
+                        <a:t>1,232</a:t>
                       </a:r>
                     </a:p>
                   </a:txBody>
@@ -15562,7 +15562,7 @@
                           <a:latin typeface="Garamond"/>
                           <a:cs typeface="Garamond"/>
                         </a:rPr>
-                        <a:t>1,336</a:t>
+                        <a:t>1,397</a:t>
                       </a:r>
                     </a:p>
                   </a:txBody>
@@ -15610,7 +15610,7 @@
                           <a:latin typeface="Garamond"/>
                           <a:cs typeface="Garamond"/>
                         </a:rPr>
-                        <a:t>1,515</a:t>
+                        <a:t>1,580</a:t>
                       </a:r>
                     </a:p>
                   </a:txBody>
@@ -15658,7 +15658,7 @@
                           <a:latin typeface="Garamond"/>
                           <a:cs typeface="Garamond"/>
                         </a:rPr>
-                        <a:t>1,711</a:t>
+                        <a:t>1,779</a:t>
                       </a:r>
                     </a:p>
                   </a:txBody>
@@ -15828,7 +15828,7 @@
                           <a:latin typeface="Garamond"/>
                           <a:cs typeface="Garamond"/>
                         </a:rPr>
-                        <a:t>(960,922)</a:t>
+                        <a:t>(1,005)</a:t>
                       </a:r>
                     </a:p>
                   </a:txBody>
@@ -15876,7 +15876,7 @@
                           <a:latin typeface="Garamond"/>
                           <a:cs typeface="Garamond"/>
                         </a:rPr>
-                        <a:t>(879,543)</a:t>
+                        <a:t>(923)</a:t>
                       </a:r>
                     </a:p>
                   </a:txBody>
@@ -15924,7 +15924,7 @@
                           <a:latin typeface="Garamond"/>
                           <a:cs typeface="Garamond"/>
                         </a:rPr>
-                        <a:t>(1,002,364)</a:t>
+                        <a:t>(1,048)</a:t>
                       </a:r>
                     </a:p>
                   </a:txBody>
@@ -15972,7 +15972,7 @@
                           <a:latin typeface="Garamond"/>
                           <a:cs typeface="Garamond"/>
                         </a:rPr>
-                        <a:t>(1,136,528)</a:t>
+                        <a:t>(1,185)</a:t>
                       </a:r>
                     </a:p>
                   </a:txBody>
@@ -16020,7 +16020,7 @@
                           <a:latin typeface="Garamond"/>
                           <a:cs typeface="Garamond"/>
                         </a:rPr>
-                        <a:t>(1,282,942)</a:t>
+                        <a:t>(1,335)</a:t>
                       </a:r>
                     </a:p>
                   </a:txBody>
@@ -16436,7 +16436,7 @@
                 <a:latin typeface="Garamond"/>
                 <a:cs typeface="Garamond"/>
               </a:rPr>
-              <a:t>Bull CFO = NOPAT + D&amp;A + ΔNWC from Scenarios col H. Bull FCF = unlevered FCF (same definition as DCF).</a:t>
+              <a:t>FCF = CFO + capex (capex shown as outflow). Bull uses same CFS line definitions as base and 10-K.</a:t>
             </a:r>
           </a:p>
         </p:txBody>

--- a/LULU/LULU_Investment_Pitch_Deck.pptx
+++ b/LULU/LULU_Investment_Pitch_Deck.pptx
@@ -13793,7 +13793,7 @@
                 <a:latin typeface="Garamond"/>
                 <a:cs typeface="Garamond"/>
               </a:rPr>
-              <a:t>Historical return of capital vs base &amp; bull FCF — all FY26–30 (US$ M)</a:t>
+              <a:t>Operating FCF (DCF input) vs financing — historical 10-K vs base &amp; bull (US$ M)</a:t>
             </a:r>
           </a:p>
         </p:txBody>
@@ -14031,7 +14031,7 @@
                 <a:latin typeface="Garamond"/>
                 <a:cs typeface="Garamond"/>
               </a:rPr>
-              <a:t>Buybacks ($1,637M) FY24, ($1,178M) FY25</a:t>
+              <a:t>Buybacks ($1,178M) FY25 are CFF — reported on 10-K, not in DCF UFCF</a:t>
             </a:r>
           </a:p>
           <a:p>
@@ -14053,7 +14053,7 @@
                 <a:latin typeface="Garamond"/>
                 <a:cs typeface="Garamond"/>
               </a:rPr>
-              <a:t>FCF = CFO − capex; same definition as forecast rows</a:t>
+              <a:t>FCF = CFO − capex; same operating definition as forecast rows above buybacks</a:t>
             </a:r>
           </a:p>
         </p:txBody>
@@ -14137,7 +14137,7 @@
                 <a:latin typeface="Garamond"/>
                 <a:cs typeface="Garamond"/>
               </a:rPr>
-              <a:t>Base FCF $1,163M → $1,184M (3-statement)</a:t>
+              <a:t>FCF (DCF input): base $1,163M → $1,184M</a:t>
             </a:r>
           </a:p>
           <a:p>
@@ -14181,7 +14181,7 @@
                 <a:latin typeface="Garamond"/>
                 <a:cs typeface="Garamond"/>
               </a:rPr>
-              <a:t>Bull CFO = net income + D&amp;A + ΔNWC; buybacks = 75% of FCF; base buybacks = $500M/yr</a:t>
+              <a:t>Buybacks below = 3-statement CFF only; DCF IV uses basic 111.4M shares (no retirements)</a:t>
             </a:r>
           </a:p>
         </p:txBody>
@@ -14960,7 +14960,7 @@
                           <a:latin typeface="Garamond"/>
                           <a:cs typeface="Garamond"/>
                         </a:rPr>
-                        <a:t>Capital expenditures</a:t>
+                        <a:t>D&amp;A (add-back)</a:t>
                       </a:r>
                     </a:p>
                   </a:txBody>
@@ -14984,7 +14984,7 @@
                           <a:latin typeface="Garamond"/>
                           <a:cs typeface="Garamond"/>
                         </a:rPr>
-                        <a:t>(639)</a:t>
+                        <a:t>292</a:t>
                       </a:r>
                     </a:p>
                   </a:txBody>
@@ -15008,7 +15008,7 @@
                           <a:latin typeface="Garamond"/>
                           <a:cs typeface="Garamond"/>
                         </a:rPr>
-                        <a:t>(652)</a:t>
+                        <a:t>379</a:t>
                       </a:r>
                     </a:p>
                   </a:txBody>
@@ -15032,7 +15032,7 @@
                           <a:latin typeface="Garamond"/>
                           <a:cs typeface="Garamond"/>
                         </a:rPr>
-                        <a:t>(689)</a:t>
+                        <a:t>447</a:t>
                       </a:r>
                     </a:p>
                   </a:txBody>
@@ -15056,7 +15056,7 @@
                           <a:latin typeface="Garamond"/>
                           <a:cs typeface="Garamond"/>
                         </a:rPr>
-                        <a:t>(681)</a:t>
+                        <a:t>496</a:t>
                       </a:r>
                     </a:p>
                   </a:txBody>
@@ -15080,7 +15080,7 @@
                           <a:latin typeface="Garamond"/>
                           <a:cs typeface="Garamond"/>
                         </a:rPr>
-                        <a:t>(573)</a:t>
+                        <a:t>469</a:t>
                       </a:r>
                     </a:p>
                   </a:txBody>
@@ -15104,7 +15104,7 @@
                           <a:latin typeface="Garamond"/>
                           <a:cs typeface="Garamond"/>
                         </a:rPr>
-                        <a:t>(480)</a:t>
+                        <a:t>480</a:t>
                       </a:r>
                     </a:p>
                   </a:txBody>
@@ -15128,7 +15128,7 @@
                           <a:latin typeface="Garamond"/>
                           <a:cs typeface="Garamond"/>
                         </a:rPr>
-                        <a:t>(587)</a:t>
+                        <a:t>480</a:t>
                       </a:r>
                     </a:p>
                   </a:txBody>
@@ -15152,7 +15152,7 @@
                           <a:latin typeface="Garamond"/>
                           <a:cs typeface="Garamond"/>
                         </a:rPr>
-                        <a:t>(508)</a:t>
+                        <a:t>508</a:t>
                       </a:r>
                     </a:p>
                   </a:txBody>
@@ -15176,7 +15176,7 @@
                           <a:latin typeface="Garamond"/>
                           <a:cs typeface="Garamond"/>
                         </a:rPr>
-                        <a:t>(600)</a:t>
+                        <a:t>491</a:t>
                       </a:r>
                     </a:p>
                   </a:txBody>
@@ -15200,7 +15200,7 @@
                           <a:latin typeface="Garamond"/>
                           <a:cs typeface="Garamond"/>
                         </a:rPr>
-                        <a:t>(539)</a:t>
+                        <a:t>539</a:t>
                       </a:r>
                     </a:p>
                   </a:txBody>
@@ -15224,7 +15224,7 @@
                           <a:latin typeface="Garamond"/>
                           <a:cs typeface="Garamond"/>
                         </a:rPr>
-                        <a:t>(614)</a:t>
+                        <a:t>502</a:t>
                       </a:r>
                     </a:p>
                   </a:txBody>
@@ -15248,7 +15248,7 @@
                           <a:latin typeface="Garamond"/>
                           <a:cs typeface="Garamond"/>
                         </a:rPr>
-                        <a:t>(571)</a:t>
+                        <a:t>571</a:t>
                       </a:r>
                     </a:p>
                   </a:txBody>
@@ -15272,7 +15272,7 @@
                           <a:latin typeface="Garamond"/>
                           <a:cs typeface="Garamond"/>
                         </a:rPr>
-                        <a:t>(628)</a:t>
+                        <a:t>514</a:t>
                       </a:r>
                     </a:p>
                   </a:txBody>
@@ -15296,7 +15296,7 @@
                           <a:latin typeface="Garamond"/>
                           <a:cs typeface="Garamond"/>
                         </a:rPr>
-                        <a:t>(606)</a:t>
+                        <a:t>606</a:t>
                       </a:r>
                     </a:p>
                   </a:txBody>
@@ -15315,14 +15315,14 @@
                     <a:p>
                       <a:pPr algn="l"/>
                       <a:r>
-                        <a:rPr sz="850" b="1" i="0">
-                          <a:solidFill>
-                            <a:srgbClr val="1F2A44"/>
-                          </a:solidFill>
-                          <a:latin typeface="Garamond"/>
-                          <a:cs typeface="Garamond"/>
-                        </a:rPr>
-                        <a:t>Free cash flow</a:t>
+                        <a:rPr sz="850" b="0" i="0">
+                          <a:solidFill>
+                            <a:srgbClr val="262626"/>
+                          </a:solidFill>
+                          <a:latin typeface="Garamond"/>
+                          <a:cs typeface="Garamond"/>
+                        </a:rPr>
+                        <a:t>Capital expenditures</a:t>
                       </a:r>
                     </a:p>
                   </a:txBody>
@@ -15339,14 +15339,14 @@
                     <a:p>
                       <a:pPr algn="r"/>
                       <a:r>
-                        <a:rPr sz="850" b="1" i="0">
-                          <a:solidFill>
-                            <a:srgbClr val="1F2A44"/>
-                          </a:solidFill>
-                          <a:latin typeface="Garamond"/>
-                          <a:cs typeface="Garamond"/>
-                        </a:rPr>
-                        <a:t>328</a:t>
+                        <a:rPr sz="850" b="0" i="0">
+                          <a:solidFill>
+                            <a:srgbClr val="262626"/>
+                          </a:solidFill>
+                          <a:latin typeface="Garamond"/>
+                          <a:cs typeface="Garamond"/>
+                        </a:rPr>
+                        <a:t>(639)</a:t>
                       </a:r>
                     </a:p>
                   </a:txBody>
@@ -15363,14 +15363,14 @@
                     <a:p>
                       <a:pPr algn="r"/>
                       <a:r>
-                        <a:rPr sz="850" b="1" i="0">
-                          <a:solidFill>
-                            <a:srgbClr val="1F2A44"/>
-                          </a:solidFill>
-                          <a:latin typeface="Garamond"/>
-                          <a:cs typeface="Garamond"/>
-                        </a:rPr>
-                        <a:t>1,644</a:t>
+                        <a:rPr sz="850" b="0" i="0">
+                          <a:solidFill>
+                            <a:srgbClr val="262626"/>
+                          </a:solidFill>
+                          <a:latin typeface="Garamond"/>
+                          <a:cs typeface="Garamond"/>
+                        </a:rPr>
+                        <a:t>(652)</a:t>
                       </a:r>
                     </a:p>
                   </a:txBody>
@@ -15387,14 +15387,14 @@
                     <a:p>
                       <a:pPr algn="r"/>
                       <a:r>
-                        <a:rPr sz="850" b="1" i="0">
-                          <a:solidFill>
-                            <a:srgbClr val="1F2A44"/>
-                          </a:solidFill>
-                          <a:latin typeface="Garamond"/>
-                          <a:cs typeface="Garamond"/>
-                        </a:rPr>
-                        <a:t>1,583</a:t>
+                        <a:rPr sz="850" b="0" i="0">
+                          <a:solidFill>
+                            <a:srgbClr val="262626"/>
+                          </a:solidFill>
+                          <a:latin typeface="Garamond"/>
+                          <a:cs typeface="Garamond"/>
+                        </a:rPr>
+                        <a:t>(689)</a:t>
                       </a:r>
                     </a:p>
                   </a:txBody>
@@ -15411,14 +15411,14 @@
                     <a:p>
                       <a:pPr algn="r"/>
                       <a:r>
-                        <a:rPr sz="850" b="1" i="0">
-                          <a:solidFill>
-                            <a:srgbClr val="1F2A44"/>
-                          </a:solidFill>
-                          <a:latin typeface="Garamond"/>
-                          <a:cs typeface="Garamond"/>
-                        </a:rPr>
-                        <a:t>922</a:t>
+                        <a:rPr sz="850" b="0" i="0">
+                          <a:solidFill>
+                            <a:srgbClr val="262626"/>
+                          </a:solidFill>
+                          <a:latin typeface="Garamond"/>
+                          <a:cs typeface="Garamond"/>
+                        </a:rPr>
+                        <a:t>(681)</a:t>
                       </a:r>
                     </a:p>
                   </a:txBody>
@@ -15435,14 +15435,14 @@
                     <a:p>
                       <a:pPr algn="r"/>
                       <a:r>
-                        <a:rPr sz="850" b="1" i="0">
-                          <a:solidFill>
-                            <a:srgbClr val="1F2A44"/>
-                          </a:solidFill>
-                          <a:latin typeface="Garamond"/>
-                          <a:cs typeface="Garamond"/>
-                        </a:rPr>
-                        <a:t>1,163</a:t>
+                        <a:rPr sz="850" b="0" i="0">
+                          <a:solidFill>
+                            <a:srgbClr val="262626"/>
+                          </a:solidFill>
+                          <a:latin typeface="Garamond"/>
+                          <a:cs typeface="Garamond"/>
+                        </a:rPr>
+                        <a:t>(573)</a:t>
                       </a:r>
                     </a:p>
                   </a:txBody>
@@ -15459,14 +15459,14 @@
                     <a:p>
                       <a:pPr algn="r"/>
                       <a:r>
-                        <a:rPr sz="850" b="1" i="0">
-                          <a:solidFill>
-                            <a:srgbClr val="1F2A44"/>
-                          </a:solidFill>
-                          <a:latin typeface="Garamond"/>
-                          <a:cs typeface="Garamond"/>
-                        </a:rPr>
-                        <a:t>1,340</a:t>
+                        <a:rPr sz="850" b="0" i="0">
+                          <a:solidFill>
+                            <a:srgbClr val="262626"/>
+                          </a:solidFill>
+                          <a:latin typeface="Garamond"/>
+                          <a:cs typeface="Garamond"/>
+                        </a:rPr>
+                        <a:t>(480)</a:t>
                       </a:r>
                     </a:p>
                   </a:txBody>
@@ -15483,14 +15483,14 @@
                     <a:p>
                       <a:pPr algn="r"/>
                       <a:r>
-                        <a:rPr sz="850" b="1" i="0">
-                          <a:solidFill>
-                            <a:srgbClr val="1F2A44"/>
-                          </a:solidFill>
-                          <a:latin typeface="Garamond"/>
-                          <a:cs typeface="Garamond"/>
-                        </a:rPr>
-                        <a:t>1,015</a:t>
+                        <a:rPr sz="850" b="0" i="0">
+                          <a:solidFill>
+                            <a:srgbClr val="262626"/>
+                          </a:solidFill>
+                          <a:latin typeface="Garamond"/>
+                          <a:cs typeface="Garamond"/>
+                        </a:rPr>
+                        <a:t>(587)</a:t>
                       </a:r>
                     </a:p>
                   </a:txBody>
@@ -15507,14 +15507,14 @@
                     <a:p>
                       <a:pPr algn="r"/>
                       <a:r>
-                        <a:rPr sz="850" b="1" i="0">
-                          <a:solidFill>
-                            <a:srgbClr val="1F2A44"/>
-                          </a:solidFill>
-                          <a:latin typeface="Garamond"/>
-                          <a:cs typeface="Garamond"/>
-                        </a:rPr>
-                        <a:t>1,232</a:t>
+                        <a:rPr sz="850" b="0" i="0">
+                          <a:solidFill>
+                            <a:srgbClr val="262626"/>
+                          </a:solidFill>
+                          <a:latin typeface="Garamond"/>
+                          <a:cs typeface="Garamond"/>
+                        </a:rPr>
+                        <a:t>(508)</a:t>
                       </a:r>
                     </a:p>
                   </a:txBody>
@@ -15531,14 +15531,14 @@
                     <a:p>
                       <a:pPr algn="r"/>
                       <a:r>
-                        <a:rPr sz="850" b="1" i="0">
-                          <a:solidFill>
-                            <a:srgbClr val="1F2A44"/>
-                          </a:solidFill>
-                          <a:latin typeface="Garamond"/>
-                          <a:cs typeface="Garamond"/>
-                        </a:rPr>
-                        <a:t>1,077</a:t>
+                        <a:rPr sz="850" b="0" i="0">
+                          <a:solidFill>
+                            <a:srgbClr val="262626"/>
+                          </a:solidFill>
+                          <a:latin typeface="Garamond"/>
+                          <a:cs typeface="Garamond"/>
+                        </a:rPr>
+                        <a:t>(600)</a:t>
                       </a:r>
                     </a:p>
                   </a:txBody>
@@ -15555,14 +15555,14 @@
                     <a:p>
                       <a:pPr algn="r"/>
                       <a:r>
-                        <a:rPr sz="850" b="1" i="0">
-                          <a:solidFill>
-                            <a:srgbClr val="1F2A44"/>
-                          </a:solidFill>
-                          <a:latin typeface="Garamond"/>
-                          <a:cs typeface="Garamond"/>
-                        </a:rPr>
-                        <a:t>1,397</a:t>
+                        <a:rPr sz="850" b="0" i="0">
+                          <a:solidFill>
+                            <a:srgbClr val="262626"/>
+                          </a:solidFill>
+                          <a:latin typeface="Garamond"/>
+                          <a:cs typeface="Garamond"/>
+                        </a:rPr>
+                        <a:t>(539)</a:t>
                       </a:r>
                     </a:p>
                   </a:txBody>
@@ -15579,14 +15579,14 @@
                     <a:p>
                       <a:pPr algn="r"/>
                       <a:r>
-                        <a:rPr sz="850" b="1" i="0">
-                          <a:solidFill>
-                            <a:srgbClr val="1F2A44"/>
-                          </a:solidFill>
-                          <a:latin typeface="Garamond"/>
-                          <a:cs typeface="Garamond"/>
-                        </a:rPr>
-                        <a:t>1,118</a:t>
+                        <a:rPr sz="850" b="0" i="0">
+                          <a:solidFill>
+                            <a:srgbClr val="262626"/>
+                          </a:solidFill>
+                          <a:latin typeface="Garamond"/>
+                          <a:cs typeface="Garamond"/>
+                        </a:rPr>
+                        <a:t>(614)</a:t>
                       </a:r>
                     </a:p>
                   </a:txBody>
@@ -15603,14 +15603,14 @@
                     <a:p>
                       <a:pPr algn="r"/>
                       <a:r>
-                        <a:rPr sz="850" b="1" i="0">
-                          <a:solidFill>
-                            <a:srgbClr val="1F2A44"/>
-                          </a:solidFill>
-                          <a:latin typeface="Garamond"/>
-                          <a:cs typeface="Garamond"/>
-                        </a:rPr>
-                        <a:t>1,580</a:t>
+                        <a:rPr sz="850" b="0" i="0">
+                          <a:solidFill>
+                            <a:srgbClr val="262626"/>
+                          </a:solidFill>
+                          <a:latin typeface="Garamond"/>
+                          <a:cs typeface="Garamond"/>
+                        </a:rPr>
+                        <a:t>(571)</a:t>
                       </a:r>
                     </a:p>
                   </a:txBody>
@@ -15627,14 +15627,14 @@
                     <a:p>
                       <a:pPr algn="r"/>
                       <a:r>
-                        <a:rPr sz="850" b="1" i="0">
-                          <a:solidFill>
-                            <a:srgbClr val="1F2A44"/>
-                          </a:solidFill>
-                          <a:latin typeface="Garamond"/>
-                          <a:cs typeface="Garamond"/>
-                        </a:rPr>
-                        <a:t>1,184</a:t>
+                        <a:rPr sz="850" b="0" i="0">
+                          <a:solidFill>
+                            <a:srgbClr val="262626"/>
+                          </a:solidFill>
+                          <a:latin typeface="Garamond"/>
+                          <a:cs typeface="Garamond"/>
+                        </a:rPr>
+                        <a:t>(628)</a:t>
                       </a:r>
                     </a:p>
                   </a:txBody>
@@ -15651,14 +15651,14 @@
                     <a:p>
                       <a:pPr algn="r"/>
                       <a:r>
-                        <a:rPr sz="850" b="1" i="0">
-                          <a:solidFill>
-                            <a:srgbClr val="1F2A44"/>
-                          </a:solidFill>
-                          <a:latin typeface="Garamond"/>
-                          <a:cs typeface="Garamond"/>
-                        </a:rPr>
-                        <a:t>1,779</a:t>
+                        <a:rPr sz="850" b="0" i="0">
+                          <a:solidFill>
+                            <a:srgbClr val="262626"/>
+                          </a:solidFill>
+                          <a:latin typeface="Garamond"/>
+                          <a:cs typeface="Garamond"/>
+                        </a:rPr>
+                        <a:t>(606)</a:t>
                       </a:r>
                     </a:p>
                   </a:txBody>
@@ -15677,14 +15677,14 @@
                     <a:p>
                       <a:pPr algn="l"/>
                       <a:r>
-                        <a:rPr sz="850" b="0" i="0">
-                          <a:solidFill>
-                            <a:srgbClr val="262626"/>
-                          </a:solidFill>
-                          <a:latin typeface="Garamond"/>
-                          <a:cs typeface="Garamond"/>
-                        </a:rPr>
-                        <a:t>Share repurchases</a:t>
+                        <a:rPr sz="850" b="1" i="0">
+                          <a:solidFill>
+                            <a:srgbClr val="1F2A44"/>
+                          </a:solidFill>
+                          <a:latin typeface="Garamond"/>
+                          <a:cs typeface="Garamond"/>
+                        </a:rPr>
+                        <a:t>Free cash flow</a:t>
                       </a:r>
                     </a:p>
                   </a:txBody>
@@ -15701,14 +15701,14 @@
                     <a:p>
                       <a:pPr algn="r"/>
                       <a:r>
-                        <a:rPr sz="850" b="0" i="0">
-                          <a:solidFill>
-                            <a:srgbClr val="262626"/>
-                          </a:solidFill>
-                          <a:latin typeface="Garamond"/>
-                          <a:cs typeface="Garamond"/>
-                        </a:rPr>
-                        <a:t>(444)</a:t>
+                        <a:rPr sz="850" b="1" i="0">
+                          <a:solidFill>
+                            <a:srgbClr val="1F2A44"/>
+                          </a:solidFill>
+                          <a:latin typeface="Garamond"/>
+                          <a:cs typeface="Garamond"/>
+                        </a:rPr>
+                        <a:t>328</a:t>
                       </a:r>
                     </a:p>
                   </a:txBody>
@@ -15725,14 +15725,14 @@
                     <a:p>
                       <a:pPr algn="r"/>
                       <a:r>
-                        <a:rPr sz="850" b="0" i="0">
-                          <a:solidFill>
-                            <a:srgbClr val="262626"/>
-                          </a:solidFill>
-                          <a:latin typeface="Garamond"/>
-                          <a:cs typeface="Garamond"/>
-                        </a:rPr>
-                        <a:t>(559)</a:t>
+                        <a:rPr sz="850" b="1" i="0">
+                          <a:solidFill>
+                            <a:srgbClr val="1F2A44"/>
+                          </a:solidFill>
+                          <a:latin typeface="Garamond"/>
+                          <a:cs typeface="Garamond"/>
+                        </a:rPr>
+                        <a:t>1,644</a:t>
                       </a:r>
                     </a:p>
                   </a:txBody>
@@ -15749,14 +15749,14 @@
                     <a:p>
                       <a:pPr algn="r"/>
                       <a:r>
-                        <a:rPr sz="850" b="0" i="0">
-                          <a:solidFill>
-                            <a:srgbClr val="262626"/>
-                          </a:solidFill>
-                          <a:latin typeface="Garamond"/>
-                          <a:cs typeface="Garamond"/>
-                        </a:rPr>
-                        <a:t>(1,637)</a:t>
+                        <a:rPr sz="850" b="1" i="0">
+                          <a:solidFill>
+                            <a:srgbClr val="1F2A44"/>
+                          </a:solidFill>
+                          <a:latin typeface="Garamond"/>
+                          <a:cs typeface="Garamond"/>
+                        </a:rPr>
+                        <a:t>1,583</a:t>
                       </a:r>
                     </a:p>
                   </a:txBody>
@@ -15773,14 +15773,14 @@
                     <a:p>
                       <a:pPr algn="r"/>
                       <a:r>
-                        <a:rPr sz="850" b="0" i="0">
-                          <a:solidFill>
-                            <a:srgbClr val="262626"/>
-                          </a:solidFill>
-                          <a:latin typeface="Garamond"/>
-                          <a:cs typeface="Garamond"/>
-                        </a:rPr>
-                        <a:t>(1,178)</a:t>
+                        <a:rPr sz="850" b="1" i="0">
+                          <a:solidFill>
+                            <a:srgbClr val="1F2A44"/>
+                          </a:solidFill>
+                          <a:latin typeface="Garamond"/>
+                          <a:cs typeface="Garamond"/>
+                        </a:rPr>
+                        <a:t>922</a:t>
                       </a:r>
                     </a:p>
                   </a:txBody>
@@ -15797,14 +15797,14 @@
                     <a:p>
                       <a:pPr algn="r"/>
                       <a:r>
-                        <a:rPr sz="850" b="0" i="0">
-                          <a:solidFill>
-                            <a:srgbClr val="262626"/>
-                          </a:solidFill>
-                          <a:latin typeface="Garamond"/>
-                          <a:cs typeface="Garamond"/>
-                        </a:rPr>
-                        <a:t>(500)</a:t>
+                        <a:rPr sz="850" b="1" i="0">
+                          <a:solidFill>
+                            <a:srgbClr val="1F2A44"/>
+                          </a:solidFill>
+                          <a:latin typeface="Garamond"/>
+                          <a:cs typeface="Garamond"/>
+                        </a:rPr>
+                        <a:t>1,163</a:t>
                       </a:r>
                     </a:p>
                   </a:txBody>
@@ -15821,14 +15821,14 @@
                     <a:p>
                       <a:pPr algn="r"/>
                       <a:r>
-                        <a:rPr sz="850" b="0" i="0">
-                          <a:solidFill>
-                            <a:srgbClr val="262626"/>
-                          </a:solidFill>
-                          <a:latin typeface="Garamond"/>
-                          <a:cs typeface="Garamond"/>
-                        </a:rPr>
-                        <a:t>(1,005)</a:t>
+                        <a:rPr sz="850" b="1" i="0">
+                          <a:solidFill>
+                            <a:srgbClr val="1F2A44"/>
+                          </a:solidFill>
+                          <a:latin typeface="Garamond"/>
+                          <a:cs typeface="Garamond"/>
+                        </a:rPr>
+                        <a:t>1,340</a:t>
                       </a:r>
                     </a:p>
                   </a:txBody>
@@ -15845,14 +15845,14 @@
                     <a:p>
                       <a:pPr algn="r"/>
                       <a:r>
-                        <a:rPr sz="850" b="0" i="0">
-                          <a:solidFill>
-                            <a:srgbClr val="262626"/>
-                          </a:solidFill>
-                          <a:latin typeface="Garamond"/>
-                          <a:cs typeface="Garamond"/>
-                        </a:rPr>
-                        <a:t>(500)</a:t>
+                        <a:rPr sz="850" b="1" i="0">
+                          <a:solidFill>
+                            <a:srgbClr val="1F2A44"/>
+                          </a:solidFill>
+                          <a:latin typeface="Garamond"/>
+                          <a:cs typeface="Garamond"/>
+                        </a:rPr>
+                        <a:t>1,015</a:t>
                       </a:r>
                     </a:p>
                   </a:txBody>
@@ -15869,14 +15869,14 @@
                     <a:p>
                       <a:pPr algn="r"/>
                       <a:r>
-                        <a:rPr sz="850" b="0" i="0">
-                          <a:solidFill>
-                            <a:srgbClr val="262626"/>
-                          </a:solidFill>
-                          <a:latin typeface="Garamond"/>
-                          <a:cs typeface="Garamond"/>
-                        </a:rPr>
-                        <a:t>(923)</a:t>
+                        <a:rPr sz="850" b="1" i="0">
+                          <a:solidFill>
+                            <a:srgbClr val="1F2A44"/>
+                          </a:solidFill>
+                          <a:latin typeface="Garamond"/>
+                          <a:cs typeface="Garamond"/>
+                        </a:rPr>
+                        <a:t>1,232</a:t>
                       </a:r>
                     </a:p>
                   </a:txBody>
@@ -15893,14 +15893,14 @@
                     <a:p>
                       <a:pPr algn="r"/>
                       <a:r>
-                        <a:rPr sz="850" b="0" i="0">
-                          <a:solidFill>
-                            <a:srgbClr val="262626"/>
-                          </a:solidFill>
-                          <a:latin typeface="Garamond"/>
-                          <a:cs typeface="Garamond"/>
-                        </a:rPr>
-                        <a:t>(500)</a:t>
+                        <a:rPr sz="850" b="1" i="0">
+                          <a:solidFill>
+                            <a:srgbClr val="1F2A44"/>
+                          </a:solidFill>
+                          <a:latin typeface="Garamond"/>
+                          <a:cs typeface="Garamond"/>
+                        </a:rPr>
+                        <a:t>1,077</a:t>
                       </a:r>
                     </a:p>
                   </a:txBody>
@@ -15917,14 +15917,14 @@
                     <a:p>
                       <a:pPr algn="r"/>
                       <a:r>
-                        <a:rPr sz="850" b="0" i="0">
-                          <a:solidFill>
-                            <a:srgbClr val="262626"/>
-                          </a:solidFill>
-                          <a:latin typeface="Garamond"/>
-                          <a:cs typeface="Garamond"/>
-                        </a:rPr>
-                        <a:t>(1,048)</a:t>
+                        <a:rPr sz="850" b="1" i="0">
+                          <a:solidFill>
+                            <a:srgbClr val="1F2A44"/>
+                          </a:solidFill>
+                          <a:latin typeface="Garamond"/>
+                          <a:cs typeface="Garamond"/>
+                        </a:rPr>
+                        <a:t>1,397</a:t>
                       </a:r>
                     </a:p>
                   </a:txBody>
@@ -15941,14 +15941,14 @@
                     <a:p>
                       <a:pPr algn="r"/>
                       <a:r>
-                        <a:rPr sz="850" b="0" i="0">
-                          <a:solidFill>
-                            <a:srgbClr val="262626"/>
-                          </a:solidFill>
-                          <a:latin typeface="Garamond"/>
-                          <a:cs typeface="Garamond"/>
-                        </a:rPr>
-                        <a:t>(500)</a:t>
+                        <a:rPr sz="850" b="1" i="0">
+                          <a:solidFill>
+                            <a:srgbClr val="1F2A44"/>
+                          </a:solidFill>
+                          <a:latin typeface="Garamond"/>
+                          <a:cs typeface="Garamond"/>
+                        </a:rPr>
+                        <a:t>1,118</a:t>
                       </a:r>
                     </a:p>
                   </a:txBody>
@@ -15965,14 +15965,14 @@
                     <a:p>
                       <a:pPr algn="r"/>
                       <a:r>
-                        <a:rPr sz="850" b="0" i="0">
-                          <a:solidFill>
-                            <a:srgbClr val="262626"/>
-                          </a:solidFill>
-                          <a:latin typeface="Garamond"/>
-                          <a:cs typeface="Garamond"/>
-                        </a:rPr>
-                        <a:t>(1,185)</a:t>
+                        <a:rPr sz="850" b="1" i="0">
+                          <a:solidFill>
+                            <a:srgbClr val="1F2A44"/>
+                          </a:solidFill>
+                          <a:latin typeface="Garamond"/>
+                          <a:cs typeface="Garamond"/>
+                        </a:rPr>
+                        <a:t>1,580</a:t>
                       </a:r>
                     </a:p>
                   </a:txBody>
@@ -15989,14 +15989,14 @@
                     <a:p>
                       <a:pPr algn="r"/>
                       <a:r>
-                        <a:rPr sz="850" b="0" i="0">
-                          <a:solidFill>
-                            <a:srgbClr val="262626"/>
-                          </a:solidFill>
-                          <a:latin typeface="Garamond"/>
-                          <a:cs typeface="Garamond"/>
-                        </a:rPr>
-                        <a:t>(500)</a:t>
+                        <a:rPr sz="850" b="1" i="0">
+                          <a:solidFill>
+                            <a:srgbClr val="1F2A44"/>
+                          </a:solidFill>
+                          <a:latin typeface="Garamond"/>
+                          <a:cs typeface="Garamond"/>
+                        </a:rPr>
+                        <a:t>1,184</a:t>
                       </a:r>
                     </a:p>
                   </a:txBody>
@@ -16013,14 +16013,14 @@
                     <a:p>
                       <a:pPr algn="r"/>
                       <a:r>
-                        <a:rPr sz="850" b="0" i="0">
-                          <a:solidFill>
-                            <a:srgbClr val="262626"/>
-                          </a:solidFill>
-                          <a:latin typeface="Garamond"/>
-                          <a:cs typeface="Garamond"/>
-                        </a:rPr>
-                        <a:t>(1,335)</a:t>
+                        <a:rPr sz="850" b="1" i="0">
+                          <a:solidFill>
+                            <a:srgbClr val="1F2A44"/>
+                          </a:solidFill>
+                          <a:latin typeface="Garamond"/>
+                          <a:cs typeface="Garamond"/>
+                        </a:rPr>
+                        <a:t>1,779</a:t>
                       </a:r>
                     </a:p>
                   </a:txBody>
@@ -16046,7 +16046,7 @@
                           <a:latin typeface="Garamond"/>
                           <a:cs typeface="Garamond"/>
                         </a:rPr>
-                        <a:t>D&amp;A</a:t>
+                        <a:t>Share repurchases (CFF)</a:t>
                       </a:r>
                     </a:p>
                   </a:txBody>
@@ -16070,7 +16070,7 @@
                           <a:latin typeface="Garamond"/>
                           <a:cs typeface="Garamond"/>
                         </a:rPr>
-                        <a:t>292</a:t>
+                        <a:t>(444)</a:t>
                       </a:r>
                     </a:p>
                   </a:txBody>
@@ -16094,7 +16094,7 @@
                           <a:latin typeface="Garamond"/>
                           <a:cs typeface="Garamond"/>
                         </a:rPr>
-                        <a:t>379</a:t>
+                        <a:t>(559)</a:t>
                       </a:r>
                     </a:p>
                   </a:txBody>
@@ -16118,7 +16118,7 @@
                           <a:latin typeface="Garamond"/>
                           <a:cs typeface="Garamond"/>
                         </a:rPr>
-                        <a:t>447</a:t>
+                        <a:t>(1,637)</a:t>
                       </a:r>
                     </a:p>
                   </a:txBody>
@@ -16142,7 +16142,7 @@
                           <a:latin typeface="Garamond"/>
                           <a:cs typeface="Garamond"/>
                         </a:rPr>
-                        <a:t>496</a:t>
+                        <a:t>(1,178)</a:t>
                       </a:r>
                     </a:p>
                   </a:txBody>
@@ -16166,7 +16166,7 @@
                           <a:latin typeface="Garamond"/>
                           <a:cs typeface="Garamond"/>
                         </a:rPr>
-                        <a:t>469</a:t>
+                        <a:t>(500)</a:t>
                       </a:r>
                     </a:p>
                   </a:txBody>
@@ -16190,7 +16190,7 @@
                           <a:latin typeface="Garamond"/>
                           <a:cs typeface="Garamond"/>
                         </a:rPr>
-                        <a:t>480</a:t>
+                        <a:t>(1,005)</a:t>
                       </a:r>
                     </a:p>
                   </a:txBody>
@@ -16214,7 +16214,7 @@
                           <a:latin typeface="Garamond"/>
                           <a:cs typeface="Garamond"/>
                         </a:rPr>
-                        <a:t>480</a:t>
+                        <a:t>(500)</a:t>
                       </a:r>
                     </a:p>
                   </a:txBody>
@@ -16238,7 +16238,7 @@
                           <a:latin typeface="Garamond"/>
                           <a:cs typeface="Garamond"/>
                         </a:rPr>
-                        <a:t>508</a:t>
+                        <a:t>(923)</a:t>
                       </a:r>
                     </a:p>
                   </a:txBody>
@@ -16262,7 +16262,7 @@
                           <a:latin typeface="Garamond"/>
                           <a:cs typeface="Garamond"/>
                         </a:rPr>
-                        <a:t>491</a:t>
+                        <a:t>(500)</a:t>
                       </a:r>
                     </a:p>
                   </a:txBody>
@@ -16286,7 +16286,7 @@
                           <a:latin typeface="Garamond"/>
                           <a:cs typeface="Garamond"/>
                         </a:rPr>
-                        <a:t>539</a:t>
+                        <a:t>(1,048)</a:t>
                       </a:r>
                     </a:p>
                   </a:txBody>
@@ -16310,7 +16310,7 @@
                           <a:latin typeface="Garamond"/>
                           <a:cs typeface="Garamond"/>
                         </a:rPr>
-                        <a:t>502</a:t>
+                        <a:t>(500)</a:t>
                       </a:r>
                     </a:p>
                   </a:txBody>
@@ -16334,7 +16334,7 @@
                           <a:latin typeface="Garamond"/>
                           <a:cs typeface="Garamond"/>
                         </a:rPr>
-                        <a:t>571</a:t>
+                        <a:t>(1,185)</a:t>
                       </a:r>
                     </a:p>
                   </a:txBody>
@@ -16358,7 +16358,7 @@
                           <a:latin typeface="Garamond"/>
                           <a:cs typeface="Garamond"/>
                         </a:rPr>
-                        <a:t>514</a:t>
+                        <a:t>(500)</a:t>
                       </a:r>
                     </a:p>
                   </a:txBody>
@@ -16382,7 +16382,7 @@
                           <a:latin typeface="Garamond"/>
                           <a:cs typeface="Garamond"/>
                         </a:rPr>
-                        <a:t>606</a:t>
+                        <a:t>(1,335)</a:t>
                       </a:r>
                     </a:p>
                   </a:txBody>
@@ -16436,7 +16436,7 @@
                 <a:latin typeface="Garamond"/>
                 <a:cs typeface="Garamond"/>
               </a:rPr>
-              <a:t>FCF = CFO + capex (capex shown as outflow). Bull uses same CFS line definitions as base and 10-K.</a:t>
+              <a:t>FCF rows tie to DCF unlevered FCF. Share repurchases are financing (CFF) — shown for 10-K / 3-statement comparability and cash bridge; they do not change DCF implied price (basic share count).</a:t>
             </a:r>
           </a:p>
         </p:txBody>

--- a/LULU/LULU_Investment_Pitch_Deck.pptx
+++ b/LULU/LULU_Investment_Pitch_Deck.pptx
@@ -7567,7 +7567,7 @@
         <p:spPr>
           <a:xfrm>
             <a:off x="457200" y="1024128"/>
-            <a:ext cx="5532120" cy="1417320"/>
+            <a:ext cx="5532120" cy="1691640"/>
           </a:xfrm>
           <a:prstGeom prst="rect">
             <a:avLst/>
@@ -7630,14 +7630,14 @@
               <a:buChar char="•"/>
             </a:pPr>
             <a:r>
-              <a:rPr sz="1050" b="0" i="0">
+              <a:rPr sz="1000" b="0" i="0">
                 <a:solidFill>
                   <a:srgbClr val="262626"/>
                 </a:solidFill>
                 <a:latin typeface="Garamond"/>
                 <a:cs typeface="Garamond"/>
               </a:rPr>
-              <a:t>Reported figures from Forms 10-K; FY2025 year ended February 1, 2026</a:t>
+              <a:t>Net revenue: FY22 $8,111M → FY25 $11,103M</a:t>
             </a:r>
           </a:p>
           <a:p>
@@ -7652,14 +7652,14 @@
               <a:buChar char="•"/>
             </a:pPr>
             <a:r>
-              <a:rPr sz="1050" b="0" i="0">
+              <a:rPr sz="1000" b="0" i="0">
                 <a:solidFill>
                   <a:srgbClr val="262626"/>
                 </a:solidFill>
                 <a:latin typeface="Garamond"/>
                 <a:cs typeface="Garamond"/>
               </a:rPr>
-              <a:t>Revenue $8,111M → $11,103M; OM peaked 23.7% (FY24); EPS $6.68 → $13.26</a:t>
+              <a:t>Operating margin %: FY22 16.4% → FY25 19.9% (peak 23.7% FY24)</a:t>
             </a:r>
           </a:p>
           <a:p>
@@ -7674,14 +7674,36 @@
               <a:buChar char="•"/>
             </a:pPr>
             <a:r>
-              <a:rPr sz="1050" b="0" i="0">
+              <a:rPr sz="1000" b="0" i="0">
                 <a:solidFill>
                   <a:srgbClr val="262626"/>
                 </a:solidFill>
                 <a:latin typeface="Garamond"/>
                 <a:cs typeface="Garamond"/>
               </a:rPr>
-              <a:t>Share count 128.0M → 119.1M via buybacks</a:t>
+              <a:t>Net income: FY22 855M → FY25 1,579M</a:t>
+            </a:r>
+          </a:p>
+          <a:p>
+            <a:pPr algn="l" indent="-152400" marL="177800">
+              <a:spcBef>
+                <a:spcPts val="0"/>
+              </a:spcBef>
+              <a:spcAft>
+                <a:spcPts val="200"/>
+              </a:spcAft>
+              <a:buFont typeface="Garamond"/>
+              <a:buChar char="•"/>
+            </a:pPr>
+            <a:r>
+              <a:rPr sz="1000" b="0" i="0">
+                <a:solidFill>
+                  <a:srgbClr val="262626"/>
+                </a:solidFill>
+                <a:latin typeface="Garamond"/>
+                <a:cs typeface="Garamond"/>
+              </a:rPr>
+              <a:t>Diluted EPS: FY22 $6.68 → FY25 $13.26</a:t>
             </a:r>
           </a:p>
         </p:txBody>
@@ -7695,7 +7717,7 @@
         <p:spPr>
           <a:xfrm>
             <a:off x="6126480" y="1024128"/>
-            <a:ext cx="5532120" cy="1417320"/>
+            <a:ext cx="5532120" cy="1691640"/>
           </a:xfrm>
           <a:prstGeom prst="rect">
             <a:avLst/>
@@ -7758,14 +7780,14 @@
               <a:buChar char="•"/>
             </a:pPr>
             <a:r>
-              <a:rPr sz="1050" b="0" i="0">
+              <a:rPr sz="1000" b="0" i="0">
                 <a:solidFill>
                   <a:srgbClr val="FFFFFF"/>
                 </a:solidFill>
                 <a:latin typeface="Garamond"/>
                 <a:cs typeface="Garamond"/>
               </a:rPr>
-              <a:t>Base: FY26 10,425M rev / 14.5% OM → FY30 11,418M / 15.5%</a:t>
+              <a:t>Net revenue: base FY26 10,425M → FY30 11,418M; bull FY26 10,658M → FY30 13,456M</a:t>
             </a:r>
           </a:p>
           <a:p>
@@ -7780,14 +7802,14 @@
               <a:buChar char="•"/>
             </a:pPr>
             <a:r>
-              <a:rPr sz="1050" b="0" i="0">
+              <a:rPr sz="1000" b="0" i="0">
                 <a:solidFill>
                   <a:srgbClr val="FFFFFF"/>
                 </a:solidFill>
                 <a:latin typeface="Garamond"/>
                 <a:cs typeface="Garamond"/>
               </a:rPr>
-              <a:t>Bull: FY26 10,658M (−4% guide) → FY30 13,456M; OM 15.8% → 19.0%</a:t>
+              <a:t>Operating margin %: base FY26 14.5% → FY30 15.5%; bull FY26 15.8% → FY30 19.0%</a:t>
             </a:r>
           </a:p>
           <a:p>
@@ -7802,14 +7824,36 @@
               <a:buChar char="•"/>
             </a:pPr>
             <a:r>
-              <a:rPr sz="1050" b="0" i="0">
+              <a:rPr sz="1000" b="0" i="0">
                 <a:solidFill>
                   <a:srgbClr val="FFFFFF"/>
                 </a:solidFill>
                 <a:latin typeface="Garamond"/>
                 <a:cs typeface="Garamond"/>
               </a:rPr>
-              <a:t>Bull EPS $10.89 → $19.14 (DCF implied price $202)</a:t>
+              <a:t>Net income: base FY26 1,089M → FY30 1,256M; bull FY26 1,242M → FY30 1,859M</a:t>
+            </a:r>
+          </a:p>
+          <a:p>
+            <a:pPr algn="l" indent="-152400" marL="177800">
+              <a:spcBef>
+                <a:spcPts val="0"/>
+              </a:spcBef>
+              <a:spcAft>
+                <a:spcPts val="200"/>
+              </a:spcAft>
+              <a:buFont typeface="Garamond"/>
+              <a:buChar char="•"/>
+            </a:pPr>
+            <a:r>
+              <a:rPr sz="1000" b="0" i="0">
+                <a:solidFill>
+                  <a:srgbClr val="FFFFFF"/>
+                </a:solidFill>
+                <a:latin typeface="Garamond"/>
+                <a:cs typeface="Garamond"/>
+              </a:rPr>
+              <a:t>Diluted EPS: base FY26 $9.55 → FY30 $12.93; bull FY26 $10.89 → FY30 $19.14</a:t>
             </a:r>
           </a:p>
         </p:txBody>
@@ -7823,8 +7867,8 @@
           <p:nvPr/>
         </p:nvGraphicFramePr>
         <p:xfrm>
-          <a:off x="457200" y="2578608"/>
-          <a:ext cx="11292828" cy="3246120"/>
+          <a:off x="457200" y="2788920"/>
+          <a:ext cx="11292828" cy="3063240"/>
         </p:xfrm>
         <a:graphic>
           <a:graphicData uri="http://schemas.openxmlformats.org/drawingml/2006/table">
@@ -7849,7 +7893,7 @@
                 <a:gridCol w="653142"/>
                 <a:gridCol w="653142"/>
               </a:tblGrid>
-              <a:tr h="463731">
+              <a:tr h="437605">
                 <a:tc>
                   <a:txBody>
                     <a:bodyPr/>
@@ -8211,7 +8255,7 @@
                   </a:tcPr>
                 </a:tc>
               </a:tr>
-              <a:tr h="463731">
+              <a:tr h="437605">
                 <a:tc>
                   <a:txBody>
                     <a:bodyPr/>
@@ -8573,7 +8617,7 @@
                   </a:tcPr>
                 </a:tc>
               </a:tr>
-              <a:tr h="463731">
+              <a:tr h="437605">
                 <a:tc>
                   <a:txBody>
                     <a:bodyPr/>
@@ -8935,7 +8979,7 @@
                   </a:tcPr>
                 </a:tc>
               </a:tr>
-              <a:tr h="463731">
+              <a:tr h="437605">
                 <a:tc>
                   <a:txBody>
                     <a:bodyPr/>
@@ -9297,7 +9341,7 @@
                   </a:tcPr>
                 </a:tc>
               </a:tr>
-              <a:tr h="463731">
+              <a:tr h="437605">
                 <a:tc>
                   <a:txBody>
                     <a:bodyPr/>
@@ -9659,7 +9703,7 @@
                   </a:tcPr>
                 </a:tc>
               </a:tr>
-              <a:tr h="463731">
+              <a:tr h="437605">
                 <a:tc>
                   <a:txBody>
                     <a:bodyPr/>
@@ -10021,7 +10065,7 @@
                   </a:tcPr>
                 </a:tc>
               </a:tr>
-              <a:tr h="463734">
+              <a:tr h="437610">
                 <a:tc>
                   <a:txBody>
                     <a:bodyPr/>
@@ -10753,7 +10797,7 @@
         <p:spPr>
           <a:xfrm>
             <a:off x="457200" y="1024128"/>
-            <a:ext cx="5532120" cy="1417320"/>
+            <a:ext cx="5532120" cy="1691640"/>
           </a:xfrm>
           <a:prstGeom prst="rect">
             <a:avLst/>
@@ -10816,14 +10860,14 @@
               <a:buChar char="•"/>
             </a:pPr>
             <a:r>
-              <a:rPr sz="1050" b="0" i="0">
+              <a:rPr sz="1000" b="0" i="0">
                 <a:solidFill>
                   <a:srgbClr val="262626"/>
                 </a:solidFill>
                 <a:latin typeface="Garamond"/>
                 <a:cs typeface="Garamond"/>
               </a:rPr>
-              <a:t>No funded debt; FY25 cash $1,807M; total assets $8,457M</a:t>
+              <a:t>Cash &amp; equivalents: FY22 1,155M → FY25 1,807M</a:t>
             </a:r>
           </a:p>
           <a:p>
@@ -10838,14 +10882,14 @@
               <a:buChar char="•"/>
             </a:pPr>
             <a:r>
-              <a:rPr sz="1050" b="0" i="0">
+              <a:rPr sz="1000" b="0" i="0">
                 <a:solidFill>
                   <a:srgbClr val="262626"/>
                 </a:solidFill>
                 <a:latin typeface="Garamond"/>
                 <a:cs typeface="Garamond"/>
               </a:rPr>
-              <a:t>Net-cash balance sheet underpins downside at ~10x earnings</a:t>
+              <a:t>Total assets: FY22 5,607M → FY25 8,457M</a:t>
             </a:r>
           </a:p>
           <a:p>
@@ -10860,14 +10904,36 @@
               <a:buChar char="•"/>
             </a:pPr>
             <a:r>
-              <a:rPr sz="1050" b="0" i="0">
+              <a:rPr sz="1000" b="0" i="0">
                 <a:solidFill>
                   <a:srgbClr val="262626"/>
                 </a:solidFill>
                 <a:latin typeface="Garamond"/>
                 <a:cs typeface="Garamond"/>
               </a:rPr>
-              <a:t>Lease-backed ROU assets ~$1.6B — not traditional debt</a:t>
+              <a:t>Total equity: FY22 3,149M → FY25 4,962M</a:t>
+            </a:r>
+          </a:p>
+          <a:p>
+            <a:pPr algn="l" indent="-152400" marL="177800">
+              <a:spcBef>
+                <a:spcPts val="0"/>
+              </a:spcBef>
+              <a:spcAft>
+                <a:spcPts val="200"/>
+              </a:spcAft>
+              <a:buFont typeface="Garamond"/>
+              <a:buChar char="•"/>
+            </a:pPr>
+            <a:r>
+              <a:rPr sz="1000" b="0" i="0">
+                <a:solidFill>
+                  <a:srgbClr val="262626"/>
+                </a:solidFill>
+                <a:latin typeface="Garamond"/>
+                <a:cs typeface="Garamond"/>
+              </a:rPr>
+              <a:t>Funded debt: $0 across FY22–FY25 (net-cash)</a:t>
             </a:r>
           </a:p>
         </p:txBody>
@@ -10881,7 +10947,7 @@
         <p:spPr>
           <a:xfrm>
             <a:off x="6126480" y="1024128"/>
-            <a:ext cx="5532120" cy="1417320"/>
+            <a:ext cx="5532120" cy="1691640"/>
           </a:xfrm>
           <a:prstGeom prst="rect">
             <a:avLst/>
@@ -10929,7 +10995,7 @@
                 <a:latin typeface="Garamond"/>
                 <a:cs typeface="Garamond"/>
               </a:rPr>
-              <a:t>FORECAST (FY2026E–FY2030E) — base vs bull</a:t>
+              <a:t>FORECAST (FY2026E–FY2030E) — base (G) vs bull (H)</a:t>
             </a:r>
           </a:p>
           <a:p>
@@ -10944,14 +11010,14 @@
               <a:buChar char="•"/>
             </a:pPr>
             <a:r>
-              <a:rPr sz="1050" b="0" i="0">
+              <a:rPr sz="1000" b="0" i="0">
                 <a:solidFill>
                   <a:srgbClr val="FFFFFF"/>
                 </a:solidFill>
                 <a:latin typeface="Garamond"/>
                 <a:cs typeface="Garamond"/>
               </a:rPr>
-              <a:t>Base cash 2,470M → 4,864M ($500M/yr buybacks)</a:t>
+              <a:t>Cash &amp; equivalents: base FY26 2,470M → FY30 4,864M; bull FY26 2,142M → FY30 3,639M</a:t>
             </a:r>
           </a:p>
           <a:p>
@@ -10966,14 +11032,14 @@
               <a:buChar char="•"/>
             </a:pPr>
             <a:r>
-              <a:rPr sz="1050" b="0" i="0">
+              <a:rPr sz="1000" b="0" i="0">
                 <a:solidFill>
                   <a:srgbClr val="FFFFFF"/>
                 </a:solidFill>
                 <a:latin typeface="Garamond"/>
                 <a:cs typeface="Garamond"/>
               </a:rPr>
-              <a:t>Bull cash 2,142M → 3,639M (75% FCF to buybacks)</a:t>
+              <a:t>Total assets: base FY26 8,892M → FY30 12,067M; bull FY26 9,091M → FY30 14,221M</a:t>
             </a:r>
           </a:p>
           <a:p>
@@ -10988,14 +11054,36 @@
               <a:buChar char="•"/>
             </a:pPr>
             <a:r>
-              <a:rPr sz="1050" b="0" i="0">
+              <a:rPr sz="1000" b="0" i="0">
                 <a:solidFill>
                   <a:srgbClr val="FFFFFF"/>
                 </a:solidFill>
                 <a:latin typeface="Garamond"/>
                 <a:cs typeface="Garamond"/>
               </a:rPr>
-              <a:t>Bull BS scaled from base WC drivers at bull revenue; cash from FCF waterfall</a:t>
+              <a:t>Total equity: base FY26 5,613M → FY30 8,481M; bull FY26 5,738M → FY30 9,995M</a:t>
+            </a:r>
+          </a:p>
+          <a:p>
+            <a:pPr algn="l" indent="-152400" marL="177800">
+              <a:spcBef>
+                <a:spcPts val="0"/>
+              </a:spcBef>
+              <a:spcAft>
+                <a:spcPts val="200"/>
+              </a:spcAft>
+              <a:buFont typeface="Garamond"/>
+              <a:buChar char="•"/>
+            </a:pPr>
+            <a:r>
+              <a:rPr sz="1000" b="0" i="0">
+                <a:solidFill>
+                  <a:srgbClr val="FFFFFF"/>
+                </a:solidFill>
+                <a:latin typeface="Garamond"/>
+                <a:cs typeface="Garamond"/>
+              </a:rPr>
+              <a:t>Funded debt: base $0; bull $0 (no term debt in model)</a:t>
             </a:r>
           </a:p>
         </p:txBody>
@@ -11009,8 +11097,8 @@
           <p:nvPr/>
         </p:nvGraphicFramePr>
         <p:xfrm>
-          <a:off x="457200" y="2578608"/>
-          <a:ext cx="11292828" cy="3246120"/>
+          <a:off x="457200" y="2788920"/>
+          <a:ext cx="11292828" cy="3063240"/>
         </p:xfrm>
         <a:graphic>
           <a:graphicData uri="http://schemas.openxmlformats.org/drawingml/2006/table">
@@ -11035,7 +11123,7 @@
                 <a:gridCol w="653142"/>
                 <a:gridCol w="653142"/>
               </a:tblGrid>
-              <a:tr h="463731">
+              <a:tr h="437605">
                 <a:tc>
                   <a:txBody>
                     <a:bodyPr/>
@@ -11397,7 +11485,7 @@
                   </a:tcPr>
                 </a:tc>
               </a:tr>
-              <a:tr h="463731">
+              <a:tr h="437605">
                 <a:tc>
                   <a:txBody>
                     <a:bodyPr/>
@@ -11759,7 +11847,7 @@
                   </a:tcPr>
                 </a:tc>
               </a:tr>
-              <a:tr h="463731">
+              <a:tr h="437605">
                 <a:tc>
                   <a:txBody>
                     <a:bodyPr/>
@@ -12121,7 +12209,7 @@
                   </a:tcPr>
                 </a:tc>
               </a:tr>
-              <a:tr h="463731">
+              <a:tr h="437605">
                 <a:tc>
                   <a:txBody>
                     <a:bodyPr/>
@@ -12483,7 +12571,7 @@
                   </a:tcPr>
                 </a:tc>
               </a:tr>
-              <a:tr h="463731">
+              <a:tr h="437605">
                 <a:tc>
                   <a:txBody>
                     <a:bodyPr/>
@@ -12845,7 +12933,7 @@
                   </a:tcPr>
                 </a:tc>
               </a:tr>
-              <a:tr h="463731">
+              <a:tr h="437605">
                 <a:tc>
                   <a:txBody>
                     <a:bodyPr/>
@@ -13207,7 +13295,7 @@
                   </a:tcPr>
                 </a:tc>
               </a:tr>
-              <a:tr h="463734">
+              <a:tr h="437610">
                 <a:tc>
                   <a:txBody>
                     <a:bodyPr/>
@@ -13939,7 +14027,7 @@
         <p:spPr>
           <a:xfrm>
             <a:off x="457200" y="1024128"/>
-            <a:ext cx="5532120" cy="1417320"/>
+            <a:ext cx="5532120" cy="1691640"/>
           </a:xfrm>
           <a:prstGeom prst="rect">
             <a:avLst/>
@@ -14002,14 +14090,14 @@
               <a:buChar char="•"/>
             </a:pPr>
             <a:r>
-              <a:rPr sz="1050" b="0" i="0">
+              <a:rPr sz="1000" b="0" i="0">
                 <a:solidFill>
                   <a:srgbClr val="262626"/>
                 </a:solidFill>
                 <a:latin typeface="Garamond"/>
                 <a:cs typeface="Garamond"/>
               </a:rPr>
-              <a:t>FY25 CFO $1,603M; capex ($681M) → ~$922M FCF</a:t>
+              <a:t>Cash from operations: FY22 966M → FY25 1,602M</a:t>
             </a:r>
           </a:p>
           <a:p>
@@ -14024,14 +14112,14 @@
               <a:buChar char="•"/>
             </a:pPr>
             <a:r>
-              <a:rPr sz="1050" b="0" i="0">
+              <a:rPr sz="1000" b="0" i="0">
                 <a:solidFill>
                   <a:srgbClr val="262626"/>
                 </a:solidFill>
                 <a:latin typeface="Garamond"/>
                 <a:cs typeface="Garamond"/>
               </a:rPr>
-              <a:t>Buybacks ($1,178M) FY25 are CFF — reported on 10-K, not in DCF UFCF</a:t>
+              <a:t>Capital expenditures: FY25 (681) outflow</a:t>
             </a:r>
           </a:p>
           <a:p>
@@ -14046,14 +14134,36 @@
               <a:buChar char="•"/>
             </a:pPr>
             <a:r>
-              <a:rPr sz="1050" b="0" i="0">
+              <a:rPr sz="1000" b="0" i="0">
                 <a:solidFill>
                   <a:srgbClr val="262626"/>
                 </a:solidFill>
                 <a:latin typeface="Garamond"/>
                 <a:cs typeface="Garamond"/>
               </a:rPr>
-              <a:t>FCF = CFO − capex; same operating definition as forecast rows above buybacks</a:t>
+              <a:t>Free cash flow: FY25 922M (CFO − capex)</a:t>
+            </a:r>
+          </a:p>
+          <a:p>
+            <a:pPr algn="l" indent="-152400" marL="177800">
+              <a:spcBef>
+                <a:spcPts val="0"/>
+              </a:spcBef>
+              <a:spcAft>
+                <a:spcPts val="200"/>
+              </a:spcAft>
+              <a:buFont typeface="Garamond"/>
+              <a:buChar char="•"/>
+            </a:pPr>
+            <a:r>
+              <a:rPr sz="1000" b="0" i="0">
+                <a:solidFill>
+                  <a:srgbClr val="262626"/>
+                </a:solidFill>
+                <a:latin typeface="Garamond"/>
+                <a:cs typeface="Garamond"/>
+              </a:rPr>
+              <a:t>Share repurchases (CFF): FY25 (1,178) outflow</a:t>
             </a:r>
           </a:p>
         </p:txBody>
@@ -14067,7 +14177,7 @@
         <p:spPr>
           <a:xfrm>
             <a:off x="6126480" y="1024128"/>
-            <a:ext cx="5532120" cy="1417320"/>
+            <a:ext cx="5532120" cy="1691640"/>
           </a:xfrm>
           <a:prstGeom prst="rect">
             <a:avLst/>
@@ -14115,7 +14225,7 @@
                 <a:latin typeface="Garamond"/>
                 <a:cs typeface="Garamond"/>
               </a:rPr>
-              <a:t>FORECAST (FY2026E–FY2030E) — base vs bull</a:t>
+              <a:t>FORECAST (FY2026E–FY2030E) — base (G) vs bull (H)</a:t>
             </a:r>
           </a:p>
           <a:p>
@@ -14130,14 +14240,14 @@
               <a:buChar char="•"/>
             </a:pPr>
             <a:r>
-              <a:rPr sz="1050" b="0" i="0">
+              <a:rPr sz="1000" b="0" i="0">
                 <a:solidFill>
                   <a:srgbClr val="FFFFFF"/>
                 </a:solidFill>
                 <a:latin typeface="Garamond"/>
                 <a:cs typeface="Garamond"/>
               </a:rPr>
-              <a:t>FCF (DCF input): base $1,163M → $1,184M</a:t>
+              <a:t>Cash from operations: base FY26 1,736M → FY30 1,812M; bull FY26 1,820M → FY30 2,385M</a:t>
             </a:r>
           </a:p>
           <a:p>
@@ -14152,14 +14262,14 @@
               <a:buChar char="•"/>
             </a:pPr>
             <a:r>
-              <a:rPr sz="1050" b="0" i="0">
+              <a:rPr sz="1000" b="0" i="0">
                 <a:solidFill>
                   <a:srgbClr val="FFFFFF"/>
                 </a:solidFill>
                 <a:latin typeface="Garamond"/>
                 <a:cs typeface="Garamond"/>
               </a:rPr>
-              <a:t>Bull FCF $1,340M → $1,779M (Scenarios col H)</a:t>
+              <a:t>Capital expenditures: base FY26 (573) → FY30 (628); bull FY26 (480) → FY30 (606)</a:t>
             </a:r>
           </a:p>
           <a:p>
@@ -14174,14 +14284,36 @@
               <a:buChar char="•"/>
             </a:pPr>
             <a:r>
-              <a:rPr sz="1050" b="0" i="0">
+              <a:rPr sz="1000" b="0" i="0">
                 <a:solidFill>
                   <a:srgbClr val="FFFFFF"/>
                 </a:solidFill>
                 <a:latin typeface="Garamond"/>
                 <a:cs typeface="Garamond"/>
               </a:rPr>
-              <a:t>Buybacks below = 3-statement CFF only; DCF IV uses basic 111.4M shares (no retirements)</a:t>
+              <a:t>Free cash flow: base FY26 1,163M → FY30 1,184M; bull FY26 1,340M → FY30 1,779M</a:t>
+            </a:r>
+          </a:p>
+          <a:p>
+            <a:pPr algn="l" indent="-152400" marL="177800">
+              <a:spcBef>
+                <a:spcPts val="0"/>
+              </a:spcBef>
+              <a:spcAft>
+                <a:spcPts val="200"/>
+              </a:spcAft>
+              <a:buFont typeface="Garamond"/>
+              <a:buChar char="•"/>
+            </a:pPr>
+            <a:r>
+              <a:rPr sz="1000" b="0" i="0">
+                <a:solidFill>
+                  <a:srgbClr val="FFFFFF"/>
+                </a:solidFill>
+                <a:latin typeface="Garamond"/>
+                <a:cs typeface="Garamond"/>
+              </a:rPr>
+              <a:t>Share repurchases (CFF): base FY26 (500) → FY30 (500); bull FY26 (1,005) → FY30 (1,335)</a:t>
             </a:r>
           </a:p>
         </p:txBody>
@@ -14195,8 +14327,8 @@
           <p:nvPr/>
         </p:nvGraphicFramePr>
         <p:xfrm>
-          <a:off x="457200" y="2578608"/>
-          <a:ext cx="11292828" cy="3246120"/>
+          <a:off x="457200" y="2788920"/>
+          <a:ext cx="11292828" cy="3063240"/>
         </p:xfrm>
         <a:graphic>
           <a:graphicData uri="http://schemas.openxmlformats.org/drawingml/2006/table">
@@ -14221,7 +14353,7 @@
                 <a:gridCol w="653142"/>
                 <a:gridCol w="653142"/>
               </a:tblGrid>
-              <a:tr h="541020">
+              <a:tr h="510540">
                 <a:tc>
                   <a:txBody>
                     <a:bodyPr/>
@@ -14583,7 +14715,7 @@
                   </a:tcPr>
                 </a:tc>
               </a:tr>
-              <a:tr h="541020">
+              <a:tr h="510540">
                 <a:tc>
                   <a:txBody>
                     <a:bodyPr/>
@@ -14945,7 +15077,7 @@
                   </a:tcPr>
                 </a:tc>
               </a:tr>
-              <a:tr h="541020">
+              <a:tr h="510540">
                 <a:tc>
                   <a:txBody>
                     <a:bodyPr/>
@@ -15307,7 +15439,7 @@
                   </a:tcPr>
                 </a:tc>
               </a:tr>
-              <a:tr h="541020">
+              <a:tr h="510540">
                 <a:tc>
                   <a:txBody>
                     <a:bodyPr/>
@@ -15669,7 +15801,7 @@
                   </a:tcPr>
                 </a:tc>
               </a:tr>
-              <a:tr h="541020">
+              <a:tr h="510540">
                 <a:tc>
                   <a:txBody>
                     <a:bodyPr/>
@@ -16031,7 +16163,7 @@
                   </a:tcPr>
                 </a:tc>
               </a:tr>
-              <a:tr h="541020">
+              <a:tr h="510540">
                 <a:tc>
                   <a:txBody>
                     <a:bodyPr/>

--- a/LULU/LULU_Investment_Pitch_Deck.pptx
+++ b/LULU/LULU_Investment_Pitch_Deck.pptx
@@ -7567,7 +7567,7 @@
         <p:spPr>
           <a:xfrm>
             <a:off x="457200" y="1024128"/>
-            <a:ext cx="5532120" cy="1691640"/>
+            <a:ext cx="5532120" cy="2240280"/>
           </a:xfrm>
           <a:prstGeom prst="rect">
             <a:avLst/>
@@ -7603,12 +7603,12 @@
                 <a:spcPts val="0"/>
               </a:spcBef>
               <a:spcAft>
-                <a:spcPts val="300"/>
-              </a:spcAft>
-              <a:buNone/>
-            </a:pPr>
-            <a:r>
-              <a:rPr sz="1150" b="1" i="0">
+                <a:spcPts val="200"/>
+              </a:spcAft>
+              <a:buNone/>
+            </a:pPr>
+            <a:r>
+              <a:rPr sz="1100" b="1" i="0">
                 <a:solidFill>
                   <a:srgbClr val="990000"/>
                 </a:solidFill>
@@ -7624,13 +7624,13 @@
                 <a:spcPts val="0"/>
               </a:spcBef>
               <a:spcAft>
-                <a:spcPts val="200"/>
+                <a:spcPts val="100"/>
               </a:spcAft>
               <a:buFont typeface="Garamond"/>
               <a:buChar char="•"/>
             </a:pPr>
             <a:r>
-              <a:rPr sz="1000" b="0" i="0">
+              <a:rPr sz="900" b="0" i="0">
                 <a:solidFill>
                   <a:srgbClr val="262626"/>
                 </a:solidFill>
@@ -7646,20 +7646,20 @@
                 <a:spcPts val="0"/>
               </a:spcBef>
               <a:spcAft>
-                <a:spcPts val="200"/>
+                <a:spcPts val="100"/>
               </a:spcAft>
               <a:buFont typeface="Garamond"/>
               <a:buChar char="•"/>
             </a:pPr>
             <a:r>
-              <a:rPr sz="1000" b="0" i="0">
+              <a:rPr sz="900" b="0" i="0">
                 <a:solidFill>
                   <a:srgbClr val="262626"/>
                 </a:solidFill>
                 <a:latin typeface="Garamond"/>
                 <a:cs typeface="Garamond"/>
               </a:rPr>
-              <a:t>Operating margin %: FY22 16.4% → FY25 19.9% (peak 23.7% FY24)</a:t>
+              <a:t>Gross profit: FY22 4,492M → FY25 6,284M</a:t>
             </a:r>
           </a:p>
           <a:p>
@@ -7668,20 +7668,20 @@
                 <a:spcPts val="0"/>
               </a:spcBef>
               <a:spcAft>
-                <a:spcPts val="200"/>
+                <a:spcPts val="100"/>
               </a:spcAft>
               <a:buFont typeface="Garamond"/>
               <a:buChar char="•"/>
             </a:pPr>
             <a:r>
-              <a:rPr sz="1000" b="0" i="0">
+              <a:rPr sz="900" b="0" i="0">
                 <a:solidFill>
                   <a:srgbClr val="262626"/>
                 </a:solidFill>
                 <a:latin typeface="Garamond"/>
                 <a:cs typeface="Garamond"/>
               </a:rPr>
-              <a:t>Net income: FY22 855M → FY25 1,579M</a:t>
+              <a:t>Operating income: FY22 1,328M → FY25 2,211M</a:t>
             </a:r>
           </a:p>
           <a:p>
@@ -7690,13 +7690,57 @@
                 <a:spcPts val="0"/>
               </a:spcBef>
               <a:spcAft>
-                <a:spcPts val="200"/>
+                <a:spcPts val="100"/>
               </a:spcAft>
               <a:buFont typeface="Garamond"/>
               <a:buChar char="•"/>
             </a:pPr>
             <a:r>
-              <a:rPr sz="1000" b="0" i="0">
+              <a:rPr sz="900" b="0" i="0">
+                <a:solidFill>
+                  <a:srgbClr val="262626"/>
+                </a:solidFill>
+                <a:latin typeface="Garamond"/>
+                <a:cs typeface="Garamond"/>
+              </a:rPr>
+              <a:t>Operating margin %: FY22 16.4% → FY25 19.9% (peak 23.7% FY24)</a:t>
+            </a:r>
+          </a:p>
+          <a:p>
+            <a:pPr algn="l" indent="-152400" marL="177800">
+              <a:spcBef>
+                <a:spcPts val="0"/>
+              </a:spcBef>
+              <a:spcAft>
+                <a:spcPts val="100"/>
+              </a:spcAft>
+              <a:buFont typeface="Garamond"/>
+              <a:buChar char="•"/>
+            </a:pPr>
+            <a:r>
+              <a:rPr sz="900" b="0" i="0">
+                <a:solidFill>
+                  <a:srgbClr val="262626"/>
+                </a:solidFill>
+                <a:latin typeface="Garamond"/>
+                <a:cs typeface="Garamond"/>
+              </a:rPr>
+              <a:t>Net income: FY22 855M → FY25 1,579M</a:t>
+            </a:r>
+          </a:p>
+          <a:p>
+            <a:pPr algn="l" indent="-152400" marL="177800">
+              <a:spcBef>
+                <a:spcPts val="0"/>
+              </a:spcBef>
+              <a:spcAft>
+                <a:spcPts val="100"/>
+              </a:spcAft>
+              <a:buFont typeface="Garamond"/>
+              <a:buChar char="•"/>
+            </a:pPr>
+            <a:r>
+              <a:rPr sz="900" b="0" i="0">
                 <a:solidFill>
                   <a:srgbClr val="262626"/>
                 </a:solidFill>
@@ -7717,7 +7761,7 @@
         <p:spPr>
           <a:xfrm>
             <a:off x="6126480" y="1024128"/>
-            <a:ext cx="5532120" cy="1691640"/>
+            <a:ext cx="5532120" cy="2240280"/>
           </a:xfrm>
           <a:prstGeom prst="rect">
             <a:avLst/>
@@ -7753,12 +7797,12 @@
                 <a:spcPts val="0"/>
               </a:spcBef>
               <a:spcAft>
-                <a:spcPts val="300"/>
-              </a:spcAft>
-              <a:buNone/>
-            </a:pPr>
-            <a:r>
-              <a:rPr sz="1150" b="1" i="0">
+                <a:spcPts val="200"/>
+              </a:spcAft>
+              <a:buNone/>
+            </a:pPr>
+            <a:r>
+              <a:rPr sz="1100" b="1" i="0">
                 <a:solidFill>
                   <a:srgbClr val="FFC72C"/>
                 </a:solidFill>
@@ -7774,13 +7818,13 @@
                 <a:spcPts val="0"/>
               </a:spcBef>
               <a:spcAft>
-                <a:spcPts val="200"/>
+                <a:spcPts val="100"/>
               </a:spcAft>
               <a:buFont typeface="Garamond"/>
               <a:buChar char="•"/>
             </a:pPr>
             <a:r>
-              <a:rPr sz="1000" b="0" i="0">
+              <a:rPr sz="900" b="0" i="0">
                 <a:solidFill>
                   <a:srgbClr val="FFFFFF"/>
                 </a:solidFill>
@@ -7796,20 +7840,20 @@
                 <a:spcPts val="0"/>
               </a:spcBef>
               <a:spcAft>
-                <a:spcPts val="200"/>
+                <a:spcPts val="100"/>
               </a:spcAft>
               <a:buFont typeface="Garamond"/>
               <a:buChar char="•"/>
             </a:pPr>
             <a:r>
-              <a:rPr sz="1000" b="0" i="0">
+              <a:rPr sz="900" b="0" i="0">
                 <a:solidFill>
                   <a:srgbClr val="FFFFFF"/>
                 </a:solidFill>
                 <a:latin typeface="Garamond"/>
                 <a:cs typeface="Garamond"/>
               </a:rPr>
-              <a:t>Operating margin %: base FY26 14.5% → FY30 15.5%; bull FY26 15.8% → FY30 19.0%</a:t>
+              <a:t>Gross profit: base FY26 6,035M → FY30 6,463M; bull FY26 6,129M → FY30 7,737M</a:t>
             </a:r>
           </a:p>
           <a:p>
@@ -7818,20 +7862,20 @@
                 <a:spcPts val="0"/>
               </a:spcBef>
               <a:spcAft>
-                <a:spcPts val="200"/>
+                <a:spcPts val="100"/>
               </a:spcAft>
               <a:buFont typeface="Garamond"/>
               <a:buChar char="•"/>
             </a:pPr>
             <a:r>
-              <a:rPr sz="1000" b="0" i="0">
+              <a:rPr sz="900" b="0" i="0">
                 <a:solidFill>
                   <a:srgbClr val="FFFFFF"/>
                 </a:solidFill>
                 <a:latin typeface="Garamond"/>
                 <a:cs typeface="Garamond"/>
               </a:rPr>
-              <a:t>Net income: base FY26 1,089M → FY30 1,256M; bull FY26 1,242M → FY30 1,859M</a:t>
+              <a:t>Operating income: base FY26 1,511M → FY30 1,770M; bull FY26 1,680M → FY30 2,557M</a:t>
             </a:r>
           </a:p>
           <a:p>
@@ -7840,13 +7884,57 @@
                 <a:spcPts val="0"/>
               </a:spcBef>
               <a:spcAft>
-                <a:spcPts val="200"/>
+                <a:spcPts val="100"/>
               </a:spcAft>
               <a:buFont typeface="Garamond"/>
               <a:buChar char="•"/>
             </a:pPr>
             <a:r>
-              <a:rPr sz="1000" b="0" i="0">
+              <a:rPr sz="900" b="0" i="0">
+                <a:solidFill>
+                  <a:srgbClr val="FFFFFF"/>
+                </a:solidFill>
+                <a:latin typeface="Garamond"/>
+                <a:cs typeface="Garamond"/>
+              </a:rPr>
+              <a:t>Operating margin %: base FY26 14.5% → FY30 15.5%; bull FY26 15.8% → FY30 19.0%</a:t>
+            </a:r>
+          </a:p>
+          <a:p>
+            <a:pPr algn="l" indent="-152400" marL="177800">
+              <a:spcBef>
+                <a:spcPts val="0"/>
+              </a:spcBef>
+              <a:spcAft>
+                <a:spcPts val="100"/>
+              </a:spcAft>
+              <a:buFont typeface="Garamond"/>
+              <a:buChar char="•"/>
+            </a:pPr>
+            <a:r>
+              <a:rPr sz="900" b="0" i="0">
+                <a:solidFill>
+                  <a:srgbClr val="FFFFFF"/>
+                </a:solidFill>
+                <a:latin typeface="Garamond"/>
+                <a:cs typeface="Garamond"/>
+              </a:rPr>
+              <a:t>Net income: base FY26 1,089M → FY30 1,256M; bull FY26 1,242M → FY30 1,859M</a:t>
+            </a:r>
+          </a:p>
+          <a:p>
+            <a:pPr algn="l" indent="-152400" marL="177800">
+              <a:spcBef>
+                <a:spcPts val="0"/>
+              </a:spcBef>
+              <a:spcAft>
+                <a:spcPts val="100"/>
+              </a:spcAft>
+              <a:buFont typeface="Garamond"/>
+              <a:buChar char="•"/>
+            </a:pPr>
+            <a:r>
+              <a:rPr sz="900" b="0" i="0">
                 <a:solidFill>
                   <a:srgbClr val="FFFFFF"/>
                 </a:solidFill>
@@ -7867,8 +7955,8 @@
           <p:nvPr/>
         </p:nvGraphicFramePr>
         <p:xfrm>
-          <a:off x="457200" y="2788920"/>
-          <a:ext cx="11292828" cy="3063240"/>
+          <a:off x="457200" y="3364992"/>
+          <a:ext cx="11292828" cy="2697480"/>
         </p:xfrm>
         <a:graphic>
           <a:graphicData uri="http://schemas.openxmlformats.org/drawingml/2006/table">
@@ -7893,7 +7981,7 @@
                 <a:gridCol w="653142"/>
                 <a:gridCol w="653142"/>
               </a:tblGrid>
-              <a:tr h="437605">
+              <a:tr h="385354">
                 <a:tc>
                   <a:txBody>
                     <a:bodyPr/>
@@ -8255,7 +8343,7 @@
                   </a:tcPr>
                 </a:tc>
               </a:tr>
-              <a:tr h="437605">
+              <a:tr h="385354">
                 <a:tc>
                   <a:txBody>
                     <a:bodyPr/>
@@ -8617,7 +8705,7 @@
                   </a:tcPr>
                 </a:tc>
               </a:tr>
-              <a:tr h="437605">
+              <a:tr h="385354">
                 <a:tc>
                   <a:txBody>
                     <a:bodyPr/>
@@ -8979,7 +9067,7 @@
                   </a:tcPr>
                 </a:tc>
               </a:tr>
-              <a:tr h="437605">
+              <a:tr h="385354">
                 <a:tc>
                   <a:txBody>
                     <a:bodyPr/>
@@ -9341,7 +9429,7 @@
                   </a:tcPr>
                 </a:tc>
               </a:tr>
-              <a:tr h="437605">
+              <a:tr h="385354">
                 <a:tc>
                   <a:txBody>
                     <a:bodyPr/>
@@ -9703,7 +9791,7 @@
                   </a:tcPr>
                 </a:tc>
               </a:tr>
-              <a:tr h="437605">
+              <a:tr h="385354">
                 <a:tc>
                   <a:txBody>
                     <a:bodyPr/>
@@ -10065,7 +10153,7 @@
                   </a:tcPr>
                 </a:tc>
               </a:tr>
-              <a:tr h="437610">
+              <a:tr h="385356">
                 <a:tc>
                   <a:txBody>
                     <a:bodyPr/>
@@ -10797,7 +10885,7 @@
         <p:spPr>
           <a:xfrm>
             <a:off x="457200" y="1024128"/>
-            <a:ext cx="5532120" cy="1691640"/>
+            <a:ext cx="5532120" cy="2240280"/>
           </a:xfrm>
           <a:prstGeom prst="rect">
             <a:avLst/>
@@ -10833,12 +10921,12 @@
                 <a:spcPts val="0"/>
               </a:spcBef>
               <a:spcAft>
-                <a:spcPts val="300"/>
-              </a:spcAft>
-              <a:buNone/>
-            </a:pPr>
-            <a:r>
-              <a:rPr sz="1150" b="1" i="0">
+                <a:spcPts val="200"/>
+              </a:spcAft>
+              <a:buNone/>
+            </a:pPr>
+            <a:r>
+              <a:rPr sz="1100" b="1" i="0">
                 <a:solidFill>
                   <a:srgbClr val="990000"/>
                 </a:solidFill>
@@ -10854,13 +10942,13 @@
                 <a:spcPts val="0"/>
               </a:spcBef>
               <a:spcAft>
-                <a:spcPts val="200"/>
+                <a:spcPts val="100"/>
               </a:spcAft>
               <a:buFont typeface="Garamond"/>
               <a:buChar char="•"/>
             </a:pPr>
             <a:r>
-              <a:rPr sz="1000" b="0" i="0">
+              <a:rPr sz="900" b="0" i="0">
                 <a:solidFill>
                   <a:srgbClr val="262626"/>
                 </a:solidFill>
@@ -10876,20 +10964,20 @@
                 <a:spcPts val="0"/>
               </a:spcBef>
               <a:spcAft>
-                <a:spcPts val="200"/>
+                <a:spcPts val="100"/>
               </a:spcAft>
               <a:buFont typeface="Garamond"/>
               <a:buChar char="•"/>
             </a:pPr>
             <a:r>
-              <a:rPr sz="1000" b="0" i="0">
+              <a:rPr sz="900" b="0" i="0">
                 <a:solidFill>
                   <a:srgbClr val="262626"/>
                 </a:solidFill>
                 <a:latin typeface="Garamond"/>
                 <a:cs typeface="Garamond"/>
               </a:rPr>
-              <a:t>Total assets: FY22 5,607M → FY25 8,457M</a:t>
+              <a:t>Inventories: FY22 1,447M → FY25 1,701M</a:t>
             </a:r>
           </a:p>
           <a:p>
@@ -10898,20 +10986,20 @@
                 <a:spcPts val="0"/>
               </a:spcBef>
               <a:spcAft>
-                <a:spcPts val="200"/>
+                <a:spcPts val="100"/>
               </a:spcAft>
               <a:buFont typeface="Garamond"/>
               <a:buChar char="•"/>
             </a:pPr>
             <a:r>
-              <a:rPr sz="1000" b="0" i="0">
+              <a:rPr sz="900" b="0" i="0">
                 <a:solidFill>
                   <a:srgbClr val="262626"/>
                 </a:solidFill>
                 <a:latin typeface="Garamond"/>
                 <a:cs typeface="Garamond"/>
               </a:rPr>
-              <a:t>Total equity: FY22 3,149M → FY25 4,962M</a:t>
+              <a:t>Total assets: FY22 5,607M → FY25 8,457M</a:t>
             </a:r>
           </a:p>
           <a:p>
@@ -10920,13 +11008,57 @@
                 <a:spcPts val="0"/>
               </a:spcBef>
               <a:spcAft>
-                <a:spcPts val="200"/>
+                <a:spcPts val="100"/>
               </a:spcAft>
               <a:buFont typeface="Garamond"/>
               <a:buChar char="•"/>
             </a:pPr>
             <a:r>
-              <a:rPr sz="1000" b="0" i="0">
+              <a:rPr sz="900" b="0" i="0">
+                <a:solidFill>
+                  <a:srgbClr val="262626"/>
+                </a:solidFill>
+                <a:latin typeface="Garamond"/>
+                <a:cs typeface="Garamond"/>
+              </a:rPr>
+              <a:t>Total liabilities: FY22 2,458M → FY25 3,495M</a:t>
+            </a:r>
+          </a:p>
+          <a:p>
+            <a:pPr algn="l" indent="-152400" marL="177800">
+              <a:spcBef>
+                <a:spcPts val="0"/>
+              </a:spcBef>
+              <a:spcAft>
+                <a:spcPts val="100"/>
+              </a:spcAft>
+              <a:buFont typeface="Garamond"/>
+              <a:buChar char="•"/>
+            </a:pPr>
+            <a:r>
+              <a:rPr sz="900" b="0" i="0">
+                <a:solidFill>
+                  <a:srgbClr val="262626"/>
+                </a:solidFill>
+                <a:latin typeface="Garamond"/>
+                <a:cs typeface="Garamond"/>
+              </a:rPr>
+              <a:t>Total equity: FY22 3,149M → FY25 4,962M</a:t>
+            </a:r>
+          </a:p>
+          <a:p>
+            <a:pPr algn="l" indent="-152400" marL="177800">
+              <a:spcBef>
+                <a:spcPts val="0"/>
+              </a:spcBef>
+              <a:spcAft>
+                <a:spcPts val="100"/>
+              </a:spcAft>
+              <a:buFont typeface="Garamond"/>
+              <a:buChar char="•"/>
+            </a:pPr>
+            <a:r>
+              <a:rPr sz="900" b="0" i="0">
                 <a:solidFill>
                   <a:srgbClr val="262626"/>
                 </a:solidFill>
@@ -10947,7 +11079,7 @@
         <p:spPr>
           <a:xfrm>
             <a:off x="6126480" y="1024128"/>
-            <a:ext cx="5532120" cy="1691640"/>
+            <a:ext cx="5532120" cy="2240280"/>
           </a:xfrm>
           <a:prstGeom prst="rect">
             <a:avLst/>
@@ -10983,12 +11115,12 @@
                 <a:spcPts val="0"/>
               </a:spcBef>
               <a:spcAft>
-                <a:spcPts val="300"/>
-              </a:spcAft>
-              <a:buNone/>
-            </a:pPr>
-            <a:r>
-              <a:rPr sz="1150" b="1" i="0">
+                <a:spcPts val="200"/>
+              </a:spcAft>
+              <a:buNone/>
+            </a:pPr>
+            <a:r>
+              <a:rPr sz="1100" b="1" i="0">
                 <a:solidFill>
                   <a:srgbClr val="FFC72C"/>
                 </a:solidFill>
@@ -11004,13 +11136,13 @@
                 <a:spcPts val="0"/>
               </a:spcBef>
               <a:spcAft>
-                <a:spcPts val="200"/>
+                <a:spcPts val="100"/>
               </a:spcAft>
               <a:buFont typeface="Garamond"/>
               <a:buChar char="•"/>
             </a:pPr>
             <a:r>
-              <a:rPr sz="1000" b="0" i="0">
+              <a:rPr sz="900" b="0" i="0">
                 <a:solidFill>
                   <a:srgbClr val="FFFFFF"/>
                 </a:solidFill>
@@ -11026,20 +11158,20 @@
                 <a:spcPts val="0"/>
               </a:spcBef>
               <a:spcAft>
-                <a:spcPts val="200"/>
+                <a:spcPts val="100"/>
               </a:spcAft>
               <a:buFont typeface="Garamond"/>
               <a:buChar char="•"/>
             </a:pPr>
             <a:r>
-              <a:rPr sz="1000" b="0" i="0">
+              <a:rPr sz="900" b="0" i="0">
                 <a:solidFill>
                   <a:srgbClr val="FFFFFF"/>
                 </a:solidFill>
                 <a:latin typeface="Garamond"/>
                 <a:cs typeface="Garamond"/>
               </a:rPr>
-              <a:t>Total assets: base FY26 8,892M → FY30 12,067M; bull FY26 9,091M → FY30 14,221M</a:t>
+              <a:t>Inventories: base FY26 1,538M → FY30 1,635M; bull FY26 1,572M → FY30 1,927M</a:t>
             </a:r>
           </a:p>
           <a:p>
@@ -11048,20 +11180,20 @@
                 <a:spcPts val="0"/>
               </a:spcBef>
               <a:spcAft>
-                <a:spcPts val="200"/>
+                <a:spcPts val="100"/>
               </a:spcAft>
               <a:buFont typeface="Garamond"/>
               <a:buChar char="•"/>
             </a:pPr>
             <a:r>
-              <a:rPr sz="1000" b="0" i="0">
+              <a:rPr sz="900" b="0" i="0">
                 <a:solidFill>
                   <a:srgbClr val="FFFFFF"/>
                 </a:solidFill>
                 <a:latin typeface="Garamond"/>
                 <a:cs typeface="Garamond"/>
               </a:rPr>
-              <a:t>Total equity: base FY26 5,613M → FY30 8,481M; bull FY26 5,738M → FY30 9,995M</a:t>
+              <a:t>Total assets: base FY26 8,892M → FY30 12,067M; bull FY26 9,091M → FY30 14,221M</a:t>
             </a:r>
           </a:p>
           <a:p>
@@ -11070,13 +11202,57 @@
                 <a:spcPts val="0"/>
               </a:spcBef>
               <a:spcAft>
-                <a:spcPts val="200"/>
+                <a:spcPts val="100"/>
               </a:spcAft>
               <a:buFont typeface="Garamond"/>
               <a:buChar char="•"/>
             </a:pPr>
             <a:r>
-              <a:rPr sz="1000" b="0" i="0">
+              <a:rPr sz="900" b="0" i="0">
+                <a:solidFill>
+                  <a:srgbClr val="FFFFFF"/>
+                </a:solidFill>
+                <a:latin typeface="Garamond"/>
+                <a:cs typeface="Garamond"/>
+              </a:rPr>
+              <a:t>Total liabilities: base FY26 3,279M → FY30 3,586M; bull FY26 3,352M → FY30 4,226M</a:t>
+            </a:r>
+          </a:p>
+          <a:p>
+            <a:pPr algn="l" indent="-152400" marL="177800">
+              <a:spcBef>
+                <a:spcPts val="0"/>
+              </a:spcBef>
+              <a:spcAft>
+                <a:spcPts val="100"/>
+              </a:spcAft>
+              <a:buFont typeface="Garamond"/>
+              <a:buChar char="•"/>
+            </a:pPr>
+            <a:r>
+              <a:rPr sz="900" b="0" i="0">
+                <a:solidFill>
+                  <a:srgbClr val="FFFFFF"/>
+                </a:solidFill>
+                <a:latin typeface="Garamond"/>
+                <a:cs typeface="Garamond"/>
+              </a:rPr>
+              <a:t>Total equity: base FY26 5,613M → FY30 8,481M; bull FY26 5,738M → FY30 9,995M</a:t>
+            </a:r>
+          </a:p>
+          <a:p>
+            <a:pPr algn="l" indent="-152400" marL="177800">
+              <a:spcBef>
+                <a:spcPts val="0"/>
+              </a:spcBef>
+              <a:spcAft>
+                <a:spcPts val="100"/>
+              </a:spcAft>
+              <a:buFont typeface="Garamond"/>
+              <a:buChar char="•"/>
+            </a:pPr>
+            <a:r>
+              <a:rPr sz="900" b="0" i="0">
                 <a:solidFill>
                   <a:srgbClr val="FFFFFF"/>
                 </a:solidFill>
@@ -11097,8 +11273,8 @@
           <p:nvPr/>
         </p:nvGraphicFramePr>
         <p:xfrm>
-          <a:off x="457200" y="2788920"/>
-          <a:ext cx="11292828" cy="3063240"/>
+          <a:off x="457200" y="3364992"/>
+          <a:ext cx="11292828" cy="2697480"/>
         </p:xfrm>
         <a:graphic>
           <a:graphicData uri="http://schemas.openxmlformats.org/drawingml/2006/table">
@@ -11123,7 +11299,7 @@
                 <a:gridCol w="653142"/>
                 <a:gridCol w="653142"/>
               </a:tblGrid>
-              <a:tr h="437605">
+              <a:tr h="385354">
                 <a:tc>
                   <a:txBody>
                     <a:bodyPr/>
@@ -11485,7 +11661,7 @@
                   </a:tcPr>
                 </a:tc>
               </a:tr>
-              <a:tr h="437605">
+              <a:tr h="385354">
                 <a:tc>
                   <a:txBody>
                     <a:bodyPr/>
@@ -11847,7 +12023,7 @@
                   </a:tcPr>
                 </a:tc>
               </a:tr>
-              <a:tr h="437605">
+              <a:tr h="385354">
                 <a:tc>
                   <a:txBody>
                     <a:bodyPr/>
@@ -12209,7 +12385,7 @@
                   </a:tcPr>
                 </a:tc>
               </a:tr>
-              <a:tr h="437605">
+              <a:tr h="385354">
                 <a:tc>
                   <a:txBody>
                     <a:bodyPr/>
@@ -12571,7 +12747,7 @@
                   </a:tcPr>
                 </a:tc>
               </a:tr>
-              <a:tr h="437605">
+              <a:tr h="385354">
                 <a:tc>
                   <a:txBody>
                     <a:bodyPr/>
@@ -12933,7 +13109,7 @@
                   </a:tcPr>
                 </a:tc>
               </a:tr>
-              <a:tr h="437605">
+              <a:tr h="385354">
                 <a:tc>
                   <a:txBody>
                     <a:bodyPr/>
@@ -13295,7 +13471,7 @@
                   </a:tcPr>
                 </a:tc>
               </a:tr>
-              <a:tr h="437610">
+              <a:tr h="385356">
                 <a:tc>
                   <a:txBody>
                     <a:bodyPr/>
@@ -14027,7 +14203,7 @@
         <p:spPr>
           <a:xfrm>
             <a:off x="457200" y="1024128"/>
-            <a:ext cx="5532120" cy="1691640"/>
+            <a:ext cx="5532120" cy="2240280"/>
           </a:xfrm>
           <a:prstGeom prst="rect">
             <a:avLst/>
@@ -14063,12 +14239,12 @@
                 <a:spcPts val="0"/>
               </a:spcBef>
               <a:spcAft>
-                <a:spcPts val="300"/>
-              </a:spcAft>
-              <a:buNone/>
-            </a:pPr>
-            <a:r>
-              <a:rPr sz="1150" b="1" i="0">
+                <a:spcPts val="200"/>
+              </a:spcAft>
+              <a:buNone/>
+            </a:pPr>
+            <a:r>
+              <a:rPr sz="1100" b="1" i="0">
                 <a:solidFill>
                   <a:srgbClr val="990000"/>
                 </a:solidFill>
@@ -14084,7 +14260,7 @@
                 <a:spcPts val="0"/>
               </a:spcBef>
               <a:spcAft>
-                <a:spcPts val="200"/>
+                <a:spcPts val="100"/>
               </a:spcAft>
               <a:buFont typeface="Garamond"/>
               <a:buChar char="•"/>
@@ -14106,7 +14282,7 @@
                 <a:spcPts val="0"/>
               </a:spcBef>
               <a:spcAft>
-                <a:spcPts val="200"/>
+                <a:spcPts val="100"/>
               </a:spcAft>
               <a:buFont typeface="Garamond"/>
               <a:buChar char="•"/>
@@ -14119,7 +14295,7 @@
                 <a:latin typeface="Garamond"/>
                 <a:cs typeface="Garamond"/>
               </a:rPr>
-              <a:t>Capital expenditures: FY25 (681) outflow</a:t>
+              <a:t>D&amp;A (add-back): FY22 292M → FY25 496M</a:t>
             </a:r>
           </a:p>
           <a:p>
@@ -14128,7 +14304,7 @@
                 <a:spcPts val="0"/>
               </a:spcBef>
               <a:spcAft>
-                <a:spcPts val="200"/>
+                <a:spcPts val="100"/>
               </a:spcAft>
               <a:buFont typeface="Garamond"/>
               <a:buChar char="•"/>
@@ -14141,6 +14317,28 @@
                 <a:latin typeface="Garamond"/>
                 <a:cs typeface="Garamond"/>
               </a:rPr>
+              <a:t>Capital expenditures: FY25 (681) outflow</a:t>
+            </a:r>
+          </a:p>
+          <a:p>
+            <a:pPr algn="l" indent="-152400" marL="177800">
+              <a:spcBef>
+                <a:spcPts val="0"/>
+              </a:spcBef>
+              <a:spcAft>
+                <a:spcPts val="100"/>
+              </a:spcAft>
+              <a:buFont typeface="Garamond"/>
+              <a:buChar char="•"/>
+            </a:pPr>
+            <a:r>
+              <a:rPr sz="1000" b="0" i="0">
+                <a:solidFill>
+                  <a:srgbClr val="262626"/>
+                </a:solidFill>
+                <a:latin typeface="Garamond"/>
+                <a:cs typeface="Garamond"/>
+              </a:rPr>
               <a:t>Free cash flow: FY25 922M (CFO − capex)</a:t>
             </a:r>
           </a:p>
@@ -14150,7 +14348,7 @@
                 <a:spcPts val="0"/>
               </a:spcBef>
               <a:spcAft>
-                <a:spcPts val="200"/>
+                <a:spcPts val="100"/>
               </a:spcAft>
               <a:buFont typeface="Garamond"/>
               <a:buChar char="•"/>
@@ -14177,7 +14375,7 @@
         <p:spPr>
           <a:xfrm>
             <a:off x="6126480" y="1024128"/>
-            <a:ext cx="5532120" cy="1691640"/>
+            <a:ext cx="5532120" cy="2240280"/>
           </a:xfrm>
           <a:prstGeom prst="rect">
             <a:avLst/>
@@ -14213,12 +14411,12 @@
                 <a:spcPts val="0"/>
               </a:spcBef>
               <a:spcAft>
-                <a:spcPts val="300"/>
-              </a:spcAft>
-              <a:buNone/>
-            </a:pPr>
-            <a:r>
-              <a:rPr sz="1150" b="1" i="0">
+                <a:spcPts val="200"/>
+              </a:spcAft>
+              <a:buNone/>
+            </a:pPr>
+            <a:r>
+              <a:rPr sz="1100" b="1" i="0">
                 <a:solidFill>
                   <a:srgbClr val="FFC72C"/>
                 </a:solidFill>
@@ -14234,7 +14432,7 @@
                 <a:spcPts val="0"/>
               </a:spcBef>
               <a:spcAft>
-                <a:spcPts val="200"/>
+                <a:spcPts val="100"/>
               </a:spcAft>
               <a:buFont typeface="Garamond"/>
               <a:buChar char="•"/>
@@ -14256,7 +14454,7 @@
                 <a:spcPts val="0"/>
               </a:spcBef>
               <a:spcAft>
-                <a:spcPts val="200"/>
+                <a:spcPts val="100"/>
               </a:spcAft>
               <a:buFont typeface="Garamond"/>
               <a:buChar char="•"/>
@@ -14269,7 +14467,7 @@
                 <a:latin typeface="Garamond"/>
                 <a:cs typeface="Garamond"/>
               </a:rPr>
-              <a:t>Capital expenditures: base FY26 (573) → FY30 (628); bull FY26 (480) → FY30 (606)</a:t>
+              <a:t>D&amp;A (add-back): base FY26 469M → FY30 514M; bull FY26 480M → FY30 606M</a:t>
             </a:r>
           </a:p>
           <a:p>
@@ -14278,7 +14476,7 @@
                 <a:spcPts val="0"/>
               </a:spcBef>
               <a:spcAft>
-                <a:spcPts val="200"/>
+                <a:spcPts val="100"/>
               </a:spcAft>
               <a:buFont typeface="Garamond"/>
               <a:buChar char="•"/>
@@ -14291,6 +14489,28 @@
                 <a:latin typeface="Garamond"/>
                 <a:cs typeface="Garamond"/>
               </a:rPr>
+              <a:t>Capital expenditures: base FY26 (573) → FY30 (628); bull FY26 (480) → FY30 (606)</a:t>
+            </a:r>
+          </a:p>
+          <a:p>
+            <a:pPr algn="l" indent="-152400" marL="177800">
+              <a:spcBef>
+                <a:spcPts val="0"/>
+              </a:spcBef>
+              <a:spcAft>
+                <a:spcPts val="100"/>
+              </a:spcAft>
+              <a:buFont typeface="Garamond"/>
+              <a:buChar char="•"/>
+            </a:pPr>
+            <a:r>
+              <a:rPr sz="1000" b="0" i="0">
+                <a:solidFill>
+                  <a:srgbClr val="FFFFFF"/>
+                </a:solidFill>
+                <a:latin typeface="Garamond"/>
+                <a:cs typeface="Garamond"/>
+              </a:rPr>
               <a:t>Free cash flow: base FY26 1,163M → FY30 1,184M; bull FY26 1,340M → FY30 1,779M</a:t>
             </a:r>
           </a:p>
@@ -14300,7 +14520,7 @@
                 <a:spcPts val="0"/>
               </a:spcBef>
               <a:spcAft>
-                <a:spcPts val="200"/>
+                <a:spcPts val="100"/>
               </a:spcAft>
               <a:buFont typeface="Garamond"/>
               <a:buChar char="•"/>
@@ -14327,8 +14547,8 @@
           <p:nvPr/>
         </p:nvGraphicFramePr>
         <p:xfrm>
-          <a:off x="457200" y="2788920"/>
-          <a:ext cx="11292828" cy="3063240"/>
+          <a:off x="457200" y="3364992"/>
+          <a:ext cx="11292828" cy="2697480"/>
         </p:xfrm>
         <a:graphic>
           <a:graphicData uri="http://schemas.openxmlformats.org/drawingml/2006/table">
@@ -14353,7 +14573,7 @@
                 <a:gridCol w="653142"/>
                 <a:gridCol w="653142"/>
               </a:tblGrid>
-              <a:tr h="510540">
+              <a:tr h="449580">
                 <a:tc>
                   <a:txBody>
                     <a:bodyPr/>
@@ -14715,7 +14935,7 @@
                   </a:tcPr>
                 </a:tc>
               </a:tr>
-              <a:tr h="510540">
+              <a:tr h="449580">
                 <a:tc>
                   <a:txBody>
                     <a:bodyPr/>
@@ -15077,7 +15297,7 @@
                   </a:tcPr>
                 </a:tc>
               </a:tr>
-              <a:tr h="510540">
+              <a:tr h="449580">
                 <a:tc>
                   <a:txBody>
                     <a:bodyPr/>
@@ -15439,7 +15659,7 @@
                   </a:tcPr>
                 </a:tc>
               </a:tr>
-              <a:tr h="510540">
+              <a:tr h="449580">
                 <a:tc>
                   <a:txBody>
                     <a:bodyPr/>
@@ -15801,7 +16021,7 @@
                   </a:tcPr>
                 </a:tc>
               </a:tr>
-              <a:tr h="510540">
+              <a:tr h="449580">
                 <a:tc>
                   <a:txBody>
                     <a:bodyPr/>
@@ -16163,7 +16383,7 @@
                   </a:tcPr>
                 </a:tc>
               </a:tr>
-              <a:tr h="510540">
+              <a:tr h="449580">
                 <a:tc>
                   <a:txBody>
                     <a:bodyPr/>

--- a/LULU/LULU_Investment_Pitch_Deck.pptx
+++ b/LULU/LULU_Investment_Pitch_Deck.pptx
@@ -7509,7 +7509,7 @@
                 <a:latin typeface="Garamond"/>
                 <a:cs typeface="Garamond"/>
               </a:rPr>
-              <a:t>Forecast: base = Scenarios col G (3-statement); bull = Scenarios col H. Historicals per FY2025 10-K. Each row uses the same metric definition across periods.</a:t>
+              <a:t>Hist = 10-K. Base (26B) = 3-Statement Model + Scenarios G. Bull (26U) = DCF Scenarios H (BS bull lines approximated — see model-source table).</a:t>
             </a:r>
           </a:p>
         </p:txBody>
@@ -7956,7 +7956,7 @@
         </p:nvGraphicFramePr>
         <p:xfrm>
           <a:off x="457200" y="3364992"/>
-          <a:ext cx="11292828" cy="2697480"/>
+          <a:ext cx="11292828" cy="2176272"/>
         </p:xfrm>
         <a:graphic>
           <a:graphicData uri="http://schemas.openxmlformats.org/drawingml/2006/table">
@@ -7981,7 +7981,7 @@
                 <a:gridCol w="653142"/>
                 <a:gridCol w="653142"/>
               </a:tblGrid>
-              <a:tr h="385354">
+              <a:tr h="310896">
                 <a:tc>
                   <a:txBody>
                     <a:bodyPr/>
@@ -8343,7 +8343,7 @@
                   </a:tcPr>
                 </a:tc>
               </a:tr>
-              <a:tr h="385354">
+              <a:tr h="310896">
                 <a:tc>
                   <a:txBody>
                     <a:bodyPr/>
@@ -8705,7 +8705,7 @@
                   </a:tcPr>
                 </a:tc>
               </a:tr>
-              <a:tr h="385354">
+              <a:tr h="310896">
                 <a:tc>
                   <a:txBody>
                     <a:bodyPr/>
@@ -9067,7 +9067,7 @@
                   </a:tcPr>
                 </a:tc>
               </a:tr>
-              <a:tr h="385354">
+              <a:tr h="310896">
                 <a:tc>
                   <a:txBody>
                     <a:bodyPr/>
@@ -9429,7 +9429,7 @@
                   </a:tcPr>
                 </a:tc>
               </a:tr>
-              <a:tr h="385354">
+              <a:tr h="310896">
                 <a:tc>
                   <a:txBody>
                     <a:bodyPr/>
@@ -9791,7 +9791,7 @@
                   </a:tcPr>
                 </a:tc>
               </a:tr>
-              <a:tr h="385354">
+              <a:tr h="310896">
                 <a:tc>
                   <a:txBody>
                     <a:bodyPr/>
@@ -10153,7 +10153,7 @@
                   </a:tcPr>
                 </a:tc>
               </a:tr>
-              <a:tr h="385356">
+              <a:tr h="310896">
                 <a:tc>
                   <a:txBody>
                     <a:bodyPr/>
@@ -10505,6 +10505,720 @@
                           <a:cs typeface="Garamond"/>
                         </a:rPr>
                         <a:t>19.14</a:t>
+                      </a:r>
+                    </a:p>
+                  </a:txBody>
+                  <a:tcPr anchor="ctr" marT="12700" marB="12700">
+                    <a:solidFill>
+                      <a:srgbClr val="F0F1F3"/>
+                    </a:solidFill>
+                  </a:tcPr>
+                </a:tc>
+              </a:tr>
+            </a:tbl>
+          </a:graphicData>
+        </a:graphic>
+      </p:graphicFrame>
+      <p:graphicFrame>
+        <p:nvGraphicFramePr>
+          <p:cNvPr id="11" name="Table 10"/>
+          <p:cNvGraphicFramePr>
+            <a:graphicFrameLocks noGrp="1"/>
+          </p:cNvGraphicFramePr>
+          <p:nvPr/>
+        </p:nvGraphicFramePr>
+        <p:xfrm>
+          <a:off x="457200" y="5623560"/>
+          <a:ext cx="11292840" cy="1024128"/>
+        </p:xfrm>
+        <a:graphic>
+          <a:graphicData uri="http://schemas.openxmlformats.org/drawingml/2006/table">
+            <a:tbl>
+              <a:tblPr firstRow="1" bandRow="1">
+                <a:tableStyleId>{5C22544A-7EE6-4342-B048-85BDC9FD1C3A}</a:tableStyleId>
+              </a:tblPr>
+              <a:tblGrid>
+                <a:gridCol w="1691640"/>
+                <a:gridCol w="3200400"/>
+                <a:gridCol w="3200400"/>
+                <a:gridCol w="3200400"/>
+              </a:tblGrid>
+              <a:tr h="146304">
+                <a:tc>
+                  <a:txBody>
+                    <a:bodyPr/>
+                    <a:lstStyle/>
+                    <a:p>
+                      <a:pPr algn="l"/>
+                      <a:r>
+                        <a:rPr sz="750" b="1" i="0">
+                          <a:solidFill>
+                            <a:srgbClr val="FFFFFF"/>
+                          </a:solidFill>
+                          <a:latin typeface="Garamond"/>
+                          <a:cs typeface="Garamond"/>
+                        </a:rPr>
+                        <a:t>Line item</a:t>
+                      </a:r>
+                    </a:p>
+                  </a:txBody>
+                  <a:tcPr anchor="ctr">
+                    <a:solidFill>
+                      <a:srgbClr val="1F2A44"/>
+                    </a:solidFill>
+                  </a:tcPr>
+                </a:tc>
+                <a:tc>
+                  <a:txBody>
+                    <a:bodyPr/>
+                    <a:lstStyle/>
+                    <a:p>
+                      <a:pPr algn="r"/>
+                      <a:r>
+                        <a:rPr sz="750" b="1" i="0">
+                          <a:solidFill>
+                            <a:srgbClr val="FFFFFF"/>
+                          </a:solidFill>
+                          <a:latin typeface="Garamond"/>
+                          <a:cs typeface="Garamond"/>
+                        </a:rPr>
+                        <a:t>Hist (22–25)</a:t>
+                      </a:r>
+                    </a:p>
+                  </a:txBody>
+                  <a:tcPr anchor="ctr">
+                    <a:solidFill>
+                      <a:srgbClr val="1F2A44"/>
+                    </a:solidFill>
+                  </a:tcPr>
+                </a:tc>
+                <a:tc>
+                  <a:txBody>
+                    <a:bodyPr/>
+                    <a:lstStyle/>
+                    <a:p>
+                      <a:pPr algn="r"/>
+                      <a:r>
+                        <a:rPr sz="750" b="1" i="0">
+                          <a:solidFill>
+                            <a:srgbClr val="FFFFFF"/>
+                          </a:solidFill>
+                          <a:latin typeface="Garamond"/>
+                          <a:cs typeface="Garamond"/>
+                        </a:rPr>
+                        <a:t>Base 26B–30B</a:t>
+                      </a:r>
+                    </a:p>
+                  </a:txBody>
+                  <a:tcPr anchor="ctr">
+                    <a:solidFill>
+                      <a:srgbClr val="1F2A44"/>
+                    </a:solidFill>
+                  </a:tcPr>
+                </a:tc>
+                <a:tc>
+                  <a:txBody>
+                    <a:bodyPr/>
+                    <a:lstStyle/>
+                    <a:p>
+                      <a:pPr algn="r"/>
+                      <a:r>
+                        <a:rPr sz="750" b="1" i="0">
+                          <a:solidFill>
+                            <a:srgbClr val="FFFFFF"/>
+                          </a:solidFill>
+                          <a:latin typeface="Garamond"/>
+                          <a:cs typeface="Garamond"/>
+                        </a:rPr>
+                        <a:t>Bull 26U–30U</a:t>
+                      </a:r>
+                    </a:p>
+                  </a:txBody>
+                  <a:tcPr anchor="ctr">
+                    <a:solidFill>
+                      <a:srgbClr val="1F2A44"/>
+                    </a:solidFill>
+                  </a:tcPr>
+                </a:tc>
+              </a:tr>
+              <a:tr h="146304">
+                <a:tc>
+                  <a:txBody>
+                    <a:bodyPr/>
+                    <a:lstStyle/>
+                    <a:p>
+                      <a:pPr algn="l"/>
+                      <a:r>
+                        <a:rPr sz="700" b="0" i="0">
+                          <a:solidFill>
+                            <a:srgbClr val="262626"/>
+                          </a:solidFill>
+                          <a:latin typeface="Garamond"/>
+                          <a:cs typeface="Garamond"/>
+                        </a:rPr>
+                        <a:t>Net revenue</a:t>
+                      </a:r>
+                    </a:p>
+                  </a:txBody>
+                  <a:tcPr anchor="ctr" marT="12700" marB="12700">
+                    <a:solidFill>
+                      <a:srgbClr val="FFFFFF"/>
+                    </a:solidFill>
+                  </a:tcPr>
+                </a:tc>
+                <a:tc>
+                  <a:txBody>
+                    <a:bodyPr/>
+                    <a:lstStyle/>
+                    <a:p>
+                      <a:pPr algn="r"/>
+                      <a:r>
+                        <a:rPr sz="700" b="0" i="0">
+                          <a:solidFill>
+                            <a:srgbClr val="262626"/>
+                          </a:solidFill>
+                          <a:latin typeface="Garamond"/>
+                          <a:cs typeface="Garamond"/>
+                        </a:rPr>
+                        <a:t>SEC Form 10-K (FY2022–FY2025)</a:t>
+                      </a:r>
+                    </a:p>
+                  </a:txBody>
+                  <a:tcPr anchor="ctr" marT="12700" marB="12700">
+                    <a:solidFill>
+                      <a:srgbClr val="FFFFFF"/>
+                    </a:solidFill>
+                  </a:tcPr>
+                </a:tc>
+                <a:tc>
+                  <a:txBody>
+                    <a:bodyPr/>
+                    <a:lstStyle/>
+                    <a:p>
+                      <a:pPr algn="r"/>
+                      <a:r>
+                        <a:rPr sz="700" b="0" i="0">
+                          <a:solidFill>
+                            <a:srgbClr val="262626"/>
+                          </a:solidFill>
+                          <a:latin typeface="Garamond"/>
+                          <a:cs typeface="Garamond"/>
+                        </a:rPr>
+                        <a:t>LULU_3_Statement_Model.xlsx → Income Statement</a:t>
+                      </a:r>
+                    </a:p>
+                  </a:txBody>
+                  <a:tcPr anchor="ctr" marT="12700" marB="12700">
+                    <a:solidFill>
+                      <a:srgbClr val="FFFFFF"/>
+                    </a:solidFill>
+                  </a:tcPr>
+                </a:tc>
+                <a:tc>
+                  <a:txBody>
+                    <a:bodyPr/>
+                    <a:lstStyle/>
+                    <a:p>
+                      <a:pPr algn="r"/>
+                      <a:r>
+                        <a:rPr sz="700" b="0" i="0">
+                          <a:solidFill>
+                            <a:srgbClr val="262626"/>
+                          </a:solidFill>
+                          <a:latin typeface="Garamond"/>
+                          <a:cs typeface="Garamond"/>
+                        </a:rPr>
+                        <a:t>LULU_DCF_Valuation_Model.xlsx → Scenarios, col H year revenue</a:t>
+                      </a:r>
+                    </a:p>
+                  </a:txBody>
+                  <a:tcPr anchor="ctr" marT="12700" marB="12700">
+                    <a:solidFill>
+                      <a:srgbClr val="FFFFFF"/>
+                    </a:solidFill>
+                  </a:tcPr>
+                </a:tc>
+              </a:tr>
+              <a:tr h="146304">
+                <a:tc>
+                  <a:txBody>
+                    <a:bodyPr/>
+                    <a:lstStyle/>
+                    <a:p>
+                      <a:pPr algn="l"/>
+                      <a:r>
+                        <a:rPr sz="700" b="0" i="0">
+                          <a:solidFill>
+                            <a:srgbClr val="262626"/>
+                          </a:solidFill>
+                          <a:latin typeface="Garamond"/>
+                          <a:cs typeface="Garamond"/>
+                        </a:rPr>
+                        <a:t>Gross profit</a:t>
+                      </a:r>
+                    </a:p>
+                  </a:txBody>
+                  <a:tcPr anchor="ctr" marT="12700" marB="12700">
+                    <a:solidFill>
+                      <a:srgbClr val="F0F1F3"/>
+                    </a:solidFill>
+                  </a:tcPr>
+                </a:tc>
+                <a:tc>
+                  <a:txBody>
+                    <a:bodyPr/>
+                    <a:lstStyle/>
+                    <a:p>
+                      <a:pPr algn="r"/>
+                      <a:r>
+                        <a:rPr sz="700" b="0" i="0">
+                          <a:solidFill>
+                            <a:srgbClr val="262626"/>
+                          </a:solidFill>
+                          <a:latin typeface="Garamond"/>
+                          <a:cs typeface="Garamond"/>
+                        </a:rPr>
+                        <a:t>SEC Form 10-K (FY2022–FY2025)</a:t>
+                      </a:r>
+                    </a:p>
+                  </a:txBody>
+                  <a:tcPr anchor="ctr" marT="12700" marB="12700">
+                    <a:solidFill>
+                      <a:srgbClr val="F0F1F3"/>
+                    </a:solidFill>
+                  </a:tcPr>
+                </a:tc>
+                <a:tc>
+                  <a:txBody>
+                    <a:bodyPr/>
+                    <a:lstStyle/>
+                    <a:p>
+                      <a:pPr algn="r"/>
+                      <a:r>
+                        <a:rPr sz="700" b="0" i="0">
+                          <a:solidFill>
+                            <a:srgbClr val="262626"/>
+                          </a:solidFill>
+                          <a:latin typeface="Garamond"/>
+                          <a:cs typeface="Garamond"/>
+                        </a:rPr>
+                        <a:t>LULU_3_Statement_Model.xlsx → Income Statement</a:t>
+                      </a:r>
+                    </a:p>
+                  </a:txBody>
+                  <a:tcPr anchor="ctr" marT="12700" marB="12700">
+                    <a:solidFill>
+                      <a:srgbClr val="F0F1F3"/>
+                    </a:solidFill>
+                  </a:tcPr>
+                </a:tc>
+                <a:tc>
+                  <a:txBody>
+                    <a:bodyPr/>
+                    <a:lstStyle/>
+                    <a:p>
+                      <a:pPr algn="r"/>
+                      <a:r>
+                        <a:rPr sz="700" b="0" i="0">
+                          <a:solidFill>
+                            <a:srgbClr val="262626"/>
+                          </a:solidFill>
+                          <a:latin typeface="Garamond"/>
+                          <a:cs typeface="Garamond"/>
+                        </a:rPr>
+                        <a:t>LULU_DCF_Valuation_Model.xlsx → Scenarios, col H GM% × revenue</a:t>
+                      </a:r>
+                    </a:p>
+                  </a:txBody>
+                  <a:tcPr anchor="ctr" marT="12700" marB="12700">
+                    <a:solidFill>
+                      <a:srgbClr val="F0F1F3"/>
+                    </a:solidFill>
+                  </a:tcPr>
+                </a:tc>
+              </a:tr>
+              <a:tr h="146304">
+                <a:tc>
+                  <a:txBody>
+                    <a:bodyPr/>
+                    <a:lstStyle/>
+                    <a:p>
+                      <a:pPr algn="l"/>
+                      <a:r>
+                        <a:rPr sz="700" b="0" i="0">
+                          <a:solidFill>
+                            <a:srgbClr val="262626"/>
+                          </a:solidFill>
+                          <a:latin typeface="Garamond"/>
+                          <a:cs typeface="Garamond"/>
+                        </a:rPr>
+                        <a:t>Operating income</a:t>
+                      </a:r>
+                    </a:p>
+                  </a:txBody>
+                  <a:tcPr anchor="ctr" marT="12700" marB="12700">
+                    <a:solidFill>
+                      <a:srgbClr val="FFFFFF"/>
+                    </a:solidFill>
+                  </a:tcPr>
+                </a:tc>
+                <a:tc>
+                  <a:txBody>
+                    <a:bodyPr/>
+                    <a:lstStyle/>
+                    <a:p>
+                      <a:pPr algn="r"/>
+                      <a:r>
+                        <a:rPr sz="700" b="0" i="0">
+                          <a:solidFill>
+                            <a:srgbClr val="262626"/>
+                          </a:solidFill>
+                          <a:latin typeface="Garamond"/>
+                          <a:cs typeface="Garamond"/>
+                        </a:rPr>
+                        <a:t>SEC Form 10-K (FY2022–FY2025)</a:t>
+                      </a:r>
+                    </a:p>
+                  </a:txBody>
+                  <a:tcPr anchor="ctr" marT="12700" marB="12700">
+                    <a:solidFill>
+                      <a:srgbClr val="FFFFFF"/>
+                    </a:solidFill>
+                  </a:tcPr>
+                </a:tc>
+                <a:tc>
+                  <a:txBody>
+                    <a:bodyPr/>
+                    <a:lstStyle/>
+                    <a:p>
+                      <a:pPr algn="r"/>
+                      <a:r>
+                        <a:rPr sz="700" b="0" i="0">
+                          <a:solidFill>
+                            <a:srgbClr val="262626"/>
+                          </a:solidFill>
+                          <a:latin typeface="Garamond"/>
+                          <a:cs typeface="Garamond"/>
+                        </a:rPr>
+                        <a:t>LULU_3_Statement_Model.xlsx → Income Statement</a:t>
+                      </a:r>
+                    </a:p>
+                  </a:txBody>
+                  <a:tcPr anchor="ctr" marT="12700" marB="12700">
+                    <a:solidFill>
+                      <a:srgbClr val="FFFFFF"/>
+                    </a:solidFill>
+                  </a:tcPr>
+                </a:tc>
+                <a:tc>
+                  <a:txBody>
+                    <a:bodyPr/>
+                    <a:lstStyle/>
+                    <a:p>
+                      <a:pPr algn="r"/>
+                      <a:r>
+                        <a:rPr sz="700" b="0" i="0">
+                          <a:solidFill>
+                            <a:srgbClr val="262626"/>
+                          </a:solidFill>
+                          <a:latin typeface="Garamond"/>
+                          <a:cs typeface="Garamond"/>
+                        </a:rPr>
+                        <a:t>LULU_DCF_Valuation_Model.xlsx → Scenarios, col H EBIT rows</a:t>
+                      </a:r>
+                    </a:p>
+                  </a:txBody>
+                  <a:tcPr anchor="ctr" marT="12700" marB="12700">
+                    <a:solidFill>
+                      <a:srgbClr val="FFFFFF"/>
+                    </a:solidFill>
+                  </a:tcPr>
+                </a:tc>
+              </a:tr>
+              <a:tr h="146304">
+                <a:tc>
+                  <a:txBody>
+                    <a:bodyPr/>
+                    <a:lstStyle/>
+                    <a:p>
+                      <a:pPr algn="l"/>
+                      <a:r>
+                        <a:rPr sz="700" b="0" i="0">
+                          <a:solidFill>
+                            <a:srgbClr val="262626"/>
+                          </a:solidFill>
+                          <a:latin typeface="Garamond"/>
+                          <a:cs typeface="Garamond"/>
+                        </a:rPr>
+                        <a:t>Operating margin %</a:t>
+                      </a:r>
+                    </a:p>
+                  </a:txBody>
+                  <a:tcPr anchor="ctr" marT="12700" marB="12700">
+                    <a:solidFill>
+                      <a:srgbClr val="F0F1F3"/>
+                    </a:solidFill>
+                  </a:tcPr>
+                </a:tc>
+                <a:tc>
+                  <a:txBody>
+                    <a:bodyPr/>
+                    <a:lstStyle/>
+                    <a:p>
+                      <a:pPr algn="r"/>
+                      <a:r>
+                        <a:rPr sz="700" b="0" i="0">
+                          <a:solidFill>
+                            <a:srgbClr val="262626"/>
+                          </a:solidFill>
+                          <a:latin typeface="Garamond"/>
+                          <a:cs typeface="Garamond"/>
+                        </a:rPr>
+                        <a:t>SEC Form 10-K (FY2022–FY2025) (OI/rev)</a:t>
+                      </a:r>
+                    </a:p>
+                  </a:txBody>
+                  <a:tcPr anchor="ctr" marT="12700" marB="12700">
+                    <a:solidFill>
+                      <a:srgbClr val="F0F1F3"/>
+                    </a:solidFill>
+                  </a:tcPr>
+                </a:tc>
+                <a:tc>
+                  <a:txBody>
+                    <a:bodyPr/>
+                    <a:lstStyle/>
+                    <a:p>
+                      <a:pPr algn="r"/>
+                      <a:r>
+                        <a:rPr sz="700" b="0" i="0">
+                          <a:solidFill>
+                            <a:srgbClr val="262626"/>
+                          </a:solidFill>
+                          <a:latin typeface="Garamond"/>
+                          <a:cs typeface="Garamond"/>
+                        </a:rPr>
+                        <a:t>LULU_3_Statement_Model.xlsx → Income Statement (OI/rev)</a:t>
+                      </a:r>
+                    </a:p>
+                  </a:txBody>
+                  <a:tcPr anchor="ctr" marT="12700" marB="12700">
+                    <a:solidFill>
+                      <a:srgbClr val="F0F1F3"/>
+                    </a:solidFill>
+                  </a:tcPr>
+                </a:tc>
+                <a:tc>
+                  <a:txBody>
+                    <a:bodyPr/>
+                    <a:lstStyle/>
+                    <a:p>
+                      <a:pPr algn="r"/>
+                      <a:r>
+                        <a:rPr sz="700" b="0" i="0">
+                          <a:solidFill>
+                            <a:srgbClr val="262626"/>
+                          </a:solidFill>
+                          <a:latin typeface="Garamond"/>
+                          <a:cs typeface="Garamond"/>
+                        </a:rPr>
+                        <a:t>LULU_DCF_Valuation_Model.xlsx → Scenarios, col H (EBIT/rev)</a:t>
+                      </a:r>
+                    </a:p>
+                  </a:txBody>
+                  <a:tcPr anchor="ctr" marT="12700" marB="12700">
+                    <a:solidFill>
+                      <a:srgbClr val="F0F1F3"/>
+                    </a:solidFill>
+                  </a:tcPr>
+                </a:tc>
+              </a:tr>
+              <a:tr h="146304">
+                <a:tc>
+                  <a:txBody>
+                    <a:bodyPr/>
+                    <a:lstStyle/>
+                    <a:p>
+                      <a:pPr algn="l"/>
+                      <a:r>
+                        <a:rPr sz="700" b="0" i="0">
+                          <a:solidFill>
+                            <a:srgbClr val="262626"/>
+                          </a:solidFill>
+                          <a:latin typeface="Garamond"/>
+                          <a:cs typeface="Garamond"/>
+                        </a:rPr>
+                        <a:t>Net income</a:t>
+                      </a:r>
+                    </a:p>
+                  </a:txBody>
+                  <a:tcPr anchor="ctr" marT="12700" marB="12700">
+                    <a:solidFill>
+                      <a:srgbClr val="FFFFFF"/>
+                    </a:solidFill>
+                  </a:tcPr>
+                </a:tc>
+                <a:tc>
+                  <a:txBody>
+                    <a:bodyPr/>
+                    <a:lstStyle/>
+                    <a:p>
+                      <a:pPr algn="r"/>
+                      <a:r>
+                        <a:rPr sz="700" b="0" i="0">
+                          <a:solidFill>
+                            <a:srgbClr val="262626"/>
+                          </a:solidFill>
+                          <a:latin typeface="Garamond"/>
+                          <a:cs typeface="Garamond"/>
+                        </a:rPr>
+                        <a:t>SEC Form 10-K (FY2022–FY2025)</a:t>
+                      </a:r>
+                    </a:p>
+                  </a:txBody>
+                  <a:tcPr anchor="ctr" marT="12700" marB="12700">
+                    <a:solidFill>
+                      <a:srgbClr val="FFFFFF"/>
+                    </a:solidFill>
+                  </a:tcPr>
+                </a:tc>
+                <a:tc>
+                  <a:txBody>
+                    <a:bodyPr/>
+                    <a:lstStyle/>
+                    <a:p>
+                      <a:pPr algn="r"/>
+                      <a:r>
+                        <a:rPr sz="700" b="0" i="0">
+                          <a:solidFill>
+                            <a:srgbClr val="262626"/>
+                          </a:solidFill>
+                          <a:latin typeface="Garamond"/>
+                          <a:cs typeface="Garamond"/>
+                        </a:rPr>
+                        <a:t>LULU_3_Statement_Model.xlsx → Income Statement</a:t>
+                      </a:r>
+                    </a:p>
+                  </a:txBody>
+                  <a:tcPr anchor="ctr" marT="12700" marB="12700">
+                    <a:solidFill>
+                      <a:srgbClr val="FFFFFF"/>
+                    </a:solidFill>
+                  </a:tcPr>
+                </a:tc>
+                <a:tc>
+                  <a:txBody>
+                    <a:bodyPr/>
+                    <a:lstStyle/>
+                    <a:p>
+                      <a:pPr algn="r"/>
+                      <a:r>
+                        <a:rPr sz="700" b="0" i="0">
+                          <a:solidFill>
+                            <a:srgbClr val="262626"/>
+                          </a:solidFill>
+                          <a:latin typeface="Garamond"/>
+                          <a:cs typeface="Garamond"/>
+                        </a:rPr>
+                        <a:t>LULU_DCF_Valuation_Model.xlsx → Scenarios, col H EBIT + other inc − tax</a:t>
+                      </a:r>
+                    </a:p>
+                  </a:txBody>
+                  <a:tcPr anchor="ctr" marT="12700" marB="12700">
+                    <a:solidFill>
+                      <a:srgbClr val="FFFFFF"/>
+                    </a:solidFill>
+                  </a:tcPr>
+                </a:tc>
+              </a:tr>
+              <a:tr h="146304">
+                <a:tc>
+                  <a:txBody>
+                    <a:bodyPr/>
+                    <a:lstStyle/>
+                    <a:p>
+                      <a:pPr algn="l"/>
+                      <a:r>
+                        <a:rPr sz="700" b="0" i="0">
+                          <a:solidFill>
+                            <a:srgbClr val="262626"/>
+                          </a:solidFill>
+                          <a:latin typeface="Garamond"/>
+                          <a:cs typeface="Garamond"/>
+                        </a:rPr>
+                        <a:t>Diluted EPS</a:t>
+                      </a:r>
+                    </a:p>
+                  </a:txBody>
+                  <a:tcPr anchor="ctr" marT="12700" marB="12700">
+                    <a:solidFill>
+                      <a:srgbClr val="F0F1F3"/>
+                    </a:solidFill>
+                  </a:tcPr>
+                </a:tc>
+                <a:tc>
+                  <a:txBody>
+                    <a:bodyPr/>
+                    <a:lstStyle/>
+                    <a:p>
+                      <a:pPr algn="r"/>
+                      <a:r>
+                        <a:rPr sz="700" b="0" i="0">
+                          <a:solidFill>
+                            <a:srgbClr val="262626"/>
+                          </a:solidFill>
+                          <a:latin typeface="Garamond"/>
+                          <a:cs typeface="Garamond"/>
+                        </a:rPr>
+                        <a:t>SEC Form 10-K (FY2022–FY2025)</a:t>
+                      </a:r>
+                    </a:p>
+                  </a:txBody>
+                  <a:tcPr anchor="ctr" marT="12700" marB="12700">
+                    <a:solidFill>
+                      <a:srgbClr val="F0F1F3"/>
+                    </a:solidFill>
+                  </a:tcPr>
+                </a:tc>
+                <a:tc>
+                  <a:txBody>
+                    <a:bodyPr/>
+                    <a:lstStyle/>
+                    <a:p>
+                      <a:pPr algn="r"/>
+                      <a:r>
+                        <a:rPr sz="700" b="0" i="0">
+                          <a:solidFill>
+                            <a:srgbClr val="262626"/>
+                          </a:solidFill>
+                          <a:latin typeface="Garamond"/>
+                          <a:cs typeface="Garamond"/>
+                        </a:rPr>
+                        <a:t>LULU_3_Statement_Model.xlsx → Income Statement</a:t>
+                      </a:r>
+                    </a:p>
+                  </a:txBody>
+                  <a:tcPr anchor="ctr" marT="12700" marB="12700">
+                    <a:solidFill>
+                      <a:srgbClr val="F0F1F3"/>
+                    </a:solidFill>
+                  </a:tcPr>
+                </a:tc>
+                <a:tc>
+                  <a:txBody>
+                    <a:bodyPr/>
+                    <a:lstStyle/>
+                    <a:p>
+                      <a:pPr algn="r"/>
+                      <a:r>
+                        <a:rPr sz="700" b="0" i="0">
+                          <a:solidFill>
+                            <a:srgbClr val="262626"/>
+                          </a:solidFill>
+                          <a:latin typeface="Garamond"/>
+                          <a:cs typeface="Garamond"/>
+                        </a:rPr>
+                        <a:t>LULU_DCF_Valuation_Model.xlsx → Scenarios, col H NI ÷ LULU_3_Statement_Model.xlsx share schedule</a:t>
                       </a:r>
                     </a:p>
                   </a:txBody>
@@ -10521,14 +11235,14 @@
       </p:graphicFrame>
       <p:sp>
         <p:nvSpPr>
-          <p:cNvPr id="11" name="TextBox 10"/>
+          <p:cNvPr id="12" name="TextBox 11"/>
           <p:cNvSpPr txBox="1"/>
           <p:nvPr/>
         </p:nvSpPr>
         <p:spPr>
           <a:xfrm>
-            <a:off x="457200" y="5897880"/>
-            <a:ext cx="11292840" cy="502920"/>
+            <a:off x="457200" y="6656832"/>
+            <a:ext cx="11292840" cy="201168"/>
           </a:xfrm>
           <a:prstGeom prst="rect">
             <a:avLst/>
@@ -10551,14 +11265,14 @@
               <a:buNone/>
             </a:pPr>
             <a:r>
-              <a:rPr sz="1000" b="0" i="1">
+              <a:rPr sz="850" b="0" i="1">
                 <a:solidFill>
                   <a:srgbClr val="8C8C8C"/>
                 </a:solidFill>
                 <a:latin typeface="Garamond"/>
                 <a:cs typeface="Garamond"/>
               </a:rPr>
-              <a:t>22–25 = FY2022–25 historical; 26B/26U = FY2026 base (G) / bull (H); same for 27–30. Bear in Appendix.</a:t>
+              <a:t>Base drivers: LULU_3_Statement_Model.xlsx → Assumptions (linked to Scenarios G). Open both workbooks for live Scenarios G links.</a:t>
             </a:r>
           </a:p>
         </p:txBody>
@@ -10827,7 +11541,7 @@
                 <a:latin typeface="Garamond"/>
                 <a:cs typeface="Garamond"/>
               </a:rPr>
-              <a:t>Forecast: base = Scenarios col G (3-statement); bull = Scenarios col H. Historicals per FY2025 10-K. Each row uses the same metric definition across periods.</a:t>
+              <a:t>Hist = 10-K. Base (26B) = 3-Statement Model + Scenarios G. Bull (26U) = DCF Scenarios H (BS bull lines approximated — see model-source table).</a:t>
             </a:r>
           </a:p>
         </p:txBody>
@@ -11274,7 +11988,7 @@
         </p:nvGraphicFramePr>
         <p:xfrm>
           <a:off x="457200" y="3364992"/>
-          <a:ext cx="11292828" cy="2697480"/>
+          <a:ext cx="11292828" cy="2176272"/>
         </p:xfrm>
         <a:graphic>
           <a:graphicData uri="http://schemas.openxmlformats.org/drawingml/2006/table">
@@ -11299,7 +12013,7 @@
                 <a:gridCol w="653142"/>
                 <a:gridCol w="653142"/>
               </a:tblGrid>
-              <a:tr h="385354">
+              <a:tr h="310896">
                 <a:tc>
                   <a:txBody>
                     <a:bodyPr/>
@@ -11661,7 +12375,7 @@
                   </a:tcPr>
                 </a:tc>
               </a:tr>
-              <a:tr h="385354">
+              <a:tr h="310896">
                 <a:tc>
                   <a:txBody>
                     <a:bodyPr/>
@@ -12023,7 +12737,7 @@
                   </a:tcPr>
                 </a:tc>
               </a:tr>
-              <a:tr h="385354">
+              <a:tr h="310896">
                 <a:tc>
                   <a:txBody>
                     <a:bodyPr/>
@@ -12385,7 +13099,7 @@
                   </a:tcPr>
                 </a:tc>
               </a:tr>
-              <a:tr h="385354">
+              <a:tr h="310896">
                 <a:tc>
                   <a:txBody>
                     <a:bodyPr/>
@@ -12747,7 +13461,7 @@
                   </a:tcPr>
                 </a:tc>
               </a:tr>
-              <a:tr h="385354">
+              <a:tr h="310896">
                 <a:tc>
                   <a:txBody>
                     <a:bodyPr/>
@@ -13109,7 +13823,7 @@
                   </a:tcPr>
                 </a:tc>
               </a:tr>
-              <a:tr h="385354">
+              <a:tr h="310896">
                 <a:tc>
                   <a:txBody>
                     <a:bodyPr/>
@@ -13471,7 +14185,7 @@
                   </a:tcPr>
                 </a:tc>
               </a:tr>
-              <a:tr h="385356">
+              <a:tr h="310896">
                 <a:tc>
                   <a:txBody>
                     <a:bodyPr/>
@@ -13823,6 +14537,720 @@
                           <a:cs typeface="Garamond"/>
                         </a:rPr>
                         <a:t>0</a:t>
+                      </a:r>
+                    </a:p>
+                  </a:txBody>
+                  <a:tcPr anchor="ctr" marT="12700" marB="12700">
+                    <a:solidFill>
+                      <a:srgbClr val="F0F1F3"/>
+                    </a:solidFill>
+                  </a:tcPr>
+                </a:tc>
+              </a:tr>
+            </a:tbl>
+          </a:graphicData>
+        </a:graphic>
+      </p:graphicFrame>
+      <p:graphicFrame>
+        <p:nvGraphicFramePr>
+          <p:cNvPr id="11" name="Table 10"/>
+          <p:cNvGraphicFramePr>
+            <a:graphicFrameLocks noGrp="1"/>
+          </p:cNvGraphicFramePr>
+          <p:nvPr/>
+        </p:nvGraphicFramePr>
+        <p:xfrm>
+          <a:off x="457200" y="5623560"/>
+          <a:ext cx="11292840" cy="1024128"/>
+        </p:xfrm>
+        <a:graphic>
+          <a:graphicData uri="http://schemas.openxmlformats.org/drawingml/2006/table">
+            <a:tbl>
+              <a:tblPr firstRow="1" bandRow="1">
+                <a:tableStyleId>{5C22544A-7EE6-4342-B048-85BDC9FD1C3A}</a:tableStyleId>
+              </a:tblPr>
+              <a:tblGrid>
+                <a:gridCol w="1691640"/>
+                <a:gridCol w="3200400"/>
+                <a:gridCol w="3200400"/>
+                <a:gridCol w="3200400"/>
+              </a:tblGrid>
+              <a:tr h="146304">
+                <a:tc>
+                  <a:txBody>
+                    <a:bodyPr/>
+                    <a:lstStyle/>
+                    <a:p>
+                      <a:pPr algn="l"/>
+                      <a:r>
+                        <a:rPr sz="750" b="1" i="0">
+                          <a:solidFill>
+                            <a:srgbClr val="FFFFFF"/>
+                          </a:solidFill>
+                          <a:latin typeface="Garamond"/>
+                          <a:cs typeface="Garamond"/>
+                        </a:rPr>
+                        <a:t>Line item</a:t>
+                      </a:r>
+                    </a:p>
+                  </a:txBody>
+                  <a:tcPr anchor="ctr">
+                    <a:solidFill>
+                      <a:srgbClr val="1F2A44"/>
+                    </a:solidFill>
+                  </a:tcPr>
+                </a:tc>
+                <a:tc>
+                  <a:txBody>
+                    <a:bodyPr/>
+                    <a:lstStyle/>
+                    <a:p>
+                      <a:pPr algn="r"/>
+                      <a:r>
+                        <a:rPr sz="750" b="1" i="0">
+                          <a:solidFill>
+                            <a:srgbClr val="FFFFFF"/>
+                          </a:solidFill>
+                          <a:latin typeface="Garamond"/>
+                          <a:cs typeface="Garamond"/>
+                        </a:rPr>
+                        <a:t>Hist (22–25)</a:t>
+                      </a:r>
+                    </a:p>
+                  </a:txBody>
+                  <a:tcPr anchor="ctr">
+                    <a:solidFill>
+                      <a:srgbClr val="1F2A44"/>
+                    </a:solidFill>
+                  </a:tcPr>
+                </a:tc>
+                <a:tc>
+                  <a:txBody>
+                    <a:bodyPr/>
+                    <a:lstStyle/>
+                    <a:p>
+                      <a:pPr algn="r"/>
+                      <a:r>
+                        <a:rPr sz="750" b="1" i="0">
+                          <a:solidFill>
+                            <a:srgbClr val="FFFFFF"/>
+                          </a:solidFill>
+                          <a:latin typeface="Garamond"/>
+                          <a:cs typeface="Garamond"/>
+                        </a:rPr>
+                        <a:t>Base 26B–30B</a:t>
+                      </a:r>
+                    </a:p>
+                  </a:txBody>
+                  <a:tcPr anchor="ctr">
+                    <a:solidFill>
+                      <a:srgbClr val="1F2A44"/>
+                    </a:solidFill>
+                  </a:tcPr>
+                </a:tc>
+                <a:tc>
+                  <a:txBody>
+                    <a:bodyPr/>
+                    <a:lstStyle/>
+                    <a:p>
+                      <a:pPr algn="r"/>
+                      <a:r>
+                        <a:rPr sz="750" b="1" i="0">
+                          <a:solidFill>
+                            <a:srgbClr val="FFFFFF"/>
+                          </a:solidFill>
+                          <a:latin typeface="Garamond"/>
+                          <a:cs typeface="Garamond"/>
+                        </a:rPr>
+                        <a:t>Bull 26U–30U</a:t>
+                      </a:r>
+                    </a:p>
+                  </a:txBody>
+                  <a:tcPr anchor="ctr">
+                    <a:solidFill>
+                      <a:srgbClr val="1F2A44"/>
+                    </a:solidFill>
+                  </a:tcPr>
+                </a:tc>
+              </a:tr>
+              <a:tr h="146304">
+                <a:tc>
+                  <a:txBody>
+                    <a:bodyPr/>
+                    <a:lstStyle/>
+                    <a:p>
+                      <a:pPr algn="l"/>
+                      <a:r>
+                        <a:rPr sz="700" b="0" i="0">
+                          <a:solidFill>
+                            <a:srgbClr val="262626"/>
+                          </a:solidFill>
+                          <a:latin typeface="Garamond"/>
+                          <a:cs typeface="Garamond"/>
+                        </a:rPr>
+                        <a:t>Cash &amp; equivalents</a:t>
+                      </a:r>
+                    </a:p>
+                  </a:txBody>
+                  <a:tcPr anchor="ctr" marT="12700" marB="12700">
+                    <a:solidFill>
+                      <a:srgbClr val="FFFFFF"/>
+                    </a:solidFill>
+                  </a:tcPr>
+                </a:tc>
+                <a:tc>
+                  <a:txBody>
+                    <a:bodyPr/>
+                    <a:lstStyle/>
+                    <a:p>
+                      <a:pPr algn="r"/>
+                      <a:r>
+                        <a:rPr sz="700" b="0" i="0">
+                          <a:solidFill>
+                            <a:srgbClr val="262626"/>
+                          </a:solidFill>
+                          <a:latin typeface="Garamond"/>
+                          <a:cs typeface="Garamond"/>
+                        </a:rPr>
+                        <a:t>SEC Form 10-K (FY2022–FY2025)</a:t>
+                      </a:r>
+                    </a:p>
+                  </a:txBody>
+                  <a:tcPr anchor="ctr" marT="12700" marB="12700">
+                    <a:solidFill>
+                      <a:srgbClr val="FFFFFF"/>
+                    </a:solidFill>
+                  </a:tcPr>
+                </a:tc>
+                <a:tc>
+                  <a:txBody>
+                    <a:bodyPr/>
+                    <a:lstStyle/>
+                    <a:p>
+                      <a:pPr algn="r"/>
+                      <a:r>
+                        <a:rPr sz="700" b="0" i="0">
+                          <a:solidFill>
+                            <a:srgbClr val="262626"/>
+                          </a:solidFill>
+                          <a:latin typeface="Garamond"/>
+                          <a:cs typeface="Garamond"/>
+                        </a:rPr>
+                        <a:t>LULU_3_Statement_Model.xlsx → Balance Sheet (CFS plug)</a:t>
+                      </a:r>
+                    </a:p>
+                  </a:txBody>
+                  <a:tcPr anchor="ctr" marT="12700" marB="12700">
+                    <a:solidFill>
+                      <a:srgbClr val="FFFFFF"/>
+                    </a:solidFill>
+                  </a:tcPr>
+                </a:tc>
+                <a:tc>
+                  <a:txBody>
+                    <a:bodyPr/>
+                    <a:lstStyle/>
+                    <a:p>
+                      <a:pPr algn="r"/>
+                      <a:r>
+                        <a:rPr sz="700" b="0" i="0">
+                          <a:solidFill>
+                            <a:srgbClr val="262626"/>
+                          </a:solidFill>
+                          <a:latin typeface="Garamond"/>
+                          <a:cs typeface="Garamond"/>
+                        </a:rPr>
+                        <a:t>FY25 cash + LULU_DCF_Valuation_Model.xlsx → Scenarios, col H FCF + buybacks</a:t>
+                      </a:r>
+                    </a:p>
+                  </a:txBody>
+                  <a:tcPr anchor="ctr" marT="12700" marB="12700">
+                    <a:solidFill>
+                      <a:srgbClr val="FFFFFF"/>
+                    </a:solidFill>
+                  </a:tcPr>
+                </a:tc>
+              </a:tr>
+              <a:tr h="146304">
+                <a:tc>
+                  <a:txBody>
+                    <a:bodyPr/>
+                    <a:lstStyle/>
+                    <a:p>
+                      <a:pPr algn="l"/>
+                      <a:r>
+                        <a:rPr sz="700" b="0" i="0">
+                          <a:solidFill>
+                            <a:srgbClr val="262626"/>
+                          </a:solidFill>
+                          <a:latin typeface="Garamond"/>
+                          <a:cs typeface="Garamond"/>
+                        </a:rPr>
+                        <a:t>Inventories</a:t>
+                      </a:r>
+                    </a:p>
+                  </a:txBody>
+                  <a:tcPr anchor="ctr" marT="12700" marB="12700">
+                    <a:solidFill>
+                      <a:srgbClr val="F0F1F3"/>
+                    </a:solidFill>
+                  </a:tcPr>
+                </a:tc>
+                <a:tc>
+                  <a:txBody>
+                    <a:bodyPr/>
+                    <a:lstStyle/>
+                    <a:p>
+                      <a:pPr algn="r"/>
+                      <a:r>
+                        <a:rPr sz="700" b="0" i="0">
+                          <a:solidFill>
+                            <a:srgbClr val="262626"/>
+                          </a:solidFill>
+                          <a:latin typeface="Garamond"/>
+                          <a:cs typeface="Garamond"/>
+                        </a:rPr>
+                        <a:t>SEC Form 10-K (FY2022–FY2025)</a:t>
+                      </a:r>
+                    </a:p>
+                  </a:txBody>
+                  <a:tcPr anchor="ctr" marT="12700" marB="12700">
+                    <a:solidFill>
+                      <a:srgbClr val="F0F1F3"/>
+                    </a:solidFill>
+                  </a:tcPr>
+                </a:tc>
+                <a:tc>
+                  <a:txBody>
+                    <a:bodyPr/>
+                    <a:lstStyle/>
+                    <a:p>
+                      <a:pPr algn="r"/>
+                      <a:r>
+                        <a:rPr sz="700" b="0" i="0">
+                          <a:solidFill>
+                            <a:srgbClr val="262626"/>
+                          </a:solidFill>
+                          <a:latin typeface="Garamond"/>
+                          <a:cs typeface="Garamond"/>
+                        </a:rPr>
+                        <a:t>LULU_3_Statement_Model.xlsx → Balance Sheet</a:t>
+                      </a:r>
+                    </a:p>
+                  </a:txBody>
+                  <a:tcPr anchor="ctr" marT="12700" marB="12700">
+                    <a:solidFill>
+                      <a:srgbClr val="F0F1F3"/>
+                    </a:solidFill>
+                  </a:tcPr>
+                </a:tc>
+                <a:tc>
+                  <a:txBody>
+                    <a:bodyPr/>
+                    <a:lstStyle/>
+                    <a:p>
+                      <a:pPr algn="r"/>
+                      <a:r>
+                        <a:rPr sz="700" b="0" i="0">
+                          <a:solidFill>
+                            <a:srgbClr val="262626"/>
+                          </a:solidFill>
+                          <a:latin typeface="Garamond"/>
+                          <a:cs typeface="Garamond"/>
+                        </a:rPr>
+                        <a:t>Pitch build: base BS × (bull rev / base rev); cash = FY25 + bull FCF + buybacks</a:t>
+                      </a:r>
+                    </a:p>
+                  </a:txBody>
+                  <a:tcPr anchor="ctr" marT="12700" marB="12700">
+                    <a:solidFill>
+                      <a:srgbClr val="F0F1F3"/>
+                    </a:solidFill>
+                  </a:tcPr>
+                </a:tc>
+              </a:tr>
+              <a:tr h="146304">
+                <a:tc>
+                  <a:txBody>
+                    <a:bodyPr/>
+                    <a:lstStyle/>
+                    <a:p>
+                      <a:pPr algn="l"/>
+                      <a:r>
+                        <a:rPr sz="700" b="0" i="0">
+                          <a:solidFill>
+                            <a:srgbClr val="262626"/>
+                          </a:solidFill>
+                          <a:latin typeface="Garamond"/>
+                          <a:cs typeface="Garamond"/>
+                        </a:rPr>
+                        <a:t>Total assets</a:t>
+                      </a:r>
+                    </a:p>
+                  </a:txBody>
+                  <a:tcPr anchor="ctr" marT="12700" marB="12700">
+                    <a:solidFill>
+                      <a:srgbClr val="FFFFFF"/>
+                    </a:solidFill>
+                  </a:tcPr>
+                </a:tc>
+                <a:tc>
+                  <a:txBody>
+                    <a:bodyPr/>
+                    <a:lstStyle/>
+                    <a:p>
+                      <a:pPr algn="r"/>
+                      <a:r>
+                        <a:rPr sz="700" b="0" i="0">
+                          <a:solidFill>
+                            <a:srgbClr val="262626"/>
+                          </a:solidFill>
+                          <a:latin typeface="Garamond"/>
+                          <a:cs typeface="Garamond"/>
+                        </a:rPr>
+                        <a:t>SEC Form 10-K (FY2022–FY2025)</a:t>
+                      </a:r>
+                    </a:p>
+                  </a:txBody>
+                  <a:tcPr anchor="ctr" marT="12700" marB="12700">
+                    <a:solidFill>
+                      <a:srgbClr val="FFFFFF"/>
+                    </a:solidFill>
+                  </a:tcPr>
+                </a:tc>
+                <a:tc>
+                  <a:txBody>
+                    <a:bodyPr/>
+                    <a:lstStyle/>
+                    <a:p>
+                      <a:pPr algn="r"/>
+                      <a:r>
+                        <a:rPr sz="700" b="0" i="0">
+                          <a:solidFill>
+                            <a:srgbClr val="262626"/>
+                          </a:solidFill>
+                          <a:latin typeface="Garamond"/>
+                          <a:cs typeface="Garamond"/>
+                        </a:rPr>
+                        <a:t>LULU_3_Statement_Model.xlsx → Balance Sheet</a:t>
+                      </a:r>
+                    </a:p>
+                  </a:txBody>
+                  <a:tcPr anchor="ctr" marT="12700" marB="12700">
+                    <a:solidFill>
+                      <a:srgbClr val="FFFFFF"/>
+                    </a:solidFill>
+                  </a:tcPr>
+                </a:tc>
+                <a:tc>
+                  <a:txBody>
+                    <a:bodyPr/>
+                    <a:lstStyle/>
+                    <a:p>
+                      <a:pPr algn="r"/>
+                      <a:r>
+                        <a:rPr sz="700" b="0" i="0">
+                          <a:solidFill>
+                            <a:srgbClr val="262626"/>
+                          </a:solidFill>
+                          <a:latin typeface="Garamond"/>
+                          <a:cs typeface="Garamond"/>
+                        </a:rPr>
+                        <a:t>Pitch build: base BS × (bull rev / base rev); cash = FY25 + bull FCF + buybacks</a:t>
+                      </a:r>
+                    </a:p>
+                  </a:txBody>
+                  <a:tcPr anchor="ctr" marT="12700" marB="12700">
+                    <a:solidFill>
+                      <a:srgbClr val="FFFFFF"/>
+                    </a:solidFill>
+                  </a:tcPr>
+                </a:tc>
+              </a:tr>
+              <a:tr h="146304">
+                <a:tc>
+                  <a:txBody>
+                    <a:bodyPr/>
+                    <a:lstStyle/>
+                    <a:p>
+                      <a:pPr algn="l"/>
+                      <a:r>
+                        <a:rPr sz="700" b="0" i="0">
+                          <a:solidFill>
+                            <a:srgbClr val="262626"/>
+                          </a:solidFill>
+                          <a:latin typeface="Garamond"/>
+                          <a:cs typeface="Garamond"/>
+                        </a:rPr>
+                        <a:t>Total liabilities</a:t>
+                      </a:r>
+                    </a:p>
+                  </a:txBody>
+                  <a:tcPr anchor="ctr" marT="12700" marB="12700">
+                    <a:solidFill>
+                      <a:srgbClr val="F0F1F3"/>
+                    </a:solidFill>
+                  </a:tcPr>
+                </a:tc>
+                <a:tc>
+                  <a:txBody>
+                    <a:bodyPr/>
+                    <a:lstStyle/>
+                    <a:p>
+                      <a:pPr algn="r"/>
+                      <a:r>
+                        <a:rPr sz="700" b="0" i="0">
+                          <a:solidFill>
+                            <a:srgbClr val="262626"/>
+                          </a:solidFill>
+                          <a:latin typeface="Garamond"/>
+                          <a:cs typeface="Garamond"/>
+                        </a:rPr>
+                        <a:t>SEC Form 10-K (FY2022–FY2025)</a:t>
+                      </a:r>
+                    </a:p>
+                  </a:txBody>
+                  <a:tcPr anchor="ctr" marT="12700" marB="12700">
+                    <a:solidFill>
+                      <a:srgbClr val="F0F1F3"/>
+                    </a:solidFill>
+                  </a:tcPr>
+                </a:tc>
+                <a:tc>
+                  <a:txBody>
+                    <a:bodyPr/>
+                    <a:lstStyle/>
+                    <a:p>
+                      <a:pPr algn="r"/>
+                      <a:r>
+                        <a:rPr sz="700" b="0" i="0">
+                          <a:solidFill>
+                            <a:srgbClr val="262626"/>
+                          </a:solidFill>
+                          <a:latin typeface="Garamond"/>
+                          <a:cs typeface="Garamond"/>
+                        </a:rPr>
+                        <a:t>LULU_3_Statement_Model.xlsx → Balance Sheet</a:t>
+                      </a:r>
+                    </a:p>
+                  </a:txBody>
+                  <a:tcPr anchor="ctr" marT="12700" marB="12700">
+                    <a:solidFill>
+                      <a:srgbClr val="F0F1F3"/>
+                    </a:solidFill>
+                  </a:tcPr>
+                </a:tc>
+                <a:tc>
+                  <a:txBody>
+                    <a:bodyPr/>
+                    <a:lstStyle/>
+                    <a:p>
+                      <a:pPr algn="r"/>
+                      <a:r>
+                        <a:rPr sz="700" b="0" i="0">
+                          <a:solidFill>
+                            <a:srgbClr val="262626"/>
+                          </a:solidFill>
+                          <a:latin typeface="Garamond"/>
+                          <a:cs typeface="Garamond"/>
+                        </a:rPr>
+                        <a:t>Pitch build: base BS × (bull rev / base rev); cash = FY25 + bull FCF + buybacks</a:t>
+                      </a:r>
+                    </a:p>
+                  </a:txBody>
+                  <a:tcPr anchor="ctr" marT="12700" marB="12700">
+                    <a:solidFill>
+                      <a:srgbClr val="F0F1F3"/>
+                    </a:solidFill>
+                  </a:tcPr>
+                </a:tc>
+              </a:tr>
+              <a:tr h="146304">
+                <a:tc>
+                  <a:txBody>
+                    <a:bodyPr/>
+                    <a:lstStyle/>
+                    <a:p>
+                      <a:pPr algn="l"/>
+                      <a:r>
+                        <a:rPr sz="700" b="0" i="0">
+                          <a:solidFill>
+                            <a:srgbClr val="262626"/>
+                          </a:solidFill>
+                          <a:latin typeface="Garamond"/>
+                          <a:cs typeface="Garamond"/>
+                        </a:rPr>
+                        <a:t>Total equity</a:t>
+                      </a:r>
+                    </a:p>
+                  </a:txBody>
+                  <a:tcPr anchor="ctr" marT="12700" marB="12700">
+                    <a:solidFill>
+                      <a:srgbClr val="FFFFFF"/>
+                    </a:solidFill>
+                  </a:tcPr>
+                </a:tc>
+                <a:tc>
+                  <a:txBody>
+                    <a:bodyPr/>
+                    <a:lstStyle/>
+                    <a:p>
+                      <a:pPr algn="r"/>
+                      <a:r>
+                        <a:rPr sz="700" b="0" i="0">
+                          <a:solidFill>
+                            <a:srgbClr val="262626"/>
+                          </a:solidFill>
+                          <a:latin typeface="Garamond"/>
+                          <a:cs typeface="Garamond"/>
+                        </a:rPr>
+                        <a:t>SEC Form 10-K (FY2022–FY2025)</a:t>
+                      </a:r>
+                    </a:p>
+                  </a:txBody>
+                  <a:tcPr anchor="ctr" marT="12700" marB="12700">
+                    <a:solidFill>
+                      <a:srgbClr val="FFFFFF"/>
+                    </a:solidFill>
+                  </a:tcPr>
+                </a:tc>
+                <a:tc>
+                  <a:txBody>
+                    <a:bodyPr/>
+                    <a:lstStyle/>
+                    <a:p>
+                      <a:pPr algn="r"/>
+                      <a:r>
+                        <a:rPr sz="700" b="0" i="0">
+                          <a:solidFill>
+                            <a:srgbClr val="262626"/>
+                          </a:solidFill>
+                          <a:latin typeface="Garamond"/>
+                          <a:cs typeface="Garamond"/>
+                        </a:rPr>
+                        <a:t>LULU_3_Statement_Model.xlsx → Balance Sheet</a:t>
+                      </a:r>
+                    </a:p>
+                  </a:txBody>
+                  <a:tcPr anchor="ctr" marT="12700" marB="12700">
+                    <a:solidFill>
+                      <a:srgbClr val="FFFFFF"/>
+                    </a:solidFill>
+                  </a:tcPr>
+                </a:tc>
+                <a:tc>
+                  <a:txBody>
+                    <a:bodyPr/>
+                    <a:lstStyle/>
+                    <a:p>
+                      <a:pPr algn="r"/>
+                      <a:r>
+                        <a:rPr sz="700" b="0" i="0">
+                          <a:solidFill>
+                            <a:srgbClr val="262626"/>
+                          </a:solidFill>
+                          <a:latin typeface="Garamond"/>
+                          <a:cs typeface="Garamond"/>
+                        </a:rPr>
+                        <a:t>Pitch build: base BS × (bull rev / base rev); cash = FY25 + bull FCF + buybacks</a:t>
+                      </a:r>
+                    </a:p>
+                  </a:txBody>
+                  <a:tcPr anchor="ctr" marT="12700" marB="12700">
+                    <a:solidFill>
+                      <a:srgbClr val="FFFFFF"/>
+                    </a:solidFill>
+                  </a:tcPr>
+                </a:tc>
+              </a:tr>
+              <a:tr h="146304">
+                <a:tc>
+                  <a:txBody>
+                    <a:bodyPr/>
+                    <a:lstStyle/>
+                    <a:p>
+                      <a:pPr algn="l"/>
+                      <a:r>
+                        <a:rPr sz="700" b="0" i="0">
+                          <a:solidFill>
+                            <a:srgbClr val="262626"/>
+                          </a:solidFill>
+                          <a:latin typeface="Garamond"/>
+                          <a:cs typeface="Garamond"/>
+                        </a:rPr>
+                        <a:t>Funded debt</a:t>
+                      </a:r>
+                    </a:p>
+                  </a:txBody>
+                  <a:tcPr anchor="ctr" marT="12700" marB="12700">
+                    <a:solidFill>
+                      <a:srgbClr val="F0F1F3"/>
+                    </a:solidFill>
+                  </a:tcPr>
+                </a:tc>
+                <a:tc>
+                  <a:txBody>
+                    <a:bodyPr/>
+                    <a:lstStyle/>
+                    <a:p>
+                      <a:pPr algn="r"/>
+                      <a:r>
+                        <a:rPr sz="700" b="0" i="0">
+                          <a:solidFill>
+                            <a:srgbClr val="262626"/>
+                          </a:solidFill>
+                          <a:latin typeface="Garamond"/>
+                          <a:cs typeface="Garamond"/>
+                        </a:rPr>
+                        <a:t>SEC Form 10-K (FY2022–FY2025) ($0)</a:t>
+                      </a:r>
+                    </a:p>
+                  </a:txBody>
+                  <a:tcPr anchor="ctr" marT="12700" marB="12700">
+                    <a:solidFill>
+                      <a:srgbClr val="F0F1F3"/>
+                    </a:solidFill>
+                  </a:tcPr>
+                </a:tc>
+                <a:tc>
+                  <a:txBody>
+                    <a:bodyPr/>
+                    <a:lstStyle/>
+                    <a:p>
+                      <a:pPr algn="r"/>
+                      <a:r>
+                        <a:rPr sz="700" b="0" i="0">
+                          <a:solidFill>
+                            <a:srgbClr val="262626"/>
+                          </a:solidFill>
+                          <a:latin typeface="Garamond"/>
+                          <a:cs typeface="Garamond"/>
+                        </a:rPr>
+                        <a:t>LULU_3_Statement_Model.xlsx → Balance Sheet ($0)</a:t>
+                      </a:r>
+                    </a:p>
+                  </a:txBody>
+                  <a:tcPr anchor="ctr" marT="12700" marB="12700">
+                    <a:solidFill>
+                      <a:srgbClr val="F0F1F3"/>
+                    </a:solidFill>
+                  </a:tcPr>
+                </a:tc>
+                <a:tc>
+                  <a:txBody>
+                    <a:bodyPr/>
+                    <a:lstStyle/>
+                    <a:p>
+                      <a:pPr algn="r"/>
+                      <a:r>
+                        <a:rPr sz="700" b="0" i="0">
+                          <a:solidFill>
+                            <a:srgbClr val="262626"/>
+                          </a:solidFill>
+                          <a:latin typeface="Garamond"/>
+                          <a:cs typeface="Garamond"/>
+                        </a:rPr>
+                        <a:t>$0 (no term debt)</a:t>
                       </a:r>
                     </a:p>
                   </a:txBody>
@@ -13839,14 +15267,14 @@
       </p:graphicFrame>
       <p:sp>
         <p:nvSpPr>
-          <p:cNvPr id="11" name="TextBox 10"/>
+          <p:cNvPr id="12" name="TextBox 11"/>
           <p:cNvSpPr txBox="1"/>
           <p:nvPr/>
         </p:nvSpPr>
         <p:spPr>
           <a:xfrm>
-            <a:off x="457200" y="5897880"/>
-            <a:ext cx="11292840" cy="502920"/>
+            <a:off x="457200" y="6656832"/>
+            <a:ext cx="11292840" cy="201168"/>
           </a:xfrm>
           <a:prstGeom prst="rect">
             <a:avLst/>
@@ -13869,14 +15297,14 @@
               <a:buNone/>
             </a:pPr>
             <a:r>
-              <a:rPr sz="1000" b="0" i="1">
+              <a:rPr sz="850" b="0" i="1">
                 <a:solidFill>
                   <a:srgbClr val="8C8C8C"/>
                 </a:solidFill>
                 <a:latin typeface="Garamond"/>
                 <a:cs typeface="Garamond"/>
               </a:rPr>
-              <a:t>Same BS line items as 10-K. Bull cash = FY25 cash + cumulative (FCF + buybacks).</a:t>
+              <a:t>Base BS only in LULU_3_Statement_Model.xlsx. Bull BS is illustrative (not a separate workbook tab).</a:t>
             </a:r>
           </a:p>
         </p:txBody>
@@ -14145,7 +15573,7 @@
                 <a:latin typeface="Garamond"/>
                 <a:cs typeface="Garamond"/>
               </a:rPr>
-              <a:t>Forecast: base = Scenarios col G (3-statement); bull = Scenarios col H. Historicals per FY2025 10-K. Each row uses the same metric definition across periods.</a:t>
+              <a:t>Hist = 10-K. Base (26B) = 3-Statement Model + Scenarios G. Bull (26U) = DCF Scenarios H (BS bull lines approximated — see model-source table).</a:t>
             </a:r>
           </a:p>
         </p:txBody>
@@ -14548,7 +15976,7 @@
         </p:nvGraphicFramePr>
         <p:xfrm>
           <a:off x="457200" y="3364992"/>
-          <a:ext cx="11292828" cy="2697480"/>
+          <a:ext cx="11292828" cy="2176272"/>
         </p:xfrm>
         <a:graphic>
           <a:graphicData uri="http://schemas.openxmlformats.org/drawingml/2006/table">
@@ -14573,7 +16001,7 @@
                 <a:gridCol w="653142"/>
                 <a:gridCol w="653142"/>
               </a:tblGrid>
-              <a:tr h="449580">
+              <a:tr h="362712">
                 <a:tc>
                   <a:txBody>
                     <a:bodyPr/>
@@ -14935,7 +16363,7 @@
                   </a:tcPr>
                 </a:tc>
               </a:tr>
-              <a:tr h="449580">
+              <a:tr h="362712">
                 <a:tc>
                   <a:txBody>
                     <a:bodyPr/>
@@ -15297,7 +16725,7 @@
                   </a:tcPr>
                 </a:tc>
               </a:tr>
-              <a:tr h="449580">
+              <a:tr h="362712">
                 <a:tc>
                   <a:txBody>
                     <a:bodyPr/>
@@ -15659,7 +17087,7 @@
                   </a:tcPr>
                 </a:tc>
               </a:tr>
-              <a:tr h="449580">
+              <a:tr h="362712">
                 <a:tc>
                   <a:txBody>
                     <a:bodyPr/>
@@ -16021,7 +17449,7 @@
                   </a:tcPr>
                 </a:tc>
               </a:tr>
-              <a:tr h="449580">
+              <a:tr h="362712">
                 <a:tc>
                   <a:txBody>
                     <a:bodyPr/>
@@ -16383,7 +17811,7 @@
                   </a:tcPr>
                 </a:tc>
               </a:tr>
-              <a:tr h="449580">
+              <a:tr h="362712">
                 <a:tc>
                   <a:txBody>
                     <a:bodyPr/>
@@ -16735,6 +18163,622 @@
                           <a:cs typeface="Garamond"/>
                         </a:rPr>
                         <a:t>(1,335)</a:t>
+                      </a:r>
+                    </a:p>
+                  </a:txBody>
+                  <a:tcPr anchor="ctr" marT="12700" marB="12700">
+                    <a:solidFill>
+                      <a:srgbClr val="FFFFFF"/>
+                    </a:solidFill>
+                  </a:tcPr>
+                </a:tc>
+              </a:tr>
+            </a:tbl>
+          </a:graphicData>
+        </a:graphic>
+      </p:graphicFrame>
+      <p:graphicFrame>
+        <p:nvGraphicFramePr>
+          <p:cNvPr id="11" name="Table 10"/>
+          <p:cNvGraphicFramePr>
+            <a:graphicFrameLocks noGrp="1"/>
+          </p:cNvGraphicFramePr>
+          <p:nvPr/>
+        </p:nvGraphicFramePr>
+        <p:xfrm>
+          <a:off x="457200" y="5623560"/>
+          <a:ext cx="11292840" cy="1024128"/>
+        </p:xfrm>
+        <a:graphic>
+          <a:graphicData uri="http://schemas.openxmlformats.org/drawingml/2006/table">
+            <a:tbl>
+              <a:tblPr firstRow="1" bandRow="1">
+                <a:tableStyleId>{5C22544A-7EE6-4342-B048-85BDC9FD1C3A}</a:tableStyleId>
+              </a:tblPr>
+              <a:tblGrid>
+                <a:gridCol w="1691640"/>
+                <a:gridCol w="3200400"/>
+                <a:gridCol w="3200400"/>
+                <a:gridCol w="3200400"/>
+              </a:tblGrid>
+              <a:tr h="170688">
+                <a:tc>
+                  <a:txBody>
+                    <a:bodyPr/>
+                    <a:lstStyle/>
+                    <a:p>
+                      <a:pPr algn="l"/>
+                      <a:r>
+                        <a:rPr sz="750" b="1" i="0">
+                          <a:solidFill>
+                            <a:srgbClr val="FFFFFF"/>
+                          </a:solidFill>
+                          <a:latin typeface="Garamond"/>
+                          <a:cs typeface="Garamond"/>
+                        </a:rPr>
+                        <a:t>Line item</a:t>
+                      </a:r>
+                    </a:p>
+                  </a:txBody>
+                  <a:tcPr anchor="ctr">
+                    <a:solidFill>
+                      <a:srgbClr val="1F2A44"/>
+                    </a:solidFill>
+                  </a:tcPr>
+                </a:tc>
+                <a:tc>
+                  <a:txBody>
+                    <a:bodyPr/>
+                    <a:lstStyle/>
+                    <a:p>
+                      <a:pPr algn="r"/>
+                      <a:r>
+                        <a:rPr sz="750" b="1" i="0">
+                          <a:solidFill>
+                            <a:srgbClr val="FFFFFF"/>
+                          </a:solidFill>
+                          <a:latin typeface="Garamond"/>
+                          <a:cs typeface="Garamond"/>
+                        </a:rPr>
+                        <a:t>Hist (22–25)</a:t>
+                      </a:r>
+                    </a:p>
+                  </a:txBody>
+                  <a:tcPr anchor="ctr">
+                    <a:solidFill>
+                      <a:srgbClr val="1F2A44"/>
+                    </a:solidFill>
+                  </a:tcPr>
+                </a:tc>
+                <a:tc>
+                  <a:txBody>
+                    <a:bodyPr/>
+                    <a:lstStyle/>
+                    <a:p>
+                      <a:pPr algn="r"/>
+                      <a:r>
+                        <a:rPr sz="750" b="1" i="0">
+                          <a:solidFill>
+                            <a:srgbClr val="FFFFFF"/>
+                          </a:solidFill>
+                          <a:latin typeface="Garamond"/>
+                          <a:cs typeface="Garamond"/>
+                        </a:rPr>
+                        <a:t>Base 26B–30B</a:t>
+                      </a:r>
+                    </a:p>
+                  </a:txBody>
+                  <a:tcPr anchor="ctr">
+                    <a:solidFill>
+                      <a:srgbClr val="1F2A44"/>
+                    </a:solidFill>
+                  </a:tcPr>
+                </a:tc>
+                <a:tc>
+                  <a:txBody>
+                    <a:bodyPr/>
+                    <a:lstStyle/>
+                    <a:p>
+                      <a:pPr algn="r"/>
+                      <a:r>
+                        <a:rPr sz="750" b="1" i="0">
+                          <a:solidFill>
+                            <a:srgbClr val="FFFFFF"/>
+                          </a:solidFill>
+                          <a:latin typeface="Garamond"/>
+                          <a:cs typeface="Garamond"/>
+                        </a:rPr>
+                        <a:t>Bull 26U–30U</a:t>
+                      </a:r>
+                    </a:p>
+                  </a:txBody>
+                  <a:tcPr anchor="ctr">
+                    <a:solidFill>
+                      <a:srgbClr val="1F2A44"/>
+                    </a:solidFill>
+                  </a:tcPr>
+                </a:tc>
+              </a:tr>
+              <a:tr h="170688">
+                <a:tc>
+                  <a:txBody>
+                    <a:bodyPr/>
+                    <a:lstStyle/>
+                    <a:p>
+                      <a:pPr algn="l"/>
+                      <a:r>
+                        <a:rPr sz="700" b="0" i="0">
+                          <a:solidFill>
+                            <a:srgbClr val="262626"/>
+                          </a:solidFill>
+                          <a:latin typeface="Garamond"/>
+                          <a:cs typeface="Garamond"/>
+                        </a:rPr>
+                        <a:t>Cash from operations</a:t>
+                      </a:r>
+                    </a:p>
+                  </a:txBody>
+                  <a:tcPr anchor="ctr" marT="12700" marB="12700">
+                    <a:solidFill>
+                      <a:srgbClr val="FFFFFF"/>
+                    </a:solidFill>
+                  </a:tcPr>
+                </a:tc>
+                <a:tc>
+                  <a:txBody>
+                    <a:bodyPr/>
+                    <a:lstStyle/>
+                    <a:p>
+                      <a:pPr algn="r"/>
+                      <a:r>
+                        <a:rPr sz="700" b="0" i="0">
+                          <a:solidFill>
+                            <a:srgbClr val="262626"/>
+                          </a:solidFill>
+                          <a:latin typeface="Garamond"/>
+                          <a:cs typeface="Garamond"/>
+                        </a:rPr>
+                        <a:t>SEC Form 10-K (FY2022–FY2025)</a:t>
+                      </a:r>
+                    </a:p>
+                  </a:txBody>
+                  <a:tcPr anchor="ctr" marT="12700" marB="12700">
+                    <a:solidFill>
+                      <a:srgbClr val="FFFFFF"/>
+                    </a:solidFill>
+                  </a:tcPr>
+                </a:tc>
+                <a:tc>
+                  <a:txBody>
+                    <a:bodyPr/>
+                    <a:lstStyle/>
+                    <a:p>
+                      <a:pPr algn="r"/>
+                      <a:r>
+                        <a:rPr sz="700" b="0" i="0">
+                          <a:solidFill>
+                            <a:srgbClr val="262626"/>
+                          </a:solidFill>
+                          <a:latin typeface="Garamond"/>
+                          <a:cs typeface="Garamond"/>
+                        </a:rPr>
+                        <a:t>LULU_3_Statement_Model.xlsx → Cash Flow</a:t>
+                      </a:r>
+                    </a:p>
+                  </a:txBody>
+                  <a:tcPr anchor="ctr" marT="12700" marB="12700">
+                    <a:solidFill>
+                      <a:srgbClr val="FFFFFF"/>
+                    </a:solidFill>
+                  </a:tcPr>
+                </a:tc>
+                <a:tc>
+                  <a:txBody>
+                    <a:bodyPr/>
+                    <a:lstStyle/>
+                    <a:p>
+                      <a:pPr algn="r"/>
+                      <a:r>
+                        <a:rPr sz="700" b="0" i="0">
+                          <a:solidFill>
+                            <a:srgbClr val="262626"/>
+                          </a:solidFill>
+                          <a:latin typeface="Garamond"/>
+                          <a:cs typeface="Garamond"/>
+                        </a:rPr>
+                        <a:t>LULU_DCF_Valuation_Model.xlsx → Scenarios, col H NI + D&amp;A + ΔNWC</a:t>
+                      </a:r>
+                    </a:p>
+                  </a:txBody>
+                  <a:tcPr anchor="ctr" marT="12700" marB="12700">
+                    <a:solidFill>
+                      <a:srgbClr val="FFFFFF"/>
+                    </a:solidFill>
+                  </a:tcPr>
+                </a:tc>
+              </a:tr>
+              <a:tr h="170688">
+                <a:tc>
+                  <a:txBody>
+                    <a:bodyPr/>
+                    <a:lstStyle/>
+                    <a:p>
+                      <a:pPr algn="l"/>
+                      <a:r>
+                        <a:rPr sz="700" b="0" i="0">
+                          <a:solidFill>
+                            <a:srgbClr val="262626"/>
+                          </a:solidFill>
+                          <a:latin typeface="Garamond"/>
+                          <a:cs typeface="Garamond"/>
+                        </a:rPr>
+                        <a:t>D&amp;A (add-back)</a:t>
+                      </a:r>
+                    </a:p>
+                  </a:txBody>
+                  <a:tcPr anchor="ctr" marT="12700" marB="12700">
+                    <a:solidFill>
+                      <a:srgbClr val="F0F1F3"/>
+                    </a:solidFill>
+                  </a:tcPr>
+                </a:tc>
+                <a:tc>
+                  <a:txBody>
+                    <a:bodyPr/>
+                    <a:lstStyle/>
+                    <a:p>
+                      <a:pPr algn="r"/>
+                      <a:r>
+                        <a:rPr sz="700" b="0" i="0">
+                          <a:solidFill>
+                            <a:srgbClr val="262626"/>
+                          </a:solidFill>
+                          <a:latin typeface="Garamond"/>
+                          <a:cs typeface="Garamond"/>
+                        </a:rPr>
+                        <a:t>SEC Form 10-K (FY2022–FY2025)</a:t>
+                      </a:r>
+                    </a:p>
+                  </a:txBody>
+                  <a:tcPr anchor="ctr" marT="12700" marB="12700">
+                    <a:solidFill>
+                      <a:srgbClr val="F0F1F3"/>
+                    </a:solidFill>
+                  </a:tcPr>
+                </a:tc>
+                <a:tc>
+                  <a:txBody>
+                    <a:bodyPr/>
+                    <a:lstStyle/>
+                    <a:p>
+                      <a:pPr algn="r"/>
+                      <a:r>
+                        <a:rPr sz="700" b="0" i="0">
+                          <a:solidFill>
+                            <a:srgbClr val="262626"/>
+                          </a:solidFill>
+                          <a:latin typeface="Garamond"/>
+                          <a:cs typeface="Garamond"/>
+                        </a:rPr>
+                        <a:t>LULU_3_Statement_Model.xlsx → Cash Flow</a:t>
+                      </a:r>
+                    </a:p>
+                  </a:txBody>
+                  <a:tcPr anchor="ctr" marT="12700" marB="12700">
+                    <a:solidFill>
+                      <a:srgbClr val="F0F1F3"/>
+                    </a:solidFill>
+                  </a:tcPr>
+                </a:tc>
+                <a:tc>
+                  <a:txBody>
+                    <a:bodyPr/>
+                    <a:lstStyle/>
+                    <a:p>
+                      <a:pPr algn="r"/>
+                      <a:r>
+                        <a:rPr sz="700" b="0" i="0">
+                          <a:solidFill>
+                            <a:srgbClr val="262626"/>
+                          </a:solidFill>
+                          <a:latin typeface="Garamond"/>
+                          <a:cs typeface="Garamond"/>
+                        </a:rPr>
+                        <a:t>LULU_DCF_Valuation_Model.xlsx → Scenarios, col H D&amp;A rows</a:t>
+                      </a:r>
+                    </a:p>
+                  </a:txBody>
+                  <a:tcPr anchor="ctr" marT="12700" marB="12700">
+                    <a:solidFill>
+                      <a:srgbClr val="F0F1F3"/>
+                    </a:solidFill>
+                  </a:tcPr>
+                </a:tc>
+              </a:tr>
+              <a:tr h="170688">
+                <a:tc>
+                  <a:txBody>
+                    <a:bodyPr/>
+                    <a:lstStyle/>
+                    <a:p>
+                      <a:pPr algn="l"/>
+                      <a:r>
+                        <a:rPr sz="700" b="0" i="0">
+                          <a:solidFill>
+                            <a:srgbClr val="262626"/>
+                          </a:solidFill>
+                          <a:latin typeface="Garamond"/>
+                          <a:cs typeface="Garamond"/>
+                        </a:rPr>
+                        <a:t>Capital expenditures</a:t>
+                      </a:r>
+                    </a:p>
+                  </a:txBody>
+                  <a:tcPr anchor="ctr" marT="12700" marB="12700">
+                    <a:solidFill>
+                      <a:srgbClr val="FFFFFF"/>
+                    </a:solidFill>
+                  </a:tcPr>
+                </a:tc>
+                <a:tc>
+                  <a:txBody>
+                    <a:bodyPr/>
+                    <a:lstStyle/>
+                    <a:p>
+                      <a:pPr algn="r"/>
+                      <a:r>
+                        <a:rPr sz="700" b="0" i="0">
+                          <a:solidFill>
+                            <a:srgbClr val="262626"/>
+                          </a:solidFill>
+                          <a:latin typeface="Garamond"/>
+                          <a:cs typeface="Garamond"/>
+                        </a:rPr>
+                        <a:t>SEC Form 10-K (FY2022–FY2025)</a:t>
+                      </a:r>
+                    </a:p>
+                  </a:txBody>
+                  <a:tcPr anchor="ctr" marT="12700" marB="12700">
+                    <a:solidFill>
+                      <a:srgbClr val="FFFFFF"/>
+                    </a:solidFill>
+                  </a:tcPr>
+                </a:tc>
+                <a:tc>
+                  <a:txBody>
+                    <a:bodyPr/>
+                    <a:lstStyle/>
+                    <a:p>
+                      <a:pPr algn="r"/>
+                      <a:r>
+                        <a:rPr sz="700" b="0" i="0">
+                          <a:solidFill>
+                            <a:srgbClr val="262626"/>
+                          </a:solidFill>
+                          <a:latin typeface="Garamond"/>
+                          <a:cs typeface="Garamond"/>
+                        </a:rPr>
+                        <a:t>LULU_3_Statement_Model.xlsx → Cash Flow (rev × capex%; LULU_DCF_Valuation_Model.xlsx → Scenarios, col G)</a:t>
+                      </a:r>
+                    </a:p>
+                  </a:txBody>
+                  <a:tcPr anchor="ctr" marT="12700" marB="12700">
+                    <a:solidFill>
+                      <a:srgbClr val="FFFFFF"/>
+                    </a:solidFill>
+                  </a:tcPr>
+                </a:tc>
+                <a:tc>
+                  <a:txBody>
+                    <a:bodyPr/>
+                    <a:lstStyle/>
+                    <a:p>
+                      <a:pPr algn="r"/>
+                      <a:r>
+                        <a:rPr sz="700" b="0" i="0">
+                          <a:solidFill>
+                            <a:srgbClr val="262626"/>
+                          </a:solidFill>
+                          <a:latin typeface="Garamond"/>
+                          <a:cs typeface="Garamond"/>
+                        </a:rPr>
+                        <a:t>LULU_DCF_Valuation_Model.xlsx → Scenarios, col H capex rows</a:t>
+                      </a:r>
+                    </a:p>
+                  </a:txBody>
+                  <a:tcPr anchor="ctr" marT="12700" marB="12700">
+                    <a:solidFill>
+                      <a:srgbClr val="FFFFFF"/>
+                    </a:solidFill>
+                  </a:tcPr>
+                </a:tc>
+              </a:tr>
+              <a:tr h="170688">
+                <a:tc>
+                  <a:txBody>
+                    <a:bodyPr/>
+                    <a:lstStyle/>
+                    <a:p>
+                      <a:pPr algn="l"/>
+                      <a:r>
+                        <a:rPr sz="700" b="0" i="0">
+                          <a:solidFill>
+                            <a:srgbClr val="262626"/>
+                          </a:solidFill>
+                          <a:latin typeface="Garamond"/>
+                          <a:cs typeface="Garamond"/>
+                        </a:rPr>
+                        <a:t>Free cash flow</a:t>
+                      </a:r>
+                    </a:p>
+                  </a:txBody>
+                  <a:tcPr anchor="ctr" marT="12700" marB="12700">
+                    <a:solidFill>
+                      <a:srgbClr val="F0F1F3"/>
+                    </a:solidFill>
+                  </a:tcPr>
+                </a:tc>
+                <a:tc>
+                  <a:txBody>
+                    <a:bodyPr/>
+                    <a:lstStyle/>
+                    <a:p>
+                      <a:pPr algn="r"/>
+                      <a:r>
+                        <a:rPr sz="700" b="0" i="0">
+                          <a:solidFill>
+                            <a:srgbClr val="262626"/>
+                          </a:solidFill>
+                          <a:latin typeface="Garamond"/>
+                          <a:cs typeface="Garamond"/>
+                        </a:rPr>
+                        <a:t>SEC Form 10-K (FY2022–FY2025) (CFO − capex)</a:t>
+                      </a:r>
+                    </a:p>
+                  </a:txBody>
+                  <a:tcPr anchor="ctr" marT="12700" marB="12700">
+                    <a:solidFill>
+                      <a:srgbClr val="F0F1F3"/>
+                    </a:solidFill>
+                  </a:tcPr>
+                </a:tc>
+                <a:tc>
+                  <a:txBody>
+                    <a:bodyPr/>
+                    <a:lstStyle/>
+                    <a:p>
+                      <a:pPr algn="r"/>
+                      <a:r>
+                        <a:rPr sz="700" b="0" i="0">
+                          <a:solidFill>
+                            <a:srgbClr val="262626"/>
+                          </a:solidFill>
+                          <a:latin typeface="Garamond"/>
+                          <a:cs typeface="Garamond"/>
+                        </a:rPr>
+                        <a:t>LULU_3_Statement_Model.xlsx → Cash Flow</a:t>
+                      </a:r>
+                    </a:p>
+                  </a:txBody>
+                  <a:tcPr anchor="ctr" marT="12700" marB="12700">
+                    <a:solidFill>
+                      <a:srgbClr val="F0F1F3"/>
+                    </a:solidFill>
+                  </a:tcPr>
+                </a:tc>
+                <a:tc>
+                  <a:txBody>
+                    <a:bodyPr/>
+                    <a:lstStyle/>
+                    <a:p>
+                      <a:pPr algn="r"/>
+                      <a:r>
+                        <a:rPr sz="700" b="0" i="0">
+                          <a:solidFill>
+                            <a:srgbClr val="262626"/>
+                          </a:solidFill>
+                          <a:latin typeface="Garamond"/>
+                          <a:cs typeface="Garamond"/>
+                        </a:rPr>
+                        <a:t>LULU_DCF_Valuation_Model.xlsx → Scenarios, col H CFO − capex</a:t>
+                      </a:r>
+                    </a:p>
+                  </a:txBody>
+                  <a:tcPr anchor="ctr" marT="12700" marB="12700">
+                    <a:solidFill>
+                      <a:srgbClr val="F0F1F3"/>
+                    </a:solidFill>
+                  </a:tcPr>
+                </a:tc>
+              </a:tr>
+              <a:tr h="170688">
+                <a:tc>
+                  <a:txBody>
+                    <a:bodyPr/>
+                    <a:lstStyle/>
+                    <a:p>
+                      <a:pPr algn="l"/>
+                      <a:r>
+                        <a:rPr sz="700" b="0" i="0">
+                          <a:solidFill>
+                            <a:srgbClr val="262626"/>
+                          </a:solidFill>
+                          <a:latin typeface="Garamond"/>
+                          <a:cs typeface="Garamond"/>
+                        </a:rPr>
+                        <a:t>Share repurchases</a:t>
+                      </a:r>
+                    </a:p>
+                  </a:txBody>
+                  <a:tcPr anchor="ctr" marT="12700" marB="12700">
+                    <a:solidFill>
+                      <a:srgbClr val="FFFFFF"/>
+                    </a:solidFill>
+                  </a:tcPr>
+                </a:tc>
+                <a:tc>
+                  <a:txBody>
+                    <a:bodyPr/>
+                    <a:lstStyle/>
+                    <a:p>
+                      <a:pPr algn="r"/>
+                      <a:r>
+                        <a:rPr sz="700" b="0" i="0">
+                          <a:solidFill>
+                            <a:srgbClr val="262626"/>
+                          </a:solidFill>
+                          <a:latin typeface="Garamond"/>
+                          <a:cs typeface="Garamond"/>
+                        </a:rPr>
+                        <a:t>SEC Form 10-K (FY2022–FY2025)</a:t>
+                      </a:r>
+                    </a:p>
+                  </a:txBody>
+                  <a:tcPr anchor="ctr" marT="12700" marB="12700">
+                    <a:solidFill>
+                      <a:srgbClr val="FFFFFF"/>
+                    </a:solidFill>
+                  </a:tcPr>
+                </a:tc>
+                <a:tc>
+                  <a:txBody>
+                    <a:bodyPr/>
+                    <a:lstStyle/>
+                    <a:p>
+                      <a:pPr algn="r"/>
+                      <a:r>
+                        <a:rPr sz="700" b="0" i="0">
+                          <a:solidFill>
+                            <a:srgbClr val="262626"/>
+                          </a:solidFill>
+                          <a:latin typeface="Garamond"/>
+                          <a:cs typeface="Garamond"/>
+                        </a:rPr>
+                        <a:t>LULU_3_Statement_Model.xlsx → Assumptions (linked to Scenarios G) $500M/yr buyback</a:t>
+                      </a:r>
+                    </a:p>
+                  </a:txBody>
+                  <a:tcPr anchor="ctr" marT="12700" marB="12700">
+                    <a:solidFill>
+                      <a:srgbClr val="FFFFFF"/>
+                    </a:solidFill>
+                  </a:tcPr>
+                </a:tc>
+                <a:tc>
+                  <a:txBody>
+                    <a:bodyPr/>
+                    <a:lstStyle/>
+                    <a:p>
+                      <a:pPr algn="r"/>
+                      <a:r>
+                        <a:rPr sz="700" b="0" i="0">
+                          <a:solidFill>
+                            <a:srgbClr val="262626"/>
+                          </a:solidFill>
+                          <a:latin typeface="Garamond"/>
+                          <a:cs typeface="Garamond"/>
+                        </a:rPr>
+                        <a:t>LULU_DCF_Valuation_Model.xlsx → Scenarios, col H 75% of bull FCF</a:t>
                       </a:r>
                     </a:p>
                   </a:txBody>
@@ -16751,14 +18795,14 @@
       </p:graphicFrame>
       <p:sp>
         <p:nvSpPr>
-          <p:cNvPr id="11" name="TextBox 10"/>
+          <p:cNvPr id="12" name="TextBox 11"/>
           <p:cNvSpPr txBox="1"/>
           <p:nvPr/>
         </p:nvSpPr>
         <p:spPr>
           <a:xfrm>
-            <a:off x="457200" y="5897880"/>
-            <a:ext cx="11292840" cy="502920"/>
+            <a:off x="457200" y="6656832"/>
+            <a:ext cx="11292840" cy="201168"/>
           </a:xfrm>
           <a:prstGeom prst="rect">
             <a:avLst/>
@@ -16781,14 +18825,14 @@
               <a:buNone/>
             </a:pPr>
             <a:r>
-              <a:rPr sz="1000" b="0" i="1">
+              <a:rPr sz="850" b="0" i="1">
                 <a:solidFill>
                   <a:srgbClr val="8C8C8C"/>
                 </a:solidFill>
                 <a:latin typeface="Garamond"/>
                 <a:cs typeface="Garamond"/>
               </a:rPr>
-              <a:t>FCF rows tie to DCF unlevered FCF. Share repurchases are financing (CFF) — shown for 10-K / 3-statement comparability and cash bridge; they do not change DCF implied price (basic share count).</a:t>
+              <a:t>Base CF in LULU_3_Statement_Model.xlsx → Cash Flow; bull CF from LULU_DCF_Valuation_Model.xlsx → Scenarios, col H. Buybacks are CFF (not in DCF FCFF).</a:t>
             </a:r>
           </a:p>
         </p:txBody>

--- a/LULU/LULU_Investment_Pitch_Deck.pptx
+++ b/LULU/LULU_Investment_Pitch_Deck.pptx
@@ -7509,7 +7509,7 @@
                 <a:latin typeface="Garamond"/>
                 <a:cs typeface="Garamond"/>
               </a:rPr>
-              <a:t>Hist = 10-K. Base (26B) = 3-Statement Model + Scenarios G. Bull (26U) = DCF Scenarios H (BS bull lines approximated — see model-source table).</a:t>
+              <a:t>Hist = 10-K. Base (26B) &amp; bull (26U) = DCF Scenarios pitch-bridge block, cols G &amp; H.</a:t>
             </a:r>
           </a:p>
         </p:txBody>
@@ -7853,7 +7853,7 @@
                 <a:latin typeface="Garamond"/>
                 <a:cs typeface="Garamond"/>
               </a:rPr>
-              <a:t>Gross profit: base FY26 6,035M → FY30 6,463M; bull FY26 6,129M → FY30 7,737M</a:t>
+              <a:t>Gross profit: base FY26 5,901M → FY30 6,463M; bull FY26 6,129M → FY30 7,737M</a:t>
             </a:r>
           </a:p>
           <a:p>
@@ -7941,7 +7941,7 @@
                 <a:latin typeface="Garamond"/>
                 <a:cs typeface="Garamond"/>
               </a:rPr>
-              <a:t>Diluted EPS: base FY26 $9.55 → FY30 $12.93; bull FY26 $10.89 → FY30 $19.14</a:t>
+              <a:t>Diluted EPS: base FY26 $9776.90 → FY30 $11279.95; bull FY26 $11150.90 → FY30 $16688.77</a:t>
             </a:r>
           </a:p>
         </p:txBody>
@@ -8840,7 +8840,7 @@
                           <a:latin typeface="Garamond"/>
                           <a:cs typeface="Garamond"/>
                         </a:rPr>
-                        <a:t>6,035</a:t>
+                        <a:t>5,901</a:t>
                       </a:r>
                     </a:p>
                   </a:txBody>
@@ -10288,7 +10288,7 @@
                           <a:latin typeface="Garamond"/>
                           <a:cs typeface="Garamond"/>
                         </a:rPr>
-                        <a:t>9.55</a:t>
+                        <a:t>9776.90</a:t>
                       </a:r>
                     </a:p>
                   </a:txBody>
@@ -10312,7 +10312,7 @@
                           <a:latin typeface="Garamond"/>
                           <a:cs typeface="Garamond"/>
                         </a:rPr>
-                        <a:t>10.89</a:t>
+                        <a:t>11150.90</a:t>
                       </a:r>
                     </a:p>
                   </a:txBody>
@@ -10336,7 +10336,7 @@
                           <a:latin typeface="Garamond"/>
                           <a:cs typeface="Garamond"/>
                         </a:rPr>
-                        <a:t>9.65</a:t>
+                        <a:t>9484.51</a:t>
                       </a:r>
                     </a:p>
                   </a:txBody>
@@ -10360,7 +10360,7 @@
                           <a:latin typeface="Garamond"/>
                           <a:cs typeface="Garamond"/>
                         </a:rPr>
-                        <a:t>11.88</a:t>
+                        <a:t>11670.19</a:t>
                       </a:r>
                     </a:p>
                   </a:txBody>
@@ -10384,7 +10384,7 @@
                           <a:latin typeface="Garamond"/>
                           <a:cs typeface="Garamond"/>
                         </a:rPr>
-                        <a:t>10.66</a:t>
+                        <a:t>10059.72</a:t>
                       </a:r>
                     </a:p>
                   </a:txBody>
@@ -10408,7 +10408,7 @@
                           <a:latin typeface="Garamond"/>
                           <a:cs typeface="Garamond"/>
                         </a:rPr>
-                        <a:t>13.98</a:t>
+                        <a:t>13193.50</a:t>
                       </a:r>
                     </a:p>
                   </a:txBody>
@@ -10432,7 +10432,7 @@
                           <a:latin typeface="Garamond"/>
                           <a:cs typeface="Garamond"/>
                         </a:rPr>
-                        <a:t>11.75</a:t>
+                        <a:t>10657.96</a:t>
                       </a:r>
                     </a:p>
                   </a:txBody>
@@ -10456,7 +10456,7 @@
                           <a:latin typeface="Garamond"/>
                           <a:cs typeface="Garamond"/>
                         </a:rPr>
-                        <a:t>16.39</a:t>
+                        <a:t>14862.40</a:t>
                       </a:r>
                     </a:p>
                   </a:txBody>
@@ -10480,7 +10480,7 @@
                           <a:latin typeface="Garamond"/>
                           <a:cs typeface="Garamond"/>
                         </a:rPr>
-                        <a:t>12.93</a:t>
+                        <a:t>11279.95</a:t>
                       </a:r>
                     </a:p>
                   </a:txBody>
@@ -10504,7 +10504,7 @@
                           <a:latin typeface="Garamond"/>
                           <a:cs typeface="Garamond"/>
                         </a:rPr>
-                        <a:t>19.14</a:t>
+                        <a:t>16688.77</a:t>
                       </a:r>
                     </a:p>
                   </a:txBody>
@@ -10704,7 +10704,7 @@
                           <a:latin typeface="Garamond"/>
                           <a:cs typeface="Garamond"/>
                         </a:rPr>
-                        <a:t>LULU_3_Statement_Model.xlsx → Income Statement</a:t>
+                        <a:t>LULU_DCF_Valuation_Model.xlsx → Scenarios, col G revenue</a:t>
                       </a:r>
                     </a:p>
                   </a:txBody>
@@ -10728,7 +10728,7 @@
                           <a:latin typeface="Garamond"/>
                           <a:cs typeface="Garamond"/>
                         </a:rPr>
-                        <a:t>LULU_DCF_Valuation_Model.xlsx → Scenarios, col H year revenue</a:t>
+                        <a:t>LULU_DCF_Valuation_Model.xlsx → Scenarios, col H revenue</a:t>
                       </a:r>
                     </a:p>
                   </a:txBody>
@@ -10802,7 +10802,7 @@
                           <a:latin typeface="Garamond"/>
                           <a:cs typeface="Garamond"/>
                         </a:rPr>
-                        <a:t>LULU_3_Statement_Model.xlsx → Income Statement</a:t>
+                        <a:t>LULU_DCF_Valuation_Model.xlsx → Scenarios, col G GM% × revenue</a:t>
                       </a:r>
                     </a:p>
                   </a:txBody>
@@ -10900,7 +10900,7 @@
                           <a:latin typeface="Garamond"/>
                           <a:cs typeface="Garamond"/>
                         </a:rPr>
-                        <a:t>LULU_3_Statement_Model.xlsx → Income Statement</a:t>
+                        <a:t>LULU_DCF_Valuation_Model.xlsx → Scenarios, col G EBIT</a:t>
                       </a:r>
                     </a:p>
                   </a:txBody>
@@ -10924,7 +10924,7 @@
                           <a:latin typeface="Garamond"/>
                           <a:cs typeface="Garamond"/>
                         </a:rPr>
-                        <a:t>LULU_DCF_Valuation_Model.xlsx → Scenarios, col H EBIT rows</a:t>
+                        <a:t>LULU_DCF_Valuation_Model.xlsx → Scenarios, col H EBIT</a:t>
                       </a:r>
                     </a:p>
                   </a:txBody>
@@ -10998,7 +10998,7 @@
                           <a:latin typeface="Garamond"/>
                           <a:cs typeface="Garamond"/>
                         </a:rPr>
-                        <a:t>LULU_3_Statement_Model.xlsx → Income Statement (OI/rev)</a:t>
+                        <a:t>LULU_DCF_Valuation_Model.xlsx → Scenarios, col G EBIT/rev</a:t>
                       </a:r>
                     </a:p>
                   </a:txBody>
@@ -11022,7 +11022,7 @@
                           <a:latin typeface="Garamond"/>
                           <a:cs typeface="Garamond"/>
                         </a:rPr>
-                        <a:t>LULU_DCF_Valuation_Model.xlsx → Scenarios, col H (EBIT/rev)</a:t>
+                        <a:t>LULU_DCF_Valuation_Model.xlsx → Scenarios, col H EBIT/rev</a:t>
                       </a:r>
                     </a:p>
                   </a:txBody>
@@ -11096,7 +11096,7 @@
                           <a:latin typeface="Garamond"/>
                           <a:cs typeface="Garamond"/>
                         </a:rPr>
-                        <a:t>LULU_3_Statement_Model.xlsx → Income Statement</a:t>
+                        <a:t>LULU_DCF_Valuation_Model.xlsx → Scenarios, col G pitch bridge NI</a:t>
                       </a:r>
                     </a:p>
                   </a:txBody>
@@ -11120,7 +11120,7 @@
                           <a:latin typeface="Garamond"/>
                           <a:cs typeface="Garamond"/>
                         </a:rPr>
-                        <a:t>LULU_DCF_Valuation_Model.xlsx → Scenarios, col H EBIT + other inc − tax</a:t>
+                        <a:t>LULU_DCF_Valuation_Model.xlsx → Scenarios, col H pitch bridge NI</a:t>
                       </a:r>
                     </a:p>
                   </a:txBody>
@@ -11194,7 +11194,7 @@
                           <a:latin typeface="Garamond"/>
                           <a:cs typeface="Garamond"/>
                         </a:rPr>
-                        <a:t>LULU_3_Statement_Model.xlsx → Income Statement</a:t>
+                        <a:t>LULU_DCF_Valuation_Model.xlsx → Scenarios, col G pitch bridge EPS</a:t>
                       </a:r>
                     </a:p>
                   </a:txBody>
@@ -11218,7 +11218,7 @@
                           <a:latin typeface="Garamond"/>
                           <a:cs typeface="Garamond"/>
                         </a:rPr>
-                        <a:t>LULU_DCF_Valuation_Model.xlsx → Scenarios, col H NI ÷ LULU_3_Statement_Model.xlsx share schedule</a:t>
+                        <a:t>LULU_DCF_Valuation_Model.xlsx → Scenarios, col H pitch bridge EPS</a:t>
                       </a:r>
                     </a:p>
                   </a:txBody>
@@ -11272,7 +11272,7 @@
                 <a:latin typeface="Garamond"/>
                 <a:cs typeface="Garamond"/>
               </a:rPr>
-              <a:t>Base drivers: LULU_3_Statement_Model.xlsx → Assumptions (linked to Scenarios G). Open both workbooks for live Scenarios G links.</a:t>
+              <a:t>All forecast lines: LULU_DCF_Valuation_Model.xlsx → Scenarios tab → pitch deck bridge block.</a:t>
             </a:r>
           </a:p>
         </p:txBody>
@@ -11541,7 +11541,7 @@
                 <a:latin typeface="Garamond"/>
                 <a:cs typeface="Garamond"/>
               </a:rPr>
-              <a:t>Hist = 10-K. Base (26B) = 3-Statement Model + Scenarios G. Bull (26U) = DCF Scenarios H (BS bull lines approximated — see model-source table).</a:t>
+              <a:t>Hist = 10-K. Base (26B) &amp; bull (26U) = DCF Scenarios pitch-bridge block, cols G &amp; H.</a:t>
             </a:r>
           </a:p>
         </p:txBody>
@@ -11863,7 +11863,7 @@
                 <a:latin typeface="Garamond"/>
                 <a:cs typeface="Garamond"/>
               </a:rPr>
-              <a:t>Cash &amp; equivalents: base FY26 2,470M → FY30 4,864M; bull FY26 2,142M → FY30 3,639M</a:t>
+              <a:t>Cash &amp; equivalents: base FY26 2,393M → FY30 4,497M; bull FY26 2,142M → FY30 3,639M</a:t>
             </a:r>
           </a:p>
           <a:p>
@@ -11885,7 +11885,7 @@
                 <a:latin typeface="Garamond"/>
                 <a:cs typeface="Garamond"/>
               </a:rPr>
-              <a:t>Inventories: base FY26 1,538M → FY30 1,635M; bull FY26 1,572M → FY30 1,927M</a:t>
+              <a:t>Inventories: base FY26 1,585M → FY30 1,681M; bull FY26 1,586M → FY30 1,940M</a:t>
             </a:r>
           </a:p>
           <a:p>
@@ -11907,7 +11907,7 @@
                 <a:latin typeface="Garamond"/>
                 <a:cs typeface="Garamond"/>
               </a:rPr>
-              <a:t>Total assets: base FY26 8,892M → FY30 12,067M; bull FY26 9,091M → FY30 14,221M</a:t>
+              <a:t>Total assets: base FY26 7,941M → FY30 8,697M; bull FY26 8,118M → FY30 10,249M</a:t>
             </a:r>
           </a:p>
           <a:p>
@@ -11929,7 +11929,7 @@
                 <a:latin typeface="Garamond"/>
                 <a:cs typeface="Garamond"/>
               </a:rPr>
-              <a:t>Total liabilities: base FY26 3,279M → FY30 3,586M; bull FY26 3,352M → FY30 4,226M</a:t>
+              <a:t>Total liabilities: base FY26 3,282M → FY30 3,594M; bull FY26 3,355M → FY30 4,236M</a:t>
             </a:r>
           </a:p>
           <a:p>
@@ -11951,7 +11951,7 @@
                 <a:latin typeface="Garamond"/>
                 <a:cs typeface="Garamond"/>
               </a:rPr>
-              <a:t>Total equity: base FY26 5,613M → FY30 8,481M; bull FY26 5,738M → FY30 9,995M</a:t>
+              <a:t>Total equity: base FY26 4,659M → FY30 5,103M; bull FY26 4,763M → FY30 6,014M</a:t>
             </a:r>
           </a:p>
           <a:p>
@@ -12510,7 +12510,7 @@
                           <a:latin typeface="Garamond"/>
                           <a:cs typeface="Garamond"/>
                         </a:rPr>
-                        <a:t>2,470</a:t>
+                        <a:t>2,393</a:t>
                       </a:r>
                     </a:p>
                   </a:txBody>
@@ -12558,7 +12558,7 @@
                           <a:latin typeface="Garamond"/>
                           <a:cs typeface="Garamond"/>
                         </a:rPr>
-                        <a:t>2,985</a:t>
+                        <a:t>2,825</a:t>
                       </a:r>
                     </a:p>
                   </a:txBody>
@@ -12582,7 +12582,7 @@
                           <a:latin typeface="Garamond"/>
                           <a:cs typeface="Garamond"/>
                         </a:rPr>
-                        <a:t>2,451</a:t>
+                        <a:t>2,450</a:t>
                       </a:r>
                     </a:p>
                   </a:txBody>
@@ -12606,7 +12606,7 @@
                           <a:latin typeface="Garamond"/>
                           <a:cs typeface="Garamond"/>
                         </a:rPr>
-                        <a:t>3,562</a:t>
+                        <a:t>3,317</a:t>
                       </a:r>
                     </a:p>
                   </a:txBody>
@@ -12630,7 +12630,7 @@
                           <a:latin typeface="Garamond"/>
                           <a:cs typeface="Garamond"/>
                         </a:rPr>
-                        <a:t>2,800</a:t>
+                        <a:t>2,799</a:t>
                       </a:r>
                     </a:p>
                   </a:txBody>
@@ -12654,7 +12654,7 @@
                           <a:latin typeface="Garamond"/>
                           <a:cs typeface="Garamond"/>
                         </a:rPr>
-                        <a:t>4,180</a:t>
+                        <a:t>3,874</a:t>
                       </a:r>
                     </a:p>
                   </a:txBody>
@@ -12678,7 +12678,7 @@
                           <a:latin typeface="Garamond"/>
                           <a:cs typeface="Garamond"/>
                         </a:rPr>
-                        <a:t>3,195</a:t>
+                        <a:t>3,194</a:t>
                       </a:r>
                     </a:p>
                   </a:txBody>
@@ -12702,7 +12702,7 @@
                           <a:latin typeface="Garamond"/>
                           <a:cs typeface="Garamond"/>
                         </a:rPr>
-                        <a:t>4,864</a:t>
+                        <a:t>4,497</a:t>
                       </a:r>
                     </a:p>
                   </a:txBody>
@@ -12872,7 +12872,7 @@
                           <a:latin typeface="Garamond"/>
                           <a:cs typeface="Garamond"/>
                         </a:rPr>
-                        <a:t>1,538</a:t>
+                        <a:t>1,585</a:t>
                       </a:r>
                     </a:p>
                   </a:txBody>
@@ -12896,7 +12896,7 @@
                           <a:latin typeface="Garamond"/>
                           <a:cs typeface="Garamond"/>
                         </a:rPr>
-                        <a:t>1,572</a:t>
+                        <a:t>1,586</a:t>
                       </a:r>
                     </a:p>
                   </a:txBody>
@@ -12920,7 +12920,7 @@
                           <a:latin typeface="Garamond"/>
                           <a:cs typeface="Garamond"/>
                         </a:rPr>
-                        <a:t>1,551</a:t>
+                        <a:t>1,608</a:t>
                       </a:r>
                     </a:p>
                   </a:txBody>
@@ -12944,7 +12944,7 @@
                           <a:latin typeface="Garamond"/>
                           <a:cs typeface="Garamond"/>
                         </a:rPr>
-                        <a:t>1,643</a:t>
+                        <a:t>1,669</a:t>
                       </a:r>
                     </a:p>
                   </a:txBody>
@@ -12968,7 +12968,7 @@
                           <a:latin typeface="Garamond"/>
                           <a:cs typeface="Garamond"/>
                         </a:rPr>
-                        <a:t>1,563</a:t>
+                        <a:t>1,632</a:t>
                       </a:r>
                     </a:p>
                   </a:txBody>
@@ -12992,7 +12992,7 @@
                           <a:latin typeface="Garamond"/>
                           <a:cs typeface="Garamond"/>
                         </a:rPr>
-                        <a:t>1,716</a:t>
+                        <a:t>1,755</a:t>
                       </a:r>
                     </a:p>
                   </a:txBody>
@@ -13016,7 +13016,7 @@
                           <a:latin typeface="Garamond"/>
                           <a:cs typeface="Garamond"/>
                         </a:rPr>
-                        <a:t>1,599</a:t>
+                        <a:t>1,657</a:t>
                       </a:r>
                     </a:p>
                   </a:txBody>
@@ -13040,7 +13040,7 @@
                           <a:latin typeface="Garamond"/>
                           <a:cs typeface="Garamond"/>
                         </a:rPr>
-                        <a:t>1,819</a:t>
+                        <a:t>1,845</a:t>
                       </a:r>
                     </a:p>
                   </a:txBody>
@@ -13064,7 +13064,7 @@
                           <a:latin typeface="Garamond"/>
                           <a:cs typeface="Garamond"/>
                         </a:rPr>
-                        <a:t>1,635</a:t>
+                        <a:t>1,681</a:t>
                       </a:r>
                     </a:p>
                   </a:txBody>
@@ -13088,7 +13088,7 @@
                           <a:latin typeface="Garamond"/>
                           <a:cs typeface="Garamond"/>
                         </a:rPr>
-                        <a:t>1,927</a:t>
+                        <a:t>1,940</a:t>
                       </a:r>
                     </a:p>
                   </a:txBody>
@@ -13234,7 +13234,7 @@
                           <a:latin typeface="Garamond"/>
                           <a:cs typeface="Garamond"/>
                         </a:rPr>
-                        <a:t>8,892</a:t>
+                        <a:t>7,941</a:t>
                       </a:r>
                     </a:p>
                   </a:txBody>
@@ -13258,7 +13258,7 @@
                           <a:latin typeface="Garamond"/>
                           <a:cs typeface="Garamond"/>
                         </a:rPr>
-                        <a:t>9,091</a:t>
+                        <a:t>8,118</a:t>
                       </a:r>
                     </a:p>
                   </a:txBody>
@@ -13282,7 +13282,7 @@
                           <a:latin typeface="Garamond"/>
                           <a:cs typeface="Garamond"/>
                         </a:rPr>
-                        <a:t>9,584</a:t>
+                        <a:t>8,124</a:t>
                       </a:r>
                     </a:p>
                   </a:txBody>
@@ -13306,7 +13306,7 @@
                           <a:latin typeface="Garamond"/>
                           <a:cs typeface="Garamond"/>
                         </a:rPr>
-                        <a:t>10,153</a:t>
+                        <a:t>8,606</a:t>
                       </a:r>
                     </a:p>
                   </a:txBody>
@@ -13330,7 +13330,7 @@
                           <a:latin typeface="Garamond"/>
                           <a:cs typeface="Garamond"/>
                         </a:rPr>
-                        <a:t>10,343</a:t>
+                        <a:t>8,310</a:t>
                       </a:r>
                     </a:p>
                   </a:txBody>
@@ -13354,7 +13354,7 @@
                           <a:latin typeface="Garamond"/>
                           <a:cs typeface="Garamond"/>
                         </a:rPr>
-                        <a:t>11,354</a:t>
+                        <a:t>9,122</a:t>
                       </a:r>
                     </a:p>
                   </a:txBody>
@@ -13378,7 +13378,7 @@
                           <a:latin typeface="Garamond"/>
                           <a:cs typeface="Garamond"/>
                         </a:rPr>
-                        <a:t>11,170</a:t>
+                        <a:t>8,502</a:t>
                       </a:r>
                     </a:p>
                   </a:txBody>
@@ -13402,7 +13402,7 @@
                           <a:latin typeface="Garamond"/>
                           <a:cs typeface="Garamond"/>
                         </a:rPr>
-                        <a:t>12,704</a:t>
+                        <a:t>9,669</a:t>
                       </a:r>
                     </a:p>
                   </a:txBody>
@@ -13426,7 +13426,7 @@
                           <a:latin typeface="Garamond"/>
                           <a:cs typeface="Garamond"/>
                         </a:rPr>
-                        <a:t>12,067</a:t>
+                        <a:t>8,697</a:t>
                       </a:r>
                     </a:p>
                   </a:txBody>
@@ -13450,7 +13450,7 @@
                           <a:latin typeface="Garamond"/>
                           <a:cs typeface="Garamond"/>
                         </a:rPr>
-                        <a:t>14,221</a:t>
+                        <a:t>10,249</a:t>
                       </a:r>
                     </a:p>
                   </a:txBody>
@@ -13596,7 +13596,7 @@
                           <a:latin typeface="Garamond"/>
                           <a:cs typeface="Garamond"/>
                         </a:rPr>
-                        <a:t>3,279</a:t>
+                        <a:t>3,282</a:t>
                       </a:r>
                     </a:p>
                   </a:txBody>
@@ -13620,7 +13620,7 @@
                           <a:latin typeface="Garamond"/>
                           <a:cs typeface="Garamond"/>
                         </a:rPr>
-                        <a:t>3,352</a:t>
+                        <a:t>3,355</a:t>
                       </a:r>
                     </a:p>
                   </a:txBody>
@@ -13644,7 +13644,7 @@
                           <a:latin typeface="Garamond"/>
                           <a:cs typeface="Garamond"/>
                         </a:rPr>
-                        <a:t>3,353</a:t>
+                        <a:t>3,357</a:t>
                       </a:r>
                     </a:p>
                   </a:txBody>
@@ -13668,7 +13668,7 @@
                           <a:latin typeface="Garamond"/>
                           <a:cs typeface="Garamond"/>
                         </a:rPr>
-                        <a:t>3,552</a:t>
+                        <a:t>3,556</a:t>
                       </a:r>
                     </a:p>
                   </a:txBody>
@@ -13692,7 +13692,7 @@
                           <a:latin typeface="Garamond"/>
                           <a:cs typeface="Garamond"/>
                         </a:rPr>
-                        <a:t>3,429</a:t>
+                        <a:t>3,434</a:t>
                       </a:r>
                     </a:p>
                   </a:txBody>
@@ -13716,7 +13716,7 @@
                           <a:latin typeface="Garamond"/>
                           <a:cs typeface="Garamond"/>
                         </a:rPr>
-                        <a:t>3,764</a:t>
+                        <a:t>3,770</a:t>
                       </a:r>
                     </a:p>
                   </a:txBody>
@@ -13740,7 +13740,7 @@
                           <a:latin typeface="Garamond"/>
                           <a:cs typeface="Garamond"/>
                         </a:rPr>
-                        <a:t>3,507</a:t>
+                        <a:t>3,513</a:t>
                       </a:r>
                     </a:p>
                   </a:txBody>
@@ -13764,7 +13764,7 @@
                           <a:latin typeface="Garamond"/>
                           <a:cs typeface="Garamond"/>
                         </a:rPr>
-                        <a:t>3,989</a:t>
+                        <a:t>3,996</a:t>
                       </a:r>
                     </a:p>
                   </a:txBody>
@@ -13788,7 +13788,7 @@
                           <a:latin typeface="Garamond"/>
                           <a:cs typeface="Garamond"/>
                         </a:rPr>
-                        <a:t>3,586</a:t>
+                        <a:t>3,594</a:t>
                       </a:r>
                     </a:p>
                   </a:txBody>
@@ -13812,7 +13812,7 @@
                           <a:latin typeface="Garamond"/>
                           <a:cs typeface="Garamond"/>
                         </a:rPr>
-                        <a:t>4,226</a:t>
+                        <a:t>4,236</a:t>
                       </a:r>
                     </a:p>
                   </a:txBody>
@@ -13958,7 +13958,7 @@
                           <a:latin typeface="Garamond"/>
                           <a:cs typeface="Garamond"/>
                         </a:rPr>
-                        <a:t>5,613</a:t>
+                        <a:t>4,659</a:t>
                       </a:r>
                     </a:p>
                   </a:txBody>
@@ -13982,7 +13982,7 @@
                           <a:latin typeface="Garamond"/>
                           <a:cs typeface="Garamond"/>
                         </a:rPr>
-                        <a:t>5,738</a:t>
+                        <a:t>4,763</a:t>
                       </a:r>
                     </a:p>
                   </a:txBody>
@@ -14006,7 +14006,7 @@
                           <a:latin typeface="Garamond"/>
                           <a:cs typeface="Garamond"/>
                         </a:rPr>
-                        <a:t>6,231</a:t>
+                        <a:t>4,766</a:t>
                       </a:r>
                     </a:p>
                   </a:txBody>
@@ -14030,7 +14030,7 @@
                           <a:latin typeface="Garamond"/>
                           <a:cs typeface="Garamond"/>
                         </a:rPr>
-                        <a:t>6,601</a:t>
+                        <a:t>5,049</a:t>
                       </a:r>
                     </a:p>
                   </a:txBody>
@@ -14054,7 +14054,7 @@
                           <a:latin typeface="Garamond"/>
                           <a:cs typeface="Garamond"/>
                         </a:rPr>
-                        <a:t>6,914</a:t>
+                        <a:t>4,876</a:t>
                       </a:r>
                     </a:p>
                   </a:txBody>
@@ -14078,7 +14078,7 @@
                           <a:latin typeface="Garamond"/>
                           <a:cs typeface="Garamond"/>
                         </a:rPr>
-                        <a:t>7,590</a:t>
+                        <a:t>5,352</a:t>
                       </a:r>
                     </a:p>
                   </a:txBody>
@@ -14102,7 +14102,7 @@
                           <a:latin typeface="Garamond"/>
                           <a:cs typeface="Garamond"/>
                         </a:rPr>
-                        <a:t>7,663</a:t>
+                        <a:t>4,988</a:t>
                       </a:r>
                     </a:p>
                   </a:txBody>
@@ -14126,7 +14126,7 @@
                           <a:latin typeface="Garamond"/>
                           <a:cs typeface="Garamond"/>
                         </a:rPr>
-                        <a:t>8,716</a:t>
+                        <a:t>5,673</a:t>
                       </a:r>
                     </a:p>
                   </a:txBody>
@@ -14150,7 +14150,7 @@
                           <a:latin typeface="Garamond"/>
                           <a:cs typeface="Garamond"/>
                         </a:rPr>
-                        <a:t>8,481</a:t>
+                        <a:t>5,103</a:t>
                       </a:r>
                     </a:p>
                   </a:txBody>
@@ -14174,7 +14174,7 @@
                           <a:latin typeface="Garamond"/>
                           <a:cs typeface="Garamond"/>
                         </a:rPr>
-                        <a:t>9,995</a:t>
+                        <a:t>6,014</a:t>
                       </a:r>
                     </a:p>
                   </a:txBody>
@@ -14736,7 +14736,7 @@
                           <a:latin typeface="Garamond"/>
                           <a:cs typeface="Garamond"/>
                         </a:rPr>
-                        <a:t>LULU_3_Statement_Model.xlsx → Balance Sheet (CFS plug)</a:t>
+                        <a:t>LULU_DCF_Valuation_Model.xlsx → Scenarios, col G pitch bridge cash</a:t>
                       </a:r>
                     </a:p>
                   </a:txBody>
@@ -14760,7 +14760,7 @@
                           <a:latin typeface="Garamond"/>
                           <a:cs typeface="Garamond"/>
                         </a:rPr>
-                        <a:t>FY25 cash + LULU_DCF_Valuation_Model.xlsx → Scenarios, col H FCF + buybacks</a:t>
+                        <a:t>LULU_DCF_Valuation_Model.xlsx → Scenarios, col H pitch bridge cash</a:t>
                       </a:r>
                     </a:p>
                   </a:txBody>
@@ -14834,7 +14834,7 @@
                           <a:latin typeface="Garamond"/>
                           <a:cs typeface="Garamond"/>
                         </a:rPr>
-                        <a:t>LULU_3_Statement_Model.xlsx → Balance Sheet</a:t>
+                        <a:t>LULU_DCF_Valuation_Model.xlsx → Scenarios, col G inventories (NWC)</a:t>
                       </a:r>
                     </a:p>
                   </a:txBody>
@@ -14858,7 +14858,7 @@
                           <a:latin typeface="Garamond"/>
                           <a:cs typeface="Garamond"/>
                         </a:rPr>
-                        <a:t>Pitch build: base BS × (bull rev / base rev); cash = FY25 + bull FCF + buybacks</a:t>
+                        <a:t>LULU_DCF_Valuation_Model.xlsx → Scenarios, col H inventories (NWC)</a:t>
                       </a:r>
                     </a:p>
                   </a:txBody>
@@ -14932,7 +14932,7 @@
                           <a:latin typeface="Garamond"/>
                           <a:cs typeface="Garamond"/>
                         </a:rPr>
-                        <a:t>LULU_3_Statement_Model.xlsx → Balance Sheet</a:t>
+                        <a:t>LULU_DCF_Valuation_Model.xlsx → Scenarios, col G pitch bridge TA</a:t>
                       </a:r>
                     </a:p>
                   </a:txBody>
@@ -14956,7 +14956,7 @@
                           <a:latin typeface="Garamond"/>
                           <a:cs typeface="Garamond"/>
                         </a:rPr>
-                        <a:t>Pitch build: base BS × (bull rev / base rev); cash = FY25 + bull FCF + buybacks</a:t>
+                        <a:t>LULU_DCF_Valuation_Model.xlsx → Scenarios, col H pitch bridge TA</a:t>
                       </a:r>
                     </a:p>
                   </a:txBody>
@@ -15030,7 +15030,7 @@
                           <a:latin typeface="Garamond"/>
                           <a:cs typeface="Garamond"/>
                         </a:rPr>
-                        <a:t>LULU_3_Statement_Model.xlsx → Balance Sheet</a:t>
+                        <a:t>LULU_DCF_Valuation_Model.xlsx → Scenarios, col G pitch bridge TL</a:t>
                       </a:r>
                     </a:p>
                   </a:txBody>
@@ -15054,7 +15054,7 @@
                           <a:latin typeface="Garamond"/>
                           <a:cs typeface="Garamond"/>
                         </a:rPr>
-                        <a:t>Pitch build: base BS × (bull rev / base rev); cash = FY25 + bull FCF + buybacks</a:t>
+                        <a:t>LULU_DCF_Valuation_Model.xlsx → Scenarios, col H pitch bridge TL</a:t>
                       </a:r>
                     </a:p>
                   </a:txBody>
@@ -15128,7 +15128,7 @@
                           <a:latin typeface="Garamond"/>
                           <a:cs typeface="Garamond"/>
                         </a:rPr>
-                        <a:t>LULU_3_Statement_Model.xlsx → Balance Sheet</a:t>
+                        <a:t>LULU_DCF_Valuation_Model.xlsx → Scenarios, col G pitch bridge equity</a:t>
                       </a:r>
                     </a:p>
                   </a:txBody>
@@ -15152,7 +15152,7 @@
                           <a:latin typeface="Garamond"/>
                           <a:cs typeface="Garamond"/>
                         </a:rPr>
-                        <a:t>Pitch build: base BS × (bull rev / base rev); cash = FY25 + bull FCF + buybacks</a:t>
+                        <a:t>LULU_DCF_Valuation_Model.xlsx → Scenarios, col H pitch bridge equity</a:t>
                       </a:r>
                     </a:p>
                   </a:txBody>
@@ -15226,7 +15226,7 @@
                           <a:latin typeface="Garamond"/>
                           <a:cs typeface="Garamond"/>
                         </a:rPr>
-                        <a:t>LULU_3_Statement_Model.xlsx → Balance Sheet ($0)</a:t>
+                        <a:t>$0</a:t>
                       </a:r>
                     </a:p>
                   </a:txBody>
@@ -15250,7 +15250,7 @@
                           <a:latin typeface="Garamond"/>
                           <a:cs typeface="Garamond"/>
                         </a:rPr>
-                        <a:t>$0 (no term debt)</a:t>
+                        <a:t>$0</a:t>
                       </a:r>
                     </a:p>
                   </a:txBody>
@@ -15304,7 +15304,7 @@
                 <a:latin typeface="Garamond"/>
                 <a:cs typeface="Garamond"/>
               </a:rPr>
-              <a:t>Base BS only in LULU_3_Statement_Model.xlsx. Bull BS is illustrative (not a separate workbook tab).</a:t>
+              <a:t>BS forecast: Scenarios pitch bridge (cash waterfall + FY25 BS × revenue growth).</a:t>
             </a:r>
           </a:p>
         </p:txBody>
@@ -15573,7 +15573,7 @@
                 <a:latin typeface="Garamond"/>
                 <a:cs typeface="Garamond"/>
               </a:rPr>
-              <a:t>Hist = 10-K. Base (26B) = 3-Statement Model + Scenarios G. Bull (26U) = DCF Scenarios H (BS bull lines approximated — see model-source table).</a:t>
+              <a:t>Hist = 10-K. Base (26B) &amp; bull (26U) = DCF Scenarios pitch-bridge block, cols G &amp; H.</a:t>
             </a:r>
           </a:p>
         </p:txBody>
@@ -15873,7 +15873,7 @@
                 <a:latin typeface="Garamond"/>
                 <a:cs typeface="Garamond"/>
               </a:rPr>
-              <a:t>Cash from operations: base FY26 1,736M → FY30 1,812M; bull FY26 1,820M → FY30 2,385M</a:t>
+              <a:t>Cash from operations: base FY26 1,660M → FY30 1,751M; bull FY26 1,820M → FY30 2,385M</a:t>
             </a:r>
           </a:p>
           <a:p>
@@ -15939,7 +15939,7 @@
                 <a:latin typeface="Garamond"/>
                 <a:cs typeface="Garamond"/>
               </a:rPr>
-              <a:t>Free cash flow: base FY26 1,163M → FY30 1,184M; bull FY26 1,340M → FY30 1,779M</a:t>
+              <a:t>Free cash flow: base FY26 1,087M → FY30 1,123M; bull FY26 1,340M → FY30 1,779M</a:t>
             </a:r>
           </a:p>
           <a:p>
@@ -16498,7 +16498,7 @@
                           <a:latin typeface="Garamond"/>
                           <a:cs typeface="Garamond"/>
                         </a:rPr>
-                        <a:t>1,736</a:t>
+                        <a:t>1,660</a:t>
                       </a:r>
                     </a:p>
                   </a:txBody>
@@ -16546,7 +16546,7 @@
                           <a:latin typeface="Garamond"/>
                           <a:cs typeface="Garamond"/>
                         </a:rPr>
-                        <a:t>1,602</a:t>
+                        <a:t>1,518</a:t>
                       </a:r>
                     </a:p>
                   </a:txBody>
@@ -16594,7 +16594,7 @@
                           <a:latin typeface="Garamond"/>
                           <a:cs typeface="Garamond"/>
                         </a:rPr>
-                        <a:t>1,677</a:t>
+                        <a:t>1,593</a:t>
                       </a:r>
                     </a:p>
                   </a:txBody>
@@ -16642,7 +16642,7 @@
                           <a:latin typeface="Garamond"/>
                           <a:cs typeface="Garamond"/>
                         </a:rPr>
-                        <a:t>1,732</a:t>
+                        <a:t>1,670</a:t>
                       </a:r>
                     </a:p>
                   </a:txBody>
@@ -16690,7 +16690,7 @@
                           <a:latin typeface="Garamond"/>
                           <a:cs typeface="Garamond"/>
                         </a:rPr>
-                        <a:t>1,812</a:t>
+                        <a:t>1,751</a:t>
                       </a:r>
                     </a:p>
                   </a:txBody>
@@ -17584,7 +17584,7 @@
                           <a:latin typeface="Garamond"/>
                           <a:cs typeface="Garamond"/>
                         </a:rPr>
-                        <a:t>1,163</a:t>
+                        <a:t>1,087</a:t>
                       </a:r>
                     </a:p>
                   </a:txBody>
@@ -17632,7 +17632,7 @@
                           <a:latin typeface="Garamond"/>
                           <a:cs typeface="Garamond"/>
                         </a:rPr>
-                        <a:t>1,015</a:t>
+                        <a:t>931</a:t>
                       </a:r>
                     </a:p>
                   </a:txBody>
@@ -17680,7 +17680,7 @@
                           <a:latin typeface="Garamond"/>
                           <a:cs typeface="Garamond"/>
                         </a:rPr>
-                        <a:t>1,077</a:t>
+                        <a:t>993</a:t>
                       </a:r>
                     </a:p>
                   </a:txBody>
@@ -17728,7 +17728,7 @@
                           <a:latin typeface="Garamond"/>
                           <a:cs typeface="Garamond"/>
                         </a:rPr>
-                        <a:t>1,118</a:t>
+                        <a:t>1,056</a:t>
                       </a:r>
                     </a:p>
                   </a:txBody>
@@ -17776,7 +17776,7 @@
                           <a:latin typeface="Garamond"/>
                           <a:cs typeface="Garamond"/>
                         </a:rPr>
-                        <a:t>1,184</a:t>
+                        <a:t>1,123</a:t>
                       </a:r>
                     </a:p>
                   </a:txBody>
@@ -18362,7 +18362,7 @@
                           <a:latin typeface="Garamond"/>
                           <a:cs typeface="Garamond"/>
                         </a:rPr>
-                        <a:t>LULU_3_Statement_Model.xlsx → Cash Flow</a:t>
+                        <a:t>LULU_DCF_Valuation_Model.xlsx → Scenarios, col G pitch bridge CFO</a:t>
                       </a:r>
                     </a:p>
                   </a:txBody>
@@ -18386,7 +18386,7 @@
                           <a:latin typeface="Garamond"/>
                           <a:cs typeface="Garamond"/>
                         </a:rPr>
-                        <a:t>LULU_DCF_Valuation_Model.xlsx → Scenarios, col H NI + D&amp;A + ΔNWC</a:t>
+                        <a:t>LULU_DCF_Valuation_Model.xlsx → Scenarios, col H pitch bridge CFO</a:t>
                       </a:r>
                     </a:p>
                   </a:txBody>
@@ -18460,7 +18460,7 @@
                           <a:latin typeface="Garamond"/>
                           <a:cs typeface="Garamond"/>
                         </a:rPr>
-                        <a:t>LULU_3_Statement_Model.xlsx → Cash Flow</a:t>
+                        <a:t>LULU_DCF_Valuation_Model.xlsx → Scenarios, col G D&amp;A rows</a:t>
                       </a:r>
                     </a:p>
                   </a:txBody>
@@ -18558,7 +18558,7 @@
                           <a:latin typeface="Garamond"/>
                           <a:cs typeface="Garamond"/>
                         </a:rPr>
-                        <a:t>LULU_3_Statement_Model.xlsx → Cash Flow (rev × capex%; LULU_DCF_Valuation_Model.xlsx → Scenarios, col G)</a:t>
+                        <a:t>LULU_DCF_Valuation_Model.xlsx → Scenarios, col G capex rows</a:t>
                       </a:r>
                     </a:p>
                   </a:txBody>
@@ -18656,7 +18656,7 @@
                           <a:latin typeface="Garamond"/>
                           <a:cs typeface="Garamond"/>
                         </a:rPr>
-                        <a:t>LULU_3_Statement_Model.xlsx → Cash Flow</a:t>
+                        <a:t>LULU_DCF_Valuation_Model.xlsx → Scenarios, col G pitch bridge FCF (CFS)</a:t>
                       </a:r>
                     </a:p>
                   </a:txBody>
@@ -18680,7 +18680,7 @@
                           <a:latin typeface="Garamond"/>
                           <a:cs typeface="Garamond"/>
                         </a:rPr>
-                        <a:t>LULU_DCF_Valuation_Model.xlsx → Scenarios, col H CFO − capex</a:t>
+                        <a:t>LULU_DCF_Valuation_Model.xlsx → Scenarios, col H pitch bridge FCF (CFS)</a:t>
                       </a:r>
                     </a:p>
                   </a:txBody>
@@ -18754,7 +18754,7 @@
                           <a:latin typeface="Garamond"/>
                           <a:cs typeface="Garamond"/>
                         </a:rPr>
-                        <a:t>LULU_3_Statement_Model.xlsx → Assumptions (linked to Scenarios G) $500M/yr buyback</a:t>
+                        <a:t>LULU_DCF_Valuation_Model.xlsx → Scenarios, col G fixed buyback ($500M)</a:t>
                       </a:r>
                     </a:p>
                   </a:txBody>
@@ -18778,7 +18778,7 @@
                           <a:latin typeface="Garamond"/>
                           <a:cs typeface="Garamond"/>
                         </a:rPr>
-                        <a:t>LULU_DCF_Valuation_Model.xlsx → Scenarios, col H 75% of bull FCF</a:t>
+                        <a:t>LULU_DCF_Valuation_Model.xlsx → Scenarios, col H 75% FCF buyback</a:t>
                       </a:r>
                     </a:p>
                   </a:txBody>
@@ -18832,7 +18832,7 @@
                 <a:latin typeface="Garamond"/>
                 <a:cs typeface="Garamond"/>
               </a:rPr>
-              <a:t>Base CF in LULU_3_Statement_Model.xlsx → Cash Flow; bull CF from LULU_DCF_Valuation_Model.xlsx → Scenarios, col H. Buybacks are CFF (not in DCF FCFF).</a:t>
+              <a:t>Buybacks: col G = $500M/yr fixed; col H = 75% FCF (Scenarios assumptions).</a:t>
             </a:r>
           </a:p>
         </p:txBody>

--- a/LULU/LULU_Investment_Pitch_Deck.pptx
+++ b/LULU/LULU_Investment_Pitch_Deck.pptx
@@ -7421,7 +7421,7 @@
                 <a:latin typeface="Garamond"/>
                 <a:cs typeface="Garamond"/>
               </a:rPr>
-              <a:t>Reported history (10-K) vs base &amp; bull operating forecast — all FY26–30 (US$ M)</a:t>
+              <a:t>Reported history (10-K) vs base-case operating forecast — FY26–30 (US$ M)</a:t>
             </a:r>
           </a:p>
         </p:txBody>
@@ -7509,7 +7509,7 @@
                 <a:latin typeface="Garamond"/>
                 <a:cs typeface="Garamond"/>
               </a:rPr>
-              <a:t>Hist = 10-K. Base (26B) &amp; bull (26U) = DCF Scenarios pitch-bridge block, cols G &amp; H.</a:t>
+              <a:t>Hist = 10-K. Forecast (26–30) = DCF Scenarios pitch-bridge block, col G (base case only).</a:t>
             </a:r>
           </a:p>
         </p:txBody>
@@ -7809,7 +7809,7 @@
                 <a:latin typeface="Garamond"/>
                 <a:cs typeface="Garamond"/>
               </a:rPr>
-              <a:t>FORECAST (FY2026E–FY2030E) — base (G) vs bull (H)</a:t>
+              <a:t>FORECAST (FY2026E–FY2030E) — base case (Scenarios col G)</a:t>
             </a:r>
           </a:p>
           <a:p>
@@ -7831,7 +7831,7 @@
                 <a:latin typeface="Garamond"/>
                 <a:cs typeface="Garamond"/>
               </a:rPr>
-              <a:t>Net revenue: base FY26 10,425M → FY30 11,418M; bull FY26 10,658M → FY30 13,456M</a:t>
+              <a:t>Net revenue: FY26 10,425M → FY30 11,418M</a:t>
             </a:r>
           </a:p>
           <a:p>
@@ -7853,7 +7853,7 @@
                 <a:latin typeface="Garamond"/>
                 <a:cs typeface="Garamond"/>
               </a:rPr>
-              <a:t>Gross profit: base FY26 5,901M → FY30 6,463M; bull FY26 6,129M → FY30 7,737M</a:t>
+              <a:t>Gross profit: FY26 5,901M → FY30 6,463M</a:t>
             </a:r>
           </a:p>
           <a:p>
@@ -7875,7 +7875,7 @@
                 <a:latin typeface="Garamond"/>
                 <a:cs typeface="Garamond"/>
               </a:rPr>
-              <a:t>Operating income: base FY26 1,511M → FY30 1,770M; bull FY26 1,680M → FY30 2,557M</a:t>
+              <a:t>Operating income: FY26 1,511M → FY30 1,770M</a:t>
             </a:r>
           </a:p>
           <a:p>
@@ -7897,7 +7897,7 @@
                 <a:latin typeface="Garamond"/>
                 <a:cs typeface="Garamond"/>
               </a:rPr>
-              <a:t>Operating margin %: base FY26 14.5% → FY30 15.5%; bull FY26 15.8% → FY30 19.0%</a:t>
+              <a:t>Operating margin %: FY26 14.5% → FY30 15.5%</a:t>
             </a:r>
           </a:p>
           <a:p>
@@ -7919,7 +7919,7 @@
                 <a:latin typeface="Garamond"/>
                 <a:cs typeface="Garamond"/>
               </a:rPr>
-              <a:t>Net income: base FY26 1,089M → FY30 1,256M; bull FY26 1,242M → FY30 1,859M</a:t>
+              <a:t>Net income: FY26 1,089M → FY30 1,256M</a:t>
             </a:r>
           </a:p>
           <a:p>
@@ -7941,7 +7941,7 @@
                 <a:latin typeface="Garamond"/>
                 <a:cs typeface="Garamond"/>
               </a:rPr>
-              <a:t>Diluted EPS: base FY26 $9776.90 → FY30 $11279.95; bull FY26 $11150.90 → FY30 $16688.77</a:t>
+              <a:t>Diluted EPS: FY26 $9776.90 → FY30 $11279.95</a:t>
             </a:r>
           </a:p>
         </p:txBody>
@@ -7956,7 +7956,7 @@
         </p:nvGraphicFramePr>
         <p:xfrm>
           <a:off x="457200" y="3364992"/>
-          <a:ext cx="11292828" cy="2176272"/>
+          <a:ext cx="11292840" cy="2176272"/>
         </p:xfrm>
         <a:graphic>
           <a:graphicData uri="http://schemas.openxmlformats.org/drawingml/2006/table">
@@ -7966,20 +7966,15 @@
               </a:tblPr>
               <a:tblGrid>
                 <a:gridCol w="2148840"/>
-                <a:gridCol w="653142"/>
-                <a:gridCol w="653142"/>
-                <a:gridCol w="653142"/>
-                <a:gridCol w="653142"/>
-                <a:gridCol w="653142"/>
-                <a:gridCol w="653142"/>
-                <a:gridCol w="653142"/>
-                <a:gridCol w="653142"/>
-                <a:gridCol w="653142"/>
-                <a:gridCol w="653142"/>
-                <a:gridCol w="653142"/>
-                <a:gridCol w="653142"/>
-                <a:gridCol w="653142"/>
-                <a:gridCol w="653142"/>
+                <a:gridCol w="1016000"/>
+                <a:gridCol w="1016000"/>
+                <a:gridCol w="1016000"/>
+                <a:gridCol w="1016000"/>
+                <a:gridCol w="1016000"/>
+                <a:gridCol w="1016000"/>
+                <a:gridCol w="1016000"/>
+                <a:gridCol w="1016000"/>
+                <a:gridCol w="1016000"/>
               </a:tblGrid>
               <a:tr h="310896">
                 <a:tc>
@@ -8116,7 +8111,7 @@
                           <a:latin typeface="Garamond"/>
                           <a:cs typeface="Garamond"/>
                         </a:rPr>
-                        <a:t>26B</a:t>
+                        <a:t>26</a:t>
                       </a:r>
                     </a:p>
                   </a:txBody>
@@ -8140,7 +8135,7 @@
                           <a:latin typeface="Garamond"/>
                           <a:cs typeface="Garamond"/>
                         </a:rPr>
-                        <a:t>26U</a:t>
+                        <a:t>27</a:t>
                       </a:r>
                     </a:p>
                   </a:txBody>
@@ -8164,7 +8159,7 @@
                           <a:latin typeface="Garamond"/>
                           <a:cs typeface="Garamond"/>
                         </a:rPr>
-                        <a:t>27B</a:t>
+                        <a:t>28</a:t>
                       </a:r>
                     </a:p>
                   </a:txBody>
@@ -8188,7 +8183,7 @@
                           <a:latin typeface="Garamond"/>
                           <a:cs typeface="Garamond"/>
                         </a:rPr>
-                        <a:t>27U</a:t>
+                        <a:t>29</a:t>
                       </a:r>
                     </a:p>
                   </a:txBody>
@@ -8212,127 +8207,7 @@
                           <a:latin typeface="Garamond"/>
                           <a:cs typeface="Garamond"/>
                         </a:rPr>
-                        <a:t>28B</a:t>
-                      </a:r>
-                    </a:p>
-                  </a:txBody>
-                  <a:tcPr anchor="ctr">
-                    <a:solidFill>
-                      <a:srgbClr val="1F2A44"/>
-                    </a:solidFill>
-                  </a:tcPr>
-                </a:tc>
-                <a:tc>
-                  <a:txBody>
-                    <a:bodyPr/>
-                    <a:lstStyle/>
-                    <a:p>
-                      <a:pPr algn="r"/>
-                      <a:r>
-                        <a:rPr sz="800" b="1" i="0">
-                          <a:solidFill>
-                            <a:srgbClr val="FFFFFF"/>
-                          </a:solidFill>
-                          <a:latin typeface="Garamond"/>
-                          <a:cs typeface="Garamond"/>
-                        </a:rPr>
-                        <a:t>28U</a:t>
-                      </a:r>
-                    </a:p>
-                  </a:txBody>
-                  <a:tcPr anchor="ctr">
-                    <a:solidFill>
-                      <a:srgbClr val="1F2A44"/>
-                    </a:solidFill>
-                  </a:tcPr>
-                </a:tc>
-                <a:tc>
-                  <a:txBody>
-                    <a:bodyPr/>
-                    <a:lstStyle/>
-                    <a:p>
-                      <a:pPr algn="r"/>
-                      <a:r>
-                        <a:rPr sz="800" b="1" i="0">
-                          <a:solidFill>
-                            <a:srgbClr val="FFFFFF"/>
-                          </a:solidFill>
-                          <a:latin typeface="Garamond"/>
-                          <a:cs typeface="Garamond"/>
-                        </a:rPr>
-                        <a:t>29B</a:t>
-                      </a:r>
-                    </a:p>
-                  </a:txBody>
-                  <a:tcPr anchor="ctr">
-                    <a:solidFill>
-                      <a:srgbClr val="1F2A44"/>
-                    </a:solidFill>
-                  </a:tcPr>
-                </a:tc>
-                <a:tc>
-                  <a:txBody>
-                    <a:bodyPr/>
-                    <a:lstStyle/>
-                    <a:p>
-                      <a:pPr algn="r"/>
-                      <a:r>
-                        <a:rPr sz="800" b="1" i="0">
-                          <a:solidFill>
-                            <a:srgbClr val="FFFFFF"/>
-                          </a:solidFill>
-                          <a:latin typeface="Garamond"/>
-                          <a:cs typeface="Garamond"/>
-                        </a:rPr>
-                        <a:t>29U</a:t>
-                      </a:r>
-                    </a:p>
-                  </a:txBody>
-                  <a:tcPr anchor="ctr">
-                    <a:solidFill>
-                      <a:srgbClr val="1F2A44"/>
-                    </a:solidFill>
-                  </a:tcPr>
-                </a:tc>
-                <a:tc>
-                  <a:txBody>
-                    <a:bodyPr/>
-                    <a:lstStyle/>
-                    <a:p>
-                      <a:pPr algn="r"/>
-                      <a:r>
-                        <a:rPr sz="800" b="1" i="0">
-                          <a:solidFill>
-                            <a:srgbClr val="FFFFFF"/>
-                          </a:solidFill>
-                          <a:latin typeface="Garamond"/>
-                          <a:cs typeface="Garamond"/>
-                        </a:rPr>
-                        <a:t>30B</a:t>
-                      </a:r>
-                    </a:p>
-                  </a:txBody>
-                  <a:tcPr anchor="ctr">
-                    <a:solidFill>
-                      <a:srgbClr val="1F2A44"/>
-                    </a:solidFill>
-                  </a:tcPr>
-                </a:tc>
-                <a:tc>
-                  <a:txBody>
-                    <a:bodyPr/>
-                    <a:lstStyle/>
-                    <a:p>
-                      <a:pPr algn="r"/>
-                      <a:r>
-                        <a:rPr sz="800" b="1" i="0">
-                          <a:solidFill>
-                            <a:srgbClr val="FFFFFF"/>
-                          </a:solidFill>
-                          <a:latin typeface="Garamond"/>
-                          <a:cs typeface="Garamond"/>
-                        </a:rPr>
-                        <a:t>30U</a:t>
+                        <a:t>30</a:t>
                       </a:r>
                     </a:p>
                   </a:txBody>
@@ -8502,7 +8377,7 @@
                           <a:latin typeface="Garamond"/>
                           <a:cs typeface="Garamond"/>
                         </a:rPr>
-                        <a:t>10,658</a:t>
+                        <a:t>10,665</a:t>
                       </a:r>
                     </a:p>
                   </a:txBody>
@@ -8526,7 +8401,7 @@
                           <a:latin typeface="Garamond"/>
                           <a:cs typeface="Garamond"/>
                         </a:rPr>
-                        <a:t>10,665</a:t>
+                        <a:t>10,910</a:t>
                       </a:r>
                     </a:p>
                   </a:txBody>
@@ -8550,7 +8425,7 @@
                           <a:latin typeface="Garamond"/>
                           <a:cs typeface="Garamond"/>
                         </a:rPr>
-                        <a:t>11,298</a:t>
+                        <a:t>11,161</a:t>
                       </a:r>
                     </a:p>
                   </a:txBody>
@@ -8574,127 +8449,7 @@
                           <a:latin typeface="Garamond"/>
                           <a:cs typeface="Garamond"/>
                         </a:rPr>
-                        <a:t>10,910</a:t>
-                      </a:r>
-                    </a:p>
-                  </a:txBody>
-                  <a:tcPr anchor="ctr" marT="12700" marB="12700">
-                    <a:solidFill>
-                      <a:srgbClr val="FFFFFF"/>
-                    </a:solidFill>
-                  </a:tcPr>
-                </a:tc>
-                <a:tc>
-                  <a:txBody>
-                    <a:bodyPr/>
-                    <a:lstStyle/>
-                    <a:p>
-                      <a:pPr algn="r"/>
-                      <a:r>
-                        <a:rPr sz="850" b="1" i="0">
-                          <a:solidFill>
-                            <a:srgbClr val="1F2A44"/>
-                          </a:solidFill>
-                          <a:latin typeface="Garamond"/>
-                          <a:cs typeface="Garamond"/>
-                        </a:rPr>
-                        <a:t>11,976</a:t>
-                      </a:r>
-                    </a:p>
-                  </a:txBody>
-                  <a:tcPr anchor="ctr" marT="12700" marB="12700">
-                    <a:solidFill>
-                      <a:srgbClr val="FFFFFF"/>
-                    </a:solidFill>
-                  </a:tcPr>
-                </a:tc>
-                <a:tc>
-                  <a:txBody>
-                    <a:bodyPr/>
-                    <a:lstStyle/>
-                    <a:p>
-                      <a:pPr algn="r"/>
-                      <a:r>
-                        <a:rPr sz="850" b="1" i="0">
-                          <a:solidFill>
-                            <a:srgbClr val="1F2A44"/>
-                          </a:solidFill>
-                          <a:latin typeface="Garamond"/>
-                          <a:cs typeface="Garamond"/>
-                        </a:rPr>
-                        <a:t>11,161</a:t>
-                      </a:r>
-                    </a:p>
-                  </a:txBody>
-                  <a:tcPr anchor="ctr" marT="12700" marB="12700">
-                    <a:solidFill>
-                      <a:srgbClr val="FFFFFF"/>
-                    </a:solidFill>
-                  </a:tcPr>
-                </a:tc>
-                <a:tc>
-                  <a:txBody>
-                    <a:bodyPr/>
-                    <a:lstStyle/>
-                    <a:p>
-                      <a:pPr algn="r"/>
-                      <a:r>
-                        <a:rPr sz="850" b="1" i="0">
-                          <a:solidFill>
-                            <a:srgbClr val="1F2A44"/>
-                          </a:solidFill>
-                          <a:latin typeface="Garamond"/>
-                          <a:cs typeface="Garamond"/>
-                        </a:rPr>
-                        <a:t>12,694</a:t>
-                      </a:r>
-                    </a:p>
-                  </a:txBody>
-                  <a:tcPr anchor="ctr" marT="12700" marB="12700">
-                    <a:solidFill>
-                      <a:srgbClr val="FFFFFF"/>
-                    </a:solidFill>
-                  </a:tcPr>
-                </a:tc>
-                <a:tc>
-                  <a:txBody>
-                    <a:bodyPr/>
-                    <a:lstStyle/>
-                    <a:p>
-                      <a:pPr algn="r"/>
-                      <a:r>
-                        <a:rPr sz="850" b="1" i="0">
-                          <a:solidFill>
-                            <a:srgbClr val="1F2A44"/>
-                          </a:solidFill>
-                          <a:latin typeface="Garamond"/>
-                          <a:cs typeface="Garamond"/>
-                        </a:rPr>
                         <a:t>11,418</a:t>
-                      </a:r>
-                    </a:p>
-                  </a:txBody>
-                  <a:tcPr anchor="ctr" marT="12700" marB="12700">
-                    <a:solidFill>
-                      <a:srgbClr val="FFFFFF"/>
-                    </a:solidFill>
-                  </a:tcPr>
-                </a:tc>
-                <a:tc>
-                  <a:txBody>
-                    <a:bodyPr/>
-                    <a:lstStyle/>
-                    <a:p>
-                      <a:pPr algn="r"/>
-                      <a:r>
-                        <a:rPr sz="850" b="1" i="0">
-                          <a:solidFill>
-                            <a:srgbClr val="1F2A44"/>
-                          </a:solidFill>
-                          <a:latin typeface="Garamond"/>
-                          <a:cs typeface="Garamond"/>
-                        </a:rPr>
-                        <a:t>13,456</a:t>
                       </a:r>
                     </a:p>
                   </a:txBody>
@@ -8864,7 +8619,7 @@
                           <a:latin typeface="Garamond"/>
                           <a:cs typeface="Garamond"/>
                         </a:rPr>
-                        <a:t>6,129</a:t>
+                        <a:t>6,036</a:t>
                       </a:r>
                     </a:p>
                   </a:txBody>
@@ -8888,7 +8643,7 @@
                           <a:latin typeface="Garamond"/>
                           <a:cs typeface="Garamond"/>
                         </a:rPr>
-                        <a:t>6,036</a:t>
+                        <a:t>6,175</a:t>
                       </a:r>
                     </a:p>
                   </a:txBody>
@@ -8912,7 +8667,7 @@
                           <a:latin typeface="Garamond"/>
                           <a:cs typeface="Garamond"/>
                         </a:rPr>
-                        <a:t>6,496</a:t>
+                        <a:t>6,317</a:t>
                       </a:r>
                     </a:p>
                   </a:txBody>
@@ -8936,127 +8691,7 @@
                           <a:latin typeface="Garamond"/>
                           <a:cs typeface="Garamond"/>
                         </a:rPr>
-                        <a:t>6,175</a:t>
-                      </a:r>
-                    </a:p>
-                  </a:txBody>
-                  <a:tcPr anchor="ctr" marT="12700" marB="12700">
-                    <a:solidFill>
-                      <a:srgbClr val="F0F1F3"/>
-                    </a:solidFill>
-                  </a:tcPr>
-                </a:tc>
-                <a:tc>
-                  <a:txBody>
-                    <a:bodyPr/>
-                    <a:lstStyle/>
-                    <a:p>
-                      <a:pPr algn="r"/>
-                      <a:r>
-                        <a:rPr sz="850" b="0" i="0">
-                          <a:solidFill>
-                            <a:srgbClr val="262626"/>
-                          </a:solidFill>
-                          <a:latin typeface="Garamond"/>
-                          <a:cs typeface="Garamond"/>
-                        </a:rPr>
-                        <a:t>6,886</a:t>
-                      </a:r>
-                    </a:p>
-                  </a:txBody>
-                  <a:tcPr anchor="ctr" marT="12700" marB="12700">
-                    <a:solidFill>
-                      <a:srgbClr val="F0F1F3"/>
-                    </a:solidFill>
-                  </a:tcPr>
-                </a:tc>
-                <a:tc>
-                  <a:txBody>
-                    <a:bodyPr/>
-                    <a:lstStyle/>
-                    <a:p>
-                      <a:pPr algn="r"/>
-                      <a:r>
-                        <a:rPr sz="850" b="0" i="0">
-                          <a:solidFill>
-                            <a:srgbClr val="262626"/>
-                          </a:solidFill>
-                          <a:latin typeface="Garamond"/>
-                          <a:cs typeface="Garamond"/>
-                        </a:rPr>
-                        <a:t>6,317</a:t>
-                      </a:r>
-                    </a:p>
-                  </a:txBody>
-                  <a:tcPr anchor="ctr" marT="12700" marB="12700">
-                    <a:solidFill>
-                      <a:srgbClr val="F0F1F3"/>
-                    </a:solidFill>
-                  </a:tcPr>
-                </a:tc>
-                <a:tc>
-                  <a:txBody>
-                    <a:bodyPr/>
-                    <a:lstStyle/>
-                    <a:p>
-                      <a:pPr algn="r"/>
-                      <a:r>
-                        <a:rPr sz="850" b="0" i="0">
-                          <a:solidFill>
-                            <a:srgbClr val="262626"/>
-                          </a:solidFill>
-                          <a:latin typeface="Garamond"/>
-                          <a:cs typeface="Garamond"/>
-                        </a:rPr>
-                        <a:t>7,299</a:t>
-                      </a:r>
-                    </a:p>
-                  </a:txBody>
-                  <a:tcPr anchor="ctr" marT="12700" marB="12700">
-                    <a:solidFill>
-                      <a:srgbClr val="F0F1F3"/>
-                    </a:solidFill>
-                  </a:tcPr>
-                </a:tc>
-                <a:tc>
-                  <a:txBody>
-                    <a:bodyPr/>
-                    <a:lstStyle/>
-                    <a:p>
-                      <a:pPr algn="r"/>
-                      <a:r>
-                        <a:rPr sz="850" b="0" i="0">
-                          <a:solidFill>
-                            <a:srgbClr val="262626"/>
-                          </a:solidFill>
-                          <a:latin typeface="Garamond"/>
-                          <a:cs typeface="Garamond"/>
-                        </a:rPr>
                         <a:t>6,463</a:t>
-                      </a:r>
-                    </a:p>
-                  </a:txBody>
-                  <a:tcPr anchor="ctr" marT="12700" marB="12700">
-                    <a:solidFill>
-                      <a:srgbClr val="F0F1F3"/>
-                    </a:solidFill>
-                  </a:tcPr>
-                </a:tc>
-                <a:tc>
-                  <a:txBody>
-                    <a:bodyPr/>
-                    <a:lstStyle/>
-                    <a:p>
-                      <a:pPr algn="r"/>
-                      <a:r>
-                        <a:rPr sz="850" b="0" i="0">
-                          <a:solidFill>
-                            <a:srgbClr val="262626"/>
-                          </a:solidFill>
-                          <a:latin typeface="Garamond"/>
-                          <a:cs typeface="Garamond"/>
-                        </a:rPr>
-                        <a:t>7,737</a:t>
                       </a:r>
                     </a:p>
                   </a:txBody>
@@ -9226,7 +8861,7 @@
                           <a:latin typeface="Garamond"/>
                           <a:cs typeface="Garamond"/>
                         </a:rPr>
-                        <a:t>1,680</a:t>
+                        <a:t>1,469</a:t>
                       </a:r>
                     </a:p>
                   </a:txBody>
@@ -9250,7 +8885,7 @@
                           <a:latin typeface="Garamond"/>
                           <a:cs typeface="Garamond"/>
                         </a:rPr>
-                        <a:t>1,469</a:t>
+                        <a:t>1,566</a:t>
                       </a:r>
                     </a:p>
                   </a:txBody>
@@ -9274,7 +8909,7 @@
                           <a:latin typeface="Garamond"/>
                           <a:cs typeface="Garamond"/>
                         </a:rPr>
-                        <a:t>1,765</a:t>
+                        <a:t>1,666</a:t>
                       </a:r>
                     </a:p>
                   </a:txBody>
@@ -9298,127 +8933,7 @@
                           <a:latin typeface="Garamond"/>
                           <a:cs typeface="Garamond"/>
                         </a:rPr>
-                        <a:t>1,566</a:t>
-                      </a:r>
-                    </a:p>
-                  </a:txBody>
-                  <a:tcPr anchor="ctr" marT="12700" marB="12700">
-                    <a:solidFill>
-                      <a:srgbClr val="FFFFFF"/>
-                    </a:solidFill>
-                  </a:tcPr>
-                </a:tc>
-                <a:tc>
-                  <a:txBody>
-                    <a:bodyPr/>
-                    <a:lstStyle/>
-                    <a:p>
-                      <a:pPr algn="r"/>
-                      <a:r>
-                        <a:rPr sz="850" b="1" i="0">
-                          <a:solidFill>
-                            <a:srgbClr val="1F2A44"/>
-                          </a:solidFill>
-                          <a:latin typeface="Garamond"/>
-                          <a:cs typeface="Garamond"/>
-                        </a:rPr>
-                        <a:t>2,006</a:t>
-                      </a:r>
-                    </a:p>
-                  </a:txBody>
-                  <a:tcPr anchor="ctr" marT="12700" marB="12700">
-                    <a:solidFill>
-                      <a:srgbClr val="FFFFFF"/>
-                    </a:solidFill>
-                  </a:tcPr>
-                </a:tc>
-                <a:tc>
-                  <a:txBody>
-                    <a:bodyPr/>
-                    <a:lstStyle/>
-                    <a:p>
-                      <a:pPr algn="r"/>
-                      <a:r>
-                        <a:rPr sz="850" b="1" i="0">
-                          <a:solidFill>
-                            <a:srgbClr val="1F2A44"/>
-                          </a:solidFill>
-                          <a:latin typeface="Garamond"/>
-                          <a:cs typeface="Garamond"/>
-                        </a:rPr>
-                        <a:t>1,666</a:t>
-                      </a:r>
-                    </a:p>
-                  </a:txBody>
-                  <a:tcPr anchor="ctr" marT="12700" marB="12700">
-                    <a:solidFill>
-                      <a:srgbClr val="FFFFFF"/>
-                    </a:solidFill>
-                  </a:tcPr>
-                </a:tc>
-                <a:tc>
-                  <a:txBody>
-                    <a:bodyPr/>
-                    <a:lstStyle/>
-                    <a:p>
-                      <a:pPr algn="r"/>
-                      <a:r>
-                        <a:rPr sz="850" b="1" i="0">
-                          <a:solidFill>
-                            <a:srgbClr val="1F2A44"/>
-                          </a:solidFill>
-                          <a:latin typeface="Garamond"/>
-                          <a:cs typeface="Garamond"/>
-                        </a:rPr>
-                        <a:t>2,269</a:t>
-                      </a:r>
-                    </a:p>
-                  </a:txBody>
-                  <a:tcPr anchor="ctr" marT="12700" marB="12700">
-                    <a:solidFill>
-                      <a:srgbClr val="FFFFFF"/>
-                    </a:solidFill>
-                  </a:tcPr>
-                </a:tc>
-                <a:tc>
-                  <a:txBody>
-                    <a:bodyPr/>
-                    <a:lstStyle/>
-                    <a:p>
-                      <a:pPr algn="r"/>
-                      <a:r>
-                        <a:rPr sz="850" b="1" i="0">
-                          <a:solidFill>
-                            <a:srgbClr val="1F2A44"/>
-                          </a:solidFill>
-                          <a:latin typeface="Garamond"/>
-                          <a:cs typeface="Garamond"/>
-                        </a:rPr>
                         <a:t>1,770</a:t>
-                      </a:r>
-                    </a:p>
-                  </a:txBody>
-                  <a:tcPr anchor="ctr" marT="12700" marB="12700">
-                    <a:solidFill>
-                      <a:srgbClr val="FFFFFF"/>
-                    </a:solidFill>
-                  </a:tcPr>
-                </a:tc>
-                <a:tc>
-                  <a:txBody>
-                    <a:bodyPr/>
-                    <a:lstStyle/>
-                    <a:p>
-                      <a:pPr algn="r"/>
-                      <a:r>
-                        <a:rPr sz="850" b="1" i="0">
-                          <a:solidFill>
-                            <a:srgbClr val="1F2A44"/>
-                          </a:solidFill>
-                          <a:latin typeface="Garamond"/>
-                          <a:cs typeface="Garamond"/>
-                        </a:rPr>
-                        <a:t>2,557</a:t>
                       </a:r>
                     </a:p>
                   </a:txBody>
@@ -9588,7 +9103,7 @@
                           <a:latin typeface="Garamond"/>
                           <a:cs typeface="Garamond"/>
                         </a:rPr>
-                        <a:t>15.8%</a:t>
+                        <a:t>13.8%</a:t>
                       </a:r>
                     </a:p>
                   </a:txBody>
@@ -9612,7 +9127,7 @@
                           <a:latin typeface="Garamond"/>
                           <a:cs typeface="Garamond"/>
                         </a:rPr>
-                        <a:t>13.8%</a:t>
+                        <a:t>14.4%</a:t>
                       </a:r>
                     </a:p>
                   </a:txBody>
@@ -9636,7 +9151,7 @@
                           <a:latin typeface="Garamond"/>
                           <a:cs typeface="Garamond"/>
                         </a:rPr>
-                        <a:t>15.6%</a:t>
+                        <a:t>14.9%</a:t>
                       </a:r>
                     </a:p>
                   </a:txBody>
@@ -9660,127 +9175,7 @@
                           <a:latin typeface="Garamond"/>
                           <a:cs typeface="Garamond"/>
                         </a:rPr>
-                        <a:t>14.4%</a:t>
-                      </a:r>
-                    </a:p>
-                  </a:txBody>
-                  <a:tcPr anchor="ctr" marT="12700" marB="12700">
-                    <a:solidFill>
-                      <a:srgbClr val="F0F1F3"/>
-                    </a:solidFill>
-                  </a:tcPr>
-                </a:tc>
-                <a:tc>
-                  <a:txBody>
-                    <a:bodyPr/>
-                    <a:lstStyle/>
-                    <a:p>
-                      <a:pPr algn="r"/>
-                      <a:r>
-                        <a:rPr sz="850" b="0" i="0">
-                          <a:solidFill>
-                            <a:srgbClr val="262626"/>
-                          </a:solidFill>
-                          <a:latin typeface="Garamond"/>
-                          <a:cs typeface="Garamond"/>
-                        </a:rPr>
-                        <a:t>16.8%</a:t>
-                      </a:r>
-                    </a:p>
-                  </a:txBody>
-                  <a:tcPr anchor="ctr" marT="12700" marB="12700">
-                    <a:solidFill>
-                      <a:srgbClr val="F0F1F3"/>
-                    </a:solidFill>
-                  </a:tcPr>
-                </a:tc>
-                <a:tc>
-                  <a:txBody>
-                    <a:bodyPr/>
-                    <a:lstStyle/>
-                    <a:p>
-                      <a:pPr algn="r"/>
-                      <a:r>
-                        <a:rPr sz="850" b="0" i="0">
-                          <a:solidFill>
-                            <a:srgbClr val="262626"/>
-                          </a:solidFill>
-                          <a:latin typeface="Garamond"/>
-                          <a:cs typeface="Garamond"/>
-                        </a:rPr>
-                        <a:t>14.9%</a:t>
-                      </a:r>
-                    </a:p>
-                  </a:txBody>
-                  <a:tcPr anchor="ctr" marT="12700" marB="12700">
-                    <a:solidFill>
-                      <a:srgbClr val="F0F1F3"/>
-                    </a:solidFill>
-                  </a:tcPr>
-                </a:tc>
-                <a:tc>
-                  <a:txBody>
-                    <a:bodyPr/>
-                    <a:lstStyle/>
-                    <a:p>
-                      <a:pPr algn="r"/>
-                      <a:r>
-                        <a:rPr sz="850" b="0" i="0">
-                          <a:solidFill>
-                            <a:srgbClr val="262626"/>
-                          </a:solidFill>
-                          <a:latin typeface="Garamond"/>
-                          <a:cs typeface="Garamond"/>
-                        </a:rPr>
-                        <a:t>17.9%</a:t>
-                      </a:r>
-                    </a:p>
-                  </a:txBody>
-                  <a:tcPr anchor="ctr" marT="12700" marB="12700">
-                    <a:solidFill>
-                      <a:srgbClr val="F0F1F3"/>
-                    </a:solidFill>
-                  </a:tcPr>
-                </a:tc>
-                <a:tc>
-                  <a:txBody>
-                    <a:bodyPr/>
-                    <a:lstStyle/>
-                    <a:p>
-                      <a:pPr algn="r"/>
-                      <a:r>
-                        <a:rPr sz="850" b="0" i="0">
-                          <a:solidFill>
-                            <a:srgbClr val="262626"/>
-                          </a:solidFill>
-                          <a:latin typeface="Garamond"/>
-                          <a:cs typeface="Garamond"/>
-                        </a:rPr>
                         <a:t>15.5%</a:t>
-                      </a:r>
-                    </a:p>
-                  </a:txBody>
-                  <a:tcPr anchor="ctr" marT="12700" marB="12700">
-                    <a:solidFill>
-                      <a:srgbClr val="F0F1F3"/>
-                    </a:solidFill>
-                  </a:tcPr>
-                </a:tc>
-                <a:tc>
-                  <a:txBody>
-                    <a:bodyPr/>
-                    <a:lstStyle/>
-                    <a:p>
-                      <a:pPr algn="r"/>
-                      <a:r>
-                        <a:rPr sz="850" b="0" i="0">
-                          <a:solidFill>
-                            <a:srgbClr val="262626"/>
-                          </a:solidFill>
-                          <a:latin typeface="Garamond"/>
-                          <a:cs typeface="Garamond"/>
-                        </a:rPr>
-                        <a:t>19.0%</a:t>
                       </a:r>
                     </a:p>
                   </a:txBody>
@@ -9950,7 +9345,7 @@
                           <a:latin typeface="Garamond"/>
                           <a:cs typeface="Garamond"/>
                         </a:rPr>
-                        <a:t>1,242</a:t>
+                        <a:t>1,056</a:t>
                       </a:r>
                     </a:p>
                   </a:txBody>
@@ -9974,7 +9369,7 @@
                           <a:latin typeface="Garamond"/>
                           <a:cs typeface="Garamond"/>
                         </a:rPr>
-                        <a:t>1,056</a:t>
+                        <a:t>1,120</a:t>
                       </a:r>
                     </a:p>
                   </a:txBody>
@@ -9998,7 +9393,7 @@
                           <a:latin typeface="Garamond"/>
                           <a:cs typeface="Garamond"/>
                         </a:rPr>
-                        <a:t>1,300</a:t>
+                        <a:t>1,187</a:t>
                       </a:r>
                     </a:p>
                   </a:txBody>
@@ -10022,127 +9417,7 @@
                           <a:latin typeface="Garamond"/>
                           <a:cs typeface="Garamond"/>
                         </a:rPr>
-                        <a:t>1,120</a:t>
-                      </a:r>
-                    </a:p>
-                  </a:txBody>
-                  <a:tcPr anchor="ctr" marT="12700" marB="12700">
-                    <a:solidFill>
-                      <a:srgbClr val="FFFFFF"/>
-                    </a:solidFill>
-                  </a:tcPr>
-                </a:tc>
-                <a:tc>
-                  <a:txBody>
-                    <a:bodyPr/>
-                    <a:lstStyle/>
-                    <a:p>
-                      <a:pPr algn="r"/>
-                      <a:r>
-                        <a:rPr sz="850" b="0" i="0">
-                          <a:solidFill>
-                            <a:srgbClr val="262626"/>
-                          </a:solidFill>
-                          <a:latin typeface="Garamond"/>
-                          <a:cs typeface="Garamond"/>
-                        </a:rPr>
-                        <a:t>1,469</a:t>
-                      </a:r>
-                    </a:p>
-                  </a:txBody>
-                  <a:tcPr anchor="ctr" marT="12700" marB="12700">
-                    <a:solidFill>
-                      <a:srgbClr val="FFFFFF"/>
-                    </a:solidFill>
-                  </a:tcPr>
-                </a:tc>
-                <a:tc>
-                  <a:txBody>
-                    <a:bodyPr/>
-                    <a:lstStyle/>
-                    <a:p>
-                      <a:pPr algn="r"/>
-                      <a:r>
-                        <a:rPr sz="850" b="0" i="0">
-                          <a:solidFill>
-                            <a:srgbClr val="262626"/>
-                          </a:solidFill>
-                          <a:latin typeface="Garamond"/>
-                          <a:cs typeface="Garamond"/>
-                        </a:rPr>
-                        <a:t>1,187</a:t>
-                      </a:r>
-                    </a:p>
-                  </a:txBody>
-                  <a:tcPr anchor="ctr" marT="12700" marB="12700">
-                    <a:solidFill>
-                      <a:srgbClr val="FFFFFF"/>
-                    </a:solidFill>
-                  </a:tcPr>
-                </a:tc>
-                <a:tc>
-                  <a:txBody>
-                    <a:bodyPr/>
-                    <a:lstStyle/>
-                    <a:p>
-                      <a:pPr algn="r"/>
-                      <a:r>
-                        <a:rPr sz="850" b="0" i="0">
-                          <a:solidFill>
-                            <a:srgbClr val="262626"/>
-                          </a:solidFill>
-                          <a:latin typeface="Garamond"/>
-                          <a:cs typeface="Garamond"/>
-                        </a:rPr>
-                        <a:t>1,655</a:t>
-                      </a:r>
-                    </a:p>
-                  </a:txBody>
-                  <a:tcPr anchor="ctr" marT="12700" marB="12700">
-                    <a:solidFill>
-                      <a:srgbClr val="FFFFFF"/>
-                    </a:solidFill>
-                  </a:tcPr>
-                </a:tc>
-                <a:tc>
-                  <a:txBody>
-                    <a:bodyPr/>
-                    <a:lstStyle/>
-                    <a:p>
-                      <a:pPr algn="r"/>
-                      <a:r>
-                        <a:rPr sz="850" b="0" i="0">
-                          <a:solidFill>
-                            <a:srgbClr val="262626"/>
-                          </a:solidFill>
-                          <a:latin typeface="Garamond"/>
-                          <a:cs typeface="Garamond"/>
-                        </a:rPr>
                         <a:t>1,256</a:t>
-                      </a:r>
-                    </a:p>
-                  </a:txBody>
-                  <a:tcPr anchor="ctr" marT="12700" marB="12700">
-                    <a:solidFill>
-                      <a:srgbClr val="FFFFFF"/>
-                    </a:solidFill>
-                  </a:tcPr>
-                </a:tc>
-                <a:tc>
-                  <a:txBody>
-                    <a:bodyPr/>
-                    <a:lstStyle/>
-                    <a:p>
-                      <a:pPr algn="r"/>
-                      <a:r>
-                        <a:rPr sz="850" b="0" i="0">
-                          <a:solidFill>
-                            <a:srgbClr val="262626"/>
-                          </a:solidFill>
-                          <a:latin typeface="Garamond"/>
-                          <a:cs typeface="Garamond"/>
-                        </a:rPr>
-                        <a:t>1,859</a:t>
                       </a:r>
                     </a:p>
                   </a:txBody>
@@ -10312,7 +9587,7 @@
                           <a:latin typeface="Garamond"/>
                           <a:cs typeface="Garamond"/>
                         </a:rPr>
-                        <a:t>11150.90</a:t>
+                        <a:t>9484.51</a:t>
                       </a:r>
                     </a:p>
                   </a:txBody>
@@ -10336,7 +9611,7 @@
                           <a:latin typeface="Garamond"/>
                           <a:cs typeface="Garamond"/>
                         </a:rPr>
-                        <a:t>9484.51</a:t>
+                        <a:t>10059.72</a:t>
                       </a:r>
                     </a:p>
                   </a:txBody>
@@ -10360,7 +9635,7 @@
                           <a:latin typeface="Garamond"/>
                           <a:cs typeface="Garamond"/>
                         </a:rPr>
-                        <a:t>11670.19</a:t>
+                        <a:t>10657.96</a:t>
                       </a:r>
                     </a:p>
                   </a:txBody>
@@ -10384,127 +9659,7 @@
                           <a:latin typeface="Garamond"/>
                           <a:cs typeface="Garamond"/>
                         </a:rPr>
-                        <a:t>10059.72</a:t>
-                      </a:r>
-                    </a:p>
-                  </a:txBody>
-                  <a:tcPr anchor="ctr" marT="12700" marB="12700">
-                    <a:solidFill>
-                      <a:srgbClr val="F0F1F3"/>
-                    </a:solidFill>
-                  </a:tcPr>
-                </a:tc>
-                <a:tc>
-                  <a:txBody>
-                    <a:bodyPr/>
-                    <a:lstStyle/>
-                    <a:p>
-                      <a:pPr algn="r"/>
-                      <a:r>
-                        <a:rPr sz="850" b="1" i="0">
-                          <a:solidFill>
-                            <a:srgbClr val="1F2A44"/>
-                          </a:solidFill>
-                          <a:latin typeface="Garamond"/>
-                          <a:cs typeface="Garamond"/>
-                        </a:rPr>
-                        <a:t>13193.50</a:t>
-                      </a:r>
-                    </a:p>
-                  </a:txBody>
-                  <a:tcPr anchor="ctr" marT="12700" marB="12700">
-                    <a:solidFill>
-                      <a:srgbClr val="F0F1F3"/>
-                    </a:solidFill>
-                  </a:tcPr>
-                </a:tc>
-                <a:tc>
-                  <a:txBody>
-                    <a:bodyPr/>
-                    <a:lstStyle/>
-                    <a:p>
-                      <a:pPr algn="r"/>
-                      <a:r>
-                        <a:rPr sz="850" b="1" i="0">
-                          <a:solidFill>
-                            <a:srgbClr val="1F2A44"/>
-                          </a:solidFill>
-                          <a:latin typeface="Garamond"/>
-                          <a:cs typeface="Garamond"/>
-                        </a:rPr>
-                        <a:t>10657.96</a:t>
-                      </a:r>
-                    </a:p>
-                  </a:txBody>
-                  <a:tcPr anchor="ctr" marT="12700" marB="12700">
-                    <a:solidFill>
-                      <a:srgbClr val="F0F1F3"/>
-                    </a:solidFill>
-                  </a:tcPr>
-                </a:tc>
-                <a:tc>
-                  <a:txBody>
-                    <a:bodyPr/>
-                    <a:lstStyle/>
-                    <a:p>
-                      <a:pPr algn="r"/>
-                      <a:r>
-                        <a:rPr sz="850" b="1" i="0">
-                          <a:solidFill>
-                            <a:srgbClr val="1F2A44"/>
-                          </a:solidFill>
-                          <a:latin typeface="Garamond"/>
-                          <a:cs typeface="Garamond"/>
-                        </a:rPr>
-                        <a:t>14862.40</a:t>
-                      </a:r>
-                    </a:p>
-                  </a:txBody>
-                  <a:tcPr anchor="ctr" marT="12700" marB="12700">
-                    <a:solidFill>
-                      <a:srgbClr val="F0F1F3"/>
-                    </a:solidFill>
-                  </a:tcPr>
-                </a:tc>
-                <a:tc>
-                  <a:txBody>
-                    <a:bodyPr/>
-                    <a:lstStyle/>
-                    <a:p>
-                      <a:pPr algn="r"/>
-                      <a:r>
-                        <a:rPr sz="850" b="1" i="0">
-                          <a:solidFill>
-                            <a:srgbClr val="1F2A44"/>
-                          </a:solidFill>
-                          <a:latin typeface="Garamond"/>
-                          <a:cs typeface="Garamond"/>
-                        </a:rPr>
                         <a:t>11279.95</a:t>
-                      </a:r>
-                    </a:p>
-                  </a:txBody>
-                  <a:tcPr anchor="ctr" marT="12700" marB="12700">
-                    <a:solidFill>
-                      <a:srgbClr val="F0F1F3"/>
-                    </a:solidFill>
-                  </a:tcPr>
-                </a:tc>
-                <a:tc>
-                  <a:txBody>
-                    <a:bodyPr/>
-                    <a:lstStyle/>
-                    <a:p>
-                      <a:pPr algn="r"/>
-                      <a:r>
-                        <a:rPr sz="850" b="1" i="0">
-                          <a:solidFill>
-                            <a:srgbClr val="1F2A44"/>
-                          </a:solidFill>
-                          <a:latin typeface="Garamond"/>
-                          <a:cs typeface="Garamond"/>
-                        </a:rPr>
-                        <a:t>16688.77</a:t>
                       </a:r>
                     </a:p>
                   </a:txBody>
@@ -10538,10 +9693,9 @@
                 <a:tableStyleId>{5C22544A-7EE6-4342-B048-85BDC9FD1C3A}</a:tableStyleId>
               </a:tblPr>
               <a:tblGrid>
-                <a:gridCol w="1691640"/>
-                <a:gridCol w="3200400"/>
-                <a:gridCol w="3200400"/>
-                <a:gridCol w="3200400"/>
+                <a:gridCol w="1828800"/>
+                <a:gridCol w="4732020"/>
+                <a:gridCol w="4732020"/>
               </a:tblGrid>
               <a:tr h="146304">
                 <a:tc>
@@ -10551,7 +9705,7 @@
                     <a:p>
                       <a:pPr algn="l"/>
                       <a:r>
-                        <a:rPr sz="750" b="1" i="0">
+                        <a:rPr sz="800" b="1" i="0">
                           <a:solidFill>
                             <a:srgbClr val="FFFFFF"/>
                           </a:solidFill>
@@ -10575,7 +9729,7 @@
                     <a:p>
                       <a:pPr algn="r"/>
                       <a:r>
-                        <a:rPr sz="750" b="1" i="0">
+                        <a:rPr sz="800" b="1" i="0">
                           <a:solidFill>
                             <a:srgbClr val="FFFFFF"/>
                           </a:solidFill>
@@ -10599,38 +9753,14 @@
                     <a:p>
                       <a:pPr algn="r"/>
                       <a:r>
-                        <a:rPr sz="750" b="1" i="0">
+                        <a:rPr sz="800" b="1" i="0">
                           <a:solidFill>
                             <a:srgbClr val="FFFFFF"/>
                           </a:solidFill>
                           <a:latin typeface="Garamond"/>
                           <a:cs typeface="Garamond"/>
                         </a:rPr>
-                        <a:t>Base 26B–30B</a:t>
-                      </a:r>
-                    </a:p>
-                  </a:txBody>
-                  <a:tcPr anchor="ctr">
-                    <a:solidFill>
-                      <a:srgbClr val="1F2A44"/>
-                    </a:solidFill>
-                  </a:tcPr>
-                </a:tc>
-                <a:tc>
-                  <a:txBody>
-                    <a:bodyPr/>
-                    <a:lstStyle/>
-                    <a:p>
-                      <a:pPr algn="r"/>
-                      <a:r>
-                        <a:rPr sz="750" b="1" i="0">
-                          <a:solidFill>
-                            <a:srgbClr val="FFFFFF"/>
-                          </a:solidFill>
-                          <a:latin typeface="Garamond"/>
-                          <a:cs typeface="Garamond"/>
-                        </a:rPr>
-                        <a:t>Bull 26U–30U</a:t>
+                        <a:t>Base forecast (26–30, col G)</a:t>
                       </a:r>
                     </a:p>
                   </a:txBody>
@@ -10649,7 +9779,7 @@
                     <a:p>
                       <a:pPr algn="l"/>
                       <a:r>
-                        <a:rPr sz="700" b="0" i="0">
+                        <a:rPr sz="750" b="0" i="0">
                           <a:solidFill>
                             <a:srgbClr val="262626"/>
                           </a:solidFill>
@@ -10673,7 +9803,7 @@
                     <a:p>
                       <a:pPr algn="r"/>
                       <a:r>
-                        <a:rPr sz="700" b="0" i="0">
+                        <a:rPr sz="750" b="0" i="0">
                           <a:solidFill>
                             <a:srgbClr val="262626"/>
                           </a:solidFill>
@@ -10697,38 +9827,14 @@
                     <a:p>
                       <a:pPr algn="r"/>
                       <a:r>
-                        <a:rPr sz="700" b="0" i="0">
+                        <a:rPr sz="750" b="0" i="0">
                           <a:solidFill>
                             <a:srgbClr val="262626"/>
                           </a:solidFill>
                           <a:latin typeface="Garamond"/>
                           <a:cs typeface="Garamond"/>
                         </a:rPr>
-                        <a:t>LULU_DCF_Valuation_Model.xlsx → Scenarios, col G revenue</a:t>
-                      </a:r>
-                    </a:p>
-                  </a:txBody>
-                  <a:tcPr anchor="ctr" marT="12700" marB="12700">
-                    <a:solidFill>
-                      <a:srgbClr val="FFFFFF"/>
-                    </a:solidFill>
-                  </a:tcPr>
-                </a:tc>
-                <a:tc>
-                  <a:txBody>
-                    <a:bodyPr/>
-                    <a:lstStyle/>
-                    <a:p>
-                      <a:pPr algn="r"/>
-                      <a:r>
-                        <a:rPr sz="700" b="0" i="0">
-                          <a:solidFill>
-                            <a:srgbClr val="262626"/>
-                          </a:solidFill>
-                          <a:latin typeface="Garamond"/>
-                          <a:cs typeface="Garamond"/>
-                        </a:rPr>
-                        <a:t>LULU_DCF_Valuation_Model.xlsx → Scenarios, col H revenue</a:t>
+                        <a:t>LULU_DCF_Valuation_Model.xlsx → Scenarios, col G (base) revenue</a:t>
                       </a:r>
                     </a:p>
                   </a:txBody>
@@ -10747,7 +9853,7 @@
                     <a:p>
                       <a:pPr algn="l"/>
                       <a:r>
-                        <a:rPr sz="700" b="0" i="0">
+                        <a:rPr sz="750" b="0" i="0">
                           <a:solidFill>
                             <a:srgbClr val="262626"/>
                           </a:solidFill>
@@ -10771,7 +9877,7 @@
                     <a:p>
                       <a:pPr algn="r"/>
                       <a:r>
-                        <a:rPr sz="700" b="0" i="0">
+                        <a:rPr sz="750" b="0" i="0">
                           <a:solidFill>
                             <a:srgbClr val="262626"/>
                           </a:solidFill>
@@ -10795,38 +9901,14 @@
                     <a:p>
                       <a:pPr algn="r"/>
                       <a:r>
-                        <a:rPr sz="700" b="0" i="0">
+                        <a:rPr sz="750" b="0" i="0">
                           <a:solidFill>
                             <a:srgbClr val="262626"/>
                           </a:solidFill>
                           <a:latin typeface="Garamond"/>
                           <a:cs typeface="Garamond"/>
                         </a:rPr>
-                        <a:t>LULU_DCF_Valuation_Model.xlsx → Scenarios, col G GM% × revenue</a:t>
-                      </a:r>
-                    </a:p>
-                  </a:txBody>
-                  <a:tcPr anchor="ctr" marT="12700" marB="12700">
-                    <a:solidFill>
-                      <a:srgbClr val="F0F1F3"/>
-                    </a:solidFill>
-                  </a:tcPr>
-                </a:tc>
-                <a:tc>
-                  <a:txBody>
-                    <a:bodyPr/>
-                    <a:lstStyle/>
-                    <a:p>
-                      <a:pPr algn="r"/>
-                      <a:r>
-                        <a:rPr sz="700" b="0" i="0">
-                          <a:solidFill>
-                            <a:srgbClr val="262626"/>
-                          </a:solidFill>
-                          <a:latin typeface="Garamond"/>
-                          <a:cs typeface="Garamond"/>
-                        </a:rPr>
-                        <a:t>LULU_DCF_Valuation_Model.xlsx → Scenarios, col H GM% × revenue</a:t>
+                        <a:t>LULU_DCF_Valuation_Model.xlsx → Scenarios, col G (base) GM% × revenue</a:t>
                       </a:r>
                     </a:p>
                   </a:txBody>
@@ -10845,7 +9927,7 @@
                     <a:p>
                       <a:pPr algn="l"/>
                       <a:r>
-                        <a:rPr sz="700" b="0" i="0">
+                        <a:rPr sz="750" b="0" i="0">
                           <a:solidFill>
                             <a:srgbClr val="262626"/>
                           </a:solidFill>
@@ -10869,7 +9951,7 @@
                     <a:p>
                       <a:pPr algn="r"/>
                       <a:r>
-                        <a:rPr sz="700" b="0" i="0">
+                        <a:rPr sz="750" b="0" i="0">
                           <a:solidFill>
                             <a:srgbClr val="262626"/>
                           </a:solidFill>
@@ -10893,38 +9975,14 @@
                     <a:p>
                       <a:pPr algn="r"/>
                       <a:r>
-                        <a:rPr sz="700" b="0" i="0">
+                        <a:rPr sz="750" b="0" i="0">
                           <a:solidFill>
                             <a:srgbClr val="262626"/>
                           </a:solidFill>
                           <a:latin typeface="Garamond"/>
                           <a:cs typeface="Garamond"/>
                         </a:rPr>
-                        <a:t>LULU_DCF_Valuation_Model.xlsx → Scenarios, col G EBIT</a:t>
-                      </a:r>
-                    </a:p>
-                  </a:txBody>
-                  <a:tcPr anchor="ctr" marT="12700" marB="12700">
-                    <a:solidFill>
-                      <a:srgbClr val="FFFFFF"/>
-                    </a:solidFill>
-                  </a:tcPr>
-                </a:tc>
-                <a:tc>
-                  <a:txBody>
-                    <a:bodyPr/>
-                    <a:lstStyle/>
-                    <a:p>
-                      <a:pPr algn="r"/>
-                      <a:r>
-                        <a:rPr sz="700" b="0" i="0">
-                          <a:solidFill>
-                            <a:srgbClr val="262626"/>
-                          </a:solidFill>
-                          <a:latin typeface="Garamond"/>
-                          <a:cs typeface="Garamond"/>
-                        </a:rPr>
-                        <a:t>LULU_DCF_Valuation_Model.xlsx → Scenarios, col H EBIT</a:t>
+                        <a:t>LULU_DCF_Valuation_Model.xlsx → Scenarios, col G (base) EBIT</a:t>
                       </a:r>
                     </a:p>
                   </a:txBody>
@@ -10943,7 +10001,7 @@
                     <a:p>
                       <a:pPr algn="l"/>
                       <a:r>
-                        <a:rPr sz="700" b="0" i="0">
+                        <a:rPr sz="750" b="0" i="0">
                           <a:solidFill>
                             <a:srgbClr val="262626"/>
                           </a:solidFill>
@@ -10967,7 +10025,7 @@
                     <a:p>
                       <a:pPr algn="r"/>
                       <a:r>
-                        <a:rPr sz="700" b="0" i="0">
+                        <a:rPr sz="750" b="0" i="0">
                           <a:solidFill>
                             <a:srgbClr val="262626"/>
                           </a:solidFill>
@@ -10991,38 +10049,14 @@
                     <a:p>
                       <a:pPr algn="r"/>
                       <a:r>
-                        <a:rPr sz="700" b="0" i="0">
+                        <a:rPr sz="750" b="0" i="0">
                           <a:solidFill>
                             <a:srgbClr val="262626"/>
                           </a:solidFill>
                           <a:latin typeface="Garamond"/>
                           <a:cs typeface="Garamond"/>
                         </a:rPr>
-                        <a:t>LULU_DCF_Valuation_Model.xlsx → Scenarios, col G EBIT/rev</a:t>
-                      </a:r>
-                    </a:p>
-                  </a:txBody>
-                  <a:tcPr anchor="ctr" marT="12700" marB="12700">
-                    <a:solidFill>
-                      <a:srgbClr val="F0F1F3"/>
-                    </a:solidFill>
-                  </a:tcPr>
-                </a:tc>
-                <a:tc>
-                  <a:txBody>
-                    <a:bodyPr/>
-                    <a:lstStyle/>
-                    <a:p>
-                      <a:pPr algn="r"/>
-                      <a:r>
-                        <a:rPr sz="700" b="0" i="0">
-                          <a:solidFill>
-                            <a:srgbClr val="262626"/>
-                          </a:solidFill>
-                          <a:latin typeface="Garamond"/>
-                          <a:cs typeface="Garamond"/>
-                        </a:rPr>
-                        <a:t>LULU_DCF_Valuation_Model.xlsx → Scenarios, col H EBIT/rev</a:t>
+                        <a:t>LULU_DCF_Valuation_Model.xlsx → Scenarios, col G (base) EBIT/rev</a:t>
                       </a:r>
                     </a:p>
                   </a:txBody>
@@ -11041,7 +10075,7 @@
                     <a:p>
                       <a:pPr algn="l"/>
                       <a:r>
-                        <a:rPr sz="700" b="0" i="0">
+                        <a:rPr sz="750" b="0" i="0">
                           <a:solidFill>
                             <a:srgbClr val="262626"/>
                           </a:solidFill>
@@ -11065,7 +10099,7 @@
                     <a:p>
                       <a:pPr algn="r"/>
                       <a:r>
-                        <a:rPr sz="700" b="0" i="0">
+                        <a:rPr sz="750" b="0" i="0">
                           <a:solidFill>
                             <a:srgbClr val="262626"/>
                           </a:solidFill>
@@ -11089,38 +10123,14 @@
                     <a:p>
                       <a:pPr algn="r"/>
                       <a:r>
-                        <a:rPr sz="700" b="0" i="0">
+                        <a:rPr sz="750" b="0" i="0">
                           <a:solidFill>
                             <a:srgbClr val="262626"/>
                           </a:solidFill>
                           <a:latin typeface="Garamond"/>
                           <a:cs typeface="Garamond"/>
                         </a:rPr>
-                        <a:t>LULU_DCF_Valuation_Model.xlsx → Scenarios, col G pitch bridge NI</a:t>
-                      </a:r>
-                    </a:p>
-                  </a:txBody>
-                  <a:tcPr anchor="ctr" marT="12700" marB="12700">
-                    <a:solidFill>
-                      <a:srgbClr val="FFFFFF"/>
-                    </a:solidFill>
-                  </a:tcPr>
-                </a:tc>
-                <a:tc>
-                  <a:txBody>
-                    <a:bodyPr/>
-                    <a:lstStyle/>
-                    <a:p>
-                      <a:pPr algn="r"/>
-                      <a:r>
-                        <a:rPr sz="700" b="0" i="0">
-                          <a:solidFill>
-                            <a:srgbClr val="262626"/>
-                          </a:solidFill>
-                          <a:latin typeface="Garamond"/>
-                          <a:cs typeface="Garamond"/>
-                        </a:rPr>
-                        <a:t>LULU_DCF_Valuation_Model.xlsx → Scenarios, col H pitch bridge NI</a:t>
+                        <a:t>LULU_DCF_Valuation_Model.xlsx → Scenarios, col G (base) pitch bridge NI</a:t>
                       </a:r>
                     </a:p>
                   </a:txBody>
@@ -11139,7 +10149,7 @@
                     <a:p>
                       <a:pPr algn="l"/>
                       <a:r>
-                        <a:rPr sz="700" b="0" i="0">
+                        <a:rPr sz="750" b="0" i="0">
                           <a:solidFill>
                             <a:srgbClr val="262626"/>
                           </a:solidFill>
@@ -11163,7 +10173,7 @@
                     <a:p>
                       <a:pPr algn="r"/>
                       <a:r>
-                        <a:rPr sz="700" b="0" i="0">
+                        <a:rPr sz="750" b="0" i="0">
                           <a:solidFill>
                             <a:srgbClr val="262626"/>
                           </a:solidFill>
@@ -11187,38 +10197,14 @@
                     <a:p>
                       <a:pPr algn="r"/>
                       <a:r>
-                        <a:rPr sz="700" b="0" i="0">
+                        <a:rPr sz="750" b="0" i="0">
                           <a:solidFill>
                             <a:srgbClr val="262626"/>
                           </a:solidFill>
                           <a:latin typeface="Garamond"/>
                           <a:cs typeface="Garamond"/>
                         </a:rPr>
-                        <a:t>LULU_DCF_Valuation_Model.xlsx → Scenarios, col G pitch bridge EPS</a:t>
-                      </a:r>
-                    </a:p>
-                  </a:txBody>
-                  <a:tcPr anchor="ctr" marT="12700" marB="12700">
-                    <a:solidFill>
-                      <a:srgbClr val="F0F1F3"/>
-                    </a:solidFill>
-                  </a:tcPr>
-                </a:tc>
-                <a:tc>
-                  <a:txBody>
-                    <a:bodyPr/>
-                    <a:lstStyle/>
-                    <a:p>
-                      <a:pPr algn="r"/>
-                      <a:r>
-                        <a:rPr sz="700" b="0" i="0">
-                          <a:solidFill>
-                            <a:srgbClr val="262626"/>
-                          </a:solidFill>
-                          <a:latin typeface="Garamond"/>
-                          <a:cs typeface="Garamond"/>
-                        </a:rPr>
-                        <a:t>LULU_DCF_Valuation_Model.xlsx → Scenarios, col H pitch bridge EPS</a:t>
+                        <a:t>LULU_DCF_Valuation_Model.xlsx → Scenarios, col G (base) pitch bridge EPS</a:t>
                       </a:r>
                     </a:p>
                   </a:txBody>
@@ -11272,7 +10258,7 @@
                 <a:latin typeface="Garamond"/>
                 <a:cs typeface="Garamond"/>
               </a:rPr>
-              <a:t>All forecast lines: LULU_DCF_Valuation_Model.xlsx → Scenarios tab → pitch deck bridge block.</a:t>
+              <a:t>All forecast lines: LULU_DCF_Valuation_Model.xlsx → Scenarios tab → pitch deck bridge block (col G).</a:t>
             </a:r>
           </a:p>
         </p:txBody>
@@ -11453,7 +10439,7 @@
                 <a:latin typeface="Garamond"/>
                 <a:cs typeface="Garamond"/>
               </a:rPr>
-              <a:t>Net-cash history vs base &amp; bull funded growth — all FY26–30 (US$ M)</a:t>
+              <a:t>Net-cash history vs base-case funded growth — FY26–30 (US$ M)</a:t>
             </a:r>
           </a:p>
         </p:txBody>
@@ -11541,7 +10527,7 @@
                 <a:latin typeface="Garamond"/>
                 <a:cs typeface="Garamond"/>
               </a:rPr>
-              <a:t>Hist = 10-K. Base (26B) &amp; bull (26U) = DCF Scenarios pitch-bridge block, cols G &amp; H.</a:t>
+              <a:t>Hist = 10-K. Forecast (26–30) = DCF Scenarios pitch-bridge block, col G (base case only).</a:t>
             </a:r>
           </a:p>
         </p:txBody>
@@ -11841,7 +10827,7 @@
                 <a:latin typeface="Garamond"/>
                 <a:cs typeface="Garamond"/>
               </a:rPr>
-              <a:t>FORECAST (FY2026E–FY2030E) — base (G) vs bull (H)</a:t>
+              <a:t>FORECAST (FY2026E–FY2030E) — base case (Scenarios col G)</a:t>
             </a:r>
           </a:p>
           <a:p>
@@ -11863,7 +10849,7 @@
                 <a:latin typeface="Garamond"/>
                 <a:cs typeface="Garamond"/>
               </a:rPr>
-              <a:t>Cash &amp; equivalents: base FY26 2,393M → FY30 4,497M; bull FY26 2,142M → FY30 3,639M</a:t>
+              <a:t>Cash &amp; equivalents: FY26 2,393M → FY30 4,497M</a:t>
             </a:r>
           </a:p>
           <a:p>
@@ -11885,7 +10871,7 @@
                 <a:latin typeface="Garamond"/>
                 <a:cs typeface="Garamond"/>
               </a:rPr>
-              <a:t>Inventories: base FY26 1,585M → FY30 1,681M; bull FY26 1,586M → FY30 1,940M</a:t>
+              <a:t>Inventories: FY26 1,585M → FY30 1,681M</a:t>
             </a:r>
           </a:p>
           <a:p>
@@ -11907,7 +10893,7 @@
                 <a:latin typeface="Garamond"/>
                 <a:cs typeface="Garamond"/>
               </a:rPr>
-              <a:t>Total assets: base FY26 7,941M → FY30 8,697M; bull FY26 8,118M → FY30 10,249M</a:t>
+              <a:t>Total assets: FY26 7,941M → FY30 8,697M</a:t>
             </a:r>
           </a:p>
           <a:p>
@@ -11929,7 +10915,7 @@
                 <a:latin typeface="Garamond"/>
                 <a:cs typeface="Garamond"/>
               </a:rPr>
-              <a:t>Total liabilities: base FY26 3,282M → FY30 3,594M; bull FY26 3,355M → FY30 4,236M</a:t>
+              <a:t>Total liabilities: FY26 3,282M → FY30 3,594M</a:t>
             </a:r>
           </a:p>
           <a:p>
@@ -11951,7 +10937,7 @@
                 <a:latin typeface="Garamond"/>
                 <a:cs typeface="Garamond"/>
               </a:rPr>
-              <a:t>Total equity: base FY26 4,659M → FY30 5,103M; bull FY26 4,763M → FY30 6,014M</a:t>
+              <a:t>Total equity: FY26 4,659M → FY30 5,103M</a:t>
             </a:r>
           </a:p>
           <a:p>
@@ -11973,7 +10959,7 @@
                 <a:latin typeface="Garamond"/>
                 <a:cs typeface="Garamond"/>
               </a:rPr>
-              <a:t>Funded debt: base $0; bull $0 (no term debt in model)</a:t>
+              <a:t>Funded debt: $0 (no term debt in model)</a:t>
             </a:r>
           </a:p>
         </p:txBody>
@@ -11988,7 +10974,7 @@
         </p:nvGraphicFramePr>
         <p:xfrm>
           <a:off x="457200" y="3364992"/>
-          <a:ext cx="11292828" cy="2176272"/>
+          <a:ext cx="11292840" cy="2176272"/>
         </p:xfrm>
         <a:graphic>
           <a:graphicData uri="http://schemas.openxmlformats.org/drawingml/2006/table">
@@ -11998,20 +10984,15 @@
               </a:tblPr>
               <a:tblGrid>
                 <a:gridCol w="2148840"/>
-                <a:gridCol w="653142"/>
-                <a:gridCol w="653142"/>
-                <a:gridCol w="653142"/>
-                <a:gridCol w="653142"/>
-                <a:gridCol w="653142"/>
-                <a:gridCol w="653142"/>
-                <a:gridCol w="653142"/>
-                <a:gridCol w="653142"/>
-                <a:gridCol w="653142"/>
-                <a:gridCol w="653142"/>
-                <a:gridCol w="653142"/>
-                <a:gridCol w="653142"/>
-                <a:gridCol w="653142"/>
-                <a:gridCol w="653142"/>
+                <a:gridCol w="1016000"/>
+                <a:gridCol w="1016000"/>
+                <a:gridCol w="1016000"/>
+                <a:gridCol w="1016000"/>
+                <a:gridCol w="1016000"/>
+                <a:gridCol w="1016000"/>
+                <a:gridCol w="1016000"/>
+                <a:gridCol w="1016000"/>
+                <a:gridCol w="1016000"/>
               </a:tblGrid>
               <a:tr h="310896">
                 <a:tc>
@@ -12148,7 +11129,7 @@
                           <a:latin typeface="Garamond"/>
                           <a:cs typeface="Garamond"/>
                         </a:rPr>
-                        <a:t>26B</a:t>
+                        <a:t>26</a:t>
                       </a:r>
                     </a:p>
                   </a:txBody>
@@ -12172,7 +11153,7 @@
                           <a:latin typeface="Garamond"/>
                           <a:cs typeface="Garamond"/>
                         </a:rPr>
-                        <a:t>26U</a:t>
+                        <a:t>27</a:t>
                       </a:r>
                     </a:p>
                   </a:txBody>
@@ -12196,7 +11177,7 @@
                           <a:latin typeface="Garamond"/>
                           <a:cs typeface="Garamond"/>
                         </a:rPr>
-                        <a:t>27B</a:t>
+                        <a:t>28</a:t>
                       </a:r>
                     </a:p>
                   </a:txBody>
@@ -12220,7 +11201,7 @@
                           <a:latin typeface="Garamond"/>
                           <a:cs typeface="Garamond"/>
                         </a:rPr>
-                        <a:t>27U</a:t>
+                        <a:t>29</a:t>
                       </a:r>
                     </a:p>
                   </a:txBody>
@@ -12244,127 +11225,7 @@
                           <a:latin typeface="Garamond"/>
                           <a:cs typeface="Garamond"/>
                         </a:rPr>
-                        <a:t>28B</a:t>
-                      </a:r>
-                    </a:p>
-                  </a:txBody>
-                  <a:tcPr anchor="ctr">
-                    <a:solidFill>
-                      <a:srgbClr val="1F2A44"/>
-                    </a:solidFill>
-                  </a:tcPr>
-                </a:tc>
-                <a:tc>
-                  <a:txBody>
-                    <a:bodyPr/>
-                    <a:lstStyle/>
-                    <a:p>
-                      <a:pPr algn="r"/>
-                      <a:r>
-                        <a:rPr sz="800" b="1" i="0">
-                          <a:solidFill>
-                            <a:srgbClr val="FFFFFF"/>
-                          </a:solidFill>
-                          <a:latin typeface="Garamond"/>
-                          <a:cs typeface="Garamond"/>
-                        </a:rPr>
-                        <a:t>28U</a:t>
-                      </a:r>
-                    </a:p>
-                  </a:txBody>
-                  <a:tcPr anchor="ctr">
-                    <a:solidFill>
-                      <a:srgbClr val="1F2A44"/>
-                    </a:solidFill>
-                  </a:tcPr>
-                </a:tc>
-                <a:tc>
-                  <a:txBody>
-                    <a:bodyPr/>
-                    <a:lstStyle/>
-                    <a:p>
-                      <a:pPr algn="r"/>
-                      <a:r>
-                        <a:rPr sz="800" b="1" i="0">
-                          <a:solidFill>
-                            <a:srgbClr val="FFFFFF"/>
-                          </a:solidFill>
-                          <a:latin typeface="Garamond"/>
-                          <a:cs typeface="Garamond"/>
-                        </a:rPr>
-                        <a:t>29B</a:t>
-                      </a:r>
-                    </a:p>
-                  </a:txBody>
-                  <a:tcPr anchor="ctr">
-                    <a:solidFill>
-                      <a:srgbClr val="1F2A44"/>
-                    </a:solidFill>
-                  </a:tcPr>
-                </a:tc>
-                <a:tc>
-                  <a:txBody>
-                    <a:bodyPr/>
-                    <a:lstStyle/>
-                    <a:p>
-                      <a:pPr algn="r"/>
-                      <a:r>
-                        <a:rPr sz="800" b="1" i="0">
-                          <a:solidFill>
-                            <a:srgbClr val="FFFFFF"/>
-                          </a:solidFill>
-                          <a:latin typeface="Garamond"/>
-                          <a:cs typeface="Garamond"/>
-                        </a:rPr>
-                        <a:t>29U</a:t>
-                      </a:r>
-                    </a:p>
-                  </a:txBody>
-                  <a:tcPr anchor="ctr">
-                    <a:solidFill>
-                      <a:srgbClr val="1F2A44"/>
-                    </a:solidFill>
-                  </a:tcPr>
-                </a:tc>
-                <a:tc>
-                  <a:txBody>
-                    <a:bodyPr/>
-                    <a:lstStyle/>
-                    <a:p>
-                      <a:pPr algn="r"/>
-                      <a:r>
-                        <a:rPr sz="800" b="1" i="0">
-                          <a:solidFill>
-                            <a:srgbClr val="FFFFFF"/>
-                          </a:solidFill>
-                          <a:latin typeface="Garamond"/>
-                          <a:cs typeface="Garamond"/>
-                        </a:rPr>
-                        <a:t>30B</a:t>
-                      </a:r>
-                    </a:p>
-                  </a:txBody>
-                  <a:tcPr anchor="ctr">
-                    <a:solidFill>
-                      <a:srgbClr val="1F2A44"/>
-                    </a:solidFill>
-                  </a:tcPr>
-                </a:tc>
-                <a:tc>
-                  <a:txBody>
-                    <a:bodyPr/>
-                    <a:lstStyle/>
-                    <a:p>
-                      <a:pPr algn="r"/>
-                      <a:r>
-                        <a:rPr sz="800" b="1" i="0">
-                          <a:solidFill>
-                            <a:srgbClr val="FFFFFF"/>
-                          </a:solidFill>
-                          <a:latin typeface="Garamond"/>
-                          <a:cs typeface="Garamond"/>
-                        </a:rPr>
-                        <a:t>30U</a:t>
+                        <a:t>30</a:t>
                       </a:r>
                     </a:p>
                   </a:txBody>
@@ -12534,7 +11395,7 @@
                           <a:latin typeface="Garamond"/>
                           <a:cs typeface="Garamond"/>
                         </a:rPr>
-                        <a:t>2,142</a:t>
+                        <a:t>2,825</a:t>
                       </a:r>
                     </a:p>
                   </a:txBody>
@@ -12558,7 +11419,7 @@
                           <a:latin typeface="Garamond"/>
                           <a:cs typeface="Garamond"/>
                         </a:rPr>
-                        <a:t>2,825</a:t>
+                        <a:t>3,317</a:t>
                       </a:r>
                     </a:p>
                   </a:txBody>
@@ -12582,7 +11443,7 @@
                           <a:latin typeface="Garamond"/>
                           <a:cs typeface="Garamond"/>
                         </a:rPr>
-                        <a:t>2,450</a:t>
+                        <a:t>3,874</a:t>
                       </a:r>
                     </a:p>
                   </a:txBody>
@@ -12606,127 +11467,7 @@
                           <a:latin typeface="Garamond"/>
                           <a:cs typeface="Garamond"/>
                         </a:rPr>
-                        <a:t>3,317</a:t>
-                      </a:r>
-                    </a:p>
-                  </a:txBody>
-                  <a:tcPr anchor="ctr" marT="12700" marB="12700">
-                    <a:solidFill>
-                      <a:srgbClr val="FFFFFF"/>
-                    </a:solidFill>
-                  </a:tcPr>
-                </a:tc>
-                <a:tc>
-                  <a:txBody>
-                    <a:bodyPr/>
-                    <a:lstStyle/>
-                    <a:p>
-                      <a:pPr algn="r"/>
-                      <a:r>
-                        <a:rPr sz="850" b="0" i="0">
-                          <a:solidFill>
-                            <a:srgbClr val="262626"/>
-                          </a:solidFill>
-                          <a:latin typeface="Garamond"/>
-                          <a:cs typeface="Garamond"/>
-                        </a:rPr>
-                        <a:t>2,799</a:t>
-                      </a:r>
-                    </a:p>
-                  </a:txBody>
-                  <a:tcPr anchor="ctr" marT="12700" marB="12700">
-                    <a:solidFill>
-                      <a:srgbClr val="FFFFFF"/>
-                    </a:solidFill>
-                  </a:tcPr>
-                </a:tc>
-                <a:tc>
-                  <a:txBody>
-                    <a:bodyPr/>
-                    <a:lstStyle/>
-                    <a:p>
-                      <a:pPr algn="r"/>
-                      <a:r>
-                        <a:rPr sz="850" b="0" i="0">
-                          <a:solidFill>
-                            <a:srgbClr val="262626"/>
-                          </a:solidFill>
-                          <a:latin typeface="Garamond"/>
-                          <a:cs typeface="Garamond"/>
-                        </a:rPr>
-                        <a:t>3,874</a:t>
-                      </a:r>
-                    </a:p>
-                  </a:txBody>
-                  <a:tcPr anchor="ctr" marT="12700" marB="12700">
-                    <a:solidFill>
-                      <a:srgbClr val="FFFFFF"/>
-                    </a:solidFill>
-                  </a:tcPr>
-                </a:tc>
-                <a:tc>
-                  <a:txBody>
-                    <a:bodyPr/>
-                    <a:lstStyle/>
-                    <a:p>
-                      <a:pPr algn="r"/>
-                      <a:r>
-                        <a:rPr sz="850" b="0" i="0">
-                          <a:solidFill>
-                            <a:srgbClr val="262626"/>
-                          </a:solidFill>
-                          <a:latin typeface="Garamond"/>
-                          <a:cs typeface="Garamond"/>
-                        </a:rPr>
-                        <a:t>3,194</a:t>
-                      </a:r>
-                    </a:p>
-                  </a:txBody>
-                  <a:tcPr anchor="ctr" marT="12700" marB="12700">
-                    <a:solidFill>
-                      <a:srgbClr val="FFFFFF"/>
-                    </a:solidFill>
-                  </a:tcPr>
-                </a:tc>
-                <a:tc>
-                  <a:txBody>
-                    <a:bodyPr/>
-                    <a:lstStyle/>
-                    <a:p>
-                      <a:pPr algn="r"/>
-                      <a:r>
-                        <a:rPr sz="850" b="0" i="0">
-                          <a:solidFill>
-                            <a:srgbClr val="262626"/>
-                          </a:solidFill>
-                          <a:latin typeface="Garamond"/>
-                          <a:cs typeface="Garamond"/>
-                        </a:rPr>
                         <a:t>4,497</a:t>
-                      </a:r>
-                    </a:p>
-                  </a:txBody>
-                  <a:tcPr anchor="ctr" marT="12700" marB="12700">
-                    <a:solidFill>
-                      <a:srgbClr val="FFFFFF"/>
-                    </a:solidFill>
-                  </a:tcPr>
-                </a:tc>
-                <a:tc>
-                  <a:txBody>
-                    <a:bodyPr/>
-                    <a:lstStyle/>
-                    <a:p>
-                      <a:pPr algn="r"/>
-                      <a:r>
-                        <a:rPr sz="850" b="0" i="0">
-                          <a:solidFill>
-                            <a:srgbClr val="262626"/>
-                          </a:solidFill>
-                          <a:latin typeface="Garamond"/>
-                          <a:cs typeface="Garamond"/>
-                        </a:rPr>
-                        <a:t>3,639</a:t>
                       </a:r>
                     </a:p>
                   </a:txBody>
@@ -12896,7 +11637,7 @@
                           <a:latin typeface="Garamond"/>
                           <a:cs typeface="Garamond"/>
                         </a:rPr>
-                        <a:t>1,586</a:t>
+                        <a:t>1,608</a:t>
                       </a:r>
                     </a:p>
                   </a:txBody>
@@ -12920,7 +11661,7 @@
                           <a:latin typeface="Garamond"/>
                           <a:cs typeface="Garamond"/>
                         </a:rPr>
-                        <a:t>1,608</a:t>
+                        <a:t>1,632</a:t>
                       </a:r>
                     </a:p>
                   </a:txBody>
@@ -12944,7 +11685,7 @@
                           <a:latin typeface="Garamond"/>
                           <a:cs typeface="Garamond"/>
                         </a:rPr>
-                        <a:t>1,669</a:t>
+                        <a:t>1,657</a:t>
                       </a:r>
                     </a:p>
                   </a:txBody>
@@ -12968,127 +11709,7 @@
                           <a:latin typeface="Garamond"/>
                           <a:cs typeface="Garamond"/>
                         </a:rPr>
-                        <a:t>1,632</a:t>
-                      </a:r>
-                    </a:p>
-                  </a:txBody>
-                  <a:tcPr anchor="ctr" marT="12700" marB="12700">
-                    <a:solidFill>
-                      <a:srgbClr val="F0F1F3"/>
-                    </a:solidFill>
-                  </a:tcPr>
-                </a:tc>
-                <a:tc>
-                  <a:txBody>
-                    <a:bodyPr/>
-                    <a:lstStyle/>
-                    <a:p>
-                      <a:pPr algn="r"/>
-                      <a:r>
-                        <a:rPr sz="850" b="0" i="0">
-                          <a:solidFill>
-                            <a:srgbClr val="262626"/>
-                          </a:solidFill>
-                          <a:latin typeface="Garamond"/>
-                          <a:cs typeface="Garamond"/>
-                        </a:rPr>
-                        <a:t>1,755</a:t>
-                      </a:r>
-                    </a:p>
-                  </a:txBody>
-                  <a:tcPr anchor="ctr" marT="12700" marB="12700">
-                    <a:solidFill>
-                      <a:srgbClr val="F0F1F3"/>
-                    </a:solidFill>
-                  </a:tcPr>
-                </a:tc>
-                <a:tc>
-                  <a:txBody>
-                    <a:bodyPr/>
-                    <a:lstStyle/>
-                    <a:p>
-                      <a:pPr algn="r"/>
-                      <a:r>
-                        <a:rPr sz="850" b="0" i="0">
-                          <a:solidFill>
-                            <a:srgbClr val="262626"/>
-                          </a:solidFill>
-                          <a:latin typeface="Garamond"/>
-                          <a:cs typeface="Garamond"/>
-                        </a:rPr>
-                        <a:t>1,657</a:t>
-                      </a:r>
-                    </a:p>
-                  </a:txBody>
-                  <a:tcPr anchor="ctr" marT="12700" marB="12700">
-                    <a:solidFill>
-                      <a:srgbClr val="F0F1F3"/>
-                    </a:solidFill>
-                  </a:tcPr>
-                </a:tc>
-                <a:tc>
-                  <a:txBody>
-                    <a:bodyPr/>
-                    <a:lstStyle/>
-                    <a:p>
-                      <a:pPr algn="r"/>
-                      <a:r>
-                        <a:rPr sz="850" b="0" i="0">
-                          <a:solidFill>
-                            <a:srgbClr val="262626"/>
-                          </a:solidFill>
-                          <a:latin typeface="Garamond"/>
-                          <a:cs typeface="Garamond"/>
-                        </a:rPr>
-                        <a:t>1,845</a:t>
-                      </a:r>
-                    </a:p>
-                  </a:txBody>
-                  <a:tcPr anchor="ctr" marT="12700" marB="12700">
-                    <a:solidFill>
-                      <a:srgbClr val="F0F1F3"/>
-                    </a:solidFill>
-                  </a:tcPr>
-                </a:tc>
-                <a:tc>
-                  <a:txBody>
-                    <a:bodyPr/>
-                    <a:lstStyle/>
-                    <a:p>
-                      <a:pPr algn="r"/>
-                      <a:r>
-                        <a:rPr sz="850" b="0" i="0">
-                          <a:solidFill>
-                            <a:srgbClr val="262626"/>
-                          </a:solidFill>
-                          <a:latin typeface="Garamond"/>
-                          <a:cs typeface="Garamond"/>
-                        </a:rPr>
                         <a:t>1,681</a:t>
-                      </a:r>
-                    </a:p>
-                  </a:txBody>
-                  <a:tcPr anchor="ctr" marT="12700" marB="12700">
-                    <a:solidFill>
-                      <a:srgbClr val="F0F1F3"/>
-                    </a:solidFill>
-                  </a:tcPr>
-                </a:tc>
-                <a:tc>
-                  <a:txBody>
-                    <a:bodyPr/>
-                    <a:lstStyle/>
-                    <a:p>
-                      <a:pPr algn="r"/>
-                      <a:r>
-                        <a:rPr sz="850" b="0" i="0">
-                          <a:solidFill>
-                            <a:srgbClr val="262626"/>
-                          </a:solidFill>
-                          <a:latin typeface="Garamond"/>
-                          <a:cs typeface="Garamond"/>
-                        </a:rPr>
-                        <a:t>1,940</a:t>
                       </a:r>
                     </a:p>
                   </a:txBody>
@@ -13258,7 +11879,7 @@
                           <a:latin typeface="Garamond"/>
                           <a:cs typeface="Garamond"/>
                         </a:rPr>
-                        <a:t>8,118</a:t>
+                        <a:t>8,124</a:t>
                       </a:r>
                     </a:p>
                   </a:txBody>
@@ -13282,7 +11903,7 @@
                           <a:latin typeface="Garamond"/>
                           <a:cs typeface="Garamond"/>
                         </a:rPr>
-                        <a:t>8,124</a:t>
+                        <a:t>8,310</a:t>
                       </a:r>
                     </a:p>
                   </a:txBody>
@@ -13306,7 +11927,7 @@
                           <a:latin typeface="Garamond"/>
                           <a:cs typeface="Garamond"/>
                         </a:rPr>
-                        <a:t>8,606</a:t>
+                        <a:t>8,502</a:t>
                       </a:r>
                     </a:p>
                   </a:txBody>
@@ -13330,127 +11951,7 @@
                           <a:latin typeface="Garamond"/>
                           <a:cs typeface="Garamond"/>
                         </a:rPr>
-                        <a:t>8,310</a:t>
-                      </a:r>
-                    </a:p>
-                  </a:txBody>
-                  <a:tcPr anchor="ctr" marT="12700" marB="12700">
-                    <a:solidFill>
-                      <a:srgbClr val="FFFFFF"/>
-                    </a:solidFill>
-                  </a:tcPr>
-                </a:tc>
-                <a:tc>
-                  <a:txBody>
-                    <a:bodyPr/>
-                    <a:lstStyle/>
-                    <a:p>
-                      <a:pPr algn="r"/>
-                      <a:r>
-                        <a:rPr sz="850" b="1" i="0">
-                          <a:solidFill>
-                            <a:srgbClr val="1F2A44"/>
-                          </a:solidFill>
-                          <a:latin typeface="Garamond"/>
-                          <a:cs typeface="Garamond"/>
-                        </a:rPr>
-                        <a:t>9,122</a:t>
-                      </a:r>
-                    </a:p>
-                  </a:txBody>
-                  <a:tcPr anchor="ctr" marT="12700" marB="12700">
-                    <a:solidFill>
-                      <a:srgbClr val="FFFFFF"/>
-                    </a:solidFill>
-                  </a:tcPr>
-                </a:tc>
-                <a:tc>
-                  <a:txBody>
-                    <a:bodyPr/>
-                    <a:lstStyle/>
-                    <a:p>
-                      <a:pPr algn="r"/>
-                      <a:r>
-                        <a:rPr sz="850" b="1" i="0">
-                          <a:solidFill>
-                            <a:srgbClr val="1F2A44"/>
-                          </a:solidFill>
-                          <a:latin typeface="Garamond"/>
-                          <a:cs typeface="Garamond"/>
-                        </a:rPr>
-                        <a:t>8,502</a:t>
-                      </a:r>
-                    </a:p>
-                  </a:txBody>
-                  <a:tcPr anchor="ctr" marT="12700" marB="12700">
-                    <a:solidFill>
-                      <a:srgbClr val="FFFFFF"/>
-                    </a:solidFill>
-                  </a:tcPr>
-                </a:tc>
-                <a:tc>
-                  <a:txBody>
-                    <a:bodyPr/>
-                    <a:lstStyle/>
-                    <a:p>
-                      <a:pPr algn="r"/>
-                      <a:r>
-                        <a:rPr sz="850" b="1" i="0">
-                          <a:solidFill>
-                            <a:srgbClr val="1F2A44"/>
-                          </a:solidFill>
-                          <a:latin typeface="Garamond"/>
-                          <a:cs typeface="Garamond"/>
-                        </a:rPr>
-                        <a:t>9,669</a:t>
-                      </a:r>
-                    </a:p>
-                  </a:txBody>
-                  <a:tcPr anchor="ctr" marT="12700" marB="12700">
-                    <a:solidFill>
-                      <a:srgbClr val="FFFFFF"/>
-                    </a:solidFill>
-                  </a:tcPr>
-                </a:tc>
-                <a:tc>
-                  <a:txBody>
-                    <a:bodyPr/>
-                    <a:lstStyle/>
-                    <a:p>
-                      <a:pPr algn="r"/>
-                      <a:r>
-                        <a:rPr sz="850" b="1" i="0">
-                          <a:solidFill>
-                            <a:srgbClr val="1F2A44"/>
-                          </a:solidFill>
-                          <a:latin typeface="Garamond"/>
-                          <a:cs typeface="Garamond"/>
-                        </a:rPr>
                         <a:t>8,697</a:t>
-                      </a:r>
-                    </a:p>
-                  </a:txBody>
-                  <a:tcPr anchor="ctr" marT="12700" marB="12700">
-                    <a:solidFill>
-                      <a:srgbClr val="FFFFFF"/>
-                    </a:solidFill>
-                  </a:tcPr>
-                </a:tc>
-                <a:tc>
-                  <a:txBody>
-                    <a:bodyPr/>
-                    <a:lstStyle/>
-                    <a:p>
-                      <a:pPr algn="r"/>
-                      <a:r>
-                        <a:rPr sz="850" b="1" i="0">
-                          <a:solidFill>
-                            <a:srgbClr val="1F2A44"/>
-                          </a:solidFill>
-                          <a:latin typeface="Garamond"/>
-                          <a:cs typeface="Garamond"/>
-                        </a:rPr>
-                        <a:t>10,249</a:t>
                       </a:r>
                     </a:p>
                   </a:txBody>
@@ -13620,7 +12121,7 @@
                           <a:latin typeface="Garamond"/>
                           <a:cs typeface="Garamond"/>
                         </a:rPr>
-                        <a:t>3,355</a:t>
+                        <a:t>3,357</a:t>
                       </a:r>
                     </a:p>
                   </a:txBody>
@@ -13644,7 +12145,7 @@
                           <a:latin typeface="Garamond"/>
                           <a:cs typeface="Garamond"/>
                         </a:rPr>
-                        <a:t>3,357</a:t>
+                        <a:t>3,434</a:t>
                       </a:r>
                     </a:p>
                   </a:txBody>
@@ -13668,7 +12169,7 @@
                           <a:latin typeface="Garamond"/>
                           <a:cs typeface="Garamond"/>
                         </a:rPr>
-                        <a:t>3,556</a:t>
+                        <a:t>3,513</a:t>
                       </a:r>
                     </a:p>
                   </a:txBody>
@@ -13692,127 +12193,7 @@
                           <a:latin typeface="Garamond"/>
                           <a:cs typeface="Garamond"/>
                         </a:rPr>
-                        <a:t>3,434</a:t>
-                      </a:r>
-                    </a:p>
-                  </a:txBody>
-                  <a:tcPr anchor="ctr" marT="12700" marB="12700">
-                    <a:solidFill>
-                      <a:srgbClr val="F0F1F3"/>
-                    </a:solidFill>
-                  </a:tcPr>
-                </a:tc>
-                <a:tc>
-                  <a:txBody>
-                    <a:bodyPr/>
-                    <a:lstStyle/>
-                    <a:p>
-                      <a:pPr algn="r"/>
-                      <a:r>
-                        <a:rPr sz="850" b="0" i="0">
-                          <a:solidFill>
-                            <a:srgbClr val="262626"/>
-                          </a:solidFill>
-                          <a:latin typeface="Garamond"/>
-                          <a:cs typeface="Garamond"/>
-                        </a:rPr>
-                        <a:t>3,770</a:t>
-                      </a:r>
-                    </a:p>
-                  </a:txBody>
-                  <a:tcPr anchor="ctr" marT="12700" marB="12700">
-                    <a:solidFill>
-                      <a:srgbClr val="F0F1F3"/>
-                    </a:solidFill>
-                  </a:tcPr>
-                </a:tc>
-                <a:tc>
-                  <a:txBody>
-                    <a:bodyPr/>
-                    <a:lstStyle/>
-                    <a:p>
-                      <a:pPr algn="r"/>
-                      <a:r>
-                        <a:rPr sz="850" b="0" i="0">
-                          <a:solidFill>
-                            <a:srgbClr val="262626"/>
-                          </a:solidFill>
-                          <a:latin typeface="Garamond"/>
-                          <a:cs typeface="Garamond"/>
-                        </a:rPr>
-                        <a:t>3,513</a:t>
-                      </a:r>
-                    </a:p>
-                  </a:txBody>
-                  <a:tcPr anchor="ctr" marT="12700" marB="12700">
-                    <a:solidFill>
-                      <a:srgbClr val="F0F1F3"/>
-                    </a:solidFill>
-                  </a:tcPr>
-                </a:tc>
-                <a:tc>
-                  <a:txBody>
-                    <a:bodyPr/>
-                    <a:lstStyle/>
-                    <a:p>
-                      <a:pPr algn="r"/>
-                      <a:r>
-                        <a:rPr sz="850" b="0" i="0">
-                          <a:solidFill>
-                            <a:srgbClr val="262626"/>
-                          </a:solidFill>
-                          <a:latin typeface="Garamond"/>
-                          <a:cs typeface="Garamond"/>
-                        </a:rPr>
-                        <a:t>3,996</a:t>
-                      </a:r>
-                    </a:p>
-                  </a:txBody>
-                  <a:tcPr anchor="ctr" marT="12700" marB="12700">
-                    <a:solidFill>
-                      <a:srgbClr val="F0F1F3"/>
-                    </a:solidFill>
-                  </a:tcPr>
-                </a:tc>
-                <a:tc>
-                  <a:txBody>
-                    <a:bodyPr/>
-                    <a:lstStyle/>
-                    <a:p>
-                      <a:pPr algn="r"/>
-                      <a:r>
-                        <a:rPr sz="850" b="0" i="0">
-                          <a:solidFill>
-                            <a:srgbClr val="262626"/>
-                          </a:solidFill>
-                          <a:latin typeface="Garamond"/>
-                          <a:cs typeface="Garamond"/>
-                        </a:rPr>
                         <a:t>3,594</a:t>
-                      </a:r>
-                    </a:p>
-                  </a:txBody>
-                  <a:tcPr anchor="ctr" marT="12700" marB="12700">
-                    <a:solidFill>
-                      <a:srgbClr val="F0F1F3"/>
-                    </a:solidFill>
-                  </a:tcPr>
-                </a:tc>
-                <a:tc>
-                  <a:txBody>
-                    <a:bodyPr/>
-                    <a:lstStyle/>
-                    <a:p>
-                      <a:pPr algn="r"/>
-                      <a:r>
-                        <a:rPr sz="850" b="0" i="0">
-                          <a:solidFill>
-                            <a:srgbClr val="262626"/>
-                          </a:solidFill>
-                          <a:latin typeface="Garamond"/>
-                          <a:cs typeface="Garamond"/>
-                        </a:rPr>
-                        <a:t>4,236</a:t>
                       </a:r>
                     </a:p>
                   </a:txBody>
@@ -13982,7 +12363,7 @@
                           <a:latin typeface="Garamond"/>
                           <a:cs typeface="Garamond"/>
                         </a:rPr>
-                        <a:t>4,763</a:t>
+                        <a:t>4,766</a:t>
                       </a:r>
                     </a:p>
                   </a:txBody>
@@ -14006,7 +12387,7 @@
                           <a:latin typeface="Garamond"/>
                           <a:cs typeface="Garamond"/>
                         </a:rPr>
-                        <a:t>4,766</a:t>
+                        <a:t>4,876</a:t>
                       </a:r>
                     </a:p>
                   </a:txBody>
@@ -14030,7 +12411,7 @@
                           <a:latin typeface="Garamond"/>
                           <a:cs typeface="Garamond"/>
                         </a:rPr>
-                        <a:t>5,049</a:t>
+                        <a:t>4,988</a:t>
                       </a:r>
                     </a:p>
                   </a:txBody>
@@ -14054,127 +12435,7 @@
                           <a:latin typeface="Garamond"/>
                           <a:cs typeface="Garamond"/>
                         </a:rPr>
-                        <a:t>4,876</a:t>
-                      </a:r>
-                    </a:p>
-                  </a:txBody>
-                  <a:tcPr anchor="ctr" marT="12700" marB="12700">
-                    <a:solidFill>
-                      <a:srgbClr val="FFFFFF"/>
-                    </a:solidFill>
-                  </a:tcPr>
-                </a:tc>
-                <a:tc>
-                  <a:txBody>
-                    <a:bodyPr/>
-                    <a:lstStyle/>
-                    <a:p>
-                      <a:pPr algn="r"/>
-                      <a:r>
-                        <a:rPr sz="850" b="1" i="0">
-                          <a:solidFill>
-                            <a:srgbClr val="1F2A44"/>
-                          </a:solidFill>
-                          <a:latin typeface="Garamond"/>
-                          <a:cs typeface="Garamond"/>
-                        </a:rPr>
-                        <a:t>5,352</a:t>
-                      </a:r>
-                    </a:p>
-                  </a:txBody>
-                  <a:tcPr anchor="ctr" marT="12700" marB="12700">
-                    <a:solidFill>
-                      <a:srgbClr val="FFFFFF"/>
-                    </a:solidFill>
-                  </a:tcPr>
-                </a:tc>
-                <a:tc>
-                  <a:txBody>
-                    <a:bodyPr/>
-                    <a:lstStyle/>
-                    <a:p>
-                      <a:pPr algn="r"/>
-                      <a:r>
-                        <a:rPr sz="850" b="1" i="0">
-                          <a:solidFill>
-                            <a:srgbClr val="1F2A44"/>
-                          </a:solidFill>
-                          <a:latin typeface="Garamond"/>
-                          <a:cs typeface="Garamond"/>
-                        </a:rPr>
-                        <a:t>4,988</a:t>
-                      </a:r>
-                    </a:p>
-                  </a:txBody>
-                  <a:tcPr anchor="ctr" marT="12700" marB="12700">
-                    <a:solidFill>
-                      <a:srgbClr val="FFFFFF"/>
-                    </a:solidFill>
-                  </a:tcPr>
-                </a:tc>
-                <a:tc>
-                  <a:txBody>
-                    <a:bodyPr/>
-                    <a:lstStyle/>
-                    <a:p>
-                      <a:pPr algn="r"/>
-                      <a:r>
-                        <a:rPr sz="850" b="1" i="0">
-                          <a:solidFill>
-                            <a:srgbClr val="1F2A44"/>
-                          </a:solidFill>
-                          <a:latin typeface="Garamond"/>
-                          <a:cs typeface="Garamond"/>
-                        </a:rPr>
-                        <a:t>5,673</a:t>
-                      </a:r>
-                    </a:p>
-                  </a:txBody>
-                  <a:tcPr anchor="ctr" marT="12700" marB="12700">
-                    <a:solidFill>
-                      <a:srgbClr val="FFFFFF"/>
-                    </a:solidFill>
-                  </a:tcPr>
-                </a:tc>
-                <a:tc>
-                  <a:txBody>
-                    <a:bodyPr/>
-                    <a:lstStyle/>
-                    <a:p>
-                      <a:pPr algn="r"/>
-                      <a:r>
-                        <a:rPr sz="850" b="1" i="0">
-                          <a:solidFill>
-                            <a:srgbClr val="1F2A44"/>
-                          </a:solidFill>
-                          <a:latin typeface="Garamond"/>
-                          <a:cs typeface="Garamond"/>
-                        </a:rPr>
                         <a:t>5,103</a:t>
-                      </a:r>
-                    </a:p>
-                  </a:txBody>
-                  <a:tcPr anchor="ctr" marT="12700" marB="12700">
-                    <a:solidFill>
-                      <a:srgbClr val="FFFFFF"/>
-                    </a:solidFill>
-                  </a:tcPr>
-                </a:tc>
-                <a:tc>
-                  <a:txBody>
-                    <a:bodyPr/>
-                    <a:lstStyle/>
-                    <a:p>
-                      <a:pPr algn="r"/>
-                      <a:r>
-                        <a:rPr sz="850" b="1" i="0">
-                          <a:solidFill>
-                            <a:srgbClr val="1F2A44"/>
-                          </a:solidFill>
-                          <a:latin typeface="Garamond"/>
-                          <a:cs typeface="Garamond"/>
-                        </a:rPr>
-                        <a:t>6,014</a:t>
                       </a:r>
                     </a:p>
                   </a:txBody>
@@ -14201,126 +12462,6 @@
                           <a:cs typeface="Garamond"/>
                         </a:rPr>
                         <a:t>Funded debt</a:t>
-                      </a:r>
-                    </a:p>
-                  </a:txBody>
-                  <a:tcPr anchor="ctr" marT="12700" marB="12700">
-                    <a:solidFill>
-                      <a:srgbClr val="F0F1F3"/>
-                    </a:solidFill>
-                  </a:tcPr>
-                </a:tc>
-                <a:tc>
-                  <a:txBody>
-                    <a:bodyPr/>
-                    <a:lstStyle/>
-                    <a:p>
-                      <a:pPr algn="r"/>
-                      <a:r>
-                        <a:rPr sz="850" b="1" i="0">
-                          <a:solidFill>
-                            <a:srgbClr val="1F2A44"/>
-                          </a:solidFill>
-                          <a:latin typeface="Garamond"/>
-                          <a:cs typeface="Garamond"/>
-                        </a:rPr>
-                        <a:t>0</a:t>
-                      </a:r>
-                    </a:p>
-                  </a:txBody>
-                  <a:tcPr anchor="ctr" marT="12700" marB="12700">
-                    <a:solidFill>
-                      <a:srgbClr val="F0F1F3"/>
-                    </a:solidFill>
-                  </a:tcPr>
-                </a:tc>
-                <a:tc>
-                  <a:txBody>
-                    <a:bodyPr/>
-                    <a:lstStyle/>
-                    <a:p>
-                      <a:pPr algn="r"/>
-                      <a:r>
-                        <a:rPr sz="850" b="1" i="0">
-                          <a:solidFill>
-                            <a:srgbClr val="1F2A44"/>
-                          </a:solidFill>
-                          <a:latin typeface="Garamond"/>
-                          <a:cs typeface="Garamond"/>
-                        </a:rPr>
-                        <a:t>0</a:t>
-                      </a:r>
-                    </a:p>
-                  </a:txBody>
-                  <a:tcPr anchor="ctr" marT="12700" marB="12700">
-                    <a:solidFill>
-                      <a:srgbClr val="F0F1F3"/>
-                    </a:solidFill>
-                  </a:tcPr>
-                </a:tc>
-                <a:tc>
-                  <a:txBody>
-                    <a:bodyPr/>
-                    <a:lstStyle/>
-                    <a:p>
-                      <a:pPr algn="r"/>
-                      <a:r>
-                        <a:rPr sz="850" b="1" i="0">
-                          <a:solidFill>
-                            <a:srgbClr val="1F2A44"/>
-                          </a:solidFill>
-                          <a:latin typeface="Garamond"/>
-                          <a:cs typeface="Garamond"/>
-                        </a:rPr>
-                        <a:t>0</a:t>
-                      </a:r>
-                    </a:p>
-                  </a:txBody>
-                  <a:tcPr anchor="ctr" marT="12700" marB="12700">
-                    <a:solidFill>
-                      <a:srgbClr val="F0F1F3"/>
-                    </a:solidFill>
-                  </a:tcPr>
-                </a:tc>
-                <a:tc>
-                  <a:txBody>
-                    <a:bodyPr/>
-                    <a:lstStyle/>
-                    <a:p>
-                      <a:pPr algn="r"/>
-                      <a:r>
-                        <a:rPr sz="850" b="1" i="0">
-                          <a:solidFill>
-                            <a:srgbClr val="1F2A44"/>
-                          </a:solidFill>
-                          <a:latin typeface="Garamond"/>
-                          <a:cs typeface="Garamond"/>
-                        </a:rPr>
-                        <a:t>0</a:t>
-                      </a:r>
-                    </a:p>
-                  </a:txBody>
-                  <a:tcPr anchor="ctr" marT="12700" marB="12700">
-                    <a:solidFill>
-                      <a:srgbClr val="F0F1F3"/>
-                    </a:solidFill>
-                  </a:tcPr>
-                </a:tc>
-                <a:tc>
-                  <a:txBody>
-                    <a:bodyPr/>
-                    <a:lstStyle/>
-                    <a:p>
-                      <a:pPr algn="r"/>
-                      <a:r>
-                        <a:rPr sz="850" b="1" i="0">
-                          <a:solidFill>
-                            <a:srgbClr val="1F2A44"/>
-                          </a:solidFill>
-                          <a:latin typeface="Garamond"/>
-                          <a:cs typeface="Garamond"/>
-                        </a:rPr>
-                        <a:t>0</a:t>
                       </a:r>
                     </a:p>
                   </a:txBody>
@@ -14570,10 +12711,9 @@
                 <a:tableStyleId>{5C22544A-7EE6-4342-B048-85BDC9FD1C3A}</a:tableStyleId>
               </a:tblPr>
               <a:tblGrid>
-                <a:gridCol w="1691640"/>
-                <a:gridCol w="3200400"/>
-                <a:gridCol w="3200400"/>
-                <a:gridCol w="3200400"/>
+                <a:gridCol w="1828800"/>
+                <a:gridCol w="4732020"/>
+                <a:gridCol w="4732020"/>
               </a:tblGrid>
               <a:tr h="146304">
                 <a:tc>
@@ -14583,7 +12723,7 @@
                     <a:p>
                       <a:pPr algn="l"/>
                       <a:r>
-                        <a:rPr sz="750" b="1" i="0">
+                        <a:rPr sz="800" b="1" i="0">
                           <a:solidFill>
                             <a:srgbClr val="FFFFFF"/>
                           </a:solidFill>
@@ -14607,7 +12747,7 @@
                     <a:p>
                       <a:pPr algn="r"/>
                       <a:r>
-                        <a:rPr sz="750" b="1" i="0">
+                        <a:rPr sz="800" b="1" i="0">
                           <a:solidFill>
                             <a:srgbClr val="FFFFFF"/>
                           </a:solidFill>
@@ -14631,38 +12771,14 @@
                     <a:p>
                       <a:pPr algn="r"/>
                       <a:r>
-                        <a:rPr sz="750" b="1" i="0">
+                        <a:rPr sz="800" b="1" i="0">
                           <a:solidFill>
                             <a:srgbClr val="FFFFFF"/>
                           </a:solidFill>
                           <a:latin typeface="Garamond"/>
                           <a:cs typeface="Garamond"/>
                         </a:rPr>
-                        <a:t>Base 26B–30B</a:t>
-                      </a:r>
-                    </a:p>
-                  </a:txBody>
-                  <a:tcPr anchor="ctr">
-                    <a:solidFill>
-                      <a:srgbClr val="1F2A44"/>
-                    </a:solidFill>
-                  </a:tcPr>
-                </a:tc>
-                <a:tc>
-                  <a:txBody>
-                    <a:bodyPr/>
-                    <a:lstStyle/>
-                    <a:p>
-                      <a:pPr algn="r"/>
-                      <a:r>
-                        <a:rPr sz="750" b="1" i="0">
-                          <a:solidFill>
-                            <a:srgbClr val="FFFFFF"/>
-                          </a:solidFill>
-                          <a:latin typeface="Garamond"/>
-                          <a:cs typeface="Garamond"/>
-                        </a:rPr>
-                        <a:t>Bull 26U–30U</a:t>
+                        <a:t>Base forecast (26–30, col G)</a:t>
                       </a:r>
                     </a:p>
                   </a:txBody>
@@ -14681,7 +12797,7 @@
                     <a:p>
                       <a:pPr algn="l"/>
                       <a:r>
-                        <a:rPr sz="700" b="0" i="0">
+                        <a:rPr sz="750" b="0" i="0">
                           <a:solidFill>
                             <a:srgbClr val="262626"/>
                           </a:solidFill>
@@ -14705,7 +12821,7 @@
                     <a:p>
                       <a:pPr algn="r"/>
                       <a:r>
-                        <a:rPr sz="700" b="0" i="0">
+                        <a:rPr sz="750" b="0" i="0">
                           <a:solidFill>
                             <a:srgbClr val="262626"/>
                           </a:solidFill>
@@ -14729,38 +12845,14 @@
                     <a:p>
                       <a:pPr algn="r"/>
                       <a:r>
-                        <a:rPr sz="700" b="0" i="0">
+                        <a:rPr sz="750" b="0" i="0">
                           <a:solidFill>
                             <a:srgbClr val="262626"/>
                           </a:solidFill>
                           <a:latin typeface="Garamond"/>
                           <a:cs typeface="Garamond"/>
                         </a:rPr>
-                        <a:t>LULU_DCF_Valuation_Model.xlsx → Scenarios, col G pitch bridge cash</a:t>
-                      </a:r>
-                    </a:p>
-                  </a:txBody>
-                  <a:tcPr anchor="ctr" marT="12700" marB="12700">
-                    <a:solidFill>
-                      <a:srgbClr val="FFFFFF"/>
-                    </a:solidFill>
-                  </a:tcPr>
-                </a:tc>
-                <a:tc>
-                  <a:txBody>
-                    <a:bodyPr/>
-                    <a:lstStyle/>
-                    <a:p>
-                      <a:pPr algn="r"/>
-                      <a:r>
-                        <a:rPr sz="700" b="0" i="0">
-                          <a:solidFill>
-                            <a:srgbClr val="262626"/>
-                          </a:solidFill>
-                          <a:latin typeface="Garamond"/>
-                          <a:cs typeface="Garamond"/>
-                        </a:rPr>
-                        <a:t>LULU_DCF_Valuation_Model.xlsx → Scenarios, col H pitch bridge cash</a:t>
+                        <a:t>LULU_DCF_Valuation_Model.xlsx → Scenarios, col G (base) pitch bridge cash</a:t>
                       </a:r>
                     </a:p>
                   </a:txBody>
@@ -14779,7 +12871,7 @@
                     <a:p>
                       <a:pPr algn="l"/>
                       <a:r>
-                        <a:rPr sz="700" b="0" i="0">
+                        <a:rPr sz="750" b="0" i="0">
                           <a:solidFill>
                             <a:srgbClr val="262626"/>
                           </a:solidFill>
@@ -14803,7 +12895,7 @@
                     <a:p>
                       <a:pPr algn="r"/>
                       <a:r>
-                        <a:rPr sz="700" b="0" i="0">
+                        <a:rPr sz="750" b="0" i="0">
                           <a:solidFill>
                             <a:srgbClr val="262626"/>
                           </a:solidFill>
@@ -14827,38 +12919,14 @@
                     <a:p>
                       <a:pPr algn="r"/>
                       <a:r>
-                        <a:rPr sz="700" b="0" i="0">
+                        <a:rPr sz="750" b="0" i="0">
                           <a:solidFill>
                             <a:srgbClr val="262626"/>
                           </a:solidFill>
                           <a:latin typeface="Garamond"/>
                           <a:cs typeface="Garamond"/>
                         </a:rPr>
-                        <a:t>LULU_DCF_Valuation_Model.xlsx → Scenarios, col G inventories (NWC)</a:t>
-                      </a:r>
-                    </a:p>
-                  </a:txBody>
-                  <a:tcPr anchor="ctr" marT="12700" marB="12700">
-                    <a:solidFill>
-                      <a:srgbClr val="F0F1F3"/>
-                    </a:solidFill>
-                  </a:tcPr>
-                </a:tc>
-                <a:tc>
-                  <a:txBody>
-                    <a:bodyPr/>
-                    <a:lstStyle/>
-                    <a:p>
-                      <a:pPr algn="r"/>
-                      <a:r>
-                        <a:rPr sz="700" b="0" i="0">
-                          <a:solidFill>
-                            <a:srgbClr val="262626"/>
-                          </a:solidFill>
-                          <a:latin typeface="Garamond"/>
-                          <a:cs typeface="Garamond"/>
-                        </a:rPr>
-                        <a:t>LULU_DCF_Valuation_Model.xlsx → Scenarios, col H inventories (NWC)</a:t>
+                        <a:t>LULU_DCF_Valuation_Model.xlsx → Scenarios, col G (base) inventories (NWC)</a:t>
                       </a:r>
                     </a:p>
                   </a:txBody>
@@ -14877,7 +12945,7 @@
                     <a:p>
                       <a:pPr algn="l"/>
                       <a:r>
-                        <a:rPr sz="700" b="0" i="0">
+                        <a:rPr sz="750" b="0" i="0">
                           <a:solidFill>
                             <a:srgbClr val="262626"/>
                           </a:solidFill>
@@ -14901,7 +12969,7 @@
                     <a:p>
                       <a:pPr algn="r"/>
                       <a:r>
-                        <a:rPr sz="700" b="0" i="0">
+                        <a:rPr sz="750" b="0" i="0">
                           <a:solidFill>
                             <a:srgbClr val="262626"/>
                           </a:solidFill>
@@ -14925,38 +12993,14 @@
                     <a:p>
                       <a:pPr algn="r"/>
                       <a:r>
-                        <a:rPr sz="700" b="0" i="0">
+                        <a:rPr sz="750" b="0" i="0">
                           <a:solidFill>
                             <a:srgbClr val="262626"/>
                           </a:solidFill>
                           <a:latin typeface="Garamond"/>
                           <a:cs typeface="Garamond"/>
                         </a:rPr>
-                        <a:t>LULU_DCF_Valuation_Model.xlsx → Scenarios, col G pitch bridge TA</a:t>
-                      </a:r>
-                    </a:p>
-                  </a:txBody>
-                  <a:tcPr anchor="ctr" marT="12700" marB="12700">
-                    <a:solidFill>
-                      <a:srgbClr val="FFFFFF"/>
-                    </a:solidFill>
-                  </a:tcPr>
-                </a:tc>
-                <a:tc>
-                  <a:txBody>
-                    <a:bodyPr/>
-                    <a:lstStyle/>
-                    <a:p>
-                      <a:pPr algn="r"/>
-                      <a:r>
-                        <a:rPr sz="700" b="0" i="0">
-                          <a:solidFill>
-                            <a:srgbClr val="262626"/>
-                          </a:solidFill>
-                          <a:latin typeface="Garamond"/>
-                          <a:cs typeface="Garamond"/>
-                        </a:rPr>
-                        <a:t>LULU_DCF_Valuation_Model.xlsx → Scenarios, col H pitch bridge TA</a:t>
+                        <a:t>LULU_DCF_Valuation_Model.xlsx → Scenarios, col G (base) pitch bridge TA</a:t>
                       </a:r>
                     </a:p>
                   </a:txBody>
@@ -14975,7 +13019,7 @@
                     <a:p>
                       <a:pPr algn="l"/>
                       <a:r>
-                        <a:rPr sz="700" b="0" i="0">
+                        <a:rPr sz="750" b="0" i="0">
                           <a:solidFill>
                             <a:srgbClr val="262626"/>
                           </a:solidFill>
@@ -14999,7 +13043,7 @@
                     <a:p>
                       <a:pPr algn="r"/>
                       <a:r>
-                        <a:rPr sz="700" b="0" i="0">
+                        <a:rPr sz="750" b="0" i="0">
                           <a:solidFill>
                             <a:srgbClr val="262626"/>
                           </a:solidFill>
@@ -15023,38 +13067,14 @@
                     <a:p>
                       <a:pPr algn="r"/>
                       <a:r>
-                        <a:rPr sz="700" b="0" i="0">
+                        <a:rPr sz="750" b="0" i="0">
                           <a:solidFill>
                             <a:srgbClr val="262626"/>
                           </a:solidFill>
                           <a:latin typeface="Garamond"/>
                           <a:cs typeface="Garamond"/>
                         </a:rPr>
-                        <a:t>LULU_DCF_Valuation_Model.xlsx → Scenarios, col G pitch bridge TL</a:t>
-                      </a:r>
-                    </a:p>
-                  </a:txBody>
-                  <a:tcPr anchor="ctr" marT="12700" marB="12700">
-                    <a:solidFill>
-                      <a:srgbClr val="F0F1F3"/>
-                    </a:solidFill>
-                  </a:tcPr>
-                </a:tc>
-                <a:tc>
-                  <a:txBody>
-                    <a:bodyPr/>
-                    <a:lstStyle/>
-                    <a:p>
-                      <a:pPr algn="r"/>
-                      <a:r>
-                        <a:rPr sz="700" b="0" i="0">
-                          <a:solidFill>
-                            <a:srgbClr val="262626"/>
-                          </a:solidFill>
-                          <a:latin typeface="Garamond"/>
-                          <a:cs typeface="Garamond"/>
-                        </a:rPr>
-                        <a:t>LULU_DCF_Valuation_Model.xlsx → Scenarios, col H pitch bridge TL</a:t>
+                        <a:t>LULU_DCF_Valuation_Model.xlsx → Scenarios, col G (base) pitch bridge TL</a:t>
                       </a:r>
                     </a:p>
                   </a:txBody>
@@ -15073,7 +13093,7 @@
                     <a:p>
                       <a:pPr algn="l"/>
                       <a:r>
-                        <a:rPr sz="700" b="0" i="0">
+                        <a:rPr sz="750" b="0" i="0">
                           <a:solidFill>
                             <a:srgbClr val="262626"/>
                           </a:solidFill>
@@ -15097,7 +13117,7 @@
                     <a:p>
                       <a:pPr algn="r"/>
                       <a:r>
-                        <a:rPr sz="700" b="0" i="0">
+                        <a:rPr sz="750" b="0" i="0">
                           <a:solidFill>
                             <a:srgbClr val="262626"/>
                           </a:solidFill>
@@ -15121,38 +13141,14 @@
                     <a:p>
                       <a:pPr algn="r"/>
                       <a:r>
-                        <a:rPr sz="700" b="0" i="0">
+                        <a:rPr sz="750" b="0" i="0">
                           <a:solidFill>
                             <a:srgbClr val="262626"/>
                           </a:solidFill>
                           <a:latin typeface="Garamond"/>
                           <a:cs typeface="Garamond"/>
                         </a:rPr>
-                        <a:t>LULU_DCF_Valuation_Model.xlsx → Scenarios, col G pitch bridge equity</a:t>
-                      </a:r>
-                    </a:p>
-                  </a:txBody>
-                  <a:tcPr anchor="ctr" marT="12700" marB="12700">
-                    <a:solidFill>
-                      <a:srgbClr val="FFFFFF"/>
-                    </a:solidFill>
-                  </a:tcPr>
-                </a:tc>
-                <a:tc>
-                  <a:txBody>
-                    <a:bodyPr/>
-                    <a:lstStyle/>
-                    <a:p>
-                      <a:pPr algn="r"/>
-                      <a:r>
-                        <a:rPr sz="700" b="0" i="0">
-                          <a:solidFill>
-                            <a:srgbClr val="262626"/>
-                          </a:solidFill>
-                          <a:latin typeface="Garamond"/>
-                          <a:cs typeface="Garamond"/>
-                        </a:rPr>
-                        <a:t>LULU_DCF_Valuation_Model.xlsx → Scenarios, col H pitch bridge equity</a:t>
+                        <a:t>LULU_DCF_Valuation_Model.xlsx → Scenarios, col G (base) pitch bridge equity</a:t>
                       </a:r>
                     </a:p>
                   </a:txBody>
@@ -15171,7 +13167,7 @@
                     <a:p>
                       <a:pPr algn="l"/>
                       <a:r>
-                        <a:rPr sz="700" b="0" i="0">
+                        <a:rPr sz="750" b="0" i="0">
                           <a:solidFill>
                             <a:srgbClr val="262626"/>
                           </a:solidFill>
@@ -15195,7 +13191,7 @@
                     <a:p>
                       <a:pPr algn="r"/>
                       <a:r>
-                        <a:rPr sz="700" b="0" i="0">
+                        <a:rPr sz="750" b="0" i="0">
                           <a:solidFill>
                             <a:srgbClr val="262626"/>
                           </a:solidFill>
@@ -15219,31 +13215,7 @@
                     <a:p>
                       <a:pPr algn="r"/>
                       <a:r>
-                        <a:rPr sz="700" b="0" i="0">
-                          <a:solidFill>
-                            <a:srgbClr val="262626"/>
-                          </a:solidFill>
-                          <a:latin typeface="Garamond"/>
-                          <a:cs typeface="Garamond"/>
-                        </a:rPr>
-                        <a:t>$0</a:t>
-                      </a:r>
-                    </a:p>
-                  </a:txBody>
-                  <a:tcPr anchor="ctr" marT="12700" marB="12700">
-                    <a:solidFill>
-                      <a:srgbClr val="F0F1F3"/>
-                    </a:solidFill>
-                  </a:tcPr>
-                </a:tc>
-                <a:tc>
-                  <a:txBody>
-                    <a:bodyPr/>
-                    <a:lstStyle/>
-                    <a:p>
-                      <a:pPr algn="r"/>
-                      <a:r>
-                        <a:rPr sz="700" b="0" i="0">
+                        <a:rPr sz="750" b="0" i="0">
                           <a:solidFill>
                             <a:srgbClr val="262626"/>
                           </a:solidFill>
@@ -15304,7 +13276,7 @@
                 <a:latin typeface="Garamond"/>
                 <a:cs typeface="Garamond"/>
               </a:rPr>
-              <a:t>BS forecast: Scenarios pitch bridge (cash waterfall + FY25 BS × revenue growth).</a:t>
+              <a:t>BS forecast: Scenarios pitch bridge (cash waterfall + FY25 BS × revenue growth), col G.</a:t>
             </a:r>
           </a:p>
         </p:txBody>
@@ -15485,7 +13457,7 @@
                 <a:latin typeface="Garamond"/>
                 <a:cs typeface="Garamond"/>
               </a:rPr>
-              <a:t>Operating FCF (DCF input) vs financing — historical 10-K vs base &amp; bull (US$ M)</a:t>
+              <a:t>Operating FCF (DCF input) vs financing — historical 10-K vs base case (US$ M)</a:t>
             </a:r>
           </a:p>
         </p:txBody>
@@ -15573,7 +13545,7 @@
                 <a:latin typeface="Garamond"/>
                 <a:cs typeface="Garamond"/>
               </a:rPr>
-              <a:t>Hist = 10-K. Base (26B) &amp; bull (26U) = DCF Scenarios pitch-bridge block, cols G &amp; H.</a:t>
+              <a:t>Hist = 10-K. Forecast (26–30) = DCF Scenarios pitch-bridge block, col G (base case only).</a:t>
             </a:r>
           </a:p>
         </p:txBody>
@@ -15851,7 +13823,7 @@
                 <a:latin typeface="Garamond"/>
                 <a:cs typeface="Garamond"/>
               </a:rPr>
-              <a:t>FORECAST (FY2026E–FY2030E) — base (G) vs bull (H)</a:t>
+              <a:t>FORECAST (FY2026E–FY2030E) — base case (Scenarios col G)</a:t>
             </a:r>
           </a:p>
           <a:p>
@@ -15873,7 +13845,7 @@
                 <a:latin typeface="Garamond"/>
                 <a:cs typeface="Garamond"/>
               </a:rPr>
-              <a:t>Cash from operations: base FY26 1,660M → FY30 1,751M; bull FY26 1,820M → FY30 2,385M</a:t>
+              <a:t>Cash from operations: FY26 1,660M → FY30 1,751M</a:t>
             </a:r>
           </a:p>
           <a:p>
@@ -15895,7 +13867,7 @@
                 <a:latin typeface="Garamond"/>
                 <a:cs typeface="Garamond"/>
               </a:rPr>
-              <a:t>D&amp;A (add-back): base FY26 469M → FY30 514M; bull FY26 480M → FY30 606M</a:t>
+              <a:t>D&amp;A (add-back): FY26 469M → FY30 514M</a:t>
             </a:r>
           </a:p>
           <a:p>
@@ -15917,7 +13889,7 @@
                 <a:latin typeface="Garamond"/>
                 <a:cs typeface="Garamond"/>
               </a:rPr>
-              <a:t>Capital expenditures: base FY26 (573) → FY30 (628); bull FY26 (480) → FY30 (606)</a:t>
+              <a:t>Capital expenditures: FY26 (573) → FY30 (628)</a:t>
             </a:r>
           </a:p>
           <a:p>
@@ -15939,7 +13911,7 @@
                 <a:latin typeface="Garamond"/>
                 <a:cs typeface="Garamond"/>
               </a:rPr>
-              <a:t>Free cash flow: base FY26 1,087M → FY30 1,123M; bull FY26 1,340M → FY30 1,779M</a:t>
+              <a:t>Free cash flow: FY26 1,087M → FY30 1,123M</a:t>
             </a:r>
           </a:p>
           <a:p>
@@ -15961,7 +13933,7 @@
                 <a:latin typeface="Garamond"/>
                 <a:cs typeface="Garamond"/>
               </a:rPr>
-              <a:t>Share repurchases (CFF): base FY26 (500) → FY30 (500); bull FY26 (1,005) → FY30 (1,335)</a:t>
+              <a:t>Share repurchases (CFF): FY26 (500) → FY30 (500)</a:t>
             </a:r>
           </a:p>
         </p:txBody>
@@ -15976,7 +13948,7 @@
         </p:nvGraphicFramePr>
         <p:xfrm>
           <a:off x="457200" y="3364992"/>
-          <a:ext cx="11292828" cy="2176272"/>
+          <a:ext cx="11292840" cy="2176272"/>
         </p:xfrm>
         <a:graphic>
           <a:graphicData uri="http://schemas.openxmlformats.org/drawingml/2006/table">
@@ -15986,20 +13958,15 @@
               </a:tblPr>
               <a:tblGrid>
                 <a:gridCol w="2148840"/>
-                <a:gridCol w="653142"/>
-                <a:gridCol w="653142"/>
-                <a:gridCol w="653142"/>
-                <a:gridCol w="653142"/>
-                <a:gridCol w="653142"/>
-                <a:gridCol w="653142"/>
-                <a:gridCol w="653142"/>
-                <a:gridCol w="653142"/>
-                <a:gridCol w="653142"/>
-                <a:gridCol w="653142"/>
-                <a:gridCol w="653142"/>
-                <a:gridCol w="653142"/>
-                <a:gridCol w="653142"/>
-                <a:gridCol w="653142"/>
+                <a:gridCol w="1016000"/>
+                <a:gridCol w="1016000"/>
+                <a:gridCol w="1016000"/>
+                <a:gridCol w="1016000"/>
+                <a:gridCol w="1016000"/>
+                <a:gridCol w="1016000"/>
+                <a:gridCol w="1016000"/>
+                <a:gridCol w="1016000"/>
+                <a:gridCol w="1016000"/>
               </a:tblGrid>
               <a:tr h="362712">
                 <a:tc>
@@ -16136,7 +14103,7 @@
                           <a:latin typeface="Garamond"/>
                           <a:cs typeface="Garamond"/>
                         </a:rPr>
-                        <a:t>26B</a:t>
+                        <a:t>26</a:t>
                       </a:r>
                     </a:p>
                   </a:txBody>
@@ -16160,7 +14127,7 @@
                           <a:latin typeface="Garamond"/>
                           <a:cs typeface="Garamond"/>
                         </a:rPr>
-                        <a:t>26U</a:t>
+                        <a:t>27</a:t>
                       </a:r>
                     </a:p>
                   </a:txBody>
@@ -16184,7 +14151,7 @@
                           <a:latin typeface="Garamond"/>
                           <a:cs typeface="Garamond"/>
                         </a:rPr>
-                        <a:t>27B</a:t>
+                        <a:t>28</a:t>
                       </a:r>
                     </a:p>
                   </a:txBody>
@@ -16208,7 +14175,7 @@
                           <a:latin typeface="Garamond"/>
                           <a:cs typeface="Garamond"/>
                         </a:rPr>
-                        <a:t>27U</a:t>
+                        <a:t>29</a:t>
                       </a:r>
                     </a:p>
                   </a:txBody>
@@ -16232,127 +14199,7 @@
                           <a:latin typeface="Garamond"/>
                           <a:cs typeface="Garamond"/>
                         </a:rPr>
-                        <a:t>28B</a:t>
-                      </a:r>
-                    </a:p>
-                  </a:txBody>
-                  <a:tcPr anchor="ctr">
-                    <a:solidFill>
-                      <a:srgbClr val="1F2A44"/>
-                    </a:solidFill>
-                  </a:tcPr>
-                </a:tc>
-                <a:tc>
-                  <a:txBody>
-                    <a:bodyPr/>
-                    <a:lstStyle/>
-                    <a:p>
-                      <a:pPr algn="r"/>
-                      <a:r>
-                        <a:rPr sz="800" b="1" i="0">
-                          <a:solidFill>
-                            <a:srgbClr val="FFFFFF"/>
-                          </a:solidFill>
-                          <a:latin typeface="Garamond"/>
-                          <a:cs typeface="Garamond"/>
-                        </a:rPr>
-                        <a:t>28U</a:t>
-                      </a:r>
-                    </a:p>
-                  </a:txBody>
-                  <a:tcPr anchor="ctr">
-                    <a:solidFill>
-                      <a:srgbClr val="1F2A44"/>
-                    </a:solidFill>
-                  </a:tcPr>
-                </a:tc>
-                <a:tc>
-                  <a:txBody>
-                    <a:bodyPr/>
-                    <a:lstStyle/>
-                    <a:p>
-                      <a:pPr algn="r"/>
-                      <a:r>
-                        <a:rPr sz="800" b="1" i="0">
-                          <a:solidFill>
-                            <a:srgbClr val="FFFFFF"/>
-                          </a:solidFill>
-                          <a:latin typeface="Garamond"/>
-                          <a:cs typeface="Garamond"/>
-                        </a:rPr>
-                        <a:t>29B</a:t>
-                      </a:r>
-                    </a:p>
-                  </a:txBody>
-                  <a:tcPr anchor="ctr">
-                    <a:solidFill>
-                      <a:srgbClr val="1F2A44"/>
-                    </a:solidFill>
-                  </a:tcPr>
-                </a:tc>
-                <a:tc>
-                  <a:txBody>
-                    <a:bodyPr/>
-                    <a:lstStyle/>
-                    <a:p>
-                      <a:pPr algn="r"/>
-                      <a:r>
-                        <a:rPr sz="800" b="1" i="0">
-                          <a:solidFill>
-                            <a:srgbClr val="FFFFFF"/>
-                          </a:solidFill>
-                          <a:latin typeface="Garamond"/>
-                          <a:cs typeface="Garamond"/>
-                        </a:rPr>
-                        <a:t>29U</a:t>
-                      </a:r>
-                    </a:p>
-                  </a:txBody>
-                  <a:tcPr anchor="ctr">
-                    <a:solidFill>
-                      <a:srgbClr val="1F2A44"/>
-                    </a:solidFill>
-                  </a:tcPr>
-                </a:tc>
-                <a:tc>
-                  <a:txBody>
-                    <a:bodyPr/>
-                    <a:lstStyle/>
-                    <a:p>
-                      <a:pPr algn="r"/>
-                      <a:r>
-                        <a:rPr sz="800" b="1" i="0">
-                          <a:solidFill>
-                            <a:srgbClr val="FFFFFF"/>
-                          </a:solidFill>
-                          <a:latin typeface="Garamond"/>
-                          <a:cs typeface="Garamond"/>
-                        </a:rPr>
-                        <a:t>30B</a:t>
-                      </a:r>
-                    </a:p>
-                  </a:txBody>
-                  <a:tcPr anchor="ctr">
-                    <a:solidFill>
-                      <a:srgbClr val="1F2A44"/>
-                    </a:solidFill>
-                  </a:tcPr>
-                </a:tc>
-                <a:tc>
-                  <a:txBody>
-                    <a:bodyPr/>
-                    <a:lstStyle/>
-                    <a:p>
-                      <a:pPr algn="r"/>
-                      <a:r>
-                        <a:rPr sz="800" b="1" i="0">
-                          <a:solidFill>
-                            <a:srgbClr val="FFFFFF"/>
-                          </a:solidFill>
-                          <a:latin typeface="Garamond"/>
-                          <a:cs typeface="Garamond"/>
-                        </a:rPr>
-                        <a:t>30U</a:t>
+                        <a:t>30</a:t>
                       </a:r>
                     </a:p>
                   </a:txBody>
@@ -16522,7 +14369,7 @@
                           <a:latin typeface="Garamond"/>
                           <a:cs typeface="Garamond"/>
                         </a:rPr>
-                        <a:t>1,820</a:t>
+                        <a:t>1,518</a:t>
                       </a:r>
                     </a:p>
                   </a:txBody>
@@ -16546,7 +14393,7 @@
                           <a:latin typeface="Garamond"/>
                           <a:cs typeface="Garamond"/>
                         </a:rPr>
-                        <a:t>1,518</a:t>
+                        <a:t>1,593</a:t>
                       </a:r>
                     </a:p>
                   </a:txBody>
@@ -16570,7 +14417,7 @@
                           <a:latin typeface="Garamond"/>
                           <a:cs typeface="Garamond"/>
                         </a:rPr>
-                        <a:t>1,740</a:t>
+                        <a:t>1,670</a:t>
                       </a:r>
                     </a:p>
                   </a:txBody>
@@ -16594,127 +14441,7 @@
                           <a:latin typeface="Garamond"/>
                           <a:cs typeface="Garamond"/>
                         </a:rPr>
-                        <a:t>1,593</a:t>
-                      </a:r>
-                    </a:p>
-                  </a:txBody>
-                  <a:tcPr anchor="ctr" marT="12700" marB="12700">
-                    <a:solidFill>
-                      <a:srgbClr val="FFFFFF"/>
-                    </a:solidFill>
-                  </a:tcPr>
-                </a:tc>
-                <a:tc>
-                  <a:txBody>
-                    <a:bodyPr/>
-                    <a:lstStyle/>
-                    <a:p>
-                      <a:pPr algn="r"/>
-                      <a:r>
-                        <a:rPr sz="850" b="0" i="0">
-                          <a:solidFill>
-                            <a:srgbClr val="262626"/>
-                          </a:solidFill>
-                          <a:latin typeface="Garamond"/>
-                          <a:cs typeface="Garamond"/>
-                        </a:rPr>
-                        <a:t>1,936</a:t>
-                      </a:r>
-                    </a:p>
-                  </a:txBody>
-                  <a:tcPr anchor="ctr" marT="12700" marB="12700">
-                    <a:solidFill>
-                      <a:srgbClr val="FFFFFF"/>
-                    </a:solidFill>
-                  </a:tcPr>
-                </a:tc>
-                <a:tc>
-                  <a:txBody>
-                    <a:bodyPr/>
-                    <a:lstStyle/>
-                    <a:p>
-                      <a:pPr algn="r"/>
-                      <a:r>
-                        <a:rPr sz="850" b="0" i="0">
-                          <a:solidFill>
-                            <a:srgbClr val="262626"/>
-                          </a:solidFill>
-                          <a:latin typeface="Garamond"/>
-                          <a:cs typeface="Garamond"/>
-                        </a:rPr>
-                        <a:t>1,670</a:t>
-                      </a:r>
-                    </a:p>
-                  </a:txBody>
-                  <a:tcPr anchor="ctr" marT="12700" marB="12700">
-                    <a:solidFill>
-                      <a:srgbClr val="FFFFFF"/>
-                    </a:solidFill>
-                  </a:tcPr>
-                </a:tc>
-                <a:tc>
-                  <a:txBody>
-                    <a:bodyPr/>
-                    <a:lstStyle/>
-                    <a:p>
-                      <a:pPr algn="r"/>
-                      <a:r>
-                        <a:rPr sz="850" b="0" i="0">
-                          <a:solidFill>
-                            <a:srgbClr val="262626"/>
-                          </a:solidFill>
-                          <a:latin typeface="Garamond"/>
-                          <a:cs typeface="Garamond"/>
-                        </a:rPr>
-                        <a:t>2,151</a:t>
-                      </a:r>
-                    </a:p>
-                  </a:txBody>
-                  <a:tcPr anchor="ctr" marT="12700" marB="12700">
-                    <a:solidFill>
-                      <a:srgbClr val="FFFFFF"/>
-                    </a:solidFill>
-                  </a:tcPr>
-                </a:tc>
-                <a:tc>
-                  <a:txBody>
-                    <a:bodyPr/>
-                    <a:lstStyle/>
-                    <a:p>
-                      <a:pPr algn="r"/>
-                      <a:r>
-                        <a:rPr sz="850" b="0" i="0">
-                          <a:solidFill>
-                            <a:srgbClr val="262626"/>
-                          </a:solidFill>
-                          <a:latin typeface="Garamond"/>
-                          <a:cs typeface="Garamond"/>
-                        </a:rPr>
                         <a:t>1,751</a:t>
-                      </a:r>
-                    </a:p>
-                  </a:txBody>
-                  <a:tcPr anchor="ctr" marT="12700" marB="12700">
-                    <a:solidFill>
-                      <a:srgbClr val="FFFFFF"/>
-                    </a:solidFill>
-                  </a:tcPr>
-                </a:tc>
-                <a:tc>
-                  <a:txBody>
-                    <a:bodyPr/>
-                    <a:lstStyle/>
-                    <a:p>
-                      <a:pPr algn="r"/>
-                      <a:r>
-                        <a:rPr sz="850" b="0" i="0">
-                          <a:solidFill>
-                            <a:srgbClr val="262626"/>
-                          </a:solidFill>
-                          <a:latin typeface="Garamond"/>
-                          <a:cs typeface="Garamond"/>
-                        </a:rPr>
-                        <a:t>2,385</a:t>
                       </a:r>
                     </a:p>
                   </a:txBody>
@@ -16908,7 +14635,7 @@
                           <a:latin typeface="Garamond"/>
                           <a:cs typeface="Garamond"/>
                         </a:rPr>
-                        <a:t>480</a:t>
+                        <a:t>491</a:t>
                       </a:r>
                     </a:p>
                   </a:txBody>
@@ -16932,7 +14659,7 @@
                           <a:latin typeface="Garamond"/>
                           <a:cs typeface="Garamond"/>
                         </a:rPr>
-                        <a:t>508</a:t>
+                        <a:t>502</a:t>
                       </a:r>
                     </a:p>
                   </a:txBody>
@@ -16956,127 +14683,7 @@
                           <a:latin typeface="Garamond"/>
                           <a:cs typeface="Garamond"/>
                         </a:rPr>
-                        <a:t>491</a:t>
-                      </a:r>
-                    </a:p>
-                  </a:txBody>
-                  <a:tcPr anchor="ctr" marT="12700" marB="12700">
-                    <a:solidFill>
-                      <a:srgbClr val="F0F1F3"/>
-                    </a:solidFill>
-                  </a:tcPr>
-                </a:tc>
-                <a:tc>
-                  <a:txBody>
-                    <a:bodyPr/>
-                    <a:lstStyle/>
-                    <a:p>
-                      <a:pPr algn="r"/>
-                      <a:r>
-                        <a:rPr sz="850" b="0" i="0">
-                          <a:solidFill>
-                            <a:srgbClr val="262626"/>
-                          </a:solidFill>
-                          <a:latin typeface="Garamond"/>
-                          <a:cs typeface="Garamond"/>
-                        </a:rPr>
-                        <a:t>539</a:t>
-                      </a:r>
-                    </a:p>
-                  </a:txBody>
-                  <a:tcPr anchor="ctr" marT="12700" marB="12700">
-                    <a:solidFill>
-                      <a:srgbClr val="F0F1F3"/>
-                    </a:solidFill>
-                  </a:tcPr>
-                </a:tc>
-                <a:tc>
-                  <a:txBody>
-                    <a:bodyPr/>
-                    <a:lstStyle/>
-                    <a:p>
-                      <a:pPr algn="r"/>
-                      <a:r>
-                        <a:rPr sz="850" b="0" i="0">
-                          <a:solidFill>
-                            <a:srgbClr val="262626"/>
-                          </a:solidFill>
-                          <a:latin typeface="Garamond"/>
-                          <a:cs typeface="Garamond"/>
-                        </a:rPr>
-                        <a:t>502</a:t>
-                      </a:r>
-                    </a:p>
-                  </a:txBody>
-                  <a:tcPr anchor="ctr" marT="12700" marB="12700">
-                    <a:solidFill>
-                      <a:srgbClr val="F0F1F3"/>
-                    </a:solidFill>
-                  </a:tcPr>
-                </a:tc>
-                <a:tc>
-                  <a:txBody>
-                    <a:bodyPr/>
-                    <a:lstStyle/>
-                    <a:p>
-                      <a:pPr algn="r"/>
-                      <a:r>
-                        <a:rPr sz="850" b="0" i="0">
-                          <a:solidFill>
-                            <a:srgbClr val="262626"/>
-                          </a:solidFill>
-                          <a:latin typeface="Garamond"/>
-                          <a:cs typeface="Garamond"/>
-                        </a:rPr>
-                        <a:t>571</a:t>
-                      </a:r>
-                    </a:p>
-                  </a:txBody>
-                  <a:tcPr anchor="ctr" marT="12700" marB="12700">
-                    <a:solidFill>
-                      <a:srgbClr val="F0F1F3"/>
-                    </a:solidFill>
-                  </a:tcPr>
-                </a:tc>
-                <a:tc>
-                  <a:txBody>
-                    <a:bodyPr/>
-                    <a:lstStyle/>
-                    <a:p>
-                      <a:pPr algn="r"/>
-                      <a:r>
-                        <a:rPr sz="850" b="0" i="0">
-                          <a:solidFill>
-                            <a:srgbClr val="262626"/>
-                          </a:solidFill>
-                          <a:latin typeface="Garamond"/>
-                          <a:cs typeface="Garamond"/>
-                        </a:rPr>
                         <a:t>514</a:t>
-                      </a:r>
-                    </a:p>
-                  </a:txBody>
-                  <a:tcPr anchor="ctr" marT="12700" marB="12700">
-                    <a:solidFill>
-                      <a:srgbClr val="F0F1F3"/>
-                    </a:solidFill>
-                  </a:tcPr>
-                </a:tc>
-                <a:tc>
-                  <a:txBody>
-                    <a:bodyPr/>
-                    <a:lstStyle/>
-                    <a:p>
-                      <a:pPr algn="r"/>
-                      <a:r>
-                        <a:rPr sz="850" b="0" i="0">
-                          <a:solidFill>
-                            <a:srgbClr val="262626"/>
-                          </a:solidFill>
-                          <a:latin typeface="Garamond"/>
-                          <a:cs typeface="Garamond"/>
-                        </a:rPr>
-                        <a:t>606</a:t>
                       </a:r>
                     </a:p>
                   </a:txBody>
@@ -17246,7 +14853,7 @@
                           <a:latin typeface="Garamond"/>
                           <a:cs typeface="Garamond"/>
                         </a:rPr>
-                        <a:t>(480)</a:t>
+                        <a:t>(587)</a:t>
                       </a:r>
                     </a:p>
                   </a:txBody>
@@ -17270,7 +14877,7 @@
                           <a:latin typeface="Garamond"/>
                           <a:cs typeface="Garamond"/>
                         </a:rPr>
-                        <a:t>(587)</a:t>
+                        <a:t>(600)</a:t>
                       </a:r>
                     </a:p>
                   </a:txBody>
@@ -17294,7 +14901,7 @@
                           <a:latin typeface="Garamond"/>
                           <a:cs typeface="Garamond"/>
                         </a:rPr>
-                        <a:t>(508)</a:t>
+                        <a:t>(614)</a:t>
                       </a:r>
                     </a:p>
                   </a:txBody>
@@ -17318,127 +14925,7 @@
                           <a:latin typeface="Garamond"/>
                           <a:cs typeface="Garamond"/>
                         </a:rPr>
-                        <a:t>(600)</a:t>
-                      </a:r>
-                    </a:p>
-                  </a:txBody>
-                  <a:tcPr anchor="ctr" marT="12700" marB="12700">
-                    <a:solidFill>
-                      <a:srgbClr val="FFFFFF"/>
-                    </a:solidFill>
-                  </a:tcPr>
-                </a:tc>
-                <a:tc>
-                  <a:txBody>
-                    <a:bodyPr/>
-                    <a:lstStyle/>
-                    <a:p>
-                      <a:pPr algn="r"/>
-                      <a:r>
-                        <a:rPr sz="850" b="0" i="0">
-                          <a:solidFill>
-                            <a:srgbClr val="262626"/>
-                          </a:solidFill>
-                          <a:latin typeface="Garamond"/>
-                          <a:cs typeface="Garamond"/>
-                        </a:rPr>
-                        <a:t>(539)</a:t>
-                      </a:r>
-                    </a:p>
-                  </a:txBody>
-                  <a:tcPr anchor="ctr" marT="12700" marB="12700">
-                    <a:solidFill>
-                      <a:srgbClr val="FFFFFF"/>
-                    </a:solidFill>
-                  </a:tcPr>
-                </a:tc>
-                <a:tc>
-                  <a:txBody>
-                    <a:bodyPr/>
-                    <a:lstStyle/>
-                    <a:p>
-                      <a:pPr algn="r"/>
-                      <a:r>
-                        <a:rPr sz="850" b="0" i="0">
-                          <a:solidFill>
-                            <a:srgbClr val="262626"/>
-                          </a:solidFill>
-                          <a:latin typeface="Garamond"/>
-                          <a:cs typeface="Garamond"/>
-                        </a:rPr>
-                        <a:t>(614)</a:t>
-                      </a:r>
-                    </a:p>
-                  </a:txBody>
-                  <a:tcPr anchor="ctr" marT="12700" marB="12700">
-                    <a:solidFill>
-                      <a:srgbClr val="FFFFFF"/>
-                    </a:solidFill>
-                  </a:tcPr>
-                </a:tc>
-                <a:tc>
-                  <a:txBody>
-                    <a:bodyPr/>
-                    <a:lstStyle/>
-                    <a:p>
-                      <a:pPr algn="r"/>
-                      <a:r>
-                        <a:rPr sz="850" b="0" i="0">
-                          <a:solidFill>
-                            <a:srgbClr val="262626"/>
-                          </a:solidFill>
-                          <a:latin typeface="Garamond"/>
-                          <a:cs typeface="Garamond"/>
-                        </a:rPr>
-                        <a:t>(571)</a:t>
-                      </a:r>
-                    </a:p>
-                  </a:txBody>
-                  <a:tcPr anchor="ctr" marT="12700" marB="12700">
-                    <a:solidFill>
-                      <a:srgbClr val="FFFFFF"/>
-                    </a:solidFill>
-                  </a:tcPr>
-                </a:tc>
-                <a:tc>
-                  <a:txBody>
-                    <a:bodyPr/>
-                    <a:lstStyle/>
-                    <a:p>
-                      <a:pPr algn="r"/>
-                      <a:r>
-                        <a:rPr sz="850" b="0" i="0">
-                          <a:solidFill>
-                            <a:srgbClr val="262626"/>
-                          </a:solidFill>
-                          <a:latin typeface="Garamond"/>
-                          <a:cs typeface="Garamond"/>
-                        </a:rPr>
                         <a:t>(628)</a:t>
-                      </a:r>
-                    </a:p>
-                  </a:txBody>
-                  <a:tcPr anchor="ctr" marT="12700" marB="12700">
-                    <a:solidFill>
-                      <a:srgbClr val="FFFFFF"/>
-                    </a:solidFill>
-                  </a:tcPr>
-                </a:tc>
-                <a:tc>
-                  <a:txBody>
-                    <a:bodyPr/>
-                    <a:lstStyle/>
-                    <a:p>
-                      <a:pPr algn="r"/>
-                      <a:r>
-                        <a:rPr sz="850" b="0" i="0">
-                          <a:solidFill>
-                            <a:srgbClr val="262626"/>
-                          </a:solidFill>
-                          <a:latin typeface="Garamond"/>
-                          <a:cs typeface="Garamond"/>
-                        </a:rPr>
-                        <a:t>(606)</a:t>
                       </a:r>
                     </a:p>
                   </a:txBody>
@@ -17608,7 +15095,7 @@
                           <a:latin typeface="Garamond"/>
                           <a:cs typeface="Garamond"/>
                         </a:rPr>
-                        <a:t>1,340</a:t>
+                        <a:t>931</a:t>
                       </a:r>
                     </a:p>
                   </a:txBody>
@@ -17632,7 +15119,7 @@
                           <a:latin typeface="Garamond"/>
                           <a:cs typeface="Garamond"/>
                         </a:rPr>
-                        <a:t>931</a:t>
+                        <a:t>993</a:t>
                       </a:r>
                     </a:p>
                   </a:txBody>
@@ -17656,7 +15143,7 @@
                           <a:latin typeface="Garamond"/>
                           <a:cs typeface="Garamond"/>
                         </a:rPr>
-                        <a:t>1,232</a:t>
+                        <a:t>1,056</a:t>
                       </a:r>
                     </a:p>
                   </a:txBody>
@@ -17680,127 +15167,7 @@
                           <a:latin typeface="Garamond"/>
                           <a:cs typeface="Garamond"/>
                         </a:rPr>
-                        <a:t>993</a:t>
-                      </a:r>
-                    </a:p>
-                  </a:txBody>
-                  <a:tcPr anchor="ctr" marT="12700" marB="12700">
-                    <a:solidFill>
-                      <a:srgbClr val="F0F1F3"/>
-                    </a:solidFill>
-                  </a:tcPr>
-                </a:tc>
-                <a:tc>
-                  <a:txBody>
-                    <a:bodyPr/>
-                    <a:lstStyle/>
-                    <a:p>
-                      <a:pPr algn="r"/>
-                      <a:r>
-                        <a:rPr sz="850" b="1" i="0">
-                          <a:solidFill>
-                            <a:srgbClr val="1F2A44"/>
-                          </a:solidFill>
-                          <a:latin typeface="Garamond"/>
-                          <a:cs typeface="Garamond"/>
-                        </a:rPr>
-                        <a:t>1,397</a:t>
-                      </a:r>
-                    </a:p>
-                  </a:txBody>
-                  <a:tcPr anchor="ctr" marT="12700" marB="12700">
-                    <a:solidFill>
-                      <a:srgbClr val="F0F1F3"/>
-                    </a:solidFill>
-                  </a:tcPr>
-                </a:tc>
-                <a:tc>
-                  <a:txBody>
-                    <a:bodyPr/>
-                    <a:lstStyle/>
-                    <a:p>
-                      <a:pPr algn="r"/>
-                      <a:r>
-                        <a:rPr sz="850" b="1" i="0">
-                          <a:solidFill>
-                            <a:srgbClr val="1F2A44"/>
-                          </a:solidFill>
-                          <a:latin typeface="Garamond"/>
-                          <a:cs typeface="Garamond"/>
-                        </a:rPr>
-                        <a:t>1,056</a:t>
-                      </a:r>
-                    </a:p>
-                  </a:txBody>
-                  <a:tcPr anchor="ctr" marT="12700" marB="12700">
-                    <a:solidFill>
-                      <a:srgbClr val="F0F1F3"/>
-                    </a:solidFill>
-                  </a:tcPr>
-                </a:tc>
-                <a:tc>
-                  <a:txBody>
-                    <a:bodyPr/>
-                    <a:lstStyle/>
-                    <a:p>
-                      <a:pPr algn="r"/>
-                      <a:r>
-                        <a:rPr sz="850" b="1" i="0">
-                          <a:solidFill>
-                            <a:srgbClr val="1F2A44"/>
-                          </a:solidFill>
-                          <a:latin typeface="Garamond"/>
-                          <a:cs typeface="Garamond"/>
-                        </a:rPr>
-                        <a:t>1,580</a:t>
-                      </a:r>
-                    </a:p>
-                  </a:txBody>
-                  <a:tcPr anchor="ctr" marT="12700" marB="12700">
-                    <a:solidFill>
-                      <a:srgbClr val="F0F1F3"/>
-                    </a:solidFill>
-                  </a:tcPr>
-                </a:tc>
-                <a:tc>
-                  <a:txBody>
-                    <a:bodyPr/>
-                    <a:lstStyle/>
-                    <a:p>
-                      <a:pPr algn="r"/>
-                      <a:r>
-                        <a:rPr sz="850" b="1" i="0">
-                          <a:solidFill>
-                            <a:srgbClr val="1F2A44"/>
-                          </a:solidFill>
-                          <a:latin typeface="Garamond"/>
-                          <a:cs typeface="Garamond"/>
-                        </a:rPr>
                         <a:t>1,123</a:t>
-                      </a:r>
-                    </a:p>
-                  </a:txBody>
-                  <a:tcPr anchor="ctr" marT="12700" marB="12700">
-                    <a:solidFill>
-                      <a:srgbClr val="F0F1F3"/>
-                    </a:solidFill>
-                  </a:tcPr>
-                </a:tc>
-                <a:tc>
-                  <a:txBody>
-                    <a:bodyPr/>
-                    <a:lstStyle/>
-                    <a:p>
-                      <a:pPr algn="r"/>
-                      <a:r>
-                        <a:rPr sz="850" b="1" i="0">
-                          <a:solidFill>
-                            <a:srgbClr val="1F2A44"/>
-                          </a:solidFill>
-                          <a:latin typeface="Garamond"/>
-                          <a:cs typeface="Garamond"/>
-                        </a:rPr>
-                        <a:t>1,779</a:t>
                       </a:r>
                     </a:p>
                   </a:txBody>
@@ -17970,7 +15337,7 @@
                           <a:latin typeface="Garamond"/>
                           <a:cs typeface="Garamond"/>
                         </a:rPr>
-                        <a:t>(1,005)</a:t>
+                        <a:t>(500)</a:t>
                       </a:r>
                     </a:p>
                   </a:txBody>
@@ -18018,7 +15385,7 @@
                           <a:latin typeface="Garamond"/>
                           <a:cs typeface="Garamond"/>
                         </a:rPr>
-                        <a:t>(923)</a:t>
+                        <a:t>(500)</a:t>
                       </a:r>
                     </a:p>
                   </a:txBody>
@@ -18043,126 +15410,6 @@
                           <a:cs typeface="Garamond"/>
                         </a:rPr>
                         <a:t>(500)</a:t>
-                      </a:r>
-                    </a:p>
-                  </a:txBody>
-                  <a:tcPr anchor="ctr" marT="12700" marB="12700">
-                    <a:solidFill>
-                      <a:srgbClr val="FFFFFF"/>
-                    </a:solidFill>
-                  </a:tcPr>
-                </a:tc>
-                <a:tc>
-                  <a:txBody>
-                    <a:bodyPr/>
-                    <a:lstStyle/>
-                    <a:p>
-                      <a:pPr algn="r"/>
-                      <a:r>
-                        <a:rPr sz="850" b="0" i="0">
-                          <a:solidFill>
-                            <a:srgbClr val="262626"/>
-                          </a:solidFill>
-                          <a:latin typeface="Garamond"/>
-                          <a:cs typeface="Garamond"/>
-                        </a:rPr>
-                        <a:t>(1,048)</a:t>
-                      </a:r>
-                    </a:p>
-                  </a:txBody>
-                  <a:tcPr anchor="ctr" marT="12700" marB="12700">
-                    <a:solidFill>
-                      <a:srgbClr val="FFFFFF"/>
-                    </a:solidFill>
-                  </a:tcPr>
-                </a:tc>
-                <a:tc>
-                  <a:txBody>
-                    <a:bodyPr/>
-                    <a:lstStyle/>
-                    <a:p>
-                      <a:pPr algn="r"/>
-                      <a:r>
-                        <a:rPr sz="850" b="0" i="0">
-                          <a:solidFill>
-                            <a:srgbClr val="262626"/>
-                          </a:solidFill>
-                          <a:latin typeface="Garamond"/>
-                          <a:cs typeface="Garamond"/>
-                        </a:rPr>
-                        <a:t>(500)</a:t>
-                      </a:r>
-                    </a:p>
-                  </a:txBody>
-                  <a:tcPr anchor="ctr" marT="12700" marB="12700">
-                    <a:solidFill>
-                      <a:srgbClr val="FFFFFF"/>
-                    </a:solidFill>
-                  </a:tcPr>
-                </a:tc>
-                <a:tc>
-                  <a:txBody>
-                    <a:bodyPr/>
-                    <a:lstStyle/>
-                    <a:p>
-                      <a:pPr algn="r"/>
-                      <a:r>
-                        <a:rPr sz="850" b="0" i="0">
-                          <a:solidFill>
-                            <a:srgbClr val="262626"/>
-                          </a:solidFill>
-                          <a:latin typeface="Garamond"/>
-                          <a:cs typeface="Garamond"/>
-                        </a:rPr>
-                        <a:t>(1,185)</a:t>
-                      </a:r>
-                    </a:p>
-                  </a:txBody>
-                  <a:tcPr anchor="ctr" marT="12700" marB="12700">
-                    <a:solidFill>
-                      <a:srgbClr val="FFFFFF"/>
-                    </a:solidFill>
-                  </a:tcPr>
-                </a:tc>
-                <a:tc>
-                  <a:txBody>
-                    <a:bodyPr/>
-                    <a:lstStyle/>
-                    <a:p>
-                      <a:pPr algn="r"/>
-                      <a:r>
-                        <a:rPr sz="850" b="0" i="0">
-                          <a:solidFill>
-                            <a:srgbClr val="262626"/>
-                          </a:solidFill>
-                          <a:latin typeface="Garamond"/>
-                          <a:cs typeface="Garamond"/>
-                        </a:rPr>
-                        <a:t>(500)</a:t>
-                      </a:r>
-                    </a:p>
-                  </a:txBody>
-                  <a:tcPr anchor="ctr" marT="12700" marB="12700">
-                    <a:solidFill>
-                      <a:srgbClr val="FFFFFF"/>
-                    </a:solidFill>
-                  </a:tcPr>
-                </a:tc>
-                <a:tc>
-                  <a:txBody>
-                    <a:bodyPr/>
-                    <a:lstStyle/>
-                    <a:p>
-                      <a:pPr algn="r"/>
-                      <a:r>
-                        <a:rPr sz="850" b="0" i="0">
-                          <a:solidFill>
-                            <a:srgbClr val="262626"/>
-                          </a:solidFill>
-                          <a:latin typeface="Garamond"/>
-                          <a:cs typeface="Garamond"/>
-                        </a:rPr>
-                        <a:t>(1,335)</a:t>
                       </a:r>
                     </a:p>
                   </a:txBody>
@@ -18196,10 +15443,9 @@
                 <a:tableStyleId>{5C22544A-7EE6-4342-B048-85BDC9FD1C3A}</a:tableStyleId>
               </a:tblPr>
               <a:tblGrid>
-                <a:gridCol w="1691640"/>
-                <a:gridCol w="3200400"/>
-                <a:gridCol w="3200400"/>
-                <a:gridCol w="3200400"/>
+                <a:gridCol w="1828800"/>
+                <a:gridCol w="4732020"/>
+                <a:gridCol w="4732020"/>
               </a:tblGrid>
               <a:tr h="170688">
                 <a:tc>
@@ -18209,7 +15455,7 @@
                     <a:p>
                       <a:pPr algn="l"/>
                       <a:r>
-                        <a:rPr sz="750" b="1" i="0">
+                        <a:rPr sz="800" b="1" i="0">
                           <a:solidFill>
                             <a:srgbClr val="FFFFFF"/>
                           </a:solidFill>
@@ -18233,7 +15479,7 @@
                     <a:p>
                       <a:pPr algn="r"/>
                       <a:r>
-                        <a:rPr sz="750" b="1" i="0">
+                        <a:rPr sz="800" b="1" i="0">
                           <a:solidFill>
                             <a:srgbClr val="FFFFFF"/>
                           </a:solidFill>
@@ -18257,38 +15503,14 @@
                     <a:p>
                       <a:pPr algn="r"/>
                       <a:r>
-                        <a:rPr sz="750" b="1" i="0">
+                        <a:rPr sz="800" b="1" i="0">
                           <a:solidFill>
                             <a:srgbClr val="FFFFFF"/>
                           </a:solidFill>
                           <a:latin typeface="Garamond"/>
                           <a:cs typeface="Garamond"/>
                         </a:rPr>
-                        <a:t>Base 26B–30B</a:t>
-                      </a:r>
-                    </a:p>
-                  </a:txBody>
-                  <a:tcPr anchor="ctr">
-                    <a:solidFill>
-                      <a:srgbClr val="1F2A44"/>
-                    </a:solidFill>
-                  </a:tcPr>
-                </a:tc>
-                <a:tc>
-                  <a:txBody>
-                    <a:bodyPr/>
-                    <a:lstStyle/>
-                    <a:p>
-                      <a:pPr algn="r"/>
-                      <a:r>
-                        <a:rPr sz="750" b="1" i="0">
-                          <a:solidFill>
-                            <a:srgbClr val="FFFFFF"/>
-                          </a:solidFill>
-                          <a:latin typeface="Garamond"/>
-                          <a:cs typeface="Garamond"/>
-                        </a:rPr>
-                        <a:t>Bull 26U–30U</a:t>
+                        <a:t>Base forecast (26–30, col G)</a:t>
                       </a:r>
                     </a:p>
                   </a:txBody>
@@ -18307,7 +15529,7 @@
                     <a:p>
                       <a:pPr algn="l"/>
                       <a:r>
-                        <a:rPr sz="700" b="0" i="0">
+                        <a:rPr sz="750" b="0" i="0">
                           <a:solidFill>
                             <a:srgbClr val="262626"/>
                           </a:solidFill>
@@ -18331,7 +15553,7 @@
                     <a:p>
                       <a:pPr algn="r"/>
                       <a:r>
-                        <a:rPr sz="700" b="0" i="0">
+                        <a:rPr sz="750" b="0" i="0">
                           <a:solidFill>
                             <a:srgbClr val="262626"/>
                           </a:solidFill>
@@ -18355,38 +15577,14 @@
                     <a:p>
                       <a:pPr algn="r"/>
                       <a:r>
-                        <a:rPr sz="700" b="0" i="0">
+                        <a:rPr sz="750" b="0" i="0">
                           <a:solidFill>
                             <a:srgbClr val="262626"/>
                           </a:solidFill>
                           <a:latin typeface="Garamond"/>
                           <a:cs typeface="Garamond"/>
                         </a:rPr>
-                        <a:t>LULU_DCF_Valuation_Model.xlsx → Scenarios, col G pitch bridge CFO</a:t>
-                      </a:r>
-                    </a:p>
-                  </a:txBody>
-                  <a:tcPr anchor="ctr" marT="12700" marB="12700">
-                    <a:solidFill>
-                      <a:srgbClr val="FFFFFF"/>
-                    </a:solidFill>
-                  </a:tcPr>
-                </a:tc>
-                <a:tc>
-                  <a:txBody>
-                    <a:bodyPr/>
-                    <a:lstStyle/>
-                    <a:p>
-                      <a:pPr algn="r"/>
-                      <a:r>
-                        <a:rPr sz="700" b="0" i="0">
-                          <a:solidFill>
-                            <a:srgbClr val="262626"/>
-                          </a:solidFill>
-                          <a:latin typeface="Garamond"/>
-                          <a:cs typeface="Garamond"/>
-                        </a:rPr>
-                        <a:t>LULU_DCF_Valuation_Model.xlsx → Scenarios, col H pitch bridge CFO</a:t>
+                        <a:t>LULU_DCF_Valuation_Model.xlsx → Scenarios, col G (base) pitch bridge CFO</a:t>
                       </a:r>
                     </a:p>
                   </a:txBody>
@@ -18405,7 +15603,7 @@
                     <a:p>
                       <a:pPr algn="l"/>
                       <a:r>
-                        <a:rPr sz="700" b="0" i="0">
+                        <a:rPr sz="750" b="0" i="0">
                           <a:solidFill>
                             <a:srgbClr val="262626"/>
                           </a:solidFill>
@@ -18429,7 +15627,7 @@
                     <a:p>
                       <a:pPr algn="r"/>
                       <a:r>
-                        <a:rPr sz="700" b="0" i="0">
+                        <a:rPr sz="750" b="0" i="0">
                           <a:solidFill>
                             <a:srgbClr val="262626"/>
                           </a:solidFill>
@@ -18453,38 +15651,14 @@
                     <a:p>
                       <a:pPr algn="r"/>
                       <a:r>
-                        <a:rPr sz="700" b="0" i="0">
+                        <a:rPr sz="750" b="0" i="0">
                           <a:solidFill>
                             <a:srgbClr val="262626"/>
                           </a:solidFill>
                           <a:latin typeface="Garamond"/>
                           <a:cs typeface="Garamond"/>
                         </a:rPr>
-                        <a:t>LULU_DCF_Valuation_Model.xlsx → Scenarios, col G D&amp;A rows</a:t>
-                      </a:r>
-                    </a:p>
-                  </a:txBody>
-                  <a:tcPr anchor="ctr" marT="12700" marB="12700">
-                    <a:solidFill>
-                      <a:srgbClr val="F0F1F3"/>
-                    </a:solidFill>
-                  </a:tcPr>
-                </a:tc>
-                <a:tc>
-                  <a:txBody>
-                    <a:bodyPr/>
-                    <a:lstStyle/>
-                    <a:p>
-                      <a:pPr algn="r"/>
-                      <a:r>
-                        <a:rPr sz="700" b="0" i="0">
-                          <a:solidFill>
-                            <a:srgbClr val="262626"/>
-                          </a:solidFill>
-                          <a:latin typeface="Garamond"/>
-                          <a:cs typeface="Garamond"/>
-                        </a:rPr>
-                        <a:t>LULU_DCF_Valuation_Model.xlsx → Scenarios, col H D&amp;A rows</a:t>
+                        <a:t>LULU_DCF_Valuation_Model.xlsx → Scenarios, col G (base) D&amp;A rows</a:t>
                       </a:r>
                     </a:p>
                   </a:txBody>
@@ -18503,7 +15677,7 @@
                     <a:p>
                       <a:pPr algn="l"/>
                       <a:r>
-                        <a:rPr sz="700" b="0" i="0">
+                        <a:rPr sz="750" b="0" i="0">
                           <a:solidFill>
                             <a:srgbClr val="262626"/>
                           </a:solidFill>
@@ -18527,7 +15701,7 @@
                     <a:p>
                       <a:pPr algn="r"/>
                       <a:r>
-                        <a:rPr sz="700" b="0" i="0">
+                        <a:rPr sz="750" b="0" i="0">
                           <a:solidFill>
                             <a:srgbClr val="262626"/>
                           </a:solidFill>
@@ -18551,38 +15725,14 @@
                     <a:p>
                       <a:pPr algn="r"/>
                       <a:r>
-                        <a:rPr sz="700" b="0" i="0">
+                        <a:rPr sz="750" b="0" i="0">
                           <a:solidFill>
                             <a:srgbClr val="262626"/>
                           </a:solidFill>
                           <a:latin typeface="Garamond"/>
                           <a:cs typeface="Garamond"/>
                         </a:rPr>
-                        <a:t>LULU_DCF_Valuation_Model.xlsx → Scenarios, col G capex rows</a:t>
-                      </a:r>
-                    </a:p>
-                  </a:txBody>
-                  <a:tcPr anchor="ctr" marT="12700" marB="12700">
-                    <a:solidFill>
-                      <a:srgbClr val="FFFFFF"/>
-                    </a:solidFill>
-                  </a:tcPr>
-                </a:tc>
-                <a:tc>
-                  <a:txBody>
-                    <a:bodyPr/>
-                    <a:lstStyle/>
-                    <a:p>
-                      <a:pPr algn="r"/>
-                      <a:r>
-                        <a:rPr sz="700" b="0" i="0">
-                          <a:solidFill>
-                            <a:srgbClr val="262626"/>
-                          </a:solidFill>
-                          <a:latin typeface="Garamond"/>
-                          <a:cs typeface="Garamond"/>
-                        </a:rPr>
-                        <a:t>LULU_DCF_Valuation_Model.xlsx → Scenarios, col H capex rows</a:t>
+                        <a:t>LULU_DCF_Valuation_Model.xlsx → Scenarios, col G (base) capex rows</a:t>
                       </a:r>
                     </a:p>
                   </a:txBody>
@@ -18601,7 +15751,7 @@
                     <a:p>
                       <a:pPr algn="l"/>
                       <a:r>
-                        <a:rPr sz="700" b="0" i="0">
+                        <a:rPr sz="750" b="0" i="0">
                           <a:solidFill>
                             <a:srgbClr val="262626"/>
                           </a:solidFill>
@@ -18625,7 +15775,7 @@
                     <a:p>
                       <a:pPr algn="r"/>
                       <a:r>
-                        <a:rPr sz="700" b="0" i="0">
+                        <a:rPr sz="750" b="0" i="0">
                           <a:solidFill>
                             <a:srgbClr val="262626"/>
                           </a:solidFill>
@@ -18649,38 +15799,14 @@
                     <a:p>
                       <a:pPr algn="r"/>
                       <a:r>
-                        <a:rPr sz="700" b="0" i="0">
+                        <a:rPr sz="750" b="0" i="0">
                           <a:solidFill>
                             <a:srgbClr val="262626"/>
                           </a:solidFill>
                           <a:latin typeface="Garamond"/>
                           <a:cs typeface="Garamond"/>
                         </a:rPr>
-                        <a:t>LULU_DCF_Valuation_Model.xlsx → Scenarios, col G pitch bridge FCF (CFS)</a:t>
-                      </a:r>
-                    </a:p>
-                  </a:txBody>
-                  <a:tcPr anchor="ctr" marT="12700" marB="12700">
-                    <a:solidFill>
-                      <a:srgbClr val="F0F1F3"/>
-                    </a:solidFill>
-                  </a:tcPr>
-                </a:tc>
-                <a:tc>
-                  <a:txBody>
-                    <a:bodyPr/>
-                    <a:lstStyle/>
-                    <a:p>
-                      <a:pPr algn="r"/>
-                      <a:r>
-                        <a:rPr sz="700" b="0" i="0">
-                          <a:solidFill>
-                            <a:srgbClr val="262626"/>
-                          </a:solidFill>
-                          <a:latin typeface="Garamond"/>
-                          <a:cs typeface="Garamond"/>
-                        </a:rPr>
-                        <a:t>LULU_DCF_Valuation_Model.xlsx → Scenarios, col H pitch bridge FCF (CFS)</a:t>
+                        <a:t>LULU_DCF_Valuation_Model.xlsx → Scenarios, col G (base) pitch bridge FCF (CFS)</a:t>
                       </a:r>
                     </a:p>
                   </a:txBody>
@@ -18699,7 +15825,7 @@
                     <a:p>
                       <a:pPr algn="l"/>
                       <a:r>
-                        <a:rPr sz="700" b="0" i="0">
+                        <a:rPr sz="750" b="0" i="0">
                           <a:solidFill>
                             <a:srgbClr val="262626"/>
                           </a:solidFill>
@@ -18723,7 +15849,7 @@
                     <a:p>
                       <a:pPr algn="r"/>
                       <a:r>
-                        <a:rPr sz="700" b="0" i="0">
+                        <a:rPr sz="750" b="0" i="0">
                           <a:solidFill>
                             <a:srgbClr val="262626"/>
                           </a:solidFill>
@@ -18747,38 +15873,14 @@
                     <a:p>
                       <a:pPr algn="r"/>
                       <a:r>
-                        <a:rPr sz="700" b="0" i="0">
+                        <a:rPr sz="750" b="0" i="0">
                           <a:solidFill>
                             <a:srgbClr val="262626"/>
                           </a:solidFill>
                           <a:latin typeface="Garamond"/>
                           <a:cs typeface="Garamond"/>
                         </a:rPr>
-                        <a:t>LULU_DCF_Valuation_Model.xlsx → Scenarios, col G fixed buyback ($500M)</a:t>
-                      </a:r>
-                    </a:p>
-                  </a:txBody>
-                  <a:tcPr anchor="ctr" marT="12700" marB="12700">
-                    <a:solidFill>
-                      <a:srgbClr val="FFFFFF"/>
-                    </a:solidFill>
-                  </a:tcPr>
-                </a:tc>
-                <a:tc>
-                  <a:txBody>
-                    <a:bodyPr/>
-                    <a:lstStyle/>
-                    <a:p>
-                      <a:pPr algn="r"/>
-                      <a:r>
-                        <a:rPr sz="700" b="0" i="0">
-                          <a:solidFill>
-                            <a:srgbClr val="262626"/>
-                          </a:solidFill>
-                          <a:latin typeface="Garamond"/>
-                          <a:cs typeface="Garamond"/>
-                        </a:rPr>
-                        <a:t>LULU_DCF_Valuation_Model.xlsx → Scenarios, col H 75% FCF buyback</a:t>
+                        <a:t>LULU_DCF_Valuation_Model.xlsx → Scenarios, col G (base) fixed buyback ($500M)</a:t>
                       </a:r>
                     </a:p>
                   </a:txBody>
@@ -18832,7 +15934,7 @@
                 <a:latin typeface="Garamond"/>
                 <a:cs typeface="Garamond"/>
               </a:rPr>
-              <a:t>Buybacks: col G = $500M/yr fixed; col H = 75% FCF (Scenarios assumptions).</a:t>
+              <a:t>Buybacks: col G = $500M/yr fixed (Scenarios assumptions).</a:t>
             </a:r>
           </a:p>
         </p:txBody>

--- a/LULU/LULU_Investment_Pitch_Deck.pptx
+++ b/LULU/LULU_Investment_Pitch_Deck.pptx
@@ -7509,7 +7509,7 @@
                 <a:latin typeface="Garamond"/>
                 <a:cs typeface="Garamond"/>
               </a:rPr>
-              <a:t>Hist = 10-K. Forecast (26–30) = DCF Scenarios pitch-bridge block, col G (base case only).</a:t>
+              <a:t>Hist = 10-K. Forecast (26–30) = DCF Scenarios pitch-bridge block, col G (base case only). Per-row model refs shown under line items.</a:t>
             </a:r>
           </a:p>
         </p:txBody>
@@ -7956,7 +7956,7 @@
         </p:nvGraphicFramePr>
         <p:xfrm>
           <a:off x="457200" y="3364992"/>
-          <a:ext cx="11292840" cy="2176272"/>
+          <a:ext cx="11292840" cy="2267712"/>
         </p:xfrm>
         <a:graphic>
           <a:graphicData uri="http://schemas.openxmlformats.org/drawingml/2006/table">
@@ -7976,7 +7976,7 @@
                 <a:gridCol w="1016000"/>
                 <a:gridCol w="1016000"/>
               </a:tblGrid>
-              <a:tr h="310896">
+              <a:tr h="323958">
                 <a:tc>
                   <a:txBody>
                     <a:bodyPr/>
@@ -8218,7 +8218,7 @@
                   </a:tcPr>
                 </a:tc>
               </a:tr>
-              <a:tr h="310896">
+              <a:tr h="323958">
                 <a:tc>
                   <a:txBody>
                     <a:bodyPr/>
@@ -8236,6 +8236,19 @@
                         <a:t>Net revenue</a:t>
                       </a:r>
                     </a:p>
+                    <a:p>
+                      <a:pPr algn="l"/>
+                      <a:r>
+                        <a:rPr sz="650" b="0" i="1">
+                          <a:solidFill>
+                            <a:srgbClr val="8C8C8C"/>
+                          </a:solidFill>
+                          <a:latin typeface="Garamond"/>
+                          <a:cs typeface="Garamond"/>
+                        </a:rPr>
+                        <a:t>Hist: 10-K IS — Net revenue · Fcst: Scenarios!G25:G29</a:t>
+                      </a:r>
+                    </a:p>
                   </a:txBody>
                   <a:tcPr anchor="ctr" marT="12700" marB="12700">
                     <a:solidFill>
@@ -8460,7 +8473,7 @@
                   </a:tcPr>
                 </a:tc>
               </a:tr>
-              <a:tr h="310896">
+              <a:tr h="323958">
                 <a:tc>
                   <a:txBody>
                     <a:bodyPr/>
@@ -8478,6 +8491,19 @@
                         <a:t>Gross profit</a:t>
                       </a:r>
                     </a:p>
+                    <a:p>
+                      <a:pPr algn="l"/>
+                      <a:r>
+                        <a:rPr sz="650" b="0" i="1">
+                          <a:solidFill>
+                            <a:srgbClr val="8C8C8C"/>
+                          </a:solidFill>
+                          <a:latin typeface="Garamond"/>
+                          <a:cs typeface="Garamond"/>
+                        </a:rPr>
+                        <a:t>Hist: 10-K IS — Gross profit · Fcst: Scenarios!G25:G29 × Scenarios!G30:G34</a:t>
+                      </a:r>
+                    </a:p>
                   </a:txBody>
                   <a:tcPr anchor="ctr" marT="12700" marB="12700">
                     <a:solidFill>
@@ -8702,7 +8728,7 @@
                   </a:tcPr>
                 </a:tc>
               </a:tr>
-              <a:tr h="310896">
+              <a:tr h="323958">
                 <a:tc>
                   <a:txBody>
                     <a:bodyPr/>
@@ -8720,6 +8746,19 @@
                         <a:t>Operating income</a:t>
                       </a:r>
                     </a:p>
+                    <a:p>
+                      <a:pPr algn="l"/>
+                      <a:r>
+                        <a:rPr sz="650" b="0" i="1">
+                          <a:solidFill>
+                            <a:srgbClr val="8C8C8C"/>
+                          </a:solidFill>
+                          <a:latin typeface="Garamond"/>
+                          <a:cs typeface="Garamond"/>
+                        </a:rPr>
+                        <a:t>Hist: 10-K IS — Operating income · Fcst: Scenarios!G45:G49</a:t>
+                      </a:r>
+                    </a:p>
                   </a:txBody>
                   <a:tcPr anchor="ctr" marT="12700" marB="12700">
                     <a:solidFill>
@@ -8944,7 +8983,7 @@
                   </a:tcPr>
                 </a:tc>
               </a:tr>
-              <a:tr h="310896">
+              <a:tr h="323958">
                 <a:tc>
                   <a:txBody>
                     <a:bodyPr/>
@@ -8962,6 +9001,19 @@
                         <a:t>Operating margin %</a:t>
                       </a:r>
                     </a:p>
+                    <a:p>
+                      <a:pPr algn="l"/>
+                      <a:r>
+                        <a:rPr sz="650" b="0" i="1">
+                          <a:solidFill>
+                            <a:srgbClr val="8C8C8C"/>
+                          </a:solidFill>
+                          <a:latin typeface="Garamond"/>
+                          <a:cs typeface="Garamond"/>
+                        </a:rPr>
+                        <a:t>Hist: 10-K IS — OI ÷ revenue · Fcst: Scenarios!G45:G49 ÷ Scenarios!G25:G29</a:t>
+                      </a:r>
+                    </a:p>
                   </a:txBody>
                   <a:tcPr anchor="ctr" marT="12700" marB="12700">
                     <a:solidFill>
@@ -9186,7 +9238,7 @@
                   </a:tcPr>
                 </a:tc>
               </a:tr>
-              <a:tr h="310896">
+              <a:tr h="323958">
                 <a:tc>
                   <a:txBody>
                     <a:bodyPr/>
@@ -9204,6 +9256,19 @@
                         <a:t>Net income</a:t>
                       </a:r>
                     </a:p>
+                    <a:p>
+                      <a:pPr algn="l"/>
+                      <a:r>
+                        <a:rPr sz="650" b="0" i="1">
+                          <a:solidFill>
+                            <a:srgbClr val="8C8C8C"/>
+                          </a:solidFill>
+                          <a:latin typeface="Garamond"/>
+                          <a:cs typeface="Garamond"/>
+                        </a:rPr>
+                        <a:t>Hist: 10-K IS — Net income · Fcst: Scenarios!G143:G147</a:t>
+                      </a:r>
+                    </a:p>
                   </a:txBody>
                   <a:tcPr anchor="ctr" marT="12700" marB="12700">
                     <a:solidFill>
@@ -9428,7 +9493,7 @@
                   </a:tcPr>
                 </a:tc>
               </a:tr>
-              <a:tr h="310896">
+              <a:tr h="323964">
                 <a:tc>
                   <a:txBody>
                     <a:bodyPr/>
@@ -9444,6 +9509,19 @@
                           <a:cs typeface="Garamond"/>
                         </a:rPr>
                         <a:t>Diluted EPS ($)</a:t>
+                      </a:r>
+                    </a:p>
+                    <a:p>
+                      <a:pPr algn="l"/>
+                      <a:r>
+                        <a:rPr sz="650" b="0" i="1">
+                          <a:solidFill>
+                            <a:srgbClr val="8C8C8C"/>
+                          </a:solidFill>
+                          <a:latin typeface="Garamond"/>
+                          <a:cs typeface="Garamond"/>
+                        </a:rPr>
+                        <a:t>Hist: 10-K IS — Diluted EPS · Fcst: Scenarios!G183:G187</a:t>
                       </a:r>
                     </a:p>
                   </a:txBody>
@@ -9683,8 +9761,8 @@
           <p:nvPr/>
         </p:nvGraphicFramePr>
         <p:xfrm>
-          <a:off x="457200" y="5623560"/>
-          <a:ext cx="11292840" cy="1024128"/>
+          <a:off x="457200" y="5687568"/>
+          <a:ext cx="11292840" cy="960120"/>
         </p:xfrm>
         <a:graphic>
           <a:graphicData uri="http://schemas.openxmlformats.org/drawingml/2006/table">
@@ -9693,11 +9771,11 @@
                 <a:tableStyleId>{5C22544A-7EE6-4342-B048-85BDC9FD1C3A}</a:tableStyleId>
               </a:tblPr>
               <a:tblGrid>
-                <a:gridCol w="1828800"/>
-                <a:gridCol w="4732020"/>
-                <a:gridCol w="4732020"/>
+                <a:gridCol w="1691640"/>
+                <a:gridCol w="4800600"/>
+                <a:gridCol w="4800600"/>
               </a:tblGrid>
-              <a:tr h="146304">
+              <a:tr h="137160">
                 <a:tc>
                   <a:txBody>
                     <a:bodyPr/>
@@ -9705,7 +9783,7 @@
                     <a:p>
                       <a:pPr algn="l"/>
                       <a:r>
-                        <a:rPr sz="800" b="1" i="0">
+                        <a:rPr sz="750" b="1" i="0">
                           <a:solidFill>
                             <a:srgbClr val="FFFFFF"/>
                           </a:solidFill>
@@ -9729,14 +9807,14 @@
                     <a:p>
                       <a:pPr algn="r"/>
                       <a:r>
-                        <a:rPr sz="800" b="1" i="0">
+                        <a:rPr sz="750" b="1" i="0">
                           <a:solidFill>
                             <a:srgbClr val="FFFFFF"/>
                           </a:solidFill>
                           <a:latin typeface="Garamond"/>
                           <a:cs typeface="Garamond"/>
                         </a:rPr>
-                        <a:t>Hist (22–25)</a:t>
+                        <a:t>Hist source (22–25)</a:t>
                       </a:r>
                     </a:p>
                   </a:txBody>
@@ -9753,14 +9831,14 @@
                     <a:p>
                       <a:pPr algn="r"/>
                       <a:r>
-                        <a:rPr sz="800" b="1" i="0">
+                        <a:rPr sz="750" b="1" i="0">
                           <a:solidFill>
                             <a:srgbClr val="FFFFFF"/>
                           </a:solidFill>
                           <a:latin typeface="Garamond"/>
                           <a:cs typeface="Garamond"/>
                         </a:rPr>
-                        <a:t>Base forecast (26–30, col G)</a:t>
+                        <a:t>Fcst source — Scenarios col G</a:t>
                       </a:r>
                     </a:p>
                   </a:txBody>
@@ -9771,7 +9849,7 @@
                   </a:tcPr>
                 </a:tc>
               </a:tr>
-              <a:tr h="146304">
+              <a:tr h="137160">
                 <a:tc>
                   <a:txBody>
                     <a:bodyPr/>
@@ -9779,7 +9857,7 @@
                     <a:p>
                       <a:pPr algn="l"/>
                       <a:r>
-                        <a:rPr sz="750" b="0" i="0">
+                        <a:rPr sz="700" b="0" i="0">
                           <a:solidFill>
                             <a:srgbClr val="262626"/>
                           </a:solidFill>
@@ -9803,14 +9881,14 @@
                     <a:p>
                       <a:pPr algn="r"/>
                       <a:r>
-                        <a:rPr sz="750" b="0" i="0">
+                        <a:rPr sz="700" b="0" i="0">
                           <a:solidFill>
                             <a:srgbClr val="262626"/>
                           </a:solidFill>
                           <a:latin typeface="Garamond"/>
                           <a:cs typeface="Garamond"/>
                         </a:rPr>
-                        <a:t>SEC Form 10-K (FY2022–FY2025)</a:t>
+                        <a:t>10-K IS — Net revenue</a:t>
                       </a:r>
                     </a:p>
                   </a:txBody>
@@ -9827,14 +9905,14 @@
                     <a:p>
                       <a:pPr algn="r"/>
                       <a:r>
-                        <a:rPr sz="750" b="0" i="0">
+                        <a:rPr sz="700" b="0" i="0">
                           <a:solidFill>
                             <a:srgbClr val="262626"/>
                           </a:solidFill>
                           <a:latin typeface="Garamond"/>
                           <a:cs typeface="Garamond"/>
                         </a:rPr>
-                        <a:t>LULU_DCF_Valuation_Model.xlsx → Scenarios, col G (base) revenue</a:t>
+                        <a:t>Scenarios!G25:G29 (Revenue yr 1–5)</a:t>
                       </a:r>
                     </a:p>
                   </a:txBody>
@@ -9845,7 +9923,7 @@
                   </a:tcPr>
                 </a:tc>
               </a:tr>
-              <a:tr h="146304">
+              <a:tr h="137160">
                 <a:tc>
                   <a:txBody>
                     <a:bodyPr/>
@@ -9853,7 +9931,7 @@
                     <a:p>
                       <a:pPr algn="l"/>
                       <a:r>
-                        <a:rPr sz="750" b="0" i="0">
+                        <a:rPr sz="700" b="0" i="0">
                           <a:solidFill>
                             <a:srgbClr val="262626"/>
                           </a:solidFill>
@@ -9877,14 +9955,14 @@
                     <a:p>
                       <a:pPr algn="r"/>
                       <a:r>
-                        <a:rPr sz="750" b="0" i="0">
+                        <a:rPr sz="700" b="0" i="0">
                           <a:solidFill>
                             <a:srgbClr val="262626"/>
                           </a:solidFill>
                           <a:latin typeface="Garamond"/>
                           <a:cs typeface="Garamond"/>
                         </a:rPr>
-                        <a:t>SEC Form 10-K (FY2022–FY2025)</a:t>
+                        <a:t>10-K IS — Gross profit</a:t>
                       </a:r>
                     </a:p>
                   </a:txBody>
@@ -9901,14 +9979,14 @@
                     <a:p>
                       <a:pPr algn="r"/>
                       <a:r>
-                        <a:rPr sz="750" b="0" i="0">
+                        <a:rPr sz="700" b="0" i="0">
                           <a:solidFill>
                             <a:srgbClr val="262626"/>
                           </a:solidFill>
                           <a:latin typeface="Garamond"/>
                           <a:cs typeface="Garamond"/>
                         </a:rPr>
-                        <a:t>LULU_DCF_Valuation_Model.xlsx → Scenarios, col G (base) GM% × revenue</a:t>
+                        <a:t>Scenarios!G25:G29 × Scenarios!G30:G34 (rev × GM%)</a:t>
                       </a:r>
                     </a:p>
                   </a:txBody>
@@ -9919,7 +9997,7 @@
                   </a:tcPr>
                 </a:tc>
               </a:tr>
-              <a:tr h="146304">
+              <a:tr h="137160">
                 <a:tc>
                   <a:txBody>
                     <a:bodyPr/>
@@ -9927,7 +10005,7 @@
                     <a:p>
                       <a:pPr algn="l"/>
                       <a:r>
-                        <a:rPr sz="750" b="0" i="0">
+                        <a:rPr sz="700" b="0" i="0">
                           <a:solidFill>
                             <a:srgbClr val="262626"/>
                           </a:solidFill>
@@ -9951,14 +10029,14 @@
                     <a:p>
                       <a:pPr algn="r"/>
                       <a:r>
-                        <a:rPr sz="750" b="0" i="0">
+                        <a:rPr sz="700" b="0" i="0">
                           <a:solidFill>
                             <a:srgbClr val="262626"/>
                           </a:solidFill>
                           <a:latin typeface="Garamond"/>
                           <a:cs typeface="Garamond"/>
                         </a:rPr>
-                        <a:t>SEC Form 10-K (FY2022–FY2025)</a:t>
+                        <a:t>10-K IS — Operating income</a:t>
                       </a:r>
                     </a:p>
                   </a:txBody>
@@ -9975,14 +10053,14 @@
                     <a:p>
                       <a:pPr algn="r"/>
                       <a:r>
-                        <a:rPr sz="750" b="0" i="0">
+                        <a:rPr sz="700" b="0" i="0">
                           <a:solidFill>
                             <a:srgbClr val="262626"/>
                           </a:solidFill>
                           <a:latin typeface="Garamond"/>
                           <a:cs typeface="Garamond"/>
                         </a:rPr>
-                        <a:t>LULU_DCF_Valuation_Model.xlsx → Scenarios, col G (base) EBIT</a:t>
+                        <a:t>Scenarios!G45:G49 (EBIT yr 1–5)</a:t>
                       </a:r>
                     </a:p>
                   </a:txBody>
@@ -9993,7 +10071,7 @@
                   </a:tcPr>
                 </a:tc>
               </a:tr>
-              <a:tr h="146304">
+              <a:tr h="137160">
                 <a:tc>
                   <a:txBody>
                     <a:bodyPr/>
@@ -10001,7 +10079,7 @@
                     <a:p>
                       <a:pPr algn="l"/>
                       <a:r>
-                        <a:rPr sz="750" b="0" i="0">
+                        <a:rPr sz="700" b="0" i="0">
                           <a:solidFill>
                             <a:srgbClr val="262626"/>
                           </a:solidFill>
@@ -10025,14 +10103,14 @@
                     <a:p>
                       <a:pPr algn="r"/>
                       <a:r>
-                        <a:rPr sz="750" b="0" i="0">
+                        <a:rPr sz="700" b="0" i="0">
                           <a:solidFill>
                             <a:srgbClr val="262626"/>
                           </a:solidFill>
                           <a:latin typeface="Garamond"/>
                           <a:cs typeface="Garamond"/>
                         </a:rPr>
-                        <a:t>SEC Form 10-K (FY2022–FY2025) (OI/rev)</a:t>
+                        <a:t>10-K IS — OI ÷ revenue</a:t>
                       </a:r>
                     </a:p>
                   </a:txBody>
@@ -10049,14 +10127,14 @@
                     <a:p>
                       <a:pPr algn="r"/>
                       <a:r>
-                        <a:rPr sz="750" b="0" i="0">
+                        <a:rPr sz="700" b="0" i="0">
                           <a:solidFill>
                             <a:srgbClr val="262626"/>
                           </a:solidFill>
                           <a:latin typeface="Garamond"/>
                           <a:cs typeface="Garamond"/>
                         </a:rPr>
-                        <a:t>LULU_DCF_Valuation_Model.xlsx → Scenarios, col G (base) EBIT/rev</a:t>
+                        <a:t>Scenarios!G45:G49 ÷ Scenarios!G25:G29</a:t>
                       </a:r>
                     </a:p>
                   </a:txBody>
@@ -10067,7 +10145,7 @@
                   </a:tcPr>
                 </a:tc>
               </a:tr>
-              <a:tr h="146304">
+              <a:tr h="137160">
                 <a:tc>
                   <a:txBody>
                     <a:bodyPr/>
@@ -10075,7 +10153,7 @@
                     <a:p>
                       <a:pPr algn="l"/>
                       <a:r>
-                        <a:rPr sz="750" b="0" i="0">
+                        <a:rPr sz="700" b="0" i="0">
                           <a:solidFill>
                             <a:srgbClr val="262626"/>
                           </a:solidFill>
@@ -10099,14 +10177,14 @@
                     <a:p>
                       <a:pPr algn="r"/>
                       <a:r>
-                        <a:rPr sz="750" b="0" i="0">
+                        <a:rPr sz="700" b="0" i="0">
                           <a:solidFill>
                             <a:srgbClr val="262626"/>
                           </a:solidFill>
                           <a:latin typeface="Garamond"/>
                           <a:cs typeface="Garamond"/>
                         </a:rPr>
-                        <a:t>SEC Form 10-K (FY2022–FY2025)</a:t>
+                        <a:t>10-K IS — Net income</a:t>
                       </a:r>
                     </a:p>
                   </a:txBody>
@@ -10123,14 +10201,14 @@
                     <a:p>
                       <a:pPr algn="r"/>
                       <a:r>
-                        <a:rPr sz="750" b="0" i="0">
+                        <a:rPr sz="700" b="0" i="0">
                           <a:solidFill>
                             <a:srgbClr val="262626"/>
                           </a:solidFill>
                           <a:latin typeface="Garamond"/>
                           <a:cs typeface="Garamond"/>
                         </a:rPr>
-                        <a:t>LULU_DCF_Valuation_Model.xlsx → Scenarios, col G (base) pitch bridge NI</a:t>
+                        <a:t>Scenarios!G143:G147 (pitch bridge NI)</a:t>
                       </a:r>
                     </a:p>
                   </a:txBody>
@@ -10141,7 +10219,7 @@
                   </a:tcPr>
                 </a:tc>
               </a:tr>
-              <a:tr h="146304">
+              <a:tr h="137160">
                 <a:tc>
                   <a:txBody>
                     <a:bodyPr/>
@@ -10149,7 +10227,7 @@
                     <a:p>
                       <a:pPr algn="l"/>
                       <a:r>
-                        <a:rPr sz="750" b="0" i="0">
+                        <a:rPr sz="700" b="0" i="0">
                           <a:solidFill>
                             <a:srgbClr val="262626"/>
                           </a:solidFill>
@@ -10173,14 +10251,14 @@
                     <a:p>
                       <a:pPr algn="r"/>
                       <a:r>
-                        <a:rPr sz="750" b="0" i="0">
+                        <a:rPr sz="700" b="0" i="0">
                           <a:solidFill>
                             <a:srgbClr val="262626"/>
                           </a:solidFill>
                           <a:latin typeface="Garamond"/>
                           <a:cs typeface="Garamond"/>
                         </a:rPr>
-                        <a:t>SEC Form 10-K (FY2022–FY2025)</a:t>
+                        <a:t>10-K IS — Diluted EPS</a:t>
                       </a:r>
                     </a:p>
                   </a:txBody>
@@ -10197,14 +10275,14 @@
                     <a:p>
                       <a:pPr algn="r"/>
                       <a:r>
-                        <a:rPr sz="750" b="0" i="0">
+                        <a:rPr sz="700" b="0" i="0">
                           <a:solidFill>
                             <a:srgbClr val="262626"/>
                           </a:solidFill>
                           <a:latin typeface="Garamond"/>
                           <a:cs typeface="Garamond"/>
                         </a:rPr>
-                        <a:t>LULU_DCF_Valuation_Model.xlsx → Scenarios, col G (base) pitch bridge EPS</a:t>
+                        <a:t>Scenarios!G183:G187 (pitch bridge EPS)</a:t>
                       </a:r>
                     </a:p>
                   </a:txBody>
@@ -10527,7 +10605,7 @@
                 <a:latin typeface="Garamond"/>
                 <a:cs typeface="Garamond"/>
               </a:rPr>
-              <a:t>Hist = 10-K. Forecast (26–30) = DCF Scenarios pitch-bridge block, col G (base case only).</a:t>
+              <a:t>Hist = 10-K. Forecast (26–30) = DCF Scenarios pitch-bridge block, col G (base case only). Per-row model refs shown under line items.</a:t>
             </a:r>
           </a:p>
         </p:txBody>
@@ -10974,7 +11052,7 @@
         </p:nvGraphicFramePr>
         <p:xfrm>
           <a:off x="457200" y="3364992"/>
-          <a:ext cx="11292840" cy="2176272"/>
+          <a:ext cx="11292840" cy="2267712"/>
         </p:xfrm>
         <a:graphic>
           <a:graphicData uri="http://schemas.openxmlformats.org/drawingml/2006/table">
@@ -10994,7 +11072,7 @@
                 <a:gridCol w="1016000"/>
                 <a:gridCol w="1016000"/>
               </a:tblGrid>
-              <a:tr h="310896">
+              <a:tr h="323958">
                 <a:tc>
                   <a:txBody>
                     <a:bodyPr/>
@@ -11236,7 +11314,7 @@
                   </a:tcPr>
                 </a:tc>
               </a:tr>
-              <a:tr h="310896">
+              <a:tr h="323958">
                 <a:tc>
                   <a:txBody>
                     <a:bodyPr/>
@@ -11254,6 +11332,19 @@
                         <a:t>Cash &amp; equivalents</a:t>
                       </a:r>
                     </a:p>
+                    <a:p>
+                      <a:pPr algn="l"/>
+                      <a:r>
+                        <a:rPr sz="650" b="0" i="1">
+                          <a:solidFill>
+                            <a:srgbClr val="8C8C8C"/>
+                          </a:solidFill>
+                          <a:latin typeface="Garamond"/>
+                          <a:cs typeface="Garamond"/>
+                        </a:rPr>
+                        <a:t>Hist: 10-K BS — Cash · Fcst: Scenarios!G163:G167</a:t>
+                      </a:r>
+                    </a:p>
                   </a:txBody>
                   <a:tcPr anchor="ctr" marT="12700" marB="12700">
                     <a:solidFill>
@@ -11478,7 +11569,7 @@
                   </a:tcPr>
                 </a:tc>
               </a:tr>
-              <a:tr h="310896">
+              <a:tr h="323958">
                 <a:tc>
                   <a:txBody>
                     <a:bodyPr/>
@@ -11496,6 +11587,19 @@
                         <a:t>Inventories</a:t>
                       </a:r>
                     </a:p>
+                    <a:p>
+                      <a:pPr algn="l"/>
+                      <a:r>
+                        <a:rPr sz="650" b="0" i="1">
+                          <a:solidFill>
+                            <a:srgbClr val="8C8C8C"/>
+                          </a:solidFill>
+                          <a:latin typeface="Garamond"/>
+                          <a:cs typeface="Garamond"/>
+                        </a:rPr>
+                        <a:t>Hist: 10-K BS — Inventories · Fcst: Scenarios!G80:G84</a:t>
+                      </a:r>
+                    </a:p>
                   </a:txBody>
                   <a:tcPr anchor="ctr" marT="12700" marB="12700">
                     <a:solidFill>
@@ -11720,7 +11824,7 @@
                   </a:tcPr>
                 </a:tc>
               </a:tr>
-              <a:tr h="310896">
+              <a:tr h="323958">
                 <a:tc>
                   <a:txBody>
                     <a:bodyPr/>
@@ -11738,6 +11842,19 @@
                         <a:t>Total assets</a:t>
                       </a:r>
                     </a:p>
+                    <a:p>
+                      <a:pPr algn="l"/>
+                      <a:r>
+                        <a:rPr sz="650" b="0" i="1">
+                          <a:solidFill>
+                            <a:srgbClr val="8C8C8C"/>
+                          </a:solidFill>
+                          <a:latin typeface="Garamond"/>
+                          <a:cs typeface="Garamond"/>
+                        </a:rPr>
+                        <a:t>Hist: 10-K BS — Total assets · Fcst: Scenarios!G168:G172</a:t>
+                      </a:r>
+                    </a:p>
                   </a:txBody>
                   <a:tcPr anchor="ctr" marT="12700" marB="12700">
                     <a:solidFill>
@@ -11962,7 +12079,7 @@
                   </a:tcPr>
                 </a:tc>
               </a:tr>
-              <a:tr h="310896">
+              <a:tr h="323958">
                 <a:tc>
                   <a:txBody>
                     <a:bodyPr/>
@@ -11980,6 +12097,19 @@
                         <a:t>Total liabilities</a:t>
                       </a:r>
                     </a:p>
+                    <a:p>
+                      <a:pPr algn="l"/>
+                      <a:r>
+                        <a:rPr sz="650" b="0" i="1">
+                          <a:solidFill>
+                            <a:srgbClr val="8C8C8C"/>
+                          </a:solidFill>
+                          <a:latin typeface="Garamond"/>
+                          <a:cs typeface="Garamond"/>
+                        </a:rPr>
+                        <a:t>Hist: 10-K BS — Total liabilities · Fcst: Scenarios!G173:G177</a:t>
+                      </a:r>
+                    </a:p>
                   </a:txBody>
                   <a:tcPr anchor="ctr" marT="12700" marB="12700">
                     <a:solidFill>
@@ -12204,7 +12334,7 @@
                   </a:tcPr>
                 </a:tc>
               </a:tr>
-              <a:tr h="310896">
+              <a:tr h="323958">
                 <a:tc>
                   <a:txBody>
                     <a:bodyPr/>
@@ -12222,6 +12352,19 @@
                         <a:t>Total equity</a:t>
                       </a:r>
                     </a:p>
+                    <a:p>
+                      <a:pPr algn="l"/>
+                      <a:r>
+                        <a:rPr sz="650" b="0" i="1">
+                          <a:solidFill>
+                            <a:srgbClr val="8C8C8C"/>
+                          </a:solidFill>
+                          <a:latin typeface="Garamond"/>
+                          <a:cs typeface="Garamond"/>
+                        </a:rPr>
+                        <a:t>Hist: 10-K BS — Total equity · Fcst: Scenarios!G178:G182</a:t>
+                      </a:r>
+                    </a:p>
                   </a:txBody>
                   <a:tcPr anchor="ctr" marT="12700" marB="12700">
                     <a:solidFill>
@@ -12446,7 +12589,7 @@
                   </a:tcPr>
                 </a:tc>
               </a:tr>
-              <a:tr h="310896">
+              <a:tr h="323964">
                 <a:tc>
                   <a:txBody>
                     <a:bodyPr/>
@@ -12462,6 +12605,19 @@
                           <a:cs typeface="Garamond"/>
                         </a:rPr>
                         <a:t>Funded debt</a:t>
+                      </a:r>
+                    </a:p>
+                    <a:p>
+                      <a:pPr algn="l"/>
+                      <a:r>
+                        <a:rPr sz="650" b="0" i="1">
+                          <a:solidFill>
+                            <a:srgbClr val="8C8C8C"/>
+                          </a:solidFill>
+                          <a:latin typeface="Garamond"/>
+                          <a:cs typeface="Garamond"/>
+                        </a:rPr>
+                        <a:t>Hist: 10-K BS — Debt ($0) · Fcst: Model — $0</a:t>
                       </a:r>
                     </a:p>
                   </a:txBody>
@@ -12701,8 +12857,8 @@
           <p:nvPr/>
         </p:nvGraphicFramePr>
         <p:xfrm>
-          <a:off x="457200" y="5623560"/>
-          <a:ext cx="11292840" cy="1024128"/>
+          <a:off x="457200" y="5687568"/>
+          <a:ext cx="11292840" cy="960120"/>
         </p:xfrm>
         <a:graphic>
           <a:graphicData uri="http://schemas.openxmlformats.org/drawingml/2006/table">
@@ -12711,11 +12867,11 @@
                 <a:tableStyleId>{5C22544A-7EE6-4342-B048-85BDC9FD1C3A}</a:tableStyleId>
               </a:tblPr>
               <a:tblGrid>
-                <a:gridCol w="1828800"/>
-                <a:gridCol w="4732020"/>
-                <a:gridCol w="4732020"/>
+                <a:gridCol w="1691640"/>
+                <a:gridCol w="4800600"/>
+                <a:gridCol w="4800600"/>
               </a:tblGrid>
-              <a:tr h="146304">
+              <a:tr h="137160">
                 <a:tc>
                   <a:txBody>
                     <a:bodyPr/>
@@ -12723,7 +12879,7 @@
                     <a:p>
                       <a:pPr algn="l"/>
                       <a:r>
-                        <a:rPr sz="800" b="1" i="0">
+                        <a:rPr sz="750" b="1" i="0">
                           <a:solidFill>
                             <a:srgbClr val="FFFFFF"/>
                           </a:solidFill>
@@ -12747,14 +12903,14 @@
                     <a:p>
                       <a:pPr algn="r"/>
                       <a:r>
-                        <a:rPr sz="800" b="1" i="0">
+                        <a:rPr sz="750" b="1" i="0">
                           <a:solidFill>
                             <a:srgbClr val="FFFFFF"/>
                           </a:solidFill>
                           <a:latin typeface="Garamond"/>
                           <a:cs typeface="Garamond"/>
                         </a:rPr>
-                        <a:t>Hist (22–25)</a:t>
+                        <a:t>Hist source (22–25)</a:t>
                       </a:r>
                     </a:p>
                   </a:txBody>
@@ -12771,14 +12927,14 @@
                     <a:p>
                       <a:pPr algn="r"/>
                       <a:r>
-                        <a:rPr sz="800" b="1" i="0">
+                        <a:rPr sz="750" b="1" i="0">
                           <a:solidFill>
                             <a:srgbClr val="FFFFFF"/>
                           </a:solidFill>
                           <a:latin typeface="Garamond"/>
                           <a:cs typeface="Garamond"/>
                         </a:rPr>
-                        <a:t>Base forecast (26–30, col G)</a:t>
+                        <a:t>Fcst source — Scenarios col G</a:t>
                       </a:r>
                     </a:p>
                   </a:txBody>
@@ -12789,7 +12945,7 @@
                   </a:tcPr>
                 </a:tc>
               </a:tr>
-              <a:tr h="146304">
+              <a:tr h="137160">
                 <a:tc>
                   <a:txBody>
                     <a:bodyPr/>
@@ -12797,7 +12953,7 @@
                     <a:p>
                       <a:pPr algn="l"/>
                       <a:r>
-                        <a:rPr sz="750" b="0" i="0">
+                        <a:rPr sz="700" b="0" i="0">
                           <a:solidFill>
                             <a:srgbClr val="262626"/>
                           </a:solidFill>
@@ -12821,14 +12977,14 @@
                     <a:p>
                       <a:pPr algn="r"/>
                       <a:r>
-                        <a:rPr sz="750" b="0" i="0">
+                        <a:rPr sz="700" b="0" i="0">
                           <a:solidFill>
                             <a:srgbClr val="262626"/>
                           </a:solidFill>
                           <a:latin typeface="Garamond"/>
                           <a:cs typeface="Garamond"/>
                         </a:rPr>
-                        <a:t>SEC Form 10-K (FY2022–FY2025)</a:t>
+                        <a:t>10-K BS — Cash &amp; equivalents</a:t>
                       </a:r>
                     </a:p>
                   </a:txBody>
@@ -12845,14 +13001,14 @@
                     <a:p>
                       <a:pPr algn="r"/>
                       <a:r>
-                        <a:rPr sz="750" b="0" i="0">
+                        <a:rPr sz="700" b="0" i="0">
                           <a:solidFill>
                             <a:srgbClr val="262626"/>
                           </a:solidFill>
                           <a:latin typeface="Garamond"/>
                           <a:cs typeface="Garamond"/>
                         </a:rPr>
-                        <a:t>LULU_DCF_Valuation_Model.xlsx → Scenarios, col G (base) pitch bridge cash</a:t>
+                        <a:t>Scenarios!G163:G167 (pitch bridge cash roll-forward)</a:t>
                       </a:r>
                     </a:p>
                   </a:txBody>
@@ -12863,7 +13019,7 @@
                   </a:tcPr>
                 </a:tc>
               </a:tr>
-              <a:tr h="146304">
+              <a:tr h="137160">
                 <a:tc>
                   <a:txBody>
                     <a:bodyPr/>
@@ -12871,7 +13027,7 @@
                     <a:p>
                       <a:pPr algn="l"/>
                       <a:r>
-                        <a:rPr sz="750" b="0" i="0">
+                        <a:rPr sz="700" b="0" i="0">
                           <a:solidFill>
                             <a:srgbClr val="262626"/>
                           </a:solidFill>
@@ -12895,14 +13051,14 @@
                     <a:p>
                       <a:pPr algn="r"/>
                       <a:r>
-                        <a:rPr sz="750" b="0" i="0">
+                        <a:rPr sz="700" b="0" i="0">
                           <a:solidFill>
                             <a:srgbClr val="262626"/>
                           </a:solidFill>
                           <a:latin typeface="Garamond"/>
                           <a:cs typeface="Garamond"/>
                         </a:rPr>
-                        <a:t>SEC Form 10-K (FY2022–FY2025)</a:t>
+                        <a:t>10-K BS — Inventories</a:t>
                       </a:r>
                     </a:p>
                   </a:txBody>
@@ -12919,14 +13075,14 @@
                     <a:p>
                       <a:pPr algn="r"/>
                       <a:r>
-                        <a:rPr sz="750" b="0" i="0">
+                        <a:rPr sz="700" b="0" i="0">
                           <a:solidFill>
                             <a:srgbClr val="262626"/>
                           </a:solidFill>
                           <a:latin typeface="Garamond"/>
                           <a:cs typeface="Garamond"/>
                         </a:rPr>
-                        <a:t>LULU_DCF_Valuation_Model.xlsx → Scenarios, col G (base) inventories (NWC)</a:t>
+                        <a:t>Scenarios!G80:G84 (NWC schedule)</a:t>
                       </a:r>
                     </a:p>
                   </a:txBody>
@@ -12937,7 +13093,7 @@
                   </a:tcPr>
                 </a:tc>
               </a:tr>
-              <a:tr h="146304">
+              <a:tr h="137160">
                 <a:tc>
                   <a:txBody>
                     <a:bodyPr/>
@@ -12945,7 +13101,7 @@
                     <a:p>
                       <a:pPr algn="l"/>
                       <a:r>
-                        <a:rPr sz="750" b="0" i="0">
+                        <a:rPr sz="700" b="0" i="0">
                           <a:solidFill>
                             <a:srgbClr val="262626"/>
                           </a:solidFill>
@@ -12969,14 +13125,14 @@
                     <a:p>
                       <a:pPr algn="r"/>
                       <a:r>
-                        <a:rPr sz="750" b="0" i="0">
+                        <a:rPr sz="700" b="0" i="0">
                           <a:solidFill>
                             <a:srgbClr val="262626"/>
                           </a:solidFill>
                           <a:latin typeface="Garamond"/>
                           <a:cs typeface="Garamond"/>
                         </a:rPr>
-                        <a:t>SEC Form 10-K (FY2022–FY2025)</a:t>
+                        <a:t>10-K BS — Total assets</a:t>
                       </a:r>
                     </a:p>
                   </a:txBody>
@@ -12993,14 +13149,14 @@
                     <a:p>
                       <a:pPr algn="r"/>
                       <a:r>
-                        <a:rPr sz="750" b="0" i="0">
+                        <a:rPr sz="700" b="0" i="0">
                           <a:solidFill>
                             <a:srgbClr val="262626"/>
                           </a:solidFill>
                           <a:latin typeface="Garamond"/>
                           <a:cs typeface="Garamond"/>
                         </a:rPr>
-                        <a:t>LULU_DCF_Valuation_Model.xlsx → Scenarios, col G (base) pitch bridge TA</a:t>
+                        <a:t>Scenarios!G168:G172 (FY25 TA × rev growth)</a:t>
                       </a:r>
                     </a:p>
                   </a:txBody>
@@ -13011,7 +13167,7 @@
                   </a:tcPr>
                 </a:tc>
               </a:tr>
-              <a:tr h="146304">
+              <a:tr h="137160">
                 <a:tc>
                   <a:txBody>
                     <a:bodyPr/>
@@ -13019,7 +13175,7 @@
                     <a:p>
                       <a:pPr algn="l"/>
                       <a:r>
-                        <a:rPr sz="750" b="0" i="0">
+                        <a:rPr sz="700" b="0" i="0">
                           <a:solidFill>
                             <a:srgbClr val="262626"/>
                           </a:solidFill>
@@ -13043,14 +13199,14 @@
                     <a:p>
                       <a:pPr algn="r"/>
                       <a:r>
-                        <a:rPr sz="750" b="0" i="0">
+                        <a:rPr sz="700" b="0" i="0">
                           <a:solidFill>
                             <a:srgbClr val="262626"/>
                           </a:solidFill>
                           <a:latin typeface="Garamond"/>
                           <a:cs typeface="Garamond"/>
                         </a:rPr>
-                        <a:t>SEC Form 10-K (FY2022–FY2025)</a:t>
+                        <a:t>10-K BS — Total liabilities</a:t>
                       </a:r>
                     </a:p>
                   </a:txBody>
@@ -13067,14 +13223,14 @@
                     <a:p>
                       <a:pPr algn="r"/>
                       <a:r>
-                        <a:rPr sz="750" b="0" i="0">
+                        <a:rPr sz="700" b="0" i="0">
                           <a:solidFill>
                             <a:srgbClr val="262626"/>
                           </a:solidFill>
                           <a:latin typeface="Garamond"/>
                           <a:cs typeface="Garamond"/>
                         </a:rPr>
-                        <a:t>LULU_DCF_Valuation_Model.xlsx → Scenarios, col G (base) pitch bridge TL</a:t>
+                        <a:t>Scenarios!G173:G177 (FY25 TL × rev growth)</a:t>
                       </a:r>
                     </a:p>
                   </a:txBody>
@@ -13085,7 +13241,7 @@
                   </a:tcPr>
                 </a:tc>
               </a:tr>
-              <a:tr h="146304">
+              <a:tr h="137160">
                 <a:tc>
                   <a:txBody>
                     <a:bodyPr/>
@@ -13093,7 +13249,7 @@
                     <a:p>
                       <a:pPr algn="l"/>
                       <a:r>
-                        <a:rPr sz="750" b="0" i="0">
+                        <a:rPr sz="700" b="0" i="0">
                           <a:solidFill>
                             <a:srgbClr val="262626"/>
                           </a:solidFill>
@@ -13117,14 +13273,14 @@
                     <a:p>
                       <a:pPr algn="r"/>
                       <a:r>
-                        <a:rPr sz="750" b="0" i="0">
+                        <a:rPr sz="700" b="0" i="0">
                           <a:solidFill>
                             <a:srgbClr val="262626"/>
                           </a:solidFill>
                           <a:latin typeface="Garamond"/>
                           <a:cs typeface="Garamond"/>
                         </a:rPr>
-                        <a:t>SEC Form 10-K (FY2022–FY2025)</a:t>
+                        <a:t>10-K BS — Total equity</a:t>
                       </a:r>
                     </a:p>
                   </a:txBody>
@@ -13141,14 +13297,14 @@
                     <a:p>
                       <a:pPr algn="r"/>
                       <a:r>
-                        <a:rPr sz="750" b="0" i="0">
+                        <a:rPr sz="700" b="0" i="0">
                           <a:solidFill>
                             <a:srgbClr val="262626"/>
                           </a:solidFill>
                           <a:latin typeface="Garamond"/>
                           <a:cs typeface="Garamond"/>
                         </a:rPr>
-                        <a:t>LULU_DCF_Valuation_Model.xlsx → Scenarios, col G (base) pitch bridge equity</a:t>
+                        <a:t>Scenarios!G178:G182 (FY25 TE × rev growth)</a:t>
                       </a:r>
                     </a:p>
                   </a:txBody>
@@ -13159,7 +13315,7 @@
                   </a:tcPr>
                 </a:tc>
               </a:tr>
-              <a:tr h="146304">
+              <a:tr h="137160">
                 <a:tc>
                   <a:txBody>
                     <a:bodyPr/>
@@ -13167,7 +13323,7 @@
                     <a:p>
                       <a:pPr algn="l"/>
                       <a:r>
-                        <a:rPr sz="750" b="0" i="0">
+                        <a:rPr sz="700" b="0" i="0">
                           <a:solidFill>
                             <a:srgbClr val="262626"/>
                           </a:solidFill>
@@ -13191,14 +13347,14 @@
                     <a:p>
                       <a:pPr algn="r"/>
                       <a:r>
-                        <a:rPr sz="750" b="0" i="0">
+                        <a:rPr sz="700" b="0" i="0">
                           <a:solidFill>
                             <a:srgbClr val="262626"/>
                           </a:solidFill>
                           <a:latin typeface="Garamond"/>
                           <a:cs typeface="Garamond"/>
                         </a:rPr>
-                        <a:t>SEC Form 10-K (FY2022–FY2025) ($0)</a:t>
+                        <a:t>10-K BS — Long-term debt ($0)</a:t>
                       </a:r>
                     </a:p>
                   </a:txBody>
@@ -13215,14 +13371,14 @@
                     <a:p>
                       <a:pPr algn="r"/>
                       <a:r>
-                        <a:rPr sz="750" b="0" i="0">
+                        <a:rPr sz="700" b="0" i="0">
                           <a:solidFill>
                             <a:srgbClr val="262626"/>
                           </a:solidFill>
                           <a:latin typeface="Garamond"/>
                           <a:cs typeface="Garamond"/>
                         </a:rPr>
-                        <a:t>$0</a:t>
+                        <a:t>Model assumption — $0 (no term debt)</a:t>
                       </a:r>
                     </a:p>
                   </a:txBody>
@@ -13545,7 +13701,7 @@
                 <a:latin typeface="Garamond"/>
                 <a:cs typeface="Garamond"/>
               </a:rPr>
-              <a:t>Hist = 10-K. Forecast (26–30) = DCF Scenarios pitch-bridge block, col G (base case only).</a:t>
+              <a:t>Hist = 10-K. Forecast (26–30) = DCF Scenarios pitch-bridge block, col G (base case only). Per-row model refs shown under line items.</a:t>
             </a:r>
           </a:p>
         </p:txBody>
@@ -13948,7 +14104,7 @@
         </p:nvGraphicFramePr>
         <p:xfrm>
           <a:off x="457200" y="3364992"/>
-          <a:ext cx="11292840" cy="2176272"/>
+          <a:ext cx="11292840" cy="2267712"/>
         </p:xfrm>
         <a:graphic>
           <a:graphicData uri="http://schemas.openxmlformats.org/drawingml/2006/table">
@@ -13968,7 +14124,7 @@
                 <a:gridCol w="1016000"/>
                 <a:gridCol w="1016000"/>
               </a:tblGrid>
-              <a:tr h="362712">
+              <a:tr h="377952">
                 <a:tc>
                   <a:txBody>
                     <a:bodyPr/>
@@ -14210,7 +14366,7 @@
                   </a:tcPr>
                 </a:tc>
               </a:tr>
-              <a:tr h="362712">
+              <a:tr h="377952">
                 <a:tc>
                   <a:txBody>
                     <a:bodyPr/>
@@ -14228,6 +14384,19 @@
                         <a:t>Cash from operations</a:t>
                       </a:r>
                     </a:p>
+                    <a:p>
+                      <a:pPr algn="l"/>
+                      <a:r>
+                        <a:rPr sz="650" b="0" i="1">
+                          <a:solidFill>
+                            <a:srgbClr val="8C8C8C"/>
+                          </a:solidFill>
+                          <a:latin typeface="Garamond"/>
+                          <a:cs typeface="Garamond"/>
+                        </a:rPr>
+                        <a:t>Hist: 10-K CF — CFO · Fcst: Scenarios!G148:G152</a:t>
+                      </a:r>
+                    </a:p>
                   </a:txBody>
                   <a:tcPr anchor="ctr" marT="12700" marB="12700">
                     <a:solidFill>
@@ -14452,7 +14621,7 @@
                   </a:tcPr>
                 </a:tc>
               </a:tr>
-              <a:tr h="362712">
+              <a:tr h="377952">
                 <a:tc>
                   <a:txBody>
                     <a:bodyPr/>
@@ -14470,6 +14639,19 @@
                         <a:t>D&amp;A (add-back)</a:t>
                       </a:r>
                     </a:p>
+                    <a:p>
+                      <a:pPr algn="l"/>
+                      <a:r>
+                        <a:rPr sz="650" b="0" i="1">
+                          <a:solidFill>
+                            <a:srgbClr val="8C8C8C"/>
+                          </a:solidFill>
+                          <a:latin typeface="Garamond"/>
+                          <a:cs typeface="Garamond"/>
+                        </a:rPr>
+                        <a:t>Hist: 10-K CF — D&amp;A · Fcst: Scenarios!G55:G59</a:t>
+                      </a:r>
+                    </a:p>
                   </a:txBody>
                   <a:tcPr anchor="ctr" marT="12700" marB="12700">
                     <a:solidFill>
@@ -14694,7 +14876,7 @@
                   </a:tcPr>
                 </a:tc>
               </a:tr>
-              <a:tr h="362712">
+              <a:tr h="377952">
                 <a:tc>
                   <a:txBody>
                     <a:bodyPr/>
@@ -14712,6 +14894,19 @@
                         <a:t>Capital expenditures</a:t>
                       </a:r>
                     </a:p>
+                    <a:p>
+                      <a:pPr algn="l"/>
+                      <a:r>
+                        <a:rPr sz="650" b="0" i="1">
+                          <a:solidFill>
+                            <a:srgbClr val="8C8C8C"/>
+                          </a:solidFill>
+                          <a:latin typeface="Garamond"/>
+                          <a:cs typeface="Garamond"/>
+                        </a:rPr>
+                        <a:t>Hist: 10-K CF — Capex · Fcst: Scenarios!G60:G64</a:t>
+                      </a:r>
+                    </a:p>
                   </a:txBody>
                   <a:tcPr anchor="ctr" marT="12700" marB="12700">
                     <a:solidFill>
@@ -14936,7 +15131,7 @@
                   </a:tcPr>
                 </a:tc>
               </a:tr>
-              <a:tr h="362712">
+              <a:tr h="377952">
                 <a:tc>
                   <a:txBody>
                     <a:bodyPr/>
@@ -14954,6 +15149,19 @@
                         <a:t>Free cash flow</a:t>
                       </a:r>
                     </a:p>
+                    <a:p>
+                      <a:pPr algn="l"/>
+                      <a:r>
+                        <a:rPr sz="650" b="0" i="1">
+                          <a:solidFill>
+                            <a:srgbClr val="8C8C8C"/>
+                          </a:solidFill>
+                          <a:latin typeface="Garamond"/>
+                          <a:cs typeface="Garamond"/>
+                        </a:rPr>
+                        <a:t>Hist: 10-K CF — CFO − capex · Fcst: Scenarios!G153:G157</a:t>
+                      </a:r>
+                    </a:p>
                   </a:txBody>
                   <a:tcPr anchor="ctr" marT="12700" marB="12700">
                     <a:solidFill>
@@ -15178,7 +15386,7 @@
                   </a:tcPr>
                 </a:tc>
               </a:tr>
-              <a:tr h="362712">
+              <a:tr h="377952">
                 <a:tc>
                   <a:txBody>
                     <a:bodyPr/>
@@ -15194,6 +15402,19 @@
                           <a:cs typeface="Garamond"/>
                         </a:rPr>
                         <a:t>Share repurchases (CFF)</a:t>
+                      </a:r>
+                    </a:p>
+                    <a:p>
+                      <a:pPr algn="l"/>
+                      <a:r>
+                        <a:rPr sz="650" b="0" i="1">
+                          <a:solidFill>
+                            <a:srgbClr val="8C8C8C"/>
+                          </a:solidFill>
+                          <a:latin typeface="Garamond"/>
+                          <a:cs typeface="Garamond"/>
+                        </a:rPr>
+                        <a:t>Hist: 10-K CF — Buybacks · Fcst: Scenarios!G158:G162</a:t>
                       </a:r>
                     </a:p>
                   </a:txBody>
@@ -15433,8 +15654,8 @@
           <p:nvPr/>
         </p:nvGraphicFramePr>
         <p:xfrm>
-          <a:off x="457200" y="5623560"/>
-          <a:ext cx="11292840" cy="1024128"/>
+          <a:off x="457200" y="5687568"/>
+          <a:ext cx="11292840" cy="960120"/>
         </p:xfrm>
         <a:graphic>
           <a:graphicData uri="http://schemas.openxmlformats.org/drawingml/2006/table">
@@ -15443,11 +15664,11 @@
                 <a:tableStyleId>{5C22544A-7EE6-4342-B048-85BDC9FD1C3A}</a:tableStyleId>
               </a:tblPr>
               <a:tblGrid>
-                <a:gridCol w="1828800"/>
-                <a:gridCol w="4732020"/>
-                <a:gridCol w="4732020"/>
+                <a:gridCol w="1691640"/>
+                <a:gridCol w="4800600"/>
+                <a:gridCol w="4800600"/>
               </a:tblGrid>
-              <a:tr h="170688">
+              <a:tr h="160020">
                 <a:tc>
                   <a:txBody>
                     <a:bodyPr/>
@@ -15455,7 +15676,7 @@
                     <a:p>
                       <a:pPr algn="l"/>
                       <a:r>
-                        <a:rPr sz="800" b="1" i="0">
+                        <a:rPr sz="750" b="1" i="0">
                           <a:solidFill>
                             <a:srgbClr val="FFFFFF"/>
                           </a:solidFill>
@@ -15479,14 +15700,14 @@
                     <a:p>
                       <a:pPr algn="r"/>
                       <a:r>
-                        <a:rPr sz="800" b="1" i="0">
+                        <a:rPr sz="750" b="1" i="0">
                           <a:solidFill>
                             <a:srgbClr val="FFFFFF"/>
                           </a:solidFill>
                           <a:latin typeface="Garamond"/>
                           <a:cs typeface="Garamond"/>
                         </a:rPr>
-                        <a:t>Hist (22–25)</a:t>
+                        <a:t>Hist source (22–25)</a:t>
                       </a:r>
                     </a:p>
                   </a:txBody>
@@ -15503,14 +15724,14 @@
                     <a:p>
                       <a:pPr algn="r"/>
                       <a:r>
-                        <a:rPr sz="800" b="1" i="0">
+                        <a:rPr sz="750" b="1" i="0">
                           <a:solidFill>
                             <a:srgbClr val="FFFFFF"/>
                           </a:solidFill>
                           <a:latin typeface="Garamond"/>
                           <a:cs typeface="Garamond"/>
                         </a:rPr>
-                        <a:t>Base forecast (26–30, col G)</a:t>
+                        <a:t>Fcst source — Scenarios col G</a:t>
                       </a:r>
                     </a:p>
                   </a:txBody>
@@ -15521,7 +15742,7 @@
                   </a:tcPr>
                 </a:tc>
               </a:tr>
-              <a:tr h="170688">
+              <a:tr h="160020">
                 <a:tc>
                   <a:txBody>
                     <a:bodyPr/>
@@ -15529,7 +15750,7 @@
                     <a:p>
                       <a:pPr algn="l"/>
                       <a:r>
-                        <a:rPr sz="750" b="0" i="0">
+                        <a:rPr sz="700" b="0" i="0">
                           <a:solidFill>
                             <a:srgbClr val="262626"/>
                           </a:solidFill>
@@ -15553,14 +15774,14 @@
                     <a:p>
                       <a:pPr algn="r"/>
                       <a:r>
-                        <a:rPr sz="750" b="0" i="0">
+                        <a:rPr sz="700" b="0" i="0">
                           <a:solidFill>
                             <a:srgbClr val="262626"/>
                           </a:solidFill>
                           <a:latin typeface="Garamond"/>
                           <a:cs typeface="Garamond"/>
                         </a:rPr>
-                        <a:t>SEC Form 10-K (FY2022–FY2025)</a:t>
+                        <a:t>10-K CF — Operating activities</a:t>
                       </a:r>
                     </a:p>
                   </a:txBody>
@@ -15577,14 +15798,14 @@
                     <a:p>
                       <a:pPr algn="r"/>
                       <a:r>
-                        <a:rPr sz="750" b="0" i="0">
+                        <a:rPr sz="700" b="0" i="0">
                           <a:solidFill>
                             <a:srgbClr val="262626"/>
                           </a:solidFill>
                           <a:latin typeface="Garamond"/>
                           <a:cs typeface="Garamond"/>
                         </a:rPr>
-                        <a:t>LULU_DCF_Valuation_Model.xlsx → Scenarios, col G (base) pitch bridge CFO</a:t>
+                        <a:t>Scenarios!G148:G152 (pitch bridge CFO)</a:t>
                       </a:r>
                     </a:p>
                   </a:txBody>
@@ -15595,7 +15816,7 @@
                   </a:tcPr>
                 </a:tc>
               </a:tr>
-              <a:tr h="170688">
+              <a:tr h="160020">
                 <a:tc>
                   <a:txBody>
                     <a:bodyPr/>
@@ -15603,7 +15824,7 @@
                     <a:p>
                       <a:pPr algn="l"/>
                       <a:r>
-                        <a:rPr sz="750" b="0" i="0">
+                        <a:rPr sz="700" b="0" i="0">
                           <a:solidFill>
                             <a:srgbClr val="262626"/>
                           </a:solidFill>
@@ -15627,14 +15848,14 @@
                     <a:p>
                       <a:pPr algn="r"/>
                       <a:r>
-                        <a:rPr sz="750" b="0" i="0">
+                        <a:rPr sz="700" b="0" i="0">
                           <a:solidFill>
                             <a:srgbClr val="262626"/>
                           </a:solidFill>
                           <a:latin typeface="Garamond"/>
                           <a:cs typeface="Garamond"/>
                         </a:rPr>
-                        <a:t>SEC Form 10-K (FY2022–FY2025)</a:t>
+                        <a:t>10-K CF — Depreciation &amp; amortization</a:t>
                       </a:r>
                     </a:p>
                   </a:txBody>
@@ -15651,14 +15872,14 @@
                     <a:p>
                       <a:pPr algn="r"/>
                       <a:r>
-                        <a:rPr sz="750" b="0" i="0">
+                        <a:rPr sz="700" b="0" i="0">
                           <a:solidFill>
                             <a:srgbClr val="262626"/>
                           </a:solidFill>
                           <a:latin typeface="Garamond"/>
                           <a:cs typeface="Garamond"/>
                         </a:rPr>
-                        <a:t>LULU_DCF_Valuation_Model.xlsx → Scenarios, col G (base) D&amp;A rows</a:t>
+                        <a:t>Scenarios!G55:G59 (D&amp;A yr 1–5)</a:t>
                       </a:r>
                     </a:p>
                   </a:txBody>
@@ -15669,7 +15890,7 @@
                   </a:tcPr>
                 </a:tc>
               </a:tr>
-              <a:tr h="170688">
+              <a:tr h="160020">
                 <a:tc>
                   <a:txBody>
                     <a:bodyPr/>
@@ -15677,7 +15898,7 @@
                     <a:p>
                       <a:pPr algn="l"/>
                       <a:r>
-                        <a:rPr sz="750" b="0" i="0">
+                        <a:rPr sz="700" b="0" i="0">
                           <a:solidFill>
                             <a:srgbClr val="262626"/>
                           </a:solidFill>
@@ -15701,14 +15922,14 @@
                     <a:p>
                       <a:pPr algn="r"/>
                       <a:r>
-                        <a:rPr sz="750" b="0" i="0">
+                        <a:rPr sz="700" b="0" i="0">
                           <a:solidFill>
                             <a:srgbClr val="262626"/>
                           </a:solidFill>
                           <a:latin typeface="Garamond"/>
                           <a:cs typeface="Garamond"/>
                         </a:rPr>
-                        <a:t>SEC Form 10-K (FY2022–FY2025)</a:t>
+                        <a:t>10-K CF — Capital expenditures</a:t>
                       </a:r>
                     </a:p>
                   </a:txBody>
@@ -15725,14 +15946,14 @@
                     <a:p>
                       <a:pPr algn="r"/>
                       <a:r>
-                        <a:rPr sz="750" b="0" i="0">
+                        <a:rPr sz="700" b="0" i="0">
                           <a:solidFill>
                             <a:srgbClr val="262626"/>
                           </a:solidFill>
                           <a:latin typeface="Garamond"/>
                           <a:cs typeface="Garamond"/>
                         </a:rPr>
-                        <a:t>LULU_DCF_Valuation_Model.xlsx → Scenarios, col G (base) capex rows</a:t>
+                        <a:t>Scenarios!G60:G64 (Capex yr 1–5)</a:t>
                       </a:r>
                     </a:p>
                   </a:txBody>
@@ -15743,7 +15964,7 @@
                   </a:tcPr>
                 </a:tc>
               </a:tr>
-              <a:tr h="170688">
+              <a:tr h="160020">
                 <a:tc>
                   <a:txBody>
                     <a:bodyPr/>
@@ -15751,7 +15972,7 @@
                     <a:p>
                       <a:pPr algn="l"/>
                       <a:r>
-                        <a:rPr sz="750" b="0" i="0">
+                        <a:rPr sz="700" b="0" i="0">
                           <a:solidFill>
                             <a:srgbClr val="262626"/>
                           </a:solidFill>
@@ -15775,14 +15996,14 @@
                     <a:p>
                       <a:pPr algn="r"/>
                       <a:r>
-                        <a:rPr sz="750" b="0" i="0">
+                        <a:rPr sz="700" b="0" i="0">
                           <a:solidFill>
                             <a:srgbClr val="262626"/>
                           </a:solidFill>
                           <a:latin typeface="Garamond"/>
                           <a:cs typeface="Garamond"/>
                         </a:rPr>
-                        <a:t>SEC Form 10-K (FY2022–FY2025) (CFO − capex)</a:t>
+                        <a:t>10-K CF — CFO − capex</a:t>
                       </a:r>
                     </a:p>
                   </a:txBody>
@@ -15799,14 +16020,14 @@
                     <a:p>
                       <a:pPr algn="r"/>
                       <a:r>
-                        <a:rPr sz="750" b="0" i="0">
+                        <a:rPr sz="700" b="0" i="0">
                           <a:solidFill>
                             <a:srgbClr val="262626"/>
                           </a:solidFill>
                           <a:latin typeface="Garamond"/>
                           <a:cs typeface="Garamond"/>
                         </a:rPr>
-                        <a:t>LULU_DCF_Valuation_Model.xlsx → Scenarios, col G (base) pitch bridge FCF (CFS)</a:t>
+                        <a:t>Scenarios!G153:G157 (pitch bridge FCF/CFS)</a:t>
                       </a:r>
                     </a:p>
                   </a:txBody>
@@ -15817,7 +16038,7 @@
                   </a:tcPr>
                 </a:tc>
               </a:tr>
-              <a:tr h="170688">
+              <a:tr h="160020">
                 <a:tc>
                   <a:txBody>
                     <a:bodyPr/>
@@ -15825,7 +16046,7 @@
                     <a:p>
                       <a:pPr algn="l"/>
                       <a:r>
-                        <a:rPr sz="750" b="0" i="0">
+                        <a:rPr sz="700" b="0" i="0">
                           <a:solidFill>
                             <a:srgbClr val="262626"/>
                           </a:solidFill>
@@ -15849,14 +16070,14 @@
                     <a:p>
                       <a:pPr algn="r"/>
                       <a:r>
-                        <a:rPr sz="750" b="0" i="0">
+                        <a:rPr sz="700" b="0" i="0">
                           <a:solidFill>
                             <a:srgbClr val="262626"/>
                           </a:solidFill>
                           <a:latin typeface="Garamond"/>
                           <a:cs typeface="Garamond"/>
                         </a:rPr>
-                        <a:t>SEC Form 10-K (FY2022–FY2025)</a:t>
+                        <a:t>10-K CF — Repurchases (financing)</a:t>
                       </a:r>
                     </a:p>
                   </a:txBody>
@@ -15873,14 +16094,14 @@
                     <a:p>
                       <a:pPr algn="r"/>
                       <a:r>
-                        <a:rPr sz="750" b="0" i="0">
+                        <a:rPr sz="700" b="0" i="0">
                           <a:solidFill>
                             <a:srgbClr val="262626"/>
                           </a:solidFill>
                           <a:latin typeface="Garamond"/>
                           <a:cs typeface="Garamond"/>
                         </a:rPr>
-                        <a:t>LULU_DCF_Valuation_Model.xlsx → Scenarios, col G (base) fixed buyback ($500M)</a:t>
+                        <a:t>Scenarios!G158:G162 (G21=$500M/yr fixed)</a:t>
                       </a:r>
                     </a:p>
                   </a:txBody>

--- a/LULU/LULU_Investment_Pitch_Deck.pptx
+++ b/LULU/LULU_Investment_Pitch_Deck.pptx
@@ -16292,7 +16292,7 @@
                 <a:latin typeface="Garamond"/>
                 <a:cs typeface="Garamond"/>
               </a:rPr>
-              <a:t>Capital Structure &amp; WACC</a:t>
+              <a:t>Financials — Capital Structure</a:t>
             </a:r>
           </a:p>
         </p:txBody>
@@ -16336,7 +16336,7 @@
                 <a:latin typeface="Garamond"/>
                 <a:cs typeface="Garamond"/>
               </a:rPr>
-              <a:t>A lease-adjusted capital structure drives a ~9.0% discount rate</a:t>
+              <a:t>Cap stack and WACC build — lease-adjusted structure; no funded term debt (critical lens for levered businesses)</a:t>
             </a:r>
           </a:p>
         </p:txBody>
@@ -16424,7 +16424,7 @@
                 <a:latin typeface="Garamond"/>
                 <a:cs typeface="Garamond"/>
               </a:rPr>
-              <a:t>Source: company SEC filings (Form 10-K, CIK 0001397187)</a:t>
+              <a:t>Cap stack &amp; WACC: LULU_DCF_Valuation_Model.xlsx → WACC tab (col E). Cash/leases: FY2025 10-K. Beta: Yahoo Finance Key Statistics.</a:t>
             </a:r>
           </a:p>
         </p:txBody>
@@ -16473,16 +16473,808 @@
           </a:p>
         </p:txBody>
       </p:sp>
+      <p:graphicFrame>
+        <p:nvGraphicFramePr>
+          <p:cNvPr id="8" name="Table 7"/>
+          <p:cNvGraphicFramePr>
+            <a:graphicFrameLocks noGrp="1"/>
+          </p:cNvGraphicFramePr>
+          <p:nvPr/>
+        </p:nvGraphicFramePr>
+        <p:xfrm>
+          <a:off x="457200" y="1051560"/>
+          <a:ext cx="5532120" cy="2606040"/>
+        </p:xfrm>
+        <a:graphic>
+          <a:graphicData uri="http://schemas.openxmlformats.org/drawingml/2006/table">
+            <a:tbl>
+              <a:tblPr firstRow="1" bandRow="1">
+                <a:tableStyleId>{5C22544A-7EE6-4342-B048-85BDC9FD1C3A}</a:tableStyleId>
+              </a:tblPr>
+              <a:tblGrid>
+                <a:gridCol w="2331720"/>
+                <a:gridCol w="1066800"/>
+                <a:gridCol w="1066800"/>
+                <a:gridCol w="1066800"/>
+              </a:tblGrid>
+              <a:tr h="372291">
+                <a:tc>
+                  <a:txBody>
+                    <a:bodyPr/>
+                    <a:lstStyle/>
+                    <a:p>
+                      <a:pPr algn="l"/>
+                      <a:r>
+                        <a:rPr sz="850" b="1" i="0">
+                          <a:solidFill>
+                            <a:srgbClr val="FFFFFF"/>
+                          </a:solidFill>
+                          <a:latin typeface="Garamond"/>
+                          <a:cs typeface="Garamond"/>
+                        </a:rPr>
+                        <a:t>Component</a:t>
+                      </a:r>
+                    </a:p>
+                  </a:txBody>
+                  <a:tcPr anchor="ctr">
+                    <a:solidFill>
+                      <a:srgbClr val="1F2A44"/>
+                    </a:solidFill>
+                  </a:tcPr>
+                </a:tc>
+                <a:tc>
+                  <a:txBody>
+                    <a:bodyPr/>
+                    <a:lstStyle/>
+                    <a:p>
+                      <a:pPr algn="r"/>
+                      <a:r>
+                        <a:rPr sz="850" b="1" i="0">
+                          <a:solidFill>
+                            <a:srgbClr val="FFFFFF"/>
+                          </a:solidFill>
+                          <a:latin typeface="Garamond"/>
+                          <a:cs typeface="Garamond"/>
+                        </a:rPr>
+                        <a:t>US$ M</a:t>
+                      </a:r>
+                    </a:p>
+                  </a:txBody>
+                  <a:tcPr anchor="ctr">
+                    <a:solidFill>
+                      <a:srgbClr val="1F2A44"/>
+                    </a:solidFill>
+                  </a:tcPr>
+                </a:tc>
+                <a:tc>
+                  <a:txBody>
+                    <a:bodyPr/>
+                    <a:lstStyle/>
+                    <a:p>
+                      <a:pPr algn="r"/>
+                      <a:r>
+                        <a:rPr sz="850" b="1" i="0">
+                          <a:solidFill>
+                            <a:srgbClr val="FFFFFF"/>
+                          </a:solidFill>
+                          <a:latin typeface="Garamond"/>
+                          <a:cs typeface="Garamond"/>
+                        </a:rPr>
+                        <a:t>% of capital</a:t>
+                      </a:r>
+                    </a:p>
+                  </a:txBody>
+                  <a:tcPr anchor="ctr">
+                    <a:solidFill>
+                      <a:srgbClr val="1F2A44"/>
+                    </a:solidFill>
+                  </a:tcPr>
+                </a:tc>
+                <a:tc>
+                  <a:txBody>
+                    <a:bodyPr/>
+                    <a:lstStyle/>
+                    <a:p>
+                      <a:pPr algn="r"/>
+                      <a:r>
+                        <a:rPr sz="850" b="1" i="0">
+                          <a:solidFill>
+                            <a:srgbClr val="FFFFFF"/>
+                          </a:solidFill>
+                          <a:latin typeface="Garamond"/>
+                          <a:cs typeface="Garamond"/>
+                        </a:rPr>
+                        <a:t>Model source</a:t>
+                      </a:r>
+                    </a:p>
+                  </a:txBody>
+                  <a:tcPr anchor="ctr">
+                    <a:solidFill>
+                      <a:srgbClr val="1F2A44"/>
+                    </a:solidFill>
+                  </a:tcPr>
+                </a:tc>
+              </a:tr>
+              <a:tr h="372291">
+                <a:tc>
+                  <a:txBody>
+                    <a:bodyPr/>
+                    <a:lstStyle/>
+                    <a:p>
+                      <a:pPr algn="l"/>
+                      <a:r>
+                        <a:rPr sz="850" b="0" i="0">
+                          <a:solidFill>
+                            <a:srgbClr val="262626"/>
+                          </a:solidFill>
+                          <a:latin typeface="Garamond"/>
+                          <a:cs typeface="Garamond"/>
+                        </a:rPr>
+                        <a:t>Market equity (price × shares)</a:t>
+                      </a:r>
+                    </a:p>
+                    <a:p>
+                      <a:pPr algn="l"/>
+                      <a:r>
+                        <a:rPr sz="650" b="0" i="1">
+                          <a:solidFill>
+                            <a:srgbClr val="8C8C8C"/>
+                          </a:solidFill>
+                          <a:latin typeface="Garamond"/>
+                          <a:cs typeface="Garamond"/>
+                        </a:rPr>
+                        <a:t>Price $100 × 111.4M shares (FY25 10-K)</a:t>
+                      </a:r>
+                    </a:p>
+                  </a:txBody>
+                  <a:tcPr anchor="ctr" marT="12700" marB="12700">
+                    <a:solidFill>
+                      <a:srgbClr val="FFFFFF"/>
+                    </a:solidFill>
+                  </a:tcPr>
+                </a:tc>
+                <a:tc>
+                  <a:txBody>
+                    <a:bodyPr/>
+                    <a:lstStyle/>
+                    <a:p>
+                      <a:pPr algn="r"/>
+                      <a:r>
+                        <a:rPr sz="850" b="0" i="0">
+                          <a:solidFill>
+                            <a:srgbClr val="262626"/>
+                          </a:solidFill>
+                          <a:latin typeface="Garamond"/>
+                          <a:cs typeface="Garamond"/>
+                        </a:rPr>
+                        <a:t>11,138</a:t>
+                      </a:r>
+                    </a:p>
+                  </a:txBody>
+                  <a:tcPr anchor="ctr" marT="12700" marB="12700">
+                    <a:solidFill>
+                      <a:srgbClr val="FFFFFF"/>
+                    </a:solidFill>
+                  </a:tcPr>
+                </a:tc>
+                <a:tc>
+                  <a:txBody>
+                    <a:bodyPr/>
+                    <a:lstStyle/>
+                    <a:p>
+                      <a:pPr algn="r"/>
+                      <a:r>
+                        <a:rPr sz="850" b="0" i="0">
+                          <a:solidFill>
+                            <a:srgbClr val="262626"/>
+                          </a:solidFill>
+                          <a:latin typeface="Garamond"/>
+                          <a:cs typeface="Garamond"/>
+                        </a:rPr>
+                        <a:t>86.1%</a:t>
+                      </a:r>
+                    </a:p>
+                  </a:txBody>
+                  <a:tcPr anchor="ctr" marT="12700" marB="12700">
+                    <a:solidFill>
+                      <a:srgbClr val="FFFFFF"/>
+                    </a:solidFill>
+                  </a:tcPr>
+                </a:tc>
+                <a:tc>
+                  <a:txBody>
+                    <a:bodyPr/>
+                    <a:lstStyle/>
+                    <a:p>
+                      <a:pPr algn="r"/>
+                      <a:r>
+                        <a:rPr sz="850" b="0" i="0">
+                          <a:solidFill>
+                            <a:srgbClr val="262626"/>
+                          </a:solidFill>
+                          <a:latin typeface="Garamond"/>
+                          <a:cs typeface="Garamond"/>
+                        </a:rPr>
+                        <a:t>WACC!E10</a:t>
+                      </a:r>
+                    </a:p>
+                  </a:txBody>
+                  <a:tcPr anchor="ctr" marT="12700" marB="12700">
+                    <a:solidFill>
+                      <a:srgbClr val="FFFFFF"/>
+                    </a:solidFill>
+                  </a:tcPr>
+                </a:tc>
+              </a:tr>
+              <a:tr h="372291">
+                <a:tc>
+                  <a:txBody>
+                    <a:bodyPr/>
+                    <a:lstStyle/>
+                    <a:p>
+                      <a:pPr algn="l"/>
+                      <a:r>
+                        <a:rPr sz="850" b="0" i="0">
+                          <a:solidFill>
+                            <a:srgbClr val="262626"/>
+                          </a:solidFill>
+                          <a:latin typeface="Garamond"/>
+                          <a:cs typeface="Garamond"/>
+                        </a:rPr>
+                        <a:t>ASC 842 operating lease liabilities</a:t>
+                      </a:r>
+                    </a:p>
+                    <a:p>
+                      <a:pPr algn="l"/>
+                      <a:r>
+                        <a:rPr sz="650" b="0" i="1">
+                          <a:solidFill>
+                            <a:srgbClr val="8C8C8C"/>
+                          </a:solidFill>
+                          <a:latin typeface="Garamond"/>
+                          <a:cs typeface="Garamond"/>
+                        </a:rPr>
+                        <a:t>Current $298,724k + non-current $1,499,717k</a:t>
+                      </a:r>
+                    </a:p>
+                  </a:txBody>
+                  <a:tcPr anchor="ctr" marT="12700" marB="12700">
+                    <a:solidFill>
+                      <a:srgbClr val="F0F1F3"/>
+                    </a:solidFill>
+                  </a:tcPr>
+                </a:tc>
+                <a:tc>
+                  <a:txBody>
+                    <a:bodyPr/>
+                    <a:lstStyle/>
+                    <a:p>
+                      <a:pPr algn="r"/>
+                      <a:r>
+                        <a:rPr sz="850" b="0" i="0">
+                          <a:solidFill>
+                            <a:srgbClr val="262626"/>
+                          </a:solidFill>
+                          <a:latin typeface="Garamond"/>
+                          <a:cs typeface="Garamond"/>
+                        </a:rPr>
+                        <a:t>1,798</a:t>
+                      </a:r>
+                    </a:p>
+                  </a:txBody>
+                  <a:tcPr anchor="ctr" marT="12700" marB="12700">
+                    <a:solidFill>
+                      <a:srgbClr val="F0F1F3"/>
+                    </a:solidFill>
+                  </a:tcPr>
+                </a:tc>
+                <a:tc>
+                  <a:txBody>
+                    <a:bodyPr/>
+                    <a:lstStyle/>
+                    <a:p>
+                      <a:pPr algn="r"/>
+                      <a:r>
+                        <a:rPr sz="850" b="0" i="0">
+                          <a:solidFill>
+                            <a:srgbClr val="262626"/>
+                          </a:solidFill>
+                          <a:latin typeface="Garamond"/>
+                          <a:cs typeface="Garamond"/>
+                        </a:rPr>
+                        <a:t>13.9%</a:t>
+                      </a:r>
+                    </a:p>
+                  </a:txBody>
+                  <a:tcPr anchor="ctr" marT="12700" marB="12700">
+                    <a:solidFill>
+                      <a:srgbClr val="F0F1F3"/>
+                    </a:solidFill>
+                  </a:tcPr>
+                </a:tc>
+                <a:tc>
+                  <a:txBody>
+                    <a:bodyPr/>
+                    <a:lstStyle/>
+                    <a:p>
+                      <a:pPr algn="r"/>
+                      <a:r>
+                        <a:rPr sz="850" b="0" i="0">
+                          <a:solidFill>
+                            <a:srgbClr val="262626"/>
+                          </a:solidFill>
+                          <a:latin typeface="Garamond"/>
+                          <a:cs typeface="Garamond"/>
+                        </a:rPr>
+                        <a:t>WACC!E11 (10-K)</a:t>
+                      </a:r>
+                    </a:p>
+                  </a:txBody>
+                  <a:tcPr anchor="ctr" marT="12700" marB="12700">
+                    <a:solidFill>
+                      <a:srgbClr val="F0F1F3"/>
+                    </a:solidFill>
+                  </a:tcPr>
+                </a:tc>
+              </a:tr>
+              <a:tr h="372291">
+                <a:tc>
+                  <a:txBody>
+                    <a:bodyPr/>
+                    <a:lstStyle/>
+                    <a:p>
+                      <a:pPr algn="l"/>
+                      <a:r>
+                        <a:rPr sz="850" b="0" i="0">
+                          <a:solidFill>
+                            <a:srgbClr val="262626"/>
+                          </a:solidFill>
+                          <a:latin typeface="Garamond"/>
+                          <a:cs typeface="Garamond"/>
+                        </a:rPr>
+                        <a:t>Funded debt (term loans / bonds)</a:t>
+                      </a:r>
+                    </a:p>
+                    <a:p>
+                      <a:pPr algn="l"/>
+                      <a:r>
+                        <a:rPr sz="650" b="0" i="1">
+                          <a:solidFill>
+                            <a:srgbClr val="8C8C8C"/>
+                          </a:solidFill>
+                          <a:latin typeface="Garamond"/>
+                          <a:cs typeface="Garamond"/>
+                        </a:rPr>
+                        <a:t>Undrawn revolver; no term borrowings per 10-K</a:t>
+                      </a:r>
+                    </a:p>
+                  </a:txBody>
+                  <a:tcPr anchor="ctr" marT="12700" marB="12700">
+                    <a:solidFill>
+                      <a:srgbClr val="FFFFFF"/>
+                    </a:solidFill>
+                  </a:tcPr>
+                </a:tc>
+                <a:tc>
+                  <a:txBody>
+                    <a:bodyPr/>
+                    <a:lstStyle/>
+                    <a:p>
+                      <a:pPr algn="r"/>
+                      <a:r>
+                        <a:rPr sz="850" b="0" i="0">
+                          <a:solidFill>
+                            <a:srgbClr val="262626"/>
+                          </a:solidFill>
+                          <a:latin typeface="Garamond"/>
+                          <a:cs typeface="Garamond"/>
+                        </a:rPr>
+                        <a:t>0</a:t>
+                      </a:r>
+                    </a:p>
+                  </a:txBody>
+                  <a:tcPr anchor="ctr" marT="12700" marB="12700">
+                    <a:solidFill>
+                      <a:srgbClr val="FFFFFF"/>
+                    </a:solidFill>
+                  </a:tcPr>
+                </a:tc>
+                <a:tc>
+                  <a:txBody>
+                    <a:bodyPr/>
+                    <a:lstStyle/>
+                    <a:p>
+                      <a:pPr algn="r"/>
+                      <a:r>
+                        <a:rPr sz="850" b="0" i="0">
+                          <a:solidFill>
+                            <a:srgbClr val="262626"/>
+                          </a:solidFill>
+                          <a:latin typeface="Garamond"/>
+                          <a:cs typeface="Garamond"/>
+                        </a:rPr>
+                        <a:t>0.0%</a:t>
+                      </a:r>
+                    </a:p>
+                  </a:txBody>
+                  <a:tcPr anchor="ctr" marT="12700" marB="12700">
+                    <a:solidFill>
+                      <a:srgbClr val="FFFFFF"/>
+                    </a:solidFill>
+                  </a:tcPr>
+                </a:tc>
+                <a:tc>
+                  <a:txBody>
+                    <a:bodyPr/>
+                    <a:lstStyle/>
+                    <a:p>
+                      <a:pPr algn="r"/>
+                      <a:r>
+                        <a:rPr sz="850" b="0" i="0">
+                          <a:solidFill>
+                            <a:srgbClr val="262626"/>
+                          </a:solidFill>
+                          <a:latin typeface="Garamond"/>
+                          <a:cs typeface="Garamond"/>
+                        </a:rPr>
+                        <a:t>WACC!E13</a:t>
+                      </a:r>
+                    </a:p>
+                  </a:txBody>
+                  <a:tcPr anchor="ctr" marT="12700" marB="12700">
+                    <a:solidFill>
+                      <a:srgbClr val="FFFFFF"/>
+                    </a:solidFill>
+                  </a:tcPr>
+                </a:tc>
+              </a:tr>
+              <a:tr h="372291">
+                <a:tc>
+                  <a:txBody>
+                    <a:bodyPr/>
+                    <a:lstStyle/>
+                    <a:p>
+                      <a:pPr algn="l"/>
+                      <a:r>
+                        <a:rPr sz="850" b="1" i="0">
+                          <a:solidFill>
+                            <a:srgbClr val="1F2A44"/>
+                          </a:solidFill>
+                          <a:latin typeface="Garamond"/>
+                          <a:cs typeface="Garamond"/>
+                        </a:rPr>
+                        <a:t>Total capital (WACC basis)</a:t>
+                      </a:r>
+                    </a:p>
+                    <a:p>
+                      <a:pPr algn="l"/>
+                      <a:r>
+                        <a:rPr sz="650" b="0" i="1">
+                          <a:solidFill>
+                            <a:srgbClr val="8C8C8C"/>
+                          </a:solidFill>
+                          <a:latin typeface="Garamond"/>
+                          <a:cs typeface="Garamond"/>
+                        </a:rPr>
+                        <a:t>Equity + lease debt equivalents</a:t>
+                      </a:r>
+                    </a:p>
+                  </a:txBody>
+                  <a:tcPr anchor="ctr" marT="12700" marB="12700">
+                    <a:solidFill>
+                      <a:srgbClr val="F0F1F3"/>
+                    </a:solidFill>
+                  </a:tcPr>
+                </a:tc>
+                <a:tc>
+                  <a:txBody>
+                    <a:bodyPr/>
+                    <a:lstStyle/>
+                    <a:p>
+                      <a:pPr algn="r"/>
+                      <a:r>
+                        <a:rPr sz="850" b="1" i="0">
+                          <a:solidFill>
+                            <a:srgbClr val="1F2A44"/>
+                          </a:solidFill>
+                          <a:latin typeface="Garamond"/>
+                          <a:cs typeface="Garamond"/>
+                        </a:rPr>
+                        <a:t>12,936</a:t>
+                      </a:r>
+                    </a:p>
+                  </a:txBody>
+                  <a:tcPr anchor="ctr" marT="12700" marB="12700">
+                    <a:solidFill>
+                      <a:srgbClr val="F0F1F3"/>
+                    </a:solidFill>
+                  </a:tcPr>
+                </a:tc>
+                <a:tc>
+                  <a:txBody>
+                    <a:bodyPr/>
+                    <a:lstStyle/>
+                    <a:p>
+                      <a:pPr algn="r"/>
+                      <a:r>
+                        <a:rPr sz="850" b="1" i="0">
+                          <a:solidFill>
+                            <a:srgbClr val="1F2A44"/>
+                          </a:solidFill>
+                          <a:latin typeface="Garamond"/>
+                          <a:cs typeface="Garamond"/>
+                        </a:rPr>
+                        <a:t>100.0%</a:t>
+                      </a:r>
+                    </a:p>
+                  </a:txBody>
+                  <a:tcPr anchor="ctr" marT="12700" marB="12700">
+                    <a:solidFill>
+                      <a:srgbClr val="F0F1F3"/>
+                    </a:solidFill>
+                  </a:tcPr>
+                </a:tc>
+                <a:tc>
+                  <a:txBody>
+                    <a:bodyPr/>
+                    <a:lstStyle/>
+                    <a:p>
+                      <a:pPr algn="r"/>
+                      <a:r>
+                        <a:rPr sz="850" b="1" i="0">
+                          <a:solidFill>
+                            <a:srgbClr val="1F2A44"/>
+                          </a:solidFill>
+                          <a:latin typeface="Garamond"/>
+                          <a:cs typeface="Garamond"/>
+                        </a:rPr>
+                        <a:t>WACC!E14</a:t>
+                      </a:r>
+                    </a:p>
+                  </a:txBody>
+                  <a:tcPr anchor="ctr" marT="12700" marB="12700">
+                    <a:solidFill>
+                      <a:srgbClr val="F0F1F3"/>
+                    </a:solidFill>
+                  </a:tcPr>
+                </a:tc>
+              </a:tr>
+              <a:tr h="372291">
+                <a:tc>
+                  <a:txBody>
+                    <a:bodyPr/>
+                    <a:lstStyle/>
+                    <a:p>
+                      <a:pPr algn="l"/>
+                      <a:r>
+                        <a:rPr sz="850" b="0" i="0">
+                          <a:solidFill>
+                            <a:srgbClr val="262626"/>
+                          </a:solidFill>
+                          <a:latin typeface="Garamond"/>
+                          <a:cs typeface="Garamond"/>
+                        </a:rPr>
+                        <a:t>Cash &amp; equivalents (EV offset)</a:t>
+                      </a:r>
+                    </a:p>
+                    <a:p>
+                      <a:pPr algn="l"/>
+                      <a:r>
+                        <a:rPr sz="650" b="0" i="1">
+                          <a:solidFill>
+                            <a:srgbClr val="8C8C8C"/>
+                          </a:solidFill>
+                          <a:latin typeface="Garamond"/>
+                          <a:cs typeface="Garamond"/>
+                        </a:rPr>
+                        <a:t>Net-cash on funded debt; leases are debt-equiv in WACC</a:t>
+                      </a:r>
+                    </a:p>
+                  </a:txBody>
+                  <a:tcPr anchor="ctr" marT="12700" marB="12700">
+                    <a:solidFill>
+                      <a:srgbClr val="FFFFFF"/>
+                    </a:solidFill>
+                  </a:tcPr>
+                </a:tc>
+                <a:tc>
+                  <a:txBody>
+                    <a:bodyPr/>
+                    <a:lstStyle/>
+                    <a:p>
+                      <a:pPr algn="r"/>
+                      <a:r>
+                        <a:rPr sz="850" b="0" i="0">
+                          <a:solidFill>
+                            <a:srgbClr val="262626"/>
+                          </a:solidFill>
+                          <a:latin typeface="Garamond"/>
+                          <a:cs typeface="Garamond"/>
+                        </a:rPr>
+                        <a:t>1,807</a:t>
+                      </a:r>
+                    </a:p>
+                  </a:txBody>
+                  <a:tcPr anchor="ctr" marT="12700" marB="12700">
+                    <a:solidFill>
+                      <a:srgbClr val="FFFFFF"/>
+                    </a:solidFill>
+                  </a:tcPr>
+                </a:tc>
+                <a:tc>
+                  <a:txBody>
+                    <a:bodyPr/>
+                    <a:lstStyle/>
+                    <a:p>
+                      <a:pPr algn="r"/>
+                      <a:r>
+                        <a:rPr sz="850" b="0" i="0">
+                          <a:solidFill>
+                            <a:srgbClr val="262626"/>
+                          </a:solidFill>
+                          <a:latin typeface="Garamond"/>
+                          <a:cs typeface="Garamond"/>
+                        </a:rPr>
+                        <a:t>—</a:t>
+                      </a:r>
+                    </a:p>
+                  </a:txBody>
+                  <a:tcPr anchor="ctr" marT="12700" marB="12700">
+                    <a:solidFill>
+                      <a:srgbClr val="FFFFFF"/>
+                    </a:solidFill>
+                  </a:tcPr>
+                </a:tc>
+                <a:tc>
+                  <a:txBody>
+                    <a:bodyPr/>
+                    <a:lstStyle/>
+                    <a:p>
+                      <a:pPr algn="r"/>
+                      <a:r>
+                        <a:rPr sz="850" b="0" i="0">
+                          <a:solidFill>
+                            <a:srgbClr val="262626"/>
+                          </a:solidFill>
+                          <a:latin typeface="Garamond"/>
+                          <a:cs typeface="Garamond"/>
+                        </a:rPr>
+                        <a:t>10-K BS — Cash</a:t>
+                      </a:r>
+                    </a:p>
+                  </a:txBody>
+                  <a:tcPr anchor="ctr" marT="12700" marB="12700">
+                    <a:solidFill>
+                      <a:srgbClr val="FFFFFF"/>
+                    </a:solidFill>
+                  </a:tcPr>
+                </a:tc>
+              </a:tr>
+              <a:tr h="372294">
+                <a:tc>
+                  <a:txBody>
+                    <a:bodyPr/>
+                    <a:lstStyle/>
+                    <a:p>
+                      <a:pPr algn="l"/>
+                      <a:r>
+                        <a:rPr sz="850" b="0" i="0">
+                          <a:solidFill>
+                            <a:srgbClr val="262626"/>
+                          </a:solidFill>
+                          <a:latin typeface="Garamond"/>
+                          <a:cs typeface="Garamond"/>
+                        </a:rPr>
+                        <a:t>Net debt (leases + funded − cash)</a:t>
+                      </a:r>
+                    </a:p>
+                    <a:p>
+                      <a:pPr algn="l"/>
+                      <a:r>
+                        <a:rPr sz="650" b="0" i="1">
+                          <a:solidFill>
+                            <a:srgbClr val="8C8C8C"/>
+                          </a:solidFill>
+                          <a:latin typeface="Garamond"/>
+                          <a:cs typeface="Garamond"/>
+                        </a:rPr>
+                        <a:t>Near-zero net debt — equity-funded with lease adj.</a:t>
+                      </a:r>
+                    </a:p>
+                  </a:txBody>
+                  <a:tcPr anchor="ctr" marT="12700" marB="12700">
+                    <a:solidFill>
+                      <a:srgbClr val="F0F1F3"/>
+                    </a:solidFill>
+                  </a:tcPr>
+                </a:tc>
+                <a:tc>
+                  <a:txBody>
+                    <a:bodyPr/>
+                    <a:lstStyle/>
+                    <a:p>
+                      <a:pPr algn="r"/>
+                      <a:r>
+                        <a:rPr sz="850" b="0" i="0">
+                          <a:solidFill>
+                            <a:srgbClr val="262626"/>
+                          </a:solidFill>
+                          <a:latin typeface="Garamond"/>
+                          <a:cs typeface="Garamond"/>
+                        </a:rPr>
+                        <a:t>-9</a:t>
+                      </a:r>
+                    </a:p>
+                  </a:txBody>
+                  <a:tcPr anchor="ctr" marT="12700" marB="12700">
+                    <a:solidFill>
+                      <a:srgbClr val="F0F1F3"/>
+                    </a:solidFill>
+                  </a:tcPr>
+                </a:tc>
+                <a:tc>
+                  <a:txBody>
+                    <a:bodyPr/>
+                    <a:lstStyle/>
+                    <a:p>
+                      <a:pPr algn="r"/>
+                      <a:r>
+                        <a:rPr sz="850" b="0" i="0">
+                          <a:solidFill>
+                            <a:srgbClr val="262626"/>
+                          </a:solidFill>
+                          <a:latin typeface="Garamond"/>
+                          <a:cs typeface="Garamond"/>
+                        </a:rPr>
+                        <a:t>—</a:t>
+                      </a:r>
+                    </a:p>
+                  </a:txBody>
+                  <a:tcPr anchor="ctr" marT="12700" marB="12700">
+                    <a:solidFill>
+                      <a:srgbClr val="F0F1F3"/>
+                    </a:solidFill>
+                  </a:tcPr>
+                </a:tc>
+                <a:tc>
+                  <a:txBody>
+                    <a:bodyPr/>
+                    <a:lstStyle/>
+                    <a:p>
+                      <a:pPr algn="r"/>
+                      <a:r>
+                        <a:rPr sz="850" b="0" i="0">
+                          <a:solidFill>
+                            <a:srgbClr val="262626"/>
+                          </a:solidFill>
+                          <a:latin typeface="Garamond"/>
+                          <a:cs typeface="Garamond"/>
+                        </a:rPr>
+                        <a:t>DCF EV bridge</a:t>
+                      </a:r>
+                    </a:p>
+                  </a:txBody>
+                  <a:tcPr anchor="ctr" marT="12700" marB="12700">
+                    <a:solidFill>
+                      <a:srgbClr val="F0F1F3"/>
+                    </a:solidFill>
+                  </a:tcPr>
+                </a:tc>
+              </a:tr>
+            </a:tbl>
+          </a:graphicData>
+        </a:graphic>
+      </p:graphicFrame>
       <p:sp>
         <p:nvSpPr>
-          <p:cNvPr id="8" name="TextBox 7"/>
+          <p:cNvPr id="9" name="TextBox 8"/>
           <p:cNvSpPr txBox="1"/>
           <p:nvPr/>
         </p:nvSpPr>
         <p:spPr>
           <a:xfrm>
-            <a:off x="457200" y="1097280"/>
-            <a:ext cx="5669280" cy="5120640"/>
+            <a:off x="457200" y="3703320"/>
+            <a:ext cx="5532120" cy="502920"/>
           </a:xfrm>
           <a:prstGeom prst="rect">
             <a:avLst/>
@@ -16500,143 +17292,1178 @@
                 <a:spcPts val="0"/>
               </a:spcBef>
               <a:spcAft>
-                <a:spcPts val="500"/>
-              </a:spcAft>
-              <a:buNone/>
-            </a:pPr>
-            <a:r>
-              <a:rPr sz="1450" b="1" i="0">
-                <a:solidFill>
-                  <a:srgbClr val="990000"/>
-                </a:solidFill>
-                <a:latin typeface="Garamond"/>
-                <a:cs typeface="Garamond"/>
-              </a:rPr>
-              <a:t>Capital structure</a:t>
-            </a:r>
-          </a:p>
-          <a:p>
-            <a:pPr algn="l" indent="-152400" marL="177800">
-              <a:spcBef>
-                <a:spcPts val="0"/>
-              </a:spcBef>
-              <a:spcAft>
-                <a:spcPts val="600"/>
-              </a:spcAft>
-              <a:buFont typeface="Garamond"/>
-              <a:buChar char="•"/>
-            </a:pPr>
-            <a:r>
-              <a:rPr sz="1300" b="0" i="0">
+                <a:spcPts val="0"/>
+              </a:spcAft>
+              <a:buNone/>
+            </a:pPr>
+            <a:r>
+              <a:rPr sz="850" b="0" i="1">
                 <a:solidFill>
                   <a:srgbClr val="262626"/>
                 </a:solidFill>
                 <a:latin typeface="Garamond"/>
                 <a:cs typeface="Garamond"/>
               </a:rPr>
-              <a:t>No funded debt; an undrawn revolving credit facility provides liquidity</a:t>
-            </a:r>
-          </a:p>
-          <a:p>
-            <a:pPr algn="l" indent="-152400" marL="177800">
-              <a:spcBef>
-                <a:spcPts val="0"/>
-              </a:spcBef>
-              <a:spcAft>
-                <a:spcPts val="600"/>
-              </a:spcAft>
-              <a:buFont typeface="Garamond"/>
-              <a:buChar char="•"/>
-            </a:pPr>
-            <a:r>
-              <a:rPr sz="1300" b="0" i="0">
-                <a:solidFill>
-                  <a:srgbClr val="262626"/>
-                </a:solidFill>
-                <a:latin typeface="Garamond"/>
-                <a:cs typeface="Garamond"/>
-              </a:rPr>
-              <a:t>$1,807.2M cash and equivalents — a net-cash position</a:t>
-            </a:r>
-          </a:p>
-          <a:p>
-            <a:pPr algn="l" indent="-152400" marL="177800">
-              <a:spcBef>
-                <a:spcPts val="0"/>
-              </a:spcBef>
-              <a:spcAft>
-                <a:spcPts val="600"/>
-              </a:spcAft>
-              <a:buFont typeface="Garamond"/>
-              <a:buChar char="•"/>
-            </a:pPr>
-            <a:r>
-              <a:rPr sz="1300" b="0" i="0">
-                <a:solidFill>
-                  <a:srgbClr val="262626"/>
-                </a:solidFill>
-                <a:latin typeface="Garamond"/>
-                <a:cs typeface="Garamond"/>
-              </a:rPr>
-              <a:t>Market EV at ~$100 is ~$9.3B (~3.5× FY25 EBITDA); intrinsic DCF enterprise value is ~$15B</a:t>
-            </a:r>
-          </a:p>
-          <a:p>
-            <a:pPr algn="l" indent="-152400" marL="177800">
-              <a:spcBef>
-                <a:spcPts val="0"/>
-              </a:spcBef>
-              <a:spcAft>
-                <a:spcPts val="600"/>
-              </a:spcAft>
-              <a:buFont typeface="Garamond"/>
-              <a:buChar char="•"/>
-            </a:pPr>
-            <a:r>
-              <a:rPr sz="1300" b="0" i="0">
-                <a:solidFill>
-                  <a:srgbClr val="262626"/>
-                </a:solidFill>
-                <a:latin typeface="Garamond"/>
-                <a:cs typeface="Garamond"/>
-              </a:rPr>
-              <a:t>We relever Yahoo 5Y β (0.86) at FY25 ASC 842 lease debt ÷ market cap (~0.16 D/E) → β used ≈ 0.84. Damodaran Retail β (0.95) is shown for reference only.</a:t>
-            </a:r>
-          </a:p>
-          <a:p>
-            <a:pPr algn="l" indent="-152400" marL="177800">
-              <a:spcBef>
-                <a:spcPts val="0"/>
-              </a:spcBef>
-              <a:spcAft>
-                <a:spcPts val="600"/>
-              </a:spcAft>
-              <a:buFont typeface="Garamond"/>
-              <a:buChar char="•"/>
-            </a:pPr>
-            <a:r>
-              <a:rPr sz="1300" b="0" i="0">
-                <a:solidFill>
-                  <a:srgbClr val="262626"/>
-                </a:solidFill>
-                <a:latin typeface="Garamond"/>
-                <a:cs typeface="Garamond"/>
-              </a:rPr>
-              <a:t>Capital returned via buybacks (no dividend); FY2025 repurchases $1,178.3M</a:t>
+              <a:t>LULU has no funded bank debt; ASC 842 store leases are the only debt equivalent in our WACC (~14% weight). Cash exceeds lease liabilities → effectively net-cash on a funded-debt basis.</a:t>
             </a:r>
           </a:p>
         </p:txBody>
       </p:sp>
+      <p:graphicFrame>
+        <p:nvGraphicFramePr>
+          <p:cNvPr id="10" name="Table 9"/>
+          <p:cNvGraphicFramePr>
+            <a:graphicFrameLocks noGrp="1"/>
+          </p:cNvGraphicFramePr>
+          <p:nvPr/>
+        </p:nvGraphicFramePr>
+        <p:xfrm>
+          <a:off x="6126480" y="1051560"/>
+          <a:ext cx="5623560" cy="3154680"/>
+        </p:xfrm>
+        <a:graphic>
+          <a:graphicData uri="http://schemas.openxmlformats.org/drawingml/2006/table">
+            <a:tbl>
+              <a:tblPr firstRow="1" bandRow="1">
+                <a:tableStyleId>{5C22544A-7EE6-4342-B048-85BDC9FD1C3A}</a:tableStyleId>
+              </a:tblPr>
+              <a:tblGrid>
+                <a:gridCol w="2148840"/>
+                <a:gridCol w="1737360"/>
+                <a:gridCol w="1737360"/>
+              </a:tblGrid>
+              <a:tr h="242667">
+                <a:tc>
+                  <a:txBody>
+                    <a:bodyPr/>
+                    <a:lstStyle/>
+                    <a:p>
+                      <a:pPr algn="l"/>
+                      <a:r>
+                        <a:rPr sz="850" b="1" i="0">
+                          <a:solidFill>
+                            <a:srgbClr val="FFFFFF"/>
+                          </a:solidFill>
+                          <a:latin typeface="Garamond"/>
+                          <a:cs typeface="Garamond"/>
+                        </a:rPr>
+                        <a:t>WACC input</a:t>
+                      </a:r>
+                    </a:p>
+                  </a:txBody>
+                  <a:tcPr anchor="ctr">
+                    <a:solidFill>
+                      <a:srgbClr val="1F2A44"/>
+                    </a:solidFill>
+                  </a:tcPr>
+                </a:tc>
+                <a:tc>
+                  <a:txBody>
+                    <a:bodyPr/>
+                    <a:lstStyle/>
+                    <a:p>
+                      <a:pPr algn="r"/>
+                      <a:r>
+                        <a:rPr sz="850" b="1" i="0">
+                          <a:solidFill>
+                            <a:srgbClr val="FFFFFF"/>
+                          </a:solidFill>
+                          <a:latin typeface="Garamond"/>
+                          <a:cs typeface="Garamond"/>
+                        </a:rPr>
+                        <a:t>Value</a:t>
+                      </a:r>
+                    </a:p>
+                  </a:txBody>
+                  <a:tcPr anchor="ctr">
+                    <a:solidFill>
+                      <a:srgbClr val="1F2A44"/>
+                    </a:solidFill>
+                  </a:tcPr>
+                </a:tc>
+                <a:tc>
+                  <a:txBody>
+                    <a:bodyPr/>
+                    <a:lstStyle/>
+                    <a:p>
+                      <a:pPr algn="r"/>
+                      <a:r>
+                        <a:rPr sz="850" b="1" i="0">
+                          <a:solidFill>
+                            <a:srgbClr val="FFFFFF"/>
+                          </a:solidFill>
+                          <a:latin typeface="Garamond"/>
+                          <a:cs typeface="Garamond"/>
+                        </a:rPr>
+                        <a:t>Model source</a:t>
+                      </a:r>
+                    </a:p>
+                  </a:txBody>
+                  <a:tcPr anchor="ctr">
+                    <a:solidFill>
+                      <a:srgbClr val="1F2A44"/>
+                    </a:solidFill>
+                  </a:tcPr>
+                </a:tc>
+              </a:tr>
+              <a:tr h="242667">
+                <a:tc>
+                  <a:txBody>
+                    <a:bodyPr/>
+                    <a:lstStyle/>
+                    <a:p>
+                      <a:pPr algn="l"/>
+                      <a:r>
+                        <a:rPr sz="850" b="0" i="0">
+                          <a:solidFill>
+                            <a:srgbClr val="262626"/>
+                          </a:solidFill>
+                          <a:latin typeface="Garamond"/>
+                          <a:cs typeface="Garamond"/>
+                        </a:rPr>
+                        <a:t>Risk-free rate (10-yr UST)</a:t>
+                      </a:r>
+                    </a:p>
+                    <a:p>
+                      <a:pPr algn="l"/>
+                      <a:r>
+                        <a:rPr sz="650" b="0" i="1">
+                          <a:solidFill>
+                            <a:srgbClr val="8C8C8C"/>
+                          </a:solidFill>
+                          <a:latin typeface="Garamond"/>
+                          <a:cs typeface="Garamond"/>
+                        </a:rPr>
+                        <a:t>FRED DGS10 → 4.8% in model</a:t>
+                      </a:r>
+                    </a:p>
+                  </a:txBody>
+                  <a:tcPr anchor="ctr" marT="12700" marB="12700">
+                    <a:solidFill>
+                      <a:srgbClr val="FFFFFF"/>
+                    </a:solidFill>
+                  </a:tcPr>
+                </a:tc>
+                <a:tc>
+                  <a:txBody>
+                    <a:bodyPr/>
+                    <a:lstStyle/>
+                    <a:p>
+                      <a:pPr algn="r"/>
+                      <a:r>
+                        <a:rPr sz="850" b="0" i="0">
+                          <a:solidFill>
+                            <a:srgbClr val="262626"/>
+                          </a:solidFill>
+                          <a:latin typeface="Garamond"/>
+                          <a:cs typeface="Garamond"/>
+                        </a:rPr>
+                        <a:t>4.80%</a:t>
+                      </a:r>
+                    </a:p>
+                  </a:txBody>
+                  <a:tcPr anchor="ctr" marT="12700" marB="12700">
+                    <a:solidFill>
+                      <a:srgbClr val="FFFFFF"/>
+                    </a:solidFill>
+                  </a:tcPr>
+                </a:tc>
+                <a:tc>
+                  <a:txBody>
+                    <a:bodyPr/>
+                    <a:lstStyle/>
+                    <a:p>
+                      <a:pPr algn="r"/>
+                      <a:r>
+                        <a:rPr sz="850" b="0" i="0">
+                          <a:solidFill>
+                            <a:srgbClr val="262626"/>
+                          </a:solidFill>
+                          <a:latin typeface="Garamond"/>
+                          <a:cs typeface="Garamond"/>
+                        </a:rPr>
+                        <a:t>WACC!E3</a:t>
+                      </a:r>
+                    </a:p>
+                  </a:txBody>
+                  <a:tcPr anchor="ctr" marT="12700" marB="12700">
+                    <a:solidFill>
+                      <a:srgbClr val="FFFFFF"/>
+                    </a:solidFill>
+                  </a:tcPr>
+                </a:tc>
+              </a:tr>
+              <a:tr h="242667">
+                <a:tc>
+                  <a:txBody>
+                    <a:bodyPr/>
+                    <a:lstStyle/>
+                    <a:p>
+                      <a:pPr algn="l"/>
+                      <a:r>
+                        <a:rPr sz="850" b="0" i="0">
+                          <a:solidFill>
+                            <a:srgbClr val="262626"/>
+                          </a:solidFill>
+                          <a:latin typeface="Garamond"/>
+                          <a:cs typeface="Garamond"/>
+                        </a:rPr>
+                        <a:t>Equity risk premium</a:t>
+                      </a:r>
+                    </a:p>
+                    <a:p>
+                      <a:pPr algn="l"/>
+                      <a:r>
+                        <a:rPr sz="650" b="0" i="1">
+                          <a:solidFill>
+                            <a:srgbClr val="8C8C8C"/>
+                          </a:solidFill>
+                          <a:latin typeface="Garamond"/>
+                          <a:cs typeface="Garamond"/>
+                        </a:rPr>
+                        <a:t>Conservative vs Damodaran implied ERP</a:t>
+                      </a:r>
+                    </a:p>
+                  </a:txBody>
+                  <a:tcPr anchor="ctr" marT="12700" marB="12700">
+                    <a:solidFill>
+                      <a:srgbClr val="F0F1F3"/>
+                    </a:solidFill>
+                  </a:tcPr>
+                </a:tc>
+                <a:tc>
+                  <a:txBody>
+                    <a:bodyPr/>
+                    <a:lstStyle/>
+                    <a:p>
+                      <a:pPr algn="r"/>
+                      <a:r>
+                        <a:rPr sz="850" b="0" i="0">
+                          <a:solidFill>
+                            <a:srgbClr val="262626"/>
+                          </a:solidFill>
+                          <a:latin typeface="Garamond"/>
+                          <a:cs typeface="Garamond"/>
+                        </a:rPr>
+                        <a:t>6.00%</a:t>
+                      </a:r>
+                    </a:p>
+                  </a:txBody>
+                  <a:tcPr anchor="ctr" marT="12700" marB="12700">
+                    <a:solidFill>
+                      <a:srgbClr val="F0F1F3"/>
+                    </a:solidFill>
+                  </a:tcPr>
+                </a:tc>
+                <a:tc>
+                  <a:txBody>
+                    <a:bodyPr/>
+                    <a:lstStyle/>
+                    <a:p>
+                      <a:pPr algn="r"/>
+                      <a:r>
+                        <a:rPr sz="850" b="0" i="0">
+                          <a:solidFill>
+                            <a:srgbClr val="262626"/>
+                          </a:solidFill>
+                          <a:latin typeface="Garamond"/>
+                          <a:cs typeface="Garamond"/>
+                        </a:rPr>
+                        <a:t>WACC!E4</a:t>
+                      </a:r>
+                    </a:p>
+                  </a:txBody>
+                  <a:tcPr anchor="ctr" marT="12700" marB="12700">
+                    <a:solidFill>
+                      <a:srgbClr val="F0F1F3"/>
+                    </a:solidFill>
+                  </a:tcPr>
+                </a:tc>
+              </a:tr>
+              <a:tr h="242667">
+                <a:tc>
+                  <a:txBody>
+                    <a:bodyPr/>
+                    <a:lstStyle/>
+                    <a:p>
+                      <a:pPr algn="l"/>
+                      <a:r>
+                        <a:rPr sz="850" b="0" i="0">
+                          <a:solidFill>
+                            <a:srgbClr val="262626"/>
+                          </a:solidFill>
+                          <a:latin typeface="Garamond"/>
+                          <a:cs typeface="Garamond"/>
+                        </a:rPr>
+                        <a:t>Tax rate</a:t>
+                      </a:r>
+                    </a:p>
+                    <a:p>
+                      <a:pPr algn="l"/>
+                      <a:r>
+                        <a:rPr sz="650" b="0" i="1">
+                          <a:solidFill>
+                            <a:srgbClr val="8C8C8C"/>
+                          </a:solidFill>
+                          <a:latin typeface="Garamond"/>
+                          <a:cs typeface="Garamond"/>
+                        </a:rPr>
+                        <a:t>FY2026 guidance ~30%</a:t>
+                      </a:r>
+                    </a:p>
+                  </a:txBody>
+                  <a:tcPr anchor="ctr" marT="12700" marB="12700">
+                    <a:solidFill>
+                      <a:srgbClr val="FFFFFF"/>
+                    </a:solidFill>
+                  </a:tcPr>
+                </a:tc>
+                <a:tc>
+                  <a:txBody>
+                    <a:bodyPr/>
+                    <a:lstStyle/>
+                    <a:p>
+                      <a:pPr algn="r"/>
+                      <a:r>
+                        <a:rPr sz="850" b="0" i="0">
+                          <a:solidFill>
+                            <a:srgbClr val="262626"/>
+                          </a:solidFill>
+                          <a:latin typeface="Garamond"/>
+                          <a:cs typeface="Garamond"/>
+                        </a:rPr>
+                        <a:t>30.00%</a:t>
+                      </a:r>
+                    </a:p>
+                  </a:txBody>
+                  <a:tcPr anchor="ctr" marT="12700" marB="12700">
+                    <a:solidFill>
+                      <a:srgbClr val="FFFFFF"/>
+                    </a:solidFill>
+                  </a:tcPr>
+                </a:tc>
+                <a:tc>
+                  <a:txBody>
+                    <a:bodyPr/>
+                    <a:lstStyle/>
+                    <a:p>
+                      <a:pPr algn="r"/>
+                      <a:r>
+                        <a:rPr sz="850" b="0" i="0">
+                          <a:solidFill>
+                            <a:srgbClr val="262626"/>
+                          </a:solidFill>
+                          <a:latin typeface="Garamond"/>
+                          <a:cs typeface="Garamond"/>
+                        </a:rPr>
+                        <a:t>WACC!E5</a:t>
+                      </a:r>
+                    </a:p>
+                  </a:txBody>
+                  <a:tcPr anchor="ctr" marT="12700" marB="12700">
+                    <a:solidFill>
+                      <a:srgbClr val="FFFFFF"/>
+                    </a:solidFill>
+                  </a:tcPr>
+                </a:tc>
+              </a:tr>
+              <a:tr h="242667">
+                <a:tc>
+                  <a:txBody>
+                    <a:bodyPr/>
+                    <a:lstStyle/>
+                    <a:p>
+                      <a:pPr algn="l"/>
+                      <a:r>
+                        <a:rPr sz="850" b="0" i="0">
+                          <a:solidFill>
+                            <a:srgbClr val="262626"/>
+                          </a:solidFill>
+                          <a:latin typeface="Garamond"/>
+                          <a:cs typeface="Garamond"/>
+                        </a:rPr>
+                        <a:t>Observed βL (Yahoo 5Y monthly)</a:t>
+                      </a:r>
+                    </a:p>
+                    <a:p>
+                      <a:pPr algn="l"/>
+                      <a:r>
+                        <a:rPr sz="650" b="0" i="1">
+                          <a:solidFill>
+                            <a:srgbClr val="8C8C8C"/>
+                          </a:solidFill>
+                          <a:latin typeface="Garamond"/>
+                          <a:cs typeface="Garamond"/>
+                        </a:rPr>
+                        <a:t>Yahoo Key Statistics</a:t>
+                      </a:r>
+                    </a:p>
+                  </a:txBody>
+                  <a:tcPr anchor="ctr" marT="12700" marB="12700">
+                    <a:solidFill>
+                      <a:srgbClr val="F0F1F3"/>
+                    </a:solidFill>
+                  </a:tcPr>
+                </a:tc>
+                <a:tc>
+                  <a:txBody>
+                    <a:bodyPr/>
+                    <a:lstStyle/>
+                    <a:p>
+                      <a:pPr algn="r"/>
+                      <a:r>
+                        <a:rPr sz="850" b="0" i="0">
+                          <a:solidFill>
+                            <a:srgbClr val="262626"/>
+                          </a:solidFill>
+                          <a:latin typeface="Garamond"/>
+                          <a:cs typeface="Garamond"/>
+                        </a:rPr>
+                        <a:t>0.86</a:t>
+                      </a:r>
+                    </a:p>
+                  </a:txBody>
+                  <a:tcPr anchor="ctr" marT="12700" marB="12700">
+                    <a:solidFill>
+                      <a:srgbClr val="F0F1F3"/>
+                    </a:solidFill>
+                  </a:tcPr>
+                </a:tc>
+                <a:tc>
+                  <a:txBody>
+                    <a:bodyPr/>
+                    <a:lstStyle/>
+                    <a:p>
+                      <a:pPr algn="r"/>
+                      <a:r>
+                        <a:rPr sz="850" b="0" i="0">
+                          <a:solidFill>
+                            <a:srgbClr val="262626"/>
+                          </a:solidFill>
+                          <a:latin typeface="Garamond"/>
+                          <a:cs typeface="Garamond"/>
+                        </a:rPr>
+                        <a:t>WACC!E17</a:t>
+                      </a:r>
+                    </a:p>
+                  </a:txBody>
+                  <a:tcPr anchor="ctr" marT="12700" marB="12700">
+                    <a:solidFill>
+                      <a:srgbClr val="F0F1F3"/>
+                    </a:solidFill>
+                  </a:tcPr>
+                </a:tc>
+              </a:tr>
+              <a:tr h="242667">
+                <a:tc>
+                  <a:txBody>
+                    <a:bodyPr/>
+                    <a:lstStyle/>
+                    <a:p>
+                      <a:pPr algn="l"/>
+                      <a:r>
+                        <a:rPr sz="850" b="0" i="0">
+                          <a:solidFill>
+                            <a:srgbClr val="262626"/>
+                          </a:solidFill>
+                          <a:latin typeface="Garamond"/>
+                          <a:cs typeface="Garamond"/>
+                        </a:rPr>
+                        <a:t>Unlevered βu (Hamada @ Yahoo D/E)</a:t>
+                      </a:r>
+                    </a:p>
+                    <a:p>
+                      <a:pPr algn="l"/>
+                      <a:r>
+                        <a:rPr sz="650" b="0" i="1">
+                          <a:solidFill>
+                            <a:srgbClr val="8C8C8C"/>
+                          </a:solidFill>
+                          <a:latin typeface="Garamond"/>
+                          <a:cs typeface="Garamond"/>
+                        </a:rPr>
+                        <a:t>D/E unlever = 0.19 (Yahoo mrq)</a:t>
+                      </a:r>
+                    </a:p>
+                  </a:txBody>
+                  <a:tcPr anchor="ctr" marT="12700" marB="12700">
+                    <a:solidFill>
+                      <a:srgbClr val="FFFFFF"/>
+                    </a:solidFill>
+                  </a:tcPr>
+                </a:tc>
+                <a:tc>
+                  <a:txBody>
+                    <a:bodyPr/>
+                    <a:lstStyle/>
+                    <a:p>
+                      <a:pPr algn="r"/>
+                      <a:r>
+                        <a:rPr sz="850" b="0" i="0">
+                          <a:solidFill>
+                            <a:srgbClr val="262626"/>
+                          </a:solidFill>
+                          <a:latin typeface="Garamond"/>
+                          <a:cs typeface="Garamond"/>
+                        </a:rPr>
+                        <a:t>0.76</a:t>
+                      </a:r>
+                    </a:p>
+                  </a:txBody>
+                  <a:tcPr anchor="ctr" marT="12700" marB="12700">
+                    <a:solidFill>
+                      <a:srgbClr val="FFFFFF"/>
+                    </a:solidFill>
+                  </a:tcPr>
+                </a:tc>
+                <a:tc>
+                  <a:txBody>
+                    <a:bodyPr/>
+                    <a:lstStyle/>
+                    <a:p>
+                      <a:pPr algn="r"/>
+                      <a:r>
+                        <a:rPr sz="850" b="0" i="0">
+                          <a:solidFill>
+                            <a:srgbClr val="262626"/>
+                          </a:solidFill>
+                          <a:latin typeface="Garamond"/>
+                          <a:cs typeface="Garamond"/>
+                        </a:rPr>
+                        <a:t>WACC!E22</a:t>
+                      </a:r>
+                    </a:p>
+                  </a:txBody>
+                  <a:tcPr anchor="ctr" marT="12700" marB="12700">
+                    <a:solidFill>
+                      <a:srgbClr val="FFFFFF"/>
+                    </a:solidFill>
+                  </a:tcPr>
+                </a:tc>
+              </a:tr>
+              <a:tr h="242667">
+                <a:tc>
+                  <a:txBody>
+                    <a:bodyPr/>
+                    <a:lstStyle/>
+                    <a:p>
+                      <a:pPr algn="l"/>
+                      <a:r>
+                        <a:rPr sz="850" b="0" i="0">
+                          <a:solidFill>
+                            <a:srgbClr val="262626"/>
+                          </a:solidFill>
+                          <a:latin typeface="Garamond"/>
+                          <a:cs typeface="Garamond"/>
+                        </a:rPr>
+                        <a:t>Relevered β (FY25 lease D/E)</a:t>
+                      </a:r>
+                    </a:p>
+                    <a:p>
+                      <a:pPr algn="l"/>
+                      <a:r>
+                        <a:rPr sz="650" b="0" i="1">
+                          <a:solidFill>
+                            <a:srgbClr val="8C8C8C"/>
+                          </a:solidFill>
+                          <a:latin typeface="Garamond"/>
+                          <a:cs typeface="Garamond"/>
+                        </a:rPr>
+                        <a:t>D/E relever = 0.16 (10-K leases / mkt cap)</a:t>
+                      </a:r>
+                    </a:p>
+                  </a:txBody>
+                  <a:tcPr anchor="ctr" marT="12700" marB="12700">
+                    <a:solidFill>
+                      <a:srgbClr val="F0F1F3"/>
+                    </a:solidFill>
+                  </a:tcPr>
+                </a:tc>
+                <a:tc>
+                  <a:txBody>
+                    <a:bodyPr/>
+                    <a:lstStyle/>
+                    <a:p>
+                      <a:pPr algn="r"/>
+                      <a:r>
+                        <a:rPr sz="850" b="0" i="0">
+                          <a:solidFill>
+                            <a:srgbClr val="262626"/>
+                          </a:solidFill>
+                          <a:latin typeface="Garamond"/>
+                          <a:cs typeface="Garamond"/>
+                        </a:rPr>
+                        <a:t>0.84</a:t>
+                      </a:r>
+                    </a:p>
+                  </a:txBody>
+                  <a:tcPr anchor="ctr" marT="12700" marB="12700">
+                    <a:solidFill>
+                      <a:srgbClr val="F0F1F3"/>
+                    </a:solidFill>
+                  </a:tcPr>
+                </a:tc>
+                <a:tc>
+                  <a:txBody>
+                    <a:bodyPr/>
+                    <a:lstStyle/>
+                    <a:p>
+                      <a:pPr algn="r"/>
+                      <a:r>
+                        <a:rPr sz="850" b="0" i="0">
+                          <a:solidFill>
+                            <a:srgbClr val="262626"/>
+                          </a:solidFill>
+                          <a:latin typeface="Garamond"/>
+                          <a:cs typeface="Garamond"/>
+                        </a:rPr>
+                        <a:t>WACC!E25</a:t>
+                      </a:r>
+                    </a:p>
+                  </a:txBody>
+                  <a:tcPr anchor="ctr" marT="12700" marB="12700">
+                    <a:solidFill>
+                      <a:srgbClr val="F0F1F3"/>
+                    </a:solidFill>
+                  </a:tcPr>
+                </a:tc>
+              </a:tr>
+              <a:tr h="242667">
+                <a:tc>
+                  <a:txBody>
+                    <a:bodyPr/>
+                    <a:lstStyle/>
+                    <a:p>
+                      <a:pPr algn="l"/>
+                      <a:r>
+                        <a:rPr sz="850" b="1" i="0">
+                          <a:solidFill>
+                            <a:srgbClr val="1F2A44"/>
+                          </a:solidFill>
+                          <a:latin typeface="Garamond"/>
+                          <a:cs typeface="Garamond"/>
+                        </a:rPr>
+                        <a:t>Cost of equity (CAPM)</a:t>
+                      </a:r>
+                    </a:p>
+                    <a:p>
+                      <a:pPr algn="l"/>
+                      <a:r>
+                        <a:rPr sz="650" b="0" i="1">
+                          <a:solidFill>
+                            <a:srgbClr val="8C8C8C"/>
+                          </a:solidFill>
+                          <a:latin typeface="Garamond"/>
+                          <a:cs typeface="Garamond"/>
+                        </a:rPr>
+                        <a:t>rf + β × ERP</a:t>
+                      </a:r>
+                    </a:p>
+                  </a:txBody>
+                  <a:tcPr anchor="ctr" marT="12700" marB="12700">
+                    <a:solidFill>
+                      <a:srgbClr val="FFFFFF"/>
+                    </a:solidFill>
+                  </a:tcPr>
+                </a:tc>
+                <a:tc>
+                  <a:txBody>
+                    <a:bodyPr/>
+                    <a:lstStyle/>
+                    <a:p>
+                      <a:pPr algn="r"/>
+                      <a:r>
+                        <a:rPr sz="850" b="1" i="0">
+                          <a:solidFill>
+                            <a:srgbClr val="1F2A44"/>
+                          </a:solidFill>
+                          <a:latin typeface="Garamond"/>
+                          <a:cs typeface="Garamond"/>
+                        </a:rPr>
+                        <a:t>9.86%</a:t>
+                      </a:r>
+                    </a:p>
+                  </a:txBody>
+                  <a:tcPr anchor="ctr" marT="12700" marB="12700">
+                    <a:solidFill>
+                      <a:srgbClr val="FFFFFF"/>
+                    </a:solidFill>
+                  </a:tcPr>
+                </a:tc>
+                <a:tc>
+                  <a:txBody>
+                    <a:bodyPr/>
+                    <a:lstStyle/>
+                    <a:p>
+                      <a:pPr algn="r"/>
+                      <a:r>
+                        <a:rPr sz="850" b="1" i="0">
+                          <a:solidFill>
+                            <a:srgbClr val="1F2A44"/>
+                          </a:solidFill>
+                          <a:latin typeface="Garamond"/>
+                          <a:cs typeface="Garamond"/>
+                        </a:rPr>
+                        <a:t>WACC!E32</a:t>
+                      </a:r>
+                    </a:p>
+                  </a:txBody>
+                  <a:tcPr anchor="ctr" marT="12700" marB="12700">
+                    <a:solidFill>
+                      <a:srgbClr val="FFFFFF"/>
+                    </a:solidFill>
+                  </a:tcPr>
+                </a:tc>
+              </a:tr>
+              <a:tr h="242667">
+                <a:tc>
+                  <a:txBody>
+                    <a:bodyPr/>
+                    <a:lstStyle/>
+                    <a:p>
+                      <a:pPr algn="l"/>
+                      <a:r>
+                        <a:rPr sz="850" b="0" i="0">
+                          <a:solidFill>
+                            <a:srgbClr val="262626"/>
+                          </a:solidFill>
+                          <a:latin typeface="Garamond"/>
+                          <a:cs typeface="Garamond"/>
+                        </a:rPr>
+                        <a:t>Pre-tax Kd (lease-equivalent)</a:t>
+                      </a:r>
+                    </a:p>
+                    <a:p>
+                      <a:pPr algn="l"/>
+                      <a:r>
+                        <a:rPr sz="650" b="0" i="1">
+                          <a:solidFill>
+                            <a:srgbClr val="8C8C8C"/>
+                          </a:solidFill>
+                          <a:latin typeface="Garamond"/>
+                          <a:cs typeface="Garamond"/>
+                        </a:rPr>
+                        <a:t>Illustrative lease borrowing cost</a:t>
+                      </a:r>
+                    </a:p>
+                  </a:txBody>
+                  <a:tcPr anchor="ctr" marT="12700" marB="12700">
+                    <a:solidFill>
+                      <a:srgbClr val="F0F1F3"/>
+                    </a:solidFill>
+                  </a:tcPr>
+                </a:tc>
+                <a:tc>
+                  <a:txBody>
+                    <a:bodyPr/>
+                    <a:lstStyle/>
+                    <a:p>
+                      <a:pPr algn="r"/>
+                      <a:r>
+                        <a:rPr sz="850" b="0" i="0">
+                          <a:solidFill>
+                            <a:srgbClr val="262626"/>
+                          </a:solidFill>
+                          <a:latin typeface="Garamond"/>
+                          <a:cs typeface="Garamond"/>
+                        </a:rPr>
+                        <a:t>5.00%</a:t>
+                      </a:r>
+                    </a:p>
+                  </a:txBody>
+                  <a:tcPr anchor="ctr" marT="12700" marB="12700">
+                    <a:solidFill>
+                      <a:srgbClr val="F0F1F3"/>
+                    </a:solidFill>
+                  </a:tcPr>
+                </a:tc>
+                <a:tc>
+                  <a:txBody>
+                    <a:bodyPr/>
+                    <a:lstStyle/>
+                    <a:p>
+                      <a:pPr algn="r"/>
+                      <a:r>
+                        <a:rPr sz="850" b="0" i="0">
+                          <a:solidFill>
+                            <a:srgbClr val="262626"/>
+                          </a:solidFill>
+                          <a:latin typeface="Garamond"/>
+                          <a:cs typeface="Garamond"/>
+                        </a:rPr>
+                        <a:t>WACC!E35</a:t>
+                      </a:r>
+                    </a:p>
+                  </a:txBody>
+                  <a:tcPr anchor="ctr" marT="12700" marB="12700">
+                    <a:solidFill>
+                      <a:srgbClr val="F0F1F3"/>
+                    </a:solidFill>
+                  </a:tcPr>
+                </a:tc>
+              </a:tr>
+              <a:tr h="242667">
+                <a:tc>
+                  <a:txBody>
+                    <a:bodyPr/>
+                    <a:lstStyle/>
+                    <a:p>
+                      <a:pPr algn="l"/>
+                      <a:r>
+                        <a:rPr sz="850" b="0" i="0">
+                          <a:solidFill>
+                            <a:srgbClr val="262626"/>
+                          </a:solidFill>
+                          <a:latin typeface="Garamond"/>
+                          <a:cs typeface="Garamond"/>
+                        </a:rPr>
+                        <a:t>After-tax Kd</a:t>
+                      </a:r>
+                    </a:p>
+                    <a:p>
+                      <a:pPr algn="l"/>
+                      <a:r>
+                        <a:rPr sz="650" b="0" i="1">
+                          <a:solidFill>
+                            <a:srgbClr val="8C8C8C"/>
+                          </a:solidFill>
+                          <a:latin typeface="Garamond"/>
+                          <a:cs typeface="Garamond"/>
+                        </a:rPr>
+                        <a:t>Kd × (1 − T)</a:t>
+                      </a:r>
+                    </a:p>
+                  </a:txBody>
+                  <a:tcPr anchor="ctr" marT="12700" marB="12700">
+                    <a:solidFill>
+                      <a:srgbClr val="FFFFFF"/>
+                    </a:solidFill>
+                  </a:tcPr>
+                </a:tc>
+                <a:tc>
+                  <a:txBody>
+                    <a:bodyPr/>
+                    <a:lstStyle/>
+                    <a:p>
+                      <a:pPr algn="r"/>
+                      <a:r>
+                        <a:rPr sz="850" b="0" i="0">
+                          <a:solidFill>
+                            <a:srgbClr val="262626"/>
+                          </a:solidFill>
+                          <a:latin typeface="Garamond"/>
+                          <a:cs typeface="Garamond"/>
+                        </a:rPr>
+                        <a:t>3.50%</a:t>
+                      </a:r>
+                    </a:p>
+                  </a:txBody>
+                  <a:tcPr anchor="ctr" marT="12700" marB="12700">
+                    <a:solidFill>
+                      <a:srgbClr val="FFFFFF"/>
+                    </a:solidFill>
+                  </a:tcPr>
+                </a:tc>
+                <a:tc>
+                  <a:txBody>
+                    <a:bodyPr/>
+                    <a:lstStyle/>
+                    <a:p>
+                      <a:pPr algn="r"/>
+                      <a:r>
+                        <a:rPr sz="850" b="0" i="0">
+                          <a:solidFill>
+                            <a:srgbClr val="262626"/>
+                          </a:solidFill>
+                          <a:latin typeface="Garamond"/>
+                          <a:cs typeface="Garamond"/>
+                        </a:rPr>
+                        <a:t>WACC!E36</a:t>
+                      </a:r>
+                    </a:p>
+                  </a:txBody>
+                  <a:tcPr anchor="ctr" marT="12700" marB="12700">
+                    <a:solidFill>
+                      <a:srgbClr val="FFFFFF"/>
+                    </a:solidFill>
+                  </a:tcPr>
+                </a:tc>
+              </a:tr>
+              <a:tr h="242667">
+                <a:tc>
+                  <a:txBody>
+                    <a:bodyPr/>
+                    <a:lstStyle/>
+                    <a:p>
+                      <a:pPr algn="l"/>
+                      <a:r>
+                        <a:rPr sz="850" b="0" i="0">
+                          <a:solidFill>
+                            <a:srgbClr val="262626"/>
+                          </a:solidFill>
+                          <a:latin typeface="Garamond"/>
+                          <a:cs typeface="Garamond"/>
+                        </a:rPr>
+                        <a:t>Equity weight</a:t>
+                      </a:r>
+                    </a:p>
+                    <a:p>
+                      <a:pPr algn="l"/>
+                      <a:r>
+                        <a:rPr sz="650" b="0" i="1">
+                          <a:solidFill>
+                            <a:srgbClr val="8C8C8C"/>
+                          </a:solidFill>
+                          <a:latin typeface="Garamond"/>
+                          <a:cs typeface="Garamond"/>
+                        </a:rPr>
+                        <a:t>Market equity / total capital</a:t>
+                      </a:r>
+                    </a:p>
+                  </a:txBody>
+                  <a:tcPr anchor="ctr" marT="12700" marB="12700">
+                    <a:solidFill>
+                      <a:srgbClr val="F0F1F3"/>
+                    </a:solidFill>
+                  </a:tcPr>
+                </a:tc>
+                <a:tc>
+                  <a:txBody>
+                    <a:bodyPr/>
+                    <a:lstStyle/>
+                    <a:p>
+                      <a:pPr algn="r"/>
+                      <a:r>
+                        <a:rPr sz="850" b="0" i="0">
+                          <a:solidFill>
+                            <a:srgbClr val="262626"/>
+                          </a:solidFill>
+                          <a:latin typeface="Garamond"/>
+                          <a:cs typeface="Garamond"/>
+                        </a:rPr>
+                        <a:t>86.1%</a:t>
+                      </a:r>
+                    </a:p>
+                  </a:txBody>
+                  <a:tcPr anchor="ctr" marT="12700" marB="12700">
+                    <a:solidFill>
+                      <a:srgbClr val="F0F1F3"/>
+                    </a:solidFill>
+                  </a:tcPr>
+                </a:tc>
+                <a:tc>
+                  <a:txBody>
+                    <a:bodyPr/>
+                    <a:lstStyle/>
+                    <a:p>
+                      <a:pPr algn="r"/>
+                      <a:r>
+                        <a:rPr sz="850" b="0" i="0">
+                          <a:solidFill>
+                            <a:srgbClr val="262626"/>
+                          </a:solidFill>
+                          <a:latin typeface="Garamond"/>
+                          <a:cs typeface="Garamond"/>
+                        </a:rPr>
+                        <a:t>WACC!E39</a:t>
+                      </a:r>
+                    </a:p>
+                  </a:txBody>
+                  <a:tcPr anchor="ctr" marT="12700" marB="12700">
+                    <a:solidFill>
+                      <a:srgbClr val="F0F1F3"/>
+                    </a:solidFill>
+                  </a:tcPr>
+                </a:tc>
+              </a:tr>
+              <a:tr h="242667">
+                <a:tc>
+                  <a:txBody>
+                    <a:bodyPr/>
+                    <a:lstStyle/>
+                    <a:p>
+                      <a:pPr algn="l"/>
+                      <a:r>
+                        <a:rPr sz="850" b="0" i="0">
+                          <a:solidFill>
+                            <a:srgbClr val="262626"/>
+                          </a:solidFill>
+                          <a:latin typeface="Garamond"/>
+                          <a:cs typeface="Garamond"/>
+                        </a:rPr>
+                        <a:t>Debt weight (leases)</a:t>
+                      </a:r>
+                    </a:p>
+                    <a:p>
+                      <a:pPr algn="l"/>
+                      <a:r>
+                        <a:rPr sz="650" b="0" i="1">
+                          <a:solidFill>
+                            <a:srgbClr val="8C8C8C"/>
+                          </a:solidFill>
+                          <a:latin typeface="Garamond"/>
+                          <a:cs typeface="Garamond"/>
+                        </a:rPr>
+                        <a:t>Lease debt / total capital</a:t>
+                      </a:r>
+                    </a:p>
+                  </a:txBody>
+                  <a:tcPr anchor="ctr" marT="12700" marB="12700">
+                    <a:solidFill>
+                      <a:srgbClr val="FFFFFF"/>
+                    </a:solidFill>
+                  </a:tcPr>
+                </a:tc>
+                <a:tc>
+                  <a:txBody>
+                    <a:bodyPr/>
+                    <a:lstStyle/>
+                    <a:p>
+                      <a:pPr algn="r"/>
+                      <a:r>
+                        <a:rPr sz="850" b="0" i="0">
+                          <a:solidFill>
+                            <a:srgbClr val="262626"/>
+                          </a:solidFill>
+                          <a:latin typeface="Garamond"/>
+                          <a:cs typeface="Garamond"/>
+                        </a:rPr>
+                        <a:t>13.9%</a:t>
+                      </a:r>
+                    </a:p>
+                  </a:txBody>
+                  <a:tcPr anchor="ctr" marT="12700" marB="12700">
+                    <a:solidFill>
+                      <a:srgbClr val="FFFFFF"/>
+                    </a:solidFill>
+                  </a:tcPr>
+                </a:tc>
+                <a:tc>
+                  <a:txBody>
+                    <a:bodyPr/>
+                    <a:lstStyle/>
+                    <a:p>
+                      <a:pPr algn="r"/>
+                      <a:r>
+                        <a:rPr sz="850" b="0" i="0">
+                          <a:solidFill>
+                            <a:srgbClr val="262626"/>
+                          </a:solidFill>
+                          <a:latin typeface="Garamond"/>
+                          <a:cs typeface="Garamond"/>
+                        </a:rPr>
+                        <a:t>WACC!E40</a:t>
+                      </a:r>
+                    </a:p>
+                  </a:txBody>
+                  <a:tcPr anchor="ctr" marT="12700" marB="12700">
+                    <a:solidFill>
+                      <a:srgbClr val="FFFFFF"/>
+                    </a:solidFill>
+                  </a:tcPr>
+                </a:tc>
+              </a:tr>
+              <a:tr h="242676">
+                <a:tc>
+                  <a:txBody>
+                    <a:bodyPr/>
+                    <a:lstStyle/>
+                    <a:p>
+                      <a:pPr algn="l"/>
+                      <a:r>
+                        <a:rPr sz="850" b="1" i="0">
+                          <a:solidFill>
+                            <a:srgbClr val="1F2A44"/>
+                          </a:solidFill>
+                          <a:latin typeface="Garamond"/>
+                          <a:cs typeface="Garamond"/>
+                        </a:rPr>
+                        <a:t>WACC</a:t>
+                      </a:r>
+                    </a:p>
+                    <a:p>
+                      <a:pPr algn="l"/>
+                      <a:r>
+                        <a:rPr sz="650" b="0" i="1">
+                          <a:solidFill>
+                            <a:srgbClr val="8C8C8C"/>
+                          </a:solidFill>
+                          <a:latin typeface="Garamond"/>
+                          <a:cs typeface="Garamond"/>
+                        </a:rPr>
+                        <a:t>We × CoE + Wd × Kd(1−T) → Scenarios col G</a:t>
+                      </a:r>
+                    </a:p>
+                  </a:txBody>
+                  <a:tcPr anchor="ctr" marT="12700" marB="12700">
+                    <a:solidFill>
+                      <a:srgbClr val="F0F1F3"/>
+                    </a:solidFill>
+                  </a:tcPr>
+                </a:tc>
+                <a:tc>
+                  <a:txBody>
+                    <a:bodyPr/>
+                    <a:lstStyle/>
+                    <a:p>
+                      <a:pPr algn="r"/>
+                      <a:r>
+                        <a:rPr sz="850" b="1" i="0">
+                          <a:solidFill>
+                            <a:srgbClr val="1F2A44"/>
+                          </a:solidFill>
+                          <a:latin typeface="Garamond"/>
+                          <a:cs typeface="Garamond"/>
+                        </a:rPr>
+                        <a:t>8.98%</a:t>
+                      </a:r>
+                    </a:p>
+                  </a:txBody>
+                  <a:tcPr anchor="ctr" marT="12700" marB="12700">
+                    <a:solidFill>
+                      <a:srgbClr val="F0F1F3"/>
+                    </a:solidFill>
+                  </a:tcPr>
+                </a:tc>
+                <a:tc>
+                  <a:txBody>
+                    <a:bodyPr/>
+                    <a:lstStyle/>
+                    <a:p>
+                      <a:pPr algn="r"/>
+                      <a:r>
+                        <a:rPr sz="850" b="1" i="0">
+                          <a:solidFill>
+                            <a:srgbClr val="1F2A44"/>
+                          </a:solidFill>
+                          <a:latin typeface="Garamond"/>
+                          <a:cs typeface="Garamond"/>
+                        </a:rPr>
+                        <a:t>WACC!E41</a:t>
+                      </a:r>
+                    </a:p>
+                  </a:txBody>
+                  <a:tcPr anchor="ctr" marT="12700" marB="12700">
+                    <a:solidFill>
+                      <a:srgbClr val="F0F1F3"/>
+                    </a:solidFill>
+                  </a:tcPr>
+                </a:tc>
+              </a:tr>
+            </a:tbl>
+          </a:graphicData>
+        </a:graphic>
+      </p:graphicFrame>
       <p:sp>
         <p:nvSpPr>
-          <p:cNvPr id="9" name="Rectangle 8"/>
+          <p:cNvPr id="11" name="Rectangle 10"/>
           <p:cNvSpPr/>
           <p:nvPr/>
         </p:nvSpPr>
         <p:spPr>
           <a:xfrm>
-            <a:off x="6400800" y="1097280"/>
-            <a:ext cx="5349240" cy="4206240"/>
+            <a:off x="6126480" y="4315968"/>
+            <a:ext cx="5623560" cy="502920"/>
           </a:xfrm>
           <a:prstGeom prst="rect">
             <a:avLst/>
@@ -16672,198 +18499,40 @@
                 <a:spcPts val="0"/>
               </a:spcBef>
               <a:spcAft>
-                <a:spcPts val="800"/>
-              </a:spcAft>
-              <a:buNone/>
-            </a:pPr>
-            <a:r>
-              <a:rPr sz="1300" b="1" i="0">
-                <a:solidFill>
-                  <a:srgbClr val="990000"/>
-                </a:solidFill>
-                <a:latin typeface="Garamond"/>
-                <a:cs typeface="Garamond"/>
-              </a:rPr>
-              <a:t>WACC BUILD (CAPM)</a:t>
-            </a:r>
-          </a:p>
-          <a:p>
-            <a:pPr>
-              <a:spcAft>
-                <a:spcPts val="600"/>
-              </a:spcAft>
-            </a:pPr>
-            <a:r>
-              <a:rPr sz="1300" b="0" i="0">
+                <a:spcPts val="200"/>
+              </a:spcAft>
+              <a:buNone/>
+            </a:pPr>
+            <a:r>
+              <a:rPr sz="1400" b="1" i="0">
+                <a:solidFill>
+                  <a:srgbClr val="1F2A44"/>
+                </a:solidFill>
+                <a:latin typeface="Garamond"/>
+                <a:cs typeface="Garamond"/>
+              </a:rPr>
+              <a:t>BASE-CASE WACC = 8.98%</a:t>
+            </a:r>
+          </a:p>
+          <a:p>
+            <a:pPr algn="l">
+              <a:spcBef>
+                <a:spcPts val="0"/>
+              </a:spcBef>
+              <a:spcAft>
+                <a:spcPts val="0"/>
+              </a:spcAft>
+              <a:buNone/>
+            </a:pPr>
+            <a:r>
+              <a:rPr sz="850" b="0" i="0">
                 <a:solidFill>
                   <a:srgbClr val="262626"/>
                 </a:solidFill>
                 <a:latin typeface="Garamond"/>
                 <a:cs typeface="Garamond"/>
               </a:rPr>
-              <a:t>Risk-free rate (10-yr UST)</a:t>
-            </a:r>
-            <a:r>
-              <a:rPr sz="1300" b="1" i="0">
-                <a:solidFill>
-                  <a:srgbClr val="1F2A44"/>
-                </a:solidFill>
-                <a:latin typeface="Garamond"/>
-                <a:cs typeface="Garamond"/>
-              </a:rPr>
-              <a:t>      4.8%</a:t>
-            </a:r>
-          </a:p>
-          <a:p>
-            <a:pPr>
-              <a:spcAft>
-                <a:spcPts val="600"/>
-              </a:spcAft>
-            </a:pPr>
-            <a:r>
-              <a:rPr sz="1300" b="0" i="0">
-                <a:solidFill>
-                  <a:srgbClr val="262626"/>
-                </a:solidFill>
-                <a:latin typeface="Garamond"/>
-                <a:cs typeface="Garamond"/>
-              </a:rPr>
-              <a:t>Equity risk premium</a:t>
-            </a:r>
-            <a:r>
-              <a:rPr sz="1300" b="1" i="0">
-                <a:solidFill>
-                  <a:srgbClr val="1F2A44"/>
-                </a:solidFill>
-                <a:latin typeface="Garamond"/>
-                <a:cs typeface="Garamond"/>
-              </a:rPr>
-              <a:t>      6.0%</a:t>
-            </a:r>
-          </a:p>
-          <a:p>
-            <a:pPr>
-              <a:spcAft>
-                <a:spcPts val="600"/>
-              </a:spcAft>
-            </a:pPr>
-            <a:r>
-              <a:rPr sz="1300" b="0" i="0">
-                <a:solidFill>
-                  <a:srgbClr val="262626"/>
-                </a:solidFill>
-                <a:latin typeface="Garamond"/>
-                <a:cs typeface="Garamond"/>
-              </a:rPr>
-              <a:t>Beta (relevered; lease adj.)</a:t>
-            </a:r>
-            <a:r>
-              <a:rPr sz="1300" b="1" i="0">
-                <a:solidFill>
-                  <a:srgbClr val="1F2A44"/>
-                </a:solidFill>
-                <a:latin typeface="Garamond"/>
-                <a:cs typeface="Garamond"/>
-              </a:rPr>
-              <a:t>      0.84</a:t>
-            </a:r>
-          </a:p>
-          <a:p>
-            <a:pPr>
-              <a:spcAft>
-                <a:spcPts val="600"/>
-              </a:spcAft>
-            </a:pPr>
-            <a:r>
-              <a:rPr sz="1300" b="1" i="0">
-                <a:solidFill>
-                  <a:srgbClr val="262626"/>
-                </a:solidFill>
-                <a:latin typeface="Garamond"/>
-                <a:cs typeface="Garamond"/>
-              </a:rPr>
-              <a:t>Cost of equity</a:t>
-            </a:r>
-            <a:r>
-              <a:rPr sz="1300" b="1" i="0">
-                <a:solidFill>
-                  <a:srgbClr val="1F2A44"/>
-                </a:solidFill>
-                <a:latin typeface="Garamond"/>
-                <a:cs typeface="Garamond"/>
-              </a:rPr>
-              <a:t>      9.9%</a:t>
-            </a:r>
-          </a:p>
-          <a:p>
-            <a:pPr>
-              <a:spcAft>
-                <a:spcPts val="600"/>
-              </a:spcAft>
-            </a:pPr>
-            <a:r>
-              <a:rPr sz="1300" b="0" i="0">
-                <a:solidFill>
-                  <a:srgbClr val="262626"/>
-                </a:solidFill>
-                <a:latin typeface="Garamond"/>
-                <a:cs typeface="Garamond"/>
-              </a:rPr>
-              <a:t>Lease-debt weight</a:t>
-            </a:r>
-            <a:r>
-              <a:rPr sz="1300" b="1" i="0">
-                <a:solidFill>
-                  <a:srgbClr val="1F2A44"/>
-                </a:solidFill>
-                <a:latin typeface="Garamond"/>
-                <a:cs typeface="Garamond"/>
-              </a:rPr>
-              <a:t>      14%</a:t>
-            </a:r>
-          </a:p>
-          <a:p>
-            <a:pPr>
-              <a:spcAft>
-                <a:spcPts val="600"/>
-              </a:spcAft>
-            </a:pPr>
-            <a:r>
-              <a:rPr sz="1300" b="0" i="0">
-                <a:solidFill>
-                  <a:srgbClr val="262626"/>
-                </a:solidFill>
-                <a:latin typeface="Garamond"/>
-                <a:cs typeface="Garamond"/>
-              </a:rPr>
-              <a:t>Equity weight</a:t>
-            </a:r>
-            <a:r>
-              <a:rPr sz="1300" b="1" i="0">
-                <a:solidFill>
-                  <a:srgbClr val="1F2A44"/>
-                </a:solidFill>
-                <a:latin typeface="Garamond"/>
-                <a:cs typeface="Garamond"/>
-              </a:rPr>
-              <a:t>      86%</a:t>
-            </a:r>
-          </a:p>
-          <a:p>
-            <a:pPr>
-              <a:spcBef>
-                <a:spcPts val="400"/>
-              </a:spcBef>
-            </a:pPr>
-            <a:r>
-              <a:rPr sz="1600" b="1" i="0">
-                <a:solidFill>
-                  <a:srgbClr val="1E7A3C"/>
-                </a:solidFill>
-                <a:latin typeface="Garamond"/>
-                <a:cs typeface="Garamond"/>
-              </a:rPr>
-              <a:t>WACC = 9.0%</a:t>
+              <a:t>Drives Scenarios col G discount rate and $134 implied share price. Bear/bull bracket WACC ±100bps on Scenarios tab.</a:t>
             </a:r>
           </a:p>
         </p:txBody>
@@ -18680,7 +20349,7 @@
                 <a:latin typeface="Garamond"/>
                 <a:cs typeface="Garamond"/>
               </a:rPr>
-              <a:t>16. Capital structure &amp; WACC</a:t>
+              <a:t>16. Financials — capital structure</a:t>
             </a:r>
           </a:p>
           <a:p>

--- a/LULU/LULU_Investment_Pitch_Deck.pptx
+++ b/LULU/LULU_Investment_Pitch_Deck.pptx
@@ -16336,7 +16336,7 @@
                 <a:latin typeface="Garamond"/>
                 <a:cs typeface="Garamond"/>
               </a:rPr>
-              <a:t>Cap stack and WACC build — lease-adjusted structure; no funded term debt (critical lens for levered businesses)</a:t>
+              <a:t>Cap stack and WACC build — lease-adjusted; no funded term debt</a:t>
             </a:r>
           </a:p>
         </p:txBody>
@@ -16424,7 +16424,7 @@
                 <a:latin typeface="Garamond"/>
                 <a:cs typeface="Garamond"/>
               </a:rPr>
-              <a:t>Cap stack &amp; WACC: LULU_DCF_Valuation_Model.xlsx → WACC tab (col E). Cash/leases: FY2025 10-K. Beta: Yahoo Finance Key Statistics.</a:t>
+              <a:t>Cap stack &amp; WACC: LULU_DCF_Valuation_Model.xlsx → WACC tab (col E). Cash/leases: FY2025 10-K.</a:t>
             </a:r>
           </a:p>
         </p:txBody>
@@ -16473,808 +16473,16 @@
           </a:p>
         </p:txBody>
       </p:sp>
-      <p:graphicFrame>
-        <p:nvGraphicFramePr>
-          <p:cNvPr id="8" name="Table 7"/>
-          <p:cNvGraphicFramePr>
-            <a:graphicFrameLocks noGrp="1"/>
-          </p:cNvGraphicFramePr>
-          <p:nvPr/>
-        </p:nvGraphicFramePr>
-        <p:xfrm>
-          <a:off x="457200" y="1051560"/>
-          <a:ext cx="5532120" cy="2606040"/>
-        </p:xfrm>
-        <a:graphic>
-          <a:graphicData uri="http://schemas.openxmlformats.org/drawingml/2006/table">
-            <a:tbl>
-              <a:tblPr firstRow="1" bandRow="1">
-                <a:tableStyleId>{5C22544A-7EE6-4342-B048-85BDC9FD1C3A}</a:tableStyleId>
-              </a:tblPr>
-              <a:tblGrid>
-                <a:gridCol w="2331720"/>
-                <a:gridCol w="1066800"/>
-                <a:gridCol w="1066800"/>
-                <a:gridCol w="1066800"/>
-              </a:tblGrid>
-              <a:tr h="372291">
-                <a:tc>
-                  <a:txBody>
-                    <a:bodyPr/>
-                    <a:lstStyle/>
-                    <a:p>
-                      <a:pPr algn="l"/>
-                      <a:r>
-                        <a:rPr sz="850" b="1" i="0">
-                          <a:solidFill>
-                            <a:srgbClr val="FFFFFF"/>
-                          </a:solidFill>
-                          <a:latin typeface="Garamond"/>
-                          <a:cs typeface="Garamond"/>
-                        </a:rPr>
-                        <a:t>Component</a:t>
-                      </a:r>
-                    </a:p>
-                  </a:txBody>
-                  <a:tcPr anchor="ctr">
-                    <a:solidFill>
-                      <a:srgbClr val="1F2A44"/>
-                    </a:solidFill>
-                  </a:tcPr>
-                </a:tc>
-                <a:tc>
-                  <a:txBody>
-                    <a:bodyPr/>
-                    <a:lstStyle/>
-                    <a:p>
-                      <a:pPr algn="r"/>
-                      <a:r>
-                        <a:rPr sz="850" b="1" i="0">
-                          <a:solidFill>
-                            <a:srgbClr val="FFFFFF"/>
-                          </a:solidFill>
-                          <a:latin typeface="Garamond"/>
-                          <a:cs typeface="Garamond"/>
-                        </a:rPr>
-                        <a:t>US$ M</a:t>
-                      </a:r>
-                    </a:p>
-                  </a:txBody>
-                  <a:tcPr anchor="ctr">
-                    <a:solidFill>
-                      <a:srgbClr val="1F2A44"/>
-                    </a:solidFill>
-                  </a:tcPr>
-                </a:tc>
-                <a:tc>
-                  <a:txBody>
-                    <a:bodyPr/>
-                    <a:lstStyle/>
-                    <a:p>
-                      <a:pPr algn="r"/>
-                      <a:r>
-                        <a:rPr sz="850" b="1" i="0">
-                          <a:solidFill>
-                            <a:srgbClr val="FFFFFF"/>
-                          </a:solidFill>
-                          <a:latin typeface="Garamond"/>
-                          <a:cs typeface="Garamond"/>
-                        </a:rPr>
-                        <a:t>% of capital</a:t>
-                      </a:r>
-                    </a:p>
-                  </a:txBody>
-                  <a:tcPr anchor="ctr">
-                    <a:solidFill>
-                      <a:srgbClr val="1F2A44"/>
-                    </a:solidFill>
-                  </a:tcPr>
-                </a:tc>
-                <a:tc>
-                  <a:txBody>
-                    <a:bodyPr/>
-                    <a:lstStyle/>
-                    <a:p>
-                      <a:pPr algn="r"/>
-                      <a:r>
-                        <a:rPr sz="850" b="1" i="0">
-                          <a:solidFill>
-                            <a:srgbClr val="FFFFFF"/>
-                          </a:solidFill>
-                          <a:latin typeface="Garamond"/>
-                          <a:cs typeface="Garamond"/>
-                        </a:rPr>
-                        <a:t>Model source</a:t>
-                      </a:r>
-                    </a:p>
-                  </a:txBody>
-                  <a:tcPr anchor="ctr">
-                    <a:solidFill>
-                      <a:srgbClr val="1F2A44"/>
-                    </a:solidFill>
-                  </a:tcPr>
-                </a:tc>
-              </a:tr>
-              <a:tr h="372291">
-                <a:tc>
-                  <a:txBody>
-                    <a:bodyPr/>
-                    <a:lstStyle/>
-                    <a:p>
-                      <a:pPr algn="l"/>
-                      <a:r>
-                        <a:rPr sz="850" b="0" i="0">
-                          <a:solidFill>
-                            <a:srgbClr val="262626"/>
-                          </a:solidFill>
-                          <a:latin typeface="Garamond"/>
-                          <a:cs typeface="Garamond"/>
-                        </a:rPr>
-                        <a:t>Market equity (price × shares)</a:t>
-                      </a:r>
-                    </a:p>
-                    <a:p>
-                      <a:pPr algn="l"/>
-                      <a:r>
-                        <a:rPr sz="650" b="0" i="1">
-                          <a:solidFill>
-                            <a:srgbClr val="8C8C8C"/>
-                          </a:solidFill>
-                          <a:latin typeface="Garamond"/>
-                          <a:cs typeface="Garamond"/>
-                        </a:rPr>
-                        <a:t>Price $100 × 111.4M shares (FY25 10-K)</a:t>
-                      </a:r>
-                    </a:p>
-                  </a:txBody>
-                  <a:tcPr anchor="ctr" marT="12700" marB="12700">
-                    <a:solidFill>
-                      <a:srgbClr val="FFFFFF"/>
-                    </a:solidFill>
-                  </a:tcPr>
-                </a:tc>
-                <a:tc>
-                  <a:txBody>
-                    <a:bodyPr/>
-                    <a:lstStyle/>
-                    <a:p>
-                      <a:pPr algn="r"/>
-                      <a:r>
-                        <a:rPr sz="850" b="0" i="0">
-                          <a:solidFill>
-                            <a:srgbClr val="262626"/>
-                          </a:solidFill>
-                          <a:latin typeface="Garamond"/>
-                          <a:cs typeface="Garamond"/>
-                        </a:rPr>
-                        <a:t>11,138</a:t>
-                      </a:r>
-                    </a:p>
-                  </a:txBody>
-                  <a:tcPr anchor="ctr" marT="12700" marB="12700">
-                    <a:solidFill>
-                      <a:srgbClr val="FFFFFF"/>
-                    </a:solidFill>
-                  </a:tcPr>
-                </a:tc>
-                <a:tc>
-                  <a:txBody>
-                    <a:bodyPr/>
-                    <a:lstStyle/>
-                    <a:p>
-                      <a:pPr algn="r"/>
-                      <a:r>
-                        <a:rPr sz="850" b="0" i="0">
-                          <a:solidFill>
-                            <a:srgbClr val="262626"/>
-                          </a:solidFill>
-                          <a:latin typeface="Garamond"/>
-                          <a:cs typeface="Garamond"/>
-                        </a:rPr>
-                        <a:t>86.1%</a:t>
-                      </a:r>
-                    </a:p>
-                  </a:txBody>
-                  <a:tcPr anchor="ctr" marT="12700" marB="12700">
-                    <a:solidFill>
-                      <a:srgbClr val="FFFFFF"/>
-                    </a:solidFill>
-                  </a:tcPr>
-                </a:tc>
-                <a:tc>
-                  <a:txBody>
-                    <a:bodyPr/>
-                    <a:lstStyle/>
-                    <a:p>
-                      <a:pPr algn="r"/>
-                      <a:r>
-                        <a:rPr sz="850" b="0" i="0">
-                          <a:solidFill>
-                            <a:srgbClr val="262626"/>
-                          </a:solidFill>
-                          <a:latin typeface="Garamond"/>
-                          <a:cs typeface="Garamond"/>
-                        </a:rPr>
-                        <a:t>WACC!E10</a:t>
-                      </a:r>
-                    </a:p>
-                  </a:txBody>
-                  <a:tcPr anchor="ctr" marT="12700" marB="12700">
-                    <a:solidFill>
-                      <a:srgbClr val="FFFFFF"/>
-                    </a:solidFill>
-                  </a:tcPr>
-                </a:tc>
-              </a:tr>
-              <a:tr h="372291">
-                <a:tc>
-                  <a:txBody>
-                    <a:bodyPr/>
-                    <a:lstStyle/>
-                    <a:p>
-                      <a:pPr algn="l"/>
-                      <a:r>
-                        <a:rPr sz="850" b="0" i="0">
-                          <a:solidFill>
-                            <a:srgbClr val="262626"/>
-                          </a:solidFill>
-                          <a:latin typeface="Garamond"/>
-                          <a:cs typeface="Garamond"/>
-                        </a:rPr>
-                        <a:t>ASC 842 operating lease liabilities</a:t>
-                      </a:r>
-                    </a:p>
-                    <a:p>
-                      <a:pPr algn="l"/>
-                      <a:r>
-                        <a:rPr sz="650" b="0" i="1">
-                          <a:solidFill>
-                            <a:srgbClr val="8C8C8C"/>
-                          </a:solidFill>
-                          <a:latin typeface="Garamond"/>
-                          <a:cs typeface="Garamond"/>
-                        </a:rPr>
-                        <a:t>Current $298,724k + non-current $1,499,717k</a:t>
-                      </a:r>
-                    </a:p>
-                  </a:txBody>
-                  <a:tcPr anchor="ctr" marT="12700" marB="12700">
-                    <a:solidFill>
-                      <a:srgbClr val="F0F1F3"/>
-                    </a:solidFill>
-                  </a:tcPr>
-                </a:tc>
-                <a:tc>
-                  <a:txBody>
-                    <a:bodyPr/>
-                    <a:lstStyle/>
-                    <a:p>
-                      <a:pPr algn="r"/>
-                      <a:r>
-                        <a:rPr sz="850" b="0" i="0">
-                          <a:solidFill>
-                            <a:srgbClr val="262626"/>
-                          </a:solidFill>
-                          <a:latin typeface="Garamond"/>
-                          <a:cs typeface="Garamond"/>
-                        </a:rPr>
-                        <a:t>1,798</a:t>
-                      </a:r>
-                    </a:p>
-                  </a:txBody>
-                  <a:tcPr anchor="ctr" marT="12700" marB="12700">
-                    <a:solidFill>
-                      <a:srgbClr val="F0F1F3"/>
-                    </a:solidFill>
-                  </a:tcPr>
-                </a:tc>
-                <a:tc>
-                  <a:txBody>
-                    <a:bodyPr/>
-                    <a:lstStyle/>
-                    <a:p>
-                      <a:pPr algn="r"/>
-                      <a:r>
-                        <a:rPr sz="850" b="0" i="0">
-                          <a:solidFill>
-                            <a:srgbClr val="262626"/>
-                          </a:solidFill>
-                          <a:latin typeface="Garamond"/>
-                          <a:cs typeface="Garamond"/>
-                        </a:rPr>
-                        <a:t>13.9%</a:t>
-                      </a:r>
-                    </a:p>
-                  </a:txBody>
-                  <a:tcPr anchor="ctr" marT="12700" marB="12700">
-                    <a:solidFill>
-                      <a:srgbClr val="F0F1F3"/>
-                    </a:solidFill>
-                  </a:tcPr>
-                </a:tc>
-                <a:tc>
-                  <a:txBody>
-                    <a:bodyPr/>
-                    <a:lstStyle/>
-                    <a:p>
-                      <a:pPr algn="r"/>
-                      <a:r>
-                        <a:rPr sz="850" b="0" i="0">
-                          <a:solidFill>
-                            <a:srgbClr val="262626"/>
-                          </a:solidFill>
-                          <a:latin typeface="Garamond"/>
-                          <a:cs typeface="Garamond"/>
-                        </a:rPr>
-                        <a:t>WACC!E11 (10-K)</a:t>
-                      </a:r>
-                    </a:p>
-                  </a:txBody>
-                  <a:tcPr anchor="ctr" marT="12700" marB="12700">
-                    <a:solidFill>
-                      <a:srgbClr val="F0F1F3"/>
-                    </a:solidFill>
-                  </a:tcPr>
-                </a:tc>
-              </a:tr>
-              <a:tr h="372291">
-                <a:tc>
-                  <a:txBody>
-                    <a:bodyPr/>
-                    <a:lstStyle/>
-                    <a:p>
-                      <a:pPr algn="l"/>
-                      <a:r>
-                        <a:rPr sz="850" b="0" i="0">
-                          <a:solidFill>
-                            <a:srgbClr val="262626"/>
-                          </a:solidFill>
-                          <a:latin typeface="Garamond"/>
-                          <a:cs typeface="Garamond"/>
-                        </a:rPr>
-                        <a:t>Funded debt (term loans / bonds)</a:t>
-                      </a:r>
-                    </a:p>
-                    <a:p>
-                      <a:pPr algn="l"/>
-                      <a:r>
-                        <a:rPr sz="650" b="0" i="1">
-                          <a:solidFill>
-                            <a:srgbClr val="8C8C8C"/>
-                          </a:solidFill>
-                          <a:latin typeface="Garamond"/>
-                          <a:cs typeface="Garamond"/>
-                        </a:rPr>
-                        <a:t>Undrawn revolver; no term borrowings per 10-K</a:t>
-                      </a:r>
-                    </a:p>
-                  </a:txBody>
-                  <a:tcPr anchor="ctr" marT="12700" marB="12700">
-                    <a:solidFill>
-                      <a:srgbClr val="FFFFFF"/>
-                    </a:solidFill>
-                  </a:tcPr>
-                </a:tc>
-                <a:tc>
-                  <a:txBody>
-                    <a:bodyPr/>
-                    <a:lstStyle/>
-                    <a:p>
-                      <a:pPr algn="r"/>
-                      <a:r>
-                        <a:rPr sz="850" b="0" i="0">
-                          <a:solidFill>
-                            <a:srgbClr val="262626"/>
-                          </a:solidFill>
-                          <a:latin typeface="Garamond"/>
-                          <a:cs typeface="Garamond"/>
-                        </a:rPr>
-                        <a:t>0</a:t>
-                      </a:r>
-                    </a:p>
-                  </a:txBody>
-                  <a:tcPr anchor="ctr" marT="12700" marB="12700">
-                    <a:solidFill>
-                      <a:srgbClr val="FFFFFF"/>
-                    </a:solidFill>
-                  </a:tcPr>
-                </a:tc>
-                <a:tc>
-                  <a:txBody>
-                    <a:bodyPr/>
-                    <a:lstStyle/>
-                    <a:p>
-                      <a:pPr algn="r"/>
-                      <a:r>
-                        <a:rPr sz="850" b="0" i="0">
-                          <a:solidFill>
-                            <a:srgbClr val="262626"/>
-                          </a:solidFill>
-                          <a:latin typeface="Garamond"/>
-                          <a:cs typeface="Garamond"/>
-                        </a:rPr>
-                        <a:t>0.0%</a:t>
-                      </a:r>
-                    </a:p>
-                  </a:txBody>
-                  <a:tcPr anchor="ctr" marT="12700" marB="12700">
-                    <a:solidFill>
-                      <a:srgbClr val="FFFFFF"/>
-                    </a:solidFill>
-                  </a:tcPr>
-                </a:tc>
-                <a:tc>
-                  <a:txBody>
-                    <a:bodyPr/>
-                    <a:lstStyle/>
-                    <a:p>
-                      <a:pPr algn="r"/>
-                      <a:r>
-                        <a:rPr sz="850" b="0" i="0">
-                          <a:solidFill>
-                            <a:srgbClr val="262626"/>
-                          </a:solidFill>
-                          <a:latin typeface="Garamond"/>
-                          <a:cs typeface="Garamond"/>
-                        </a:rPr>
-                        <a:t>WACC!E13</a:t>
-                      </a:r>
-                    </a:p>
-                  </a:txBody>
-                  <a:tcPr anchor="ctr" marT="12700" marB="12700">
-                    <a:solidFill>
-                      <a:srgbClr val="FFFFFF"/>
-                    </a:solidFill>
-                  </a:tcPr>
-                </a:tc>
-              </a:tr>
-              <a:tr h="372291">
-                <a:tc>
-                  <a:txBody>
-                    <a:bodyPr/>
-                    <a:lstStyle/>
-                    <a:p>
-                      <a:pPr algn="l"/>
-                      <a:r>
-                        <a:rPr sz="850" b="1" i="0">
-                          <a:solidFill>
-                            <a:srgbClr val="1F2A44"/>
-                          </a:solidFill>
-                          <a:latin typeface="Garamond"/>
-                          <a:cs typeface="Garamond"/>
-                        </a:rPr>
-                        <a:t>Total capital (WACC basis)</a:t>
-                      </a:r>
-                    </a:p>
-                    <a:p>
-                      <a:pPr algn="l"/>
-                      <a:r>
-                        <a:rPr sz="650" b="0" i="1">
-                          <a:solidFill>
-                            <a:srgbClr val="8C8C8C"/>
-                          </a:solidFill>
-                          <a:latin typeface="Garamond"/>
-                          <a:cs typeface="Garamond"/>
-                        </a:rPr>
-                        <a:t>Equity + lease debt equivalents</a:t>
-                      </a:r>
-                    </a:p>
-                  </a:txBody>
-                  <a:tcPr anchor="ctr" marT="12700" marB="12700">
-                    <a:solidFill>
-                      <a:srgbClr val="F0F1F3"/>
-                    </a:solidFill>
-                  </a:tcPr>
-                </a:tc>
-                <a:tc>
-                  <a:txBody>
-                    <a:bodyPr/>
-                    <a:lstStyle/>
-                    <a:p>
-                      <a:pPr algn="r"/>
-                      <a:r>
-                        <a:rPr sz="850" b="1" i="0">
-                          <a:solidFill>
-                            <a:srgbClr val="1F2A44"/>
-                          </a:solidFill>
-                          <a:latin typeface="Garamond"/>
-                          <a:cs typeface="Garamond"/>
-                        </a:rPr>
-                        <a:t>12,936</a:t>
-                      </a:r>
-                    </a:p>
-                  </a:txBody>
-                  <a:tcPr anchor="ctr" marT="12700" marB="12700">
-                    <a:solidFill>
-                      <a:srgbClr val="F0F1F3"/>
-                    </a:solidFill>
-                  </a:tcPr>
-                </a:tc>
-                <a:tc>
-                  <a:txBody>
-                    <a:bodyPr/>
-                    <a:lstStyle/>
-                    <a:p>
-                      <a:pPr algn="r"/>
-                      <a:r>
-                        <a:rPr sz="850" b="1" i="0">
-                          <a:solidFill>
-                            <a:srgbClr val="1F2A44"/>
-                          </a:solidFill>
-                          <a:latin typeface="Garamond"/>
-                          <a:cs typeface="Garamond"/>
-                        </a:rPr>
-                        <a:t>100.0%</a:t>
-                      </a:r>
-                    </a:p>
-                  </a:txBody>
-                  <a:tcPr anchor="ctr" marT="12700" marB="12700">
-                    <a:solidFill>
-                      <a:srgbClr val="F0F1F3"/>
-                    </a:solidFill>
-                  </a:tcPr>
-                </a:tc>
-                <a:tc>
-                  <a:txBody>
-                    <a:bodyPr/>
-                    <a:lstStyle/>
-                    <a:p>
-                      <a:pPr algn="r"/>
-                      <a:r>
-                        <a:rPr sz="850" b="1" i="0">
-                          <a:solidFill>
-                            <a:srgbClr val="1F2A44"/>
-                          </a:solidFill>
-                          <a:latin typeface="Garamond"/>
-                          <a:cs typeface="Garamond"/>
-                        </a:rPr>
-                        <a:t>WACC!E14</a:t>
-                      </a:r>
-                    </a:p>
-                  </a:txBody>
-                  <a:tcPr anchor="ctr" marT="12700" marB="12700">
-                    <a:solidFill>
-                      <a:srgbClr val="F0F1F3"/>
-                    </a:solidFill>
-                  </a:tcPr>
-                </a:tc>
-              </a:tr>
-              <a:tr h="372291">
-                <a:tc>
-                  <a:txBody>
-                    <a:bodyPr/>
-                    <a:lstStyle/>
-                    <a:p>
-                      <a:pPr algn="l"/>
-                      <a:r>
-                        <a:rPr sz="850" b="0" i="0">
-                          <a:solidFill>
-                            <a:srgbClr val="262626"/>
-                          </a:solidFill>
-                          <a:latin typeface="Garamond"/>
-                          <a:cs typeface="Garamond"/>
-                        </a:rPr>
-                        <a:t>Cash &amp; equivalents (EV offset)</a:t>
-                      </a:r>
-                    </a:p>
-                    <a:p>
-                      <a:pPr algn="l"/>
-                      <a:r>
-                        <a:rPr sz="650" b="0" i="1">
-                          <a:solidFill>
-                            <a:srgbClr val="8C8C8C"/>
-                          </a:solidFill>
-                          <a:latin typeface="Garamond"/>
-                          <a:cs typeface="Garamond"/>
-                        </a:rPr>
-                        <a:t>Net-cash on funded debt; leases are debt-equiv in WACC</a:t>
-                      </a:r>
-                    </a:p>
-                  </a:txBody>
-                  <a:tcPr anchor="ctr" marT="12700" marB="12700">
-                    <a:solidFill>
-                      <a:srgbClr val="FFFFFF"/>
-                    </a:solidFill>
-                  </a:tcPr>
-                </a:tc>
-                <a:tc>
-                  <a:txBody>
-                    <a:bodyPr/>
-                    <a:lstStyle/>
-                    <a:p>
-                      <a:pPr algn="r"/>
-                      <a:r>
-                        <a:rPr sz="850" b="0" i="0">
-                          <a:solidFill>
-                            <a:srgbClr val="262626"/>
-                          </a:solidFill>
-                          <a:latin typeface="Garamond"/>
-                          <a:cs typeface="Garamond"/>
-                        </a:rPr>
-                        <a:t>1,807</a:t>
-                      </a:r>
-                    </a:p>
-                  </a:txBody>
-                  <a:tcPr anchor="ctr" marT="12700" marB="12700">
-                    <a:solidFill>
-                      <a:srgbClr val="FFFFFF"/>
-                    </a:solidFill>
-                  </a:tcPr>
-                </a:tc>
-                <a:tc>
-                  <a:txBody>
-                    <a:bodyPr/>
-                    <a:lstStyle/>
-                    <a:p>
-                      <a:pPr algn="r"/>
-                      <a:r>
-                        <a:rPr sz="850" b="0" i="0">
-                          <a:solidFill>
-                            <a:srgbClr val="262626"/>
-                          </a:solidFill>
-                          <a:latin typeface="Garamond"/>
-                          <a:cs typeface="Garamond"/>
-                        </a:rPr>
-                        <a:t>—</a:t>
-                      </a:r>
-                    </a:p>
-                  </a:txBody>
-                  <a:tcPr anchor="ctr" marT="12700" marB="12700">
-                    <a:solidFill>
-                      <a:srgbClr val="FFFFFF"/>
-                    </a:solidFill>
-                  </a:tcPr>
-                </a:tc>
-                <a:tc>
-                  <a:txBody>
-                    <a:bodyPr/>
-                    <a:lstStyle/>
-                    <a:p>
-                      <a:pPr algn="r"/>
-                      <a:r>
-                        <a:rPr sz="850" b="0" i="0">
-                          <a:solidFill>
-                            <a:srgbClr val="262626"/>
-                          </a:solidFill>
-                          <a:latin typeface="Garamond"/>
-                          <a:cs typeface="Garamond"/>
-                        </a:rPr>
-                        <a:t>10-K BS — Cash</a:t>
-                      </a:r>
-                    </a:p>
-                  </a:txBody>
-                  <a:tcPr anchor="ctr" marT="12700" marB="12700">
-                    <a:solidFill>
-                      <a:srgbClr val="FFFFFF"/>
-                    </a:solidFill>
-                  </a:tcPr>
-                </a:tc>
-              </a:tr>
-              <a:tr h="372294">
-                <a:tc>
-                  <a:txBody>
-                    <a:bodyPr/>
-                    <a:lstStyle/>
-                    <a:p>
-                      <a:pPr algn="l"/>
-                      <a:r>
-                        <a:rPr sz="850" b="0" i="0">
-                          <a:solidFill>
-                            <a:srgbClr val="262626"/>
-                          </a:solidFill>
-                          <a:latin typeface="Garamond"/>
-                          <a:cs typeface="Garamond"/>
-                        </a:rPr>
-                        <a:t>Net debt (leases + funded − cash)</a:t>
-                      </a:r>
-                    </a:p>
-                    <a:p>
-                      <a:pPr algn="l"/>
-                      <a:r>
-                        <a:rPr sz="650" b="0" i="1">
-                          <a:solidFill>
-                            <a:srgbClr val="8C8C8C"/>
-                          </a:solidFill>
-                          <a:latin typeface="Garamond"/>
-                          <a:cs typeface="Garamond"/>
-                        </a:rPr>
-                        <a:t>Near-zero net debt — equity-funded with lease adj.</a:t>
-                      </a:r>
-                    </a:p>
-                  </a:txBody>
-                  <a:tcPr anchor="ctr" marT="12700" marB="12700">
-                    <a:solidFill>
-                      <a:srgbClr val="F0F1F3"/>
-                    </a:solidFill>
-                  </a:tcPr>
-                </a:tc>
-                <a:tc>
-                  <a:txBody>
-                    <a:bodyPr/>
-                    <a:lstStyle/>
-                    <a:p>
-                      <a:pPr algn="r"/>
-                      <a:r>
-                        <a:rPr sz="850" b="0" i="0">
-                          <a:solidFill>
-                            <a:srgbClr val="262626"/>
-                          </a:solidFill>
-                          <a:latin typeface="Garamond"/>
-                          <a:cs typeface="Garamond"/>
-                        </a:rPr>
-                        <a:t>-9</a:t>
-                      </a:r>
-                    </a:p>
-                  </a:txBody>
-                  <a:tcPr anchor="ctr" marT="12700" marB="12700">
-                    <a:solidFill>
-                      <a:srgbClr val="F0F1F3"/>
-                    </a:solidFill>
-                  </a:tcPr>
-                </a:tc>
-                <a:tc>
-                  <a:txBody>
-                    <a:bodyPr/>
-                    <a:lstStyle/>
-                    <a:p>
-                      <a:pPr algn="r"/>
-                      <a:r>
-                        <a:rPr sz="850" b="0" i="0">
-                          <a:solidFill>
-                            <a:srgbClr val="262626"/>
-                          </a:solidFill>
-                          <a:latin typeface="Garamond"/>
-                          <a:cs typeface="Garamond"/>
-                        </a:rPr>
-                        <a:t>—</a:t>
-                      </a:r>
-                    </a:p>
-                  </a:txBody>
-                  <a:tcPr anchor="ctr" marT="12700" marB="12700">
-                    <a:solidFill>
-                      <a:srgbClr val="F0F1F3"/>
-                    </a:solidFill>
-                  </a:tcPr>
-                </a:tc>
-                <a:tc>
-                  <a:txBody>
-                    <a:bodyPr/>
-                    <a:lstStyle/>
-                    <a:p>
-                      <a:pPr algn="r"/>
-                      <a:r>
-                        <a:rPr sz="850" b="0" i="0">
-                          <a:solidFill>
-                            <a:srgbClr val="262626"/>
-                          </a:solidFill>
-                          <a:latin typeface="Garamond"/>
-                          <a:cs typeface="Garamond"/>
-                        </a:rPr>
-                        <a:t>DCF EV bridge</a:t>
-                      </a:r>
-                    </a:p>
-                  </a:txBody>
-                  <a:tcPr anchor="ctr" marT="12700" marB="12700">
-                    <a:solidFill>
-                      <a:srgbClr val="F0F1F3"/>
-                    </a:solidFill>
-                  </a:tcPr>
-                </a:tc>
-              </a:tr>
-            </a:tbl>
-          </a:graphicData>
-        </a:graphic>
-      </p:graphicFrame>
       <p:sp>
         <p:nvSpPr>
-          <p:cNvPr id="9" name="TextBox 8"/>
+          <p:cNvPr id="8" name="TextBox 7"/>
           <p:cNvSpPr txBox="1"/>
           <p:nvPr/>
         </p:nvSpPr>
         <p:spPr>
           <a:xfrm>
-            <a:off x="457200" y="3703320"/>
-            <a:ext cx="5532120" cy="502920"/>
+            <a:off x="457200" y="1005840"/>
+            <a:ext cx="5486400" cy="256032"/>
           </a:xfrm>
           <a:prstGeom prst="rect">
             <a:avLst/>
@@ -17297,14 +16505,58 @@
               <a:buNone/>
             </a:pPr>
             <a:r>
-              <a:rPr sz="850" b="0" i="1">
-                <a:solidFill>
-                  <a:srgbClr val="262626"/>
-                </a:solidFill>
-                <a:latin typeface="Garamond"/>
-                <a:cs typeface="Garamond"/>
-              </a:rPr>
-              <a:t>LULU has no funded bank debt; ASC 842 store leases are the only debt equivalent in our WACC (~14% weight). Cash exceeds lease liabilities → effectively net-cash on a funded-debt basis.</a:t>
+              <a:rPr sz="1100" b="1" i="0">
+                <a:solidFill>
+                  <a:srgbClr val="990000"/>
+                </a:solidFill>
+                <a:latin typeface="Garamond"/>
+                <a:cs typeface="Garamond"/>
+              </a:rPr>
+              <a:t>CAPITAL STACK (US$ M)</a:t>
+            </a:r>
+          </a:p>
+        </p:txBody>
+      </p:sp>
+      <p:sp>
+        <p:nvSpPr>
+          <p:cNvPr id="9" name="TextBox 8"/>
+          <p:cNvSpPr txBox="1"/>
+          <p:nvPr/>
+        </p:nvSpPr>
+        <p:spPr>
+          <a:xfrm>
+            <a:off x="6126480" y="1005840"/>
+            <a:ext cx="5623560" cy="256032"/>
+          </a:xfrm>
+          <a:prstGeom prst="rect">
+            <a:avLst/>
+          </a:prstGeom>
+          <a:noFill/>
+        </p:spPr>
+        <p:txBody>
+          <a:bodyPr wrap="square" anchor="t" lIns="25400" rIns="25400" tIns="12700" bIns="12700">
+            <a:spAutoFit/>
+          </a:bodyPr>
+          <a:lstStyle/>
+          <a:p>
+            <a:pPr algn="l">
+              <a:spcBef>
+                <a:spcPts val="0"/>
+              </a:spcBef>
+              <a:spcAft>
+                <a:spcPts val="0"/>
+              </a:spcAft>
+              <a:buNone/>
+            </a:pPr>
+            <a:r>
+              <a:rPr sz="1100" b="1" i="0">
+                <a:solidFill>
+                  <a:srgbClr val="990000"/>
+                </a:solidFill>
+                <a:latin typeface="Garamond"/>
+                <a:cs typeface="Garamond"/>
+              </a:rPr>
+              <a:t>WACC BUILD (CAPM)</a:t>
             </a:r>
           </a:p>
         </p:txBody>
@@ -17318,8 +16570,8 @@
           <p:nvPr/>
         </p:nvGraphicFramePr>
         <p:xfrm>
-          <a:off x="6126480" y="1051560"/>
-          <a:ext cx="5623560" cy="3154680"/>
+          <a:off x="457200" y="1261872"/>
+          <a:ext cx="5532118" cy="1874519"/>
         </p:xfrm>
         <a:graphic>
           <a:graphicData uri="http://schemas.openxmlformats.org/drawingml/2006/table">
@@ -17328,11 +16580,11 @@
                 <a:tableStyleId>{5C22544A-7EE6-4342-B048-85BDC9FD1C3A}</a:tableStyleId>
               </a:tblPr>
               <a:tblGrid>
-                <a:gridCol w="2148840"/>
-                <a:gridCol w="1737360"/>
-                <a:gridCol w="1737360"/>
+                <a:gridCol w="2606040"/>
+                <a:gridCol w="1463039"/>
+                <a:gridCol w="1463039"/>
               </a:tblGrid>
-              <a:tr h="242667">
+              <a:tr h="267788">
                 <a:tc>
                   <a:txBody>
                     <a:bodyPr/>
@@ -17340,14 +16592,14 @@
                     <a:p>
                       <a:pPr algn="l"/>
                       <a:r>
-                        <a:rPr sz="850" b="1" i="0">
+                        <a:rPr sz="900" b="1" i="0">
                           <a:solidFill>
                             <a:srgbClr val="FFFFFF"/>
                           </a:solidFill>
                           <a:latin typeface="Garamond"/>
                           <a:cs typeface="Garamond"/>
                         </a:rPr>
-                        <a:t>WACC input</a:t>
+                        <a:t>Component</a:t>
                       </a:r>
                     </a:p>
                   </a:txBody>
@@ -17364,14 +16616,14 @@
                     <a:p>
                       <a:pPr algn="r"/>
                       <a:r>
-                        <a:rPr sz="850" b="1" i="0">
+                        <a:rPr sz="900" b="1" i="0">
                           <a:solidFill>
                             <a:srgbClr val="FFFFFF"/>
                           </a:solidFill>
                           <a:latin typeface="Garamond"/>
                           <a:cs typeface="Garamond"/>
                         </a:rPr>
-                        <a:t>Value</a:t>
+                        <a:t>US$ M</a:t>
                       </a:r>
                     </a:p>
                   </a:txBody>
@@ -17388,14 +16640,14 @@
                     <a:p>
                       <a:pPr algn="r"/>
                       <a:r>
-                        <a:rPr sz="850" b="1" i="0">
+                        <a:rPr sz="900" b="1" i="0">
                           <a:solidFill>
                             <a:srgbClr val="FFFFFF"/>
                           </a:solidFill>
                           <a:latin typeface="Garamond"/>
                           <a:cs typeface="Garamond"/>
                         </a:rPr>
-                        <a:t>Model source</a:t>
+                        <a:t>% of capital</a:t>
                       </a:r>
                     </a:p>
                   </a:txBody>
@@ -17406,7 +16658,7 @@
                   </a:tcPr>
                 </a:tc>
               </a:tr>
-              <a:tr h="242667">
+              <a:tr h="267788">
                 <a:tc>
                   <a:txBody>
                     <a:bodyPr/>
@@ -17414,27 +16666,162 @@
                     <a:p>
                       <a:pPr algn="l"/>
                       <a:r>
-                        <a:rPr sz="850" b="0" i="0">
+                        <a:rPr sz="900" b="0" i="0">
                           <a:solidFill>
                             <a:srgbClr val="262626"/>
                           </a:solidFill>
                           <a:latin typeface="Garamond"/>
                           <a:cs typeface="Garamond"/>
                         </a:rPr>
-                        <a:t>Risk-free rate (10-yr UST)</a:t>
-                      </a:r>
-                    </a:p>
+                        <a:t>Market equity (price × shares)</a:t>
+                      </a:r>
+                    </a:p>
+                  </a:txBody>
+                  <a:tcPr anchor="ctr" marT="12700" marB="12700">
+                    <a:solidFill>
+                      <a:srgbClr val="FFFFFF"/>
+                    </a:solidFill>
+                  </a:tcPr>
+                </a:tc>
+                <a:tc>
+                  <a:txBody>
+                    <a:bodyPr/>
+                    <a:lstStyle/>
+                    <a:p>
+                      <a:pPr algn="r"/>
+                      <a:r>
+                        <a:rPr sz="900" b="0" i="0">
+                          <a:solidFill>
+                            <a:srgbClr val="262626"/>
+                          </a:solidFill>
+                          <a:latin typeface="Garamond"/>
+                          <a:cs typeface="Garamond"/>
+                        </a:rPr>
+                        <a:t>11,138</a:t>
+                      </a:r>
+                    </a:p>
+                  </a:txBody>
+                  <a:tcPr anchor="ctr" marT="12700" marB="12700">
+                    <a:solidFill>
+                      <a:srgbClr val="FFFFFF"/>
+                    </a:solidFill>
+                  </a:tcPr>
+                </a:tc>
+                <a:tc>
+                  <a:txBody>
+                    <a:bodyPr/>
+                    <a:lstStyle/>
+                    <a:p>
+                      <a:pPr algn="r"/>
+                      <a:r>
+                        <a:rPr sz="900" b="0" i="0">
+                          <a:solidFill>
+                            <a:srgbClr val="262626"/>
+                          </a:solidFill>
+                          <a:latin typeface="Garamond"/>
+                          <a:cs typeface="Garamond"/>
+                        </a:rPr>
+                        <a:t>86.1%</a:t>
+                      </a:r>
+                    </a:p>
+                  </a:txBody>
+                  <a:tcPr anchor="ctr" marT="12700" marB="12700">
+                    <a:solidFill>
+                      <a:srgbClr val="FFFFFF"/>
+                    </a:solidFill>
+                  </a:tcPr>
+                </a:tc>
+              </a:tr>
+              <a:tr h="267788">
+                <a:tc>
+                  <a:txBody>
+                    <a:bodyPr/>
+                    <a:lstStyle/>
                     <a:p>
                       <a:pPr algn="l"/>
                       <a:r>
-                        <a:rPr sz="650" b="0" i="1">
-                          <a:solidFill>
-                            <a:srgbClr val="8C8C8C"/>
-                          </a:solidFill>
-                          <a:latin typeface="Garamond"/>
-                          <a:cs typeface="Garamond"/>
-                        </a:rPr>
-                        <a:t>FRED DGS10 → 4.8% in model</a:t>
+                        <a:rPr sz="900" b="0" i="0">
+                          <a:solidFill>
+                            <a:srgbClr val="262626"/>
+                          </a:solidFill>
+                          <a:latin typeface="Garamond"/>
+                          <a:cs typeface="Garamond"/>
+                        </a:rPr>
+                        <a:t>ASC 842 operating lease liabilities</a:t>
+                      </a:r>
+                    </a:p>
+                  </a:txBody>
+                  <a:tcPr anchor="ctr" marT="12700" marB="12700">
+                    <a:solidFill>
+                      <a:srgbClr val="F0F1F3"/>
+                    </a:solidFill>
+                  </a:tcPr>
+                </a:tc>
+                <a:tc>
+                  <a:txBody>
+                    <a:bodyPr/>
+                    <a:lstStyle/>
+                    <a:p>
+                      <a:pPr algn="r"/>
+                      <a:r>
+                        <a:rPr sz="900" b="0" i="0">
+                          <a:solidFill>
+                            <a:srgbClr val="262626"/>
+                          </a:solidFill>
+                          <a:latin typeface="Garamond"/>
+                          <a:cs typeface="Garamond"/>
+                        </a:rPr>
+                        <a:t>1,798</a:t>
+                      </a:r>
+                    </a:p>
+                  </a:txBody>
+                  <a:tcPr anchor="ctr" marT="12700" marB="12700">
+                    <a:solidFill>
+                      <a:srgbClr val="F0F1F3"/>
+                    </a:solidFill>
+                  </a:tcPr>
+                </a:tc>
+                <a:tc>
+                  <a:txBody>
+                    <a:bodyPr/>
+                    <a:lstStyle/>
+                    <a:p>
+                      <a:pPr algn="r"/>
+                      <a:r>
+                        <a:rPr sz="900" b="0" i="0">
+                          <a:solidFill>
+                            <a:srgbClr val="262626"/>
+                          </a:solidFill>
+                          <a:latin typeface="Garamond"/>
+                          <a:cs typeface="Garamond"/>
+                        </a:rPr>
+                        <a:t>13.9%</a:t>
+                      </a:r>
+                    </a:p>
+                  </a:txBody>
+                  <a:tcPr anchor="ctr" marT="12700" marB="12700">
+                    <a:solidFill>
+                      <a:srgbClr val="F0F1F3"/>
+                    </a:solidFill>
+                  </a:tcPr>
+                </a:tc>
+              </a:tr>
+              <a:tr h="267788">
+                <a:tc>
+                  <a:txBody>
+                    <a:bodyPr/>
+                    <a:lstStyle/>
+                    <a:p>
+                      <a:pPr algn="l"/>
+                      <a:r>
+                        <a:rPr sz="900" b="0" i="0">
+                          <a:solidFill>
+                            <a:srgbClr val="262626"/>
+                          </a:solidFill>
+                          <a:latin typeface="Garamond"/>
+                          <a:cs typeface="Garamond"/>
+                        </a:rPr>
+                        <a:t>Funded debt (term loans / bonds)</a:t>
                       </a:r>
                     </a:p>
                   </a:txBody>
@@ -17451,14 +16838,14 @@
                     <a:p>
                       <a:pPr algn="r"/>
                       <a:r>
-                        <a:rPr sz="850" b="0" i="0">
+                        <a:rPr sz="900" b="0" i="0">
                           <a:solidFill>
                             <a:srgbClr val="262626"/>
                           </a:solidFill>
                           <a:latin typeface="Garamond"/>
                           <a:cs typeface="Garamond"/>
                         </a:rPr>
-                        <a:t>4.80%</a:t>
+                        <a:t>0</a:t>
                       </a:r>
                     </a:p>
                   </a:txBody>
@@ -17475,14 +16862,14 @@
                     <a:p>
                       <a:pPr algn="r"/>
                       <a:r>
-                        <a:rPr sz="850" b="0" i="0">
+                        <a:rPr sz="900" b="0" i="0">
                           <a:solidFill>
                             <a:srgbClr val="262626"/>
                           </a:solidFill>
                           <a:latin typeface="Garamond"/>
                           <a:cs typeface="Garamond"/>
                         </a:rPr>
-                        <a:t>WACC!E3</a:t>
+                        <a:t>0.0%</a:t>
                       </a:r>
                     </a:p>
                   </a:txBody>
@@ -17493,7 +16880,7 @@
                   </a:tcPr>
                 </a:tc>
               </a:tr>
-              <a:tr h="242667">
+              <a:tr h="267788">
                 <a:tc>
                   <a:txBody>
                     <a:bodyPr/>
@@ -17501,27 +16888,162 @@
                     <a:p>
                       <a:pPr algn="l"/>
                       <a:r>
-                        <a:rPr sz="850" b="0" i="0">
+                        <a:rPr sz="900" b="1" i="0">
+                          <a:solidFill>
+                            <a:srgbClr val="1F2A44"/>
+                          </a:solidFill>
+                          <a:latin typeface="Garamond"/>
+                          <a:cs typeface="Garamond"/>
+                        </a:rPr>
+                        <a:t>Total capital (WACC basis)</a:t>
+                      </a:r>
+                    </a:p>
+                  </a:txBody>
+                  <a:tcPr anchor="ctr" marT="12700" marB="12700">
+                    <a:solidFill>
+                      <a:srgbClr val="F0F1F3"/>
+                    </a:solidFill>
+                  </a:tcPr>
+                </a:tc>
+                <a:tc>
+                  <a:txBody>
+                    <a:bodyPr/>
+                    <a:lstStyle/>
+                    <a:p>
+                      <a:pPr algn="r"/>
+                      <a:r>
+                        <a:rPr sz="900" b="1" i="0">
+                          <a:solidFill>
+                            <a:srgbClr val="1F2A44"/>
+                          </a:solidFill>
+                          <a:latin typeface="Garamond"/>
+                          <a:cs typeface="Garamond"/>
+                        </a:rPr>
+                        <a:t>12,936</a:t>
+                      </a:r>
+                    </a:p>
+                  </a:txBody>
+                  <a:tcPr anchor="ctr" marT="12700" marB="12700">
+                    <a:solidFill>
+                      <a:srgbClr val="F0F1F3"/>
+                    </a:solidFill>
+                  </a:tcPr>
+                </a:tc>
+                <a:tc>
+                  <a:txBody>
+                    <a:bodyPr/>
+                    <a:lstStyle/>
+                    <a:p>
+                      <a:pPr algn="r"/>
+                      <a:r>
+                        <a:rPr sz="900" b="1" i="0">
+                          <a:solidFill>
+                            <a:srgbClr val="1F2A44"/>
+                          </a:solidFill>
+                          <a:latin typeface="Garamond"/>
+                          <a:cs typeface="Garamond"/>
+                        </a:rPr>
+                        <a:t>100.0%</a:t>
+                      </a:r>
+                    </a:p>
+                  </a:txBody>
+                  <a:tcPr anchor="ctr" marT="12700" marB="12700">
+                    <a:solidFill>
+                      <a:srgbClr val="F0F1F3"/>
+                    </a:solidFill>
+                  </a:tcPr>
+                </a:tc>
+              </a:tr>
+              <a:tr h="267788">
+                <a:tc>
+                  <a:txBody>
+                    <a:bodyPr/>
+                    <a:lstStyle/>
+                    <a:p>
+                      <a:pPr algn="l"/>
+                      <a:r>
+                        <a:rPr sz="900" b="0" i="0">
                           <a:solidFill>
                             <a:srgbClr val="262626"/>
                           </a:solidFill>
                           <a:latin typeface="Garamond"/>
                           <a:cs typeface="Garamond"/>
                         </a:rPr>
-                        <a:t>Equity risk premium</a:t>
-                      </a:r>
-                    </a:p>
+                        <a:t>Cash &amp; equivalents (EV offset)</a:t>
+                      </a:r>
+                    </a:p>
+                  </a:txBody>
+                  <a:tcPr anchor="ctr" marT="12700" marB="12700">
+                    <a:solidFill>
+                      <a:srgbClr val="FFFFFF"/>
+                    </a:solidFill>
+                  </a:tcPr>
+                </a:tc>
+                <a:tc>
+                  <a:txBody>
+                    <a:bodyPr/>
+                    <a:lstStyle/>
+                    <a:p>
+                      <a:pPr algn="r"/>
+                      <a:r>
+                        <a:rPr sz="900" b="0" i="0">
+                          <a:solidFill>
+                            <a:srgbClr val="262626"/>
+                          </a:solidFill>
+                          <a:latin typeface="Garamond"/>
+                          <a:cs typeface="Garamond"/>
+                        </a:rPr>
+                        <a:t>1,807</a:t>
+                      </a:r>
+                    </a:p>
+                  </a:txBody>
+                  <a:tcPr anchor="ctr" marT="12700" marB="12700">
+                    <a:solidFill>
+                      <a:srgbClr val="FFFFFF"/>
+                    </a:solidFill>
+                  </a:tcPr>
+                </a:tc>
+                <a:tc>
+                  <a:txBody>
+                    <a:bodyPr/>
+                    <a:lstStyle/>
+                    <a:p>
+                      <a:pPr algn="r"/>
+                      <a:r>
+                        <a:rPr sz="900" b="0" i="0">
+                          <a:solidFill>
+                            <a:srgbClr val="262626"/>
+                          </a:solidFill>
+                          <a:latin typeface="Garamond"/>
+                          <a:cs typeface="Garamond"/>
+                        </a:rPr>
+                        <a:t>—</a:t>
+                      </a:r>
+                    </a:p>
+                  </a:txBody>
+                  <a:tcPr anchor="ctr" marT="12700" marB="12700">
+                    <a:solidFill>
+                      <a:srgbClr val="FFFFFF"/>
+                    </a:solidFill>
+                  </a:tcPr>
+                </a:tc>
+              </a:tr>
+              <a:tr h="267791">
+                <a:tc>
+                  <a:txBody>
+                    <a:bodyPr/>
+                    <a:lstStyle/>
                     <a:p>
                       <a:pPr algn="l"/>
                       <a:r>
-                        <a:rPr sz="650" b="0" i="1">
-                          <a:solidFill>
-                            <a:srgbClr val="8C8C8C"/>
-                          </a:solidFill>
-                          <a:latin typeface="Garamond"/>
-                          <a:cs typeface="Garamond"/>
-                        </a:rPr>
-                        <a:t>Conservative vs Damodaran implied ERP</a:t>
+                        <a:rPr sz="900" b="0" i="0">
+                          <a:solidFill>
+                            <a:srgbClr val="262626"/>
+                          </a:solidFill>
+                          <a:latin typeface="Garamond"/>
+                          <a:cs typeface="Garamond"/>
+                        </a:rPr>
+                        <a:t>Net debt (leases + funded − cash)</a:t>
                       </a:r>
                     </a:p>
                   </a:txBody>
@@ -17538,14 +17060,14 @@
                     <a:p>
                       <a:pPr algn="r"/>
                       <a:r>
-                        <a:rPr sz="850" b="0" i="0">
+                        <a:rPr sz="900" b="0" i="0">
                           <a:solidFill>
                             <a:srgbClr val="262626"/>
                           </a:solidFill>
                           <a:latin typeface="Garamond"/>
                           <a:cs typeface="Garamond"/>
                         </a:rPr>
-                        <a:t>6.00%</a:t>
+                        <a:t>-9</a:t>
                       </a:r>
                     </a:p>
                   </a:txBody>
@@ -17562,884 +17084,14 @@
                     <a:p>
                       <a:pPr algn="r"/>
                       <a:r>
-                        <a:rPr sz="850" b="0" i="0">
+                        <a:rPr sz="900" b="0" i="0">
                           <a:solidFill>
                             <a:srgbClr val="262626"/>
                           </a:solidFill>
                           <a:latin typeface="Garamond"/>
                           <a:cs typeface="Garamond"/>
                         </a:rPr>
-                        <a:t>WACC!E4</a:t>
-                      </a:r>
-                    </a:p>
-                  </a:txBody>
-                  <a:tcPr anchor="ctr" marT="12700" marB="12700">
-                    <a:solidFill>
-                      <a:srgbClr val="F0F1F3"/>
-                    </a:solidFill>
-                  </a:tcPr>
-                </a:tc>
-              </a:tr>
-              <a:tr h="242667">
-                <a:tc>
-                  <a:txBody>
-                    <a:bodyPr/>
-                    <a:lstStyle/>
-                    <a:p>
-                      <a:pPr algn="l"/>
-                      <a:r>
-                        <a:rPr sz="850" b="0" i="0">
-                          <a:solidFill>
-                            <a:srgbClr val="262626"/>
-                          </a:solidFill>
-                          <a:latin typeface="Garamond"/>
-                          <a:cs typeface="Garamond"/>
-                        </a:rPr>
-                        <a:t>Tax rate</a:t>
-                      </a:r>
-                    </a:p>
-                    <a:p>
-                      <a:pPr algn="l"/>
-                      <a:r>
-                        <a:rPr sz="650" b="0" i="1">
-                          <a:solidFill>
-                            <a:srgbClr val="8C8C8C"/>
-                          </a:solidFill>
-                          <a:latin typeface="Garamond"/>
-                          <a:cs typeface="Garamond"/>
-                        </a:rPr>
-                        <a:t>FY2026 guidance ~30%</a:t>
-                      </a:r>
-                    </a:p>
-                  </a:txBody>
-                  <a:tcPr anchor="ctr" marT="12700" marB="12700">
-                    <a:solidFill>
-                      <a:srgbClr val="FFFFFF"/>
-                    </a:solidFill>
-                  </a:tcPr>
-                </a:tc>
-                <a:tc>
-                  <a:txBody>
-                    <a:bodyPr/>
-                    <a:lstStyle/>
-                    <a:p>
-                      <a:pPr algn="r"/>
-                      <a:r>
-                        <a:rPr sz="850" b="0" i="0">
-                          <a:solidFill>
-                            <a:srgbClr val="262626"/>
-                          </a:solidFill>
-                          <a:latin typeface="Garamond"/>
-                          <a:cs typeface="Garamond"/>
-                        </a:rPr>
-                        <a:t>30.00%</a:t>
-                      </a:r>
-                    </a:p>
-                  </a:txBody>
-                  <a:tcPr anchor="ctr" marT="12700" marB="12700">
-                    <a:solidFill>
-                      <a:srgbClr val="FFFFFF"/>
-                    </a:solidFill>
-                  </a:tcPr>
-                </a:tc>
-                <a:tc>
-                  <a:txBody>
-                    <a:bodyPr/>
-                    <a:lstStyle/>
-                    <a:p>
-                      <a:pPr algn="r"/>
-                      <a:r>
-                        <a:rPr sz="850" b="0" i="0">
-                          <a:solidFill>
-                            <a:srgbClr val="262626"/>
-                          </a:solidFill>
-                          <a:latin typeface="Garamond"/>
-                          <a:cs typeface="Garamond"/>
-                        </a:rPr>
-                        <a:t>WACC!E5</a:t>
-                      </a:r>
-                    </a:p>
-                  </a:txBody>
-                  <a:tcPr anchor="ctr" marT="12700" marB="12700">
-                    <a:solidFill>
-                      <a:srgbClr val="FFFFFF"/>
-                    </a:solidFill>
-                  </a:tcPr>
-                </a:tc>
-              </a:tr>
-              <a:tr h="242667">
-                <a:tc>
-                  <a:txBody>
-                    <a:bodyPr/>
-                    <a:lstStyle/>
-                    <a:p>
-                      <a:pPr algn="l"/>
-                      <a:r>
-                        <a:rPr sz="850" b="0" i="0">
-                          <a:solidFill>
-                            <a:srgbClr val="262626"/>
-                          </a:solidFill>
-                          <a:latin typeface="Garamond"/>
-                          <a:cs typeface="Garamond"/>
-                        </a:rPr>
-                        <a:t>Observed βL (Yahoo 5Y monthly)</a:t>
-                      </a:r>
-                    </a:p>
-                    <a:p>
-                      <a:pPr algn="l"/>
-                      <a:r>
-                        <a:rPr sz="650" b="0" i="1">
-                          <a:solidFill>
-                            <a:srgbClr val="8C8C8C"/>
-                          </a:solidFill>
-                          <a:latin typeface="Garamond"/>
-                          <a:cs typeface="Garamond"/>
-                        </a:rPr>
-                        <a:t>Yahoo Key Statistics</a:t>
-                      </a:r>
-                    </a:p>
-                  </a:txBody>
-                  <a:tcPr anchor="ctr" marT="12700" marB="12700">
-                    <a:solidFill>
-                      <a:srgbClr val="F0F1F3"/>
-                    </a:solidFill>
-                  </a:tcPr>
-                </a:tc>
-                <a:tc>
-                  <a:txBody>
-                    <a:bodyPr/>
-                    <a:lstStyle/>
-                    <a:p>
-                      <a:pPr algn="r"/>
-                      <a:r>
-                        <a:rPr sz="850" b="0" i="0">
-                          <a:solidFill>
-                            <a:srgbClr val="262626"/>
-                          </a:solidFill>
-                          <a:latin typeface="Garamond"/>
-                          <a:cs typeface="Garamond"/>
-                        </a:rPr>
-                        <a:t>0.86</a:t>
-                      </a:r>
-                    </a:p>
-                  </a:txBody>
-                  <a:tcPr anchor="ctr" marT="12700" marB="12700">
-                    <a:solidFill>
-                      <a:srgbClr val="F0F1F3"/>
-                    </a:solidFill>
-                  </a:tcPr>
-                </a:tc>
-                <a:tc>
-                  <a:txBody>
-                    <a:bodyPr/>
-                    <a:lstStyle/>
-                    <a:p>
-                      <a:pPr algn="r"/>
-                      <a:r>
-                        <a:rPr sz="850" b="0" i="0">
-                          <a:solidFill>
-                            <a:srgbClr val="262626"/>
-                          </a:solidFill>
-                          <a:latin typeface="Garamond"/>
-                          <a:cs typeface="Garamond"/>
-                        </a:rPr>
-                        <a:t>WACC!E17</a:t>
-                      </a:r>
-                    </a:p>
-                  </a:txBody>
-                  <a:tcPr anchor="ctr" marT="12700" marB="12700">
-                    <a:solidFill>
-                      <a:srgbClr val="F0F1F3"/>
-                    </a:solidFill>
-                  </a:tcPr>
-                </a:tc>
-              </a:tr>
-              <a:tr h="242667">
-                <a:tc>
-                  <a:txBody>
-                    <a:bodyPr/>
-                    <a:lstStyle/>
-                    <a:p>
-                      <a:pPr algn="l"/>
-                      <a:r>
-                        <a:rPr sz="850" b="0" i="0">
-                          <a:solidFill>
-                            <a:srgbClr val="262626"/>
-                          </a:solidFill>
-                          <a:latin typeface="Garamond"/>
-                          <a:cs typeface="Garamond"/>
-                        </a:rPr>
-                        <a:t>Unlevered βu (Hamada @ Yahoo D/E)</a:t>
-                      </a:r>
-                    </a:p>
-                    <a:p>
-                      <a:pPr algn="l"/>
-                      <a:r>
-                        <a:rPr sz="650" b="0" i="1">
-                          <a:solidFill>
-                            <a:srgbClr val="8C8C8C"/>
-                          </a:solidFill>
-                          <a:latin typeface="Garamond"/>
-                          <a:cs typeface="Garamond"/>
-                        </a:rPr>
-                        <a:t>D/E unlever = 0.19 (Yahoo mrq)</a:t>
-                      </a:r>
-                    </a:p>
-                  </a:txBody>
-                  <a:tcPr anchor="ctr" marT="12700" marB="12700">
-                    <a:solidFill>
-                      <a:srgbClr val="FFFFFF"/>
-                    </a:solidFill>
-                  </a:tcPr>
-                </a:tc>
-                <a:tc>
-                  <a:txBody>
-                    <a:bodyPr/>
-                    <a:lstStyle/>
-                    <a:p>
-                      <a:pPr algn="r"/>
-                      <a:r>
-                        <a:rPr sz="850" b="0" i="0">
-                          <a:solidFill>
-                            <a:srgbClr val="262626"/>
-                          </a:solidFill>
-                          <a:latin typeface="Garamond"/>
-                          <a:cs typeface="Garamond"/>
-                        </a:rPr>
-                        <a:t>0.76</a:t>
-                      </a:r>
-                    </a:p>
-                  </a:txBody>
-                  <a:tcPr anchor="ctr" marT="12700" marB="12700">
-                    <a:solidFill>
-                      <a:srgbClr val="FFFFFF"/>
-                    </a:solidFill>
-                  </a:tcPr>
-                </a:tc>
-                <a:tc>
-                  <a:txBody>
-                    <a:bodyPr/>
-                    <a:lstStyle/>
-                    <a:p>
-                      <a:pPr algn="r"/>
-                      <a:r>
-                        <a:rPr sz="850" b="0" i="0">
-                          <a:solidFill>
-                            <a:srgbClr val="262626"/>
-                          </a:solidFill>
-                          <a:latin typeface="Garamond"/>
-                          <a:cs typeface="Garamond"/>
-                        </a:rPr>
-                        <a:t>WACC!E22</a:t>
-                      </a:r>
-                    </a:p>
-                  </a:txBody>
-                  <a:tcPr anchor="ctr" marT="12700" marB="12700">
-                    <a:solidFill>
-                      <a:srgbClr val="FFFFFF"/>
-                    </a:solidFill>
-                  </a:tcPr>
-                </a:tc>
-              </a:tr>
-              <a:tr h="242667">
-                <a:tc>
-                  <a:txBody>
-                    <a:bodyPr/>
-                    <a:lstStyle/>
-                    <a:p>
-                      <a:pPr algn="l"/>
-                      <a:r>
-                        <a:rPr sz="850" b="0" i="0">
-                          <a:solidFill>
-                            <a:srgbClr val="262626"/>
-                          </a:solidFill>
-                          <a:latin typeface="Garamond"/>
-                          <a:cs typeface="Garamond"/>
-                        </a:rPr>
-                        <a:t>Relevered β (FY25 lease D/E)</a:t>
-                      </a:r>
-                    </a:p>
-                    <a:p>
-                      <a:pPr algn="l"/>
-                      <a:r>
-                        <a:rPr sz="650" b="0" i="1">
-                          <a:solidFill>
-                            <a:srgbClr val="8C8C8C"/>
-                          </a:solidFill>
-                          <a:latin typeface="Garamond"/>
-                          <a:cs typeface="Garamond"/>
-                        </a:rPr>
-                        <a:t>D/E relever = 0.16 (10-K leases / mkt cap)</a:t>
-                      </a:r>
-                    </a:p>
-                  </a:txBody>
-                  <a:tcPr anchor="ctr" marT="12700" marB="12700">
-                    <a:solidFill>
-                      <a:srgbClr val="F0F1F3"/>
-                    </a:solidFill>
-                  </a:tcPr>
-                </a:tc>
-                <a:tc>
-                  <a:txBody>
-                    <a:bodyPr/>
-                    <a:lstStyle/>
-                    <a:p>
-                      <a:pPr algn="r"/>
-                      <a:r>
-                        <a:rPr sz="850" b="0" i="0">
-                          <a:solidFill>
-                            <a:srgbClr val="262626"/>
-                          </a:solidFill>
-                          <a:latin typeface="Garamond"/>
-                          <a:cs typeface="Garamond"/>
-                        </a:rPr>
-                        <a:t>0.84</a:t>
-                      </a:r>
-                    </a:p>
-                  </a:txBody>
-                  <a:tcPr anchor="ctr" marT="12700" marB="12700">
-                    <a:solidFill>
-                      <a:srgbClr val="F0F1F3"/>
-                    </a:solidFill>
-                  </a:tcPr>
-                </a:tc>
-                <a:tc>
-                  <a:txBody>
-                    <a:bodyPr/>
-                    <a:lstStyle/>
-                    <a:p>
-                      <a:pPr algn="r"/>
-                      <a:r>
-                        <a:rPr sz="850" b="0" i="0">
-                          <a:solidFill>
-                            <a:srgbClr val="262626"/>
-                          </a:solidFill>
-                          <a:latin typeface="Garamond"/>
-                          <a:cs typeface="Garamond"/>
-                        </a:rPr>
-                        <a:t>WACC!E25</a:t>
-                      </a:r>
-                    </a:p>
-                  </a:txBody>
-                  <a:tcPr anchor="ctr" marT="12700" marB="12700">
-                    <a:solidFill>
-                      <a:srgbClr val="F0F1F3"/>
-                    </a:solidFill>
-                  </a:tcPr>
-                </a:tc>
-              </a:tr>
-              <a:tr h="242667">
-                <a:tc>
-                  <a:txBody>
-                    <a:bodyPr/>
-                    <a:lstStyle/>
-                    <a:p>
-                      <a:pPr algn="l"/>
-                      <a:r>
-                        <a:rPr sz="850" b="1" i="0">
-                          <a:solidFill>
-                            <a:srgbClr val="1F2A44"/>
-                          </a:solidFill>
-                          <a:latin typeface="Garamond"/>
-                          <a:cs typeface="Garamond"/>
-                        </a:rPr>
-                        <a:t>Cost of equity (CAPM)</a:t>
-                      </a:r>
-                    </a:p>
-                    <a:p>
-                      <a:pPr algn="l"/>
-                      <a:r>
-                        <a:rPr sz="650" b="0" i="1">
-                          <a:solidFill>
-                            <a:srgbClr val="8C8C8C"/>
-                          </a:solidFill>
-                          <a:latin typeface="Garamond"/>
-                          <a:cs typeface="Garamond"/>
-                        </a:rPr>
-                        <a:t>rf + β × ERP</a:t>
-                      </a:r>
-                    </a:p>
-                  </a:txBody>
-                  <a:tcPr anchor="ctr" marT="12700" marB="12700">
-                    <a:solidFill>
-                      <a:srgbClr val="FFFFFF"/>
-                    </a:solidFill>
-                  </a:tcPr>
-                </a:tc>
-                <a:tc>
-                  <a:txBody>
-                    <a:bodyPr/>
-                    <a:lstStyle/>
-                    <a:p>
-                      <a:pPr algn="r"/>
-                      <a:r>
-                        <a:rPr sz="850" b="1" i="0">
-                          <a:solidFill>
-                            <a:srgbClr val="1F2A44"/>
-                          </a:solidFill>
-                          <a:latin typeface="Garamond"/>
-                          <a:cs typeface="Garamond"/>
-                        </a:rPr>
-                        <a:t>9.86%</a:t>
-                      </a:r>
-                    </a:p>
-                  </a:txBody>
-                  <a:tcPr anchor="ctr" marT="12700" marB="12700">
-                    <a:solidFill>
-                      <a:srgbClr val="FFFFFF"/>
-                    </a:solidFill>
-                  </a:tcPr>
-                </a:tc>
-                <a:tc>
-                  <a:txBody>
-                    <a:bodyPr/>
-                    <a:lstStyle/>
-                    <a:p>
-                      <a:pPr algn="r"/>
-                      <a:r>
-                        <a:rPr sz="850" b="1" i="0">
-                          <a:solidFill>
-                            <a:srgbClr val="1F2A44"/>
-                          </a:solidFill>
-                          <a:latin typeface="Garamond"/>
-                          <a:cs typeface="Garamond"/>
-                        </a:rPr>
-                        <a:t>WACC!E32</a:t>
-                      </a:r>
-                    </a:p>
-                  </a:txBody>
-                  <a:tcPr anchor="ctr" marT="12700" marB="12700">
-                    <a:solidFill>
-                      <a:srgbClr val="FFFFFF"/>
-                    </a:solidFill>
-                  </a:tcPr>
-                </a:tc>
-              </a:tr>
-              <a:tr h="242667">
-                <a:tc>
-                  <a:txBody>
-                    <a:bodyPr/>
-                    <a:lstStyle/>
-                    <a:p>
-                      <a:pPr algn="l"/>
-                      <a:r>
-                        <a:rPr sz="850" b="0" i="0">
-                          <a:solidFill>
-                            <a:srgbClr val="262626"/>
-                          </a:solidFill>
-                          <a:latin typeface="Garamond"/>
-                          <a:cs typeface="Garamond"/>
-                        </a:rPr>
-                        <a:t>Pre-tax Kd (lease-equivalent)</a:t>
-                      </a:r>
-                    </a:p>
-                    <a:p>
-                      <a:pPr algn="l"/>
-                      <a:r>
-                        <a:rPr sz="650" b="0" i="1">
-                          <a:solidFill>
-                            <a:srgbClr val="8C8C8C"/>
-                          </a:solidFill>
-                          <a:latin typeface="Garamond"/>
-                          <a:cs typeface="Garamond"/>
-                        </a:rPr>
-                        <a:t>Illustrative lease borrowing cost</a:t>
-                      </a:r>
-                    </a:p>
-                  </a:txBody>
-                  <a:tcPr anchor="ctr" marT="12700" marB="12700">
-                    <a:solidFill>
-                      <a:srgbClr val="F0F1F3"/>
-                    </a:solidFill>
-                  </a:tcPr>
-                </a:tc>
-                <a:tc>
-                  <a:txBody>
-                    <a:bodyPr/>
-                    <a:lstStyle/>
-                    <a:p>
-                      <a:pPr algn="r"/>
-                      <a:r>
-                        <a:rPr sz="850" b="0" i="0">
-                          <a:solidFill>
-                            <a:srgbClr val="262626"/>
-                          </a:solidFill>
-                          <a:latin typeface="Garamond"/>
-                          <a:cs typeface="Garamond"/>
-                        </a:rPr>
-                        <a:t>5.00%</a:t>
-                      </a:r>
-                    </a:p>
-                  </a:txBody>
-                  <a:tcPr anchor="ctr" marT="12700" marB="12700">
-                    <a:solidFill>
-                      <a:srgbClr val="F0F1F3"/>
-                    </a:solidFill>
-                  </a:tcPr>
-                </a:tc>
-                <a:tc>
-                  <a:txBody>
-                    <a:bodyPr/>
-                    <a:lstStyle/>
-                    <a:p>
-                      <a:pPr algn="r"/>
-                      <a:r>
-                        <a:rPr sz="850" b="0" i="0">
-                          <a:solidFill>
-                            <a:srgbClr val="262626"/>
-                          </a:solidFill>
-                          <a:latin typeface="Garamond"/>
-                          <a:cs typeface="Garamond"/>
-                        </a:rPr>
-                        <a:t>WACC!E35</a:t>
-                      </a:r>
-                    </a:p>
-                  </a:txBody>
-                  <a:tcPr anchor="ctr" marT="12700" marB="12700">
-                    <a:solidFill>
-                      <a:srgbClr val="F0F1F3"/>
-                    </a:solidFill>
-                  </a:tcPr>
-                </a:tc>
-              </a:tr>
-              <a:tr h="242667">
-                <a:tc>
-                  <a:txBody>
-                    <a:bodyPr/>
-                    <a:lstStyle/>
-                    <a:p>
-                      <a:pPr algn="l"/>
-                      <a:r>
-                        <a:rPr sz="850" b="0" i="0">
-                          <a:solidFill>
-                            <a:srgbClr val="262626"/>
-                          </a:solidFill>
-                          <a:latin typeface="Garamond"/>
-                          <a:cs typeface="Garamond"/>
-                        </a:rPr>
-                        <a:t>After-tax Kd</a:t>
-                      </a:r>
-                    </a:p>
-                    <a:p>
-                      <a:pPr algn="l"/>
-                      <a:r>
-                        <a:rPr sz="650" b="0" i="1">
-                          <a:solidFill>
-                            <a:srgbClr val="8C8C8C"/>
-                          </a:solidFill>
-                          <a:latin typeface="Garamond"/>
-                          <a:cs typeface="Garamond"/>
-                        </a:rPr>
-                        <a:t>Kd × (1 − T)</a:t>
-                      </a:r>
-                    </a:p>
-                  </a:txBody>
-                  <a:tcPr anchor="ctr" marT="12700" marB="12700">
-                    <a:solidFill>
-                      <a:srgbClr val="FFFFFF"/>
-                    </a:solidFill>
-                  </a:tcPr>
-                </a:tc>
-                <a:tc>
-                  <a:txBody>
-                    <a:bodyPr/>
-                    <a:lstStyle/>
-                    <a:p>
-                      <a:pPr algn="r"/>
-                      <a:r>
-                        <a:rPr sz="850" b="0" i="0">
-                          <a:solidFill>
-                            <a:srgbClr val="262626"/>
-                          </a:solidFill>
-                          <a:latin typeface="Garamond"/>
-                          <a:cs typeface="Garamond"/>
-                        </a:rPr>
-                        <a:t>3.50%</a:t>
-                      </a:r>
-                    </a:p>
-                  </a:txBody>
-                  <a:tcPr anchor="ctr" marT="12700" marB="12700">
-                    <a:solidFill>
-                      <a:srgbClr val="FFFFFF"/>
-                    </a:solidFill>
-                  </a:tcPr>
-                </a:tc>
-                <a:tc>
-                  <a:txBody>
-                    <a:bodyPr/>
-                    <a:lstStyle/>
-                    <a:p>
-                      <a:pPr algn="r"/>
-                      <a:r>
-                        <a:rPr sz="850" b="0" i="0">
-                          <a:solidFill>
-                            <a:srgbClr val="262626"/>
-                          </a:solidFill>
-                          <a:latin typeface="Garamond"/>
-                          <a:cs typeface="Garamond"/>
-                        </a:rPr>
-                        <a:t>WACC!E36</a:t>
-                      </a:r>
-                    </a:p>
-                  </a:txBody>
-                  <a:tcPr anchor="ctr" marT="12700" marB="12700">
-                    <a:solidFill>
-                      <a:srgbClr val="FFFFFF"/>
-                    </a:solidFill>
-                  </a:tcPr>
-                </a:tc>
-              </a:tr>
-              <a:tr h="242667">
-                <a:tc>
-                  <a:txBody>
-                    <a:bodyPr/>
-                    <a:lstStyle/>
-                    <a:p>
-                      <a:pPr algn="l"/>
-                      <a:r>
-                        <a:rPr sz="850" b="0" i="0">
-                          <a:solidFill>
-                            <a:srgbClr val="262626"/>
-                          </a:solidFill>
-                          <a:latin typeface="Garamond"/>
-                          <a:cs typeface="Garamond"/>
-                        </a:rPr>
-                        <a:t>Equity weight</a:t>
-                      </a:r>
-                    </a:p>
-                    <a:p>
-                      <a:pPr algn="l"/>
-                      <a:r>
-                        <a:rPr sz="650" b="0" i="1">
-                          <a:solidFill>
-                            <a:srgbClr val="8C8C8C"/>
-                          </a:solidFill>
-                          <a:latin typeface="Garamond"/>
-                          <a:cs typeface="Garamond"/>
-                        </a:rPr>
-                        <a:t>Market equity / total capital</a:t>
-                      </a:r>
-                    </a:p>
-                  </a:txBody>
-                  <a:tcPr anchor="ctr" marT="12700" marB="12700">
-                    <a:solidFill>
-                      <a:srgbClr val="F0F1F3"/>
-                    </a:solidFill>
-                  </a:tcPr>
-                </a:tc>
-                <a:tc>
-                  <a:txBody>
-                    <a:bodyPr/>
-                    <a:lstStyle/>
-                    <a:p>
-                      <a:pPr algn="r"/>
-                      <a:r>
-                        <a:rPr sz="850" b="0" i="0">
-                          <a:solidFill>
-                            <a:srgbClr val="262626"/>
-                          </a:solidFill>
-                          <a:latin typeface="Garamond"/>
-                          <a:cs typeface="Garamond"/>
-                        </a:rPr>
-                        <a:t>86.1%</a:t>
-                      </a:r>
-                    </a:p>
-                  </a:txBody>
-                  <a:tcPr anchor="ctr" marT="12700" marB="12700">
-                    <a:solidFill>
-                      <a:srgbClr val="F0F1F3"/>
-                    </a:solidFill>
-                  </a:tcPr>
-                </a:tc>
-                <a:tc>
-                  <a:txBody>
-                    <a:bodyPr/>
-                    <a:lstStyle/>
-                    <a:p>
-                      <a:pPr algn="r"/>
-                      <a:r>
-                        <a:rPr sz="850" b="0" i="0">
-                          <a:solidFill>
-                            <a:srgbClr val="262626"/>
-                          </a:solidFill>
-                          <a:latin typeface="Garamond"/>
-                          <a:cs typeface="Garamond"/>
-                        </a:rPr>
-                        <a:t>WACC!E39</a:t>
-                      </a:r>
-                    </a:p>
-                  </a:txBody>
-                  <a:tcPr anchor="ctr" marT="12700" marB="12700">
-                    <a:solidFill>
-                      <a:srgbClr val="F0F1F3"/>
-                    </a:solidFill>
-                  </a:tcPr>
-                </a:tc>
-              </a:tr>
-              <a:tr h="242667">
-                <a:tc>
-                  <a:txBody>
-                    <a:bodyPr/>
-                    <a:lstStyle/>
-                    <a:p>
-                      <a:pPr algn="l"/>
-                      <a:r>
-                        <a:rPr sz="850" b="0" i="0">
-                          <a:solidFill>
-                            <a:srgbClr val="262626"/>
-                          </a:solidFill>
-                          <a:latin typeface="Garamond"/>
-                          <a:cs typeface="Garamond"/>
-                        </a:rPr>
-                        <a:t>Debt weight (leases)</a:t>
-                      </a:r>
-                    </a:p>
-                    <a:p>
-                      <a:pPr algn="l"/>
-                      <a:r>
-                        <a:rPr sz="650" b="0" i="1">
-                          <a:solidFill>
-                            <a:srgbClr val="8C8C8C"/>
-                          </a:solidFill>
-                          <a:latin typeface="Garamond"/>
-                          <a:cs typeface="Garamond"/>
-                        </a:rPr>
-                        <a:t>Lease debt / total capital</a:t>
-                      </a:r>
-                    </a:p>
-                  </a:txBody>
-                  <a:tcPr anchor="ctr" marT="12700" marB="12700">
-                    <a:solidFill>
-                      <a:srgbClr val="FFFFFF"/>
-                    </a:solidFill>
-                  </a:tcPr>
-                </a:tc>
-                <a:tc>
-                  <a:txBody>
-                    <a:bodyPr/>
-                    <a:lstStyle/>
-                    <a:p>
-                      <a:pPr algn="r"/>
-                      <a:r>
-                        <a:rPr sz="850" b="0" i="0">
-                          <a:solidFill>
-                            <a:srgbClr val="262626"/>
-                          </a:solidFill>
-                          <a:latin typeface="Garamond"/>
-                          <a:cs typeface="Garamond"/>
-                        </a:rPr>
-                        <a:t>13.9%</a:t>
-                      </a:r>
-                    </a:p>
-                  </a:txBody>
-                  <a:tcPr anchor="ctr" marT="12700" marB="12700">
-                    <a:solidFill>
-                      <a:srgbClr val="FFFFFF"/>
-                    </a:solidFill>
-                  </a:tcPr>
-                </a:tc>
-                <a:tc>
-                  <a:txBody>
-                    <a:bodyPr/>
-                    <a:lstStyle/>
-                    <a:p>
-                      <a:pPr algn="r"/>
-                      <a:r>
-                        <a:rPr sz="850" b="0" i="0">
-                          <a:solidFill>
-                            <a:srgbClr val="262626"/>
-                          </a:solidFill>
-                          <a:latin typeface="Garamond"/>
-                          <a:cs typeface="Garamond"/>
-                        </a:rPr>
-                        <a:t>WACC!E40</a:t>
-                      </a:r>
-                    </a:p>
-                  </a:txBody>
-                  <a:tcPr anchor="ctr" marT="12700" marB="12700">
-                    <a:solidFill>
-                      <a:srgbClr val="FFFFFF"/>
-                    </a:solidFill>
-                  </a:tcPr>
-                </a:tc>
-              </a:tr>
-              <a:tr h="242676">
-                <a:tc>
-                  <a:txBody>
-                    <a:bodyPr/>
-                    <a:lstStyle/>
-                    <a:p>
-                      <a:pPr algn="l"/>
-                      <a:r>
-                        <a:rPr sz="850" b="1" i="0">
-                          <a:solidFill>
-                            <a:srgbClr val="1F2A44"/>
-                          </a:solidFill>
-                          <a:latin typeface="Garamond"/>
-                          <a:cs typeface="Garamond"/>
-                        </a:rPr>
-                        <a:t>WACC</a:t>
-                      </a:r>
-                    </a:p>
-                    <a:p>
-                      <a:pPr algn="l"/>
-                      <a:r>
-                        <a:rPr sz="650" b="0" i="1">
-                          <a:solidFill>
-                            <a:srgbClr val="8C8C8C"/>
-                          </a:solidFill>
-                          <a:latin typeface="Garamond"/>
-                          <a:cs typeface="Garamond"/>
-                        </a:rPr>
-                        <a:t>We × CoE + Wd × Kd(1−T) → Scenarios col G</a:t>
-                      </a:r>
-                    </a:p>
-                  </a:txBody>
-                  <a:tcPr anchor="ctr" marT="12700" marB="12700">
-                    <a:solidFill>
-                      <a:srgbClr val="F0F1F3"/>
-                    </a:solidFill>
-                  </a:tcPr>
-                </a:tc>
-                <a:tc>
-                  <a:txBody>
-                    <a:bodyPr/>
-                    <a:lstStyle/>
-                    <a:p>
-                      <a:pPr algn="r"/>
-                      <a:r>
-                        <a:rPr sz="850" b="1" i="0">
-                          <a:solidFill>
-                            <a:srgbClr val="1F2A44"/>
-                          </a:solidFill>
-                          <a:latin typeface="Garamond"/>
-                          <a:cs typeface="Garamond"/>
-                        </a:rPr>
-                        <a:t>8.98%</a:t>
-                      </a:r>
-                    </a:p>
-                  </a:txBody>
-                  <a:tcPr anchor="ctr" marT="12700" marB="12700">
-                    <a:solidFill>
-                      <a:srgbClr val="F0F1F3"/>
-                    </a:solidFill>
-                  </a:tcPr>
-                </a:tc>
-                <a:tc>
-                  <a:txBody>
-                    <a:bodyPr/>
-                    <a:lstStyle/>
-                    <a:p>
-                      <a:pPr algn="r"/>
-                      <a:r>
-                        <a:rPr sz="850" b="1" i="0">
-                          <a:solidFill>
-                            <a:srgbClr val="1F2A44"/>
-                          </a:solidFill>
-                          <a:latin typeface="Garamond"/>
-                          <a:cs typeface="Garamond"/>
-                        </a:rPr>
-                        <a:t>WACC!E41</a:t>
+                        <a:t>—</a:t>
                       </a:r>
                     </a:p>
                   </a:txBody>
@@ -18456,14 +17108,58 @@
       </p:graphicFrame>
       <p:sp>
         <p:nvSpPr>
-          <p:cNvPr id="11" name="Rectangle 10"/>
+          <p:cNvPr id="11" name="TextBox 10"/>
+          <p:cNvSpPr txBox="1"/>
+          <p:nvPr/>
+        </p:nvSpPr>
+        <p:spPr>
+          <a:xfrm>
+            <a:off x="457200" y="3218688"/>
+            <a:ext cx="5532120" cy="658368"/>
+          </a:xfrm>
+          <a:prstGeom prst="rect">
+            <a:avLst/>
+          </a:prstGeom>
+          <a:noFill/>
+        </p:spPr>
+        <p:txBody>
+          <a:bodyPr wrap="square" anchor="t" lIns="25400" rIns="25400" tIns="12700" bIns="12700">
+            <a:spAutoFit/>
+          </a:bodyPr>
+          <a:lstStyle/>
+          <a:p>
+            <a:pPr algn="l">
+              <a:spcBef>
+                <a:spcPts val="0"/>
+              </a:spcBef>
+              <a:spcAft>
+                <a:spcPts val="0"/>
+              </a:spcAft>
+              <a:buNone/>
+            </a:pPr>
+            <a:r>
+              <a:rPr sz="850" b="0" i="1">
+                <a:solidFill>
+                  <a:srgbClr val="262626"/>
+                </a:solidFill>
+                <a:latin typeface="Garamond"/>
+                <a:cs typeface="Garamond"/>
+              </a:rPr>
+              <a:t>No funded bank debt; ASC 842 store leases are the only debt equivalent (~14% WACC weight). Cash $1,807M exceeds lease debt → net-cash on a funded-debt basis.</a:t>
+            </a:r>
+          </a:p>
+        </p:txBody>
+      </p:sp>
+      <p:sp>
+        <p:nvSpPr>
+          <p:cNvPr id="12" name="Rectangle 11"/>
           <p:cNvSpPr/>
           <p:nvPr/>
         </p:nvSpPr>
         <p:spPr>
           <a:xfrm>
-            <a:off x="6126480" y="4315968"/>
-            <a:ext cx="5623560" cy="502920"/>
+            <a:off x="6126480" y="1234440"/>
+            <a:ext cx="5623560" cy="3657600"/>
           </a:xfrm>
           <a:prstGeom prst="rect">
             <a:avLst/>
@@ -18491,6 +17187,570 @@
           </a:fontRef>
         </p:style>
         <p:txBody>
+          <a:bodyPr rtlCol="0" anchor="ctr"/>
+          <a:lstStyle/>
+          <a:p>
+            <a:pPr algn="ctr"/>
+          </a:p>
+        </p:txBody>
+      </p:sp>
+      <p:graphicFrame>
+        <p:nvGraphicFramePr>
+          <p:cNvPr id="13" name="Table 12"/>
+          <p:cNvGraphicFramePr>
+            <a:graphicFrameLocks noGrp="1"/>
+          </p:cNvGraphicFramePr>
+          <p:nvPr/>
+        </p:nvGraphicFramePr>
+        <p:xfrm>
+          <a:off x="6199632" y="1298448"/>
+          <a:ext cx="5468112" cy="2148840"/>
+        </p:xfrm>
+        <a:graphic>
+          <a:graphicData uri="http://schemas.openxmlformats.org/drawingml/2006/table">
+            <a:tbl>
+              <a:tblPr firstRow="1" bandRow="1">
+                <a:tableStyleId>{5C22544A-7EE6-4342-B048-85BDC9FD1C3A}</a:tableStyleId>
+              </a:tblPr>
+              <a:tblGrid>
+                <a:gridCol w="3063240"/>
+                <a:gridCol w="2404872"/>
+              </a:tblGrid>
+              <a:tr h="238760">
+                <a:tc>
+                  <a:txBody>
+                    <a:bodyPr/>
+                    <a:lstStyle/>
+                    <a:p>
+                      <a:pPr algn="l"/>
+                      <a:r>
+                        <a:rPr sz="900" b="1" i="0">
+                          <a:solidFill>
+                            <a:srgbClr val="FFFFFF"/>
+                          </a:solidFill>
+                          <a:latin typeface="Garamond"/>
+                          <a:cs typeface="Garamond"/>
+                        </a:rPr>
+                        <a:t>Input</a:t>
+                      </a:r>
+                    </a:p>
+                  </a:txBody>
+                  <a:tcPr anchor="ctr">
+                    <a:solidFill>
+                      <a:srgbClr val="1F2A44"/>
+                    </a:solidFill>
+                  </a:tcPr>
+                </a:tc>
+                <a:tc>
+                  <a:txBody>
+                    <a:bodyPr/>
+                    <a:lstStyle/>
+                    <a:p>
+                      <a:pPr algn="r"/>
+                      <a:r>
+                        <a:rPr sz="900" b="1" i="0">
+                          <a:solidFill>
+                            <a:srgbClr val="FFFFFF"/>
+                          </a:solidFill>
+                          <a:latin typeface="Garamond"/>
+                          <a:cs typeface="Garamond"/>
+                        </a:rPr>
+                        <a:t>Value</a:t>
+                      </a:r>
+                    </a:p>
+                  </a:txBody>
+                  <a:tcPr anchor="ctr">
+                    <a:solidFill>
+                      <a:srgbClr val="1F2A44"/>
+                    </a:solidFill>
+                  </a:tcPr>
+                </a:tc>
+              </a:tr>
+              <a:tr h="238760">
+                <a:tc>
+                  <a:txBody>
+                    <a:bodyPr/>
+                    <a:lstStyle/>
+                    <a:p>
+                      <a:pPr algn="l"/>
+                      <a:r>
+                        <a:rPr sz="900" b="0" i="0">
+                          <a:solidFill>
+                            <a:srgbClr val="262626"/>
+                          </a:solidFill>
+                          <a:latin typeface="Garamond"/>
+                          <a:cs typeface="Garamond"/>
+                        </a:rPr>
+                        <a:t>Risk-free rate (10-yr UST)</a:t>
+                      </a:r>
+                    </a:p>
+                  </a:txBody>
+                  <a:tcPr anchor="ctr" marT="12700" marB="12700">
+                    <a:solidFill>
+                      <a:srgbClr val="FFFFFF"/>
+                    </a:solidFill>
+                  </a:tcPr>
+                </a:tc>
+                <a:tc>
+                  <a:txBody>
+                    <a:bodyPr/>
+                    <a:lstStyle/>
+                    <a:p>
+                      <a:pPr algn="r"/>
+                      <a:r>
+                        <a:rPr sz="900" b="0" i="0">
+                          <a:solidFill>
+                            <a:srgbClr val="262626"/>
+                          </a:solidFill>
+                          <a:latin typeface="Garamond"/>
+                          <a:cs typeface="Garamond"/>
+                        </a:rPr>
+                        <a:t>4.80%</a:t>
+                      </a:r>
+                    </a:p>
+                  </a:txBody>
+                  <a:tcPr anchor="ctr" marT="12700" marB="12700">
+                    <a:solidFill>
+                      <a:srgbClr val="FFFFFF"/>
+                    </a:solidFill>
+                  </a:tcPr>
+                </a:tc>
+              </a:tr>
+              <a:tr h="238760">
+                <a:tc>
+                  <a:txBody>
+                    <a:bodyPr/>
+                    <a:lstStyle/>
+                    <a:p>
+                      <a:pPr algn="l"/>
+                      <a:r>
+                        <a:rPr sz="900" b="0" i="0">
+                          <a:solidFill>
+                            <a:srgbClr val="262626"/>
+                          </a:solidFill>
+                          <a:latin typeface="Garamond"/>
+                          <a:cs typeface="Garamond"/>
+                        </a:rPr>
+                        <a:t>Equity risk premium</a:t>
+                      </a:r>
+                    </a:p>
+                  </a:txBody>
+                  <a:tcPr anchor="ctr" marT="12700" marB="12700">
+                    <a:solidFill>
+                      <a:srgbClr val="F0F1F3"/>
+                    </a:solidFill>
+                  </a:tcPr>
+                </a:tc>
+                <a:tc>
+                  <a:txBody>
+                    <a:bodyPr/>
+                    <a:lstStyle/>
+                    <a:p>
+                      <a:pPr algn="r"/>
+                      <a:r>
+                        <a:rPr sz="900" b="0" i="0">
+                          <a:solidFill>
+                            <a:srgbClr val="262626"/>
+                          </a:solidFill>
+                          <a:latin typeface="Garamond"/>
+                          <a:cs typeface="Garamond"/>
+                        </a:rPr>
+                        <a:t>6.00%</a:t>
+                      </a:r>
+                    </a:p>
+                  </a:txBody>
+                  <a:tcPr anchor="ctr" marT="12700" marB="12700">
+                    <a:solidFill>
+                      <a:srgbClr val="F0F1F3"/>
+                    </a:solidFill>
+                  </a:tcPr>
+                </a:tc>
+              </a:tr>
+              <a:tr h="238760">
+                <a:tc>
+                  <a:txBody>
+                    <a:bodyPr/>
+                    <a:lstStyle/>
+                    <a:p>
+                      <a:pPr algn="l"/>
+                      <a:r>
+                        <a:rPr sz="900" b="0" i="0">
+                          <a:solidFill>
+                            <a:srgbClr val="262626"/>
+                          </a:solidFill>
+                          <a:latin typeface="Garamond"/>
+                          <a:cs typeface="Garamond"/>
+                        </a:rPr>
+                        <a:t>Tax rate</a:t>
+                      </a:r>
+                    </a:p>
+                  </a:txBody>
+                  <a:tcPr anchor="ctr" marT="12700" marB="12700">
+                    <a:solidFill>
+                      <a:srgbClr val="FFFFFF"/>
+                    </a:solidFill>
+                  </a:tcPr>
+                </a:tc>
+                <a:tc>
+                  <a:txBody>
+                    <a:bodyPr/>
+                    <a:lstStyle/>
+                    <a:p>
+                      <a:pPr algn="r"/>
+                      <a:r>
+                        <a:rPr sz="900" b="0" i="0">
+                          <a:solidFill>
+                            <a:srgbClr val="262626"/>
+                          </a:solidFill>
+                          <a:latin typeface="Garamond"/>
+                          <a:cs typeface="Garamond"/>
+                        </a:rPr>
+                        <a:t>30.00%</a:t>
+                      </a:r>
+                    </a:p>
+                  </a:txBody>
+                  <a:tcPr anchor="ctr" marT="12700" marB="12700">
+                    <a:solidFill>
+                      <a:srgbClr val="FFFFFF"/>
+                    </a:solidFill>
+                  </a:tcPr>
+                </a:tc>
+              </a:tr>
+              <a:tr h="238760">
+                <a:tc>
+                  <a:txBody>
+                    <a:bodyPr/>
+                    <a:lstStyle/>
+                    <a:p>
+                      <a:pPr algn="l"/>
+                      <a:r>
+                        <a:rPr sz="900" b="0" i="0">
+                          <a:solidFill>
+                            <a:srgbClr val="262626"/>
+                          </a:solidFill>
+                          <a:latin typeface="Garamond"/>
+                          <a:cs typeface="Garamond"/>
+                        </a:rPr>
+                        <a:t>Beta (relevered; lease adj.)</a:t>
+                      </a:r>
+                    </a:p>
+                  </a:txBody>
+                  <a:tcPr anchor="ctr" marT="12700" marB="12700">
+                    <a:solidFill>
+                      <a:srgbClr val="F0F1F3"/>
+                    </a:solidFill>
+                  </a:tcPr>
+                </a:tc>
+                <a:tc>
+                  <a:txBody>
+                    <a:bodyPr/>
+                    <a:lstStyle/>
+                    <a:p>
+                      <a:pPr algn="r"/>
+                      <a:r>
+                        <a:rPr sz="900" b="0" i="0">
+                          <a:solidFill>
+                            <a:srgbClr val="262626"/>
+                          </a:solidFill>
+                          <a:latin typeface="Garamond"/>
+                          <a:cs typeface="Garamond"/>
+                        </a:rPr>
+                        <a:t>0.84</a:t>
+                      </a:r>
+                    </a:p>
+                  </a:txBody>
+                  <a:tcPr anchor="ctr" marT="12700" marB="12700">
+                    <a:solidFill>
+                      <a:srgbClr val="F0F1F3"/>
+                    </a:solidFill>
+                  </a:tcPr>
+                </a:tc>
+              </a:tr>
+              <a:tr h="238760">
+                <a:tc>
+                  <a:txBody>
+                    <a:bodyPr/>
+                    <a:lstStyle/>
+                    <a:p>
+                      <a:pPr algn="l"/>
+                      <a:r>
+                        <a:rPr sz="900" b="1" i="0">
+                          <a:solidFill>
+                            <a:srgbClr val="1F2A44"/>
+                          </a:solidFill>
+                          <a:latin typeface="Garamond"/>
+                          <a:cs typeface="Garamond"/>
+                        </a:rPr>
+                        <a:t>Cost of equity (CAPM)</a:t>
+                      </a:r>
+                    </a:p>
+                  </a:txBody>
+                  <a:tcPr anchor="ctr" marT="12700" marB="12700">
+                    <a:solidFill>
+                      <a:srgbClr val="FFFFFF"/>
+                    </a:solidFill>
+                  </a:tcPr>
+                </a:tc>
+                <a:tc>
+                  <a:txBody>
+                    <a:bodyPr/>
+                    <a:lstStyle/>
+                    <a:p>
+                      <a:pPr algn="r"/>
+                      <a:r>
+                        <a:rPr sz="900" b="1" i="0">
+                          <a:solidFill>
+                            <a:srgbClr val="1F2A44"/>
+                          </a:solidFill>
+                          <a:latin typeface="Garamond"/>
+                          <a:cs typeface="Garamond"/>
+                        </a:rPr>
+                        <a:t>9.86%</a:t>
+                      </a:r>
+                    </a:p>
+                  </a:txBody>
+                  <a:tcPr anchor="ctr" marT="12700" marB="12700">
+                    <a:solidFill>
+                      <a:srgbClr val="FFFFFF"/>
+                    </a:solidFill>
+                  </a:tcPr>
+                </a:tc>
+              </a:tr>
+              <a:tr h="238760">
+                <a:tc>
+                  <a:txBody>
+                    <a:bodyPr/>
+                    <a:lstStyle/>
+                    <a:p>
+                      <a:pPr algn="l"/>
+                      <a:r>
+                        <a:rPr sz="900" b="0" i="0">
+                          <a:solidFill>
+                            <a:srgbClr val="262626"/>
+                          </a:solidFill>
+                          <a:latin typeface="Garamond"/>
+                          <a:cs typeface="Garamond"/>
+                        </a:rPr>
+                        <a:t>Pre-tax Kd (lease-equivalent)</a:t>
+                      </a:r>
+                    </a:p>
+                  </a:txBody>
+                  <a:tcPr anchor="ctr" marT="12700" marB="12700">
+                    <a:solidFill>
+                      <a:srgbClr val="F0F1F3"/>
+                    </a:solidFill>
+                  </a:tcPr>
+                </a:tc>
+                <a:tc>
+                  <a:txBody>
+                    <a:bodyPr/>
+                    <a:lstStyle/>
+                    <a:p>
+                      <a:pPr algn="r"/>
+                      <a:r>
+                        <a:rPr sz="900" b="0" i="0">
+                          <a:solidFill>
+                            <a:srgbClr val="262626"/>
+                          </a:solidFill>
+                          <a:latin typeface="Garamond"/>
+                          <a:cs typeface="Garamond"/>
+                        </a:rPr>
+                        <a:t>5.00%</a:t>
+                      </a:r>
+                    </a:p>
+                  </a:txBody>
+                  <a:tcPr anchor="ctr" marT="12700" marB="12700">
+                    <a:solidFill>
+                      <a:srgbClr val="F0F1F3"/>
+                    </a:solidFill>
+                  </a:tcPr>
+                </a:tc>
+              </a:tr>
+              <a:tr h="238760">
+                <a:tc>
+                  <a:txBody>
+                    <a:bodyPr/>
+                    <a:lstStyle/>
+                    <a:p>
+                      <a:pPr algn="l"/>
+                      <a:r>
+                        <a:rPr sz="900" b="0" i="0">
+                          <a:solidFill>
+                            <a:srgbClr val="262626"/>
+                          </a:solidFill>
+                          <a:latin typeface="Garamond"/>
+                          <a:cs typeface="Garamond"/>
+                        </a:rPr>
+                        <a:t>After-tax Kd</a:t>
+                      </a:r>
+                    </a:p>
+                  </a:txBody>
+                  <a:tcPr anchor="ctr" marT="12700" marB="12700">
+                    <a:solidFill>
+                      <a:srgbClr val="FFFFFF"/>
+                    </a:solidFill>
+                  </a:tcPr>
+                </a:tc>
+                <a:tc>
+                  <a:txBody>
+                    <a:bodyPr/>
+                    <a:lstStyle/>
+                    <a:p>
+                      <a:pPr algn="r"/>
+                      <a:r>
+                        <a:rPr sz="900" b="0" i="0">
+                          <a:solidFill>
+                            <a:srgbClr val="262626"/>
+                          </a:solidFill>
+                          <a:latin typeface="Garamond"/>
+                          <a:cs typeface="Garamond"/>
+                        </a:rPr>
+                        <a:t>3.50%</a:t>
+                      </a:r>
+                    </a:p>
+                  </a:txBody>
+                  <a:tcPr anchor="ctr" marT="12700" marB="12700">
+                    <a:solidFill>
+                      <a:srgbClr val="FFFFFF"/>
+                    </a:solidFill>
+                  </a:tcPr>
+                </a:tc>
+              </a:tr>
+              <a:tr h="238760">
+                <a:tc>
+                  <a:txBody>
+                    <a:bodyPr/>
+                    <a:lstStyle/>
+                    <a:p>
+                      <a:pPr algn="l"/>
+                      <a:r>
+                        <a:rPr sz="900" b="0" i="0">
+                          <a:solidFill>
+                            <a:srgbClr val="262626"/>
+                          </a:solidFill>
+                          <a:latin typeface="Garamond"/>
+                          <a:cs typeface="Garamond"/>
+                        </a:rPr>
+                        <a:t>Equity / debt weight</a:t>
+                      </a:r>
+                    </a:p>
+                  </a:txBody>
+                  <a:tcPr anchor="ctr" marT="12700" marB="12700">
+                    <a:solidFill>
+                      <a:srgbClr val="F0F1F3"/>
+                    </a:solidFill>
+                  </a:tcPr>
+                </a:tc>
+                <a:tc>
+                  <a:txBody>
+                    <a:bodyPr/>
+                    <a:lstStyle/>
+                    <a:p>
+                      <a:pPr algn="r"/>
+                      <a:r>
+                        <a:rPr sz="900" b="0" i="0">
+                          <a:solidFill>
+                            <a:srgbClr val="262626"/>
+                          </a:solidFill>
+                          <a:latin typeface="Garamond"/>
+                          <a:cs typeface="Garamond"/>
+                        </a:rPr>
+                        <a:t>86.1% / 13.9%</a:t>
+                      </a:r>
+                    </a:p>
+                  </a:txBody>
+                  <a:tcPr anchor="ctr" marT="12700" marB="12700">
+                    <a:solidFill>
+                      <a:srgbClr val="F0F1F3"/>
+                    </a:solidFill>
+                  </a:tcPr>
+                </a:tc>
+              </a:tr>
+            </a:tbl>
+          </a:graphicData>
+        </a:graphic>
+      </p:graphicFrame>
+      <p:sp>
+        <p:nvSpPr>
+          <p:cNvPr id="14" name="TextBox 13"/>
+          <p:cNvSpPr txBox="1"/>
+          <p:nvPr/>
+        </p:nvSpPr>
+        <p:spPr>
+          <a:xfrm>
+            <a:off x="6263640" y="3584448"/>
+            <a:ext cx="5349240" cy="384048"/>
+          </a:xfrm>
+          <a:prstGeom prst="rect">
+            <a:avLst/>
+          </a:prstGeom>
+          <a:noFill/>
+        </p:spPr>
+        <p:txBody>
+          <a:bodyPr wrap="square" anchor="t" lIns="25400" rIns="25400" tIns="12700" bIns="12700">
+            <a:spAutoFit/>
+          </a:bodyPr>
+          <a:lstStyle/>
+          <a:p>
+            <a:pPr algn="l">
+              <a:spcBef>
+                <a:spcPts val="0"/>
+              </a:spcBef>
+              <a:spcAft>
+                <a:spcPts val="0"/>
+              </a:spcAft>
+              <a:buNone/>
+            </a:pPr>
+            <a:r>
+              <a:rPr sz="800" b="0" i="1">
+                <a:solidFill>
+                  <a:srgbClr val="262626"/>
+                </a:solidFill>
+                <a:latin typeface="Garamond"/>
+                <a:cs typeface="Garamond"/>
+              </a:rPr>
+              <a:t>β: Yahoo βL 0.86 → unlevered 0.76 @ D/E 0.19 → relever 0.84 @ lease D/E 0.16</a:t>
+            </a:r>
+          </a:p>
+        </p:txBody>
+      </p:sp>
+      <p:sp>
+        <p:nvSpPr>
+          <p:cNvPr id="15" name="Rectangle 14"/>
+          <p:cNvSpPr/>
+          <p:nvPr/>
+        </p:nvSpPr>
+        <p:spPr>
+          <a:xfrm>
+            <a:off x="6126480" y="4041648"/>
+            <a:ext cx="5623560" cy="804672"/>
+          </a:xfrm>
+          <a:prstGeom prst="rect">
+            <a:avLst/>
+          </a:prstGeom>
+          <a:solidFill>
+            <a:srgbClr val="1F2A44"/>
+          </a:solidFill>
+          <a:ln>
+            <a:noFill/>
+          </a:ln>
+          <a:effectLst/>
+        </p:spPr>
+        <p:style>
+          <a:lnRef idx="1">
+            <a:schemeClr val="accent1"/>
+          </a:lnRef>
+          <a:fillRef idx="3">
+            <a:schemeClr val="accent1"/>
+          </a:fillRef>
+          <a:effectRef idx="2">
+            <a:schemeClr val="accent1"/>
+          </a:effectRef>
+          <a:fontRef idx="minor">
+            <a:schemeClr val="lt1"/>
+          </a:fontRef>
+        </p:style>
+        <p:txBody>
           <a:bodyPr rtlCol="0" anchor="ctr" wrap="square"/>
           <a:lstStyle/>
           <a:p>
@@ -18504,14 +17764,14 @@
               <a:buNone/>
             </a:pPr>
             <a:r>
-              <a:rPr sz="1400" b="1" i="0">
-                <a:solidFill>
-                  <a:srgbClr val="1F2A44"/>
-                </a:solidFill>
-                <a:latin typeface="Garamond"/>
-                <a:cs typeface="Garamond"/>
-              </a:rPr>
-              <a:t>BASE-CASE WACC = 8.98%</a:t>
+              <a:rPr sz="1700" b="1" i="0">
+                <a:solidFill>
+                  <a:srgbClr val="FFFFFF"/>
+                </a:solidFill>
+                <a:latin typeface="Garamond"/>
+                <a:cs typeface="Garamond"/>
+              </a:rPr>
+              <a:t>WACC = 8.98%</a:t>
             </a:r>
           </a:p>
           <a:p>
@@ -18525,18 +17785,888 @@
               <a:buNone/>
             </a:pPr>
             <a:r>
-              <a:rPr sz="850" b="0" i="0">
-                <a:solidFill>
-                  <a:srgbClr val="262626"/>
-                </a:solidFill>
-                <a:latin typeface="Garamond"/>
-                <a:cs typeface="Garamond"/>
-              </a:rPr>
-              <a:t>Drives Scenarios col G discount rate and $134 implied share price. Bear/bull bracket WACC ±100bps on Scenarios tab.</a:t>
+              <a:rPr sz="900" b="0" i="0">
+                <a:solidFill>
+                  <a:srgbClr val="FFFFFF"/>
+                </a:solidFill>
+                <a:latin typeface="Garamond"/>
+                <a:cs typeface="Garamond"/>
+              </a:rPr>
+              <a:t>Base-case discount rate → Scenarios col G · implied price $134</a:t>
             </a:r>
           </a:p>
         </p:txBody>
       </p:sp>
+      <p:sp>
+        <p:nvSpPr>
+          <p:cNvPr id="16" name="TextBox 15"/>
+          <p:cNvSpPr txBox="1"/>
+          <p:nvPr/>
+        </p:nvSpPr>
+        <p:spPr>
+          <a:xfrm>
+            <a:off x="457200" y="5285232"/>
+            <a:ext cx="11292840" cy="182880"/>
+          </a:xfrm>
+          <a:prstGeom prst="rect">
+            <a:avLst/>
+          </a:prstGeom>
+          <a:noFill/>
+        </p:spPr>
+        <p:txBody>
+          <a:bodyPr wrap="square" anchor="t" lIns="25400" rIns="25400" tIns="12700" bIns="12700">
+            <a:spAutoFit/>
+          </a:bodyPr>
+          <a:lstStyle/>
+          <a:p>
+            <a:pPr algn="l">
+              <a:spcBef>
+                <a:spcPts val="0"/>
+              </a:spcBef>
+              <a:spcAft>
+                <a:spcPts val="0"/>
+              </a:spcAft>
+              <a:buNone/>
+            </a:pPr>
+            <a:r>
+              <a:rPr sz="900" b="1" i="0">
+                <a:solidFill>
+                  <a:srgbClr val="990000"/>
+                </a:solidFill>
+                <a:latin typeface="Garamond"/>
+                <a:cs typeface="Garamond"/>
+              </a:rPr>
+              <a:t>MODEL SOURCE MAP</a:t>
+            </a:r>
+          </a:p>
+        </p:txBody>
+      </p:sp>
+      <p:graphicFrame>
+        <p:nvGraphicFramePr>
+          <p:cNvPr id="17" name="Table 16"/>
+          <p:cNvGraphicFramePr>
+            <a:graphicFrameLocks noGrp="1"/>
+          </p:cNvGraphicFramePr>
+          <p:nvPr/>
+        </p:nvGraphicFramePr>
+        <p:xfrm>
+          <a:off x="457200" y="5468112"/>
+          <a:ext cx="11292840" cy="932688"/>
+        </p:xfrm>
+        <a:graphic>
+          <a:graphicData uri="http://schemas.openxmlformats.org/drawingml/2006/table">
+            <a:tbl>
+              <a:tblPr firstRow="1" bandRow="1">
+                <a:tableStyleId>{5C22544A-7EE6-4342-B048-85BDC9FD1C3A}</a:tableStyleId>
+              </a:tblPr>
+              <a:tblGrid>
+                <a:gridCol w="2194560"/>
+                <a:gridCol w="9098280"/>
+              </a:tblGrid>
+              <a:tr h="58293">
+                <a:tc>
+                  <a:txBody>
+                    <a:bodyPr/>
+                    <a:lstStyle/>
+                    <a:p>
+                      <a:pPr algn="l"/>
+                      <a:r>
+                        <a:rPr sz="750" b="1" i="0">
+                          <a:solidFill>
+                            <a:srgbClr val="FFFFFF"/>
+                          </a:solidFill>
+                          <a:latin typeface="Garamond"/>
+                          <a:cs typeface="Garamond"/>
+                        </a:rPr>
+                        <a:t>Line item</a:t>
+                      </a:r>
+                    </a:p>
+                  </a:txBody>
+                  <a:tcPr anchor="ctr">
+                    <a:solidFill>
+                      <a:srgbClr val="1F2A44"/>
+                    </a:solidFill>
+                  </a:tcPr>
+                </a:tc>
+                <a:tc>
+                  <a:txBody>
+                    <a:bodyPr/>
+                    <a:lstStyle/>
+                    <a:p>
+                      <a:pPr algn="r"/>
+                      <a:r>
+                        <a:rPr sz="750" b="1" i="0">
+                          <a:solidFill>
+                            <a:srgbClr val="FFFFFF"/>
+                          </a:solidFill>
+                          <a:latin typeface="Garamond"/>
+                          <a:cs typeface="Garamond"/>
+                        </a:rPr>
+                        <a:t>DCF model source (WACC tab, col E)</a:t>
+                      </a:r>
+                    </a:p>
+                  </a:txBody>
+                  <a:tcPr anchor="ctr">
+                    <a:solidFill>
+                      <a:srgbClr val="1F2A44"/>
+                    </a:solidFill>
+                  </a:tcPr>
+                </a:tc>
+              </a:tr>
+              <a:tr h="58293">
+                <a:tc>
+                  <a:txBody>
+                    <a:bodyPr/>
+                    <a:lstStyle/>
+                    <a:p>
+                      <a:pPr algn="l"/>
+                      <a:r>
+                        <a:rPr sz="700" b="0" i="0">
+                          <a:solidFill>
+                            <a:srgbClr val="262626"/>
+                          </a:solidFill>
+                          <a:latin typeface="Garamond"/>
+                          <a:cs typeface="Garamond"/>
+                        </a:rPr>
+                        <a:t>Market equity</a:t>
+                      </a:r>
+                    </a:p>
+                  </a:txBody>
+                  <a:tcPr anchor="ctr" marT="12700" marB="12700">
+                    <a:solidFill>
+                      <a:srgbClr val="FFFFFF"/>
+                    </a:solidFill>
+                  </a:tcPr>
+                </a:tc>
+                <a:tc>
+                  <a:txBody>
+                    <a:bodyPr/>
+                    <a:lstStyle/>
+                    <a:p>
+                      <a:pPr algn="r"/>
+                      <a:r>
+                        <a:rPr sz="700" b="0" i="0">
+                          <a:solidFill>
+                            <a:srgbClr val="262626"/>
+                          </a:solidFill>
+                          <a:latin typeface="Garamond"/>
+                          <a:cs typeface="Garamond"/>
+                        </a:rPr>
+                        <a:t>WACC!E10</a:t>
+                      </a:r>
+                    </a:p>
+                  </a:txBody>
+                  <a:tcPr anchor="ctr" marT="12700" marB="12700">
+                    <a:solidFill>
+                      <a:srgbClr val="FFFFFF"/>
+                    </a:solidFill>
+                  </a:tcPr>
+                </a:tc>
+              </a:tr>
+              <a:tr h="58293">
+                <a:tc>
+                  <a:txBody>
+                    <a:bodyPr/>
+                    <a:lstStyle/>
+                    <a:p>
+                      <a:pPr algn="l"/>
+                      <a:r>
+                        <a:rPr sz="700" b="0" i="0">
+                          <a:solidFill>
+                            <a:srgbClr val="262626"/>
+                          </a:solidFill>
+                          <a:latin typeface="Garamond"/>
+                          <a:cs typeface="Garamond"/>
+                        </a:rPr>
+                        <a:t>ASC 842 operating leases</a:t>
+                      </a:r>
+                    </a:p>
+                  </a:txBody>
+                  <a:tcPr anchor="ctr" marT="12700" marB="12700">
+                    <a:solidFill>
+                      <a:srgbClr val="F0F1F3"/>
+                    </a:solidFill>
+                  </a:tcPr>
+                </a:tc>
+                <a:tc>
+                  <a:txBody>
+                    <a:bodyPr/>
+                    <a:lstStyle/>
+                    <a:p>
+                      <a:pPr algn="r"/>
+                      <a:r>
+                        <a:rPr sz="700" b="0" i="0">
+                          <a:solidFill>
+                            <a:srgbClr val="262626"/>
+                          </a:solidFill>
+                          <a:latin typeface="Garamond"/>
+                          <a:cs typeface="Garamond"/>
+                        </a:rPr>
+                        <a:t>WACC!E11 (FY25 10-K)</a:t>
+                      </a:r>
+                    </a:p>
+                  </a:txBody>
+                  <a:tcPr anchor="ctr" marT="12700" marB="12700">
+                    <a:solidFill>
+                      <a:srgbClr val="F0F1F3"/>
+                    </a:solidFill>
+                  </a:tcPr>
+                </a:tc>
+              </a:tr>
+              <a:tr h="58293">
+                <a:tc>
+                  <a:txBody>
+                    <a:bodyPr/>
+                    <a:lstStyle/>
+                    <a:p>
+                      <a:pPr algn="l"/>
+                      <a:r>
+                        <a:rPr sz="700" b="0" i="0">
+                          <a:solidFill>
+                            <a:srgbClr val="262626"/>
+                          </a:solidFill>
+                          <a:latin typeface="Garamond"/>
+                          <a:cs typeface="Garamond"/>
+                        </a:rPr>
+                        <a:t>Funded debt</a:t>
+                      </a:r>
+                    </a:p>
+                  </a:txBody>
+                  <a:tcPr anchor="ctr" marT="12700" marB="12700">
+                    <a:solidFill>
+                      <a:srgbClr val="FFFFFF"/>
+                    </a:solidFill>
+                  </a:tcPr>
+                </a:tc>
+                <a:tc>
+                  <a:txBody>
+                    <a:bodyPr/>
+                    <a:lstStyle/>
+                    <a:p>
+                      <a:pPr algn="r"/>
+                      <a:r>
+                        <a:rPr sz="700" b="0" i="0">
+                          <a:solidFill>
+                            <a:srgbClr val="262626"/>
+                          </a:solidFill>
+                          <a:latin typeface="Garamond"/>
+                          <a:cs typeface="Garamond"/>
+                        </a:rPr>
+                        <a:t>WACC!E13</a:t>
+                      </a:r>
+                    </a:p>
+                  </a:txBody>
+                  <a:tcPr anchor="ctr" marT="12700" marB="12700">
+                    <a:solidFill>
+                      <a:srgbClr val="FFFFFF"/>
+                    </a:solidFill>
+                  </a:tcPr>
+                </a:tc>
+              </a:tr>
+              <a:tr h="58293">
+                <a:tc>
+                  <a:txBody>
+                    <a:bodyPr/>
+                    <a:lstStyle/>
+                    <a:p>
+                      <a:pPr algn="l"/>
+                      <a:r>
+                        <a:rPr sz="700" b="0" i="0">
+                          <a:solidFill>
+                            <a:srgbClr val="262626"/>
+                          </a:solidFill>
+                          <a:latin typeface="Garamond"/>
+                          <a:cs typeface="Garamond"/>
+                        </a:rPr>
+                        <a:t>Total capital</a:t>
+                      </a:r>
+                    </a:p>
+                  </a:txBody>
+                  <a:tcPr anchor="ctr" marT="12700" marB="12700">
+                    <a:solidFill>
+                      <a:srgbClr val="F0F1F3"/>
+                    </a:solidFill>
+                  </a:tcPr>
+                </a:tc>
+                <a:tc>
+                  <a:txBody>
+                    <a:bodyPr/>
+                    <a:lstStyle/>
+                    <a:p>
+                      <a:pPr algn="r"/>
+                      <a:r>
+                        <a:rPr sz="700" b="0" i="0">
+                          <a:solidFill>
+                            <a:srgbClr val="262626"/>
+                          </a:solidFill>
+                          <a:latin typeface="Garamond"/>
+                          <a:cs typeface="Garamond"/>
+                        </a:rPr>
+                        <a:t>WACC!E14</a:t>
+                      </a:r>
+                    </a:p>
+                  </a:txBody>
+                  <a:tcPr anchor="ctr" marT="12700" marB="12700">
+                    <a:solidFill>
+                      <a:srgbClr val="F0F1F3"/>
+                    </a:solidFill>
+                  </a:tcPr>
+                </a:tc>
+              </a:tr>
+              <a:tr h="58293">
+                <a:tc>
+                  <a:txBody>
+                    <a:bodyPr/>
+                    <a:lstStyle/>
+                    <a:p>
+                      <a:pPr algn="l"/>
+                      <a:r>
+                        <a:rPr sz="700" b="0" i="0">
+                          <a:solidFill>
+                            <a:srgbClr val="262626"/>
+                          </a:solidFill>
+                          <a:latin typeface="Garamond"/>
+                          <a:cs typeface="Garamond"/>
+                        </a:rPr>
+                        <a:t>Cash &amp; equivalents</a:t>
+                      </a:r>
+                    </a:p>
+                  </a:txBody>
+                  <a:tcPr anchor="ctr" marT="12700" marB="12700">
+                    <a:solidFill>
+                      <a:srgbClr val="FFFFFF"/>
+                    </a:solidFill>
+                  </a:tcPr>
+                </a:tc>
+                <a:tc>
+                  <a:txBody>
+                    <a:bodyPr/>
+                    <a:lstStyle/>
+                    <a:p>
+                      <a:pPr algn="r"/>
+                      <a:r>
+                        <a:rPr sz="700" b="0" i="0">
+                          <a:solidFill>
+                            <a:srgbClr val="262626"/>
+                          </a:solidFill>
+                          <a:latin typeface="Garamond"/>
+                          <a:cs typeface="Garamond"/>
+                        </a:rPr>
+                        <a:t>10-K BS — Cash</a:t>
+                      </a:r>
+                    </a:p>
+                  </a:txBody>
+                  <a:tcPr anchor="ctr" marT="12700" marB="12700">
+                    <a:solidFill>
+                      <a:srgbClr val="FFFFFF"/>
+                    </a:solidFill>
+                  </a:tcPr>
+                </a:tc>
+              </a:tr>
+              <a:tr h="58293">
+                <a:tc>
+                  <a:txBody>
+                    <a:bodyPr/>
+                    <a:lstStyle/>
+                    <a:p>
+                      <a:pPr algn="l"/>
+                      <a:r>
+                        <a:rPr sz="700" b="0" i="0">
+                          <a:solidFill>
+                            <a:srgbClr val="262626"/>
+                          </a:solidFill>
+                          <a:latin typeface="Garamond"/>
+                          <a:cs typeface="Garamond"/>
+                        </a:rPr>
+                        <a:t>Net debt</a:t>
+                      </a:r>
+                    </a:p>
+                  </a:txBody>
+                  <a:tcPr anchor="ctr" marT="12700" marB="12700">
+                    <a:solidFill>
+                      <a:srgbClr val="F0F1F3"/>
+                    </a:solidFill>
+                  </a:tcPr>
+                </a:tc>
+                <a:tc>
+                  <a:txBody>
+                    <a:bodyPr/>
+                    <a:lstStyle/>
+                    <a:p>
+                      <a:pPr algn="r"/>
+                      <a:r>
+                        <a:rPr sz="700" b="0" i="0">
+                          <a:solidFill>
+                            <a:srgbClr val="262626"/>
+                          </a:solidFill>
+                          <a:latin typeface="Garamond"/>
+                          <a:cs typeface="Garamond"/>
+                        </a:rPr>
+                        <a:t>DCF EV bridge</a:t>
+                      </a:r>
+                    </a:p>
+                  </a:txBody>
+                  <a:tcPr anchor="ctr" marT="12700" marB="12700">
+                    <a:solidFill>
+                      <a:srgbClr val="F0F1F3"/>
+                    </a:solidFill>
+                  </a:tcPr>
+                </a:tc>
+              </a:tr>
+              <a:tr h="58293">
+                <a:tc>
+                  <a:txBody>
+                    <a:bodyPr/>
+                    <a:lstStyle/>
+                    <a:p>
+                      <a:pPr algn="l"/>
+                      <a:r>
+                        <a:rPr sz="700" b="0" i="0">
+                          <a:solidFill>
+                            <a:srgbClr val="262626"/>
+                          </a:solidFill>
+                          <a:latin typeface="Garamond"/>
+                          <a:cs typeface="Garamond"/>
+                        </a:rPr>
+                        <a:t>Risk-free rate</a:t>
+                      </a:r>
+                    </a:p>
+                  </a:txBody>
+                  <a:tcPr anchor="ctr" marT="12700" marB="12700">
+                    <a:solidFill>
+                      <a:srgbClr val="FFFFFF"/>
+                    </a:solidFill>
+                  </a:tcPr>
+                </a:tc>
+                <a:tc>
+                  <a:txBody>
+                    <a:bodyPr/>
+                    <a:lstStyle/>
+                    <a:p>
+                      <a:pPr algn="r"/>
+                      <a:r>
+                        <a:rPr sz="700" b="0" i="0">
+                          <a:solidFill>
+                            <a:srgbClr val="262626"/>
+                          </a:solidFill>
+                          <a:latin typeface="Garamond"/>
+                          <a:cs typeface="Garamond"/>
+                        </a:rPr>
+                        <a:t>WACC!E3</a:t>
+                      </a:r>
+                    </a:p>
+                  </a:txBody>
+                  <a:tcPr anchor="ctr" marT="12700" marB="12700">
+                    <a:solidFill>
+                      <a:srgbClr val="FFFFFF"/>
+                    </a:solidFill>
+                  </a:tcPr>
+                </a:tc>
+              </a:tr>
+              <a:tr h="58293">
+                <a:tc>
+                  <a:txBody>
+                    <a:bodyPr/>
+                    <a:lstStyle/>
+                    <a:p>
+                      <a:pPr algn="l"/>
+                      <a:r>
+                        <a:rPr sz="700" b="0" i="0">
+                          <a:solidFill>
+                            <a:srgbClr val="262626"/>
+                          </a:solidFill>
+                          <a:latin typeface="Garamond"/>
+                          <a:cs typeface="Garamond"/>
+                        </a:rPr>
+                        <a:t>Equity risk premium</a:t>
+                      </a:r>
+                    </a:p>
+                  </a:txBody>
+                  <a:tcPr anchor="ctr" marT="12700" marB="12700">
+                    <a:solidFill>
+                      <a:srgbClr val="F0F1F3"/>
+                    </a:solidFill>
+                  </a:tcPr>
+                </a:tc>
+                <a:tc>
+                  <a:txBody>
+                    <a:bodyPr/>
+                    <a:lstStyle/>
+                    <a:p>
+                      <a:pPr algn="r"/>
+                      <a:r>
+                        <a:rPr sz="700" b="0" i="0">
+                          <a:solidFill>
+                            <a:srgbClr val="262626"/>
+                          </a:solidFill>
+                          <a:latin typeface="Garamond"/>
+                          <a:cs typeface="Garamond"/>
+                        </a:rPr>
+                        <a:t>WACC!E4</a:t>
+                      </a:r>
+                    </a:p>
+                  </a:txBody>
+                  <a:tcPr anchor="ctr" marT="12700" marB="12700">
+                    <a:solidFill>
+                      <a:srgbClr val="F0F1F3"/>
+                    </a:solidFill>
+                  </a:tcPr>
+                </a:tc>
+              </a:tr>
+              <a:tr h="58293">
+                <a:tc>
+                  <a:txBody>
+                    <a:bodyPr/>
+                    <a:lstStyle/>
+                    <a:p>
+                      <a:pPr algn="l"/>
+                      <a:r>
+                        <a:rPr sz="700" b="0" i="0">
+                          <a:solidFill>
+                            <a:srgbClr val="262626"/>
+                          </a:solidFill>
+                          <a:latin typeface="Garamond"/>
+                          <a:cs typeface="Garamond"/>
+                        </a:rPr>
+                        <a:t>Tax rate</a:t>
+                      </a:r>
+                    </a:p>
+                  </a:txBody>
+                  <a:tcPr anchor="ctr" marT="12700" marB="12700">
+                    <a:solidFill>
+                      <a:srgbClr val="FFFFFF"/>
+                    </a:solidFill>
+                  </a:tcPr>
+                </a:tc>
+                <a:tc>
+                  <a:txBody>
+                    <a:bodyPr/>
+                    <a:lstStyle/>
+                    <a:p>
+                      <a:pPr algn="r"/>
+                      <a:r>
+                        <a:rPr sz="700" b="0" i="0">
+                          <a:solidFill>
+                            <a:srgbClr val="262626"/>
+                          </a:solidFill>
+                          <a:latin typeface="Garamond"/>
+                          <a:cs typeface="Garamond"/>
+                        </a:rPr>
+                        <a:t>WACC!E5</a:t>
+                      </a:r>
+                    </a:p>
+                  </a:txBody>
+                  <a:tcPr anchor="ctr" marT="12700" marB="12700">
+                    <a:solidFill>
+                      <a:srgbClr val="FFFFFF"/>
+                    </a:solidFill>
+                  </a:tcPr>
+                </a:tc>
+              </a:tr>
+              <a:tr h="58293">
+                <a:tc>
+                  <a:txBody>
+                    <a:bodyPr/>
+                    <a:lstStyle/>
+                    <a:p>
+                      <a:pPr algn="l"/>
+                      <a:r>
+                        <a:rPr sz="700" b="0" i="0">
+                          <a:solidFill>
+                            <a:srgbClr val="262626"/>
+                          </a:solidFill>
+                          <a:latin typeface="Garamond"/>
+                          <a:cs typeface="Garamond"/>
+                        </a:rPr>
+                        <a:t>Beta (relevered)</a:t>
+                      </a:r>
+                    </a:p>
+                  </a:txBody>
+                  <a:tcPr anchor="ctr" marT="12700" marB="12700">
+                    <a:solidFill>
+                      <a:srgbClr val="F0F1F3"/>
+                    </a:solidFill>
+                  </a:tcPr>
+                </a:tc>
+                <a:tc>
+                  <a:txBody>
+                    <a:bodyPr/>
+                    <a:lstStyle/>
+                    <a:p>
+                      <a:pPr algn="r"/>
+                      <a:r>
+                        <a:rPr sz="700" b="0" i="0">
+                          <a:solidFill>
+                            <a:srgbClr val="262626"/>
+                          </a:solidFill>
+                          <a:latin typeface="Garamond"/>
+                          <a:cs typeface="Garamond"/>
+                        </a:rPr>
+                        <a:t>WACC!E25</a:t>
+                      </a:r>
+                    </a:p>
+                  </a:txBody>
+                  <a:tcPr anchor="ctr" marT="12700" marB="12700">
+                    <a:solidFill>
+                      <a:srgbClr val="F0F1F3"/>
+                    </a:solidFill>
+                  </a:tcPr>
+                </a:tc>
+              </a:tr>
+              <a:tr h="58293">
+                <a:tc>
+                  <a:txBody>
+                    <a:bodyPr/>
+                    <a:lstStyle/>
+                    <a:p>
+                      <a:pPr algn="l"/>
+                      <a:r>
+                        <a:rPr sz="700" b="0" i="0">
+                          <a:solidFill>
+                            <a:srgbClr val="262626"/>
+                          </a:solidFill>
+                          <a:latin typeface="Garamond"/>
+                          <a:cs typeface="Garamond"/>
+                        </a:rPr>
+                        <a:t>Cost of equity</a:t>
+                      </a:r>
+                    </a:p>
+                  </a:txBody>
+                  <a:tcPr anchor="ctr" marT="12700" marB="12700">
+                    <a:solidFill>
+                      <a:srgbClr val="FFFFFF"/>
+                    </a:solidFill>
+                  </a:tcPr>
+                </a:tc>
+                <a:tc>
+                  <a:txBody>
+                    <a:bodyPr/>
+                    <a:lstStyle/>
+                    <a:p>
+                      <a:pPr algn="r"/>
+                      <a:r>
+                        <a:rPr sz="700" b="0" i="0">
+                          <a:solidFill>
+                            <a:srgbClr val="262626"/>
+                          </a:solidFill>
+                          <a:latin typeface="Garamond"/>
+                          <a:cs typeface="Garamond"/>
+                        </a:rPr>
+                        <a:t>WACC!E32</a:t>
+                      </a:r>
+                    </a:p>
+                  </a:txBody>
+                  <a:tcPr anchor="ctr" marT="12700" marB="12700">
+                    <a:solidFill>
+                      <a:srgbClr val="FFFFFF"/>
+                    </a:solidFill>
+                  </a:tcPr>
+                </a:tc>
+              </a:tr>
+              <a:tr h="58293">
+                <a:tc>
+                  <a:txBody>
+                    <a:bodyPr/>
+                    <a:lstStyle/>
+                    <a:p>
+                      <a:pPr algn="l"/>
+                      <a:r>
+                        <a:rPr sz="700" b="0" i="0">
+                          <a:solidFill>
+                            <a:srgbClr val="262626"/>
+                          </a:solidFill>
+                          <a:latin typeface="Garamond"/>
+                          <a:cs typeface="Garamond"/>
+                        </a:rPr>
+                        <a:t>Pre-tax Kd</a:t>
+                      </a:r>
+                    </a:p>
+                  </a:txBody>
+                  <a:tcPr anchor="ctr" marT="12700" marB="12700">
+                    <a:solidFill>
+                      <a:srgbClr val="F0F1F3"/>
+                    </a:solidFill>
+                  </a:tcPr>
+                </a:tc>
+                <a:tc>
+                  <a:txBody>
+                    <a:bodyPr/>
+                    <a:lstStyle/>
+                    <a:p>
+                      <a:pPr algn="r"/>
+                      <a:r>
+                        <a:rPr sz="700" b="0" i="0">
+                          <a:solidFill>
+                            <a:srgbClr val="262626"/>
+                          </a:solidFill>
+                          <a:latin typeface="Garamond"/>
+                          <a:cs typeface="Garamond"/>
+                        </a:rPr>
+                        <a:t>WACC!E35</a:t>
+                      </a:r>
+                    </a:p>
+                  </a:txBody>
+                  <a:tcPr anchor="ctr" marT="12700" marB="12700">
+                    <a:solidFill>
+                      <a:srgbClr val="F0F1F3"/>
+                    </a:solidFill>
+                  </a:tcPr>
+                </a:tc>
+              </a:tr>
+              <a:tr h="58293">
+                <a:tc>
+                  <a:txBody>
+                    <a:bodyPr/>
+                    <a:lstStyle/>
+                    <a:p>
+                      <a:pPr algn="l"/>
+                      <a:r>
+                        <a:rPr sz="700" b="0" i="0">
+                          <a:solidFill>
+                            <a:srgbClr val="262626"/>
+                          </a:solidFill>
+                          <a:latin typeface="Garamond"/>
+                          <a:cs typeface="Garamond"/>
+                        </a:rPr>
+                        <a:t>After-tax Kd</a:t>
+                      </a:r>
+                    </a:p>
+                  </a:txBody>
+                  <a:tcPr anchor="ctr" marT="12700" marB="12700">
+                    <a:solidFill>
+                      <a:srgbClr val="FFFFFF"/>
+                    </a:solidFill>
+                  </a:tcPr>
+                </a:tc>
+                <a:tc>
+                  <a:txBody>
+                    <a:bodyPr/>
+                    <a:lstStyle/>
+                    <a:p>
+                      <a:pPr algn="r"/>
+                      <a:r>
+                        <a:rPr sz="700" b="0" i="0">
+                          <a:solidFill>
+                            <a:srgbClr val="262626"/>
+                          </a:solidFill>
+                          <a:latin typeface="Garamond"/>
+                          <a:cs typeface="Garamond"/>
+                        </a:rPr>
+                        <a:t>WACC!E36</a:t>
+                      </a:r>
+                    </a:p>
+                  </a:txBody>
+                  <a:tcPr anchor="ctr" marT="12700" marB="12700">
+                    <a:solidFill>
+                      <a:srgbClr val="FFFFFF"/>
+                    </a:solidFill>
+                  </a:tcPr>
+                </a:tc>
+              </a:tr>
+              <a:tr h="58293">
+                <a:tc>
+                  <a:txBody>
+                    <a:bodyPr/>
+                    <a:lstStyle/>
+                    <a:p>
+                      <a:pPr algn="l"/>
+                      <a:r>
+                        <a:rPr sz="700" b="0" i="0">
+                          <a:solidFill>
+                            <a:srgbClr val="262626"/>
+                          </a:solidFill>
+                          <a:latin typeface="Garamond"/>
+                          <a:cs typeface="Garamond"/>
+                        </a:rPr>
+                        <a:t>Equity / debt weights</a:t>
+                      </a:r>
+                    </a:p>
+                  </a:txBody>
+                  <a:tcPr anchor="ctr" marT="12700" marB="12700">
+                    <a:solidFill>
+                      <a:srgbClr val="F0F1F3"/>
+                    </a:solidFill>
+                  </a:tcPr>
+                </a:tc>
+                <a:tc>
+                  <a:txBody>
+                    <a:bodyPr/>
+                    <a:lstStyle/>
+                    <a:p>
+                      <a:pPr algn="r"/>
+                      <a:r>
+                        <a:rPr sz="700" b="0" i="0">
+                          <a:solidFill>
+                            <a:srgbClr val="262626"/>
+                          </a:solidFill>
+                          <a:latin typeface="Garamond"/>
+                          <a:cs typeface="Garamond"/>
+                        </a:rPr>
+                        <a:t>WACC!E39 / WACC!E40</a:t>
+                      </a:r>
+                    </a:p>
+                  </a:txBody>
+                  <a:tcPr anchor="ctr" marT="12700" marB="12700">
+                    <a:solidFill>
+                      <a:srgbClr val="F0F1F3"/>
+                    </a:solidFill>
+                  </a:tcPr>
+                </a:tc>
+              </a:tr>
+              <a:tr h="58293">
+                <a:tc>
+                  <a:txBody>
+                    <a:bodyPr/>
+                    <a:lstStyle/>
+                    <a:p>
+                      <a:pPr algn="l"/>
+                      <a:r>
+                        <a:rPr sz="700" b="1" i="0">
+                          <a:solidFill>
+                            <a:srgbClr val="1F2A44"/>
+                          </a:solidFill>
+                          <a:latin typeface="Garamond"/>
+                          <a:cs typeface="Garamond"/>
+                        </a:rPr>
+                        <a:t>WACC</a:t>
+                      </a:r>
+                    </a:p>
+                  </a:txBody>
+                  <a:tcPr anchor="ctr" marT="12700" marB="12700">
+                    <a:solidFill>
+                      <a:srgbClr val="FFFFFF"/>
+                    </a:solidFill>
+                  </a:tcPr>
+                </a:tc>
+                <a:tc>
+                  <a:txBody>
+                    <a:bodyPr/>
+                    <a:lstStyle/>
+                    <a:p>
+                      <a:pPr algn="r"/>
+                      <a:r>
+                        <a:rPr sz="700" b="1" i="0">
+                          <a:solidFill>
+                            <a:srgbClr val="1F2A44"/>
+                          </a:solidFill>
+                          <a:latin typeface="Garamond"/>
+                          <a:cs typeface="Garamond"/>
+                        </a:rPr>
+                        <a:t>WACC!E41</a:t>
+                      </a:r>
+                    </a:p>
+                  </a:txBody>
+                  <a:tcPr anchor="ctr" marT="12700" marB="12700">
+                    <a:solidFill>
+                      <a:srgbClr val="FFFFFF"/>
+                    </a:solidFill>
+                  </a:tcPr>
+                </a:tc>
+              </a:tr>
+            </a:tbl>
+          </a:graphicData>
+        </a:graphic>
+      </p:graphicFrame>
     </p:spTree>
   </p:cSld>
   <p:clrMapOvr>

--- a/LULU/LULU_Investment_Pitch_Deck.pptx
+++ b/LULU/LULU_Investment_Pitch_Deck.pptx
@@ -28,6 +28,7 @@
     <p:sldId id="276" r:id="rId27"/>
     <p:sldId id="277" r:id="rId28"/>
     <p:sldId id="278" r:id="rId29"/>
+    <p:sldId id="279" r:id="rId30"/>
   </p:sldIdLst>
   <p:sldSz cx="12191695" cy="6858000" type="screen4x3"/>
   <p:notesSz cx="6858000" cy="9144000"/>
@@ -18843,7 +18844,7 @@
                 <a:latin typeface="Garamond"/>
                 <a:cs typeface="Garamond"/>
               </a:rPr>
-              <a:t>Multiple methods converge above the current price — target $140</a:t>
+              <a:t>Football field — implied share-price ranges by methodology (base case DCF; bear/bull in appendix)</a:t>
             </a:r>
           </a:p>
         </p:txBody>
@@ -18931,7 +18932,7 @@
                 <a:latin typeface="Garamond"/>
                 <a:cs typeface="Garamond"/>
               </a:rPr>
-              <a:t>Source: GIS DCF and comps models; multiples are analyst ranges</a:t>
+              <a:t>Source: LULU_DCF_Valuation_Model.xlsx → Comps / football field tab; geographic SOTP on FY30E base revenue mix</a:t>
             </a:r>
           </a:p>
         </p:txBody>
@@ -18982,14 +18983,366 @@
       </p:sp>
       <p:sp>
         <p:nvSpPr>
-          <p:cNvPr id="8" name="TextBox 7"/>
+          <p:cNvPr id="8" name="Rectangle 7"/>
+          <p:cNvSpPr/>
+          <p:nvPr/>
+        </p:nvSpPr>
+        <p:spPr>
+          <a:xfrm>
+            <a:off x="3063240" y="1261872"/>
+            <a:ext cx="12700" cy="3977639"/>
+          </a:xfrm>
+          <a:prstGeom prst="rect">
+            <a:avLst/>
+          </a:prstGeom>
+          <a:solidFill>
+            <a:srgbClr val="F0F1F3"/>
+          </a:solidFill>
+          <a:ln>
+            <a:noFill/>
+          </a:ln>
+          <a:effectLst/>
+        </p:spPr>
+        <p:style>
+          <a:lnRef idx="1">
+            <a:schemeClr val="accent1"/>
+          </a:lnRef>
+          <a:fillRef idx="3">
+            <a:schemeClr val="accent1"/>
+          </a:fillRef>
+          <a:effectRef idx="2">
+            <a:schemeClr val="accent1"/>
+          </a:effectRef>
+          <a:fontRef idx="minor">
+            <a:schemeClr val="lt1"/>
+          </a:fontRef>
+        </p:style>
+        <p:txBody>
+          <a:bodyPr rtlCol="0" anchor="ctr"/>
+          <a:lstStyle/>
+          <a:p>
+            <a:pPr algn="ctr"/>
+          </a:p>
+        </p:txBody>
+      </p:sp>
+      <p:sp>
+        <p:nvSpPr>
+          <p:cNvPr id="9" name="TextBox 8"/>
           <p:cNvSpPr txBox="1"/>
           <p:nvPr/>
         </p:nvSpPr>
         <p:spPr>
           <a:xfrm>
-            <a:off x="457200" y="1536192"/>
-            <a:ext cx="2377440" cy="457200"/>
+            <a:off x="2834640" y="5285232"/>
+            <a:ext cx="502920" cy="201168"/>
+          </a:xfrm>
+          <a:prstGeom prst="rect">
+            <a:avLst/>
+          </a:prstGeom>
+          <a:noFill/>
+        </p:spPr>
+        <p:txBody>
+          <a:bodyPr wrap="square" anchor="t" lIns="25400" rIns="25400" tIns="12700" bIns="12700">
+            <a:spAutoFit/>
+          </a:bodyPr>
+          <a:lstStyle/>
+          <a:p>
+            <a:pPr algn="ctr">
+              <a:spcBef>
+                <a:spcPts val="0"/>
+              </a:spcBef>
+              <a:spcAft>
+                <a:spcPts val="0"/>
+              </a:spcAft>
+              <a:buNone/>
+            </a:pPr>
+            <a:r>
+              <a:rPr sz="800" b="0" i="0">
+                <a:solidFill>
+                  <a:srgbClr val="8C8C8C"/>
+                </a:solidFill>
+                <a:latin typeface="Garamond"/>
+                <a:cs typeface="Garamond"/>
+              </a:rPr>
+              <a:t>$50</a:t>
+            </a:r>
+          </a:p>
+        </p:txBody>
+      </p:sp>
+      <p:sp>
+        <p:nvSpPr>
+          <p:cNvPr id="10" name="Rectangle 9"/>
+          <p:cNvSpPr/>
+          <p:nvPr/>
+        </p:nvSpPr>
+        <p:spPr>
+          <a:xfrm>
+            <a:off x="5265018" y="1261872"/>
+            <a:ext cx="12700" cy="3977639"/>
+          </a:xfrm>
+          <a:prstGeom prst="rect">
+            <a:avLst/>
+          </a:prstGeom>
+          <a:solidFill>
+            <a:srgbClr val="F0F1F3"/>
+          </a:solidFill>
+          <a:ln>
+            <a:noFill/>
+          </a:ln>
+          <a:effectLst/>
+        </p:spPr>
+        <p:style>
+          <a:lnRef idx="1">
+            <a:schemeClr val="accent1"/>
+          </a:lnRef>
+          <a:fillRef idx="3">
+            <a:schemeClr val="accent1"/>
+          </a:fillRef>
+          <a:effectRef idx="2">
+            <a:schemeClr val="accent1"/>
+          </a:effectRef>
+          <a:fontRef idx="minor">
+            <a:schemeClr val="lt1"/>
+          </a:fontRef>
+        </p:style>
+        <p:txBody>
+          <a:bodyPr rtlCol="0" anchor="ctr"/>
+          <a:lstStyle/>
+          <a:p>
+            <a:pPr algn="ctr"/>
+          </a:p>
+        </p:txBody>
+      </p:sp>
+      <p:sp>
+        <p:nvSpPr>
+          <p:cNvPr id="11" name="TextBox 10"/>
+          <p:cNvSpPr txBox="1"/>
+          <p:nvPr/>
+        </p:nvSpPr>
+        <p:spPr>
+          <a:xfrm>
+            <a:off x="5036418" y="5285232"/>
+            <a:ext cx="502920" cy="201168"/>
+          </a:xfrm>
+          <a:prstGeom prst="rect">
+            <a:avLst/>
+          </a:prstGeom>
+          <a:noFill/>
+        </p:spPr>
+        <p:txBody>
+          <a:bodyPr wrap="square" anchor="t" lIns="25400" rIns="25400" tIns="12700" bIns="12700">
+            <a:spAutoFit/>
+          </a:bodyPr>
+          <a:lstStyle/>
+          <a:p>
+            <a:pPr algn="ctr">
+              <a:spcBef>
+                <a:spcPts val="0"/>
+              </a:spcBef>
+              <a:spcAft>
+                <a:spcPts val="0"/>
+              </a:spcAft>
+              <a:buNone/>
+            </a:pPr>
+            <a:r>
+              <a:rPr sz="800" b="0" i="0">
+                <a:solidFill>
+                  <a:srgbClr val="8C8C8C"/>
+                </a:solidFill>
+                <a:latin typeface="Garamond"/>
+                <a:cs typeface="Garamond"/>
+              </a:rPr>
+              <a:t>$100</a:t>
+            </a:r>
+          </a:p>
+        </p:txBody>
+      </p:sp>
+      <p:sp>
+        <p:nvSpPr>
+          <p:cNvPr id="12" name="Rectangle 11"/>
+          <p:cNvSpPr/>
+          <p:nvPr/>
+        </p:nvSpPr>
+        <p:spPr>
+          <a:xfrm>
+            <a:off x="7466797" y="1261872"/>
+            <a:ext cx="12700" cy="3977639"/>
+          </a:xfrm>
+          <a:prstGeom prst="rect">
+            <a:avLst/>
+          </a:prstGeom>
+          <a:solidFill>
+            <a:srgbClr val="F0F1F3"/>
+          </a:solidFill>
+          <a:ln>
+            <a:noFill/>
+          </a:ln>
+          <a:effectLst/>
+        </p:spPr>
+        <p:style>
+          <a:lnRef idx="1">
+            <a:schemeClr val="accent1"/>
+          </a:lnRef>
+          <a:fillRef idx="3">
+            <a:schemeClr val="accent1"/>
+          </a:fillRef>
+          <a:effectRef idx="2">
+            <a:schemeClr val="accent1"/>
+          </a:effectRef>
+          <a:fontRef idx="minor">
+            <a:schemeClr val="lt1"/>
+          </a:fontRef>
+        </p:style>
+        <p:txBody>
+          <a:bodyPr rtlCol="0" anchor="ctr"/>
+          <a:lstStyle/>
+          <a:p>
+            <a:pPr algn="ctr"/>
+          </a:p>
+        </p:txBody>
+      </p:sp>
+      <p:sp>
+        <p:nvSpPr>
+          <p:cNvPr id="13" name="TextBox 12"/>
+          <p:cNvSpPr txBox="1"/>
+          <p:nvPr/>
+        </p:nvSpPr>
+        <p:spPr>
+          <a:xfrm>
+            <a:off x="7238197" y="5285232"/>
+            <a:ext cx="502920" cy="201168"/>
+          </a:xfrm>
+          <a:prstGeom prst="rect">
+            <a:avLst/>
+          </a:prstGeom>
+          <a:noFill/>
+        </p:spPr>
+        <p:txBody>
+          <a:bodyPr wrap="square" anchor="t" lIns="25400" rIns="25400" tIns="12700" bIns="12700">
+            <a:spAutoFit/>
+          </a:bodyPr>
+          <a:lstStyle/>
+          <a:p>
+            <a:pPr algn="ctr">
+              <a:spcBef>
+                <a:spcPts val="0"/>
+              </a:spcBef>
+              <a:spcAft>
+                <a:spcPts val="0"/>
+              </a:spcAft>
+              <a:buNone/>
+            </a:pPr>
+            <a:r>
+              <a:rPr sz="800" b="0" i="0">
+                <a:solidFill>
+                  <a:srgbClr val="8C8C8C"/>
+                </a:solidFill>
+                <a:latin typeface="Garamond"/>
+                <a:cs typeface="Garamond"/>
+              </a:rPr>
+              <a:t>$150</a:t>
+            </a:r>
+          </a:p>
+        </p:txBody>
+      </p:sp>
+      <p:sp>
+        <p:nvSpPr>
+          <p:cNvPr id="14" name="Rectangle 13"/>
+          <p:cNvSpPr/>
+          <p:nvPr/>
+        </p:nvSpPr>
+        <p:spPr>
+          <a:xfrm>
+            <a:off x="9668576" y="1261872"/>
+            <a:ext cx="12700" cy="3977639"/>
+          </a:xfrm>
+          <a:prstGeom prst="rect">
+            <a:avLst/>
+          </a:prstGeom>
+          <a:solidFill>
+            <a:srgbClr val="F0F1F3"/>
+          </a:solidFill>
+          <a:ln>
+            <a:noFill/>
+          </a:ln>
+          <a:effectLst/>
+        </p:spPr>
+        <p:style>
+          <a:lnRef idx="1">
+            <a:schemeClr val="accent1"/>
+          </a:lnRef>
+          <a:fillRef idx="3">
+            <a:schemeClr val="accent1"/>
+          </a:fillRef>
+          <a:effectRef idx="2">
+            <a:schemeClr val="accent1"/>
+          </a:effectRef>
+          <a:fontRef idx="minor">
+            <a:schemeClr val="lt1"/>
+          </a:fontRef>
+        </p:style>
+        <p:txBody>
+          <a:bodyPr rtlCol="0" anchor="ctr"/>
+          <a:lstStyle/>
+          <a:p>
+            <a:pPr algn="ctr"/>
+          </a:p>
+        </p:txBody>
+      </p:sp>
+      <p:sp>
+        <p:nvSpPr>
+          <p:cNvPr id="15" name="TextBox 14"/>
+          <p:cNvSpPr txBox="1"/>
+          <p:nvPr/>
+        </p:nvSpPr>
+        <p:spPr>
+          <a:xfrm>
+            <a:off x="9439976" y="5285232"/>
+            <a:ext cx="502920" cy="201168"/>
+          </a:xfrm>
+          <a:prstGeom prst="rect">
+            <a:avLst/>
+          </a:prstGeom>
+          <a:noFill/>
+        </p:spPr>
+        <p:txBody>
+          <a:bodyPr wrap="square" anchor="t" lIns="25400" rIns="25400" tIns="12700" bIns="12700">
+            <a:spAutoFit/>
+          </a:bodyPr>
+          <a:lstStyle/>
+          <a:p>
+            <a:pPr algn="ctr">
+              <a:spcBef>
+                <a:spcPts val="0"/>
+              </a:spcBef>
+              <a:spcAft>
+                <a:spcPts val="0"/>
+              </a:spcAft>
+              <a:buNone/>
+            </a:pPr>
+            <a:r>
+              <a:rPr sz="800" b="0" i="0">
+                <a:solidFill>
+                  <a:srgbClr val="8C8C8C"/>
+                </a:solidFill>
+                <a:latin typeface="Garamond"/>
+                <a:cs typeface="Garamond"/>
+              </a:rPr>
+              <a:t>$200</a:t>
+            </a:r>
+          </a:p>
+        </p:txBody>
+      </p:sp>
+      <p:sp>
+        <p:nvSpPr>
+          <p:cNvPr id="16" name="TextBox 15"/>
+          <p:cNvSpPr txBox="1"/>
+          <p:nvPr/>
+        </p:nvSpPr>
+        <p:spPr>
+          <a:xfrm>
+            <a:off x="457200" y="1399032"/>
+            <a:ext cx="2514600" cy="438912"/>
           </a:xfrm>
           <a:prstGeom prst="rect">
             <a:avLst/>
@@ -19012,7 +19365,7 @@
               <a:buNone/>
             </a:pPr>
             <a:r>
-              <a:rPr sz="1200" b="1" i="0">
+              <a:rPr sz="1100" b="1" i="0">
                 <a:solidFill>
                   <a:srgbClr val="1F2A44"/>
                 </a:solidFill>
@@ -19026,14 +19379,14 @@
       </p:sp>
       <p:sp>
         <p:nvSpPr>
-          <p:cNvPr id="9" name="Rectangle 8"/>
+          <p:cNvPr id="17" name="Rectangle 16"/>
           <p:cNvSpPr/>
           <p:nvPr/>
         </p:nvSpPr>
         <p:spPr>
           <a:xfrm>
-            <a:off x="4554674" y="1554480"/>
-            <a:ext cx="3483382" cy="411480"/>
+            <a:off x="5088876" y="1417320"/>
+            <a:ext cx="3390739" cy="384048"/>
           </a:xfrm>
           <a:prstGeom prst="rect">
             <a:avLst/>
@@ -19061,12 +19414,12 @@
           </a:fontRef>
         </p:style>
         <p:txBody>
-          <a:bodyPr rtlCol="0" anchor="ctr" wrap="none" lIns="50800" rIns="50800"/>
+          <a:bodyPr rtlCol="0" anchor="ctr" lIns="38100"/>
           <a:lstStyle/>
           <a:p>
             <a:pPr algn="l"/>
             <a:r>
-              <a:rPr sz="1050" b="1" i="0">
+              <a:rPr sz="1000" b="1" i="0">
                 <a:solidFill>
                   <a:srgbClr val="1F2A44"/>
                 </a:solidFill>
@@ -19080,14 +19433,14 @@
       </p:sp>
       <p:sp>
         <p:nvSpPr>
-          <p:cNvPr id="10" name="TextBox 9"/>
+          <p:cNvPr id="18" name="TextBox 17"/>
           <p:cNvSpPr txBox="1"/>
           <p:nvPr/>
         </p:nvSpPr>
         <p:spPr>
           <a:xfrm>
-            <a:off x="8056345" y="1554480"/>
-            <a:ext cx="822960" cy="411480"/>
+            <a:off x="8497904" y="1417320"/>
+            <a:ext cx="777240" cy="384048"/>
           </a:xfrm>
           <a:prstGeom prst="rect">
             <a:avLst/>
@@ -19110,7 +19463,7 @@
               <a:buNone/>
             </a:pPr>
             <a:r>
-              <a:rPr sz="1050" b="1" i="0">
+              <a:rPr sz="1000" b="1" i="0">
                 <a:solidFill>
                   <a:srgbClr val="1F2A44"/>
                 </a:solidFill>
@@ -19124,14 +19477,14 @@
       </p:sp>
       <p:sp>
         <p:nvSpPr>
-          <p:cNvPr id="11" name="TextBox 10"/>
+          <p:cNvPr id="19" name="TextBox 18"/>
           <p:cNvSpPr txBox="1"/>
           <p:nvPr/>
         </p:nvSpPr>
         <p:spPr>
           <a:xfrm>
-            <a:off x="457200" y="2221992"/>
-            <a:ext cx="2377440" cy="457200"/>
+            <a:off x="457200" y="2057400"/>
+            <a:ext cx="2514600" cy="438912"/>
           </a:xfrm>
           <a:prstGeom prst="rect">
             <a:avLst/>
@@ -19154,28 +19507,28 @@
               <a:buNone/>
             </a:pPr>
             <a:r>
-              <a:rPr sz="1200" b="1" i="0">
+              <a:rPr sz="1100" b="1" i="0">
                 <a:solidFill>
                   <a:srgbClr val="1F2A44"/>
                 </a:solidFill>
                 <a:latin typeface="Garamond"/>
                 <a:cs typeface="Garamond"/>
               </a:rPr>
-              <a:t>EV / EBITDA (4.5–7.5x)</a:t>
+              <a:t>EV / EBITDA (5.0–8.0x FY30E)</a:t>
             </a:r>
           </a:p>
         </p:txBody>
       </p:sp>
       <p:sp>
         <p:nvSpPr>
-          <p:cNvPr id="12" name="Rectangle 11"/>
+          <p:cNvPr id="20" name="Rectangle 19"/>
           <p:cNvSpPr/>
           <p:nvPr/>
         </p:nvSpPr>
         <p:spPr>
           <a:xfrm>
-            <a:off x="5595165" y="2240280"/>
-            <a:ext cx="2759562" cy="411480"/>
+            <a:off x="6101694" y="2075688"/>
+            <a:ext cx="2686170" cy="384048"/>
           </a:xfrm>
           <a:prstGeom prst="rect">
             <a:avLst/>
@@ -19203,12 +19556,12 @@
           </a:fontRef>
         </p:style>
         <p:txBody>
-          <a:bodyPr rtlCol="0" anchor="ctr" wrap="none" lIns="50800" rIns="50800"/>
+          <a:bodyPr rtlCol="0" anchor="ctr" lIns="38100"/>
           <a:lstStyle/>
           <a:p>
             <a:pPr algn="l"/>
             <a:r>
-              <a:rPr sz="1050" b="1" i="0">
+              <a:rPr sz="1000" b="1" i="0">
                 <a:solidFill>
                   <a:srgbClr val="1F2A44"/>
                 </a:solidFill>
@@ -19222,14 +19575,14 @@
       </p:sp>
       <p:sp>
         <p:nvSpPr>
-          <p:cNvPr id="13" name="TextBox 12"/>
+          <p:cNvPr id="21" name="TextBox 20"/>
           <p:cNvSpPr txBox="1"/>
           <p:nvPr/>
         </p:nvSpPr>
         <p:spPr>
           <a:xfrm>
-            <a:off x="8373016" y="2240280"/>
-            <a:ext cx="822960" cy="411480"/>
+            <a:off x="8806153" y="2075688"/>
+            <a:ext cx="777240" cy="384048"/>
           </a:xfrm>
           <a:prstGeom prst="rect">
             <a:avLst/>
@@ -19252,7 +19605,7 @@
               <a:buNone/>
             </a:pPr>
             <a:r>
-              <a:rPr sz="1050" b="1" i="0">
+              <a:rPr sz="1000" b="1" i="0">
                 <a:solidFill>
                   <a:srgbClr val="1F2A44"/>
                 </a:solidFill>
@@ -19266,14 +19619,14 @@
       </p:sp>
       <p:sp>
         <p:nvSpPr>
-          <p:cNvPr id="14" name="TextBox 13"/>
+          <p:cNvPr id="22" name="TextBox 21"/>
           <p:cNvSpPr txBox="1"/>
           <p:nvPr/>
         </p:nvSpPr>
         <p:spPr>
           <a:xfrm>
-            <a:off x="457200" y="2907792"/>
-            <a:ext cx="2377440" cy="457200"/>
+            <a:off x="457200" y="2715768"/>
+            <a:ext cx="2514600" cy="438912"/>
           </a:xfrm>
           <a:prstGeom prst="rect">
             <a:avLst/>
@@ -19296,28 +19649,28 @@
               <a:buNone/>
             </a:pPr>
             <a:r>
-              <a:rPr sz="1200" b="1" i="0">
+              <a:rPr sz="1100" b="1" i="0">
                 <a:solidFill>
                   <a:srgbClr val="1F2A44"/>
                 </a:solidFill>
                 <a:latin typeface="Garamond"/>
                 <a:cs typeface="Garamond"/>
               </a:rPr>
-              <a:t>DCF (bear – bull)</a:t>
+              <a:t>Geographic SOTP (FY30E)</a:t>
             </a:r>
           </a:p>
         </p:txBody>
       </p:sp>
       <p:sp>
         <p:nvSpPr>
-          <p:cNvPr id="15" name="Rectangle 14"/>
+          <p:cNvPr id="23" name="Rectangle 22"/>
           <p:cNvSpPr/>
           <p:nvPr/>
         </p:nvSpPr>
         <p:spPr>
           <a:xfrm>
-            <a:off x="2745125" y="2926080"/>
-            <a:ext cx="6604855" cy="411480"/>
+            <a:off x="5132912" y="2734056"/>
+            <a:ext cx="1277031" cy="384048"/>
           </a:xfrm>
           <a:prstGeom prst="rect">
             <a:avLst/>
@@ -19345,33 +19698,33 @@
           </a:fontRef>
         </p:style>
         <p:txBody>
-          <a:bodyPr rtlCol="0" anchor="ctr" wrap="none" lIns="50800" rIns="50800"/>
+          <a:bodyPr rtlCol="0" anchor="ctr" lIns="38100"/>
           <a:lstStyle/>
           <a:p>
             <a:pPr algn="l"/>
             <a:r>
-              <a:rPr sz="1050" b="1" i="0">
+              <a:rPr sz="1000" b="1" i="0">
                 <a:solidFill>
                   <a:srgbClr val="1F2A44"/>
                 </a:solidFill>
                 <a:latin typeface="Garamond"/>
                 <a:cs typeface="Garamond"/>
               </a:rPr>
-              <a:t>$56</a:t>
+              <a:t>$97</a:t>
             </a:r>
           </a:p>
         </p:txBody>
       </p:sp>
       <p:sp>
         <p:nvSpPr>
-          <p:cNvPr id="16" name="TextBox 15"/>
+          <p:cNvPr id="24" name="TextBox 23"/>
           <p:cNvSpPr txBox="1"/>
           <p:nvPr/>
         </p:nvSpPr>
         <p:spPr>
           <a:xfrm>
-            <a:off x="9368268" y="2926080"/>
-            <a:ext cx="822960" cy="411480"/>
+            <a:off x="6428231" y="2734056"/>
+            <a:ext cx="777240" cy="384048"/>
           </a:xfrm>
           <a:prstGeom prst="rect">
             <a:avLst/>
@@ -19394,28 +19747,28 @@
               <a:buNone/>
             </a:pPr>
             <a:r>
-              <a:rPr sz="1050" b="1" i="0">
+              <a:rPr sz="1000" b="1" i="0">
                 <a:solidFill>
                   <a:srgbClr val="1F2A44"/>
                 </a:solidFill>
                 <a:latin typeface="Garamond"/>
                 <a:cs typeface="Garamond"/>
               </a:rPr>
-              <a:t>$202</a:t>
+              <a:t>$126</a:t>
             </a:r>
           </a:p>
         </p:txBody>
       </p:sp>
       <p:sp>
         <p:nvSpPr>
-          <p:cNvPr id="17" name="TextBox 16"/>
+          <p:cNvPr id="25" name="TextBox 24"/>
           <p:cNvSpPr txBox="1"/>
           <p:nvPr/>
         </p:nvSpPr>
         <p:spPr>
           <a:xfrm>
-            <a:off x="457200" y="3593592"/>
-            <a:ext cx="2377440" cy="457200"/>
+            <a:off x="457200" y="3374136"/>
+            <a:ext cx="2514600" cy="438912"/>
           </a:xfrm>
           <a:prstGeom prst="rect">
             <a:avLst/>
@@ -19438,28 +19791,28 @@
               <a:buNone/>
             </a:pPr>
             <a:r>
-              <a:rPr sz="1200" b="1" i="0">
+              <a:rPr sz="1100" b="1" i="0">
                 <a:solidFill>
                   <a:srgbClr val="1F2A44"/>
                 </a:solidFill>
                 <a:latin typeface="Garamond"/>
                 <a:cs typeface="Garamond"/>
               </a:rPr>
-              <a:t>52-week range</a:t>
+              <a:t>Unlevered DCF (base / Gordon g)</a:t>
             </a:r>
           </a:p>
         </p:txBody>
       </p:sp>
       <p:sp>
         <p:nvSpPr>
-          <p:cNvPr id="18" name="Rectangle 17"/>
+          <p:cNvPr id="26" name="Rectangle 25"/>
           <p:cNvSpPr/>
           <p:nvPr/>
         </p:nvSpPr>
         <p:spPr>
           <a:xfrm>
-            <a:off x="4735629" y="3611880"/>
-            <a:ext cx="5700080" cy="411480"/>
+            <a:off x="6762228" y="3392424"/>
+            <a:ext cx="73152" cy="384048"/>
           </a:xfrm>
           <a:prstGeom prst="rect">
             <a:avLst/>
@@ -19487,33 +19840,33 @@
           </a:fontRef>
         </p:style>
         <p:txBody>
-          <a:bodyPr rtlCol="0" anchor="ctr" wrap="none" lIns="50800" rIns="50800"/>
+          <a:bodyPr rtlCol="0" anchor="ctr" lIns="38100"/>
           <a:lstStyle/>
           <a:p>
             <a:pPr algn="l"/>
             <a:r>
-              <a:rPr sz="1050" b="1" i="0">
+              <a:rPr sz="1000" b="1" i="0">
                 <a:solidFill>
                   <a:srgbClr val="1F2A44"/>
                 </a:solidFill>
                 <a:latin typeface="Garamond"/>
                 <a:cs typeface="Garamond"/>
               </a:rPr>
-              <a:t>$100</a:t>
+              <a:t>$134</a:t>
             </a:r>
           </a:p>
         </p:txBody>
       </p:sp>
       <p:sp>
         <p:nvSpPr>
-          <p:cNvPr id="19" name="TextBox 18"/>
+          <p:cNvPr id="27" name="TextBox 26"/>
           <p:cNvSpPr txBox="1"/>
           <p:nvPr/>
         </p:nvSpPr>
         <p:spPr>
           <a:xfrm>
-            <a:off x="10453998" y="3611880"/>
-            <a:ext cx="822960" cy="411480"/>
+            <a:off x="457200" y="4032504"/>
+            <a:ext cx="2514600" cy="438912"/>
           </a:xfrm>
           <a:prstGeom prst="rect">
             <a:avLst/>
@@ -19536,28 +19889,126 @@
               <a:buNone/>
             </a:pPr>
             <a:r>
-              <a:rPr sz="1050" b="1" i="0">
+              <a:rPr sz="1100" b="1" i="0">
                 <a:solidFill>
                   <a:srgbClr val="1F2A44"/>
                 </a:solidFill>
                 <a:latin typeface="Garamond"/>
                 <a:cs typeface="Garamond"/>
               </a:rPr>
-              <a:t>$226</a:t>
+              <a:t>52-week range</a:t>
             </a:r>
           </a:p>
         </p:txBody>
       </p:sp>
       <p:sp>
         <p:nvSpPr>
-          <p:cNvPr id="20" name="Rectangle 19"/>
+          <p:cNvPr id="28" name="Rectangle 27"/>
           <p:cNvSpPr/>
           <p:nvPr/>
         </p:nvSpPr>
         <p:spPr>
           <a:xfrm>
-            <a:off x="4735629" y="1417320"/>
-            <a:ext cx="25400" cy="3108960"/>
+            <a:off x="5265018" y="4050791"/>
+            <a:ext cx="5548482" cy="384048"/>
+          </a:xfrm>
+          <a:prstGeom prst="rect">
+            <a:avLst/>
+          </a:prstGeom>
+          <a:solidFill>
+            <a:srgbClr val="FFC72C"/>
+          </a:solidFill>
+          <a:ln>
+            <a:noFill/>
+          </a:ln>
+          <a:effectLst/>
+        </p:spPr>
+        <p:style>
+          <a:lnRef idx="1">
+            <a:schemeClr val="accent1"/>
+          </a:lnRef>
+          <a:fillRef idx="3">
+            <a:schemeClr val="accent1"/>
+          </a:fillRef>
+          <a:effectRef idx="2">
+            <a:schemeClr val="accent1"/>
+          </a:effectRef>
+          <a:fontRef idx="minor">
+            <a:schemeClr val="lt1"/>
+          </a:fontRef>
+        </p:style>
+        <p:txBody>
+          <a:bodyPr rtlCol="0" anchor="ctr" lIns="38100"/>
+          <a:lstStyle/>
+          <a:p>
+            <a:pPr algn="l"/>
+            <a:r>
+              <a:rPr sz="1000" b="1" i="0">
+                <a:solidFill>
+                  <a:srgbClr val="1F2A44"/>
+                </a:solidFill>
+                <a:latin typeface="Garamond"/>
+                <a:cs typeface="Garamond"/>
+              </a:rPr>
+              <a:t>$100</a:t>
+            </a:r>
+          </a:p>
+        </p:txBody>
+      </p:sp>
+      <p:sp>
+        <p:nvSpPr>
+          <p:cNvPr id="29" name="TextBox 28"/>
+          <p:cNvSpPr txBox="1"/>
+          <p:nvPr/>
+        </p:nvSpPr>
+        <p:spPr>
+          <a:xfrm>
+            <a:off x="10831789" y="4050791"/>
+            <a:ext cx="777240" cy="384048"/>
+          </a:xfrm>
+          <a:prstGeom prst="rect">
+            <a:avLst/>
+          </a:prstGeom>
+          <a:noFill/>
+        </p:spPr>
+        <p:txBody>
+          <a:bodyPr wrap="square" anchor="ctr" lIns="25400" rIns="25400" tIns="12700" bIns="12700">
+            <a:spAutoFit/>
+          </a:bodyPr>
+          <a:lstStyle/>
+          <a:p>
+            <a:pPr algn="l">
+              <a:spcBef>
+                <a:spcPts val="0"/>
+              </a:spcBef>
+              <a:spcAft>
+                <a:spcPts val="0"/>
+              </a:spcAft>
+              <a:buNone/>
+            </a:pPr>
+            <a:r>
+              <a:rPr sz="1000" b="1" i="0">
+                <a:solidFill>
+                  <a:srgbClr val="1F2A44"/>
+                </a:solidFill>
+                <a:latin typeface="Garamond"/>
+                <a:cs typeface="Garamond"/>
+              </a:rPr>
+              <a:t>$226</a:t>
+            </a:r>
+          </a:p>
+        </p:txBody>
+      </p:sp>
+      <p:sp>
+        <p:nvSpPr>
+          <p:cNvPr id="30" name="Rectangle 29"/>
+          <p:cNvSpPr/>
+          <p:nvPr/>
+        </p:nvSpPr>
+        <p:spPr>
+          <a:xfrm>
+            <a:off x="5265018" y="1325880"/>
+            <a:ext cx="25400" cy="3886200"/>
           </a:xfrm>
           <a:prstGeom prst="rect">
             <a:avLst/>
@@ -19594,14 +20045,14 @@
       </p:sp>
       <p:sp>
         <p:nvSpPr>
-          <p:cNvPr id="21" name="Rectangle 20"/>
+          <p:cNvPr id="31" name="Rectangle 30"/>
           <p:cNvSpPr/>
           <p:nvPr/>
         </p:nvSpPr>
         <p:spPr>
           <a:xfrm>
-            <a:off x="6545178" y="1417320"/>
-            <a:ext cx="25400" cy="3108960"/>
+            <a:off x="7026442" y="1325880"/>
+            <a:ext cx="25400" cy="3886200"/>
           </a:xfrm>
           <a:prstGeom prst="rect">
             <a:avLst/>
@@ -19638,14 +20089,14 @@
       </p:sp>
       <p:sp>
         <p:nvSpPr>
-          <p:cNvPr id="22" name="TextBox 21"/>
+          <p:cNvPr id="32" name="TextBox 31"/>
           <p:cNvSpPr txBox="1"/>
           <p:nvPr/>
         </p:nvSpPr>
         <p:spPr>
           <a:xfrm>
-            <a:off x="4095549" y="4526280"/>
-            <a:ext cx="1463040" cy="274320"/>
+            <a:off x="4670658" y="5321808"/>
+            <a:ext cx="1371600" cy="228600"/>
           </a:xfrm>
           <a:prstGeom prst="rect">
             <a:avLst/>
@@ -19668,7 +20119,7 @@
               <a:buNone/>
             </a:pPr>
             <a:r>
-              <a:rPr sz="1050" b="1" i="0">
+              <a:rPr sz="950" b="1" i="0">
                 <a:solidFill>
                   <a:srgbClr val="262626"/>
                 </a:solidFill>
@@ -19682,14 +20133,14 @@
       </p:sp>
       <p:sp>
         <p:nvSpPr>
-          <p:cNvPr id="23" name="TextBox 22"/>
+          <p:cNvPr id="33" name="TextBox 32"/>
           <p:cNvSpPr txBox="1"/>
           <p:nvPr/>
         </p:nvSpPr>
         <p:spPr>
           <a:xfrm>
-            <a:off x="5905098" y="4754880"/>
-            <a:ext cx="1463040" cy="274320"/>
+            <a:off x="6432082" y="5321808"/>
+            <a:ext cx="1371600" cy="228600"/>
           </a:xfrm>
           <a:prstGeom prst="rect">
             <a:avLst/>
@@ -19712,7 +20163,7 @@
               <a:buNone/>
             </a:pPr>
             <a:r>
-              <a:rPr sz="1050" b="1" i="0">
+              <a:rPr sz="950" b="1" i="0">
                 <a:solidFill>
                   <a:srgbClr val="990000"/>
                 </a:solidFill>
@@ -19726,14 +20177,14 @@
       </p:sp>
       <p:sp>
         <p:nvSpPr>
-          <p:cNvPr id="24" name="TextBox 23"/>
+          <p:cNvPr id="34" name="TextBox 33"/>
           <p:cNvSpPr txBox="1"/>
           <p:nvPr/>
         </p:nvSpPr>
         <p:spPr>
           <a:xfrm>
-            <a:off x="457200" y="5212080"/>
-            <a:ext cx="11292840" cy="1097280"/>
+            <a:off x="457200" y="5596128"/>
+            <a:ext cx="11292840" cy="804672"/>
           </a:xfrm>
           <a:prstGeom prst="rect">
             <a:avLst/>
@@ -19751,19 +20202,19 @@
                 <a:spcPts val="0"/>
               </a:spcBef>
               <a:spcAft>
-                <a:spcPts val="500"/>
-              </a:spcAft>
-              <a:buNone/>
-            </a:pPr>
-            <a:r>
-              <a:rPr sz="1300" b="1" i="0">
+                <a:spcPts val="400"/>
+              </a:spcAft>
+              <a:buNone/>
+            </a:pPr>
+            <a:r>
+              <a:rPr sz="1250" b="1" i="0">
                 <a:solidFill>
                   <a:srgbClr val="1F2A44"/>
                 </a:solidFill>
                 <a:latin typeface="Garamond"/>
                 <a:cs typeface="Garamond"/>
               </a:rPr>
-              <a:t>We set a 12-month target of $140 — above the Gordon DCF of $134, for a partial re-rating toward historical multiples — implying ~40% upside</a:t>
+              <a:t>12-month target $140 sits above base-case DCF $134 and inside the comps/SOTP ranges — a partial re-rating, not a return to peak multiples.</a:t>
             </a:r>
           </a:p>
           <a:p>
@@ -19777,14 +20228,14 @@
               <a:buNone/>
             </a:pPr>
             <a:r>
-              <a:rPr sz="1250" b="0" i="1">
+              <a:rPr sz="1100" b="0" i="1">
                 <a:solidFill>
                   <a:srgbClr val="262626"/>
                 </a:solidFill>
                 <a:latin typeface="Garamond"/>
                 <a:cs typeface="Garamond"/>
               </a:rPr>
-              <a:t>The P/E low end (~$96) sits near today's price, showing how little recovery is required for the stock to work</a:t>
+              <a:t>DCF row = Scenarios col G (Gordon growth). Bear ${_d(V['bear'])} / bull ${_d(V['bull'])} bracket scenarios are in the appendix.</a:t>
             </a:r>
           </a:p>
         </p:txBody>
@@ -20333,6 +20784,27 @@
               <a:t>10. Thesis III — Elite economics &amp; capital return</a:t>
             </a:r>
           </a:p>
+          <a:p>
+            <a:pPr algn="l">
+              <a:spcBef>
+                <a:spcPts val="0"/>
+              </a:spcBef>
+              <a:spcAft>
+                <a:spcPts val="800"/>
+              </a:spcAft>
+              <a:buNone/>
+            </a:pPr>
+            <a:r>
+              <a:rPr sz="1450" b="1" i="0">
+                <a:solidFill>
+                  <a:srgbClr val="1F2A44"/>
+                </a:solidFill>
+                <a:latin typeface="Garamond"/>
+                <a:cs typeface="Garamond"/>
+              </a:rPr>
+              <a:t>11. Risks &amp; mitigants</a:t>
+            </a:r>
+          </a:p>
         </p:txBody>
       </p:sp>
       <p:sp>
@@ -20374,7 +20846,7 @@
                 <a:latin typeface="Garamond"/>
                 <a:cs typeface="Garamond"/>
               </a:rPr>
-              <a:t>11. Risks &amp; mitigants</a:t>
+              <a:t>12. Catalyst timeline</a:t>
             </a:r>
           </a:p>
           <a:p>
@@ -20395,7 +20867,7 @@
                 <a:latin typeface="Garamond"/>
                 <a:cs typeface="Garamond"/>
               </a:rPr>
-              <a:t>12. Catalyst timeline</a:t>
+              <a:t>13. Financials — income statement</a:t>
             </a:r>
           </a:p>
           <a:p>
@@ -20416,7 +20888,7 @@
                 <a:latin typeface="Garamond"/>
                 <a:cs typeface="Garamond"/>
               </a:rPr>
-              <a:t>13. Financials — income statement</a:t>
+              <a:t>14. Financials — balance sheet</a:t>
             </a:r>
           </a:p>
           <a:p>
@@ -20437,7 +20909,7 @@
                 <a:latin typeface="Garamond"/>
                 <a:cs typeface="Garamond"/>
               </a:rPr>
-              <a:t>14. Financials — balance sheet</a:t>
+              <a:t>15. Financials — cash flow</a:t>
             </a:r>
           </a:p>
           <a:p>
@@ -20458,7 +20930,7 @@
                 <a:latin typeface="Garamond"/>
                 <a:cs typeface="Garamond"/>
               </a:rPr>
-              <a:t>15. Financials — cash flow</a:t>
+              <a:t>16. Financials — capital structure</a:t>
             </a:r>
           </a:p>
           <a:p>
@@ -20479,7 +20951,7 @@
                 <a:latin typeface="Garamond"/>
                 <a:cs typeface="Garamond"/>
               </a:rPr>
-              <a:t>16. Financials — capital structure</a:t>
+              <a:t>17. Valuation summary (football field)</a:t>
             </a:r>
           </a:p>
           <a:p>
@@ -20500,7 +20972,7 @@
                 <a:latin typeface="Garamond"/>
                 <a:cs typeface="Garamond"/>
               </a:rPr>
-              <a:t>17. Valuation summary (football field)</a:t>
+              <a:t>18. Sum of the parts</a:t>
             </a:r>
           </a:p>
           <a:p>
@@ -20521,7 +20993,7 @@
                 <a:latin typeface="Garamond"/>
                 <a:cs typeface="Garamond"/>
               </a:rPr>
-              <a:t>18. DCF valuation</a:t>
+              <a:t>19. DCF valuation (base case)</a:t>
             </a:r>
           </a:p>
           <a:p>
@@ -20542,7 +21014,7 @@
                 <a:latin typeface="Garamond"/>
                 <a:cs typeface="Garamond"/>
               </a:rPr>
-              <a:t>19. Comparable companies</a:t>
+              <a:t>20. Comparable companies</a:t>
             </a:r>
           </a:p>
           <a:p>
@@ -20563,7 +21035,7 @@
                 <a:latin typeface="Garamond"/>
                 <a:cs typeface="Garamond"/>
               </a:rPr>
-              <a:t>20. Appendix — bull / bear scenarios</a:t>
+              <a:t>21. Appendix — bull / bear scenarios</a:t>
             </a:r>
           </a:p>
         </p:txBody>
@@ -20700,7 +21172,7 @@
                 <a:latin typeface="Garamond"/>
                 <a:cs typeface="Garamond"/>
               </a:rPr>
-              <a:t>DCF Valuation</a:t>
+              <a:t>Sum of the Parts</a:t>
             </a:r>
           </a:p>
         </p:txBody>
@@ -20744,7 +21216,7 @@
                 <a:latin typeface="Garamond"/>
                 <a:cs typeface="Garamond"/>
               </a:rPr>
-              <a:t>Base-case unlevered DCF yields ~$134 per share</a:t>
+              <a:t>Geographic segments valued separately on FY30E base-case revenue — illustrative EV/EBITDA ranges</a:t>
             </a:r>
           </a:p>
         </p:txBody>
@@ -20832,7 +21304,7 @@
                 <a:latin typeface="Garamond"/>
                 <a:cs typeface="Garamond"/>
               </a:rPr>
-              <a:t>Source: GIS DCF model (from scratch); FY2025 cash &amp; share count per 10-K</a:t>
+              <a:t>Segment revenue: FY2025 10-K geography; FY30E scaled to base-case consolidated revenue (Scenarios col G)</a:t>
             </a:r>
           </a:p>
         </p:txBody>
@@ -20881,16 +21353,1214 @@
           </a:p>
         </p:txBody>
       </p:sp>
+      <p:graphicFrame>
+        <p:nvGraphicFramePr>
+          <p:cNvPr id="8" name="Table 7"/>
+          <p:cNvGraphicFramePr>
+            <a:graphicFrameLocks noGrp="1"/>
+          </p:cNvGraphicFramePr>
+          <p:nvPr/>
+        </p:nvGraphicFramePr>
+        <p:xfrm>
+          <a:off x="457200" y="1097280"/>
+          <a:ext cx="11292840" cy="2788920"/>
+        </p:xfrm>
+        <a:graphic>
+          <a:graphicData uri="http://schemas.openxmlformats.org/drawingml/2006/table">
+            <a:tbl>
+              <a:tblPr firstRow="1" bandRow="1">
+                <a:tableStyleId>{5C22544A-7EE6-4342-B048-85BDC9FD1C3A}</a:tableStyleId>
+              </a:tblPr>
+              <a:tblGrid>
+                <a:gridCol w="1965960"/>
+                <a:gridCol w="1865376"/>
+                <a:gridCol w="1865376"/>
+                <a:gridCol w="1865376"/>
+                <a:gridCol w="1865376"/>
+                <a:gridCol w="1865376"/>
+              </a:tblGrid>
+              <a:tr h="348615">
+                <a:tc>
+                  <a:txBody>
+                    <a:bodyPr/>
+                    <a:lstStyle/>
+                    <a:p>
+                      <a:pPr algn="l"/>
+                      <a:r>
+                        <a:rPr sz="900" b="1" i="0">
+                          <a:solidFill>
+                            <a:srgbClr val="FFFFFF"/>
+                          </a:solidFill>
+                          <a:latin typeface="Garamond"/>
+                          <a:cs typeface="Garamond"/>
+                        </a:rPr>
+                        <a:t>Segment</a:t>
+                      </a:r>
+                    </a:p>
+                  </a:txBody>
+                  <a:tcPr anchor="ctr">
+                    <a:solidFill>
+                      <a:srgbClr val="1F2A44"/>
+                    </a:solidFill>
+                  </a:tcPr>
+                </a:tc>
+                <a:tc>
+                  <a:txBody>
+                    <a:bodyPr/>
+                    <a:lstStyle/>
+                    <a:p>
+                      <a:pPr algn="r"/>
+                      <a:r>
+                        <a:rPr sz="900" b="1" i="0">
+                          <a:solidFill>
+                            <a:srgbClr val="FFFFFF"/>
+                          </a:solidFill>
+                          <a:latin typeface="Garamond"/>
+                          <a:cs typeface="Garamond"/>
+                        </a:rPr>
+                        <a:t>FY30E rev</a:t>
+                      </a:r>
+                    </a:p>
+                  </a:txBody>
+                  <a:tcPr anchor="ctr">
+                    <a:solidFill>
+                      <a:srgbClr val="1F2A44"/>
+                    </a:solidFill>
+                  </a:tcPr>
+                </a:tc>
+                <a:tc>
+                  <a:txBody>
+                    <a:bodyPr/>
+                    <a:lstStyle/>
+                    <a:p>
+                      <a:pPr algn="r"/>
+                      <a:r>
+                        <a:rPr sz="900" b="1" i="0">
+                          <a:solidFill>
+                            <a:srgbClr val="FFFFFF"/>
+                          </a:solidFill>
+                          <a:latin typeface="Garamond"/>
+                          <a:cs typeface="Garamond"/>
+                        </a:rPr>
+                        <a:t>EBITDA %</a:t>
+                      </a:r>
+                    </a:p>
+                  </a:txBody>
+                  <a:tcPr anchor="ctr">
+                    <a:solidFill>
+                      <a:srgbClr val="1F2A44"/>
+                    </a:solidFill>
+                  </a:tcPr>
+                </a:tc>
+                <a:tc>
+                  <a:txBody>
+                    <a:bodyPr/>
+                    <a:lstStyle/>
+                    <a:p>
+                      <a:pPr algn="r"/>
+                      <a:r>
+                        <a:rPr sz="900" b="1" i="0">
+                          <a:solidFill>
+                            <a:srgbClr val="FFFFFF"/>
+                          </a:solidFill>
+                          <a:latin typeface="Garamond"/>
+                          <a:cs typeface="Garamond"/>
+                        </a:rPr>
+                        <a:t>FY30E EBITDA</a:t>
+                      </a:r>
+                    </a:p>
+                  </a:txBody>
+                  <a:tcPr anchor="ctr">
+                    <a:solidFill>
+                      <a:srgbClr val="1F2A44"/>
+                    </a:solidFill>
+                  </a:tcPr>
+                </a:tc>
+                <a:tc>
+                  <a:txBody>
+                    <a:bodyPr/>
+                    <a:lstStyle/>
+                    <a:p>
+                      <a:pPr algn="r"/>
+                      <a:r>
+                        <a:rPr sz="900" b="1" i="0">
+                          <a:solidFill>
+                            <a:srgbClr val="FFFFFF"/>
+                          </a:solidFill>
+                          <a:latin typeface="Garamond"/>
+                          <a:cs typeface="Garamond"/>
+                        </a:rPr>
+                        <a:t>EV/EBITDA</a:t>
+                      </a:r>
+                    </a:p>
+                  </a:txBody>
+                  <a:tcPr anchor="ctr">
+                    <a:solidFill>
+                      <a:srgbClr val="1F2A44"/>
+                    </a:solidFill>
+                  </a:tcPr>
+                </a:tc>
+                <a:tc>
+                  <a:txBody>
+                    <a:bodyPr/>
+                    <a:lstStyle/>
+                    <a:p>
+                      <a:pPr algn="r"/>
+                      <a:r>
+                        <a:rPr sz="900" b="1" i="0">
+                          <a:solidFill>
+                            <a:srgbClr val="FFFFFF"/>
+                          </a:solidFill>
+                          <a:latin typeface="Garamond"/>
+                          <a:cs typeface="Garamond"/>
+                        </a:rPr>
+                        <a:t>Segment EV ($M)</a:t>
+                      </a:r>
+                    </a:p>
+                  </a:txBody>
+                  <a:tcPr anchor="ctr">
+                    <a:solidFill>
+                      <a:srgbClr val="1F2A44"/>
+                    </a:solidFill>
+                  </a:tcPr>
+                </a:tc>
+              </a:tr>
+              <a:tr h="348615">
+                <a:tc>
+                  <a:txBody>
+                    <a:bodyPr/>
+                    <a:lstStyle/>
+                    <a:p>
+                      <a:pPr algn="l"/>
+                      <a:r>
+                        <a:rPr sz="900" b="0" i="0">
+                          <a:solidFill>
+                            <a:srgbClr val="262626"/>
+                          </a:solidFill>
+                          <a:latin typeface="Garamond"/>
+                          <a:cs typeface="Garamond"/>
+                        </a:rPr>
+                        <a:t>Americas</a:t>
+                      </a:r>
+                    </a:p>
+                  </a:txBody>
+                  <a:tcPr anchor="ctr" marT="12700" marB="12700">
+                    <a:solidFill>
+                      <a:srgbClr val="FFFFFF"/>
+                    </a:solidFill>
+                  </a:tcPr>
+                </a:tc>
+                <a:tc>
+                  <a:txBody>
+                    <a:bodyPr/>
+                    <a:lstStyle/>
+                    <a:p>
+                      <a:pPr algn="r"/>
+                      <a:r>
+                        <a:rPr sz="900" b="0" i="0">
+                          <a:solidFill>
+                            <a:srgbClr val="262626"/>
+                          </a:solidFill>
+                          <a:latin typeface="Garamond"/>
+                          <a:cs typeface="Garamond"/>
+                        </a:rPr>
+                        <a:t>8,070</a:t>
+                      </a:r>
+                    </a:p>
+                  </a:txBody>
+                  <a:tcPr anchor="ctr" marT="12700" marB="12700">
+                    <a:solidFill>
+                      <a:srgbClr val="FFFFFF"/>
+                    </a:solidFill>
+                  </a:tcPr>
+                </a:tc>
+                <a:tc>
+                  <a:txBody>
+                    <a:bodyPr/>
+                    <a:lstStyle/>
+                    <a:p>
+                      <a:pPr algn="r"/>
+                      <a:r>
+                        <a:rPr sz="900" b="0" i="0">
+                          <a:solidFill>
+                            <a:srgbClr val="262626"/>
+                          </a:solidFill>
+                          <a:latin typeface="Garamond"/>
+                          <a:cs typeface="Garamond"/>
+                        </a:rPr>
+                        <a:t>16.5%</a:t>
+                      </a:r>
+                    </a:p>
+                  </a:txBody>
+                  <a:tcPr anchor="ctr" marT="12700" marB="12700">
+                    <a:solidFill>
+                      <a:srgbClr val="FFFFFF"/>
+                    </a:solidFill>
+                  </a:tcPr>
+                </a:tc>
+                <a:tc>
+                  <a:txBody>
+                    <a:bodyPr/>
+                    <a:lstStyle/>
+                    <a:p>
+                      <a:pPr algn="r"/>
+                      <a:r>
+                        <a:rPr sz="900" b="0" i="0">
+                          <a:solidFill>
+                            <a:srgbClr val="262626"/>
+                          </a:solidFill>
+                          <a:latin typeface="Garamond"/>
+                          <a:cs typeface="Garamond"/>
+                        </a:rPr>
+                        <a:t>1,332</a:t>
+                      </a:r>
+                    </a:p>
+                  </a:txBody>
+                  <a:tcPr anchor="ctr" marT="12700" marB="12700">
+                    <a:solidFill>
+                      <a:srgbClr val="FFFFFF"/>
+                    </a:solidFill>
+                  </a:tcPr>
+                </a:tc>
+                <a:tc>
+                  <a:txBody>
+                    <a:bodyPr/>
+                    <a:lstStyle/>
+                    <a:p>
+                      <a:pPr algn="r"/>
+                      <a:r>
+                        <a:rPr sz="900" b="0" i="0">
+                          <a:solidFill>
+                            <a:srgbClr val="262626"/>
+                          </a:solidFill>
+                          <a:latin typeface="Garamond"/>
+                          <a:cs typeface="Garamond"/>
+                        </a:rPr>
+                        <a:t>5.0x–6.5x</a:t>
+                      </a:r>
+                    </a:p>
+                  </a:txBody>
+                  <a:tcPr anchor="ctr" marT="12700" marB="12700">
+                    <a:solidFill>
+                      <a:srgbClr val="FFFFFF"/>
+                    </a:solidFill>
+                  </a:tcPr>
+                </a:tc>
+                <a:tc>
+                  <a:txBody>
+                    <a:bodyPr/>
+                    <a:lstStyle/>
+                    <a:p>
+                      <a:pPr algn="r"/>
+                      <a:r>
+                        <a:rPr sz="900" b="0" i="0">
+                          <a:solidFill>
+                            <a:srgbClr val="262626"/>
+                          </a:solidFill>
+                          <a:latin typeface="Garamond"/>
+                          <a:cs typeface="Garamond"/>
+                        </a:rPr>
+                        <a:t>6,658–8,655</a:t>
+                      </a:r>
+                    </a:p>
+                  </a:txBody>
+                  <a:tcPr anchor="ctr" marT="12700" marB="12700">
+                    <a:solidFill>
+                      <a:srgbClr val="FFFFFF"/>
+                    </a:solidFill>
+                  </a:tcPr>
+                </a:tc>
+              </a:tr>
+              <a:tr h="348615">
+                <a:tc>
+                  <a:txBody>
+                    <a:bodyPr/>
+                    <a:lstStyle/>
+                    <a:p>
+                      <a:pPr algn="l"/>
+                      <a:r>
+                        <a:rPr sz="900" b="0" i="0">
+                          <a:solidFill>
+                            <a:srgbClr val="262626"/>
+                          </a:solidFill>
+                          <a:latin typeface="Garamond"/>
+                          <a:cs typeface="Garamond"/>
+                        </a:rPr>
+                        <a:t>China Mainland</a:t>
+                      </a:r>
+                    </a:p>
+                  </a:txBody>
+                  <a:tcPr anchor="ctr" marT="12700" marB="12700">
+                    <a:solidFill>
+                      <a:srgbClr val="F0F1F3"/>
+                    </a:solidFill>
+                  </a:tcPr>
+                </a:tc>
+                <a:tc>
+                  <a:txBody>
+                    <a:bodyPr/>
+                    <a:lstStyle/>
+                    <a:p>
+                      <a:pPr algn="r"/>
+                      <a:r>
+                        <a:rPr sz="900" b="0" i="0">
+                          <a:solidFill>
+                            <a:srgbClr val="262626"/>
+                          </a:solidFill>
+                          <a:latin typeface="Garamond"/>
+                          <a:cs typeface="Garamond"/>
+                        </a:rPr>
+                        <a:t>1,805</a:t>
+                      </a:r>
+                    </a:p>
+                  </a:txBody>
+                  <a:tcPr anchor="ctr" marT="12700" marB="12700">
+                    <a:solidFill>
+                      <a:srgbClr val="F0F1F3"/>
+                    </a:solidFill>
+                  </a:tcPr>
+                </a:tc>
+                <a:tc>
+                  <a:txBody>
+                    <a:bodyPr/>
+                    <a:lstStyle/>
+                    <a:p>
+                      <a:pPr algn="r"/>
+                      <a:r>
+                        <a:rPr sz="900" b="0" i="0">
+                          <a:solidFill>
+                            <a:srgbClr val="262626"/>
+                          </a:solidFill>
+                          <a:latin typeface="Garamond"/>
+                          <a:cs typeface="Garamond"/>
+                        </a:rPr>
+                        <a:t>19.5%</a:t>
+                      </a:r>
+                    </a:p>
+                  </a:txBody>
+                  <a:tcPr anchor="ctr" marT="12700" marB="12700">
+                    <a:solidFill>
+                      <a:srgbClr val="F0F1F3"/>
+                    </a:solidFill>
+                  </a:tcPr>
+                </a:tc>
+                <a:tc>
+                  <a:txBody>
+                    <a:bodyPr/>
+                    <a:lstStyle/>
+                    <a:p>
+                      <a:pPr algn="r"/>
+                      <a:r>
+                        <a:rPr sz="900" b="0" i="0">
+                          <a:solidFill>
+                            <a:srgbClr val="262626"/>
+                          </a:solidFill>
+                          <a:latin typeface="Garamond"/>
+                          <a:cs typeface="Garamond"/>
+                        </a:rPr>
+                        <a:t>352</a:t>
+                      </a:r>
+                    </a:p>
+                  </a:txBody>
+                  <a:tcPr anchor="ctr" marT="12700" marB="12700">
+                    <a:solidFill>
+                      <a:srgbClr val="F0F1F3"/>
+                    </a:solidFill>
+                  </a:tcPr>
+                </a:tc>
+                <a:tc>
+                  <a:txBody>
+                    <a:bodyPr/>
+                    <a:lstStyle/>
+                    <a:p>
+                      <a:pPr algn="r"/>
+                      <a:r>
+                        <a:rPr sz="900" b="0" i="0">
+                          <a:solidFill>
+                            <a:srgbClr val="262626"/>
+                          </a:solidFill>
+                          <a:latin typeface="Garamond"/>
+                          <a:cs typeface="Garamond"/>
+                        </a:rPr>
+                        <a:t>7.0x–9.0x</a:t>
+                      </a:r>
+                    </a:p>
+                  </a:txBody>
+                  <a:tcPr anchor="ctr" marT="12700" marB="12700">
+                    <a:solidFill>
+                      <a:srgbClr val="F0F1F3"/>
+                    </a:solidFill>
+                  </a:tcPr>
+                </a:tc>
+                <a:tc>
+                  <a:txBody>
+                    <a:bodyPr/>
+                    <a:lstStyle/>
+                    <a:p>
+                      <a:pPr algn="r"/>
+                      <a:r>
+                        <a:rPr sz="900" b="0" i="0">
+                          <a:solidFill>
+                            <a:srgbClr val="262626"/>
+                          </a:solidFill>
+                          <a:latin typeface="Garamond"/>
+                          <a:cs typeface="Garamond"/>
+                        </a:rPr>
+                        <a:t>2,463–3,167</a:t>
+                      </a:r>
+                    </a:p>
+                  </a:txBody>
+                  <a:tcPr anchor="ctr" marT="12700" marB="12700">
+                    <a:solidFill>
+                      <a:srgbClr val="F0F1F3"/>
+                    </a:solidFill>
+                  </a:tcPr>
+                </a:tc>
+              </a:tr>
+              <a:tr h="348615">
+                <a:tc>
+                  <a:txBody>
+                    <a:bodyPr/>
+                    <a:lstStyle/>
+                    <a:p>
+                      <a:pPr algn="l"/>
+                      <a:r>
+                        <a:rPr sz="900" b="0" i="0">
+                          <a:solidFill>
+                            <a:srgbClr val="262626"/>
+                          </a:solidFill>
+                          <a:latin typeface="Garamond"/>
+                          <a:cs typeface="Garamond"/>
+                        </a:rPr>
+                        <a:t>Rest of World</a:t>
+                      </a:r>
+                    </a:p>
+                  </a:txBody>
+                  <a:tcPr anchor="ctr" marT="12700" marB="12700">
+                    <a:solidFill>
+                      <a:srgbClr val="FFFFFF"/>
+                    </a:solidFill>
+                  </a:tcPr>
+                </a:tc>
+                <a:tc>
+                  <a:txBody>
+                    <a:bodyPr/>
+                    <a:lstStyle/>
+                    <a:p>
+                      <a:pPr algn="r"/>
+                      <a:r>
+                        <a:rPr sz="900" b="0" i="0">
+                          <a:solidFill>
+                            <a:srgbClr val="262626"/>
+                          </a:solidFill>
+                          <a:latin typeface="Garamond"/>
+                          <a:cs typeface="Garamond"/>
+                        </a:rPr>
+                        <a:t>1,543</a:t>
+                      </a:r>
+                    </a:p>
+                  </a:txBody>
+                  <a:tcPr anchor="ctr" marT="12700" marB="12700">
+                    <a:solidFill>
+                      <a:srgbClr val="FFFFFF"/>
+                    </a:solidFill>
+                  </a:tcPr>
+                </a:tc>
+                <a:tc>
+                  <a:txBody>
+                    <a:bodyPr/>
+                    <a:lstStyle/>
+                    <a:p>
+                      <a:pPr algn="r"/>
+                      <a:r>
+                        <a:rPr sz="900" b="0" i="0">
+                          <a:solidFill>
+                            <a:srgbClr val="262626"/>
+                          </a:solidFill>
+                          <a:latin typeface="Garamond"/>
+                          <a:cs typeface="Garamond"/>
+                        </a:rPr>
+                        <a:t>18.0%</a:t>
+                      </a:r>
+                    </a:p>
+                  </a:txBody>
+                  <a:tcPr anchor="ctr" marT="12700" marB="12700">
+                    <a:solidFill>
+                      <a:srgbClr val="FFFFFF"/>
+                    </a:solidFill>
+                  </a:tcPr>
+                </a:tc>
+                <a:tc>
+                  <a:txBody>
+                    <a:bodyPr/>
+                    <a:lstStyle/>
+                    <a:p>
+                      <a:pPr algn="r"/>
+                      <a:r>
+                        <a:rPr sz="900" b="0" i="0">
+                          <a:solidFill>
+                            <a:srgbClr val="262626"/>
+                          </a:solidFill>
+                          <a:latin typeface="Garamond"/>
+                          <a:cs typeface="Garamond"/>
+                        </a:rPr>
+                        <a:t>278</a:t>
+                      </a:r>
+                    </a:p>
+                  </a:txBody>
+                  <a:tcPr anchor="ctr" marT="12700" marB="12700">
+                    <a:solidFill>
+                      <a:srgbClr val="FFFFFF"/>
+                    </a:solidFill>
+                  </a:tcPr>
+                </a:tc>
+                <a:tc>
+                  <a:txBody>
+                    <a:bodyPr/>
+                    <a:lstStyle/>
+                    <a:p>
+                      <a:pPr algn="r"/>
+                      <a:r>
+                        <a:rPr sz="900" b="0" i="0">
+                          <a:solidFill>
+                            <a:srgbClr val="262626"/>
+                          </a:solidFill>
+                          <a:latin typeface="Garamond"/>
+                          <a:cs typeface="Garamond"/>
+                        </a:rPr>
+                        <a:t>6.0x–8.0x</a:t>
+                      </a:r>
+                    </a:p>
+                  </a:txBody>
+                  <a:tcPr anchor="ctr" marT="12700" marB="12700">
+                    <a:solidFill>
+                      <a:srgbClr val="FFFFFF"/>
+                    </a:solidFill>
+                  </a:tcPr>
+                </a:tc>
+                <a:tc>
+                  <a:txBody>
+                    <a:bodyPr/>
+                    <a:lstStyle/>
+                    <a:p>
+                      <a:pPr algn="r"/>
+                      <a:r>
+                        <a:rPr sz="900" b="0" i="0">
+                          <a:solidFill>
+                            <a:srgbClr val="262626"/>
+                          </a:solidFill>
+                          <a:latin typeface="Garamond"/>
+                          <a:cs typeface="Garamond"/>
+                        </a:rPr>
+                        <a:t>1,667–2,222</a:t>
+                      </a:r>
+                    </a:p>
+                  </a:txBody>
+                  <a:tcPr anchor="ctr" marT="12700" marB="12700">
+                    <a:solidFill>
+                      <a:srgbClr val="FFFFFF"/>
+                    </a:solidFill>
+                  </a:tcPr>
+                </a:tc>
+              </a:tr>
+              <a:tr h="348615">
+                <a:tc>
+                  <a:txBody>
+                    <a:bodyPr/>
+                    <a:lstStyle/>
+                    <a:p>
+                      <a:pPr algn="l"/>
+                      <a:r>
+                        <a:rPr sz="900" b="1" i="0">
+                          <a:solidFill>
+                            <a:srgbClr val="1F2A44"/>
+                          </a:solidFill>
+                          <a:latin typeface="Garamond"/>
+                          <a:cs typeface="Garamond"/>
+                        </a:rPr>
+                        <a:t>Total segment EV</a:t>
+                      </a:r>
+                    </a:p>
+                  </a:txBody>
+                  <a:tcPr anchor="ctr" marT="12700" marB="12700">
+                    <a:solidFill>
+                      <a:srgbClr val="F0F1F3"/>
+                    </a:solidFill>
+                  </a:tcPr>
+                </a:tc>
+                <a:tc>
+                  <a:txBody>
+                    <a:bodyPr/>
+                    <a:lstStyle/>
+                    <a:p>
+                      <a:pPr algn="r"/>
+                      <a:r>
+                        <a:rPr sz="900" b="1" i="0">
+                          <a:solidFill>
+                            <a:srgbClr val="1F2A44"/>
+                          </a:solidFill>
+                          <a:latin typeface="Garamond"/>
+                          <a:cs typeface="Garamond"/>
+                        </a:rPr>
+                        <a:t>11,418</a:t>
+                      </a:r>
+                    </a:p>
+                  </a:txBody>
+                  <a:tcPr anchor="ctr" marT="12700" marB="12700">
+                    <a:solidFill>
+                      <a:srgbClr val="F0F1F3"/>
+                    </a:solidFill>
+                  </a:tcPr>
+                </a:tc>
+                <a:tc>
+                  <a:txBody>
+                    <a:bodyPr/>
+                    <a:lstStyle/>
+                    <a:p>
+                      <a:pPr algn="r"/>
+                      <a:r>
+                        <a:rPr sz="900" b="1" i="0">
+                          <a:solidFill>
+                            <a:srgbClr val="1F2A44"/>
+                          </a:solidFill>
+                          <a:latin typeface="Garamond"/>
+                          <a:cs typeface="Garamond"/>
+                        </a:rPr>
+                        <a:t>—</a:t>
+                      </a:r>
+                    </a:p>
+                  </a:txBody>
+                  <a:tcPr anchor="ctr" marT="12700" marB="12700">
+                    <a:solidFill>
+                      <a:srgbClr val="F0F1F3"/>
+                    </a:solidFill>
+                  </a:tcPr>
+                </a:tc>
+                <a:tc>
+                  <a:txBody>
+                    <a:bodyPr/>
+                    <a:lstStyle/>
+                    <a:p>
+                      <a:pPr algn="r"/>
+                      <a:r>
+                        <a:rPr sz="900" b="1" i="0">
+                          <a:solidFill>
+                            <a:srgbClr val="1F2A44"/>
+                          </a:solidFill>
+                          <a:latin typeface="Garamond"/>
+                          <a:cs typeface="Garamond"/>
+                        </a:rPr>
+                        <a:t>—</a:t>
+                      </a:r>
+                    </a:p>
+                  </a:txBody>
+                  <a:tcPr anchor="ctr" marT="12700" marB="12700">
+                    <a:solidFill>
+                      <a:srgbClr val="F0F1F3"/>
+                    </a:solidFill>
+                  </a:tcPr>
+                </a:tc>
+                <a:tc>
+                  <a:txBody>
+                    <a:bodyPr/>
+                    <a:lstStyle/>
+                    <a:p>
+                      <a:pPr algn="r"/>
+                      <a:r>
+                        <a:rPr sz="900" b="1" i="0">
+                          <a:solidFill>
+                            <a:srgbClr val="1F2A44"/>
+                          </a:solidFill>
+                          <a:latin typeface="Garamond"/>
+                          <a:cs typeface="Garamond"/>
+                        </a:rPr>
+                        <a:t>—</a:t>
+                      </a:r>
+                    </a:p>
+                  </a:txBody>
+                  <a:tcPr anchor="ctr" marT="12700" marB="12700">
+                    <a:solidFill>
+                      <a:srgbClr val="F0F1F3"/>
+                    </a:solidFill>
+                  </a:tcPr>
+                </a:tc>
+                <a:tc>
+                  <a:txBody>
+                    <a:bodyPr/>
+                    <a:lstStyle/>
+                    <a:p>
+                      <a:pPr algn="r"/>
+                      <a:r>
+                        <a:rPr sz="900" b="1" i="0">
+                          <a:solidFill>
+                            <a:srgbClr val="1F2A44"/>
+                          </a:solidFill>
+                          <a:latin typeface="Garamond"/>
+                          <a:cs typeface="Garamond"/>
+                        </a:rPr>
+                        <a:t>10,788–14,045</a:t>
+                      </a:r>
+                    </a:p>
+                  </a:txBody>
+                  <a:tcPr anchor="ctr" marT="12700" marB="12700">
+                    <a:solidFill>
+                      <a:srgbClr val="F0F1F3"/>
+                    </a:solidFill>
+                  </a:tcPr>
+                </a:tc>
+              </a:tr>
+              <a:tr h="348615">
+                <a:tc>
+                  <a:txBody>
+                    <a:bodyPr/>
+                    <a:lstStyle/>
+                    <a:p>
+                      <a:pPr algn="l"/>
+                      <a:r>
+                        <a:rPr sz="900" b="0" i="0">
+                          <a:solidFill>
+                            <a:srgbClr val="262626"/>
+                          </a:solidFill>
+                          <a:latin typeface="Garamond"/>
+                          <a:cs typeface="Garamond"/>
+                        </a:rPr>
+                        <a:t>Corporate / HQ (no separate carve-out)</a:t>
+                      </a:r>
+                    </a:p>
+                  </a:txBody>
+                  <a:tcPr anchor="ctr" marT="12700" marB="12700">
+                    <a:solidFill>
+                      <a:srgbClr val="FFFFFF"/>
+                    </a:solidFill>
+                  </a:tcPr>
+                </a:tc>
+                <a:tc>
+                  <a:txBody>
+                    <a:bodyPr/>
+                    <a:lstStyle/>
+                    <a:p>
+                      <a:pPr algn="r"/>
+                      <a:r>
+                        <a:rPr sz="900" b="0" i="0">
+                          <a:solidFill>
+                            <a:srgbClr val="262626"/>
+                          </a:solidFill>
+                          <a:latin typeface="Garamond"/>
+                          <a:cs typeface="Garamond"/>
+                        </a:rPr>
+                        <a:t>—</a:t>
+                      </a:r>
+                    </a:p>
+                  </a:txBody>
+                  <a:tcPr anchor="ctr" marT="12700" marB="12700">
+                    <a:solidFill>
+                      <a:srgbClr val="FFFFFF"/>
+                    </a:solidFill>
+                  </a:tcPr>
+                </a:tc>
+                <a:tc>
+                  <a:txBody>
+                    <a:bodyPr/>
+                    <a:lstStyle/>
+                    <a:p>
+                      <a:pPr algn="r"/>
+                      <a:r>
+                        <a:rPr sz="900" b="0" i="0">
+                          <a:solidFill>
+                            <a:srgbClr val="262626"/>
+                          </a:solidFill>
+                          <a:latin typeface="Garamond"/>
+                          <a:cs typeface="Garamond"/>
+                        </a:rPr>
+                        <a:t>—</a:t>
+                      </a:r>
+                    </a:p>
+                  </a:txBody>
+                  <a:tcPr anchor="ctr" marT="12700" marB="12700">
+                    <a:solidFill>
+                      <a:srgbClr val="FFFFFF"/>
+                    </a:solidFill>
+                  </a:tcPr>
+                </a:tc>
+                <a:tc>
+                  <a:txBody>
+                    <a:bodyPr/>
+                    <a:lstStyle/>
+                    <a:p>
+                      <a:pPr algn="r"/>
+                      <a:r>
+                        <a:rPr sz="900" b="0" i="0">
+                          <a:solidFill>
+                            <a:srgbClr val="262626"/>
+                          </a:solidFill>
+                          <a:latin typeface="Garamond"/>
+                          <a:cs typeface="Garamond"/>
+                        </a:rPr>
+                        <a:t>—</a:t>
+                      </a:r>
+                    </a:p>
+                  </a:txBody>
+                  <a:tcPr anchor="ctr" marT="12700" marB="12700">
+                    <a:solidFill>
+                      <a:srgbClr val="FFFFFF"/>
+                    </a:solidFill>
+                  </a:tcPr>
+                </a:tc>
+                <a:tc>
+                  <a:txBody>
+                    <a:bodyPr/>
+                    <a:lstStyle/>
+                    <a:p>
+                      <a:pPr algn="r"/>
+                      <a:r>
+                        <a:rPr sz="900" b="0" i="0">
+                          <a:solidFill>
+                            <a:srgbClr val="262626"/>
+                          </a:solidFill>
+                          <a:latin typeface="Garamond"/>
+                          <a:cs typeface="Garamond"/>
+                        </a:rPr>
+                        <a:t>—</a:t>
+                      </a:r>
+                    </a:p>
+                  </a:txBody>
+                  <a:tcPr anchor="ctr" marT="12700" marB="12700">
+                    <a:solidFill>
+                      <a:srgbClr val="FFFFFF"/>
+                    </a:solidFill>
+                  </a:tcPr>
+                </a:tc>
+                <a:tc>
+                  <a:txBody>
+                    <a:bodyPr/>
+                    <a:lstStyle/>
+                    <a:p>
+                      <a:pPr algn="r"/>
+                      <a:r>
+                        <a:rPr sz="900" b="0" i="0">
+                          <a:solidFill>
+                            <a:srgbClr val="262626"/>
+                          </a:solidFill>
+                          <a:latin typeface="Garamond"/>
+                          <a:cs typeface="Garamond"/>
+                        </a:rPr>
+                        <a:t>$0</a:t>
+                      </a:r>
+                    </a:p>
+                  </a:txBody>
+                  <a:tcPr anchor="ctr" marT="12700" marB="12700">
+                    <a:solidFill>
+                      <a:srgbClr val="FFFFFF"/>
+                    </a:solidFill>
+                  </a:tcPr>
+                </a:tc>
+              </a:tr>
+              <a:tr h="348615">
+                <a:tc>
+                  <a:txBody>
+                    <a:bodyPr/>
+                    <a:lstStyle/>
+                    <a:p>
+                      <a:pPr algn="l"/>
+                      <a:r>
+                        <a:rPr sz="900" b="0" i="0">
+                          <a:solidFill>
+                            <a:srgbClr val="262626"/>
+                          </a:solidFill>
+                          <a:latin typeface="Garamond"/>
+                          <a:cs typeface="Garamond"/>
+                        </a:rPr>
+                        <a:t>+ Cash / − lease debt (EV bridge)</a:t>
+                      </a:r>
+                    </a:p>
+                  </a:txBody>
+                  <a:tcPr anchor="ctr" marT="12700" marB="12700">
+                    <a:solidFill>
+                      <a:srgbClr val="F0F1F3"/>
+                    </a:solidFill>
+                  </a:tcPr>
+                </a:tc>
+                <a:tc>
+                  <a:txBody>
+                    <a:bodyPr/>
+                    <a:lstStyle/>
+                    <a:p>
+                      <a:pPr algn="r"/>
+                      <a:r>
+                        <a:rPr sz="900" b="0" i="0">
+                          <a:solidFill>
+                            <a:srgbClr val="262626"/>
+                          </a:solidFill>
+                          <a:latin typeface="Garamond"/>
+                          <a:cs typeface="Garamond"/>
+                        </a:rPr>
+                        <a:t>—</a:t>
+                      </a:r>
+                    </a:p>
+                  </a:txBody>
+                  <a:tcPr anchor="ctr" marT="12700" marB="12700">
+                    <a:solidFill>
+                      <a:srgbClr val="F0F1F3"/>
+                    </a:solidFill>
+                  </a:tcPr>
+                </a:tc>
+                <a:tc>
+                  <a:txBody>
+                    <a:bodyPr/>
+                    <a:lstStyle/>
+                    <a:p>
+                      <a:pPr algn="r"/>
+                      <a:r>
+                        <a:rPr sz="900" b="0" i="0">
+                          <a:solidFill>
+                            <a:srgbClr val="262626"/>
+                          </a:solidFill>
+                          <a:latin typeface="Garamond"/>
+                          <a:cs typeface="Garamond"/>
+                        </a:rPr>
+                        <a:t>—</a:t>
+                      </a:r>
+                    </a:p>
+                  </a:txBody>
+                  <a:tcPr anchor="ctr" marT="12700" marB="12700">
+                    <a:solidFill>
+                      <a:srgbClr val="F0F1F3"/>
+                    </a:solidFill>
+                  </a:tcPr>
+                </a:tc>
+                <a:tc>
+                  <a:txBody>
+                    <a:bodyPr/>
+                    <a:lstStyle/>
+                    <a:p>
+                      <a:pPr algn="r"/>
+                      <a:r>
+                        <a:rPr sz="900" b="0" i="0">
+                          <a:solidFill>
+                            <a:srgbClr val="262626"/>
+                          </a:solidFill>
+                          <a:latin typeface="Garamond"/>
+                          <a:cs typeface="Garamond"/>
+                        </a:rPr>
+                        <a:t>—</a:t>
+                      </a:r>
+                    </a:p>
+                  </a:txBody>
+                  <a:tcPr anchor="ctr" marT="12700" marB="12700">
+                    <a:solidFill>
+                      <a:srgbClr val="F0F1F3"/>
+                    </a:solidFill>
+                  </a:tcPr>
+                </a:tc>
+                <a:tc>
+                  <a:txBody>
+                    <a:bodyPr/>
+                    <a:lstStyle/>
+                    <a:p>
+                      <a:pPr algn="r"/>
+                      <a:r>
+                        <a:rPr sz="900" b="0" i="0">
+                          <a:solidFill>
+                            <a:srgbClr val="262626"/>
+                          </a:solidFill>
+                          <a:latin typeface="Garamond"/>
+                          <a:cs typeface="Garamond"/>
+                        </a:rPr>
+                        <a:t>—</a:t>
+                      </a:r>
+                    </a:p>
+                  </a:txBody>
+                  <a:tcPr anchor="ctr" marT="12700" marB="12700">
+                    <a:solidFill>
+                      <a:srgbClr val="F0F1F3"/>
+                    </a:solidFill>
+                  </a:tcPr>
+                </a:tc>
+                <a:tc>
+                  <a:txBody>
+                    <a:bodyPr/>
+                    <a:lstStyle/>
+                    <a:p>
+                      <a:pPr algn="r"/>
+                      <a:r>
+                        <a:rPr sz="900" b="0" i="0">
+                          <a:solidFill>
+                            <a:srgbClr val="262626"/>
+                          </a:solidFill>
+                          <a:latin typeface="Garamond"/>
+                          <a:cs typeface="Garamond"/>
+                        </a:rPr>
+                        <a:t>+1,807 / −1,798</a:t>
+                      </a:r>
+                    </a:p>
+                  </a:txBody>
+                  <a:tcPr anchor="ctr" marT="12700" marB="12700">
+                    <a:solidFill>
+                      <a:srgbClr val="F0F1F3"/>
+                    </a:solidFill>
+                  </a:tcPr>
+                </a:tc>
+              </a:tr>
+              <a:tr h="348615">
+                <a:tc>
+                  <a:txBody>
+                    <a:bodyPr/>
+                    <a:lstStyle/>
+                    <a:p>
+                      <a:pPr algn="l"/>
+                      <a:r>
+                        <a:rPr sz="900" b="1" i="0">
+                          <a:solidFill>
+                            <a:srgbClr val="1F2A44"/>
+                          </a:solidFill>
+                          <a:latin typeface="Garamond"/>
+                          <a:cs typeface="Garamond"/>
+                        </a:rPr>
+                        <a:t>Implied equity value / share</a:t>
+                      </a:r>
+                    </a:p>
+                  </a:txBody>
+                  <a:tcPr anchor="ctr" marT="12700" marB="12700">
+                    <a:solidFill>
+                      <a:srgbClr val="FFFFFF"/>
+                    </a:solidFill>
+                  </a:tcPr>
+                </a:tc>
+                <a:tc>
+                  <a:txBody>
+                    <a:bodyPr/>
+                    <a:lstStyle/>
+                    <a:p>
+                      <a:pPr algn="r"/>
+                      <a:r>
+                        <a:rPr sz="900" b="1" i="0">
+                          <a:solidFill>
+                            <a:srgbClr val="1F2A44"/>
+                          </a:solidFill>
+                          <a:latin typeface="Garamond"/>
+                          <a:cs typeface="Garamond"/>
+                        </a:rPr>
+                        <a:t>—</a:t>
+                      </a:r>
+                    </a:p>
+                  </a:txBody>
+                  <a:tcPr anchor="ctr" marT="12700" marB="12700">
+                    <a:solidFill>
+                      <a:srgbClr val="FFFFFF"/>
+                    </a:solidFill>
+                  </a:tcPr>
+                </a:tc>
+                <a:tc>
+                  <a:txBody>
+                    <a:bodyPr/>
+                    <a:lstStyle/>
+                    <a:p>
+                      <a:pPr algn="r"/>
+                      <a:r>
+                        <a:rPr sz="900" b="1" i="0">
+                          <a:solidFill>
+                            <a:srgbClr val="1F2A44"/>
+                          </a:solidFill>
+                          <a:latin typeface="Garamond"/>
+                          <a:cs typeface="Garamond"/>
+                        </a:rPr>
+                        <a:t>—</a:t>
+                      </a:r>
+                    </a:p>
+                  </a:txBody>
+                  <a:tcPr anchor="ctr" marT="12700" marB="12700">
+                    <a:solidFill>
+                      <a:srgbClr val="FFFFFF"/>
+                    </a:solidFill>
+                  </a:tcPr>
+                </a:tc>
+                <a:tc>
+                  <a:txBody>
+                    <a:bodyPr/>
+                    <a:lstStyle/>
+                    <a:p>
+                      <a:pPr algn="r"/>
+                      <a:r>
+                        <a:rPr sz="900" b="1" i="0">
+                          <a:solidFill>
+                            <a:srgbClr val="1F2A44"/>
+                          </a:solidFill>
+                          <a:latin typeface="Garamond"/>
+                          <a:cs typeface="Garamond"/>
+                        </a:rPr>
+                        <a:t>—</a:t>
+                      </a:r>
+                    </a:p>
+                  </a:txBody>
+                  <a:tcPr anchor="ctr" marT="12700" marB="12700">
+                    <a:solidFill>
+                      <a:srgbClr val="FFFFFF"/>
+                    </a:solidFill>
+                  </a:tcPr>
+                </a:tc>
+                <a:tc>
+                  <a:txBody>
+                    <a:bodyPr/>
+                    <a:lstStyle/>
+                    <a:p>
+                      <a:pPr algn="r"/>
+                      <a:r>
+                        <a:rPr sz="900" b="1" i="0">
+                          <a:solidFill>
+                            <a:srgbClr val="1F2A44"/>
+                          </a:solidFill>
+                          <a:latin typeface="Garamond"/>
+                          <a:cs typeface="Garamond"/>
+                        </a:rPr>
+                        <a:t>—</a:t>
+                      </a:r>
+                    </a:p>
+                  </a:txBody>
+                  <a:tcPr anchor="ctr" marT="12700" marB="12700">
+                    <a:solidFill>
+                      <a:srgbClr val="FFFFFF"/>
+                    </a:solidFill>
+                  </a:tcPr>
+                </a:tc>
+                <a:tc>
+                  <a:txBody>
+                    <a:bodyPr/>
+                    <a:lstStyle/>
+                    <a:p>
+                      <a:pPr algn="r"/>
+                      <a:r>
+                        <a:rPr sz="900" b="1" i="0">
+                          <a:solidFill>
+                            <a:srgbClr val="1F2A44"/>
+                          </a:solidFill>
+                          <a:latin typeface="Garamond"/>
+                          <a:cs typeface="Garamond"/>
+                        </a:rPr>
+                        <a:t>$97–$126</a:t>
+                      </a:r>
+                    </a:p>
+                  </a:txBody>
+                  <a:tcPr anchor="ctr" marT="12700" marB="12700">
+                    <a:solidFill>
+                      <a:srgbClr val="FFFFFF"/>
+                    </a:solidFill>
+                  </a:tcPr>
+                </a:tc>
+              </a:tr>
+            </a:tbl>
+          </a:graphicData>
+        </a:graphic>
+      </p:graphicFrame>
       <p:sp>
         <p:nvSpPr>
-          <p:cNvPr id="8" name="TextBox 7"/>
+          <p:cNvPr id="9" name="TextBox 8"/>
           <p:cNvSpPr txBox="1"/>
           <p:nvPr/>
         </p:nvSpPr>
         <p:spPr>
           <a:xfrm>
-            <a:off x="457200" y="1051560"/>
-            <a:ext cx="5577840" cy="365760"/>
+            <a:off x="457200" y="4005072"/>
+            <a:ext cx="7132320" cy="960120"/>
           </a:xfrm>
           <a:prstGeom prst="rect">
             <a:avLst/>
@@ -20908,399 +22578,111 @@
                 <a:spcPts val="0"/>
               </a:spcBef>
               <a:spcAft>
-                <a:spcPts val="0"/>
-              </a:spcAft>
-              <a:buNone/>
-            </a:pPr>
-            <a:r>
-              <a:rPr sz="1400" b="1" i="0">
+                <a:spcPts val="300"/>
+              </a:spcAft>
+              <a:buNone/>
+            </a:pPr>
+            <a:r>
+              <a:rPr sz="1200" b="1" i="0">
                 <a:solidFill>
                   <a:srgbClr val="990000"/>
                 </a:solidFill>
                 <a:latin typeface="Garamond"/>
                 <a:cs typeface="Garamond"/>
               </a:rPr>
-              <a:t>Base-case assumptions</a:t>
+              <a:t>Methodology</a:t>
+            </a:r>
+          </a:p>
+          <a:p>
+            <a:pPr algn="l" indent="-152400" marL="177800">
+              <a:spcBef>
+                <a:spcPts val="0"/>
+              </a:spcBef>
+              <a:spcAft>
+                <a:spcPts val="300"/>
+              </a:spcAft>
+              <a:buFont typeface="Garamond"/>
+              <a:buChar char="•"/>
+            </a:pPr>
+            <a:r>
+              <a:rPr sz="1050" b="0" i="0">
+                <a:solidFill>
+                  <a:srgbClr val="262626"/>
+                </a:solidFill>
+                <a:latin typeface="Garamond"/>
+                <a:cs typeface="Garamond"/>
+              </a:rPr>
+              <a:t>Single-brand retailer — geography is the cleanest SOTP cut (Americas / China / RoW per 10-K)</a:t>
+            </a:r>
+          </a:p>
+          <a:p>
+            <a:pPr algn="l" indent="-152400" marL="177800">
+              <a:spcBef>
+                <a:spcPts val="0"/>
+              </a:spcBef>
+              <a:spcAft>
+                <a:spcPts val="300"/>
+              </a:spcAft>
+              <a:buFont typeface="Garamond"/>
+              <a:buChar char="•"/>
+            </a:pPr>
+            <a:r>
+              <a:rPr sz="1050" b="0" i="0">
+                <a:solidFill>
+                  <a:srgbClr val="262626"/>
+                </a:solidFill>
+                <a:latin typeface="Garamond"/>
+                <a:cs typeface="Garamond"/>
+              </a:rPr>
+              <a:t>FY30E segment revenue = FY25 geo mix × base-case consolidated FY30 revenue (Scenarios col G)</a:t>
+            </a:r>
+          </a:p>
+          <a:p>
+            <a:pPr algn="l" indent="-152400" marL="177800">
+              <a:spcBef>
+                <a:spcPts val="0"/>
+              </a:spcBef>
+              <a:spcAft>
+                <a:spcPts val="300"/>
+              </a:spcAft>
+              <a:buFont typeface="Garamond"/>
+              <a:buChar char="•"/>
+            </a:pPr>
+            <a:r>
+              <a:rPr sz="1050" b="0" i="0">
+                <a:solidFill>
+                  <a:srgbClr val="262626"/>
+                </a:solidFill>
+                <a:latin typeface="Garamond"/>
+                <a:cs typeface="Garamond"/>
+              </a:rPr>
+              <a:t>Segment EBITDA margins are illustrative (mature Americas vs growth China); multiples are range checks, not peer averages</a:t>
+            </a:r>
+          </a:p>
+          <a:p>
+            <a:pPr algn="l" indent="-152400" marL="177800">
+              <a:spcBef>
+                <a:spcPts val="0"/>
+              </a:spcBef>
+              <a:spcAft>
+                <a:spcPts val="300"/>
+              </a:spcAft>
+              <a:buFont typeface="Garamond"/>
+              <a:buChar char="•"/>
+            </a:pPr>
+            <a:r>
+              <a:rPr sz="1050" b="0" i="0">
+                <a:solidFill>
+                  <a:srgbClr val="262626"/>
+                </a:solidFill>
+                <a:latin typeface="Garamond"/>
+                <a:cs typeface="Garamond"/>
+              </a:rPr>
+              <a:t>Consolidated base-case DCF $134 is the primary valuation anchor; SOTP triangulates geographic optionality</a:t>
             </a:r>
           </a:p>
         </p:txBody>
       </p:sp>
-      <p:graphicFrame>
-        <p:nvGraphicFramePr>
-          <p:cNvPr id="9" name="Table 8"/>
-          <p:cNvGraphicFramePr>
-            <a:graphicFrameLocks noGrp="1"/>
-          </p:cNvGraphicFramePr>
-          <p:nvPr/>
-        </p:nvGraphicFramePr>
-        <p:xfrm>
-          <a:off x="457200" y="1463040"/>
-          <a:ext cx="5486400" cy="2743200"/>
-        </p:xfrm>
-        <a:graphic>
-          <a:graphicData uri="http://schemas.openxmlformats.org/drawingml/2006/table">
-            <a:tbl>
-              <a:tblPr firstRow="1" bandRow="1">
-                <a:tableStyleId>{5C22544A-7EE6-4342-B048-85BDC9FD1C3A}</a:tableStyleId>
-              </a:tblPr>
-              <a:tblGrid>
-                <a:gridCol w="3657600"/>
-                <a:gridCol w="1828800"/>
-              </a:tblGrid>
-              <a:tr h="391885">
-                <a:tc>
-                  <a:txBody>
-                    <a:bodyPr/>
-                    <a:lstStyle/>
-                    <a:p>
-                      <a:pPr algn="l"/>
-                      <a:r>
-                        <a:rPr sz="1150" b="1" i="0">
-                          <a:solidFill>
-                            <a:srgbClr val="FFFFFF"/>
-                          </a:solidFill>
-                          <a:latin typeface="Garamond"/>
-                          <a:cs typeface="Garamond"/>
-                        </a:rPr>
-                        <a:t>Assumption</a:t>
-                      </a:r>
-                    </a:p>
-                  </a:txBody>
-                  <a:tcPr anchor="ctr">
-                    <a:solidFill>
-                      <a:srgbClr val="1F2A44"/>
-                    </a:solidFill>
-                  </a:tcPr>
-                </a:tc>
-                <a:tc>
-                  <a:txBody>
-                    <a:bodyPr/>
-                    <a:lstStyle/>
-                    <a:p>
-                      <a:pPr algn="r"/>
-                      <a:r>
-                        <a:rPr sz="1150" b="1" i="0">
-                          <a:solidFill>
-                            <a:srgbClr val="FFFFFF"/>
-                          </a:solidFill>
-                          <a:latin typeface="Garamond"/>
-                          <a:cs typeface="Garamond"/>
-                        </a:rPr>
-                        <a:t>Value</a:t>
-                      </a:r>
-                    </a:p>
-                  </a:txBody>
-                  <a:tcPr anchor="ctr">
-                    <a:solidFill>
-                      <a:srgbClr val="1F2A44"/>
-                    </a:solidFill>
-                  </a:tcPr>
-                </a:tc>
-              </a:tr>
-              <a:tr h="391885">
-                <a:tc>
-                  <a:txBody>
-                    <a:bodyPr/>
-                    <a:lstStyle/>
-                    <a:p>
-                      <a:pPr algn="l"/>
-                      <a:r>
-                        <a:rPr sz="1150" b="0" i="0">
-                          <a:solidFill>
-                            <a:srgbClr val="262626"/>
-                          </a:solidFill>
-                          <a:latin typeface="Garamond"/>
-                          <a:cs typeface="Garamond"/>
-                        </a:rPr>
-                        <a:t>Revenue growth (FY26 → FY30)</a:t>
-                      </a:r>
-                    </a:p>
-                  </a:txBody>
-                  <a:tcPr anchor="ctr">
-                    <a:solidFill>
-                      <a:srgbClr val="FFFFFF"/>
-                    </a:solidFill>
-                  </a:tcPr>
-                </a:tc>
-                <a:tc>
-                  <a:txBody>
-                    <a:bodyPr/>
-                    <a:lstStyle/>
-                    <a:p>
-                      <a:pPr algn="r"/>
-                      <a:r>
-                        <a:rPr sz="1150" b="0" i="0">
-                          <a:solidFill>
-                            <a:srgbClr val="990000"/>
-                          </a:solidFill>
-                          <a:latin typeface="Garamond"/>
-                          <a:cs typeface="Garamond"/>
-                        </a:rPr>
-                        <a:t>−6.1% → +2.3%</a:t>
-                      </a:r>
-                    </a:p>
-                  </a:txBody>
-                  <a:tcPr anchor="ctr">
-                    <a:solidFill>
-                      <a:srgbClr val="FFFFFF"/>
-                    </a:solidFill>
-                  </a:tcPr>
-                </a:tc>
-              </a:tr>
-              <a:tr h="391885">
-                <a:tc>
-                  <a:txBody>
-                    <a:bodyPr/>
-                    <a:lstStyle/>
-                    <a:p>
-                      <a:pPr algn="l"/>
-                      <a:r>
-                        <a:rPr sz="1150" b="0" i="0">
-                          <a:solidFill>
-                            <a:srgbClr val="262626"/>
-                          </a:solidFill>
-                          <a:latin typeface="Garamond"/>
-                          <a:cs typeface="Garamond"/>
-                        </a:rPr>
-                        <a:t>EBIT margin (FY26 → FY30)</a:t>
-                      </a:r>
-                    </a:p>
-                  </a:txBody>
-                  <a:tcPr anchor="ctr">
-                    <a:solidFill>
-                      <a:srgbClr val="F0F1F3"/>
-                    </a:solidFill>
-                  </a:tcPr>
-                </a:tc>
-                <a:tc>
-                  <a:txBody>
-                    <a:bodyPr/>
-                    <a:lstStyle/>
-                    <a:p>
-                      <a:pPr algn="r"/>
-                      <a:r>
-                        <a:rPr sz="1150" b="0" i="0">
-                          <a:solidFill>
-                            <a:srgbClr val="990000"/>
-                          </a:solidFill>
-                          <a:latin typeface="Garamond"/>
-                          <a:cs typeface="Garamond"/>
-                        </a:rPr>
-                        <a:t>13.2% clean → 15.5% (+$134.5M FY26)</a:t>
-                      </a:r>
-                    </a:p>
-                  </a:txBody>
-                  <a:tcPr anchor="ctr">
-                    <a:solidFill>
-                      <a:srgbClr val="F0F1F3"/>
-                    </a:solidFill>
-                  </a:tcPr>
-                </a:tc>
-              </a:tr>
-              <a:tr h="391885">
-                <a:tc>
-                  <a:txBody>
-                    <a:bodyPr/>
-                    <a:lstStyle/>
-                    <a:p>
-                      <a:pPr algn="l"/>
-                      <a:r>
-                        <a:rPr sz="1150" b="0" i="0">
-                          <a:solidFill>
-                            <a:srgbClr val="262626"/>
-                          </a:solidFill>
-                          <a:latin typeface="Garamond"/>
-                          <a:cs typeface="Garamond"/>
-                        </a:rPr>
-                        <a:t>Tax rate</a:t>
-                      </a:r>
-                    </a:p>
-                  </a:txBody>
-                  <a:tcPr anchor="ctr">
-                    <a:solidFill>
-                      <a:srgbClr val="FFFFFF"/>
-                    </a:solidFill>
-                  </a:tcPr>
-                </a:tc>
-                <a:tc>
-                  <a:txBody>
-                    <a:bodyPr/>
-                    <a:lstStyle/>
-                    <a:p>
-                      <a:pPr algn="r"/>
-                      <a:r>
-                        <a:rPr sz="1150" b="0" i="0">
-                          <a:solidFill>
-                            <a:srgbClr val="990000"/>
-                          </a:solidFill>
-                          <a:latin typeface="Garamond"/>
-                          <a:cs typeface="Garamond"/>
-                        </a:rPr>
-                        <a:t>30%</a:t>
-                      </a:r>
-                    </a:p>
-                  </a:txBody>
-                  <a:tcPr anchor="ctr">
-                    <a:solidFill>
-                      <a:srgbClr val="FFFFFF"/>
-                    </a:solidFill>
-                  </a:tcPr>
-                </a:tc>
-              </a:tr>
-              <a:tr h="391885">
-                <a:tc>
-                  <a:txBody>
-                    <a:bodyPr/>
-                    <a:lstStyle/>
-                    <a:p>
-                      <a:pPr algn="l"/>
-                      <a:r>
-                        <a:rPr sz="1150" b="0" i="0">
-                          <a:solidFill>
-                            <a:srgbClr val="262626"/>
-                          </a:solidFill>
-                          <a:latin typeface="Garamond"/>
-                          <a:cs typeface="Garamond"/>
-                        </a:rPr>
-                        <a:t>Capex % of revenue</a:t>
-                      </a:r>
-                    </a:p>
-                  </a:txBody>
-                  <a:tcPr anchor="ctr">
-                    <a:solidFill>
-                      <a:srgbClr val="F0F1F3"/>
-                    </a:solidFill>
-                  </a:tcPr>
-                </a:tc>
-                <a:tc>
-                  <a:txBody>
-                    <a:bodyPr/>
-                    <a:lstStyle/>
-                    <a:p>
-                      <a:pPr algn="r"/>
-                      <a:r>
-                        <a:rPr sz="1150" b="0" i="0">
-                          <a:solidFill>
-                            <a:srgbClr val="990000"/>
-                          </a:solidFill>
-                          <a:latin typeface="Garamond"/>
-                          <a:cs typeface="Garamond"/>
-                        </a:rPr>
-                        <a:t>5.5% blend</a:t>
-                      </a:r>
-                    </a:p>
-                  </a:txBody>
-                  <a:tcPr anchor="ctr">
-                    <a:solidFill>
-                      <a:srgbClr val="F0F1F3"/>
-                    </a:solidFill>
-                  </a:tcPr>
-                </a:tc>
-              </a:tr>
-              <a:tr h="391885">
-                <a:tc>
-                  <a:txBody>
-                    <a:bodyPr/>
-                    <a:lstStyle/>
-                    <a:p>
-                      <a:pPr algn="l"/>
-                      <a:r>
-                        <a:rPr sz="1150" b="0" i="0">
-                          <a:solidFill>
-                            <a:srgbClr val="262626"/>
-                          </a:solidFill>
-                          <a:latin typeface="Garamond"/>
-                          <a:cs typeface="Garamond"/>
-                        </a:rPr>
-                        <a:t>WACC</a:t>
-                      </a:r>
-                    </a:p>
-                  </a:txBody>
-                  <a:tcPr anchor="ctr">
-                    <a:solidFill>
-                      <a:srgbClr val="FFFFFF"/>
-                    </a:solidFill>
-                  </a:tcPr>
-                </a:tc>
-                <a:tc>
-                  <a:txBody>
-                    <a:bodyPr/>
-                    <a:lstStyle/>
-                    <a:p>
-                      <a:pPr algn="r"/>
-                      <a:r>
-                        <a:rPr sz="1150" b="0" i="0">
-                          <a:solidFill>
-                            <a:srgbClr val="990000"/>
-                          </a:solidFill>
-                          <a:latin typeface="Garamond"/>
-                          <a:cs typeface="Garamond"/>
-                        </a:rPr>
-                        <a:t>9.0%</a:t>
-                      </a:r>
-                    </a:p>
-                  </a:txBody>
-                  <a:tcPr anchor="ctr">
-                    <a:solidFill>
-                      <a:srgbClr val="FFFFFF"/>
-                    </a:solidFill>
-                  </a:tcPr>
-                </a:tc>
-              </a:tr>
-              <a:tr h="391890">
-                <a:tc>
-                  <a:txBody>
-                    <a:bodyPr/>
-                    <a:lstStyle/>
-                    <a:p>
-                      <a:pPr algn="l"/>
-                      <a:r>
-                        <a:rPr sz="1150" b="0" i="0">
-                          <a:solidFill>
-                            <a:srgbClr val="262626"/>
-                          </a:solidFill>
-                          <a:latin typeface="Garamond"/>
-                          <a:cs typeface="Garamond"/>
-                        </a:rPr>
-                        <a:t>Terminal growth</a:t>
-                      </a:r>
-                    </a:p>
-                  </a:txBody>
-                  <a:tcPr anchor="ctr">
-                    <a:solidFill>
-                      <a:srgbClr val="F0F1F3"/>
-                    </a:solidFill>
-                  </a:tcPr>
-                </a:tc>
-                <a:tc>
-                  <a:txBody>
-                    <a:bodyPr/>
-                    <a:lstStyle/>
-                    <a:p>
-                      <a:pPr algn="r"/>
-                      <a:r>
-                        <a:rPr sz="1150" b="0" i="0">
-                          <a:solidFill>
-                            <a:srgbClr val="990000"/>
-                          </a:solidFill>
-                          <a:latin typeface="Garamond"/>
-                          <a:cs typeface="Garamond"/>
-                        </a:rPr>
-                        <a:t>2.25%</a:t>
-                      </a:r>
-                    </a:p>
-                  </a:txBody>
-                  <a:tcPr anchor="ctr">
-                    <a:solidFill>
-                      <a:srgbClr val="F0F1F3"/>
-                    </a:solidFill>
-                  </a:tcPr>
-                </a:tc>
-              </a:tr>
-            </a:tbl>
-          </a:graphicData>
-        </a:graphic>
-      </p:graphicFrame>
       <p:sp>
         <p:nvSpPr>
           <p:cNvPr id="10" name="Rectangle 9"/>
@@ -21309,8 +22691,8 @@
         </p:nvSpPr>
         <p:spPr>
           <a:xfrm>
-            <a:off x="6400800" y="1463040"/>
-            <a:ext cx="5349240" cy="2743200"/>
+            <a:off x="7772400" y="4005072"/>
+            <a:ext cx="3977639" cy="1417320"/>
           </a:xfrm>
           <a:prstGeom prst="rect">
             <a:avLst/>
@@ -21346,1152 +22728,86 @@
                 <a:spcPts val="0"/>
               </a:spcBef>
               <a:spcAft>
-                <a:spcPts val="600"/>
-              </a:spcAft>
-              <a:buNone/>
-            </a:pPr>
-            <a:r>
-              <a:rPr sz="1250" b="1" i="0">
+                <a:spcPts val="400"/>
+              </a:spcAft>
+              <a:buNone/>
+            </a:pPr>
+            <a:r>
+              <a:rPr sz="1200" b="1" i="0">
                 <a:solidFill>
                   <a:srgbClr val="990000"/>
                 </a:solidFill>
                 <a:latin typeface="Garamond"/>
                 <a:cs typeface="Garamond"/>
               </a:rPr>
-              <a:t>VALUATION OUTPUT (US$ M)</a:t>
-            </a:r>
-          </a:p>
-          <a:p>
-            <a:pPr>
-              <a:spcAft>
-                <a:spcPts val="500"/>
-              </a:spcAft>
-            </a:pPr>
-            <a:r>
-              <a:rPr sz="1250" b="0" i="0">
+              <a:t>SOTP vs DCF</a:t>
+            </a:r>
+          </a:p>
+          <a:p>
+            <a:pPr algn="l">
+              <a:spcBef>
+                <a:spcPts val="0"/>
+              </a:spcBef>
+              <a:spcAft>
+                <a:spcPts val="300"/>
+              </a:spcAft>
+              <a:buNone/>
+            </a:pPr>
+            <a:r>
+              <a:rPr sz="1300" b="1" i="0">
+                <a:solidFill>
+                  <a:srgbClr val="1F2A44"/>
+                </a:solidFill>
+                <a:latin typeface="Garamond"/>
+                <a:cs typeface="Garamond"/>
+              </a:rPr>
+              <a:t>SOTP range: $97–$126</a:t>
+            </a:r>
+          </a:p>
+          <a:p>
+            <a:pPr algn="l">
+              <a:spcBef>
+                <a:spcPts val="0"/>
+              </a:spcBef>
+              <a:spcAft>
+                <a:spcPts val="300"/>
+              </a:spcAft>
+              <a:buNone/>
+            </a:pPr>
+            <a:r>
+              <a:rPr sz="1300" b="1" i="0">
+                <a:solidFill>
+                  <a:srgbClr val="1F2A44"/>
+                </a:solidFill>
+                <a:latin typeface="Garamond"/>
+                <a:cs typeface="Garamond"/>
+              </a:rPr>
+              <a:t>Base-case DCF: $134</a:t>
+            </a:r>
+          </a:p>
+          <a:p>
+            <a:pPr algn="l">
+              <a:spcBef>
+                <a:spcPts val="0"/>
+              </a:spcBef>
+              <a:spcAft>
+                <a:spcPts val="0"/>
+              </a:spcAft>
+              <a:buNone/>
+            </a:pPr>
+            <a:r>
+              <a:rPr sz="950" b="0" i="0">
                 <a:solidFill>
                   <a:srgbClr val="262626"/>
                 </a:solidFill>
                 <a:latin typeface="Garamond"/>
                 <a:cs typeface="Garamond"/>
               </a:rPr>
-              <a:t>PV of explicit FCF (FY26–FY30)</a:t>
-            </a:r>
-            <a:r>
-              <a:rPr sz="1250" b="1" i="0">
-                <a:solidFill>
-                  <a:srgbClr val="1F2A44"/>
-                </a:solidFill>
-                <a:latin typeface="Garamond"/>
-                <a:cs typeface="Garamond"/>
-              </a:rPr>
-              <a:t>      3,944</a:t>
-            </a:r>
-          </a:p>
-          <a:p>
-            <a:pPr>
-              <a:spcAft>
-                <a:spcPts val="500"/>
-              </a:spcAft>
-            </a:pPr>
-            <a:r>
-              <a:rPr sz="1250" b="0" i="0">
-                <a:solidFill>
-                  <a:srgbClr val="262626"/>
-                </a:solidFill>
-                <a:latin typeface="Garamond"/>
-                <a:cs typeface="Garamond"/>
-              </a:rPr>
-              <a:t>PV of terminal value</a:t>
-            </a:r>
-            <a:r>
-              <a:rPr sz="1250" b="1" i="0">
-                <a:solidFill>
-                  <a:srgbClr val="1F2A44"/>
-                </a:solidFill>
-                <a:latin typeface="Garamond"/>
-                <a:cs typeface="Garamond"/>
-              </a:rPr>
-              <a:t>      10,933</a:t>
-            </a:r>
-          </a:p>
-          <a:p>
-            <a:pPr>
-              <a:spcAft>
-                <a:spcPts val="500"/>
-              </a:spcAft>
-            </a:pPr>
-            <a:r>
-              <a:rPr sz="1250" b="1" i="0">
-                <a:solidFill>
-                  <a:srgbClr val="262626"/>
-                </a:solidFill>
-                <a:latin typeface="Garamond"/>
-                <a:cs typeface="Garamond"/>
-              </a:rPr>
-              <a:t>Enterprise value</a:t>
-            </a:r>
-            <a:r>
-              <a:rPr sz="1250" b="1" i="0">
-                <a:solidFill>
-                  <a:srgbClr val="1F2A44"/>
-                </a:solidFill>
-                <a:latin typeface="Garamond"/>
-                <a:cs typeface="Garamond"/>
-              </a:rPr>
-              <a:t>      14,876</a:t>
-            </a:r>
-          </a:p>
-          <a:p>
-            <a:pPr>
-              <a:spcAft>
-                <a:spcPts val="500"/>
-              </a:spcAft>
-            </a:pPr>
-            <a:r>
-              <a:rPr sz="1250" b="0" i="0">
-                <a:solidFill>
-                  <a:srgbClr val="262626"/>
-                </a:solidFill>
-                <a:latin typeface="Garamond"/>
-                <a:cs typeface="Garamond"/>
-              </a:rPr>
-              <a:t>Plus: cash</a:t>
-            </a:r>
-            <a:r>
-              <a:rPr sz="1250" b="1" i="0">
-                <a:solidFill>
-                  <a:srgbClr val="1F2A44"/>
-                </a:solidFill>
-                <a:latin typeface="Garamond"/>
-                <a:cs typeface="Garamond"/>
-              </a:rPr>
-              <a:t>      1,807</a:t>
-            </a:r>
-          </a:p>
-          <a:p>
-            <a:pPr>
-              <a:spcAft>
-                <a:spcPts val="500"/>
-              </a:spcAft>
-            </a:pPr>
-            <a:r>
-              <a:rPr sz="1250" b="1" i="0">
-                <a:solidFill>
-                  <a:srgbClr val="262626"/>
-                </a:solidFill>
-                <a:latin typeface="Garamond"/>
-                <a:cs typeface="Garamond"/>
-              </a:rPr>
-              <a:t>Equity value</a:t>
-            </a:r>
-            <a:r>
-              <a:rPr sz="1250" b="1" i="0">
-                <a:solidFill>
-                  <a:srgbClr val="1F2A44"/>
-                </a:solidFill>
-                <a:latin typeface="Garamond"/>
-                <a:cs typeface="Garamond"/>
-              </a:rPr>
-              <a:t>      14,885</a:t>
-            </a:r>
-          </a:p>
-          <a:p>
-            <a:pPr>
-              <a:spcAft>
-                <a:spcPts val="500"/>
-              </a:spcAft>
-            </a:pPr>
-            <a:r>
-              <a:rPr sz="1250" b="0" i="0">
-                <a:solidFill>
-                  <a:srgbClr val="262626"/>
-                </a:solidFill>
-                <a:latin typeface="Garamond"/>
-                <a:cs typeface="Garamond"/>
-              </a:rPr>
-              <a:t>÷ Diluted shares (M)</a:t>
-            </a:r>
-            <a:r>
-              <a:rPr sz="1250" b="1" i="0">
-                <a:solidFill>
-                  <a:srgbClr val="1F2A44"/>
-                </a:solidFill>
-                <a:latin typeface="Garamond"/>
-                <a:cs typeface="Garamond"/>
-              </a:rPr>
-              <a:t>      111.4</a:t>
-            </a:r>
-          </a:p>
-          <a:p>
-            <a:pPr>
-              <a:spcBef>
-                <a:spcPts val="600"/>
-              </a:spcBef>
-            </a:pPr>
-            <a:r>
-              <a:rPr sz="1600" b="1" i="0">
-                <a:solidFill>
-                  <a:srgbClr val="1E7A3C"/>
-                </a:solidFill>
-                <a:latin typeface="Garamond"/>
-                <a:cs typeface="Garamond"/>
-              </a:rPr>
-              <a:t>Implied value:  $134 / share</a:t>
+              <a:t>Overlap is expected — SOTP uses terminal-year EBITDA; DCF discounts explicit FCF + Gordon TV.</a:t>
             </a:r>
           </a:p>
         </p:txBody>
       </p:sp>
-      <p:sp>
-        <p:nvSpPr>
-          <p:cNvPr id="11" name="TextBox 10"/>
-          <p:cNvSpPr txBox="1"/>
-          <p:nvPr/>
-        </p:nvSpPr>
-        <p:spPr>
-          <a:xfrm>
-            <a:off x="457200" y="4434840"/>
-            <a:ext cx="11292840" cy="1828800"/>
-          </a:xfrm>
-          <a:prstGeom prst="rect">
-            <a:avLst/>
-          </a:prstGeom>
-          <a:noFill/>
-        </p:spPr>
-        <p:txBody>
-          <a:bodyPr wrap="square" anchor="t" lIns="25400" rIns="25400" tIns="12700" bIns="12700">
-            <a:spAutoFit/>
-          </a:bodyPr>
-          <a:lstStyle/>
-          <a:p>
-            <a:pPr algn="l">
-              <a:spcBef>
-                <a:spcPts val="0"/>
-              </a:spcBef>
-              <a:spcAft>
-                <a:spcPts val="400"/>
-              </a:spcAft>
-              <a:buNone/>
-            </a:pPr>
-            <a:r>
-              <a:rPr sz="1300" b="1" i="0">
-                <a:solidFill>
-                  <a:srgbClr val="990000"/>
-                </a:solidFill>
-                <a:latin typeface="Garamond"/>
-                <a:cs typeface="Garamond"/>
-              </a:rPr>
-              <a:t>Sensitivity — implied share price (WACC vs terminal growth)</a:t>
-            </a:r>
-          </a:p>
-        </p:txBody>
-      </p:sp>
-      <p:graphicFrame>
-        <p:nvGraphicFramePr>
-          <p:cNvPr id="12" name="Table 11"/>
-          <p:cNvGraphicFramePr>
-            <a:graphicFrameLocks noGrp="1"/>
-          </p:cNvGraphicFramePr>
-          <p:nvPr/>
-        </p:nvGraphicFramePr>
-        <p:xfrm>
-          <a:off x="457200" y="4892040"/>
-          <a:ext cx="6949440" cy="1371600"/>
-        </p:xfrm>
-        <a:graphic>
-          <a:graphicData uri="http://schemas.openxmlformats.org/drawingml/2006/table">
-            <a:tbl>
-              <a:tblPr firstRow="1" bandRow="1">
-                <a:tableStyleId>{5C22544A-7EE6-4342-B048-85BDC9FD1C3A}</a:tableStyleId>
-              </a:tblPr>
-              <a:tblGrid>
-                <a:gridCol w="1158240"/>
-                <a:gridCol w="1158240"/>
-                <a:gridCol w="1158240"/>
-                <a:gridCol w="1158240"/>
-                <a:gridCol w="1158240"/>
-                <a:gridCol w="1158240"/>
-              </a:tblGrid>
-              <a:tr h="228600">
-                <a:tc>
-                  <a:txBody>
-                    <a:bodyPr/>
-                    <a:lstStyle/>
-                    <a:p>
-                      <a:pPr algn="ctr"/>
-                      <a:r>
-                        <a:rPr sz="1050" b="1" i="0">
-                          <a:solidFill>
-                            <a:srgbClr val="FFFFFF"/>
-                          </a:solidFill>
-                          <a:latin typeface="Garamond"/>
-                          <a:cs typeface="Garamond"/>
-                        </a:rPr>
-                        <a:t>WACC \ g</a:t>
-                      </a:r>
-                    </a:p>
-                  </a:txBody>
-                  <a:tcPr anchor="ctr">
-                    <a:solidFill>
-                      <a:srgbClr val="1F2A44"/>
-                    </a:solidFill>
-                  </a:tcPr>
-                </a:tc>
-                <a:tc>
-                  <a:txBody>
-                    <a:bodyPr/>
-                    <a:lstStyle/>
-                    <a:p>
-                      <a:pPr algn="ctr"/>
-                      <a:r>
-                        <a:rPr sz="1050" b="1" i="0">
-                          <a:solidFill>
-                            <a:srgbClr val="FFFFFF"/>
-                          </a:solidFill>
-                          <a:latin typeface="Garamond"/>
-                          <a:cs typeface="Garamond"/>
-                        </a:rPr>
-                        <a:t>1.5%</a:t>
-                      </a:r>
-                    </a:p>
-                  </a:txBody>
-                  <a:tcPr anchor="ctr">
-                    <a:solidFill>
-                      <a:srgbClr val="1F2A44"/>
-                    </a:solidFill>
-                  </a:tcPr>
-                </a:tc>
-                <a:tc>
-                  <a:txBody>
-                    <a:bodyPr/>
-                    <a:lstStyle/>
-                    <a:p>
-                      <a:pPr algn="ctr"/>
-                      <a:r>
-                        <a:rPr sz="1050" b="1" i="0">
-                          <a:solidFill>
-                            <a:srgbClr val="FFFFFF"/>
-                          </a:solidFill>
-                          <a:latin typeface="Garamond"/>
-                          <a:cs typeface="Garamond"/>
-                        </a:rPr>
-                        <a:t>2.0%</a:t>
-                      </a:r>
-                    </a:p>
-                  </a:txBody>
-                  <a:tcPr anchor="ctr">
-                    <a:solidFill>
-                      <a:srgbClr val="1F2A44"/>
-                    </a:solidFill>
-                  </a:tcPr>
-                </a:tc>
-                <a:tc>
-                  <a:txBody>
-                    <a:bodyPr/>
-                    <a:lstStyle/>
-                    <a:p>
-                      <a:pPr algn="ctr"/>
-                      <a:r>
-                        <a:rPr sz="1050" b="1" i="0">
-                          <a:solidFill>
-                            <a:srgbClr val="FFFFFF"/>
-                          </a:solidFill>
-                          <a:latin typeface="Garamond"/>
-                          <a:cs typeface="Garamond"/>
-                        </a:rPr>
-                        <a:t>2.25%</a:t>
-                      </a:r>
-                    </a:p>
-                  </a:txBody>
-                  <a:tcPr anchor="ctr">
-                    <a:solidFill>
-                      <a:srgbClr val="1F2A44"/>
-                    </a:solidFill>
-                  </a:tcPr>
-                </a:tc>
-                <a:tc>
-                  <a:txBody>
-                    <a:bodyPr/>
-                    <a:lstStyle/>
-                    <a:p>
-                      <a:pPr algn="ctr"/>
-                      <a:r>
-                        <a:rPr sz="1050" b="1" i="0">
-                          <a:solidFill>
-                            <a:srgbClr val="FFFFFF"/>
-                          </a:solidFill>
-                          <a:latin typeface="Garamond"/>
-                          <a:cs typeface="Garamond"/>
-                        </a:rPr>
-                        <a:t>2.5%</a:t>
-                      </a:r>
-                    </a:p>
-                  </a:txBody>
-                  <a:tcPr anchor="ctr">
-                    <a:solidFill>
-                      <a:srgbClr val="1F2A44"/>
-                    </a:solidFill>
-                  </a:tcPr>
-                </a:tc>
-                <a:tc>
-                  <a:txBody>
-                    <a:bodyPr/>
-                    <a:lstStyle/>
-                    <a:p>
-                      <a:pPr algn="ctr"/>
-                      <a:r>
-                        <a:rPr sz="1050" b="1" i="0">
-                          <a:solidFill>
-                            <a:srgbClr val="FFFFFF"/>
-                          </a:solidFill>
-                          <a:latin typeface="Garamond"/>
-                          <a:cs typeface="Garamond"/>
-                        </a:rPr>
-                        <a:t>3.0%</a:t>
-                      </a:r>
-                    </a:p>
-                  </a:txBody>
-                  <a:tcPr anchor="ctr">
-                    <a:solidFill>
-                      <a:srgbClr val="1F2A44"/>
-                    </a:solidFill>
-                  </a:tcPr>
-                </a:tc>
-              </a:tr>
-              <a:tr h="228600">
-                <a:tc>
-                  <a:txBody>
-                    <a:bodyPr/>
-                    <a:lstStyle/>
-                    <a:p>
-                      <a:pPr algn="ctr"/>
-                      <a:r>
-                        <a:rPr sz="1050" b="1" i="0">
-                          <a:solidFill>
-                            <a:srgbClr val="FFFFFF"/>
-                          </a:solidFill>
-                          <a:latin typeface="Garamond"/>
-                          <a:cs typeface="Garamond"/>
-                        </a:rPr>
-                        <a:t>9.5%</a:t>
-                      </a:r>
-                    </a:p>
-                  </a:txBody>
-                  <a:tcPr anchor="ctr">
-                    <a:solidFill>
-                      <a:srgbClr val="1F2A44"/>
-                    </a:solidFill>
-                  </a:tcPr>
-                </a:tc>
-                <a:tc>
-                  <a:txBody>
-                    <a:bodyPr/>
-                    <a:lstStyle/>
-                    <a:p>
-                      <a:pPr algn="ctr"/>
-                      <a:r>
-                        <a:rPr sz="1050" b="0" i="0">
-                          <a:solidFill>
-                            <a:srgbClr val="262626"/>
-                          </a:solidFill>
-                          <a:latin typeface="Garamond"/>
-                          <a:cs typeface="Garamond"/>
-                        </a:rPr>
-                        <a:t>$115</a:t>
-                      </a:r>
-                    </a:p>
-                  </a:txBody>
-                  <a:tcPr anchor="ctr">
-                    <a:solidFill>
-                      <a:srgbClr val="FFFFFF"/>
-                    </a:solidFill>
-                  </a:tcPr>
-                </a:tc>
-                <a:tc>
-                  <a:txBody>
-                    <a:bodyPr/>
-                    <a:lstStyle/>
-                    <a:p>
-                      <a:pPr algn="ctr"/>
-                      <a:r>
-                        <a:rPr sz="1050" b="0" i="0">
-                          <a:solidFill>
-                            <a:srgbClr val="262626"/>
-                          </a:solidFill>
-                          <a:latin typeface="Garamond"/>
-                          <a:cs typeface="Garamond"/>
-                        </a:rPr>
-                        <a:t>$121</a:t>
-                      </a:r>
-                    </a:p>
-                  </a:txBody>
-                  <a:tcPr anchor="ctr">
-                    <a:solidFill>
-                      <a:srgbClr val="FFFFFF"/>
-                    </a:solidFill>
-                  </a:tcPr>
-                </a:tc>
-                <a:tc>
-                  <a:txBody>
-                    <a:bodyPr/>
-                    <a:lstStyle/>
-                    <a:p>
-                      <a:pPr algn="ctr"/>
-                      <a:r>
-                        <a:rPr sz="1050" b="1" i="0">
-                          <a:solidFill>
-                            <a:srgbClr val="1F2A44"/>
-                          </a:solidFill>
-                          <a:latin typeface="Garamond"/>
-                          <a:cs typeface="Garamond"/>
-                        </a:rPr>
-                        <a:t>$124</a:t>
-                      </a:r>
-                    </a:p>
-                  </a:txBody>
-                  <a:tcPr anchor="ctr">
-                    <a:solidFill>
-                      <a:srgbClr val="FFC72C"/>
-                    </a:solidFill>
-                  </a:tcPr>
-                </a:tc>
-                <a:tc>
-                  <a:txBody>
-                    <a:bodyPr/>
-                    <a:lstStyle/>
-                    <a:p>
-                      <a:pPr algn="ctr"/>
-                      <a:r>
-                        <a:rPr sz="1050" b="0" i="0">
-                          <a:solidFill>
-                            <a:srgbClr val="262626"/>
-                          </a:solidFill>
-                          <a:latin typeface="Garamond"/>
-                          <a:cs typeface="Garamond"/>
-                        </a:rPr>
-                        <a:t>$127</a:t>
-                      </a:r>
-                    </a:p>
-                  </a:txBody>
-                  <a:tcPr anchor="ctr">
-                    <a:solidFill>
-                      <a:srgbClr val="FFFFFF"/>
-                    </a:solidFill>
-                  </a:tcPr>
-                </a:tc>
-                <a:tc>
-                  <a:txBody>
-                    <a:bodyPr/>
-                    <a:lstStyle/>
-                    <a:p>
-                      <a:pPr algn="ctr"/>
-                      <a:r>
-                        <a:rPr sz="1050" b="0" i="0">
-                          <a:solidFill>
-                            <a:srgbClr val="262626"/>
-                          </a:solidFill>
-                          <a:latin typeface="Garamond"/>
-                          <a:cs typeface="Garamond"/>
-                        </a:rPr>
-                        <a:t>$135</a:t>
-                      </a:r>
-                    </a:p>
-                  </a:txBody>
-                  <a:tcPr anchor="ctr">
-                    <a:solidFill>
-                      <a:srgbClr val="FFFFFF"/>
-                    </a:solidFill>
-                  </a:tcPr>
-                </a:tc>
-              </a:tr>
-              <a:tr h="228600">
-                <a:tc>
-                  <a:txBody>
-                    <a:bodyPr/>
-                    <a:lstStyle/>
-                    <a:p>
-                      <a:pPr algn="ctr"/>
-                      <a:r>
-                        <a:rPr sz="1050" b="1" i="0">
-                          <a:solidFill>
-                            <a:srgbClr val="FFFFFF"/>
-                          </a:solidFill>
-                          <a:latin typeface="Garamond"/>
-                          <a:cs typeface="Garamond"/>
-                        </a:rPr>
-                        <a:t>10.0%</a:t>
-                      </a:r>
-                    </a:p>
-                  </a:txBody>
-                  <a:tcPr anchor="ctr">
-                    <a:solidFill>
-                      <a:srgbClr val="1F2A44"/>
-                    </a:solidFill>
-                  </a:tcPr>
-                </a:tc>
-                <a:tc>
-                  <a:txBody>
-                    <a:bodyPr/>
-                    <a:lstStyle/>
-                    <a:p>
-                      <a:pPr algn="ctr"/>
-                      <a:r>
-                        <a:rPr sz="1050" b="0" i="0">
-                          <a:solidFill>
-                            <a:srgbClr val="262626"/>
-                          </a:solidFill>
-                          <a:latin typeface="Garamond"/>
-                          <a:cs typeface="Garamond"/>
-                        </a:rPr>
-                        <a:t>$108</a:t>
-                      </a:r>
-                    </a:p>
-                  </a:txBody>
-                  <a:tcPr anchor="ctr">
-                    <a:solidFill>
-                      <a:srgbClr val="F0F1F3"/>
-                    </a:solidFill>
-                  </a:tcPr>
-                </a:tc>
-                <a:tc>
-                  <a:txBody>
-                    <a:bodyPr/>
-                    <a:lstStyle/>
-                    <a:p>
-                      <a:pPr algn="ctr"/>
-                      <a:r>
-                        <a:rPr sz="1050" b="0" i="0">
-                          <a:solidFill>
-                            <a:srgbClr val="262626"/>
-                          </a:solidFill>
-                          <a:latin typeface="Garamond"/>
-                          <a:cs typeface="Garamond"/>
-                        </a:rPr>
-                        <a:t>$113</a:t>
-                      </a:r>
-                    </a:p>
-                  </a:txBody>
-                  <a:tcPr anchor="ctr">
-                    <a:solidFill>
-                      <a:srgbClr val="F0F1F3"/>
-                    </a:solidFill>
-                  </a:tcPr>
-                </a:tc>
-                <a:tc>
-                  <a:txBody>
-                    <a:bodyPr/>
-                    <a:lstStyle/>
-                    <a:p>
-                      <a:pPr algn="ctr"/>
-                      <a:r>
-                        <a:rPr sz="1050" b="0" i="0">
-                          <a:solidFill>
-                            <a:srgbClr val="262626"/>
-                          </a:solidFill>
-                          <a:latin typeface="Garamond"/>
-                          <a:cs typeface="Garamond"/>
-                        </a:rPr>
-                        <a:t>$116</a:t>
-                      </a:r>
-                    </a:p>
-                  </a:txBody>
-                  <a:tcPr anchor="ctr">
-                    <a:solidFill>
-                      <a:srgbClr val="F0F1F3"/>
-                    </a:solidFill>
-                  </a:tcPr>
-                </a:tc>
-                <a:tc>
-                  <a:txBody>
-                    <a:bodyPr/>
-                    <a:lstStyle/>
-                    <a:p>
-                      <a:pPr algn="ctr"/>
-                      <a:r>
-                        <a:rPr sz="1050" b="0" i="0">
-                          <a:solidFill>
-                            <a:srgbClr val="262626"/>
-                          </a:solidFill>
-                          <a:latin typeface="Garamond"/>
-                          <a:cs typeface="Garamond"/>
-                        </a:rPr>
-                        <a:t>$119</a:t>
-                      </a:r>
-                    </a:p>
-                  </a:txBody>
-                  <a:tcPr anchor="ctr">
-                    <a:solidFill>
-                      <a:srgbClr val="F0F1F3"/>
-                    </a:solidFill>
-                  </a:tcPr>
-                </a:tc>
-                <a:tc>
-                  <a:txBody>
-                    <a:bodyPr/>
-                    <a:lstStyle/>
-                    <a:p>
-                      <a:pPr algn="ctr"/>
-                      <a:r>
-                        <a:rPr sz="1050" b="0" i="0">
-                          <a:solidFill>
-                            <a:srgbClr val="262626"/>
-                          </a:solidFill>
-                          <a:latin typeface="Garamond"/>
-                          <a:cs typeface="Garamond"/>
-                        </a:rPr>
-                        <a:t>$125</a:t>
-                      </a:r>
-                    </a:p>
-                  </a:txBody>
-                  <a:tcPr anchor="ctr">
-                    <a:solidFill>
-                      <a:srgbClr val="F0F1F3"/>
-                    </a:solidFill>
-                  </a:tcPr>
-                </a:tc>
-              </a:tr>
-              <a:tr h="228600">
-                <a:tc>
-                  <a:txBody>
-                    <a:bodyPr/>
-                    <a:lstStyle/>
-                    <a:p>
-                      <a:pPr algn="ctr"/>
-                      <a:r>
-                        <a:rPr sz="1050" b="1" i="0">
-                          <a:solidFill>
-                            <a:srgbClr val="FFFFFF"/>
-                          </a:solidFill>
-                          <a:latin typeface="Garamond"/>
-                          <a:cs typeface="Garamond"/>
-                        </a:rPr>
-                        <a:t>10.5%</a:t>
-                      </a:r>
-                    </a:p>
-                  </a:txBody>
-                  <a:tcPr anchor="ctr">
-                    <a:solidFill>
-                      <a:srgbClr val="1F2A44"/>
-                    </a:solidFill>
-                  </a:tcPr>
-                </a:tc>
-                <a:tc>
-                  <a:txBody>
-                    <a:bodyPr/>
-                    <a:lstStyle/>
-                    <a:p>
-                      <a:pPr algn="ctr"/>
-                      <a:r>
-                        <a:rPr sz="1050" b="0" i="0">
-                          <a:solidFill>
-                            <a:srgbClr val="262626"/>
-                          </a:solidFill>
-                          <a:latin typeface="Garamond"/>
-                          <a:cs typeface="Garamond"/>
-                        </a:rPr>
-                        <a:t>$102</a:t>
-                      </a:r>
-                    </a:p>
-                  </a:txBody>
-                  <a:tcPr anchor="ctr">
-                    <a:solidFill>
-                      <a:srgbClr val="FFFFFF"/>
-                    </a:solidFill>
-                  </a:tcPr>
-                </a:tc>
-                <a:tc>
-                  <a:txBody>
-                    <a:bodyPr/>
-                    <a:lstStyle/>
-                    <a:p>
-                      <a:pPr algn="ctr"/>
-                      <a:r>
-                        <a:rPr sz="1050" b="0" i="0">
-                          <a:solidFill>
-                            <a:srgbClr val="262626"/>
-                          </a:solidFill>
-                          <a:latin typeface="Garamond"/>
-                          <a:cs typeface="Garamond"/>
-                        </a:rPr>
-                        <a:t>$106</a:t>
-                      </a:r>
-                    </a:p>
-                  </a:txBody>
-                  <a:tcPr anchor="ctr">
-                    <a:solidFill>
-                      <a:srgbClr val="FFFFFF"/>
-                    </a:solidFill>
-                  </a:tcPr>
-                </a:tc>
-                <a:tc>
-                  <a:txBody>
-                    <a:bodyPr/>
-                    <a:lstStyle/>
-                    <a:p>
-                      <a:pPr algn="ctr"/>
-                      <a:r>
-                        <a:rPr sz="1050" b="0" i="0">
-                          <a:solidFill>
-                            <a:srgbClr val="262626"/>
-                          </a:solidFill>
-                          <a:latin typeface="Garamond"/>
-                          <a:cs typeface="Garamond"/>
-                        </a:rPr>
-                        <a:t>$109</a:t>
-                      </a:r>
-                    </a:p>
-                  </a:txBody>
-                  <a:tcPr anchor="ctr">
-                    <a:solidFill>
-                      <a:srgbClr val="FFFFFF"/>
-                    </a:solidFill>
-                  </a:tcPr>
-                </a:tc>
-                <a:tc>
-                  <a:txBody>
-                    <a:bodyPr/>
-                    <a:lstStyle/>
-                    <a:p>
-                      <a:pPr algn="ctr"/>
-                      <a:r>
-                        <a:rPr sz="1050" b="0" i="0">
-                          <a:solidFill>
-                            <a:srgbClr val="262626"/>
-                          </a:solidFill>
-                          <a:latin typeface="Garamond"/>
-                          <a:cs typeface="Garamond"/>
-                        </a:rPr>
-                        <a:t>$111</a:t>
-                      </a:r>
-                    </a:p>
-                  </a:txBody>
-                  <a:tcPr anchor="ctr">
-                    <a:solidFill>
-                      <a:srgbClr val="FFFFFF"/>
-                    </a:solidFill>
-                  </a:tcPr>
-                </a:tc>
-                <a:tc>
-                  <a:txBody>
-                    <a:bodyPr/>
-                    <a:lstStyle/>
-                    <a:p>
-                      <a:pPr algn="ctr"/>
-                      <a:r>
-                        <a:rPr sz="1050" b="0" i="0">
-                          <a:solidFill>
-                            <a:srgbClr val="262626"/>
-                          </a:solidFill>
-                          <a:latin typeface="Garamond"/>
-                          <a:cs typeface="Garamond"/>
-                        </a:rPr>
-                        <a:t>$117</a:t>
-                      </a:r>
-                    </a:p>
-                  </a:txBody>
-                  <a:tcPr anchor="ctr">
-                    <a:solidFill>
-                      <a:srgbClr val="FFFFFF"/>
-                    </a:solidFill>
-                  </a:tcPr>
-                </a:tc>
-              </a:tr>
-              <a:tr h="228600">
-                <a:tc>
-                  <a:txBody>
-                    <a:bodyPr/>
-                    <a:lstStyle/>
-                    <a:p>
-                      <a:pPr algn="ctr"/>
-                      <a:r>
-                        <a:rPr sz="1050" b="1" i="0">
-                          <a:solidFill>
-                            <a:srgbClr val="FFFFFF"/>
-                          </a:solidFill>
-                          <a:latin typeface="Garamond"/>
-                          <a:cs typeface="Garamond"/>
-                        </a:rPr>
-                        <a:t>11.0%</a:t>
-                      </a:r>
-                    </a:p>
-                  </a:txBody>
-                  <a:tcPr anchor="ctr">
-                    <a:solidFill>
-                      <a:srgbClr val="1F2A44"/>
-                    </a:solidFill>
-                  </a:tcPr>
-                </a:tc>
-                <a:tc>
-                  <a:txBody>
-                    <a:bodyPr/>
-                    <a:lstStyle/>
-                    <a:p>
-                      <a:pPr algn="ctr"/>
-                      <a:r>
-                        <a:rPr sz="1050" b="0" i="0">
-                          <a:solidFill>
-                            <a:srgbClr val="262626"/>
-                          </a:solidFill>
-                          <a:latin typeface="Garamond"/>
-                          <a:cs typeface="Garamond"/>
-                        </a:rPr>
-                        <a:t>$97</a:t>
-                      </a:r>
-                    </a:p>
-                  </a:txBody>
-                  <a:tcPr anchor="ctr">
-                    <a:solidFill>
-                      <a:srgbClr val="F0F1F3"/>
-                    </a:solidFill>
-                  </a:tcPr>
-                </a:tc>
-                <a:tc>
-                  <a:txBody>
-                    <a:bodyPr/>
-                    <a:lstStyle/>
-                    <a:p>
-                      <a:pPr algn="ctr"/>
-                      <a:r>
-                        <a:rPr sz="1050" b="0" i="0">
-                          <a:solidFill>
-                            <a:srgbClr val="262626"/>
-                          </a:solidFill>
-                          <a:latin typeface="Garamond"/>
-                          <a:cs typeface="Garamond"/>
-                        </a:rPr>
-                        <a:t>$100</a:t>
-                      </a:r>
-                    </a:p>
-                  </a:txBody>
-                  <a:tcPr anchor="ctr">
-                    <a:solidFill>
-                      <a:srgbClr val="F0F1F3"/>
-                    </a:solidFill>
-                  </a:tcPr>
-                </a:tc>
-                <a:tc>
-                  <a:txBody>
-                    <a:bodyPr/>
-                    <a:lstStyle/>
-                    <a:p>
-                      <a:pPr algn="ctr"/>
-                      <a:r>
-                        <a:rPr sz="1050" b="0" i="0">
-                          <a:solidFill>
-                            <a:srgbClr val="262626"/>
-                          </a:solidFill>
-                          <a:latin typeface="Garamond"/>
-                          <a:cs typeface="Garamond"/>
-                        </a:rPr>
-                        <a:t>$103</a:t>
-                      </a:r>
-                    </a:p>
-                  </a:txBody>
-                  <a:tcPr anchor="ctr">
-                    <a:solidFill>
-                      <a:srgbClr val="F0F1F3"/>
-                    </a:solidFill>
-                  </a:tcPr>
-                </a:tc>
-                <a:tc>
-                  <a:txBody>
-                    <a:bodyPr/>
-                    <a:lstStyle/>
-                    <a:p>
-                      <a:pPr algn="ctr"/>
-                      <a:r>
-                        <a:rPr sz="1050" b="0" i="0">
-                          <a:solidFill>
-                            <a:srgbClr val="262626"/>
-                          </a:solidFill>
-                          <a:latin typeface="Garamond"/>
-                          <a:cs typeface="Garamond"/>
-                        </a:rPr>
-                        <a:t>$105</a:t>
-                      </a:r>
-                    </a:p>
-                  </a:txBody>
-                  <a:tcPr anchor="ctr">
-                    <a:solidFill>
-                      <a:srgbClr val="F0F1F3"/>
-                    </a:solidFill>
-                  </a:tcPr>
-                </a:tc>
-                <a:tc>
-                  <a:txBody>
-                    <a:bodyPr/>
-                    <a:lstStyle/>
-                    <a:p>
-                      <a:pPr algn="ctr"/>
-                      <a:r>
-                        <a:rPr sz="1050" b="0" i="0">
-                          <a:solidFill>
-                            <a:srgbClr val="262626"/>
-                          </a:solidFill>
-                          <a:latin typeface="Garamond"/>
-                          <a:cs typeface="Garamond"/>
-                        </a:rPr>
-                        <a:t>$110</a:t>
-                      </a:r>
-                    </a:p>
-                  </a:txBody>
-                  <a:tcPr anchor="ctr">
-                    <a:solidFill>
-                      <a:srgbClr val="F0F1F3"/>
-                    </a:solidFill>
-                  </a:tcPr>
-                </a:tc>
-              </a:tr>
-              <a:tr h="228600">
-                <a:tc>
-                  <a:txBody>
-                    <a:bodyPr/>
-                    <a:lstStyle/>
-                    <a:p>
-                      <a:pPr algn="ctr"/>
-                      <a:r>
-                        <a:rPr sz="1050" b="1" i="0">
-                          <a:solidFill>
-                            <a:srgbClr val="FFFFFF"/>
-                          </a:solidFill>
-                          <a:latin typeface="Garamond"/>
-                          <a:cs typeface="Garamond"/>
-                        </a:rPr>
-                        <a:t>11.5%</a:t>
-                      </a:r>
-                    </a:p>
-                  </a:txBody>
-                  <a:tcPr anchor="ctr">
-                    <a:solidFill>
-                      <a:srgbClr val="1F2A44"/>
-                    </a:solidFill>
-                  </a:tcPr>
-                </a:tc>
-                <a:tc>
-                  <a:txBody>
-                    <a:bodyPr/>
-                    <a:lstStyle/>
-                    <a:p>
-                      <a:pPr algn="ctr"/>
-                      <a:r>
-                        <a:rPr sz="1050" b="0" i="0">
-                          <a:solidFill>
-                            <a:srgbClr val="262626"/>
-                          </a:solidFill>
-                          <a:latin typeface="Garamond"/>
-                          <a:cs typeface="Garamond"/>
-                        </a:rPr>
-                        <a:t>$92</a:t>
-                      </a:r>
-                    </a:p>
-                  </a:txBody>
-                  <a:tcPr anchor="ctr">
-                    <a:solidFill>
-                      <a:srgbClr val="FFFFFF"/>
-                    </a:solidFill>
-                  </a:tcPr>
-                </a:tc>
-                <a:tc>
-                  <a:txBody>
-                    <a:bodyPr/>
-                    <a:lstStyle/>
-                    <a:p>
-                      <a:pPr algn="ctr"/>
-                      <a:r>
-                        <a:rPr sz="1050" b="0" i="0">
-                          <a:solidFill>
-                            <a:srgbClr val="262626"/>
-                          </a:solidFill>
-                          <a:latin typeface="Garamond"/>
-                          <a:cs typeface="Garamond"/>
-                        </a:rPr>
-                        <a:t>$95</a:t>
-                      </a:r>
-                    </a:p>
-                  </a:txBody>
-                  <a:tcPr anchor="ctr">
-                    <a:solidFill>
-                      <a:srgbClr val="FFFFFF"/>
-                    </a:solidFill>
-                  </a:tcPr>
-                </a:tc>
-                <a:tc>
-                  <a:txBody>
-                    <a:bodyPr/>
-                    <a:lstStyle/>
-                    <a:p>
-                      <a:pPr algn="ctr"/>
-                      <a:r>
-                        <a:rPr sz="1050" b="0" i="0">
-                          <a:solidFill>
-                            <a:srgbClr val="262626"/>
-                          </a:solidFill>
-                          <a:latin typeface="Garamond"/>
-                          <a:cs typeface="Garamond"/>
-                        </a:rPr>
-                        <a:t>$97</a:t>
-                      </a:r>
-                    </a:p>
-                  </a:txBody>
-                  <a:tcPr anchor="ctr">
-                    <a:solidFill>
-                      <a:srgbClr val="FFFFFF"/>
-                    </a:solidFill>
-                  </a:tcPr>
-                </a:tc>
-                <a:tc>
-                  <a:txBody>
-                    <a:bodyPr/>
-                    <a:lstStyle/>
-                    <a:p>
-                      <a:pPr algn="ctr"/>
-                      <a:r>
-                        <a:rPr sz="1050" b="0" i="0">
-                          <a:solidFill>
-                            <a:srgbClr val="262626"/>
-                          </a:solidFill>
-                          <a:latin typeface="Garamond"/>
-                          <a:cs typeface="Garamond"/>
-                        </a:rPr>
-                        <a:t>$99</a:t>
-                      </a:r>
-                    </a:p>
-                  </a:txBody>
-                  <a:tcPr anchor="ctr">
-                    <a:solidFill>
-                      <a:srgbClr val="FFFFFF"/>
-                    </a:solidFill>
-                  </a:tcPr>
-                </a:tc>
-                <a:tc>
-                  <a:txBody>
-                    <a:bodyPr/>
-                    <a:lstStyle/>
-                    <a:p>
-                      <a:pPr algn="ctr"/>
-                      <a:r>
-                        <a:rPr sz="1050" b="0" i="0">
-                          <a:solidFill>
-                            <a:srgbClr val="262626"/>
-                          </a:solidFill>
-                          <a:latin typeface="Garamond"/>
-                          <a:cs typeface="Garamond"/>
-                        </a:rPr>
-                        <a:t>$103</a:t>
-                      </a:r>
-                    </a:p>
-                  </a:txBody>
-                  <a:tcPr anchor="ctr">
-                    <a:solidFill>
-                      <a:srgbClr val="FFFFFF"/>
-                    </a:solidFill>
-                  </a:tcPr>
-                </a:tc>
-              </a:tr>
-            </a:tbl>
-          </a:graphicData>
-        </a:graphic>
-      </p:graphicFrame>
     </p:spTree>
   </p:cSld>
   <p:clrMapOvr>
@@ -22624,7 +22940,7 @@
                 <a:latin typeface="Garamond"/>
                 <a:cs typeface="Garamond"/>
               </a:rPr>
-              <a:t>Comparable Companies</a:t>
+              <a:t>DCF Valuation</a:t>
             </a:r>
           </a:p>
         </p:txBody>
@@ -22668,7 +22984,7 @@
                 <a:latin typeface="Garamond"/>
                 <a:cs typeface="Garamond"/>
               </a:rPr>
-              <a:t>PitchBook pubcomps are the current tape; Alo still has no EV/EBITDA</a:t>
+              <a:t>Base-case unlevered DCF (Scenarios col G) — Gordon growth &amp; exit-multiple terminal value reconcile to $134</a:t>
             </a:r>
           </a:p>
         </p:txBody>
@@ -22756,7 +23072,7 @@
                 <a:latin typeface="Garamond"/>
                 <a:cs typeface="Garamond"/>
               </a:rPr>
-              <a:t>Source: PitchBook Comps Set 04-Sep-2026 (EV/EBITDA = daily EV / TTM EBITDA); Alo ask $10bn / Forbes ~$2bn</a:t>
+              <a:t>Source: LULU_DCF_Valuation_Model.xlsx → Scenarios col G + DCF tab; bear/bull scenarios in appendix</a:t>
             </a:r>
           </a:p>
         </p:txBody>
@@ -22805,1143 +23121,16 @@
           </a:p>
         </p:txBody>
       </p:sp>
-      <p:graphicFrame>
-        <p:nvGraphicFramePr>
-          <p:cNvPr id="8" name="Table 7"/>
-          <p:cNvGraphicFramePr>
-            <a:graphicFrameLocks noGrp="1"/>
-          </p:cNvGraphicFramePr>
-          <p:nvPr/>
-        </p:nvGraphicFramePr>
-        <p:xfrm>
-          <a:off x="457200" y="1097280"/>
-          <a:ext cx="11292836" cy="3566160"/>
-        </p:xfrm>
-        <a:graphic>
-          <a:graphicData uri="http://schemas.openxmlformats.org/drawingml/2006/table">
-            <a:tbl>
-              <a:tblPr firstRow="1" bandRow="1">
-                <a:tableStyleId>{5C22544A-7EE6-4342-B048-85BDC9FD1C3A}</a:tableStyleId>
-              </a:tblPr>
-              <a:tblGrid>
-                <a:gridCol w="3108960"/>
-                <a:gridCol w="2045969"/>
-                <a:gridCol w="2045969"/>
-                <a:gridCol w="2045969"/>
-                <a:gridCol w="2045969"/>
-              </a:tblGrid>
-              <a:tr h="396240">
-                <a:tc>
-                  <a:txBody>
-                    <a:bodyPr/>
-                    <a:lstStyle/>
-                    <a:p>
-                      <a:pPr algn="l"/>
-                      <a:r>
-                        <a:rPr sz="1100" b="1" i="0">
-                          <a:solidFill>
-                            <a:srgbClr val="FFFFFF"/>
-                          </a:solidFill>
-                          <a:latin typeface="Garamond"/>
-                          <a:cs typeface="Garamond"/>
-                        </a:rPr>
-                        <a:t>Company</a:t>
-                      </a:r>
-                    </a:p>
-                  </a:txBody>
-                  <a:tcPr anchor="ctr">
-                    <a:solidFill>
-                      <a:srgbClr val="1F2A44"/>
-                    </a:solidFill>
-                  </a:tcPr>
-                </a:tc>
-                <a:tc>
-                  <a:txBody>
-                    <a:bodyPr/>
-                    <a:lstStyle/>
-                    <a:p>
-                      <a:pPr algn="r"/>
-                      <a:r>
-                        <a:rPr sz="1100" b="1" i="0">
-                          <a:solidFill>
-                            <a:srgbClr val="FFFFFF"/>
-                          </a:solidFill>
-                          <a:latin typeface="Garamond"/>
-                          <a:cs typeface="Garamond"/>
-                        </a:rPr>
-                        <a:t>EV/EBITDA</a:t>
-                      </a:r>
-                    </a:p>
-                  </a:txBody>
-                  <a:tcPr anchor="ctr">
-                    <a:solidFill>
-                      <a:srgbClr val="1F2A44"/>
-                    </a:solidFill>
-                  </a:tcPr>
-                </a:tc>
-                <a:tc>
-                  <a:txBody>
-                    <a:bodyPr/>
-                    <a:lstStyle/>
-                    <a:p>
-                      <a:pPr algn="r"/>
-                      <a:r>
-                        <a:rPr sz="1100" b="1" i="0">
-                          <a:solidFill>
-                            <a:srgbClr val="FFFFFF"/>
-                          </a:solidFill>
-                          <a:latin typeface="Garamond"/>
-                          <a:cs typeface="Garamond"/>
-                        </a:rPr>
-                        <a:t>P/E</a:t>
-                      </a:r>
-                    </a:p>
-                  </a:txBody>
-                  <a:tcPr anchor="ctr">
-                    <a:solidFill>
-                      <a:srgbClr val="1F2A44"/>
-                    </a:solidFill>
-                  </a:tcPr>
-                </a:tc>
-                <a:tc>
-                  <a:txBody>
-                    <a:bodyPr/>
-                    <a:lstStyle/>
-                    <a:p>
-                      <a:pPr algn="r"/>
-                      <a:r>
-                        <a:rPr sz="1100" b="1" i="0">
-                          <a:solidFill>
-                            <a:srgbClr val="FFFFFF"/>
-                          </a:solidFill>
-                          <a:latin typeface="Garamond"/>
-                          <a:cs typeface="Garamond"/>
-                        </a:rPr>
-                        <a:t>EV ($000)</a:t>
-                      </a:r>
-                    </a:p>
-                  </a:txBody>
-                  <a:tcPr anchor="ctr">
-                    <a:solidFill>
-                      <a:srgbClr val="1F2A44"/>
-                    </a:solidFill>
-                  </a:tcPr>
-                </a:tc>
-                <a:tc>
-                  <a:txBody>
-                    <a:bodyPr/>
-                    <a:lstStyle/>
-                    <a:p>
-                      <a:pPr algn="r"/>
-                      <a:r>
-                        <a:rPr sz="1100" b="1" i="0">
-                          <a:solidFill>
-                            <a:srgbClr val="FFFFFF"/>
-                          </a:solidFill>
-                          <a:latin typeface="Garamond"/>
-                          <a:cs typeface="Garamond"/>
-                        </a:rPr>
-                        <a:t>EBITDA ($000)</a:t>
-                      </a:r>
-                    </a:p>
-                  </a:txBody>
-                  <a:tcPr anchor="ctr">
-                    <a:solidFill>
-                      <a:srgbClr val="1F2A44"/>
-                    </a:solidFill>
-                  </a:tcPr>
-                </a:tc>
-              </a:tr>
-              <a:tr h="396240">
-                <a:tc>
-                  <a:txBody>
-                    <a:bodyPr/>
-                    <a:lstStyle/>
-                    <a:p>
-                      <a:pPr algn="l"/>
-                      <a:r>
-                        <a:rPr sz="1050" b="1" i="0">
-                          <a:solidFill>
-                            <a:srgbClr val="1F2A44"/>
-                          </a:solidFill>
-                          <a:latin typeface="Garamond"/>
-                          <a:cs typeface="Garamond"/>
-                        </a:rPr>
-                        <a:t>lululemon (LULU)</a:t>
-                      </a:r>
-                    </a:p>
-                  </a:txBody>
-                  <a:tcPr anchor="ctr" marT="12700" marB="12700">
-                    <a:solidFill>
-                      <a:srgbClr val="FFFFFF"/>
-                    </a:solidFill>
-                  </a:tcPr>
-                </a:tc>
-                <a:tc>
-                  <a:txBody>
-                    <a:bodyPr/>
-                    <a:lstStyle/>
-                    <a:p>
-                      <a:pPr algn="r"/>
-                      <a:r>
-                        <a:rPr sz="1050" b="1" i="0">
-                          <a:solidFill>
-                            <a:srgbClr val="1F2A44"/>
-                          </a:solidFill>
-                          <a:latin typeface="Garamond"/>
-                          <a:cs typeface="Garamond"/>
-                        </a:rPr>
-                        <a:t>4.7x</a:t>
-                      </a:r>
-                    </a:p>
-                  </a:txBody>
-                  <a:tcPr anchor="ctr" marT="12700" marB="12700">
-                    <a:solidFill>
-                      <a:srgbClr val="FFFFFF"/>
-                    </a:solidFill>
-                  </a:tcPr>
-                </a:tc>
-                <a:tc>
-                  <a:txBody>
-                    <a:bodyPr/>
-                    <a:lstStyle/>
-                    <a:p>
-                      <a:pPr algn="r"/>
-                      <a:r>
-                        <a:rPr sz="1050" b="1" i="0">
-                          <a:solidFill>
-                            <a:srgbClr val="1F2A44"/>
-                          </a:solidFill>
-                          <a:latin typeface="Garamond"/>
-                          <a:cs typeface="Garamond"/>
-                        </a:rPr>
-                        <a:t>8.3x</a:t>
-                      </a:r>
-                    </a:p>
-                  </a:txBody>
-                  <a:tcPr anchor="ctr" marT="12700" marB="12700">
-                    <a:solidFill>
-                      <a:srgbClr val="FFFFFF"/>
-                    </a:solidFill>
-                  </a:tcPr>
-                </a:tc>
-                <a:tc>
-                  <a:txBody>
-                    <a:bodyPr/>
-                    <a:lstStyle/>
-                    <a:p>
-                      <a:pPr algn="r"/>
-                      <a:r>
-                        <a:rPr sz="1050" b="1" i="0">
-                          <a:solidFill>
-                            <a:srgbClr val="1F2A44"/>
-                          </a:solidFill>
-                          <a:latin typeface="Garamond"/>
-                          <a:cs typeface="Garamond"/>
-                        </a:rPr>
-                        <a:t>11,890,440</a:t>
-                      </a:r>
-                    </a:p>
-                  </a:txBody>
-                  <a:tcPr anchor="ctr" marT="12700" marB="12700">
-                    <a:solidFill>
-                      <a:srgbClr val="FFFFFF"/>
-                    </a:solidFill>
-                  </a:tcPr>
-                </a:tc>
-                <a:tc>
-                  <a:txBody>
-                    <a:bodyPr/>
-                    <a:lstStyle/>
-                    <a:p>
-                      <a:pPr algn="r"/>
-                      <a:r>
-                        <a:rPr sz="1050" b="1" i="0">
-                          <a:solidFill>
-                            <a:srgbClr val="1F2A44"/>
-                          </a:solidFill>
-                          <a:latin typeface="Garamond"/>
-                          <a:cs typeface="Garamond"/>
-                        </a:rPr>
-                        <a:t>2,548,084</a:t>
-                      </a:r>
-                    </a:p>
-                  </a:txBody>
-                  <a:tcPr anchor="ctr" marT="12700" marB="12700">
-                    <a:solidFill>
-                      <a:srgbClr val="FFFFFF"/>
-                    </a:solidFill>
-                  </a:tcPr>
-                </a:tc>
-              </a:tr>
-              <a:tr h="396240">
-                <a:tc>
-                  <a:txBody>
-                    <a:bodyPr/>
-                    <a:lstStyle/>
-                    <a:p>
-                      <a:pPr algn="l"/>
-                      <a:r>
-                        <a:rPr sz="1050" b="0" i="0">
-                          <a:solidFill>
-                            <a:srgbClr val="262626"/>
-                          </a:solidFill>
-                          <a:latin typeface="Garamond"/>
-                          <a:cs typeface="Garamond"/>
-                        </a:rPr>
-                        <a:t>Nike (NKE)</a:t>
-                      </a:r>
-                    </a:p>
-                  </a:txBody>
-                  <a:tcPr anchor="ctr" marT="12700" marB="12700">
-                    <a:solidFill>
-                      <a:srgbClr val="F0F1F3"/>
-                    </a:solidFill>
-                  </a:tcPr>
-                </a:tc>
-                <a:tc>
-                  <a:txBody>
-                    <a:bodyPr/>
-                    <a:lstStyle/>
-                    <a:p>
-                      <a:pPr algn="r"/>
-                      <a:r>
-                        <a:rPr sz="1050" b="0" i="0">
-                          <a:solidFill>
-                            <a:srgbClr val="262626"/>
-                          </a:solidFill>
-                          <a:latin typeface="Garamond"/>
-                          <a:cs typeface="Garamond"/>
-                        </a:rPr>
-                        <a:t>12.7x</a:t>
-                      </a:r>
-                    </a:p>
-                  </a:txBody>
-                  <a:tcPr anchor="ctr" marT="12700" marB="12700">
-                    <a:solidFill>
-                      <a:srgbClr val="F0F1F3"/>
-                    </a:solidFill>
-                  </a:tcPr>
-                </a:tc>
-                <a:tc>
-                  <a:txBody>
-                    <a:bodyPr/>
-                    <a:lstStyle/>
-                    <a:p>
-                      <a:pPr algn="r"/>
-                      <a:r>
-                        <a:rPr sz="1050" b="0" i="0">
-                          <a:solidFill>
-                            <a:srgbClr val="262626"/>
-                          </a:solidFill>
-                          <a:latin typeface="Garamond"/>
-                          <a:cs typeface="Garamond"/>
-                        </a:rPr>
-                        <a:t>18.3x</a:t>
-                      </a:r>
-                    </a:p>
-                  </a:txBody>
-                  <a:tcPr anchor="ctr" marT="12700" marB="12700">
-                    <a:solidFill>
-                      <a:srgbClr val="F0F1F3"/>
-                    </a:solidFill>
-                  </a:tcPr>
-                </a:tc>
-                <a:tc>
-                  <a:txBody>
-                    <a:bodyPr/>
-                    <a:lstStyle/>
-                    <a:p>
-                      <a:pPr algn="r"/>
-                      <a:r>
-                        <a:rPr sz="1050" b="0" i="0">
-                          <a:solidFill>
-                            <a:srgbClr val="262626"/>
-                          </a:solidFill>
-                          <a:latin typeface="Garamond"/>
-                          <a:cs typeface="Garamond"/>
-                        </a:rPr>
-                        <a:t>58,972,350</a:t>
-                      </a:r>
-                    </a:p>
-                  </a:txBody>
-                  <a:tcPr anchor="ctr" marT="12700" marB="12700">
-                    <a:solidFill>
-                      <a:srgbClr val="F0F1F3"/>
-                    </a:solidFill>
-                  </a:tcPr>
-                </a:tc>
-                <a:tc>
-                  <a:txBody>
-                    <a:bodyPr/>
-                    <a:lstStyle/>
-                    <a:p>
-                      <a:pPr algn="r"/>
-                      <a:r>
-                        <a:rPr sz="1050" b="0" i="0">
-                          <a:solidFill>
-                            <a:srgbClr val="262626"/>
-                          </a:solidFill>
-                          <a:latin typeface="Garamond"/>
-                          <a:cs typeface="Garamond"/>
-                        </a:rPr>
-                        <a:t>4,647,000</a:t>
-                      </a:r>
-                    </a:p>
-                  </a:txBody>
-                  <a:tcPr anchor="ctr" marT="12700" marB="12700">
-                    <a:solidFill>
-                      <a:srgbClr val="F0F1F3"/>
-                    </a:solidFill>
-                  </a:tcPr>
-                </a:tc>
-              </a:tr>
-              <a:tr h="396240">
-                <a:tc>
-                  <a:txBody>
-                    <a:bodyPr/>
-                    <a:lstStyle/>
-                    <a:p>
-                      <a:pPr algn="l"/>
-                      <a:r>
-                        <a:rPr sz="1050" b="0" i="0">
-                          <a:solidFill>
-                            <a:srgbClr val="262626"/>
-                          </a:solidFill>
-                          <a:latin typeface="Garamond"/>
-                          <a:cs typeface="Garamond"/>
-                        </a:rPr>
-                        <a:t>adidas (ADS)</a:t>
-                      </a:r>
-                    </a:p>
-                  </a:txBody>
-                  <a:tcPr anchor="ctr" marT="12700" marB="12700">
-                    <a:solidFill>
-                      <a:srgbClr val="FFFFFF"/>
-                    </a:solidFill>
-                  </a:tcPr>
-                </a:tc>
-                <a:tc>
-                  <a:txBody>
-                    <a:bodyPr/>
-                    <a:lstStyle/>
-                    <a:p>
-                      <a:pPr algn="r"/>
-                      <a:r>
-                        <a:rPr sz="1050" b="0" i="0">
-                          <a:solidFill>
-                            <a:srgbClr val="262626"/>
-                          </a:solidFill>
-                          <a:latin typeface="Garamond"/>
-                          <a:cs typeface="Garamond"/>
-                        </a:rPr>
-                        <a:t>9.2x</a:t>
-                      </a:r>
-                    </a:p>
-                  </a:txBody>
-                  <a:tcPr anchor="ctr" marT="12700" marB="12700">
-                    <a:solidFill>
-                      <a:srgbClr val="FFFFFF"/>
-                    </a:solidFill>
-                  </a:tcPr>
-                </a:tc>
-                <a:tc>
-                  <a:txBody>
-                    <a:bodyPr/>
-                    <a:lstStyle/>
-                    <a:p>
-                      <a:pPr algn="r"/>
-                      <a:r>
-                        <a:rPr sz="1050" b="0" i="0">
-                          <a:solidFill>
-                            <a:srgbClr val="262626"/>
-                          </a:solidFill>
-                          <a:latin typeface="Garamond"/>
-                          <a:cs typeface="Garamond"/>
-                        </a:rPr>
-                        <a:t>19.1x</a:t>
-                      </a:r>
-                    </a:p>
-                  </a:txBody>
-                  <a:tcPr anchor="ctr" marT="12700" marB="12700">
-                    <a:solidFill>
-                      <a:srgbClr val="FFFFFF"/>
-                    </a:solidFill>
-                  </a:tcPr>
-                </a:tc>
-                <a:tc>
-                  <a:txBody>
-                    <a:bodyPr/>
-                    <a:lstStyle/>
-                    <a:p>
-                      <a:pPr algn="r"/>
-                      <a:r>
-                        <a:rPr sz="1050" b="0" i="0">
-                          <a:solidFill>
-                            <a:srgbClr val="262626"/>
-                          </a:solidFill>
-                          <a:latin typeface="Garamond"/>
-                          <a:cs typeface="Garamond"/>
-                        </a:rPr>
-                        <a:t>35,661,944</a:t>
-                      </a:r>
-                    </a:p>
-                  </a:txBody>
-                  <a:tcPr anchor="ctr" marT="12700" marB="12700">
-                    <a:solidFill>
-                      <a:srgbClr val="FFFFFF"/>
-                    </a:solidFill>
-                  </a:tcPr>
-                </a:tc>
-                <a:tc>
-                  <a:txBody>
-                    <a:bodyPr/>
-                    <a:lstStyle/>
-                    <a:p>
-                      <a:pPr algn="r"/>
-                      <a:r>
-                        <a:rPr sz="1050" b="0" i="0">
-                          <a:solidFill>
-                            <a:srgbClr val="262626"/>
-                          </a:solidFill>
-                          <a:latin typeface="Garamond"/>
-                          <a:cs typeface="Garamond"/>
-                        </a:rPr>
-                        <a:t>3,857,684</a:t>
-                      </a:r>
-                    </a:p>
-                  </a:txBody>
-                  <a:tcPr anchor="ctr" marT="12700" marB="12700">
-                    <a:solidFill>
-                      <a:srgbClr val="FFFFFF"/>
-                    </a:solidFill>
-                  </a:tcPr>
-                </a:tc>
-              </a:tr>
-              <a:tr h="396240">
-                <a:tc>
-                  <a:txBody>
-                    <a:bodyPr/>
-                    <a:lstStyle/>
-                    <a:p>
-                      <a:pPr algn="l"/>
-                      <a:r>
-                        <a:rPr sz="1050" b="0" i="0">
-                          <a:solidFill>
-                            <a:srgbClr val="262626"/>
-                          </a:solidFill>
-                          <a:latin typeface="Garamond"/>
-                          <a:cs typeface="Garamond"/>
-                        </a:rPr>
-                        <a:t>Deckers (DECK)</a:t>
-                      </a:r>
-                    </a:p>
-                  </a:txBody>
-                  <a:tcPr anchor="ctr" marT="12700" marB="12700">
-                    <a:solidFill>
-                      <a:srgbClr val="F0F1F3"/>
-                    </a:solidFill>
-                  </a:tcPr>
-                </a:tc>
-                <a:tc>
-                  <a:txBody>
-                    <a:bodyPr/>
-                    <a:lstStyle/>
-                    <a:p>
-                      <a:pPr algn="r"/>
-                      <a:r>
-                        <a:rPr sz="1050" b="0" i="0">
-                          <a:solidFill>
-                            <a:srgbClr val="262626"/>
-                          </a:solidFill>
-                          <a:latin typeface="Garamond"/>
-                          <a:cs typeface="Garamond"/>
-                        </a:rPr>
-                        <a:t>7.9x</a:t>
-                      </a:r>
-                    </a:p>
-                  </a:txBody>
-                  <a:tcPr anchor="ctr" marT="12700" marB="12700">
-                    <a:solidFill>
-                      <a:srgbClr val="F0F1F3"/>
-                    </a:solidFill>
-                  </a:tcPr>
-                </a:tc>
-                <a:tc>
-                  <a:txBody>
-                    <a:bodyPr/>
-                    <a:lstStyle/>
-                    <a:p>
-                      <a:pPr algn="r"/>
-                      <a:r>
-                        <a:rPr sz="1050" b="0" i="0">
-                          <a:solidFill>
-                            <a:srgbClr val="262626"/>
-                          </a:solidFill>
-                          <a:latin typeface="Garamond"/>
-                          <a:cs typeface="Garamond"/>
-                        </a:rPr>
-                        <a:t>12.1x</a:t>
-                      </a:r>
-                    </a:p>
-                  </a:txBody>
-                  <a:tcPr anchor="ctr" marT="12700" marB="12700">
-                    <a:solidFill>
-                      <a:srgbClr val="F0F1F3"/>
-                    </a:solidFill>
-                  </a:tcPr>
-                </a:tc>
-                <a:tc>
-                  <a:txBody>
-                    <a:bodyPr/>
-                    <a:lstStyle/>
-                    <a:p>
-                      <a:pPr algn="r"/>
-                      <a:r>
-                        <a:rPr sz="1050" b="0" i="0">
-                          <a:solidFill>
-                            <a:srgbClr val="262626"/>
-                          </a:solidFill>
-                          <a:latin typeface="Garamond"/>
-                          <a:cs typeface="Garamond"/>
-                        </a:rPr>
-                        <a:t>10,555,510</a:t>
-                      </a:r>
-                    </a:p>
-                  </a:txBody>
-                  <a:tcPr anchor="ctr" marT="12700" marB="12700">
-                    <a:solidFill>
-                      <a:srgbClr val="F0F1F3"/>
-                    </a:solidFill>
-                  </a:tcPr>
-                </a:tc>
-                <a:tc>
-                  <a:txBody>
-                    <a:bodyPr/>
-                    <a:lstStyle/>
-                    <a:p>
-                      <a:pPr algn="r"/>
-                      <a:r>
-                        <a:rPr sz="1050" b="0" i="0">
-                          <a:solidFill>
-                            <a:srgbClr val="262626"/>
-                          </a:solidFill>
-                          <a:latin typeface="Garamond"/>
-                          <a:cs typeface="Garamond"/>
-                        </a:rPr>
-                        <a:t>1,329,439</a:t>
-                      </a:r>
-                    </a:p>
-                  </a:txBody>
-                  <a:tcPr anchor="ctr" marT="12700" marB="12700">
-                    <a:solidFill>
-                      <a:srgbClr val="F0F1F3"/>
-                    </a:solidFill>
-                  </a:tcPr>
-                </a:tc>
-              </a:tr>
-              <a:tr h="396240">
-                <a:tc>
-                  <a:txBody>
-                    <a:bodyPr/>
-                    <a:lstStyle/>
-                    <a:p>
-                      <a:pPr algn="l"/>
-                      <a:r>
-                        <a:rPr sz="1050" b="0" i="0">
-                          <a:solidFill>
-                            <a:srgbClr val="262626"/>
-                          </a:solidFill>
-                          <a:latin typeface="Garamond"/>
-                          <a:cs typeface="Garamond"/>
-                        </a:rPr>
-                        <a:t>Crocs (CROX)</a:t>
-                      </a:r>
-                    </a:p>
-                  </a:txBody>
-                  <a:tcPr anchor="ctr" marT="12700" marB="12700">
-                    <a:solidFill>
-                      <a:srgbClr val="FFFFFF"/>
-                    </a:solidFill>
-                  </a:tcPr>
-                </a:tc>
-                <a:tc>
-                  <a:txBody>
-                    <a:bodyPr/>
-                    <a:lstStyle/>
-                    <a:p>
-                      <a:pPr algn="r"/>
-                      <a:r>
-                        <a:rPr sz="1050" b="0" i="0">
-                          <a:solidFill>
-                            <a:srgbClr val="262626"/>
-                          </a:solidFill>
-                          <a:latin typeface="Garamond"/>
-                          <a:cs typeface="Garamond"/>
-                        </a:rPr>
-                        <a:t>7.8x</a:t>
-                      </a:r>
-                    </a:p>
-                  </a:txBody>
-                  <a:tcPr anchor="ctr" marT="12700" marB="12700">
-                    <a:solidFill>
-                      <a:srgbClr val="FFFFFF"/>
-                    </a:solidFill>
-                  </a:tcPr>
-                </a:tc>
-                <a:tc>
-                  <a:txBody>
-                    <a:bodyPr/>
-                    <a:lstStyle/>
-                    <a:p>
-                      <a:pPr algn="r"/>
-                      <a:r>
-                        <a:rPr sz="1050" b="0" i="0">
-                          <a:solidFill>
-                            <a:srgbClr val="262626"/>
-                          </a:solidFill>
-                          <a:latin typeface="Garamond"/>
-                          <a:cs typeface="Garamond"/>
-                        </a:rPr>
-                        <a:t>10.3x</a:t>
-                      </a:r>
-                    </a:p>
-                  </a:txBody>
-                  <a:tcPr anchor="ctr" marT="12700" marB="12700">
-                    <a:solidFill>
-                      <a:srgbClr val="FFFFFF"/>
-                    </a:solidFill>
-                  </a:tcPr>
-                </a:tc>
-                <a:tc>
-                  <a:txBody>
-                    <a:bodyPr/>
-                    <a:lstStyle/>
-                    <a:p>
-                      <a:pPr algn="r"/>
-                      <a:r>
-                        <a:rPr sz="1050" b="0" i="0">
-                          <a:solidFill>
-                            <a:srgbClr val="262626"/>
-                          </a:solidFill>
-                          <a:latin typeface="Garamond"/>
-                          <a:cs typeface="Garamond"/>
-                        </a:rPr>
-                        <a:t>7,153,911</a:t>
-                      </a:r>
-                    </a:p>
-                  </a:txBody>
-                  <a:tcPr anchor="ctr" marT="12700" marB="12700">
-                    <a:solidFill>
-                      <a:srgbClr val="FFFFFF"/>
-                    </a:solidFill>
-                  </a:tcPr>
-                </a:tc>
-                <a:tc>
-                  <a:txBody>
-                    <a:bodyPr/>
-                    <a:lstStyle/>
-                    <a:p>
-                      <a:pPr algn="r"/>
-                      <a:r>
-                        <a:rPr sz="1050" b="0" i="0">
-                          <a:solidFill>
-                            <a:srgbClr val="262626"/>
-                          </a:solidFill>
-                          <a:latin typeface="Garamond"/>
-                          <a:cs typeface="Garamond"/>
-                        </a:rPr>
-                        <a:t>922,278</a:t>
-                      </a:r>
-                    </a:p>
-                  </a:txBody>
-                  <a:tcPr anchor="ctr" marT="12700" marB="12700">
-                    <a:solidFill>
-                      <a:srgbClr val="FFFFFF"/>
-                    </a:solidFill>
-                  </a:tcPr>
-                </a:tc>
-              </a:tr>
-              <a:tr h="396240">
-                <a:tc>
-                  <a:txBody>
-                    <a:bodyPr/>
-                    <a:lstStyle/>
-                    <a:p>
-                      <a:pPr algn="l"/>
-                      <a:r>
-                        <a:rPr sz="1050" b="0" i="0">
-                          <a:solidFill>
-                            <a:srgbClr val="262626"/>
-                          </a:solidFill>
-                          <a:latin typeface="Garamond"/>
-                          <a:cs typeface="Garamond"/>
-                        </a:rPr>
-                        <a:t>Levi Strauss (LEVI)</a:t>
-                      </a:r>
-                    </a:p>
-                  </a:txBody>
-                  <a:tcPr anchor="ctr" marT="12700" marB="12700">
-                    <a:solidFill>
-                      <a:srgbClr val="F0F1F3"/>
-                    </a:solidFill>
-                  </a:tcPr>
-                </a:tc>
-                <a:tc>
-                  <a:txBody>
-                    <a:bodyPr/>
-                    <a:lstStyle/>
-                    <a:p>
-                      <a:pPr algn="r"/>
-                      <a:r>
-                        <a:rPr sz="1050" b="0" i="0">
-                          <a:solidFill>
-                            <a:srgbClr val="262626"/>
-                          </a:solidFill>
-                          <a:latin typeface="Garamond"/>
-                          <a:cs typeface="Garamond"/>
-                        </a:rPr>
-                        <a:t>9.6x</a:t>
-                      </a:r>
-                    </a:p>
-                  </a:txBody>
-                  <a:tcPr anchor="ctr" marT="12700" marB="12700">
-                    <a:solidFill>
-                      <a:srgbClr val="F0F1F3"/>
-                    </a:solidFill>
-                  </a:tcPr>
-                </a:tc>
-                <a:tc>
-                  <a:txBody>
-                    <a:bodyPr/>
-                    <a:lstStyle/>
-                    <a:p>
-                      <a:pPr algn="r"/>
-                      <a:r>
-                        <a:rPr sz="1050" b="0" i="0">
-                          <a:solidFill>
-                            <a:srgbClr val="262626"/>
-                          </a:solidFill>
-                          <a:latin typeface="Garamond"/>
-                          <a:cs typeface="Garamond"/>
-                        </a:rPr>
-                        <a:t>15.0x</a:t>
-                      </a:r>
-                    </a:p>
-                  </a:txBody>
-                  <a:tcPr anchor="ctr" marT="12700" marB="12700">
-                    <a:solidFill>
-                      <a:srgbClr val="F0F1F3"/>
-                    </a:solidFill>
-                  </a:tcPr>
-                </a:tc>
-                <a:tc>
-                  <a:txBody>
-                    <a:bodyPr/>
-                    <a:lstStyle/>
-                    <a:p>
-                      <a:pPr algn="r"/>
-                      <a:r>
-                        <a:rPr sz="1050" b="0" i="0">
-                          <a:solidFill>
-                            <a:srgbClr val="262626"/>
-                          </a:solidFill>
-                          <a:latin typeface="Garamond"/>
-                          <a:cs typeface="Garamond"/>
-                        </a:rPr>
-                        <a:t>9,422,753</a:t>
-                      </a:r>
-                    </a:p>
-                  </a:txBody>
-                  <a:tcPr anchor="ctr" marT="12700" marB="12700">
-                    <a:solidFill>
-                      <a:srgbClr val="F0F1F3"/>
-                    </a:solidFill>
-                  </a:tcPr>
-                </a:tc>
-                <a:tc>
-                  <a:txBody>
-                    <a:bodyPr/>
-                    <a:lstStyle/>
-                    <a:p>
-                      <a:pPr algn="r"/>
-                      <a:r>
-                        <a:rPr sz="1050" b="0" i="0">
-                          <a:solidFill>
-                            <a:srgbClr val="262626"/>
-                          </a:solidFill>
-                          <a:latin typeface="Garamond"/>
-                          <a:cs typeface="Garamond"/>
-                        </a:rPr>
-                        <a:t>976,700</a:t>
-                      </a:r>
-                    </a:p>
-                  </a:txBody>
-                  <a:tcPr anchor="ctr" marT="12700" marB="12700">
-                    <a:solidFill>
-                      <a:srgbClr val="F0F1F3"/>
-                    </a:solidFill>
-                  </a:tcPr>
-                </a:tc>
-              </a:tr>
-              <a:tr h="396240">
-                <a:tc>
-                  <a:txBody>
-                    <a:bodyPr/>
-                    <a:lstStyle/>
-                    <a:p>
-                      <a:pPr algn="l"/>
-                      <a:r>
-                        <a:rPr sz="1050" b="0" i="0">
-                          <a:solidFill>
-                            <a:srgbClr val="262626"/>
-                          </a:solidFill>
-                          <a:latin typeface="Garamond"/>
-                          <a:cs typeface="Garamond"/>
-                        </a:rPr>
-                        <a:t>Kontoor (KTB)</a:t>
-                      </a:r>
-                    </a:p>
-                  </a:txBody>
-                  <a:tcPr anchor="ctr" marT="12700" marB="12700">
-                    <a:solidFill>
-                      <a:srgbClr val="FFFFFF"/>
-                    </a:solidFill>
-                  </a:tcPr>
-                </a:tc>
-                <a:tc>
-                  <a:txBody>
-                    <a:bodyPr/>
-                    <a:lstStyle/>
-                    <a:p>
-                      <a:pPr algn="r"/>
-                      <a:r>
-                        <a:rPr sz="1050" b="0" i="0">
-                          <a:solidFill>
-                            <a:srgbClr val="262626"/>
-                          </a:solidFill>
-                          <a:latin typeface="Garamond"/>
-                          <a:cs typeface="Garamond"/>
-                        </a:rPr>
-                        <a:t>12.9x</a:t>
-                      </a:r>
-                    </a:p>
-                  </a:txBody>
-                  <a:tcPr anchor="ctr" marT="12700" marB="12700">
-                    <a:solidFill>
-                      <a:srgbClr val="FFFFFF"/>
-                    </a:solidFill>
-                  </a:tcPr>
-                </a:tc>
-                <a:tc>
-                  <a:txBody>
-                    <a:bodyPr/>
-                    <a:lstStyle/>
-                    <a:p>
-                      <a:pPr algn="r"/>
-                      <a:r>
-                        <a:rPr sz="1050" b="0" i="0">
-                          <a:solidFill>
-                            <a:srgbClr val="262626"/>
-                          </a:solidFill>
-                          <a:latin typeface="Garamond"/>
-                          <a:cs typeface="Garamond"/>
-                        </a:rPr>
-                        <a:t>18.0x</a:t>
-                      </a:r>
-                    </a:p>
-                  </a:txBody>
-                  <a:tcPr anchor="ctr" marT="12700" marB="12700">
-                    <a:solidFill>
-                      <a:srgbClr val="FFFFFF"/>
-                    </a:solidFill>
-                  </a:tcPr>
-                </a:tc>
-                <a:tc>
-                  <a:txBody>
-                    <a:bodyPr/>
-                    <a:lstStyle/>
-                    <a:p>
-                      <a:pPr algn="r"/>
-                      <a:r>
-                        <a:rPr sz="1050" b="0" i="0">
-                          <a:solidFill>
-                            <a:srgbClr val="262626"/>
-                          </a:solidFill>
-                          <a:latin typeface="Garamond"/>
-                          <a:cs typeface="Garamond"/>
-                        </a:rPr>
-                        <a:t>5,236,269</a:t>
-                      </a:r>
-                    </a:p>
-                  </a:txBody>
-                  <a:tcPr anchor="ctr" marT="12700" marB="12700">
-                    <a:solidFill>
-                      <a:srgbClr val="FFFFFF"/>
-                    </a:solidFill>
-                  </a:tcPr>
-                </a:tc>
-                <a:tc>
-                  <a:txBody>
-                    <a:bodyPr/>
-                    <a:lstStyle/>
-                    <a:p>
-                      <a:pPr algn="r"/>
-                      <a:r>
-                        <a:rPr sz="1050" b="0" i="0">
-                          <a:solidFill>
-                            <a:srgbClr val="262626"/>
-                          </a:solidFill>
-                          <a:latin typeface="Garamond"/>
-                          <a:cs typeface="Garamond"/>
-                        </a:rPr>
-                        <a:t>407,521</a:t>
-                      </a:r>
-                    </a:p>
-                  </a:txBody>
-                  <a:tcPr anchor="ctr" marT="12700" marB="12700">
-                    <a:solidFill>
-                      <a:srgbClr val="FFFFFF"/>
-                    </a:solidFill>
-                  </a:tcPr>
-                </a:tc>
-              </a:tr>
-              <a:tr h="396240">
-                <a:tc>
-                  <a:txBody>
-                    <a:bodyPr/>
-                    <a:lstStyle/>
-                    <a:p>
-                      <a:pPr algn="l"/>
-                      <a:r>
-                        <a:rPr sz="1050" b="0" i="0">
-                          <a:solidFill>
-                            <a:srgbClr val="262626"/>
-                          </a:solidFill>
-                          <a:latin typeface="Garamond"/>
-                          <a:cs typeface="Garamond"/>
-                        </a:rPr>
-                        <a:t>Alo Yoga (private)</a:t>
-                      </a:r>
-                    </a:p>
-                  </a:txBody>
-                  <a:tcPr anchor="ctr" marT="12700" marB="12700">
-                    <a:solidFill>
-                      <a:srgbClr val="F0F1F3"/>
-                    </a:solidFill>
-                  </a:tcPr>
-                </a:tc>
-                <a:tc>
-                  <a:txBody>
-                    <a:bodyPr/>
-                    <a:lstStyle/>
-                    <a:p>
-                      <a:pPr algn="r"/>
-                      <a:r>
-                        <a:rPr sz="1050" b="0" i="0">
-                          <a:solidFill>
-                            <a:srgbClr val="262626"/>
-                          </a:solidFill>
-                          <a:latin typeface="Garamond"/>
-                          <a:cs typeface="Garamond"/>
-                        </a:rPr>
-                        <a:t>n.a.</a:t>
-                      </a:r>
-                    </a:p>
-                  </a:txBody>
-                  <a:tcPr anchor="ctr" marT="12700" marB="12700">
-                    <a:solidFill>
-                      <a:srgbClr val="F0F1F3"/>
-                    </a:solidFill>
-                  </a:tcPr>
-                </a:tc>
-                <a:tc>
-                  <a:txBody>
-                    <a:bodyPr/>
-                    <a:lstStyle/>
-                    <a:p>
-                      <a:pPr algn="r"/>
-                      <a:r>
-                        <a:rPr sz="1050" b="0" i="0">
-                          <a:solidFill>
-                            <a:srgbClr val="262626"/>
-                          </a:solidFill>
-                          <a:latin typeface="Garamond"/>
-                          <a:cs typeface="Garamond"/>
-                        </a:rPr>
-                        <a:t>n.m.</a:t>
-                      </a:r>
-                    </a:p>
-                  </a:txBody>
-                  <a:tcPr anchor="ctr" marT="12700" marB="12700">
-                    <a:solidFill>
-                      <a:srgbClr val="F0F1F3"/>
-                    </a:solidFill>
-                  </a:tcPr>
-                </a:tc>
-                <a:tc>
-                  <a:txBody>
-                    <a:bodyPr/>
-                    <a:lstStyle/>
-                    <a:p>
-                      <a:pPr algn="r"/>
-                      <a:r>
-                        <a:rPr sz="1050" b="0" i="0">
-                          <a:solidFill>
-                            <a:srgbClr val="262626"/>
-                          </a:solidFill>
-                          <a:latin typeface="Garamond"/>
-                          <a:cs typeface="Garamond"/>
-                        </a:rPr>
-                        <a:t>—</a:t>
-                      </a:r>
-                    </a:p>
-                  </a:txBody>
-                  <a:tcPr anchor="ctr" marT="12700" marB="12700">
-                    <a:solidFill>
-                      <a:srgbClr val="F0F1F3"/>
-                    </a:solidFill>
-                  </a:tcPr>
-                </a:tc>
-                <a:tc>
-                  <a:txBody>
-                    <a:bodyPr/>
-                    <a:lstStyle/>
-                    <a:p>
-                      <a:pPr algn="r"/>
-                      <a:r>
-                        <a:rPr sz="1050" b="0" i="0">
-                          <a:solidFill>
-                            <a:srgbClr val="262626"/>
-                          </a:solidFill>
-                          <a:latin typeface="Garamond"/>
-                          <a:cs typeface="Garamond"/>
-                        </a:rPr>
-                        <a:t>—</a:t>
-                      </a:r>
-                    </a:p>
-                  </a:txBody>
-                  <a:tcPr anchor="ctr" marT="12700" marB="12700">
-                    <a:solidFill>
-                      <a:srgbClr val="F0F1F3"/>
-                    </a:solidFill>
-                  </a:tcPr>
-                </a:tc>
-              </a:tr>
-            </a:tbl>
-          </a:graphicData>
-        </a:graphic>
-      </p:graphicFrame>
       <p:sp>
         <p:nvSpPr>
-          <p:cNvPr id="9" name="TextBox 8"/>
+          <p:cNvPr id="8" name="TextBox 7"/>
           <p:cNvSpPr txBox="1"/>
           <p:nvPr/>
         </p:nvSpPr>
         <p:spPr>
           <a:xfrm>
-            <a:off x="457200" y="4754880"/>
-            <a:ext cx="11292840" cy="1600200"/>
+            <a:off x="457200" y="1024128"/>
+            <a:ext cx="5669280" cy="256032"/>
           </a:xfrm>
           <a:prstGeom prst="rect">
             <a:avLst/>
@@ -23959,85 +23148,2254 @@
                 <a:spcPts val="0"/>
               </a:spcBef>
               <a:spcAft>
+                <a:spcPts val="0"/>
+              </a:spcAft>
+              <a:buNone/>
+            </a:pPr>
+            <a:r>
+              <a:rPr sz="1100" b="1" i="0">
+                <a:solidFill>
+                  <a:srgbClr val="990000"/>
+                </a:solidFill>
+                <a:latin typeface="Garamond"/>
+                <a:cs typeface="Garamond"/>
+              </a:rPr>
+              <a:t>BASE-CASE ASSUMPTIONS (SCENARIOS COL G)</a:t>
+            </a:r>
+          </a:p>
+        </p:txBody>
+      </p:sp>
+      <p:graphicFrame>
+        <p:nvGraphicFramePr>
+          <p:cNvPr id="9" name="Table 8"/>
+          <p:cNvGraphicFramePr>
+            <a:graphicFrameLocks noGrp="1"/>
+          </p:cNvGraphicFramePr>
+          <p:nvPr/>
+        </p:nvGraphicFramePr>
+        <p:xfrm>
+          <a:off x="457200" y="1261872"/>
+          <a:ext cx="5623560" cy="2606040"/>
+        </p:xfrm>
+        <a:graphic>
+          <a:graphicData uri="http://schemas.openxmlformats.org/drawingml/2006/table">
+            <a:tbl>
+              <a:tblPr firstRow="1" bandRow="1">
+                <a:tableStyleId>{5C22544A-7EE6-4342-B048-85BDC9FD1C3A}</a:tableStyleId>
+              </a:tblPr>
+              <a:tblGrid>
+                <a:gridCol w="3200400"/>
+                <a:gridCol w="2423160"/>
+              </a:tblGrid>
+              <a:tr h="236912">
+                <a:tc>
+                  <a:txBody>
+                    <a:bodyPr/>
+                    <a:lstStyle/>
+                    <a:p>
+                      <a:pPr algn="l"/>
+                      <a:r>
+                        <a:rPr sz="900" b="1" i="0">
+                          <a:solidFill>
+                            <a:srgbClr val="FFFFFF"/>
+                          </a:solidFill>
+                          <a:latin typeface="Garamond"/>
+                          <a:cs typeface="Garamond"/>
+                        </a:rPr>
+                        <a:t>Assumption</a:t>
+                      </a:r>
+                    </a:p>
+                  </a:txBody>
+                  <a:tcPr anchor="ctr">
+                    <a:solidFill>
+                      <a:srgbClr val="1F2A44"/>
+                    </a:solidFill>
+                  </a:tcPr>
+                </a:tc>
+                <a:tc>
+                  <a:txBody>
+                    <a:bodyPr/>
+                    <a:lstStyle/>
+                    <a:p>
+                      <a:pPr algn="r"/>
+                      <a:r>
+                        <a:rPr sz="900" b="1" i="0">
+                          <a:solidFill>
+                            <a:srgbClr val="FFFFFF"/>
+                          </a:solidFill>
+                          <a:latin typeface="Garamond"/>
+                          <a:cs typeface="Garamond"/>
+                        </a:rPr>
+                        <a:t>Value</a:t>
+                      </a:r>
+                    </a:p>
+                  </a:txBody>
+                  <a:tcPr anchor="ctr">
+                    <a:solidFill>
+                      <a:srgbClr val="1F2A44"/>
+                    </a:solidFill>
+                  </a:tcPr>
+                </a:tc>
+              </a:tr>
+              <a:tr h="236912">
+                <a:tc>
+                  <a:txBody>
+                    <a:bodyPr/>
+                    <a:lstStyle/>
+                    <a:p>
+                      <a:pPr algn="l"/>
+                      <a:r>
+                        <a:rPr sz="900" b="0" i="0">
+                          <a:solidFill>
+                            <a:srgbClr val="262626"/>
+                          </a:solidFill>
+                          <a:latin typeface="Garamond"/>
+                          <a:cs typeface="Garamond"/>
+                        </a:rPr>
+                        <a:t>FY2026 revenue growth</a:t>
+                      </a:r>
+                    </a:p>
+                  </a:txBody>
+                  <a:tcPr anchor="ctr" marT="12700" marB="12700">
+                    <a:solidFill>
+                      <a:srgbClr val="FFFFFF"/>
+                    </a:solidFill>
+                  </a:tcPr>
+                </a:tc>
+                <a:tc>
+                  <a:txBody>
+                    <a:bodyPr/>
+                    <a:lstStyle/>
+                    <a:p>
+                      <a:pPr algn="r"/>
+                      <a:r>
+                        <a:rPr sz="900" b="0" i="0">
+                          <a:solidFill>
+                            <a:srgbClr val="262626"/>
+                          </a:solidFill>
+                          <a:latin typeface="Garamond"/>
+                          <a:cs typeface="Garamond"/>
+                        </a:rPr>
+                        <a:t>-6.1%</a:t>
+                      </a:r>
+                    </a:p>
+                  </a:txBody>
+                  <a:tcPr anchor="ctr" marT="12700" marB="12700">
+                    <a:solidFill>
+                      <a:srgbClr val="FFFFFF"/>
+                    </a:solidFill>
+                  </a:tcPr>
+                </a:tc>
+              </a:tr>
+              <a:tr h="236912">
+                <a:tc>
+                  <a:txBody>
+                    <a:bodyPr/>
+                    <a:lstStyle/>
+                    <a:p>
+                      <a:pPr algn="l"/>
+                      <a:r>
+                        <a:rPr sz="900" b="0" i="0">
+                          <a:solidFill>
+                            <a:srgbClr val="262626"/>
+                          </a:solidFill>
+                          <a:latin typeface="Garamond"/>
+                          <a:cs typeface="Garamond"/>
+                        </a:rPr>
+                        <a:t>FY2027–30 revenue growth (avg)</a:t>
+                      </a:r>
+                    </a:p>
+                  </a:txBody>
+                  <a:tcPr anchor="ctr" marT="12700" marB="12700">
+                    <a:solidFill>
+                      <a:srgbClr val="F0F1F3"/>
+                    </a:solidFill>
+                  </a:tcPr>
+                </a:tc>
+                <a:tc>
+                  <a:txBody>
+                    <a:bodyPr/>
+                    <a:lstStyle/>
+                    <a:p>
+                      <a:pPr algn="r"/>
+                      <a:r>
+                        <a:rPr sz="900" b="0" i="0">
+                          <a:solidFill>
+                            <a:srgbClr val="262626"/>
+                          </a:solidFill>
+                          <a:latin typeface="Garamond"/>
+                          <a:cs typeface="Garamond"/>
+                        </a:rPr>
+                        <a:t>+2.3%</a:t>
+                      </a:r>
+                    </a:p>
+                  </a:txBody>
+                  <a:tcPr anchor="ctr" marT="12700" marB="12700">
+                    <a:solidFill>
+                      <a:srgbClr val="F0F1F3"/>
+                    </a:solidFill>
+                  </a:tcPr>
+                </a:tc>
+              </a:tr>
+              <a:tr h="236912">
+                <a:tc>
+                  <a:txBody>
+                    <a:bodyPr/>
+                    <a:lstStyle/>
+                    <a:p>
+                      <a:pPr algn="l"/>
+                      <a:r>
+                        <a:rPr sz="900" b="0" i="0">
+                          <a:solidFill>
+                            <a:srgbClr val="262626"/>
+                          </a:solidFill>
+                          <a:latin typeface="Garamond"/>
+                          <a:cs typeface="Garamond"/>
+                        </a:rPr>
+                        <a:t>Clean EBIT margin (FY26 run-rate)</a:t>
+                      </a:r>
+                    </a:p>
+                  </a:txBody>
+                  <a:tcPr anchor="ctr" marT="12700" marB="12700">
+                    <a:solidFill>
+                      <a:srgbClr val="FFFFFF"/>
+                    </a:solidFill>
+                  </a:tcPr>
+                </a:tc>
+                <a:tc>
+                  <a:txBody>
+                    <a:bodyPr/>
+                    <a:lstStyle/>
+                    <a:p>
+                      <a:pPr algn="r"/>
+                      <a:r>
+                        <a:rPr sz="900" b="0" i="0">
+                          <a:solidFill>
+                            <a:srgbClr val="262626"/>
+                          </a:solidFill>
+                          <a:latin typeface="Garamond"/>
+                          <a:cs typeface="Garamond"/>
+                        </a:rPr>
+                        <a:t>13.2%</a:t>
+                      </a:r>
+                    </a:p>
+                  </a:txBody>
+                  <a:tcPr anchor="ctr" marT="12700" marB="12700">
+                    <a:solidFill>
+                      <a:srgbClr val="FFFFFF"/>
+                    </a:solidFill>
+                  </a:tcPr>
+                </a:tc>
+              </a:tr>
+              <a:tr h="236912">
+                <a:tc>
+                  <a:txBody>
+                    <a:bodyPr/>
+                    <a:lstStyle/>
+                    <a:p>
+                      <a:pPr algn="l"/>
+                      <a:r>
+                        <a:rPr sz="900" b="0" i="0">
+                          <a:solidFill>
+                            <a:srgbClr val="262626"/>
+                          </a:solidFill>
+                          <a:latin typeface="Garamond"/>
+                          <a:cs typeface="Garamond"/>
+                        </a:rPr>
+                        <a:t>Terminal EBIT margin (FY2030E)</a:t>
+                      </a:r>
+                    </a:p>
+                  </a:txBody>
+                  <a:tcPr anchor="ctr" marT="12700" marB="12700">
+                    <a:solidFill>
+                      <a:srgbClr val="F0F1F3"/>
+                    </a:solidFill>
+                  </a:tcPr>
+                </a:tc>
+                <a:tc>
+                  <a:txBody>
+                    <a:bodyPr/>
+                    <a:lstStyle/>
+                    <a:p>
+                      <a:pPr algn="r"/>
+                      <a:r>
+                        <a:rPr sz="900" b="0" i="0">
+                          <a:solidFill>
+                            <a:srgbClr val="262626"/>
+                          </a:solidFill>
+                          <a:latin typeface="Garamond"/>
+                          <a:cs typeface="Garamond"/>
+                        </a:rPr>
+                        <a:t>15.5%</a:t>
+                      </a:r>
+                    </a:p>
+                  </a:txBody>
+                  <a:tcPr anchor="ctr" marT="12700" marB="12700">
+                    <a:solidFill>
+                      <a:srgbClr val="F0F1F3"/>
+                    </a:solidFill>
+                  </a:tcPr>
+                </a:tc>
+              </a:tr>
+              <a:tr h="236912">
+                <a:tc>
+                  <a:txBody>
+                    <a:bodyPr/>
+                    <a:lstStyle/>
+                    <a:p>
+                      <a:pPr algn="l"/>
+                      <a:r>
+                        <a:rPr sz="900" b="0" i="0">
+                          <a:solidFill>
+                            <a:srgbClr val="262626"/>
+                          </a:solidFill>
+                          <a:latin typeface="Garamond"/>
+                          <a:cs typeface="Garamond"/>
+                        </a:rPr>
+                        <a:t>FY26 tariff refunds (one-time)</a:t>
+                      </a:r>
+                    </a:p>
+                  </a:txBody>
+                  <a:tcPr anchor="ctr" marT="12700" marB="12700">
+                    <a:solidFill>
+                      <a:srgbClr val="FFFFFF"/>
+                    </a:solidFill>
+                  </a:tcPr>
+                </a:tc>
+                <a:tc>
+                  <a:txBody>
+                    <a:bodyPr/>
+                    <a:lstStyle/>
+                    <a:p>
+                      <a:pPr algn="r"/>
+                      <a:r>
+                        <a:rPr sz="900" b="0" i="0">
+                          <a:solidFill>
+                            <a:srgbClr val="262626"/>
+                          </a:solidFill>
+                          <a:latin typeface="Garamond"/>
+                          <a:cs typeface="Garamond"/>
+                        </a:rPr>
+                        <a:t>$134.5M</a:t>
+                      </a:r>
+                    </a:p>
+                  </a:txBody>
+                  <a:tcPr anchor="ctr" marT="12700" marB="12700">
+                    <a:solidFill>
+                      <a:srgbClr val="FFFFFF"/>
+                    </a:solidFill>
+                  </a:tcPr>
+                </a:tc>
+              </a:tr>
+              <a:tr h="236912">
+                <a:tc>
+                  <a:txBody>
+                    <a:bodyPr/>
+                    <a:lstStyle/>
+                    <a:p>
+                      <a:pPr algn="l"/>
+                      <a:r>
+                        <a:rPr sz="900" b="0" i="0">
+                          <a:solidFill>
+                            <a:srgbClr val="262626"/>
+                          </a:solidFill>
+                          <a:latin typeface="Garamond"/>
+                          <a:cs typeface="Garamond"/>
+                        </a:rPr>
+                        <a:t>Cash tax rate</a:t>
+                      </a:r>
+                    </a:p>
+                  </a:txBody>
+                  <a:tcPr anchor="ctr" marT="12700" marB="12700">
+                    <a:solidFill>
+                      <a:srgbClr val="F0F1F3"/>
+                    </a:solidFill>
+                  </a:tcPr>
+                </a:tc>
+                <a:tc>
+                  <a:txBody>
+                    <a:bodyPr/>
+                    <a:lstStyle/>
+                    <a:p>
+                      <a:pPr algn="r"/>
+                      <a:r>
+                        <a:rPr sz="900" b="0" i="0">
+                          <a:solidFill>
+                            <a:srgbClr val="262626"/>
+                          </a:solidFill>
+                          <a:latin typeface="Garamond"/>
+                          <a:cs typeface="Garamond"/>
+                        </a:rPr>
+                        <a:t>30%</a:t>
+                      </a:r>
+                    </a:p>
+                  </a:txBody>
+                  <a:tcPr anchor="ctr" marT="12700" marB="12700">
+                    <a:solidFill>
+                      <a:srgbClr val="F0F1F3"/>
+                    </a:solidFill>
+                  </a:tcPr>
+                </a:tc>
+              </a:tr>
+              <a:tr h="236912">
+                <a:tc>
+                  <a:txBody>
+                    <a:bodyPr/>
+                    <a:lstStyle/>
+                    <a:p>
+                      <a:pPr algn="l"/>
+                      <a:r>
+                        <a:rPr sz="900" b="0" i="0">
+                          <a:solidFill>
+                            <a:srgbClr val="262626"/>
+                          </a:solidFill>
+                          <a:latin typeface="Garamond"/>
+                          <a:cs typeface="Garamond"/>
+                        </a:rPr>
+                        <a:t>Capex % of revenue</a:t>
+                      </a:r>
+                    </a:p>
+                  </a:txBody>
+                  <a:tcPr anchor="ctr" marT="12700" marB="12700">
+                    <a:solidFill>
+                      <a:srgbClr val="FFFFFF"/>
+                    </a:solidFill>
+                  </a:tcPr>
+                </a:tc>
+                <a:tc>
+                  <a:txBody>
+                    <a:bodyPr/>
+                    <a:lstStyle/>
+                    <a:p>
+                      <a:pPr algn="r"/>
+                      <a:r>
+                        <a:rPr sz="900" b="0" i="0">
+                          <a:solidFill>
+                            <a:srgbClr val="262626"/>
+                          </a:solidFill>
+                          <a:latin typeface="Garamond"/>
+                          <a:cs typeface="Garamond"/>
+                        </a:rPr>
+                        <a:t>5.5%</a:t>
+                      </a:r>
+                    </a:p>
+                  </a:txBody>
+                  <a:tcPr anchor="ctr" marT="12700" marB="12700">
+                    <a:solidFill>
+                      <a:srgbClr val="FFFFFF"/>
+                    </a:solidFill>
+                  </a:tcPr>
+                </a:tc>
+              </a:tr>
+              <a:tr h="236912">
+                <a:tc>
+                  <a:txBody>
+                    <a:bodyPr/>
+                    <a:lstStyle/>
+                    <a:p>
+                      <a:pPr algn="l"/>
+                      <a:r>
+                        <a:rPr sz="900" b="0" i="0">
+                          <a:solidFill>
+                            <a:srgbClr val="262626"/>
+                          </a:solidFill>
+                          <a:latin typeface="Garamond"/>
+                          <a:cs typeface="Garamond"/>
+                        </a:rPr>
+                        <a:t>WACC</a:t>
+                      </a:r>
+                    </a:p>
+                  </a:txBody>
+                  <a:tcPr anchor="ctr" marT="12700" marB="12700">
+                    <a:solidFill>
+                      <a:srgbClr val="F0F1F3"/>
+                    </a:solidFill>
+                  </a:tcPr>
+                </a:tc>
+                <a:tc>
+                  <a:txBody>
+                    <a:bodyPr/>
+                    <a:lstStyle/>
+                    <a:p>
+                      <a:pPr algn="r"/>
+                      <a:r>
+                        <a:rPr sz="900" b="0" i="0">
+                          <a:solidFill>
+                            <a:srgbClr val="262626"/>
+                          </a:solidFill>
+                          <a:latin typeface="Garamond"/>
+                          <a:cs typeface="Garamond"/>
+                        </a:rPr>
+                        <a:t>9.0%</a:t>
+                      </a:r>
+                    </a:p>
+                  </a:txBody>
+                  <a:tcPr anchor="ctr" marT="12700" marB="12700">
+                    <a:solidFill>
+                      <a:srgbClr val="F0F1F3"/>
+                    </a:solidFill>
+                  </a:tcPr>
+                </a:tc>
+              </a:tr>
+              <a:tr h="236912">
+                <a:tc>
+                  <a:txBody>
+                    <a:bodyPr/>
+                    <a:lstStyle/>
+                    <a:p>
+                      <a:pPr algn="l"/>
+                      <a:r>
+                        <a:rPr sz="900" b="0" i="0">
+                          <a:solidFill>
+                            <a:srgbClr val="262626"/>
+                          </a:solidFill>
+                          <a:latin typeface="Garamond"/>
+                          <a:cs typeface="Garamond"/>
+                        </a:rPr>
+                        <a:t>Terminal growth (g)</a:t>
+                      </a:r>
+                    </a:p>
+                  </a:txBody>
+                  <a:tcPr anchor="ctr" marT="12700" marB="12700">
+                    <a:solidFill>
+                      <a:srgbClr val="FFFFFF"/>
+                    </a:solidFill>
+                  </a:tcPr>
+                </a:tc>
+                <a:tc>
+                  <a:txBody>
+                    <a:bodyPr/>
+                    <a:lstStyle/>
+                    <a:p>
+                      <a:pPr algn="r"/>
+                      <a:r>
+                        <a:rPr sz="900" b="0" i="0">
+                          <a:solidFill>
+                            <a:srgbClr val="262626"/>
+                          </a:solidFill>
+                          <a:latin typeface="Garamond"/>
+                          <a:cs typeface="Garamond"/>
+                        </a:rPr>
+                        <a:t>2.25%</a:t>
+                      </a:r>
+                    </a:p>
+                  </a:txBody>
+                  <a:tcPr anchor="ctr" marT="12700" marB="12700">
+                    <a:solidFill>
+                      <a:srgbClr val="FFFFFF"/>
+                    </a:solidFill>
+                  </a:tcPr>
+                </a:tc>
+              </a:tr>
+              <a:tr h="236920">
+                <a:tc>
+                  <a:txBody>
+                    <a:bodyPr/>
+                    <a:lstStyle/>
+                    <a:p>
+                      <a:pPr algn="l"/>
+                      <a:r>
+                        <a:rPr sz="900" b="0" i="0">
+                          <a:solidFill>
+                            <a:srgbClr val="262626"/>
+                          </a:solidFill>
+                          <a:latin typeface="Garamond"/>
+                          <a:cs typeface="Garamond"/>
+                        </a:rPr>
+                        <a:t>Exit EV/EBITDA (Gordon implied)</a:t>
+                      </a:r>
+                    </a:p>
+                  </a:txBody>
+                  <a:tcPr anchor="ctr" marT="12700" marB="12700">
+                    <a:solidFill>
+                      <a:srgbClr val="F0F1F3"/>
+                    </a:solidFill>
+                  </a:tcPr>
+                </a:tc>
+                <a:tc>
+                  <a:txBody>
+                    <a:bodyPr/>
+                    <a:lstStyle/>
+                    <a:p>
+                      <a:pPr algn="r"/>
+                      <a:r>
+                        <a:rPr sz="900" b="0" i="0">
+                          <a:solidFill>
+                            <a:srgbClr val="262626"/>
+                          </a:solidFill>
+                          <a:latin typeface="Garamond"/>
+                          <a:cs typeface="Garamond"/>
+                        </a:rPr>
+                        <a:t>7.4x</a:t>
+                      </a:r>
+                    </a:p>
+                  </a:txBody>
+                  <a:tcPr anchor="ctr" marT="12700" marB="12700">
+                    <a:solidFill>
+                      <a:srgbClr val="F0F1F3"/>
+                    </a:solidFill>
+                  </a:tcPr>
+                </a:tc>
+              </a:tr>
+            </a:tbl>
+          </a:graphicData>
+        </a:graphic>
+      </p:graphicFrame>
+      <p:sp>
+        <p:nvSpPr>
+          <p:cNvPr id="10" name="TextBox 9"/>
+          <p:cNvSpPr txBox="1"/>
+          <p:nvPr/>
+        </p:nvSpPr>
+        <p:spPr>
+          <a:xfrm>
+            <a:off x="457200" y="3950208"/>
+            <a:ext cx="5623560" cy="228600"/>
+          </a:xfrm>
+          <a:prstGeom prst="rect">
+            <a:avLst/>
+          </a:prstGeom>
+          <a:noFill/>
+        </p:spPr>
+        <p:txBody>
+          <a:bodyPr wrap="square" anchor="t" lIns="25400" rIns="25400" tIns="12700" bIns="12700">
+            <a:spAutoFit/>
+          </a:bodyPr>
+          <a:lstStyle/>
+          <a:p>
+            <a:pPr algn="l">
+              <a:spcBef>
+                <a:spcPts val="0"/>
+              </a:spcBef>
+              <a:spcAft>
+                <a:spcPts val="0"/>
+              </a:spcAft>
+              <a:buNone/>
+            </a:pPr>
+            <a:r>
+              <a:rPr sz="1000" b="1" i="0">
+                <a:solidFill>
+                  <a:srgbClr val="990000"/>
+                </a:solidFill>
+                <a:latin typeface="Garamond"/>
+                <a:cs typeface="Garamond"/>
+              </a:rPr>
+              <a:t>TERMINAL VALUE — TWO APPROACHES (IDENTICAL IN MODEL)</a:t>
+            </a:r>
+          </a:p>
+        </p:txBody>
+      </p:sp>
+      <p:graphicFrame>
+        <p:nvGraphicFramePr>
+          <p:cNvPr id="11" name="Table 10"/>
+          <p:cNvGraphicFramePr>
+            <a:graphicFrameLocks noGrp="1"/>
+          </p:cNvGraphicFramePr>
+          <p:nvPr/>
+        </p:nvGraphicFramePr>
+        <p:xfrm>
+          <a:off x="457200" y="4187952"/>
+          <a:ext cx="5623560" cy="658368"/>
+        </p:xfrm>
+        <a:graphic>
+          <a:graphicData uri="http://schemas.openxmlformats.org/drawingml/2006/table">
+            <a:tbl>
+              <a:tblPr firstRow="1" bandRow="1">
+                <a:tableStyleId>{5C22544A-7EE6-4342-B048-85BDC9FD1C3A}</a:tableStyleId>
+              </a:tblPr>
+              <a:tblGrid>
+                <a:gridCol w="1417320"/>
+                <a:gridCol w="2103120"/>
+                <a:gridCol w="2103120"/>
+              </a:tblGrid>
+              <a:tr h="219456">
+                <a:tc>
+                  <a:txBody>
+                    <a:bodyPr/>
+                    <a:lstStyle/>
+                    <a:p>
+                      <a:pPr algn="l"/>
+                      <a:r>
+                        <a:rPr sz="850" b="1" i="0">
+                          <a:solidFill>
+                            <a:srgbClr val="FFFFFF"/>
+                          </a:solidFill>
+                          <a:latin typeface="Garamond"/>
+                          <a:cs typeface="Garamond"/>
+                        </a:rPr>
+                        <a:t>Method</a:t>
+                      </a:r>
+                    </a:p>
+                  </a:txBody>
+                  <a:tcPr anchor="ctr">
+                    <a:solidFill>
+                      <a:srgbClr val="1F2A44"/>
+                    </a:solidFill>
+                  </a:tcPr>
+                </a:tc>
+                <a:tc>
+                  <a:txBody>
+                    <a:bodyPr/>
+                    <a:lstStyle/>
+                    <a:p>
+                      <a:pPr algn="r"/>
+                      <a:r>
+                        <a:rPr sz="850" b="1" i="0">
+                          <a:solidFill>
+                            <a:srgbClr val="FFFFFF"/>
+                          </a:solidFill>
+                          <a:latin typeface="Garamond"/>
+                          <a:cs typeface="Garamond"/>
+                        </a:rPr>
+                        <a:t>Formula / input</a:t>
+                      </a:r>
+                    </a:p>
+                  </a:txBody>
+                  <a:tcPr anchor="ctr">
+                    <a:solidFill>
+                      <a:srgbClr val="1F2A44"/>
+                    </a:solidFill>
+                  </a:tcPr>
+                </a:tc>
+                <a:tc>
+                  <a:txBody>
+                    <a:bodyPr/>
+                    <a:lstStyle/>
+                    <a:p>
+                      <a:pPr algn="r"/>
+                      <a:r>
+                        <a:rPr sz="850" b="1" i="0">
+                          <a:solidFill>
+                            <a:srgbClr val="FFFFFF"/>
+                          </a:solidFill>
+                          <a:latin typeface="Garamond"/>
+                          <a:cs typeface="Garamond"/>
+                        </a:rPr>
+                        <a:t>FY30 TV ($M)</a:t>
+                      </a:r>
+                    </a:p>
+                  </a:txBody>
+                  <a:tcPr anchor="ctr">
+                    <a:solidFill>
+                      <a:srgbClr val="1F2A44"/>
+                    </a:solidFill>
+                  </a:tcPr>
+                </a:tc>
+              </a:tr>
+              <a:tr h="219456">
+                <a:tc>
+                  <a:txBody>
+                    <a:bodyPr/>
+                    <a:lstStyle/>
+                    <a:p>
+                      <a:pPr algn="l"/>
+                      <a:r>
+                        <a:rPr sz="850" b="0" i="0">
+                          <a:solidFill>
+                            <a:srgbClr val="262626"/>
+                          </a:solidFill>
+                          <a:latin typeface="Garamond"/>
+                          <a:cs typeface="Garamond"/>
+                        </a:rPr>
+                        <a:t>Gordon growth</a:t>
+                      </a:r>
+                    </a:p>
+                  </a:txBody>
+                  <a:tcPr anchor="ctr" marT="12700" marB="12700">
+                    <a:solidFill>
+                      <a:srgbClr val="FFFFFF"/>
+                    </a:solidFill>
+                  </a:tcPr>
+                </a:tc>
+                <a:tc>
+                  <a:txBody>
+                    <a:bodyPr/>
+                    <a:lstStyle/>
+                    <a:p>
+                      <a:pPr algn="r"/>
+                      <a:r>
+                        <a:rPr sz="850" b="0" i="0">
+                          <a:solidFill>
+                            <a:srgbClr val="262626"/>
+                          </a:solidFill>
+                          <a:latin typeface="Garamond"/>
+                          <a:cs typeface="Garamond"/>
+                        </a:rPr>
+                        <a:t>FCF₅ × (1+g) / (WACC−g); g=2.25%</a:t>
+                      </a:r>
+                    </a:p>
+                  </a:txBody>
+                  <a:tcPr anchor="ctr" marT="12700" marB="12700">
+                    <a:solidFill>
+                      <a:srgbClr val="FFFFFF"/>
+                    </a:solidFill>
+                  </a:tcPr>
+                </a:tc>
+                <a:tc>
+                  <a:txBody>
+                    <a:bodyPr/>
+                    <a:lstStyle/>
+                    <a:p>
+                      <a:pPr algn="r"/>
+                      <a:r>
+                        <a:rPr sz="850" b="0" i="0">
+                          <a:solidFill>
+                            <a:srgbClr val="262626"/>
+                          </a:solidFill>
+                          <a:latin typeface="Garamond"/>
+                          <a:cs typeface="Garamond"/>
+                        </a:rPr>
+                        <a:t>16,804</a:t>
+                      </a:r>
+                    </a:p>
+                  </a:txBody>
+                  <a:tcPr anchor="ctr" marT="12700" marB="12700">
+                    <a:solidFill>
+                      <a:srgbClr val="FFFFFF"/>
+                    </a:solidFill>
+                  </a:tcPr>
+                </a:tc>
+              </a:tr>
+              <a:tr h="219456">
+                <a:tc>
+                  <a:txBody>
+                    <a:bodyPr/>
+                    <a:lstStyle/>
+                    <a:p>
+                      <a:pPr algn="l"/>
+                      <a:r>
+                        <a:rPr sz="850" b="0" i="0">
+                          <a:solidFill>
+                            <a:srgbClr val="262626"/>
+                          </a:solidFill>
+                          <a:latin typeface="Garamond"/>
+                          <a:cs typeface="Garamond"/>
+                        </a:rPr>
+                        <a:t>Exit multiple</a:t>
+                      </a:r>
+                    </a:p>
+                  </a:txBody>
+                  <a:tcPr anchor="ctr" marT="12700" marB="12700">
+                    <a:solidFill>
+                      <a:srgbClr val="F0F1F3"/>
+                    </a:solidFill>
+                  </a:tcPr>
+                </a:tc>
+                <a:tc>
+                  <a:txBody>
+                    <a:bodyPr/>
+                    <a:lstStyle/>
+                    <a:p>
+                      <a:pPr algn="r"/>
+                      <a:r>
+                        <a:rPr sz="850" b="0" i="0">
+                          <a:solidFill>
+                            <a:srgbClr val="262626"/>
+                          </a:solidFill>
+                          <a:latin typeface="Garamond"/>
+                          <a:cs typeface="Garamond"/>
+                        </a:rPr>
+                        <a:t>FY30 EBITDA × 7.4x (Gordon identity, not peer avg)</a:t>
+                      </a:r>
+                    </a:p>
+                  </a:txBody>
+                  <a:tcPr anchor="ctr" marT="12700" marB="12700">
+                    <a:solidFill>
+                      <a:srgbClr val="F0F1F3"/>
+                    </a:solidFill>
+                  </a:tcPr>
+                </a:tc>
+                <a:tc>
+                  <a:txBody>
+                    <a:bodyPr/>
+                    <a:lstStyle/>
+                    <a:p>
+                      <a:pPr algn="r"/>
+                      <a:r>
+                        <a:rPr sz="850" b="0" i="0">
+                          <a:solidFill>
+                            <a:srgbClr val="262626"/>
+                          </a:solidFill>
+                          <a:latin typeface="Garamond"/>
+                          <a:cs typeface="Garamond"/>
+                        </a:rPr>
+                        <a:t>16,804</a:t>
+                      </a:r>
+                    </a:p>
+                  </a:txBody>
+                  <a:tcPr anchor="ctr" marT="12700" marB="12700">
+                    <a:solidFill>
+                      <a:srgbClr val="F0F1F3"/>
+                    </a:solidFill>
+                  </a:tcPr>
+                </a:tc>
+              </a:tr>
+            </a:tbl>
+          </a:graphicData>
+        </a:graphic>
+      </p:graphicFrame>
+      <p:sp>
+        <p:nvSpPr>
+          <p:cNvPr id="12" name="Rectangle 11"/>
+          <p:cNvSpPr/>
+          <p:nvPr/>
+        </p:nvSpPr>
+        <p:spPr>
+          <a:xfrm>
+            <a:off x="6263640" y="1234440"/>
+            <a:ext cx="5486400" cy="2331720"/>
+          </a:xfrm>
+          <a:prstGeom prst="rect">
+            <a:avLst/>
+          </a:prstGeom>
+          <a:solidFill>
+            <a:srgbClr val="F0F1F3"/>
+          </a:solidFill>
+          <a:ln>
+            <a:noFill/>
+          </a:ln>
+          <a:effectLst/>
+        </p:spPr>
+        <p:style>
+          <a:lnRef idx="1">
+            <a:schemeClr val="accent1"/>
+          </a:lnRef>
+          <a:fillRef idx="3">
+            <a:schemeClr val="accent1"/>
+          </a:fillRef>
+          <a:effectRef idx="2">
+            <a:schemeClr val="accent1"/>
+          </a:effectRef>
+          <a:fontRef idx="minor">
+            <a:schemeClr val="lt1"/>
+          </a:fontRef>
+        </p:style>
+        <p:txBody>
+          <a:bodyPr rtlCol="0" anchor="ctr" wrap="square"/>
+          <a:lstStyle/>
+          <a:p>
+            <a:pPr algn="l">
+              <a:spcBef>
+                <a:spcPts val="0"/>
+              </a:spcBef>
+              <a:spcAft>
+                <a:spcPts val="500"/>
+              </a:spcAft>
+              <a:buNone/>
+            </a:pPr>
+            <a:r>
+              <a:rPr sz="1100" b="1" i="0">
+                <a:solidFill>
+                  <a:srgbClr val="990000"/>
+                </a:solidFill>
+                <a:latin typeface="Garamond"/>
+                <a:cs typeface="Garamond"/>
+              </a:rPr>
+              <a:t>VALUATION OUTPUT (US$ M)</a:t>
+            </a:r>
+          </a:p>
+          <a:p>
+            <a:pPr>
+              <a:spcAft>
                 <a:spcPts val="300"/>
               </a:spcAft>
-              <a:buNone/>
-            </a:pPr>
-            <a:r>
-              <a:rPr sz="1350" b="1" i="0">
+            </a:pPr>
+            <a:r>
+              <a:rPr sz="1050" b="0" i="0">
+                <a:solidFill>
+                  <a:srgbClr val="262626"/>
+                </a:solidFill>
+                <a:latin typeface="Garamond"/>
+                <a:cs typeface="Garamond"/>
+              </a:rPr>
+              <a:t>PV of explicit FCF (FY26–FY30)</a:t>
+            </a:r>
+            <a:r>
+              <a:rPr sz="1050" b="1" i="0">
+                <a:solidFill>
+                  <a:srgbClr val="1F2A44"/>
+                </a:solidFill>
+                <a:latin typeface="Garamond"/>
+                <a:cs typeface="Garamond"/>
+              </a:rPr>
+              <a:t>  3,944</a:t>
+            </a:r>
+          </a:p>
+          <a:p>
+            <a:pPr>
+              <a:spcAft>
+                <a:spcPts val="300"/>
+              </a:spcAft>
+            </a:pPr>
+            <a:r>
+              <a:rPr sz="1050" b="0" i="0">
+                <a:solidFill>
+                  <a:srgbClr val="262626"/>
+                </a:solidFill>
+                <a:latin typeface="Garamond"/>
+                <a:cs typeface="Garamond"/>
+              </a:rPr>
+              <a:t>PV of terminal value</a:t>
+            </a:r>
+            <a:r>
+              <a:rPr sz="1050" b="1" i="0">
+                <a:solidFill>
+                  <a:srgbClr val="1F2A44"/>
+                </a:solidFill>
+                <a:latin typeface="Garamond"/>
+                <a:cs typeface="Garamond"/>
+              </a:rPr>
+              <a:t>  10,933</a:t>
+            </a:r>
+          </a:p>
+          <a:p>
+            <a:pPr>
+              <a:spcAft>
+                <a:spcPts val="300"/>
+              </a:spcAft>
+            </a:pPr>
+            <a:r>
+              <a:rPr sz="1050" b="1" i="0">
+                <a:solidFill>
+                  <a:srgbClr val="262626"/>
+                </a:solidFill>
+                <a:latin typeface="Garamond"/>
+                <a:cs typeface="Garamond"/>
+              </a:rPr>
+              <a:t>Enterprise value</a:t>
+            </a:r>
+            <a:r>
+              <a:rPr sz="1050" b="1" i="0">
+                <a:solidFill>
+                  <a:srgbClr val="1F2A44"/>
+                </a:solidFill>
+                <a:latin typeface="Garamond"/>
+                <a:cs typeface="Garamond"/>
+              </a:rPr>
+              <a:t>  14,876</a:t>
+            </a:r>
+          </a:p>
+          <a:p>
+            <a:pPr>
+              <a:spcAft>
+                <a:spcPts val="300"/>
+              </a:spcAft>
+            </a:pPr>
+            <a:r>
+              <a:rPr sz="1050" b="0" i="0">
+                <a:solidFill>
+                  <a:srgbClr val="262626"/>
+                </a:solidFill>
+                <a:latin typeface="Garamond"/>
+                <a:cs typeface="Garamond"/>
+              </a:rPr>
+              <a:t>Plus: cash</a:t>
+            </a:r>
+            <a:r>
+              <a:rPr sz="1050" b="1" i="0">
+                <a:solidFill>
+                  <a:srgbClr val="1F2A44"/>
+                </a:solidFill>
+                <a:latin typeface="Garamond"/>
+                <a:cs typeface="Garamond"/>
+              </a:rPr>
+              <a:t>  1,807</a:t>
+            </a:r>
+          </a:p>
+          <a:p>
+            <a:pPr>
+              <a:spcAft>
+                <a:spcPts val="300"/>
+              </a:spcAft>
+            </a:pPr>
+            <a:r>
+              <a:rPr sz="1050" b="0" i="0">
+                <a:solidFill>
+                  <a:srgbClr val="262626"/>
+                </a:solidFill>
+                <a:latin typeface="Garamond"/>
+                <a:cs typeface="Garamond"/>
+              </a:rPr>
+              <a:t>Less: lease debt (ASC 842)</a:t>
+            </a:r>
+            <a:r>
+              <a:rPr sz="1050" b="1" i="0">
+                <a:solidFill>
+                  <a:srgbClr val="1F2A44"/>
+                </a:solidFill>
+                <a:latin typeface="Garamond"/>
+                <a:cs typeface="Garamond"/>
+              </a:rPr>
+              <a:t>  (1,798)</a:t>
+            </a:r>
+          </a:p>
+          <a:p>
+            <a:pPr>
+              <a:spcAft>
+                <a:spcPts val="300"/>
+              </a:spcAft>
+            </a:pPr>
+            <a:r>
+              <a:rPr sz="1050" b="1" i="0">
+                <a:solidFill>
+                  <a:srgbClr val="262626"/>
+                </a:solidFill>
+                <a:latin typeface="Garamond"/>
+                <a:cs typeface="Garamond"/>
+              </a:rPr>
+              <a:t>Equity value</a:t>
+            </a:r>
+            <a:r>
+              <a:rPr sz="1050" b="1" i="0">
+                <a:solidFill>
+                  <a:srgbClr val="1F2A44"/>
+                </a:solidFill>
+                <a:latin typeface="Garamond"/>
+                <a:cs typeface="Garamond"/>
+              </a:rPr>
+              <a:t>  14,885</a:t>
+            </a:r>
+          </a:p>
+          <a:p>
+            <a:pPr>
+              <a:spcAft>
+                <a:spcPts val="300"/>
+              </a:spcAft>
+            </a:pPr>
+            <a:r>
+              <a:rPr sz="1050" b="0" i="0">
+                <a:solidFill>
+                  <a:srgbClr val="262626"/>
+                </a:solidFill>
+                <a:latin typeface="Garamond"/>
+                <a:cs typeface="Garamond"/>
+              </a:rPr>
+              <a:t>÷ Diluted shares (M)</a:t>
+            </a:r>
+            <a:r>
+              <a:rPr sz="1050" b="1" i="0">
+                <a:solidFill>
+                  <a:srgbClr val="1F2A44"/>
+                </a:solidFill>
+                <a:latin typeface="Garamond"/>
+                <a:cs typeface="Garamond"/>
+              </a:rPr>
+              <a:t>  111.4</a:t>
+            </a:r>
+          </a:p>
+          <a:p>
+            <a:pPr>
+              <a:spcBef>
+                <a:spcPts val="400"/>
+              </a:spcBef>
+            </a:pPr>
+            <a:r>
+              <a:rPr sz="1500" b="1" i="0">
+                <a:solidFill>
+                  <a:srgbClr val="1E7A3C"/>
+                </a:solidFill>
+                <a:latin typeface="Garamond"/>
+                <a:cs typeface="Garamond"/>
+              </a:rPr>
+              <a:t>Implied value:  $134 / share</a:t>
+            </a:r>
+          </a:p>
+        </p:txBody>
+      </p:sp>
+      <p:sp>
+        <p:nvSpPr>
+          <p:cNvPr id="13" name="Rectangle 12"/>
+          <p:cNvSpPr/>
+          <p:nvPr/>
+        </p:nvSpPr>
+        <p:spPr>
+          <a:xfrm>
+            <a:off x="6263640" y="3703320"/>
+            <a:ext cx="5486400" cy="1143000"/>
+          </a:xfrm>
+          <a:prstGeom prst="rect">
+            <a:avLst/>
+          </a:prstGeom>
+          <a:solidFill>
+            <a:srgbClr val="1F2A44"/>
+          </a:solidFill>
+          <a:ln>
+            <a:noFill/>
+          </a:ln>
+          <a:effectLst/>
+        </p:spPr>
+        <p:style>
+          <a:lnRef idx="1">
+            <a:schemeClr val="accent1"/>
+          </a:lnRef>
+          <a:fillRef idx="3">
+            <a:schemeClr val="accent1"/>
+          </a:fillRef>
+          <a:effectRef idx="2">
+            <a:schemeClr val="accent1"/>
+          </a:effectRef>
+          <a:fontRef idx="minor">
+            <a:schemeClr val="lt1"/>
+          </a:fontRef>
+        </p:style>
+        <p:txBody>
+          <a:bodyPr rtlCol="0" anchor="ctr" wrap="square"/>
+          <a:lstStyle/>
+          <a:p>
+            <a:pPr algn="l">
+              <a:spcBef>
+                <a:spcPts val="0"/>
+              </a:spcBef>
+              <a:spcAft>
+                <a:spcPts val="300"/>
+              </a:spcAft>
+              <a:buNone/>
+            </a:pPr>
+            <a:r>
+              <a:rPr sz="1050" b="1" i="0">
+                <a:solidFill>
+                  <a:srgbClr val="FFFFFF"/>
+                </a:solidFill>
+                <a:latin typeface="Garamond"/>
+                <a:cs typeface="Garamond"/>
+              </a:rPr>
+              <a:t>TV = 73% of EV  ·  Exit 7.4x = Gordon identity on FY30 EBITDA $2,284M</a:t>
+            </a:r>
+          </a:p>
+          <a:p>
+            <a:pPr algn="l">
+              <a:spcBef>
+                <a:spcPts val="0"/>
+              </a:spcBef>
+              <a:spcAft>
+                <a:spcPts val="0"/>
+              </a:spcAft>
+              <a:buNone/>
+            </a:pPr>
+            <a:r>
+              <a:rPr sz="900" b="0" i="0">
+                <a:solidFill>
+                  <a:srgbClr val="FFFFFF"/>
+                </a:solidFill>
+                <a:latin typeface="Garamond"/>
+                <a:cs typeface="Garamond"/>
+              </a:rPr>
+              <a:t>We do not average PitchBook comps for TV. Bear/bull WACC &amp; g brackets are in the appendix.</a:t>
+            </a:r>
+          </a:p>
+        </p:txBody>
+      </p:sp>
+      <p:sp>
+        <p:nvSpPr>
+          <p:cNvPr id="14" name="TextBox 13"/>
+          <p:cNvSpPr txBox="1"/>
+          <p:nvPr/>
+        </p:nvSpPr>
+        <p:spPr>
+          <a:xfrm>
+            <a:off x="457200" y="4956048"/>
+            <a:ext cx="11292840" cy="228600"/>
+          </a:xfrm>
+          <a:prstGeom prst="rect">
+            <a:avLst/>
+          </a:prstGeom>
+          <a:noFill/>
+        </p:spPr>
+        <p:txBody>
+          <a:bodyPr wrap="square" anchor="t" lIns="25400" rIns="25400" tIns="12700" bIns="12700">
+            <a:spAutoFit/>
+          </a:bodyPr>
+          <a:lstStyle/>
+          <a:p>
+            <a:pPr algn="l">
+              <a:spcBef>
+                <a:spcPts val="0"/>
+              </a:spcBef>
+              <a:spcAft>
+                <a:spcPts val="0"/>
+              </a:spcAft>
+              <a:buNone/>
+            </a:pPr>
+            <a:r>
+              <a:rPr sz="1000" b="1" i="0">
                 <a:solidFill>
                   <a:srgbClr val="990000"/>
                 </a:solidFill>
                 <a:latin typeface="Garamond"/>
                 <a:cs typeface="Garamond"/>
               </a:rPr>
-              <a:t>Read-through — we do not average these for terminal value</a:t>
-            </a:r>
-          </a:p>
-          <a:p>
-            <a:pPr algn="l" indent="-152400" marL="177800">
-              <a:spcBef>
-                <a:spcPts val="0"/>
-              </a:spcBef>
-              <a:spcAft>
-                <a:spcPts val="300"/>
-              </a:spcAft>
-              <a:buFont typeface="Garamond"/>
-              <a:buChar char="•"/>
-            </a:pPr>
-            <a:r>
-              <a:rPr sz="1250" b="0" i="0">
+              <a:t>SENSITIVITY — IMPLIED SHARE PRICE (WACC vs TERMINAL g)</a:t>
+            </a:r>
+          </a:p>
+        </p:txBody>
+      </p:sp>
+      <p:graphicFrame>
+        <p:nvGraphicFramePr>
+          <p:cNvPr id="15" name="Table 14"/>
+          <p:cNvGraphicFramePr>
+            <a:graphicFrameLocks noGrp="1"/>
+          </p:cNvGraphicFramePr>
+          <p:nvPr/>
+        </p:nvGraphicFramePr>
+        <p:xfrm>
+          <a:off x="457200" y="5166360"/>
+          <a:ext cx="6766560" cy="960120"/>
+        </p:xfrm>
+        <a:graphic>
+          <a:graphicData uri="http://schemas.openxmlformats.org/drawingml/2006/table">
+            <a:tbl>
+              <a:tblPr firstRow="1" bandRow="1">
+                <a:tableStyleId>{5C22544A-7EE6-4342-B048-85BDC9FD1C3A}</a:tableStyleId>
+              </a:tblPr>
+              <a:tblGrid>
+                <a:gridCol w="914400"/>
+                <a:gridCol w="1170432"/>
+                <a:gridCol w="1170432"/>
+                <a:gridCol w="1170432"/>
+                <a:gridCol w="1170432"/>
+                <a:gridCol w="1170432"/>
+              </a:tblGrid>
+              <a:tr h="160020">
+                <a:tc>
+                  <a:txBody>
+                    <a:bodyPr/>
+                    <a:lstStyle/>
+                    <a:p>
+                      <a:pPr algn="l"/>
+                      <a:r>
+                        <a:rPr sz="900" b="1" i="0">
+                          <a:solidFill>
+                            <a:srgbClr val="FFFFFF"/>
+                          </a:solidFill>
+                          <a:latin typeface="Garamond"/>
+                          <a:cs typeface="Garamond"/>
+                        </a:rPr>
+                        <a:t>WACC \ g</a:t>
+                      </a:r>
+                    </a:p>
+                  </a:txBody>
+                  <a:tcPr anchor="ctr">
+                    <a:solidFill>
+                      <a:srgbClr val="1F2A44"/>
+                    </a:solidFill>
+                  </a:tcPr>
+                </a:tc>
+                <a:tc>
+                  <a:txBody>
+                    <a:bodyPr/>
+                    <a:lstStyle/>
+                    <a:p>
+                      <a:pPr algn="r"/>
+                      <a:r>
+                        <a:rPr sz="900" b="1" i="0">
+                          <a:solidFill>
+                            <a:srgbClr val="FFFFFF"/>
+                          </a:solidFill>
+                          <a:latin typeface="Garamond"/>
+                          <a:cs typeface="Garamond"/>
+                        </a:rPr>
+                        <a:t>1.5%</a:t>
+                      </a:r>
+                    </a:p>
+                  </a:txBody>
+                  <a:tcPr anchor="ctr">
+                    <a:solidFill>
+                      <a:srgbClr val="1F2A44"/>
+                    </a:solidFill>
+                  </a:tcPr>
+                </a:tc>
+                <a:tc>
+                  <a:txBody>
+                    <a:bodyPr/>
+                    <a:lstStyle/>
+                    <a:p>
+                      <a:pPr algn="r"/>
+                      <a:r>
+                        <a:rPr sz="900" b="1" i="0">
+                          <a:solidFill>
+                            <a:srgbClr val="FFFFFF"/>
+                          </a:solidFill>
+                          <a:latin typeface="Garamond"/>
+                          <a:cs typeface="Garamond"/>
+                        </a:rPr>
+                        <a:t>2.0%</a:t>
+                      </a:r>
+                    </a:p>
+                  </a:txBody>
+                  <a:tcPr anchor="ctr">
+                    <a:solidFill>
+                      <a:srgbClr val="1F2A44"/>
+                    </a:solidFill>
+                  </a:tcPr>
+                </a:tc>
+                <a:tc>
+                  <a:txBody>
+                    <a:bodyPr/>
+                    <a:lstStyle/>
+                    <a:p>
+                      <a:pPr algn="r"/>
+                      <a:r>
+                        <a:rPr sz="900" b="1" i="0">
+                          <a:solidFill>
+                            <a:srgbClr val="FFFFFF"/>
+                          </a:solidFill>
+                          <a:latin typeface="Garamond"/>
+                          <a:cs typeface="Garamond"/>
+                        </a:rPr>
+                        <a:t>2.25%</a:t>
+                      </a:r>
+                    </a:p>
+                  </a:txBody>
+                  <a:tcPr anchor="ctr">
+                    <a:solidFill>
+                      <a:srgbClr val="1F2A44"/>
+                    </a:solidFill>
+                  </a:tcPr>
+                </a:tc>
+                <a:tc>
+                  <a:txBody>
+                    <a:bodyPr/>
+                    <a:lstStyle/>
+                    <a:p>
+                      <a:pPr algn="r"/>
+                      <a:r>
+                        <a:rPr sz="900" b="1" i="0">
+                          <a:solidFill>
+                            <a:srgbClr val="FFFFFF"/>
+                          </a:solidFill>
+                          <a:latin typeface="Garamond"/>
+                          <a:cs typeface="Garamond"/>
+                        </a:rPr>
+                        <a:t>2.5%</a:t>
+                      </a:r>
+                    </a:p>
+                  </a:txBody>
+                  <a:tcPr anchor="ctr">
+                    <a:solidFill>
+                      <a:srgbClr val="1F2A44"/>
+                    </a:solidFill>
+                  </a:tcPr>
+                </a:tc>
+                <a:tc>
+                  <a:txBody>
+                    <a:bodyPr/>
+                    <a:lstStyle/>
+                    <a:p>
+                      <a:pPr algn="r"/>
+                      <a:r>
+                        <a:rPr sz="900" b="1" i="0">
+                          <a:solidFill>
+                            <a:srgbClr val="FFFFFF"/>
+                          </a:solidFill>
+                          <a:latin typeface="Garamond"/>
+                          <a:cs typeface="Garamond"/>
+                        </a:rPr>
+                        <a:t>3.0%</a:t>
+                      </a:r>
+                    </a:p>
+                  </a:txBody>
+                  <a:tcPr anchor="ctr">
+                    <a:solidFill>
+                      <a:srgbClr val="1F2A44"/>
+                    </a:solidFill>
+                  </a:tcPr>
+                </a:tc>
+              </a:tr>
+              <a:tr h="160020">
+                <a:tc>
+                  <a:txBody>
+                    <a:bodyPr/>
+                    <a:lstStyle/>
+                    <a:p>
+                      <a:pPr algn="l"/>
+                      <a:r>
+                        <a:rPr sz="900" b="0" i="0">
+                          <a:solidFill>
+                            <a:srgbClr val="262626"/>
+                          </a:solidFill>
+                          <a:latin typeface="Garamond"/>
+                          <a:cs typeface="Garamond"/>
+                        </a:rPr>
+                        <a:t>9.5%</a:t>
+                      </a:r>
+                    </a:p>
+                  </a:txBody>
+                  <a:tcPr anchor="ctr" marT="12700" marB="12700">
+                    <a:solidFill>
+                      <a:srgbClr val="FFFFFF"/>
+                    </a:solidFill>
+                  </a:tcPr>
+                </a:tc>
+                <a:tc>
+                  <a:txBody>
+                    <a:bodyPr/>
+                    <a:lstStyle/>
+                    <a:p>
+                      <a:pPr algn="r"/>
+                      <a:r>
+                        <a:rPr sz="900" b="0" i="0">
+                          <a:solidFill>
+                            <a:srgbClr val="262626"/>
+                          </a:solidFill>
+                          <a:latin typeface="Garamond"/>
+                          <a:cs typeface="Garamond"/>
+                        </a:rPr>
+                        <a:t>$115</a:t>
+                      </a:r>
+                    </a:p>
+                  </a:txBody>
+                  <a:tcPr anchor="ctr" marT="12700" marB="12700">
+                    <a:solidFill>
+                      <a:srgbClr val="FFFFFF"/>
+                    </a:solidFill>
+                  </a:tcPr>
+                </a:tc>
+                <a:tc>
+                  <a:txBody>
+                    <a:bodyPr/>
+                    <a:lstStyle/>
+                    <a:p>
+                      <a:pPr algn="r"/>
+                      <a:r>
+                        <a:rPr sz="900" b="0" i="0">
+                          <a:solidFill>
+                            <a:srgbClr val="262626"/>
+                          </a:solidFill>
+                          <a:latin typeface="Garamond"/>
+                          <a:cs typeface="Garamond"/>
+                        </a:rPr>
+                        <a:t>$121</a:t>
+                      </a:r>
+                    </a:p>
+                  </a:txBody>
+                  <a:tcPr anchor="ctr" marT="12700" marB="12700">
+                    <a:solidFill>
+                      <a:srgbClr val="FFFFFF"/>
+                    </a:solidFill>
+                  </a:tcPr>
+                </a:tc>
+                <a:tc>
+                  <a:txBody>
+                    <a:bodyPr/>
+                    <a:lstStyle/>
+                    <a:p>
+                      <a:pPr algn="r"/>
+                      <a:r>
+                        <a:rPr sz="900" b="0" i="0">
+                          <a:solidFill>
+                            <a:srgbClr val="262626"/>
+                          </a:solidFill>
+                          <a:latin typeface="Garamond"/>
+                          <a:cs typeface="Garamond"/>
+                        </a:rPr>
+                        <a:t>$124</a:t>
+                      </a:r>
+                    </a:p>
+                  </a:txBody>
+                  <a:tcPr anchor="ctr" marT="12700" marB="12700">
+                    <a:solidFill>
+                      <a:srgbClr val="FFFFFF"/>
+                    </a:solidFill>
+                  </a:tcPr>
+                </a:tc>
+                <a:tc>
+                  <a:txBody>
+                    <a:bodyPr/>
+                    <a:lstStyle/>
+                    <a:p>
+                      <a:pPr algn="r"/>
+                      <a:r>
+                        <a:rPr sz="900" b="0" i="0">
+                          <a:solidFill>
+                            <a:srgbClr val="262626"/>
+                          </a:solidFill>
+                          <a:latin typeface="Garamond"/>
+                          <a:cs typeface="Garamond"/>
+                        </a:rPr>
+                        <a:t>$127</a:t>
+                      </a:r>
+                    </a:p>
+                  </a:txBody>
+                  <a:tcPr anchor="ctr" marT="12700" marB="12700">
+                    <a:solidFill>
+                      <a:srgbClr val="FFFFFF"/>
+                    </a:solidFill>
+                  </a:tcPr>
+                </a:tc>
+                <a:tc>
+                  <a:txBody>
+                    <a:bodyPr/>
+                    <a:lstStyle/>
+                    <a:p>
+                      <a:pPr algn="r"/>
+                      <a:r>
+                        <a:rPr sz="900" b="0" i="0">
+                          <a:solidFill>
+                            <a:srgbClr val="262626"/>
+                          </a:solidFill>
+                          <a:latin typeface="Garamond"/>
+                          <a:cs typeface="Garamond"/>
+                        </a:rPr>
+                        <a:t>$135</a:t>
+                      </a:r>
+                    </a:p>
+                  </a:txBody>
+                  <a:tcPr anchor="ctr" marT="12700" marB="12700">
+                    <a:solidFill>
+                      <a:srgbClr val="FFFFFF"/>
+                    </a:solidFill>
+                  </a:tcPr>
+                </a:tc>
+              </a:tr>
+              <a:tr h="160020">
+                <a:tc>
+                  <a:txBody>
+                    <a:bodyPr/>
+                    <a:lstStyle/>
+                    <a:p>
+                      <a:pPr algn="l"/>
+                      <a:r>
+                        <a:rPr sz="900" b="0" i="0">
+                          <a:solidFill>
+                            <a:srgbClr val="262626"/>
+                          </a:solidFill>
+                          <a:latin typeface="Garamond"/>
+                          <a:cs typeface="Garamond"/>
+                        </a:rPr>
+                        <a:t>10.0%</a:t>
+                      </a:r>
+                    </a:p>
+                  </a:txBody>
+                  <a:tcPr anchor="ctr" marT="12700" marB="12700">
+                    <a:solidFill>
+                      <a:srgbClr val="F0F1F3"/>
+                    </a:solidFill>
+                  </a:tcPr>
+                </a:tc>
+                <a:tc>
+                  <a:txBody>
+                    <a:bodyPr/>
+                    <a:lstStyle/>
+                    <a:p>
+                      <a:pPr algn="r"/>
+                      <a:r>
+                        <a:rPr sz="900" b="0" i="0">
+                          <a:solidFill>
+                            <a:srgbClr val="262626"/>
+                          </a:solidFill>
+                          <a:latin typeface="Garamond"/>
+                          <a:cs typeface="Garamond"/>
+                        </a:rPr>
+                        <a:t>$108</a:t>
+                      </a:r>
+                    </a:p>
+                  </a:txBody>
+                  <a:tcPr anchor="ctr" marT="12700" marB="12700">
+                    <a:solidFill>
+                      <a:srgbClr val="F0F1F3"/>
+                    </a:solidFill>
+                  </a:tcPr>
+                </a:tc>
+                <a:tc>
+                  <a:txBody>
+                    <a:bodyPr/>
+                    <a:lstStyle/>
+                    <a:p>
+                      <a:pPr algn="r"/>
+                      <a:r>
+                        <a:rPr sz="900" b="0" i="0">
+                          <a:solidFill>
+                            <a:srgbClr val="262626"/>
+                          </a:solidFill>
+                          <a:latin typeface="Garamond"/>
+                          <a:cs typeface="Garamond"/>
+                        </a:rPr>
+                        <a:t>$113</a:t>
+                      </a:r>
+                    </a:p>
+                  </a:txBody>
+                  <a:tcPr anchor="ctr" marT="12700" marB="12700">
+                    <a:solidFill>
+                      <a:srgbClr val="F0F1F3"/>
+                    </a:solidFill>
+                  </a:tcPr>
+                </a:tc>
+                <a:tc>
+                  <a:txBody>
+                    <a:bodyPr/>
+                    <a:lstStyle/>
+                    <a:p>
+                      <a:pPr algn="r"/>
+                      <a:r>
+                        <a:rPr sz="900" b="0" i="0">
+                          <a:solidFill>
+                            <a:srgbClr val="262626"/>
+                          </a:solidFill>
+                          <a:latin typeface="Garamond"/>
+                          <a:cs typeface="Garamond"/>
+                        </a:rPr>
+                        <a:t>$116</a:t>
+                      </a:r>
+                    </a:p>
+                  </a:txBody>
+                  <a:tcPr anchor="ctr" marT="12700" marB="12700">
+                    <a:solidFill>
+                      <a:srgbClr val="F0F1F3"/>
+                    </a:solidFill>
+                  </a:tcPr>
+                </a:tc>
+                <a:tc>
+                  <a:txBody>
+                    <a:bodyPr/>
+                    <a:lstStyle/>
+                    <a:p>
+                      <a:pPr algn="r"/>
+                      <a:r>
+                        <a:rPr sz="900" b="0" i="0">
+                          <a:solidFill>
+                            <a:srgbClr val="262626"/>
+                          </a:solidFill>
+                          <a:latin typeface="Garamond"/>
+                          <a:cs typeface="Garamond"/>
+                        </a:rPr>
+                        <a:t>$119</a:t>
+                      </a:r>
+                    </a:p>
+                  </a:txBody>
+                  <a:tcPr anchor="ctr" marT="12700" marB="12700">
+                    <a:solidFill>
+                      <a:srgbClr val="F0F1F3"/>
+                    </a:solidFill>
+                  </a:tcPr>
+                </a:tc>
+                <a:tc>
+                  <a:txBody>
+                    <a:bodyPr/>
+                    <a:lstStyle/>
+                    <a:p>
+                      <a:pPr algn="r"/>
+                      <a:r>
+                        <a:rPr sz="900" b="0" i="0">
+                          <a:solidFill>
+                            <a:srgbClr val="262626"/>
+                          </a:solidFill>
+                          <a:latin typeface="Garamond"/>
+                          <a:cs typeface="Garamond"/>
+                        </a:rPr>
+                        <a:t>$125</a:t>
+                      </a:r>
+                    </a:p>
+                  </a:txBody>
+                  <a:tcPr anchor="ctr" marT="12700" marB="12700">
+                    <a:solidFill>
+                      <a:srgbClr val="F0F1F3"/>
+                    </a:solidFill>
+                  </a:tcPr>
+                </a:tc>
+              </a:tr>
+              <a:tr h="160020">
+                <a:tc>
+                  <a:txBody>
+                    <a:bodyPr/>
+                    <a:lstStyle/>
+                    <a:p>
+                      <a:pPr algn="l"/>
+                      <a:r>
+                        <a:rPr sz="900" b="0" i="0">
+                          <a:solidFill>
+                            <a:srgbClr val="262626"/>
+                          </a:solidFill>
+                          <a:latin typeface="Garamond"/>
+                          <a:cs typeface="Garamond"/>
+                        </a:rPr>
+                        <a:t>10.5%</a:t>
+                      </a:r>
+                    </a:p>
+                  </a:txBody>
+                  <a:tcPr anchor="ctr" marT="12700" marB="12700">
+                    <a:solidFill>
+                      <a:srgbClr val="FFFFFF"/>
+                    </a:solidFill>
+                  </a:tcPr>
+                </a:tc>
+                <a:tc>
+                  <a:txBody>
+                    <a:bodyPr/>
+                    <a:lstStyle/>
+                    <a:p>
+                      <a:pPr algn="r"/>
+                      <a:r>
+                        <a:rPr sz="900" b="0" i="0">
+                          <a:solidFill>
+                            <a:srgbClr val="262626"/>
+                          </a:solidFill>
+                          <a:latin typeface="Garamond"/>
+                          <a:cs typeface="Garamond"/>
+                        </a:rPr>
+                        <a:t>$102</a:t>
+                      </a:r>
+                    </a:p>
+                  </a:txBody>
+                  <a:tcPr anchor="ctr" marT="12700" marB="12700">
+                    <a:solidFill>
+                      <a:srgbClr val="FFFFFF"/>
+                    </a:solidFill>
+                  </a:tcPr>
+                </a:tc>
+                <a:tc>
+                  <a:txBody>
+                    <a:bodyPr/>
+                    <a:lstStyle/>
+                    <a:p>
+                      <a:pPr algn="r"/>
+                      <a:r>
+                        <a:rPr sz="900" b="0" i="0">
+                          <a:solidFill>
+                            <a:srgbClr val="262626"/>
+                          </a:solidFill>
+                          <a:latin typeface="Garamond"/>
+                          <a:cs typeface="Garamond"/>
+                        </a:rPr>
+                        <a:t>$106</a:t>
+                      </a:r>
+                    </a:p>
+                  </a:txBody>
+                  <a:tcPr anchor="ctr" marT="12700" marB="12700">
+                    <a:solidFill>
+                      <a:srgbClr val="FFFFFF"/>
+                    </a:solidFill>
+                  </a:tcPr>
+                </a:tc>
+                <a:tc>
+                  <a:txBody>
+                    <a:bodyPr/>
+                    <a:lstStyle/>
+                    <a:p>
+                      <a:pPr algn="r"/>
+                      <a:r>
+                        <a:rPr sz="900" b="0" i="0">
+                          <a:solidFill>
+                            <a:srgbClr val="262626"/>
+                          </a:solidFill>
+                          <a:latin typeface="Garamond"/>
+                          <a:cs typeface="Garamond"/>
+                        </a:rPr>
+                        <a:t>$109</a:t>
+                      </a:r>
+                    </a:p>
+                  </a:txBody>
+                  <a:tcPr anchor="ctr" marT="12700" marB="12700">
+                    <a:solidFill>
+                      <a:srgbClr val="FFFFFF"/>
+                    </a:solidFill>
+                  </a:tcPr>
+                </a:tc>
+                <a:tc>
+                  <a:txBody>
+                    <a:bodyPr/>
+                    <a:lstStyle/>
+                    <a:p>
+                      <a:pPr algn="r"/>
+                      <a:r>
+                        <a:rPr sz="900" b="0" i="0">
+                          <a:solidFill>
+                            <a:srgbClr val="262626"/>
+                          </a:solidFill>
+                          <a:latin typeface="Garamond"/>
+                          <a:cs typeface="Garamond"/>
+                        </a:rPr>
+                        <a:t>$111</a:t>
+                      </a:r>
+                    </a:p>
+                  </a:txBody>
+                  <a:tcPr anchor="ctr" marT="12700" marB="12700">
+                    <a:solidFill>
+                      <a:srgbClr val="FFFFFF"/>
+                    </a:solidFill>
+                  </a:tcPr>
+                </a:tc>
+                <a:tc>
+                  <a:txBody>
+                    <a:bodyPr/>
+                    <a:lstStyle/>
+                    <a:p>
+                      <a:pPr algn="r"/>
+                      <a:r>
+                        <a:rPr sz="900" b="0" i="0">
+                          <a:solidFill>
+                            <a:srgbClr val="262626"/>
+                          </a:solidFill>
+                          <a:latin typeface="Garamond"/>
+                          <a:cs typeface="Garamond"/>
+                        </a:rPr>
+                        <a:t>$117</a:t>
+                      </a:r>
+                    </a:p>
+                  </a:txBody>
+                  <a:tcPr anchor="ctr" marT="12700" marB="12700">
+                    <a:solidFill>
+                      <a:srgbClr val="FFFFFF"/>
+                    </a:solidFill>
+                  </a:tcPr>
+                </a:tc>
+              </a:tr>
+              <a:tr h="160020">
+                <a:tc>
+                  <a:txBody>
+                    <a:bodyPr/>
+                    <a:lstStyle/>
+                    <a:p>
+                      <a:pPr algn="l"/>
+                      <a:r>
+                        <a:rPr sz="900" b="0" i="0">
+                          <a:solidFill>
+                            <a:srgbClr val="262626"/>
+                          </a:solidFill>
+                          <a:latin typeface="Garamond"/>
+                          <a:cs typeface="Garamond"/>
+                        </a:rPr>
+                        <a:t>11.0%</a:t>
+                      </a:r>
+                    </a:p>
+                  </a:txBody>
+                  <a:tcPr anchor="ctr" marT="12700" marB="12700">
+                    <a:solidFill>
+                      <a:srgbClr val="F0F1F3"/>
+                    </a:solidFill>
+                  </a:tcPr>
+                </a:tc>
+                <a:tc>
+                  <a:txBody>
+                    <a:bodyPr/>
+                    <a:lstStyle/>
+                    <a:p>
+                      <a:pPr algn="r"/>
+                      <a:r>
+                        <a:rPr sz="900" b="0" i="0">
+                          <a:solidFill>
+                            <a:srgbClr val="262626"/>
+                          </a:solidFill>
+                          <a:latin typeface="Garamond"/>
+                          <a:cs typeface="Garamond"/>
+                        </a:rPr>
+                        <a:t>$97</a:t>
+                      </a:r>
+                    </a:p>
+                  </a:txBody>
+                  <a:tcPr anchor="ctr" marT="12700" marB="12700">
+                    <a:solidFill>
+                      <a:srgbClr val="F0F1F3"/>
+                    </a:solidFill>
+                  </a:tcPr>
+                </a:tc>
+                <a:tc>
+                  <a:txBody>
+                    <a:bodyPr/>
+                    <a:lstStyle/>
+                    <a:p>
+                      <a:pPr algn="r"/>
+                      <a:r>
+                        <a:rPr sz="900" b="0" i="0">
+                          <a:solidFill>
+                            <a:srgbClr val="262626"/>
+                          </a:solidFill>
+                          <a:latin typeface="Garamond"/>
+                          <a:cs typeface="Garamond"/>
+                        </a:rPr>
+                        <a:t>$100</a:t>
+                      </a:r>
+                    </a:p>
+                  </a:txBody>
+                  <a:tcPr anchor="ctr" marT="12700" marB="12700">
+                    <a:solidFill>
+                      <a:srgbClr val="F0F1F3"/>
+                    </a:solidFill>
+                  </a:tcPr>
+                </a:tc>
+                <a:tc>
+                  <a:txBody>
+                    <a:bodyPr/>
+                    <a:lstStyle/>
+                    <a:p>
+                      <a:pPr algn="r"/>
+                      <a:r>
+                        <a:rPr sz="900" b="0" i="0">
+                          <a:solidFill>
+                            <a:srgbClr val="262626"/>
+                          </a:solidFill>
+                          <a:latin typeface="Garamond"/>
+                          <a:cs typeface="Garamond"/>
+                        </a:rPr>
+                        <a:t>$103</a:t>
+                      </a:r>
+                    </a:p>
+                  </a:txBody>
+                  <a:tcPr anchor="ctr" marT="12700" marB="12700">
+                    <a:solidFill>
+                      <a:srgbClr val="F0F1F3"/>
+                    </a:solidFill>
+                  </a:tcPr>
+                </a:tc>
+                <a:tc>
+                  <a:txBody>
+                    <a:bodyPr/>
+                    <a:lstStyle/>
+                    <a:p>
+                      <a:pPr algn="r"/>
+                      <a:r>
+                        <a:rPr sz="900" b="0" i="0">
+                          <a:solidFill>
+                            <a:srgbClr val="262626"/>
+                          </a:solidFill>
+                          <a:latin typeface="Garamond"/>
+                          <a:cs typeface="Garamond"/>
+                        </a:rPr>
+                        <a:t>$105</a:t>
+                      </a:r>
+                    </a:p>
+                  </a:txBody>
+                  <a:tcPr anchor="ctr" marT="12700" marB="12700">
+                    <a:solidFill>
+                      <a:srgbClr val="F0F1F3"/>
+                    </a:solidFill>
+                  </a:tcPr>
+                </a:tc>
+                <a:tc>
+                  <a:txBody>
+                    <a:bodyPr/>
+                    <a:lstStyle/>
+                    <a:p>
+                      <a:pPr algn="r"/>
+                      <a:r>
+                        <a:rPr sz="900" b="0" i="0">
+                          <a:solidFill>
+                            <a:srgbClr val="262626"/>
+                          </a:solidFill>
+                          <a:latin typeface="Garamond"/>
+                          <a:cs typeface="Garamond"/>
+                        </a:rPr>
+                        <a:t>$110</a:t>
+                      </a:r>
+                    </a:p>
+                  </a:txBody>
+                  <a:tcPr anchor="ctr" marT="12700" marB="12700">
+                    <a:solidFill>
+                      <a:srgbClr val="F0F1F3"/>
+                    </a:solidFill>
+                  </a:tcPr>
+                </a:tc>
+              </a:tr>
+              <a:tr h="160020">
+                <a:tc>
+                  <a:txBody>
+                    <a:bodyPr/>
+                    <a:lstStyle/>
+                    <a:p>
+                      <a:pPr algn="l"/>
+                      <a:r>
+                        <a:rPr sz="900" b="0" i="0">
+                          <a:solidFill>
+                            <a:srgbClr val="262626"/>
+                          </a:solidFill>
+                          <a:latin typeface="Garamond"/>
+                          <a:cs typeface="Garamond"/>
+                        </a:rPr>
+                        <a:t>11.5%</a:t>
+                      </a:r>
+                    </a:p>
+                  </a:txBody>
+                  <a:tcPr anchor="ctr" marT="12700" marB="12700">
+                    <a:solidFill>
+                      <a:srgbClr val="FFFFFF"/>
+                    </a:solidFill>
+                  </a:tcPr>
+                </a:tc>
+                <a:tc>
+                  <a:txBody>
+                    <a:bodyPr/>
+                    <a:lstStyle/>
+                    <a:p>
+                      <a:pPr algn="r"/>
+                      <a:r>
+                        <a:rPr sz="900" b="0" i="0">
+                          <a:solidFill>
+                            <a:srgbClr val="262626"/>
+                          </a:solidFill>
+                          <a:latin typeface="Garamond"/>
+                          <a:cs typeface="Garamond"/>
+                        </a:rPr>
+                        <a:t>$92</a:t>
+                      </a:r>
+                    </a:p>
+                  </a:txBody>
+                  <a:tcPr anchor="ctr" marT="12700" marB="12700">
+                    <a:solidFill>
+                      <a:srgbClr val="FFFFFF"/>
+                    </a:solidFill>
+                  </a:tcPr>
+                </a:tc>
+                <a:tc>
+                  <a:txBody>
+                    <a:bodyPr/>
+                    <a:lstStyle/>
+                    <a:p>
+                      <a:pPr algn="r"/>
+                      <a:r>
+                        <a:rPr sz="900" b="0" i="0">
+                          <a:solidFill>
+                            <a:srgbClr val="262626"/>
+                          </a:solidFill>
+                          <a:latin typeface="Garamond"/>
+                          <a:cs typeface="Garamond"/>
+                        </a:rPr>
+                        <a:t>$95</a:t>
+                      </a:r>
+                    </a:p>
+                  </a:txBody>
+                  <a:tcPr anchor="ctr" marT="12700" marB="12700">
+                    <a:solidFill>
+                      <a:srgbClr val="FFFFFF"/>
+                    </a:solidFill>
+                  </a:tcPr>
+                </a:tc>
+                <a:tc>
+                  <a:txBody>
+                    <a:bodyPr/>
+                    <a:lstStyle/>
+                    <a:p>
+                      <a:pPr algn="r"/>
+                      <a:r>
+                        <a:rPr sz="900" b="0" i="0">
+                          <a:solidFill>
+                            <a:srgbClr val="262626"/>
+                          </a:solidFill>
+                          <a:latin typeface="Garamond"/>
+                          <a:cs typeface="Garamond"/>
+                        </a:rPr>
+                        <a:t>$97</a:t>
+                      </a:r>
+                    </a:p>
+                  </a:txBody>
+                  <a:tcPr anchor="ctr" marT="12700" marB="12700">
+                    <a:solidFill>
+                      <a:srgbClr val="FFFFFF"/>
+                    </a:solidFill>
+                  </a:tcPr>
+                </a:tc>
+                <a:tc>
+                  <a:txBody>
+                    <a:bodyPr/>
+                    <a:lstStyle/>
+                    <a:p>
+                      <a:pPr algn="r"/>
+                      <a:r>
+                        <a:rPr sz="900" b="0" i="0">
+                          <a:solidFill>
+                            <a:srgbClr val="262626"/>
+                          </a:solidFill>
+                          <a:latin typeface="Garamond"/>
+                          <a:cs typeface="Garamond"/>
+                        </a:rPr>
+                        <a:t>$99</a:t>
+                      </a:r>
+                    </a:p>
+                  </a:txBody>
+                  <a:tcPr anchor="ctr" marT="12700" marB="12700">
+                    <a:solidFill>
+                      <a:srgbClr val="FFFFFF"/>
+                    </a:solidFill>
+                  </a:tcPr>
+                </a:tc>
+                <a:tc>
+                  <a:txBody>
+                    <a:bodyPr/>
+                    <a:lstStyle/>
+                    <a:p>
+                      <a:pPr algn="r"/>
+                      <a:r>
+                        <a:rPr sz="900" b="0" i="0">
+                          <a:solidFill>
+                            <a:srgbClr val="262626"/>
+                          </a:solidFill>
+                          <a:latin typeface="Garamond"/>
+                          <a:cs typeface="Garamond"/>
+                        </a:rPr>
+                        <a:t>$103</a:t>
+                      </a:r>
+                    </a:p>
+                  </a:txBody>
+                  <a:tcPr anchor="ctr" marT="12700" marB="12700">
+                    <a:solidFill>
+                      <a:srgbClr val="FFFFFF"/>
+                    </a:solidFill>
+                  </a:tcPr>
+                </a:tc>
+              </a:tr>
+            </a:tbl>
+          </a:graphicData>
+        </a:graphic>
+      </p:graphicFrame>
+      <p:sp>
+        <p:nvSpPr>
+          <p:cNvPr id="16" name="TextBox 15"/>
+          <p:cNvSpPr txBox="1"/>
+          <p:nvPr/>
+        </p:nvSpPr>
+        <p:spPr>
+          <a:xfrm>
+            <a:off x="7406640" y="5166360"/>
+            <a:ext cx="4343400" cy="960120"/>
+          </a:xfrm>
+          <a:prstGeom prst="rect">
+            <a:avLst/>
+          </a:prstGeom>
+          <a:noFill/>
+        </p:spPr>
+        <p:txBody>
+          <a:bodyPr wrap="square" anchor="t" lIns="25400" rIns="25400" tIns="12700" bIns="12700">
+            <a:spAutoFit/>
+          </a:bodyPr>
+          <a:lstStyle/>
+          <a:p>
+            <a:pPr algn="l">
+              <a:spcBef>
+                <a:spcPts val="0"/>
+              </a:spcBef>
+              <a:spcAft>
+                <a:spcPts val="200"/>
+              </a:spcAft>
+              <a:buNone/>
+            </a:pPr>
+            <a:r>
+              <a:rPr sz="900" b="1" i="0">
+                <a:solidFill>
+                  <a:srgbClr val="990000"/>
+                </a:solidFill>
+                <a:latin typeface="Garamond"/>
+                <a:cs typeface="Garamond"/>
+              </a:rPr>
+              <a:t>Base-case cell</a:t>
+            </a:r>
+          </a:p>
+          <a:p>
+            <a:pPr algn="l">
+              <a:spcBef>
+                <a:spcPts val="0"/>
+              </a:spcBef>
+              <a:spcAft>
+                <a:spcPts val="0"/>
+              </a:spcAft>
+              <a:buNone/>
+            </a:pPr>
+            <a:r>
+              <a:rPr sz="900" b="0" i="0">
                 <a:solidFill>
                   <a:srgbClr val="262626"/>
                 </a:solidFill>
                 <a:latin typeface="Garamond"/>
                 <a:cs typeface="Garamond"/>
               </a:rPr>
-              <a:t>PitchBook core mean (ex-UAA, ex-WSM/MOV/LZB) is the current athletic/apparel tape. UAA has negative EBITDA so it is out of the average</a:t>
-            </a:r>
-          </a:p>
-          <a:p>
-            <a:pPr algn="l" indent="-152400" marL="177800">
-              <a:spcBef>
-                <a:spcPts val="0"/>
-              </a:spcBef>
-              <a:spcAft>
-                <a:spcPts val="300"/>
-              </a:spcAft>
-              <a:buFont typeface="Garamond"/>
-              <a:buChar char="•"/>
-            </a:pPr>
-            <a:r>
-              <a:rPr sz="1250" b="0" i="0">
-                <a:solidFill>
-                  <a:srgbClr val="262626"/>
-                </a:solidFill>
-                <a:latin typeface="Garamond"/>
-                <a:cs typeface="Garamond"/>
-              </a:rPr>
-              <a:t>Selected TV is the Gordon identity (~7.4x FY30 EBITDA at base WACC/g). A 2.25% g year is not today’s NKE 12.7x or WSM 15.4x</a:t>
-            </a:r>
-          </a:p>
-          <a:p>
-            <a:pPr algn="l" indent="-152400" marL="177800">
-              <a:spcBef>
-                <a:spcPts val="0"/>
-              </a:spcBef>
-              <a:spcAft>
-                <a:spcPts val="0"/>
-              </a:spcAft>
-              <a:buFont typeface="Garamond"/>
-              <a:buChar char="•"/>
-            </a:pPr>
-            <a:r>
-              <a:rPr sz="1250" b="0" i="0">
-                <a:solidFill>
-                  <a:srgbClr val="262626"/>
-                </a:solidFill>
-                <a:latin typeface="Garamond"/>
-                <a:cs typeface="Garamond"/>
-              </a:rPr>
-              <a:t>Alo EV/EBITDA is still n.a. Implied 5.0x is EV/Sales on an unclosed $10bn ask — not in this PitchBook set and not the TV</a:t>
+              <a:t>WACC 9.0% × g 2.25% → $134. Grid brackets ±100bps WACC and 1.5–3.0% g.</a:t>
             </a:r>
           </a:p>
         </p:txBody>
@@ -24174,7 +25532,7 @@
                 <a:latin typeface="Garamond"/>
                 <a:cs typeface="Garamond"/>
               </a:rPr>
-              <a:t>Appendix — Bull / Bear Scenarios</a:t>
+              <a:t>Comparable Companies</a:t>
             </a:r>
           </a:p>
         </p:txBody>
@@ -24218,7 +25576,7 @@
                 <a:latin typeface="Garamond"/>
                 <a:cs typeface="Garamond"/>
               </a:rPr>
-              <a:t>Asymmetric payoff: limited downside, substantial upside</a:t>
+              <a:t>PitchBook pubcomps are the current tape; Alo still has no EV/EBITDA</a:t>
             </a:r>
           </a:p>
         </p:txBody>
@@ -24306,7 +25664,7 @@
                 <a:latin typeface="Garamond"/>
                 <a:cs typeface="Garamond"/>
               </a:rPr>
-              <a:t>Source: GIS DCF model (scenario tab)</a:t>
+              <a:t>Source: PitchBook Comps Set 04-Sep-2026 (EV/EBITDA = daily EV / TTM EBITDA); Alo ask $10bn / Forbes ~$2bn</a:t>
             </a:r>
           </a:p>
         </p:txBody>
@@ -24351,6 +25709,1556 @@
                 <a:cs typeface="Garamond"/>
               </a:rPr>
               <a:t>21</a:t>
+            </a:r>
+          </a:p>
+        </p:txBody>
+      </p:sp>
+      <p:graphicFrame>
+        <p:nvGraphicFramePr>
+          <p:cNvPr id="8" name="Table 7"/>
+          <p:cNvGraphicFramePr>
+            <a:graphicFrameLocks noGrp="1"/>
+          </p:cNvGraphicFramePr>
+          <p:nvPr/>
+        </p:nvGraphicFramePr>
+        <p:xfrm>
+          <a:off x="457200" y="1097280"/>
+          <a:ext cx="11292836" cy="3566160"/>
+        </p:xfrm>
+        <a:graphic>
+          <a:graphicData uri="http://schemas.openxmlformats.org/drawingml/2006/table">
+            <a:tbl>
+              <a:tblPr firstRow="1" bandRow="1">
+                <a:tableStyleId>{5C22544A-7EE6-4342-B048-85BDC9FD1C3A}</a:tableStyleId>
+              </a:tblPr>
+              <a:tblGrid>
+                <a:gridCol w="3108960"/>
+                <a:gridCol w="2045969"/>
+                <a:gridCol w="2045969"/>
+                <a:gridCol w="2045969"/>
+                <a:gridCol w="2045969"/>
+              </a:tblGrid>
+              <a:tr h="396240">
+                <a:tc>
+                  <a:txBody>
+                    <a:bodyPr/>
+                    <a:lstStyle/>
+                    <a:p>
+                      <a:pPr algn="l"/>
+                      <a:r>
+                        <a:rPr sz="1100" b="1" i="0">
+                          <a:solidFill>
+                            <a:srgbClr val="FFFFFF"/>
+                          </a:solidFill>
+                          <a:latin typeface="Garamond"/>
+                          <a:cs typeface="Garamond"/>
+                        </a:rPr>
+                        <a:t>Company</a:t>
+                      </a:r>
+                    </a:p>
+                  </a:txBody>
+                  <a:tcPr anchor="ctr">
+                    <a:solidFill>
+                      <a:srgbClr val="1F2A44"/>
+                    </a:solidFill>
+                  </a:tcPr>
+                </a:tc>
+                <a:tc>
+                  <a:txBody>
+                    <a:bodyPr/>
+                    <a:lstStyle/>
+                    <a:p>
+                      <a:pPr algn="r"/>
+                      <a:r>
+                        <a:rPr sz="1100" b="1" i="0">
+                          <a:solidFill>
+                            <a:srgbClr val="FFFFFF"/>
+                          </a:solidFill>
+                          <a:latin typeface="Garamond"/>
+                          <a:cs typeface="Garamond"/>
+                        </a:rPr>
+                        <a:t>EV/EBITDA</a:t>
+                      </a:r>
+                    </a:p>
+                  </a:txBody>
+                  <a:tcPr anchor="ctr">
+                    <a:solidFill>
+                      <a:srgbClr val="1F2A44"/>
+                    </a:solidFill>
+                  </a:tcPr>
+                </a:tc>
+                <a:tc>
+                  <a:txBody>
+                    <a:bodyPr/>
+                    <a:lstStyle/>
+                    <a:p>
+                      <a:pPr algn="r"/>
+                      <a:r>
+                        <a:rPr sz="1100" b="1" i="0">
+                          <a:solidFill>
+                            <a:srgbClr val="FFFFFF"/>
+                          </a:solidFill>
+                          <a:latin typeface="Garamond"/>
+                          <a:cs typeface="Garamond"/>
+                        </a:rPr>
+                        <a:t>P/E</a:t>
+                      </a:r>
+                    </a:p>
+                  </a:txBody>
+                  <a:tcPr anchor="ctr">
+                    <a:solidFill>
+                      <a:srgbClr val="1F2A44"/>
+                    </a:solidFill>
+                  </a:tcPr>
+                </a:tc>
+                <a:tc>
+                  <a:txBody>
+                    <a:bodyPr/>
+                    <a:lstStyle/>
+                    <a:p>
+                      <a:pPr algn="r"/>
+                      <a:r>
+                        <a:rPr sz="1100" b="1" i="0">
+                          <a:solidFill>
+                            <a:srgbClr val="FFFFFF"/>
+                          </a:solidFill>
+                          <a:latin typeface="Garamond"/>
+                          <a:cs typeface="Garamond"/>
+                        </a:rPr>
+                        <a:t>EV ($000)</a:t>
+                      </a:r>
+                    </a:p>
+                  </a:txBody>
+                  <a:tcPr anchor="ctr">
+                    <a:solidFill>
+                      <a:srgbClr val="1F2A44"/>
+                    </a:solidFill>
+                  </a:tcPr>
+                </a:tc>
+                <a:tc>
+                  <a:txBody>
+                    <a:bodyPr/>
+                    <a:lstStyle/>
+                    <a:p>
+                      <a:pPr algn="r"/>
+                      <a:r>
+                        <a:rPr sz="1100" b="1" i="0">
+                          <a:solidFill>
+                            <a:srgbClr val="FFFFFF"/>
+                          </a:solidFill>
+                          <a:latin typeface="Garamond"/>
+                          <a:cs typeface="Garamond"/>
+                        </a:rPr>
+                        <a:t>EBITDA ($000)</a:t>
+                      </a:r>
+                    </a:p>
+                  </a:txBody>
+                  <a:tcPr anchor="ctr">
+                    <a:solidFill>
+                      <a:srgbClr val="1F2A44"/>
+                    </a:solidFill>
+                  </a:tcPr>
+                </a:tc>
+              </a:tr>
+              <a:tr h="396240">
+                <a:tc>
+                  <a:txBody>
+                    <a:bodyPr/>
+                    <a:lstStyle/>
+                    <a:p>
+                      <a:pPr algn="l"/>
+                      <a:r>
+                        <a:rPr sz="1050" b="1" i="0">
+                          <a:solidFill>
+                            <a:srgbClr val="1F2A44"/>
+                          </a:solidFill>
+                          <a:latin typeface="Garamond"/>
+                          <a:cs typeface="Garamond"/>
+                        </a:rPr>
+                        <a:t>lululemon (LULU)</a:t>
+                      </a:r>
+                    </a:p>
+                  </a:txBody>
+                  <a:tcPr anchor="ctr" marT="12700" marB="12700">
+                    <a:solidFill>
+                      <a:srgbClr val="FFFFFF"/>
+                    </a:solidFill>
+                  </a:tcPr>
+                </a:tc>
+                <a:tc>
+                  <a:txBody>
+                    <a:bodyPr/>
+                    <a:lstStyle/>
+                    <a:p>
+                      <a:pPr algn="r"/>
+                      <a:r>
+                        <a:rPr sz="1050" b="1" i="0">
+                          <a:solidFill>
+                            <a:srgbClr val="1F2A44"/>
+                          </a:solidFill>
+                          <a:latin typeface="Garamond"/>
+                          <a:cs typeface="Garamond"/>
+                        </a:rPr>
+                        <a:t>4.7x</a:t>
+                      </a:r>
+                    </a:p>
+                  </a:txBody>
+                  <a:tcPr anchor="ctr" marT="12700" marB="12700">
+                    <a:solidFill>
+                      <a:srgbClr val="FFFFFF"/>
+                    </a:solidFill>
+                  </a:tcPr>
+                </a:tc>
+                <a:tc>
+                  <a:txBody>
+                    <a:bodyPr/>
+                    <a:lstStyle/>
+                    <a:p>
+                      <a:pPr algn="r"/>
+                      <a:r>
+                        <a:rPr sz="1050" b="1" i="0">
+                          <a:solidFill>
+                            <a:srgbClr val="1F2A44"/>
+                          </a:solidFill>
+                          <a:latin typeface="Garamond"/>
+                          <a:cs typeface="Garamond"/>
+                        </a:rPr>
+                        <a:t>8.3x</a:t>
+                      </a:r>
+                    </a:p>
+                  </a:txBody>
+                  <a:tcPr anchor="ctr" marT="12700" marB="12700">
+                    <a:solidFill>
+                      <a:srgbClr val="FFFFFF"/>
+                    </a:solidFill>
+                  </a:tcPr>
+                </a:tc>
+                <a:tc>
+                  <a:txBody>
+                    <a:bodyPr/>
+                    <a:lstStyle/>
+                    <a:p>
+                      <a:pPr algn="r"/>
+                      <a:r>
+                        <a:rPr sz="1050" b="1" i="0">
+                          <a:solidFill>
+                            <a:srgbClr val="1F2A44"/>
+                          </a:solidFill>
+                          <a:latin typeface="Garamond"/>
+                          <a:cs typeface="Garamond"/>
+                        </a:rPr>
+                        <a:t>11,890,440</a:t>
+                      </a:r>
+                    </a:p>
+                  </a:txBody>
+                  <a:tcPr anchor="ctr" marT="12700" marB="12700">
+                    <a:solidFill>
+                      <a:srgbClr val="FFFFFF"/>
+                    </a:solidFill>
+                  </a:tcPr>
+                </a:tc>
+                <a:tc>
+                  <a:txBody>
+                    <a:bodyPr/>
+                    <a:lstStyle/>
+                    <a:p>
+                      <a:pPr algn="r"/>
+                      <a:r>
+                        <a:rPr sz="1050" b="1" i="0">
+                          <a:solidFill>
+                            <a:srgbClr val="1F2A44"/>
+                          </a:solidFill>
+                          <a:latin typeface="Garamond"/>
+                          <a:cs typeface="Garamond"/>
+                        </a:rPr>
+                        <a:t>2,548,084</a:t>
+                      </a:r>
+                    </a:p>
+                  </a:txBody>
+                  <a:tcPr anchor="ctr" marT="12700" marB="12700">
+                    <a:solidFill>
+                      <a:srgbClr val="FFFFFF"/>
+                    </a:solidFill>
+                  </a:tcPr>
+                </a:tc>
+              </a:tr>
+              <a:tr h="396240">
+                <a:tc>
+                  <a:txBody>
+                    <a:bodyPr/>
+                    <a:lstStyle/>
+                    <a:p>
+                      <a:pPr algn="l"/>
+                      <a:r>
+                        <a:rPr sz="1050" b="0" i="0">
+                          <a:solidFill>
+                            <a:srgbClr val="262626"/>
+                          </a:solidFill>
+                          <a:latin typeface="Garamond"/>
+                          <a:cs typeface="Garamond"/>
+                        </a:rPr>
+                        <a:t>Nike (NKE)</a:t>
+                      </a:r>
+                    </a:p>
+                  </a:txBody>
+                  <a:tcPr anchor="ctr" marT="12700" marB="12700">
+                    <a:solidFill>
+                      <a:srgbClr val="F0F1F3"/>
+                    </a:solidFill>
+                  </a:tcPr>
+                </a:tc>
+                <a:tc>
+                  <a:txBody>
+                    <a:bodyPr/>
+                    <a:lstStyle/>
+                    <a:p>
+                      <a:pPr algn="r"/>
+                      <a:r>
+                        <a:rPr sz="1050" b="0" i="0">
+                          <a:solidFill>
+                            <a:srgbClr val="262626"/>
+                          </a:solidFill>
+                          <a:latin typeface="Garamond"/>
+                          <a:cs typeface="Garamond"/>
+                        </a:rPr>
+                        <a:t>12.7x</a:t>
+                      </a:r>
+                    </a:p>
+                  </a:txBody>
+                  <a:tcPr anchor="ctr" marT="12700" marB="12700">
+                    <a:solidFill>
+                      <a:srgbClr val="F0F1F3"/>
+                    </a:solidFill>
+                  </a:tcPr>
+                </a:tc>
+                <a:tc>
+                  <a:txBody>
+                    <a:bodyPr/>
+                    <a:lstStyle/>
+                    <a:p>
+                      <a:pPr algn="r"/>
+                      <a:r>
+                        <a:rPr sz="1050" b="0" i="0">
+                          <a:solidFill>
+                            <a:srgbClr val="262626"/>
+                          </a:solidFill>
+                          <a:latin typeface="Garamond"/>
+                          <a:cs typeface="Garamond"/>
+                        </a:rPr>
+                        <a:t>18.3x</a:t>
+                      </a:r>
+                    </a:p>
+                  </a:txBody>
+                  <a:tcPr anchor="ctr" marT="12700" marB="12700">
+                    <a:solidFill>
+                      <a:srgbClr val="F0F1F3"/>
+                    </a:solidFill>
+                  </a:tcPr>
+                </a:tc>
+                <a:tc>
+                  <a:txBody>
+                    <a:bodyPr/>
+                    <a:lstStyle/>
+                    <a:p>
+                      <a:pPr algn="r"/>
+                      <a:r>
+                        <a:rPr sz="1050" b="0" i="0">
+                          <a:solidFill>
+                            <a:srgbClr val="262626"/>
+                          </a:solidFill>
+                          <a:latin typeface="Garamond"/>
+                          <a:cs typeface="Garamond"/>
+                        </a:rPr>
+                        <a:t>58,972,350</a:t>
+                      </a:r>
+                    </a:p>
+                  </a:txBody>
+                  <a:tcPr anchor="ctr" marT="12700" marB="12700">
+                    <a:solidFill>
+                      <a:srgbClr val="F0F1F3"/>
+                    </a:solidFill>
+                  </a:tcPr>
+                </a:tc>
+                <a:tc>
+                  <a:txBody>
+                    <a:bodyPr/>
+                    <a:lstStyle/>
+                    <a:p>
+                      <a:pPr algn="r"/>
+                      <a:r>
+                        <a:rPr sz="1050" b="0" i="0">
+                          <a:solidFill>
+                            <a:srgbClr val="262626"/>
+                          </a:solidFill>
+                          <a:latin typeface="Garamond"/>
+                          <a:cs typeface="Garamond"/>
+                        </a:rPr>
+                        <a:t>4,647,000</a:t>
+                      </a:r>
+                    </a:p>
+                  </a:txBody>
+                  <a:tcPr anchor="ctr" marT="12700" marB="12700">
+                    <a:solidFill>
+                      <a:srgbClr val="F0F1F3"/>
+                    </a:solidFill>
+                  </a:tcPr>
+                </a:tc>
+              </a:tr>
+              <a:tr h="396240">
+                <a:tc>
+                  <a:txBody>
+                    <a:bodyPr/>
+                    <a:lstStyle/>
+                    <a:p>
+                      <a:pPr algn="l"/>
+                      <a:r>
+                        <a:rPr sz="1050" b="0" i="0">
+                          <a:solidFill>
+                            <a:srgbClr val="262626"/>
+                          </a:solidFill>
+                          <a:latin typeface="Garamond"/>
+                          <a:cs typeface="Garamond"/>
+                        </a:rPr>
+                        <a:t>adidas (ADS)</a:t>
+                      </a:r>
+                    </a:p>
+                  </a:txBody>
+                  <a:tcPr anchor="ctr" marT="12700" marB="12700">
+                    <a:solidFill>
+                      <a:srgbClr val="FFFFFF"/>
+                    </a:solidFill>
+                  </a:tcPr>
+                </a:tc>
+                <a:tc>
+                  <a:txBody>
+                    <a:bodyPr/>
+                    <a:lstStyle/>
+                    <a:p>
+                      <a:pPr algn="r"/>
+                      <a:r>
+                        <a:rPr sz="1050" b="0" i="0">
+                          <a:solidFill>
+                            <a:srgbClr val="262626"/>
+                          </a:solidFill>
+                          <a:latin typeface="Garamond"/>
+                          <a:cs typeface="Garamond"/>
+                        </a:rPr>
+                        <a:t>9.2x</a:t>
+                      </a:r>
+                    </a:p>
+                  </a:txBody>
+                  <a:tcPr anchor="ctr" marT="12700" marB="12700">
+                    <a:solidFill>
+                      <a:srgbClr val="FFFFFF"/>
+                    </a:solidFill>
+                  </a:tcPr>
+                </a:tc>
+                <a:tc>
+                  <a:txBody>
+                    <a:bodyPr/>
+                    <a:lstStyle/>
+                    <a:p>
+                      <a:pPr algn="r"/>
+                      <a:r>
+                        <a:rPr sz="1050" b="0" i="0">
+                          <a:solidFill>
+                            <a:srgbClr val="262626"/>
+                          </a:solidFill>
+                          <a:latin typeface="Garamond"/>
+                          <a:cs typeface="Garamond"/>
+                        </a:rPr>
+                        <a:t>19.1x</a:t>
+                      </a:r>
+                    </a:p>
+                  </a:txBody>
+                  <a:tcPr anchor="ctr" marT="12700" marB="12700">
+                    <a:solidFill>
+                      <a:srgbClr val="FFFFFF"/>
+                    </a:solidFill>
+                  </a:tcPr>
+                </a:tc>
+                <a:tc>
+                  <a:txBody>
+                    <a:bodyPr/>
+                    <a:lstStyle/>
+                    <a:p>
+                      <a:pPr algn="r"/>
+                      <a:r>
+                        <a:rPr sz="1050" b="0" i="0">
+                          <a:solidFill>
+                            <a:srgbClr val="262626"/>
+                          </a:solidFill>
+                          <a:latin typeface="Garamond"/>
+                          <a:cs typeface="Garamond"/>
+                        </a:rPr>
+                        <a:t>35,661,944</a:t>
+                      </a:r>
+                    </a:p>
+                  </a:txBody>
+                  <a:tcPr anchor="ctr" marT="12700" marB="12700">
+                    <a:solidFill>
+                      <a:srgbClr val="FFFFFF"/>
+                    </a:solidFill>
+                  </a:tcPr>
+                </a:tc>
+                <a:tc>
+                  <a:txBody>
+                    <a:bodyPr/>
+                    <a:lstStyle/>
+                    <a:p>
+                      <a:pPr algn="r"/>
+                      <a:r>
+                        <a:rPr sz="1050" b="0" i="0">
+                          <a:solidFill>
+                            <a:srgbClr val="262626"/>
+                          </a:solidFill>
+                          <a:latin typeface="Garamond"/>
+                          <a:cs typeface="Garamond"/>
+                        </a:rPr>
+                        <a:t>3,857,684</a:t>
+                      </a:r>
+                    </a:p>
+                  </a:txBody>
+                  <a:tcPr anchor="ctr" marT="12700" marB="12700">
+                    <a:solidFill>
+                      <a:srgbClr val="FFFFFF"/>
+                    </a:solidFill>
+                  </a:tcPr>
+                </a:tc>
+              </a:tr>
+              <a:tr h="396240">
+                <a:tc>
+                  <a:txBody>
+                    <a:bodyPr/>
+                    <a:lstStyle/>
+                    <a:p>
+                      <a:pPr algn="l"/>
+                      <a:r>
+                        <a:rPr sz="1050" b="0" i="0">
+                          <a:solidFill>
+                            <a:srgbClr val="262626"/>
+                          </a:solidFill>
+                          <a:latin typeface="Garamond"/>
+                          <a:cs typeface="Garamond"/>
+                        </a:rPr>
+                        <a:t>Deckers (DECK)</a:t>
+                      </a:r>
+                    </a:p>
+                  </a:txBody>
+                  <a:tcPr anchor="ctr" marT="12700" marB="12700">
+                    <a:solidFill>
+                      <a:srgbClr val="F0F1F3"/>
+                    </a:solidFill>
+                  </a:tcPr>
+                </a:tc>
+                <a:tc>
+                  <a:txBody>
+                    <a:bodyPr/>
+                    <a:lstStyle/>
+                    <a:p>
+                      <a:pPr algn="r"/>
+                      <a:r>
+                        <a:rPr sz="1050" b="0" i="0">
+                          <a:solidFill>
+                            <a:srgbClr val="262626"/>
+                          </a:solidFill>
+                          <a:latin typeface="Garamond"/>
+                          <a:cs typeface="Garamond"/>
+                        </a:rPr>
+                        <a:t>7.9x</a:t>
+                      </a:r>
+                    </a:p>
+                  </a:txBody>
+                  <a:tcPr anchor="ctr" marT="12700" marB="12700">
+                    <a:solidFill>
+                      <a:srgbClr val="F0F1F3"/>
+                    </a:solidFill>
+                  </a:tcPr>
+                </a:tc>
+                <a:tc>
+                  <a:txBody>
+                    <a:bodyPr/>
+                    <a:lstStyle/>
+                    <a:p>
+                      <a:pPr algn="r"/>
+                      <a:r>
+                        <a:rPr sz="1050" b="0" i="0">
+                          <a:solidFill>
+                            <a:srgbClr val="262626"/>
+                          </a:solidFill>
+                          <a:latin typeface="Garamond"/>
+                          <a:cs typeface="Garamond"/>
+                        </a:rPr>
+                        <a:t>12.1x</a:t>
+                      </a:r>
+                    </a:p>
+                  </a:txBody>
+                  <a:tcPr anchor="ctr" marT="12700" marB="12700">
+                    <a:solidFill>
+                      <a:srgbClr val="F0F1F3"/>
+                    </a:solidFill>
+                  </a:tcPr>
+                </a:tc>
+                <a:tc>
+                  <a:txBody>
+                    <a:bodyPr/>
+                    <a:lstStyle/>
+                    <a:p>
+                      <a:pPr algn="r"/>
+                      <a:r>
+                        <a:rPr sz="1050" b="0" i="0">
+                          <a:solidFill>
+                            <a:srgbClr val="262626"/>
+                          </a:solidFill>
+                          <a:latin typeface="Garamond"/>
+                          <a:cs typeface="Garamond"/>
+                        </a:rPr>
+                        <a:t>10,555,510</a:t>
+                      </a:r>
+                    </a:p>
+                  </a:txBody>
+                  <a:tcPr anchor="ctr" marT="12700" marB="12700">
+                    <a:solidFill>
+                      <a:srgbClr val="F0F1F3"/>
+                    </a:solidFill>
+                  </a:tcPr>
+                </a:tc>
+                <a:tc>
+                  <a:txBody>
+                    <a:bodyPr/>
+                    <a:lstStyle/>
+                    <a:p>
+                      <a:pPr algn="r"/>
+                      <a:r>
+                        <a:rPr sz="1050" b="0" i="0">
+                          <a:solidFill>
+                            <a:srgbClr val="262626"/>
+                          </a:solidFill>
+                          <a:latin typeface="Garamond"/>
+                          <a:cs typeface="Garamond"/>
+                        </a:rPr>
+                        <a:t>1,329,439</a:t>
+                      </a:r>
+                    </a:p>
+                  </a:txBody>
+                  <a:tcPr anchor="ctr" marT="12700" marB="12700">
+                    <a:solidFill>
+                      <a:srgbClr val="F0F1F3"/>
+                    </a:solidFill>
+                  </a:tcPr>
+                </a:tc>
+              </a:tr>
+              <a:tr h="396240">
+                <a:tc>
+                  <a:txBody>
+                    <a:bodyPr/>
+                    <a:lstStyle/>
+                    <a:p>
+                      <a:pPr algn="l"/>
+                      <a:r>
+                        <a:rPr sz="1050" b="0" i="0">
+                          <a:solidFill>
+                            <a:srgbClr val="262626"/>
+                          </a:solidFill>
+                          <a:latin typeface="Garamond"/>
+                          <a:cs typeface="Garamond"/>
+                        </a:rPr>
+                        <a:t>Crocs (CROX)</a:t>
+                      </a:r>
+                    </a:p>
+                  </a:txBody>
+                  <a:tcPr anchor="ctr" marT="12700" marB="12700">
+                    <a:solidFill>
+                      <a:srgbClr val="FFFFFF"/>
+                    </a:solidFill>
+                  </a:tcPr>
+                </a:tc>
+                <a:tc>
+                  <a:txBody>
+                    <a:bodyPr/>
+                    <a:lstStyle/>
+                    <a:p>
+                      <a:pPr algn="r"/>
+                      <a:r>
+                        <a:rPr sz="1050" b="0" i="0">
+                          <a:solidFill>
+                            <a:srgbClr val="262626"/>
+                          </a:solidFill>
+                          <a:latin typeface="Garamond"/>
+                          <a:cs typeface="Garamond"/>
+                        </a:rPr>
+                        <a:t>7.8x</a:t>
+                      </a:r>
+                    </a:p>
+                  </a:txBody>
+                  <a:tcPr anchor="ctr" marT="12700" marB="12700">
+                    <a:solidFill>
+                      <a:srgbClr val="FFFFFF"/>
+                    </a:solidFill>
+                  </a:tcPr>
+                </a:tc>
+                <a:tc>
+                  <a:txBody>
+                    <a:bodyPr/>
+                    <a:lstStyle/>
+                    <a:p>
+                      <a:pPr algn="r"/>
+                      <a:r>
+                        <a:rPr sz="1050" b="0" i="0">
+                          <a:solidFill>
+                            <a:srgbClr val="262626"/>
+                          </a:solidFill>
+                          <a:latin typeface="Garamond"/>
+                          <a:cs typeface="Garamond"/>
+                        </a:rPr>
+                        <a:t>10.3x</a:t>
+                      </a:r>
+                    </a:p>
+                  </a:txBody>
+                  <a:tcPr anchor="ctr" marT="12700" marB="12700">
+                    <a:solidFill>
+                      <a:srgbClr val="FFFFFF"/>
+                    </a:solidFill>
+                  </a:tcPr>
+                </a:tc>
+                <a:tc>
+                  <a:txBody>
+                    <a:bodyPr/>
+                    <a:lstStyle/>
+                    <a:p>
+                      <a:pPr algn="r"/>
+                      <a:r>
+                        <a:rPr sz="1050" b="0" i="0">
+                          <a:solidFill>
+                            <a:srgbClr val="262626"/>
+                          </a:solidFill>
+                          <a:latin typeface="Garamond"/>
+                          <a:cs typeface="Garamond"/>
+                        </a:rPr>
+                        <a:t>7,153,911</a:t>
+                      </a:r>
+                    </a:p>
+                  </a:txBody>
+                  <a:tcPr anchor="ctr" marT="12700" marB="12700">
+                    <a:solidFill>
+                      <a:srgbClr val="FFFFFF"/>
+                    </a:solidFill>
+                  </a:tcPr>
+                </a:tc>
+                <a:tc>
+                  <a:txBody>
+                    <a:bodyPr/>
+                    <a:lstStyle/>
+                    <a:p>
+                      <a:pPr algn="r"/>
+                      <a:r>
+                        <a:rPr sz="1050" b="0" i="0">
+                          <a:solidFill>
+                            <a:srgbClr val="262626"/>
+                          </a:solidFill>
+                          <a:latin typeface="Garamond"/>
+                          <a:cs typeface="Garamond"/>
+                        </a:rPr>
+                        <a:t>922,278</a:t>
+                      </a:r>
+                    </a:p>
+                  </a:txBody>
+                  <a:tcPr anchor="ctr" marT="12700" marB="12700">
+                    <a:solidFill>
+                      <a:srgbClr val="FFFFFF"/>
+                    </a:solidFill>
+                  </a:tcPr>
+                </a:tc>
+              </a:tr>
+              <a:tr h="396240">
+                <a:tc>
+                  <a:txBody>
+                    <a:bodyPr/>
+                    <a:lstStyle/>
+                    <a:p>
+                      <a:pPr algn="l"/>
+                      <a:r>
+                        <a:rPr sz="1050" b="0" i="0">
+                          <a:solidFill>
+                            <a:srgbClr val="262626"/>
+                          </a:solidFill>
+                          <a:latin typeface="Garamond"/>
+                          <a:cs typeface="Garamond"/>
+                        </a:rPr>
+                        <a:t>Levi Strauss (LEVI)</a:t>
+                      </a:r>
+                    </a:p>
+                  </a:txBody>
+                  <a:tcPr anchor="ctr" marT="12700" marB="12700">
+                    <a:solidFill>
+                      <a:srgbClr val="F0F1F3"/>
+                    </a:solidFill>
+                  </a:tcPr>
+                </a:tc>
+                <a:tc>
+                  <a:txBody>
+                    <a:bodyPr/>
+                    <a:lstStyle/>
+                    <a:p>
+                      <a:pPr algn="r"/>
+                      <a:r>
+                        <a:rPr sz="1050" b="0" i="0">
+                          <a:solidFill>
+                            <a:srgbClr val="262626"/>
+                          </a:solidFill>
+                          <a:latin typeface="Garamond"/>
+                          <a:cs typeface="Garamond"/>
+                        </a:rPr>
+                        <a:t>9.6x</a:t>
+                      </a:r>
+                    </a:p>
+                  </a:txBody>
+                  <a:tcPr anchor="ctr" marT="12700" marB="12700">
+                    <a:solidFill>
+                      <a:srgbClr val="F0F1F3"/>
+                    </a:solidFill>
+                  </a:tcPr>
+                </a:tc>
+                <a:tc>
+                  <a:txBody>
+                    <a:bodyPr/>
+                    <a:lstStyle/>
+                    <a:p>
+                      <a:pPr algn="r"/>
+                      <a:r>
+                        <a:rPr sz="1050" b="0" i="0">
+                          <a:solidFill>
+                            <a:srgbClr val="262626"/>
+                          </a:solidFill>
+                          <a:latin typeface="Garamond"/>
+                          <a:cs typeface="Garamond"/>
+                        </a:rPr>
+                        <a:t>15.0x</a:t>
+                      </a:r>
+                    </a:p>
+                  </a:txBody>
+                  <a:tcPr anchor="ctr" marT="12700" marB="12700">
+                    <a:solidFill>
+                      <a:srgbClr val="F0F1F3"/>
+                    </a:solidFill>
+                  </a:tcPr>
+                </a:tc>
+                <a:tc>
+                  <a:txBody>
+                    <a:bodyPr/>
+                    <a:lstStyle/>
+                    <a:p>
+                      <a:pPr algn="r"/>
+                      <a:r>
+                        <a:rPr sz="1050" b="0" i="0">
+                          <a:solidFill>
+                            <a:srgbClr val="262626"/>
+                          </a:solidFill>
+                          <a:latin typeface="Garamond"/>
+                          <a:cs typeface="Garamond"/>
+                        </a:rPr>
+                        <a:t>9,422,753</a:t>
+                      </a:r>
+                    </a:p>
+                  </a:txBody>
+                  <a:tcPr anchor="ctr" marT="12700" marB="12700">
+                    <a:solidFill>
+                      <a:srgbClr val="F0F1F3"/>
+                    </a:solidFill>
+                  </a:tcPr>
+                </a:tc>
+                <a:tc>
+                  <a:txBody>
+                    <a:bodyPr/>
+                    <a:lstStyle/>
+                    <a:p>
+                      <a:pPr algn="r"/>
+                      <a:r>
+                        <a:rPr sz="1050" b="0" i="0">
+                          <a:solidFill>
+                            <a:srgbClr val="262626"/>
+                          </a:solidFill>
+                          <a:latin typeface="Garamond"/>
+                          <a:cs typeface="Garamond"/>
+                        </a:rPr>
+                        <a:t>976,700</a:t>
+                      </a:r>
+                    </a:p>
+                  </a:txBody>
+                  <a:tcPr anchor="ctr" marT="12700" marB="12700">
+                    <a:solidFill>
+                      <a:srgbClr val="F0F1F3"/>
+                    </a:solidFill>
+                  </a:tcPr>
+                </a:tc>
+              </a:tr>
+              <a:tr h="396240">
+                <a:tc>
+                  <a:txBody>
+                    <a:bodyPr/>
+                    <a:lstStyle/>
+                    <a:p>
+                      <a:pPr algn="l"/>
+                      <a:r>
+                        <a:rPr sz="1050" b="0" i="0">
+                          <a:solidFill>
+                            <a:srgbClr val="262626"/>
+                          </a:solidFill>
+                          <a:latin typeface="Garamond"/>
+                          <a:cs typeface="Garamond"/>
+                        </a:rPr>
+                        <a:t>Kontoor (KTB)</a:t>
+                      </a:r>
+                    </a:p>
+                  </a:txBody>
+                  <a:tcPr anchor="ctr" marT="12700" marB="12700">
+                    <a:solidFill>
+                      <a:srgbClr val="FFFFFF"/>
+                    </a:solidFill>
+                  </a:tcPr>
+                </a:tc>
+                <a:tc>
+                  <a:txBody>
+                    <a:bodyPr/>
+                    <a:lstStyle/>
+                    <a:p>
+                      <a:pPr algn="r"/>
+                      <a:r>
+                        <a:rPr sz="1050" b="0" i="0">
+                          <a:solidFill>
+                            <a:srgbClr val="262626"/>
+                          </a:solidFill>
+                          <a:latin typeface="Garamond"/>
+                          <a:cs typeface="Garamond"/>
+                        </a:rPr>
+                        <a:t>12.9x</a:t>
+                      </a:r>
+                    </a:p>
+                  </a:txBody>
+                  <a:tcPr anchor="ctr" marT="12700" marB="12700">
+                    <a:solidFill>
+                      <a:srgbClr val="FFFFFF"/>
+                    </a:solidFill>
+                  </a:tcPr>
+                </a:tc>
+                <a:tc>
+                  <a:txBody>
+                    <a:bodyPr/>
+                    <a:lstStyle/>
+                    <a:p>
+                      <a:pPr algn="r"/>
+                      <a:r>
+                        <a:rPr sz="1050" b="0" i="0">
+                          <a:solidFill>
+                            <a:srgbClr val="262626"/>
+                          </a:solidFill>
+                          <a:latin typeface="Garamond"/>
+                          <a:cs typeface="Garamond"/>
+                        </a:rPr>
+                        <a:t>18.0x</a:t>
+                      </a:r>
+                    </a:p>
+                  </a:txBody>
+                  <a:tcPr anchor="ctr" marT="12700" marB="12700">
+                    <a:solidFill>
+                      <a:srgbClr val="FFFFFF"/>
+                    </a:solidFill>
+                  </a:tcPr>
+                </a:tc>
+                <a:tc>
+                  <a:txBody>
+                    <a:bodyPr/>
+                    <a:lstStyle/>
+                    <a:p>
+                      <a:pPr algn="r"/>
+                      <a:r>
+                        <a:rPr sz="1050" b="0" i="0">
+                          <a:solidFill>
+                            <a:srgbClr val="262626"/>
+                          </a:solidFill>
+                          <a:latin typeface="Garamond"/>
+                          <a:cs typeface="Garamond"/>
+                        </a:rPr>
+                        <a:t>5,236,269</a:t>
+                      </a:r>
+                    </a:p>
+                  </a:txBody>
+                  <a:tcPr anchor="ctr" marT="12700" marB="12700">
+                    <a:solidFill>
+                      <a:srgbClr val="FFFFFF"/>
+                    </a:solidFill>
+                  </a:tcPr>
+                </a:tc>
+                <a:tc>
+                  <a:txBody>
+                    <a:bodyPr/>
+                    <a:lstStyle/>
+                    <a:p>
+                      <a:pPr algn="r"/>
+                      <a:r>
+                        <a:rPr sz="1050" b="0" i="0">
+                          <a:solidFill>
+                            <a:srgbClr val="262626"/>
+                          </a:solidFill>
+                          <a:latin typeface="Garamond"/>
+                          <a:cs typeface="Garamond"/>
+                        </a:rPr>
+                        <a:t>407,521</a:t>
+                      </a:r>
+                    </a:p>
+                  </a:txBody>
+                  <a:tcPr anchor="ctr" marT="12700" marB="12700">
+                    <a:solidFill>
+                      <a:srgbClr val="FFFFFF"/>
+                    </a:solidFill>
+                  </a:tcPr>
+                </a:tc>
+              </a:tr>
+              <a:tr h="396240">
+                <a:tc>
+                  <a:txBody>
+                    <a:bodyPr/>
+                    <a:lstStyle/>
+                    <a:p>
+                      <a:pPr algn="l"/>
+                      <a:r>
+                        <a:rPr sz="1050" b="0" i="0">
+                          <a:solidFill>
+                            <a:srgbClr val="262626"/>
+                          </a:solidFill>
+                          <a:latin typeface="Garamond"/>
+                          <a:cs typeface="Garamond"/>
+                        </a:rPr>
+                        <a:t>Alo Yoga (private)</a:t>
+                      </a:r>
+                    </a:p>
+                  </a:txBody>
+                  <a:tcPr anchor="ctr" marT="12700" marB="12700">
+                    <a:solidFill>
+                      <a:srgbClr val="F0F1F3"/>
+                    </a:solidFill>
+                  </a:tcPr>
+                </a:tc>
+                <a:tc>
+                  <a:txBody>
+                    <a:bodyPr/>
+                    <a:lstStyle/>
+                    <a:p>
+                      <a:pPr algn="r"/>
+                      <a:r>
+                        <a:rPr sz="1050" b="0" i="0">
+                          <a:solidFill>
+                            <a:srgbClr val="262626"/>
+                          </a:solidFill>
+                          <a:latin typeface="Garamond"/>
+                          <a:cs typeface="Garamond"/>
+                        </a:rPr>
+                        <a:t>n.a.</a:t>
+                      </a:r>
+                    </a:p>
+                  </a:txBody>
+                  <a:tcPr anchor="ctr" marT="12700" marB="12700">
+                    <a:solidFill>
+                      <a:srgbClr val="F0F1F3"/>
+                    </a:solidFill>
+                  </a:tcPr>
+                </a:tc>
+                <a:tc>
+                  <a:txBody>
+                    <a:bodyPr/>
+                    <a:lstStyle/>
+                    <a:p>
+                      <a:pPr algn="r"/>
+                      <a:r>
+                        <a:rPr sz="1050" b="0" i="0">
+                          <a:solidFill>
+                            <a:srgbClr val="262626"/>
+                          </a:solidFill>
+                          <a:latin typeface="Garamond"/>
+                          <a:cs typeface="Garamond"/>
+                        </a:rPr>
+                        <a:t>n.m.</a:t>
+                      </a:r>
+                    </a:p>
+                  </a:txBody>
+                  <a:tcPr anchor="ctr" marT="12700" marB="12700">
+                    <a:solidFill>
+                      <a:srgbClr val="F0F1F3"/>
+                    </a:solidFill>
+                  </a:tcPr>
+                </a:tc>
+                <a:tc>
+                  <a:txBody>
+                    <a:bodyPr/>
+                    <a:lstStyle/>
+                    <a:p>
+                      <a:pPr algn="r"/>
+                      <a:r>
+                        <a:rPr sz="1050" b="0" i="0">
+                          <a:solidFill>
+                            <a:srgbClr val="262626"/>
+                          </a:solidFill>
+                          <a:latin typeface="Garamond"/>
+                          <a:cs typeface="Garamond"/>
+                        </a:rPr>
+                        <a:t>—</a:t>
+                      </a:r>
+                    </a:p>
+                  </a:txBody>
+                  <a:tcPr anchor="ctr" marT="12700" marB="12700">
+                    <a:solidFill>
+                      <a:srgbClr val="F0F1F3"/>
+                    </a:solidFill>
+                  </a:tcPr>
+                </a:tc>
+                <a:tc>
+                  <a:txBody>
+                    <a:bodyPr/>
+                    <a:lstStyle/>
+                    <a:p>
+                      <a:pPr algn="r"/>
+                      <a:r>
+                        <a:rPr sz="1050" b="0" i="0">
+                          <a:solidFill>
+                            <a:srgbClr val="262626"/>
+                          </a:solidFill>
+                          <a:latin typeface="Garamond"/>
+                          <a:cs typeface="Garamond"/>
+                        </a:rPr>
+                        <a:t>—</a:t>
+                      </a:r>
+                    </a:p>
+                  </a:txBody>
+                  <a:tcPr anchor="ctr" marT="12700" marB="12700">
+                    <a:solidFill>
+                      <a:srgbClr val="F0F1F3"/>
+                    </a:solidFill>
+                  </a:tcPr>
+                </a:tc>
+              </a:tr>
+            </a:tbl>
+          </a:graphicData>
+        </a:graphic>
+      </p:graphicFrame>
+      <p:sp>
+        <p:nvSpPr>
+          <p:cNvPr id="9" name="TextBox 8"/>
+          <p:cNvSpPr txBox="1"/>
+          <p:nvPr/>
+        </p:nvSpPr>
+        <p:spPr>
+          <a:xfrm>
+            <a:off x="457200" y="4754880"/>
+            <a:ext cx="11292840" cy="1600200"/>
+          </a:xfrm>
+          <a:prstGeom prst="rect">
+            <a:avLst/>
+          </a:prstGeom>
+          <a:noFill/>
+        </p:spPr>
+        <p:txBody>
+          <a:bodyPr wrap="square" anchor="t" lIns="25400" rIns="25400" tIns="12700" bIns="12700">
+            <a:spAutoFit/>
+          </a:bodyPr>
+          <a:lstStyle/>
+          <a:p>
+            <a:pPr algn="l">
+              <a:spcBef>
+                <a:spcPts val="0"/>
+              </a:spcBef>
+              <a:spcAft>
+                <a:spcPts val="300"/>
+              </a:spcAft>
+              <a:buNone/>
+            </a:pPr>
+            <a:r>
+              <a:rPr sz="1350" b="1" i="0">
+                <a:solidFill>
+                  <a:srgbClr val="990000"/>
+                </a:solidFill>
+                <a:latin typeface="Garamond"/>
+                <a:cs typeface="Garamond"/>
+              </a:rPr>
+              <a:t>Read-through — we do not average these for terminal value</a:t>
+            </a:r>
+          </a:p>
+          <a:p>
+            <a:pPr algn="l" indent="-152400" marL="177800">
+              <a:spcBef>
+                <a:spcPts val="0"/>
+              </a:spcBef>
+              <a:spcAft>
+                <a:spcPts val="300"/>
+              </a:spcAft>
+              <a:buFont typeface="Garamond"/>
+              <a:buChar char="•"/>
+            </a:pPr>
+            <a:r>
+              <a:rPr sz="1250" b="0" i="0">
+                <a:solidFill>
+                  <a:srgbClr val="262626"/>
+                </a:solidFill>
+                <a:latin typeface="Garamond"/>
+                <a:cs typeface="Garamond"/>
+              </a:rPr>
+              <a:t>PitchBook core mean (ex-UAA, ex-WSM/MOV/LZB) is the current athletic/apparel tape. UAA has negative EBITDA so it is out of the average</a:t>
+            </a:r>
+          </a:p>
+          <a:p>
+            <a:pPr algn="l" indent="-152400" marL="177800">
+              <a:spcBef>
+                <a:spcPts val="0"/>
+              </a:spcBef>
+              <a:spcAft>
+                <a:spcPts val="300"/>
+              </a:spcAft>
+              <a:buFont typeface="Garamond"/>
+              <a:buChar char="•"/>
+            </a:pPr>
+            <a:r>
+              <a:rPr sz="1250" b="0" i="0">
+                <a:solidFill>
+                  <a:srgbClr val="262626"/>
+                </a:solidFill>
+                <a:latin typeface="Garamond"/>
+                <a:cs typeface="Garamond"/>
+              </a:rPr>
+              <a:t>Selected TV is the Gordon identity (~7.4x FY30 EBITDA at base WACC/g). A 2.25% g year is not today’s NKE 12.7x or WSM 15.4x</a:t>
+            </a:r>
+          </a:p>
+          <a:p>
+            <a:pPr algn="l" indent="-152400" marL="177800">
+              <a:spcBef>
+                <a:spcPts val="0"/>
+              </a:spcBef>
+              <a:spcAft>
+                <a:spcPts val="0"/>
+              </a:spcAft>
+              <a:buFont typeface="Garamond"/>
+              <a:buChar char="•"/>
+            </a:pPr>
+            <a:r>
+              <a:rPr sz="1250" b="0" i="0">
+                <a:solidFill>
+                  <a:srgbClr val="262626"/>
+                </a:solidFill>
+                <a:latin typeface="Garamond"/>
+                <a:cs typeface="Garamond"/>
+              </a:rPr>
+              <a:t>Alo EV/EBITDA is still n.a. Implied 5.0x is EV/Sales on an unclosed $10bn ask — not in this PitchBook set and not the TV</a:t>
+            </a:r>
+          </a:p>
+        </p:txBody>
+      </p:sp>
+    </p:spTree>
+  </p:cSld>
+  <p:clrMapOvr>
+    <a:masterClrMapping/>
+  </p:clrMapOvr>
+</p:sld>
+</file>
+
+<file path=ppt/slides/slide23.xml><?xml version="1.0" encoding="utf-8"?>
+<p:sld xmlns:a="http://schemas.openxmlformats.org/drawingml/2006/main" xmlns:p="http://schemas.openxmlformats.org/presentationml/2006/main" xmlns:r="http://schemas.openxmlformats.org/officeDocument/2006/relationships">
+  <p:cSld>
+    <p:spTree>
+      <p:nvGrpSpPr>
+        <p:cNvPr id="1" name=""/>
+        <p:cNvGrpSpPr/>
+        <p:nvPr/>
+      </p:nvGrpSpPr>
+      <p:grpSpPr/>
+      <p:sp>
+        <p:nvSpPr>
+          <p:cNvPr id="2" name="TextBox 1"/>
+          <p:cNvSpPr txBox="1"/>
+          <p:nvPr/>
+        </p:nvSpPr>
+        <p:spPr>
+          <a:xfrm>
+            <a:off x="411480" y="164592"/>
+            <a:ext cx="5943600" cy="502920"/>
+          </a:xfrm>
+          <a:prstGeom prst="rect">
+            <a:avLst/>
+          </a:prstGeom>
+          <a:noFill/>
+        </p:spPr>
+        <p:txBody>
+          <a:bodyPr wrap="square" anchor="t" lIns="25400" rIns="25400" tIns="12700" bIns="12700">
+            <a:spAutoFit/>
+          </a:bodyPr>
+          <a:lstStyle/>
+          <a:p>
+            <a:pPr algn="l">
+              <a:spcBef>
+                <a:spcPts val="0"/>
+              </a:spcBef>
+              <a:spcAft>
+                <a:spcPts val="0"/>
+              </a:spcAft>
+              <a:buNone/>
+            </a:pPr>
+            <a:r>
+              <a:rPr sz="1100" b="1" i="0">
+                <a:solidFill>
+                  <a:srgbClr val="990000"/>
+                </a:solidFill>
+                <a:latin typeface="Garamond"/>
+                <a:cs typeface="Garamond"/>
+              </a:rPr>
+              <a:t>Investment Research Division</a:t>
+            </a:r>
+          </a:p>
+          <a:p>
+            <a:pPr algn="l">
+              <a:spcBef>
+                <a:spcPts val="0"/>
+              </a:spcBef>
+              <a:spcAft>
+                <a:spcPts val="0"/>
+              </a:spcAft>
+              <a:buNone/>
+            </a:pPr>
+            <a:r>
+              <a:rPr sz="1250" b="1" i="0">
+                <a:solidFill>
+                  <a:srgbClr val="1F2A44"/>
+                </a:solidFill>
+                <a:latin typeface="Garamond"/>
+                <a:cs typeface="Garamond"/>
+              </a:rPr>
+              <a:t>lululemon athletica (NASDAQ: LULU)</a:t>
+            </a:r>
+          </a:p>
+        </p:txBody>
+      </p:sp>
+      <p:sp>
+        <p:nvSpPr>
+          <p:cNvPr id="3" name="Rectangle 2"/>
+          <p:cNvSpPr/>
+          <p:nvPr/>
+        </p:nvSpPr>
+        <p:spPr>
+          <a:xfrm>
+            <a:off x="5486400" y="201168"/>
+            <a:ext cx="6309360" cy="274320"/>
+          </a:xfrm>
+          <a:prstGeom prst="rect">
+            <a:avLst/>
+          </a:prstGeom>
+          <a:solidFill>
+            <a:srgbClr val="1F2A44"/>
+          </a:solidFill>
+          <a:ln>
+            <a:noFill/>
+          </a:ln>
+          <a:effectLst/>
+        </p:spPr>
+        <p:style>
+          <a:lnRef idx="1">
+            <a:schemeClr val="accent1"/>
+          </a:lnRef>
+          <a:fillRef idx="3">
+            <a:schemeClr val="accent1"/>
+          </a:fillRef>
+          <a:effectRef idx="2">
+            <a:schemeClr val="accent1"/>
+          </a:effectRef>
+          <a:fontRef idx="minor">
+            <a:schemeClr val="lt1"/>
+          </a:fontRef>
+        </p:style>
+        <p:txBody>
+          <a:bodyPr rtlCol="0" anchor="ctr" wrap="square" tIns="0" bIns="0" rIns="76200"/>
+          <a:lstStyle/>
+          <a:p>
+            <a:pPr algn="r"/>
+            <a:r>
+              <a:rPr sz="1500" b="1" i="0">
+                <a:solidFill>
+                  <a:srgbClr val="FFFFFF"/>
+                </a:solidFill>
+                <a:latin typeface="Garamond"/>
+                <a:cs typeface="Garamond"/>
+              </a:rPr>
+              <a:t>Appendix — Bull / Bear Scenarios</a:t>
+            </a:r>
+          </a:p>
+        </p:txBody>
+      </p:sp>
+      <p:sp>
+        <p:nvSpPr>
+          <p:cNvPr id="4" name="TextBox 3"/>
+          <p:cNvSpPr txBox="1"/>
+          <p:nvPr/>
+        </p:nvSpPr>
+        <p:spPr>
+          <a:xfrm>
+            <a:off x="411480" y="566928"/>
+            <a:ext cx="11384280" cy="310896"/>
+          </a:xfrm>
+          <a:prstGeom prst="rect">
+            <a:avLst/>
+          </a:prstGeom>
+          <a:noFill/>
+        </p:spPr>
+        <p:txBody>
+          <a:bodyPr wrap="square" anchor="t" lIns="25400" rIns="25400" tIns="12700" bIns="12700">
+            <a:spAutoFit/>
+          </a:bodyPr>
+          <a:lstStyle/>
+          <a:p>
+            <a:pPr algn="l">
+              <a:spcBef>
+                <a:spcPts val="0"/>
+              </a:spcBef>
+              <a:spcAft>
+                <a:spcPts val="0"/>
+              </a:spcAft>
+              <a:buNone/>
+            </a:pPr>
+            <a:r>
+              <a:rPr sz="1250" b="0" i="1">
+                <a:solidFill>
+                  <a:srgbClr val="8C8C8C"/>
+                </a:solidFill>
+                <a:latin typeface="Garamond"/>
+                <a:cs typeface="Garamond"/>
+              </a:rPr>
+              <a:t>Asymmetric payoff: limited downside, substantial upside</a:t>
+            </a:r>
+          </a:p>
+        </p:txBody>
+      </p:sp>
+      <p:sp>
+        <p:nvSpPr>
+          <p:cNvPr id="5" name="Rectangle 4"/>
+          <p:cNvSpPr/>
+          <p:nvPr/>
+        </p:nvSpPr>
+        <p:spPr>
+          <a:xfrm>
+            <a:off x="411480" y="896112"/>
+            <a:ext cx="11384280" cy="20320"/>
+          </a:xfrm>
+          <a:prstGeom prst="rect">
+            <a:avLst/>
+          </a:prstGeom>
+          <a:solidFill>
+            <a:srgbClr val="FFC72C"/>
+          </a:solidFill>
+          <a:ln>
+            <a:noFill/>
+          </a:ln>
+          <a:effectLst/>
+        </p:spPr>
+        <p:style>
+          <a:lnRef idx="1">
+            <a:schemeClr val="accent1"/>
+          </a:lnRef>
+          <a:fillRef idx="3">
+            <a:schemeClr val="accent1"/>
+          </a:fillRef>
+          <a:effectRef idx="2">
+            <a:schemeClr val="accent1"/>
+          </a:effectRef>
+          <a:fontRef idx="minor">
+            <a:schemeClr val="lt1"/>
+          </a:fontRef>
+        </p:style>
+        <p:txBody>
+          <a:bodyPr rtlCol="0" anchor="ctr"/>
+          <a:lstStyle/>
+          <a:p>
+            <a:pPr algn="ctr"/>
+          </a:p>
+        </p:txBody>
+      </p:sp>
+      <p:sp>
+        <p:nvSpPr>
+          <p:cNvPr id="6" name="TextBox 5"/>
+          <p:cNvSpPr txBox="1"/>
+          <p:nvPr/>
+        </p:nvSpPr>
+        <p:spPr>
+          <a:xfrm>
+            <a:off x="411480" y="6510528"/>
+            <a:ext cx="11384280" cy="274320"/>
+          </a:xfrm>
+          <a:prstGeom prst="rect">
+            <a:avLst/>
+          </a:prstGeom>
+          <a:noFill/>
+        </p:spPr>
+        <p:txBody>
+          <a:bodyPr wrap="square" anchor="t" lIns="25400" rIns="25400" tIns="12700" bIns="12700">
+            <a:spAutoFit/>
+          </a:bodyPr>
+          <a:lstStyle/>
+          <a:p>
+            <a:pPr algn="l">
+              <a:spcBef>
+                <a:spcPts val="0"/>
+              </a:spcBef>
+              <a:spcAft>
+                <a:spcPts val="0"/>
+              </a:spcAft>
+              <a:buNone/>
+            </a:pPr>
+            <a:r>
+              <a:rPr sz="850" b="0" i="0">
+                <a:solidFill>
+                  <a:srgbClr val="8C8C8C"/>
+                </a:solidFill>
+                <a:latin typeface="Garamond"/>
+                <a:cs typeface="Garamond"/>
+              </a:rPr>
+              <a:t>Source: GIS DCF model (scenario tab)</a:t>
+            </a:r>
+          </a:p>
+        </p:txBody>
+      </p:sp>
+      <p:sp>
+        <p:nvSpPr>
+          <p:cNvPr id="7" name="TextBox 6"/>
+          <p:cNvSpPr txBox="1"/>
+          <p:nvPr/>
+        </p:nvSpPr>
+        <p:spPr>
+          <a:xfrm>
+            <a:off x="11247120" y="6510528"/>
+            <a:ext cx="822960" cy="274320"/>
+          </a:xfrm>
+          <a:prstGeom prst="rect">
+            <a:avLst/>
+          </a:prstGeom>
+          <a:noFill/>
+        </p:spPr>
+        <p:txBody>
+          <a:bodyPr wrap="square" anchor="t" lIns="25400" rIns="25400" tIns="12700" bIns="12700">
+            <a:spAutoFit/>
+          </a:bodyPr>
+          <a:lstStyle/>
+          <a:p>
+            <a:pPr algn="r">
+              <a:spcBef>
+                <a:spcPts val="0"/>
+              </a:spcBef>
+              <a:spcAft>
+                <a:spcPts val="0"/>
+              </a:spcAft>
+              <a:buNone/>
+            </a:pPr>
+            <a:r>
+              <a:rPr sz="900" b="0" i="0">
+                <a:solidFill>
+                  <a:srgbClr val="8C8C8C"/>
+                </a:solidFill>
+                <a:latin typeface="Garamond"/>
+                <a:cs typeface="Garamond"/>
+              </a:rPr>
+              <a:t>22</a:t>
             </a:r>
           </a:p>
         </p:txBody>
@@ -25043,7 +27951,7 @@
 </p:sld>
 </file>
 
-<file path=ppt/slides/slide23.xml><?xml version="1.0" encoding="utf-8"?>
+<file path=ppt/slides/slide24.xml><?xml version="1.0" encoding="utf-8"?>
 <p:sld xmlns:a="http://schemas.openxmlformats.org/drawingml/2006/main" xmlns:p="http://schemas.openxmlformats.org/presentationml/2006/main" xmlns:r="http://schemas.openxmlformats.org/officeDocument/2006/relationships">
   <p:cSld>
     <p:spTree>
@@ -25343,7 +28251,7 @@
                 <a:latin typeface="Garamond"/>
                 <a:cs typeface="Garamond"/>
               </a:rPr>
-              <a:t>22</a:t>
+              <a:t>23</a:t>
             </a:r>
           </a:p>
         </p:txBody>

--- a/LULU/LULU_Investment_Pitch_Deck.pptx
+++ b/LULU/LULU_Investment_Pitch_Deck.pptx
@@ -16572,7 +16572,7 @@
         </p:nvGraphicFramePr>
         <p:xfrm>
           <a:off x="457200" y="1261872"/>
-          <a:ext cx="5532118" cy="1874519"/>
+          <a:ext cx="5532118" cy="1325880"/>
         </p:xfrm>
         <a:graphic>
           <a:graphicData uri="http://schemas.openxmlformats.org/drawingml/2006/table">
@@ -16585,7 +16585,7 @@
                 <a:gridCol w="1463039"/>
                 <a:gridCol w="1463039"/>
               </a:tblGrid>
-              <a:tr h="267788">
+              <a:tr h="265176">
                 <a:tc>
                   <a:txBody>
                     <a:bodyPr/>
@@ -16648,7 +16648,7 @@
                           <a:latin typeface="Garamond"/>
                           <a:cs typeface="Garamond"/>
                         </a:rPr>
-                        <a:t>% of capital</a:t>
+                        <a:t>WACC weight</a:t>
                       </a:r>
                     </a:p>
                   </a:txBody>
@@ -16659,7 +16659,7 @@
                   </a:tcPr>
                 </a:tc>
               </a:tr>
-              <a:tr h="267788">
+              <a:tr h="265176">
                 <a:tc>
                   <a:txBody>
                     <a:bodyPr/>
@@ -16733,7 +16733,7 @@
                   </a:tcPr>
                 </a:tc>
               </a:tr>
-              <a:tr h="267788">
+              <a:tr h="265176">
                 <a:tc>
                   <a:txBody>
                     <a:bodyPr/>
@@ -16807,7 +16807,7 @@
                   </a:tcPr>
                 </a:tc>
               </a:tr>
-              <a:tr h="267788">
+              <a:tr h="265176">
                 <a:tc>
                   <a:txBody>
                     <a:bodyPr/>
@@ -16881,7 +16881,7 @@
                   </a:tcPr>
                 </a:tc>
               </a:tr>
-              <a:tr h="267788">
+              <a:tr h="265176">
                 <a:tc>
                   <a:txBody>
                     <a:bodyPr/>
@@ -16945,154 +16945,6 @@
                           <a:cs typeface="Garamond"/>
                         </a:rPr>
                         <a:t>100.0%</a:t>
-                      </a:r>
-                    </a:p>
-                  </a:txBody>
-                  <a:tcPr anchor="ctr" marT="12700" marB="12700">
-                    <a:solidFill>
-                      <a:srgbClr val="F0F1F3"/>
-                    </a:solidFill>
-                  </a:tcPr>
-                </a:tc>
-              </a:tr>
-              <a:tr h="267788">
-                <a:tc>
-                  <a:txBody>
-                    <a:bodyPr/>
-                    <a:lstStyle/>
-                    <a:p>
-                      <a:pPr algn="l"/>
-                      <a:r>
-                        <a:rPr sz="900" b="0" i="0">
-                          <a:solidFill>
-                            <a:srgbClr val="262626"/>
-                          </a:solidFill>
-                          <a:latin typeface="Garamond"/>
-                          <a:cs typeface="Garamond"/>
-                        </a:rPr>
-                        <a:t>Cash &amp; equivalents (EV offset)</a:t>
-                      </a:r>
-                    </a:p>
-                  </a:txBody>
-                  <a:tcPr anchor="ctr" marT="12700" marB="12700">
-                    <a:solidFill>
-                      <a:srgbClr val="FFFFFF"/>
-                    </a:solidFill>
-                  </a:tcPr>
-                </a:tc>
-                <a:tc>
-                  <a:txBody>
-                    <a:bodyPr/>
-                    <a:lstStyle/>
-                    <a:p>
-                      <a:pPr algn="r"/>
-                      <a:r>
-                        <a:rPr sz="900" b="0" i="0">
-                          <a:solidFill>
-                            <a:srgbClr val="262626"/>
-                          </a:solidFill>
-                          <a:latin typeface="Garamond"/>
-                          <a:cs typeface="Garamond"/>
-                        </a:rPr>
-                        <a:t>1,807</a:t>
-                      </a:r>
-                    </a:p>
-                  </a:txBody>
-                  <a:tcPr anchor="ctr" marT="12700" marB="12700">
-                    <a:solidFill>
-                      <a:srgbClr val="FFFFFF"/>
-                    </a:solidFill>
-                  </a:tcPr>
-                </a:tc>
-                <a:tc>
-                  <a:txBody>
-                    <a:bodyPr/>
-                    <a:lstStyle/>
-                    <a:p>
-                      <a:pPr algn="r"/>
-                      <a:r>
-                        <a:rPr sz="900" b="0" i="0">
-                          <a:solidFill>
-                            <a:srgbClr val="262626"/>
-                          </a:solidFill>
-                          <a:latin typeface="Garamond"/>
-                          <a:cs typeface="Garamond"/>
-                        </a:rPr>
-                        <a:t>—</a:t>
-                      </a:r>
-                    </a:p>
-                  </a:txBody>
-                  <a:tcPr anchor="ctr" marT="12700" marB="12700">
-                    <a:solidFill>
-                      <a:srgbClr val="FFFFFF"/>
-                    </a:solidFill>
-                  </a:tcPr>
-                </a:tc>
-              </a:tr>
-              <a:tr h="267791">
-                <a:tc>
-                  <a:txBody>
-                    <a:bodyPr/>
-                    <a:lstStyle/>
-                    <a:p>
-                      <a:pPr algn="l"/>
-                      <a:r>
-                        <a:rPr sz="900" b="0" i="0">
-                          <a:solidFill>
-                            <a:srgbClr val="262626"/>
-                          </a:solidFill>
-                          <a:latin typeface="Garamond"/>
-                          <a:cs typeface="Garamond"/>
-                        </a:rPr>
-                        <a:t>Net debt (leases + funded − cash)</a:t>
-                      </a:r>
-                    </a:p>
-                  </a:txBody>
-                  <a:tcPr anchor="ctr" marT="12700" marB="12700">
-                    <a:solidFill>
-                      <a:srgbClr val="F0F1F3"/>
-                    </a:solidFill>
-                  </a:tcPr>
-                </a:tc>
-                <a:tc>
-                  <a:txBody>
-                    <a:bodyPr/>
-                    <a:lstStyle/>
-                    <a:p>
-                      <a:pPr algn="r"/>
-                      <a:r>
-                        <a:rPr sz="900" b="0" i="0">
-                          <a:solidFill>
-                            <a:srgbClr val="262626"/>
-                          </a:solidFill>
-                          <a:latin typeface="Garamond"/>
-                          <a:cs typeface="Garamond"/>
-                        </a:rPr>
-                        <a:t>-9</a:t>
-                      </a:r>
-                    </a:p>
-                  </a:txBody>
-                  <a:tcPr anchor="ctr" marT="12700" marB="12700">
-                    <a:solidFill>
-                      <a:srgbClr val="F0F1F3"/>
-                    </a:solidFill>
-                  </a:tcPr>
-                </a:tc>
-                <a:tc>
-                  <a:txBody>
-                    <a:bodyPr/>
-                    <a:lstStyle/>
-                    <a:p>
-                      <a:pPr algn="r"/>
-                      <a:r>
-                        <a:rPr sz="900" b="0" i="0">
-                          <a:solidFill>
-                            <a:srgbClr val="262626"/>
-                          </a:solidFill>
-                          <a:latin typeface="Garamond"/>
-                          <a:cs typeface="Garamond"/>
-                        </a:rPr>
-                        <a:t>—</a:t>
                       </a:r>
                     </a:p>
                   </a:txBody>
@@ -17115,8 +16967,8 @@
         </p:nvSpPr>
         <p:spPr>
           <a:xfrm>
-            <a:off x="457200" y="3218688"/>
-            <a:ext cx="5532120" cy="658368"/>
+            <a:off x="457200" y="2651760"/>
+            <a:ext cx="5532120" cy="256032"/>
           </a:xfrm>
           <a:prstGeom prst="rect">
             <a:avLst/>
@@ -17139,6 +16991,299 @@
               <a:buNone/>
             </a:pPr>
             <a:r>
+              <a:rPr sz="900" b="1" i="0">
+                <a:solidFill>
+                  <a:srgbClr val="990000"/>
+                </a:solidFill>
+                <a:latin typeface="Garamond"/>
+                <a:cs typeface="Garamond"/>
+              </a:rPr>
+              <a:t>EV BRIDGE (NOT IN WACC WEIGHTS)</a:t>
+            </a:r>
+          </a:p>
+        </p:txBody>
+      </p:sp>
+      <p:graphicFrame>
+        <p:nvGraphicFramePr>
+          <p:cNvPr id="12" name="Table 11"/>
+          <p:cNvGraphicFramePr>
+            <a:graphicFrameLocks noGrp="1"/>
+          </p:cNvGraphicFramePr>
+          <p:nvPr/>
+        </p:nvGraphicFramePr>
+        <p:xfrm>
+          <a:off x="457200" y="2852928"/>
+          <a:ext cx="5532118" cy="566928"/>
+        </p:xfrm>
+        <a:graphic>
+          <a:graphicData uri="http://schemas.openxmlformats.org/drawingml/2006/table">
+            <a:tbl>
+              <a:tblPr firstRow="1" bandRow="1">
+                <a:tableStyleId>{5C22544A-7EE6-4342-B048-85BDC9FD1C3A}</a:tableStyleId>
+              </a:tblPr>
+              <a:tblGrid>
+                <a:gridCol w="2606040"/>
+                <a:gridCol w="1463039"/>
+                <a:gridCol w="1463039"/>
+              </a:tblGrid>
+              <a:tr h="188976">
+                <a:tc>
+                  <a:txBody>
+                    <a:bodyPr/>
+                    <a:lstStyle/>
+                    <a:p>
+                      <a:pPr algn="l"/>
+                      <a:r>
+                        <a:rPr sz="850" b="1" i="0">
+                          <a:solidFill>
+                            <a:srgbClr val="FFFFFF"/>
+                          </a:solidFill>
+                          <a:latin typeface="Garamond"/>
+                          <a:cs typeface="Garamond"/>
+                        </a:rPr>
+                        <a:t>Component</a:t>
+                      </a:r>
+                    </a:p>
+                  </a:txBody>
+                  <a:tcPr anchor="ctr">
+                    <a:solidFill>
+                      <a:srgbClr val="1F2A44"/>
+                    </a:solidFill>
+                  </a:tcPr>
+                </a:tc>
+                <a:tc>
+                  <a:txBody>
+                    <a:bodyPr/>
+                    <a:lstStyle/>
+                    <a:p>
+                      <a:pPr algn="r"/>
+                      <a:r>
+                        <a:rPr sz="850" b="1" i="0">
+                          <a:solidFill>
+                            <a:srgbClr val="FFFFFF"/>
+                          </a:solidFill>
+                          <a:latin typeface="Garamond"/>
+                          <a:cs typeface="Garamond"/>
+                        </a:rPr>
+                        <a:t>US$ M</a:t>
+                      </a:r>
+                    </a:p>
+                  </a:txBody>
+                  <a:tcPr anchor="ctr">
+                    <a:solidFill>
+                      <a:srgbClr val="1F2A44"/>
+                    </a:solidFill>
+                  </a:tcPr>
+                </a:tc>
+                <a:tc>
+                  <a:txBody>
+                    <a:bodyPr/>
+                    <a:lstStyle/>
+                    <a:p>
+                      <a:pPr algn="r"/>
+                      <a:r>
+                        <a:rPr sz="850" b="1" i="0">
+                          <a:solidFill>
+                            <a:srgbClr val="FFFFFF"/>
+                          </a:solidFill>
+                          <a:latin typeface="Garamond"/>
+                          <a:cs typeface="Garamond"/>
+                        </a:rPr>
+                        <a:t>Note</a:t>
+                      </a:r>
+                    </a:p>
+                  </a:txBody>
+                  <a:tcPr anchor="ctr">
+                    <a:solidFill>
+                      <a:srgbClr val="1F2A44"/>
+                    </a:solidFill>
+                  </a:tcPr>
+                </a:tc>
+              </a:tr>
+              <a:tr h="188976">
+                <a:tc>
+                  <a:txBody>
+                    <a:bodyPr/>
+                    <a:lstStyle/>
+                    <a:p>
+                      <a:pPr algn="l"/>
+                      <a:r>
+                        <a:rPr sz="850" b="0" i="0">
+                          <a:solidFill>
+                            <a:srgbClr val="262626"/>
+                          </a:solidFill>
+                          <a:latin typeface="Garamond"/>
+                          <a:cs typeface="Garamond"/>
+                        </a:rPr>
+                        <a:t>Cash &amp; equivalents</a:t>
+                      </a:r>
+                    </a:p>
+                  </a:txBody>
+                  <a:tcPr anchor="ctr" marT="12700" marB="12700">
+                    <a:solidFill>
+                      <a:srgbClr val="FFFFFF"/>
+                    </a:solidFill>
+                  </a:tcPr>
+                </a:tc>
+                <a:tc>
+                  <a:txBody>
+                    <a:bodyPr/>
+                    <a:lstStyle/>
+                    <a:p>
+                      <a:pPr algn="r"/>
+                      <a:r>
+                        <a:rPr sz="850" b="0" i="0">
+                          <a:solidFill>
+                            <a:srgbClr val="262626"/>
+                          </a:solidFill>
+                          <a:latin typeface="Garamond"/>
+                          <a:cs typeface="Garamond"/>
+                        </a:rPr>
+                        <a:t>1,807</a:t>
+                      </a:r>
+                    </a:p>
+                  </a:txBody>
+                  <a:tcPr anchor="ctr" marT="12700" marB="12700">
+                    <a:solidFill>
+                      <a:srgbClr val="FFFFFF"/>
+                    </a:solidFill>
+                  </a:tcPr>
+                </a:tc>
+                <a:tc>
+                  <a:txBody>
+                    <a:bodyPr/>
+                    <a:lstStyle/>
+                    <a:p>
+                      <a:pPr algn="r"/>
+                      <a:r>
+                        <a:rPr sz="850" b="0" i="0">
+                          <a:solidFill>
+                            <a:srgbClr val="262626"/>
+                          </a:solidFill>
+                          <a:latin typeface="Garamond"/>
+                          <a:cs typeface="Garamond"/>
+                        </a:rPr>
+                        <a:t>Added back in EV → equity bridge</a:t>
+                      </a:r>
+                    </a:p>
+                  </a:txBody>
+                  <a:tcPr anchor="ctr" marT="12700" marB="12700">
+                    <a:solidFill>
+                      <a:srgbClr val="FFFFFF"/>
+                    </a:solidFill>
+                  </a:tcPr>
+                </a:tc>
+              </a:tr>
+              <a:tr h="188976">
+                <a:tc>
+                  <a:txBody>
+                    <a:bodyPr/>
+                    <a:lstStyle/>
+                    <a:p>
+                      <a:pPr algn="l"/>
+                      <a:r>
+                        <a:rPr sz="850" b="0" i="0">
+                          <a:solidFill>
+                            <a:srgbClr val="262626"/>
+                          </a:solidFill>
+                          <a:latin typeface="Garamond"/>
+                          <a:cs typeface="Garamond"/>
+                        </a:rPr>
+                        <a:t>Net debt (leases − cash)</a:t>
+                      </a:r>
+                    </a:p>
+                  </a:txBody>
+                  <a:tcPr anchor="ctr" marT="12700" marB="12700">
+                    <a:solidFill>
+                      <a:srgbClr val="F0F1F3"/>
+                    </a:solidFill>
+                  </a:tcPr>
+                </a:tc>
+                <a:tc>
+                  <a:txBody>
+                    <a:bodyPr/>
+                    <a:lstStyle/>
+                    <a:p>
+                      <a:pPr algn="r"/>
+                      <a:r>
+                        <a:rPr sz="850" b="0" i="0">
+                          <a:solidFill>
+                            <a:srgbClr val="262626"/>
+                          </a:solidFill>
+                          <a:latin typeface="Garamond"/>
+                          <a:cs typeface="Garamond"/>
+                        </a:rPr>
+                        <a:t>-9</a:t>
+                      </a:r>
+                    </a:p>
+                  </a:txBody>
+                  <a:tcPr anchor="ctr" marT="12700" marB="12700">
+                    <a:solidFill>
+                      <a:srgbClr val="F0F1F3"/>
+                    </a:solidFill>
+                  </a:tcPr>
+                </a:tc>
+                <a:tc>
+                  <a:txBody>
+                    <a:bodyPr/>
+                    <a:lstStyle/>
+                    <a:p>
+                      <a:pPr algn="r"/>
+                      <a:r>
+                        <a:rPr sz="850" b="0" i="0">
+                          <a:solidFill>
+                            <a:srgbClr val="262626"/>
+                          </a:solidFill>
+                          <a:latin typeface="Garamond"/>
+                          <a:cs typeface="Garamond"/>
+                        </a:rPr>
+                        <a:t>Near net-cash; leases in WACC above</a:t>
+                      </a:r>
+                    </a:p>
+                  </a:txBody>
+                  <a:tcPr anchor="ctr" marT="12700" marB="12700">
+                    <a:solidFill>
+                      <a:srgbClr val="F0F1F3"/>
+                    </a:solidFill>
+                  </a:tcPr>
+                </a:tc>
+              </a:tr>
+            </a:tbl>
+          </a:graphicData>
+        </a:graphic>
+      </p:graphicFrame>
+      <p:sp>
+        <p:nvSpPr>
+          <p:cNvPr id="13" name="TextBox 12"/>
+          <p:cNvSpPr txBox="1"/>
+          <p:nvPr/>
+        </p:nvSpPr>
+        <p:spPr>
+          <a:xfrm>
+            <a:off x="457200" y="3493008"/>
+            <a:ext cx="5532120" cy="384048"/>
+          </a:xfrm>
+          <a:prstGeom prst="rect">
+            <a:avLst/>
+          </a:prstGeom>
+          <a:noFill/>
+        </p:spPr>
+        <p:txBody>
+          <a:bodyPr wrap="square" anchor="t" lIns="25400" rIns="25400" tIns="12700" bIns="12700">
+            <a:spAutoFit/>
+          </a:bodyPr>
+          <a:lstStyle/>
+          <a:p>
+            <a:pPr algn="l">
+              <a:spcBef>
+                <a:spcPts val="0"/>
+              </a:spcBef>
+              <a:spcAft>
+                <a:spcPts val="0"/>
+              </a:spcAft>
+              <a:buNone/>
+            </a:pPr>
+            <a:r>
               <a:rPr sz="850" b="0" i="1">
                 <a:solidFill>
                   <a:srgbClr val="262626"/>
@@ -17153,7 +17298,7 @@
       </p:sp>
       <p:sp>
         <p:nvSpPr>
-          <p:cNvPr id="12" name="Rectangle 11"/>
+          <p:cNvPr id="14" name="Rectangle 13"/>
           <p:cNvSpPr/>
           <p:nvPr/>
         </p:nvSpPr>
@@ -17197,7 +17342,7 @@
       </p:sp>
       <p:graphicFrame>
         <p:nvGraphicFramePr>
-          <p:cNvPr id="13" name="Table 12"/>
+          <p:cNvPr id="15" name="Table 14"/>
           <p:cNvGraphicFramePr>
             <a:graphicFrameLocks noGrp="1"/>
           </p:cNvGraphicFramePr>
@@ -17673,7 +17818,7 @@
       </p:graphicFrame>
       <p:sp>
         <p:nvSpPr>
-          <p:cNvPr id="14" name="TextBox 13"/>
+          <p:cNvPr id="16" name="TextBox 15"/>
           <p:cNvSpPr txBox="1"/>
           <p:nvPr/>
         </p:nvSpPr>
@@ -17717,7 +17862,7 @@
       </p:sp>
       <p:sp>
         <p:nvSpPr>
-          <p:cNvPr id="15" name="Rectangle 14"/>
+          <p:cNvPr id="17" name="Rectangle 16"/>
           <p:cNvSpPr/>
           <p:nvPr/>
         </p:nvSpPr>
@@ -17800,7 +17945,7 @@
       </p:sp>
       <p:sp>
         <p:nvSpPr>
-          <p:cNvPr id="16" name="TextBox 15"/>
+          <p:cNvPr id="18" name="TextBox 17"/>
           <p:cNvSpPr txBox="1"/>
           <p:nvPr/>
         </p:nvSpPr>
@@ -17844,7 +17989,7 @@
       </p:sp>
       <p:graphicFrame>
         <p:nvGraphicFramePr>
-          <p:cNvPr id="17" name="Table 16"/>
+          <p:cNvPr id="19" name="Table 18"/>
           <p:cNvGraphicFramePr>
             <a:graphicFrameLocks noGrp="1"/>
           </p:cNvGraphicFramePr>
@@ -22026,7 +22171,7 @@
                           <a:latin typeface="Garamond"/>
                           <a:cs typeface="Garamond"/>
                         </a:rPr>
-                        <a:t>—</a:t>
+                        <a:t/>
                       </a:r>
                     </a:p>
                   </a:txBody>
@@ -22050,7 +22195,7 @@
                           <a:latin typeface="Garamond"/>
                           <a:cs typeface="Garamond"/>
                         </a:rPr>
-                        <a:t>—</a:t>
+                        <a:t/>
                       </a:r>
                     </a:p>
                   </a:txBody>
@@ -22074,7 +22219,7 @@
                           <a:latin typeface="Garamond"/>
                           <a:cs typeface="Garamond"/>
                         </a:rPr>
-                        <a:t>—</a:t>
+                        <a:t>FF band 5.0–8.0x</a:t>
                       </a:r>
                     </a:p>
                   </a:txBody>
@@ -22148,7 +22293,7 @@
                           <a:latin typeface="Garamond"/>
                           <a:cs typeface="Garamond"/>
                         </a:rPr>
-                        <a:t>—</a:t>
+                        <a:t/>
                       </a:r>
                     </a:p>
                   </a:txBody>
@@ -22172,7 +22317,7 @@
                           <a:latin typeface="Garamond"/>
                           <a:cs typeface="Garamond"/>
                         </a:rPr>
-                        <a:t>—</a:t>
+                        <a:t/>
                       </a:r>
                     </a:p>
                   </a:txBody>
@@ -22196,7 +22341,7 @@
                           <a:latin typeface="Garamond"/>
                           <a:cs typeface="Garamond"/>
                         </a:rPr>
-                        <a:t>—</a:t>
+                        <a:t/>
                       </a:r>
                     </a:p>
                   </a:txBody>
@@ -22220,7 +22365,7 @@
                           <a:latin typeface="Garamond"/>
                           <a:cs typeface="Garamond"/>
                         </a:rPr>
-                        <a:t>—</a:t>
+                        <a:t>n/a</a:t>
                       </a:r>
                     </a:p>
                   </a:txBody>
@@ -22294,7 +22439,7 @@
                           <a:latin typeface="Garamond"/>
                           <a:cs typeface="Garamond"/>
                         </a:rPr>
-                        <a:t>—</a:t>
+                        <a:t/>
                       </a:r>
                     </a:p>
                   </a:txBody>
@@ -22318,7 +22463,7 @@
                           <a:latin typeface="Garamond"/>
                           <a:cs typeface="Garamond"/>
                         </a:rPr>
-                        <a:t>—</a:t>
+                        <a:t/>
                       </a:r>
                     </a:p>
                   </a:txBody>
@@ -22342,7 +22487,7 @@
                           <a:latin typeface="Garamond"/>
                           <a:cs typeface="Garamond"/>
                         </a:rPr>
-                        <a:t>—</a:t>
+                        <a:t/>
                       </a:r>
                     </a:p>
                   </a:txBody>
@@ -22366,7 +22511,7 @@
                           <a:latin typeface="Garamond"/>
                           <a:cs typeface="Garamond"/>
                         </a:rPr>
-                        <a:t>—</a:t>
+                        <a:t>n/a</a:t>
                       </a:r>
                     </a:p>
                   </a:txBody>
@@ -22440,7 +22585,7 @@
                           <a:latin typeface="Garamond"/>
                           <a:cs typeface="Garamond"/>
                         </a:rPr>
-                        <a:t>—</a:t>
+                        <a:t/>
                       </a:r>
                     </a:p>
                   </a:txBody>
@@ -22464,7 +22609,7 @@
                           <a:latin typeface="Garamond"/>
                           <a:cs typeface="Garamond"/>
                         </a:rPr>
-                        <a:t>—</a:t>
+                        <a:t/>
                       </a:r>
                     </a:p>
                   </a:txBody>
@@ -22488,7 +22633,7 @@
                           <a:latin typeface="Garamond"/>
                           <a:cs typeface="Garamond"/>
                         </a:rPr>
-                        <a:t>—</a:t>
+                        <a:t/>
                       </a:r>
                     </a:p>
                   </a:txBody>
@@ -22512,7 +22657,7 @@
                           <a:latin typeface="Garamond"/>
                           <a:cs typeface="Garamond"/>
                         </a:rPr>
-                        <a:t>—</a:t>
+                        <a:t>n/a</a:t>
                       </a:r>
                     </a:p>
                   </a:txBody>
@@ -22656,7 +22801,7 @@
                 <a:latin typeface="Garamond"/>
                 <a:cs typeface="Garamond"/>
               </a:rPr>
-              <a:t>Segment EBITDA margins are illustrative (mature Americas vs growth China); multiples are range checks, not peer averages</a:t>
+              <a:t>EV/EBITDA ranges anchor to DCF Comps football-field band (5.0–8.0x FY30E) with segment premium/discount — not separate peer prints</a:t>
             </a:r>
           </a:p>
           <a:p>
@@ -22678,7 +22823,29 @@
                 <a:latin typeface="Garamond"/>
                 <a:cs typeface="Garamond"/>
               </a:rPr>
-              <a:t>Consolidated base-case DCF $134 is the primary valuation anchor; SOTP triangulates geographic optionality</a:t>
+              <a:t>Americas 5.0–6.5x (mature / near trough); China 7.0–9.0x (growth); RoW 6.0–8.0x (mid-band)</a:t>
+            </a:r>
+          </a:p>
+          <a:p>
+            <a:pPr algn="l" indent="-152400" marL="177800">
+              <a:spcBef>
+                <a:spcPts val="0"/>
+              </a:spcBef>
+              <a:spcAft>
+                <a:spcPts val="300"/>
+              </a:spcAft>
+              <a:buFont typeface="Garamond"/>
+              <a:buChar char="•"/>
+            </a:pPr>
+            <a:r>
+              <a:rPr sz="1050" b="0" i="0">
+                <a:solidFill>
+                  <a:srgbClr val="262626"/>
+                </a:solidFill>
+                <a:latin typeface="Garamond"/>
+                <a:cs typeface="Garamond"/>
+              </a:rPr>
+              <a:t>Consolidated base-case DCF $134 is the primary anchor; SOTP triangulates geographic optionality</a:t>
             </a:r>
           </a:p>
         </p:txBody>

--- a/LULU/LULU_Investment_Pitch_Deck.pptx
+++ b/LULU/LULU_Investment_Pitch_Deck.pptx
@@ -19801,7 +19801,7 @@
                 <a:latin typeface="Garamond"/>
                 <a:cs typeface="Garamond"/>
               </a:rPr>
-              <a:t>Geographic SOTP (FY30E)</a:t>
+              <a:t>Geographic SOTP (FY30E; Gordon anchor)</a:t>
             </a:r>
           </a:p>
         </p:txBody>
@@ -19814,8 +19814,8 @@
         </p:nvSpPr>
         <p:spPr>
           <a:xfrm>
-            <a:off x="5132912" y="2734056"/>
-            <a:ext cx="1277031" cy="384048"/>
+            <a:off x="6982406" y="2734056"/>
+            <a:ext cx="792640" cy="384048"/>
           </a:xfrm>
           <a:prstGeom prst="rect">
             <a:avLst/>
@@ -19855,7 +19855,7 @@
                 <a:latin typeface="Garamond"/>
                 <a:cs typeface="Garamond"/>
               </a:rPr>
-              <a:t>$97</a:t>
+              <a:t>$139</a:t>
             </a:r>
           </a:p>
         </p:txBody>
@@ -19868,7 +19868,7 @@
         </p:nvSpPr>
         <p:spPr>
           <a:xfrm>
-            <a:off x="6428231" y="2734056"/>
+            <a:off x="7793334" y="2734056"/>
             <a:ext cx="777240" cy="384048"/>
           </a:xfrm>
           <a:prstGeom prst="rect">
@@ -19899,7 +19899,7 @@
                 <a:latin typeface="Garamond"/>
                 <a:cs typeface="Garamond"/>
               </a:rPr>
-              <a:t>$126</a:t>
+              <a:t>$157</a:t>
             </a:r>
           </a:p>
         </p:txBody>
@@ -21361,7 +21361,7 @@
                 <a:latin typeface="Garamond"/>
                 <a:cs typeface="Garamond"/>
               </a:rPr>
-              <a:t>Geographic segments valued separately on FY30E base-case revenue — illustrative EV/EBITDA ranges</a:t>
+              <a:t>Geographic segments on FY30E base revenue — EV/EBITDA spreads vs Gordon-implied exit (7.4x)</a:t>
             </a:r>
           </a:p>
         </p:txBody>
@@ -21757,7 +21757,7 @@
                           <a:latin typeface="Garamond"/>
                           <a:cs typeface="Garamond"/>
                         </a:rPr>
-                        <a:t>1,332</a:t>
+                        <a:t>1,551</a:t>
                       </a:r>
                     </a:p>
                   </a:txBody>
@@ -21781,7 +21781,7 @@
                           <a:latin typeface="Garamond"/>
                           <a:cs typeface="Garamond"/>
                         </a:rPr>
-                        <a:t>5.0x–6.5x</a:t>
+                        <a:t>6.4x–7.1x</a:t>
                       </a:r>
                     </a:p>
                   </a:txBody>
@@ -21805,7 +21805,7 @@
                           <a:latin typeface="Garamond"/>
                           <a:cs typeface="Garamond"/>
                         </a:rPr>
-                        <a:t>6,658–8,655</a:t>
+                        <a:t>9,924–11,010</a:t>
                       </a:r>
                     </a:p>
                   </a:txBody>
@@ -21903,7 +21903,7 @@
                           <a:latin typeface="Garamond"/>
                           <a:cs typeface="Garamond"/>
                         </a:rPr>
-                        <a:t>352</a:t>
+                        <a:t>410</a:t>
                       </a:r>
                     </a:p>
                   </a:txBody>
@@ -21927,7 +21927,7 @@
                           <a:latin typeface="Garamond"/>
                           <a:cs typeface="Garamond"/>
                         </a:rPr>
-                        <a:t>7.0x–9.0x</a:t>
+                        <a:t>7.9x–9.4x</a:t>
                       </a:r>
                     </a:p>
                   </a:txBody>
@@ -21951,7 +21951,7 @@
                           <a:latin typeface="Garamond"/>
                           <a:cs typeface="Garamond"/>
                         </a:rPr>
-                        <a:t>2,463–3,167</a:t>
+                        <a:t>3,238–3,852</a:t>
                       </a:r>
                     </a:p>
                   </a:txBody>
@@ -22049,7 +22049,7 @@
                           <a:latin typeface="Garamond"/>
                           <a:cs typeface="Garamond"/>
                         </a:rPr>
-                        <a:t>278</a:t>
+                        <a:t>324</a:t>
                       </a:r>
                     </a:p>
                   </a:txBody>
@@ -22073,7 +22073,7 @@
                           <a:latin typeface="Garamond"/>
                           <a:cs typeface="Garamond"/>
                         </a:rPr>
-                        <a:t>6.0x–8.0x</a:t>
+                        <a:t>7.1x–8.1x</a:t>
                       </a:r>
                     </a:p>
                   </a:txBody>
@@ -22097,7 +22097,7 @@
                           <a:latin typeface="Garamond"/>
                           <a:cs typeface="Garamond"/>
                         </a:rPr>
-                        <a:t>1,667–2,222</a:t>
+                        <a:t>2,297–2,621</a:t>
                       </a:r>
                     </a:p>
                   </a:txBody>
@@ -22195,7 +22195,7 @@
                           <a:latin typeface="Garamond"/>
                           <a:cs typeface="Garamond"/>
                         </a:rPr>
-                        <a:t/>
+                        <a:t>2,284</a:t>
                       </a:r>
                     </a:p>
                   </a:txBody>
@@ -22219,7 +22219,7 @@
                           <a:latin typeface="Garamond"/>
                           <a:cs typeface="Garamond"/>
                         </a:rPr>
-                        <a:t>FF band 5.0–8.0x</a:t>
+                        <a:t>6.8x–7.7x</a:t>
                       </a:r>
                     </a:p>
                   </a:txBody>
@@ -22243,7 +22243,7 @@
                           <a:latin typeface="Garamond"/>
                           <a:cs typeface="Garamond"/>
                         </a:rPr>
-                        <a:t>10,788–14,045</a:t>
+                        <a:t>15,459–17,483</a:t>
                       </a:r>
                     </a:p>
                   </a:txBody>
@@ -22681,7 +22681,7 @@
                           <a:latin typeface="Garamond"/>
                           <a:cs typeface="Garamond"/>
                         </a:rPr>
-                        <a:t>$97–$126</a:t>
+                        <a:t>$139–$157</a:t>
                       </a:r>
                     </a:p>
                   </a:txBody>
@@ -22801,7 +22801,7 @@
                 <a:latin typeface="Garamond"/>
                 <a:cs typeface="Garamond"/>
               </a:rPr>
-              <a:t>EV/EBITDA ranges anchor to DCF Comps football-field band (5.0–8.0x FY30E) with segment premium/discount — not separate peer prints</a:t>
+              <a:t>Segment EV/EBITDA spreads anchor to Gordon-implied exit 7.4x (selected DCF TV identity — not the 5–8x comps football-field band)</a:t>
             </a:r>
           </a:p>
           <a:p>
@@ -22823,7 +22823,7 @@
                 <a:latin typeface="Garamond"/>
                 <a:cs typeface="Garamond"/>
               </a:rPr>
-              <a:t>Americas 5.0–6.5x (mature / near trough); China 7.0–9.0x (growth); RoW 6.0–8.0x (mid-band)</a:t>
+              <a:t>Americas: Gordon − 1.0x to − 0.25x (mature); China: +0.5x to +2.0x (growth); RoW: −0.25x to +0.75x</a:t>
             </a:r>
           </a:p>
           <a:p>
@@ -22845,7 +22845,7 @@
                 <a:latin typeface="Garamond"/>
                 <a:cs typeface="Garamond"/>
               </a:rPr>
-              <a:t>Consolidated base-case DCF $134 is the primary anchor; SOTP triangulates geographic optionality</a:t>
+              <a:t>Consolidated base-case DCF $134 uses Gordon growth (g=2.25%); SOTP is terminal-year EBITDA triangulation only</a:t>
             </a:r>
           </a:p>
         </p:txBody>
@@ -22928,7 +22928,7 @@
                 <a:latin typeface="Garamond"/>
                 <a:cs typeface="Garamond"/>
               </a:rPr>
-              <a:t>SOTP range: $97–$126</a:t>
+              <a:t>SOTP range: $139–$157</a:t>
             </a:r>
           </a:p>
           <a:p>
@@ -22970,7 +22970,7 @@
                 <a:latin typeface="Garamond"/>
                 <a:cs typeface="Garamond"/>
               </a:rPr>
-              <a:t>Overlap is expected — SOTP uses terminal-year EBITDA; DCF discounts explicit FCF + Gordon TV.</a:t>
+              <a:t>Overlap is expected — SOTP applies FY30 EBITDA multiples; DCF discounts explicit FCF + Gordon growth TV.</a:t>
             </a:r>
           </a:p>
         </p:txBody>
@@ -23151,7 +23151,7 @@
                 <a:latin typeface="Garamond"/>
                 <a:cs typeface="Garamond"/>
               </a:rPr>
-              <a:t>Base-case unlevered DCF (Scenarios col G) — Gordon growth &amp; exit-multiple terminal value reconcile to $134</a:t>
+              <a:t>Base-case unlevered DCF (Scenarios col G) — Gordon growth terminal value; 7.4x is implied exit identity</a:t>
             </a:r>
           </a:p>
         </p:txBody>
@@ -23869,7 +23869,7 @@
                           <a:latin typeface="Garamond"/>
                           <a:cs typeface="Garamond"/>
                         </a:rPr>
-                        <a:t>Exit EV/EBITDA (Gordon implied)</a:t>
+                        <a:t>Gordon-implied exit EV/EBITDA (identity)</a:t>
                       </a:r>
                     </a:p>
                   </a:txBody>
@@ -23947,7 +23947,7 @@
                 <a:latin typeface="Garamond"/>
                 <a:cs typeface="Garamond"/>
               </a:rPr>
-              <a:t>TERMINAL VALUE — TWO APPROACHES (IDENTICAL IN MODEL)</a:t>
+              <a:t>TERMINAL VALUE — GORDON GROWTH (SELECTED)</a:t>
             </a:r>
           </a:p>
         </p:txBody>
@@ -24064,7 +24064,7 @@
                           <a:latin typeface="Garamond"/>
                           <a:cs typeface="Garamond"/>
                         </a:rPr>
-                        <a:t>Gordon growth</a:t>
+                        <a:t>Gordon growth (selected)</a:t>
                       </a:r>
                     </a:p>
                   </a:txBody>
@@ -24138,7 +24138,7 @@
                           <a:latin typeface="Garamond"/>
                           <a:cs typeface="Garamond"/>
                         </a:rPr>
-                        <a:t>Exit multiple</a:t>
+                        <a:t>Exit multiple (identity check)</a:t>
                       </a:r>
                     </a:p>
                   </a:txBody>
@@ -24162,7 +24162,7 @@
                           <a:latin typeface="Garamond"/>
                           <a:cs typeface="Garamond"/>
                         </a:rPr>
-                        <a:t>FY30 EBITDA × 7.4x (Gordon identity, not peer avg)</a:t>
+                        <a:t>FY30 EBITDA × 7.4x = Gordon TV ÷ EBITDA (same number)</a:t>
                       </a:r>
                     </a:p>
                   </a:txBody>
@@ -24526,7 +24526,7 @@
                 <a:latin typeface="Garamond"/>
                 <a:cs typeface="Garamond"/>
               </a:rPr>
-              <a:t>TV = 73% of EV  ·  Exit 7.4x = Gordon identity on FY30 EBITDA $2,284M</a:t>
+              <a:t>TV = 73% of EV  ·  7.4x = Gordon TV ÷ FY30 EBITDA $2,284M (not a peer pick)</a:t>
             </a:r>
           </a:p>
           <a:p>
@@ -24547,7 +24547,7 @@
                 <a:latin typeface="Garamond"/>
                 <a:cs typeface="Garamond"/>
               </a:rPr>
-              <a:t>We do not average PitchBook comps for TV. Bear/bull WACC &amp; g brackets are in the appendix.</a:t>
+              <a:t>Selected TV is Gordon growth (g). The 7.4x exit multiple is the identity check (TV ÷ FY30 EBITDA), not a peer average.</a:t>
             </a:r>
           </a:p>
         </p:txBody>

--- a/LULU/LULU_Investment_Pitch_Deck.pptx
+++ b/LULU/LULU_Investment_Pitch_Deck.pptx
@@ -29,6 +29,7 @@
     <p:sldId id="277" r:id="rId28"/>
     <p:sldId id="278" r:id="rId29"/>
     <p:sldId id="279" r:id="rId30"/>
+    <p:sldId id="280" r:id="rId31"/>
   </p:sldIdLst>
   <p:sldSz cx="12191695" cy="6858000" type="screen4x3"/>
   <p:notesSz cx="6858000" cy="9144000"/>
@@ -21159,7 +21160,7 @@
                 <a:latin typeface="Garamond"/>
                 <a:cs typeface="Garamond"/>
               </a:rPr>
-              <a:t>20. Comparable companies</a:t>
+              <a:t>20. Comps analysis</a:t>
             </a:r>
           </a:p>
           <a:p>
@@ -21180,7 +21181,28 @@
                 <a:latin typeface="Garamond"/>
                 <a:cs typeface="Garamond"/>
               </a:rPr>
-              <a:t>21. Appendix — bull / bear scenarios</a:t>
+              <a:t>21. Precedent transactions</a:t>
+            </a:r>
+          </a:p>
+          <a:p>
+            <a:pPr algn="l">
+              <a:spcBef>
+                <a:spcPts val="0"/>
+              </a:spcBef>
+              <a:spcAft>
+                <a:spcPts val="800"/>
+              </a:spcAft>
+              <a:buNone/>
+            </a:pPr>
+            <a:r>
+              <a:rPr sz="1450" b="1" i="0">
+                <a:solidFill>
+                  <a:srgbClr val="1F2A44"/>
+                </a:solidFill>
+                <a:latin typeface="Garamond"/>
+                <a:cs typeface="Garamond"/>
+              </a:rPr>
+              <a:t>22. Appendix — bull / bear scenarios</a:t>
             </a:r>
           </a:p>
         </p:txBody>
@@ -25699,7 +25721,7 @@
                 <a:latin typeface="Garamond"/>
                 <a:cs typeface="Garamond"/>
               </a:rPr>
-              <a:t>Comparable Companies</a:t>
+              <a:t>Comps Analysis</a:t>
             </a:r>
           </a:p>
         </p:txBody>
@@ -25743,7 +25765,7 @@
                 <a:latin typeface="Garamond"/>
                 <a:cs typeface="Garamond"/>
               </a:rPr>
-              <a:t>PitchBook pubcomps are the current tape; Alo still has no EV/EBITDA</a:t>
+              <a:t>Implied LULU valuation from PitchBook core athletic / apparel set (04-Sep-2026)</a:t>
             </a:r>
           </a:p>
         </p:txBody>
@@ -25831,7 +25853,7 @@
                 <a:latin typeface="Garamond"/>
                 <a:cs typeface="Garamond"/>
               </a:rPr>
-              <a:t>Source: PitchBook Comps Set 04-Sep-2026 (EV/EBITDA = daily EV / TTM EBITDA); Alo ask $10bn / Forbes ~$2bn</a:t>
+              <a:t>PitchBook Comps Set 04-Sep-2026 (EV, TTM EBITDA); revenue/EBIT from company filings; forward P/E from consensus</a:t>
             </a:r>
           </a:p>
         </p:txBody>
@@ -25880,1143 +25902,16 @@
           </a:p>
         </p:txBody>
       </p:sp>
-      <p:graphicFrame>
-        <p:nvGraphicFramePr>
-          <p:cNvPr id="8" name="Table 7"/>
-          <p:cNvGraphicFramePr>
-            <a:graphicFrameLocks noGrp="1"/>
-          </p:cNvGraphicFramePr>
-          <p:nvPr/>
-        </p:nvGraphicFramePr>
-        <p:xfrm>
-          <a:off x="457200" y="1097280"/>
-          <a:ext cx="11292836" cy="3566160"/>
-        </p:xfrm>
-        <a:graphic>
-          <a:graphicData uri="http://schemas.openxmlformats.org/drawingml/2006/table">
-            <a:tbl>
-              <a:tblPr firstRow="1" bandRow="1">
-                <a:tableStyleId>{5C22544A-7EE6-4342-B048-85BDC9FD1C3A}</a:tableStyleId>
-              </a:tblPr>
-              <a:tblGrid>
-                <a:gridCol w="3108960"/>
-                <a:gridCol w="2045969"/>
-                <a:gridCol w="2045969"/>
-                <a:gridCol w="2045969"/>
-                <a:gridCol w="2045969"/>
-              </a:tblGrid>
-              <a:tr h="396240">
-                <a:tc>
-                  <a:txBody>
-                    <a:bodyPr/>
-                    <a:lstStyle/>
-                    <a:p>
-                      <a:pPr algn="l"/>
-                      <a:r>
-                        <a:rPr sz="1100" b="1" i="0">
-                          <a:solidFill>
-                            <a:srgbClr val="FFFFFF"/>
-                          </a:solidFill>
-                          <a:latin typeface="Garamond"/>
-                          <a:cs typeface="Garamond"/>
-                        </a:rPr>
-                        <a:t>Company</a:t>
-                      </a:r>
-                    </a:p>
-                  </a:txBody>
-                  <a:tcPr anchor="ctr">
-                    <a:solidFill>
-                      <a:srgbClr val="1F2A44"/>
-                    </a:solidFill>
-                  </a:tcPr>
-                </a:tc>
-                <a:tc>
-                  <a:txBody>
-                    <a:bodyPr/>
-                    <a:lstStyle/>
-                    <a:p>
-                      <a:pPr algn="r"/>
-                      <a:r>
-                        <a:rPr sz="1100" b="1" i="0">
-                          <a:solidFill>
-                            <a:srgbClr val="FFFFFF"/>
-                          </a:solidFill>
-                          <a:latin typeface="Garamond"/>
-                          <a:cs typeface="Garamond"/>
-                        </a:rPr>
-                        <a:t>EV/EBITDA</a:t>
-                      </a:r>
-                    </a:p>
-                  </a:txBody>
-                  <a:tcPr anchor="ctr">
-                    <a:solidFill>
-                      <a:srgbClr val="1F2A44"/>
-                    </a:solidFill>
-                  </a:tcPr>
-                </a:tc>
-                <a:tc>
-                  <a:txBody>
-                    <a:bodyPr/>
-                    <a:lstStyle/>
-                    <a:p>
-                      <a:pPr algn="r"/>
-                      <a:r>
-                        <a:rPr sz="1100" b="1" i="0">
-                          <a:solidFill>
-                            <a:srgbClr val="FFFFFF"/>
-                          </a:solidFill>
-                          <a:latin typeface="Garamond"/>
-                          <a:cs typeface="Garamond"/>
-                        </a:rPr>
-                        <a:t>P/E</a:t>
-                      </a:r>
-                    </a:p>
-                  </a:txBody>
-                  <a:tcPr anchor="ctr">
-                    <a:solidFill>
-                      <a:srgbClr val="1F2A44"/>
-                    </a:solidFill>
-                  </a:tcPr>
-                </a:tc>
-                <a:tc>
-                  <a:txBody>
-                    <a:bodyPr/>
-                    <a:lstStyle/>
-                    <a:p>
-                      <a:pPr algn="r"/>
-                      <a:r>
-                        <a:rPr sz="1100" b="1" i="0">
-                          <a:solidFill>
-                            <a:srgbClr val="FFFFFF"/>
-                          </a:solidFill>
-                          <a:latin typeface="Garamond"/>
-                          <a:cs typeface="Garamond"/>
-                        </a:rPr>
-                        <a:t>EV ($000)</a:t>
-                      </a:r>
-                    </a:p>
-                  </a:txBody>
-                  <a:tcPr anchor="ctr">
-                    <a:solidFill>
-                      <a:srgbClr val="1F2A44"/>
-                    </a:solidFill>
-                  </a:tcPr>
-                </a:tc>
-                <a:tc>
-                  <a:txBody>
-                    <a:bodyPr/>
-                    <a:lstStyle/>
-                    <a:p>
-                      <a:pPr algn="r"/>
-                      <a:r>
-                        <a:rPr sz="1100" b="1" i="0">
-                          <a:solidFill>
-                            <a:srgbClr val="FFFFFF"/>
-                          </a:solidFill>
-                          <a:latin typeface="Garamond"/>
-                          <a:cs typeface="Garamond"/>
-                        </a:rPr>
-                        <a:t>EBITDA ($000)</a:t>
-                      </a:r>
-                    </a:p>
-                  </a:txBody>
-                  <a:tcPr anchor="ctr">
-                    <a:solidFill>
-                      <a:srgbClr val="1F2A44"/>
-                    </a:solidFill>
-                  </a:tcPr>
-                </a:tc>
-              </a:tr>
-              <a:tr h="396240">
-                <a:tc>
-                  <a:txBody>
-                    <a:bodyPr/>
-                    <a:lstStyle/>
-                    <a:p>
-                      <a:pPr algn="l"/>
-                      <a:r>
-                        <a:rPr sz="1050" b="1" i="0">
-                          <a:solidFill>
-                            <a:srgbClr val="1F2A44"/>
-                          </a:solidFill>
-                          <a:latin typeface="Garamond"/>
-                          <a:cs typeface="Garamond"/>
-                        </a:rPr>
-                        <a:t>lululemon (LULU)</a:t>
-                      </a:r>
-                    </a:p>
-                  </a:txBody>
-                  <a:tcPr anchor="ctr" marT="12700" marB="12700">
-                    <a:solidFill>
-                      <a:srgbClr val="FFFFFF"/>
-                    </a:solidFill>
-                  </a:tcPr>
-                </a:tc>
-                <a:tc>
-                  <a:txBody>
-                    <a:bodyPr/>
-                    <a:lstStyle/>
-                    <a:p>
-                      <a:pPr algn="r"/>
-                      <a:r>
-                        <a:rPr sz="1050" b="1" i="0">
-                          <a:solidFill>
-                            <a:srgbClr val="1F2A44"/>
-                          </a:solidFill>
-                          <a:latin typeface="Garamond"/>
-                          <a:cs typeface="Garamond"/>
-                        </a:rPr>
-                        <a:t>4.7x</a:t>
-                      </a:r>
-                    </a:p>
-                  </a:txBody>
-                  <a:tcPr anchor="ctr" marT="12700" marB="12700">
-                    <a:solidFill>
-                      <a:srgbClr val="FFFFFF"/>
-                    </a:solidFill>
-                  </a:tcPr>
-                </a:tc>
-                <a:tc>
-                  <a:txBody>
-                    <a:bodyPr/>
-                    <a:lstStyle/>
-                    <a:p>
-                      <a:pPr algn="r"/>
-                      <a:r>
-                        <a:rPr sz="1050" b="1" i="0">
-                          <a:solidFill>
-                            <a:srgbClr val="1F2A44"/>
-                          </a:solidFill>
-                          <a:latin typeface="Garamond"/>
-                          <a:cs typeface="Garamond"/>
-                        </a:rPr>
-                        <a:t>8.3x</a:t>
-                      </a:r>
-                    </a:p>
-                  </a:txBody>
-                  <a:tcPr anchor="ctr" marT="12700" marB="12700">
-                    <a:solidFill>
-                      <a:srgbClr val="FFFFFF"/>
-                    </a:solidFill>
-                  </a:tcPr>
-                </a:tc>
-                <a:tc>
-                  <a:txBody>
-                    <a:bodyPr/>
-                    <a:lstStyle/>
-                    <a:p>
-                      <a:pPr algn="r"/>
-                      <a:r>
-                        <a:rPr sz="1050" b="1" i="0">
-                          <a:solidFill>
-                            <a:srgbClr val="1F2A44"/>
-                          </a:solidFill>
-                          <a:latin typeface="Garamond"/>
-                          <a:cs typeface="Garamond"/>
-                        </a:rPr>
-                        <a:t>11,890,440</a:t>
-                      </a:r>
-                    </a:p>
-                  </a:txBody>
-                  <a:tcPr anchor="ctr" marT="12700" marB="12700">
-                    <a:solidFill>
-                      <a:srgbClr val="FFFFFF"/>
-                    </a:solidFill>
-                  </a:tcPr>
-                </a:tc>
-                <a:tc>
-                  <a:txBody>
-                    <a:bodyPr/>
-                    <a:lstStyle/>
-                    <a:p>
-                      <a:pPr algn="r"/>
-                      <a:r>
-                        <a:rPr sz="1050" b="1" i="0">
-                          <a:solidFill>
-                            <a:srgbClr val="1F2A44"/>
-                          </a:solidFill>
-                          <a:latin typeface="Garamond"/>
-                          <a:cs typeface="Garamond"/>
-                        </a:rPr>
-                        <a:t>2,548,084</a:t>
-                      </a:r>
-                    </a:p>
-                  </a:txBody>
-                  <a:tcPr anchor="ctr" marT="12700" marB="12700">
-                    <a:solidFill>
-                      <a:srgbClr val="FFFFFF"/>
-                    </a:solidFill>
-                  </a:tcPr>
-                </a:tc>
-              </a:tr>
-              <a:tr h="396240">
-                <a:tc>
-                  <a:txBody>
-                    <a:bodyPr/>
-                    <a:lstStyle/>
-                    <a:p>
-                      <a:pPr algn="l"/>
-                      <a:r>
-                        <a:rPr sz="1050" b="0" i="0">
-                          <a:solidFill>
-                            <a:srgbClr val="262626"/>
-                          </a:solidFill>
-                          <a:latin typeface="Garamond"/>
-                          <a:cs typeface="Garamond"/>
-                        </a:rPr>
-                        <a:t>Nike (NKE)</a:t>
-                      </a:r>
-                    </a:p>
-                  </a:txBody>
-                  <a:tcPr anchor="ctr" marT="12700" marB="12700">
-                    <a:solidFill>
-                      <a:srgbClr val="F0F1F3"/>
-                    </a:solidFill>
-                  </a:tcPr>
-                </a:tc>
-                <a:tc>
-                  <a:txBody>
-                    <a:bodyPr/>
-                    <a:lstStyle/>
-                    <a:p>
-                      <a:pPr algn="r"/>
-                      <a:r>
-                        <a:rPr sz="1050" b="0" i="0">
-                          <a:solidFill>
-                            <a:srgbClr val="262626"/>
-                          </a:solidFill>
-                          <a:latin typeface="Garamond"/>
-                          <a:cs typeface="Garamond"/>
-                        </a:rPr>
-                        <a:t>12.7x</a:t>
-                      </a:r>
-                    </a:p>
-                  </a:txBody>
-                  <a:tcPr anchor="ctr" marT="12700" marB="12700">
-                    <a:solidFill>
-                      <a:srgbClr val="F0F1F3"/>
-                    </a:solidFill>
-                  </a:tcPr>
-                </a:tc>
-                <a:tc>
-                  <a:txBody>
-                    <a:bodyPr/>
-                    <a:lstStyle/>
-                    <a:p>
-                      <a:pPr algn="r"/>
-                      <a:r>
-                        <a:rPr sz="1050" b="0" i="0">
-                          <a:solidFill>
-                            <a:srgbClr val="262626"/>
-                          </a:solidFill>
-                          <a:latin typeface="Garamond"/>
-                          <a:cs typeface="Garamond"/>
-                        </a:rPr>
-                        <a:t>18.3x</a:t>
-                      </a:r>
-                    </a:p>
-                  </a:txBody>
-                  <a:tcPr anchor="ctr" marT="12700" marB="12700">
-                    <a:solidFill>
-                      <a:srgbClr val="F0F1F3"/>
-                    </a:solidFill>
-                  </a:tcPr>
-                </a:tc>
-                <a:tc>
-                  <a:txBody>
-                    <a:bodyPr/>
-                    <a:lstStyle/>
-                    <a:p>
-                      <a:pPr algn="r"/>
-                      <a:r>
-                        <a:rPr sz="1050" b="0" i="0">
-                          <a:solidFill>
-                            <a:srgbClr val="262626"/>
-                          </a:solidFill>
-                          <a:latin typeface="Garamond"/>
-                          <a:cs typeface="Garamond"/>
-                        </a:rPr>
-                        <a:t>58,972,350</a:t>
-                      </a:r>
-                    </a:p>
-                  </a:txBody>
-                  <a:tcPr anchor="ctr" marT="12700" marB="12700">
-                    <a:solidFill>
-                      <a:srgbClr val="F0F1F3"/>
-                    </a:solidFill>
-                  </a:tcPr>
-                </a:tc>
-                <a:tc>
-                  <a:txBody>
-                    <a:bodyPr/>
-                    <a:lstStyle/>
-                    <a:p>
-                      <a:pPr algn="r"/>
-                      <a:r>
-                        <a:rPr sz="1050" b="0" i="0">
-                          <a:solidFill>
-                            <a:srgbClr val="262626"/>
-                          </a:solidFill>
-                          <a:latin typeface="Garamond"/>
-                          <a:cs typeface="Garamond"/>
-                        </a:rPr>
-                        <a:t>4,647,000</a:t>
-                      </a:r>
-                    </a:p>
-                  </a:txBody>
-                  <a:tcPr anchor="ctr" marT="12700" marB="12700">
-                    <a:solidFill>
-                      <a:srgbClr val="F0F1F3"/>
-                    </a:solidFill>
-                  </a:tcPr>
-                </a:tc>
-              </a:tr>
-              <a:tr h="396240">
-                <a:tc>
-                  <a:txBody>
-                    <a:bodyPr/>
-                    <a:lstStyle/>
-                    <a:p>
-                      <a:pPr algn="l"/>
-                      <a:r>
-                        <a:rPr sz="1050" b="0" i="0">
-                          <a:solidFill>
-                            <a:srgbClr val="262626"/>
-                          </a:solidFill>
-                          <a:latin typeface="Garamond"/>
-                          <a:cs typeface="Garamond"/>
-                        </a:rPr>
-                        <a:t>adidas (ADS)</a:t>
-                      </a:r>
-                    </a:p>
-                  </a:txBody>
-                  <a:tcPr anchor="ctr" marT="12700" marB="12700">
-                    <a:solidFill>
-                      <a:srgbClr val="FFFFFF"/>
-                    </a:solidFill>
-                  </a:tcPr>
-                </a:tc>
-                <a:tc>
-                  <a:txBody>
-                    <a:bodyPr/>
-                    <a:lstStyle/>
-                    <a:p>
-                      <a:pPr algn="r"/>
-                      <a:r>
-                        <a:rPr sz="1050" b="0" i="0">
-                          <a:solidFill>
-                            <a:srgbClr val="262626"/>
-                          </a:solidFill>
-                          <a:latin typeface="Garamond"/>
-                          <a:cs typeface="Garamond"/>
-                        </a:rPr>
-                        <a:t>9.2x</a:t>
-                      </a:r>
-                    </a:p>
-                  </a:txBody>
-                  <a:tcPr anchor="ctr" marT="12700" marB="12700">
-                    <a:solidFill>
-                      <a:srgbClr val="FFFFFF"/>
-                    </a:solidFill>
-                  </a:tcPr>
-                </a:tc>
-                <a:tc>
-                  <a:txBody>
-                    <a:bodyPr/>
-                    <a:lstStyle/>
-                    <a:p>
-                      <a:pPr algn="r"/>
-                      <a:r>
-                        <a:rPr sz="1050" b="0" i="0">
-                          <a:solidFill>
-                            <a:srgbClr val="262626"/>
-                          </a:solidFill>
-                          <a:latin typeface="Garamond"/>
-                          <a:cs typeface="Garamond"/>
-                        </a:rPr>
-                        <a:t>19.1x</a:t>
-                      </a:r>
-                    </a:p>
-                  </a:txBody>
-                  <a:tcPr anchor="ctr" marT="12700" marB="12700">
-                    <a:solidFill>
-                      <a:srgbClr val="FFFFFF"/>
-                    </a:solidFill>
-                  </a:tcPr>
-                </a:tc>
-                <a:tc>
-                  <a:txBody>
-                    <a:bodyPr/>
-                    <a:lstStyle/>
-                    <a:p>
-                      <a:pPr algn="r"/>
-                      <a:r>
-                        <a:rPr sz="1050" b="0" i="0">
-                          <a:solidFill>
-                            <a:srgbClr val="262626"/>
-                          </a:solidFill>
-                          <a:latin typeface="Garamond"/>
-                          <a:cs typeface="Garamond"/>
-                        </a:rPr>
-                        <a:t>35,661,944</a:t>
-                      </a:r>
-                    </a:p>
-                  </a:txBody>
-                  <a:tcPr anchor="ctr" marT="12700" marB="12700">
-                    <a:solidFill>
-                      <a:srgbClr val="FFFFFF"/>
-                    </a:solidFill>
-                  </a:tcPr>
-                </a:tc>
-                <a:tc>
-                  <a:txBody>
-                    <a:bodyPr/>
-                    <a:lstStyle/>
-                    <a:p>
-                      <a:pPr algn="r"/>
-                      <a:r>
-                        <a:rPr sz="1050" b="0" i="0">
-                          <a:solidFill>
-                            <a:srgbClr val="262626"/>
-                          </a:solidFill>
-                          <a:latin typeface="Garamond"/>
-                          <a:cs typeface="Garamond"/>
-                        </a:rPr>
-                        <a:t>3,857,684</a:t>
-                      </a:r>
-                    </a:p>
-                  </a:txBody>
-                  <a:tcPr anchor="ctr" marT="12700" marB="12700">
-                    <a:solidFill>
-                      <a:srgbClr val="FFFFFF"/>
-                    </a:solidFill>
-                  </a:tcPr>
-                </a:tc>
-              </a:tr>
-              <a:tr h="396240">
-                <a:tc>
-                  <a:txBody>
-                    <a:bodyPr/>
-                    <a:lstStyle/>
-                    <a:p>
-                      <a:pPr algn="l"/>
-                      <a:r>
-                        <a:rPr sz="1050" b="0" i="0">
-                          <a:solidFill>
-                            <a:srgbClr val="262626"/>
-                          </a:solidFill>
-                          <a:latin typeface="Garamond"/>
-                          <a:cs typeface="Garamond"/>
-                        </a:rPr>
-                        <a:t>Deckers (DECK)</a:t>
-                      </a:r>
-                    </a:p>
-                  </a:txBody>
-                  <a:tcPr anchor="ctr" marT="12700" marB="12700">
-                    <a:solidFill>
-                      <a:srgbClr val="F0F1F3"/>
-                    </a:solidFill>
-                  </a:tcPr>
-                </a:tc>
-                <a:tc>
-                  <a:txBody>
-                    <a:bodyPr/>
-                    <a:lstStyle/>
-                    <a:p>
-                      <a:pPr algn="r"/>
-                      <a:r>
-                        <a:rPr sz="1050" b="0" i="0">
-                          <a:solidFill>
-                            <a:srgbClr val="262626"/>
-                          </a:solidFill>
-                          <a:latin typeface="Garamond"/>
-                          <a:cs typeface="Garamond"/>
-                        </a:rPr>
-                        <a:t>7.9x</a:t>
-                      </a:r>
-                    </a:p>
-                  </a:txBody>
-                  <a:tcPr anchor="ctr" marT="12700" marB="12700">
-                    <a:solidFill>
-                      <a:srgbClr val="F0F1F3"/>
-                    </a:solidFill>
-                  </a:tcPr>
-                </a:tc>
-                <a:tc>
-                  <a:txBody>
-                    <a:bodyPr/>
-                    <a:lstStyle/>
-                    <a:p>
-                      <a:pPr algn="r"/>
-                      <a:r>
-                        <a:rPr sz="1050" b="0" i="0">
-                          <a:solidFill>
-                            <a:srgbClr val="262626"/>
-                          </a:solidFill>
-                          <a:latin typeface="Garamond"/>
-                          <a:cs typeface="Garamond"/>
-                        </a:rPr>
-                        <a:t>12.1x</a:t>
-                      </a:r>
-                    </a:p>
-                  </a:txBody>
-                  <a:tcPr anchor="ctr" marT="12700" marB="12700">
-                    <a:solidFill>
-                      <a:srgbClr val="F0F1F3"/>
-                    </a:solidFill>
-                  </a:tcPr>
-                </a:tc>
-                <a:tc>
-                  <a:txBody>
-                    <a:bodyPr/>
-                    <a:lstStyle/>
-                    <a:p>
-                      <a:pPr algn="r"/>
-                      <a:r>
-                        <a:rPr sz="1050" b="0" i="0">
-                          <a:solidFill>
-                            <a:srgbClr val="262626"/>
-                          </a:solidFill>
-                          <a:latin typeface="Garamond"/>
-                          <a:cs typeface="Garamond"/>
-                        </a:rPr>
-                        <a:t>10,555,510</a:t>
-                      </a:r>
-                    </a:p>
-                  </a:txBody>
-                  <a:tcPr anchor="ctr" marT="12700" marB="12700">
-                    <a:solidFill>
-                      <a:srgbClr val="F0F1F3"/>
-                    </a:solidFill>
-                  </a:tcPr>
-                </a:tc>
-                <a:tc>
-                  <a:txBody>
-                    <a:bodyPr/>
-                    <a:lstStyle/>
-                    <a:p>
-                      <a:pPr algn="r"/>
-                      <a:r>
-                        <a:rPr sz="1050" b="0" i="0">
-                          <a:solidFill>
-                            <a:srgbClr val="262626"/>
-                          </a:solidFill>
-                          <a:latin typeface="Garamond"/>
-                          <a:cs typeface="Garamond"/>
-                        </a:rPr>
-                        <a:t>1,329,439</a:t>
-                      </a:r>
-                    </a:p>
-                  </a:txBody>
-                  <a:tcPr anchor="ctr" marT="12700" marB="12700">
-                    <a:solidFill>
-                      <a:srgbClr val="F0F1F3"/>
-                    </a:solidFill>
-                  </a:tcPr>
-                </a:tc>
-              </a:tr>
-              <a:tr h="396240">
-                <a:tc>
-                  <a:txBody>
-                    <a:bodyPr/>
-                    <a:lstStyle/>
-                    <a:p>
-                      <a:pPr algn="l"/>
-                      <a:r>
-                        <a:rPr sz="1050" b="0" i="0">
-                          <a:solidFill>
-                            <a:srgbClr val="262626"/>
-                          </a:solidFill>
-                          <a:latin typeface="Garamond"/>
-                          <a:cs typeface="Garamond"/>
-                        </a:rPr>
-                        <a:t>Crocs (CROX)</a:t>
-                      </a:r>
-                    </a:p>
-                  </a:txBody>
-                  <a:tcPr anchor="ctr" marT="12700" marB="12700">
-                    <a:solidFill>
-                      <a:srgbClr val="FFFFFF"/>
-                    </a:solidFill>
-                  </a:tcPr>
-                </a:tc>
-                <a:tc>
-                  <a:txBody>
-                    <a:bodyPr/>
-                    <a:lstStyle/>
-                    <a:p>
-                      <a:pPr algn="r"/>
-                      <a:r>
-                        <a:rPr sz="1050" b="0" i="0">
-                          <a:solidFill>
-                            <a:srgbClr val="262626"/>
-                          </a:solidFill>
-                          <a:latin typeface="Garamond"/>
-                          <a:cs typeface="Garamond"/>
-                        </a:rPr>
-                        <a:t>7.8x</a:t>
-                      </a:r>
-                    </a:p>
-                  </a:txBody>
-                  <a:tcPr anchor="ctr" marT="12700" marB="12700">
-                    <a:solidFill>
-                      <a:srgbClr val="FFFFFF"/>
-                    </a:solidFill>
-                  </a:tcPr>
-                </a:tc>
-                <a:tc>
-                  <a:txBody>
-                    <a:bodyPr/>
-                    <a:lstStyle/>
-                    <a:p>
-                      <a:pPr algn="r"/>
-                      <a:r>
-                        <a:rPr sz="1050" b="0" i="0">
-                          <a:solidFill>
-                            <a:srgbClr val="262626"/>
-                          </a:solidFill>
-                          <a:latin typeface="Garamond"/>
-                          <a:cs typeface="Garamond"/>
-                        </a:rPr>
-                        <a:t>10.3x</a:t>
-                      </a:r>
-                    </a:p>
-                  </a:txBody>
-                  <a:tcPr anchor="ctr" marT="12700" marB="12700">
-                    <a:solidFill>
-                      <a:srgbClr val="FFFFFF"/>
-                    </a:solidFill>
-                  </a:tcPr>
-                </a:tc>
-                <a:tc>
-                  <a:txBody>
-                    <a:bodyPr/>
-                    <a:lstStyle/>
-                    <a:p>
-                      <a:pPr algn="r"/>
-                      <a:r>
-                        <a:rPr sz="1050" b="0" i="0">
-                          <a:solidFill>
-                            <a:srgbClr val="262626"/>
-                          </a:solidFill>
-                          <a:latin typeface="Garamond"/>
-                          <a:cs typeface="Garamond"/>
-                        </a:rPr>
-                        <a:t>7,153,911</a:t>
-                      </a:r>
-                    </a:p>
-                  </a:txBody>
-                  <a:tcPr anchor="ctr" marT="12700" marB="12700">
-                    <a:solidFill>
-                      <a:srgbClr val="FFFFFF"/>
-                    </a:solidFill>
-                  </a:tcPr>
-                </a:tc>
-                <a:tc>
-                  <a:txBody>
-                    <a:bodyPr/>
-                    <a:lstStyle/>
-                    <a:p>
-                      <a:pPr algn="r"/>
-                      <a:r>
-                        <a:rPr sz="1050" b="0" i="0">
-                          <a:solidFill>
-                            <a:srgbClr val="262626"/>
-                          </a:solidFill>
-                          <a:latin typeface="Garamond"/>
-                          <a:cs typeface="Garamond"/>
-                        </a:rPr>
-                        <a:t>922,278</a:t>
-                      </a:r>
-                    </a:p>
-                  </a:txBody>
-                  <a:tcPr anchor="ctr" marT="12700" marB="12700">
-                    <a:solidFill>
-                      <a:srgbClr val="FFFFFF"/>
-                    </a:solidFill>
-                  </a:tcPr>
-                </a:tc>
-              </a:tr>
-              <a:tr h="396240">
-                <a:tc>
-                  <a:txBody>
-                    <a:bodyPr/>
-                    <a:lstStyle/>
-                    <a:p>
-                      <a:pPr algn="l"/>
-                      <a:r>
-                        <a:rPr sz="1050" b="0" i="0">
-                          <a:solidFill>
-                            <a:srgbClr val="262626"/>
-                          </a:solidFill>
-                          <a:latin typeface="Garamond"/>
-                          <a:cs typeface="Garamond"/>
-                        </a:rPr>
-                        <a:t>Levi Strauss (LEVI)</a:t>
-                      </a:r>
-                    </a:p>
-                  </a:txBody>
-                  <a:tcPr anchor="ctr" marT="12700" marB="12700">
-                    <a:solidFill>
-                      <a:srgbClr val="F0F1F3"/>
-                    </a:solidFill>
-                  </a:tcPr>
-                </a:tc>
-                <a:tc>
-                  <a:txBody>
-                    <a:bodyPr/>
-                    <a:lstStyle/>
-                    <a:p>
-                      <a:pPr algn="r"/>
-                      <a:r>
-                        <a:rPr sz="1050" b="0" i="0">
-                          <a:solidFill>
-                            <a:srgbClr val="262626"/>
-                          </a:solidFill>
-                          <a:latin typeface="Garamond"/>
-                          <a:cs typeface="Garamond"/>
-                        </a:rPr>
-                        <a:t>9.6x</a:t>
-                      </a:r>
-                    </a:p>
-                  </a:txBody>
-                  <a:tcPr anchor="ctr" marT="12700" marB="12700">
-                    <a:solidFill>
-                      <a:srgbClr val="F0F1F3"/>
-                    </a:solidFill>
-                  </a:tcPr>
-                </a:tc>
-                <a:tc>
-                  <a:txBody>
-                    <a:bodyPr/>
-                    <a:lstStyle/>
-                    <a:p>
-                      <a:pPr algn="r"/>
-                      <a:r>
-                        <a:rPr sz="1050" b="0" i="0">
-                          <a:solidFill>
-                            <a:srgbClr val="262626"/>
-                          </a:solidFill>
-                          <a:latin typeface="Garamond"/>
-                          <a:cs typeface="Garamond"/>
-                        </a:rPr>
-                        <a:t>15.0x</a:t>
-                      </a:r>
-                    </a:p>
-                  </a:txBody>
-                  <a:tcPr anchor="ctr" marT="12700" marB="12700">
-                    <a:solidFill>
-                      <a:srgbClr val="F0F1F3"/>
-                    </a:solidFill>
-                  </a:tcPr>
-                </a:tc>
-                <a:tc>
-                  <a:txBody>
-                    <a:bodyPr/>
-                    <a:lstStyle/>
-                    <a:p>
-                      <a:pPr algn="r"/>
-                      <a:r>
-                        <a:rPr sz="1050" b="0" i="0">
-                          <a:solidFill>
-                            <a:srgbClr val="262626"/>
-                          </a:solidFill>
-                          <a:latin typeface="Garamond"/>
-                          <a:cs typeface="Garamond"/>
-                        </a:rPr>
-                        <a:t>9,422,753</a:t>
-                      </a:r>
-                    </a:p>
-                  </a:txBody>
-                  <a:tcPr anchor="ctr" marT="12700" marB="12700">
-                    <a:solidFill>
-                      <a:srgbClr val="F0F1F3"/>
-                    </a:solidFill>
-                  </a:tcPr>
-                </a:tc>
-                <a:tc>
-                  <a:txBody>
-                    <a:bodyPr/>
-                    <a:lstStyle/>
-                    <a:p>
-                      <a:pPr algn="r"/>
-                      <a:r>
-                        <a:rPr sz="1050" b="0" i="0">
-                          <a:solidFill>
-                            <a:srgbClr val="262626"/>
-                          </a:solidFill>
-                          <a:latin typeface="Garamond"/>
-                          <a:cs typeface="Garamond"/>
-                        </a:rPr>
-                        <a:t>976,700</a:t>
-                      </a:r>
-                    </a:p>
-                  </a:txBody>
-                  <a:tcPr anchor="ctr" marT="12700" marB="12700">
-                    <a:solidFill>
-                      <a:srgbClr val="F0F1F3"/>
-                    </a:solidFill>
-                  </a:tcPr>
-                </a:tc>
-              </a:tr>
-              <a:tr h="396240">
-                <a:tc>
-                  <a:txBody>
-                    <a:bodyPr/>
-                    <a:lstStyle/>
-                    <a:p>
-                      <a:pPr algn="l"/>
-                      <a:r>
-                        <a:rPr sz="1050" b="0" i="0">
-                          <a:solidFill>
-                            <a:srgbClr val="262626"/>
-                          </a:solidFill>
-                          <a:latin typeface="Garamond"/>
-                          <a:cs typeface="Garamond"/>
-                        </a:rPr>
-                        <a:t>Kontoor (KTB)</a:t>
-                      </a:r>
-                    </a:p>
-                  </a:txBody>
-                  <a:tcPr anchor="ctr" marT="12700" marB="12700">
-                    <a:solidFill>
-                      <a:srgbClr val="FFFFFF"/>
-                    </a:solidFill>
-                  </a:tcPr>
-                </a:tc>
-                <a:tc>
-                  <a:txBody>
-                    <a:bodyPr/>
-                    <a:lstStyle/>
-                    <a:p>
-                      <a:pPr algn="r"/>
-                      <a:r>
-                        <a:rPr sz="1050" b="0" i="0">
-                          <a:solidFill>
-                            <a:srgbClr val="262626"/>
-                          </a:solidFill>
-                          <a:latin typeface="Garamond"/>
-                          <a:cs typeface="Garamond"/>
-                        </a:rPr>
-                        <a:t>12.9x</a:t>
-                      </a:r>
-                    </a:p>
-                  </a:txBody>
-                  <a:tcPr anchor="ctr" marT="12700" marB="12700">
-                    <a:solidFill>
-                      <a:srgbClr val="FFFFFF"/>
-                    </a:solidFill>
-                  </a:tcPr>
-                </a:tc>
-                <a:tc>
-                  <a:txBody>
-                    <a:bodyPr/>
-                    <a:lstStyle/>
-                    <a:p>
-                      <a:pPr algn="r"/>
-                      <a:r>
-                        <a:rPr sz="1050" b="0" i="0">
-                          <a:solidFill>
-                            <a:srgbClr val="262626"/>
-                          </a:solidFill>
-                          <a:latin typeface="Garamond"/>
-                          <a:cs typeface="Garamond"/>
-                        </a:rPr>
-                        <a:t>18.0x</a:t>
-                      </a:r>
-                    </a:p>
-                  </a:txBody>
-                  <a:tcPr anchor="ctr" marT="12700" marB="12700">
-                    <a:solidFill>
-                      <a:srgbClr val="FFFFFF"/>
-                    </a:solidFill>
-                  </a:tcPr>
-                </a:tc>
-                <a:tc>
-                  <a:txBody>
-                    <a:bodyPr/>
-                    <a:lstStyle/>
-                    <a:p>
-                      <a:pPr algn="r"/>
-                      <a:r>
-                        <a:rPr sz="1050" b="0" i="0">
-                          <a:solidFill>
-                            <a:srgbClr val="262626"/>
-                          </a:solidFill>
-                          <a:latin typeface="Garamond"/>
-                          <a:cs typeface="Garamond"/>
-                        </a:rPr>
-                        <a:t>5,236,269</a:t>
-                      </a:r>
-                    </a:p>
-                  </a:txBody>
-                  <a:tcPr anchor="ctr" marT="12700" marB="12700">
-                    <a:solidFill>
-                      <a:srgbClr val="FFFFFF"/>
-                    </a:solidFill>
-                  </a:tcPr>
-                </a:tc>
-                <a:tc>
-                  <a:txBody>
-                    <a:bodyPr/>
-                    <a:lstStyle/>
-                    <a:p>
-                      <a:pPr algn="r"/>
-                      <a:r>
-                        <a:rPr sz="1050" b="0" i="0">
-                          <a:solidFill>
-                            <a:srgbClr val="262626"/>
-                          </a:solidFill>
-                          <a:latin typeface="Garamond"/>
-                          <a:cs typeface="Garamond"/>
-                        </a:rPr>
-                        <a:t>407,521</a:t>
-                      </a:r>
-                    </a:p>
-                  </a:txBody>
-                  <a:tcPr anchor="ctr" marT="12700" marB="12700">
-                    <a:solidFill>
-                      <a:srgbClr val="FFFFFF"/>
-                    </a:solidFill>
-                  </a:tcPr>
-                </a:tc>
-              </a:tr>
-              <a:tr h="396240">
-                <a:tc>
-                  <a:txBody>
-                    <a:bodyPr/>
-                    <a:lstStyle/>
-                    <a:p>
-                      <a:pPr algn="l"/>
-                      <a:r>
-                        <a:rPr sz="1050" b="0" i="0">
-                          <a:solidFill>
-                            <a:srgbClr val="262626"/>
-                          </a:solidFill>
-                          <a:latin typeface="Garamond"/>
-                          <a:cs typeface="Garamond"/>
-                        </a:rPr>
-                        <a:t>Alo Yoga (private)</a:t>
-                      </a:r>
-                    </a:p>
-                  </a:txBody>
-                  <a:tcPr anchor="ctr" marT="12700" marB="12700">
-                    <a:solidFill>
-                      <a:srgbClr val="F0F1F3"/>
-                    </a:solidFill>
-                  </a:tcPr>
-                </a:tc>
-                <a:tc>
-                  <a:txBody>
-                    <a:bodyPr/>
-                    <a:lstStyle/>
-                    <a:p>
-                      <a:pPr algn="r"/>
-                      <a:r>
-                        <a:rPr sz="1050" b="0" i="0">
-                          <a:solidFill>
-                            <a:srgbClr val="262626"/>
-                          </a:solidFill>
-                          <a:latin typeface="Garamond"/>
-                          <a:cs typeface="Garamond"/>
-                        </a:rPr>
-                        <a:t>n.a.</a:t>
-                      </a:r>
-                    </a:p>
-                  </a:txBody>
-                  <a:tcPr anchor="ctr" marT="12700" marB="12700">
-                    <a:solidFill>
-                      <a:srgbClr val="F0F1F3"/>
-                    </a:solidFill>
-                  </a:tcPr>
-                </a:tc>
-                <a:tc>
-                  <a:txBody>
-                    <a:bodyPr/>
-                    <a:lstStyle/>
-                    <a:p>
-                      <a:pPr algn="r"/>
-                      <a:r>
-                        <a:rPr sz="1050" b="0" i="0">
-                          <a:solidFill>
-                            <a:srgbClr val="262626"/>
-                          </a:solidFill>
-                          <a:latin typeface="Garamond"/>
-                          <a:cs typeface="Garamond"/>
-                        </a:rPr>
-                        <a:t>n.m.</a:t>
-                      </a:r>
-                    </a:p>
-                  </a:txBody>
-                  <a:tcPr anchor="ctr" marT="12700" marB="12700">
-                    <a:solidFill>
-                      <a:srgbClr val="F0F1F3"/>
-                    </a:solidFill>
-                  </a:tcPr>
-                </a:tc>
-                <a:tc>
-                  <a:txBody>
-                    <a:bodyPr/>
-                    <a:lstStyle/>
-                    <a:p>
-                      <a:pPr algn="r"/>
-                      <a:r>
-                        <a:rPr sz="1050" b="0" i="0">
-                          <a:solidFill>
-                            <a:srgbClr val="262626"/>
-                          </a:solidFill>
-                          <a:latin typeface="Garamond"/>
-                          <a:cs typeface="Garamond"/>
-                        </a:rPr>
-                        <a:t>—</a:t>
-                      </a:r>
-                    </a:p>
-                  </a:txBody>
-                  <a:tcPr anchor="ctr" marT="12700" marB="12700">
-                    <a:solidFill>
-                      <a:srgbClr val="F0F1F3"/>
-                    </a:solidFill>
-                  </a:tcPr>
-                </a:tc>
-                <a:tc>
-                  <a:txBody>
-                    <a:bodyPr/>
-                    <a:lstStyle/>
-                    <a:p>
-                      <a:pPr algn="r"/>
-                      <a:r>
-                        <a:rPr sz="1050" b="0" i="0">
-                          <a:solidFill>
-                            <a:srgbClr val="262626"/>
-                          </a:solidFill>
-                          <a:latin typeface="Garamond"/>
-                          <a:cs typeface="Garamond"/>
-                        </a:rPr>
-                        <a:t>—</a:t>
-                      </a:r>
-                    </a:p>
-                  </a:txBody>
-                  <a:tcPr anchor="ctr" marT="12700" marB="12700">
-                    <a:solidFill>
-                      <a:srgbClr val="F0F1F3"/>
-                    </a:solidFill>
-                  </a:tcPr>
-                </a:tc>
-              </a:tr>
-            </a:tbl>
-          </a:graphicData>
-        </a:graphic>
-      </p:graphicFrame>
       <p:sp>
         <p:nvSpPr>
-          <p:cNvPr id="9" name="TextBox 8"/>
+          <p:cNvPr id="8" name="TextBox 7"/>
           <p:cNvSpPr txBox="1"/>
           <p:nvPr/>
         </p:nvSpPr>
         <p:spPr>
           <a:xfrm>
-            <a:off x="457200" y="4754880"/>
-            <a:ext cx="11292840" cy="1600200"/>
+            <a:off x="457200" y="1005840"/>
+            <a:ext cx="6583680" cy="228600"/>
           </a:xfrm>
           <a:prstGeom prst="rect">
             <a:avLst/>
@@ -27034,19 +25929,1874 @@
                 <a:spcPts val="0"/>
               </a:spcBef>
               <a:spcAft>
-                <a:spcPts val="300"/>
-              </a:spcAft>
-              <a:buNone/>
-            </a:pPr>
-            <a:r>
-              <a:rPr sz="1350" b="1" i="0">
+                <a:spcPts val="0"/>
+              </a:spcAft>
+              <a:buNone/>
+            </a:pPr>
+            <a:r>
+              <a:rPr sz="1000" b="1" i="0">
                 <a:solidFill>
                   <a:srgbClr val="990000"/>
                 </a:solidFill>
                 <a:latin typeface="Garamond"/>
                 <a:cs typeface="Garamond"/>
               </a:rPr>
-              <a:t>Read-through — we do not average these for terminal value</a:t>
+              <a:t>COMPARABLE COMPANIES — TRADING MULTIPLES</a:t>
+            </a:r>
+          </a:p>
+        </p:txBody>
+      </p:sp>
+      <p:graphicFrame>
+        <p:nvGraphicFramePr>
+          <p:cNvPr id="9" name="Table 8"/>
+          <p:cNvGraphicFramePr>
+            <a:graphicFrameLocks noGrp="1"/>
+          </p:cNvGraphicFramePr>
+          <p:nvPr/>
+        </p:nvGraphicFramePr>
+        <p:xfrm>
+          <a:off x="457200" y="1207008"/>
+          <a:ext cx="6629400" cy="2331720"/>
+        </p:xfrm>
+        <a:graphic>
+          <a:graphicData uri="http://schemas.openxmlformats.org/drawingml/2006/table">
+            <a:tbl>
+              <a:tblPr firstRow="1" bandRow="1">
+                <a:tableStyleId>{5C22544A-7EE6-4342-B048-85BDC9FD1C3A}</a:tableStyleId>
+              </a:tblPr>
+              <a:tblGrid>
+                <a:gridCol w="1828800"/>
+                <a:gridCol w="1200150"/>
+                <a:gridCol w="1200150"/>
+                <a:gridCol w="1200150"/>
+                <a:gridCol w="1200150"/>
+              </a:tblGrid>
+              <a:tr h="233172">
+                <a:tc>
+                  <a:txBody>
+                    <a:bodyPr/>
+                    <a:lstStyle/>
+                    <a:p>
+                      <a:pPr algn="l"/>
+                      <a:r>
+                        <a:rPr sz="850" b="1" i="0">
+                          <a:solidFill>
+                            <a:srgbClr val="FFFFFF"/>
+                          </a:solidFill>
+                          <a:latin typeface="Garamond"/>
+                          <a:cs typeface="Garamond"/>
+                        </a:rPr>
+                        <a:t>Company</a:t>
+                      </a:r>
+                    </a:p>
+                  </a:txBody>
+                  <a:tcPr anchor="ctr">
+                    <a:solidFill>
+                      <a:srgbClr val="1F2A44"/>
+                    </a:solidFill>
+                  </a:tcPr>
+                </a:tc>
+                <a:tc>
+                  <a:txBody>
+                    <a:bodyPr/>
+                    <a:lstStyle/>
+                    <a:p>
+                      <a:pPr algn="r"/>
+                      <a:r>
+                        <a:rPr sz="850" b="1" i="0">
+                          <a:solidFill>
+                            <a:srgbClr val="FFFFFF"/>
+                          </a:solidFill>
+                          <a:latin typeface="Garamond"/>
+                          <a:cs typeface="Garamond"/>
+                        </a:rPr>
+                        <a:t>EV/Rev</a:t>
+                      </a:r>
+                    </a:p>
+                  </a:txBody>
+                  <a:tcPr anchor="ctr">
+                    <a:solidFill>
+                      <a:srgbClr val="1F2A44"/>
+                    </a:solidFill>
+                  </a:tcPr>
+                </a:tc>
+                <a:tc>
+                  <a:txBody>
+                    <a:bodyPr/>
+                    <a:lstStyle/>
+                    <a:p>
+                      <a:pPr algn="r"/>
+                      <a:r>
+                        <a:rPr sz="850" b="1" i="0">
+                          <a:solidFill>
+                            <a:srgbClr val="FFFFFF"/>
+                          </a:solidFill>
+                          <a:latin typeface="Garamond"/>
+                          <a:cs typeface="Garamond"/>
+                        </a:rPr>
+                        <a:t>EV/EBITDA</a:t>
+                      </a:r>
+                    </a:p>
+                  </a:txBody>
+                  <a:tcPr anchor="ctr">
+                    <a:solidFill>
+                      <a:srgbClr val="1F2A44"/>
+                    </a:solidFill>
+                  </a:tcPr>
+                </a:tc>
+                <a:tc>
+                  <a:txBody>
+                    <a:bodyPr/>
+                    <a:lstStyle/>
+                    <a:p>
+                      <a:pPr algn="r"/>
+                      <a:r>
+                        <a:rPr sz="850" b="1" i="0">
+                          <a:solidFill>
+                            <a:srgbClr val="FFFFFF"/>
+                          </a:solidFill>
+                          <a:latin typeface="Garamond"/>
+                          <a:cs typeface="Garamond"/>
+                        </a:rPr>
+                        <a:t>EV/EBIT</a:t>
+                      </a:r>
+                    </a:p>
+                  </a:txBody>
+                  <a:tcPr anchor="ctr">
+                    <a:solidFill>
+                      <a:srgbClr val="1F2A44"/>
+                    </a:solidFill>
+                  </a:tcPr>
+                </a:tc>
+                <a:tc>
+                  <a:txBody>
+                    <a:bodyPr/>
+                    <a:lstStyle/>
+                    <a:p>
+                      <a:pPr algn="r"/>
+                      <a:r>
+                        <a:rPr sz="850" b="1" i="0">
+                          <a:solidFill>
+                            <a:srgbClr val="FFFFFF"/>
+                          </a:solidFill>
+                          <a:latin typeface="Garamond"/>
+                          <a:cs typeface="Garamond"/>
+                        </a:rPr>
+                        <a:t>P/E</a:t>
+                      </a:r>
+                    </a:p>
+                  </a:txBody>
+                  <a:tcPr anchor="ctr">
+                    <a:solidFill>
+                      <a:srgbClr val="1F2A44"/>
+                    </a:solidFill>
+                  </a:tcPr>
+                </a:tc>
+              </a:tr>
+              <a:tr h="233172">
+                <a:tc>
+                  <a:txBody>
+                    <a:bodyPr/>
+                    <a:lstStyle/>
+                    <a:p>
+                      <a:pPr algn="l"/>
+                      <a:r>
+                        <a:rPr sz="850" b="0" i="0">
+                          <a:solidFill>
+                            <a:srgbClr val="262626"/>
+                          </a:solidFill>
+                          <a:latin typeface="Garamond"/>
+                          <a:cs typeface="Garamond"/>
+                        </a:rPr>
+                        <a:t>lululemon</a:t>
+                      </a:r>
+                    </a:p>
+                  </a:txBody>
+                  <a:tcPr anchor="ctr" marT="12700" marB="12700">
+                    <a:solidFill>
+                      <a:srgbClr val="FFFFFF"/>
+                    </a:solidFill>
+                  </a:tcPr>
+                </a:tc>
+                <a:tc>
+                  <a:txBody>
+                    <a:bodyPr/>
+                    <a:lstStyle/>
+                    <a:p>
+                      <a:pPr algn="r"/>
+                      <a:r>
+                        <a:rPr sz="850" b="0" i="0">
+                          <a:solidFill>
+                            <a:srgbClr val="262626"/>
+                          </a:solidFill>
+                          <a:latin typeface="Garamond"/>
+                          <a:cs typeface="Garamond"/>
+                        </a:rPr>
+                        <a:t>1.07x</a:t>
+                      </a:r>
+                    </a:p>
+                  </a:txBody>
+                  <a:tcPr anchor="ctr" marT="12700" marB="12700">
+                    <a:solidFill>
+                      <a:srgbClr val="FFFFFF"/>
+                    </a:solidFill>
+                  </a:tcPr>
+                </a:tc>
+                <a:tc>
+                  <a:txBody>
+                    <a:bodyPr/>
+                    <a:lstStyle/>
+                    <a:p>
+                      <a:pPr algn="r"/>
+                      <a:r>
+                        <a:rPr sz="850" b="0" i="0">
+                          <a:solidFill>
+                            <a:srgbClr val="262626"/>
+                          </a:solidFill>
+                          <a:latin typeface="Garamond"/>
+                          <a:cs typeface="Garamond"/>
+                        </a:rPr>
+                        <a:t>4.7x</a:t>
+                      </a:r>
+                    </a:p>
+                  </a:txBody>
+                  <a:tcPr anchor="ctr" marT="12700" marB="12700">
+                    <a:solidFill>
+                      <a:srgbClr val="FFFFFF"/>
+                    </a:solidFill>
+                  </a:tcPr>
+                </a:tc>
+                <a:tc>
+                  <a:txBody>
+                    <a:bodyPr/>
+                    <a:lstStyle/>
+                    <a:p>
+                      <a:pPr algn="r"/>
+                      <a:r>
+                        <a:rPr sz="850" b="0" i="0">
+                          <a:solidFill>
+                            <a:srgbClr val="262626"/>
+                          </a:solidFill>
+                          <a:latin typeface="Garamond"/>
+                          <a:cs typeface="Garamond"/>
+                        </a:rPr>
+                        <a:t>5.4x</a:t>
+                      </a:r>
+                    </a:p>
+                  </a:txBody>
+                  <a:tcPr anchor="ctr" marT="12700" marB="12700">
+                    <a:solidFill>
+                      <a:srgbClr val="FFFFFF"/>
+                    </a:solidFill>
+                  </a:tcPr>
+                </a:tc>
+                <a:tc>
+                  <a:txBody>
+                    <a:bodyPr/>
+                    <a:lstStyle/>
+                    <a:p>
+                      <a:pPr algn="r"/>
+                      <a:r>
+                        <a:rPr sz="850" b="0" i="0">
+                          <a:solidFill>
+                            <a:srgbClr val="262626"/>
+                          </a:solidFill>
+                          <a:latin typeface="Garamond"/>
+                          <a:cs typeface="Garamond"/>
+                        </a:rPr>
+                        <a:t>8.3x</a:t>
+                      </a:r>
+                    </a:p>
+                  </a:txBody>
+                  <a:tcPr anchor="ctr" marT="12700" marB="12700">
+                    <a:solidFill>
+                      <a:srgbClr val="FFFFFF"/>
+                    </a:solidFill>
+                  </a:tcPr>
+                </a:tc>
+              </a:tr>
+              <a:tr h="233172">
+                <a:tc>
+                  <a:txBody>
+                    <a:bodyPr/>
+                    <a:lstStyle/>
+                    <a:p>
+                      <a:pPr algn="l"/>
+                      <a:r>
+                        <a:rPr sz="850" b="0" i="0">
+                          <a:solidFill>
+                            <a:srgbClr val="262626"/>
+                          </a:solidFill>
+                          <a:latin typeface="Garamond"/>
+                          <a:cs typeface="Garamond"/>
+                        </a:rPr>
+                        <a:t>adidas</a:t>
+                      </a:r>
+                    </a:p>
+                  </a:txBody>
+                  <a:tcPr anchor="ctr" marT="12700" marB="12700">
+                    <a:solidFill>
+                      <a:srgbClr val="F0F1F3"/>
+                    </a:solidFill>
+                  </a:tcPr>
+                </a:tc>
+                <a:tc>
+                  <a:txBody>
+                    <a:bodyPr/>
+                    <a:lstStyle/>
+                    <a:p>
+                      <a:pPr algn="r"/>
+                      <a:r>
+                        <a:rPr sz="850" b="0" i="0">
+                          <a:solidFill>
+                            <a:srgbClr val="262626"/>
+                          </a:solidFill>
+                          <a:latin typeface="Garamond"/>
+                          <a:cs typeface="Garamond"/>
+                        </a:rPr>
+                        <a:t>1.51x</a:t>
+                      </a:r>
+                    </a:p>
+                  </a:txBody>
+                  <a:tcPr anchor="ctr" marT="12700" marB="12700">
+                    <a:solidFill>
+                      <a:srgbClr val="F0F1F3"/>
+                    </a:solidFill>
+                  </a:tcPr>
+                </a:tc>
+                <a:tc>
+                  <a:txBody>
+                    <a:bodyPr/>
+                    <a:lstStyle/>
+                    <a:p>
+                      <a:pPr algn="r"/>
+                      <a:r>
+                        <a:rPr sz="850" b="0" i="0">
+                          <a:solidFill>
+                            <a:srgbClr val="262626"/>
+                          </a:solidFill>
+                          <a:latin typeface="Garamond"/>
+                          <a:cs typeface="Garamond"/>
+                        </a:rPr>
+                        <a:t>9.2x</a:t>
+                      </a:r>
+                    </a:p>
+                  </a:txBody>
+                  <a:tcPr anchor="ctr" marT="12700" marB="12700">
+                    <a:solidFill>
+                      <a:srgbClr val="F0F1F3"/>
+                    </a:solidFill>
+                  </a:tcPr>
+                </a:tc>
+                <a:tc>
+                  <a:txBody>
+                    <a:bodyPr/>
+                    <a:lstStyle/>
+                    <a:p>
+                      <a:pPr algn="r"/>
+                      <a:r>
+                        <a:rPr sz="850" b="0" i="0">
+                          <a:solidFill>
+                            <a:srgbClr val="262626"/>
+                          </a:solidFill>
+                          <a:latin typeface="Garamond"/>
+                          <a:cs typeface="Garamond"/>
+                        </a:rPr>
+                        <a:t>18.6x</a:t>
+                      </a:r>
+                    </a:p>
+                  </a:txBody>
+                  <a:tcPr anchor="ctr" marT="12700" marB="12700">
+                    <a:solidFill>
+                      <a:srgbClr val="F0F1F3"/>
+                    </a:solidFill>
+                  </a:tcPr>
+                </a:tc>
+                <a:tc>
+                  <a:txBody>
+                    <a:bodyPr/>
+                    <a:lstStyle/>
+                    <a:p>
+                      <a:pPr algn="r"/>
+                      <a:r>
+                        <a:rPr sz="850" b="0" i="0">
+                          <a:solidFill>
+                            <a:srgbClr val="262626"/>
+                          </a:solidFill>
+                          <a:latin typeface="Garamond"/>
+                          <a:cs typeface="Garamond"/>
+                        </a:rPr>
+                        <a:t>19.1x</a:t>
+                      </a:r>
+                    </a:p>
+                  </a:txBody>
+                  <a:tcPr anchor="ctr" marT="12700" marB="12700">
+                    <a:solidFill>
+                      <a:srgbClr val="F0F1F3"/>
+                    </a:solidFill>
+                  </a:tcPr>
+                </a:tc>
+              </a:tr>
+              <a:tr h="233172">
+                <a:tc>
+                  <a:txBody>
+                    <a:bodyPr/>
+                    <a:lstStyle/>
+                    <a:p>
+                      <a:pPr algn="l"/>
+                      <a:r>
+                        <a:rPr sz="850" b="0" i="0">
+                          <a:solidFill>
+                            <a:srgbClr val="262626"/>
+                          </a:solidFill>
+                          <a:latin typeface="Garamond"/>
+                          <a:cs typeface="Garamond"/>
+                        </a:rPr>
+                        <a:t>Nike</a:t>
+                      </a:r>
+                    </a:p>
+                  </a:txBody>
+                  <a:tcPr anchor="ctr" marT="12700" marB="12700">
+                    <a:solidFill>
+                      <a:srgbClr val="FFFFFF"/>
+                    </a:solidFill>
+                  </a:tcPr>
+                </a:tc>
+                <a:tc>
+                  <a:txBody>
+                    <a:bodyPr/>
+                    <a:lstStyle/>
+                    <a:p>
+                      <a:pPr algn="r"/>
+                      <a:r>
+                        <a:rPr sz="850" b="0" i="0">
+                          <a:solidFill>
+                            <a:srgbClr val="262626"/>
+                          </a:solidFill>
+                          <a:latin typeface="Garamond"/>
+                          <a:cs typeface="Garamond"/>
+                        </a:rPr>
+                        <a:t>1.27x</a:t>
+                      </a:r>
+                    </a:p>
+                  </a:txBody>
+                  <a:tcPr anchor="ctr" marT="12700" marB="12700">
+                    <a:solidFill>
+                      <a:srgbClr val="FFFFFF"/>
+                    </a:solidFill>
+                  </a:tcPr>
+                </a:tc>
+                <a:tc>
+                  <a:txBody>
+                    <a:bodyPr/>
+                    <a:lstStyle/>
+                    <a:p>
+                      <a:pPr algn="r"/>
+                      <a:r>
+                        <a:rPr sz="850" b="0" i="0">
+                          <a:solidFill>
+                            <a:srgbClr val="262626"/>
+                          </a:solidFill>
+                          <a:latin typeface="Garamond"/>
+                          <a:cs typeface="Garamond"/>
+                        </a:rPr>
+                        <a:t>12.7x</a:t>
+                      </a:r>
+                    </a:p>
+                  </a:txBody>
+                  <a:tcPr anchor="ctr" marT="12700" marB="12700">
+                    <a:solidFill>
+                      <a:srgbClr val="FFFFFF"/>
+                    </a:solidFill>
+                  </a:tcPr>
+                </a:tc>
+                <a:tc>
+                  <a:txBody>
+                    <a:bodyPr/>
+                    <a:lstStyle/>
+                    <a:p>
+                      <a:pPr algn="r"/>
+                      <a:r>
+                        <a:rPr sz="850" b="0" i="0">
+                          <a:solidFill>
+                            <a:srgbClr val="262626"/>
+                          </a:solidFill>
+                          <a:latin typeface="Garamond"/>
+                          <a:cs typeface="Garamond"/>
+                        </a:rPr>
+                        <a:t>15.9x</a:t>
+                      </a:r>
+                    </a:p>
+                  </a:txBody>
+                  <a:tcPr anchor="ctr" marT="12700" marB="12700">
+                    <a:solidFill>
+                      <a:srgbClr val="FFFFFF"/>
+                    </a:solidFill>
+                  </a:tcPr>
+                </a:tc>
+                <a:tc>
+                  <a:txBody>
+                    <a:bodyPr/>
+                    <a:lstStyle/>
+                    <a:p>
+                      <a:pPr algn="r"/>
+                      <a:r>
+                        <a:rPr sz="850" b="0" i="0">
+                          <a:solidFill>
+                            <a:srgbClr val="262626"/>
+                          </a:solidFill>
+                          <a:latin typeface="Garamond"/>
+                          <a:cs typeface="Garamond"/>
+                        </a:rPr>
+                        <a:t>18.3x</a:t>
+                      </a:r>
+                    </a:p>
+                  </a:txBody>
+                  <a:tcPr anchor="ctr" marT="12700" marB="12700">
+                    <a:solidFill>
+                      <a:srgbClr val="FFFFFF"/>
+                    </a:solidFill>
+                  </a:tcPr>
+                </a:tc>
+              </a:tr>
+              <a:tr h="233172">
+                <a:tc>
+                  <a:txBody>
+                    <a:bodyPr/>
+                    <a:lstStyle/>
+                    <a:p>
+                      <a:pPr algn="l"/>
+                      <a:r>
+                        <a:rPr sz="850" b="0" i="0">
+                          <a:solidFill>
+                            <a:srgbClr val="262626"/>
+                          </a:solidFill>
+                          <a:latin typeface="Garamond"/>
+                          <a:cs typeface="Garamond"/>
+                        </a:rPr>
+                        <a:t>Deckers</a:t>
+                      </a:r>
+                    </a:p>
+                  </a:txBody>
+                  <a:tcPr anchor="ctr" marT="12700" marB="12700">
+                    <a:solidFill>
+                      <a:srgbClr val="F0F1F3"/>
+                    </a:solidFill>
+                  </a:tcPr>
+                </a:tc>
+                <a:tc>
+                  <a:txBody>
+                    <a:bodyPr/>
+                    <a:lstStyle/>
+                    <a:p>
+                      <a:pPr algn="r"/>
+                      <a:r>
+                        <a:rPr sz="850" b="0" i="0">
+                          <a:solidFill>
+                            <a:srgbClr val="262626"/>
+                          </a:solidFill>
+                          <a:latin typeface="Garamond"/>
+                          <a:cs typeface="Garamond"/>
+                        </a:rPr>
+                        <a:t>2.47x</a:t>
+                      </a:r>
+                    </a:p>
+                  </a:txBody>
+                  <a:tcPr anchor="ctr" marT="12700" marB="12700">
+                    <a:solidFill>
+                      <a:srgbClr val="F0F1F3"/>
+                    </a:solidFill>
+                  </a:tcPr>
+                </a:tc>
+                <a:tc>
+                  <a:txBody>
+                    <a:bodyPr/>
+                    <a:lstStyle/>
+                    <a:p>
+                      <a:pPr algn="r"/>
+                      <a:r>
+                        <a:rPr sz="850" b="0" i="0">
+                          <a:solidFill>
+                            <a:srgbClr val="262626"/>
+                          </a:solidFill>
+                          <a:latin typeface="Garamond"/>
+                          <a:cs typeface="Garamond"/>
+                        </a:rPr>
+                        <a:t>7.9x</a:t>
+                      </a:r>
+                    </a:p>
+                  </a:txBody>
+                  <a:tcPr anchor="ctr" marT="12700" marB="12700">
+                    <a:solidFill>
+                      <a:srgbClr val="F0F1F3"/>
+                    </a:solidFill>
+                  </a:tcPr>
+                </a:tc>
+                <a:tc>
+                  <a:txBody>
+                    <a:bodyPr/>
+                    <a:lstStyle/>
+                    <a:p>
+                      <a:pPr algn="r"/>
+                      <a:r>
+                        <a:rPr sz="850" b="0" i="0">
+                          <a:solidFill>
+                            <a:srgbClr val="262626"/>
+                          </a:solidFill>
+                          <a:latin typeface="Garamond"/>
+                          <a:cs typeface="Garamond"/>
+                        </a:rPr>
+                        <a:t>9.8x</a:t>
+                      </a:r>
+                    </a:p>
+                  </a:txBody>
+                  <a:tcPr anchor="ctr" marT="12700" marB="12700">
+                    <a:solidFill>
+                      <a:srgbClr val="F0F1F3"/>
+                    </a:solidFill>
+                  </a:tcPr>
+                </a:tc>
+                <a:tc>
+                  <a:txBody>
+                    <a:bodyPr/>
+                    <a:lstStyle/>
+                    <a:p>
+                      <a:pPr algn="r"/>
+                      <a:r>
+                        <a:rPr sz="850" b="0" i="0">
+                          <a:solidFill>
+                            <a:srgbClr val="262626"/>
+                          </a:solidFill>
+                          <a:latin typeface="Garamond"/>
+                          <a:cs typeface="Garamond"/>
+                        </a:rPr>
+                        <a:t>12.1x</a:t>
+                      </a:r>
+                    </a:p>
+                  </a:txBody>
+                  <a:tcPr anchor="ctr" marT="12700" marB="12700">
+                    <a:solidFill>
+                      <a:srgbClr val="F0F1F3"/>
+                    </a:solidFill>
+                  </a:tcPr>
+                </a:tc>
+              </a:tr>
+              <a:tr h="233172">
+                <a:tc>
+                  <a:txBody>
+                    <a:bodyPr/>
+                    <a:lstStyle/>
+                    <a:p>
+                      <a:pPr algn="l"/>
+                      <a:r>
+                        <a:rPr sz="850" b="0" i="0">
+                          <a:solidFill>
+                            <a:srgbClr val="262626"/>
+                          </a:solidFill>
+                          <a:latin typeface="Garamond"/>
+                          <a:cs typeface="Garamond"/>
+                        </a:rPr>
+                        <a:t>Crocs</a:t>
+                      </a:r>
+                    </a:p>
+                  </a:txBody>
+                  <a:tcPr anchor="ctr" marT="12700" marB="12700">
+                    <a:solidFill>
+                      <a:srgbClr val="FFFFFF"/>
+                    </a:solidFill>
+                  </a:tcPr>
+                </a:tc>
+                <a:tc>
+                  <a:txBody>
+                    <a:bodyPr/>
+                    <a:lstStyle/>
+                    <a:p>
+                      <a:pPr algn="r"/>
+                      <a:r>
+                        <a:rPr sz="850" b="0" i="0">
+                          <a:solidFill>
+                            <a:srgbClr val="262626"/>
+                          </a:solidFill>
+                          <a:latin typeface="Garamond"/>
+                          <a:cs typeface="Garamond"/>
+                        </a:rPr>
+                        <a:t>1.74x</a:t>
+                      </a:r>
+                    </a:p>
+                  </a:txBody>
+                  <a:tcPr anchor="ctr" marT="12700" marB="12700">
+                    <a:solidFill>
+                      <a:srgbClr val="FFFFFF"/>
+                    </a:solidFill>
+                  </a:tcPr>
+                </a:tc>
+                <a:tc>
+                  <a:txBody>
+                    <a:bodyPr/>
+                    <a:lstStyle/>
+                    <a:p>
+                      <a:pPr algn="r"/>
+                      <a:r>
+                        <a:rPr sz="850" b="0" i="0">
+                          <a:solidFill>
+                            <a:srgbClr val="262626"/>
+                          </a:solidFill>
+                          <a:latin typeface="Garamond"/>
+                          <a:cs typeface="Garamond"/>
+                        </a:rPr>
+                        <a:t>7.8x</a:t>
+                      </a:r>
+                    </a:p>
+                  </a:txBody>
+                  <a:tcPr anchor="ctr" marT="12700" marB="12700">
+                    <a:solidFill>
+                      <a:srgbClr val="FFFFFF"/>
+                    </a:solidFill>
+                  </a:tcPr>
+                </a:tc>
+                <a:tc>
+                  <a:txBody>
+                    <a:bodyPr/>
+                    <a:lstStyle/>
+                    <a:p>
+                      <a:pPr algn="r"/>
+                      <a:r>
+                        <a:rPr sz="850" b="0" i="0">
+                          <a:solidFill>
+                            <a:srgbClr val="262626"/>
+                          </a:solidFill>
+                          <a:latin typeface="Garamond"/>
+                          <a:cs typeface="Garamond"/>
+                        </a:rPr>
+                        <a:t>7.8x</a:t>
+                      </a:r>
+                    </a:p>
+                  </a:txBody>
+                  <a:tcPr anchor="ctr" marT="12700" marB="12700">
+                    <a:solidFill>
+                      <a:srgbClr val="FFFFFF"/>
+                    </a:solidFill>
+                  </a:tcPr>
+                </a:tc>
+                <a:tc>
+                  <a:txBody>
+                    <a:bodyPr/>
+                    <a:lstStyle/>
+                    <a:p>
+                      <a:pPr algn="r"/>
+                      <a:r>
+                        <a:rPr sz="850" b="0" i="0">
+                          <a:solidFill>
+                            <a:srgbClr val="262626"/>
+                          </a:solidFill>
+                          <a:latin typeface="Garamond"/>
+                          <a:cs typeface="Garamond"/>
+                        </a:rPr>
+                        <a:t>10.3x</a:t>
+                      </a:r>
+                    </a:p>
+                  </a:txBody>
+                  <a:tcPr anchor="ctr" marT="12700" marB="12700">
+                    <a:solidFill>
+                      <a:srgbClr val="FFFFFF"/>
+                    </a:solidFill>
+                  </a:tcPr>
+                </a:tc>
+              </a:tr>
+              <a:tr h="233172">
+                <a:tc>
+                  <a:txBody>
+                    <a:bodyPr/>
+                    <a:lstStyle/>
+                    <a:p>
+                      <a:pPr algn="l"/>
+                      <a:r>
+                        <a:rPr sz="850" b="0" i="0">
+                          <a:solidFill>
+                            <a:srgbClr val="262626"/>
+                          </a:solidFill>
+                          <a:latin typeface="Garamond"/>
+                          <a:cs typeface="Garamond"/>
+                        </a:rPr>
+                        <a:t>Levi Strauss</a:t>
+                      </a:r>
+                    </a:p>
+                  </a:txBody>
+                  <a:tcPr anchor="ctr" marT="12700" marB="12700">
+                    <a:solidFill>
+                      <a:srgbClr val="F0F1F3"/>
+                    </a:solidFill>
+                  </a:tcPr>
+                </a:tc>
+                <a:tc>
+                  <a:txBody>
+                    <a:bodyPr/>
+                    <a:lstStyle/>
+                    <a:p>
+                      <a:pPr algn="r"/>
+                      <a:r>
+                        <a:rPr sz="850" b="0" i="0">
+                          <a:solidFill>
+                            <a:srgbClr val="262626"/>
+                          </a:solidFill>
+                          <a:latin typeface="Garamond"/>
+                          <a:cs typeface="Garamond"/>
+                        </a:rPr>
+                        <a:t>1.52x</a:t>
+                      </a:r>
+                    </a:p>
+                  </a:txBody>
+                  <a:tcPr anchor="ctr" marT="12700" marB="12700">
+                    <a:solidFill>
+                      <a:srgbClr val="F0F1F3"/>
+                    </a:solidFill>
+                  </a:tcPr>
+                </a:tc>
+                <a:tc>
+                  <a:txBody>
+                    <a:bodyPr/>
+                    <a:lstStyle/>
+                    <a:p>
+                      <a:pPr algn="r"/>
+                      <a:r>
+                        <a:rPr sz="850" b="0" i="0">
+                          <a:solidFill>
+                            <a:srgbClr val="262626"/>
+                          </a:solidFill>
+                          <a:latin typeface="Garamond"/>
+                          <a:cs typeface="Garamond"/>
+                        </a:rPr>
+                        <a:t>9.6x</a:t>
+                      </a:r>
+                    </a:p>
+                  </a:txBody>
+                  <a:tcPr anchor="ctr" marT="12700" marB="12700">
+                    <a:solidFill>
+                      <a:srgbClr val="F0F1F3"/>
+                    </a:solidFill>
+                  </a:tcPr>
+                </a:tc>
+                <a:tc>
+                  <a:txBody>
+                    <a:bodyPr/>
+                    <a:lstStyle/>
+                    <a:p>
+                      <a:pPr algn="r"/>
+                      <a:r>
+                        <a:rPr sz="850" b="0" i="0">
+                          <a:solidFill>
+                            <a:srgbClr val="262626"/>
+                          </a:solidFill>
+                          <a:latin typeface="Garamond"/>
+                          <a:cs typeface="Garamond"/>
+                        </a:rPr>
+                        <a:t>18.1x</a:t>
+                      </a:r>
+                    </a:p>
+                  </a:txBody>
+                  <a:tcPr anchor="ctr" marT="12700" marB="12700">
+                    <a:solidFill>
+                      <a:srgbClr val="F0F1F3"/>
+                    </a:solidFill>
+                  </a:tcPr>
+                </a:tc>
+                <a:tc>
+                  <a:txBody>
+                    <a:bodyPr/>
+                    <a:lstStyle/>
+                    <a:p>
+                      <a:pPr algn="r"/>
+                      <a:r>
+                        <a:rPr sz="850" b="0" i="0">
+                          <a:solidFill>
+                            <a:srgbClr val="262626"/>
+                          </a:solidFill>
+                          <a:latin typeface="Garamond"/>
+                          <a:cs typeface="Garamond"/>
+                        </a:rPr>
+                        <a:t>15.0x</a:t>
+                      </a:r>
+                    </a:p>
+                  </a:txBody>
+                  <a:tcPr anchor="ctr" marT="12700" marB="12700">
+                    <a:solidFill>
+                      <a:srgbClr val="F0F1F3"/>
+                    </a:solidFill>
+                  </a:tcPr>
+                </a:tc>
+              </a:tr>
+              <a:tr h="233172">
+                <a:tc>
+                  <a:txBody>
+                    <a:bodyPr/>
+                    <a:lstStyle/>
+                    <a:p>
+                      <a:pPr algn="l"/>
+                      <a:r>
+                        <a:rPr sz="850" b="0" i="0">
+                          <a:solidFill>
+                            <a:srgbClr val="262626"/>
+                          </a:solidFill>
+                          <a:latin typeface="Garamond"/>
+                          <a:cs typeface="Garamond"/>
+                        </a:rPr>
+                        <a:t>Kontoor</a:t>
+                      </a:r>
+                    </a:p>
+                  </a:txBody>
+                  <a:tcPr anchor="ctr" marT="12700" marB="12700">
+                    <a:solidFill>
+                      <a:srgbClr val="FFFFFF"/>
+                    </a:solidFill>
+                  </a:tcPr>
+                </a:tc>
+                <a:tc>
+                  <a:txBody>
+                    <a:bodyPr/>
+                    <a:lstStyle/>
+                    <a:p>
+                      <a:pPr algn="r"/>
+                      <a:r>
+                        <a:rPr sz="850" b="0" i="0">
+                          <a:solidFill>
+                            <a:srgbClr val="262626"/>
+                          </a:solidFill>
+                          <a:latin typeface="Garamond"/>
+                          <a:cs typeface="Garamond"/>
+                        </a:rPr>
+                        <a:t>2.01x</a:t>
+                      </a:r>
+                    </a:p>
+                  </a:txBody>
+                  <a:tcPr anchor="ctr" marT="12700" marB="12700">
+                    <a:solidFill>
+                      <a:srgbClr val="FFFFFF"/>
+                    </a:solidFill>
+                  </a:tcPr>
+                </a:tc>
+                <a:tc>
+                  <a:txBody>
+                    <a:bodyPr/>
+                    <a:lstStyle/>
+                    <a:p>
+                      <a:pPr algn="r"/>
+                      <a:r>
+                        <a:rPr sz="850" b="0" i="0">
+                          <a:solidFill>
+                            <a:srgbClr val="262626"/>
+                          </a:solidFill>
+                          <a:latin typeface="Garamond"/>
+                          <a:cs typeface="Garamond"/>
+                        </a:rPr>
+                        <a:t>12.8x</a:t>
+                      </a:r>
+                    </a:p>
+                  </a:txBody>
+                  <a:tcPr anchor="ctr" marT="12700" marB="12700">
+                    <a:solidFill>
+                      <a:srgbClr val="FFFFFF"/>
+                    </a:solidFill>
+                  </a:tcPr>
+                </a:tc>
+                <a:tc>
+                  <a:txBody>
+                    <a:bodyPr/>
+                    <a:lstStyle/>
+                    <a:p>
+                      <a:pPr algn="r"/>
+                      <a:r>
+                        <a:rPr sz="850" b="0" i="0">
+                          <a:solidFill>
+                            <a:srgbClr val="262626"/>
+                          </a:solidFill>
+                          <a:latin typeface="Garamond"/>
+                          <a:cs typeface="Garamond"/>
+                        </a:rPr>
+                        <a:t>15.4x</a:t>
+                      </a:r>
+                    </a:p>
+                  </a:txBody>
+                  <a:tcPr anchor="ctr" marT="12700" marB="12700">
+                    <a:solidFill>
+                      <a:srgbClr val="FFFFFF"/>
+                    </a:solidFill>
+                  </a:tcPr>
+                </a:tc>
+                <a:tc>
+                  <a:txBody>
+                    <a:bodyPr/>
+                    <a:lstStyle/>
+                    <a:p>
+                      <a:pPr algn="r"/>
+                      <a:r>
+                        <a:rPr sz="850" b="0" i="0">
+                          <a:solidFill>
+                            <a:srgbClr val="262626"/>
+                          </a:solidFill>
+                          <a:latin typeface="Garamond"/>
+                          <a:cs typeface="Garamond"/>
+                        </a:rPr>
+                        <a:t>18.0x</a:t>
+                      </a:r>
+                    </a:p>
+                  </a:txBody>
+                  <a:tcPr anchor="ctr" marT="12700" marB="12700">
+                    <a:solidFill>
+                      <a:srgbClr val="FFFFFF"/>
+                    </a:solidFill>
+                  </a:tcPr>
+                </a:tc>
+              </a:tr>
+              <a:tr h="233172">
+                <a:tc>
+                  <a:txBody>
+                    <a:bodyPr/>
+                    <a:lstStyle/>
+                    <a:p>
+                      <a:pPr algn="l"/>
+                      <a:r>
+                        <a:rPr sz="850" b="0" i="0">
+                          <a:solidFill>
+                            <a:srgbClr val="262626"/>
+                          </a:solidFill>
+                          <a:latin typeface="Garamond"/>
+                          <a:cs typeface="Garamond"/>
+                        </a:rPr>
+                        <a:t>Core median (ex-LULU)</a:t>
+                      </a:r>
+                    </a:p>
+                  </a:txBody>
+                  <a:tcPr anchor="ctr" marT="12700" marB="12700">
+                    <a:solidFill>
+                      <a:srgbClr val="F0F1F3"/>
+                    </a:solidFill>
+                  </a:tcPr>
+                </a:tc>
+                <a:tc>
+                  <a:txBody>
+                    <a:bodyPr/>
+                    <a:lstStyle/>
+                    <a:p>
+                      <a:pPr algn="r"/>
+                      <a:r>
+                        <a:rPr sz="850" b="0" i="0">
+                          <a:solidFill>
+                            <a:srgbClr val="262626"/>
+                          </a:solidFill>
+                          <a:latin typeface="Garamond"/>
+                          <a:cs typeface="Garamond"/>
+                        </a:rPr>
+                        <a:t>1.63x</a:t>
+                      </a:r>
+                    </a:p>
+                  </a:txBody>
+                  <a:tcPr anchor="ctr" marT="12700" marB="12700">
+                    <a:solidFill>
+                      <a:srgbClr val="F0F1F3"/>
+                    </a:solidFill>
+                  </a:tcPr>
+                </a:tc>
+                <a:tc>
+                  <a:txBody>
+                    <a:bodyPr/>
+                    <a:lstStyle/>
+                    <a:p>
+                      <a:pPr algn="r"/>
+                      <a:r>
+                        <a:rPr sz="850" b="0" i="0">
+                          <a:solidFill>
+                            <a:srgbClr val="262626"/>
+                          </a:solidFill>
+                          <a:latin typeface="Garamond"/>
+                          <a:cs typeface="Garamond"/>
+                        </a:rPr>
+                        <a:t>9.4x</a:t>
+                      </a:r>
+                    </a:p>
+                  </a:txBody>
+                  <a:tcPr anchor="ctr" marT="12700" marB="12700">
+                    <a:solidFill>
+                      <a:srgbClr val="F0F1F3"/>
+                    </a:solidFill>
+                  </a:tcPr>
+                </a:tc>
+                <a:tc>
+                  <a:txBody>
+                    <a:bodyPr/>
+                    <a:lstStyle/>
+                    <a:p>
+                      <a:pPr algn="r"/>
+                      <a:r>
+                        <a:rPr sz="850" b="0" i="0">
+                          <a:solidFill>
+                            <a:srgbClr val="262626"/>
+                          </a:solidFill>
+                          <a:latin typeface="Garamond"/>
+                          <a:cs typeface="Garamond"/>
+                        </a:rPr>
+                        <a:t>15.7x</a:t>
+                      </a:r>
+                    </a:p>
+                  </a:txBody>
+                  <a:tcPr anchor="ctr" marT="12700" marB="12700">
+                    <a:solidFill>
+                      <a:srgbClr val="F0F1F3"/>
+                    </a:solidFill>
+                  </a:tcPr>
+                </a:tc>
+                <a:tc>
+                  <a:txBody>
+                    <a:bodyPr/>
+                    <a:lstStyle/>
+                    <a:p>
+                      <a:pPr algn="r"/>
+                      <a:r>
+                        <a:rPr sz="850" b="0" i="0">
+                          <a:solidFill>
+                            <a:srgbClr val="262626"/>
+                          </a:solidFill>
+                          <a:latin typeface="Garamond"/>
+                          <a:cs typeface="Garamond"/>
+                        </a:rPr>
+                        <a:t>16.5x</a:t>
+                      </a:r>
+                    </a:p>
+                  </a:txBody>
+                  <a:tcPr anchor="ctr" marT="12700" marB="12700">
+                    <a:solidFill>
+                      <a:srgbClr val="F0F1F3"/>
+                    </a:solidFill>
+                  </a:tcPr>
+                </a:tc>
+              </a:tr>
+              <a:tr h="233172">
+                <a:tc>
+                  <a:txBody>
+                    <a:bodyPr/>
+                    <a:lstStyle/>
+                    <a:p>
+                      <a:pPr algn="l"/>
+                      <a:r>
+                        <a:rPr sz="850" b="1" i="0">
+                          <a:solidFill>
+                            <a:srgbClr val="1F2A44"/>
+                          </a:solidFill>
+                          <a:latin typeface="Garamond"/>
+                          <a:cs typeface="Garamond"/>
+                        </a:rPr>
+                        <a:t>LULU @ $100 (current)</a:t>
+                      </a:r>
+                    </a:p>
+                  </a:txBody>
+                  <a:tcPr anchor="ctr" marT="12700" marB="12700">
+                    <a:solidFill>
+                      <a:srgbClr val="FFFFFF"/>
+                    </a:solidFill>
+                  </a:tcPr>
+                </a:tc>
+                <a:tc>
+                  <a:txBody>
+                    <a:bodyPr/>
+                    <a:lstStyle/>
+                    <a:p>
+                      <a:pPr algn="r"/>
+                      <a:r>
+                        <a:rPr sz="850" b="1" i="0">
+                          <a:solidFill>
+                            <a:srgbClr val="1F2A44"/>
+                          </a:solidFill>
+                          <a:latin typeface="Garamond"/>
+                          <a:cs typeface="Garamond"/>
+                        </a:rPr>
+                        <a:t>1.07x</a:t>
+                      </a:r>
+                    </a:p>
+                  </a:txBody>
+                  <a:tcPr anchor="ctr" marT="12700" marB="12700">
+                    <a:solidFill>
+                      <a:srgbClr val="FFFFFF"/>
+                    </a:solidFill>
+                  </a:tcPr>
+                </a:tc>
+                <a:tc>
+                  <a:txBody>
+                    <a:bodyPr/>
+                    <a:lstStyle/>
+                    <a:p>
+                      <a:pPr algn="r"/>
+                      <a:r>
+                        <a:rPr sz="850" b="1" i="0">
+                          <a:solidFill>
+                            <a:srgbClr val="1F2A44"/>
+                          </a:solidFill>
+                          <a:latin typeface="Garamond"/>
+                          <a:cs typeface="Garamond"/>
+                        </a:rPr>
+                        <a:t>4.7x</a:t>
+                      </a:r>
+                    </a:p>
+                  </a:txBody>
+                  <a:tcPr anchor="ctr" marT="12700" marB="12700">
+                    <a:solidFill>
+                      <a:srgbClr val="FFFFFF"/>
+                    </a:solidFill>
+                  </a:tcPr>
+                </a:tc>
+                <a:tc>
+                  <a:txBody>
+                    <a:bodyPr/>
+                    <a:lstStyle/>
+                    <a:p>
+                      <a:pPr algn="r"/>
+                      <a:r>
+                        <a:rPr sz="850" b="1" i="0">
+                          <a:solidFill>
+                            <a:srgbClr val="1F2A44"/>
+                          </a:solidFill>
+                          <a:latin typeface="Garamond"/>
+                          <a:cs typeface="Garamond"/>
+                        </a:rPr>
+                        <a:t>5.0x</a:t>
+                      </a:r>
+                    </a:p>
+                  </a:txBody>
+                  <a:tcPr anchor="ctr" marT="12700" marB="12700">
+                    <a:solidFill>
+                      <a:srgbClr val="FFFFFF"/>
+                    </a:solidFill>
+                  </a:tcPr>
+                </a:tc>
+                <a:tc>
+                  <a:txBody>
+                    <a:bodyPr/>
+                    <a:lstStyle/>
+                    <a:p>
+                      <a:pPr algn="r"/>
+                      <a:r>
+                        <a:rPr sz="850" b="1" i="0">
+                          <a:solidFill>
+                            <a:srgbClr val="1F2A44"/>
+                          </a:solidFill>
+                          <a:latin typeface="Garamond"/>
+                          <a:cs typeface="Garamond"/>
+                        </a:rPr>
+                        <a:t>10.4x</a:t>
+                      </a:r>
+                    </a:p>
+                  </a:txBody>
+                  <a:tcPr anchor="ctr" marT="12700" marB="12700">
+                    <a:solidFill>
+                      <a:srgbClr val="FFFFFF"/>
+                    </a:solidFill>
+                  </a:tcPr>
+                </a:tc>
+              </a:tr>
+            </a:tbl>
+          </a:graphicData>
+        </a:graphic>
+      </p:graphicFrame>
+      <p:sp>
+        <p:nvSpPr>
+          <p:cNvPr id="10" name="TextBox 9"/>
+          <p:cNvSpPr txBox="1"/>
+          <p:nvPr/>
+        </p:nvSpPr>
+        <p:spPr>
+          <a:xfrm>
+            <a:off x="7269480" y="1005840"/>
+            <a:ext cx="4572000" cy="228600"/>
+          </a:xfrm>
+          <a:prstGeom prst="rect">
+            <a:avLst/>
+          </a:prstGeom>
+          <a:noFill/>
+        </p:spPr>
+        <p:txBody>
+          <a:bodyPr wrap="square" anchor="t" lIns="25400" rIns="25400" tIns="12700" bIns="12700">
+            <a:spAutoFit/>
+          </a:bodyPr>
+          <a:lstStyle/>
+          <a:p>
+            <a:pPr algn="l">
+              <a:spcBef>
+                <a:spcPts val="0"/>
+              </a:spcBef>
+              <a:spcAft>
+                <a:spcPts val="0"/>
+              </a:spcAft>
+              <a:buNone/>
+            </a:pPr>
+            <a:r>
+              <a:rPr sz="1000" b="1" i="0">
+                <a:solidFill>
+                  <a:srgbClr val="990000"/>
+                </a:solidFill>
+                <a:latin typeface="Garamond"/>
+                <a:cs typeface="Garamond"/>
+              </a:rPr>
+              <a:t>IMPLIED LULU VALUATION (CORE PEER MEDIAN)</a:t>
+            </a:r>
+          </a:p>
+        </p:txBody>
+      </p:sp>
+      <p:graphicFrame>
+        <p:nvGraphicFramePr>
+          <p:cNvPr id="11" name="Table 10"/>
+          <p:cNvGraphicFramePr>
+            <a:graphicFrameLocks noGrp="1"/>
+          </p:cNvGraphicFramePr>
+          <p:nvPr/>
+        </p:nvGraphicFramePr>
+        <p:xfrm>
+          <a:off x="7269480" y="1207008"/>
+          <a:ext cx="4617717" cy="2331720"/>
+        </p:xfrm>
+        <a:graphic>
+          <a:graphicData uri="http://schemas.openxmlformats.org/drawingml/2006/table">
+            <a:tbl>
+              <a:tblPr firstRow="1" bandRow="1">
+                <a:tableStyleId>{5C22544A-7EE6-4342-B048-85BDC9FD1C3A}</a:tableStyleId>
+              </a:tblPr>
+              <a:tblGrid>
+                <a:gridCol w="1234440"/>
+                <a:gridCol w="1127759"/>
+                <a:gridCol w="1127759"/>
+                <a:gridCol w="1127759"/>
+              </a:tblGrid>
+              <a:tr h="466344">
+                <a:tc>
+                  <a:txBody>
+                    <a:bodyPr/>
+                    <a:lstStyle/>
+                    <a:p>
+                      <a:pPr algn="l"/>
+                      <a:r>
+                        <a:rPr sz="800" b="1" i="0">
+                          <a:solidFill>
+                            <a:srgbClr val="FFFFFF"/>
+                          </a:solidFill>
+                          <a:latin typeface="Garamond"/>
+                          <a:cs typeface="Garamond"/>
+                        </a:rPr>
+                        <a:t>Metric</a:t>
+                      </a:r>
+                    </a:p>
+                  </a:txBody>
+                  <a:tcPr anchor="ctr">
+                    <a:solidFill>
+                      <a:srgbClr val="1F2A44"/>
+                    </a:solidFill>
+                  </a:tcPr>
+                </a:tc>
+                <a:tc>
+                  <a:txBody>
+                    <a:bodyPr/>
+                    <a:lstStyle/>
+                    <a:p>
+                      <a:pPr algn="r"/>
+                      <a:r>
+                        <a:rPr sz="800" b="1" i="0">
+                          <a:solidFill>
+                            <a:srgbClr val="FFFFFF"/>
+                          </a:solidFill>
+                          <a:latin typeface="Garamond"/>
+                          <a:cs typeface="Garamond"/>
+                        </a:rPr>
+                        <a:t>Peer med.</a:t>
+                      </a:r>
+                    </a:p>
+                  </a:txBody>
+                  <a:tcPr anchor="ctr">
+                    <a:solidFill>
+                      <a:srgbClr val="1F2A44"/>
+                    </a:solidFill>
+                  </a:tcPr>
+                </a:tc>
+                <a:tc>
+                  <a:txBody>
+                    <a:bodyPr/>
+                    <a:lstStyle/>
+                    <a:p>
+                      <a:pPr algn="r"/>
+                      <a:r>
+                        <a:rPr sz="800" b="1" i="0">
+                          <a:solidFill>
+                            <a:srgbClr val="FFFFFF"/>
+                          </a:solidFill>
+                          <a:latin typeface="Garamond"/>
+                          <a:cs typeface="Garamond"/>
+                        </a:rPr>
+                        <a:t>LULU base</a:t>
+                      </a:r>
+                    </a:p>
+                  </a:txBody>
+                  <a:tcPr anchor="ctr">
+                    <a:solidFill>
+                      <a:srgbClr val="1F2A44"/>
+                    </a:solidFill>
+                  </a:tcPr>
+                </a:tc>
+                <a:tc>
+                  <a:txBody>
+                    <a:bodyPr/>
+                    <a:lstStyle/>
+                    <a:p>
+                      <a:pPr algn="r"/>
+                      <a:r>
+                        <a:rPr sz="800" b="1" i="0">
+                          <a:solidFill>
+                            <a:srgbClr val="FFFFFF"/>
+                          </a:solidFill>
+                          <a:latin typeface="Garamond"/>
+                          <a:cs typeface="Garamond"/>
+                        </a:rPr>
+                        <a:t>Implied px</a:t>
+                      </a:r>
+                    </a:p>
+                  </a:txBody>
+                  <a:tcPr anchor="ctr">
+                    <a:solidFill>
+                      <a:srgbClr val="1F2A44"/>
+                    </a:solidFill>
+                  </a:tcPr>
+                </a:tc>
+              </a:tr>
+              <a:tr h="466344">
+                <a:tc>
+                  <a:txBody>
+                    <a:bodyPr/>
+                    <a:lstStyle/>
+                    <a:p>
+                      <a:pPr algn="l"/>
+                      <a:r>
+                        <a:rPr sz="800" b="0" i="0">
+                          <a:solidFill>
+                            <a:srgbClr val="262626"/>
+                          </a:solidFill>
+                          <a:latin typeface="Garamond"/>
+                          <a:cs typeface="Garamond"/>
+                        </a:rPr>
+                        <a:t>EV / Revenue</a:t>
+                      </a:r>
+                    </a:p>
+                  </a:txBody>
+                  <a:tcPr anchor="ctr" marT="12700" marB="12700">
+                    <a:solidFill>
+                      <a:srgbClr val="FFFFFF"/>
+                    </a:solidFill>
+                  </a:tcPr>
+                </a:tc>
+                <a:tc>
+                  <a:txBody>
+                    <a:bodyPr/>
+                    <a:lstStyle/>
+                    <a:p>
+                      <a:pPr algn="r"/>
+                      <a:r>
+                        <a:rPr sz="800" b="0" i="0">
+                          <a:solidFill>
+                            <a:srgbClr val="262626"/>
+                          </a:solidFill>
+                          <a:latin typeface="Garamond"/>
+                          <a:cs typeface="Garamond"/>
+                        </a:rPr>
+                        <a:t>1.63x</a:t>
+                      </a:r>
+                    </a:p>
+                  </a:txBody>
+                  <a:tcPr anchor="ctr" marT="12700" marB="12700">
+                    <a:solidFill>
+                      <a:srgbClr val="FFFFFF"/>
+                    </a:solidFill>
+                  </a:tcPr>
+                </a:tc>
+                <a:tc>
+                  <a:txBody>
+                    <a:bodyPr/>
+                    <a:lstStyle/>
+                    <a:p>
+                      <a:pPr algn="r"/>
+                      <a:r>
+                        <a:rPr sz="800" b="0" i="0">
+                          <a:solidFill>
+                            <a:srgbClr val="262626"/>
+                          </a:solidFill>
+                          <a:latin typeface="Garamond"/>
+                          <a:cs typeface="Garamond"/>
+                        </a:rPr>
+                        <a:t>$10,425M</a:t>
+                      </a:r>
+                    </a:p>
+                  </a:txBody>
+                  <a:tcPr anchor="ctr" marT="12700" marB="12700">
+                    <a:solidFill>
+                      <a:srgbClr val="FFFFFF"/>
+                    </a:solidFill>
+                  </a:tcPr>
+                </a:tc>
+                <a:tc>
+                  <a:txBody>
+                    <a:bodyPr/>
+                    <a:lstStyle/>
+                    <a:p>
+                      <a:pPr algn="r"/>
+                      <a:r>
+                        <a:rPr sz="800" b="0" i="0">
+                          <a:solidFill>
+                            <a:srgbClr val="262626"/>
+                          </a:solidFill>
+                          <a:latin typeface="Garamond"/>
+                          <a:cs typeface="Garamond"/>
+                        </a:rPr>
+                        <a:t>$119–$231 (med $153)</a:t>
+                      </a:r>
+                    </a:p>
+                  </a:txBody>
+                  <a:tcPr anchor="ctr" marT="12700" marB="12700">
+                    <a:solidFill>
+                      <a:srgbClr val="FFFFFF"/>
+                    </a:solidFill>
+                  </a:tcPr>
+                </a:tc>
+              </a:tr>
+              <a:tr h="466344">
+                <a:tc>
+                  <a:txBody>
+                    <a:bodyPr/>
+                    <a:lstStyle/>
+                    <a:p>
+                      <a:pPr algn="l"/>
+                      <a:r>
+                        <a:rPr sz="800" b="0" i="0">
+                          <a:solidFill>
+                            <a:srgbClr val="262626"/>
+                          </a:solidFill>
+                          <a:latin typeface="Garamond"/>
+                          <a:cs typeface="Garamond"/>
+                        </a:rPr>
+                        <a:t>EV / EBITDA</a:t>
+                      </a:r>
+                    </a:p>
+                  </a:txBody>
+                  <a:tcPr anchor="ctr" marT="12700" marB="12700">
+                    <a:solidFill>
+                      <a:srgbClr val="F0F1F3"/>
+                    </a:solidFill>
+                  </a:tcPr>
+                </a:tc>
+                <a:tc>
+                  <a:txBody>
+                    <a:bodyPr/>
+                    <a:lstStyle/>
+                    <a:p>
+                      <a:pPr algn="r"/>
+                      <a:r>
+                        <a:rPr sz="800" b="0" i="0">
+                          <a:solidFill>
+                            <a:srgbClr val="262626"/>
+                          </a:solidFill>
+                          <a:latin typeface="Garamond"/>
+                          <a:cs typeface="Garamond"/>
+                        </a:rPr>
+                        <a:t>9.4x</a:t>
+                      </a:r>
+                    </a:p>
+                  </a:txBody>
+                  <a:tcPr anchor="ctr" marT="12700" marB="12700">
+                    <a:solidFill>
+                      <a:srgbClr val="F0F1F3"/>
+                    </a:solidFill>
+                  </a:tcPr>
+                </a:tc>
+                <a:tc>
+                  <a:txBody>
+                    <a:bodyPr/>
+                    <a:lstStyle/>
+                    <a:p>
+                      <a:pPr algn="r"/>
+                      <a:r>
+                        <a:rPr sz="800" b="0" i="0">
+                          <a:solidFill>
+                            <a:srgbClr val="262626"/>
+                          </a:solidFill>
+                          <a:latin typeface="Garamond"/>
+                          <a:cs typeface="Garamond"/>
+                        </a:rPr>
+                        <a:t>$2,707M</a:t>
+                      </a:r>
+                    </a:p>
+                  </a:txBody>
+                  <a:tcPr anchor="ctr" marT="12700" marB="12700">
+                    <a:solidFill>
+                      <a:srgbClr val="F0F1F3"/>
+                    </a:solidFill>
+                  </a:tcPr>
+                </a:tc>
+                <a:tc>
+                  <a:txBody>
+                    <a:bodyPr/>
+                    <a:lstStyle/>
+                    <a:p>
+                      <a:pPr algn="r"/>
+                      <a:r>
+                        <a:rPr sz="800" b="0" i="0">
+                          <a:solidFill>
+                            <a:srgbClr val="262626"/>
+                          </a:solidFill>
+                          <a:latin typeface="Garamond"/>
+                          <a:cs typeface="Garamond"/>
+                        </a:rPr>
+                        <a:t>$190–$311 (med $229)</a:t>
+                      </a:r>
+                    </a:p>
+                  </a:txBody>
+                  <a:tcPr anchor="ctr" marT="12700" marB="12700">
+                    <a:solidFill>
+                      <a:srgbClr val="F0F1F3"/>
+                    </a:solidFill>
+                  </a:tcPr>
+                </a:tc>
+              </a:tr>
+              <a:tr h="466344">
+                <a:tc>
+                  <a:txBody>
+                    <a:bodyPr/>
+                    <a:lstStyle/>
+                    <a:p>
+                      <a:pPr algn="l"/>
+                      <a:r>
+                        <a:rPr sz="800" b="0" i="0">
+                          <a:solidFill>
+                            <a:srgbClr val="262626"/>
+                          </a:solidFill>
+                          <a:latin typeface="Garamond"/>
+                          <a:cs typeface="Garamond"/>
+                        </a:rPr>
+                        <a:t>EV / EBIT</a:t>
+                      </a:r>
+                    </a:p>
+                  </a:txBody>
+                  <a:tcPr anchor="ctr" marT="12700" marB="12700">
+                    <a:solidFill>
+                      <a:srgbClr val="FFFFFF"/>
+                    </a:solidFill>
+                  </a:tcPr>
+                </a:tc>
+                <a:tc>
+                  <a:txBody>
+                    <a:bodyPr/>
+                    <a:lstStyle/>
+                    <a:p>
+                      <a:pPr algn="r"/>
+                      <a:r>
+                        <a:rPr sz="800" b="0" i="0">
+                          <a:solidFill>
+                            <a:srgbClr val="262626"/>
+                          </a:solidFill>
+                          <a:latin typeface="Garamond"/>
+                          <a:cs typeface="Garamond"/>
+                        </a:rPr>
+                        <a:t>15.7x</a:t>
+                      </a:r>
+                    </a:p>
+                  </a:txBody>
+                  <a:tcPr anchor="ctr" marT="12700" marB="12700">
+                    <a:solidFill>
+                      <a:srgbClr val="FFFFFF"/>
+                    </a:solidFill>
+                  </a:tcPr>
+                </a:tc>
+                <a:tc>
+                  <a:txBody>
+                    <a:bodyPr/>
+                    <a:lstStyle/>
+                    <a:p>
+                      <a:pPr algn="r"/>
+                      <a:r>
+                        <a:rPr sz="800" b="0" i="0">
+                          <a:solidFill>
+                            <a:srgbClr val="262626"/>
+                          </a:solidFill>
+                          <a:latin typeface="Garamond"/>
+                          <a:cs typeface="Garamond"/>
+                        </a:rPr>
+                        <a:t>$2,211M</a:t>
+                      </a:r>
+                    </a:p>
+                  </a:txBody>
+                  <a:tcPr anchor="ctr" marT="12700" marB="12700">
+                    <a:solidFill>
+                      <a:srgbClr val="FFFFFF"/>
+                    </a:solidFill>
+                  </a:tcPr>
+                </a:tc>
+                <a:tc>
+                  <a:txBody>
+                    <a:bodyPr/>
+                    <a:lstStyle/>
+                    <a:p>
+                      <a:pPr algn="r"/>
+                      <a:r>
+                        <a:rPr sz="800" b="0" i="0">
+                          <a:solidFill>
+                            <a:srgbClr val="262626"/>
+                          </a:solidFill>
+                          <a:latin typeface="Garamond"/>
+                          <a:cs typeface="Garamond"/>
+                        </a:rPr>
+                        <a:t>$155–$369 (med $311)</a:t>
+                      </a:r>
+                    </a:p>
+                  </a:txBody>
+                  <a:tcPr anchor="ctr" marT="12700" marB="12700">
+                    <a:solidFill>
+                      <a:srgbClr val="FFFFFF"/>
+                    </a:solidFill>
+                  </a:tcPr>
+                </a:tc>
+              </a:tr>
+              <a:tr h="466344">
+                <a:tc>
+                  <a:txBody>
+                    <a:bodyPr/>
+                    <a:lstStyle/>
+                    <a:p>
+                      <a:pPr algn="l"/>
+                      <a:r>
+                        <a:rPr sz="800" b="0" i="0">
+                          <a:solidFill>
+                            <a:srgbClr val="262626"/>
+                          </a:solidFill>
+                          <a:latin typeface="Garamond"/>
+                          <a:cs typeface="Garamond"/>
+                        </a:rPr>
+                        <a:t>P / E</a:t>
+                      </a:r>
+                    </a:p>
+                  </a:txBody>
+                  <a:tcPr anchor="ctr" marT="12700" marB="12700">
+                    <a:solidFill>
+                      <a:srgbClr val="F0F1F3"/>
+                    </a:solidFill>
+                  </a:tcPr>
+                </a:tc>
+                <a:tc>
+                  <a:txBody>
+                    <a:bodyPr/>
+                    <a:lstStyle/>
+                    <a:p>
+                      <a:pPr algn="r"/>
+                      <a:r>
+                        <a:rPr sz="800" b="0" i="0">
+                          <a:solidFill>
+                            <a:srgbClr val="262626"/>
+                          </a:solidFill>
+                          <a:latin typeface="Garamond"/>
+                          <a:cs typeface="Garamond"/>
+                        </a:rPr>
+                        <a:t>16.5x</a:t>
+                      </a:r>
+                    </a:p>
+                  </a:txBody>
+                  <a:tcPr anchor="ctr" marT="12700" marB="12700">
+                    <a:solidFill>
+                      <a:srgbClr val="F0F1F3"/>
+                    </a:solidFill>
+                  </a:tcPr>
+                </a:tc>
+                <a:tc>
+                  <a:txBody>
+                    <a:bodyPr/>
+                    <a:lstStyle/>
+                    <a:p>
+                      <a:pPr algn="r"/>
+                      <a:r>
+                        <a:rPr sz="800" b="0" i="0">
+                          <a:solidFill>
+                            <a:srgbClr val="262626"/>
+                          </a:solidFill>
+                          <a:latin typeface="Garamond"/>
+                          <a:cs typeface="Garamond"/>
+                        </a:rPr>
+                        <a:t>$9.61</a:t>
+                      </a:r>
+                    </a:p>
+                  </a:txBody>
+                  <a:tcPr anchor="ctr" marT="12700" marB="12700">
+                    <a:solidFill>
+                      <a:srgbClr val="F0F1F3"/>
+                    </a:solidFill>
+                  </a:tcPr>
+                </a:tc>
+                <a:tc>
+                  <a:txBody>
+                    <a:bodyPr/>
+                    <a:lstStyle/>
+                    <a:p>
+                      <a:pPr algn="r"/>
+                      <a:r>
+                        <a:rPr sz="800" b="0" i="0">
+                          <a:solidFill>
+                            <a:srgbClr val="262626"/>
+                          </a:solidFill>
+                          <a:latin typeface="Garamond"/>
+                          <a:cs typeface="Garamond"/>
+                        </a:rPr>
+                        <a:t>$99–$183 (med $158)</a:t>
+                      </a:r>
+                    </a:p>
+                  </a:txBody>
+                  <a:tcPr anchor="ctr" marT="12700" marB="12700">
+                    <a:solidFill>
+                      <a:srgbClr val="F0F1F3"/>
+                    </a:solidFill>
+                  </a:tcPr>
+                </a:tc>
+              </a:tr>
+            </a:tbl>
+          </a:graphicData>
+        </a:graphic>
+      </p:graphicFrame>
+      <p:sp>
+        <p:nvSpPr>
+          <p:cNvPr id="12" name="TextBox 11"/>
+          <p:cNvSpPr txBox="1"/>
+          <p:nvPr/>
+        </p:nvSpPr>
+        <p:spPr>
+          <a:xfrm>
+            <a:off x="457200" y="3657600"/>
+            <a:ext cx="11292840" cy="2148840"/>
+          </a:xfrm>
+          <a:prstGeom prst="rect">
+            <a:avLst/>
+          </a:prstGeom>
+          <a:noFill/>
+        </p:spPr>
+        <p:txBody>
+          <a:bodyPr wrap="square" anchor="t" lIns="25400" rIns="25400" tIns="12700" bIns="12700">
+            <a:spAutoFit/>
+          </a:bodyPr>
+          <a:lstStyle/>
+          <a:p>
+            <a:pPr algn="l">
+              <a:spcBef>
+                <a:spcPts val="0"/>
+              </a:spcBef>
+              <a:spcAft>
+                <a:spcPts val="400"/>
+              </a:spcAft>
+              <a:buNone/>
+            </a:pPr>
+            <a:r>
+              <a:rPr sz="1200" b="1" i="0">
+                <a:solidFill>
+                  <a:srgbClr val="990000"/>
+                </a:solidFill>
+                <a:latin typeface="Garamond"/>
+                <a:cs typeface="Garamond"/>
+              </a:rPr>
+              <a:t>Methodology &amp; read-through</a:t>
             </a:r>
           </a:p>
           <a:p>
@@ -27061,14 +27811,14 @@
               <a:buChar char="•"/>
             </a:pPr>
             <a:r>
-              <a:rPr sz="1250" b="0" i="0">
+              <a:rPr sz="1000" b="0" i="0">
                 <a:solidFill>
                   <a:srgbClr val="262626"/>
                 </a:solidFill>
                 <a:latin typeface="Garamond"/>
                 <a:cs typeface="Garamond"/>
               </a:rPr>
-              <a:t>PitchBook core mean (ex-UAA, ex-WSM/MOV/LZB) is the current athletic/apparel tape. UAA has negative EBITDA so it is out of the average</a:t>
+              <a:t>Core set: LULU, NKE, ADS, DECK, CROX, LEVI, KTB — PitchBook daily EV / TTM EBITDA (04-Sep-2026); revenue &amp; EBIT from latest company filings</a:t>
             </a:r>
           </a:p>
           <a:p>
@@ -27083,14 +27833,14 @@
               <a:buChar char="•"/>
             </a:pPr>
             <a:r>
-              <a:rPr sz="1250" b="0" i="0">
+              <a:rPr sz="1000" b="0" i="0">
                 <a:solidFill>
                   <a:srgbClr val="262626"/>
                 </a:solidFill>
                 <a:latin typeface="Garamond"/>
                 <a:cs typeface="Garamond"/>
               </a:rPr>
-              <a:t>Selected TV is the Gordon identity (~7.4x FY30 EBITDA at base WACC/g). A 2.25% g year is not today’s NKE 12.7x or WSM 15.4x</a:t>
+              <a:t>EV/Revenue on FY2026E revenue; EV/EBITDA &amp; EV/EBIT on FY2025 (TTM anchor); P/E on FY2026E EPS ($9.61 mid-guide) — then EV → equity via cash &amp; ASC 842 leases</a:t>
             </a:r>
           </a:p>
           <a:p>
@@ -27099,20 +27849,64 @@
                 <a:spcPts val="0"/>
               </a:spcBef>
               <a:spcAft>
-                <a:spcPts val="0"/>
+                <a:spcPts val="300"/>
               </a:spcAft>
               <a:buFont typeface="Garamond"/>
               <a:buChar char="•"/>
             </a:pPr>
             <a:r>
-              <a:rPr sz="1250" b="0" i="0">
+              <a:rPr sz="1000" b="0" i="0">
                 <a:solidFill>
                   <a:srgbClr val="262626"/>
                 </a:solidFill>
                 <a:latin typeface="Garamond"/>
                 <a:cs typeface="Garamond"/>
               </a:rPr>
-              <a:t>Alo EV/EBITDA is still n.a. Implied 5.0x is EV/Sales on an unclosed $10bn ask — not in this PitchBook set and not the TV</a:t>
+              <a:t>LULU trades at 1.07x EV/Revenue and 10.4x forward P/E vs core medians 1.63x / 16.5x</a:t>
+            </a:r>
+          </a:p>
+          <a:p>
+            <a:pPr algn="l" indent="-152400" marL="177800">
+              <a:spcBef>
+                <a:spcPts val="0"/>
+              </a:spcBef>
+              <a:spcAft>
+                <a:spcPts val="300"/>
+              </a:spcAft>
+              <a:buFont typeface="Garamond"/>
+              <a:buChar char="•"/>
+            </a:pPr>
+            <a:r>
+              <a:rPr sz="1000" b="0" i="0">
+                <a:solidFill>
+                  <a:srgbClr val="262626"/>
+                </a:solidFill>
+                <a:latin typeface="Garamond"/>
+                <a:cs typeface="Garamond"/>
+              </a:rPr>
+              <a:t>DCF terminal value uses Gordon growth (g = 2.25%) — the ~7.4x exit multiple is FY30 EBITDA × identity check only, not the peer median (~9x EV/EBITDA)</a:t>
+            </a:r>
+          </a:p>
+          <a:p>
+            <a:pPr algn="l" indent="-152400" marL="177800">
+              <a:spcBef>
+                <a:spcPts val="0"/>
+              </a:spcBef>
+              <a:spcAft>
+                <a:spcPts val="300"/>
+              </a:spcAft>
+              <a:buFont typeface="Garamond"/>
+              <a:buChar char="•"/>
+            </a:pPr>
+            <a:r>
+              <a:rPr sz="1000" b="0" i="0">
+                <a:solidFill>
+                  <a:srgbClr val="262626"/>
+                </a:solidFill>
+                <a:latin typeface="Garamond"/>
+                <a:cs typeface="Garamond"/>
+              </a:rPr>
+              <a:t>Base-case DCF $134 sits between comps-implied ranges; target $140 = partial re-rating toward peer medians, not full NKE multiple</a:t>
             </a:r>
           </a:p>
         </p:txBody>
@@ -27249,7 +28043,7 @@
                 <a:latin typeface="Garamond"/>
                 <a:cs typeface="Garamond"/>
               </a:rPr>
-              <a:t>Appendix — Bull / Bear Scenarios</a:t>
+              <a:t>Precedent Transactions</a:t>
             </a:r>
           </a:p>
         </p:txBody>
@@ -27293,7 +28087,7 @@
                 <a:latin typeface="Garamond"/>
                 <a:cs typeface="Garamond"/>
               </a:rPr>
-              <a:t>Asymmetric payoff: limited downside, substantial upside</a:t>
+              <a:t>Private-market reference for athleisure M&amp;A / take-private angle (no closed LULU-scale precedent)</a:t>
             </a:r>
           </a:p>
         </p:txBody>
@@ -27381,7 +28175,7 @@
                 <a:latin typeface="Garamond"/>
                 <a:cs typeface="Garamond"/>
               </a:rPr>
-              <a:t>Source: GIS DCF model (scenario tab)</a:t>
+              <a:t>Source: Reuters (Oct-2023 Moelis process; Jun-2026 update); Forbes Color Image sales est.</a:t>
             </a:r>
           </a:p>
         </p:txBody>
@@ -27426,6 +28220,1045 @@
                 <a:cs typeface="Garamond"/>
               </a:rPr>
               <a:t>22</a:t>
+            </a:r>
+          </a:p>
+        </p:txBody>
+      </p:sp>
+      <p:graphicFrame>
+        <p:nvGraphicFramePr>
+          <p:cNvPr id="8" name="Table 7"/>
+          <p:cNvGraphicFramePr>
+            <a:graphicFrameLocks noGrp="1"/>
+          </p:cNvGraphicFramePr>
+          <p:nvPr/>
+        </p:nvGraphicFramePr>
+        <p:xfrm>
+          <a:off x="457200" y="1097280"/>
+          <a:ext cx="11292835" cy="1325880"/>
+        </p:xfrm>
+        <a:graphic>
+          <a:graphicData uri="http://schemas.openxmlformats.org/drawingml/2006/table">
+            <a:tbl>
+              <a:tblPr firstRow="1" bandRow="1">
+                <a:tableStyleId>{5C22544A-7EE6-4342-B048-85BDC9FD1C3A}</a:tableStyleId>
+              </a:tblPr>
+              <a:tblGrid>
+                <a:gridCol w="1828800"/>
+                <a:gridCol w="1892807"/>
+                <a:gridCol w="1892807"/>
+                <a:gridCol w="1892807"/>
+                <a:gridCol w="1892807"/>
+                <a:gridCol w="1892807"/>
+              </a:tblGrid>
+              <a:tr h="441960">
+                <a:tc>
+                  <a:txBody>
+                    <a:bodyPr/>
+                    <a:lstStyle/>
+                    <a:p>
+                      <a:pPr algn="l"/>
+                      <a:r>
+                        <a:rPr sz="900" b="1" i="0">
+                          <a:solidFill>
+                            <a:srgbClr val="FFFFFF"/>
+                          </a:solidFill>
+                          <a:latin typeface="Garamond"/>
+                          <a:cs typeface="Garamond"/>
+                        </a:rPr>
+                        <a:t>Target</a:t>
+                      </a:r>
+                    </a:p>
+                  </a:txBody>
+                  <a:tcPr anchor="ctr">
+                    <a:solidFill>
+                      <a:srgbClr val="1F2A44"/>
+                    </a:solidFill>
+                  </a:tcPr>
+                </a:tc>
+                <a:tc>
+                  <a:txBody>
+                    <a:bodyPr/>
+                    <a:lstStyle/>
+                    <a:p>
+                      <a:pPr algn="r"/>
+                      <a:r>
+                        <a:rPr sz="900" b="1" i="0">
+                          <a:solidFill>
+                            <a:srgbClr val="FFFFFF"/>
+                          </a:solidFill>
+                          <a:latin typeface="Garamond"/>
+                          <a:cs typeface="Garamond"/>
+                        </a:rPr>
+                        <a:t>Year</a:t>
+                      </a:r>
+                    </a:p>
+                  </a:txBody>
+                  <a:tcPr anchor="ctr">
+                    <a:solidFill>
+                      <a:srgbClr val="1F2A44"/>
+                    </a:solidFill>
+                  </a:tcPr>
+                </a:tc>
+                <a:tc>
+                  <a:txBody>
+                    <a:bodyPr/>
+                    <a:lstStyle/>
+                    <a:p>
+                      <a:pPr algn="r"/>
+                      <a:r>
+                        <a:rPr sz="900" b="1" i="0">
+                          <a:solidFill>
+                            <a:srgbClr val="FFFFFF"/>
+                          </a:solidFill>
+                          <a:latin typeface="Garamond"/>
+                          <a:cs typeface="Garamond"/>
+                        </a:rPr>
+                        <a:t>EV ($M)</a:t>
+                      </a:r>
+                    </a:p>
+                  </a:txBody>
+                  <a:tcPr anchor="ctr">
+                    <a:solidFill>
+                      <a:srgbClr val="1F2A44"/>
+                    </a:solidFill>
+                  </a:tcPr>
+                </a:tc>
+                <a:tc>
+                  <a:txBody>
+                    <a:bodyPr/>
+                    <a:lstStyle/>
+                    <a:p>
+                      <a:pPr algn="r"/>
+                      <a:r>
+                        <a:rPr sz="900" b="1" i="0">
+                          <a:solidFill>
+                            <a:srgbClr val="FFFFFF"/>
+                          </a:solidFill>
+                          <a:latin typeface="Garamond"/>
+                          <a:cs typeface="Garamond"/>
+                        </a:rPr>
+                        <a:t>EV/Revenue</a:t>
+                      </a:r>
+                    </a:p>
+                  </a:txBody>
+                  <a:tcPr anchor="ctr">
+                    <a:solidFill>
+                      <a:srgbClr val="1F2A44"/>
+                    </a:solidFill>
+                  </a:tcPr>
+                </a:tc>
+                <a:tc>
+                  <a:txBody>
+                    <a:bodyPr/>
+                    <a:lstStyle/>
+                    <a:p>
+                      <a:pPr algn="r"/>
+                      <a:r>
+                        <a:rPr sz="900" b="1" i="0">
+                          <a:solidFill>
+                            <a:srgbClr val="FFFFFF"/>
+                          </a:solidFill>
+                          <a:latin typeface="Garamond"/>
+                          <a:cs typeface="Garamond"/>
+                        </a:rPr>
+                        <a:t>EV/EBITDA</a:t>
+                      </a:r>
+                    </a:p>
+                  </a:txBody>
+                  <a:tcPr anchor="ctr">
+                    <a:solidFill>
+                      <a:srgbClr val="1F2A44"/>
+                    </a:solidFill>
+                  </a:tcPr>
+                </a:tc>
+                <a:tc>
+                  <a:txBody>
+                    <a:bodyPr/>
+                    <a:lstStyle/>
+                    <a:p>
+                      <a:pPr algn="r"/>
+                      <a:r>
+                        <a:rPr sz="900" b="1" i="0">
+                          <a:solidFill>
+                            <a:srgbClr val="FFFFFF"/>
+                          </a:solidFill>
+                          <a:latin typeface="Garamond"/>
+                          <a:cs typeface="Garamond"/>
+                        </a:rPr>
+                        <a:t>Status / premium</a:t>
+                      </a:r>
+                    </a:p>
+                  </a:txBody>
+                  <a:tcPr anchor="ctr">
+                    <a:solidFill>
+                      <a:srgbClr val="1F2A44"/>
+                    </a:solidFill>
+                  </a:tcPr>
+                </a:tc>
+              </a:tr>
+              <a:tr h="441960">
+                <a:tc>
+                  <a:txBody>
+                    <a:bodyPr/>
+                    <a:lstStyle/>
+                    <a:p>
+                      <a:pPr algn="l"/>
+                      <a:r>
+                        <a:rPr sz="900" b="0" i="0">
+                          <a:solidFill>
+                            <a:srgbClr val="262626"/>
+                          </a:solidFill>
+                          <a:latin typeface="Garamond"/>
+                          <a:cs typeface="Garamond"/>
+                        </a:rPr>
+                        <a:t>Alo Yoga (Color Image)</a:t>
+                      </a:r>
+                    </a:p>
+                  </a:txBody>
+                  <a:tcPr anchor="ctr" marT="12700" marB="12700">
+                    <a:solidFill>
+                      <a:srgbClr val="FFFFFF"/>
+                    </a:solidFill>
+                  </a:tcPr>
+                </a:tc>
+                <a:tc>
+                  <a:txBody>
+                    <a:bodyPr/>
+                    <a:lstStyle/>
+                    <a:p>
+                      <a:pPr algn="r"/>
+                      <a:r>
+                        <a:rPr sz="900" b="0" i="0">
+                          <a:solidFill>
+                            <a:srgbClr val="262626"/>
+                          </a:solidFill>
+                          <a:latin typeface="Garamond"/>
+                          <a:cs typeface="Garamond"/>
+                        </a:rPr>
+                        <a:t>2023</a:t>
+                      </a:r>
+                    </a:p>
+                  </a:txBody>
+                  <a:tcPr anchor="ctr" marT="12700" marB="12700">
+                    <a:solidFill>
+                      <a:srgbClr val="FFFFFF"/>
+                    </a:solidFill>
+                  </a:tcPr>
+                </a:tc>
+                <a:tc>
+                  <a:txBody>
+                    <a:bodyPr/>
+                    <a:lstStyle/>
+                    <a:p>
+                      <a:pPr algn="r"/>
+                      <a:r>
+                        <a:rPr sz="900" b="0" i="0">
+                          <a:solidFill>
+                            <a:srgbClr val="262626"/>
+                          </a:solidFill>
+                          <a:latin typeface="Garamond"/>
+                          <a:cs typeface="Garamond"/>
+                        </a:rPr>
+                        <a:t>10,000</a:t>
+                      </a:r>
+                    </a:p>
+                  </a:txBody>
+                  <a:tcPr anchor="ctr" marT="12700" marB="12700">
+                    <a:solidFill>
+                      <a:srgbClr val="FFFFFF"/>
+                    </a:solidFill>
+                  </a:tcPr>
+                </a:tc>
+                <a:tc>
+                  <a:txBody>
+                    <a:bodyPr/>
+                    <a:lstStyle/>
+                    <a:p>
+                      <a:pPr algn="r"/>
+                      <a:r>
+                        <a:rPr sz="900" b="0" i="0">
+                          <a:solidFill>
+                            <a:srgbClr val="262626"/>
+                          </a:solidFill>
+                          <a:latin typeface="Garamond"/>
+                          <a:cs typeface="Garamond"/>
+                        </a:rPr>
+                        <a:t>5.0x</a:t>
+                      </a:r>
+                    </a:p>
+                  </a:txBody>
+                  <a:tcPr anchor="ctr" marT="12700" marB="12700">
+                    <a:solidFill>
+                      <a:srgbClr val="FFFFFF"/>
+                    </a:solidFill>
+                  </a:tcPr>
+                </a:tc>
+                <a:tc>
+                  <a:txBody>
+                    <a:bodyPr/>
+                    <a:lstStyle/>
+                    <a:p>
+                      <a:pPr algn="r"/>
+                      <a:r>
+                        <a:rPr sz="900" b="0" i="0">
+                          <a:solidFill>
+                            <a:srgbClr val="262626"/>
+                          </a:solidFill>
+                          <a:latin typeface="Garamond"/>
+                          <a:cs typeface="Garamond"/>
+                        </a:rPr>
+                        <a:t>—</a:t>
+                      </a:r>
+                    </a:p>
+                  </a:txBody>
+                  <a:tcPr anchor="ctr" marT="12700" marB="12700">
+                    <a:solidFill>
+                      <a:srgbClr val="FFFFFF"/>
+                    </a:solidFill>
+                  </a:tcPr>
+                </a:tc>
+                <a:tc>
+                  <a:txBody>
+                    <a:bodyPr/>
+                    <a:lstStyle/>
+                    <a:p>
+                      <a:pPr algn="r"/>
+                      <a:r>
+                        <a:rPr sz="900" b="0" i="0">
+                          <a:solidFill>
+                            <a:srgbClr val="262626"/>
+                          </a:solidFill>
+                          <a:latin typeface="Garamond"/>
+                          <a:cs typeface="Garamond"/>
+                        </a:rPr>
+                        <a:t>Unclosed — Reuters Jun-2026: no deal announced; IPO or ; +367% vs LULU EV/Sales</a:t>
+                      </a:r>
+                    </a:p>
+                  </a:txBody>
+                  <a:tcPr anchor="ctr" marT="12700" marB="12700">
+                    <a:solidFill>
+                      <a:srgbClr val="FFFFFF"/>
+                    </a:solidFill>
+                  </a:tcPr>
+                </a:tc>
+              </a:tr>
+              <a:tr h="441960">
+                <a:tc>
+                  <a:txBody>
+                    <a:bodyPr/>
+                    <a:lstStyle/>
+                    <a:p>
+                      <a:pPr algn="l"/>
+                      <a:r>
+                        <a:rPr sz="900" b="1" i="0">
+                          <a:solidFill>
+                            <a:srgbClr val="1F2A44"/>
+                          </a:solidFill>
+                          <a:latin typeface="Garamond"/>
+                          <a:cs typeface="Garamond"/>
+                        </a:rPr>
+                        <a:t>LULU (current @ $100)</a:t>
+                      </a:r>
+                    </a:p>
+                  </a:txBody>
+                  <a:tcPr anchor="ctr" marT="12700" marB="12700">
+                    <a:solidFill>
+                      <a:srgbClr val="F0F1F3"/>
+                    </a:solidFill>
+                  </a:tcPr>
+                </a:tc>
+                <a:tc>
+                  <a:txBody>
+                    <a:bodyPr/>
+                    <a:lstStyle/>
+                    <a:p>
+                      <a:pPr algn="r"/>
+                      <a:r>
+                        <a:rPr sz="900" b="1" i="0">
+                          <a:solidFill>
+                            <a:srgbClr val="1F2A44"/>
+                          </a:solidFill>
+                          <a:latin typeface="Garamond"/>
+                          <a:cs typeface="Garamond"/>
+                        </a:rPr>
+                        <a:t>—</a:t>
+                      </a:r>
+                    </a:p>
+                  </a:txBody>
+                  <a:tcPr anchor="ctr" marT="12700" marB="12700">
+                    <a:solidFill>
+                      <a:srgbClr val="F0F1F3"/>
+                    </a:solidFill>
+                  </a:tcPr>
+                </a:tc>
+                <a:tc>
+                  <a:txBody>
+                    <a:bodyPr/>
+                    <a:lstStyle/>
+                    <a:p>
+                      <a:pPr algn="r"/>
+                      <a:r>
+                        <a:rPr sz="900" b="1" i="0">
+                          <a:solidFill>
+                            <a:srgbClr val="1F2A44"/>
+                          </a:solidFill>
+                          <a:latin typeface="Garamond"/>
+                          <a:cs typeface="Garamond"/>
+                        </a:rPr>
+                        <a:t>11,129</a:t>
+                      </a:r>
+                    </a:p>
+                  </a:txBody>
+                  <a:tcPr anchor="ctr" marT="12700" marB="12700">
+                    <a:solidFill>
+                      <a:srgbClr val="F0F1F3"/>
+                    </a:solidFill>
+                  </a:tcPr>
+                </a:tc>
+                <a:tc>
+                  <a:txBody>
+                    <a:bodyPr/>
+                    <a:lstStyle/>
+                    <a:p>
+                      <a:pPr algn="r"/>
+                      <a:r>
+                        <a:rPr sz="900" b="1" i="0">
+                          <a:solidFill>
+                            <a:srgbClr val="1F2A44"/>
+                          </a:solidFill>
+                          <a:latin typeface="Garamond"/>
+                          <a:cs typeface="Garamond"/>
+                        </a:rPr>
+                        <a:t>1.07x</a:t>
+                      </a:r>
+                    </a:p>
+                  </a:txBody>
+                  <a:tcPr anchor="ctr" marT="12700" marB="12700">
+                    <a:solidFill>
+                      <a:srgbClr val="F0F1F3"/>
+                    </a:solidFill>
+                  </a:tcPr>
+                </a:tc>
+                <a:tc>
+                  <a:txBody>
+                    <a:bodyPr/>
+                    <a:lstStyle/>
+                    <a:p>
+                      <a:pPr algn="r"/>
+                      <a:r>
+                        <a:rPr sz="900" b="1" i="0">
+                          <a:solidFill>
+                            <a:srgbClr val="1F2A44"/>
+                          </a:solidFill>
+                          <a:latin typeface="Garamond"/>
+                          <a:cs typeface="Garamond"/>
+                        </a:rPr>
+                        <a:t>4.7x</a:t>
+                      </a:r>
+                    </a:p>
+                  </a:txBody>
+                  <a:tcPr anchor="ctr" marT="12700" marB="12700">
+                    <a:solidFill>
+                      <a:srgbClr val="F0F1F3"/>
+                    </a:solidFill>
+                  </a:tcPr>
+                </a:tc>
+                <a:tc>
+                  <a:txBody>
+                    <a:bodyPr/>
+                    <a:lstStyle/>
+                    <a:p>
+                      <a:pPr algn="r"/>
+                      <a:r>
+                        <a:rPr sz="900" b="1" i="0">
+                          <a:solidFill>
+                            <a:srgbClr val="1F2A44"/>
+                          </a:solidFill>
+                          <a:latin typeface="Garamond"/>
+                          <a:cs typeface="Garamond"/>
+                        </a:rPr>
+                        <a:t>Public — trough multiple vs private ask</a:t>
+                      </a:r>
+                    </a:p>
+                  </a:txBody>
+                  <a:tcPr anchor="ctr" marT="12700" marB="12700">
+                    <a:solidFill>
+                      <a:srgbClr val="F0F1F3"/>
+                    </a:solidFill>
+                  </a:tcPr>
+                </a:tc>
+              </a:tr>
+            </a:tbl>
+          </a:graphicData>
+        </a:graphic>
+      </p:graphicFrame>
+      <p:sp>
+        <p:nvSpPr>
+          <p:cNvPr id="9" name="TextBox 8"/>
+          <p:cNvSpPr txBox="1"/>
+          <p:nvPr/>
+        </p:nvSpPr>
+        <p:spPr>
+          <a:xfrm>
+            <a:off x="457200" y="2606040"/>
+            <a:ext cx="11292840" cy="3200400"/>
+          </a:xfrm>
+          <a:prstGeom prst="rect">
+            <a:avLst/>
+          </a:prstGeom>
+          <a:noFill/>
+        </p:spPr>
+        <p:txBody>
+          <a:bodyPr wrap="square" anchor="t" lIns="25400" rIns="25400" tIns="12700" bIns="12700">
+            <a:spAutoFit/>
+          </a:bodyPr>
+          <a:lstStyle/>
+          <a:p>
+            <a:pPr algn="l">
+              <a:spcBef>
+                <a:spcPts val="0"/>
+              </a:spcBef>
+              <a:spcAft>
+                <a:spcPts val="400"/>
+              </a:spcAft>
+              <a:buNone/>
+            </a:pPr>
+            <a:r>
+              <a:rPr sz="1200" b="1" i="0">
+                <a:solidFill>
+                  <a:srgbClr val="990000"/>
+                </a:solidFill>
+                <a:latin typeface="Garamond"/>
+                <a:cs typeface="Garamond"/>
+              </a:rPr>
+              <a:t>M&amp;A / take-private read-through</a:t>
+            </a:r>
+          </a:p>
+          <a:p>
+            <a:pPr algn="l" indent="-152400" marL="177800">
+              <a:spcBef>
+                <a:spcPts val="0"/>
+              </a:spcBef>
+              <a:spcAft>
+                <a:spcPts val="400"/>
+              </a:spcAft>
+              <a:buFont typeface="Garamond"/>
+              <a:buChar char="•"/>
+            </a:pPr>
+            <a:r>
+              <a:rPr sz="1050" b="0" i="0">
+                <a:solidFill>
+                  <a:srgbClr val="262626"/>
+                </a:solidFill>
+                <a:latin typeface="Garamond"/>
+                <a:cs typeface="Garamond"/>
+              </a:rPr>
+              <a:t>No directly comparable public take-private of LULU-scale athletic apparel. Alo is the best private-market reference; premium is EV/Sales vs LULU at current price.</a:t>
+            </a:r>
+          </a:p>
+          <a:p>
+            <a:pPr algn="l" indent="-152400" marL="177800">
+              <a:spcBef>
+                <a:spcPts val="0"/>
+              </a:spcBef>
+              <a:spcAft>
+                <a:spcPts val="400"/>
+              </a:spcAft>
+              <a:buFont typeface="Garamond"/>
+              <a:buChar char="•"/>
+            </a:pPr>
+            <a:r>
+              <a:rPr sz="1050" b="0" i="0">
+                <a:solidFill>
+                  <a:srgbClr val="262626"/>
+                </a:solidFill>
+                <a:latin typeface="Garamond"/>
+                <a:cs typeface="Garamond"/>
+              </a:rPr>
+              <a:t>Alo Yoga (Color Image): 2023 Moelis process at ~$10bn EV on ~$2bn Forbes-est. parent sales → ~5.0x EV/Revenue. No EBITDA print; deal never closed (Reuters Jun-2026 still exploring IPO/sale)</a:t>
+            </a:r>
+          </a:p>
+          <a:p>
+            <a:pPr algn="l" indent="-152400" marL="177800">
+              <a:spcBef>
+                <a:spcPts val="0"/>
+              </a:spcBef>
+              <a:spcAft>
+                <a:spcPts val="400"/>
+              </a:spcAft>
+              <a:buFont typeface="Garamond"/>
+              <a:buChar char="•"/>
+            </a:pPr>
+            <a:r>
+              <a:rPr sz="1050" b="0" i="0">
+                <a:solidFill>
+                  <a:srgbClr val="262626"/>
+                </a:solidFill>
+                <a:latin typeface="Garamond"/>
+                <a:cs typeface="Garamond"/>
+              </a:rPr>
+              <a:t>At $100, LULU trades ~1.1x EV/Revenue on FY2026E revenue — ~367% below the Alo ask multiple on a like-for-like sales basis</a:t>
+            </a:r>
+          </a:p>
+          <a:p>
+            <a:pPr algn="l" indent="-152400" marL="177800">
+              <a:spcBef>
+                <a:spcPts val="0"/>
+              </a:spcBef>
+              <a:spcAft>
+                <a:spcPts val="400"/>
+              </a:spcAft>
+              <a:buFont typeface="Garamond"/>
+              <a:buChar char="•"/>
+            </a:pPr>
+            <a:r>
+              <a:rPr sz="1050" b="0" i="0">
+                <a:solidFill>
+                  <a:srgbClr val="262626"/>
+                </a:solidFill>
+                <a:latin typeface="Garamond"/>
+                <a:cs typeface="Garamond"/>
+              </a:rPr>
+              <a:t>Implied control premium: if a strategic paid Alo-like ~5x EV/Sales on LULU FY26E revenue, equity value would be ~$52bn vs ~$11bn today — illustrative only; LULU is already public with liquid float</a:t>
+            </a:r>
+          </a:p>
+          <a:p>
+            <a:pPr algn="l" indent="-152400" marL="177800">
+              <a:spcBef>
+                <a:spcPts val="0"/>
+              </a:spcBef>
+              <a:spcAft>
+                <a:spcPts val="400"/>
+              </a:spcAft>
+              <a:buFont typeface="Garamond"/>
+              <a:buChar char="•"/>
+            </a:pPr>
+            <a:r>
+              <a:rPr sz="1050" b="0" i="0">
+                <a:solidFill>
+                  <a:srgbClr val="262626"/>
+                </a:solidFill>
+                <a:latin typeface="Garamond"/>
+                <a:cs typeface="Garamond"/>
+              </a:rPr>
+              <a:t>No directly comparable precedent for a $10bn+ athletic-apparel take-private; comps analysis (prior slide) and DCF remain primary valuation anchors</a:t>
+            </a:r>
+          </a:p>
+        </p:txBody>
+      </p:sp>
+      <p:sp>
+        <p:nvSpPr>
+          <p:cNvPr id="10" name="Rectangle 9"/>
+          <p:cNvSpPr/>
+          <p:nvPr/>
+        </p:nvSpPr>
+        <p:spPr>
+          <a:xfrm>
+            <a:off x="7772400" y="5074920"/>
+            <a:ext cx="3977639" cy="1234440"/>
+          </a:xfrm>
+          <a:prstGeom prst="rect">
+            <a:avLst/>
+          </a:prstGeom>
+          <a:solidFill>
+            <a:srgbClr val="F0F1F3"/>
+          </a:solidFill>
+          <a:ln>
+            <a:noFill/>
+          </a:ln>
+          <a:effectLst/>
+        </p:spPr>
+        <p:style>
+          <a:lnRef idx="1">
+            <a:schemeClr val="accent1"/>
+          </a:lnRef>
+          <a:fillRef idx="3">
+            <a:schemeClr val="accent1"/>
+          </a:fillRef>
+          <a:effectRef idx="2">
+            <a:schemeClr val="accent1"/>
+          </a:effectRef>
+          <a:fontRef idx="minor">
+            <a:schemeClr val="lt1"/>
+          </a:fontRef>
+        </p:style>
+        <p:txBody>
+          <a:bodyPr rtlCol="0" anchor="ctr" wrap="square"/>
+          <a:lstStyle/>
+          <a:p>
+            <a:pPr algn="l">
+              <a:spcBef>
+                <a:spcPts val="0"/>
+              </a:spcBef>
+              <a:spcAft>
+                <a:spcPts val="400"/>
+              </a:spcAft>
+              <a:buNone/>
+            </a:pPr>
+            <a:r>
+              <a:rPr sz="1100" b="1" i="0">
+                <a:solidFill>
+                  <a:srgbClr val="990000"/>
+                </a:solidFill>
+                <a:latin typeface="Garamond"/>
+                <a:cs typeface="Garamond"/>
+              </a:rPr>
+              <a:t>Valuation stack</a:t>
+            </a:r>
+          </a:p>
+          <a:p>
+            <a:pPr algn="l">
+              <a:spcBef>
+                <a:spcPts val="0"/>
+              </a:spcBef>
+              <a:spcAft>
+                <a:spcPts val="300"/>
+              </a:spcAft>
+              <a:buNone/>
+            </a:pPr>
+            <a:r>
+              <a:rPr sz="1200" b="1" i="0">
+                <a:solidFill>
+                  <a:srgbClr val="1F2A44"/>
+                </a:solidFill>
+                <a:latin typeface="Garamond"/>
+                <a:cs typeface="Garamond"/>
+              </a:rPr>
+              <a:t>DCF base: $134  |  Target: $140</a:t>
+            </a:r>
+          </a:p>
+          <a:p>
+            <a:pPr algn="l">
+              <a:spcBef>
+                <a:spcPts val="0"/>
+              </a:spcBef>
+              <a:spcAft>
+                <a:spcPts val="0"/>
+              </a:spcAft>
+              <a:buNone/>
+            </a:pPr>
+            <a:r>
+              <a:rPr sz="1000" b="0" i="0">
+                <a:solidFill>
+                  <a:srgbClr val="262626"/>
+                </a:solidFill>
+                <a:latin typeface="Garamond"/>
+                <a:cs typeface="Garamond"/>
+              </a:rPr>
+              <a:t>Comps median EV/EBITDA 9.4x → ~$229/sh</a:t>
+            </a:r>
+          </a:p>
+        </p:txBody>
+      </p:sp>
+    </p:spTree>
+  </p:cSld>
+  <p:clrMapOvr>
+    <a:masterClrMapping/>
+  </p:clrMapOvr>
+</p:sld>
+</file>
+
+<file path=ppt/slides/slide24.xml><?xml version="1.0" encoding="utf-8"?>
+<p:sld xmlns:a="http://schemas.openxmlformats.org/drawingml/2006/main" xmlns:p="http://schemas.openxmlformats.org/presentationml/2006/main" xmlns:r="http://schemas.openxmlformats.org/officeDocument/2006/relationships">
+  <p:cSld>
+    <p:spTree>
+      <p:nvGrpSpPr>
+        <p:cNvPr id="1" name=""/>
+        <p:cNvGrpSpPr/>
+        <p:nvPr/>
+      </p:nvGrpSpPr>
+      <p:grpSpPr/>
+      <p:sp>
+        <p:nvSpPr>
+          <p:cNvPr id="2" name="TextBox 1"/>
+          <p:cNvSpPr txBox="1"/>
+          <p:nvPr/>
+        </p:nvSpPr>
+        <p:spPr>
+          <a:xfrm>
+            <a:off x="411480" y="164592"/>
+            <a:ext cx="5943600" cy="502920"/>
+          </a:xfrm>
+          <a:prstGeom prst="rect">
+            <a:avLst/>
+          </a:prstGeom>
+          <a:noFill/>
+        </p:spPr>
+        <p:txBody>
+          <a:bodyPr wrap="square" anchor="t" lIns="25400" rIns="25400" tIns="12700" bIns="12700">
+            <a:spAutoFit/>
+          </a:bodyPr>
+          <a:lstStyle/>
+          <a:p>
+            <a:pPr algn="l">
+              <a:spcBef>
+                <a:spcPts val="0"/>
+              </a:spcBef>
+              <a:spcAft>
+                <a:spcPts val="0"/>
+              </a:spcAft>
+              <a:buNone/>
+            </a:pPr>
+            <a:r>
+              <a:rPr sz="1100" b="1" i="0">
+                <a:solidFill>
+                  <a:srgbClr val="990000"/>
+                </a:solidFill>
+                <a:latin typeface="Garamond"/>
+                <a:cs typeface="Garamond"/>
+              </a:rPr>
+              <a:t>Investment Research Division</a:t>
+            </a:r>
+          </a:p>
+          <a:p>
+            <a:pPr algn="l">
+              <a:spcBef>
+                <a:spcPts val="0"/>
+              </a:spcBef>
+              <a:spcAft>
+                <a:spcPts val="0"/>
+              </a:spcAft>
+              <a:buNone/>
+            </a:pPr>
+            <a:r>
+              <a:rPr sz="1250" b="1" i="0">
+                <a:solidFill>
+                  <a:srgbClr val="1F2A44"/>
+                </a:solidFill>
+                <a:latin typeface="Garamond"/>
+                <a:cs typeface="Garamond"/>
+              </a:rPr>
+              <a:t>lululemon athletica (NASDAQ: LULU)</a:t>
+            </a:r>
+          </a:p>
+        </p:txBody>
+      </p:sp>
+      <p:sp>
+        <p:nvSpPr>
+          <p:cNvPr id="3" name="Rectangle 2"/>
+          <p:cNvSpPr/>
+          <p:nvPr/>
+        </p:nvSpPr>
+        <p:spPr>
+          <a:xfrm>
+            <a:off x="5486400" y="201168"/>
+            <a:ext cx="6309360" cy="274320"/>
+          </a:xfrm>
+          <a:prstGeom prst="rect">
+            <a:avLst/>
+          </a:prstGeom>
+          <a:solidFill>
+            <a:srgbClr val="1F2A44"/>
+          </a:solidFill>
+          <a:ln>
+            <a:noFill/>
+          </a:ln>
+          <a:effectLst/>
+        </p:spPr>
+        <p:style>
+          <a:lnRef idx="1">
+            <a:schemeClr val="accent1"/>
+          </a:lnRef>
+          <a:fillRef idx="3">
+            <a:schemeClr val="accent1"/>
+          </a:fillRef>
+          <a:effectRef idx="2">
+            <a:schemeClr val="accent1"/>
+          </a:effectRef>
+          <a:fontRef idx="minor">
+            <a:schemeClr val="lt1"/>
+          </a:fontRef>
+        </p:style>
+        <p:txBody>
+          <a:bodyPr rtlCol="0" anchor="ctr" wrap="square" tIns="0" bIns="0" rIns="76200"/>
+          <a:lstStyle/>
+          <a:p>
+            <a:pPr algn="r"/>
+            <a:r>
+              <a:rPr sz="1500" b="1" i="0">
+                <a:solidFill>
+                  <a:srgbClr val="FFFFFF"/>
+                </a:solidFill>
+                <a:latin typeface="Garamond"/>
+                <a:cs typeface="Garamond"/>
+              </a:rPr>
+              <a:t>Appendix — Bull / Bear Scenarios</a:t>
+            </a:r>
+          </a:p>
+        </p:txBody>
+      </p:sp>
+      <p:sp>
+        <p:nvSpPr>
+          <p:cNvPr id="4" name="TextBox 3"/>
+          <p:cNvSpPr txBox="1"/>
+          <p:nvPr/>
+        </p:nvSpPr>
+        <p:spPr>
+          <a:xfrm>
+            <a:off x="411480" y="566928"/>
+            <a:ext cx="11384280" cy="310896"/>
+          </a:xfrm>
+          <a:prstGeom prst="rect">
+            <a:avLst/>
+          </a:prstGeom>
+          <a:noFill/>
+        </p:spPr>
+        <p:txBody>
+          <a:bodyPr wrap="square" anchor="t" lIns="25400" rIns="25400" tIns="12700" bIns="12700">
+            <a:spAutoFit/>
+          </a:bodyPr>
+          <a:lstStyle/>
+          <a:p>
+            <a:pPr algn="l">
+              <a:spcBef>
+                <a:spcPts val="0"/>
+              </a:spcBef>
+              <a:spcAft>
+                <a:spcPts val="0"/>
+              </a:spcAft>
+              <a:buNone/>
+            </a:pPr>
+            <a:r>
+              <a:rPr sz="1250" b="0" i="1">
+                <a:solidFill>
+                  <a:srgbClr val="8C8C8C"/>
+                </a:solidFill>
+                <a:latin typeface="Garamond"/>
+                <a:cs typeface="Garamond"/>
+              </a:rPr>
+              <a:t>Asymmetric payoff: limited downside, substantial upside</a:t>
+            </a:r>
+          </a:p>
+        </p:txBody>
+      </p:sp>
+      <p:sp>
+        <p:nvSpPr>
+          <p:cNvPr id="5" name="Rectangle 4"/>
+          <p:cNvSpPr/>
+          <p:nvPr/>
+        </p:nvSpPr>
+        <p:spPr>
+          <a:xfrm>
+            <a:off x="411480" y="896112"/>
+            <a:ext cx="11384280" cy="20320"/>
+          </a:xfrm>
+          <a:prstGeom prst="rect">
+            <a:avLst/>
+          </a:prstGeom>
+          <a:solidFill>
+            <a:srgbClr val="FFC72C"/>
+          </a:solidFill>
+          <a:ln>
+            <a:noFill/>
+          </a:ln>
+          <a:effectLst/>
+        </p:spPr>
+        <p:style>
+          <a:lnRef idx="1">
+            <a:schemeClr val="accent1"/>
+          </a:lnRef>
+          <a:fillRef idx="3">
+            <a:schemeClr val="accent1"/>
+          </a:fillRef>
+          <a:effectRef idx="2">
+            <a:schemeClr val="accent1"/>
+          </a:effectRef>
+          <a:fontRef idx="minor">
+            <a:schemeClr val="lt1"/>
+          </a:fontRef>
+        </p:style>
+        <p:txBody>
+          <a:bodyPr rtlCol="0" anchor="ctr"/>
+          <a:lstStyle/>
+          <a:p>
+            <a:pPr algn="ctr"/>
+          </a:p>
+        </p:txBody>
+      </p:sp>
+      <p:sp>
+        <p:nvSpPr>
+          <p:cNvPr id="6" name="TextBox 5"/>
+          <p:cNvSpPr txBox="1"/>
+          <p:nvPr/>
+        </p:nvSpPr>
+        <p:spPr>
+          <a:xfrm>
+            <a:off x="411480" y="6510528"/>
+            <a:ext cx="11384280" cy="274320"/>
+          </a:xfrm>
+          <a:prstGeom prst="rect">
+            <a:avLst/>
+          </a:prstGeom>
+          <a:noFill/>
+        </p:spPr>
+        <p:txBody>
+          <a:bodyPr wrap="square" anchor="t" lIns="25400" rIns="25400" tIns="12700" bIns="12700">
+            <a:spAutoFit/>
+          </a:bodyPr>
+          <a:lstStyle/>
+          <a:p>
+            <a:pPr algn="l">
+              <a:spcBef>
+                <a:spcPts val="0"/>
+              </a:spcBef>
+              <a:spcAft>
+                <a:spcPts val="0"/>
+              </a:spcAft>
+              <a:buNone/>
+            </a:pPr>
+            <a:r>
+              <a:rPr sz="850" b="0" i="0">
+                <a:solidFill>
+                  <a:srgbClr val="8C8C8C"/>
+                </a:solidFill>
+                <a:latin typeface="Garamond"/>
+                <a:cs typeface="Garamond"/>
+              </a:rPr>
+              <a:t>Source: GIS DCF model (scenario tab)</a:t>
+            </a:r>
+          </a:p>
+        </p:txBody>
+      </p:sp>
+      <p:sp>
+        <p:nvSpPr>
+          <p:cNvPr id="7" name="TextBox 6"/>
+          <p:cNvSpPr txBox="1"/>
+          <p:nvPr/>
+        </p:nvSpPr>
+        <p:spPr>
+          <a:xfrm>
+            <a:off x="11247120" y="6510528"/>
+            <a:ext cx="822960" cy="274320"/>
+          </a:xfrm>
+          <a:prstGeom prst="rect">
+            <a:avLst/>
+          </a:prstGeom>
+          <a:noFill/>
+        </p:spPr>
+        <p:txBody>
+          <a:bodyPr wrap="square" anchor="t" lIns="25400" rIns="25400" tIns="12700" bIns="12700">
+            <a:spAutoFit/>
+          </a:bodyPr>
+          <a:lstStyle/>
+          <a:p>
+            <a:pPr algn="r">
+              <a:spcBef>
+                <a:spcPts val="0"/>
+              </a:spcBef>
+              <a:spcAft>
+                <a:spcPts val="0"/>
+              </a:spcAft>
+              <a:buNone/>
+            </a:pPr>
+            <a:r>
+              <a:rPr sz="900" b="0" i="0">
+                <a:solidFill>
+                  <a:srgbClr val="8C8C8C"/>
+                </a:solidFill>
+                <a:latin typeface="Garamond"/>
+                <a:cs typeface="Garamond"/>
+              </a:rPr>
+              <a:t>23</a:t>
             </a:r>
           </a:p>
         </p:txBody>
@@ -28118,7 +29951,7 @@
 </p:sld>
 </file>
 
-<file path=ppt/slides/slide24.xml><?xml version="1.0" encoding="utf-8"?>
+<file path=ppt/slides/slide25.xml><?xml version="1.0" encoding="utf-8"?>
 <p:sld xmlns:a="http://schemas.openxmlformats.org/drawingml/2006/main" xmlns:p="http://schemas.openxmlformats.org/presentationml/2006/main" xmlns:r="http://schemas.openxmlformats.org/officeDocument/2006/relationships">
   <p:cSld>
     <p:spTree>
@@ -28418,7 +30251,7 @@
                 <a:latin typeface="Garamond"/>
                 <a:cs typeface="Garamond"/>
               </a:rPr>
-              <a:t>23</a:t>
+              <a:t>24</a:t>
             </a:r>
           </a:p>
         </p:txBody>

--- a/LULU/LULU_Investment_Pitch_Deck.pptx
+++ b/LULU/LULU_Investment_Pitch_Deck.pptx
@@ -28087,7 +28087,7 @@
                 <a:latin typeface="Garamond"/>
                 <a:cs typeface="Garamond"/>
               </a:rPr>
-              <a:t>Private-market reference for athleisure M&amp;A / take-private angle (no closed LULU-scale precedent)</a:t>
+              <a:t>Private-market context for athleisure M&amp;A — not used to imply a control premium on LULU</a:t>
             </a:r>
           </a:p>
         </p:txBody>
@@ -28385,7 +28385,7 @@
                           <a:latin typeface="Garamond"/>
                           <a:cs typeface="Garamond"/>
                         </a:rPr>
-                        <a:t>Status / premium</a:t>
+                        <a:t>Status</a:t>
                       </a:r>
                     </a:p>
                   </a:txBody>
@@ -28531,7 +28531,7 @@
                           <a:latin typeface="Garamond"/>
                           <a:cs typeface="Garamond"/>
                         </a:rPr>
-                        <a:t>Unclosed — Reuters Jun-2026: no deal announced; IPO or ; +367% vs LULU EV/Sales</a:t>
+                        <a:t>Unclosed — Reuters Jun-2026: no deal announced; IPO or sale still explored</a:t>
                       </a:r>
                     </a:p>
                   </a:txBody>
@@ -28557,7 +28557,7 @@
                           <a:latin typeface="Garamond"/>
                           <a:cs typeface="Garamond"/>
                         </a:rPr>
-                        <a:t>LULU (current @ $100)</a:t>
+                        <a:t>LULU (public @ $100)</a:t>
                       </a:r>
                     </a:p>
                   </a:txBody>
@@ -28677,7 +28677,7 @@
                           <a:latin typeface="Garamond"/>
                           <a:cs typeface="Garamond"/>
                         </a:rPr>
-                        <a:t>Public — trough multiple vs private ask</a:t>
+                        <a:t>Trading comps only — not a premium benchmark</a:t>
                       </a:r>
                     </a:p>
                   </a:txBody>
@@ -28731,7 +28731,7 @@
                 <a:latin typeface="Garamond"/>
                 <a:cs typeface="Garamond"/>
               </a:rPr>
-              <a:t>M&amp;A / take-private read-through</a:t>
+              <a:t>How we use (and do not use) private precedents</a:t>
             </a:r>
           </a:p>
           <a:p>
@@ -28753,7 +28753,7 @@
                 <a:latin typeface="Garamond"/>
                 <a:cs typeface="Garamond"/>
               </a:rPr>
-              <a:t>No directly comparable public take-private of LULU-scale athletic apparel. Alo is the best private-market reference; premium is EV/Sales vs LULU at current price.</a:t>
+              <a:t>Private precedents inform what strategics/PE may pay for premium athleisure assets. We do not derive a control premium from an unclosed ask vs LULU's public trading multiple. Valuation anchors remain DCF and public comps (prior slide).</a:t>
             </a:r>
           </a:p>
           <a:p>
@@ -28775,7 +28775,7 @@
                 <a:latin typeface="Garamond"/>
                 <a:cs typeface="Garamond"/>
               </a:rPr>
-              <a:t>Alo Yoga (Color Image): 2023 Moelis process at ~$10bn EV on ~$2bn Forbes-est. parent sales → ~5.0x EV/Revenue. No EBITDA print; deal never closed (Reuters Jun-2026 still exploring IPO/sale)</a:t>
+              <a:t>Alo Yoga (Color Image): 2023 Moelis sale process at ~$10bn ask on ~$2bn Forbes-est. parent sales → ~5.0x EV/Revenue. No EBITDA print; process unclosed (Reuters Jun-2026)</a:t>
             </a:r>
           </a:p>
           <a:p>
@@ -28797,7 +28797,7 @@
                 <a:latin typeface="Garamond"/>
                 <a:cs typeface="Garamond"/>
               </a:rPr>
-              <a:t>At $100, LULU trades ~1.1x EV/Revenue on FY2026E revenue — ~367% below the Alo ask multiple on a like-for-like sales basis</a:t>
+              <a:t>Valid use: shows strategics/PE will pay up for high-growth private athleisure at scale — supports the competitive-threat and category-consolidation narrative</a:t>
             </a:r>
           </a:p>
           <a:p>
@@ -28819,7 +28819,7 @@
                 <a:latin typeface="Garamond"/>
                 <a:cs typeface="Garamond"/>
               </a:rPr>
-              <a:t>Implied control premium: if a strategic paid Alo-like ~5x EV/Sales on LULU FY26E revenue, equity value would be ~$52bn vs ~$11bn today — illustrative only; LULU is already public with liquid float</a:t>
+              <a:t>Not valid use: we do not apply Alo’s 5.0x ask as a control premium on LULU’s 1.07x public EV/Revenue — different liquidity, scale, profitability, and an unclosed ask vs a traded stock</a:t>
             </a:r>
           </a:p>
           <a:p>
@@ -28841,7 +28841,7 @@
                 <a:latin typeface="Garamond"/>
                 <a:cs typeface="Garamond"/>
               </a:rPr>
-              <a:t>No directly comparable precedent for a $10bn+ athletic-apparel take-private; comps analysis (prior slide) and DCF remain primary valuation anchors</a:t>
+              <a:t>No closed take-private precedent at LULU’s scale; implied valuation and $140 target come from DCF + public comps (slide 20), not private ask multiples</a:t>
             </a:r>
           </a:p>
         </p:txBody>

--- a/LULU/LULU_Investment_Pitch_Deck.pptx
+++ b/LULU/LULU_Investment_Pitch_Deck.pptx
@@ -28175,7 +28175,7 @@
                 <a:latin typeface="Garamond"/>
                 <a:cs typeface="Garamond"/>
               </a:rPr>
-              <a:t>Source: Reuters (Oct-2023 Moelis process; Jun-2026 update); Forbes Color Image sales est.</a:t>
+              <a:t>Source: Wolverine IR/SEC (Sweaty Betty); Bloomberg (Gymshark); BusinessWire/Reuters (Vuori); Reuters/Forbes (Alo)</a:t>
             </a:r>
           </a:p>
         </p:txBody>
@@ -28233,8 +28233,8 @@
           <p:nvPr/>
         </p:nvGraphicFramePr>
         <p:xfrm>
-          <a:off x="457200" y="1097280"/>
-          <a:ext cx="11292835" cy="1325880"/>
+          <a:off x="457200" y="1051560"/>
+          <a:ext cx="11292840" cy="1874519"/>
         </p:xfrm>
         <a:graphic>
           <a:graphicData uri="http://schemas.openxmlformats.org/drawingml/2006/table">
@@ -28243,14 +28243,15 @@
                 <a:tableStyleId>{5C22544A-7EE6-4342-B048-85BDC9FD1C3A}</a:tableStyleId>
               </a:tblPr>
               <a:tblGrid>
-                <a:gridCol w="1828800"/>
-                <a:gridCol w="1892807"/>
-                <a:gridCol w="1892807"/>
-                <a:gridCol w="1892807"/>
-                <a:gridCol w="1892807"/>
-                <a:gridCol w="1892807"/>
+                <a:gridCol w="1600200"/>
+                <a:gridCol w="1615440"/>
+                <a:gridCol w="1615440"/>
+                <a:gridCol w="1615440"/>
+                <a:gridCol w="1615440"/>
+                <a:gridCol w="1615440"/>
+                <a:gridCol w="1615440"/>
               </a:tblGrid>
-              <a:tr h="441960">
+              <a:tr h="312419">
                 <a:tc>
                   <a:txBody>
                     <a:bodyPr/>
@@ -28258,7 +28259,7 @@
                     <a:p>
                       <a:pPr algn="l"/>
                       <a:r>
-                        <a:rPr sz="900" b="1" i="0">
+                        <a:rPr sz="800" b="1" i="0">
                           <a:solidFill>
                             <a:srgbClr val="FFFFFF"/>
                           </a:solidFill>
@@ -28282,7 +28283,7 @@
                     <a:p>
                       <a:pPr algn="r"/>
                       <a:r>
-                        <a:rPr sz="900" b="1" i="0">
+                        <a:rPr sz="800" b="1" i="0">
                           <a:solidFill>
                             <a:srgbClr val="FFFFFF"/>
                           </a:solidFill>
@@ -28306,13 +28307,37 @@
                     <a:p>
                       <a:pPr algn="r"/>
                       <a:r>
-                        <a:rPr sz="900" b="1" i="0">
+                        <a:rPr sz="800" b="1" i="0">
                           <a:solidFill>
                             <a:srgbClr val="FFFFFF"/>
                           </a:solidFill>
                           <a:latin typeface="Garamond"/>
                           <a:cs typeface="Garamond"/>
                         </a:rPr>
+                        <a:t>Type</a:t>
+                      </a:r>
+                    </a:p>
+                  </a:txBody>
+                  <a:tcPr anchor="ctr">
+                    <a:solidFill>
+                      <a:srgbClr val="1F2A44"/>
+                    </a:solidFill>
+                  </a:tcPr>
+                </a:tc>
+                <a:tc>
+                  <a:txBody>
+                    <a:bodyPr/>
+                    <a:lstStyle/>
+                    <a:p>
+                      <a:pPr algn="r"/>
+                      <a:r>
+                        <a:rPr sz="800" b="1" i="0">
+                          <a:solidFill>
+                            <a:srgbClr val="FFFFFF"/>
+                          </a:solidFill>
+                          <a:latin typeface="Garamond"/>
+                          <a:cs typeface="Garamond"/>
+                        </a:rPr>
                         <a:t>EV ($M)</a:t>
                       </a:r>
                     </a:p>
@@ -28330,14 +28355,14 @@
                     <a:p>
                       <a:pPr algn="r"/>
                       <a:r>
-                        <a:rPr sz="900" b="1" i="0">
+                        <a:rPr sz="800" b="1" i="0">
                           <a:solidFill>
                             <a:srgbClr val="FFFFFF"/>
                           </a:solidFill>
                           <a:latin typeface="Garamond"/>
                           <a:cs typeface="Garamond"/>
                         </a:rPr>
-                        <a:t>EV/Revenue</a:t>
+                        <a:t>EV/Rev</a:t>
                       </a:r>
                     </a:p>
                   </a:txBody>
@@ -28354,7 +28379,7 @@
                     <a:p>
                       <a:pPr algn="r"/>
                       <a:r>
-                        <a:rPr sz="900" b="1" i="0">
+                        <a:rPr sz="800" b="1" i="0">
                           <a:solidFill>
                             <a:srgbClr val="FFFFFF"/>
                           </a:solidFill>
@@ -28378,7 +28403,7 @@
                     <a:p>
                       <a:pPr algn="r"/>
                       <a:r>
-                        <a:rPr sz="900" b="1" i="0">
+                        <a:rPr sz="800" b="1" i="0">
                           <a:solidFill>
                             <a:srgbClr val="FFFFFF"/>
                           </a:solidFill>
@@ -28396,7 +28421,7 @@
                   </a:tcPr>
                 </a:tc>
               </a:tr>
-              <a:tr h="441960">
+              <a:tr h="312419">
                 <a:tc>
                   <a:txBody>
                     <a:bodyPr/>
@@ -28404,7 +28429,517 @@
                     <a:p>
                       <a:pPr algn="l"/>
                       <a:r>
-                        <a:rPr sz="900" b="0" i="0">
+                        <a:rPr sz="800" b="0" i="0">
+                          <a:solidFill>
+                            <a:srgbClr val="262626"/>
+                          </a:solidFill>
+                          <a:latin typeface="Garamond"/>
+                          <a:cs typeface="Garamond"/>
+                        </a:rPr>
+                        <a:t>Sweaty Betty</a:t>
+                      </a:r>
+                    </a:p>
+                  </a:txBody>
+                  <a:tcPr anchor="ctr" marT="12700" marB="12700">
+                    <a:solidFill>
+                      <a:srgbClr val="FFFFFF"/>
+                    </a:solidFill>
+                  </a:tcPr>
+                </a:tc>
+                <a:tc>
+                  <a:txBody>
+                    <a:bodyPr/>
+                    <a:lstStyle/>
+                    <a:p>
+                      <a:pPr algn="r"/>
+                      <a:r>
+                        <a:rPr sz="800" b="0" i="0">
+                          <a:solidFill>
+                            <a:srgbClr val="262626"/>
+                          </a:solidFill>
+                          <a:latin typeface="Garamond"/>
+                          <a:cs typeface="Garamond"/>
+                        </a:rPr>
+                        <a:t>2021</a:t>
+                      </a:r>
+                    </a:p>
+                  </a:txBody>
+                  <a:tcPr anchor="ctr" marT="12700" marB="12700">
+                    <a:solidFill>
+                      <a:srgbClr val="FFFFFF"/>
+                    </a:solidFill>
+                  </a:tcPr>
+                </a:tc>
+                <a:tc>
+                  <a:txBody>
+                    <a:bodyPr/>
+                    <a:lstStyle/>
+                    <a:p>
+                      <a:pPr algn="r"/>
+                      <a:r>
+                        <a:rPr sz="800" b="0" i="0">
+                          <a:solidFill>
+                            <a:srgbClr val="262626"/>
+                          </a:solidFill>
+                          <a:latin typeface="Garamond"/>
+                          <a:cs typeface="Garamond"/>
+                        </a:rPr>
+                        <a:t>Closed acquisition</a:t>
+                      </a:r>
+                    </a:p>
+                  </a:txBody>
+                  <a:tcPr anchor="ctr" marT="12700" marB="12700">
+                    <a:solidFill>
+                      <a:srgbClr val="FFFFFF"/>
+                    </a:solidFill>
+                  </a:tcPr>
+                </a:tc>
+                <a:tc>
+                  <a:txBody>
+                    <a:bodyPr/>
+                    <a:lstStyle/>
+                    <a:p>
+                      <a:pPr algn="r"/>
+                      <a:r>
+                        <a:rPr sz="800" b="0" i="0">
+                          <a:solidFill>
+                            <a:srgbClr val="262626"/>
+                          </a:solidFill>
+                          <a:latin typeface="Garamond"/>
+                          <a:cs typeface="Garamond"/>
+                        </a:rPr>
+                        <a:t>410</a:t>
+                      </a:r>
+                    </a:p>
+                  </a:txBody>
+                  <a:tcPr anchor="ctr" marT="12700" marB="12700">
+                    <a:solidFill>
+                      <a:srgbClr val="FFFFFF"/>
+                    </a:solidFill>
+                  </a:tcPr>
+                </a:tc>
+                <a:tc>
+                  <a:txBody>
+                    <a:bodyPr/>
+                    <a:lstStyle/>
+                    <a:p>
+                      <a:pPr algn="r"/>
+                      <a:r>
+                        <a:rPr sz="800" b="0" i="0">
+                          <a:solidFill>
+                            <a:srgbClr val="262626"/>
+                          </a:solidFill>
+                          <a:latin typeface="Garamond"/>
+                          <a:cs typeface="Garamond"/>
+                        </a:rPr>
+                        <a:t>1.6x</a:t>
+                      </a:r>
+                    </a:p>
+                  </a:txBody>
+                  <a:tcPr anchor="ctr" marT="12700" marB="12700">
+                    <a:solidFill>
+                      <a:srgbClr val="FFFFFF"/>
+                    </a:solidFill>
+                  </a:tcPr>
+                </a:tc>
+                <a:tc>
+                  <a:txBody>
+                    <a:bodyPr/>
+                    <a:lstStyle/>
+                    <a:p>
+                      <a:pPr algn="r"/>
+                      <a:r>
+                        <a:rPr sz="800" b="0" i="0">
+                          <a:solidFill>
+                            <a:srgbClr val="262626"/>
+                          </a:solidFill>
+                          <a:latin typeface="Garamond"/>
+                          <a:cs typeface="Garamond"/>
+                        </a:rPr>
+                        <a:t>16.0x</a:t>
+                      </a:r>
+                    </a:p>
+                  </a:txBody>
+                  <a:tcPr anchor="ctr" marT="12700" marB="12700">
+                    <a:solidFill>
+                      <a:srgbClr val="FFFFFF"/>
+                    </a:solidFill>
+                  </a:tcPr>
+                </a:tc>
+                <a:tc>
+                  <a:txBody>
+                    <a:bodyPr/>
+                    <a:lstStyle/>
+                    <a:p>
+                      <a:pPr algn="r"/>
+                      <a:r>
+                        <a:rPr sz="800" b="0" i="0">
+                          <a:solidFill>
+                            <a:srgbClr val="262626"/>
+                          </a:solidFill>
+                          <a:latin typeface="Garamond"/>
+                          <a:cs typeface="Garamond"/>
+                        </a:rPr>
+                        <a:t>Closed Aug-2021 — ~16x FY21E EBITDA; women's premium activewear</a:t>
+                      </a:r>
+                    </a:p>
+                  </a:txBody>
+                  <a:tcPr anchor="ctr" marT="12700" marB="12700">
+                    <a:solidFill>
+                      <a:srgbClr val="FFFFFF"/>
+                    </a:solidFill>
+                  </a:tcPr>
+                </a:tc>
+              </a:tr>
+              <a:tr h="312419">
+                <a:tc>
+                  <a:txBody>
+                    <a:bodyPr/>
+                    <a:lstStyle/>
+                    <a:p>
+                      <a:pPr algn="l"/>
+                      <a:r>
+                        <a:rPr sz="800" b="0" i="0">
+                          <a:solidFill>
+                            <a:srgbClr val="262626"/>
+                          </a:solidFill>
+                          <a:latin typeface="Garamond"/>
+                          <a:cs typeface="Garamond"/>
+                        </a:rPr>
+                        <a:t>Gymshark</a:t>
+                      </a:r>
+                    </a:p>
+                  </a:txBody>
+                  <a:tcPr anchor="ctr" marT="12700" marB="12700">
+                    <a:solidFill>
+                      <a:srgbClr val="F0F1F3"/>
+                    </a:solidFill>
+                  </a:tcPr>
+                </a:tc>
+                <a:tc>
+                  <a:txBody>
+                    <a:bodyPr/>
+                    <a:lstStyle/>
+                    <a:p>
+                      <a:pPr algn="r"/>
+                      <a:r>
+                        <a:rPr sz="800" b="0" i="0">
+                          <a:solidFill>
+                            <a:srgbClr val="262626"/>
+                          </a:solidFill>
+                          <a:latin typeface="Garamond"/>
+                          <a:cs typeface="Garamond"/>
+                        </a:rPr>
+                        <a:t>2020</a:t>
+                      </a:r>
+                    </a:p>
+                  </a:txBody>
+                  <a:tcPr anchor="ctr" marT="12700" marB="12700">
+                    <a:solidFill>
+                      <a:srgbClr val="F0F1F3"/>
+                    </a:solidFill>
+                  </a:tcPr>
+                </a:tc>
+                <a:tc>
+                  <a:txBody>
+                    <a:bodyPr/>
+                    <a:lstStyle/>
+                    <a:p>
+                      <a:pPr algn="r"/>
+                      <a:r>
+                        <a:rPr sz="800" b="0" i="0">
+                          <a:solidFill>
+                            <a:srgbClr val="262626"/>
+                          </a:solidFill>
+                          <a:latin typeface="Garamond"/>
+                          <a:cs typeface="Garamond"/>
+                        </a:rPr>
+                        <a:t>Minority growth round</a:t>
+                      </a:r>
+                    </a:p>
+                  </a:txBody>
+                  <a:tcPr anchor="ctr" marT="12700" marB="12700">
+                    <a:solidFill>
+                      <a:srgbClr val="F0F1F3"/>
+                    </a:solidFill>
+                  </a:tcPr>
+                </a:tc>
+                <a:tc>
+                  <a:txBody>
+                    <a:bodyPr/>
+                    <a:lstStyle/>
+                    <a:p>
+                      <a:pPr algn="r"/>
+                      <a:r>
+                        <a:rPr sz="800" b="0" i="0">
+                          <a:solidFill>
+                            <a:srgbClr val="262626"/>
+                          </a:solidFill>
+                          <a:latin typeface="Garamond"/>
+                          <a:cs typeface="Garamond"/>
+                        </a:rPr>
+                        <a:t>1,300</a:t>
+                      </a:r>
+                    </a:p>
+                  </a:txBody>
+                  <a:tcPr anchor="ctr" marT="12700" marB="12700">
+                    <a:solidFill>
+                      <a:srgbClr val="F0F1F3"/>
+                    </a:solidFill>
+                  </a:tcPr>
+                </a:tc>
+                <a:tc>
+                  <a:txBody>
+                    <a:bodyPr/>
+                    <a:lstStyle/>
+                    <a:p>
+                      <a:pPr algn="r"/>
+                      <a:r>
+                        <a:rPr sz="800" b="0" i="0">
+                          <a:solidFill>
+                            <a:srgbClr val="262626"/>
+                          </a:solidFill>
+                          <a:latin typeface="Garamond"/>
+                          <a:cs typeface="Garamond"/>
+                        </a:rPr>
+                        <a:t>5.0x</a:t>
+                      </a:r>
+                    </a:p>
+                  </a:txBody>
+                  <a:tcPr anchor="ctr" marT="12700" marB="12700">
+                    <a:solidFill>
+                      <a:srgbClr val="F0F1F3"/>
+                    </a:solidFill>
+                  </a:tcPr>
+                </a:tc>
+                <a:tc>
+                  <a:txBody>
+                    <a:bodyPr/>
+                    <a:lstStyle/>
+                    <a:p>
+                      <a:pPr algn="r"/>
+                      <a:r>
+                        <a:rPr sz="800" b="0" i="0">
+                          <a:solidFill>
+                            <a:srgbClr val="262626"/>
+                          </a:solidFill>
+                          <a:latin typeface="Garamond"/>
+                          <a:cs typeface="Garamond"/>
+                        </a:rPr>
+                        <a:t>—</a:t>
+                      </a:r>
+                    </a:p>
+                  </a:txBody>
+                  <a:tcPr anchor="ctr" marT="12700" marB="12700">
+                    <a:solidFill>
+                      <a:srgbClr val="F0F1F3"/>
+                    </a:solidFill>
+                  </a:tcPr>
+                </a:tc>
+                <a:tc>
+                  <a:txBody>
+                    <a:bodyPr/>
+                    <a:lstStyle/>
+                    <a:p>
+                      <a:pPr algn="r"/>
+                      <a:r>
+                        <a:rPr sz="800" b="0" i="0">
+                          <a:solidFill>
+                            <a:srgbClr val="262626"/>
+                          </a:solidFill>
+                          <a:latin typeface="Garamond"/>
+                          <a:cs typeface="Garamond"/>
+                        </a:rPr>
+                        <a:t>Closed Aug-2020 — $1.3bn implied EV; minority stake, not control</a:t>
+                      </a:r>
+                    </a:p>
+                  </a:txBody>
+                  <a:tcPr anchor="ctr" marT="12700" marB="12700">
+                    <a:solidFill>
+                      <a:srgbClr val="F0F1F3"/>
+                    </a:solidFill>
+                  </a:tcPr>
+                </a:tc>
+              </a:tr>
+              <a:tr h="312419">
+                <a:tc>
+                  <a:txBody>
+                    <a:bodyPr/>
+                    <a:lstStyle/>
+                    <a:p>
+                      <a:pPr algn="l"/>
+                      <a:r>
+                        <a:rPr sz="800" b="0" i="0">
+                          <a:solidFill>
+                            <a:srgbClr val="262626"/>
+                          </a:solidFill>
+                          <a:latin typeface="Garamond"/>
+                          <a:cs typeface="Garamond"/>
+                        </a:rPr>
+                        <a:t>Vuori</a:t>
+                      </a:r>
+                    </a:p>
+                  </a:txBody>
+                  <a:tcPr anchor="ctr" marT="12700" marB="12700">
+                    <a:solidFill>
+                      <a:srgbClr val="FFFFFF"/>
+                    </a:solidFill>
+                  </a:tcPr>
+                </a:tc>
+                <a:tc>
+                  <a:txBody>
+                    <a:bodyPr/>
+                    <a:lstStyle/>
+                    <a:p>
+                      <a:pPr algn="r"/>
+                      <a:r>
+                        <a:rPr sz="800" b="0" i="0">
+                          <a:solidFill>
+                            <a:srgbClr val="262626"/>
+                          </a:solidFill>
+                          <a:latin typeface="Garamond"/>
+                          <a:cs typeface="Garamond"/>
+                        </a:rPr>
+                        <a:t>2021</a:t>
+                      </a:r>
+                    </a:p>
+                  </a:txBody>
+                  <a:tcPr anchor="ctr" marT="12700" marB="12700">
+                    <a:solidFill>
+                      <a:srgbClr val="FFFFFF"/>
+                    </a:solidFill>
+                  </a:tcPr>
+                </a:tc>
+                <a:tc>
+                  <a:txBody>
+                    <a:bodyPr/>
+                    <a:lstStyle/>
+                    <a:p>
+                      <a:pPr algn="r"/>
+                      <a:r>
+                        <a:rPr sz="800" b="0" i="0">
+                          <a:solidFill>
+                            <a:srgbClr val="262626"/>
+                          </a:solidFill>
+                          <a:latin typeface="Garamond"/>
+                          <a:cs typeface="Garamond"/>
+                        </a:rPr>
+                        <a:t>Growth investment</a:t>
+                      </a:r>
+                    </a:p>
+                  </a:txBody>
+                  <a:tcPr anchor="ctr" marT="12700" marB="12700">
+                    <a:solidFill>
+                      <a:srgbClr val="FFFFFF"/>
+                    </a:solidFill>
+                  </a:tcPr>
+                </a:tc>
+                <a:tc>
+                  <a:txBody>
+                    <a:bodyPr/>
+                    <a:lstStyle/>
+                    <a:p>
+                      <a:pPr algn="r"/>
+                      <a:r>
+                        <a:rPr sz="800" b="0" i="0">
+                          <a:solidFill>
+                            <a:srgbClr val="262626"/>
+                          </a:solidFill>
+                          <a:latin typeface="Garamond"/>
+                          <a:cs typeface="Garamond"/>
+                        </a:rPr>
+                        <a:t>4,000</a:t>
+                      </a:r>
+                    </a:p>
+                  </a:txBody>
+                  <a:tcPr anchor="ctr" marT="12700" marB="12700">
+                    <a:solidFill>
+                      <a:srgbClr val="FFFFFF"/>
+                    </a:solidFill>
+                  </a:tcPr>
+                </a:tc>
+                <a:tc>
+                  <a:txBody>
+                    <a:bodyPr/>
+                    <a:lstStyle/>
+                    <a:p>
+                      <a:pPr algn="r"/>
+                      <a:r>
+                        <a:rPr sz="800" b="0" i="0">
+                          <a:solidFill>
+                            <a:srgbClr val="262626"/>
+                          </a:solidFill>
+                          <a:latin typeface="Garamond"/>
+                          <a:cs typeface="Garamond"/>
+                        </a:rPr>
+                        <a:t>—</a:t>
+                      </a:r>
+                    </a:p>
+                  </a:txBody>
+                  <a:tcPr anchor="ctr" marT="12700" marB="12700">
+                    <a:solidFill>
+                      <a:srgbClr val="FFFFFF"/>
+                    </a:solidFill>
+                  </a:tcPr>
+                </a:tc>
+                <a:tc>
+                  <a:txBody>
+                    <a:bodyPr/>
+                    <a:lstStyle/>
+                    <a:p>
+                      <a:pPr algn="r"/>
+                      <a:r>
+                        <a:rPr sz="800" b="0" i="0">
+                          <a:solidFill>
+                            <a:srgbClr val="262626"/>
+                          </a:solidFill>
+                          <a:latin typeface="Garamond"/>
+                          <a:cs typeface="Garamond"/>
+                        </a:rPr>
+                        <a:t>—</a:t>
+                      </a:r>
+                    </a:p>
+                  </a:txBody>
+                  <a:tcPr anchor="ctr" marT="12700" marB="12700">
+                    <a:solidFill>
+                      <a:srgbClr val="FFFFFF"/>
+                    </a:solidFill>
+                  </a:tcPr>
+                </a:tc>
+                <a:tc>
+                  <a:txBody>
+                    <a:bodyPr/>
+                    <a:lstStyle/>
+                    <a:p>
+                      <a:pPr algn="r"/>
+                      <a:r>
+                        <a:rPr sz="800" b="0" i="0">
+                          <a:solidFill>
+                            <a:srgbClr val="262626"/>
+                          </a:solidFill>
+                          <a:latin typeface="Garamond"/>
+                          <a:cs typeface="Garamond"/>
+                        </a:rPr>
+                        <a:t>Closed Oct-2021 — $4bn post-money; revenue not disclosed (~140% YoY grow</a:t>
+                      </a:r>
+                    </a:p>
+                  </a:txBody>
+                  <a:tcPr anchor="ctr" marT="12700" marB="12700">
+                    <a:solidFill>
+                      <a:srgbClr val="FFFFFF"/>
+                    </a:solidFill>
+                  </a:tcPr>
+                </a:tc>
+              </a:tr>
+              <a:tr h="312419">
+                <a:tc>
+                  <a:txBody>
+                    <a:bodyPr/>
+                    <a:lstStyle/>
+                    <a:p>
+                      <a:pPr algn="l"/>
+                      <a:r>
+                        <a:rPr sz="800" b="0" i="0">
                           <a:solidFill>
                             <a:srgbClr val="262626"/>
                           </a:solidFill>
@@ -28417,6 +28952,176 @@
                   </a:txBody>
                   <a:tcPr anchor="ctr" marT="12700" marB="12700">
                     <a:solidFill>
+                      <a:srgbClr val="F0F1F3"/>
+                    </a:solidFill>
+                  </a:tcPr>
+                </a:tc>
+                <a:tc>
+                  <a:txBody>
+                    <a:bodyPr/>
+                    <a:lstStyle/>
+                    <a:p>
+                      <a:pPr algn="r"/>
+                      <a:r>
+                        <a:rPr sz="800" b="0" i="0">
+                          <a:solidFill>
+                            <a:srgbClr val="262626"/>
+                          </a:solidFill>
+                          <a:latin typeface="Garamond"/>
+                          <a:cs typeface="Garamond"/>
+                        </a:rPr>
+                        <a:t>2023</a:t>
+                      </a:r>
+                    </a:p>
+                  </a:txBody>
+                  <a:tcPr anchor="ctr" marT="12700" marB="12700">
+                    <a:solidFill>
+                      <a:srgbClr val="F0F1F3"/>
+                    </a:solidFill>
+                  </a:tcPr>
+                </a:tc>
+                <a:tc>
+                  <a:txBody>
+                    <a:bodyPr/>
+                    <a:lstStyle/>
+                    <a:p>
+                      <a:pPr algn="r"/>
+                      <a:r>
+                        <a:rPr sz="800" b="0" i="0">
+                          <a:solidFill>
+                            <a:srgbClr val="262626"/>
+                          </a:solidFill>
+                          <a:latin typeface="Garamond"/>
+                          <a:cs typeface="Garamond"/>
+                        </a:rPr>
+                        <a:t>Unclosed sale process</a:t>
+                      </a:r>
+                    </a:p>
+                  </a:txBody>
+                  <a:tcPr anchor="ctr" marT="12700" marB="12700">
+                    <a:solidFill>
+                      <a:srgbClr val="F0F1F3"/>
+                    </a:solidFill>
+                  </a:tcPr>
+                </a:tc>
+                <a:tc>
+                  <a:txBody>
+                    <a:bodyPr/>
+                    <a:lstStyle/>
+                    <a:p>
+                      <a:pPr algn="r"/>
+                      <a:r>
+                        <a:rPr sz="800" b="0" i="0">
+                          <a:solidFill>
+                            <a:srgbClr val="262626"/>
+                          </a:solidFill>
+                          <a:latin typeface="Garamond"/>
+                          <a:cs typeface="Garamond"/>
+                        </a:rPr>
+                        <a:t>10,000</a:t>
+                      </a:r>
+                    </a:p>
+                  </a:txBody>
+                  <a:tcPr anchor="ctr" marT="12700" marB="12700">
+                    <a:solidFill>
+                      <a:srgbClr val="F0F1F3"/>
+                    </a:solidFill>
+                  </a:tcPr>
+                </a:tc>
+                <a:tc>
+                  <a:txBody>
+                    <a:bodyPr/>
+                    <a:lstStyle/>
+                    <a:p>
+                      <a:pPr algn="r"/>
+                      <a:r>
+                        <a:rPr sz="800" b="0" i="0">
+                          <a:solidFill>
+                            <a:srgbClr val="262626"/>
+                          </a:solidFill>
+                          <a:latin typeface="Garamond"/>
+                          <a:cs typeface="Garamond"/>
+                        </a:rPr>
+                        <a:t>5.0x</a:t>
+                      </a:r>
+                    </a:p>
+                  </a:txBody>
+                  <a:tcPr anchor="ctr" marT="12700" marB="12700">
+                    <a:solidFill>
+                      <a:srgbClr val="F0F1F3"/>
+                    </a:solidFill>
+                  </a:tcPr>
+                </a:tc>
+                <a:tc>
+                  <a:txBody>
+                    <a:bodyPr/>
+                    <a:lstStyle/>
+                    <a:p>
+                      <a:pPr algn="r"/>
+                      <a:r>
+                        <a:rPr sz="800" b="0" i="0">
+                          <a:solidFill>
+                            <a:srgbClr val="262626"/>
+                          </a:solidFill>
+                          <a:latin typeface="Garamond"/>
+                          <a:cs typeface="Garamond"/>
+                        </a:rPr>
+                        <a:t>—</a:t>
+                      </a:r>
+                    </a:p>
+                  </a:txBody>
+                  <a:tcPr anchor="ctr" marT="12700" marB="12700">
+                    <a:solidFill>
+                      <a:srgbClr val="F0F1F3"/>
+                    </a:solidFill>
+                  </a:tcPr>
+                </a:tc>
+                <a:tc>
+                  <a:txBody>
+                    <a:bodyPr/>
+                    <a:lstStyle/>
+                    <a:p>
+                      <a:pPr algn="r"/>
+                      <a:r>
+                        <a:rPr sz="800" b="0" i="0">
+                          <a:solidFill>
+                            <a:srgbClr val="262626"/>
+                          </a:solidFill>
+                          <a:latin typeface="Garamond"/>
+                          <a:cs typeface="Garamond"/>
+                        </a:rPr>
+                        <a:t>Unclosed — Reuters Jun-2026: no deal announced; IPO or sale still explor</a:t>
+                      </a:r>
+                    </a:p>
+                  </a:txBody>
+                  <a:tcPr anchor="ctr" marT="12700" marB="12700">
+                    <a:solidFill>
+                      <a:srgbClr val="F0F1F3"/>
+                    </a:solidFill>
+                  </a:tcPr>
+                </a:tc>
+              </a:tr>
+              <a:tr h="312424">
+                <a:tc>
+                  <a:txBody>
+                    <a:bodyPr/>
+                    <a:lstStyle/>
+                    <a:p>
+                      <a:pPr algn="l"/>
+                      <a:r>
+                        <a:rPr sz="800" b="1" i="0">
+                          <a:solidFill>
+                            <a:srgbClr val="1F2A44"/>
+                          </a:solidFill>
+                          <a:latin typeface="Garamond"/>
+                          <a:cs typeface="Garamond"/>
+                        </a:rPr>
+                        <a:t>LULU (public @ $100)</a:t>
+                      </a:r>
+                    </a:p>
+                  </a:txBody>
+                  <a:tcPr anchor="ctr" marT="12700" marB="12700">
+                    <a:solidFill>
                       <a:srgbClr val="FFFFFF"/>
                     </a:solidFill>
                   </a:tcPr>
@@ -28428,14 +29133,14 @@
                     <a:p>
                       <a:pPr algn="r"/>
                       <a:r>
-                        <a:rPr sz="900" b="0" i="0">
-                          <a:solidFill>
-                            <a:srgbClr val="262626"/>
-                          </a:solidFill>
-                          <a:latin typeface="Garamond"/>
-                          <a:cs typeface="Garamond"/>
-                        </a:rPr>
-                        <a:t>2023</a:t>
+                        <a:rPr sz="800" b="1" i="0">
+                          <a:solidFill>
+                            <a:srgbClr val="1F2A44"/>
+                          </a:solidFill>
+                          <a:latin typeface="Garamond"/>
+                          <a:cs typeface="Garamond"/>
+                        </a:rPr>
+                        <a:t>—</a:t>
                       </a:r>
                     </a:p>
                   </a:txBody>
@@ -28452,14 +29157,14 @@
                     <a:p>
                       <a:pPr algn="r"/>
                       <a:r>
-                        <a:rPr sz="900" b="0" i="0">
-                          <a:solidFill>
-                            <a:srgbClr val="262626"/>
-                          </a:solidFill>
-                          <a:latin typeface="Garamond"/>
-                          <a:cs typeface="Garamond"/>
-                        </a:rPr>
-                        <a:t>10,000</a:t>
+                        <a:rPr sz="800" b="1" i="0">
+                          <a:solidFill>
+                            <a:srgbClr val="1F2A44"/>
+                          </a:solidFill>
+                          <a:latin typeface="Garamond"/>
+                          <a:cs typeface="Garamond"/>
+                        </a:rPr>
+                        <a:t>Public equity</a:t>
                       </a:r>
                     </a:p>
                   </a:txBody>
@@ -28476,14 +29181,14 @@
                     <a:p>
                       <a:pPr algn="r"/>
                       <a:r>
-                        <a:rPr sz="900" b="0" i="0">
-                          <a:solidFill>
-                            <a:srgbClr val="262626"/>
-                          </a:solidFill>
-                          <a:latin typeface="Garamond"/>
-                          <a:cs typeface="Garamond"/>
-                        </a:rPr>
-                        <a:t>5.0x</a:t>
+                        <a:rPr sz="800" b="1" i="0">
+                          <a:solidFill>
+                            <a:srgbClr val="1F2A44"/>
+                          </a:solidFill>
+                          <a:latin typeface="Garamond"/>
+                          <a:cs typeface="Garamond"/>
+                        </a:rPr>
+                        <a:t>11,129</a:t>
                       </a:r>
                     </a:p>
                   </a:txBody>
@@ -28500,14 +29205,14 @@
                     <a:p>
                       <a:pPr algn="r"/>
                       <a:r>
-                        <a:rPr sz="900" b="0" i="0">
-                          <a:solidFill>
-                            <a:srgbClr val="262626"/>
-                          </a:solidFill>
-                          <a:latin typeface="Garamond"/>
-                          <a:cs typeface="Garamond"/>
-                        </a:rPr>
-                        <a:t>—</a:t>
+                        <a:rPr sz="800" b="1" i="0">
+                          <a:solidFill>
+                            <a:srgbClr val="1F2A44"/>
+                          </a:solidFill>
+                          <a:latin typeface="Garamond"/>
+                          <a:cs typeface="Garamond"/>
+                        </a:rPr>
+                        <a:t>1.07x</a:t>
                       </a:r>
                     </a:p>
                   </a:txBody>
@@ -28524,14 +29229,14 @@
                     <a:p>
                       <a:pPr algn="r"/>
                       <a:r>
-                        <a:rPr sz="900" b="0" i="0">
-                          <a:solidFill>
-                            <a:srgbClr val="262626"/>
-                          </a:solidFill>
-                          <a:latin typeface="Garamond"/>
-                          <a:cs typeface="Garamond"/>
-                        </a:rPr>
-                        <a:t>Unclosed — Reuters Jun-2026: no deal announced; IPO or sale still explored</a:t>
+                        <a:rPr sz="800" b="1" i="0">
+                          <a:solidFill>
+                            <a:srgbClr val="1F2A44"/>
+                          </a:solidFill>
+                          <a:latin typeface="Garamond"/>
+                          <a:cs typeface="Garamond"/>
+                        </a:rPr>
+                        <a:t>4.7x</a:t>
                       </a:r>
                     </a:p>
                   </a:txBody>
@@ -28541,149 +29246,27 @@
                     </a:solidFill>
                   </a:tcPr>
                 </a:tc>
-              </a:tr>
-              <a:tr h="441960">
-                <a:tc>
-                  <a:txBody>
-                    <a:bodyPr/>
-                    <a:lstStyle/>
-                    <a:p>
-                      <a:pPr algn="l"/>
-                      <a:r>
-                        <a:rPr sz="900" b="1" i="0">
+                <a:tc>
+                  <a:txBody>
+                    <a:bodyPr/>
+                    <a:lstStyle/>
+                    <a:p>
+                      <a:pPr algn="r"/>
+                      <a:r>
+                        <a:rPr sz="800" b="1" i="0">
                           <a:solidFill>
                             <a:srgbClr val="1F2A44"/>
                           </a:solidFill>
                           <a:latin typeface="Garamond"/>
                           <a:cs typeface="Garamond"/>
                         </a:rPr>
-                        <a:t>LULU (public @ $100)</a:t>
-                      </a:r>
-                    </a:p>
-                  </a:txBody>
-                  <a:tcPr anchor="ctr" marT="12700" marB="12700">
-                    <a:solidFill>
-                      <a:srgbClr val="F0F1F3"/>
-                    </a:solidFill>
-                  </a:tcPr>
-                </a:tc>
-                <a:tc>
-                  <a:txBody>
-                    <a:bodyPr/>
-                    <a:lstStyle/>
-                    <a:p>
-                      <a:pPr algn="r"/>
-                      <a:r>
-                        <a:rPr sz="900" b="1" i="0">
-                          <a:solidFill>
-                            <a:srgbClr val="1F2A44"/>
-                          </a:solidFill>
-                          <a:latin typeface="Garamond"/>
-                          <a:cs typeface="Garamond"/>
-                        </a:rPr>
-                        <a:t>—</a:t>
-                      </a:r>
-                    </a:p>
-                  </a:txBody>
-                  <a:tcPr anchor="ctr" marT="12700" marB="12700">
-                    <a:solidFill>
-                      <a:srgbClr val="F0F1F3"/>
-                    </a:solidFill>
-                  </a:tcPr>
-                </a:tc>
-                <a:tc>
-                  <a:txBody>
-                    <a:bodyPr/>
-                    <a:lstStyle/>
-                    <a:p>
-                      <a:pPr algn="r"/>
-                      <a:r>
-                        <a:rPr sz="900" b="1" i="0">
-                          <a:solidFill>
-                            <a:srgbClr val="1F2A44"/>
-                          </a:solidFill>
-                          <a:latin typeface="Garamond"/>
-                          <a:cs typeface="Garamond"/>
-                        </a:rPr>
-                        <a:t>11,129</a:t>
-                      </a:r>
-                    </a:p>
-                  </a:txBody>
-                  <a:tcPr anchor="ctr" marT="12700" marB="12700">
-                    <a:solidFill>
-                      <a:srgbClr val="F0F1F3"/>
-                    </a:solidFill>
-                  </a:tcPr>
-                </a:tc>
-                <a:tc>
-                  <a:txBody>
-                    <a:bodyPr/>
-                    <a:lstStyle/>
-                    <a:p>
-                      <a:pPr algn="r"/>
-                      <a:r>
-                        <a:rPr sz="900" b="1" i="0">
-                          <a:solidFill>
-                            <a:srgbClr val="1F2A44"/>
-                          </a:solidFill>
-                          <a:latin typeface="Garamond"/>
-                          <a:cs typeface="Garamond"/>
-                        </a:rPr>
-                        <a:t>1.07x</a:t>
-                      </a:r>
-                    </a:p>
-                  </a:txBody>
-                  <a:tcPr anchor="ctr" marT="12700" marB="12700">
-                    <a:solidFill>
-                      <a:srgbClr val="F0F1F3"/>
-                    </a:solidFill>
-                  </a:tcPr>
-                </a:tc>
-                <a:tc>
-                  <a:txBody>
-                    <a:bodyPr/>
-                    <a:lstStyle/>
-                    <a:p>
-                      <a:pPr algn="r"/>
-                      <a:r>
-                        <a:rPr sz="900" b="1" i="0">
-                          <a:solidFill>
-                            <a:srgbClr val="1F2A44"/>
-                          </a:solidFill>
-                          <a:latin typeface="Garamond"/>
-                          <a:cs typeface="Garamond"/>
-                        </a:rPr>
-                        <a:t>4.7x</a:t>
-                      </a:r>
-                    </a:p>
-                  </a:txBody>
-                  <a:tcPr anchor="ctr" marT="12700" marB="12700">
-                    <a:solidFill>
-                      <a:srgbClr val="F0F1F3"/>
-                    </a:solidFill>
-                  </a:tcPr>
-                </a:tc>
-                <a:tc>
-                  <a:txBody>
-                    <a:bodyPr/>
-                    <a:lstStyle/>
-                    <a:p>
-                      <a:pPr algn="r"/>
-                      <a:r>
-                        <a:rPr sz="900" b="1" i="0">
-                          <a:solidFill>
-                            <a:srgbClr val="1F2A44"/>
-                          </a:solidFill>
-                          <a:latin typeface="Garamond"/>
-                          <a:cs typeface="Garamond"/>
-                        </a:rPr>
                         <a:t>Trading comps only — not a premium benchmark</a:t>
                       </a:r>
                     </a:p>
                   </a:txBody>
                   <a:tcPr anchor="ctr" marT="12700" marB="12700">
                     <a:solidFill>
-                      <a:srgbClr val="F0F1F3"/>
+                      <a:srgbClr val="FFFFFF"/>
                     </a:solidFill>
                   </a:tcPr>
                 </a:tc>
@@ -28700,8 +29283,8 @@
         </p:nvSpPr>
         <p:spPr>
           <a:xfrm>
-            <a:off x="457200" y="2606040"/>
-            <a:ext cx="11292840" cy="3200400"/>
+            <a:off x="457200" y="3063240"/>
+            <a:ext cx="11292840" cy="2926080"/>
           </a:xfrm>
           <a:prstGeom prst="rect">
             <a:avLst/>
@@ -28775,7 +29358,7 @@
                 <a:latin typeface="Garamond"/>
                 <a:cs typeface="Garamond"/>
               </a:rPr>
-              <a:t>Alo Yoga (Color Image): 2023 Moelis sale process at ~$10bn ask on ~$2bn Forbes-est. parent sales → ~5.0x EV/Revenue. No EBITDA print; process unclosed (Reuters Jun-2026)</a:t>
+              <a:t>Closed M&amp;A: Sweaty Betty (2021) — Wolverine paid $410M (~16x FY21E EBITDA, ~1.6x sales) for premium women's DTC activewear; closest operating-company precedent</a:t>
             </a:r>
           </a:p>
           <a:p>
@@ -28797,7 +29380,7 @@
                 <a:latin typeface="Garamond"/>
                 <a:cs typeface="Garamond"/>
               </a:rPr>
-              <a:t>Valid use: shows strategics/PE will pay up for high-growth private athleisure at scale — supports the competitive-threat and category-consolidation narrative</a:t>
+              <a:t>Private growth rounds: Gymshark ($1.3bn implied EV, 2020 minority stake) and Vuori ($4bn post-money, 2021) show strategics/PE pay up for high-growth DTC athleisure — minority/valuation markers, not LULU control comps</a:t>
             </a:r>
           </a:p>
           <a:p>
@@ -28819,7 +29402,7 @@
                 <a:latin typeface="Garamond"/>
                 <a:cs typeface="Garamond"/>
               </a:rPr>
-              <a:t>Not valid use: we do not apply Alo’s 5.0x ask as a control premium on LULU’s 1.07x public EV/Revenue — different liquidity, scale, profitability, and an unclosed ask vs a traded stock</a:t>
+              <a:t>Unclosed process: Alo ~$10bn ask (~5.0x EV/Sales on Forbes ~$2bn sales) — illustrates private-brand heat; we do not apply as a control premium on LULU's public multiple</a:t>
             </a:r>
           </a:p>
           <a:p>
@@ -28841,7 +29424,7 @@
                 <a:latin typeface="Garamond"/>
                 <a:cs typeface="Garamond"/>
               </a:rPr>
-              <a:t>No closed take-private precedent at LULU’s scale; implied valuation and $140 target come from DCF + public comps (slide 20), not private ask multiples</a:t>
+              <a:t>Valuation anchors remain DCF + public comps (slide 20); precedents support the category-consolidation narrative only</a:t>
             </a:r>
           </a:p>
         </p:txBody>

--- a/LULU/LULU_Investment_Pitch_Deck.pptx
+++ b/LULU/LULU_Investment_Pitch_Deck.pptx
@@ -25971,7 +25971,7 @@
                 <a:gridCol w="1200150"/>
                 <a:gridCol w="1200150"/>
               </a:tblGrid>
-              <a:tr h="233172">
+              <a:tr h="259080">
                 <a:tc>
                   <a:txBody>
                     <a:bodyPr/>
@@ -26093,7 +26093,7 @@
                   </a:tcPr>
                 </a:tc>
               </a:tr>
-              <a:tr h="233172">
+              <a:tr h="259080">
                 <a:tc>
                   <a:txBody>
                     <a:bodyPr/>
@@ -26108,7 +26108,7 @@
                           <a:latin typeface="Garamond"/>
                           <a:cs typeface="Garamond"/>
                         </a:rPr>
-                        <a:t>lululemon</a:t>
+                        <a:t>adidas</a:t>
                       </a:r>
                     </a:p>
                   </a:txBody>
@@ -26132,110 +26132,866 @@
                           <a:latin typeface="Garamond"/>
                           <a:cs typeface="Garamond"/>
                         </a:rPr>
+                        <a:t>1.51x</a:t>
+                      </a:r>
+                    </a:p>
+                  </a:txBody>
+                  <a:tcPr anchor="ctr" marT="12700" marB="12700">
+                    <a:solidFill>
+                      <a:srgbClr val="FFFFFF"/>
+                    </a:solidFill>
+                  </a:tcPr>
+                </a:tc>
+                <a:tc>
+                  <a:txBody>
+                    <a:bodyPr/>
+                    <a:lstStyle/>
+                    <a:p>
+                      <a:pPr algn="r"/>
+                      <a:r>
+                        <a:rPr sz="850" b="0" i="0">
+                          <a:solidFill>
+                            <a:srgbClr val="262626"/>
+                          </a:solidFill>
+                          <a:latin typeface="Garamond"/>
+                          <a:cs typeface="Garamond"/>
+                        </a:rPr>
+                        <a:t>9.2x</a:t>
+                      </a:r>
+                    </a:p>
+                  </a:txBody>
+                  <a:tcPr anchor="ctr" marT="12700" marB="12700">
+                    <a:solidFill>
+                      <a:srgbClr val="FFFFFF"/>
+                    </a:solidFill>
+                  </a:tcPr>
+                </a:tc>
+                <a:tc>
+                  <a:txBody>
+                    <a:bodyPr/>
+                    <a:lstStyle/>
+                    <a:p>
+                      <a:pPr algn="r"/>
+                      <a:r>
+                        <a:rPr sz="850" b="0" i="0">
+                          <a:solidFill>
+                            <a:srgbClr val="262626"/>
+                          </a:solidFill>
+                          <a:latin typeface="Garamond"/>
+                          <a:cs typeface="Garamond"/>
+                        </a:rPr>
+                        <a:t>18.6x</a:t>
+                      </a:r>
+                    </a:p>
+                  </a:txBody>
+                  <a:tcPr anchor="ctr" marT="12700" marB="12700">
+                    <a:solidFill>
+                      <a:srgbClr val="FFFFFF"/>
+                    </a:solidFill>
+                  </a:tcPr>
+                </a:tc>
+                <a:tc>
+                  <a:txBody>
+                    <a:bodyPr/>
+                    <a:lstStyle/>
+                    <a:p>
+                      <a:pPr algn="r"/>
+                      <a:r>
+                        <a:rPr sz="850" b="0" i="0">
+                          <a:solidFill>
+                            <a:srgbClr val="262626"/>
+                          </a:solidFill>
+                          <a:latin typeface="Garamond"/>
+                          <a:cs typeface="Garamond"/>
+                        </a:rPr>
+                        <a:t>19.1x</a:t>
+                      </a:r>
+                    </a:p>
+                  </a:txBody>
+                  <a:tcPr anchor="ctr" marT="12700" marB="12700">
+                    <a:solidFill>
+                      <a:srgbClr val="FFFFFF"/>
+                    </a:solidFill>
+                  </a:tcPr>
+                </a:tc>
+              </a:tr>
+              <a:tr h="259080">
+                <a:tc>
+                  <a:txBody>
+                    <a:bodyPr/>
+                    <a:lstStyle/>
+                    <a:p>
+                      <a:pPr algn="l"/>
+                      <a:r>
+                        <a:rPr sz="850" b="0" i="0">
+                          <a:solidFill>
+                            <a:srgbClr val="262626"/>
+                          </a:solidFill>
+                          <a:latin typeface="Garamond"/>
+                          <a:cs typeface="Garamond"/>
+                        </a:rPr>
+                        <a:t>Nike</a:t>
+                      </a:r>
+                    </a:p>
+                  </a:txBody>
+                  <a:tcPr anchor="ctr" marT="12700" marB="12700">
+                    <a:solidFill>
+                      <a:srgbClr val="F0F1F3"/>
+                    </a:solidFill>
+                  </a:tcPr>
+                </a:tc>
+                <a:tc>
+                  <a:txBody>
+                    <a:bodyPr/>
+                    <a:lstStyle/>
+                    <a:p>
+                      <a:pPr algn="r"/>
+                      <a:r>
+                        <a:rPr sz="850" b="0" i="0">
+                          <a:solidFill>
+                            <a:srgbClr val="262626"/>
+                          </a:solidFill>
+                          <a:latin typeface="Garamond"/>
+                          <a:cs typeface="Garamond"/>
+                        </a:rPr>
+                        <a:t>1.27x</a:t>
+                      </a:r>
+                    </a:p>
+                  </a:txBody>
+                  <a:tcPr anchor="ctr" marT="12700" marB="12700">
+                    <a:solidFill>
+                      <a:srgbClr val="F0F1F3"/>
+                    </a:solidFill>
+                  </a:tcPr>
+                </a:tc>
+                <a:tc>
+                  <a:txBody>
+                    <a:bodyPr/>
+                    <a:lstStyle/>
+                    <a:p>
+                      <a:pPr algn="r"/>
+                      <a:r>
+                        <a:rPr sz="850" b="0" i="0">
+                          <a:solidFill>
+                            <a:srgbClr val="262626"/>
+                          </a:solidFill>
+                          <a:latin typeface="Garamond"/>
+                          <a:cs typeface="Garamond"/>
+                        </a:rPr>
+                        <a:t>12.7x</a:t>
+                      </a:r>
+                    </a:p>
+                  </a:txBody>
+                  <a:tcPr anchor="ctr" marT="12700" marB="12700">
+                    <a:solidFill>
+                      <a:srgbClr val="F0F1F3"/>
+                    </a:solidFill>
+                  </a:tcPr>
+                </a:tc>
+                <a:tc>
+                  <a:txBody>
+                    <a:bodyPr/>
+                    <a:lstStyle/>
+                    <a:p>
+                      <a:pPr algn="r"/>
+                      <a:r>
+                        <a:rPr sz="850" b="0" i="0">
+                          <a:solidFill>
+                            <a:srgbClr val="262626"/>
+                          </a:solidFill>
+                          <a:latin typeface="Garamond"/>
+                          <a:cs typeface="Garamond"/>
+                        </a:rPr>
+                        <a:t>15.9x</a:t>
+                      </a:r>
+                    </a:p>
+                  </a:txBody>
+                  <a:tcPr anchor="ctr" marT="12700" marB="12700">
+                    <a:solidFill>
+                      <a:srgbClr val="F0F1F3"/>
+                    </a:solidFill>
+                  </a:tcPr>
+                </a:tc>
+                <a:tc>
+                  <a:txBody>
+                    <a:bodyPr/>
+                    <a:lstStyle/>
+                    <a:p>
+                      <a:pPr algn="r"/>
+                      <a:r>
+                        <a:rPr sz="850" b="0" i="0">
+                          <a:solidFill>
+                            <a:srgbClr val="262626"/>
+                          </a:solidFill>
+                          <a:latin typeface="Garamond"/>
+                          <a:cs typeface="Garamond"/>
+                        </a:rPr>
+                        <a:t>18.3x</a:t>
+                      </a:r>
+                    </a:p>
+                  </a:txBody>
+                  <a:tcPr anchor="ctr" marT="12700" marB="12700">
+                    <a:solidFill>
+                      <a:srgbClr val="F0F1F3"/>
+                    </a:solidFill>
+                  </a:tcPr>
+                </a:tc>
+              </a:tr>
+              <a:tr h="259080">
+                <a:tc>
+                  <a:txBody>
+                    <a:bodyPr/>
+                    <a:lstStyle/>
+                    <a:p>
+                      <a:pPr algn="l"/>
+                      <a:r>
+                        <a:rPr sz="850" b="0" i="0">
+                          <a:solidFill>
+                            <a:srgbClr val="262626"/>
+                          </a:solidFill>
+                          <a:latin typeface="Garamond"/>
+                          <a:cs typeface="Garamond"/>
+                        </a:rPr>
+                        <a:t>Deckers</a:t>
+                      </a:r>
+                    </a:p>
+                  </a:txBody>
+                  <a:tcPr anchor="ctr" marT="12700" marB="12700">
+                    <a:solidFill>
+                      <a:srgbClr val="FFFFFF"/>
+                    </a:solidFill>
+                  </a:tcPr>
+                </a:tc>
+                <a:tc>
+                  <a:txBody>
+                    <a:bodyPr/>
+                    <a:lstStyle/>
+                    <a:p>
+                      <a:pPr algn="r"/>
+                      <a:r>
+                        <a:rPr sz="850" b="0" i="0">
+                          <a:solidFill>
+                            <a:srgbClr val="262626"/>
+                          </a:solidFill>
+                          <a:latin typeface="Garamond"/>
+                          <a:cs typeface="Garamond"/>
+                        </a:rPr>
+                        <a:t>2.47x</a:t>
+                      </a:r>
+                    </a:p>
+                  </a:txBody>
+                  <a:tcPr anchor="ctr" marT="12700" marB="12700">
+                    <a:solidFill>
+                      <a:srgbClr val="FFFFFF"/>
+                    </a:solidFill>
+                  </a:tcPr>
+                </a:tc>
+                <a:tc>
+                  <a:txBody>
+                    <a:bodyPr/>
+                    <a:lstStyle/>
+                    <a:p>
+                      <a:pPr algn="r"/>
+                      <a:r>
+                        <a:rPr sz="850" b="0" i="0">
+                          <a:solidFill>
+                            <a:srgbClr val="262626"/>
+                          </a:solidFill>
+                          <a:latin typeface="Garamond"/>
+                          <a:cs typeface="Garamond"/>
+                        </a:rPr>
+                        <a:t>7.9x</a:t>
+                      </a:r>
+                    </a:p>
+                  </a:txBody>
+                  <a:tcPr anchor="ctr" marT="12700" marB="12700">
+                    <a:solidFill>
+                      <a:srgbClr val="FFFFFF"/>
+                    </a:solidFill>
+                  </a:tcPr>
+                </a:tc>
+                <a:tc>
+                  <a:txBody>
+                    <a:bodyPr/>
+                    <a:lstStyle/>
+                    <a:p>
+                      <a:pPr algn="r"/>
+                      <a:r>
+                        <a:rPr sz="850" b="0" i="0">
+                          <a:solidFill>
+                            <a:srgbClr val="262626"/>
+                          </a:solidFill>
+                          <a:latin typeface="Garamond"/>
+                          <a:cs typeface="Garamond"/>
+                        </a:rPr>
+                        <a:t>9.8x</a:t>
+                      </a:r>
+                    </a:p>
+                  </a:txBody>
+                  <a:tcPr anchor="ctr" marT="12700" marB="12700">
+                    <a:solidFill>
+                      <a:srgbClr val="FFFFFF"/>
+                    </a:solidFill>
+                  </a:tcPr>
+                </a:tc>
+                <a:tc>
+                  <a:txBody>
+                    <a:bodyPr/>
+                    <a:lstStyle/>
+                    <a:p>
+                      <a:pPr algn="r"/>
+                      <a:r>
+                        <a:rPr sz="850" b="0" i="0">
+                          <a:solidFill>
+                            <a:srgbClr val="262626"/>
+                          </a:solidFill>
+                          <a:latin typeface="Garamond"/>
+                          <a:cs typeface="Garamond"/>
+                        </a:rPr>
+                        <a:t>12.1x</a:t>
+                      </a:r>
+                    </a:p>
+                  </a:txBody>
+                  <a:tcPr anchor="ctr" marT="12700" marB="12700">
+                    <a:solidFill>
+                      <a:srgbClr val="FFFFFF"/>
+                    </a:solidFill>
+                  </a:tcPr>
+                </a:tc>
+              </a:tr>
+              <a:tr h="259080">
+                <a:tc>
+                  <a:txBody>
+                    <a:bodyPr/>
+                    <a:lstStyle/>
+                    <a:p>
+                      <a:pPr algn="l"/>
+                      <a:r>
+                        <a:rPr sz="850" b="0" i="0">
+                          <a:solidFill>
+                            <a:srgbClr val="262626"/>
+                          </a:solidFill>
+                          <a:latin typeface="Garamond"/>
+                          <a:cs typeface="Garamond"/>
+                        </a:rPr>
+                        <a:t>Crocs</a:t>
+                      </a:r>
+                    </a:p>
+                  </a:txBody>
+                  <a:tcPr anchor="ctr" marT="12700" marB="12700">
+                    <a:solidFill>
+                      <a:srgbClr val="F0F1F3"/>
+                    </a:solidFill>
+                  </a:tcPr>
+                </a:tc>
+                <a:tc>
+                  <a:txBody>
+                    <a:bodyPr/>
+                    <a:lstStyle/>
+                    <a:p>
+                      <a:pPr algn="r"/>
+                      <a:r>
+                        <a:rPr sz="850" b="0" i="0">
+                          <a:solidFill>
+                            <a:srgbClr val="262626"/>
+                          </a:solidFill>
+                          <a:latin typeface="Garamond"/>
+                          <a:cs typeface="Garamond"/>
+                        </a:rPr>
+                        <a:t>1.74x</a:t>
+                      </a:r>
+                    </a:p>
+                  </a:txBody>
+                  <a:tcPr anchor="ctr" marT="12700" marB="12700">
+                    <a:solidFill>
+                      <a:srgbClr val="F0F1F3"/>
+                    </a:solidFill>
+                  </a:tcPr>
+                </a:tc>
+                <a:tc>
+                  <a:txBody>
+                    <a:bodyPr/>
+                    <a:lstStyle/>
+                    <a:p>
+                      <a:pPr algn="r"/>
+                      <a:r>
+                        <a:rPr sz="850" b="0" i="0">
+                          <a:solidFill>
+                            <a:srgbClr val="262626"/>
+                          </a:solidFill>
+                          <a:latin typeface="Garamond"/>
+                          <a:cs typeface="Garamond"/>
+                        </a:rPr>
+                        <a:t>7.8x</a:t>
+                      </a:r>
+                    </a:p>
+                  </a:txBody>
+                  <a:tcPr anchor="ctr" marT="12700" marB="12700">
+                    <a:solidFill>
+                      <a:srgbClr val="F0F1F3"/>
+                    </a:solidFill>
+                  </a:tcPr>
+                </a:tc>
+                <a:tc>
+                  <a:txBody>
+                    <a:bodyPr/>
+                    <a:lstStyle/>
+                    <a:p>
+                      <a:pPr algn="r"/>
+                      <a:r>
+                        <a:rPr sz="850" b="0" i="0">
+                          <a:solidFill>
+                            <a:srgbClr val="262626"/>
+                          </a:solidFill>
+                          <a:latin typeface="Garamond"/>
+                          <a:cs typeface="Garamond"/>
+                        </a:rPr>
+                        <a:t>7.8x</a:t>
+                      </a:r>
+                    </a:p>
+                  </a:txBody>
+                  <a:tcPr anchor="ctr" marT="12700" marB="12700">
+                    <a:solidFill>
+                      <a:srgbClr val="F0F1F3"/>
+                    </a:solidFill>
+                  </a:tcPr>
+                </a:tc>
+                <a:tc>
+                  <a:txBody>
+                    <a:bodyPr/>
+                    <a:lstStyle/>
+                    <a:p>
+                      <a:pPr algn="r"/>
+                      <a:r>
+                        <a:rPr sz="850" b="0" i="0">
+                          <a:solidFill>
+                            <a:srgbClr val="262626"/>
+                          </a:solidFill>
+                          <a:latin typeface="Garamond"/>
+                          <a:cs typeface="Garamond"/>
+                        </a:rPr>
+                        <a:t>10.3x</a:t>
+                      </a:r>
+                    </a:p>
+                  </a:txBody>
+                  <a:tcPr anchor="ctr" marT="12700" marB="12700">
+                    <a:solidFill>
+                      <a:srgbClr val="F0F1F3"/>
+                    </a:solidFill>
+                  </a:tcPr>
+                </a:tc>
+              </a:tr>
+              <a:tr h="259080">
+                <a:tc>
+                  <a:txBody>
+                    <a:bodyPr/>
+                    <a:lstStyle/>
+                    <a:p>
+                      <a:pPr algn="l"/>
+                      <a:r>
+                        <a:rPr sz="850" b="0" i="0">
+                          <a:solidFill>
+                            <a:srgbClr val="262626"/>
+                          </a:solidFill>
+                          <a:latin typeface="Garamond"/>
+                          <a:cs typeface="Garamond"/>
+                        </a:rPr>
+                        <a:t>Levi Strauss</a:t>
+                      </a:r>
+                    </a:p>
+                  </a:txBody>
+                  <a:tcPr anchor="ctr" marT="12700" marB="12700">
+                    <a:solidFill>
+                      <a:srgbClr val="FFFFFF"/>
+                    </a:solidFill>
+                  </a:tcPr>
+                </a:tc>
+                <a:tc>
+                  <a:txBody>
+                    <a:bodyPr/>
+                    <a:lstStyle/>
+                    <a:p>
+                      <a:pPr algn="r"/>
+                      <a:r>
+                        <a:rPr sz="850" b="0" i="0">
+                          <a:solidFill>
+                            <a:srgbClr val="262626"/>
+                          </a:solidFill>
+                          <a:latin typeface="Garamond"/>
+                          <a:cs typeface="Garamond"/>
+                        </a:rPr>
+                        <a:t>1.52x</a:t>
+                      </a:r>
+                    </a:p>
+                  </a:txBody>
+                  <a:tcPr anchor="ctr" marT="12700" marB="12700">
+                    <a:solidFill>
+                      <a:srgbClr val="FFFFFF"/>
+                    </a:solidFill>
+                  </a:tcPr>
+                </a:tc>
+                <a:tc>
+                  <a:txBody>
+                    <a:bodyPr/>
+                    <a:lstStyle/>
+                    <a:p>
+                      <a:pPr algn="r"/>
+                      <a:r>
+                        <a:rPr sz="850" b="0" i="0">
+                          <a:solidFill>
+                            <a:srgbClr val="262626"/>
+                          </a:solidFill>
+                          <a:latin typeface="Garamond"/>
+                          <a:cs typeface="Garamond"/>
+                        </a:rPr>
+                        <a:t>9.6x</a:t>
+                      </a:r>
+                    </a:p>
+                  </a:txBody>
+                  <a:tcPr anchor="ctr" marT="12700" marB="12700">
+                    <a:solidFill>
+                      <a:srgbClr val="FFFFFF"/>
+                    </a:solidFill>
+                  </a:tcPr>
+                </a:tc>
+                <a:tc>
+                  <a:txBody>
+                    <a:bodyPr/>
+                    <a:lstStyle/>
+                    <a:p>
+                      <a:pPr algn="r"/>
+                      <a:r>
+                        <a:rPr sz="850" b="0" i="0">
+                          <a:solidFill>
+                            <a:srgbClr val="262626"/>
+                          </a:solidFill>
+                          <a:latin typeface="Garamond"/>
+                          <a:cs typeface="Garamond"/>
+                        </a:rPr>
+                        <a:t>18.1x</a:t>
+                      </a:r>
+                    </a:p>
+                  </a:txBody>
+                  <a:tcPr anchor="ctr" marT="12700" marB="12700">
+                    <a:solidFill>
+                      <a:srgbClr val="FFFFFF"/>
+                    </a:solidFill>
+                  </a:tcPr>
+                </a:tc>
+                <a:tc>
+                  <a:txBody>
+                    <a:bodyPr/>
+                    <a:lstStyle/>
+                    <a:p>
+                      <a:pPr algn="r"/>
+                      <a:r>
+                        <a:rPr sz="850" b="0" i="0">
+                          <a:solidFill>
+                            <a:srgbClr val="262626"/>
+                          </a:solidFill>
+                          <a:latin typeface="Garamond"/>
+                          <a:cs typeface="Garamond"/>
+                        </a:rPr>
+                        <a:t>15.0x</a:t>
+                      </a:r>
+                    </a:p>
+                  </a:txBody>
+                  <a:tcPr anchor="ctr" marT="12700" marB="12700">
+                    <a:solidFill>
+                      <a:srgbClr val="FFFFFF"/>
+                    </a:solidFill>
+                  </a:tcPr>
+                </a:tc>
+              </a:tr>
+              <a:tr h="259080">
+                <a:tc>
+                  <a:txBody>
+                    <a:bodyPr/>
+                    <a:lstStyle/>
+                    <a:p>
+                      <a:pPr algn="l"/>
+                      <a:r>
+                        <a:rPr sz="850" b="0" i="0">
+                          <a:solidFill>
+                            <a:srgbClr val="262626"/>
+                          </a:solidFill>
+                          <a:latin typeface="Garamond"/>
+                          <a:cs typeface="Garamond"/>
+                        </a:rPr>
+                        <a:t>Kontoor</a:t>
+                      </a:r>
+                    </a:p>
+                  </a:txBody>
+                  <a:tcPr anchor="ctr" marT="12700" marB="12700">
+                    <a:solidFill>
+                      <a:srgbClr val="F0F1F3"/>
+                    </a:solidFill>
+                  </a:tcPr>
+                </a:tc>
+                <a:tc>
+                  <a:txBody>
+                    <a:bodyPr/>
+                    <a:lstStyle/>
+                    <a:p>
+                      <a:pPr algn="r"/>
+                      <a:r>
+                        <a:rPr sz="850" b="0" i="0">
+                          <a:solidFill>
+                            <a:srgbClr val="262626"/>
+                          </a:solidFill>
+                          <a:latin typeface="Garamond"/>
+                          <a:cs typeface="Garamond"/>
+                        </a:rPr>
+                        <a:t>2.01x</a:t>
+                      </a:r>
+                    </a:p>
+                  </a:txBody>
+                  <a:tcPr anchor="ctr" marT="12700" marB="12700">
+                    <a:solidFill>
+                      <a:srgbClr val="F0F1F3"/>
+                    </a:solidFill>
+                  </a:tcPr>
+                </a:tc>
+                <a:tc>
+                  <a:txBody>
+                    <a:bodyPr/>
+                    <a:lstStyle/>
+                    <a:p>
+                      <a:pPr algn="r"/>
+                      <a:r>
+                        <a:rPr sz="850" b="0" i="0">
+                          <a:solidFill>
+                            <a:srgbClr val="262626"/>
+                          </a:solidFill>
+                          <a:latin typeface="Garamond"/>
+                          <a:cs typeface="Garamond"/>
+                        </a:rPr>
+                        <a:t>12.8x</a:t>
+                      </a:r>
+                    </a:p>
+                  </a:txBody>
+                  <a:tcPr anchor="ctr" marT="12700" marB="12700">
+                    <a:solidFill>
+                      <a:srgbClr val="F0F1F3"/>
+                    </a:solidFill>
+                  </a:tcPr>
+                </a:tc>
+                <a:tc>
+                  <a:txBody>
+                    <a:bodyPr/>
+                    <a:lstStyle/>
+                    <a:p>
+                      <a:pPr algn="r"/>
+                      <a:r>
+                        <a:rPr sz="850" b="0" i="0">
+                          <a:solidFill>
+                            <a:srgbClr val="262626"/>
+                          </a:solidFill>
+                          <a:latin typeface="Garamond"/>
+                          <a:cs typeface="Garamond"/>
+                        </a:rPr>
+                        <a:t>15.4x</a:t>
+                      </a:r>
+                    </a:p>
+                  </a:txBody>
+                  <a:tcPr anchor="ctr" marT="12700" marB="12700">
+                    <a:solidFill>
+                      <a:srgbClr val="F0F1F3"/>
+                    </a:solidFill>
+                  </a:tcPr>
+                </a:tc>
+                <a:tc>
+                  <a:txBody>
+                    <a:bodyPr/>
+                    <a:lstStyle/>
+                    <a:p>
+                      <a:pPr algn="r"/>
+                      <a:r>
+                        <a:rPr sz="850" b="0" i="0">
+                          <a:solidFill>
+                            <a:srgbClr val="262626"/>
+                          </a:solidFill>
+                          <a:latin typeface="Garamond"/>
+                          <a:cs typeface="Garamond"/>
+                        </a:rPr>
+                        <a:t>18.0x</a:t>
+                      </a:r>
+                    </a:p>
+                  </a:txBody>
+                  <a:tcPr anchor="ctr" marT="12700" marB="12700">
+                    <a:solidFill>
+                      <a:srgbClr val="F0F1F3"/>
+                    </a:solidFill>
+                  </a:tcPr>
+                </a:tc>
+              </a:tr>
+              <a:tr h="259080">
+                <a:tc>
+                  <a:txBody>
+                    <a:bodyPr/>
+                    <a:lstStyle/>
+                    <a:p>
+                      <a:pPr algn="l"/>
+                      <a:r>
+                        <a:rPr sz="850" b="0" i="0">
+                          <a:solidFill>
+                            <a:srgbClr val="262626"/>
+                          </a:solidFill>
+                          <a:latin typeface="Garamond"/>
+                          <a:cs typeface="Garamond"/>
+                        </a:rPr>
+                        <a:t>Core median (ex-LULU)</a:t>
+                      </a:r>
+                    </a:p>
+                  </a:txBody>
+                  <a:tcPr anchor="ctr" marT="12700" marB="12700">
+                    <a:solidFill>
+                      <a:srgbClr val="FFFFFF"/>
+                    </a:solidFill>
+                  </a:tcPr>
+                </a:tc>
+                <a:tc>
+                  <a:txBody>
+                    <a:bodyPr/>
+                    <a:lstStyle/>
+                    <a:p>
+                      <a:pPr algn="r"/>
+                      <a:r>
+                        <a:rPr sz="850" b="0" i="0">
+                          <a:solidFill>
+                            <a:srgbClr val="262626"/>
+                          </a:solidFill>
+                          <a:latin typeface="Garamond"/>
+                          <a:cs typeface="Garamond"/>
+                        </a:rPr>
+                        <a:t>1.63x</a:t>
+                      </a:r>
+                    </a:p>
+                  </a:txBody>
+                  <a:tcPr anchor="ctr" marT="12700" marB="12700">
+                    <a:solidFill>
+                      <a:srgbClr val="FFFFFF"/>
+                    </a:solidFill>
+                  </a:tcPr>
+                </a:tc>
+                <a:tc>
+                  <a:txBody>
+                    <a:bodyPr/>
+                    <a:lstStyle/>
+                    <a:p>
+                      <a:pPr algn="r"/>
+                      <a:r>
+                        <a:rPr sz="850" b="0" i="0">
+                          <a:solidFill>
+                            <a:srgbClr val="262626"/>
+                          </a:solidFill>
+                          <a:latin typeface="Garamond"/>
+                          <a:cs typeface="Garamond"/>
+                        </a:rPr>
+                        <a:t>9.4x</a:t>
+                      </a:r>
+                    </a:p>
+                  </a:txBody>
+                  <a:tcPr anchor="ctr" marT="12700" marB="12700">
+                    <a:solidFill>
+                      <a:srgbClr val="FFFFFF"/>
+                    </a:solidFill>
+                  </a:tcPr>
+                </a:tc>
+                <a:tc>
+                  <a:txBody>
+                    <a:bodyPr/>
+                    <a:lstStyle/>
+                    <a:p>
+                      <a:pPr algn="r"/>
+                      <a:r>
+                        <a:rPr sz="850" b="0" i="0">
+                          <a:solidFill>
+                            <a:srgbClr val="262626"/>
+                          </a:solidFill>
+                          <a:latin typeface="Garamond"/>
+                          <a:cs typeface="Garamond"/>
+                        </a:rPr>
+                        <a:t>15.7x</a:t>
+                      </a:r>
+                    </a:p>
+                  </a:txBody>
+                  <a:tcPr anchor="ctr" marT="12700" marB="12700">
+                    <a:solidFill>
+                      <a:srgbClr val="FFFFFF"/>
+                    </a:solidFill>
+                  </a:tcPr>
+                </a:tc>
+                <a:tc>
+                  <a:txBody>
+                    <a:bodyPr/>
+                    <a:lstStyle/>
+                    <a:p>
+                      <a:pPr algn="r"/>
+                      <a:r>
+                        <a:rPr sz="850" b="0" i="0">
+                          <a:solidFill>
+                            <a:srgbClr val="262626"/>
+                          </a:solidFill>
+                          <a:latin typeface="Garamond"/>
+                          <a:cs typeface="Garamond"/>
+                        </a:rPr>
+                        <a:t>16.5x</a:t>
+                      </a:r>
+                    </a:p>
+                  </a:txBody>
+                  <a:tcPr anchor="ctr" marT="12700" marB="12700">
+                    <a:solidFill>
+                      <a:srgbClr val="FFFFFF"/>
+                    </a:solidFill>
+                  </a:tcPr>
+                </a:tc>
+              </a:tr>
+              <a:tr h="259080">
+                <a:tc>
+                  <a:txBody>
+                    <a:bodyPr/>
+                    <a:lstStyle/>
+                    <a:p>
+                      <a:pPr algn="l"/>
+                      <a:r>
+                        <a:rPr sz="850" b="1" i="0">
+                          <a:solidFill>
+                            <a:srgbClr val="1F2A44"/>
+                          </a:solidFill>
+                          <a:latin typeface="Garamond"/>
+                          <a:cs typeface="Garamond"/>
+                        </a:rPr>
+                        <a:t>LULU @ $100 (current)</a:t>
+                      </a:r>
+                    </a:p>
+                  </a:txBody>
+                  <a:tcPr anchor="ctr" marT="12700" marB="12700">
+                    <a:solidFill>
+                      <a:srgbClr val="F0F1F3"/>
+                    </a:solidFill>
+                  </a:tcPr>
+                </a:tc>
+                <a:tc>
+                  <a:txBody>
+                    <a:bodyPr/>
+                    <a:lstStyle/>
+                    <a:p>
+                      <a:pPr algn="r"/>
+                      <a:r>
+                        <a:rPr sz="850" b="1" i="0">
+                          <a:solidFill>
+                            <a:srgbClr val="1F2A44"/>
+                          </a:solidFill>
+                          <a:latin typeface="Garamond"/>
+                          <a:cs typeface="Garamond"/>
+                        </a:rPr>
                         <a:t>1.07x</a:t>
                       </a:r>
                     </a:p>
                   </a:txBody>
                   <a:tcPr anchor="ctr" marT="12700" marB="12700">
                     <a:solidFill>
-                      <a:srgbClr val="FFFFFF"/>
-                    </a:solidFill>
-                  </a:tcPr>
-                </a:tc>
-                <a:tc>
-                  <a:txBody>
-                    <a:bodyPr/>
-                    <a:lstStyle/>
-                    <a:p>
-                      <a:pPr algn="r"/>
-                      <a:r>
-                        <a:rPr sz="850" b="0" i="0">
-                          <a:solidFill>
-                            <a:srgbClr val="262626"/>
-                          </a:solidFill>
-                          <a:latin typeface="Garamond"/>
-                          <a:cs typeface="Garamond"/>
-                        </a:rPr>
-                        <a:t>4.7x</a:t>
-                      </a:r>
-                    </a:p>
-                  </a:txBody>
-                  <a:tcPr anchor="ctr" marT="12700" marB="12700">
-                    <a:solidFill>
-                      <a:srgbClr val="FFFFFF"/>
-                    </a:solidFill>
-                  </a:tcPr>
-                </a:tc>
-                <a:tc>
-                  <a:txBody>
-                    <a:bodyPr/>
-                    <a:lstStyle/>
-                    <a:p>
-                      <a:pPr algn="r"/>
-                      <a:r>
-                        <a:rPr sz="850" b="0" i="0">
-                          <a:solidFill>
-                            <a:srgbClr val="262626"/>
-                          </a:solidFill>
-                          <a:latin typeface="Garamond"/>
-                          <a:cs typeface="Garamond"/>
-                        </a:rPr>
-                        <a:t>5.4x</a:t>
-                      </a:r>
-                    </a:p>
-                  </a:txBody>
-                  <a:tcPr anchor="ctr" marT="12700" marB="12700">
-                    <a:solidFill>
-                      <a:srgbClr val="FFFFFF"/>
-                    </a:solidFill>
-                  </a:tcPr>
-                </a:tc>
-                <a:tc>
-                  <a:txBody>
-                    <a:bodyPr/>
-                    <a:lstStyle/>
-                    <a:p>
-                      <a:pPr algn="r"/>
-                      <a:r>
-                        <a:rPr sz="850" b="0" i="0">
-                          <a:solidFill>
-                            <a:srgbClr val="262626"/>
-                          </a:solidFill>
-                          <a:latin typeface="Garamond"/>
-                          <a:cs typeface="Garamond"/>
-                        </a:rPr>
-                        <a:t>8.3x</a:t>
-                      </a:r>
-                    </a:p>
-                  </a:txBody>
-                  <a:tcPr anchor="ctr" marT="12700" marB="12700">
-                    <a:solidFill>
-                      <a:srgbClr val="FFFFFF"/>
-                    </a:solidFill>
-                  </a:tcPr>
-                </a:tc>
-              </a:tr>
-              <a:tr h="233172">
-                <a:tc>
-                  <a:txBody>
-                    <a:bodyPr/>
-                    <a:lstStyle/>
-                    <a:p>
-                      <a:pPr algn="l"/>
-                      <a:r>
-                        <a:rPr sz="850" b="0" i="0">
-                          <a:solidFill>
-                            <a:srgbClr val="262626"/>
-                          </a:solidFill>
-                          <a:latin typeface="Garamond"/>
-                          <a:cs typeface="Garamond"/>
-                        </a:rPr>
-                        <a:t>adidas</a:t>
-                      </a:r>
-                    </a:p>
-                  </a:txBody>
-                  <a:tcPr anchor="ctr" marT="12700" marB="12700">
-                    <a:solidFill>
                       <a:srgbClr val="F0F1F3"/>
                     </a:solidFill>
                   </a:tcPr>
@@ -26247,14 +27003,14 @@
                     <a:p>
                       <a:pPr algn="r"/>
                       <a:r>
-                        <a:rPr sz="850" b="0" i="0">
-                          <a:solidFill>
-                            <a:srgbClr val="262626"/>
-                          </a:solidFill>
-                          <a:latin typeface="Garamond"/>
-                          <a:cs typeface="Garamond"/>
-                        </a:rPr>
-                        <a:t>1.51x</a:t>
+                        <a:rPr sz="850" b="1" i="0">
+                          <a:solidFill>
+                            <a:srgbClr val="1F2A44"/>
+                          </a:solidFill>
+                          <a:latin typeface="Garamond"/>
+                          <a:cs typeface="Garamond"/>
+                        </a:rPr>
+                        <a:t>4.1x</a:t>
                       </a:r>
                     </a:p>
                   </a:txBody>
@@ -26271,14 +27027,14 @@
                     <a:p>
                       <a:pPr algn="r"/>
                       <a:r>
-                        <a:rPr sz="850" b="0" i="0">
-                          <a:solidFill>
-                            <a:srgbClr val="262626"/>
-                          </a:solidFill>
-                          <a:latin typeface="Garamond"/>
-                          <a:cs typeface="Garamond"/>
-                        </a:rPr>
-                        <a:t>9.2x</a:t>
+                        <a:rPr sz="850" b="1" i="0">
+                          <a:solidFill>
+                            <a:srgbClr val="1F2A44"/>
+                          </a:solidFill>
+                          <a:latin typeface="Garamond"/>
+                          <a:cs typeface="Garamond"/>
+                        </a:rPr>
+                        <a:t>5.0x</a:t>
                       </a:r>
                     </a:p>
                   </a:txBody>
@@ -26295,898 +27051,20 @@
                     <a:p>
                       <a:pPr algn="r"/>
                       <a:r>
-                        <a:rPr sz="850" b="0" i="0">
-                          <a:solidFill>
-                            <a:srgbClr val="262626"/>
-                          </a:solidFill>
-                          <a:latin typeface="Garamond"/>
-                          <a:cs typeface="Garamond"/>
-                        </a:rPr>
-                        <a:t>18.6x</a:t>
+                        <a:rPr sz="850" b="1" i="0">
+                          <a:solidFill>
+                            <a:srgbClr val="1F2A44"/>
+                          </a:solidFill>
+                          <a:latin typeface="Garamond"/>
+                          <a:cs typeface="Garamond"/>
+                        </a:rPr>
+                        <a:t>10.4x</a:t>
                       </a:r>
                     </a:p>
                   </a:txBody>
                   <a:tcPr anchor="ctr" marT="12700" marB="12700">
                     <a:solidFill>
                       <a:srgbClr val="F0F1F3"/>
-                    </a:solidFill>
-                  </a:tcPr>
-                </a:tc>
-                <a:tc>
-                  <a:txBody>
-                    <a:bodyPr/>
-                    <a:lstStyle/>
-                    <a:p>
-                      <a:pPr algn="r"/>
-                      <a:r>
-                        <a:rPr sz="850" b="0" i="0">
-                          <a:solidFill>
-                            <a:srgbClr val="262626"/>
-                          </a:solidFill>
-                          <a:latin typeface="Garamond"/>
-                          <a:cs typeface="Garamond"/>
-                        </a:rPr>
-                        <a:t>19.1x</a:t>
-                      </a:r>
-                    </a:p>
-                  </a:txBody>
-                  <a:tcPr anchor="ctr" marT="12700" marB="12700">
-                    <a:solidFill>
-                      <a:srgbClr val="F0F1F3"/>
-                    </a:solidFill>
-                  </a:tcPr>
-                </a:tc>
-              </a:tr>
-              <a:tr h="233172">
-                <a:tc>
-                  <a:txBody>
-                    <a:bodyPr/>
-                    <a:lstStyle/>
-                    <a:p>
-                      <a:pPr algn="l"/>
-                      <a:r>
-                        <a:rPr sz="850" b="0" i="0">
-                          <a:solidFill>
-                            <a:srgbClr val="262626"/>
-                          </a:solidFill>
-                          <a:latin typeface="Garamond"/>
-                          <a:cs typeface="Garamond"/>
-                        </a:rPr>
-                        <a:t>Nike</a:t>
-                      </a:r>
-                    </a:p>
-                  </a:txBody>
-                  <a:tcPr anchor="ctr" marT="12700" marB="12700">
-                    <a:solidFill>
-                      <a:srgbClr val="FFFFFF"/>
-                    </a:solidFill>
-                  </a:tcPr>
-                </a:tc>
-                <a:tc>
-                  <a:txBody>
-                    <a:bodyPr/>
-                    <a:lstStyle/>
-                    <a:p>
-                      <a:pPr algn="r"/>
-                      <a:r>
-                        <a:rPr sz="850" b="0" i="0">
-                          <a:solidFill>
-                            <a:srgbClr val="262626"/>
-                          </a:solidFill>
-                          <a:latin typeface="Garamond"/>
-                          <a:cs typeface="Garamond"/>
-                        </a:rPr>
-                        <a:t>1.27x</a:t>
-                      </a:r>
-                    </a:p>
-                  </a:txBody>
-                  <a:tcPr anchor="ctr" marT="12700" marB="12700">
-                    <a:solidFill>
-                      <a:srgbClr val="FFFFFF"/>
-                    </a:solidFill>
-                  </a:tcPr>
-                </a:tc>
-                <a:tc>
-                  <a:txBody>
-                    <a:bodyPr/>
-                    <a:lstStyle/>
-                    <a:p>
-                      <a:pPr algn="r"/>
-                      <a:r>
-                        <a:rPr sz="850" b="0" i="0">
-                          <a:solidFill>
-                            <a:srgbClr val="262626"/>
-                          </a:solidFill>
-                          <a:latin typeface="Garamond"/>
-                          <a:cs typeface="Garamond"/>
-                        </a:rPr>
-                        <a:t>12.7x</a:t>
-                      </a:r>
-                    </a:p>
-                  </a:txBody>
-                  <a:tcPr anchor="ctr" marT="12700" marB="12700">
-                    <a:solidFill>
-                      <a:srgbClr val="FFFFFF"/>
-                    </a:solidFill>
-                  </a:tcPr>
-                </a:tc>
-                <a:tc>
-                  <a:txBody>
-                    <a:bodyPr/>
-                    <a:lstStyle/>
-                    <a:p>
-                      <a:pPr algn="r"/>
-                      <a:r>
-                        <a:rPr sz="850" b="0" i="0">
-                          <a:solidFill>
-                            <a:srgbClr val="262626"/>
-                          </a:solidFill>
-                          <a:latin typeface="Garamond"/>
-                          <a:cs typeface="Garamond"/>
-                        </a:rPr>
-                        <a:t>15.9x</a:t>
-                      </a:r>
-                    </a:p>
-                  </a:txBody>
-                  <a:tcPr anchor="ctr" marT="12700" marB="12700">
-                    <a:solidFill>
-                      <a:srgbClr val="FFFFFF"/>
-                    </a:solidFill>
-                  </a:tcPr>
-                </a:tc>
-                <a:tc>
-                  <a:txBody>
-                    <a:bodyPr/>
-                    <a:lstStyle/>
-                    <a:p>
-                      <a:pPr algn="r"/>
-                      <a:r>
-                        <a:rPr sz="850" b="0" i="0">
-                          <a:solidFill>
-                            <a:srgbClr val="262626"/>
-                          </a:solidFill>
-                          <a:latin typeface="Garamond"/>
-                          <a:cs typeface="Garamond"/>
-                        </a:rPr>
-                        <a:t>18.3x</a:t>
-                      </a:r>
-                    </a:p>
-                  </a:txBody>
-                  <a:tcPr anchor="ctr" marT="12700" marB="12700">
-                    <a:solidFill>
-                      <a:srgbClr val="FFFFFF"/>
-                    </a:solidFill>
-                  </a:tcPr>
-                </a:tc>
-              </a:tr>
-              <a:tr h="233172">
-                <a:tc>
-                  <a:txBody>
-                    <a:bodyPr/>
-                    <a:lstStyle/>
-                    <a:p>
-                      <a:pPr algn="l"/>
-                      <a:r>
-                        <a:rPr sz="850" b="0" i="0">
-                          <a:solidFill>
-                            <a:srgbClr val="262626"/>
-                          </a:solidFill>
-                          <a:latin typeface="Garamond"/>
-                          <a:cs typeface="Garamond"/>
-                        </a:rPr>
-                        <a:t>Deckers</a:t>
-                      </a:r>
-                    </a:p>
-                  </a:txBody>
-                  <a:tcPr anchor="ctr" marT="12700" marB="12700">
-                    <a:solidFill>
-                      <a:srgbClr val="F0F1F3"/>
-                    </a:solidFill>
-                  </a:tcPr>
-                </a:tc>
-                <a:tc>
-                  <a:txBody>
-                    <a:bodyPr/>
-                    <a:lstStyle/>
-                    <a:p>
-                      <a:pPr algn="r"/>
-                      <a:r>
-                        <a:rPr sz="850" b="0" i="0">
-                          <a:solidFill>
-                            <a:srgbClr val="262626"/>
-                          </a:solidFill>
-                          <a:latin typeface="Garamond"/>
-                          <a:cs typeface="Garamond"/>
-                        </a:rPr>
-                        <a:t>2.47x</a:t>
-                      </a:r>
-                    </a:p>
-                  </a:txBody>
-                  <a:tcPr anchor="ctr" marT="12700" marB="12700">
-                    <a:solidFill>
-                      <a:srgbClr val="F0F1F3"/>
-                    </a:solidFill>
-                  </a:tcPr>
-                </a:tc>
-                <a:tc>
-                  <a:txBody>
-                    <a:bodyPr/>
-                    <a:lstStyle/>
-                    <a:p>
-                      <a:pPr algn="r"/>
-                      <a:r>
-                        <a:rPr sz="850" b="0" i="0">
-                          <a:solidFill>
-                            <a:srgbClr val="262626"/>
-                          </a:solidFill>
-                          <a:latin typeface="Garamond"/>
-                          <a:cs typeface="Garamond"/>
-                        </a:rPr>
-                        <a:t>7.9x</a:t>
-                      </a:r>
-                    </a:p>
-                  </a:txBody>
-                  <a:tcPr anchor="ctr" marT="12700" marB="12700">
-                    <a:solidFill>
-                      <a:srgbClr val="F0F1F3"/>
-                    </a:solidFill>
-                  </a:tcPr>
-                </a:tc>
-                <a:tc>
-                  <a:txBody>
-                    <a:bodyPr/>
-                    <a:lstStyle/>
-                    <a:p>
-                      <a:pPr algn="r"/>
-                      <a:r>
-                        <a:rPr sz="850" b="0" i="0">
-                          <a:solidFill>
-                            <a:srgbClr val="262626"/>
-                          </a:solidFill>
-                          <a:latin typeface="Garamond"/>
-                          <a:cs typeface="Garamond"/>
-                        </a:rPr>
-                        <a:t>9.8x</a:t>
-                      </a:r>
-                    </a:p>
-                  </a:txBody>
-                  <a:tcPr anchor="ctr" marT="12700" marB="12700">
-                    <a:solidFill>
-                      <a:srgbClr val="F0F1F3"/>
-                    </a:solidFill>
-                  </a:tcPr>
-                </a:tc>
-                <a:tc>
-                  <a:txBody>
-                    <a:bodyPr/>
-                    <a:lstStyle/>
-                    <a:p>
-                      <a:pPr algn="r"/>
-                      <a:r>
-                        <a:rPr sz="850" b="0" i="0">
-                          <a:solidFill>
-                            <a:srgbClr val="262626"/>
-                          </a:solidFill>
-                          <a:latin typeface="Garamond"/>
-                          <a:cs typeface="Garamond"/>
-                        </a:rPr>
-                        <a:t>12.1x</a:t>
-                      </a:r>
-                    </a:p>
-                  </a:txBody>
-                  <a:tcPr anchor="ctr" marT="12700" marB="12700">
-                    <a:solidFill>
-                      <a:srgbClr val="F0F1F3"/>
-                    </a:solidFill>
-                  </a:tcPr>
-                </a:tc>
-              </a:tr>
-              <a:tr h="233172">
-                <a:tc>
-                  <a:txBody>
-                    <a:bodyPr/>
-                    <a:lstStyle/>
-                    <a:p>
-                      <a:pPr algn="l"/>
-                      <a:r>
-                        <a:rPr sz="850" b="0" i="0">
-                          <a:solidFill>
-                            <a:srgbClr val="262626"/>
-                          </a:solidFill>
-                          <a:latin typeface="Garamond"/>
-                          <a:cs typeface="Garamond"/>
-                        </a:rPr>
-                        <a:t>Crocs</a:t>
-                      </a:r>
-                    </a:p>
-                  </a:txBody>
-                  <a:tcPr anchor="ctr" marT="12700" marB="12700">
-                    <a:solidFill>
-                      <a:srgbClr val="FFFFFF"/>
-                    </a:solidFill>
-                  </a:tcPr>
-                </a:tc>
-                <a:tc>
-                  <a:txBody>
-                    <a:bodyPr/>
-                    <a:lstStyle/>
-                    <a:p>
-                      <a:pPr algn="r"/>
-                      <a:r>
-                        <a:rPr sz="850" b="0" i="0">
-                          <a:solidFill>
-                            <a:srgbClr val="262626"/>
-                          </a:solidFill>
-                          <a:latin typeface="Garamond"/>
-                          <a:cs typeface="Garamond"/>
-                        </a:rPr>
-                        <a:t>1.74x</a:t>
-                      </a:r>
-                    </a:p>
-                  </a:txBody>
-                  <a:tcPr anchor="ctr" marT="12700" marB="12700">
-                    <a:solidFill>
-                      <a:srgbClr val="FFFFFF"/>
-                    </a:solidFill>
-                  </a:tcPr>
-                </a:tc>
-                <a:tc>
-                  <a:txBody>
-                    <a:bodyPr/>
-                    <a:lstStyle/>
-                    <a:p>
-                      <a:pPr algn="r"/>
-                      <a:r>
-                        <a:rPr sz="850" b="0" i="0">
-                          <a:solidFill>
-                            <a:srgbClr val="262626"/>
-                          </a:solidFill>
-                          <a:latin typeface="Garamond"/>
-                          <a:cs typeface="Garamond"/>
-                        </a:rPr>
-                        <a:t>7.8x</a:t>
-                      </a:r>
-                    </a:p>
-                  </a:txBody>
-                  <a:tcPr anchor="ctr" marT="12700" marB="12700">
-                    <a:solidFill>
-                      <a:srgbClr val="FFFFFF"/>
-                    </a:solidFill>
-                  </a:tcPr>
-                </a:tc>
-                <a:tc>
-                  <a:txBody>
-                    <a:bodyPr/>
-                    <a:lstStyle/>
-                    <a:p>
-                      <a:pPr algn="r"/>
-                      <a:r>
-                        <a:rPr sz="850" b="0" i="0">
-                          <a:solidFill>
-                            <a:srgbClr val="262626"/>
-                          </a:solidFill>
-                          <a:latin typeface="Garamond"/>
-                          <a:cs typeface="Garamond"/>
-                        </a:rPr>
-                        <a:t>7.8x</a:t>
-                      </a:r>
-                    </a:p>
-                  </a:txBody>
-                  <a:tcPr anchor="ctr" marT="12700" marB="12700">
-                    <a:solidFill>
-                      <a:srgbClr val="FFFFFF"/>
-                    </a:solidFill>
-                  </a:tcPr>
-                </a:tc>
-                <a:tc>
-                  <a:txBody>
-                    <a:bodyPr/>
-                    <a:lstStyle/>
-                    <a:p>
-                      <a:pPr algn="r"/>
-                      <a:r>
-                        <a:rPr sz="850" b="0" i="0">
-                          <a:solidFill>
-                            <a:srgbClr val="262626"/>
-                          </a:solidFill>
-                          <a:latin typeface="Garamond"/>
-                          <a:cs typeface="Garamond"/>
-                        </a:rPr>
-                        <a:t>10.3x</a:t>
-                      </a:r>
-                    </a:p>
-                  </a:txBody>
-                  <a:tcPr anchor="ctr" marT="12700" marB="12700">
-                    <a:solidFill>
-                      <a:srgbClr val="FFFFFF"/>
-                    </a:solidFill>
-                  </a:tcPr>
-                </a:tc>
-              </a:tr>
-              <a:tr h="233172">
-                <a:tc>
-                  <a:txBody>
-                    <a:bodyPr/>
-                    <a:lstStyle/>
-                    <a:p>
-                      <a:pPr algn="l"/>
-                      <a:r>
-                        <a:rPr sz="850" b="0" i="0">
-                          <a:solidFill>
-                            <a:srgbClr val="262626"/>
-                          </a:solidFill>
-                          <a:latin typeface="Garamond"/>
-                          <a:cs typeface="Garamond"/>
-                        </a:rPr>
-                        <a:t>Levi Strauss</a:t>
-                      </a:r>
-                    </a:p>
-                  </a:txBody>
-                  <a:tcPr anchor="ctr" marT="12700" marB="12700">
-                    <a:solidFill>
-                      <a:srgbClr val="F0F1F3"/>
-                    </a:solidFill>
-                  </a:tcPr>
-                </a:tc>
-                <a:tc>
-                  <a:txBody>
-                    <a:bodyPr/>
-                    <a:lstStyle/>
-                    <a:p>
-                      <a:pPr algn="r"/>
-                      <a:r>
-                        <a:rPr sz="850" b="0" i="0">
-                          <a:solidFill>
-                            <a:srgbClr val="262626"/>
-                          </a:solidFill>
-                          <a:latin typeface="Garamond"/>
-                          <a:cs typeface="Garamond"/>
-                        </a:rPr>
-                        <a:t>1.52x</a:t>
-                      </a:r>
-                    </a:p>
-                  </a:txBody>
-                  <a:tcPr anchor="ctr" marT="12700" marB="12700">
-                    <a:solidFill>
-                      <a:srgbClr val="F0F1F3"/>
-                    </a:solidFill>
-                  </a:tcPr>
-                </a:tc>
-                <a:tc>
-                  <a:txBody>
-                    <a:bodyPr/>
-                    <a:lstStyle/>
-                    <a:p>
-                      <a:pPr algn="r"/>
-                      <a:r>
-                        <a:rPr sz="850" b="0" i="0">
-                          <a:solidFill>
-                            <a:srgbClr val="262626"/>
-                          </a:solidFill>
-                          <a:latin typeface="Garamond"/>
-                          <a:cs typeface="Garamond"/>
-                        </a:rPr>
-                        <a:t>9.6x</a:t>
-                      </a:r>
-                    </a:p>
-                  </a:txBody>
-                  <a:tcPr anchor="ctr" marT="12700" marB="12700">
-                    <a:solidFill>
-                      <a:srgbClr val="F0F1F3"/>
-                    </a:solidFill>
-                  </a:tcPr>
-                </a:tc>
-                <a:tc>
-                  <a:txBody>
-                    <a:bodyPr/>
-                    <a:lstStyle/>
-                    <a:p>
-                      <a:pPr algn="r"/>
-                      <a:r>
-                        <a:rPr sz="850" b="0" i="0">
-                          <a:solidFill>
-                            <a:srgbClr val="262626"/>
-                          </a:solidFill>
-                          <a:latin typeface="Garamond"/>
-                          <a:cs typeface="Garamond"/>
-                        </a:rPr>
-                        <a:t>18.1x</a:t>
-                      </a:r>
-                    </a:p>
-                  </a:txBody>
-                  <a:tcPr anchor="ctr" marT="12700" marB="12700">
-                    <a:solidFill>
-                      <a:srgbClr val="F0F1F3"/>
-                    </a:solidFill>
-                  </a:tcPr>
-                </a:tc>
-                <a:tc>
-                  <a:txBody>
-                    <a:bodyPr/>
-                    <a:lstStyle/>
-                    <a:p>
-                      <a:pPr algn="r"/>
-                      <a:r>
-                        <a:rPr sz="850" b="0" i="0">
-                          <a:solidFill>
-                            <a:srgbClr val="262626"/>
-                          </a:solidFill>
-                          <a:latin typeface="Garamond"/>
-                          <a:cs typeface="Garamond"/>
-                        </a:rPr>
-                        <a:t>15.0x</a:t>
-                      </a:r>
-                    </a:p>
-                  </a:txBody>
-                  <a:tcPr anchor="ctr" marT="12700" marB="12700">
-                    <a:solidFill>
-                      <a:srgbClr val="F0F1F3"/>
-                    </a:solidFill>
-                  </a:tcPr>
-                </a:tc>
-              </a:tr>
-              <a:tr h="233172">
-                <a:tc>
-                  <a:txBody>
-                    <a:bodyPr/>
-                    <a:lstStyle/>
-                    <a:p>
-                      <a:pPr algn="l"/>
-                      <a:r>
-                        <a:rPr sz="850" b="0" i="0">
-                          <a:solidFill>
-                            <a:srgbClr val="262626"/>
-                          </a:solidFill>
-                          <a:latin typeface="Garamond"/>
-                          <a:cs typeface="Garamond"/>
-                        </a:rPr>
-                        <a:t>Kontoor</a:t>
-                      </a:r>
-                    </a:p>
-                  </a:txBody>
-                  <a:tcPr anchor="ctr" marT="12700" marB="12700">
-                    <a:solidFill>
-                      <a:srgbClr val="FFFFFF"/>
-                    </a:solidFill>
-                  </a:tcPr>
-                </a:tc>
-                <a:tc>
-                  <a:txBody>
-                    <a:bodyPr/>
-                    <a:lstStyle/>
-                    <a:p>
-                      <a:pPr algn="r"/>
-                      <a:r>
-                        <a:rPr sz="850" b="0" i="0">
-                          <a:solidFill>
-                            <a:srgbClr val="262626"/>
-                          </a:solidFill>
-                          <a:latin typeface="Garamond"/>
-                          <a:cs typeface="Garamond"/>
-                        </a:rPr>
-                        <a:t>2.01x</a:t>
-                      </a:r>
-                    </a:p>
-                  </a:txBody>
-                  <a:tcPr anchor="ctr" marT="12700" marB="12700">
-                    <a:solidFill>
-                      <a:srgbClr val="FFFFFF"/>
-                    </a:solidFill>
-                  </a:tcPr>
-                </a:tc>
-                <a:tc>
-                  <a:txBody>
-                    <a:bodyPr/>
-                    <a:lstStyle/>
-                    <a:p>
-                      <a:pPr algn="r"/>
-                      <a:r>
-                        <a:rPr sz="850" b="0" i="0">
-                          <a:solidFill>
-                            <a:srgbClr val="262626"/>
-                          </a:solidFill>
-                          <a:latin typeface="Garamond"/>
-                          <a:cs typeface="Garamond"/>
-                        </a:rPr>
-                        <a:t>12.8x</a:t>
-                      </a:r>
-                    </a:p>
-                  </a:txBody>
-                  <a:tcPr anchor="ctr" marT="12700" marB="12700">
-                    <a:solidFill>
-                      <a:srgbClr val="FFFFFF"/>
-                    </a:solidFill>
-                  </a:tcPr>
-                </a:tc>
-                <a:tc>
-                  <a:txBody>
-                    <a:bodyPr/>
-                    <a:lstStyle/>
-                    <a:p>
-                      <a:pPr algn="r"/>
-                      <a:r>
-                        <a:rPr sz="850" b="0" i="0">
-                          <a:solidFill>
-                            <a:srgbClr val="262626"/>
-                          </a:solidFill>
-                          <a:latin typeface="Garamond"/>
-                          <a:cs typeface="Garamond"/>
-                        </a:rPr>
-                        <a:t>15.4x</a:t>
-                      </a:r>
-                    </a:p>
-                  </a:txBody>
-                  <a:tcPr anchor="ctr" marT="12700" marB="12700">
-                    <a:solidFill>
-                      <a:srgbClr val="FFFFFF"/>
-                    </a:solidFill>
-                  </a:tcPr>
-                </a:tc>
-                <a:tc>
-                  <a:txBody>
-                    <a:bodyPr/>
-                    <a:lstStyle/>
-                    <a:p>
-                      <a:pPr algn="r"/>
-                      <a:r>
-                        <a:rPr sz="850" b="0" i="0">
-                          <a:solidFill>
-                            <a:srgbClr val="262626"/>
-                          </a:solidFill>
-                          <a:latin typeface="Garamond"/>
-                          <a:cs typeface="Garamond"/>
-                        </a:rPr>
-                        <a:t>18.0x</a:t>
-                      </a:r>
-                    </a:p>
-                  </a:txBody>
-                  <a:tcPr anchor="ctr" marT="12700" marB="12700">
-                    <a:solidFill>
-                      <a:srgbClr val="FFFFFF"/>
-                    </a:solidFill>
-                  </a:tcPr>
-                </a:tc>
-              </a:tr>
-              <a:tr h="233172">
-                <a:tc>
-                  <a:txBody>
-                    <a:bodyPr/>
-                    <a:lstStyle/>
-                    <a:p>
-                      <a:pPr algn="l"/>
-                      <a:r>
-                        <a:rPr sz="850" b="0" i="0">
-                          <a:solidFill>
-                            <a:srgbClr val="262626"/>
-                          </a:solidFill>
-                          <a:latin typeface="Garamond"/>
-                          <a:cs typeface="Garamond"/>
-                        </a:rPr>
-                        <a:t>Core median (ex-LULU)</a:t>
-                      </a:r>
-                    </a:p>
-                  </a:txBody>
-                  <a:tcPr anchor="ctr" marT="12700" marB="12700">
-                    <a:solidFill>
-                      <a:srgbClr val="F0F1F3"/>
-                    </a:solidFill>
-                  </a:tcPr>
-                </a:tc>
-                <a:tc>
-                  <a:txBody>
-                    <a:bodyPr/>
-                    <a:lstStyle/>
-                    <a:p>
-                      <a:pPr algn="r"/>
-                      <a:r>
-                        <a:rPr sz="850" b="0" i="0">
-                          <a:solidFill>
-                            <a:srgbClr val="262626"/>
-                          </a:solidFill>
-                          <a:latin typeface="Garamond"/>
-                          <a:cs typeface="Garamond"/>
-                        </a:rPr>
-                        <a:t>1.63x</a:t>
-                      </a:r>
-                    </a:p>
-                  </a:txBody>
-                  <a:tcPr anchor="ctr" marT="12700" marB="12700">
-                    <a:solidFill>
-                      <a:srgbClr val="F0F1F3"/>
-                    </a:solidFill>
-                  </a:tcPr>
-                </a:tc>
-                <a:tc>
-                  <a:txBody>
-                    <a:bodyPr/>
-                    <a:lstStyle/>
-                    <a:p>
-                      <a:pPr algn="r"/>
-                      <a:r>
-                        <a:rPr sz="850" b="0" i="0">
-                          <a:solidFill>
-                            <a:srgbClr val="262626"/>
-                          </a:solidFill>
-                          <a:latin typeface="Garamond"/>
-                          <a:cs typeface="Garamond"/>
-                        </a:rPr>
-                        <a:t>9.4x</a:t>
-                      </a:r>
-                    </a:p>
-                  </a:txBody>
-                  <a:tcPr anchor="ctr" marT="12700" marB="12700">
-                    <a:solidFill>
-                      <a:srgbClr val="F0F1F3"/>
-                    </a:solidFill>
-                  </a:tcPr>
-                </a:tc>
-                <a:tc>
-                  <a:txBody>
-                    <a:bodyPr/>
-                    <a:lstStyle/>
-                    <a:p>
-                      <a:pPr algn="r"/>
-                      <a:r>
-                        <a:rPr sz="850" b="0" i="0">
-                          <a:solidFill>
-                            <a:srgbClr val="262626"/>
-                          </a:solidFill>
-                          <a:latin typeface="Garamond"/>
-                          <a:cs typeface="Garamond"/>
-                        </a:rPr>
-                        <a:t>15.7x</a:t>
-                      </a:r>
-                    </a:p>
-                  </a:txBody>
-                  <a:tcPr anchor="ctr" marT="12700" marB="12700">
-                    <a:solidFill>
-                      <a:srgbClr val="F0F1F3"/>
-                    </a:solidFill>
-                  </a:tcPr>
-                </a:tc>
-                <a:tc>
-                  <a:txBody>
-                    <a:bodyPr/>
-                    <a:lstStyle/>
-                    <a:p>
-                      <a:pPr algn="r"/>
-                      <a:r>
-                        <a:rPr sz="850" b="0" i="0">
-                          <a:solidFill>
-                            <a:srgbClr val="262626"/>
-                          </a:solidFill>
-                          <a:latin typeface="Garamond"/>
-                          <a:cs typeface="Garamond"/>
-                        </a:rPr>
-                        <a:t>16.5x</a:t>
-                      </a:r>
-                    </a:p>
-                  </a:txBody>
-                  <a:tcPr anchor="ctr" marT="12700" marB="12700">
-                    <a:solidFill>
-                      <a:srgbClr val="F0F1F3"/>
-                    </a:solidFill>
-                  </a:tcPr>
-                </a:tc>
-              </a:tr>
-              <a:tr h="233172">
-                <a:tc>
-                  <a:txBody>
-                    <a:bodyPr/>
-                    <a:lstStyle/>
-                    <a:p>
-                      <a:pPr algn="l"/>
-                      <a:r>
-                        <a:rPr sz="850" b="1" i="0">
-                          <a:solidFill>
-                            <a:srgbClr val="1F2A44"/>
-                          </a:solidFill>
-                          <a:latin typeface="Garamond"/>
-                          <a:cs typeface="Garamond"/>
-                        </a:rPr>
-                        <a:t>LULU @ $100 (current)</a:t>
-                      </a:r>
-                    </a:p>
-                  </a:txBody>
-                  <a:tcPr anchor="ctr" marT="12700" marB="12700">
-                    <a:solidFill>
-                      <a:srgbClr val="FFFFFF"/>
-                    </a:solidFill>
-                  </a:tcPr>
-                </a:tc>
-                <a:tc>
-                  <a:txBody>
-                    <a:bodyPr/>
-                    <a:lstStyle/>
-                    <a:p>
-                      <a:pPr algn="r"/>
-                      <a:r>
-                        <a:rPr sz="850" b="1" i="0">
-                          <a:solidFill>
-                            <a:srgbClr val="1F2A44"/>
-                          </a:solidFill>
-                          <a:latin typeface="Garamond"/>
-                          <a:cs typeface="Garamond"/>
-                        </a:rPr>
-                        <a:t>1.07x</a:t>
-                      </a:r>
-                    </a:p>
-                  </a:txBody>
-                  <a:tcPr anchor="ctr" marT="12700" marB="12700">
-                    <a:solidFill>
-                      <a:srgbClr val="FFFFFF"/>
-                    </a:solidFill>
-                  </a:tcPr>
-                </a:tc>
-                <a:tc>
-                  <a:txBody>
-                    <a:bodyPr/>
-                    <a:lstStyle/>
-                    <a:p>
-                      <a:pPr algn="r"/>
-                      <a:r>
-                        <a:rPr sz="850" b="1" i="0">
-                          <a:solidFill>
-                            <a:srgbClr val="1F2A44"/>
-                          </a:solidFill>
-                          <a:latin typeface="Garamond"/>
-                          <a:cs typeface="Garamond"/>
-                        </a:rPr>
-                        <a:t>4.7x</a:t>
-                      </a:r>
-                    </a:p>
-                  </a:txBody>
-                  <a:tcPr anchor="ctr" marT="12700" marB="12700">
-                    <a:solidFill>
-                      <a:srgbClr val="FFFFFF"/>
-                    </a:solidFill>
-                  </a:tcPr>
-                </a:tc>
-                <a:tc>
-                  <a:txBody>
-                    <a:bodyPr/>
-                    <a:lstStyle/>
-                    <a:p>
-                      <a:pPr algn="r"/>
-                      <a:r>
-                        <a:rPr sz="850" b="1" i="0">
-                          <a:solidFill>
-                            <a:srgbClr val="1F2A44"/>
-                          </a:solidFill>
-                          <a:latin typeface="Garamond"/>
-                          <a:cs typeface="Garamond"/>
-                        </a:rPr>
-                        <a:t>5.0x</a:t>
-                      </a:r>
-                    </a:p>
-                  </a:txBody>
-                  <a:tcPr anchor="ctr" marT="12700" marB="12700">
-                    <a:solidFill>
-                      <a:srgbClr val="FFFFFF"/>
-                    </a:solidFill>
-                  </a:tcPr>
-                </a:tc>
-                <a:tc>
-                  <a:txBody>
-                    <a:bodyPr/>
-                    <a:lstStyle/>
-                    <a:p>
-                      <a:pPr algn="r"/>
-                      <a:r>
-                        <a:rPr sz="850" b="1" i="0">
-                          <a:solidFill>
-                            <a:srgbClr val="1F2A44"/>
-                          </a:solidFill>
-                          <a:latin typeface="Garamond"/>
-                          <a:cs typeface="Garamond"/>
-                        </a:rPr>
-                        <a:t>10.4x</a:t>
-                      </a:r>
-                    </a:p>
-                  </a:txBody>
-                  <a:tcPr anchor="ctr" marT="12700" marB="12700">
-                    <a:solidFill>
-                      <a:srgbClr val="FFFFFF"/>
                     </a:solidFill>
                   </a:tcPr>
                 </a:tc>
@@ -27818,7 +27696,7 @@
                 <a:latin typeface="Garamond"/>
                 <a:cs typeface="Garamond"/>
               </a:rPr>
-              <a:t>Core set: LULU, NKE, ADS, DECK, CROX, LEVI, KTB — PitchBook daily EV / TTM EBITDA (04-Sep-2026); revenue &amp; EBIT from latest company filings</a:t>
+              <a:t>Point of the slide: LULU trades at a deep discount — 4.1x EV/EBITDA @ $100 vs 9.4x core median (~56% below peers on TTM EBITDA)</a:t>
             </a:r>
           </a:p>
           <a:p>
@@ -27840,7 +27718,7 @@
                 <a:latin typeface="Garamond"/>
                 <a:cs typeface="Garamond"/>
               </a:rPr>
-              <a:t>EV/Revenue on FY2026E revenue; EV/EBITDA &amp; EV/EBIT on FY2025 (TTM anchor); P/E on FY2026E EPS ($9.61 mid-guide) — then EV → equity via cash &amp; ASC 842 leases</a:t>
+              <a:t>We apply peer-medians to LULU bases for implied price ranges (right table) — triangulating partial re-rating to $140, not DCF terminal value or M&amp;A premium</a:t>
             </a:r>
           </a:p>
           <a:p>
@@ -27862,7 +27740,7 @@
                 <a:latin typeface="Garamond"/>
                 <a:cs typeface="Garamond"/>
               </a:rPr>
-              <a:t>LULU trades at 1.07x EV/Revenue and 10.4x forward P/E vs core medians 1.63x / 16.5x</a:t>
+              <a:t>Core set: NKE, ADS, DECK, CROX, LEVI, KTB (+ LULU benchmark row) — PitchBook EV / TTM EBITDA (04-Sep-2026); LULU multiples @ model price $100 / FY26E EPS $9.61</a:t>
             </a:r>
           </a:p>
           <a:p>
@@ -27884,7 +27762,7 @@
                 <a:latin typeface="Garamond"/>
                 <a:cs typeface="Garamond"/>
               </a:rPr>
-              <a:t>DCF terminal value uses Gordon growth (g = 2.25%) — the ~7.4x exit multiple is FY30 EBITDA × identity check only, not the peer median (~9x EV/EBITDA)</a:t>
+              <a:t>EV/Revenue on FY2026E; EV/EBITDA &amp; EV/EBIT on FY2025 EBITDA/EBIT — then EV → equity via cash &amp; ASC 842 leases</a:t>
             </a:r>
           </a:p>
           <a:p>
@@ -27906,7 +27784,7 @@
                 <a:latin typeface="Garamond"/>
                 <a:cs typeface="Garamond"/>
               </a:rPr>
-              <a:t>Base-case DCF $134 sits between comps-implied ranges; target $140 = partial re-rating toward peer medians, not full NKE multiple</a:t>
+              <a:t>Also cheap on P/E: 10.4x vs 16.5x median; DCF base $134 uses Gordon growth TV (~7.4x FY30 identity, not this ~9x peer tape)</a:t>
             </a:r>
           </a:p>
         </p:txBody>
@@ -29236,7 +29114,7 @@
                           <a:latin typeface="Garamond"/>
                           <a:cs typeface="Garamond"/>
                         </a:rPr>
-                        <a:t>4.7x</a:t>
+                        <a:t>4.1x</a:t>
                       </a:r>
                     </a:p>
                   </a:txBody>

--- a/LULU/LULU_Investment_Pitch_Deck.pptx
+++ b/LULU/LULU_Investment_Pitch_Deck.pptx
@@ -27010,7 +27010,7 @@
                           <a:latin typeface="Garamond"/>
                           <a:cs typeface="Garamond"/>
                         </a:rPr>
-                        <a:t>4.1x</a:t>
+                        <a:t>4.7x</a:t>
                       </a:r>
                     </a:p>
                   </a:txBody>
@@ -27696,7 +27696,7 @@
                 <a:latin typeface="Garamond"/>
                 <a:cs typeface="Garamond"/>
               </a:rPr>
-              <a:t>Point of the slide: LULU trades at a deep discount — 4.1x EV/EBITDA @ $100 vs 9.4x core median (~56% below peers on TTM EBITDA)</a:t>
+              <a:t>Point of the slide: LULU trades at a deep discount — 4.7x EV/EBITDA @ $100 vs 9.4x core median (~50% below peers on TTM EBITDA)</a:t>
             </a:r>
           </a:p>
           <a:p>
@@ -27762,7 +27762,7 @@
                 <a:latin typeface="Garamond"/>
                 <a:cs typeface="Garamond"/>
               </a:rPr>
-              <a:t>EV/Revenue on FY2026E; EV/EBITDA &amp; EV/EBIT on FY2025 EBITDA/EBIT — then EV → equity via cash &amp; ASC 842 leases</a:t>
+              <a:t>EV/Revenue on FY2026E; EV/EBITDA 4.7x = PitchBook TTM tape (Sep-2026); EV/EBIT &amp; P/E @ model price $100 / FY26E EPS $9.61</a:t>
             </a:r>
           </a:p>
           <a:p>
@@ -29114,7 +29114,7 @@
                           <a:latin typeface="Garamond"/>
                           <a:cs typeface="Garamond"/>
                         </a:rPr>
-                        <a:t>4.1x</a:t>
+                        <a:t>4.7x</a:t>
                       </a:r>
                     </a:p>
                   </a:txBody>

--- a/LULU/LULU_Investment_Pitch_Deck.pptx
+++ b/LULU/LULU_Investment_Pitch_Deck.pptx
@@ -27643,6 +27643,50 @@
         </p:nvSpPr>
         <p:spPr>
           <a:xfrm>
+            <a:off x="7269480" y="3584448"/>
+            <a:ext cx="4617720" cy="502920"/>
+          </a:xfrm>
+          <a:prstGeom prst="rect">
+            <a:avLst/>
+          </a:prstGeom>
+          <a:noFill/>
+        </p:spPr>
+        <p:txBody>
+          <a:bodyPr wrap="square" anchor="t" lIns="25400" rIns="25400" tIns="12700" bIns="12700">
+            <a:spAutoFit/>
+          </a:bodyPr>
+          <a:lstStyle/>
+          <a:p>
+            <a:pPr algn="l">
+              <a:spcBef>
+                <a:spcPts val="0"/>
+              </a:spcBef>
+              <a:spcAft>
+                <a:spcPts val="0"/>
+              </a:spcAft>
+              <a:buNone/>
+            </a:pPr>
+            <a:r>
+              <a:rPr sz="750" b="0" i="1">
+                <a:solidFill>
+                  <a:srgbClr val="262626"/>
+                </a:solidFill>
+                <a:latin typeface="Garamond"/>
+                <a:cs typeface="Garamond"/>
+              </a:rPr>
+              <a:t>Implied EV = peer median × LULU base (cols 2–3); P/E = median × EPS (no EV). EV + cash − lease debt ÷ shares = equity/sh.</a:t>
+            </a:r>
+          </a:p>
+        </p:txBody>
+      </p:sp>
+      <p:sp>
+        <p:nvSpPr>
+          <p:cNvPr id="13" name="TextBox 12"/>
+          <p:cNvSpPr txBox="1"/>
+          <p:nvPr/>
+        </p:nvSpPr>
+        <p:spPr>
+          <a:xfrm>
             <a:off x="457200" y="3657600"/>
             <a:ext cx="11292840" cy="2148840"/>
           </a:xfrm>
@@ -27718,7 +27762,7 @@
                 <a:latin typeface="Garamond"/>
                 <a:cs typeface="Garamond"/>
               </a:rPr>
-              <a:t>We apply peer-medians to LULU bases for implied price ranges (right table) — triangulating partial re-rating to $140, not DCF terminal value or M&amp;A premium</a:t>
+              <a:t>Implied price (right table) = core peer median × LULU base → enterprise value; P/E is median × FY26E EPS ($9.61) with no EV step</a:t>
             </a:r>
           </a:p>
           <a:p>
@@ -27740,7 +27784,7 @@
                 <a:latin typeface="Garamond"/>
                 <a:cs typeface="Garamond"/>
               </a:rPr>
-              <a:t>Core set: NKE, ADS, DECK, CROX, LEVI, KTB (+ LULU benchmark row) — PitchBook EV / TTM EBITDA (04-Sep-2026); LULU multiples @ model price $100 / FY26E EPS $9.61</a:t>
+              <a:t>EV-to-equity bridge: add FY25 cash (~$1.8B), subtract ASC 842 store lease debt (~$1.8B), divide by 111M shares</a:t>
             </a:r>
           </a:p>
           <a:p>
@@ -27762,7 +27806,7 @@
                 <a:latin typeface="Garamond"/>
                 <a:cs typeface="Garamond"/>
               </a:rPr>
-              <a:t>EV/Revenue on FY2026E; EV/EBITDA 4.7x = PitchBook TTM tape (Sep-2026); EV/EBIT &amp; P/E @ model price $100 / FY26E EPS $9.61</a:t>
+              <a:t>We use those implied ranges to triangulate partial re-rating to $140 — not DCF terminal value or M&amp;A premium</a:t>
             </a:r>
           </a:p>
           <a:p>
@@ -27784,7 +27828,7 @@
                 <a:latin typeface="Garamond"/>
                 <a:cs typeface="Garamond"/>
               </a:rPr>
-              <a:t>Also cheap on P/E: 10.4x vs 16.5x median; DCF base $134 uses Gordon growth TV (~7.4x FY30 identity, not this ~9x peer tape)</a:t>
+              <a:t>Core set: NKE, ADS, DECK, CROX, LEVI, KTB (+ LULU @ $100); EV/EBITDA 4.7x = PitchBook TTM tape (Sep-2026)</a:t>
             </a:r>
           </a:p>
         </p:txBody>

--- a/LULU/LULU_Investment_Pitch_Deck.pptx
+++ b/LULU/LULU_Investment_Pitch_Deck.pptx
@@ -27687,8 +27687,8 @@
         </p:nvSpPr>
         <p:spPr>
           <a:xfrm>
-            <a:off x="457200" y="3657600"/>
-            <a:ext cx="11292840" cy="2148840"/>
+            <a:off x="457200" y="3611880"/>
+            <a:ext cx="11292840" cy="2331720"/>
           </a:xfrm>
           <a:prstGeom prst="rect">
             <a:avLst/>
@@ -27706,31 +27706,30 @@
                 <a:spcPts val="0"/>
               </a:spcBef>
               <a:spcAft>
-                <a:spcPts val="400"/>
-              </a:spcAft>
-              <a:buNone/>
-            </a:pPr>
-            <a:r>
-              <a:rPr sz="1200" b="1" i="0">
+                <a:spcPts val="200"/>
+              </a:spcAft>
+              <a:buNone/>
+            </a:pPr>
+            <a:r>
+              <a:rPr sz="1100" b="1" i="0">
                 <a:solidFill>
                   <a:srgbClr val="990000"/>
                 </a:solidFill>
                 <a:latin typeface="Garamond"/>
                 <a:cs typeface="Garamond"/>
               </a:rPr>
-              <a:t>Methodology &amp; read-through</a:t>
-            </a:r>
-          </a:p>
-          <a:p>
-            <a:pPr algn="l" indent="-152400" marL="177800">
-              <a:spcBef>
-                <a:spcPts val="0"/>
-              </a:spcBef>
-              <a:spcAft>
-                <a:spcPts val="300"/>
-              </a:spcAft>
-              <a:buFont typeface="Garamond"/>
-              <a:buChar char="•"/>
+              <a:t>Peer benchmark methodology</a:t>
+            </a:r>
+          </a:p>
+          <a:p>
+            <a:pPr algn="l">
+              <a:spcBef>
+                <a:spcPts val="0"/>
+              </a:spcBef>
+              <a:spcAft>
+                <a:spcPts val="600"/>
+              </a:spcAft>
+              <a:buNone/>
             </a:pPr>
             <a:r>
               <a:rPr sz="1000" b="0" i="0">
@@ -27740,19 +27739,39 @@
                 <a:latin typeface="Garamond"/>
                 <a:cs typeface="Garamond"/>
               </a:rPr>
-              <a:t>Point of the slide: LULU trades at a deep discount — 4.7x EV/EBITDA @ $100 vs 9.4x core median (~50% below peers on TTM EBITDA)</a:t>
-            </a:r>
-          </a:p>
-          <a:p>
-            <a:pPr algn="l" indent="-152400" marL="177800">
-              <a:spcBef>
-                <a:spcPts val="0"/>
-              </a:spcBef>
-              <a:spcAft>
-                <a:spcPts val="300"/>
-              </a:spcAft>
-              <a:buFont typeface="Garamond"/>
-              <a:buChar char="•"/>
+              <a:t>Core peer set (NKE, ADS, DECK, CROX, LEVI, KTB) evaluates relative valuation using PitchBook data (04-Sep-2026). Implied equity = peer median × LULU base → EV, then + cash − ASC 842 lease debt ÷ shares.</a:t>
+            </a:r>
+          </a:p>
+          <a:p>
+            <a:pPr algn="l">
+              <a:spcBef>
+                <a:spcPts val="0"/>
+              </a:spcBef>
+              <a:spcAft>
+                <a:spcPts val="200"/>
+              </a:spcAft>
+              <a:buNone/>
+            </a:pPr>
+            <a:r>
+              <a:rPr sz="1100" b="1" i="0">
+                <a:solidFill>
+                  <a:srgbClr val="990000"/>
+                </a:solidFill>
+                <a:latin typeface="Garamond"/>
+                <a:cs typeface="Garamond"/>
+              </a:rPr>
+              <a:t>Multiples confirm severe undervaluation</a:t>
+            </a:r>
+          </a:p>
+          <a:p>
+            <a:pPr algn="l">
+              <a:spcBef>
+                <a:spcPts val="0"/>
+              </a:spcBef>
+              <a:spcAft>
+                <a:spcPts val="600"/>
+              </a:spcAft>
+              <a:buNone/>
             </a:pPr>
             <a:r>
               <a:rPr sz="1000" b="0" i="0">
@@ -27762,19 +27781,39 @@
                 <a:latin typeface="Garamond"/>
                 <a:cs typeface="Garamond"/>
               </a:rPr>
-              <a:t>Implied price (right table) = core peer median × LULU base → enterprise value; P/E is median × FY26E EPS ($9.61) with no EV step</a:t>
-            </a:r>
-          </a:p>
-          <a:p>
-            <a:pPr algn="l" indent="-152400" marL="177800">
-              <a:spcBef>
-                <a:spcPts val="0"/>
-              </a:spcBef>
-              <a:spcAft>
-                <a:spcPts val="300"/>
-              </a:spcAft>
-              <a:buFont typeface="Garamond"/>
-              <a:buChar char="•"/>
+              <a:t>LULU trades at 1.07x EV/Revenue, 4.7x EV/EBITDA (PitchBook TTM), and 10.4x forward P/E vs core peer medians of 1.63x EV/Revenue, 9.4x EV/EBITDA, and 16.5x P/E.</a:t>
+            </a:r>
+          </a:p>
+          <a:p>
+            <a:pPr algn="l">
+              <a:spcBef>
+                <a:spcPts val="0"/>
+              </a:spcBef>
+              <a:spcAft>
+                <a:spcPts val="200"/>
+              </a:spcAft>
+              <a:buNone/>
+            </a:pPr>
+            <a:r>
+              <a:rPr sz="1100" b="1" i="0">
+                <a:solidFill>
+                  <a:srgbClr val="990000"/>
+                </a:solidFill>
+                <a:latin typeface="Garamond"/>
+                <a:cs typeface="Garamond"/>
+              </a:rPr>
+              <a:t>DCF terminal valuation discount</a:t>
+            </a:r>
+          </a:p>
+          <a:p>
+            <a:pPr algn="l">
+              <a:spcBef>
+                <a:spcPts val="0"/>
+              </a:spcBef>
+              <a:spcAft>
+                <a:spcPts val="600"/>
+              </a:spcAft>
+              <a:buNone/>
             </a:pPr>
             <a:r>
               <a:rPr sz="1000" b="0" i="0">
@@ -27784,19 +27823,39 @@
                 <a:latin typeface="Garamond"/>
                 <a:cs typeface="Garamond"/>
               </a:rPr>
-              <a:t>EV-to-equity bridge: add FY25 cash (~$1.8B), subtract ASC 842 store lease debt (~$1.8B), divide by 111M shares</a:t>
-            </a:r>
-          </a:p>
-          <a:p>
-            <a:pPr algn="l" indent="-152400" marL="177800">
-              <a:spcBef>
-                <a:spcPts val="0"/>
-              </a:spcBef>
-              <a:spcAft>
-                <a:spcPts val="300"/>
-              </a:spcAft>
-              <a:buFont typeface="Garamond"/>
-              <a:buChar char="•"/>
+              <a:t>Base-case DCF uses Gordon growth g = 2.25%, implying 7.4x FY30 EV/EBITDA exit multiple — well below the 9.4x peer median (right table uses TTM EBITDA).</a:t>
+            </a:r>
+          </a:p>
+          <a:p>
+            <a:pPr algn="l">
+              <a:spcBef>
+                <a:spcPts val="0"/>
+              </a:spcBef>
+              <a:spcAft>
+                <a:spcPts val="200"/>
+              </a:spcAft>
+              <a:buNone/>
+            </a:pPr>
+            <a:r>
+              <a:rPr sz="1100" b="1" i="0">
+                <a:solidFill>
+                  <a:srgbClr val="990000"/>
+                </a:solidFill>
+                <a:latin typeface="Garamond"/>
+                <a:cs typeface="Garamond"/>
+              </a:rPr>
+              <a:t>Conservative target price re-rating</a:t>
+            </a:r>
+          </a:p>
+          <a:p>
+            <a:pPr algn="l">
+              <a:spcBef>
+                <a:spcPts val="0"/>
+              </a:spcBef>
+              <a:spcAft>
+                <a:spcPts val="600"/>
+              </a:spcAft>
+              <a:buNone/>
             </a:pPr>
             <a:r>
               <a:rPr sz="1000" b="0" i="0">
@@ -27806,29 +27865,7 @@
                 <a:latin typeface="Garamond"/>
                 <a:cs typeface="Garamond"/>
               </a:rPr>
-              <a:t>We use those implied ranges to triangulate partial re-rating to $140 — not DCF terminal value or M&amp;A premium</a:t>
-            </a:r>
-          </a:p>
-          <a:p>
-            <a:pPr algn="l" indent="-152400" marL="177800">
-              <a:spcBef>
-                <a:spcPts val="0"/>
-              </a:spcBef>
-              <a:spcAft>
-                <a:spcPts val="300"/>
-              </a:spcAft>
-              <a:buFont typeface="Garamond"/>
-              <a:buChar char="•"/>
-            </a:pPr>
-            <a:r>
-              <a:rPr sz="1000" b="0" i="0">
-                <a:solidFill>
-                  <a:srgbClr val="262626"/>
-                </a:solidFill>
-                <a:latin typeface="Garamond"/>
-                <a:cs typeface="Garamond"/>
-              </a:rPr>
-              <a:t>Core set: NKE, ADS, DECK, CROX, LEVI, KTB (+ LULU @ $100); EV/EBITDA 4.7x = PitchBook TTM tape (Sep-2026)</a:t>
+              <a:t>Our $134 base-case DCF and $140 12-month target (+6 vs DCF, ~4% above model fair value) reflect undervaluation with only a modest re-rating — not Nike-level multiples.</a:t>
             </a:r>
           </a:p>
         </p:txBody>

--- a/LULU/LULU_Investment_Pitch_Deck.pptx
+++ b/LULU/LULU_Investment_Pitch_Deck.pptx
@@ -29242,8 +29242,8 @@
         </p:nvSpPr>
         <p:spPr>
           <a:xfrm>
-            <a:off x="457200" y="3063240"/>
-            <a:ext cx="11292840" cy="2926080"/>
+            <a:off x="457200" y="3017520"/>
+            <a:ext cx="11292840" cy="2651760"/>
           </a:xfrm>
           <a:prstGeom prst="rect">
             <a:avLst/>
@@ -29261,129 +29261,208 @@
                 <a:spcPts val="0"/>
               </a:spcBef>
               <a:spcAft>
-                <a:spcPts val="400"/>
-              </a:spcAft>
-              <a:buNone/>
-            </a:pPr>
-            <a:r>
-              <a:rPr sz="1200" b="1" i="0">
+                <a:spcPts val="200"/>
+              </a:spcAft>
+              <a:buNone/>
+            </a:pPr>
+            <a:r>
+              <a:rPr sz="1100" b="1" i="0">
                 <a:solidFill>
                   <a:srgbClr val="990000"/>
                 </a:solidFill>
                 <a:latin typeface="Garamond"/>
                 <a:cs typeface="Garamond"/>
               </a:rPr>
-              <a:t>How we use (and do not use) private precedents</a:t>
-            </a:r>
-          </a:p>
-          <a:p>
-            <a:pPr algn="l" indent="-152400" marL="177800">
-              <a:spcBef>
-                <a:spcPts val="0"/>
-              </a:spcBef>
-              <a:spcAft>
-                <a:spcPts val="400"/>
-              </a:spcAft>
-              <a:buFont typeface="Garamond"/>
-              <a:buChar char="•"/>
-            </a:pPr>
-            <a:r>
-              <a:rPr sz="1050" b="0" i="0">
+              <a:t>Private precedent framework</a:t>
+            </a:r>
+          </a:p>
+          <a:p>
+            <a:pPr algn="l">
+              <a:spcBef>
+                <a:spcPts val="0"/>
+              </a:spcBef>
+              <a:spcAft>
+                <a:spcPts val="500"/>
+              </a:spcAft>
+              <a:buNone/>
+            </a:pPr>
+            <a:r>
+              <a:rPr sz="1000" b="0" i="0">
                 <a:solidFill>
                   <a:srgbClr val="262626"/>
                 </a:solidFill>
                 <a:latin typeface="Garamond"/>
                 <a:cs typeface="Garamond"/>
               </a:rPr>
-              <a:t>Private precedents inform what strategics/PE may pay for premium athleisure assets. We do not derive a control premium from an unclosed ask vs LULU's public trading multiple. Valuation anchors remain DCF and public comps (prior slide).</a:t>
-            </a:r>
-          </a:p>
-          <a:p>
-            <a:pPr algn="l" indent="-152400" marL="177800">
-              <a:spcBef>
-                <a:spcPts val="0"/>
-              </a:spcBef>
-              <a:spcAft>
-                <a:spcPts val="400"/>
-              </a:spcAft>
-              <a:buFont typeface="Garamond"/>
-              <a:buChar char="•"/>
-            </a:pPr>
-            <a:r>
-              <a:rPr sz="1050" b="0" i="0">
+              <a:t>Non-Alo private transactions establish a contextual floor of what strategics and PE pay for premium athleisure — not a control premium on LULU’s public stock.</a:t>
+            </a:r>
+          </a:p>
+          <a:p>
+            <a:pPr algn="l">
+              <a:spcBef>
+                <a:spcPts val="0"/>
+              </a:spcBef>
+              <a:spcAft>
+                <a:spcPts val="200"/>
+              </a:spcAft>
+              <a:buNone/>
+            </a:pPr>
+            <a:r>
+              <a:rPr sz="1100" b="1" i="0">
+                <a:solidFill>
+                  <a:srgbClr val="990000"/>
+                </a:solidFill>
+                <a:latin typeface="Garamond"/>
+                <a:cs typeface="Garamond"/>
+              </a:rPr>
+              <a:t>Closed M&amp;A benchmark</a:t>
+            </a:r>
+          </a:p>
+          <a:p>
+            <a:pPr algn="l">
+              <a:spcBef>
+                <a:spcPts val="0"/>
+              </a:spcBef>
+              <a:spcAft>
+                <a:spcPts val="500"/>
+              </a:spcAft>
+              <a:buNone/>
+            </a:pPr>
+            <a:r>
+              <a:rPr sz="1000" b="0" i="0">
                 <a:solidFill>
                   <a:srgbClr val="262626"/>
                 </a:solidFill>
                 <a:latin typeface="Garamond"/>
                 <a:cs typeface="Garamond"/>
               </a:rPr>
-              <a:t>Closed M&amp;A: Sweaty Betty (2021) — Wolverine paid $410M (~16x FY21E EBITDA, ~1.6x sales) for premium women's DTC activewear; closest operating-company precedent</a:t>
-            </a:r>
-          </a:p>
-          <a:p>
-            <a:pPr algn="l" indent="-152400" marL="177800">
-              <a:spcBef>
-                <a:spcPts val="0"/>
-              </a:spcBef>
-              <a:spcAft>
-                <a:spcPts val="400"/>
-              </a:spcAft>
-              <a:buFont typeface="Garamond"/>
-              <a:buChar char="•"/>
-            </a:pPr>
-            <a:r>
-              <a:rPr sz="1050" b="0" i="0">
+              <a:t>Wolverine paid $410M (~16x EBITDA, ~1.6x sales) for Sweaty Betty (2021) — concrete operating-company precedent for women’s DTC activewear.</a:t>
+            </a:r>
+          </a:p>
+          <a:p>
+            <a:pPr algn="l">
+              <a:spcBef>
+                <a:spcPts val="0"/>
+              </a:spcBef>
+              <a:spcAft>
+                <a:spcPts val="200"/>
+              </a:spcAft>
+              <a:buNone/>
+            </a:pPr>
+            <a:r>
+              <a:rPr sz="1100" b="1" i="0">
+                <a:solidFill>
+                  <a:srgbClr val="990000"/>
+                </a:solidFill>
+                <a:latin typeface="Garamond"/>
+                <a:cs typeface="Garamond"/>
+              </a:rPr>
+              <a:t>Growth capital rounds</a:t>
+            </a:r>
+          </a:p>
+          <a:p>
+            <a:pPr algn="l">
+              <a:spcBef>
+                <a:spcPts val="0"/>
+              </a:spcBef>
+              <a:spcAft>
+                <a:spcPts val="500"/>
+              </a:spcAft>
+              <a:buNone/>
+            </a:pPr>
+            <a:r>
+              <a:rPr sz="1000" b="0" i="0">
                 <a:solidFill>
                   <a:srgbClr val="262626"/>
                 </a:solidFill>
                 <a:latin typeface="Garamond"/>
                 <a:cs typeface="Garamond"/>
               </a:rPr>
-              <a:t>Private growth rounds: Gymshark ($1.3bn implied EV, 2020 minority stake) and Vuori ($4bn post-money, 2021) show strategics/PE pay up for high-growth DTC athleisure — minority/valuation markers, not LULU control comps</a:t>
-            </a:r>
-          </a:p>
-          <a:p>
-            <a:pPr algn="l" indent="-152400" marL="177800">
-              <a:spcBef>
-                <a:spcPts val="0"/>
-              </a:spcBef>
-              <a:spcAft>
-                <a:spcPts val="400"/>
-              </a:spcAft>
-              <a:buFont typeface="Garamond"/>
-              <a:buChar char="•"/>
-            </a:pPr>
-       